--- a/docs/FedCast_Fullerton.pptx
+++ b/docs/FedCast_Fullerton.pptx
@@ -129,13 +129,13 @@
   <p:extLst>
     <p:ext uri="{521415D9-36F7-43E2-AB2F-B90AF26B5E84}">
       <p14:sectionLst xmlns:p14="http://schemas.microsoft.com/office/powerpoint/2010/main">
-        <p14:section name="Opening" id="{e243ee2c-17ed-fc69-5a53-04c731e61d58}">
+        <p14:section name="Opening" id="{4c3782d7-9cd0-5c26-222a-cfa8f3e5a3f5}">
           <p14:sldIdLst>
             <p14:sldId id="256"/>
             <p14:sldId id="257"/>
           </p14:sldIdLst>
         </p14:section>
-        <p14:section name="Objective" id="{3dbdd1ef-cedc-d113-da20-9d27ba08a80f}">
+        <p14:section name="Objective" id="{8b520ad7-c864-106f-c1c2-3859526d89bb}">
           <p14:sldIdLst>
             <p14:sldId id="258"/>
             <p14:sldId id="259"/>
@@ -144,21 +144,21 @@
             <p14:sldId id="262"/>
           </p14:sldIdLst>
         </p14:section>
-        <p14:section name="How it works" id="{56e1f8ee-2f96-872a-1c0b-2346d4a719d9}">
+        <p14:section name="How it works" id="{4b9b7ebb-c2ab-b2f1-b12e-6999eea1de8b}">
           <p14:sldIdLst>
             <p14:sldId id="263"/>
             <p14:sldId id="264"/>
             <p14:sldId id="265"/>
           </p14:sldIdLst>
         </p14:section>
-        <p14:section name="The harness" id="{b9997f85-3feb-bb03-be17-b11ec07c2bd2}">
+        <p14:section name="The harness" id="{bcd77549-0e03-5fbe-1965-70fefddf844f}">
           <p14:sldIdLst>
             <p14:sldId id="266"/>
             <p14:sldId id="267"/>
             <p14:sldId id="268"/>
           </p14:sldIdLst>
         </p14:section>
-        <p14:section name="Evidence" id="{57022b4f-3eec-402b-13a6-5abb11d4c311}">
+        <p14:section name="Evidence" id="{936f6400-439c-1588-3c06-a05f9a9fc8ec}">
           <p14:sldIdLst>
             <p14:sldId id="269"/>
             <p14:sldId id="270"/>
@@ -169,7 +169,7 @@
             <p14:sldId id="275"/>
           </p14:sldIdLst>
         </p14:section>
-        <p14:section name="Limits and next" id="{ed528062-ad37-55eb-cb4c-5604f2eb5dd3}">
+        <p14:section name="Limits and next" id="{b3fb1f83-ee01-423e-ce5c-bcc9c5d12b04}">
           <p14:sldIdLst>
             <p14:sldId id="276"/>
             <p14:sldId id="277"/>
@@ -1812,7 +1812,7 @@
           <a:p>
             <a:r>
               <a:rPr lang="en-US" dirty="0"/>
-              <a:t>Three follow-ups worth discussing with the room. Live scoring starts this week. Longer windows are where reading evidence should matter more: for the December meeting the market already prices a hike at three in four, and the year-end rate is open. And an events agent for regime shifts: the cuts of 1987, 1998, 2008 and 2020 were driven by financial stress, not by the data the models read; the base-rates pre-read already lists the intermeeting moves, and a watch-out agent could flag when conditions look like those episodes.</a:t>
+              <a:t>Three follow-ups worth discussing with the room. Live scoring is built and the first record lands the morning after the decision. Longer windows are where reading evidence should matter more: for the December meeting the market already prices a hike at three in four, and the year-end rate is open. And an events agent for regime shifts: the cuts of 1987, 1998, 2008 and 2020 were driven by financial stress, not by the data the models read; the base-rates pre-read already lists the intermeeting moves, and a watch-out agent could flag when conditions look like those episodes.</a:t>
             </a:r>
             <a:endParaRPr lang="en-US" dirty="0"/>
           </a:p>
@@ -16228,7 +16228,7 @@
                   <a:schemeClr val="tx2"/>
                 </a:solidFill>
               </a:rPr>
-              <a:t>Score live decisions</a:t>
+              <a:t>Score live decisions: built this week</a:t>
             </a:r>
             <a:endParaRPr lang="en-US" sz="1500" dirty="0"/>
           </a:p>
@@ -16264,7 +16264,7 @@
                   <a:schemeClr val="tx1"/>
                 </a:solidFill>
               </a:rPr>
-              <a:t>From 28 October, a log score per model and per track is written to the ledger by code. Every weight decision waits on this record.</a:t>
+              <a:t>Once the overnight-rate row is dated after the meeting, one click scores every forecast of that meeting, each track, each model and two naive baselines, with log score and Brier, into an append-only file. The first record lands the morning after 28 October. Every weight decision waits on this record.</a:t>
             </a:r>
             <a:endParaRPr lang="en-US" sz="1150" dirty="0"/>
           </a:p>

--- a/docs/FedCast_Fullerton.pptx
+++ b/docs/FedCast_Fullerton.pptx
@@ -129,13 +129,13 @@
   <p:extLst>
     <p:ext uri="{521415D9-36F7-43E2-AB2F-B90AF26B5E84}">
       <p14:sectionLst xmlns:p14="http://schemas.microsoft.com/office/powerpoint/2010/main">
-        <p14:section name="Opening" id="{4c3782d7-9cd0-5c26-222a-cfa8f3e5a3f5}">
+        <p14:section name="Opening" id="{be377cea-06bf-2115-d346-690e18a1862b}">
           <p14:sldIdLst>
             <p14:sldId id="256"/>
             <p14:sldId id="257"/>
           </p14:sldIdLst>
         </p14:section>
-        <p14:section name="Objective" id="{8b520ad7-c864-106f-c1c2-3859526d89bb}">
+        <p14:section name="Objective" id="{585f81b1-93ce-a0fd-6bec-2218d9f62864}">
           <p14:sldIdLst>
             <p14:sldId id="258"/>
             <p14:sldId id="259"/>
@@ -144,21 +144,21 @@
             <p14:sldId id="262"/>
           </p14:sldIdLst>
         </p14:section>
-        <p14:section name="How it works" id="{4b9b7ebb-c2ab-b2f1-b12e-6999eea1de8b}">
+        <p14:section name="How it works" id="{4ac93ffd-9b66-a051-4bd8-ac980cc7d41d}">
           <p14:sldIdLst>
             <p14:sldId id="263"/>
             <p14:sldId id="264"/>
             <p14:sldId id="265"/>
           </p14:sldIdLst>
         </p14:section>
-        <p14:section name="The harness" id="{bcd77549-0e03-5fbe-1965-70fefddf844f}">
+        <p14:section name="The harness" id="{67738a85-be33-6475-8835-333390c4713e}">
           <p14:sldIdLst>
             <p14:sldId id="266"/>
             <p14:sldId id="267"/>
             <p14:sldId id="268"/>
           </p14:sldIdLst>
         </p14:section>
-        <p14:section name="Evidence" id="{936f6400-439c-1588-3c06-a05f9a9fc8ec}">
+        <p14:section name="Evidence" id="{8b2e86d5-f801-993e-06c8-69e4590dbb99}">
           <p14:sldIdLst>
             <p14:sldId id="269"/>
             <p14:sldId id="270"/>
@@ -169,7 +169,7 @@
             <p14:sldId id="275"/>
           </p14:sldIdLst>
         </p14:section>
-        <p14:section name="Limits and next" id="{b3fb1f83-ee01-423e-ce5c-bcc9c5d12b04}">
+        <p14:section name="Limits and next" id="{9a3f574a-217f-3a1b-ec7c-3131ce7ebfd1}">
           <p14:sldIdLst>
             <p14:sldId id="276"/>
             <p14:sldId id="277"/>
@@ -756,7 +756,7 @@
           <a:p>
             <a:r>
               <a:rPr lang="en-US" dirty="0"/>
-              <a:t>This is the slide that explains what harnessing means. The same model is run eight ways on the same snapshot. Analyst 1 gets nothing but the question: that is what the model does on its own, the control. Each later arm adds exactly one technique, so the score difference between neighbouring arms is the value of that technique. Arms A and B are meant to fail; the tool is judged on C and D.</a:t>
+              <a:t>This is the slide that explains what harnessing means. The same model is run eight ways on the same snapshot. Analyst 1 gets nothing but the question: that is what the model does on its own, the control. Each step up adds exactly one thing, so the score difference between neighbouring steps is the value of that thing. Analysts 1 and 2 are meant to fail; the tool is judged on 3 and 4 to 8.</a:t>
             </a:r>
             <a:endParaRPr lang="en-US" dirty="0"/>
           </a:p>
@@ -1020,7 +1020,7 @@
           <a:p>
             <a:r>
               <a:rPr lang="en-US" dirty="0"/>
-              <a:t>Read left to right. The naive model wobbles by three to five points between identical runs, cites nothing, and leaks three dozen numbers from memory; it still thinks the Fed is cutting. Showing it the evidence removes the leaks but not the wobble, and nothing can be checked. Structure plus verification makes the output stable and fully verifiable. Specialists keep that and add attribution. Same model, same day; the difference is the harness.</a:t>
+              <a:t>Read left to right as an evolution. Analyst 1 wobbles by three to five points between identical runs, cites nothing, and leaks three dozen numbers from memory; it still thinks the Fed is cutting. Adding the evidence (analyst 2) removes the leaks but not the wobble, and nothing can be checked. Adding the answer shape and the verifier (analyst 3) is the step that makes the output stable and fully verifiable. Specialists (4 to 8) keep that and add attribution. Same model, same day; the difference at each step is the one thing added.</a:t>
             </a:r>
             <a:endParaRPr lang="en-US" dirty="0"/>
           </a:p>
@@ -4011,7 +4011,7 @@
                   <a:schemeClr val="tx2"/>
                 </a:solidFill>
               </a:rPr>
-              <a:t>Eight analysts, one model, four arms</a:t>
+              <a:t>Eight analysts, one model, one ladder</a:t>
             </a:r>
             <a:endParaRPr lang="en-US" sz="3200" dirty="0"/>
           </a:p>
@@ -4077,7 +4077,7 @@
                 <a:ea typeface="Cambria" pitchFamily="34" charset="-122"/>
                 <a:cs typeface="Cambria" pitchFamily="34" charset="-120"/>
               </a:rPr>
-              <a:t>A</a:t>
+              <a:t>1</a:t>
             </a:r>
             <a:endParaRPr lang="en-US" sz="3000" dirty="0"/>
           </a:p>
@@ -4185,7 +4185,7 @@
                   <a:schemeClr val="tx1"/>
                 </a:solidFill>
               </a:rPr>
-              <a:t>What the model does on its own. The control every other arm is measured against.</a:t>
+              <a:t>What the model does on its own. The control every later step is measured against.</a:t>
             </a:r>
             <a:endParaRPr lang="en-US" sz="1250" dirty="0"/>
           </a:p>
@@ -4251,7 +4251,7 @@
                 <a:ea typeface="Cambria" pitchFamily="34" charset="-122"/>
                 <a:cs typeface="Cambria" pitchFamily="34" charset="-120"/>
               </a:rPr>
-              <a:t>B</a:t>
+              <a:t>2</a:t>
             </a:r>
             <a:endParaRPr lang="en-US" sz="3000" dirty="0"/>
           </a:p>
@@ -4425,7 +4425,7 @@
                 <a:ea typeface="Cambria" pitchFamily="34" charset="-122"/>
                 <a:cs typeface="Cambria" pitchFamily="34" charset="-120"/>
               </a:rPr>
-              <a:t>C</a:t>
+              <a:t>3</a:t>
             </a:r>
             <a:endParaRPr lang="en-US" sz="3000" dirty="0"/>
           </a:p>
@@ -4591,7 +4591,7 @@
               <a:buNone/>
             </a:pPr>
             <a:r>
-              <a:rPr lang="en-US" sz="3000" b="1" dirty="0">
+              <a:rPr lang="en-US" sz="2200" b="1" dirty="0">
                 <a:solidFill>
                   <a:schemeClr val="bg1"/>
                 </a:solidFill>
@@ -4599,9 +4599,9 @@
                 <a:ea typeface="Cambria" pitchFamily="34" charset="-122"/>
                 <a:cs typeface="Cambria" pitchFamily="34" charset="-120"/>
               </a:rPr>
-              <a:t>D</a:t>
-            </a:r>
-            <a:endParaRPr lang="en-US" sz="3000" dirty="0"/>
+              <a:t>4-8</a:t>
+            </a:r>
+            <a:endParaRPr lang="en-US" sz="2200" dirty="0"/>
           </a:p>
         </p:txBody>
       </p:sp>
@@ -4743,7 +4743,7 @@
                   <a:schemeClr val="accent4"/>
                 </a:solidFill>
               </a:rPr>
-              <a:t>Each arm adds one technique. The value of the technique is the difference between neighbouring arms.</a:t>
+              <a:t>Each step adds one thing. The value of that thing is the difference in score between neighbouring steps.</a:t>
             </a:r>
             <a:endParaRPr lang="en-US" sz="1200" dirty="0"/>
           </a:p>
@@ -6149,7 +6149,7 @@
                   <a:schemeClr val="tx2"/>
                 </a:solidFill>
               </a:rPr>
-              <a:t>The ladder, three snapshots, five runs each</a:t>
+              <a:t>The ladder, four snapshots, five runs each</a:t>
             </a:r>
             <a:endParaRPr lang="en-US" sz="3200" dirty="0"/>
           </a:p>
@@ -6260,7 +6260,7 @@
                             <a:srgbClr val="FFFFFF"/>
                           </a:solidFill>
                         </a:rPr>
-                        <a:t>Arm A: naive</a:t>
+                        <a:t>Analyst 1: the question only</a:t>
                       </a:r>
                       <a:endParaRPr lang="en-US" sz="1150" dirty="0"/>
                     </a:p>
@@ -6321,7 +6321,7 @@
                             <a:srgbClr val="FFFFFF"/>
                           </a:solidFill>
                         </a:rPr>
-                        <a:t>Arm B: evidence shown</a:t>
+                        <a:t>Analyst 2: + the evidence</a:t>
                       </a:r>
                       <a:endParaRPr lang="en-US" sz="1150" dirty="0"/>
                     </a:p>
@@ -6382,7 +6382,7 @@
                             <a:srgbClr val="FFFFFF"/>
                           </a:solidFill>
                         </a:rPr>
-                        <a:t>Arm C: generalist + verifier</a:t>
+                        <a:t>Analyst 3: + answer shape + verifier</a:t>
                       </a:r>
                       <a:endParaRPr lang="en-US" sz="1150" dirty="0"/>
                     </a:p>
@@ -6443,7 +6443,7 @@
                             <a:srgbClr val="FFFFFF"/>
                           </a:solidFill>
                         </a:rPr>
-                        <a:t>Arm D: specialists</a:t>
+                        <a:t>Analysts 4-8: + one slice each</a:t>
                       </a:r>
                       <a:endParaRPr lang="en-US" sz="1150" dirty="0"/>
                     </a:p>
@@ -6578,7 +6578,7 @@
                             <a:srgbClr val="C8553D"/>
                           </a:solidFill>
                         </a:rPr>
-                        <a:t>3.4 / 4.5 / 4.9 pp, fail</a:t>
+                        <a:t>3.4 / 4.5 / 4.9 / 4.1 pp, fail</a:t>
                       </a:r>
                       <a:endParaRPr lang="en-US" sz="1150" dirty="0"/>
                     </a:p>
@@ -6636,7 +6636,7 @@
                             <a:srgbClr val="C8553D"/>
                           </a:solidFill>
                         </a:rPr>
-                        <a:t>3.3 / 2.3 / 4.8 pp, fail</a:t>
+                        <a:t>3.3 / 2.3 / 4.8 / 3.4 pp, fail</a:t>
                       </a:r>
                       <a:endParaRPr lang="en-US" sz="1150" dirty="0"/>
                     </a:p>
@@ -6694,7 +6694,7 @@
                             <a:srgbClr val="2C6E49"/>
                           </a:solidFill>
                         </a:rPr>
-                        <a:t>0.6 / 0.5 / 0.5 bp of tilt, pass</a:t>
+                        <a:t>0.6 / 0.5 / 0.5 / 0.8 bp of tilt, pass</a:t>
                       </a:r>
                       <a:endParaRPr lang="en-US" sz="1150" dirty="0"/>
                     </a:p>
@@ -6752,7 +6752,7 @@
                             <a:srgbClr val="2C6E49"/>
                           </a:solidFill>
                         </a:rPr>
-                        <a:t>0.5 / 0.8 / 1.2 bp of tilt, pass</a:t>
+                        <a:t>0.5 / 0.8 / 1.2 / 0.8 bp of tilt, pass</a:t>
                       </a:r>
                       <a:endParaRPr lang="en-US" sz="1150" dirty="0"/>
                     </a:p>
@@ -7000,7 +7000,7 @@
                             <a:srgbClr val="2C6E49"/>
                           </a:solidFill>
                         </a:rPr>
-                        <a:t>100% on all three, pass</a:t>
+                        <a:t>100 / 100 / 100 / 99%, pass</a:t>
                       </a:r>
                       <a:endParaRPr lang="en-US" sz="1150" dirty="0"/>
                     </a:p>
@@ -7058,7 +7058,7 @@
                             <a:srgbClr val="2C6E49"/>
                           </a:solidFill>
                         </a:rPr>
-                        <a:t>100 / 97 / 100%, pass</a:t>
+                        <a:t>100 / 97 / 100 / 100%, pass</a:t>
                       </a:r>
                       <a:endParaRPr lang="en-US" sz="1150" dirty="0"/>
                     </a:p>
@@ -7190,7 +7190,7 @@
                             <a:srgbClr val="C8553D"/>
                           </a:solidFill>
                         </a:rPr>
-                        <a:t>36 / 36 / 39, fail</a:t>
+                        <a:t>36 / 36 / 39 / 38, fail</a:t>
                       </a:r>
                       <a:endParaRPr lang="en-US" sz="1150" dirty="0"/>
                     </a:p>
@@ -7482,7 +7482,7 @@
                             <a:srgbClr val="6B7280"/>
                           </a:solidFill>
                         </a:rPr>
-                        <a:t>Cut 25 bps at 57%: its memory of the Fed is stale</a:t>
+                        <a:t>Cut 25 bps at 57 to 67%: its memory of the Fed is stale</a:t>
                       </a:r>
                       <a:endParaRPr lang="en-US" sz="1150" dirty="0"/>
                     </a:p>
@@ -7540,7 +7540,7 @@
                             <a:srgbClr val="6B7280"/>
                           </a:solidFill>
                         </a:rPr>
-                        <a:t>+25 bps at 55 to 57%: reads the evidence, overshoots the market</a:t>
+                        <a:t>+25 bps at 50 to 57%: reads the evidence, overshoots the market</a:t>
                       </a:r>
                       <a:endParaRPr lang="en-US" sz="1150" dirty="0"/>
                     </a:p>
@@ -7598,7 +7598,7 @@
                             <a:srgbClr val="6B7280"/>
                           </a:solidFill>
                         </a:rPr>
-                        <a:t>+7.0 / +6.6 / +6.4 bp hawkish</a:t>
+                        <a:t>+7.0 / +6.6 / +6.4 / +5.8 bp hawkish</a:t>
                       </a:r>
                       <a:endParaRPr lang="en-US" sz="1150" dirty="0"/>
                     </a:p>
@@ -7656,7 +7656,7 @@
                             <a:srgbClr val="6B7280"/>
                           </a:solidFill>
                         </a:rPr>
-                        <a:t>+4.4 / +4.1 / +4.4 bp hawkish; labour the lone non-hawk</a:t>
+                        <a:t>+4.4 / +4.1 / +4.4 / +4.0 bp hawkish; labour the lone non-hawk</a:t>
                       </a:r>
                       <a:endParaRPr lang="en-US" sz="1150" dirty="0"/>
                     </a:p>
@@ -7735,7 +7735,7 @@
                   <a:schemeClr val="accent4"/>
                 </a:solidFill>
               </a:rPr>
-              <a:t>Snapshots of 15, 24 and 26 October 2026. Arms C and D report S1 in basis points of tilt because they output a lean, not a distribution.</a:t>
+              <a:t>Snapshots of 15, 24, 26 and 28 October 2026. Analysts 3 to 8 report S1 in basis points of tilt because they output a lean, not a distribution.</a:t>
             </a:r>
             <a:endParaRPr lang="en-US" sz="1050" dirty="0"/>
           </a:p>
@@ -16893,7 +16893,7 @@
                   <a:schemeClr val="tx2"/>
                 </a:solidFill>
               </a:rPr>
-              <a:t>Arm F and a second model family</a:t>
+              <a:t>One more step and a second model family</a:t>
             </a:r>
             <a:endParaRPr lang="en-US" sz="1500" dirty="0"/>
           </a:p>
@@ -18737,7 +18737,7 @@
                   <a:schemeClr val="tx1"/>
                 </a:solidFill>
               </a:rPr>
-              <a:t>The decision is the first target, not the only one. The same chain can forecast the December meeting, the year-end rate, or another central bank, and the control arms measure whether the language model is still earning its place.</a:t>
+              <a:t>The decision is the first target, not the only one. The same chain can forecast the December meeting, the year-end rate, or another central bank, and the control analysts measure whether the language model is still earning its place.</a:t>
             </a:r>
             <a:endParaRPr lang="en-US" sz="1400" dirty="0"/>
           </a:p>
@@ -20250,7 +20250,7 @@
                             <a:srgbClr val="1B1F2A"/>
                           </a:solidFill>
                         </a:rPr>
-                        <a:t>16 meetings; no frozen evidence, no quote verification, no replay, no control arm</a:t>
+                        <a:t>16 meetings; no frozen evidence, no quote verification, no replay, no control</a:t>
                       </a:r>
                       <a:endParaRPr lang="en-US" sz="1150" dirty="0"/>
                     </a:p>

--- a/docs/FedCast_Fullerton.pptx
+++ b/docs/FedCast_Fullerton.pptx
@@ -4,6 +4,9 @@
   <p:sldMasterIdLst>
     <p:sldMasterId id="2147483648" r:id="rId1"/>
   </p:sldMasterIdLst>
+  <p:notesMasterIdLst>
+    <p:notesMasterId r:id="rId26"/>
+  </p:notesMasterIdLst>
   <p:sldIdLst>
     <p:sldId id="256" r:id="rId2"/>
     <p:sldId id="257" r:id="rId3"/>
@@ -30,9 +33,6 @@
     <p:sldId id="278" r:id="rId24"/>
     <p:sldId id="279" r:id="rId25"/>
   </p:sldIdLst>
-  <p:notesMasterIdLst>
-    <p:notesMasterId r:id="rId26"/>
-  </p:notesMasterIdLst>
   <p:sldSz cx="12192000" cy="6858000"/>
   <p:notesSz cx="6858000" cy="12192000"/>
   <p:defaultTextStyle>
@@ -130,13 +130,13 @@
   <p:extLst>
     <p:ext uri="{521415D9-36F7-43E2-AB2F-B90AF26B5E84}">
       <p14:sectionLst xmlns:p14="http://schemas.microsoft.com/office/powerpoint/2010/main">
-        <p14:section name="Opening" id="{15935fa0-f4e4-b090-9120-575ef2d70a08}">
+        <p14:section name="Opening" id="{15935FA0-F4E4-B090-9120-575EF2D70A08}">
           <p14:sldIdLst>
             <p14:sldId id="256"/>
             <p14:sldId id="257"/>
           </p14:sldIdLst>
         </p14:section>
-        <p14:section name="Objective" id="{f04d9cc6-9f5c-f2a2-38d3-b45d22cb63a4}">
+        <p14:section name="Objective" id="{F04D9CC6-9F5C-F2A2-38D3-B45D22CB63A4}">
           <p14:sldIdLst>
             <p14:sldId id="258"/>
             <p14:sldId id="259"/>
@@ -145,21 +145,21 @@
             <p14:sldId id="262"/>
           </p14:sldIdLst>
         </p14:section>
-        <p14:section name="How it works" id="{601a1573-d908-714a-31ef-98a3bd7215e3}">
+        <p14:section name="How it works" id="{601A1573-D908-714A-31EF-98A3BD7215E3}">
           <p14:sldIdLst>
             <p14:sldId id="263"/>
             <p14:sldId id="264"/>
             <p14:sldId id="265"/>
           </p14:sldIdLst>
         </p14:section>
-        <p14:section name="The harness" id="{5ca7bfd4-36b8-99d8-07c1-089eaac56d42}">
+        <p14:section name="The harness" id="{5CA7BFD4-36B8-99D8-07C1-089EAAC56D42}">
           <p14:sldIdLst>
             <p14:sldId id="266"/>
             <p14:sldId id="267"/>
             <p14:sldId id="268"/>
           </p14:sldIdLst>
         </p14:section>
-        <p14:section name="Evidence" id="{5b1ea1cb-d504-09eb-96d2-53a5f97c58a0}">
+        <p14:section name="Evidence" id="{5B1EA1CB-D504-09EB-96D2-53A5F97C58A0}">
           <p14:sldIdLst>
             <p14:sldId id="269"/>
             <p14:sldId id="270"/>
@@ -171,7 +171,7 @@
             <p14:sldId id="276"/>
           </p14:sldIdLst>
         </p14:section>
-        <p14:section name="Limits and next" id="{88e3fd57-d065-9a81-1801-ce5e1c20f99f}">
+        <p14:section name="Limits and next" id="{88E3FD57-D065-9A81-1801-CE5E1C20F99F}">
           <p14:sldIdLst>
             <p14:sldId id="277"/>
             <p14:sldId id="278"/>
@@ -188,9 +188,11 @@
 </file>
 
 <file path=ppt/charts/chart1.xml><?xml version="1.0" encoding="utf-8"?>
-<c:chartSpace xmlns:c="http://schemas.openxmlformats.org/drawingml/2006/chart" xmlns:a="http://schemas.openxmlformats.org/drawingml/2006/main" xmlns:r="http://schemas.openxmlformats.org/officeDocument/2006/relationships">
+<c:chartSpace xmlns:c="http://schemas.openxmlformats.org/drawingml/2006/chart" xmlns:a="http://schemas.openxmlformats.org/drawingml/2006/main" xmlns:r="http://schemas.openxmlformats.org/officeDocument/2006/relationships" xmlns:c16r2="http://schemas.microsoft.com/office/drawing/2015/06/chart">
   <c:date1904 val="0"/>
+  <c:lang val="en-US"/>
   <c:roundedCorners val="1"/>
+  <c:style val="2"/>
   <c:chart>
     <c:autoTitleDeleted val="1"/>
     <c:plotArea>
@@ -222,18 +224,26 @@
           <c:invertIfNegative val="0"/>
           <c:dLbls>
             <c:numFmt formatCode="0.0" sourceLinked="0"/>
+            <c:spPr>
+              <a:noFill/>
+              <a:ln>
+                <a:noFill/>
+              </a:ln>
+              <a:effectLst/>
+            </c:spPr>
             <c:txPr>
               <a:bodyPr/>
               <a:lstStyle/>
               <a:p>
                 <a:pPr>
-                  <a:defRPr b="0" i="0" strike="noStrike" sz="1100" u="none">
+                  <a:defRPr sz="1100" b="0" i="0" u="none" strike="noStrike">
                     <a:solidFill>
                       <a:srgbClr val="1B1F2A"/>
                     </a:solidFill>
                     <a:latin typeface="Arial"/>
                   </a:defRPr>
                 </a:pPr>
+                <a:endParaRPr lang="en-US"/>
               </a:p>
             </c:txPr>
             <c:showLegendKey val="0"/>
@@ -243,28 +253,31 @@
             <c:showPercent val="0"/>
             <c:showBubbleSize val="0"/>
             <c:showLeaderLines val="0"/>
+            <c:extLst>
+              <c:ext xmlns:c15="http://schemas.microsoft.com/office/drawing/2012/chart" uri="{CE6537A1-D6FC-4f65-9D91-7224C49458BB}">
+                <c15:showLeaderLines val="0"/>
+              </c:ext>
+            </c:extLst>
           </c:dLbls>
           <c:cat>
-            <c:multiLvlStrRef>
+            <c:strRef>
               <c:f>Sheet1!$A$2:$A$5</c:f>
-              <c:multiLvlStrCache>
+              <c:strCache>
                 <c:ptCount val="4"/>
-                <c:lvl>
-                  <c:pt idx="0">
-                    <c:v>1: question only</c:v>
-                  </c:pt>
-                  <c:pt idx="1">
-                    <c:v>2: + evidence</c:v>
-                  </c:pt>
-                  <c:pt idx="2">
-                    <c:v>3: + shape, verifier</c:v>
-                  </c:pt>
-                  <c:pt idx="3">
-                    <c:v>4-8: + one slice each</c:v>
-                  </c:pt>
-                </c:lvl>
-              </c:multiLvlStrCache>
-            </c:multiLvlStrRef>
+                <c:pt idx="0">
+                  <c:v>1: question only</c:v>
+                </c:pt>
+                <c:pt idx="1">
+                  <c:v>2: + evidence</c:v>
+                </c:pt>
+                <c:pt idx="2">
+                  <c:v>3: + shape, verifier</c:v>
+                </c:pt>
+                <c:pt idx="3">
+                  <c:v>4-8: + one slice each</c:v>
+                </c:pt>
+              </c:strCache>
+            </c:strRef>
           </c:cat>
           <c:val>
             <c:numRef>
@@ -287,36 +300,23 @@
               </c:numCache>
             </c:numRef>
           </c:val>
+          <c:extLst>
+            <c:ext xmlns:c16="http://schemas.microsoft.com/office/drawing/2014/chart" uri="{C3380CC4-5D6E-409C-BE32-E72D297353CC}">
+              <c16:uniqueId val="{00000000-D624-4001-857F-063BBF8F9D07}"/>
+            </c:ext>
+          </c:extLst>
         </c:ser>
         <c:dLbls>
-          <c:numFmt formatCode="0.0" sourceLinked="0"/>
-          <c:txPr>
-            <a:bodyPr/>
-            <a:lstStyle/>
-            <a:p>
-              <a:pPr>
-                <a:defRPr b="0" i="0" strike="noStrike" sz="1100" u="none">
-                  <a:solidFill>
-                    <a:srgbClr val="1B1F2A"/>
-                  </a:solidFill>
-                  <a:latin typeface="Arial"/>
-                </a:defRPr>
-              </a:pPr>
-            </a:p>
-          </c:txPr>
           <c:showLegendKey val="0"/>
           <c:showVal val="1"/>
           <c:showCatName val="0"/>
           <c:showSerName val="0"/>
           <c:showPercent val="0"/>
           <c:showBubbleSize val="0"/>
-          <c:showLeaderLines val="0"/>
         </c:dLbls>
         <c:gapWidth val="60"/>
-        <c:overlap val="0"/>
         <c:axId val="2094734554"/>
         <c:axId val="2094734552"/>
-        <c:axId val="2094734556"/>
       </c:barChart>
       <c:catAx>
         <c:axId val="2094734554"/>
@@ -355,6 +355,7 @@
         <c:crosses val="autoZero"/>
         <c:auto val="1"/>
         <c:lblAlgn val="ctr"/>
+        <c:lblOffset val="100"/>
         <c:noMultiLvlLbl val="1"/>
       </c:catAx>
       <c:valAx>
@@ -417,6 +418,7 @@
     </c:plotArea>
     <c:plotVisOnly val="1"/>
     <c:dispBlanksAs val="span"/>
+    <c:showDLblsOverMax val="1"/>
   </c:chart>
   <c:spPr>
     <a:noFill/>
@@ -432,9 +434,11 @@
 </file>
 
 <file path=ppt/charts/chart2.xml><?xml version="1.0" encoding="utf-8"?>
-<c:chartSpace xmlns:c="http://schemas.openxmlformats.org/drawingml/2006/chart" xmlns:a="http://schemas.openxmlformats.org/drawingml/2006/main" xmlns:r="http://schemas.openxmlformats.org/officeDocument/2006/relationships">
+<c:chartSpace xmlns:c="http://schemas.openxmlformats.org/drawingml/2006/chart" xmlns:a="http://schemas.openxmlformats.org/drawingml/2006/main" xmlns:r="http://schemas.openxmlformats.org/officeDocument/2006/relationships" xmlns:c16r2="http://schemas.microsoft.com/office/drawing/2015/06/chart">
   <c:date1904 val="0"/>
+  <c:lang val="en-US"/>
   <c:roundedCorners val="1"/>
+  <c:style val="2"/>
   <c:chart>
     <c:autoTitleDeleted val="1"/>
     <c:plotArea>
@@ -466,18 +470,26 @@
           <c:invertIfNegative val="0"/>
           <c:dLbls>
             <c:numFmt formatCode="0" sourceLinked="0"/>
+            <c:spPr>
+              <a:noFill/>
+              <a:ln>
+                <a:noFill/>
+              </a:ln>
+              <a:effectLst/>
+            </c:spPr>
             <c:txPr>
               <a:bodyPr/>
               <a:lstStyle/>
               <a:p>
                 <a:pPr>
-                  <a:defRPr b="0" i="0" strike="noStrike" sz="1100" u="none">
+                  <a:defRPr sz="1100" b="0" i="0" u="none" strike="noStrike">
                     <a:solidFill>
                       <a:srgbClr val="1B1F2A"/>
                     </a:solidFill>
                     <a:latin typeface="Arial"/>
                   </a:defRPr>
                 </a:pPr>
+                <a:endParaRPr lang="en-US"/>
               </a:p>
             </c:txPr>
             <c:showLegendKey val="0"/>
@@ -487,28 +499,31 @@
             <c:showPercent val="0"/>
             <c:showBubbleSize val="0"/>
             <c:showLeaderLines val="0"/>
+            <c:extLst>
+              <c:ext xmlns:c15="http://schemas.microsoft.com/office/drawing/2012/chart" uri="{CE6537A1-D6FC-4f65-9D91-7224C49458BB}">
+                <c15:showLeaderLines val="0"/>
+              </c:ext>
+            </c:extLst>
           </c:dLbls>
           <c:cat>
-            <c:multiLvlStrRef>
+            <c:strRef>
               <c:f>Sheet1!$A$2:$A$5</c:f>
-              <c:multiLvlStrCache>
+              <c:strCache>
                 <c:ptCount val="4"/>
-                <c:lvl>
-                  <c:pt idx="0">
-                    <c:v>1: question only</c:v>
-                  </c:pt>
-                  <c:pt idx="1">
-                    <c:v>2: + evidence</c:v>
-                  </c:pt>
-                  <c:pt idx="2">
-                    <c:v>3: + shape, verifier</c:v>
-                  </c:pt>
-                  <c:pt idx="3">
-                    <c:v>4-8: + one slice each</c:v>
-                  </c:pt>
-                </c:lvl>
-              </c:multiLvlStrCache>
-            </c:multiLvlStrRef>
+                <c:pt idx="0">
+                  <c:v>1: question only</c:v>
+                </c:pt>
+                <c:pt idx="1">
+                  <c:v>2: + evidence</c:v>
+                </c:pt>
+                <c:pt idx="2">
+                  <c:v>3: + shape, verifier</c:v>
+                </c:pt>
+                <c:pt idx="3">
+                  <c:v>4-8: + one slice each</c:v>
+                </c:pt>
+              </c:strCache>
+            </c:strRef>
           </c:cat>
           <c:val>
             <c:numRef>
@@ -531,36 +546,23 @@
               </c:numCache>
             </c:numRef>
           </c:val>
+          <c:extLst>
+            <c:ext xmlns:c16="http://schemas.microsoft.com/office/drawing/2014/chart" uri="{C3380CC4-5D6E-409C-BE32-E72D297353CC}">
+              <c16:uniqueId val="{00000000-4F9A-4664-9EC9-5BCF136A3B7E}"/>
+            </c:ext>
+          </c:extLst>
         </c:ser>
         <c:dLbls>
-          <c:numFmt formatCode="0" sourceLinked="0"/>
-          <c:txPr>
-            <a:bodyPr/>
-            <a:lstStyle/>
-            <a:p>
-              <a:pPr>
-                <a:defRPr b="0" i="0" strike="noStrike" sz="1100" u="none">
-                  <a:solidFill>
-                    <a:srgbClr val="1B1F2A"/>
-                  </a:solidFill>
-                  <a:latin typeface="Arial"/>
-                </a:defRPr>
-              </a:pPr>
-            </a:p>
-          </c:txPr>
           <c:showLegendKey val="0"/>
           <c:showVal val="1"/>
           <c:showCatName val="0"/>
           <c:showSerName val="0"/>
           <c:showPercent val="0"/>
           <c:showBubbleSize val="0"/>
-          <c:showLeaderLines val="0"/>
         </c:dLbls>
         <c:gapWidth val="60"/>
-        <c:overlap val="0"/>
         <c:axId val="2094734554"/>
         <c:axId val="2094734552"/>
-        <c:axId val="2094734556"/>
       </c:barChart>
       <c:catAx>
         <c:axId val="2094734554"/>
@@ -599,6 +601,7 @@
         <c:crosses val="autoZero"/>
         <c:auto val="1"/>
         <c:lblAlgn val="ctr"/>
+        <c:lblOffset val="100"/>
         <c:noMultiLvlLbl val="1"/>
       </c:catAx>
       <c:valAx>
@@ -661,6 +664,7 @@
     </c:plotArea>
     <c:plotVisOnly val="1"/>
     <c:dispBlanksAs val="span"/>
+    <c:showDLblsOverMax val="1"/>
   </c:chart>
   <c:spPr>
     <a:noFill/>
@@ -676,9 +680,11 @@
 </file>
 
 <file path=ppt/charts/chart3.xml><?xml version="1.0" encoding="utf-8"?>
-<c:chartSpace xmlns:c="http://schemas.openxmlformats.org/drawingml/2006/chart" xmlns:a="http://schemas.openxmlformats.org/drawingml/2006/main" xmlns:r="http://schemas.openxmlformats.org/officeDocument/2006/relationships">
+<c:chartSpace xmlns:c="http://schemas.openxmlformats.org/drawingml/2006/chart" xmlns:a="http://schemas.openxmlformats.org/drawingml/2006/main" xmlns:r="http://schemas.openxmlformats.org/officeDocument/2006/relationships" xmlns:c16r2="http://schemas.microsoft.com/office/drawing/2015/06/chart">
   <c:date1904 val="0"/>
+  <c:lang val="en-US"/>
   <c:roundedCorners val="1"/>
+  <c:style val="2"/>
   <c:chart>
     <c:autoTitleDeleted val="1"/>
     <c:plotArea>
@@ -710,18 +716,26 @@
           <c:invertIfNegative val="0"/>
           <c:dLbls>
             <c:numFmt formatCode="0.0" sourceLinked="0"/>
+            <c:spPr>
+              <a:noFill/>
+              <a:ln>
+                <a:noFill/>
+              </a:ln>
+              <a:effectLst/>
+            </c:spPr>
             <c:txPr>
               <a:bodyPr/>
               <a:lstStyle/>
               <a:p>
                 <a:pPr>
-                  <a:defRPr b="0" i="0" strike="noStrike" sz="1100" u="none">
+                  <a:defRPr sz="1100" b="0" i="0" u="none" strike="noStrike">
                     <a:solidFill>
                       <a:srgbClr val="1B1F2A"/>
                     </a:solidFill>
                     <a:latin typeface="Arial"/>
                   </a:defRPr>
                 </a:pPr>
+                <a:endParaRPr lang="en-US"/>
               </a:p>
             </c:txPr>
             <c:showLegendKey val="0"/>
@@ -731,25 +745,28 @@
             <c:showPercent val="0"/>
             <c:showBubbleSize val="0"/>
             <c:showLeaderLines val="0"/>
+            <c:extLst>
+              <c:ext xmlns:c15="http://schemas.microsoft.com/office/drawing/2012/chart" uri="{CE6537A1-D6FC-4f65-9D91-7224C49458BB}">
+                <c15:showLeaderLines val="0"/>
+              </c:ext>
+            </c:extLst>
           </c:dLbls>
           <c:cat>
-            <c:multiLvlStrRef>
+            <c:strRef>
               <c:f>Sheet1!$A$2:$A$4</c:f>
-              <c:multiLvlStrCache>
+              <c:strCache>
                 <c:ptCount val="3"/>
-                <c:lvl>
-                  <c:pt idx="0">
-                    <c:v>1: question only</c:v>
-                  </c:pt>
-                  <c:pt idx="1">
-                    <c:v>3: + shape, verifier</c:v>
-                  </c:pt>
-                  <c:pt idx="2">
-                    <c:v>4-8: + one slice each</c:v>
-                  </c:pt>
-                </c:lvl>
-              </c:multiLvlStrCache>
-            </c:multiLvlStrRef>
+                <c:pt idx="0">
+                  <c:v>1: question only</c:v>
+                </c:pt>
+                <c:pt idx="1">
+                  <c:v>3: + shape, verifier</c:v>
+                </c:pt>
+                <c:pt idx="2">
+                  <c:v>4-8: + one slice each</c:v>
+                </c:pt>
+              </c:strCache>
+            </c:strRef>
           </c:cat>
           <c:val>
             <c:numRef>
@@ -769,36 +786,23 @@
               </c:numCache>
             </c:numRef>
           </c:val>
+          <c:extLst>
+            <c:ext xmlns:c16="http://schemas.microsoft.com/office/drawing/2014/chart" uri="{C3380CC4-5D6E-409C-BE32-E72D297353CC}">
+              <c16:uniqueId val="{00000000-E304-4A27-B405-4833308546BD}"/>
+            </c:ext>
+          </c:extLst>
         </c:ser>
         <c:dLbls>
-          <c:numFmt formatCode="0.0" sourceLinked="0"/>
-          <c:txPr>
-            <a:bodyPr/>
-            <a:lstStyle/>
-            <a:p>
-              <a:pPr>
-                <a:defRPr b="0" i="0" strike="noStrike" sz="1100" u="none">
-                  <a:solidFill>
-                    <a:srgbClr val="1B1F2A"/>
-                  </a:solidFill>
-                  <a:latin typeface="Arial"/>
-                </a:defRPr>
-              </a:pPr>
-            </a:p>
-          </c:txPr>
           <c:showLegendKey val="0"/>
           <c:showVal val="1"/>
           <c:showCatName val="0"/>
           <c:showSerName val="0"/>
           <c:showPercent val="0"/>
           <c:showBubbleSize val="0"/>
-          <c:showLeaderLines val="0"/>
         </c:dLbls>
         <c:gapWidth val="60"/>
-        <c:overlap val="0"/>
         <c:axId val="2094734554"/>
         <c:axId val="2094734552"/>
-        <c:axId val="2094734556"/>
       </c:barChart>
       <c:catAx>
         <c:axId val="2094734554"/>
@@ -837,6 +841,7 @@
         <c:crosses val="autoZero"/>
         <c:auto val="1"/>
         <c:lblAlgn val="ctr"/>
+        <c:lblOffset val="100"/>
         <c:noMultiLvlLbl val="1"/>
       </c:catAx>
       <c:valAx>
@@ -899,6 +904,7 @@
     </c:plotArea>
     <c:plotVisOnly val="1"/>
     <c:dispBlanksAs val="span"/>
+    <c:showDLblsOverMax val="1"/>
   </c:chart>
   <c:spPr>
     <a:noFill/>
@@ -935,234 +941,10 @@
           <a:chExt cx="0" cy="0"/>
         </a:xfrm>
       </p:grpSpPr>
-      <p:sp>
-        <p:nvSpPr>
-          <p:cNvPr id="2" name="Header Placeholder 1"/>
-          <p:cNvSpPr>
-            <a:spLocks noGrp="1"/>
-          </p:cNvSpPr>
-          <p:nvPr>
-            <p:ph type="hdr" sz="quarter"/>
-          </p:nvPr>
-        </p:nvSpPr>
-        <p:spPr>
-          <a:xfrm>
-            <a:off x="0" y="0"/>
-            <a:ext cx="2971800" cy="458788"/>
-          </a:xfrm>
-          <a:prstGeom prst="rect">
-            <a:avLst/>
-          </a:prstGeom>
-        </p:spPr>
-        <p:txBody>
-          <a:bodyPr vert="horz" lIns="91440" tIns="45720" rIns="91440" bIns="45720" rtlCol="0"/>
-          <a:lstStyle>
-            <a:lvl1pPr algn="l">
-              <a:defRPr sz="1200"/>
-            </a:lvl1pPr>
-          </a:lstStyle>
-          <a:p>
-            <a:endParaRPr lang="en-US"/>
-          </a:p>
-        </p:txBody>
-      </p:sp>
-      <p:sp>
-        <p:nvSpPr>
-          <p:cNvPr id="3" name="Date Placeholder 2"/>
-          <p:cNvSpPr>
-            <a:spLocks noGrp="1"/>
-          </p:cNvSpPr>
-          <p:nvPr>
-            <p:ph type="dt" idx="1"/>
-          </p:nvPr>
-        </p:nvSpPr>
-        <p:spPr>
-          <a:xfrm>
-            <a:off x="3884613" y="0"/>
-            <a:ext cx="2971800" cy="458788"/>
-          </a:xfrm>
-          <a:prstGeom prst="rect">
-            <a:avLst/>
-          </a:prstGeom>
-        </p:spPr>
-        <p:txBody>
-          <a:bodyPr vert="horz" lIns="91440" tIns="45720" rIns="91440" bIns="45720" rtlCol="0"/>
-          <a:lstStyle>
-            <a:lvl1pPr algn="r">
-              <a:defRPr sz="1200"/>
-            </a:lvl1pPr>
-          </a:lstStyle>
-          <a:p>
-            <a:fld id="{5282F153-3F37-0F45-9E97-73ACFA13230C}" type="datetimeFigureOut">
-              <a:rPr lang="en-US"/>
-              <a:t>7/23/19</a:t>
-            </a:fld>
-            <a:endParaRPr lang="en-US"/>
-          </a:p>
-        </p:txBody>
-      </p:sp>
-      <p:sp>
-        <p:nvSpPr>
-          <p:cNvPr id="4" name="Slide Image Placeholder 3"/>
-          <p:cNvSpPr>
-            <a:spLocks noGrp="1" noRot="1" noChangeAspect="1"/>
-          </p:cNvSpPr>
-          <p:nvPr>
-            <p:ph type="sldImg" idx="2"/>
-          </p:nvPr>
-        </p:nvSpPr>
-        <p:spPr>
-          <a:xfrm>
-            <a:off x="685800" y="1143000"/>
-            <a:ext cx="5486400" cy="3086100"/>
-          </a:xfrm>
-          <a:prstGeom prst="rect">
-            <a:avLst/>
-          </a:prstGeom>
-          <a:noFill/>
-          <a:ln w="12700">
-            <a:solidFill>
-              <a:prstClr val="black"/>
-            </a:solidFill>
-          </a:ln>
-        </p:spPr>
-        <p:txBody>
-          <a:bodyPr vert="horz" lIns="91440" tIns="45720" rIns="91440" bIns="45720" rtlCol="0" anchor="ctr"/>
-          <a:lstStyle/>
-          <a:p>
-            <a:endParaRPr lang="en-US"/>
-          </a:p>
-        </p:txBody>
-      </p:sp>
-      <p:sp>
-        <p:nvSpPr>
-          <p:cNvPr id="5" name="Notes Placeholder 4"/>
-          <p:cNvSpPr>
-            <a:spLocks noGrp="1"/>
-          </p:cNvSpPr>
-          <p:nvPr>
-            <p:ph type="body" sz="quarter" idx="3"/>
-          </p:nvPr>
-        </p:nvSpPr>
-        <p:spPr>
-          <a:xfrm>
-            <a:off x="685800" y="4400550"/>
-            <a:ext cx="5486400" cy="3600450"/>
-          </a:xfrm>
-          <a:prstGeom prst="rect">
-            <a:avLst/>
-          </a:prstGeom>
-        </p:spPr>
-        <p:txBody>
-          <a:bodyPr vert="horz" lIns="91440" tIns="45720" rIns="91440" bIns="45720" rtlCol="0"/>
-          <a:lstStyle/>
-          <a:p>
-            <a:pPr lvl="0"/>
-            <a:r>
-              <a:rPr lang="en-US"/>
-              <a:t>Click to edit Master text styles</a:t>
-            </a:r>
-          </a:p>
-          <a:p>
-            <a:pPr lvl="1"/>
-            <a:r>
-              <a:rPr lang="en-US"/>
-              <a:t>Second level</a:t>
-            </a:r>
-          </a:p>
-          <a:p>
-            <a:pPr lvl="2"/>
-            <a:r>
-              <a:rPr lang="en-US"/>
-              <a:t>Third level</a:t>
-            </a:r>
-          </a:p>
-          <a:p>
-            <a:pPr lvl="3"/>
-            <a:r>
-              <a:rPr lang="en-US"/>
-              <a:t>Fourth level</a:t>
-            </a:r>
-          </a:p>
-          <a:p>
-            <a:pPr lvl="4"/>
-            <a:r>
-              <a:rPr lang="en-US"/>
-              <a:t>Fifth level</a:t>
-            </a:r>
-          </a:p>
-        </p:txBody>
-      </p:sp>
-      <p:sp>
-        <p:nvSpPr>
-          <p:cNvPr id="6" name="Footer Placeholder 5"/>
-          <p:cNvSpPr>
-            <a:spLocks noGrp="1"/>
-          </p:cNvSpPr>
-          <p:nvPr>
-            <p:ph type="ftr" sz="quarter" idx="4"/>
-          </p:nvPr>
-        </p:nvSpPr>
-        <p:spPr>
-          <a:xfrm>
-            <a:off x="0" y="8685213"/>
-            <a:ext cx="2971800" cy="458787"/>
-          </a:xfrm>
-          <a:prstGeom prst="rect">
-            <a:avLst/>
-          </a:prstGeom>
-        </p:spPr>
-        <p:txBody>
-          <a:bodyPr vert="horz" lIns="91440" tIns="45720" rIns="91440" bIns="45720" rtlCol="0" anchor="b"/>
-          <a:lstStyle>
-            <a:lvl1pPr algn="l">
-              <a:defRPr sz="1200"/>
-            </a:lvl1pPr>
-          </a:lstStyle>
-          <a:p>
-            <a:endParaRPr lang="en-US"/>
-          </a:p>
-        </p:txBody>
-      </p:sp>
-      <p:sp>
-        <p:nvSpPr>
-          <p:cNvPr id="7" name="Slide Number Placeholder 6"/>
-          <p:cNvSpPr>
-            <a:spLocks noGrp="1"/>
-          </p:cNvSpPr>
-          <p:nvPr>
-            <p:ph type="sldNum" sz="quarter" idx="5"/>
-          </p:nvPr>
-        </p:nvSpPr>
-        <p:spPr>
-          <a:xfrm>
-            <a:off x="3884613" y="8685213"/>
-            <a:ext cx="2971800" cy="458787"/>
-          </a:xfrm>
-          <a:prstGeom prst="rect">
-            <a:avLst/>
-          </a:prstGeom>
-        </p:spPr>
-        <p:txBody>
-          <a:bodyPr vert="horz" lIns="91440" tIns="45720" rIns="91440" bIns="45720" rtlCol="0" anchor="b"/>
-          <a:lstStyle>
-            <a:lvl1pPr algn="r">
-              <a:defRPr sz="1200"/>
-            </a:lvl1pPr>
-          </a:lstStyle>
-          <a:p>
-            <a:fld id="{CE5E9CC1-C706-0F49-92D6-E571CC5EEA8F}" type="slidenum">
-              <a:rPr lang="en-US"/>
-              <a:t>‹#›</a:t>
-            </a:fld>
-            <a:endParaRPr lang="en-US"/>
-          </a:p>
-        </p:txBody>
-      </p:sp>
     </p:spTree>
     <p:extLst>
       <p:ext uri="{BB962C8B-B14F-4D97-AF65-F5344CB8AC3E}">
-        <p14:creationId xmlns:p14="http://schemas.microsoft.com/office/powerpoint/2010/main" val="1024086991"/>
+        <p14:creationId xmlns:p14="http://schemas.microsoft.com/office/powerpoint/2010/main" val="3899145563"/>
       </p:ext>
     </p:extLst>
   </p:cSld>
@@ -1310,7 +1092,6 @@
               <a:rPr lang="en-US" dirty="0"/>
               <a:t>Before the session: start the app (fedcast ui), press Pull evidence then Run forecast so the top bar reads 'under an hour ago', open the Forecast view, and have the Evidence graph, Analyst prompts, Analyst results and Scorecard tabs one click away. Open with the one-line thesis: a language model inside an engineered harness gives forecasts that are measurably more repeatable and more faithful to evidence than the same model asked naively, and the way to prove it is to measure the process, not to wait for eight decisions a year to come true.</a:t>
             </a:r>
-            <a:endParaRPr lang="en-US" dirty="0"/>
           </a:p>
         </p:txBody>
       </p:sp>
@@ -1398,7 +1179,6 @@
               <a:rPr lang="en-US" dirty="0"/>
               <a:t>This is the longest demo. Start at the raw futures price so the audience sees arithmetic, not a black box. Then the pool box, then one click into an evidence item to show the frozen text.</a:t>
             </a:r>
-            <a:endParaRPr lang="en-US" dirty="0"/>
           </a:p>
         </p:txBody>
       </p:sp>
@@ -1486,7 +1266,6 @@
               <a:rPr lang="en-US" dirty="0"/>
               <a:t>This is the slide that explains what harnessing means. The same model is run eight ways on the same snapshot. Analyst 1 gets nothing but the question: that is what the model does on its own, the control. Each step up adds exactly one thing, so the score difference between neighbouring steps is the value of that thing. Analysts 1 and 2 are meant to fail; the tool is judged on 3 and 4 to 8.</a:t>
             </a:r>
-            <a:endParaRPr lang="en-US" dirty="0"/>
           </a:p>
         </p:txBody>
       </p:sp>
@@ -1574,7 +1353,6 @@
               <a:rPr lang="en-US" dirty="0"/>
               <a:t>Five mechanisms. None of them is clever; together they are what makes a language model's output usable in a forecast.</a:t>
             </a:r>
-            <a:endParaRPr lang="en-US" dirty="0"/>
           </a:p>
         </p:txBody>
       </p:sp>
@@ -1662,7 +1440,6 @@
               <a:rPr lang="en-US" dirty="0"/>
               <a:t>Open analyst 1 first so the contrast with analyst 6 lands. Scroll the full prompt slowly past the schema and the pre-read; do not read it out.</a:t>
             </a:r>
-            <a:endParaRPr lang="en-US" dirty="0"/>
           </a:p>
         </p:txBody>
       </p:sp>
@@ -1750,7 +1527,6 @@
               <a:rPr lang="en-US" dirty="0"/>
               <a:t>Read left to right as an evolution. Analyst 1 wobbles by three to five points between identical runs, cites nothing, and leaks three dozen numbers from memory; it still thinks the Fed is cutting. Adding the evidence (analyst 2) removes the leaks but not the wobble, and nothing can be checked. Adding the answer shape and the verifier (analyst 3) is the step that makes the output stable and fully verifiable. Specialists (4 to 8) keep that and add attribution. Same model, same day; the difference at each step is the one thing added.</a:t>
             </a:r>
-            <a:endParaRPr lang="en-US" dirty="0"/>
           </a:p>
         </p:txBody>
       </p:sp>
@@ -1838,7 +1614,6 @@
               <a:rPr lang="en-US" dirty="0"/>
               <a:t>Three charts, one per dimension, averaged over the four snapshots. Left: how much the answer moves between identical runs. The step that matters is analyst 2 to analyst 3: the answer shape and the verifier take the wobble from three and a half points to under one. Middle: numbers from memory, gone as soon as the evidence is shown. Right: share of claims whose quote code found verbatim; analyst 2 cannot be measured because it quotes nothing. The specialists keep what analyst 3 achieved. For analysts 3 to 8 the wobble is in their lean, which maps one basis point to one percentage point of probability, so the four bars are comparable.</a:t>
             </a:r>
-            <a:endParaRPr lang="en-US" dirty="0"/>
           </a:p>
         </p:txBody>
       </p:sp>
@@ -1926,7 +1701,6 @@
               <a:rPr lang="en-US" dirty="0"/>
               <a:t>Make it concrete. Each specialist's lean, and one real claim with the quote code matched. The labour analyst is the one that does not lean hawkish, and because it is a separate reader that dissent is visible rather than averaged away.</a:t>
             </a:r>
-            <a:endParaRPr lang="en-US" dirty="0"/>
           </a:p>
         </p:txBody>
       </p:sp>
@@ -2014,7 +1788,6 @@
               <a:rPr lang="en-US" dirty="0"/>
               <a:t>Pick the signal.tone claim on analyst 4 if asked where a quote comes from: it is the pre-read, our arithmetic over the two statements.</a:t>
             </a:r>
-            <a:endParaRPr lang="en-US" dirty="0"/>
           </a:p>
         </p:txBody>
       </p:sp>
@@ -2102,7 +1875,6 @@
               <a:rPr lang="en-US" dirty="0"/>
               <a:t>Ten dimensions fixed before any forecasting code existed. Eight are now measured automatically on each new snapshot. The over-time table is the drift check: the marks never move, so a cell that turns red is a change in the system. It has already caught two things, bottom right.</a:t>
             </a:r>
-            <a:endParaRPr lang="en-US" dirty="0"/>
           </a:p>
         </p:txBody>
       </p:sp>
@@ -2190,7 +1962,6 @@
               <a:rPr lang="en-US" dirty="0"/>
               <a:t>If time is short, skip the dropdown and go straight to the over-time table.</a:t>
             </a:r>
-            <a:endParaRPr lang="en-US" dirty="0"/>
           </a:p>
         </p:txBody>
       </p:sp>
@@ -2276,9 +2047,8 @@
           <a:p>
             <a:r>
               <a:rPr lang="en-US" dirty="0"/>
-              <a:t>One minute. The thread to pull: every system on the right had to put a model's output in front of people making live decisions, and the hard part was never the model, it was earning trust in what it said. FedCast is that problem made explicit and measurable.</a:t>
-            </a:r>
-            <a:endParaRPr lang="en-US" dirty="0"/>
+              <a:t>One minute. The thread: every system on the right put a model's output in front of people making live decisions, and the hard part was never the model, it was earning trust in what it said. FedCast is that problem made explicit and measurable.</a:t>
+            </a:r>
           </a:p>
         </p:txBody>
       </p:sp>
@@ -2308,7 +2078,7 @@
     </p:spTree>
     <p:extLst>
       <p:ext uri="{BB962C8B-B14F-4D97-AF65-F5344CB8AC3E}">
-        <p14:creationId xmlns:p14="http://schemas.microsoft.com/office/powerpoint/2010/main" val="1024086991"/>
+        <p14:creationId xmlns:p14="http://schemas.microsoft.com/office/powerpoint/2010/main" val="3944271024"/>
       </p:ext>
     </p:extLst>
   </p:cSld>
@@ -2366,7 +2136,6 @@
               <a:rPr lang="en-US" dirty="0"/>
               <a:t>Seven amendments in five weeks, each logged with its reason, each changing the spec hash pinned in the tests. The point of the timeline is that every change to the method is visible and dated, and that the number can be recomputed under the spec it was made with.</a:t>
             </a:r>
-            <a:endParaRPr lang="en-US" dirty="0"/>
           </a:p>
         </p:txBody>
       </p:sp>
@@ -2454,7 +2223,6 @@
               <a:rPr lang="en-US" dirty="0"/>
               <a:t>One minute. Press the button, read the result line, move on.</a:t>
             </a:r>
-            <a:endParaRPr lang="en-US" dirty="0"/>
           </a:p>
         </p:txBody>
       </p:sp>
@@ -2542,7 +2310,6 @@
               <a:rPr lang="en-US" dirty="0"/>
               <a:t>Say the limits before anyone asks. There is no live record: the first scored decision is 28 October. The weights are judgement, logged, not fitted. The probit is kept out. The sample behind every quant model is small and unbalanced. And at five weeks the market is the anchor, not the competitor.</a:t>
             </a:r>
-            <a:endParaRPr lang="en-US" dirty="0"/>
           </a:p>
         </p:txBody>
       </p:sp>
@@ -2630,7 +2397,6 @@
               <a:rPr lang="en-US" dirty="0"/>
               <a:t>Three follow-ups worth discussing with the room. Live scoring is built and the first record lands the morning after the decision. Longer windows are where reading evidence should matter more: for the December meeting the market already prices a hike at three in four, and the year-end rate is open. And an events agent for regime shifts: the cuts of 1987, 1998, 2008 and 2020 were driven by financial stress, not by the data the models read; the base-rates pre-read already lists the intermeeting moves, and a watch-out agent could flag when conditions look like those episodes.</a:t>
             </a:r>
-            <a:endParaRPr lang="en-US" dirty="0"/>
           </a:p>
         </p:txBody>
       </p:sp>
@@ -2718,7 +2484,6 @@
               <a:rPr lang="en-US" dirty="0"/>
               <a:t>Close on the ask. The forecast for 28 October is on file; the scoring is automatic from here; what the room can add is scrutiny and the next target.</a:t>
             </a:r>
-            <a:endParaRPr lang="en-US" dirty="0"/>
           </a:p>
         </p:txBody>
       </p:sp>
@@ -2806,7 +2571,6 @@
               <a:rPr lang="en-US" dirty="0"/>
               <a:t>The question is narrow on purpose: what will the FOMC decide at its next scheduled meeting, as probabilities over five outcomes. Today's answer is on the left. On the right is the point: the market alone says 90/10; the system says 71/23 and can show every step from evidence to that number.</a:t>
             </a:r>
-            <a:endParaRPr lang="en-US" dirty="0"/>
           </a:p>
         </p:txBody>
       </p:sp>
@@ -2894,7 +2658,6 @@
               <a:rPr lang="en-US" dirty="0"/>
               <a:t>Keep this to one minute. The point is only that the number exists, is dated, and is traceable. Do not explain the models yet.</a:t>
             </a:r>
-            <a:endParaRPr lang="en-US" dirty="0"/>
           </a:p>
         </p:txBody>
       </p:sp>
@@ -2982,7 +2745,6 @@
               <a:rPr lang="en-US" dirty="0"/>
               <a:t>Three reasons. First, accuracy is the wrong yardstick at this horizon: eight decisions a year, and the market already gets most of them right, so a good year proves nothing. Second, what a desk can use is a number whose every input it can see and challenge. Third, the harness is the asset: the same machine can target the December meeting, the year-end rate, or a different central bank, and the controls tell you whether it is still working.</a:t>
             </a:r>
-            <a:endParaRPr lang="en-US" dirty="0"/>
           </a:p>
         </p:txBody>
       </p:sp>
@@ -3070,7 +2832,6 @@
               <a:rPr lang="en-US" dirty="0"/>
               <a:t>The honest comparison. At thirty days the futures market, read through CME FedWatch, calls about 88% of decisions right over thirty years, and nothing here claims to beat that. The academic LLM papers report higher accuracy but on sixteen meetings, with no replay and no verification of what the model read. The gap we fill is the right-hand column: not a better guess, a checkable one.</a:t>
             </a:r>
-            <a:endParaRPr lang="en-US" dirty="0"/>
           </a:p>
         </p:txBody>
       </p:sp>
@@ -3158,7 +2919,6 @@
               <a:rPr lang="en-US" dirty="0"/>
               <a:t>Four properties, each enforced by code, each measured. Say them slowly; they are the whole design.</a:t>
             </a:r>
-            <a:endParaRPr lang="en-US" dirty="0"/>
           </a:p>
         </p:txBody>
       </p:sp>
@@ -3246,7 +3006,6 @@
               <a:rPr lang="en-US" dirty="0"/>
               <a:t>Blue boxes are code and deterministic. The orange box is the language model, which may lean the number but never writes it. The green box is the human. Walk it left to right; every box is a view in the app.</a:t>
             </a:r>
-            <a:endParaRPr lang="en-US" dirty="0"/>
           </a:p>
         </p:txBody>
       </p:sp>
@@ -3334,7 +3093,6 @@
               <a:rPr lang="en-US" dirty="0"/>
               <a:t>This is the arithmetic for entry 16. The pool is a weighted average, then the floor. The specialists' mean lean of +4.4 basis points becomes 4.4 points of probability moved toward a hike, through the same capped mechanism a human view uses.</a:t>
             </a:r>
-            <a:endParaRPr lang="en-US" dirty="0"/>
           </a:p>
         </p:txBody>
       </p:sp>
@@ -3412,6 +3170,7 @@
         <a:solidFill>
           <a:srgbClr val="1E2761"/>
         </a:solidFill>
+        <a:effectLst/>
       </p:bgPr>
     </p:bg>
     <p:spTree>
@@ -3431,9 +3190,11 @@
       <p:sp>
         <p:nvSpPr>
           <p:cNvPr id="2" name="Text 0"/>
-          <p:cNvSpPr/>
+          <p:cNvSpPr>
+            <a:spLocks noGrp="1"/>
+          </p:cNvSpPr>
           <p:nvPr>
-            <p:ph idx="100" type="title" hasCustomPrompt="1"/>
+            <p:ph type="title" idx="100" hasCustomPrompt="1"/>
           </p:nvPr>
         </p:nvSpPr>
         <p:spPr>
@@ -3450,7 +3211,7 @@
         <p:txBody>
           <a:bodyPr wrap="square" rtlCol="0"/>
           <a:lstStyle>
-            <a:lvl1pPr algn="l" indent="0" marL="0">
+            <a:lvl1pPr marL="0" indent="0" algn="l">
               <a:buNone/>
               <a:defRPr lang="en-US" sz="4000" b="1" dirty="0">
                 <a:solidFill>
@@ -3460,7 +3221,7 @@
             </a:lvl1pPr>
           </a:lstStyle>
           <a:p>
-            <a:pPr algn="l" indent="0" marL="0">
+            <a:pPr marL="0" indent="0" algn="l">
               <a:buNone/>
             </a:pPr>
             <a:endParaRPr lang="en-US" sz="4000" dirty="0"/>
@@ -3470,9 +3231,11 @@
       <p:sp>
         <p:nvSpPr>
           <p:cNvPr id="3" name="Text 0"/>
-          <p:cNvSpPr/>
+          <p:cNvSpPr>
+            <a:spLocks noGrp="1"/>
+          </p:cNvSpPr>
           <p:nvPr>
-            <p:ph idx="101" type="body" hasCustomPrompt="1"/>
+            <p:ph type="body" idx="101" hasCustomPrompt="1"/>
           </p:nvPr>
         </p:nvSpPr>
         <p:spPr>
@@ -3489,7 +3252,7 @@
         <p:txBody>
           <a:bodyPr wrap="square" rtlCol="0"/>
           <a:lstStyle>
-            <a:lvl1pPr algn="l" indent="0" marL="0">
+            <a:lvl1pPr marL="0" indent="0" algn="l">
               <a:buNone/>
               <a:defRPr lang="en-US" sz="2000" dirty="0">
                 <a:solidFill>
@@ -3499,7 +3262,7 @@
             </a:lvl1pPr>
           </a:lstStyle>
           <a:p>
-            <a:pPr algn="l" indent="0" marL="0">
+            <a:pPr marL="0" indent="0" algn="l">
               <a:buNone/>
             </a:pPr>
             <a:endParaRPr lang="en-US" sz="2000" dirty="0"/>
@@ -3522,6 +3285,7 @@
         <a:solidFill>
           <a:srgbClr val="FFFFFF"/>
         </a:solidFill>
+        <a:effectLst/>
       </p:bgPr>
     </p:bg>
     <p:spTree>
@@ -3541,9 +3305,11 @@
       <p:sp>
         <p:nvSpPr>
           <p:cNvPr id="2" name="Text 0"/>
-          <p:cNvSpPr/>
+          <p:cNvSpPr>
+            <a:spLocks noGrp="1"/>
+          </p:cNvSpPr>
           <p:nvPr>
-            <p:ph idx="100" type="title" hasCustomPrompt="1"/>
+            <p:ph type="title" idx="100" hasCustomPrompt="1"/>
           </p:nvPr>
         </p:nvSpPr>
         <p:spPr>
@@ -3560,7 +3326,7 @@
         <p:txBody>
           <a:bodyPr wrap="square" rtlCol="0"/>
           <a:lstStyle>
-            <a:lvl1pPr algn="l" indent="0" marL="0">
+            <a:lvl1pPr marL="0" indent="0" algn="l">
               <a:buNone/>
               <a:defRPr lang="en-US" sz="3200" b="1" dirty="0">
                 <a:solidFill>
@@ -3570,7 +3336,7 @@
             </a:lvl1pPr>
           </a:lstStyle>
           <a:p>
-            <a:pPr algn="l" indent="0" marL="0">
+            <a:pPr marL="0" indent="0" algn="l">
               <a:buNone/>
             </a:pPr>
             <a:endParaRPr lang="en-US" sz="3200" dirty="0"/>
@@ -3598,7 +3364,7 @@
           <a:bodyPr wrap="square" lIns="0" tIns="0" rIns="0" bIns="0" rtlCol="0" anchor="ctr"/>
           <a:lstStyle/>
           <a:p>
-            <a:pPr indent="0" marL="0">
+            <a:pPr marL="0" indent="0">
               <a:buNone/>
             </a:pPr>
             <a:r>
@@ -3633,7 +3399,7 @@
           </a:prstGeom>
           <a:extLst>
             <a:ext uri="{C572A759-6A51-4108-AA02-DFA0A04FC94B}">
-              <ma14:wrappingTextBoxFlag xmlns:ma14="http://schemas.microsoft.com/office/mac/drawingml/2011/main" val="0"/>
+              <ma14:wrappingTextBoxFlag xmlns:ma14="http://schemas.microsoft.com/office/mac/drawingml/2011/main" xmlns="" val="0"/>
             </a:ext>
           </a:extLst>
         </p:spPr>
@@ -3651,8 +3417,8 @@
           <a:p>
             <a:pPr algn="r"/>
             <a:fld id="{F7021451-1387-4CA6-816F-3879F97B5CBC}" type="slidenum">
-              <a:rPr b="0" lang="en-US"/>
-              <a:t>1003</a:t>
+              <a:rPr lang="en-US" b="0"/>
+              <a:t>‹#›</a:t>
             </a:fld>
             <a:endParaRPr lang="en-US"/>
           </a:p>
@@ -3674,6 +3440,7 @@
         <a:solidFill>
           <a:srgbClr val="1B1F2A"/>
         </a:solidFill>
+        <a:effectLst/>
       </p:bgPr>
     </p:bg>
     <p:spTree>
@@ -3693,9 +3460,11 @@
       <p:sp>
         <p:nvSpPr>
           <p:cNvPr id="2" name="Text 0"/>
-          <p:cNvSpPr/>
+          <p:cNvSpPr>
+            <a:spLocks noGrp="1"/>
+          </p:cNvSpPr>
           <p:nvPr>
-            <p:ph idx="100" type="title" hasCustomPrompt="1"/>
+            <p:ph type="title" idx="100" hasCustomPrompt="1"/>
           </p:nvPr>
         </p:nvSpPr>
         <p:spPr>
@@ -3712,7 +3481,7 @@
         <p:txBody>
           <a:bodyPr wrap="square" rtlCol="0"/>
           <a:lstStyle>
-            <a:lvl1pPr algn="l" indent="0" marL="0">
+            <a:lvl1pPr marL="0" indent="0" algn="l">
               <a:buNone/>
               <a:defRPr lang="en-US" sz="3000" b="1" dirty="0">
                 <a:solidFill>
@@ -3722,7 +3491,7 @@
             </a:lvl1pPr>
           </a:lstStyle>
           <a:p>
-            <a:pPr algn="l" indent="0" marL="0">
+            <a:pPr marL="0" indent="0" algn="l">
               <a:buNone/>
             </a:pPr>
             <a:endParaRPr lang="en-US" sz="3000" dirty="0"/>
@@ -3750,7 +3519,7 @@
           <a:bodyPr wrap="square" lIns="0" tIns="0" rIns="0" bIns="0" rtlCol="0" anchor="ctr"/>
           <a:lstStyle/>
           <a:p>
-            <a:pPr indent="0" marL="0">
+            <a:pPr marL="0" indent="0">
               <a:buNone/>
             </a:pPr>
             <a:r>
@@ -3776,6 +3545,11 @@
 <file path=ppt/slideMasters/slideMaster1.xml><?xml version="1.0" encoding="utf-8"?>
 <p:sldMaster xmlns:a="http://schemas.openxmlformats.org/drawingml/2006/main" xmlns:r="http://schemas.openxmlformats.org/officeDocument/2006/relationships" xmlns:p="http://schemas.openxmlformats.org/presentationml/2006/main">
   <p:cSld>
+    <p:bg>
+      <p:bgRef idx="1001">
+        <a:schemeClr val="bg1"/>
+      </p:bgRef>
+    </p:bg>
     <p:spTree>
       <p:nvGrpSpPr>
         <p:cNvPr id="1" name=""/>
@@ -3810,7 +3584,7 @@
           </a:prstGeom>
           <a:extLst>
             <a:ext uri="{C572A759-6A51-4108-AA02-DFA0A04FC94B}">
-              <ma14:wrappingTextBoxFlag xmlns:ma14="http://schemas.microsoft.com/office/mac/drawingml/2011/main" val="0"/>
+              <ma14:wrappingTextBoxFlag xmlns:ma14="http://schemas.microsoft.com/office/mac/drawingml/2011/main" xmlns="" val="0"/>
             </a:ext>
           </a:extLst>
         </p:spPr>
@@ -3828,8 +3602,8 @@
           <a:p>
             <a:pPr algn="r"/>
             <a:fld id="{F7021451-1387-4CA6-816F-3879F97B5CBC}" type="slidenum">
-              <a:rPr b="0" lang="en-US"/>
-              <a:t>null</a:t>
+              <a:rPr lang="en-US" b="0"/>
+              <a:t>‹#›</a:t>
             </a:fld>
             <a:endParaRPr lang="en-US"/>
           </a:p>
@@ -4118,9 +3892,11 @@
       <p:sp>
         <p:nvSpPr>
           <p:cNvPr id="2" name="Text 0"/>
-          <p:cNvSpPr/>
+          <p:cNvSpPr>
+            <a:spLocks noGrp="1"/>
+          </p:cNvSpPr>
           <p:nvPr>
-            <p:ph idx="100" type="title" hasCustomPrompt="1"/>
+            <p:ph type="title" idx="100" hasCustomPrompt="1"/>
           </p:nvPr>
         </p:nvSpPr>
         <p:spPr>
@@ -4138,7 +3914,7 @@
           <a:bodyPr wrap="square" lIns="0" tIns="0" rIns="0" bIns="0" rtlCol="0" anchor="b"/>
           <a:lstStyle/>
           <a:p>
-            <a:pPr algn="l" indent="0" marL="0">
+            <a:pPr marL="0" indent="0" algn="l">
               <a:buNone/>
             </a:pPr>
             <a:r>
@@ -4156,9 +3932,11 @@
       <p:sp>
         <p:nvSpPr>
           <p:cNvPr id="3" name="Text 0"/>
-          <p:cNvSpPr/>
+          <p:cNvSpPr>
+            <a:spLocks noGrp="1"/>
+          </p:cNvSpPr>
           <p:nvPr>
-            <p:ph idx="101" type="body" hasCustomPrompt="1"/>
+            <p:ph type="body" idx="101" hasCustomPrompt="1"/>
           </p:nvPr>
         </p:nvSpPr>
         <p:spPr>
@@ -4176,7 +3954,7 @@
           <a:bodyPr wrap="square" lIns="0" tIns="0" rIns="0" bIns="0" rtlCol="0" anchor="t"/>
           <a:lstStyle/>
           <a:p>
-            <a:pPr algn="l" indent="0" marL="0">
+            <a:pPr marL="0" indent="0" algn="l">
               <a:buNone/>
             </a:pPr>
             <a:r>
@@ -4212,7 +3990,7 @@
           <a:bodyPr wrap="square" lIns="0" tIns="0" rIns="0" bIns="0" rtlCol="0" anchor="t"/>
           <a:lstStyle/>
           <a:p>
-            <a:pPr indent="0" marL="0">
+            <a:pPr marL="0" indent="0">
               <a:buNone/>
             </a:pPr>
             <a:r>
@@ -4255,9 +4033,11 @@
       <p:sp>
         <p:nvSpPr>
           <p:cNvPr id="2" name="Text 0"/>
-          <p:cNvSpPr/>
+          <p:cNvSpPr>
+            <a:spLocks noGrp="1"/>
+          </p:cNvSpPr>
           <p:nvPr>
-            <p:ph idx="100" type="title" hasCustomPrompt="1"/>
+            <p:ph type="title" idx="100" hasCustomPrompt="1"/>
           </p:nvPr>
         </p:nvSpPr>
         <p:spPr>
@@ -4275,7 +4055,7 @@
           <a:bodyPr wrap="square" lIns="0" tIns="0" rIns="0" bIns="0" rtlCol="0" anchor="ctr"/>
           <a:lstStyle/>
           <a:p>
-            <a:pPr algn="l" indent="0" marL="0">
+            <a:pPr marL="0" indent="0" algn="l">
               <a:buNone/>
             </a:pPr>
             <a:r>
@@ -4338,7 +4118,7 @@
           <a:bodyPr wrap="square" lIns="0" tIns="0" rIns="0" bIns="0" rtlCol="0" anchor="ctr"/>
           <a:lstStyle/>
           <a:p>
-            <a:pPr algn="ctr" indent="0" marL="0">
+            <a:pPr marL="0" indent="0" algn="ctr">
               <a:buNone/>
             </a:pPr>
             <a:r>
@@ -4401,7 +4181,7 @@
           <a:bodyPr wrap="square" lIns="0" tIns="0" rIns="0" bIns="0" rtlCol="0" anchor="ctr"/>
           <a:lstStyle/>
           <a:p>
-            <a:pPr indent="0" marL="0">
+            <a:pPr marL="0" indent="0">
               <a:buNone/>
             </a:pPr>
             <a:r>
@@ -4558,7 +4338,7 @@
           <a:bodyPr wrap="square" lIns="0" tIns="0" rIns="0" bIns="0" rtlCol="0" anchor="ctr"/>
           <a:lstStyle/>
           <a:p>
-            <a:pPr indent="0" marL="0">
+            <a:pPr marL="0" indent="0">
               <a:buNone/>
             </a:pPr>
             <a:r>
@@ -4697,7 +4477,7 @@
           <a:bodyPr wrap="square" lIns="0" tIns="0" rIns="0" bIns="0" rtlCol="0" anchor="ctr"/>
           <a:lstStyle/>
           <a:p>
-            <a:pPr indent="0" marL="0">
+            <a:pPr marL="0" indent="0">
               <a:buNone/>
             </a:pPr>
             <a:r>
@@ -4798,9 +4578,11 @@
       <p:sp>
         <p:nvSpPr>
           <p:cNvPr id="2" name="Text 0"/>
-          <p:cNvSpPr/>
+          <p:cNvSpPr>
+            <a:spLocks noGrp="1"/>
+          </p:cNvSpPr>
           <p:nvPr>
-            <p:ph idx="100" type="title" hasCustomPrompt="1"/>
+            <p:ph type="title" idx="100" hasCustomPrompt="1"/>
           </p:nvPr>
         </p:nvSpPr>
         <p:spPr>
@@ -4818,7 +4600,7 @@
           <a:bodyPr wrap="square" lIns="0" tIns="0" rIns="0" bIns="0" rtlCol="0" anchor="ctr"/>
           <a:lstStyle/>
           <a:p>
-            <a:pPr algn="l" indent="0" marL="0">
+            <a:pPr marL="0" indent="0" algn="l">
               <a:buNone/>
             </a:pPr>
             <a:r>
@@ -4881,7 +4663,7 @@
           <a:bodyPr wrap="square" lIns="0" tIns="0" rIns="0" bIns="0" rtlCol="0" anchor="ctr"/>
           <a:lstStyle/>
           <a:p>
-            <a:pPr algn="ctr" indent="0" marL="0">
+            <a:pPr marL="0" indent="0" algn="ctr">
               <a:buNone/>
             </a:pPr>
             <a:r>
@@ -4920,7 +4702,7 @@
           <a:bodyPr wrap="square" lIns="0" tIns="0" rIns="0" bIns="0" rtlCol="0" anchor="ctr"/>
           <a:lstStyle/>
           <a:p>
-            <a:pPr indent="0" marL="0">
+            <a:pPr marL="0" indent="0">
               <a:buNone/>
             </a:pPr>
             <a:r>
@@ -4956,7 +4738,7 @@
           <a:bodyPr wrap="square" lIns="0" tIns="0" rIns="0" bIns="0" rtlCol="0" anchor="t"/>
           <a:lstStyle/>
           <a:p>
-            <a:pPr indent="0" marL="0">
+            <a:pPr marL="0" indent="0">
               <a:buNone/>
             </a:pPr>
             <a:r>
@@ -4992,7 +4774,7 @@
           <a:bodyPr wrap="square" lIns="0" tIns="0" rIns="0" bIns="0" rtlCol="0" anchor="ctr"/>
           <a:lstStyle/>
           <a:p>
-            <a:pPr indent="0" marL="0">
+            <a:pPr marL="0" indent="0">
               <a:buNone/>
             </a:pPr>
             <a:r>
@@ -5055,7 +4837,7 @@
           <a:bodyPr wrap="square" lIns="0" tIns="0" rIns="0" bIns="0" rtlCol="0" anchor="ctr"/>
           <a:lstStyle/>
           <a:p>
-            <a:pPr algn="ctr" indent="0" marL="0">
+            <a:pPr marL="0" indent="0" algn="ctr">
               <a:buNone/>
             </a:pPr>
             <a:r>
@@ -5094,7 +4876,7 @@
           <a:bodyPr wrap="square" lIns="0" tIns="0" rIns="0" bIns="0" rtlCol="0" anchor="ctr"/>
           <a:lstStyle/>
           <a:p>
-            <a:pPr indent="0" marL="0">
+            <a:pPr marL="0" indent="0">
               <a:buNone/>
             </a:pPr>
             <a:r>
@@ -5130,7 +4912,7 @@
           <a:bodyPr wrap="square" lIns="0" tIns="0" rIns="0" bIns="0" rtlCol="0" anchor="t"/>
           <a:lstStyle/>
           <a:p>
-            <a:pPr indent="0" marL="0">
+            <a:pPr marL="0" indent="0">
               <a:buNone/>
             </a:pPr>
             <a:r>
@@ -5166,7 +4948,7 @@
           <a:bodyPr wrap="square" lIns="0" tIns="0" rIns="0" bIns="0" rtlCol="0" anchor="ctr"/>
           <a:lstStyle/>
           <a:p>
-            <a:pPr indent="0" marL="0">
+            <a:pPr marL="0" indent="0">
               <a:buNone/>
             </a:pPr>
             <a:r>
@@ -5229,7 +5011,7 @@
           <a:bodyPr wrap="square" lIns="0" tIns="0" rIns="0" bIns="0" rtlCol="0" anchor="ctr"/>
           <a:lstStyle/>
           <a:p>
-            <a:pPr algn="ctr" indent="0" marL="0">
+            <a:pPr marL="0" indent="0" algn="ctr">
               <a:buNone/>
             </a:pPr>
             <a:r>
@@ -5268,7 +5050,7 @@
           <a:bodyPr wrap="square" lIns="0" tIns="0" rIns="0" bIns="0" rtlCol="0" anchor="ctr"/>
           <a:lstStyle/>
           <a:p>
-            <a:pPr indent="0" marL="0">
+            <a:pPr marL="0" indent="0">
               <a:buNone/>
             </a:pPr>
             <a:r>
@@ -5304,7 +5086,7 @@
           <a:bodyPr wrap="square" lIns="0" tIns="0" rIns="0" bIns="0" rtlCol="0" anchor="t"/>
           <a:lstStyle/>
           <a:p>
-            <a:pPr indent="0" marL="0">
+            <a:pPr marL="0" indent="0">
               <a:buNone/>
             </a:pPr>
             <a:r>
@@ -5340,7 +5122,7 @@
           <a:bodyPr wrap="square" lIns="0" tIns="0" rIns="0" bIns="0" rtlCol="0" anchor="ctr"/>
           <a:lstStyle/>
           <a:p>
-            <a:pPr indent="0" marL="0">
+            <a:pPr marL="0" indent="0">
               <a:buNone/>
             </a:pPr>
             <a:r>
@@ -5403,7 +5185,7 @@
           <a:bodyPr wrap="square" lIns="0" tIns="0" rIns="0" bIns="0" rtlCol="0" anchor="ctr"/>
           <a:lstStyle/>
           <a:p>
-            <a:pPr algn="ctr" indent="0" marL="0">
+            <a:pPr marL="0" indent="0" algn="ctr">
               <a:buNone/>
             </a:pPr>
             <a:r>
@@ -5442,7 +5224,7 @@
           <a:bodyPr wrap="square" lIns="0" tIns="0" rIns="0" bIns="0" rtlCol="0" anchor="ctr"/>
           <a:lstStyle/>
           <a:p>
-            <a:pPr indent="0" marL="0">
+            <a:pPr marL="0" indent="0">
               <a:buNone/>
             </a:pPr>
             <a:r>
@@ -5478,7 +5260,7 @@
           <a:bodyPr wrap="square" lIns="0" tIns="0" rIns="0" bIns="0" rtlCol="0" anchor="t"/>
           <a:lstStyle/>
           <a:p>
-            <a:pPr indent="0" marL="0">
+            <a:pPr marL="0" indent="0">
               <a:buNone/>
             </a:pPr>
             <a:r>
@@ -5514,7 +5296,7 @@
           <a:bodyPr wrap="square" lIns="0" tIns="0" rIns="0" bIns="0" rtlCol="0" anchor="ctr"/>
           <a:lstStyle/>
           <a:p>
-            <a:pPr indent="0" marL="0">
+            <a:pPr marL="0" indent="0">
               <a:buNone/>
             </a:pPr>
             <a:r>
@@ -5550,7 +5332,7 @@
           <a:bodyPr wrap="square" lIns="0" tIns="0" rIns="0" bIns="0" rtlCol="0" anchor="t"/>
           <a:lstStyle/>
           <a:p>
-            <a:pPr indent="0" marL="0">
+            <a:pPr marL="0" indent="0">
               <a:buNone/>
             </a:pPr>
             <a:r>
@@ -5585,7 +5367,7 @@
           </a:prstGeom>
           <a:extLst>
             <a:ext uri="{C572A759-6A51-4108-AA02-DFA0A04FC94B}">
-              <ma14:wrappingTextBoxFlag xmlns:ma14="http://schemas.microsoft.com/office/mac/drawingml/2011/main" val="0"/>
+              <ma14:wrappingTextBoxFlag xmlns:ma14="http://schemas.microsoft.com/office/mac/drawingml/2011/main" xmlns="" val="0"/>
             </a:ext>
           </a:extLst>
         </p:spPr>
@@ -5603,7 +5385,7 @@
           <a:p>
             <a:pPr algn="r"/>
             <a:fld id="{F7021451-1387-4CA6-816F-3879F97B5CBC}" type="slidenum">
-              <a:rPr b="0" lang="en-US"/>
+              <a:rPr lang="en-US" b="0"/>
               <a:t>11</a:t>
             </a:fld>
             <a:endParaRPr lang="en-US"/>
@@ -5638,9 +5420,11 @@
       <p:sp>
         <p:nvSpPr>
           <p:cNvPr id="2" name="Text 0"/>
-          <p:cNvSpPr/>
+          <p:cNvSpPr>
+            <a:spLocks noGrp="1"/>
+          </p:cNvSpPr>
           <p:nvPr>
-            <p:ph idx="100" type="title" hasCustomPrompt="1"/>
+            <p:ph type="title" idx="100" hasCustomPrompt="1"/>
           </p:nvPr>
         </p:nvSpPr>
         <p:spPr>
@@ -5658,7 +5442,7 @@
           <a:bodyPr wrap="square" lIns="0" tIns="0" rIns="0" bIns="0" rtlCol="0" anchor="ctr"/>
           <a:lstStyle/>
           <a:p>
-            <a:pPr algn="l" indent="0" marL="0">
+            <a:pPr marL="0" indent="0" algn="l">
               <a:buNone/>
             </a:pPr>
             <a:r>
@@ -5719,7 +5503,7 @@
           <a:bodyPr wrap="square" lIns="0" tIns="0" rIns="0" bIns="0" rtlCol="0" anchor="ctr"/>
           <a:lstStyle/>
           <a:p>
-            <a:pPr algn="ctr" indent="0" marL="0">
+            <a:pPr marL="0" indent="0" algn="ctr">
               <a:buNone/>
             </a:pPr>
             <a:r>
@@ -5755,7 +5539,7 @@
           <a:bodyPr wrap="square" lIns="0" tIns="0" rIns="0" bIns="0" rtlCol="0" anchor="ctr"/>
           <a:lstStyle/>
           <a:p>
-            <a:pPr indent="0" marL="0">
+            <a:pPr marL="0" indent="0">
               <a:buNone/>
             </a:pPr>
             <a:r>
@@ -5791,7 +5575,7 @@
           <a:bodyPr wrap="square" lIns="0" tIns="0" rIns="0" bIns="0" rtlCol="0" anchor="ctr"/>
           <a:lstStyle/>
           <a:p>
-            <a:pPr indent="0" marL="0">
+            <a:pPr marL="0" indent="0">
               <a:buNone/>
             </a:pPr>
             <a:r>
@@ -5852,7 +5636,7 @@
           <a:bodyPr wrap="square" lIns="0" tIns="0" rIns="0" bIns="0" rtlCol="0" anchor="ctr"/>
           <a:lstStyle/>
           <a:p>
-            <a:pPr algn="ctr" indent="0" marL="0">
+            <a:pPr marL="0" indent="0" algn="ctr">
               <a:buNone/>
             </a:pPr>
             <a:r>
@@ -5888,7 +5672,7 @@
           <a:bodyPr wrap="square" lIns="0" tIns="0" rIns="0" bIns="0" rtlCol="0" anchor="ctr"/>
           <a:lstStyle/>
           <a:p>
-            <a:pPr indent="0" marL="0">
+            <a:pPr marL="0" indent="0">
               <a:buNone/>
             </a:pPr>
             <a:r>
@@ -5924,7 +5708,7 @@
           <a:bodyPr wrap="square" lIns="0" tIns="0" rIns="0" bIns="0" rtlCol="0" anchor="ctr"/>
           <a:lstStyle/>
           <a:p>
-            <a:pPr indent="0" marL="0">
+            <a:pPr marL="0" indent="0">
               <a:buNone/>
             </a:pPr>
             <a:r>
@@ -5985,7 +5769,7 @@
           <a:bodyPr wrap="square" lIns="0" tIns="0" rIns="0" bIns="0" rtlCol="0" anchor="ctr"/>
           <a:lstStyle/>
           <a:p>
-            <a:pPr algn="ctr" indent="0" marL="0">
+            <a:pPr marL="0" indent="0" algn="ctr">
               <a:buNone/>
             </a:pPr>
             <a:r>
@@ -6021,7 +5805,7 @@
           <a:bodyPr wrap="square" lIns="0" tIns="0" rIns="0" bIns="0" rtlCol="0" anchor="ctr"/>
           <a:lstStyle/>
           <a:p>
-            <a:pPr indent="0" marL="0">
+            <a:pPr marL="0" indent="0">
               <a:buNone/>
             </a:pPr>
             <a:r>
@@ -6057,7 +5841,7 @@
           <a:bodyPr wrap="square" lIns="0" tIns="0" rIns="0" bIns="0" rtlCol="0" anchor="ctr"/>
           <a:lstStyle/>
           <a:p>
-            <a:pPr indent="0" marL="0">
+            <a:pPr marL="0" indent="0">
               <a:buNone/>
             </a:pPr>
             <a:r>
@@ -6118,7 +5902,7 @@
           <a:bodyPr wrap="square" lIns="0" tIns="0" rIns="0" bIns="0" rtlCol="0" anchor="ctr"/>
           <a:lstStyle/>
           <a:p>
-            <a:pPr algn="ctr" indent="0" marL="0">
+            <a:pPr marL="0" indent="0" algn="ctr">
               <a:buNone/>
             </a:pPr>
             <a:r>
@@ -6154,7 +5938,7 @@
           <a:bodyPr wrap="square" lIns="0" tIns="0" rIns="0" bIns="0" rtlCol="0" anchor="ctr"/>
           <a:lstStyle/>
           <a:p>
-            <a:pPr indent="0" marL="0">
+            <a:pPr marL="0" indent="0">
               <a:buNone/>
             </a:pPr>
             <a:r>
@@ -6190,7 +5974,7 @@
           <a:bodyPr wrap="square" lIns="0" tIns="0" rIns="0" bIns="0" rtlCol="0" anchor="ctr"/>
           <a:lstStyle/>
           <a:p>
-            <a:pPr indent="0" marL="0">
+            <a:pPr marL="0" indent="0">
               <a:buNone/>
             </a:pPr>
             <a:r>
@@ -6251,7 +6035,7 @@
           <a:bodyPr wrap="square" lIns="0" tIns="0" rIns="0" bIns="0" rtlCol="0" anchor="ctr"/>
           <a:lstStyle/>
           <a:p>
-            <a:pPr algn="ctr" indent="0" marL="0">
+            <a:pPr marL="0" indent="0" algn="ctr">
               <a:buNone/>
             </a:pPr>
             <a:r>
@@ -6287,7 +6071,7 @@
           <a:bodyPr wrap="square" lIns="0" tIns="0" rIns="0" bIns="0" rtlCol="0" anchor="ctr"/>
           <a:lstStyle/>
           <a:p>
-            <a:pPr indent="0" marL="0">
+            <a:pPr marL="0" indent="0">
               <a:buNone/>
             </a:pPr>
             <a:r>
@@ -6323,7 +6107,7 @@
           <a:bodyPr wrap="square" lIns="0" tIns="0" rIns="0" bIns="0" rtlCol="0" anchor="ctr"/>
           <a:lstStyle/>
           <a:p>
-            <a:pPr indent="0" marL="0">
+            <a:pPr marL="0" indent="0">
               <a:buNone/>
             </a:pPr>
             <a:r>
@@ -6358,7 +6142,7 @@
           </a:prstGeom>
           <a:extLst>
             <a:ext uri="{C572A759-6A51-4108-AA02-DFA0A04FC94B}">
-              <ma14:wrappingTextBoxFlag xmlns:ma14="http://schemas.microsoft.com/office/mac/drawingml/2011/main" val="0"/>
+              <ma14:wrappingTextBoxFlag xmlns:ma14="http://schemas.microsoft.com/office/mac/drawingml/2011/main" xmlns="" val="0"/>
             </a:ext>
           </a:extLst>
         </p:spPr>
@@ -6376,7 +6160,7 @@
           <a:p>
             <a:pPr algn="r"/>
             <a:fld id="{F7021451-1387-4CA6-816F-3879F97B5CBC}" type="slidenum">
-              <a:rPr b="0" lang="en-US"/>
+              <a:rPr lang="en-US" b="0"/>
               <a:t>12</a:t>
             </a:fld>
             <a:endParaRPr lang="en-US"/>
@@ -6411,9 +6195,11 @@
       <p:sp>
         <p:nvSpPr>
           <p:cNvPr id="2" name="Text 0"/>
-          <p:cNvSpPr/>
+          <p:cNvSpPr>
+            <a:spLocks noGrp="1"/>
+          </p:cNvSpPr>
           <p:nvPr>
-            <p:ph idx="100" type="title" hasCustomPrompt="1"/>
+            <p:ph type="title" idx="100" hasCustomPrompt="1"/>
           </p:nvPr>
         </p:nvSpPr>
         <p:spPr>
@@ -6431,7 +6217,7 @@
           <a:bodyPr wrap="square" lIns="0" tIns="0" rIns="0" bIns="0" rtlCol="0" anchor="ctr"/>
           <a:lstStyle/>
           <a:p>
-            <a:pPr algn="l" indent="0" marL="0">
+            <a:pPr marL="0" indent="0" algn="l">
               <a:buNone/>
             </a:pPr>
             <a:r>
@@ -6494,7 +6280,7 @@
           <a:bodyPr wrap="square" lIns="0" tIns="0" rIns="0" bIns="0" rtlCol="0" anchor="ctr"/>
           <a:lstStyle/>
           <a:p>
-            <a:pPr algn="ctr" indent="0" marL="0">
+            <a:pPr marL="0" indent="0" algn="ctr">
               <a:buNone/>
             </a:pPr>
             <a:r>
@@ -6557,7 +6343,7 @@
           <a:bodyPr wrap="square" lIns="0" tIns="0" rIns="0" bIns="0" rtlCol="0" anchor="ctr"/>
           <a:lstStyle/>
           <a:p>
-            <a:pPr indent="0" marL="0">
+            <a:pPr marL="0" indent="0">
               <a:buNone/>
             </a:pPr>
             <a:r>
@@ -6696,7 +6482,7 @@
           <a:bodyPr wrap="square" lIns="0" tIns="0" rIns="0" bIns="0" rtlCol="0" anchor="ctr"/>
           <a:lstStyle/>
           <a:p>
-            <a:pPr indent="0" marL="0">
+            <a:pPr marL="0" indent="0">
               <a:buNone/>
             </a:pPr>
             <a:r>
@@ -6835,7 +6621,7 @@
           <a:bodyPr wrap="square" lIns="0" tIns="0" rIns="0" bIns="0" rtlCol="0" anchor="ctr"/>
           <a:lstStyle/>
           <a:p>
-            <a:pPr indent="0" marL="0">
+            <a:pPr marL="0" indent="0">
               <a:buNone/>
             </a:pPr>
             <a:r>
@@ -6936,9 +6722,11 @@
       <p:sp>
         <p:nvSpPr>
           <p:cNvPr id="2" name="Text 0"/>
-          <p:cNvSpPr/>
+          <p:cNvSpPr>
+            <a:spLocks noGrp="1"/>
+          </p:cNvSpPr>
           <p:nvPr>
-            <p:ph idx="100" type="title" hasCustomPrompt="1"/>
+            <p:ph type="title" idx="100" hasCustomPrompt="1"/>
           </p:nvPr>
         </p:nvSpPr>
         <p:spPr>
@@ -6956,7 +6744,7 @@
           <a:bodyPr wrap="square" lIns="0" tIns="0" rIns="0" bIns="0" rtlCol="0" anchor="ctr"/>
           <a:lstStyle/>
           <a:p>
-            <a:pPr algn="l" indent="0" marL="0">
+            <a:pPr marL="0" indent="0" algn="l">
               <a:buNone/>
             </a:pPr>
             <a:r>
@@ -6994,11 +6782,41 @@
             <a:tbl>
               <a:tblPr/>
               <a:tblGrid>
-                <a:gridCol w="3017520"/>
-                <a:gridCol w="2011680"/>
-                <a:gridCol w="2011680"/>
-                <a:gridCol w="2011680"/>
-                <a:gridCol w="2039112"/>
+                <a:gridCol w="3017520">
+                  <a:extLst>
+                    <a:ext uri="{9D8B030D-6E8A-4147-A177-3AD203B41FA5}">
+                      <a16:colId xmlns:a16="http://schemas.microsoft.com/office/drawing/2014/main" val="20000"/>
+                    </a:ext>
+                  </a:extLst>
+                </a:gridCol>
+                <a:gridCol w="2011680">
+                  <a:extLst>
+                    <a:ext uri="{9D8B030D-6E8A-4147-A177-3AD203B41FA5}">
+                      <a16:colId xmlns:a16="http://schemas.microsoft.com/office/drawing/2014/main" val="20001"/>
+                    </a:ext>
+                  </a:extLst>
+                </a:gridCol>
+                <a:gridCol w="2011680">
+                  <a:extLst>
+                    <a:ext uri="{9D8B030D-6E8A-4147-A177-3AD203B41FA5}">
+                      <a16:colId xmlns:a16="http://schemas.microsoft.com/office/drawing/2014/main" val="20002"/>
+                    </a:ext>
+                  </a:extLst>
+                </a:gridCol>
+                <a:gridCol w="2011680">
+                  <a:extLst>
+                    <a:ext uri="{9D8B030D-6E8A-4147-A177-3AD203B41FA5}">
+                      <a16:colId xmlns:a16="http://schemas.microsoft.com/office/drawing/2014/main" val="20003"/>
+                    </a:ext>
+                  </a:extLst>
+                </a:gridCol>
+                <a:gridCol w="2039112">
+                  <a:extLst>
+                    <a:ext uri="{9D8B030D-6E8A-4147-A177-3AD203B41FA5}">
+                      <a16:colId xmlns:a16="http://schemas.microsoft.com/office/drawing/2014/main" val="20004"/>
+                    </a:ext>
+                  </a:extLst>
+                </a:gridCol>
               </a:tblGrid>
               <a:tr h="777240">
                 <a:tc>
@@ -7006,7 +6824,7 @@
                     <a:bodyPr/>
                     <a:lstStyle/>
                     <a:p>
-                      <a:pPr indent="0" marL="0">
+                      <a:pPr marL="0" indent="0">
                         <a:buNone/>
                       </a:pPr>
                       <a:r>
@@ -7067,7 +6885,7 @@
                     <a:bodyPr/>
                     <a:lstStyle/>
                     <a:p>
-                      <a:pPr algn="ctr" indent="0" marL="0">
+                      <a:pPr marL="0" indent="0" algn="ctr">
                         <a:buNone/>
                       </a:pPr>
                       <a:r>
@@ -7128,7 +6946,7 @@
                     <a:bodyPr/>
                     <a:lstStyle/>
                     <a:p>
-                      <a:pPr algn="ctr" indent="0" marL="0">
+                      <a:pPr marL="0" indent="0" algn="ctr">
                         <a:buNone/>
                       </a:pPr>
                       <a:r>
@@ -7189,7 +7007,7 @@
                     <a:bodyPr/>
                     <a:lstStyle/>
                     <a:p>
-                      <a:pPr algn="ctr" indent="0" marL="0">
+                      <a:pPr marL="0" indent="0" algn="ctr">
                         <a:buNone/>
                       </a:pPr>
                       <a:r>
@@ -7250,7 +7068,7 @@
                     <a:bodyPr/>
                     <a:lstStyle/>
                     <a:p>
-                      <a:pPr algn="ctr" indent="0" marL="0">
+                      <a:pPr marL="0" indent="0" algn="ctr">
                         <a:buNone/>
                       </a:pPr>
                       <a:r>
@@ -7306,6 +7124,11 @@
                     </a:solidFill>
                   </a:tcPr>
                 </a:tc>
+                <a:extLst>
+                  <a:ext uri="{0D108BD9-81ED-4DB2-BD59-A6C34878D82A}">
+                    <a16:rowId xmlns:a16="http://schemas.microsoft.com/office/drawing/2014/main" val="10000"/>
+                  </a:ext>
+                </a:extLst>
               </a:tr>
               <a:tr h="777240">
                 <a:tc>
@@ -7313,7 +7136,7 @@
                     <a:bodyPr/>
                     <a:lstStyle/>
                     <a:p>
-                      <a:pPr indent="0" marL="0">
+                      <a:pPr marL="0" indent="0">
                         <a:buNone/>
                       </a:pPr>
                       <a:r>
@@ -7327,7 +7150,7 @@
                       <a:endParaRPr lang="en-US" sz="1150" dirty="0"/>
                     </a:p>
                     <a:p>
-                      <a:pPr indent="0" marL="0">
+                      <a:pPr marL="0" indent="0">
                         <a:buNone/>
                       </a:pPr>
                       <a:r>
@@ -7385,7 +7208,7 @@
                     <a:bodyPr/>
                     <a:lstStyle/>
                     <a:p>
-                      <a:pPr algn="ctr" indent="0" marL="0">
+                      <a:pPr marL="0" indent="0" algn="ctr">
                         <a:buNone/>
                       </a:pPr>
                       <a:r>
@@ -7443,7 +7266,7 @@
                     <a:bodyPr/>
                     <a:lstStyle/>
                     <a:p>
-                      <a:pPr algn="ctr" indent="0" marL="0">
+                      <a:pPr marL="0" indent="0" algn="ctr">
                         <a:buNone/>
                       </a:pPr>
                       <a:r>
@@ -7501,7 +7324,7 @@
                     <a:bodyPr/>
                     <a:lstStyle/>
                     <a:p>
-                      <a:pPr algn="ctr" indent="0" marL="0">
+                      <a:pPr marL="0" indent="0" algn="ctr">
                         <a:buNone/>
                       </a:pPr>
                       <a:r>
@@ -7559,7 +7382,7 @@
                     <a:bodyPr/>
                     <a:lstStyle/>
                     <a:p>
-                      <a:pPr algn="ctr" indent="0" marL="0">
+                      <a:pPr marL="0" indent="0" algn="ctr">
                         <a:buNone/>
                       </a:pPr>
                       <a:r>
@@ -7612,6 +7435,11 @@
                     </a:lnB>
                   </a:tcPr>
                 </a:tc>
+                <a:extLst>
+                  <a:ext uri="{0D108BD9-81ED-4DB2-BD59-A6C34878D82A}">
+                    <a16:rowId xmlns:a16="http://schemas.microsoft.com/office/drawing/2014/main" val="10001"/>
+                  </a:ext>
+                </a:extLst>
               </a:tr>
               <a:tr h="777240">
                 <a:tc>
@@ -7619,7 +7447,7 @@
                     <a:bodyPr/>
                     <a:lstStyle/>
                     <a:p>
-                      <a:pPr indent="0" marL="0">
+                      <a:pPr marL="0" indent="0">
                         <a:buNone/>
                       </a:pPr>
                       <a:r>
@@ -7633,7 +7461,7 @@
                       <a:endParaRPr lang="en-US" sz="1150" dirty="0"/>
                     </a:p>
                     <a:p>
-                      <a:pPr indent="0" marL="0">
+                      <a:pPr marL="0" indent="0">
                         <a:buNone/>
                       </a:pPr>
                       <a:r>
@@ -7691,7 +7519,7 @@
                     <a:bodyPr/>
                     <a:lstStyle/>
                     <a:p>
-                      <a:pPr algn="ctr" indent="0" marL="0">
+                      <a:pPr marL="0" indent="0" algn="ctr">
                         <a:buNone/>
                       </a:pPr>
                       <a:r>
@@ -7749,7 +7577,7 @@
                     <a:bodyPr/>
                     <a:lstStyle/>
                     <a:p>
-                      <a:pPr algn="ctr" indent="0" marL="0">
+                      <a:pPr marL="0" indent="0" algn="ctr">
                         <a:buNone/>
                       </a:pPr>
                       <a:r>
@@ -7807,7 +7635,7 @@
                     <a:bodyPr/>
                     <a:lstStyle/>
                     <a:p>
-                      <a:pPr algn="ctr" indent="0" marL="0">
+                      <a:pPr marL="0" indent="0" algn="ctr">
                         <a:buNone/>
                       </a:pPr>
                       <a:r>
@@ -7865,7 +7693,7 @@
                     <a:bodyPr/>
                     <a:lstStyle/>
                     <a:p>
-                      <a:pPr algn="ctr" indent="0" marL="0">
+                      <a:pPr marL="0" indent="0" algn="ctr">
                         <a:buNone/>
                       </a:pPr>
                       <a:r>
@@ -7918,6 +7746,11 @@
                     </a:lnB>
                   </a:tcPr>
                 </a:tc>
+                <a:extLst>
+                  <a:ext uri="{0D108BD9-81ED-4DB2-BD59-A6C34878D82A}">
+                    <a16:rowId xmlns:a16="http://schemas.microsoft.com/office/drawing/2014/main" val="10002"/>
+                  </a:ext>
+                </a:extLst>
               </a:tr>
               <a:tr h="777240">
                 <a:tc>
@@ -7925,7 +7758,7 @@
                     <a:bodyPr/>
                     <a:lstStyle/>
                     <a:p>
-                      <a:pPr indent="0" marL="0">
+                      <a:pPr marL="0" indent="0">
                         <a:buNone/>
                       </a:pPr>
                       <a:r>
@@ -7939,7 +7772,7 @@
                       <a:endParaRPr lang="en-US" sz="1150" dirty="0"/>
                     </a:p>
                     <a:p>
-                      <a:pPr indent="0" marL="0">
+                      <a:pPr marL="0" indent="0">
                         <a:buNone/>
                       </a:pPr>
                       <a:r>
@@ -7997,7 +7830,7 @@
                     <a:bodyPr/>
                     <a:lstStyle/>
                     <a:p>
-                      <a:pPr algn="ctr" indent="0" marL="0">
+                      <a:pPr marL="0" indent="0" algn="ctr">
                         <a:buNone/>
                       </a:pPr>
                       <a:r>
@@ -8055,7 +7888,7 @@
                     <a:bodyPr/>
                     <a:lstStyle/>
                     <a:p>
-                      <a:pPr algn="ctr" indent="0" marL="0">
+                      <a:pPr marL="0" indent="0" algn="ctr">
                         <a:buNone/>
                       </a:pPr>
                       <a:r>
@@ -8113,7 +7946,7 @@
                     <a:bodyPr/>
                     <a:lstStyle/>
                     <a:p>
-                      <a:pPr algn="ctr" indent="0" marL="0">
+                      <a:pPr marL="0" indent="0" algn="ctr">
                         <a:buNone/>
                       </a:pPr>
                       <a:r>
@@ -8171,7 +8004,7 @@
                     <a:bodyPr/>
                     <a:lstStyle/>
                     <a:p>
-                      <a:pPr algn="ctr" indent="0" marL="0">
+                      <a:pPr marL="0" indent="0" algn="ctr">
                         <a:buNone/>
                       </a:pPr>
                       <a:r>
@@ -8224,6 +8057,11 @@
                     </a:lnB>
                   </a:tcPr>
                 </a:tc>
+                <a:extLst>
+                  <a:ext uri="{0D108BD9-81ED-4DB2-BD59-A6C34878D82A}">
+                    <a16:rowId xmlns:a16="http://schemas.microsoft.com/office/drawing/2014/main" val="10003"/>
+                  </a:ext>
+                </a:extLst>
               </a:tr>
               <a:tr h="777240">
                 <a:tc>
@@ -8231,7 +8069,7 @@
                     <a:bodyPr/>
                     <a:lstStyle/>
                     <a:p>
-                      <a:pPr indent="0" marL="0">
+                      <a:pPr marL="0" indent="0">
                         <a:buNone/>
                       </a:pPr>
                       <a:r>
@@ -8289,7 +8127,7 @@
                     <a:bodyPr/>
                     <a:lstStyle/>
                     <a:p>
-                      <a:pPr algn="ctr" indent="0" marL="0">
+                      <a:pPr marL="0" indent="0" algn="ctr">
                         <a:buNone/>
                       </a:pPr>
                       <a:r>
@@ -8347,7 +8185,7 @@
                     <a:bodyPr/>
                     <a:lstStyle/>
                     <a:p>
-                      <a:pPr algn="ctr" indent="0" marL="0">
+                      <a:pPr marL="0" indent="0" algn="ctr">
                         <a:buNone/>
                       </a:pPr>
                       <a:r>
@@ -8405,7 +8243,7 @@
                     <a:bodyPr/>
                     <a:lstStyle/>
                     <a:p>
-                      <a:pPr algn="ctr" indent="0" marL="0">
+                      <a:pPr marL="0" indent="0" algn="ctr">
                         <a:buNone/>
                       </a:pPr>
                       <a:r>
@@ -8463,7 +8301,7 @@
                     <a:bodyPr/>
                     <a:lstStyle/>
                     <a:p>
-                      <a:pPr algn="ctr" indent="0" marL="0">
+                      <a:pPr marL="0" indent="0" algn="ctr">
                         <a:buNone/>
                       </a:pPr>
                       <a:r>
@@ -8516,6 +8354,11 @@
                     </a:lnB>
                   </a:tcPr>
                 </a:tc>
+                <a:extLst>
+                  <a:ext uri="{0D108BD9-81ED-4DB2-BD59-A6C34878D82A}">
+                    <a16:rowId xmlns:a16="http://schemas.microsoft.com/office/drawing/2014/main" val="10004"/>
+                  </a:ext>
+                </a:extLst>
               </a:tr>
             </a:tbl>
           </a:graphicData>
@@ -8542,7 +8385,7 @@
           <a:bodyPr wrap="square" lIns="0" tIns="0" rIns="0" bIns="0" rtlCol="0" anchor="t"/>
           <a:lstStyle/>
           <a:p>
-            <a:pPr indent="0" marL="0">
+            <a:pPr marL="0" indent="0">
               <a:buNone/>
             </a:pPr>
             <a:r>
@@ -8577,7 +8420,7 @@
           </a:prstGeom>
           <a:extLst>
             <a:ext uri="{C572A759-6A51-4108-AA02-DFA0A04FC94B}">
-              <ma14:wrappingTextBoxFlag xmlns:ma14="http://schemas.microsoft.com/office/mac/drawingml/2011/main" val="0"/>
+              <ma14:wrappingTextBoxFlag xmlns:ma14="http://schemas.microsoft.com/office/mac/drawingml/2011/main" xmlns="" val="0"/>
             </a:ext>
           </a:extLst>
         </p:spPr>
@@ -8595,7 +8438,7 @@
           <a:p>
             <a:pPr algn="r"/>
             <a:fld id="{F7021451-1387-4CA6-816F-3879F97B5CBC}" type="slidenum">
-              <a:rPr b="0" lang="en-US"/>
+              <a:rPr lang="en-US" b="0"/>
               <a:t>14</a:t>
             </a:fld>
             <a:endParaRPr lang="en-US"/>
@@ -8630,9 +8473,11 @@
       <p:sp>
         <p:nvSpPr>
           <p:cNvPr id="2" name="Text 0"/>
-          <p:cNvSpPr/>
+          <p:cNvSpPr>
+            <a:spLocks noGrp="1"/>
+          </p:cNvSpPr>
           <p:nvPr>
-            <p:ph idx="100" type="title" hasCustomPrompt="1"/>
+            <p:ph type="title" idx="100" hasCustomPrompt="1"/>
           </p:nvPr>
         </p:nvSpPr>
         <p:spPr>
@@ -8650,7 +8495,7 @@
           <a:bodyPr wrap="square" lIns="0" tIns="0" rIns="0" bIns="0" rtlCol="0" anchor="ctr"/>
           <a:lstStyle/>
           <a:p>
-            <a:pPr algn="l" indent="0" marL="0">
+            <a:pPr marL="0" indent="0" algn="l">
               <a:buNone/>
             </a:pPr>
             <a:r>
@@ -8686,7 +8531,7 @@
           <a:bodyPr wrap="square" lIns="0" tIns="0" rIns="0" bIns="0" rtlCol="0" anchor="t"/>
           <a:lstStyle/>
           <a:p>
-            <a:pPr indent="0" marL="0">
+            <a:pPr marL="0" indent="0">
               <a:buNone/>
             </a:pPr>
             <a:r>
@@ -8703,7 +8548,7 @@
       </p:sp>
       <p:graphicFrame>
         <p:nvGraphicFramePr>
-          <p:cNvPr id="5" name="Chart 0" descr=""/>
+          <p:cNvPr id="5" name="Chart 0"/>
           <p:cNvGraphicFramePr/>
           <p:nvPr/>
         </p:nvGraphicFramePr>
@@ -8711,9 +8556,9 @@
           <a:off x="548640" y="1691640"/>
           <a:ext cx="3544824" cy="3566160"/>
         </p:xfrm>
-        <a:graphic xmlns:a="http://schemas.openxmlformats.org/drawingml/2006/main">
+        <a:graphic>
           <a:graphicData uri="http://schemas.openxmlformats.org/drawingml/2006/chart">
-            <c:chart xmlns:c="http://schemas.openxmlformats.org/drawingml/2006/chart" r:id="rId1"/>
+            <c:chart xmlns:c="http://schemas.openxmlformats.org/drawingml/2006/chart" xmlns:r="http://schemas.openxmlformats.org/officeDocument/2006/relationships" r:id="rId3"/>
           </a:graphicData>
         </a:graphic>
       </p:graphicFrame>
@@ -8738,7 +8583,7 @@
           <a:bodyPr wrap="square" lIns="0" tIns="0" rIns="0" bIns="0" rtlCol="0" anchor="t"/>
           <a:lstStyle/>
           <a:p>
-            <a:pPr indent="0" marL="0">
+            <a:pPr marL="0" indent="0">
               <a:buNone/>
             </a:pPr>
             <a:r>
@@ -8774,7 +8619,7 @@
           <a:bodyPr wrap="square" lIns="0" tIns="0" rIns="0" bIns="0" rtlCol="0" anchor="t"/>
           <a:lstStyle/>
           <a:p>
-            <a:pPr indent="0" marL="0">
+            <a:pPr marL="0" indent="0">
               <a:buNone/>
             </a:pPr>
             <a:r>
@@ -8791,7 +8636,7 @@
       </p:sp>
       <p:graphicFrame>
         <p:nvGraphicFramePr>
-          <p:cNvPr id="8" name="Chart 1" descr=""/>
+          <p:cNvPr id="8" name="Chart 1"/>
           <p:cNvGraphicFramePr/>
           <p:nvPr/>
         </p:nvGraphicFramePr>
@@ -8799,9 +8644,9 @@
           <a:off x="4322064" y="1691640"/>
           <a:ext cx="3544824" cy="3566160"/>
         </p:xfrm>
-        <a:graphic xmlns:a="http://schemas.openxmlformats.org/drawingml/2006/main">
+        <a:graphic>
           <a:graphicData uri="http://schemas.openxmlformats.org/drawingml/2006/chart">
-            <c:chart xmlns:c="http://schemas.openxmlformats.org/drawingml/2006/chart" r:id="rId2"/>
+            <c:chart xmlns:c="http://schemas.openxmlformats.org/drawingml/2006/chart" xmlns:r="http://schemas.openxmlformats.org/officeDocument/2006/relationships" r:id="rId4"/>
           </a:graphicData>
         </a:graphic>
       </p:graphicFrame>
@@ -8826,7 +8671,7 @@
           <a:bodyPr wrap="square" lIns="0" tIns="0" rIns="0" bIns="0" rtlCol="0" anchor="t"/>
           <a:lstStyle/>
           <a:p>
-            <a:pPr indent="0" marL="0">
+            <a:pPr marL="0" indent="0">
               <a:buNone/>
             </a:pPr>
             <a:r>
@@ -8862,7 +8707,7 @@
           <a:bodyPr wrap="square" lIns="0" tIns="0" rIns="0" bIns="0" rtlCol="0" anchor="t"/>
           <a:lstStyle/>
           <a:p>
-            <a:pPr indent="0" marL="0">
+            <a:pPr marL="0" indent="0">
               <a:buNone/>
             </a:pPr>
             <a:r>
@@ -8879,7 +8724,7 @@
       </p:sp>
       <p:graphicFrame>
         <p:nvGraphicFramePr>
-          <p:cNvPr id="11" name="Chart 2" descr=""/>
+          <p:cNvPr id="11" name="Chart 2"/>
           <p:cNvGraphicFramePr/>
           <p:nvPr/>
         </p:nvGraphicFramePr>
@@ -8887,9 +8732,9 @@
           <a:off x="8095488" y="1691640"/>
           <a:ext cx="3544824" cy="3566160"/>
         </p:xfrm>
-        <a:graphic xmlns:a="http://schemas.openxmlformats.org/drawingml/2006/main">
+        <a:graphic>
           <a:graphicData uri="http://schemas.openxmlformats.org/drawingml/2006/chart">
-            <c:chart xmlns:c="http://schemas.openxmlformats.org/drawingml/2006/chart" r:id="rId3"/>
+            <c:chart xmlns:c="http://schemas.openxmlformats.org/drawingml/2006/chart" xmlns:r="http://schemas.openxmlformats.org/officeDocument/2006/relationships" r:id="rId5"/>
           </a:graphicData>
         </a:graphic>
       </p:graphicFrame>
@@ -8914,7 +8759,7 @@
           <a:bodyPr wrap="square" lIns="0" tIns="0" rIns="0" bIns="0" rtlCol="0" anchor="t"/>
           <a:lstStyle/>
           <a:p>
-            <a:pPr indent="0" marL="0">
+            <a:pPr marL="0" indent="0">
               <a:buNone/>
             </a:pPr>
             <a:r>
@@ -8950,7 +8795,7 @@
           <a:bodyPr wrap="square" lIns="0" tIns="0" rIns="0" bIns="0" rtlCol="0" anchor="t"/>
           <a:lstStyle/>
           <a:p>
-            <a:pPr indent="0" marL="0">
+            <a:pPr marL="0" indent="0">
               <a:buNone/>
             </a:pPr>
             <a:r>
@@ -8985,7 +8830,7 @@
           </a:prstGeom>
           <a:extLst>
             <a:ext uri="{C572A759-6A51-4108-AA02-DFA0A04FC94B}">
-              <ma14:wrappingTextBoxFlag xmlns:ma14="http://schemas.microsoft.com/office/mac/drawingml/2011/main" val="0"/>
+              <ma14:wrappingTextBoxFlag xmlns:ma14="http://schemas.microsoft.com/office/mac/drawingml/2011/main" xmlns="" val="0"/>
             </a:ext>
           </a:extLst>
         </p:spPr>
@@ -9003,7 +8848,7 @@
           <a:p>
             <a:pPr algn="r"/>
             <a:fld id="{F7021451-1387-4CA6-816F-3879F97B5CBC}" type="slidenum">
-              <a:rPr b="0" lang="en-US"/>
+              <a:rPr lang="en-US" b="0"/>
               <a:t>15</a:t>
             </a:fld>
             <a:endParaRPr lang="en-US"/>
@@ -9038,9 +8883,11 @@
       <p:sp>
         <p:nvSpPr>
           <p:cNvPr id="2" name="Text 0"/>
-          <p:cNvSpPr/>
+          <p:cNvSpPr>
+            <a:spLocks noGrp="1"/>
+          </p:cNvSpPr>
           <p:nvPr>
-            <p:ph idx="100" type="title" hasCustomPrompt="1"/>
+            <p:ph type="title" idx="100" hasCustomPrompt="1"/>
           </p:nvPr>
         </p:nvSpPr>
         <p:spPr>
@@ -9058,7 +8905,7 @@
           <a:bodyPr wrap="square" lIns="0" tIns="0" rIns="0" bIns="0" rtlCol="0" anchor="ctr"/>
           <a:lstStyle/>
           <a:p>
-            <a:pPr algn="l" indent="0" marL="0">
+            <a:pPr marL="0" indent="0" algn="l">
               <a:buNone/>
             </a:pPr>
             <a:r>
@@ -9096,10 +8943,34 @@
             <a:tbl>
               <a:tblPr/>
               <a:tblGrid>
-                <a:gridCol w="1737360"/>
-                <a:gridCol w="2743200"/>
-                <a:gridCol w="1280160"/>
-                <a:gridCol w="1005840"/>
+                <a:gridCol w="1737360">
+                  <a:extLst>
+                    <a:ext uri="{9D8B030D-6E8A-4147-A177-3AD203B41FA5}">
+                      <a16:colId xmlns:a16="http://schemas.microsoft.com/office/drawing/2014/main" val="20000"/>
+                    </a:ext>
+                  </a:extLst>
+                </a:gridCol>
+                <a:gridCol w="2743200">
+                  <a:extLst>
+                    <a:ext uri="{9D8B030D-6E8A-4147-A177-3AD203B41FA5}">
+                      <a16:colId xmlns:a16="http://schemas.microsoft.com/office/drawing/2014/main" val="20001"/>
+                    </a:ext>
+                  </a:extLst>
+                </a:gridCol>
+                <a:gridCol w="1280160">
+                  <a:extLst>
+                    <a:ext uri="{9D8B030D-6E8A-4147-A177-3AD203B41FA5}">
+                      <a16:colId xmlns:a16="http://schemas.microsoft.com/office/drawing/2014/main" val="20002"/>
+                    </a:ext>
+                  </a:extLst>
+                </a:gridCol>
+                <a:gridCol w="1005840">
+                  <a:extLst>
+                    <a:ext uri="{9D8B030D-6E8A-4147-A177-3AD203B41FA5}">
+                      <a16:colId xmlns:a16="http://schemas.microsoft.com/office/drawing/2014/main" val="20003"/>
+                    </a:ext>
+                  </a:extLst>
+                </a:gridCol>
               </a:tblGrid>
               <a:tr h="502920">
                 <a:tc>
@@ -9107,7 +8978,7 @@
                     <a:bodyPr/>
                     <a:lstStyle/>
                     <a:p>
-                      <a:pPr indent="0" marL="0">
+                      <a:pPr marL="0" indent="0">
                         <a:buNone/>
                       </a:pPr>
                       <a:r>
@@ -9168,7 +9039,7 @@
                     <a:bodyPr/>
                     <a:lstStyle/>
                     <a:p>
-                      <a:pPr indent="0" marL="0">
+                      <a:pPr marL="0" indent="0">
                         <a:buNone/>
                       </a:pPr>
                       <a:r>
@@ -9229,7 +9100,7 @@
                     <a:bodyPr/>
                     <a:lstStyle/>
                     <a:p>
-                      <a:pPr algn="ctr" indent="0" marL="0">
+                      <a:pPr marL="0" indent="0" algn="ctr">
                         <a:buNone/>
                       </a:pPr>
                       <a:r>
@@ -9290,7 +9161,7 @@
                     <a:bodyPr/>
                     <a:lstStyle/>
                     <a:p>
-                      <a:pPr algn="ctr" indent="0" marL="0">
+                      <a:pPr marL="0" indent="0" algn="ctr">
                         <a:buNone/>
                       </a:pPr>
                       <a:r>
@@ -9346,6 +9217,11 @@
                     </a:solidFill>
                   </a:tcPr>
                 </a:tc>
+                <a:extLst>
+                  <a:ext uri="{0D108BD9-81ED-4DB2-BD59-A6C34878D82A}">
+                    <a16:rowId xmlns:a16="http://schemas.microsoft.com/office/drawing/2014/main" val="10000"/>
+                  </a:ext>
+                </a:extLst>
               </a:tr>
               <a:tr h="502920">
                 <a:tc>
@@ -9353,7 +9229,7 @@
                     <a:bodyPr/>
                     <a:lstStyle/>
                     <a:p>
-                      <a:pPr indent="0" marL="0">
+                      <a:pPr marL="0" indent="0">
                         <a:buNone/>
                       </a:pPr>
                       <a:r>
@@ -9411,7 +9287,7 @@
                     <a:bodyPr/>
                     <a:lstStyle/>
                     <a:p>
-                      <a:pPr indent="0" marL="0">
+                      <a:pPr marL="0" indent="0">
                         <a:buNone/>
                       </a:pPr>
                       <a:r>
@@ -9469,7 +9345,7 @@
                     <a:bodyPr/>
                     <a:lstStyle/>
                     <a:p>
-                      <a:pPr algn="ctr" indent="0" marL="0">
+                      <a:pPr marL="0" indent="0" algn="ctr">
                         <a:buNone/>
                       </a:pPr>
                       <a:r>
@@ -9527,7 +9403,7 @@
                     <a:bodyPr/>
                     <a:lstStyle/>
                     <a:p>
-                      <a:pPr algn="ctr" indent="0" marL="0">
+                      <a:pPr marL="0" indent="0" algn="ctr">
                         <a:buNone/>
                       </a:pPr>
                       <a:r>
@@ -9580,6 +9456,11 @@
                     </a:lnB>
                   </a:tcPr>
                 </a:tc>
+                <a:extLst>
+                  <a:ext uri="{0D108BD9-81ED-4DB2-BD59-A6C34878D82A}">
+                    <a16:rowId xmlns:a16="http://schemas.microsoft.com/office/drawing/2014/main" val="10001"/>
+                  </a:ext>
+                </a:extLst>
               </a:tr>
               <a:tr h="502920">
                 <a:tc>
@@ -9587,7 +9468,7 @@
                     <a:bodyPr/>
                     <a:lstStyle/>
                     <a:p>
-                      <a:pPr indent="0" marL="0">
+                      <a:pPr marL="0" indent="0">
                         <a:buNone/>
                       </a:pPr>
                       <a:r>
@@ -9645,7 +9526,7 @@
                     <a:bodyPr/>
                     <a:lstStyle/>
                     <a:p>
-                      <a:pPr indent="0" marL="0">
+                      <a:pPr marL="0" indent="0">
                         <a:buNone/>
                       </a:pPr>
                       <a:r>
@@ -9703,7 +9584,7 @@
                     <a:bodyPr/>
                     <a:lstStyle/>
                     <a:p>
-                      <a:pPr algn="ctr" indent="0" marL="0">
+                      <a:pPr marL="0" indent="0" algn="ctr">
                         <a:buNone/>
                       </a:pPr>
                       <a:r>
@@ -9761,7 +9642,7 @@
                     <a:bodyPr/>
                     <a:lstStyle/>
                     <a:p>
-                      <a:pPr algn="ctr" indent="0" marL="0">
+                      <a:pPr marL="0" indent="0" algn="ctr">
                         <a:buNone/>
                       </a:pPr>
                       <a:r>
@@ -9814,6 +9695,11 @@
                     </a:lnB>
                   </a:tcPr>
                 </a:tc>
+                <a:extLst>
+                  <a:ext uri="{0D108BD9-81ED-4DB2-BD59-A6C34878D82A}">
+                    <a16:rowId xmlns:a16="http://schemas.microsoft.com/office/drawing/2014/main" val="10002"/>
+                  </a:ext>
+                </a:extLst>
               </a:tr>
               <a:tr h="502920">
                 <a:tc>
@@ -9821,7 +9707,7 @@
                     <a:bodyPr/>
                     <a:lstStyle/>
                     <a:p>
-                      <a:pPr indent="0" marL="0">
+                      <a:pPr marL="0" indent="0">
                         <a:buNone/>
                       </a:pPr>
                       <a:r>
@@ -9879,7 +9765,7 @@
                     <a:bodyPr/>
                     <a:lstStyle/>
                     <a:p>
-                      <a:pPr indent="0" marL="0">
+                      <a:pPr marL="0" indent="0">
                         <a:buNone/>
                       </a:pPr>
                       <a:r>
@@ -9937,7 +9823,7 @@
                     <a:bodyPr/>
                     <a:lstStyle/>
                     <a:p>
-                      <a:pPr algn="ctr" indent="0" marL="0">
+                      <a:pPr marL="0" indent="0" algn="ctr">
                         <a:buNone/>
                       </a:pPr>
                       <a:r>
@@ -9995,7 +9881,7 @@
                     <a:bodyPr/>
                     <a:lstStyle/>
                     <a:p>
-                      <a:pPr algn="ctr" indent="0" marL="0">
+                      <a:pPr marL="0" indent="0" algn="ctr">
                         <a:buNone/>
                       </a:pPr>
                       <a:r>
@@ -10048,6 +9934,11 @@
                     </a:lnB>
                   </a:tcPr>
                 </a:tc>
+                <a:extLst>
+                  <a:ext uri="{0D108BD9-81ED-4DB2-BD59-A6C34878D82A}">
+                    <a16:rowId xmlns:a16="http://schemas.microsoft.com/office/drawing/2014/main" val="10003"/>
+                  </a:ext>
+                </a:extLst>
               </a:tr>
               <a:tr h="502920">
                 <a:tc>
@@ -10055,7 +9946,7 @@
                     <a:bodyPr/>
                     <a:lstStyle/>
                     <a:p>
-                      <a:pPr indent="0" marL="0">
+                      <a:pPr marL="0" indent="0">
                         <a:buNone/>
                       </a:pPr>
                       <a:r>
@@ -10113,7 +10004,7 @@
                     <a:bodyPr/>
                     <a:lstStyle/>
                     <a:p>
-                      <a:pPr indent="0" marL="0">
+                      <a:pPr marL="0" indent="0">
                         <a:buNone/>
                       </a:pPr>
                       <a:r>
@@ -10171,7 +10062,7 @@
                     <a:bodyPr/>
                     <a:lstStyle/>
                     <a:p>
-                      <a:pPr algn="ctr" indent="0" marL="0">
+                      <a:pPr marL="0" indent="0" algn="ctr">
                         <a:buNone/>
                       </a:pPr>
                       <a:r>
@@ -10229,7 +10120,7 @@
                     <a:bodyPr/>
                     <a:lstStyle/>
                     <a:p>
-                      <a:pPr algn="ctr" indent="0" marL="0">
+                      <a:pPr marL="0" indent="0" algn="ctr">
                         <a:buNone/>
                       </a:pPr>
                       <a:r>
@@ -10282,6 +10173,11 @@
                     </a:lnB>
                   </a:tcPr>
                 </a:tc>
+                <a:extLst>
+                  <a:ext uri="{0D108BD9-81ED-4DB2-BD59-A6C34878D82A}">
+                    <a16:rowId xmlns:a16="http://schemas.microsoft.com/office/drawing/2014/main" val="10004"/>
+                  </a:ext>
+                </a:extLst>
               </a:tr>
               <a:tr h="502920">
                 <a:tc>
@@ -10289,7 +10185,7 @@
                     <a:bodyPr/>
                     <a:lstStyle/>
                     <a:p>
-                      <a:pPr indent="0" marL="0">
+                      <a:pPr marL="0" indent="0">
                         <a:buNone/>
                       </a:pPr>
                       <a:r>
@@ -10347,7 +10243,7 @@
                     <a:bodyPr/>
                     <a:lstStyle/>
                     <a:p>
-                      <a:pPr indent="0" marL="0">
+                      <a:pPr marL="0" indent="0">
                         <a:buNone/>
                       </a:pPr>
                       <a:r>
@@ -10405,7 +10301,7 @@
                     <a:bodyPr/>
                     <a:lstStyle/>
                     <a:p>
-                      <a:pPr algn="ctr" indent="0" marL="0">
+                      <a:pPr marL="0" indent="0" algn="ctr">
                         <a:buNone/>
                       </a:pPr>
                       <a:r>
@@ -10463,7 +10359,7 @@
                     <a:bodyPr/>
                     <a:lstStyle/>
                     <a:p>
-                      <a:pPr algn="ctr" indent="0" marL="0">
+                      <a:pPr marL="0" indent="0" algn="ctr">
                         <a:buNone/>
                       </a:pPr>
                       <a:r>
@@ -10516,6 +10412,11 @@
                     </a:lnB>
                   </a:tcPr>
                 </a:tc>
+                <a:extLst>
+                  <a:ext uri="{0D108BD9-81ED-4DB2-BD59-A6C34878D82A}">
+                    <a16:rowId xmlns:a16="http://schemas.microsoft.com/office/drawing/2014/main" val="10005"/>
+                  </a:ext>
+                </a:extLst>
               </a:tr>
             </a:tbl>
           </a:graphicData>
@@ -10547,7 +10448,7 @@
             <a:prstDash val="solid"/>
           </a:ln>
           <a:effectLst>
-            <a:outerShdw sx="100000" sy="100000" kx="0" ky="0" algn="bl" rotWithShape="0" blurRad="50800" dist="12700" dir="5400000">
+            <a:outerShdw blurRad="50800" dist="12700" dir="5400000" algn="bl" rotWithShape="0">
               <a:srgbClr val="000000">
                 <a:alpha val="8000"/>
               </a:srgbClr>
@@ -10576,7 +10477,7 @@
           <a:bodyPr wrap="square" lIns="0" tIns="0" rIns="0" bIns="0" rtlCol="0" anchor="t"/>
           <a:lstStyle/>
           <a:p>
-            <a:pPr indent="0" marL="0">
+            <a:pPr marL="0" indent="0">
               <a:buNone/>
             </a:pPr>
             <a:r>
@@ -10612,7 +10513,7 @@
           <a:bodyPr wrap="square" lIns="0" tIns="0" rIns="0" bIns="0" rtlCol="0" anchor="t"/>
           <a:lstStyle/>
           <a:p>
-            <a:pPr indent="0" marL="0">
+            <a:pPr marL="0" indent="0">
               <a:buNone/>
             </a:pPr>
             <a:r>
@@ -10648,7 +10549,7 @@
           <a:bodyPr wrap="square" lIns="0" tIns="0" rIns="0" bIns="0" rtlCol="0" anchor="t"/>
           <a:lstStyle/>
           <a:p>
-            <a:pPr indent="0" marL="0">
+            <a:pPr marL="0" indent="0">
               <a:buNone/>
             </a:pPr>
             <a:r>
@@ -10687,7 +10588,7 @@
           <a:bodyPr wrap="square" lIns="0" tIns="0" rIns="0" bIns="0" rtlCol="0" anchor="t"/>
           <a:lstStyle/>
           <a:p>
-            <a:pPr indent="0" marL="0">
+            <a:pPr marL="0" indent="0">
               <a:buNone/>
             </a:pPr>
             <a:r>
@@ -10722,7 +10623,7 @@
           </a:prstGeom>
           <a:extLst>
             <a:ext uri="{C572A759-6A51-4108-AA02-DFA0A04FC94B}">
-              <ma14:wrappingTextBoxFlag xmlns:ma14="http://schemas.microsoft.com/office/mac/drawingml/2011/main" val="0"/>
+              <ma14:wrappingTextBoxFlag xmlns:ma14="http://schemas.microsoft.com/office/mac/drawingml/2011/main" xmlns="" val="0"/>
             </a:ext>
           </a:extLst>
         </p:spPr>
@@ -10740,7 +10641,7 @@
           <a:p>
             <a:pPr algn="r"/>
             <a:fld id="{F7021451-1387-4CA6-816F-3879F97B5CBC}" type="slidenum">
-              <a:rPr b="0" lang="en-US"/>
+              <a:rPr lang="en-US" b="0"/>
               <a:t>16</a:t>
             </a:fld>
             <a:endParaRPr lang="en-US"/>
@@ -10775,9 +10676,11 @@
       <p:sp>
         <p:nvSpPr>
           <p:cNvPr id="2" name="Text 0"/>
-          <p:cNvSpPr/>
+          <p:cNvSpPr>
+            <a:spLocks noGrp="1"/>
+          </p:cNvSpPr>
           <p:nvPr>
-            <p:ph idx="100" type="title" hasCustomPrompt="1"/>
+            <p:ph type="title" idx="100" hasCustomPrompt="1"/>
           </p:nvPr>
         </p:nvSpPr>
         <p:spPr>
@@ -10795,7 +10698,7 @@
           <a:bodyPr wrap="square" lIns="0" tIns="0" rIns="0" bIns="0" rtlCol="0" anchor="ctr"/>
           <a:lstStyle/>
           <a:p>
-            <a:pPr algn="l" indent="0" marL="0">
+            <a:pPr marL="0" indent="0" algn="l">
               <a:buNone/>
             </a:pPr>
             <a:r>
@@ -10858,7 +10761,7 @@
           <a:bodyPr wrap="square" lIns="0" tIns="0" rIns="0" bIns="0" rtlCol="0" anchor="ctr"/>
           <a:lstStyle/>
           <a:p>
-            <a:pPr algn="ctr" indent="0" marL="0">
+            <a:pPr marL="0" indent="0" algn="ctr">
               <a:buNone/>
             </a:pPr>
             <a:r>
@@ -10921,7 +10824,7 @@
           <a:bodyPr wrap="square" lIns="0" tIns="0" rIns="0" bIns="0" rtlCol="0" anchor="ctr"/>
           <a:lstStyle/>
           <a:p>
-            <a:pPr indent="0" marL="0">
+            <a:pPr marL="0" indent="0">
               <a:buNone/>
             </a:pPr>
             <a:r>
@@ -11060,7 +10963,7 @@
           <a:bodyPr wrap="square" lIns="0" tIns="0" rIns="0" bIns="0" rtlCol="0" anchor="ctr"/>
           <a:lstStyle/>
           <a:p>
-            <a:pPr indent="0" marL="0">
+            <a:pPr marL="0" indent="0">
               <a:buNone/>
             </a:pPr>
             <a:r>
@@ -11199,7 +11102,7 @@
           <a:bodyPr wrap="square" lIns="0" tIns="0" rIns="0" bIns="0" rtlCol="0" anchor="ctr"/>
           <a:lstStyle/>
           <a:p>
-            <a:pPr indent="0" marL="0">
+            <a:pPr marL="0" indent="0">
               <a:buNone/>
             </a:pPr>
             <a:r>
@@ -11300,9 +11203,11 @@
       <p:sp>
         <p:nvSpPr>
           <p:cNvPr id="2" name="Text 0"/>
-          <p:cNvSpPr/>
+          <p:cNvSpPr>
+            <a:spLocks noGrp="1"/>
+          </p:cNvSpPr>
           <p:nvPr>
-            <p:ph idx="100" type="title" hasCustomPrompt="1"/>
+            <p:ph type="title" idx="100" hasCustomPrompt="1"/>
           </p:nvPr>
         </p:nvSpPr>
         <p:spPr>
@@ -11320,7 +11225,7 @@
           <a:bodyPr wrap="square" lIns="0" tIns="0" rIns="0" bIns="0" rtlCol="0" anchor="ctr"/>
           <a:lstStyle/>
           <a:p>
-            <a:pPr algn="l" indent="0" marL="0">
+            <a:pPr marL="0" indent="0" algn="l">
               <a:buNone/>
             </a:pPr>
             <a:r>
@@ -11361,7 +11266,7 @@
             <a:prstDash val="solid"/>
           </a:ln>
           <a:effectLst>
-            <a:outerShdw sx="100000" sy="100000" kx="0" ky="0" algn="bl" rotWithShape="0" blurRad="50800" dist="12700" dir="5400000">
+            <a:outerShdw blurRad="50800" dist="12700" dir="5400000" algn="bl" rotWithShape="0">
               <a:srgbClr val="000000">
                 <a:alpha val="8000"/>
               </a:srgbClr>
@@ -11415,7 +11320,7 @@
           <a:bodyPr wrap="square" lIns="0" tIns="0" rIns="0" bIns="0" rtlCol="0" anchor="ctr"/>
           <a:lstStyle/>
           <a:p>
-            <a:pPr algn="ctr" indent="0" marL="0">
+            <a:pPr marL="0" indent="0" algn="ctr">
               <a:buNone/>
             </a:pPr>
             <a:r>
@@ -11451,7 +11356,7 @@
           <a:bodyPr wrap="square" lIns="0" tIns="0" rIns="0" bIns="0" rtlCol="0" anchor="ctr"/>
           <a:lstStyle/>
           <a:p>
-            <a:pPr indent="0" marL="0">
+            <a:pPr marL="0" indent="0">
               <a:buNone/>
             </a:pPr>
             <a:r>
@@ -11487,7 +11392,7 @@
           <a:bodyPr wrap="square" lIns="0" tIns="0" rIns="0" bIns="0" rtlCol="0" anchor="t"/>
           <a:lstStyle/>
           <a:p>
-            <a:pPr indent="0" marL="0">
+            <a:pPr marL="0" indent="0">
               <a:buNone/>
             </a:pPr>
             <a:r>
@@ -11528,7 +11433,7 @@
             <a:prstDash val="solid"/>
           </a:ln>
           <a:effectLst>
-            <a:outerShdw sx="100000" sy="100000" kx="0" ky="0" algn="bl" rotWithShape="0" blurRad="50800" dist="12700" dir="5400000">
+            <a:outerShdw blurRad="50800" dist="12700" dir="5400000" algn="bl" rotWithShape="0">
               <a:srgbClr val="000000">
                 <a:alpha val="8000"/>
               </a:srgbClr>
@@ -11582,7 +11487,7 @@
           <a:bodyPr wrap="square" lIns="0" tIns="0" rIns="0" bIns="0" rtlCol="0" anchor="ctr"/>
           <a:lstStyle/>
           <a:p>
-            <a:pPr algn="ctr" indent="0" marL="0">
+            <a:pPr marL="0" indent="0" algn="ctr">
               <a:buNone/>
             </a:pPr>
             <a:r>
@@ -11618,7 +11523,7 @@
           <a:bodyPr wrap="square" lIns="0" tIns="0" rIns="0" bIns="0" rtlCol="0" anchor="ctr"/>
           <a:lstStyle/>
           <a:p>
-            <a:pPr indent="0" marL="0">
+            <a:pPr marL="0" indent="0">
               <a:buNone/>
             </a:pPr>
             <a:r>
@@ -11654,7 +11559,7 @@
           <a:bodyPr wrap="square" lIns="0" tIns="0" rIns="0" bIns="0" rtlCol="0" anchor="t"/>
           <a:lstStyle/>
           <a:p>
-            <a:pPr indent="0" marL="0">
+            <a:pPr marL="0" indent="0">
               <a:buNone/>
             </a:pPr>
             <a:r>
@@ -11695,7 +11600,7 @@
             <a:prstDash val="solid"/>
           </a:ln>
           <a:effectLst>
-            <a:outerShdw sx="100000" sy="100000" kx="0" ky="0" algn="bl" rotWithShape="0" blurRad="50800" dist="12700" dir="5400000">
+            <a:outerShdw blurRad="50800" dist="12700" dir="5400000" algn="bl" rotWithShape="0">
               <a:srgbClr val="000000">
                 <a:alpha val="8000"/>
               </a:srgbClr>
@@ -11749,7 +11654,7 @@
           <a:bodyPr wrap="square" lIns="0" tIns="0" rIns="0" bIns="0" rtlCol="0" anchor="ctr"/>
           <a:lstStyle/>
           <a:p>
-            <a:pPr algn="ctr" indent="0" marL="0">
+            <a:pPr marL="0" indent="0" algn="ctr">
               <a:buNone/>
             </a:pPr>
             <a:r>
@@ -11785,7 +11690,7 @@
           <a:bodyPr wrap="square" lIns="0" tIns="0" rIns="0" bIns="0" rtlCol="0" anchor="ctr"/>
           <a:lstStyle/>
           <a:p>
-            <a:pPr indent="0" marL="0">
+            <a:pPr marL="0" indent="0">
               <a:buNone/>
             </a:pPr>
             <a:r>
@@ -11821,7 +11726,7 @@
           <a:bodyPr wrap="square" lIns="0" tIns="0" rIns="0" bIns="0" rtlCol="0" anchor="t"/>
           <a:lstStyle/>
           <a:p>
-            <a:pPr indent="0" marL="0">
+            <a:pPr marL="0" indent="0">
               <a:buNone/>
             </a:pPr>
             <a:r>
@@ -11862,7 +11767,7 @@
             <a:prstDash val="solid"/>
           </a:ln>
           <a:effectLst>
-            <a:outerShdw sx="100000" sy="100000" kx="0" ky="0" algn="bl" rotWithShape="0" blurRad="50800" dist="12700" dir="5400000">
+            <a:outerShdw blurRad="50800" dist="12700" dir="5400000" algn="bl" rotWithShape="0">
               <a:srgbClr val="000000">
                 <a:alpha val="8000"/>
               </a:srgbClr>
@@ -11916,7 +11821,7 @@
           <a:bodyPr wrap="square" lIns="0" tIns="0" rIns="0" bIns="0" rtlCol="0" anchor="ctr"/>
           <a:lstStyle/>
           <a:p>
-            <a:pPr algn="ctr" indent="0" marL="0">
+            <a:pPr marL="0" indent="0" algn="ctr">
               <a:buNone/>
             </a:pPr>
             <a:r>
@@ -11952,7 +11857,7 @@
           <a:bodyPr wrap="square" lIns="0" tIns="0" rIns="0" bIns="0" rtlCol="0" anchor="ctr"/>
           <a:lstStyle/>
           <a:p>
-            <a:pPr indent="0" marL="0">
+            <a:pPr marL="0" indent="0">
               <a:buNone/>
             </a:pPr>
             <a:r>
@@ -11988,7 +11893,7 @@
           <a:bodyPr wrap="square" lIns="0" tIns="0" rIns="0" bIns="0" rtlCol="0" anchor="t"/>
           <a:lstStyle/>
           <a:p>
-            <a:pPr indent="0" marL="0">
+            <a:pPr marL="0" indent="0">
               <a:buNone/>
             </a:pPr>
             <a:r>
@@ -12029,7 +11934,7 @@
             <a:prstDash val="solid"/>
           </a:ln>
           <a:effectLst>
-            <a:outerShdw sx="100000" sy="100000" kx="0" ky="0" algn="bl" rotWithShape="0" blurRad="50800" dist="12700" dir="5400000">
+            <a:outerShdw blurRad="50800" dist="12700" dir="5400000" algn="bl" rotWithShape="0">
               <a:srgbClr val="000000">
                 <a:alpha val="8000"/>
               </a:srgbClr>
@@ -12083,7 +11988,7 @@
           <a:bodyPr wrap="square" lIns="0" tIns="0" rIns="0" bIns="0" rtlCol="0" anchor="ctr"/>
           <a:lstStyle/>
           <a:p>
-            <a:pPr algn="ctr" indent="0" marL="0">
+            <a:pPr marL="0" indent="0" algn="ctr">
               <a:buNone/>
             </a:pPr>
             <a:r>
@@ -12119,7 +12024,7 @@
           <a:bodyPr wrap="square" lIns="0" tIns="0" rIns="0" bIns="0" rtlCol="0" anchor="ctr"/>
           <a:lstStyle/>
           <a:p>
-            <a:pPr indent="0" marL="0">
+            <a:pPr marL="0" indent="0">
               <a:buNone/>
             </a:pPr>
             <a:r>
@@ -12155,7 +12060,7 @@
           <a:bodyPr wrap="square" lIns="0" tIns="0" rIns="0" bIns="0" rtlCol="0" anchor="t"/>
           <a:lstStyle/>
           <a:p>
-            <a:pPr indent="0" marL="0">
+            <a:pPr marL="0" indent="0">
               <a:buNone/>
             </a:pPr>
             <a:r>
@@ -12196,7 +12101,7 @@
             <a:prstDash val="solid"/>
           </a:ln>
           <a:effectLst>
-            <a:outerShdw sx="100000" sy="100000" kx="0" ky="0" algn="bl" rotWithShape="0" blurRad="50800" dist="12700" dir="5400000">
+            <a:outerShdw blurRad="50800" dist="12700" dir="5400000" algn="bl" rotWithShape="0">
               <a:srgbClr val="000000">
                 <a:alpha val="8000"/>
               </a:srgbClr>
@@ -12250,7 +12155,7 @@
           <a:bodyPr wrap="square" lIns="0" tIns="0" rIns="0" bIns="0" rtlCol="0" anchor="ctr"/>
           <a:lstStyle/>
           <a:p>
-            <a:pPr algn="ctr" indent="0" marL="0">
+            <a:pPr marL="0" indent="0" algn="ctr">
               <a:buNone/>
             </a:pPr>
             <a:r>
@@ -12286,7 +12191,7 @@
           <a:bodyPr wrap="square" lIns="0" tIns="0" rIns="0" bIns="0" rtlCol="0" anchor="ctr"/>
           <a:lstStyle/>
           <a:p>
-            <a:pPr indent="0" marL="0">
+            <a:pPr marL="0" indent="0">
               <a:buNone/>
             </a:pPr>
             <a:r>
@@ -12322,7 +12227,7 @@
           <a:bodyPr wrap="square" lIns="0" tIns="0" rIns="0" bIns="0" rtlCol="0" anchor="t"/>
           <a:lstStyle/>
           <a:p>
-            <a:pPr indent="0" marL="0">
+            <a:pPr marL="0" indent="0">
               <a:buNone/>
             </a:pPr>
             <a:r>
@@ -12363,7 +12268,7 @@
             <a:prstDash val="solid"/>
           </a:ln>
           <a:effectLst>
-            <a:outerShdw sx="100000" sy="100000" kx="0" ky="0" algn="bl" rotWithShape="0" blurRad="50800" dist="12700" dir="5400000">
+            <a:outerShdw blurRad="50800" dist="12700" dir="5400000" algn="bl" rotWithShape="0">
               <a:srgbClr val="000000">
                 <a:alpha val="8000"/>
               </a:srgbClr>
@@ -12417,7 +12322,7 @@
           <a:bodyPr wrap="square" lIns="0" tIns="0" rIns="0" bIns="0" rtlCol="0" anchor="ctr"/>
           <a:lstStyle/>
           <a:p>
-            <a:pPr algn="ctr" indent="0" marL="0">
+            <a:pPr marL="0" indent="0" algn="ctr">
               <a:buNone/>
             </a:pPr>
             <a:r>
@@ -12453,7 +12358,7 @@
           <a:bodyPr wrap="square" lIns="0" tIns="0" rIns="0" bIns="0" rtlCol="0" anchor="ctr"/>
           <a:lstStyle/>
           <a:p>
-            <a:pPr indent="0" marL="0">
+            <a:pPr marL="0" indent="0">
               <a:buNone/>
             </a:pPr>
             <a:r>
@@ -12489,7 +12394,7 @@
           <a:bodyPr wrap="square" lIns="0" tIns="0" rIns="0" bIns="0" rtlCol="0" anchor="t"/>
           <a:lstStyle/>
           <a:p>
-            <a:pPr indent="0" marL="0">
+            <a:pPr marL="0" indent="0">
               <a:buNone/>
             </a:pPr>
             <a:r>
@@ -12530,7 +12435,7 @@
             <a:prstDash val="solid"/>
           </a:ln>
           <a:effectLst>
-            <a:outerShdw sx="100000" sy="100000" kx="0" ky="0" algn="bl" rotWithShape="0" blurRad="50800" dist="12700" dir="5400000">
+            <a:outerShdw blurRad="50800" dist="12700" dir="5400000" algn="bl" rotWithShape="0">
               <a:srgbClr val="000000">
                 <a:alpha val="8000"/>
               </a:srgbClr>
@@ -12584,7 +12489,7 @@
           <a:bodyPr wrap="square" lIns="0" tIns="0" rIns="0" bIns="0" rtlCol="0" anchor="ctr"/>
           <a:lstStyle/>
           <a:p>
-            <a:pPr algn="ctr" indent="0" marL="0">
+            <a:pPr marL="0" indent="0" algn="ctr">
               <a:buNone/>
             </a:pPr>
             <a:r>
@@ -12620,7 +12525,7 @@
           <a:bodyPr wrap="square" lIns="0" tIns="0" rIns="0" bIns="0" rtlCol="0" anchor="ctr"/>
           <a:lstStyle/>
           <a:p>
-            <a:pPr indent="0" marL="0">
+            <a:pPr marL="0" indent="0">
               <a:buNone/>
             </a:pPr>
             <a:r>
@@ -12656,7 +12561,7 @@
           <a:bodyPr wrap="square" lIns="0" tIns="0" rIns="0" bIns="0" rtlCol="0" anchor="t"/>
           <a:lstStyle/>
           <a:p>
-            <a:pPr indent="0" marL="0">
+            <a:pPr marL="0" indent="0">
               <a:buNone/>
             </a:pPr>
             <a:r>
@@ -12697,7 +12602,7 @@
             <a:prstDash val="solid"/>
           </a:ln>
           <a:effectLst>
-            <a:outerShdw sx="100000" sy="100000" kx="0" ky="0" algn="bl" rotWithShape="0" blurRad="50800" dist="12700" dir="5400000">
+            <a:outerShdw blurRad="50800" dist="12700" dir="5400000" algn="bl" rotWithShape="0">
               <a:srgbClr val="000000">
                 <a:alpha val="8000"/>
               </a:srgbClr>
@@ -12751,7 +12656,7 @@
           <a:bodyPr wrap="square" lIns="0" tIns="0" rIns="0" bIns="0" rtlCol="0" anchor="ctr"/>
           <a:lstStyle/>
           <a:p>
-            <a:pPr algn="ctr" indent="0" marL="0">
+            <a:pPr marL="0" indent="0" algn="ctr">
               <a:buNone/>
             </a:pPr>
             <a:r>
@@ -12787,7 +12692,7 @@
           <a:bodyPr wrap="square" lIns="0" tIns="0" rIns="0" bIns="0" rtlCol="0" anchor="ctr"/>
           <a:lstStyle/>
           <a:p>
-            <a:pPr indent="0" marL="0">
+            <a:pPr marL="0" indent="0">
               <a:buNone/>
             </a:pPr>
             <a:r>
@@ -12823,7 +12728,7 @@
           <a:bodyPr wrap="square" lIns="0" tIns="0" rIns="0" bIns="0" rtlCol="0" anchor="t"/>
           <a:lstStyle/>
           <a:p>
-            <a:pPr indent="0" marL="0">
+            <a:pPr marL="0" indent="0">
               <a:buNone/>
             </a:pPr>
             <a:r>
@@ -12864,7 +12769,7 @@
             <a:prstDash val="solid"/>
           </a:ln>
           <a:effectLst>
-            <a:outerShdw sx="100000" sy="100000" kx="0" ky="0" algn="bl" rotWithShape="0" blurRad="50800" dist="12700" dir="5400000">
+            <a:outerShdw blurRad="50800" dist="12700" dir="5400000" algn="bl" rotWithShape="0">
               <a:srgbClr val="000000">
                 <a:alpha val="8000"/>
               </a:srgbClr>
@@ -12918,7 +12823,7 @@
           <a:bodyPr wrap="square" lIns="0" tIns="0" rIns="0" bIns="0" rtlCol="0" anchor="ctr"/>
           <a:lstStyle/>
           <a:p>
-            <a:pPr algn="ctr" indent="0" marL="0">
+            <a:pPr marL="0" indent="0" algn="ctr">
               <a:buNone/>
             </a:pPr>
             <a:r>
@@ -12954,7 +12859,7 @@
           <a:bodyPr wrap="square" lIns="0" tIns="0" rIns="0" bIns="0" rtlCol="0" anchor="ctr"/>
           <a:lstStyle/>
           <a:p>
-            <a:pPr indent="0" marL="0">
+            <a:pPr marL="0" indent="0">
               <a:buNone/>
             </a:pPr>
             <a:r>
@@ -12990,7 +12895,7 @@
           <a:bodyPr wrap="square" lIns="0" tIns="0" rIns="0" bIns="0" rtlCol="0" anchor="t"/>
           <a:lstStyle/>
           <a:p>
-            <a:pPr indent="0" marL="0">
+            <a:pPr marL="0" indent="0">
               <a:buNone/>
             </a:pPr>
             <a:r>
@@ -13031,7 +12936,7 @@
             <a:prstDash val="solid"/>
           </a:ln>
           <a:effectLst>
-            <a:outerShdw sx="100000" sy="100000" kx="0" ky="0" algn="bl" rotWithShape="0" blurRad="50800" dist="12700" dir="5400000">
+            <a:outerShdw blurRad="50800" dist="12700" dir="5400000" algn="bl" rotWithShape="0">
               <a:srgbClr val="000000">
                 <a:alpha val="8000"/>
               </a:srgbClr>
@@ -13060,7 +12965,7 @@
           <a:bodyPr wrap="square" lIns="0" tIns="0" rIns="0" bIns="0" rtlCol="0" anchor="t"/>
           <a:lstStyle/>
           <a:p>
-            <a:pPr indent="0" marL="0">
+            <a:pPr marL="0" indent="0">
               <a:buNone/>
             </a:pPr>
             <a:r>
@@ -13195,7 +13100,7 @@
             <a:prstDash val="solid"/>
           </a:ln>
           <a:effectLst>
-            <a:outerShdw sx="100000" sy="100000" kx="0" ky="0" algn="bl" rotWithShape="0" blurRad="50800" dist="12700" dir="5400000">
+            <a:outerShdw blurRad="50800" dist="12700" dir="5400000" algn="bl" rotWithShape="0">
               <a:srgbClr val="000000">
                 <a:alpha val="8000"/>
               </a:srgbClr>
@@ -13224,7 +13129,7 @@
           <a:bodyPr wrap="square" lIns="0" tIns="0" rIns="0" bIns="0" rtlCol="0" anchor="t"/>
           <a:lstStyle/>
           <a:p>
-            <a:pPr indent="0" marL="0">
+            <a:pPr marL="0" indent="0">
               <a:buNone/>
             </a:pPr>
             <a:r>
@@ -13299,7 +13204,7 @@
       </p:sp>
       <p:sp>
         <p:nvSpPr>
-          <p:cNvPr id="25" name="Slide Number Placeholder 0"/>
+          <p:cNvPr id="3" name="Slide Number Placeholder 0"/>
           <p:cNvSpPr>
             <a:spLocks noGrp="1"/>
           </p:cNvSpPr>
@@ -13317,7 +13222,7 @@
           </a:prstGeom>
           <a:extLst>
             <a:ext uri="{C572A759-6A51-4108-AA02-DFA0A04FC94B}">
-              <ma14:wrappingTextBoxFlag xmlns:ma14="http://schemas.microsoft.com/office/mac/drawingml/2011/main" val="0"/>
+              <ma14:wrappingTextBoxFlag xmlns:ma14="http://schemas.microsoft.com/office/mac/drawingml/2011/main" xmlns="" val="0"/>
             </a:ext>
           </a:extLst>
         </p:spPr>
@@ -13335,7 +13240,7 @@
           <a:p>
             <a:pPr algn="r"/>
             <a:fld id="{F7021451-1387-4CA6-816F-3879F97B5CBC}" type="slidenum">
-              <a:rPr b="0" lang="en-US"/>
+              <a:rPr lang="en-US" b="0"/>
               <a:t>18</a:t>
             </a:fld>
             <a:endParaRPr lang="en-US"/>
@@ -13370,9 +13275,11 @@
       <p:sp>
         <p:nvSpPr>
           <p:cNvPr id="2" name="Text 0"/>
-          <p:cNvSpPr/>
+          <p:cNvSpPr>
+            <a:spLocks noGrp="1"/>
+          </p:cNvSpPr>
           <p:nvPr>
-            <p:ph idx="100" type="title" hasCustomPrompt="1"/>
+            <p:ph type="title" idx="100" hasCustomPrompt="1"/>
           </p:nvPr>
         </p:nvSpPr>
         <p:spPr>
@@ -13390,7 +13297,7 @@
           <a:bodyPr wrap="square" lIns="0" tIns="0" rIns="0" bIns="0" rtlCol="0" anchor="ctr"/>
           <a:lstStyle/>
           <a:p>
-            <a:pPr algn="l" indent="0" marL="0">
+            <a:pPr marL="0" indent="0" algn="l">
               <a:buNone/>
             </a:pPr>
             <a:r>
@@ -13453,7 +13360,7 @@
           <a:bodyPr wrap="square" lIns="0" tIns="0" rIns="0" bIns="0" rtlCol="0" anchor="ctr"/>
           <a:lstStyle/>
           <a:p>
-            <a:pPr algn="ctr" indent="0" marL="0">
+            <a:pPr marL="0" indent="0" algn="ctr">
               <a:buNone/>
             </a:pPr>
             <a:r>
@@ -13516,7 +13423,7 @@
           <a:bodyPr wrap="square" lIns="0" tIns="0" rIns="0" bIns="0" rtlCol="0" anchor="ctr"/>
           <a:lstStyle/>
           <a:p>
-            <a:pPr indent="0" marL="0">
+            <a:pPr marL="0" indent="0">
               <a:buNone/>
             </a:pPr>
             <a:r>
@@ -13673,7 +13580,7 @@
           <a:bodyPr wrap="square" lIns="0" tIns="0" rIns="0" bIns="0" rtlCol="0" anchor="ctr"/>
           <a:lstStyle/>
           <a:p>
-            <a:pPr indent="0" marL="0">
+            <a:pPr marL="0" indent="0">
               <a:buNone/>
             </a:pPr>
             <a:r>
@@ -13812,7 +13719,7 @@
           <a:bodyPr wrap="square" lIns="0" tIns="0" rIns="0" bIns="0" rtlCol="0" anchor="ctr"/>
           <a:lstStyle/>
           <a:p>
-            <a:pPr indent="0" marL="0">
+            <a:pPr marL="0" indent="0">
               <a:buNone/>
             </a:pPr>
             <a:r>
@@ -13895,7 +13802,7 @@
 
 <file path=ppt/slides/slide2.xml><?xml version="1.0" encoding="utf-8"?>
 <p:sld xmlns:a="http://schemas.openxmlformats.org/drawingml/2006/main" xmlns:r="http://schemas.openxmlformats.org/officeDocument/2006/relationships" xmlns:p="http://schemas.openxmlformats.org/presentationml/2006/main">
-  <p:cSld name="Slide 2">
+  <p:cSld>
     <p:spTree>
       <p:nvGrpSpPr>
         <p:cNvPr id="1" name=""/>
@@ -13913,9 +13820,11 @@
       <p:sp>
         <p:nvSpPr>
           <p:cNvPr id="2" name="Text 0"/>
-          <p:cNvSpPr/>
+          <p:cNvSpPr>
+            <a:spLocks noGrp="1"/>
+          </p:cNvSpPr>
           <p:nvPr>
-            <p:ph idx="100" type="title" hasCustomPrompt="1"/>
+            <p:ph type="title" idx="100" hasCustomPrompt="1"/>
           </p:nvPr>
         </p:nvSpPr>
         <p:spPr>
@@ -13933,7 +13842,7 @@
           <a:bodyPr wrap="square" lIns="0" tIns="0" rIns="0" bIns="0" rtlCol="0" anchor="ctr"/>
           <a:lstStyle/>
           <a:p>
-            <a:pPr algn="l" indent="0" marL="0">
+            <a:pPr marL="0" indent="0" algn="l">
               <a:buNone/>
             </a:pPr>
             <a:r>
@@ -13974,7 +13883,7 @@
             <a:prstDash val="solid"/>
           </a:ln>
           <a:effectLst>
-            <a:outerShdw sx="100000" sy="100000" kx="0" ky="0" algn="bl" rotWithShape="0" blurRad="50800" dist="12700" dir="5400000">
+            <a:outerShdw blurRad="50800" dist="12700" dir="5400000" algn="bl" rotWithShape="0">
               <a:srgbClr val="000000">
                 <a:alpha val="8000"/>
               </a:srgbClr>
@@ -14003,7 +13912,7 @@
           <a:bodyPr wrap="square" lIns="0" tIns="0" rIns="0" bIns="0" rtlCol="0" anchor="t"/>
           <a:lstStyle/>
           <a:p>
-            <a:pPr indent="0" marL="0">
+            <a:pPr marL="0" indent="0">
               <a:buNone/>
             </a:pPr>
             <a:r>
@@ -14042,7 +13951,7 @@
           <a:bodyPr wrap="square" lIns="0" tIns="0" rIns="0" bIns="0" rtlCol="0" anchor="t"/>
           <a:lstStyle/>
           <a:p>
-            <a:pPr indent="0" marL="0">
+            <a:pPr marL="0" indent="0">
               <a:buNone/>
             </a:pPr>
             <a:r>
@@ -14051,9 +13960,12 @@
                   <a:schemeClr val="tx1"/>
                 </a:solidFill>
               </a:rPr>
-              <a:t>Senior AI, Data and Technology Consultant, seconded to Temasek Holdings, Digital Innovation (2023 to now)</a:t>
-            </a:r>
-            <a:endParaRPr lang="en-US" sz="1250" dirty="0"/>
+              <a:t>Senior AI, Data and Technology Consultant, seconded to </a:t>
+            </a:r>
+            <a:r>
+              <a:rPr lang="en-US" sz="1250" dirty="0"/>
+              <a:t>Sovereign Wealth Fund. </a:t>
+            </a:r>
           </a:p>
         </p:txBody>
       </p:sp>
@@ -14078,7 +13990,7 @@
           <a:bodyPr wrap="square" lIns="0" tIns="0" rIns="0" bIns="0" rtlCol="0" anchor="t"/>
           <a:lstStyle/>
           <a:p>
-            <a:pPr indent="0" marL="0">
+            <a:pPr marL="0" indent="0">
               <a:buNone/>
             </a:pPr>
             <a:r>
@@ -14127,7 +14039,19 @@
                   <a:schemeClr val="tx1"/>
                 </a:solidFill>
               </a:rPr>
-              <a:t>Data scientist, RSAF Data Office: authored the Air Force's AI strategy, set up its first digital unit</a:t>
+              <a:t>Data scientist, RSAF Data Office: </a:t>
+            </a:r>
+            <a:r>
+              <a:rPr lang="en-US" sz="1150" dirty="0"/>
+              <a:t>contributed to RSAF AI Strategy</a:t>
+            </a:r>
+            <a:r>
+              <a:rPr lang="en-US" sz="1150" dirty="0">
+                <a:solidFill>
+                  <a:schemeClr val="tx1"/>
+                </a:solidFill>
+              </a:rPr>
+              <a:t>, set up its first digital unit</a:t>
             </a:r>
             <a:endParaRPr lang="en-US" sz="1150" dirty="0"/>
           </a:p>
@@ -14172,7 +14096,7 @@
           <a:bodyPr wrap="square" lIns="0" tIns="0" rIns="0" bIns="0" rtlCol="0" anchor="t"/>
           <a:lstStyle/>
           <a:p>
-            <a:pPr indent="0" marL="0">
+            <a:pPr marL="0" indent="0">
               <a:buNone/>
             </a:pPr>
             <a:r>
@@ -14208,7 +14132,7 @@
           <a:bodyPr wrap="square" lIns="0" tIns="0" rIns="0" bIns="0" rtlCol="0" anchor="t"/>
           <a:lstStyle/>
           <a:p>
-            <a:pPr indent="0" marL="0">
+            <a:pPr marL="0" indent="0">
               <a:buNone/>
             </a:pPr>
             <a:r>
@@ -14244,7 +14168,7 @@
           <a:bodyPr wrap="square" lIns="0" tIns="0" rIns="0" bIns="0" rtlCol="0" anchor="t"/>
           <a:lstStyle/>
           <a:p>
-            <a:pPr indent="0" marL="0">
+            <a:pPr marL="0" indent="0">
               <a:buNone/>
             </a:pPr>
             <a:r>
@@ -14253,7 +14177,7 @@
                   <a:schemeClr val="tx2"/>
                 </a:solidFill>
               </a:rPr>
-              <a:t>Things I have built that models had to earn trust in</a:t>
+              <a:t>Things I have built that models/Applications in</a:t>
             </a:r>
             <a:endParaRPr lang="en-US" sz="1600" dirty="0"/>
           </a:p>
@@ -14305,7 +14229,7 @@
           <a:bodyPr wrap="square" lIns="0" tIns="0" rIns="0" bIns="0" rtlCol="0" anchor="ctr"/>
           <a:lstStyle/>
           <a:p>
-            <a:pPr algn="ctr" indent="0" marL="0">
+            <a:pPr marL="0" indent="0" algn="ctr">
               <a:buNone/>
             </a:pPr>
             <a:r>
@@ -14341,7 +14265,7 @@
           <a:bodyPr wrap="square" lIns="0" tIns="0" rIns="0" bIns="0" rtlCol="0" anchor="t"/>
           <a:lstStyle/>
           <a:p>
-            <a:pPr indent="0" marL="0">
+            <a:pPr marL="0" indent="0">
               <a:buNone/>
             </a:pPr>
             <a:r>
@@ -14350,7 +14274,7 @@
                   <a:schemeClr val="tx2"/>
                 </a:solidFill>
               </a:rPr>
-              <a:t>Investment analytics at Temasek</a:t>
+              <a:t>Investment analytics, valuation and execution</a:t>
             </a:r>
             <a:endParaRPr lang="en-US" sz="1300" dirty="0"/>
           </a:p>
@@ -14364,7 +14288,7 @@
         </p:nvSpPr>
         <p:spPr>
           <a:xfrm>
-            <a:off x="5897880" y="2286000"/>
+            <a:off x="5879592" y="2234363"/>
             <a:ext cx="5760720" cy="713232"/>
           </a:xfrm>
           <a:prstGeom prst="rect">
@@ -14377,30 +14301,49 @@
           <a:bodyPr wrap="square" lIns="0" tIns="0" rIns="0" bIns="0" rtlCol="0" anchor="t"/>
           <a:lstStyle/>
           <a:p>
-            <a:pPr indent="0" marL="0">
-              <a:buNone/>
-            </a:pPr>
-            <a:r>
-              <a:rPr lang="en-US" sz="1050" dirty="0">
-                <a:solidFill>
-                  <a:schemeClr val="tx1"/>
-                </a:solidFill>
-              </a:rPr>
-              <a:t>An AI-assisted analyst performance and attribution platform for 50+ investment professionals, with an LLM signal tracker for high-conviction ideas; signal cadence moved from monthly to daily, every recommendation logged in real time.</a:t>
-            </a:r>
-            <a:endParaRPr lang="en-US" sz="1050" dirty="0"/>
-          </a:p>
-        </p:txBody>
-      </p:sp>
-      <p:sp>
-        <p:nvSpPr>
-          <p:cNvPr id="16" name="Shape 13"/>
+            <a:pPr lvl="0"/>
+            <a:r>
+              <a:rPr lang="en-US" sz="1050" b="1" dirty="0"/>
+              <a:t>Investment analytics:</a:t>
+            </a:r>
+            <a:r>
+              <a:rPr lang="en-US" sz="1050" dirty="0"/>
+              <a:t> AI-assisted performance attribution and idea tracking for an investment team.</a:t>
+            </a:r>
+          </a:p>
+          <a:p>
+            <a:pPr lvl="0"/>
+            <a:r>
+              <a:rPr lang="en-US" sz="1050" b="1" dirty="0"/>
+              <a:t>Valuation:</a:t>
+            </a:r>
+            <a:r>
+              <a:rPr lang="en-US" sz="1050" dirty="0"/>
+              <a:t> Machine-learning valuation for illiquid assets.</a:t>
+            </a:r>
+          </a:p>
+          <a:p>
+            <a:pPr lvl="0"/>
+            <a:r>
+              <a:rPr lang="en-US" sz="1050" b="1" dirty="0"/>
+              <a:t>Execution:</a:t>
+            </a:r>
+            <a:r>
+              <a:rPr lang="en-US" sz="1050" dirty="0"/>
+              <a:t> Trade workflow automation for investment teams.</a:t>
+            </a:r>
+          </a:p>
+        </p:txBody>
+      </p:sp>
+      <p:sp>
+        <p:nvSpPr>
+          <p:cNvPr id="20" name="Shape 17"/>
           <p:cNvSpPr/>
           <p:nvPr/>
         </p:nvSpPr>
         <p:spPr>
           <a:xfrm>
-            <a:off x="5394960" y="3035808"/>
+            <a:off x="5394960" y="3377722"/>
             <a:ext cx="384048" cy="384048"/>
           </a:xfrm>
           <a:prstGeom prst="ellipse">
@@ -14419,13 +14362,13 @@
       </p:sp>
       <p:sp>
         <p:nvSpPr>
-          <p:cNvPr id="17" name="Text 14"/>
+          <p:cNvPr id="21" name="Text 18"/>
           <p:cNvSpPr txBox="1"/>
           <p:nvPr/>
         </p:nvSpPr>
         <p:spPr>
           <a:xfrm>
-            <a:off x="5394960" y="3035808"/>
+            <a:off x="5394960" y="3377722"/>
             <a:ext cx="384048" cy="384048"/>
           </a:xfrm>
           <a:prstGeom prst="rect">
@@ -14438,7 +14381,7 @@
           <a:bodyPr wrap="square" lIns="0" tIns="0" rIns="0" bIns="0" rtlCol="0" anchor="ctr"/>
           <a:lstStyle/>
           <a:p>
-            <a:pPr algn="ctr" indent="0" marL="0">
+            <a:pPr marL="0" indent="0" algn="ctr">
               <a:buNone/>
             </a:pPr>
             <a:r>
@@ -14455,13 +14398,13 @@
       </p:sp>
       <p:sp>
         <p:nvSpPr>
-          <p:cNvPr id="18" name="Text 15"/>
+          <p:cNvPr id="22" name="Text 19"/>
           <p:cNvSpPr txBox="1"/>
           <p:nvPr/>
         </p:nvSpPr>
         <p:spPr>
           <a:xfrm>
-            <a:off x="5897880" y="2990088"/>
+            <a:off x="5897880" y="3332002"/>
             <a:ext cx="5760720" cy="320040"/>
           </a:xfrm>
           <a:prstGeom prst="rect">
@@ -14474,7 +14417,7 @@
           <a:bodyPr wrap="square" lIns="0" tIns="0" rIns="0" bIns="0" rtlCol="0" anchor="t"/>
           <a:lstStyle/>
           <a:p>
-            <a:pPr indent="0" marL="0">
+            <a:pPr marL="0" indent="0">
               <a:buNone/>
             </a:pPr>
             <a:r>
@@ -14483,7 +14426,7 @@
                   <a:schemeClr val="tx2"/>
                 </a:solidFill>
               </a:rPr>
-              <a:t>Valuation and execution</a:t>
+              <a:t>Data Science </a:t>
             </a:r>
             <a:endParaRPr lang="en-US" sz="1300" dirty="0"/>
           </a:p>
@@ -14491,13 +14434,13 @@
       </p:sp>
       <p:sp>
         <p:nvSpPr>
-          <p:cNvPr id="19" name="Text 16"/>
+          <p:cNvPr id="23" name="Text 20"/>
           <p:cNvSpPr txBox="1"/>
           <p:nvPr/>
         </p:nvSpPr>
         <p:spPr>
           <a:xfrm>
-            <a:off x="5897880" y="3310128"/>
+            <a:off x="5897880" y="3652042"/>
             <a:ext cx="5760720" cy="713232"/>
           </a:xfrm>
           <a:prstGeom prst="rect">
@@ -14510,7 +14453,7 @@
           <a:bodyPr wrap="square" lIns="0" tIns="0" rIns="0" bIns="0" rtlCol="0" anchor="t"/>
           <a:lstStyle/>
           <a:p>
-            <a:pPr indent="0" marL="0">
+            <a:pPr marL="0" indent="0">
               <a:buNone/>
             </a:pPr>
             <a:r>
@@ -14519,7 +14462,44 @@
                   <a:schemeClr val="tx1"/>
                 </a:solidFill>
               </a:rPr>
-              <a:t>A machine-learning mark-to-market for private holdings, systematic and reproducible; and an AI-driven order management system on AWS processing about S$30m a day, replacing an email-based workflow.</a:t>
+              <a:t>- 4th of 160+ teams (MIT, DoD, USAF) in the 2023 USAF AI Accelerator, predicting pilot flying difficulty from physiology; </a:t>
+            </a:r>
+          </a:p>
+          <a:p>
+            <a:pPr marL="0" indent="0">
+              <a:buNone/>
+            </a:pPr>
+            <a:r>
+              <a:rPr lang="en-US" sz="1050" dirty="0"/>
+              <a:t>- A</a:t>
+            </a:r>
+            <a:r>
+              <a:rPr lang="en-US" sz="1050" dirty="0">
+                <a:solidFill>
+                  <a:schemeClr val="tx1"/>
+                </a:solidFill>
+              </a:rPr>
+              <a:t>n ammunition recommender (quantile LightGBM) that cut wastage with no shortfall</a:t>
+            </a:r>
+            <a:r>
+              <a:rPr lang="en-US" sz="1050" dirty="0"/>
+              <a:t> -&gt; </a:t>
+            </a:r>
+            <a:r>
+              <a:rPr lang="en-US" sz="1050" dirty="0" err="1">
+                <a:solidFill>
+                  <a:schemeClr val="tx1"/>
+                </a:solidFill>
+              </a:rPr>
+              <a:t>Defence</a:t>
+            </a:r>
+            <a:r>
+              <a:rPr lang="en-US" sz="1050" dirty="0">
+                <a:solidFill>
+                  <a:schemeClr val="tx1"/>
+                </a:solidFill>
+              </a:rPr>
+              <a:t> Manpower Committee Innovation Award 2022.</a:t>
             </a:r>
             <a:endParaRPr lang="en-US" sz="1050" dirty="0"/>
           </a:p>
@@ -14527,13 +14507,13 @@
       </p:sp>
       <p:sp>
         <p:nvSpPr>
-          <p:cNvPr id="20" name="Shape 17"/>
+          <p:cNvPr id="24" name="Shape 21"/>
           <p:cNvSpPr/>
           <p:nvPr/>
         </p:nvSpPr>
         <p:spPr>
           <a:xfrm>
-            <a:off x="5394960" y="4059936"/>
+            <a:off x="5394960" y="4809744"/>
             <a:ext cx="384048" cy="384048"/>
           </a:xfrm>
           <a:prstGeom prst="ellipse">
@@ -14552,13 +14532,13 @@
       </p:sp>
       <p:sp>
         <p:nvSpPr>
-          <p:cNvPr id="21" name="Text 18"/>
+          <p:cNvPr id="25" name="Text 22"/>
           <p:cNvSpPr txBox="1"/>
           <p:nvPr/>
         </p:nvSpPr>
         <p:spPr>
           <a:xfrm>
-            <a:off x="5394960" y="4059936"/>
+            <a:off x="5394960" y="4809744"/>
             <a:ext cx="384048" cy="384048"/>
           </a:xfrm>
           <a:prstGeom prst="rect">
@@ -14571,7 +14551,7 @@
           <a:bodyPr wrap="square" lIns="0" tIns="0" rIns="0" bIns="0" rtlCol="0" anchor="ctr"/>
           <a:lstStyle/>
           <a:p>
-            <a:pPr algn="ctr" indent="0" marL="0">
+            <a:pPr marL="0" indent="0" algn="ctr">
               <a:buNone/>
             </a:pPr>
             <a:r>
@@ -14588,13 +14568,13 @@
       </p:sp>
       <p:sp>
         <p:nvSpPr>
-          <p:cNvPr id="22" name="Text 19"/>
+          <p:cNvPr id="26" name="Text 23"/>
           <p:cNvSpPr txBox="1"/>
           <p:nvPr/>
         </p:nvSpPr>
         <p:spPr>
           <a:xfrm>
-            <a:off x="5897880" y="4014216"/>
+            <a:off x="5897880" y="4764024"/>
             <a:ext cx="5760720" cy="320040"/>
           </a:xfrm>
           <a:prstGeom prst="rect">
@@ -14607,7 +14587,7 @@
           <a:bodyPr wrap="square" lIns="0" tIns="0" rIns="0" bIns="0" rtlCol="0" anchor="t"/>
           <a:lstStyle/>
           <a:p>
-            <a:pPr indent="0" marL="0">
+            <a:pPr marL="0" indent="0">
               <a:buNone/>
             </a:pPr>
             <a:r>
@@ -14616,7 +14596,7 @@
                   <a:schemeClr val="tx2"/>
                 </a:solidFill>
               </a:rPr>
-              <a:t>Forecasting under a scoreboard</a:t>
+              <a:t>COVID-19, 2021</a:t>
             </a:r>
             <a:endParaRPr lang="en-US" sz="1300" dirty="0"/>
           </a:p>
@@ -14624,13 +14604,13 @@
       </p:sp>
       <p:sp>
         <p:nvSpPr>
-          <p:cNvPr id="23" name="Text 20"/>
+          <p:cNvPr id="27" name="Text 24"/>
           <p:cNvSpPr txBox="1"/>
           <p:nvPr/>
         </p:nvSpPr>
         <p:spPr>
           <a:xfrm>
-            <a:off x="5897880" y="4334256"/>
+            <a:off x="5897880" y="5084064"/>
             <a:ext cx="5760720" cy="713232"/>
           </a:xfrm>
           <a:prstGeom prst="rect">
@@ -14643,7 +14623,7 @@
           <a:bodyPr wrap="square" lIns="0" tIns="0" rIns="0" bIns="0" rtlCol="0" anchor="t"/>
           <a:lstStyle/>
           <a:p>
-            <a:pPr indent="0" marL="0">
+            <a:pPr marL="0" indent="0">
               <a:buNone/>
             </a:pPr>
             <a:r>
@@ -14652,7 +14632,7 @@
                   <a:schemeClr val="tx1"/>
                 </a:solidFill>
               </a:rPr>
-              <a:t>4th of 160+ teams (MIT, DoD, USAF) in the 2023 USAF AI Accelerator, predicting pilot flying difficulty from physiology; an ammunition recommender (quantile LightGBM) that cut wastage with no shortfall, Defence Manpower Committee Innovation Award 2022.</a:t>
+              <a:t>Built, in weeks, the system that engaged every home-recovery patient in Singapore, 10,000 people a day, on form.sg, Azure and Zendesk. The lesson that carries over: a system people rely on must say what it knows and what it does not.</a:t>
             </a:r>
             <a:endParaRPr lang="en-US" sz="1050" dirty="0"/>
           </a:p>
@@ -14660,140 +14640,7 @@
       </p:sp>
       <p:sp>
         <p:nvSpPr>
-          <p:cNvPr id="24" name="Shape 21"/>
-          <p:cNvSpPr/>
-          <p:nvPr/>
-        </p:nvSpPr>
-        <p:spPr>
-          <a:xfrm>
-            <a:off x="5394960" y="5084064"/>
-            <a:ext cx="384048" cy="384048"/>
-          </a:xfrm>
-          <a:prstGeom prst="ellipse">
-            <a:avLst/>
-          </a:prstGeom>
-          <a:solidFill>
-            <a:srgbClr val="1E2761"/>
-          </a:solidFill>
-          <a:ln w="12700">
-            <a:solidFill>
-              <a:srgbClr val="1E2761"/>
-            </a:solidFill>
-            <a:prstDash val="solid"/>
-          </a:ln>
-        </p:spPr>
-      </p:sp>
-      <p:sp>
-        <p:nvSpPr>
-          <p:cNvPr id="25" name="Text 22"/>
-          <p:cNvSpPr txBox="1"/>
-          <p:nvPr/>
-        </p:nvSpPr>
-        <p:spPr>
-          <a:xfrm>
-            <a:off x="5394960" y="5084064"/>
-            <a:ext cx="384048" cy="384048"/>
-          </a:xfrm>
-          <a:prstGeom prst="rect">
-            <a:avLst/>
-          </a:prstGeom>
-          <a:noFill/>
-          <a:ln/>
-        </p:spPr>
-        <p:txBody>
-          <a:bodyPr wrap="square" lIns="0" tIns="0" rIns="0" bIns="0" rtlCol="0" anchor="ctr"/>
-          <a:lstStyle/>
-          <a:p>
-            <a:pPr algn="ctr" indent="0" marL="0">
-              <a:buNone/>
-            </a:pPr>
-            <a:r>
-              <a:rPr lang="en-US" sz="1400" b="1" dirty="0">
-                <a:solidFill>
-                  <a:schemeClr val="bg1"/>
-                </a:solidFill>
-              </a:rPr>
-              <a:t>4</a:t>
-            </a:r>
-            <a:endParaRPr lang="en-US" sz="1400" dirty="0"/>
-          </a:p>
-        </p:txBody>
-      </p:sp>
-      <p:sp>
-        <p:nvSpPr>
-          <p:cNvPr id="26" name="Text 23"/>
-          <p:cNvSpPr txBox="1"/>
-          <p:nvPr/>
-        </p:nvSpPr>
-        <p:spPr>
-          <a:xfrm>
-            <a:off x="5897880" y="5038344"/>
-            <a:ext cx="5760720" cy="320040"/>
-          </a:xfrm>
-          <a:prstGeom prst="rect">
-            <a:avLst/>
-          </a:prstGeom>
-          <a:noFill/>
-          <a:ln/>
-        </p:spPr>
-        <p:txBody>
-          <a:bodyPr wrap="square" lIns="0" tIns="0" rIns="0" bIns="0" rtlCol="0" anchor="t"/>
-          <a:lstStyle/>
-          <a:p>
-            <a:pPr indent="0" marL="0">
-              <a:buNone/>
-            </a:pPr>
-            <a:r>
-              <a:rPr lang="en-US" sz="1300" b="1" dirty="0">
-                <a:solidFill>
-                  <a:schemeClr val="tx2"/>
-                </a:solidFill>
-              </a:rPr>
-              <a:t>COVID-19, 2021</a:t>
-            </a:r>
-            <a:endParaRPr lang="en-US" sz="1300" dirty="0"/>
-          </a:p>
-        </p:txBody>
-      </p:sp>
-      <p:sp>
-        <p:nvSpPr>
-          <p:cNvPr id="27" name="Text 24"/>
-          <p:cNvSpPr txBox="1"/>
-          <p:nvPr/>
-        </p:nvSpPr>
-        <p:spPr>
-          <a:xfrm>
-            <a:off x="5897880" y="5358384"/>
-            <a:ext cx="5760720" cy="713232"/>
-          </a:xfrm>
-          <a:prstGeom prst="rect">
-            <a:avLst/>
-          </a:prstGeom>
-          <a:noFill/>
-          <a:ln/>
-        </p:spPr>
-        <p:txBody>
-          <a:bodyPr wrap="square" lIns="0" tIns="0" rIns="0" bIns="0" rtlCol="0" anchor="t"/>
-          <a:lstStyle/>
-          <a:p>
-            <a:pPr indent="0" marL="0">
-              <a:buNone/>
-            </a:pPr>
-            <a:r>
-              <a:rPr lang="en-US" sz="1050" dirty="0">
-                <a:solidFill>
-                  <a:schemeClr val="tx1"/>
-                </a:solidFill>
-              </a:rPr>
-              <a:t>Built, in weeks, the system that engaged every home-recovery patient in Singapore, 10,000 people a day, on form.sg, Azure and Zendesk. The lesson that carries over: a system people rely on must say what it knows and what it does not.</a:t>
-            </a:r>
-            <a:endParaRPr lang="en-US" sz="1050" dirty="0"/>
-          </a:p>
-        </p:txBody>
-      </p:sp>
-      <p:sp>
-        <p:nvSpPr>
-          <p:cNvPr id="25" name="Slide Number Placeholder 0"/>
+          <p:cNvPr id="3" name="Slide Number Placeholder 0"/>
           <p:cNvSpPr>
             <a:spLocks noGrp="1"/>
           </p:cNvSpPr>
@@ -14811,7 +14658,7 @@
           </a:prstGeom>
           <a:extLst>
             <a:ext uri="{C572A759-6A51-4108-AA02-DFA0A04FC94B}">
-              <ma14:wrappingTextBoxFlag xmlns:ma14="http://schemas.microsoft.com/office/mac/drawingml/2011/main" val="0"/>
+              <ma14:wrappingTextBoxFlag xmlns:ma14="http://schemas.microsoft.com/office/mac/drawingml/2011/main" xmlns="" val="0"/>
             </a:ext>
           </a:extLst>
         </p:spPr>
@@ -14829,14 +14676,53 @@
           <a:p>
             <a:pPr algn="r"/>
             <a:fld id="{F7021451-1387-4CA6-816F-3879F97B5CBC}" type="slidenum">
-              <a:rPr b="0" lang="en-US"/>
+              <a:rPr lang="en-US" b="0"/>
               <a:t>2</a:t>
             </a:fld>
             <a:endParaRPr lang="en-US"/>
           </a:p>
         </p:txBody>
       </p:sp>
+      <p:pic>
+        <p:nvPicPr>
+          <p:cNvPr id="28" name="Picture 27">
+            <a:extLst>
+              <a:ext uri="{FF2B5EF4-FFF2-40B4-BE49-F238E27FC236}">
+                <a16:creationId xmlns:a16="http://schemas.microsoft.com/office/drawing/2014/main" id="{4CEC26B7-4B44-7817-CE81-1D48CC958ABA}"/>
+              </a:ext>
+            </a:extLst>
+          </p:cNvPr>
+          <p:cNvPicPr>
+            <a:picLocks noChangeAspect="1"/>
+          </p:cNvPicPr>
+          <p:nvPr/>
+        </p:nvPicPr>
+        <p:blipFill>
+          <a:blip r:embed="rId3"/>
+          <a:stretch>
+            <a:fillRect/>
+          </a:stretch>
+        </p:blipFill>
+        <p:spPr>
+          <a:xfrm>
+            <a:off x="10339174" y="536044"/>
+            <a:ext cx="1232199" cy="1232199"/>
+          </a:xfrm>
+          <a:prstGeom prst="ellipse">
+            <a:avLst/>
+          </a:prstGeom>
+          <a:ln w="63500" cap="rnd">
+            <a:noFill/>
+          </a:ln>
+          <a:effectLst/>
+        </p:spPr>
+      </p:pic>
     </p:spTree>
+    <p:extLst>
+      <p:ext uri="{BB962C8B-B14F-4D97-AF65-F5344CB8AC3E}">
+        <p14:creationId xmlns:p14="http://schemas.microsoft.com/office/powerpoint/2010/main" val="1191207065"/>
+      </p:ext>
+    </p:extLst>
   </p:cSld>
   <p:clrMapOvr>
     <a:masterClrMapping/>
@@ -14864,9 +14750,11 @@
       <p:sp>
         <p:nvSpPr>
           <p:cNvPr id="2" name="Text 0"/>
-          <p:cNvSpPr/>
+          <p:cNvSpPr>
+            <a:spLocks noGrp="1"/>
+          </p:cNvSpPr>
           <p:nvPr>
-            <p:ph idx="100" type="title" hasCustomPrompt="1"/>
+            <p:ph type="title" idx="100" hasCustomPrompt="1"/>
           </p:nvPr>
         </p:nvSpPr>
         <p:spPr>
@@ -14884,7 +14772,7 @@
           <a:bodyPr wrap="square" lIns="0" tIns="0" rIns="0" bIns="0" rtlCol="0" anchor="ctr"/>
           <a:lstStyle/>
           <a:p>
-            <a:pPr algn="l" indent="0" marL="0">
+            <a:pPr marL="0" indent="0" algn="l">
               <a:buNone/>
             </a:pPr>
             <a:r>
@@ -14968,7 +14856,7 @@
           <a:bodyPr wrap="square" lIns="0" tIns="0" rIns="0" bIns="0" rtlCol="0" anchor="t"/>
           <a:lstStyle/>
           <a:p>
-            <a:pPr algn="ctr" indent="0" marL="0">
+            <a:pPr marL="0" indent="0" algn="ctr">
               <a:buNone/>
             </a:pPr>
             <a:r>
@@ -15004,7 +14892,7 @@
           <a:bodyPr wrap="square" lIns="0" tIns="0" rIns="0" bIns="0" rtlCol="0" anchor="t"/>
           <a:lstStyle/>
           <a:p>
-            <a:pPr algn="ctr" indent="0" marL="0">
+            <a:pPr marL="0" indent="0" algn="ctr">
               <a:buNone/>
             </a:pPr>
             <a:r>
@@ -15040,7 +14928,7 @@
           <a:bodyPr wrap="square" lIns="0" tIns="0" rIns="0" bIns="0" rtlCol="0" anchor="t"/>
           <a:lstStyle/>
           <a:p>
-            <a:pPr algn="ctr" indent="0" marL="0">
+            <a:pPr marL="0" indent="0" algn="ctr">
               <a:buNone/>
             </a:pPr>
             <a:r>
@@ -15101,7 +14989,7 @@
           <a:bodyPr wrap="square" lIns="0" tIns="0" rIns="0" bIns="0" rtlCol="0" anchor="t"/>
           <a:lstStyle/>
           <a:p>
-            <a:pPr algn="ctr" indent="0" marL="0">
+            <a:pPr marL="0" indent="0" algn="ctr">
               <a:buNone/>
             </a:pPr>
             <a:r>
@@ -15137,7 +15025,7 @@
           <a:bodyPr wrap="square" lIns="0" tIns="0" rIns="0" bIns="0" rtlCol="0" anchor="t"/>
           <a:lstStyle/>
           <a:p>
-            <a:pPr algn="ctr" indent="0" marL="0">
+            <a:pPr marL="0" indent="0" algn="ctr">
               <a:buNone/>
             </a:pPr>
             <a:r>
@@ -15173,7 +15061,7 @@
           <a:bodyPr wrap="square" lIns="0" tIns="0" rIns="0" bIns="0" rtlCol="0" anchor="t"/>
           <a:lstStyle/>
           <a:p>
-            <a:pPr algn="ctr" indent="0" marL="0">
+            <a:pPr marL="0" indent="0" algn="ctr">
               <a:buNone/>
             </a:pPr>
             <a:r>
@@ -15234,7 +15122,7 @@
           <a:bodyPr wrap="square" lIns="0" tIns="0" rIns="0" bIns="0" rtlCol="0" anchor="t"/>
           <a:lstStyle/>
           <a:p>
-            <a:pPr algn="ctr" indent="0" marL="0">
+            <a:pPr marL="0" indent="0" algn="ctr">
               <a:buNone/>
             </a:pPr>
             <a:r>
@@ -15270,7 +15158,7 @@
           <a:bodyPr wrap="square" lIns="0" tIns="0" rIns="0" bIns="0" rtlCol="0" anchor="t"/>
           <a:lstStyle/>
           <a:p>
-            <a:pPr algn="ctr" indent="0" marL="0">
+            <a:pPr marL="0" indent="0" algn="ctr">
               <a:buNone/>
             </a:pPr>
             <a:r>
@@ -15306,7 +15194,7 @@
           <a:bodyPr wrap="square" lIns="0" tIns="0" rIns="0" bIns="0" rtlCol="0" anchor="t"/>
           <a:lstStyle/>
           <a:p>
-            <a:pPr algn="ctr" indent="0" marL="0">
+            <a:pPr marL="0" indent="0" algn="ctr">
               <a:buNone/>
             </a:pPr>
             <a:r>
@@ -15367,7 +15255,7 @@
           <a:bodyPr wrap="square" lIns="0" tIns="0" rIns="0" bIns="0" rtlCol="0" anchor="t"/>
           <a:lstStyle/>
           <a:p>
-            <a:pPr algn="ctr" indent="0" marL="0">
+            <a:pPr marL="0" indent="0" algn="ctr">
               <a:buNone/>
             </a:pPr>
             <a:r>
@@ -15403,7 +15291,7 @@
           <a:bodyPr wrap="square" lIns="0" tIns="0" rIns="0" bIns="0" rtlCol="0" anchor="t"/>
           <a:lstStyle/>
           <a:p>
-            <a:pPr algn="ctr" indent="0" marL="0">
+            <a:pPr marL="0" indent="0" algn="ctr">
               <a:buNone/>
             </a:pPr>
             <a:r>
@@ -15439,7 +15327,7 @@
           <a:bodyPr wrap="square" lIns="0" tIns="0" rIns="0" bIns="0" rtlCol="0" anchor="t"/>
           <a:lstStyle/>
           <a:p>
-            <a:pPr algn="ctr" indent="0" marL="0">
+            <a:pPr marL="0" indent="0" algn="ctr">
               <a:buNone/>
             </a:pPr>
             <a:r>
@@ -15500,7 +15388,7 @@
           <a:bodyPr wrap="square" lIns="0" tIns="0" rIns="0" bIns="0" rtlCol="0" anchor="t"/>
           <a:lstStyle/>
           <a:p>
-            <a:pPr algn="ctr" indent="0" marL="0">
+            <a:pPr marL="0" indent="0" algn="ctr">
               <a:buNone/>
             </a:pPr>
             <a:r>
@@ -15536,7 +15424,7 @@
           <a:bodyPr wrap="square" lIns="0" tIns="0" rIns="0" bIns="0" rtlCol="0" anchor="t"/>
           <a:lstStyle/>
           <a:p>
-            <a:pPr algn="ctr" indent="0" marL="0">
+            <a:pPr marL="0" indent="0" algn="ctr">
               <a:buNone/>
             </a:pPr>
             <a:r>
@@ -15572,7 +15460,7 @@
           <a:bodyPr wrap="square" lIns="0" tIns="0" rIns="0" bIns="0" rtlCol="0" anchor="t"/>
           <a:lstStyle/>
           <a:p>
-            <a:pPr algn="ctr" indent="0" marL="0">
+            <a:pPr marL="0" indent="0" algn="ctr">
               <a:buNone/>
             </a:pPr>
             <a:r>
@@ -15633,7 +15521,7 @@
           <a:bodyPr wrap="square" lIns="0" tIns="0" rIns="0" bIns="0" rtlCol="0" anchor="t"/>
           <a:lstStyle/>
           <a:p>
-            <a:pPr algn="ctr" indent="0" marL="0">
+            <a:pPr marL="0" indent="0" algn="ctr">
               <a:buNone/>
             </a:pPr>
             <a:r>
@@ -15669,7 +15557,7 @@
           <a:bodyPr wrap="square" lIns="0" tIns="0" rIns="0" bIns="0" rtlCol="0" anchor="t"/>
           <a:lstStyle/>
           <a:p>
-            <a:pPr algn="ctr" indent="0" marL="0">
+            <a:pPr marL="0" indent="0" algn="ctr">
               <a:buNone/>
             </a:pPr>
             <a:r>
@@ -15705,7 +15593,7 @@
           <a:bodyPr wrap="square" lIns="0" tIns="0" rIns="0" bIns="0" rtlCol="0" anchor="t"/>
           <a:lstStyle/>
           <a:p>
-            <a:pPr algn="ctr" indent="0" marL="0">
+            <a:pPr marL="0" indent="0" algn="ctr">
               <a:buNone/>
             </a:pPr>
             <a:r>
@@ -15741,7 +15629,7 @@
           <a:bodyPr wrap="square" lIns="0" tIns="0" rIns="0" bIns="0" rtlCol="0" anchor="t"/>
           <a:lstStyle/>
           <a:p>
-            <a:pPr indent="0" marL="0">
+            <a:pPr marL="0" indent="0">
               <a:buNone/>
             </a:pPr>
             <a:r>
@@ -15780,7 +15668,7 @@
           <a:bodyPr wrap="square" lIns="0" tIns="0" rIns="0" bIns="0" rtlCol="0" anchor="t"/>
           <a:lstStyle/>
           <a:p>
-            <a:pPr indent="0" marL="0">
+            <a:pPr marL="0" indent="0">
               <a:buNone/>
             </a:pPr>
             <a:r>
@@ -15816,7 +15704,7 @@
           <a:bodyPr wrap="square" lIns="0" tIns="0" rIns="0" bIns="0" rtlCol="0" anchor="t"/>
           <a:lstStyle/>
           <a:p>
-            <a:pPr indent="0" marL="0">
+            <a:pPr marL="0" indent="0">
               <a:buNone/>
             </a:pPr>
             <a:r>
@@ -15855,7 +15743,7 @@
           <a:bodyPr wrap="square" lIns="0" tIns="0" rIns="0" bIns="0" rtlCol="0" anchor="t"/>
           <a:lstStyle/>
           <a:p>
-            <a:pPr indent="0" marL="0">
+            <a:pPr marL="0" indent="0">
               <a:buNone/>
             </a:pPr>
             <a:r>
@@ -15891,7 +15779,7 @@
           <a:bodyPr wrap="square" lIns="0" tIns="0" rIns="0" bIns="0" rtlCol="0" anchor="t"/>
           <a:lstStyle/>
           <a:p>
-            <a:pPr indent="0" marL="0">
+            <a:pPr marL="0" indent="0">
               <a:buNone/>
             </a:pPr>
             <a:r>
@@ -15930,7 +15818,7 @@
           <a:bodyPr wrap="square" lIns="0" tIns="0" rIns="0" bIns="0" rtlCol="0" anchor="t"/>
           <a:lstStyle/>
           <a:p>
-            <a:pPr indent="0" marL="0">
+            <a:pPr marL="0" indent="0">
               <a:buNone/>
             </a:pPr>
             <a:r>
@@ -15966,7 +15854,7 @@
           <a:bodyPr wrap="square" lIns="0" tIns="0" rIns="0" bIns="0" rtlCol="0" anchor="t"/>
           <a:lstStyle/>
           <a:p>
-            <a:pPr indent="0" marL="0">
+            <a:pPr marL="0" indent="0">
               <a:buNone/>
             </a:pPr>
             <a:r>
@@ -16005,7 +15893,7 @@
           <a:bodyPr wrap="square" lIns="0" tIns="0" rIns="0" bIns="0" rtlCol="0" anchor="t"/>
           <a:lstStyle/>
           <a:p>
-            <a:pPr indent="0" marL="0">
+            <a:pPr marL="0" indent="0">
               <a:buNone/>
             </a:pPr>
             <a:r>
@@ -16022,7 +15910,7 @@
       </p:sp>
       <p:sp>
         <p:nvSpPr>
-          <p:cNvPr id="25" name="Slide Number Placeholder 0"/>
+          <p:cNvPr id="3" name="Slide Number Placeholder 0"/>
           <p:cNvSpPr>
             <a:spLocks noGrp="1"/>
           </p:cNvSpPr>
@@ -16040,7 +15928,7 @@
           </a:prstGeom>
           <a:extLst>
             <a:ext uri="{C572A759-6A51-4108-AA02-DFA0A04FC94B}">
-              <ma14:wrappingTextBoxFlag xmlns:ma14="http://schemas.microsoft.com/office/mac/drawingml/2011/main" val="0"/>
+              <ma14:wrappingTextBoxFlag xmlns:ma14="http://schemas.microsoft.com/office/mac/drawingml/2011/main" xmlns="" val="0"/>
             </a:ext>
           </a:extLst>
         </p:spPr>
@@ -16058,7 +15946,7 @@
           <a:p>
             <a:pPr algn="r"/>
             <a:fld id="{F7021451-1387-4CA6-816F-3879F97B5CBC}" type="slidenum">
-              <a:rPr b="0" lang="en-US"/>
+              <a:rPr lang="en-US" b="0"/>
               <a:t>20</a:t>
             </a:fld>
             <a:endParaRPr lang="en-US"/>
@@ -16093,9 +15981,11 @@
       <p:sp>
         <p:nvSpPr>
           <p:cNvPr id="2" name="Text 0"/>
-          <p:cNvSpPr/>
+          <p:cNvSpPr>
+            <a:spLocks noGrp="1"/>
+          </p:cNvSpPr>
           <p:nvPr>
-            <p:ph idx="100" type="title" hasCustomPrompt="1"/>
+            <p:ph type="title" idx="100" hasCustomPrompt="1"/>
           </p:nvPr>
         </p:nvSpPr>
         <p:spPr>
@@ -16113,7 +16003,7 @@
           <a:bodyPr wrap="square" lIns="0" tIns="0" rIns="0" bIns="0" rtlCol="0" anchor="ctr"/>
           <a:lstStyle/>
           <a:p>
-            <a:pPr algn="l" indent="0" marL="0">
+            <a:pPr marL="0" indent="0" algn="l">
               <a:buNone/>
             </a:pPr>
             <a:r>
@@ -16176,7 +16066,7 @@
           <a:bodyPr wrap="square" lIns="0" tIns="0" rIns="0" bIns="0" rtlCol="0" anchor="ctr"/>
           <a:lstStyle/>
           <a:p>
-            <a:pPr algn="ctr" indent="0" marL="0">
+            <a:pPr marL="0" indent="0" algn="ctr">
               <a:buNone/>
             </a:pPr>
             <a:r>
@@ -16239,7 +16129,7 @@
           <a:bodyPr wrap="square" lIns="0" tIns="0" rIns="0" bIns="0" rtlCol="0" anchor="ctr"/>
           <a:lstStyle/>
           <a:p>
-            <a:pPr indent="0" marL="0">
+            <a:pPr marL="0" indent="0">
               <a:buNone/>
             </a:pPr>
             <a:r>
@@ -16360,7 +16250,7 @@
           <a:bodyPr wrap="square" lIns="0" tIns="0" rIns="0" bIns="0" rtlCol="0" anchor="ctr"/>
           <a:lstStyle/>
           <a:p>
-            <a:pPr indent="0" marL="0">
+            <a:pPr marL="0" indent="0">
               <a:buNone/>
             </a:pPr>
             <a:r>
@@ -16481,7 +16371,7 @@
           <a:bodyPr wrap="square" lIns="0" tIns="0" rIns="0" bIns="0" rtlCol="0" anchor="ctr"/>
           <a:lstStyle/>
           <a:p>
-            <a:pPr indent="0" marL="0">
+            <a:pPr marL="0" indent="0">
               <a:buNone/>
             </a:pPr>
             <a:r>
@@ -16582,9 +16472,11 @@
       <p:sp>
         <p:nvSpPr>
           <p:cNvPr id="2" name="Text 0"/>
-          <p:cNvSpPr/>
+          <p:cNvSpPr>
+            <a:spLocks noGrp="1"/>
+          </p:cNvSpPr>
           <p:nvPr>
-            <p:ph idx="100" type="title" hasCustomPrompt="1"/>
+            <p:ph type="title" idx="100" hasCustomPrompt="1"/>
           </p:nvPr>
         </p:nvSpPr>
         <p:spPr>
@@ -16602,7 +16494,7 @@
           <a:bodyPr wrap="square" lIns="0" tIns="0" rIns="0" bIns="0" rtlCol="0" anchor="ctr"/>
           <a:lstStyle/>
           <a:p>
-            <a:pPr algn="l" indent="0" marL="0">
+            <a:pPr marL="0" indent="0" algn="l">
               <a:buNone/>
             </a:pPr>
             <a:r>
@@ -16643,7 +16535,7 @@
             <a:prstDash val="solid"/>
           </a:ln>
           <a:effectLst>
-            <a:outerShdw sx="100000" sy="100000" kx="0" ky="0" algn="bl" rotWithShape="0" blurRad="50800" dist="12700" dir="5400000">
+            <a:outerShdw blurRad="50800" dist="12700" dir="5400000" algn="bl" rotWithShape="0">
               <a:srgbClr val="000000">
                 <a:alpha val="8000"/>
               </a:srgbClr>
@@ -16672,7 +16564,7 @@
           <a:bodyPr wrap="square" lIns="0" tIns="0" rIns="0" bIns="0" rtlCol="0" anchor="t"/>
           <a:lstStyle/>
           <a:p>
-            <a:pPr indent="0" marL="0">
+            <a:pPr marL="0" indent="0">
               <a:buNone/>
             </a:pPr>
             <a:r>
@@ -16708,7 +16600,7 @@
           <a:bodyPr wrap="square" lIns="0" tIns="0" rIns="0" bIns="0" rtlCol="0" anchor="t"/>
           <a:lstStyle/>
           <a:p>
-            <a:pPr indent="0" marL="0">
+            <a:pPr marL="0" indent="0">
               <a:buNone/>
             </a:pPr>
             <a:r>
@@ -16749,7 +16641,7 @@
             <a:prstDash val="solid"/>
           </a:ln>
           <a:effectLst>
-            <a:outerShdw sx="100000" sy="100000" kx="0" ky="0" algn="bl" rotWithShape="0" blurRad="50800" dist="12700" dir="5400000">
+            <a:outerShdw blurRad="50800" dist="12700" dir="5400000" algn="bl" rotWithShape="0">
               <a:srgbClr val="000000">
                 <a:alpha val="8000"/>
               </a:srgbClr>
@@ -16778,7 +16670,7 @@
           <a:bodyPr wrap="square" lIns="0" tIns="0" rIns="0" bIns="0" rtlCol="0" anchor="t"/>
           <a:lstStyle/>
           <a:p>
-            <a:pPr indent="0" marL="0">
+            <a:pPr marL="0" indent="0">
               <a:buNone/>
             </a:pPr>
             <a:r>
@@ -16814,7 +16706,7 @@
           <a:bodyPr wrap="square" lIns="0" tIns="0" rIns="0" bIns="0" rtlCol="0" anchor="t"/>
           <a:lstStyle/>
           <a:p>
-            <a:pPr indent="0" marL="0">
+            <a:pPr marL="0" indent="0">
               <a:buNone/>
             </a:pPr>
             <a:r>
@@ -16855,7 +16747,7 @@
             <a:prstDash val="solid"/>
           </a:ln>
           <a:effectLst>
-            <a:outerShdw sx="100000" sy="100000" kx="0" ky="0" algn="bl" rotWithShape="0" blurRad="50800" dist="12700" dir="5400000">
+            <a:outerShdw blurRad="50800" dist="12700" dir="5400000" algn="bl" rotWithShape="0">
               <a:srgbClr val="000000">
                 <a:alpha val="8000"/>
               </a:srgbClr>
@@ -16884,7 +16776,7 @@
           <a:bodyPr wrap="square" lIns="0" tIns="0" rIns="0" bIns="0" rtlCol="0" anchor="t"/>
           <a:lstStyle/>
           <a:p>
-            <a:pPr indent="0" marL="0">
+            <a:pPr marL="0" indent="0">
               <a:buNone/>
             </a:pPr>
             <a:r>
@@ -16920,7 +16812,7 @@
           <a:bodyPr wrap="square" lIns="0" tIns="0" rIns="0" bIns="0" rtlCol="0" anchor="t"/>
           <a:lstStyle/>
           <a:p>
-            <a:pPr indent="0" marL="0">
+            <a:pPr marL="0" indent="0">
               <a:buNone/>
             </a:pPr>
             <a:r>
@@ -16961,7 +16853,7 @@
             <a:prstDash val="solid"/>
           </a:ln>
           <a:effectLst>
-            <a:outerShdw sx="100000" sy="100000" kx="0" ky="0" algn="bl" rotWithShape="0" blurRad="50800" dist="12700" dir="5400000">
+            <a:outerShdw blurRad="50800" dist="12700" dir="5400000" algn="bl" rotWithShape="0">
               <a:srgbClr val="000000">
                 <a:alpha val="8000"/>
               </a:srgbClr>
@@ -16990,7 +16882,7 @@
           <a:bodyPr wrap="square" lIns="0" tIns="0" rIns="0" bIns="0" rtlCol="0" anchor="t"/>
           <a:lstStyle/>
           <a:p>
-            <a:pPr indent="0" marL="0">
+            <a:pPr marL="0" indent="0">
               <a:buNone/>
             </a:pPr>
             <a:r>
@@ -17026,7 +16918,7 @@
           <a:bodyPr wrap="square" lIns="0" tIns="0" rIns="0" bIns="0" rtlCol="0" anchor="t"/>
           <a:lstStyle/>
           <a:p>
-            <a:pPr indent="0" marL="0">
+            <a:pPr marL="0" indent="0">
               <a:buNone/>
             </a:pPr>
             <a:r>
@@ -17067,7 +16959,7 @@
             <a:prstDash val="solid"/>
           </a:ln>
           <a:effectLst>
-            <a:outerShdw sx="100000" sy="100000" kx="0" ky="0" algn="bl" rotWithShape="0" blurRad="50800" dist="12700" dir="5400000">
+            <a:outerShdw blurRad="50800" dist="12700" dir="5400000" algn="bl" rotWithShape="0">
               <a:srgbClr val="000000">
                 <a:alpha val="8000"/>
               </a:srgbClr>
@@ -17096,7 +16988,7 @@
           <a:bodyPr wrap="square" lIns="0" tIns="0" rIns="0" bIns="0" rtlCol="0" anchor="t"/>
           <a:lstStyle/>
           <a:p>
-            <a:pPr indent="0" marL="0">
+            <a:pPr marL="0" indent="0">
               <a:buNone/>
             </a:pPr>
             <a:r>
@@ -17132,7 +17024,7 @@
           <a:bodyPr wrap="square" lIns="0" tIns="0" rIns="0" bIns="0" rtlCol="0" anchor="t"/>
           <a:lstStyle/>
           <a:p>
-            <a:pPr indent="0" marL="0">
+            <a:pPr marL="0" indent="0">
               <a:buNone/>
             </a:pPr>
             <a:r>
@@ -17173,7 +17065,7 @@
             <a:prstDash val="solid"/>
           </a:ln>
           <a:effectLst>
-            <a:outerShdw sx="100000" sy="100000" kx="0" ky="0" algn="bl" rotWithShape="0" blurRad="50800" dist="12700" dir="5400000">
+            <a:outerShdw blurRad="50800" dist="12700" dir="5400000" algn="bl" rotWithShape="0">
               <a:srgbClr val="000000">
                 <a:alpha val="8000"/>
               </a:srgbClr>
@@ -17202,7 +17094,7 @@
           <a:bodyPr wrap="square" lIns="0" tIns="0" rIns="0" bIns="0" rtlCol="0" anchor="t"/>
           <a:lstStyle/>
           <a:p>
-            <a:pPr indent="0" marL="0">
+            <a:pPr marL="0" indent="0">
               <a:buNone/>
             </a:pPr>
             <a:r>
@@ -17238,7 +17130,7 @@
           <a:bodyPr wrap="square" lIns="0" tIns="0" rIns="0" bIns="0" rtlCol="0" anchor="t"/>
           <a:lstStyle/>
           <a:p>
-            <a:pPr indent="0" marL="0">
+            <a:pPr marL="0" indent="0">
               <a:buNone/>
             </a:pPr>
             <a:r>
@@ -17273,7 +17165,7 @@
           </a:prstGeom>
           <a:extLst>
             <a:ext uri="{C572A759-6A51-4108-AA02-DFA0A04FC94B}">
-              <ma14:wrappingTextBoxFlag xmlns:ma14="http://schemas.microsoft.com/office/mac/drawingml/2011/main" val="0"/>
+              <ma14:wrappingTextBoxFlag xmlns:ma14="http://schemas.microsoft.com/office/mac/drawingml/2011/main" xmlns="" val="0"/>
             </a:ext>
           </a:extLst>
         </p:spPr>
@@ -17291,7 +17183,7 @@
           <a:p>
             <a:pPr algn="r"/>
             <a:fld id="{F7021451-1387-4CA6-816F-3879F97B5CBC}" type="slidenum">
-              <a:rPr b="0" lang="en-US"/>
+              <a:rPr lang="en-US" b="0"/>
               <a:t>22</a:t>
             </a:fld>
             <a:endParaRPr lang="en-US"/>
@@ -17326,9 +17218,11 @@
       <p:sp>
         <p:nvSpPr>
           <p:cNvPr id="2" name="Text 0"/>
-          <p:cNvSpPr/>
+          <p:cNvSpPr>
+            <a:spLocks noGrp="1"/>
+          </p:cNvSpPr>
           <p:nvPr>
-            <p:ph idx="100" type="title" hasCustomPrompt="1"/>
+            <p:ph type="title" idx="100" hasCustomPrompt="1"/>
           </p:nvPr>
         </p:nvSpPr>
         <p:spPr>
@@ -17346,7 +17240,7 @@
           <a:bodyPr wrap="square" lIns="0" tIns="0" rIns="0" bIns="0" rtlCol="0" anchor="ctr"/>
           <a:lstStyle/>
           <a:p>
-            <a:pPr algn="l" indent="0" marL="0">
+            <a:pPr marL="0" indent="0" algn="l">
               <a:buNone/>
             </a:pPr>
             <a:r>
@@ -17407,7 +17301,7 @@
           <a:bodyPr wrap="square" lIns="0" tIns="0" rIns="0" bIns="0" rtlCol="0" anchor="ctr"/>
           <a:lstStyle/>
           <a:p>
-            <a:pPr algn="ctr" indent="0" marL="0">
+            <a:pPr marL="0" indent="0" algn="ctr">
               <a:buNone/>
             </a:pPr>
             <a:r>
@@ -17443,7 +17337,7 @@
           <a:bodyPr wrap="square" lIns="0" tIns="0" rIns="0" bIns="0" rtlCol="0" anchor="ctr"/>
           <a:lstStyle/>
           <a:p>
-            <a:pPr indent="0" marL="0">
+            <a:pPr marL="0" indent="0">
               <a:buNone/>
             </a:pPr>
             <a:r>
@@ -17479,7 +17373,7 @@
           <a:bodyPr wrap="square" lIns="0" tIns="0" rIns="0" bIns="0" rtlCol="0" anchor="t"/>
           <a:lstStyle/>
           <a:p>
-            <a:pPr indent="0" marL="0">
+            <a:pPr marL="0" indent="0">
               <a:buNone/>
             </a:pPr>
             <a:r>
@@ -17540,7 +17434,7 @@
           <a:bodyPr wrap="square" lIns="0" tIns="0" rIns="0" bIns="0" rtlCol="0" anchor="ctr"/>
           <a:lstStyle/>
           <a:p>
-            <a:pPr algn="ctr" indent="0" marL="0">
+            <a:pPr marL="0" indent="0" algn="ctr">
               <a:buNone/>
             </a:pPr>
             <a:r>
@@ -17576,7 +17470,7 @@
           <a:bodyPr wrap="square" lIns="0" tIns="0" rIns="0" bIns="0" rtlCol="0" anchor="ctr"/>
           <a:lstStyle/>
           <a:p>
-            <a:pPr indent="0" marL="0">
+            <a:pPr marL="0" indent="0">
               <a:buNone/>
             </a:pPr>
             <a:r>
@@ -17612,7 +17506,7 @@
           <a:bodyPr wrap="square" lIns="0" tIns="0" rIns="0" bIns="0" rtlCol="0" anchor="t"/>
           <a:lstStyle/>
           <a:p>
-            <a:pPr indent="0" marL="0">
+            <a:pPr marL="0" indent="0">
               <a:buNone/>
             </a:pPr>
             <a:r>
@@ -17673,7 +17567,7 @@
           <a:bodyPr wrap="square" lIns="0" tIns="0" rIns="0" bIns="0" rtlCol="0" anchor="ctr"/>
           <a:lstStyle/>
           <a:p>
-            <a:pPr algn="ctr" indent="0" marL="0">
+            <a:pPr marL="0" indent="0" algn="ctr">
               <a:buNone/>
             </a:pPr>
             <a:r>
@@ -17709,7 +17603,7 @@
           <a:bodyPr wrap="square" lIns="0" tIns="0" rIns="0" bIns="0" rtlCol="0" anchor="ctr"/>
           <a:lstStyle/>
           <a:p>
-            <a:pPr indent="0" marL="0">
+            <a:pPr marL="0" indent="0">
               <a:buNone/>
             </a:pPr>
             <a:r>
@@ -17745,7 +17639,7 @@
           <a:bodyPr wrap="square" lIns="0" tIns="0" rIns="0" bIns="0" rtlCol="0" anchor="t"/>
           <a:lstStyle/>
           <a:p>
-            <a:pPr indent="0" marL="0">
+            <a:pPr marL="0" indent="0">
               <a:buNone/>
             </a:pPr>
             <a:r>
@@ -17806,7 +17700,7 @@
           <a:bodyPr wrap="square" lIns="0" tIns="0" rIns="0" bIns="0" rtlCol="0" anchor="ctr"/>
           <a:lstStyle/>
           <a:p>
-            <a:pPr algn="ctr" indent="0" marL="0">
+            <a:pPr marL="0" indent="0" algn="ctr">
               <a:buNone/>
             </a:pPr>
             <a:r>
@@ -17842,7 +17736,7 @@
           <a:bodyPr wrap="square" lIns="0" tIns="0" rIns="0" bIns="0" rtlCol="0" anchor="ctr"/>
           <a:lstStyle/>
           <a:p>
-            <a:pPr indent="0" marL="0">
+            <a:pPr marL="0" indent="0">
               <a:buNone/>
             </a:pPr>
             <a:r>
@@ -17878,7 +17772,7 @@
           <a:bodyPr wrap="square" lIns="0" tIns="0" rIns="0" bIns="0" rtlCol="0" anchor="t"/>
           <a:lstStyle/>
           <a:p>
-            <a:pPr indent="0" marL="0">
+            <a:pPr marL="0" indent="0">
               <a:buNone/>
             </a:pPr>
             <a:r>
@@ -17939,7 +17833,7 @@
           <a:bodyPr wrap="square" lIns="0" tIns="0" rIns="0" bIns="0" rtlCol="0" anchor="ctr"/>
           <a:lstStyle/>
           <a:p>
-            <a:pPr algn="ctr" indent="0" marL="0">
+            <a:pPr marL="0" indent="0" algn="ctr">
               <a:buNone/>
             </a:pPr>
             <a:r>
@@ -17975,7 +17869,7 @@
           <a:bodyPr wrap="square" lIns="0" tIns="0" rIns="0" bIns="0" rtlCol="0" anchor="ctr"/>
           <a:lstStyle/>
           <a:p>
-            <a:pPr indent="0" marL="0">
+            <a:pPr marL="0" indent="0">
               <a:buNone/>
             </a:pPr>
             <a:r>
@@ -18011,7 +17905,7 @@
           <a:bodyPr wrap="square" lIns="0" tIns="0" rIns="0" bIns="0" rtlCol="0" anchor="t"/>
           <a:lstStyle/>
           <a:p>
-            <a:pPr indent="0" marL="0">
+            <a:pPr marL="0" indent="0">
               <a:buNone/>
             </a:pPr>
             <a:r>
@@ -18072,7 +17966,7 @@
           <a:bodyPr wrap="square" lIns="0" tIns="0" rIns="0" bIns="0" rtlCol="0" anchor="ctr"/>
           <a:lstStyle/>
           <a:p>
-            <a:pPr algn="ctr" indent="0" marL="0">
+            <a:pPr marL="0" indent="0" algn="ctr">
               <a:buNone/>
             </a:pPr>
             <a:r>
@@ -18108,7 +18002,7 @@
           <a:bodyPr wrap="square" lIns="0" tIns="0" rIns="0" bIns="0" rtlCol="0" anchor="ctr"/>
           <a:lstStyle/>
           <a:p>
-            <a:pPr indent="0" marL="0">
+            <a:pPr marL="0" indent="0">
               <a:buNone/>
             </a:pPr>
             <a:r>
@@ -18144,7 +18038,7 @@
           <a:bodyPr wrap="square" lIns="0" tIns="0" rIns="0" bIns="0" rtlCol="0" anchor="t"/>
           <a:lstStyle/>
           <a:p>
-            <a:pPr indent="0" marL="0">
+            <a:pPr marL="0" indent="0">
               <a:buNone/>
             </a:pPr>
             <a:r>
@@ -18161,7 +18055,7 @@
       </p:sp>
       <p:sp>
         <p:nvSpPr>
-          <p:cNvPr id="25" name="Slide Number Placeholder 0"/>
+          <p:cNvPr id="3" name="Slide Number Placeholder 0"/>
           <p:cNvSpPr>
             <a:spLocks noGrp="1"/>
           </p:cNvSpPr>
@@ -18179,7 +18073,7 @@
           </a:prstGeom>
           <a:extLst>
             <a:ext uri="{C572A759-6A51-4108-AA02-DFA0A04FC94B}">
-              <ma14:wrappingTextBoxFlag xmlns:ma14="http://schemas.microsoft.com/office/mac/drawingml/2011/main" val="0"/>
+              <ma14:wrappingTextBoxFlag xmlns:ma14="http://schemas.microsoft.com/office/mac/drawingml/2011/main" xmlns="" val="0"/>
             </a:ext>
           </a:extLst>
         </p:spPr>
@@ -18197,7 +18091,7 @@
           <a:p>
             <a:pPr algn="r"/>
             <a:fld id="{F7021451-1387-4CA6-816F-3879F97B5CBC}" type="slidenum">
-              <a:rPr b="0" lang="en-US"/>
+              <a:rPr lang="en-US" b="0"/>
               <a:t>23</a:t>
             </a:fld>
             <a:endParaRPr lang="en-US"/>
@@ -18232,9 +18126,11 @@
       <p:sp>
         <p:nvSpPr>
           <p:cNvPr id="2" name="Text 0"/>
-          <p:cNvSpPr/>
+          <p:cNvSpPr>
+            <a:spLocks noGrp="1"/>
+          </p:cNvSpPr>
           <p:nvPr>
-            <p:ph idx="100" type="title" hasCustomPrompt="1"/>
+            <p:ph type="title" idx="100" hasCustomPrompt="1"/>
           </p:nvPr>
         </p:nvSpPr>
         <p:spPr>
@@ -18252,7 +18148,7 @@
           <a:bodyPr wrap="square" lIns="0" tIns="0" rIns="0" bIns="0" rtlCol="0" anchor="b"/>
           <a:lstStyle/>
           <a:p>
-            <a:pPr algn="l" indent="0" marL="0">
+            <a:pPr marL="0" indent="0" algn="l">
               <a:buNone/>
             </a:pPr>
             <a:r>
@@ -18270,9 +18166,11 @@
       <p:sp>
         <p:nvSpPr>
           <p:cNvPr id="3" name="Text 0"/>
-          <p:cNvSpPr/>
+          <p:cNvSpPr>
+            <a:spLocks noGrp="1"/>
+          </p:cNvSpPr>
           <p:nvPr>
-            <p:ph idx="101" type="body" hasCustomPrompt="1"/>
+            <p:ph type="body" idx="101" hasCustomPrompt="1"/>
           </p:nvPr>
         </p:nvSpPr>
         <p:spPr>
@@ -18290,7 +18188,7 @@
           <a:bodyPr wrap="square" lIns="0" tIns="0" rIns="0" bIns="0" rtlCol="0" anchor="t"/>
           <a:lstStyle/>
           <a:p>
-            <a:pPr algn="l" marL="342900" indent="-342900">
+            <a:pPr marL="342900" indent="-342900" algn="l">
               <a:spcAft>
                 <a:spcPts val="800"/>
               </a:spcAft>
@@ -18308,7 +18206,7 @@
             <a:endParaRPr lang="en-US" sz="2000" dirty="0"/>
           </a:p>
           <a:p>
-            <a:pPr algn="l" marL="342900" indent="-342900">
+            <a:pPr marL="342900" indent="-342900" algn="l">
               <a:spcAft>
                 <a:spcPts val="800"/>
               </a:spcAft>
@@ -18326,7 +18224,7 @@
             <a:endParaRPr lang="en-US" sz="2000" dirty="0"/>
           </a:p>
           <a:p>
-            <a:pPr algn="l" marL="342900" indent="-342900">
+            <a:pPr marL="342900" indent="-342900" algn="l">
               <a:buSzPct val="100000"/>
               <a:buChar char="•"/>
             </a:pPr>
@@ -18370,9 +18268,11 @@
       <p:sp>
         <p:nvSpPr>
           <p:cNvPr id="2" name="Text 0"/>
-          <p:cNvSpPr/>
+          <p:cNvSpPr>
+            <a:spLocks noGrp="1"/>
+          </p:cNvSpPr>
           <p:nvPr>
-            <p:ph idx="100" type="title" hasCustomPrompt="1"/>
+            <p:ph type="title" idx="100" hasCustomPrompt="1"/>
           </p:nvPr>
         </p:nvSpPr>
         <p:spPr>
@@ -18390,7 +18290,7 @@
           <a:bodyPr wrap="square" lIns="0" tIns="0" rIns="0" bIns="0" rtlCol="0" anchor="ctr"/>
           <a:lstStyle/>
           <a:p>
-            <a:pPr algn="l" indent="0" marL="0">
+            <a:pPr marL="0" indent="0" algn="l">
               <a:buNone/>
             </a:pPr>
             <a:r>
@@ -18426,7 +18326,7 @@
           <a:bodyPr wrap="square" lIns="0" tIns="0" rIns="0" bIns="0" rtlCol="0" anchor="t"/>
           <a:lstStyle/>
           <a:p>
-            <a:pPr indent="0" marL="0">
+            <a:pPr marL="0" indent="0">
               <a:buNone/>
             </a:pPr>
             <a:r>
@@ -18465,7 +18365,7 @@
           <a:bodyPr wrap="square" lIns="0" tIns="0" rIns="0" bIns="0" rtlCol="0" anchor="t"/>
           <a:lstStyle/>
           <a:p>
-            <a:pPr indent="0" marL="0">
+            <a:pPr marL="0" indent="0">
               <a:buNone/>
             </a:pPr>
             <a:r>
@@ -18501,7 +18401,7 @@
           <a:bodyPr wrap="square" lIns="0" tIns="0" rIns="0" bIns="0" rtlCol="0" anchor="t"/>
           <a:lstStyle/>
           <a:p>
-            <a:pPr indent="0" marL="0">
+            <a:pPr marL="0" indent="0">
               <a:buNone/>
             </a:pPr>
             <a:r>
@@ -18540,7 +18440,7 @@
           <a:bodyPr wrap="square" lIns="0" tIns="0" rIns="0" bIns="0" rtlCol="0" anchor="t"/>
           <a:lstStyle/>
           <a:p>
-            <a:pPr indent="0" marL="0">
+            <a:pPr marL="0" indent="0">
               <a:buNone/>
             </a:pPr>
             <a:r>
@@ -18576,7 +18476,7 @@
           <a:bodyPr wrap="square" lIns="0" tIns="0" rIns="0" bIns="0" rtlCol="0" anchor="t"/>
           <a:lstStyle/>
           <a:p>
-            <a:pPr indent="0" marL="0">
+            <a:pPr marL="0" indent="0">
               <a:buNone/>
             </a:pPr>
             <a:r>
@@ -18615,7 +18515,7 @@
           <a:bodyPr wrap="square" lIns="0" tIns="0" rIns="0" bIns="0" rtlCol="0" anchor="t"/>
           <a:lstStyle/>
           <a:p>
-            <a:pPr indent="0" marL="0">
+            <a:pPr marL="0" indent="0">
               <a:buNone/>
             </a:pPr>
             <a:r>
@@ -18651,7 +18551,7 @@
           <a:bodyPr wrap="square" lIns="0" tIns="0" rIns="0" bIns="0" rtlCol="0" anchor="t"/>
           <a:lstStyle/>
           <a:p>
-            <a:pPr indent="0" marL="0">
+            <a:pPr marL="0" indent="0">
               <a:buNone/>
             </a:pPr>
             <a:r>
@@ -18690,7 +18590,7 @@
           <a:bodyPr wrap="square" lIns="0" tIns="0" rIns="0" bIns="0" rtlCol="0" anchor="t"/>
           <a:lstStyle/>
           <a:p>
-            <a:pPr indent="0" marL="0">
+            <a:pPr marL="0" indent="0">
               <a:buNone/>
             </a:pPr>
             <a:r>
@@ -18731,7 +18631,7 @@
             <a:prstDash val="solid"/>
           </a:ln>
           <a:effectLst>
-            <a:outerShdw sx="100000" sy="100000" kx="0" ky="0" algn="bl" rotWithShape="0" blurRad="50800" dist="12700" dir="5400000">
+            <a:outerShdw blurRad="50800" dist="12700" dir="5400000" algn="bl" rotWithShape="0">
               <a:srgbClr val="000000">
                 <a:alpha val="8000"/>
               </a:srgbClr>
@@ -18760,7 +18660,7 @@
           <a:bodyPr wrap="square" lIns="0" tIns="0" rIns="0" bIns="0" rtlCol="0" anchor="t"/>
           <a:lstStyle/>
           <a:p>
-            <a:pPr indent="0" marL="0">
+            <a:pPr marL="0" indent="0">
               <a:buNone/>
             </a:pPr>
             <a:r>
@@ -18889,7 +18789,7 @@
           </a:prstGeom>
           <a:extLst>
             <a:ext uri="{C572A759-6A51-4108-AA02-DFA0A04FC94B}">
-              <ma14:wrappingTextBoxFlag xmlns:ma14="http://schemas.microsoft.com/office/mac/drawingml/2011/main" val="0"/>
+              <ma14:wrappingTextBoxFlag xmlns:ma14="http://schemas.microsoft.com/office/mac/drawingml/2011/main" xmlns="" val="0"/>
             </a:ext>
           </a:extLst>
         </p:spPr>
@@ -18907,7 +18807,7 @@
           <a:p>
             <a:pPr algn="r"/>
             <a:fld id="{F7021451-1387-4CA6-816F-3879F97B5CBC}" type="slidenum">
-              <a:rPr b="0" lang="en-US"/>
+              <a:rPr lang="en-US" b="0"/>
               <a:t>3</a:t>
             </a:fld>
             <a:endParaRPr lang="en-US"/>
@@ -18942,9 +18842,11 @@
       <p:sp>
         <p:nvSpPr>
           <p:cNvPr id="2" name="Text 0"/>
-          <p:cNvSpPr/>
+          <p:cNvSpPr>
+            <a:spLocks noGrp="1"/>
+          </p:cNvSpPr>
           <p:nvPr>
-            <p:ph idx="100" type="title" hasCustomPrompt="1"/>
+            <p:ph type="title" idx="100" hasCustomPrompt="1"/>
           </p:nvPr>
         </p:nvSpPr>
         <p:spPr>
@@ -18962,7 +18864,7 @@
           <a:bodyPr wrap="square" lIns="0" tIns="0" rIns="0" bIns="0" rtlCol="0" anchor="ctr"/>
           <a:lstStyle/>
           <a:p>
-            <a:pPr algn="l" indent="0" marL="0">
+            <a:pPr marL="0" indent="0" algn="l">
               <a:buNone/>
             </a:pPr>
             <a:r>
@@ -19025,7 +18927,7 @@
           <a:bodyPr wrap="square" lIns="0" tIns="0" rIns="0" bIns="0" rtlCol="0" anchor="ctr"/>
           <a:lstStyle/>
           <a:p>
-            <a:pPr algn="ctr" indent="0" marL="0">
+            <a:pPr marL="0" indent="0" algn="ctr">
               <a:buNone/>
             </a:pPr>
             <a:r>
@@ -19088,7 +18990,7 @@
           <a:bodyPr wrap="square" lIns="0" tIns="0" rIns="0" bIns="0" rtlCol="0" anchor="ctr"/>
           <a:lstStyle/>
           <a:p>
-            <a:pPr indent="0" marL="0">
+            <a:pPr marL="0" indent="0">
               <a:buNone/>
             </a:pPr>
             <a:r>
@@ -19209,7 +19111,7 @@
           <a:bodyPr wrap="square" lIns="0" tIns="0" rIns="0" bIns="0" rtlCol="0" anchor="ctr"/>
           <a:lstStyle/>
           <a:p>
-            <a:pPr indent="0" marL="0">
+            <a:pPr marL="0" indent="0">
               <a:buNone/>
             </a:pPr>
             <a:r>
@@ -19348,7 +19250,7 @@
           <a:bodyPr wrap="square" lIns="0" tIns="0" rIns="0" bIns="0" rtlCol="0" anchor="ctr"/>
           <a:lstStyle/>
           <a:p>
-            <a:pPr indent="0" marL="0">
+            <a:pPr marL="0" indent="0">
               <a:buNone/>
             </a:pPr>
             <a:r>
@@ -19431,9 +19333,11 @@
       <p:sp>
         <p:nvSpPr>
           <p:cNvPr id="2" name="Text 0"/>
-          <p:cNvSpPr/>
+          <p:cNvSpPr>
+            <a:spLocks noGrp="1"/>
+          </p:cNvSpPr>
           <p:nvPr>
-            <p:ph idx="100" type="title" hasCustomPrompt="1"/>
+            <p:ph type="title" idx="100" hasCustomPrompt="1"/>
           </p:nvPr>
         </p:nvSpPr>
         <p:spPr>
@@ -19451,7 +19355,7 @@
           <a:bodyPr wrap="square" lIns="0" tIns="0" rIns="0" bIns="0" rtlCol="0" anchor="ctr"/>
           <a:lstStyle/>
           <a:p>
-            <a:pPr algn="l" indent="0" marL="0">
+            <a:pPr marL="0" indent="0" algn="l">
               <a:buNone/>
             </a:pPr>
             <a:r>
@@ -19492,7 +19396,7 @@
             <a:prstDash val="solid"/>
           </a:ln>
           <a:effectLst>
-            <a:outerShdw sx="100000" sy="100000" kx="0" ky="0" algn="bl" rotWithShape="0" blurRad="50800" dist="12700" dir="5400000">
+            <a:outerShdw blurRad="50800" dist="12700" dir="5400000" algn="bl" rotWithShape="0">
               <a:srgbClr val="000000">
                 <a:alpha val="8000"/>
               </a:srgbClr>
@@ -19546,7 +19450,7 @@
           <a:bodyPr wrap="square" lIns="0" tIns="0" rIns="0" bIns="0" rtlCol="0" anchor="ctr"/>
           <a:lstStyle/>
           <a:p>
-            <a:pPr algn="ctr" indent="0" marL="0">
+            <a:pPr marL="0" indent="0" algn="ctr">
               <a:buNone/>
             </a:pPr>
             <a:r>
@@ -19582,7 +19486,7 @@
           <a:bodyPr wrap="square" lIns="0" tIns="0" rIns="0" bIns="0" rtlCol="0" anchor="t"/>
           <a:lstStyle/>
           <a:p>
-            <a:pPr indent="0" marL="0">
+            <a:pPr marL="0" indent="0">
               <a:buNone/>
             </a:pPr>
             <a:r>
@@ -19618,7 +19522,7 @@
           <a:bodyPr wrap="square" lIns="0" tIns="0" rIns="0" bIns="0" rtlCol="0" anchor="t"/>
           <a:lstStyle/>
           <a:p>
-            <a:pPr indent="0" marL="0">
+            <a:pPr marL="0" indent="0">
               <a:buNone/>
             </a:pPr>
             <a:r>
@@ -19659,7 +19563,7 @@
             <a:prstDash val="solid"/>
           </a:ln>
           <a:effectLst>
-            <a:outerShdw sx="100000" sy="100000" kx="0" ky="0" algn="bl" rotWithShape="0" blurRad="50800" dist="12700" dir="5400000">
+            <a:outerShdw blurRad="50800" dist="12700" dir="5400000" algn="bl" rotWithShape="0">
               <a:srgbClr val="000000">
                 <a:alpha val="8000"/>
               </a:srgbClr>
@@ -19713,7 +19617,7 @@
           <a:bodyPr wrap="square" lIns="0" tIns="0" rIns="0" bIns="0" rtlCol="0" anchor="ctr"/>
           <a:lstStyle/>
           <a:p>
-            <a:pPr algn="ctr" indent="0" marL="0">
+            <a:pPr marL="0" indent="0" algn="ctr">
               <a:buNone/>
             </a:pPr>
             <a:r>
@@ -19749,7 +19653,7 @@
           <a:bodyPr wrap="square" lIns="0" tIns="0" rIns="0" bIns="0" rtlCol="0" anchor="t"/>
           <a:lstStyle/>
           <a:p>
-            <a:pPr indent="0" marL="0">
+            <a:pPr marL="0" indent="0">
               <a:buNone/>
             </a:pPr>
             <a:r>
@@ -19785,7 +19689,7 @@
           <a:bodyPr wrap="square" lIns="0" tIns="0" rIns="0" bIns="0" rtlCol="0" anchor="t"/>
           <a:lstStyle/>
           <a:p>
-            <a:pPr indent="0" marL="0">
+            <a:pPr marL="0" indent="0">
               <a:buNone/>
             </a:pPr>
             <a:r>
@@ -19826,7 +19730,7 @@
             <a:prstDash val="solid"/>
           </a:ln>
           <a:effectLst>
-            <a:outerShdw sx="100000" sy="100000" kx="0" ky="0" algn="bl" rotWithShape="0" blurRad="50800" dist="12700" dir="5400000">
+            <a:outerShdw blurRad="50800" dist="12700" dir="5400000" algn="bl" rotWithShape="0">
               <a:srgbClr val="000000">
                 <a:alpha val="8000"/>
               </a:srgbClr>
@@ -19880,7 +19784,7 @@
           <a:bodyPr wrap="square" lIns="0" tIns="0" rIns="0" bIns="0" rtlCol="0" anchor="ctr"/>
           <a:lstStyle/>
           <a:p>
-            <a:pPr algn="ctr" indent="0" marL="0">
+            <a:pPr marL="0" indent="0" algn="ctr">
               <a:buNone/>
             </a:pPr>
             <a:r>
@@ -19916,7 +19820,7 @@
           <a:bodyPr wrap="square" lIns="0" tIns="0" rIns="0" bIns="0" rtlCol="0" anchor="t"/>
           <a:lstStyle/>
           <a:p>
-            <a:pPr indent="0" marL="0">
+            <a:pPr marL="0" indent="0">
               <a:buNone/>
             </a:pPr>
             <a:r>
@@ -19952,7 +19856,7 @@
           <a:bodyPr wrap="square" lIns="0" tIns="0" rIns="0" bIns="0" rtlCol="0" anchor="t"/>
           <a:lstStyle/>
           <a:p>
-            <a:pPr indent="0" marL="0">
+            <a:pPr marL="0" indent="0">
               <a:buNone/>
             </a:pPr>
             <a:r>
@@ -19987,7 +19891,7 @@
           </a:prstGeom>
           <a:extLst>
             <a:ext uri="{C572A759-6A51-4108-AA02-DFA0A04FC94B}">
-              <ma14:wrappingTextBoxFlag xmlns:ma14="http://schemas.microsoft.com/office/mac/drawingml/2011/main" val="0"/>
+              <ma14:wrappingTextBoxFlag xmlns:ma14="http://schemas.microsoft.com/office/mac/drawingml/2011/main" xmlns="" val="0"/>
             </a:ext>
           </a:extLst>
         </p:spPr>
@@ -20005,7 +19909,7 @@
           <a:p>
             <a:pPr algn="r"/>
             <a:fld id="{F7021451-1387-4CA6-816F-3879F97B5CBC}" type="slidenum">
-              <a:rPr b="0" lang="en-US"/>
+              <a:rPr lang="en-US" b="0"/>
               <a:t>5</a:t>
             </a:fld>
             <a:endParaRPr lang="en-US"/>
@@ -20040,9 +19944,11 @@
       <p:sp>
         <p:nvSpPr>
           <p:cNvPr id="2" name="Text 0"/>
-          <p:cNvSpPr/>
+          <p:cNvSpPr>
+            <a:spLocks noGrp="1"/>
+          </p:cNvSpPr>
           <p:nvPr>
-            <p:ph idx="100" type="title" hasCustomPrompt="1"/>
+            <p:ph type="title" idx="100" hasCustomPrompt="1"/>
           </p:nvPr>
         </p:nvSpPr>
         <p:spPr>
@@ -20060,7 +19966,7 @@
           <a:bodyPr wrap="square" lIns="0" tIns="0" rIns="0" bIns="0" rtlCol="0" anchor="ctr"/>
           <a:lstStyle/>
           <a:p>
-            <a:pPr algn="l" indent="0" marL="0">
+            <a:pPr marL="0" indent="0" algn="l">
               <a:buNone/>
             </a:pPr>
             <a:r>
@@ -20098,10 +20004,34 @@
             <a:tbl>
               <a:tblPr/>
               <a:tblGrid>
-                <a:gridCol w="2377440"/>
-                <a:gridCol w="2651760"/>
-                <a:gridCol w="2926080"/>
-                <a:gridCol w="3136392"/>
+                <a:gridCol w="2377440">
+                  <a:extLst>
+                    <a:ext uri="{9D8B030D-6E8A-4147-A177-3AD203B41FA5}">
+                      <a16:colId xmlns:a16="http://schemas.microsoft.com/office/drawing/2014/main" val="20000"/>
+                    </a:ext>
+                  </a:extLst>
+                </a:gridCol>
+                <a:gridCol w="2651760">
+                  <a:extLst>
+                    <a:ext uri="{9D8B030D-6E8A-4147-A177-3AD203B41FA5}">
+                      <a16:colId xmlns:a16="http://schemas.microsoft.com/office/drawing/2014/main" val="20001"/>
+                    </a:ext>
+                  </a:extLst>
+                </a:gridCol>
+                <a:gridCol w="2926080">
+                  <a:extLst>
+                    <a:ext uri="{9D8B030D-6E8A-4147-A177-3AD203B41FA5}">
+                      <a16:colId xmlns:a16="http://schemas.microsoft.com/office/drawing/2014/main" val="20002"/>
+                    </a:ext>
+                  </a:extLst>
+                </a:gridCol>
+                <a:gridCol w="3136392">
+                  <a:extLst>
+                    <a:ext uri="{9D8B030D-6E8A-4147-A177-3AD203B41FA5}">
+                      <a16:colId xmlns:a16="http://schemas.microsoft.com/office/drawing/2014/main" val="20003"/>
+                    </a:ext>
+                  </a:extLst>
+                </a:gridCol>
               </a:tblGrid>
               <a:tr h="566928">
                 <a:tc>
@@ -20109,7 +20039,7 @@
                     <a:bodyPr/>
                     <a:lstStyle/>
                     <a:p>
-                      <a:pPr indent="0" marL="0">
+                      <a:pPr marL="0" indent="0">
                         <a:buNone/>
                       </a:pPr>
                       <a:r>
@@ -20170,7 +20100,7 @@
                     <a:bodyPr/>
                     <a:lstStyle/>
                     <a:p>
-                      <a:pPr indent="0" marL="0">
+                      <a:pPr marL="0" indent="0">
                         <a:buNone/>
                       </a:pPr>
                       <a:r>
@@ -20231,7 +20161,7 @@
                     <a:bodyPr/>
                     <a:lstStyle/>
                     <a:p>
-                      <a:pPr indent="0" marL="0">
+                      <a:pPr marL="0" indent="0">
                         <a:buNone/>
                       </a:pPr>
                       <a:r>
@@ -20292,7 +20222,7 @@
                     <a:bodyPr/>
                     <a:lstStyle/>
                     <a:p>
-                      <a:pPr indent="0" marL="0">
+                      <a:pPr marL="0" indent="0">
                         <a:buNone/>
                       </a:pPr>
                       <a:r>
@@ -20348,6 +20278,11 @@
                     </a:solidFill>
                   </a:tcPr>
                 </a:tc>
+                <a:extLst>
+                  <a:ext uri="{0D108BD9-81ED-4DB2-BD59-A6C34878D82A}">
+                    <a16:rowId xmlns:a16="http://schemas.microsoft.com/office/drawing/2014/main" val="10000"/>
+                  </a:ext>
+                </a:extLst>
               </a:tr>
               <a:tr h="566928">
                 <a:tc>
@@ -20355,7 +20290,7 @@
                     <a:bodyPr/>
                     <a:lstStyle/>
                     <a:p>
-                      <a:pPr indent="0" marL="0">
+                      <a:pPr marL="0" indent="0">
                         <a:buNone/>
                       </a:pPr>
                       <a:r>
@@ -20413,7 +20348,7 @@
                     <a:bodyPr/>
                     <a:lstStyle/>
                     <a:p>
-                      <a:pPr indent="0" marL="0">
+                      <a:pPr marL="0" indent="0">
                         <a:buNone/>
                       </a:pPr>
                       <a:r>
@@ -20471,7 +20406,7 @@
                     <a:bodyPr/>
                     <a:lstStyle/>
                     <a:p>
-                      <a:pPr indent="0" marL="0">
+                      <a:pPr marL="0" indent="0">
                         <a:buNone/>
                       </a:pPr>
                       <a:r>
@@ -20529,7 +20464,7 @@
                     <a:bodyPr/>
                     <a:lstStyle/>
                     <a:p>
-                      <a:pPr indent="0" marL="0">
+                      <a:pPr marL="0" indent="0">
                         <a:buNone/>
                       </a:pPr>
                       <a:r>
@@ -20582,6 +20517,11 @@
                     </a:lnB>
                   </a:tcPr>
                 </a:tc>
+                <a:extLst>
+                  <a:ext uri="{0D108BD9-81ED-4DB2-BD59-A6C34878D82A}">
+                    <a16:rowId xmlns:a16="http://schemas.microsoft.com/office/drawing/2014/main" val="10001"/>
+                  </a:ext>
+                </a:extLst>
               </a:tr>
               <a:tr h="566928">
                 <a:tc>
@@ -20589,7 +20529,7 @@
                     <a:bodyPr/>
                     <a:lstStyle/>
                     <a:p>
-                      <a:pPr indent="0" marL="0">
+                      <a:pPr marL="0" indent="0">
                         <a:buNone/>
                       </a:pPr>
                       <a:r>
@@ -20647,7 +20587,7 @@
                     <a:bodyPr/>
                     <a:lstStyle/>
                     <a:p>
-                      <a:pPr indent="0" marL="0">
+                      <a:pPr marL="0" indent="0">
                         <a:buNone/>
                       </a:pPr>
                       <a:r>
@@ -20705,7 +20645,7 @@
                     <a:bodyPr/>
                     <a:lstStyle/>
                     <a:p>
-                      <a:pPr indent="0" marL="0">
+                      <a:pPr marL="0" indent="0">
                         <a:buNone/>
                       </a:pPr>
                       <a:r>
@@ -20763,7 +20703,7 @@
                     <a:bodyPr/>
                     <a:lstStyle/>
                     <a:p>
-                      <a:pPr indent="0" marL="0">
+                      <a:pPr marL="0" indent="0">
                         <a:buNone/>
                       </a:pPr>
                       <a:r>
@@ -20816,6 +20756,11 @@
                     </a:lnB>
                   </a:tcPr>
                 </a:tc>
+                <a:extLst>
+                  <a:ext uri="{0D108BD9-81ED-4DB2-BD59-A6C34878D82A}">
+                    <a16:rowId xmlns:a16="http://schemas.microsoft.com/office/drawing/2014/main" val="10002"/>
+                  </a:ext>
+                </a:extLst>
               </a:tr>
               <a:tr h="566928">
                 <a:tc>
@@ -20823,7 +20768,7 @@
                     <a:bodyPr/>
                     <a:lstStyle/>
                     <a:p>
-                      <a:pPr indent="0" marL="0">
+                      <a:pPr marL="0" indent="0">
                         <a:buNone/>
                       </a:pPr>
                       <a:r>
@@ -20881,7 +20826,7 @@
                     <a:bodyPr/>
                     <a:lstStyle/>
                     <a:p>
-                      <a:pPr indent="0" marL="0">
+                      <a:pPr marL="0" indent="0">
                         <a:buNone/>
                       </a:pPr>
                       <a:r>
@@ -20939,7 +20884,7 @@
                     <a:bodyPr/>
                     <a:lstStyle/>
                     <a:p>
-                      <a:pPr indent="0" marL="0">
+                      <a:pPr marL="0" indent="0">
                         <a:buNone/>
                       </a:pPr>
                       <a:r>
@@ -20997,7 +20942,7 @@
                     <a:bodyPr/>
                     <a:lstStyle/>
                     <a:p>
-                      <a:pPr indent="0" marL="0">
+                      <a:pPr marL="0" indent="0">
                         <a:buNone/>
                       </a:pPr>
                       <a:r>
@@ -21050,6 +20995,11 @@
                     </a:lnB>
                   </a:tcPr>
                 </a:tc>
+                <a:extLst>
+                  <a:ext uri="{0D108BD9-81ED-4DB2-BD59-A6C34878D82A}">
+                    <a16:rowId xmlns:a16="http://schemas.microsoft.com/office/drawing/2014/main" val="10003"/>
+                  </a:ext>
+                </a:extLst>
               </a:tr>
               <a:tr h="566928">
                 <a:tc>
@@ -21057,7 +21007,7 @@
                     <a:bodyPr/>
                     <a:lstStyle/>
                     <a:p>
-                      <a:pPr indent="0" marL="0">
+                      <a:pPr marL="0" indent="0">
                         <a:buNone/>
                       </a:pPr>
                       <a:r>
@@ -21115,7 +21065,7 @@
                     <a:bodyPr/>
                     <a:lstStyle/>
                     <a:p>
-                      <a:pPr indent="0" marL="0">
+                      <a:pPr marL="0" indent="0">
                         <a:buNone/>
                       </a:pPr>
                       <a:r>
@@ -21173,7 +21123,7 @@
                     <a:bodyPr/>
                     <a:lstStyle/>
                     <a:p>
-                      <a:pPr indent="0" marL="0">
+                      <a:pPr marL="0" indent="0">
                         <a:buNone/>
                       </a:pPr>
                       <a:r>
@@ -21231,7 +21181,7 @@
                     <a:bodyPr/>
                     <a:lstStyle/>
                     <a:p>
-                      <a:pPr indent="0" marL="0">
+                      <a:pPr marL="0" indent="0">
                         <a:buNone/>
                       </a:pPr>
                       <a:r>
@@ -21284,6 +21234,11 @@
                     </a:lnB>
                   </a:tcPr>
                 </a:tc>
+                <a:extLst>
+                  <a:ext uri="{0D108BD9-81ED-4DB2-BD59-A6C34878D82A}">
+                    <a16:rowId xmlns:a16="http://schemas.microsoft.com/office/drawing/2014/main" val="10004"/>
+                  </a:ext>
+                </a:extLst>
               </a:tr>
               <a:tr h="566928">
                 <a:tc>
@@ -21291,7 +21246,7 @@
                     <a:bodyPr/>
                     <a:lstStyle/>
                     <a:p>
-                      <a:pPr indent="0" marL="0">
+                      <a:pPr marL="0" indent="0">
                         <a:buNone/>
                       </a:pPr>
                       <a:r>
@@ -21349,7 +21304,7 @@
                     <a:bodyPr/>
                     <a:lstStyle/>
                     <a:p>
-                      <a:pPr indent="0" marL="0">
+                      <a:pPr marL="0" indent="0">
                         <a:buNone/>
                       </a:pPr>
                       <a:r>
@@ -21407,7 +21362,7 @@
                     <a:bodyPr/>
                     <a:lstStyle/>
                     <a:p>
-                      <a:pPr indent="0" marL="0">
+                      <a:pPr marL="0" indent="0">
                         <a:buNone/>
                       </a:pPr>
                       <a:r>
@@ -21465,7 +21420,7 @@
                     <a:bodyPr/>
                     <a:lstStyle/>
                     <a:p>
-                      <a:pPr indent="0" marL="0">
+                      <a:pPr marL="0" indent="0">
                         <a:buNone/>
                       </a:pPr>
                       <a:r>
@@ -21518,6 +21473,11 @@
                     </a:lnB>
                   </a:tcPr>
                 </a:tc>
+                <a:extLst>
+                  <a:ext uri="{0D108BD9-81ED-4DB2-BD59-A6C34878D82A}">
+                    <a16:rowId xmlns:a16="http://schemas.microsoft.com/office/drawing/2014/main" val="10005"/>
+                  </a:ext>
+                </a:extLst>
               </a:tr>
               <a:tr h="566928">
                 <a:tc>
@@ -21525,7 +21485,7 @@
                     <a:bodyPr/>
                     <a:lstStyle/>
                     <a:p>
-                      <a:pPr indent="0" marL="0">
+                      <a:pPr marL="0" indent="0">
                         <a:buNone/>
                       </a:pPr>
                       <a:r>
@@ -21583,7 +21543,7 @@
                     <a:bodyPr/>
                     <a:lstStyle/>
                     <a:p>
-                      <a:pPr indent="0" marL="0">
+                      <a:pPr marL="0" indent="0">
                         <a:buNone/>
                       </a:pPr>
                       <a:r>
@@ -21641,7 +21601,7 @@
                     <a:bodyPr/>
                     <a:lstStyle/>
                     <a:p>
-                      <a:pPr indent="0" marL="0">
+                      <a:pPr marL="0" indent="0">
                         <a:buNone/>
                       </a:pPr>
                       <a:r>
@@ -21699,7 +21659,7 @@
                     <a:bodyPr/>
                     <a:lstStyle/>
                     <a:p>
-                      <a:pPr indent="0" marL="0">
+                      <a:pPr marL="0" indent="0">
                         <a:buNone/>
                       </a:pPr>
                       <a:r>
@@ -21752,6 +21712,11 @@
                     </a:lnB>
                   </a:tcPr>
                 </a:tc>
+                <a:extLst>
+                  <a:ext uri="{0D108BD9-81ED-4DB2-BD59-A6C34878D82A}">
+                    <a16:rowId xmlns:a16="http://schemas.microsoft.com/office/drawing/2014/main" val="10006"/>
+                  </a:ext>
+                </a:extLst>
               </a:tr>
             </a:tbl>
           </a:graphicData>
@@ -21778,7 +21743,7 @@
           <a:bodyPr wrap="square" lIns="0" tIns="0" rIns="0" bIns="0" rtlCol="0" anchor="t"/>
           <a:lstStyle/>
           <a:p>
-            <a:pPr indent="0" marL="0">
+            <a:pPr marL="0" indent="0">
               <a:buNone/>
             </a:pPr>
             <a:r>
@@ -21813,7 +21778,7 @@
           </a:prstGeom>
           <a:extLst>
             <a:ext uri="{C572A759-6A51-4108-AA02-DFA0A04FC94B}">
-              <ma14:wrappingTextBoxFlag xmlns:ma14="http://schemas.microsoft.com/office/mac/drawingml/2011/main" val="0"/>
+              <ma14:wrappingTextBoxFlag xmlns:ma14="http://schemas.microsoft.com/office/mac/drawingml/2011/main" xmlns="" val="0"/>
             </a:ext>
           </a:extLst>
         </p:spPr>
@@ -21831,7 +21796,7 @@
           <a:p>
             <a:pPr algn="r"/>
             <a:fld id="{F7021451-1387-4CA6-816F-3879F97B5CBC}" type="slidenum">
-              <a:rPr b="0" lang="en-US"/>
+              <a:rPr lang="en-US" b="0"/>
               <a:t>6</a:t>
             </a:fld>
             <a:endParaRPr lang="en-US"/>
@@ -21866,9 +21831,11 @@
       <p:sp>
         <p:nvSpPr>
           <p:cNvPr id="2" name="Text 0"/>
-          <p:cNvSpPr/>
+          <p:cNvSpPr>
+            <a:spLocks noGrp="1"/>
+          </p:cNvSpPr>
           <p:nvPr>
-            <p:ph idx="100" type="title" hasCustomPrompt="1"/>
+            <p:ph type="title" idx="100" hasCustomPrompt="1"/>
           </p:nvPr>
         </p:nvSpPr>
         <p:spPr>
@@ -21886,7 +21853,7 @@
           <a:bodyPr wrap="square" lIns="0" tIns="0" rIns="0" bIns="0" rtlCol="0" anchor="ctr"/>
           <a:lstStyle/>
           <a:p>
-            <a:pPr algn="l" indent="0" marL="0">
+            <a:pPr marL="0" indent="0" algn="l">
               <a:buNone/>
             </a:pPr>
             <a:r>
@@ -21927,7 +21894,7 @@
             <a:prstDash val="solid"/>
           </a:ln>
           <a:effectLst>
-            <a:outerShdw sx="100000" sy="100000" kx="0" ky="0" algn="bl" rotWithShape="0" blurRad="50800" dist="12700" dir="5400000">
+            <a:outerShdw blurRad="50800" dist="12700" dir="5400000" algn="bl" rotWithShape="0">
               <a:srgbClr val="000000">
                 <a:alpha val="8000"/>
               </a:srgbClr>
@@ -21981,7 +21948,7 @@
           <a:bodyPr wrap="square" lIns="0" tIns="0" rIns="0" bIns="0" rtlCol="0" anchor="ctr"/>
           <a:lstStyle/>
           <a:p>
-            <a:pPr indent="0" marL="0">
+            <a:pPr marL="0" indent="0">
               <a:buNone/>
             </a:pPr>
             <a:r>
@@ -22017,7 +21984,7 @@
           <a:bodyPr wrap="square" lIns="0" tIns="0" rIns="0" bIns="0" rtlCol="0" anchor="t"/>
           <a:lstStyle/>
           <a:p>
-            <a:pPr indent="0" marL="0">
+            <a:pPr marL="0" indent="0">
               <a:buNone/>
             </a:pPr>
             <a:r>
@@ -22058,7 +22025,7 @@
             <a:prstDash val="solid"/>
           </a:ln>
           <a:effectLst>
-            <a:outerShdw sx="100000" sy="100000" kx="0" ky="0" algn="bl" rotWithShape="0" blurRad="50800" dist="12700" dir="5400000">
+            <a:outerShdw blurRad="50800" dist="12700" dir="5400000" algn="bl" rotWithShape="0">
               <a:srgbClr val="000000">
                 <a:alpha val="8000"/>
               </a:srgbClr>
@@ -22112,7 +22079,7 @@
           <a:bodyPr wrap="square" lIns="0" tIns="0" rIns="0" bIns="0" rtlCol="0" anchor="ctr"/>
           <a:lstStyle/>
           <a:p>
-            <a:pPr indent="0" marL="0">
+            <a:pPr marL="0" indent="0">
               <a:buNone/>
             </a:pPr>
             <a:r>
@@ -22148,7 +22115,7 @@
           <a:bodyPr wrap="square" lIns="0" tIns="0" rIns="0" bIns="0" rtlCol="0" anchor="t"/>
           <a:lstStyle/>
           <a:p>
-            <a:pPr indent="0" marL="0">
+            <a:pPr marL="0" indent="0">
               <a:buNone/>
             </a:pPr>
             <a:r>
@@ -22189,7 +22156,7 @@
             <a:prstDash val="solid"/>
           </a:ln>
           <a:effectLst>
-            <a:outerShdw sx="100000" sy="100000" kx="0" ky="0" algn="bl" rotWithShape="0" blurRad="50800" dist="12700" dir="5400000">
+            <a:outerShdw blurRad="50800" dist="12700" dir="5400000" algn="bl" rotWithShape="0">
               <a:srgbClr val="000000">
                 <a:alpha val="8000"/>
               </a:srgbClr>
@@ -22243,7 +22210,7 @@
           <a:bodyPr wrap="square" lIns="0" tIns="0" rIns="0" bIns="0" rtlCol="0" anchor="ctr"/>
           <a:lstStyle/>
           <a:p>
-            <a:pPr indent="0" marL="0">
+            <a:pPr marL="0" indent="0">
               <a:buNone/>
             </a:pPr>
             <a:r>
@@ -22279,7 +22246,7 @@
           <a:bodyPr wrap="square" lIns="0" tIns="0" rIns="0" bIns="0" rtlCol="0" anchor="t"/>
           <a:lstStyle/>
           <a:p>
-            <a:pPr indent="0" marL="0">
+            <a:pPr marL="0" indent="0">
               <a:buNone/>
             </a:pPr>
             <a:r>
@@ -22320,7 +22287,7 @@
             <a:prstDash val="solid"/>
           </a:ln>
           <a:effectLst>
-            <a:outerShdw sx="100000" sy="100000" kx="0" ky="0" algn="bl" rotWithShape="0" blurRad="50800" dist="12700" dir="5400000">
+            <a:outerShdw blurRad="50800" dist="12700" dir="5400000" algn="bl" rotWithShape="0">
               <a:srgbClr val="000000">
                 <a:alpha val="8000"/>
               </a:srgbClr>
@@ -22374,7 +22341,7 @@
           <a:bodyPr wrap="square" lIns="0" tIns="0" rIns="0" bIns="0" rtlCol="0" anchor="ctr"/>
           <a:lstStyle/>
           <a:p>
-            <a:pPr indent="0" marL="0">
+            <a:pPr marL="0" indent="0">
               <a:buNone/>
             </a:pPr>
             <a:r>
@@ -22410,7 +22377,7 @@
           <a:bodyPr wrap="square" lIns="0" tIns="0" rIns="0" bIns="0" rtlCol="0" anchor="t"/>
           <a:lstStyle/>
           <a:p>
-            <a:pPr indent="0" marL="0">
+            <a:pPr marL="0" indent="0">
               <a:buNone/>
             </a:pPr>
             <a:r>
@@ -22445,7 +22412,7 @@
           </a:prstGeom>
           <a:extLst>
             <a:ext uri="{C572A759-6A51-4108-AA02-DFA0A04FC94B}">
-              <ma14:wrappingTextBoxFlag xmlns:ma14="http://schemas.microsoft.com/office/mac/drawingml/2011/main" val="0"/>
+              <ma14:wrappingTextBoxFlag xmlns:ma14="http://schemas.microsoft.com/office/mac/drawingml/2011/main" xmlns="" val="0"/>
             </a:ext>
           </a:extLst>
         </p:spPr>
@@ -22463,7 +22430,7 @@
           <a:p>
             <a:pPr algn="r"/>
             <a:fld id="{F7021451-1387-4CA6-816F-3879F97B5CBC}" type="slidenum">
-              <a:rPr b="0" lang="en-US"/>
+              <a:rPr lang="en-US" b="0"/>
               <a:t>7</a:t>
             </a:fld>
             <a:endParaRPr lang="en-US"/>
@@ -22498,9 +22465,11 @@
       <p:sp>
         <p:nvSpPr>
           <p:cNvPr id="2" name="Text 0"/>
-          <p:cNvSpPr/>
+          <p:cNvSpPr>
+            <a:spLocks noGrp="1"/>
+          </p:cNvSpPr>
           <p:nvPr>
-            <p:ph idx="100" type="title" hasCustomPrompt="1"/>
+            <p:ph type="title" idx="100" hasCustomPrompt="1"/>
           </p:nvPr>
         </p:nvSpPr>
         <p:spPr>
@@ -22518,7 +22487,7 @@
           <a:bodyPr wrap="square" lIns="0" tIns="0" rIns="0" bIns="0" rtlCol="0" anchor="ctr"/>
           <a:lstStyle/>
           <a:p>
-            <a:pPr algn="l" indent="0" marL="0">
+            <a:pPr marL="0" indent="0" algn="l">
               <a:buNone/>
             </a:pPr>
             <a:r>
@@ -22581,7 +22550,7 @@
           <a:bodyPr wrap="square" lIns="0" tIns="0" rIns="0" bIns="0" rtlCol="0" anchor="t"/>
           <a:lstStyle/>
           <a:p>
-            <a:pPr algn="ctr" indent="0" marL="0">
+            <a:pPr marL="0" indent="0" algn="ctr">
               <a:buNone/>
             </a:pPr>
             <a:r>
@@ -22617,7 +22586,7 @@
           <a:bodyPr wrap="square" lIns="0" tIns="0" rIns="0" bIns="0" rtlCol="0" anchor="t"/>
           <a:lstStyle/>
           <a:p>
-            <a:pPr algn="ctr" indent="0" marL="0">
+            <a:pPr marL="0" indent="0" algn="ctr">
               <a:buNone/>
             </a:pPr>
             <a:r>
@@ -22705,7 +22674,7 @@
           <a:bodyPr wrap="square" lIns="0" tIns="0" rIns="0" bIns="0" rtlCol="0" anchor="t"/>
           <a:lstStyle/>
           <a:p>
-            <a:pPr algn="ctr" indent="0" marL="0">
+            <a:pPr marL="0" indent="0" algn="ctr">
               <a:buNone/>
             </a:pPr>
             <a:r>
@@ -22741,7 +22710,7 @@
           <a:bodyPr wrap="square" lIns="0" tIns="0" rIns="0" bIns="0" rtlCol="0" anchor="t"/>
           <a:lstStyle/>
           <a:p>
-            <a:pPr algn="ctr" indent="0" marL="0">
+            <a:pPr marL="0" indent="0" algn="ctr">
               <a:buNone/>
             </a:pPr>
             <a:r>
@@ -22829,7 +22798,7 @@
           <a:bodyPr wrap="square" lIns="0" tIns="0" rIns="0" bIns="0" rtlCol="0" anchor="t"/>
           <a:lstStyle/>
           <a:p>
-            <a:pPr algn="ctr" indent="0" marL="0">
+            <a:pPr marL="0" indent="0" algn="ctr">
               <a:buNone/>
             </a:pPr>
             <a:r>
@@ -22865,7 +22834,7 @@
           <a:bodyPr wrap="square" lIns="0" tIns="0" rIns="0" bIns="0" rtlCol="0" anchor="t"/>
           <a:lstStyle/>
           <a:p>
-            <a:pPr algn="ctr" indent="0" marL="0">
+            <a:pPr marL="0" indent="0" algn="ctr">
               <a:buNone/>
             </a:pPr>
             <a:r>
@@ -22953,7 +22922,7 @@
           <a:bodyPr wrap="square" lIns="0" tIns="0" rIns="0" bIns="0" rtlCol="0" anchor="t"/>
           <a:lstStyle/>
           <a:p>
-            <a:pPr algn="ctr" indent="0" marL="0">
+            <a:pPr marL="0" indent="0" algn="ctr">
               <a:buNone/>
             </a:pPr>
             <a:r>
@@ -22989,7 +22958,7 @@
           <a:bodyPr wrap="square" lIns="0" tIns="0" rIns="0" bIns="0" rtlCol="0" anchor="t"/>
           <a:lstStyle/>
           <a:p>
-            <a:pPr algn="ctr" indent="0" marL="0">
+            <a:pPr marL="0" indent="0" algn="ctr">
               <a:buNone/>
             </a:pPr>
             <a:r>
@@ -23077,7 +23046,7 @@
           <a:bodyPr wrap="square" lIns="0" tIns="0" rIns="0" bIns="0" rtlCol="0" anchor="t"/>
           <a:lstStyle/>
           <a:p>
-            <a:pPr algn="ctr" indent="0" marL="0">
+            <a:pPr marL="0" indent="0" algn="ctr">
               <a:buNone/>
             </a:pPr>
             <a:r>
@@ -23113,7 +23082,7 @@
           <a:bodyPr wrap="square" lIns="0" tIns="0" rIns="0" bIns="0" rtlCol="0" anchor="t"/>
           <a:lstStyle/>
           <a:p>
-            <a:pPr algn="ctr" indent="0" marL="0">
+            <a:pPr marL="0" indent="0" algn="ctr">
               <a:buNone/>
             </a:pPr>
             <a:r>
@@ -23201,7 +23170,7 @@
           <a:bodyPr wrap="square" lIns="0" tIns="0" rIns="0" bIns="0" rtlCol="0" anchor="t"/>
           <a:lstStyle/>
           <a:p>
-            <a:pPr algn="ctr" indent="0" marL="0">
+            <a:pPr marL="0" indent="0" algn="ctr">
               <a:buNone/>
             </a:pPr>
             <a:r>
@@ -23237,7 +23206,7 @@
           <a:bodyPr wrap="square" lIns="0" tIns="0" rIns="0" bIns="0" rtlCol="0" anchor="t"/>
           <a:lstStyle/>
           <a:p>
-            <a:pPr algn="ctr" indent="0" marL="0">
+            <a:pPr marL="0" indent="0" algn="ctr">
               <a:buNone/>
             </a:pPr>
             <a:r>
@@ -23325,7 +23294,7 @@
           <a:bodyPr wrap="square" lIns="0" tIns="0" rIns="0" bIns="0" rtlCol="0" anchor="t"/>
           <a:lstStyle/>
           <a:p>
-            <a:pPr algn="ctr" indent="0" marL="0">
+            <a:pPr marL="0" indent="0" algn="ctr">
               <a:buNone/>
             </a:pPr>
             <a:r>
@@ -23361,7 +23330,7 @@
           <a:bodyPr wrap="square" lIns="0" tIns="0" rIns="0" bIns="0" rtlCol="0" anchor="t"/>
           <a:lstStyle/>
           <a:p>
-            <a:pPr algn="ctr" indent="0" marL="0">
+            <a:pPr marL="0" indent="0" algn="ctr">
               <a:buNone/>
             </a:pPr>
             <a:r>
@@ -23422,7 +23391,7 @@
           <a:bodyPr wrap="square" lIns="0" tIns="0" rIns="0" bIns="0" rtlCol="0" anchor="ctr"/>
           <a:lstStyle/>
           <a:p>
-            <a:pPr indent="0" marL="0">
+            <a:pPr marL="0" indent="0">
               <a:buNone/>
             </a:pPr>
             <a:r>
@@ -23483,7 +23452,7 @@
           <a:bodyPr wrap="square" lIns="0" tIns="0" rIns="0" bIns="0" rtlCol="0" anchor="ctr"/>
           <a:lstStyle/>
           <a:p>
-            <a:pPr indent="0" marL="0">
+            <a:pPr marL="0" indent="0">
               <a:buNone/>
             </a:pPr>
             <a:r>
@@ -23544,7 +23513,7 @@
           <a:bodyPr wrap="square" lIns="0" tIns="0" rIns="0" bIns="0" rtlCol="0" anchor="ctr"/>
           <a:lstStyle/>
           <a:p>
-            <a:pPr indent="0" marL="0">
+            <a:pPr marL="0" indent="0">
               <a:buNone/>
             </a:pPr>
             <a:r>
@@ -23580,7 +23549,7 @@
           <a:bodyPr wrap="square" lIns="0" tIns="0" rIns="0" bIns="0" rtlCol="0" anchor="t"/>
           <a:lstStyle/>
           <a:p>
-            <a:pPr indent="0" marL="0">
+            <a:pPr marL="0" indent="0">
               <a:buNone/>
             </a:pPr>
             <a:r>
@@ -23597,7 +23566,7 @@
       </p:sp>
       <p:sp>
         <p:nvSpPr>
-          <p:cNvPr id="25" name="Slide Number Placeholder 0"/>
+          <p:cNvPr id="3" name="Slide Number Placeholder 0"/>
           <p:cNvSpPr>
             <a:spLocks noGrp="1"/>
           </p:cNvSpPr>
@@ -23615,7 +23584,7 @@
           </a:prstGeom>
           <a:extLst>
             <a:ext uri="{C572A759-6A51-4108-AA02-DFA0A04FC94B}">
-              <ma14:wrappingTextBoxFlag xmlns:ma14="http://schemas.microsoft.com/office/mac/drawingml/2011/main" val="0"/>
+              <ma14:wrappingTextBoxFlag xmlns:ma14="http://schemas.microsoft.com/office/mac/drawingml/2011/main" xmlns="" val="0"/>
             </a:ext>
           </a:extLst>
         </p:spPr>
@@ -23633,7 +23602,7 @@
           <a:p>
             <a:pPr algn="r"/>
             <a:fld id="{F7021451-1387-4CA6-816F-3879F97B5CBC}" type="slidenum">
-              <a:rPr b="0" lang="en-US"/>
+              <a:rPr lang="en-US" b="0"/>
               <a:t>8</a:t>
             </a:fld>
             <a:endParaRPr lang="en-US"/>
@@ -23668,9 +23637,11 @@
       <p:sp>
         <p:nvSpPr>
           <p:cNvPr id="2" name="Text 0"/>
-          <p:cNvSpPr/>
+          <p:cNvSpPr>
+            <a:spLocks noGrp="1"/>
+          </p:cNvSpPr>
           <p:nvPr>
-            <p:ph idx="100" type="title" hasCustomPrompt="1"/>
+            <p:ph type="title" idx="100" hasCustomPrompt="1"/>
           </p:nvPr>
         </p:nvSpPr>
         <p:spPr>
@@ -23688,7 +23659,7 @@
           <a:bodyPr wrap="square" lIns="0" tIns="0" rIns="0" bIns="0" rtlCol="0" anchor="ctr"/>
           <a:lstStyle/>
           <a:p>
-            <a:pPr algn="l" indent="0" marL="0">
+            <a:pPr marL="0" indent="0" algn="l">
               <a:buNone/>
             </a:pPr>
             <a:r>
@@ -23726,13 +23697,55 @@
             <a:tbl>
               <a:tblPr/>
               <a:tblGrid>
-                <a:gridCol w="1920240"/>
-                <a:gridCol w="4233672"/>
-                <a:gridCol w="822960"/>
-                <a:gridCol w="1188720"/>
-                <a:gridCol w="822960"/>
-                <a:gridCol w="822960"/>
-                <a:gridCol w="1280160"/>
+                <a:gridCol w="1920240">
+                  <a:extLst>
+                    <a:ext uri="{9D8B030D-6E8A-4147-A177-3AD203B41FA5}">
+                      <a16:colId xmlns:a16="http://schemas.microsoft.com/office/drawing/2014/main" val="20000"/>
+                    </a:ext>
+                  </a:extLst>
+                </a:gridCol>
+                <a:gridCol w="4233672">
+                  <a:extLst>
+                    <a:ext uri="{9D8B030D-6E8A-4147-A177-3AD203B41FA5}">
+                      <a16:colId xmlns:a16="http://schemas.microsoft.com/office/drawing/2014/main" val="20001"/>
+                    </a:ext>
+                  </a:extLst>
+                </a:gridCol>
+                <a:gridCol w="822960">
+                  <a:extLst>
+                    <a:ext uri="{9D8B030D-6E8A-4147-A177-3AD203B41FA5}">
+                      <a16:colId xmlns:a16="http://schemas.microsoft.com/office/drawing/2014/main" val="20002"/>
+                    </a:ext>
+                  </a:extLst>
+                </a:gridCol>
+                <a:gridCol w="1188720">
+                  <a:extLst>
+                    <a:ext uri="{9D8B030D-6E8A-4147-A177-3AD203B41FA5}">
+                      <a16:colId xmlns:a16="http://schemas.microsoft.com/office/drawing/2014/main" val="20003"/>
+                    </a:ext>
+                  </a:extLst>
+                </a:gridCol>
+                <a:gridCol w="822960">
+                  <a:extLst>
+                    <a:ext uri="{9D8B030D-6E8A-4147-A177-3AD203B41FA5}">
+                      <a16:colId xmlns:a16="http://schemas.microsoft.com/office/drawing/2014/main" val="20004"/>
+                    </a:ext>
+                  </a:extLst>
+                </a:gridCol>
+                <a:gridCol w="822960">
+                  <a:extLst>
+                    <a:ext uri="{9D8B030D-6E8A-4147-A177-3AD203B41FA5}">
+                      <a16:colId xmlns:a16="http://schemas.microsoft.com/office/drawing/2014/main" val="20005"/>
+                    </a:ext>
+                  </a:extLst>
+                </a:gridCol>
+                <a:gridCol w="1280160">
+                  <a:extLst>
+                    <a:ext uri="{9D8B030D-6E8A-4147-A177-3AD203B41FA5}">
+                      <a16:colId xmlns:a16="http://schemas.microsoft.com/office/drawing/2014/main" val="20006"/>
+                    </a:ext>
+                  </a:extLst>
+                </a:gridCol>
               </a:tblGrid>
               <a:tr h="475488">
                 <a:tc>
@@ -23740,7 +23753,7 @@
                     <a:bodyPr/>
                     <a:lstStyle/>
                     <a:p>
-                      <a:pPr indent="0" marL="0">
+                      <a:pPr marL="0" indent="0">
                         <a:buNone/>
                       </a:pPr>
                       <a:r>
@@ -23801,7 +23814,7 @@
                     <a:bodyPr/>
                     <a:lstStyle/>
                     <a:p>
-                      <a:pPr indent="0" marL="0">
+                      <a:pPr marL="0" indent="0">
                         <a:buNone/>
                       </a:pPr>
                       <a:r>
@@ -23862,7 +23875,7 @@
                     <a:bodyPr/>
                     <a:lstStyle/>
                     <a:p>
-                      <a:pPr algn="ctr" indent="0" marL="0">
+                      <a:pPr marL="0" indent="0" algn="ctr">
                         <a:buNone/>
                       </a:pPr>
                       <a:r>
@@ -23923,7 +23936,7 @@
                     <a:bodyPr/>
                     <a:lstStyle/>
                     <a:p>
-                      <a:pPr algn="ctr" indent="0" marL="0">
+                      <a:pPr marL="0" indent="0" algn="ctr">
                         <a:buNone/>
                       </a:pPr>
                       <a:r>
@@ -23984,7 +23997,7 @@
                     <a:bodyPr/>
                     <a:lstStyle/>
                     <a:p>
-                      <a:pPr algn="ctr" indent="0" marL="0">
+                      <a:pPr marL="0" indent="0" algn="ctr">
                         <a:buNone/>
                       </a:pPr>
                       <a:r>
@@ -24045,7 +24058,7 @@
                     <a:bodyPr/>
                     <a:lstStyle/>
                     <a:p>
-                      <a:pPr algn="ctr" indent="0" marL="0">
+                      <a:pPr marL="0" indent="0" algn="ctr">
                         <a:buNone/>
                       </a:pPr>
                       <a:r>
@@ -24106,7 +24119,7 @@
                     <a:bodyPr/>
                     <a:lstStyle/>
                     <a:p>
-                      <a:pPr algn="ctr" indent="0" marL="0">
+                      <a:pPr marL="0" indent="0" algn="ctr">
                         <a:buNone/>
                       </a:pPr>
                       <a:r>
@@ -24162,6 +24175,11 @@
                     </a:solidFill>
                   </a:tcPr>
                 </a:tc>
+                <a:extLst>
+                  <a:ext uri="{0D108BD9-81ED-4DB2-BD59-A6C34878D82A}">
+                    <a16:rowId xmlns:a16="http://schemas.microsoft.com/office/drawing/2014/main" val="10000"/>
+                  </a:ext>
+                </a:extLst>
               </a:tr>
               <a:tr h="475488">
                 <a:tc>
@@ -24169,7 +24187,7 @@
                     <a:bodyPr/>
                     <a:lstStyle/>
                     <a:p>
-                      <a:pPr indent="0" marL="0">
+                      <a:pPr marL="0" indent="0">
                         <a:buNone/>
                       </a:pPr>
                       <a:r>
@@ -24227,7 +24245,7 @@
                     <a:bodyPr/>
                     <a:lstStyle/>
                     <a:p>
-                      <a:pPr indent="0" marL="0">
+                      <a:pPr marL="0" indent="0">
                         <a:buNone/>
                       </a:pPr>
                       <a:r>
@@ -24285,7 +24303,7 @@
                     <a:bodyPr/>
                     <a:lstStyle/>
                     <a:p>
-                      <a:pPr algn="ctr" indent="0" marL="0">
+                      <a:pPr marL="0" indent="0" algn="ctr">
                         <a:buNone/>
                       </a:pPr>
                       <a:r>
@@ -24343,7 +24361,7 @@
                     <a:bodyPr/>
                     <a:lstStyle/>
                     <a:p>
-                      <a:pPr algn="ctr" indent="0" marL="0">
+                      <a:pPr marL="0" indent="0" algn="ctr">
                         <a:buNone/>
                       </a:pPr>
                       <a:r>
@@ -24401,7 +24419,7 @@
                     <a:bodyPr/>
                     <a:lstStyle/>
                     <a:p>
-                      <a:pPr algn="ctr" indent="0" marL="0">
+                      <a:pPr marL="0" indent="0" algn="ctr">
                         <a:buNone/>
                       </a:pPr>
                       <a:r>
@@ -24459,7 +24477,7 @@
                     <a:bodyPr/>
                     <a:lstStyle/>
                     <a:p>
-                      <a:pPr algn="ctr" indent="0" marL="0">
+                      <a:pPr marL="0" indent="0" algn="ctr">
                         <a:buNone/>
                       </a:pPr>
                       <a:r>
@@ -24517,7 +24535,7 @@
                     <a:bodyPr/>
                     <a:lstStyle/>
                     <a:p>
-                      <a:pPr algn="ctr" indent="0" marL="0">
+                      <a:pPr marL="0" indent="0" algn="ctr">
                         <a:buNone/>
                       </a:pPr>
                       <a:r>
@@ -24570,6 +24588,11 @@
                     </a:lnB>
                   </a:tcPr>
                 </a:tc>
+                <a:extLst>
+                  <a:ext uri="{0D108BD9-81ED-4DB2-BD59-A6C34878D82A}">
+                    <a16:rowId xmlns:a16="http://schemas.microsoft.com/office/drawing/2014/main" val="10001"/>
+                  </a:ext>
+                </a:extLst>
               </a:tr>
               <a:tr h="475488">
                 <a:tc>
@@ -24577,7 +24600,7 @@
                     <a:bodyPr/>
                     <a:lstStyle/>
                     <a:p>
-                      <a:pPr indent="0" marL="0">
+                      <a:pPr marL="0" indent="0">
                         <a:buNone/>
                       </a:pPr>
                       <a:r>
@@ -24635,7 +24658,7 @@
                     <a:bodyPr/>
                     <a:lstStyle/>
                     <a:p>
-                      <a:pPr indent="0" marL="0">
+                      <a:pPr marL="0" indent="0">
                         <a:buNone/>
                       </a:pPr>
                       <a:r>
@@ -24693,7 +24716,7 @@
                     <a:bodyPr/>
                     <a:lstStyle/>
                     <a:p>
-                      <a:pPr algn="ctr" indent="0" marL="0">
+                      <a:pPr marL="0" indent="0" algn="ctr">
                         <a:buNone/>
                       </a:pPr>
                       <a:r>
@@ -24751,7 +24774,7 @@
                     <a:bodyPr/>
                     <a:lstStyle/>
                     <a:p>
-                      <a:pPr algn="ctr" indent="0" marL="0">
+                      <a:pPr marL="0" indent="0" algn="ctr">
                         <a:buNone/>
                       </a:pPr>
                       <a:r>
@@ -24809,7 +24832,7 @@
                     <a:bodyPr/>
                     <a:lstStyle/>
                     <a:p>
-                      <a:pPr algn="ctr" indent="0" marL="0">
+                      <a:pPr marL="0" indent="0" algn="ctr">
                         <a:buNone/>
                       </a:pPr>
                       <a:r>
@@ -24867,7 +24890,7 @@
                     <a:bodyPr/>
                     <a:lstStyle/>
                     <a:p>
-                      <a:pPr algn="ctr" indent="0" marL="0">
+                      <a:pPr marL="0" indent="0" algn="ctr">
                         <a:buNone/>
                       </a:pPr>
                       <a:r>
@@ -24925,7 +24948,7 @@
                     <a:bodyPr/>
                     <a:lstStyle/>
                     <a:p>
-                      <a:pPr algn="ctr" indent="0" marL="0">
+                      <a:pPr marL="0" indent="0" algn="ctr">
                         <a:buNone/>
                       </a:pPr>
                       <a:r>
@@ -24978,6 +25001,11 @@
                     </a:lnB>
                   </a:tcPr>
                 </a:tc>
+                <a:extLst>
+                  <a:ext uri="{0D108BD9-81ED-4DB2-BD59-A6C34878D82A}">
+                    <a16:rowId xmlns:a16="http://schemas.microsoft.com/office/drawing/2014/main" val="10002"/>
+                  </a:ext>
+                </a:extLst>
               </a:tr>
               <a:tr h="475488">
                 <a:tc>
@@ -24985,7 +25013,7 @@
                     <a:bodyPr/>
                     <a:lstStyle/>
                     <a:p>
-                      <a:pPr indent="0" marL="0">
+                      <a:pPr marL="0" indent="0">
                         <a:buNone/>
                       </a:pPr>
                       <a:r>
@@ -25043,7 +25071,7 @@
                     <a:bodyPr/>
                     <a:lstStyle/>
                     <a:p>
-                      <a:pPr indent="0" marL="0">
+                      <a:pPr marL="0" indent="0">
                         <a:buNone/>
                       </a:pPr>
                       <a:r>
@@ -25101,7 +25129,7 @@
                     <a:bodyPr/>
                     <a:lstStyle/>
                     <a:p>
-                      <a:pPr algn="ctr" indent="0" marL="0">
+                      <a:pPr marL="0" indent="0" algn="ctr">
                         <a:buNone/>
                       </a:pPr>
                       <a:r>
@@ -25159,7 +25187,7 @@
                     <a:bodyPr/>
                     <a:lstStyle/>
                     <a:p>
-                      <a:pPr algn="ctr" indent="0" marL="0">
+                      <a:pPr marL="0" indent="0" algn="ctr">
                         <a:buNone/>
                       </a:pPr>
                       <a:r>
@@ -25217,7 +25245,7 @@
                     <a:bodyPr/>
                     <a:lstStyle/>
                     <a:p>
-                      <a:pPr algn="ctr" indent="0" marL="0">
+                      <a:pPr marL="0" indent="0" algn="ctr">
                         <a:buNone/>
                       </a:pPr>
                       <a:r>
@@ -25275,7 +25303,7 @@
                     <a:bodyPr/>
                     <a:lstStyle/>
                     <a:p>
-                      <a:pPr algn="ctr" indent="0" marL="0">
+                      <a:pPr marL="0" indent="0" algn="ctr">
                         <a:buNone/>
                       </a:pPr>
                       <a:r>
@@ -25333,7 +25361,7 @@
                     <a:bodyPr/>
                     <a:lstStyle/>
                     <a:p>
-                      <a:pPr algn="ctr" indent="0" marL="0">
+                      <a:pPr marL="0" indent="0" algn="ctr">
                         <a:buNone/>
                       </a:pPr>
                       <a:r>
@@ -25386,6 +25414,11 @@
                     </a:lnB>
                   </a:tcPr>
                 </a:tc>
+                <a:extLst>
+                  <a:ext uri="{0D108BD9-81ED-4DB2-BD59-A6C34878D82A}">
+                    <a16:rowId xmlns:a16="http://schemas.microsoft.com/office/drawing/2014/main" val="10003"/>
+                  </a:ext>
+                </a:extLst>
               </a:tr>
               <a:tr h="475488">
                 <a:tc>
@@ -25393,7 +25426,7 @@
                     <a:bodyPr/>
                     <a:lstStyle/>
                     <a:p>
-                      <a:pPr indent="0" marL="0">
+                      <a:pPr marL="0" indent="0">
                         <a:buNone/>
                       </a:pPr>
                       <a:r>
@@ -25451,7 +25484,7 @@
                     <a:bodyPr/>
                     <a:lstStyle/>
                     <a:p>
-                      <a:pPr indent="0" marL="0">
+                      <a:pPr marL="0" indent="0">
                         <a:buNone/>
                       </a:pPr>
                       <a:r>
@@ -25509,7 +25542,7 @@
                     <a:bodyPr/>
                     <a:lstStyle/>
                     <a:p>
-                      <a:pPr algn="ctr" indent="0" marL="0">
+                      <a:pPr marL="0" indent="0" algn="ctr">
                         <a:buNone/>
                       </a:pPr>
                       <a:r>
@@ -25567,7 +25600,7 @@
                     <a:bodyPr/>
                     <a:lstStyle/>
                     <a:p>
-                      <a:pPr algn="ctr" indent="0" marL="0">
+                      <a:pPr marL="0" indent="0" algn="ctr">
                         <a:buNone/>
                       </a:pPr>
                       <a:r>
@@ -25625,7 +25658,7 @@
                     <a:bodyPr/>
                     <a:lstStyle/>
                     <a:p>
-                      <a:pPr algn="ctr" indent="0" marL="0">
+                      <a:pPr marL="0" indent="0" algn="ctr">
                         <a:buNone/>
                       </a:pPr>
                       <a:r>
@@ -25683,7 +25716,7 @@
                     <a:bodyPr/>
                     <a:lstStyle/>
                     <a:p>
-                      <a:pPr algn="ctr" indent="0" marL="0">
+                      <a:pPr marL="0" indent="0" algn="ctr">
                         <a:buNone/>
                       </a:pPr>
                       <a:r>
@@ -25741,7 +25774,7 @@
                     <a:bodyPr/>
                     <a:lstStyle/>
                     <a:p>
-                      <a:pPr algn="ctr" indent="0" marL="0">
+                      <a:pPr marL="0" indent="0" algn="ctr">
                         <a:buNone/>
                       </a:pPr>
                       <a:r>
@@ -25794,6 +25827,11 @@
                     </a:lnB>
                   </a:tcPr>
                 </a:tc>
+                <a:extLst>
+                  <a:ext uri="{0D108BD9-81ED-4DB2-BD59-A6C34878D82A}">
+                    <a16:rowId xmlns:a16="http://schemas.microsoft.com/office/drawing/2014/main" val="10004"/>
+                  </a:ext>
+                </a:extLst>
               </a:tr>
               <a:tr h="475488">
                 <a:tc>
@@ -25801,7 +25839,7 @@
                     <a:bodyPr/>
                     <a:lstStyle/>
                     <a:p>
-                      <a:pPr indent="0" marL="0">
+                      <a:pPr marL="0" indent="0">
                         <a:buNone/>
                       </a:pPr>
                       <a:r>
@@ -25859,7 +25897,7 @@
                     <a:bodyPr/>
                     <a:lstStyle/>
                     <a:p>
-                      <a:pPr indent="0" marL="0">
+                      <a:pPr marL="0" indent="0">
                         <a:buNone/>
                       </a:pPr>
                       <a:r>
@@ -25917,7 +25955,7 @@
                     <a:bodyPr/>
                     <a:lstStyle/>
                     <a:p>
-                      <a:pPr algn="ctr" indent="0" marL="0">
+                      <a:pPr marL="0" indent="0" algn="ctr">
                         <a:buNone/>
                       </a:pPr>
                       <a:r>
@@ -25975,7 +26013,7 @@
                     <a:bodyPr/>
                     <a:lstStyle/>
                     <a:p>
-                      <a:pPr algn="ctr" indent="0" marL="0">
+                      <a:pPr marL="0" indent="0" algn="ctr">
                         <a:buNone/>
                       </a:pPr>
                       <a:r>
@@ -26033,7 +26071,7 @@
                     <a:bodyPr/>
                     <a:lstStyle/>
                     <a:p>
-                      <a:pPr algn="ctr" indent="0" marL="0">
+                      <a:pPr marL="0" indent="0" algn="ctr">
                         <a:buNone/>
                       </a:pPr>
                       <a:r>
@@ -26091,7 +26129,7 @@
                     <a:bodyPr/>
                     <a:lstStyle/>
                     <a:p>
-                      <a:pPr algn="ctr" indent="0" marL="0">
+                      <a:pPr marL="0" indent="0" algn="ctr">
                         <a:buNone/>
                       </a:pPr>
                       <a:r>
@@ -26149,7 +26187,7 @@
                     <a:bodyPr/>
                     <a:lstStyle/>
                     <a:p>
-                      <a:pPr algn="ctr" indent="0" marL="0">
+                      <a:pPr marL="0" indent="0" algn="ctr">
                         <a:buNone/>
                       </a:pPr>
                       <a:endParaRPr lang="en-US" sz="1200" dirty="0"/>
@@ -26194,6 +26232,11 @@
                     </a:lnB>
                   </a:tcPr>
                 </a:tc>
+                <a:extLst>
+                  <a:ext uri="{0D108BD9-81ED-4DB2-BD59-A6C34878D82A}">
+                    <a16:rowId xmlns:a16="http://schemas.microsoft.com/office/drawing/2014/main" val="10005"/>
+                  </a:ext>
+                </a:extLst>
               </a:tr>
               <a:tr h="475488">
                 <a:tc>
@@ -26201,7 +26244,7 @@
                     <a:bodyPr/>
                     <a:lstStyle/>
                     <a:p>
-                      <a:pPr indent="0" marL="0">
+                      <a:pPr marL="0" indent="0">
                         <a:buNone/>
                       </a:pPr>
                       <a:r>
@@ -26259,7 +26302,7 @@
                     <a:bodyPr/>
                     <a:lstStyle/>
                     <a:p>
-                      <a:pPr indent="0" marL="0">
+                      <a:pPr marL="0" indent="0">
                         <a:buNone/>
                       </a:pPr>
                       <a:r>
@@ -26317,7 +26360,7 @@
                     <a:bodyPr/>
                     <a:lstStyle/>
                     <a:p>
-                      <a:pPr algn="ctr" indent="0" marL="0">
+                      <a:pPr marL="0" indent="0" algn="ctr">
                         <a:buNone/>
                       </a:pPr>
                       <a:endParaRPr lang="en-US" sz="1200" dirty="0"/>
@@ -26367,7 +26410,7 @@
                     <a:bodyPr/>
                     <a:lstStyle/>
                     <a:p>
-                      <a:pPr algn="ctr" indent="0" marL="0">
+                      <a:pPr marL="0" indent="0" algn="ctr">
                         <a:buNone/>
                       </a:pPr>
                       <a:endParaRPr lang="en-US" sz="1200" dirty="0"/>
@@ -26417,7 +26460,7 @@
                     <a:bodyPr/>
                     <a:lstStyle/>
                     <a:p>
-                      <a:pPr algn="ctr" indent="0" marL="0">
+                      <a:pPr marL="0" indent="0" algn="ctr">
                         <a:buNone/>
                       </a:pPr>
                       <a:endParaRPr lang="en-US" sz="1200" dirty="0"/>
@@ -26467,7 +26510,7 @@
                     <a:bodyPr/>
                     <a:lstStyle/>
                     <a:p>
-                      <a:pPr algn="ctr" indent="0" marL="0">
+                      <a:pPr marL="0" indent="0" algn="ctr">
                         <a:buNone/>
                       </a:pPr>
                       <a:endParaRPr lang="en-US" sz="1200" dirty="0"/>
@@ -26517,7 +26560,7 @@
                     <a:bodyPr/>
                     <a:lstStyle/>
                     <a:p>
-                      <a:pPr algn="ctr" indent="0" marL="0">
+                      <a:pPr marL="0" indent="0" algn="ctr">
                         <a:buNone/>
                       </a:pPr>
                       <a:endParaRPr lang="en-US" sz="1200" dirty="0"/>
@@ -26562,6 +26605,11 @@
                     </a:lnB>
                   </a:tcPr>
                 </a:tc>
+                <a:extLst>
+                  <a:ext uri="{0D108BD9-81ED-4DB2-BD59-A6C34878D82A}">
+                    <a16:rowId xmlns:a16="http://schemas.microsoft.com/office/drawing/2014/main" val="10006"/>
+                  </a:ext>
+                </a:extLst>
               </a:tr>
               <a:tr h="475488">
                 <a:tc>
@@ -26569,7 +26617,7 @@
                     <a:bodyPr/>
                     <a:lstStyle/>
                     <a:p>
-                      <a:pPr indent="0" marL="0">
+                      <a:pPr marL="0" indent="0">
                         <a:buNone/>
                       </a:pPr>
                       <a:r>
@@ -26627,7 +26675,7 @@
                     <a:bodyPr/>
                     <a:lstStyle/>
                     <a:p>
-                      <a:pPr indent="0" marL="0">
+                      <a:pPr marL="0" indent="0">
                         <a:buNone/>
                       </a:pPr>
                       <a:r>
@@ -26685,7 +26733,7 @@
                     <a:bodyPr/>
                     <a:lstStyle/>
                     <a:p>
-                      <a:pPr algn="ctr" indent="0" marL="0">
+                      <a:pPr marL="0" indent="0" algn="ctr">
                         <a:buNone/>
                       </a:pPr>
                       <a:r>
@@ -26743,7 +26791,7 @@
                     <a:bodyPr/>
                     <a:lstStyle/>
                     <a:p>
-                      <a:pPr algn="ctr" indent="0" marL="0">
+                      <a:pPr marL="0" indent="0" algn="ctr">
                         <a:buNone/>
                       </a:pPr>
                       <a:r>
@@ -26801,7 +26849,7 @@
                     <a:bodyPr/>
                     <a:lstStyle/>
                     <a:p>
-                      <a:pPr algn="ctr" indent="0" marL="0">
+                      <a:pPr marL="0" indent="0" algn="ctr">
                         <a:buNone/>
                       </a:pPr>
                       <a:r>
@@ -26859,7 +26907,7 @@
                     <a:bodyPr/>
                     <a:lstStyle/>
                     <a:p>
-                      <a:pPr algn="ctr" indent="0" marL="0">
+                      <a:pPr marL="0" indent="0" algn="ctr">
                         <a:buNone/>
                       </a:pPr>
                       <a:r>
@@ -26917,7 +26965,7 @@
                     <a:bodyPr/>
                     <a:lstStyle/>
                     <a:p>
-                      <a:pPr algn="ctr" indent="0" marL="0">
+                      <a:pPr marL="0" indent="0" algn="ctr">
                         <a:buNone/>
                       </a:pPr>
                       <a:endParaRPr lang="en-US" sz="1200" dirty="0"/>
@@ -26962,6 +27010,11 @@
                     </a:lnB>
                   </a:tcPr>
                 </a:tc>
+                <a:extLst>
+                  <a:ext uri="{0D108BD9-81ED-4DB2-BD59-A6C34878D82A}">
+                    <a16:rowId xmlns:a16="http://schemas.microsoft.com/office/drawing/2014/main" val="10007"/>
+                  </a:ext>
+                </a:extLst>
               </a:tr>
             </a:tbl>
           </a:graphicData>
@@ -26988,7 +27041,7 @@
           <a:bodyPr wrap="square" lIns="0" tIns="0" rIns="0" bIns="0" rtlCol="0" anchor="t"/>
           <a:lstStyle/>
           <a:p>
-            <a:pPr indent="0" marL="0">
+            <a:pPr marL="0" indent="0">
               <a:buNone/>
             </a:pPr>
             <a:r>
@@ -27023,7 +27076,7 @@
           </a:prstGeom>
           <a:extLst>
             <a:ext uri="{C572A759-6A51-4108-AA02-DFA0A04FC94B}">
-              <ma14:wrappingTextBoxFlag xmlns:ma14="http://schemas.microsoft.com/office/mac/drawingml/2011/main" val="0"/>
+              <ma14:wrappingTextBoxFlag xmlns:ma14="http://schemas.microsoft.com/office/mac/drawingml/2011/main" xmlns="" val="0"/>
             </a:ext>
           </a:extLst>
         </p:spPr>
@@ -27041,7 +27094,7 @@
           <a:p>
             <a:pPr algn="r"/>
             <a:fld id="{F7021451-1387-4CA6-816F-3879F97B5CBC}" type="slidenum">
-              <a:rPr b="0" lang="en-US"/>
+              <a:rPr lang="en-US" b="0"/>
               <a:t>9</a:t>
             </a:fld>
             <a:endParaRPr lang="en-US"/>
@@ -27349,4 +27402,299 @@
     </a:ext>
   </a:extLst>
 </a:theme>
+</file>
+
+<file path=ppt/theme/theme2.xml><?xml version="1.0" encoding="utf-8"?>
+<a:theme xmlns:a="http://schemas.openxmlformats.org/drawingml/2006/main" name="Office Theme">
+  <a:themeElements>
+    <a:clrScheme name="Office">
+      <a:dk1>
+        <a:sysClr val="windowText" lastClr="000000"/>
+      </a:dk1>
+      <a:lt1>
+        <a:sysClr val="window" lastClr="FFFFFF"/>
+      </a:lt1>
+      <a:dk2>
+        <a:srgbClr val="44546A"/>
+      </a:dk2>
+      <a:lt2>
+        <a:srgbClr val="E7E6E6"/>
+      </a:lt2>
+      <a:accent1>
+        <a:srgbClr val="4472C4"/>
+      </a:accent1>
+      <a:accent2>
+        <a:srgbClr val="ED7D31"/>
+      </a:accent2>
+      <a:accent3>
+        <a:srgbClr val="A5A5A5"/>
+      </a:accent3>
+      <a:accent4>
+        <a:srgbClr val="FFC000"/>
+      </a:accent4>
+      <a:accent5>
+        <a:srgbClr val="5B9BD5"/>
+      </a:accent5>
+      <a:accent6>
+        <a:srgbClr val="70AD47"/>
+      </a:accent6>
+      <a:hlink>
+        <a:srgbClr val="0563C1"/>
+      </a:hlink>
+      <a:folHlink>
+        <a:srgbClr val="954F72"/>
+      </a:folHlink>
+    </a:clrScheme>
+    <a:fontScheme name="Office">
+      <a:majorFont>
+        <a:latin typeface="Calibri Light" panose="020F0302020204030204"/>
+        <a:ea typeface=""/>
+        <a:cs typeface=""/>
+        <a:font script="Jpan" typeface="游ゴシック Light"/>
+        <a:font script="Hang" typeface="맑은 고딕"/>
+        <a:font script="Hans" typeface="等线 Light"/>
+        <a:font script="Hant" typeface="新細明體"/>
+        <a:font script="Arab" typeface="Times New Roman"/>
+        <a:font script="Hebr" typeface="Times New Roman"/>
+        <a:font script="Thai" typeface="Angsana New"/>
+        <a:font script="Ethi" typeface="Nyala"/>
+        <a:font script="Beng" typeface="Vrinda"/>
+        <a:font script="Gujr" typeface="Shruti"/>
+        <a:font script="Khmr" typeface="MoolBoran"/>
+        <a:font script="Knda" typeface="Tunga"/>
+        <a:font script="Guru" typeface="Raavi"/>
+        <a:font script="Cans" typeface="Euphemia"/>
+        <a:font script="Cher" typeface="Plantagenet Cherokee"/>
+        <a:font script="Yiii" typeface="Microsoft Yi Baiti"/>
+        <a:font script="Tibt" typeface="Microsoft Himalaya"/>
+        <a:font script="Thaa" typeface="MV Boli"/>
+        <a:font script="Deva" typeface="Mangal"/>
+        <a:font script="Telu" typeface="Gautami"/>
+        <a:font script="Taml" typeface="Latha"/>
+        <a:font script="Syrc" typeface="Estrangelo Edessa"/>
+        <a:font script="Orya" typeface="Kalinga"/>
+        <a:font script="Mlym" typeface="Kartika"/>
+        <a:font script="Laoo" typeface="DokChampa"/>
+        <a:font script="Sinh" typeface="Iskoola Pota"/>
+        <a:font script="Mong" typeface="Mongolian Baiti"/>
+        <a:font script="Viet" typeface="Times New Roman"/>
+        <a:font script="Uigh" typeface="Microsoft Uighur"/>
+        <a:font script="Geor" typeface="Sylfaen"/>
+        <a:font script="Armn" typeface="Arial"/>
+        <a:font script="Bugi" typeface="Leelawadee UI"/>
+        <a:font script="Bopo" typeface="Microsoft JhengHei"/>
+        <a:font script="Java" typeface="Javanese Text"/>
+        <a:font script="Lisu" typeface="Segoe UI"/>
+        <a:font script="Mymr" typeface="Myanmar Text"/>
+        <a:font script="Nkoo" typeface="Ebrima"/>
+        <a:font script="Olck" typeface="Nirmala UI"/>
+        <a:font script="Osma" typeface="Ebrima"/>
+        <a:font script="Phag" typeface="Phagspa"/>
+        <a:font script="Syrn" typeface="Estrangelo Edessa"/>
+        <a:font script="Syrj" typeface="Estrangelo Edessa"/>
+        <a:font script="Syre" typeface="Estrangelo Edessa"/>
+        <a:font script="Sora" typeface="Nirmala UI"/>
+        <a:font script="Tale" typeface="Microsoft Tai Le"/>
+        <a:font script="Talu" typeface="Microsoft New Tai Lue"/>
+        <a:font script="Tfng" typeface="Ebrima"/>
+      </a:majorFont>
+      <a:minorFont>
+        <a:latin typeface="Calibri" panose="020F0502020204030204"/>
+        <a:ea typeface=""/>
+        <a:cs typeface=""/>
+        <a:font script="Jpan" typeface="游ゴシック"/>
+        <a:font script="Hang" typeface="맑은 고딕"/>
+        <a:font script="Hans" typeface="等线"/>
+        <a:font script="Hant" typeface="新細明體"/>
+        <a:font script="Arab" typeface="Arial"/>
+        <a:font script="Hebr" typeface="Arial"/>
+        <a:font script="Thai" typeface="Cordia New"/>
+        <a:font script="Ethi" typeface="Nyala"/>
+        <a:font script="Beng" typeface="Vrinda"/>
+        <a:font script="Gujr" typeface="Shruti"/>
+        <a:font script="Khmr" typeface="DaunPenh"/>
+        <a:font script="Knda" typeface="Tunga"/>
+        <a:font script="Guru" typeface="Raavi"/>
+        <a:font script="Cans" typeface="Euphemia"/>
+        <a:font script="Cher" typeface="Plantagenet Cherokee"/>
+        <a:font script="Yiii" typeface="Microsoft Yi Baiti"/>
+        <a:font script="Tibt" typeface="Microsoft Himalaya"/>
+        <a:font script="Thaa" typeface="MV Boli"/>
+        <a:font script="Deva" typeface="Mangal"/>
+        <a:font script="Telu" typeface="Gautami"/>
+        <a:font script="Taml" typeface="Latha"/>
+        <a:font script="Syrc" typeface="Estrangelo Edessa"/>
+        <a:font script="Orya" typeface="Kalinga"/>
+        <a:font script="Mlym" typeface="Kartika"/>
+        <a:font script="Laoo" typeface="DokChampa"/>
+        <a:font script="Sinh" typeface="Iskoola Pota"/>
+        <a:font script="Mong" typeface="Mongolian Baiti"/>
+        <a:font script="Viet" typeface="Arial"/>
+        <a:font script="Uigh" typeface="Microsoft Uighur"/>
+        <a:font script="Geor" typeface="Sylfaen"/>
+        <a:font script="Armn" typeface="Arial"/>
+        <a:font script="Bugi" typeface="Leelawadee UI"/>
+        <a:font script="Bopo" typeface="Microsoft JhengHei"/>
+        <a:font script="Java" typeface="Javanese Text"/>
+        <a:font script="Lisu" typeface="Segoe UI"/>
+        <a:font script="Mymr" typeface="Myanmar Text"/>
+        <a:font script="Nkoo" typeface="Ebrima"/>
+        <a:font script="Olck" typeface="Nirmala UI"/>
+        <a:font script="Osma" typeface="Ebrima"/>
+        <a:font script="Phag" typeface="Phagspa"/>
+        <a:font script="Syrn" typeface="Estrangelo Edessa"/>
+        <a:font script="Syrj" typeface="Estrangelo Edessa"/>
+        <a:font script="Syre" typeface="Estrangelo Edessa"/>
+        <a:font script="Sora" typeface="Nirmala UI"/>
+        <a:font script="Tale" typeface="Microsoft Tai Le"/>
+        <a:font script="Talu" typeface="Microsoft New Tai Lue"/>
+        <a:font script="Tfng" typeface="Ebrima"/>
+      </a:minorFont>
+    </a:fontScheme>
+    <a:fmtScheme name="Office">
+      <a:fillStyleLst>
+        <a:solidFill>
+          <a:schemeClr val="phClr"/>
+        </a:solidFill>
+        <a:gradFill rotWithShape="1">
+          <a:gsLst>
+            <a:gs pos="0">
+              <a:schemeClr val="phClr">
+                <a:lumMod val="110000"/>
+                <a:satMod val="105000"/>
+                <a:tint val="67000"/>
+              </a:schemeClr>
+            </a:gs>
+            <a:gs pos="50000">
+              <a:schemeClr val="phClr">
+                <a:lumMod val="105000"/>
+                <a:satMod val="103000"/>
+                <a:tint val="73000"/>
+              </a:schemeClr>
+            </a:gs>
+            <a:gs pos="100000">
+              <a:schemeClr val="phClr">
+                <a:lumMod val="105000"/>
+                <a:satMod val="109000"/>
+                <a:tint val="81000"/>
+              </a:schemeClr>
+            </a:gs>
+          </a:gsLst>
+          <a:lin ang="5400000" scaled="0"/>
+        </a:gradFill>
+        <a:gradFill rotWithShape="1">
+          <a:gsLst>
+            <a:gs pos="0">
+              <a:schemeClr val="phClr">
+                <a:satMod val="103000"/>
+                <a:lumMod val="102000"/>
+                <a:tint val="94000"/>
+              </a:schemeClr>
+            </a:gs>
+            <a:gs pos="50000">
+              <a:schemeClr val="phClr">
+                <a:satMod val="110000"/>
+                <a:lumMod val="100000"/>
+                <a:shade val="100000"/>
+              </a:schemeClr>
+            </a:gs>
+            <a:gs pos="100000">
+              <a:schemeClr val="phClr">
+                <a:lumMod val="99000"/>
+                <a:satMod val="120000"/>
+                <a:shade val="78000"/>
+              </a:schemeClr>
+            </a:gs>
+          </a:gsLst>
+          <a:lin ang="5400000" scaled="0"/>
+        </a:gradFill>
+      </a:fillStyleLst>
+      <a:lnStyleLst>
+        <a:ln w="6350" cap="flat" cmpd="sng" algn="ctr">
+          <a:solidFill>
+            <a:schemeClr val="phClr"/>
+          </a:solidFill>
+          <a:prstDash val="solid"/>
+          <a:miter lim="800000"/>
+        </a:ln>
+        <a:ln w="12700" cap="flat" cmpd="sng" algn="ctr">
+          <a:solidFill>
+            <a:schemeClr val="phClr"/>
+          </a:solidFill>
+          <a:prstDash val="solid"/>
+          <a:miter lim="800000"/>
+        </a:ln>
+        <a:ln w="19050" cap="flat" cmpd="sng" algn="ctr">
+          <a:solidFill>
+            <a:schemeClr val="phClr"/>
+          </a:solidFill>
+          <a:prstDash val="solid"/>
+          <a:miter lim="800000"/>
+        </a:ln>
+      </a:lnStyleLst>
+      <a:effectStyleLst>
+        <a:effectStyle>
+          <a:effectLst/>
+        </a:effectStyle>
+        <a:effectStyle>
+          <a:effectLst/>
+        </a:effectStyle>
+        <a:effectStyle>
+          <a:effectLst>
+            <a:outerShdw blurRad="57150" dist="19050" dir="5400000" algn="ctr" rotWithShape="0">
+              <a:srgbClr val="000000">
+                <a:alpha val="63000"/>
+              </a:srgbClr>
+            </a:outerShdw>
+          </a:effectLst>
+        </a:effectStyle>
+      </a:effectStyleLst>
+      <a:bgFillStyleLst>
+        <a:solidFill>
+          <a:schemeClr val="phClr"/>
+        </a:solidFill>
+        <a:solidFill>
+          <a:schemeClr val="phClr">
+            <a:tint val="95000"/>
+            <a:satMod val="170000"/>
+          </a:schemeClr>
+        </a:solidFill>
+        <a:gradFill rotWithShape="1">
+          <a:gsLst>
+            <a:gs pos="0">
+              <a:schemeClr val="phClr">
+                <a:tint val="93000"/>
+                <a:satMod val="150000"/>
+                <a:shade val="98000"/>
+                <a:lumMod val="102000"/>
+              </a:schemeClr>
+            </a:gs>
+            <a:gs pos="50000">
+              <a:schemeClr val="phClr">
+                <a:tint val="98000"/>
+                <a:satMod val="130000"/>
+                <a:shade val="90000"/>
+                <a:lumMod val="103000"/>
+              </a:schemeClr>
+            </a:gs>
+            <a:gs pos="100000">
+              <a:schemeClr val="phClr">
+                <a:shade val="63000"/>
+                <a:satMod val="120000"/>
+              </a:schemeClr>
+            </a:gs>
+          </a:gsLst>
+          <a:lin ang="5400000" scaled="0"/>
+        </a:gradFill>
+      </a:bgFillStyleLst>
+    </a:fmtScheme>
+  </a:themeElements>
+  <a:objectDefaults/>
+  <a:extraClrSchemeLst/>
+  <a:extLst>
+    <a:ext uri="{05A4C25C-085E-4340-85A3-A5531E510DB2}">
+      <thm15:themeFamily xmlns:thm15="http://schemas.microsoft.com/office/thememl/2012/main" name="Office Theme" id="{62F939B6-93AF-4DB8-9C6B-D6C7DFDC589F}" vid="{4A3C46E8-61CC-4603-A589-7422A47A8E4A}"/>
+    </a:ext>
+  </a:extLst>
+</a:theme>
 </file>
--- a/docs/FedCast_Fullerton.pptx
+++ b/docs/FedCast_Fullerton.pptx
@@ -4,6 +4,9 @@
   <p:sldMasterIdLst>
     <p:sldMasterId id="2147483648" r:id="rId1"/>
   </p:sldMasterIdLst>
+  <p:notesMasterIdLst>
+    <p:notesMasterId r:id="rId24"/>
+  </p:notesMasterIdLst>
   <p:sldIdLst>
     <p:sldId id="256" r:id="rId2"/>
     <p:sldId id="257" r:id="rId3"/>
@@ -28,9 +31,6 @@
     <p:sldId id="276" r:id="rId22"/>
     <p:sldId id="277" r:id="rId23"/>
   </p:sldIdLst>
-  <p:notesMasterIdLst>
-    <p:notesMasterId r:id="rId24"/>
-  </p:notesMasterIdLst>
   <p:sldSz cx="12192000" cy="6858000"/>
   <p:notesSz cx="6858000" cy="12192000"/>
   <p:defaultTextStyle>
@@ -128,13 +128,13 @@
   <p:extLst>
     <p:ext uri="{521415D9-36F7-43E2-AB2F-B90AF26B5E84}">
       <p14:sectionLst xmlns:p14="http://schemas.microsoft.com/office/powerpoint/2010/main">
-        <p14:section name="Opening" id="{e810d2df-9d9b-89b2-d9f6-7ff4699c5077}">
+        <p14:section name="Opening" id="{EBE0A322-C711-6356-C0FA-81FFBF2CD038}">
           <p14:sldIdLst>
             <p14:sldId id="256"/>
             <p14:sldId id="257"/>
           </p14:sldIdLst>
         </p14:section>
-        <p14:section name="Objective" id="{2f223129-d8d5-85c8-919e-9d874291ab15}">
+        <p14:section name="Objective" id="{A15A7BD8-DE7C-6B45-BFCB-6F6BC3F0EA31}">
           <p14:sldIdLst>
             <p14:sldId id="258"/>
             <p14:sldId id="259"/>
@@ -142,14 +142,14 @@
             <p14:sldId id="261"/>
           </p14:sldIdLst>
         </p14:section>
-        <p14:section name="How it works" id="{8d029834-38d1-6c06-1961-7502d28c0b1d}">
+        <p14:section name="How it works" id="{51E39E62-D42A-5461-E95E-6B45ACE96CC0}">
           <p14:sldIdLst>
             <p14:sldId id="262"/>
             <p14:sldId id="263"/>
             <p14:sldId id="264"/>
           </p14:sldIdLst>
         </p14:section>
-        <p14:section name="The harness" id="{239b6bd4-6490-0770-1b8b-09ebb250423f}">
+        <p14:section name="The harness" id="{92928B70-AC41-17EA-8015-68E5296D82D9}">
           <p14:sldIdLst>
             <p14:sldId id="265"/>
             <p14:sldId id="266"/>
@@ -157,7 +157,7 @@
             <p14:sldId id="268"/>
           </p14:sldIdLst>
         </p14:section>
-        <p14:section name="Evidence" id="{1f26d330-ff6f-8051-5953-bc079399bd47}">
+        <p14:section name="Evidence" id="{5A3B821E-E9C2-E8B2-83B3-FA9E97777045}">
           <p14:sldIdLst>
             <p14:sldId id="269"/>
             <p14:sldId id="270"/>
@@ -167,13 +167,13 @@
             <p14:sldId id="274"/>
           </p14:sldIdLst>
         </p14:section>
-        <p14:section name="Limits and next" id="{54b79475-94c6-bea8-0404-484f2f928718}">
+        <p14:section name="Limits and next" id="{A86175A9-6A09-739A-6218-CDC852B09B1B}">
           <p14:sldIdLst>
             <p14:sldId id="275"/>
             <p14:sldId id="276"/>
           </p14:sldIdLst>
         </p14:section>
-        <p14:section name="Backup" id="{80515033-334d-cf06-a3f0-1bbc9189fd34}">
+        <p14:section name="Backup" id="{C779AD3C-958E-9E55-6CE0-CB67D10A91C1}">
           <p14:sldIdLst>
             <p14:sldId id="277"/>
           </p14:sldIdLst>
@@ -188,9 +188,11 @@
 </file>
 
 <file path=ppt/charts/chart1.xml><?xml version="1.0" encoding="utf-8"?>
-<c:chartSpace xmlns:c="http://schemas.openxmlformats.org/drawingml/2006/chart" xmlns:a="http://schemas.openxmlformats.org/drawingml/2006/main" xmlns:r="http://schemas.openxmlformats.org/officeDocument/2006/relationships">
+<c:chartSpace xmlns:c="http://schemas.openxmlformats.org/drawingml/2006/chart" xmlns:a="http://schemas.openxmlformats.org/drawingml/2006/main" xmlns:r="http://schemas.openxmlformats.org/officeDocument/2006/relationships" xmlns:c16r2="http://schemas.microsoft.com/office/drawing/2015/06/chart">
   <c:date1904 val="0"/>
+  <c:lang val="en-US"/>
   <c:roundedCorners val="1"/>
+  <c:style val="2"/>
   <c:chart>
     <c:autoTitleDeleted val="1"/>
     <c:plotArea>
@@ -222,18 +224,26 @@
           <c:invertIfNegative val="0"/>
           <c:dLbls>
             <c:numFmt formatCode="0.0" sourceLinked="0"/>
+            <c:spPr>
+              <a:noFill/>
+              <a:ln>
+                <a:noFill/>
+              </a:ln>
+              <a:effectLst/>
+            </c:spPr>
             <c:txPr>
               <a:bodyPr/>
               <a:lstStyle/>
               <a:p>
                 <a:pPr>
-                  <a:defRPr b="0" i="0" strike="noStrike" sz="1100" u="none">
+                  <a:defRPr sz="1100" b="0" i="0" u="none" strike="noStrike">
                     <a:solidFill>
                       <a:srgbClr val="1B1F2A"/>
                     </a:solidFill>
                     <a:latin typeface="Arial"/>
                   </a:defRPr>
                 </a:pPr>
+                <a:endParaRPr lang="en-US"/>
               </a:p>
             </c:txPr>
             <c:showLegendKey val="0"/>
@@ -243,28 +253,31 @@
             <c:showPercent val="0"/>
             <c:showBubbleSize val="0"/>
             <c:showLeaderLines val="0"/>
+            <c:extLst>
+              <c:ext xmlns:c15="http://schemas.microsoft.com/office/drawing/2012/chart" uri="{CE6537A1-D6FC-4f65-9D91-7224C49458BB}">
+                <c15:showLeaderLines val="0"/>
+              </c:ext>
+            </c:extLst>
           </c:dLbls>
           <c:cat>
-            <c:multiLvlStrRef>
+            <c:strRef>
               <c:f>Sheet1!$A$2:$A$5</c:f>
-              <c:multiLvlStrCache>
+              <c:strCache>
                 <c:ptCount val="4"/>
-                <c:lvl>
-                  <c:pt idx="0">
-                    <c:v>1: question only</c:v>
-                  </c:pt>
-                  <c:pt idx="1">
-                    <c:v>2: + evidence</c:v>
-                  </c:pt>
-                  <c:pt idx="2">
-                    <c:v>3: + shape, verifier</c:v>
-                  </c:pt>
-                  <c:pt idx="3">
-                    <c:v>4-8: + one slice each</c:v>
-                  </c:pt>
-                </c:lvl>
-              </c:multiLvlStrCache>
-            </c:multiLvlStrRef>
+                <c:pt idx="0">
+                  <c:v>1: question only</c:v>
+                </c:pt>
+                <c:pt idx="1">
+                  <c:v>2: + evidence</c:v>
+                </c:pt>
+                <c:pt idx="2">
+                  <c:v>3: + shape, verifier</c:v>
+                </c:pt>
+                <c:pt idx="3">
+                  <c:v>4-8: + one slice each</c:v>
+                </c:pt>
+              </c:strCache>
+            </c:strRef>
           </c:cat>
           <c:val>
             <c:numRef>
@@ -287,36 +300,23 @@
               </c:numCache>
             </c:numRef>
           </c:val>
+          <c:extLst>
+            <c:ext xmlns:c16="http://schemas.microsoft.com/office/drawing/2014/chart" uri="{C3380CC4-5D6E-409C-BE32-E72D297353CC}">
+              <c16:uniqueId val="{00000000-E399-48A4-9D3C-9EB4B56D7632}"/>
+            </c:ext>
+          </c:extLst>
         </c:ser>
         <c:dLbls>
-          <c:numFmt formatCode="0.0" sourceLinked="0"/>
-          <c:txPr>
-            <a:bodyPr/>
-            <a:lstStyle/>
-            <a:p>
-              <a:pPr>
-                <a:defRPr b="0" i="0" strike="noStrike" sz="1100" u="none">
-                  <a:solidFill>
-                    <a:srgbClr val="1B1F2A"/>
-                  </a:solidFill>
-                  <a:latin typeface="Arial"/>
-                </a:defRPr>
-              </a:pPr>
-            </a:p>
-          </c:txPr>
           <c:showLegendKey val="0"/>
           <c:showVal val="1"/>
           <c:showCatName val="0"/>
           <c:showSerName val="0"/>
           <c:showPercent val="0"/>
           <c:showBubbleSize val="0"/>
-          <c:showLeaderLines val="0"/>
         </c:dLbls>
         <c:gapWidth val="60"/>
-        <c:overlap val="0"/>
         <c:axId val="2094734554"/>
         <c:axId val="2094734552"/>
-        <c:axId val="2094734556"/>
       </c:barChart>
       <c:catAx>
         <c:axId val="2094734554"/>
@@ -355,6 +355,7 @@
         <c:crosses val="autoZero"/>
         <c:auto val="1"/>
         <c:lblAlgn val="ctr"/>
+        <c:lblOffset val="100"/>
         <c:noMultiLvlLbl val="1"/>
       </c:catAx>
       <c:valAx>
@@ -417,6 +418,7 @@
     </c:plotArea>
     <c:plotVisOnly val="1"/>
     <c:dispBlanksAs val="span"/>
+    <c:showDLblsOverMax val="1"/>
   </c:chart>
   <c:spPr>
     <a:noFill/>
@@ -432,9 +434,11 @@
 </file>
 
 <file path=ppt/charts/chart2.xml><?xml version="1.0" encoding="utf-8"?>
-<c:chartSpace xmlns:c="http://schemas.openxmlformats.org/drawingml/2006/chart" xmlns:a="http://schemas.openxmlformats.org/drawingml/2006/main" xmlns:r="http://schemas.openxmlformats.org/officeDocument/2006/relationships">
+<c:chartSpace xmlns:c="http://schemas.openxmlformats.org/drawingml/2006/chart" xmlns:a="http://schemas.openxmlformats.org/drawingml/2006/main" xmlns:r="http://schemas.openxmlformats.org/officeDocument/2006/relationships" xmlns:c16r2="http://schemas.microsoft.com/office/drawing/2015/06/chart">
   <c:date1904 val="0"/>
+  <c:lang val="en-US"/>
   <c:roundedCorners val="1"/>
+  <c:style val="2"/>
   <c:chart>
     <c:autoTitleDeleted val="1"/>
     <c:plotArea>
@@ -466,18 +470,26 @@
           <c:invertIfNegative val="0"/>
           <c:dLbls>
             <c:numFmt formatCode="0" sourceLinked="0"/>
+            <c:spPr>
+              <a:noFill/>
+              <a:ln>
+                <a:noFill/>
+              </a:ln>
+              <a:effectLst/>
+            </c:spPr>
             <c:txPr>
               <a:bodyPr/>
               <a:lstStyle/>
               <a:p>
                 <a:pPr>
-                  <a:defRPr b="0" i="0" strike="noStrike" sz="1100" u="none">
+                  <a:defRPr sz="1100" b="0" i="0" u="none" strike="noStrike">
                     <a:solidFill>
                       <a:srgbClr val="1B1F2A"/>
                     </a:solidFill>
                     <a:latin typeface="Arial"/>
                   </a:defRPr>
                 </a:pPr>
+                <a:endParaRPr lang="en-US"/>
               </a:p>
             </c:txPr>
             <c:showLegendKey val="0"/>
@@ -487,28 +499,31 @@
             <c:showPercent val="0"/>
             <c:showBubbleSize val="0"/>
             <c:showLeaderLines val="0"/>
+            <c:extLst>
+              <c:ext xmlns:c15="http://schemas.microsoft.com/office/drawing/2012/chart" uri="{CE6537A1-D6FC-4f65-9D91-7224C49458BB}">
+                <c15:showLeaderLines val="0"/>
+              </c:ext>
+            </c:extLst>
           </c:dLbls>
           <c:cat>
-            <c:multiLvlStrRef>
+            <c:strRef>
               <c:f>Sheet1!$A$2:$A$5</c:f>
-              <c:multiLvlStrCache>
+              <c:strCache>
                 <c:ptCount val="4"/>
-                <c:lvl>
-                  <c:pt idx="0">
-                    <c:v>1: question only</c:v>
-                  </c:pt>
-                  <c:pt idx="1">
-                    <c:v>2: + evidence</c:v>
-                  </c:pt>
-                  <c:pt idx="2">
-                    <c:v>3: + shape, verifier</c:v>
-                  </c:pt>
-                  <c:pt idx="3">
-                    <c:v>4-8: + one slice each</c:v>
-                  </c:pt>
-                </c:lvl>
-              </c:multiLvlStrCache>
-            </c:multiLvlStrRef>
+                <c:pt idx="0">
+                  <c:v>1: question only</c:v>
+                </c:pt>
+                <c:pt idx="1">
+                  <c:v>2: + evidence</c:v>
+                </c:pt>
+                <c:pt idx="2">
+                  <c:v>3: + shape, verifier</c:v>
+                </c:pt>
+                <c:pt idx="3">
+                  <c:v>4-8: + one slice each</c:v>
+                </c:pt>
+              </c:strCache>
+            </c:strRef>
           </c:cat>
           <c:val>
             <c:numRef>
@@ -531,36 +546,23 @@
               </c:numCache>
             </c:numRef>
           </c:val>
+          <c:extLst>
+            <c:ext xmlns:c16="http://schemas.microsoft.com/office/drawing/2014/chart" uri="{C3380CC4-5D6E-409C-BE32-E72D297353CC}">
+              <c16:uniqueId val="{00000000-0C43-400C-B73A-90C20BBDFEC3}"/>
+            </c:ext>
+          </c:extLst>
         </c:ser>
         <c:dLbls>
-          <c:numFmt formatCode="0" sourceLinked="0"/>
-          <c:txPr>
-            <a:bodyPr/>
-            <a:lstStyle/>
-            <a:p>
-              <a:pPr>
-                <a:defRPr b="0" i="0" strike="noStrike" sz="1100" u="none">
-                  <a:solidFill>
-                    <a:srgbClr val="1B1F2A"/>
-                  </a:solidFill>
-                  <a:latin typeface="Arial"/>
-                </a:defRPr>
-              </a:pPr>
-            </a:p>
-          </c:txPr>
           <c:showLegendKey val="0"/>
           <c:showVal val="1"/>
           <c:showCatName val="0"/>
           <c:showSerName val="0"/>
           <c:showPercent val="0"/>
           <c:showBubbleSize val="0"/>
-          <c:showLeaderLines val="0"/>
         </c:dLbls>
         <c:gapWidth val="60"/>
-        <c:overlap val="0"/>
         <c:axId val="2094734554"/>
         <c:axId val="2094734552"/>
-        <c:axId val="2094734556"/>
       </c:barChart>
       <c:catAx>
         <c:axId val="2094734554"/>
@@ -599,6 +601,7 @@
         <c:crosses val="autoZero"/>
         <c:auto val="1"/>
         <c:lblAlgn val="ctr"/>
+        <c:lblOffset val="100"/>
         <c:noMultiLvlLbl val="1"/>
       </c:catAx>
       <c:valAx>
@@ -661,6 +664,7 @@
     </c:plotArea>
     <c:plotVisOnly val="1"/>
     <c:dispBlanksAs val="span"/>
+    <c:showDLblsOverMax val="1"/>
   </c:chart>
   <c:spPr>
     <a:noFill/>
@@ -676,9 +680,11 @@
 </file>
 
 <file path=ppt/charts/chart3.xml><?xml version="1.0" encoding="utf-8"?>
-<c:chartSpace xmlns:c="http://schemas.openxmlformats.org/drawingml/2006/chart" xmlns:a="http://schemas.openxmlformats.org/drawingml/2006/main" xmlns:r="http://schemas.openxmlformats.org/officeDocument/2006/relationships">
+<c:chartSpace xmlns:c="http://schemas.openxmlformats.org/drawingml/2006/chart" xmlns:a="http://schemas.openxmlformats.org/drawingml/2006/main" xmlns:r="http://schemas.openxmlformats.org/officeDocument/2006/relationships" xmlns:c16r2="http://schemas.microsoft.com/office/drawing/2015/06/chart">
   <c:date1904 val="0"/>
+  <c:lang val="en-US"/>
   <c:roundedCorners val="1"/>
+  <c:style val="2"/>
   <c:chart>
     <c:autoTitleDeleted val="1"/>
     <c:plotArea>
@@ -710,18 +716,26 @@
           <c:invertIfNegative val="0"/>
           <c:dLbls>
             <c:numFmt formatCode="0.0" sourceLinked="0"/>
+            <c:spPr>
+              <a:noFill/>
+              <a:ln>
+                <a:noFill/>
+              </a:ln>
+              <a:effectLst/>
+            </c:spPr>
             <c:txPr>
               <a:bodyPr/>
               <a:lstStyle/>
               <a:p>
                 <a:pPr>
-                  <a:defRPr b="0" i="0" strike="noStrike" sz="1100" u="none">
+                  <a:defRPr sz="1100" b="0" i="0" u="none" strike="noStrike">
                     <a:solidFill>
                       <a:srgbClr val="1B1F2A"/>
                     </a:solidFill>
                     <a:latin typeface="Arial"/>
                   </a:defRPr>
                 </a:pPr>
+                <a:endParaRPr lang="en-US"/>
               </a:p>
             </c:txPr>
             <c:showLegendKey val="0"/>
@@ -731,25 +745,28 @@
             <c:showPercent val="0"/>
             <c:showBubbleSize val="0"/>
             <c:showLeaderLines val="0"/>
+            <c:extLst>
+              <c:ext xmlns:c15="http://schemas.microsoft.com/office/drawing/2012/chart" uri="{CE6537A1-D6FC-4f65-9D91-7224C49458BB}">
+                <c15:showLeaderLines val="0"/>
+              </c:ext>
+            </c:extLst>
           </c:dLbls>
           <c:cat>
-            <c:multiLvlStrRef>
+            <c:strRef>
               <c:f>Sheet1!$A$2:$A$4</c:f>
-              <c:multiLvlStrCache>
+              <c:strCache>
                 <c:ptCount val="3"/>
-                <c:lvl>
-                  <c:pt idx="0">
-                    <c:v>1: question only</c:v>
-                  </c:pt>
-                  <c:pt idx="1">
-                    <c:v>3: + shape, verifier</c:v>
-                  </c:pt>
-                  <c:pt idx="2">
-                    <c:v>4-8: + one slice each</c:v>
-                  </c:pt>
-                </c:lvl>
-              </c:multiLvlStrCache>
-            </c:multiLvlStrRef>
+                <c:pt idx="0">
+                  <c:v>1: question only</c:v>
+                </c:pt>
+                <c:pt idx="1">
+                  <c:v>3: + shape, verifier</c:v>
+                </c:pt>
+                <c:pt idx="2">
+                  <c:v>4-8: + one slice each</c:v>
+                </c:pt>
+              </c:strCache>
+            </c:strRef>
           </c:cat>
           <c:val>
             <c:numRef>
@@ -769,36 +786,23 @@
               </c:numCache>
             </c:numRef>
           </c:val>
+          <c:extLst>
+            <c:ext xmlns:c16="http://schemas.microsoft.com/office/drawing/2014/chart" uri="{C3380CC4-5D6E-409C-BE32-E72D297353CC}">
+              <c16:uniqueId val="{00000000-33D6-4F6E-80AA-7078D3AC0AD3}"/>
+            </c:ext>
+          </c:extLst>
         </c:ser>
         <c:dLbls>
-          <c:numFmt formatCode="0.0" sourceLinked="0"/>
-          <c:txPr>
-            <a:bodyPr/>
-            <a:lstStyle/>
-            <a:p>
-              <a:pPr>
-                <a:defRPr b="0" i="0" strike="noStrike" sz="1100" u="none">
-                  <a:solidFill>
-                    <a:srgbClr val="1B1F2A"/>
-                  </a:solidFill>
-                  <a:latin typeface="Arial"/>
-                </a:defRPr>
-              </a:pPr>
-            </a:p>
-          </c:txPr>
           <c:showLegendKey val="0"/>
           <c:showVal val="1"/>
           <c:showCatName val="0"/>
           <c:showSerName val="0"/>
           <c:showPercent val="0"/>
           <c:showBubbleSize val="0"/>
-          <c:showLeaderLines val="0"/>
         </c:dLbls>
         <c:gapWidth val="60"/>
-        <c:overlap val="0"/>
         <c:axId val="2094734554"/>
         <c:axId val="2094734552"/>
-        <c:axId val="2094734556"/>
       </c:barChart>
       <c:catAx>
         <c:axId val="2094734554"/>
@@ -837,6 +841,7 @@
         <c:crosses val="autoZero"/>
         <c:auto val="1"/>
         <c:lblAlgn val="ctr"/>
+        <c:lblOffset val="100"/>
         <c:noMultiLvlLbl val="1"/>
       </c:catAx>
       <c:valAx>
@@ -899,6 +904,7 @@
     </c:plotArea>
     <c:plotVisOnly val="1"/>
     <c:dispBlanksAs val="span"/>
+    <c:showDLblsOverMax val="1"/>
   </c:chart>
   <c:spPr>
     <a:noFill/>
@@ -935,234 +941,10 @@
           <a:chExt cx="0" cy="0"/>
         </a:xfrm>
       </p:grpSpPr>
-      <p:sp>
-        <p:nvSpPr>
-          <p:cNvPr id="2" name="Header Placeholder 1"/>
-          <p:cNvSpPr>
-            <a:spLocks noGrp="1"/>
-          </p:cNvSpPr>
-          <p:nvPr>
-            <p:ph type="hdr" sz="quarter"/>
-          </p:nvPr>
-        </p:nvSpPr>
-        <p:spPr>
-          <a:xfrm>
-            <a:off x="0" y="0"/>
-            <a:ext cx="2971800" cy="458788"/>
-          </a:xfrm>
-          <a:prstGeom prst="rect">
-            <a:avLst/>
-          </a:prstGeom>
-        </p:spPr>
-        <p:txBody>
-          <a:bodyPr vert="horz" lIns="91440" tIns="45720" rIns="91440" bIns="45720" rtlCol="0"/>
-          <a:lstStyle>
-            <a:lvl1pPr algn="l">
-              <a:defRPr sz="1200"/>
-            </a:lvl1pPr>
-          </a:lstStyle>
-          <a:p>
-            <a:endParaRPr lang="en-US"/>
-          </a:p>
-        </p:txBody>
-      </p:sp>
-      <p:sp>
-        <p:nvSpPr>
-          <p:cNvPr id="3" name="Date Placeholder 2"/>
-          <p:cNvSpPr>
-            <a:spLocks noGrp="1"/>
-          </p:cNvSpPr>
-          <p:nvPr>
-            <p:ph type="dt" idx="1"/>
-          </p:nvPr>
-        </p:nvSpPr>
-        <p:spPr>
-          <a:xfrm>
-            <a:off x="3884613" y="0"/>
-            <a:ext cx="2971800" cy="458788"/>
-          </a:xfrm>
-          <a:prstGeom prst="rect">
-            <a:avLst/>
-          </a:prstGeom>
-        </p:spPr>
-        <p:txBody>
-          <a:bodyPr vert="horz" lIns="91440" tIns="45720" rIns="91440" bIns="45720" rtlCol="0"/>
-          <a:lstStyle>
-            <a:lvl1pPr algn="r">
-              <a:defRPr sz="1200"/>
-            </a:lvl1pPr>
-          </a:lstStyle>
-          <a:p>
-            <a:fld id="{5282F153-3F37-0F45-9E97-73ACFA13230C}" type="datetimeFigureOut">
-              <a:rPr lang="en-US"/>
-              <a:t>7/23/19</a:t>
-            </a:fld>
-            <a:endParaRPr lang="en-US"/>
-          </a:p>
-        </p:txBody>
-      </p:sp>
-      <p:sp>
-        <p:nvSpPr>
-          <p:cNvPr id="4" name="Slide Image Placeholder 3"/>
-          <p:cNvSpPr>
-            <a:spLocks noGrp="1" noRot="1" noChangeAspect="1"/>
-          </p:cNvSpPr>
-          <p:nvPr>
-            <p:ph type="sldImg" idx="2"/>
-          </p:nvPr>
-        </p:nvSpPr>
-        <p:spPr>
-          <a:xfrm>
-            <a:off x="685800" y="1143000"/>
-            <a:ext cx="5486400" cy="3086100"/>
-          </a:xfrm>
-          <a:prstGeom prst="rect">
-            <a:avLst/>
-          </a:prstGeom>
-          <a:noFill/>
-          <a:ln w="12700">
-            <a:solidFill>
-              <a:prstClr val="black"/>
-            </a:solidFill>
-          </a:ln>
-        </p:spPr>
-        <p:txBody>
-          <a:bodyPr vert="horz" lIns="91440" tIns="45720" rIns="91440" bIns="45720" rtlCol="0" anchor="ctr"/>
-          <a:lstStyle/>
-          <a:p>
-            <a:endParaRPr lang="en-US"/>
-          </a:p>
-        </p:txBody>
-      </p:sp>
-      <p:sp>
-        <p:nvSpPr>
-          <p:cNvPr id="5" name="Notes Placeholder 4"/>
-          <p:cNvSpPr>
-            <a:spLocks noGrp="1"/>
-          </p:cNvSpPr>
-          <p:nvPr>
-            <p:ph type="body" sz="quarter" idx="3"/>
-          </p:nvPr>
-        </p:nvSpPr>
-        <p:spPr>
-          <a:xfrm>
-            <a:off x="685800" y="4400550"/>
-            <a:ext cx="5486400" cy="3600450"/>
-          </a:xfrm>
-          <a:prstGeom prst="rect">
-            <a:avLst/>
-          </a:prstGeom>
-        </p:spPr>
-        <p:txBody>
-          <a:bodyPr vert="horz" lIns="91440" tIns="45720" rIns="91440" bIns="45720" rtlCol="0"/>
-          <a:lstStyle/>
-          <a:p>
-            <a:pPr lvl="0"/>
-            <a:r>
-              <a:rPr lang="en-US"/>
-              <a:t>Click to edit Master text styles</a:t>
-            </a:r>
-          </a:p>
-          <a:p>
-            <a:pPr lvl="1"/>
-            <a:r>
-              <a:rPr lang="en-US"/>
-              <a:t>Second level</a:t>
-            </a:r>
-          </a:p>
-          <a:p>
-            <a:pPr lvl="2"/>
-            <a:r>
-              <a:rPr lang="en-US"/>
-              <a:t>Third level</a:t>
-            </a:r>
-          </a:p>
-          <a:p>
-            <a:pPr lvl="3"/>
-            <a:r>
-              <a:rPr lang="en-US"/>
-              <a:t>Fourth level</a:t>
-            </a:r>
-          </a:p>
-          <a:p>
-            <a:pPr lvl="4"/>
-            <a:r>
-              <a:rPr lang="en-US"/>
-              <a:t>Fifth level</a:t>
-            </a:r>
-          </a:p>
-        </p:txBody>
-      </p:sp>
-      <p:sp>
-        <p:nvSpPr>
-          <p:cNvPr id="6" name="Footer Placeholder 5"/>
-          <p:cNvSpPr>
-            <a:spLocks noGrp="1"/>
-          </p:cNvSpPr>
-          <p:nvPr>
-            <p:ph type="ftr" sz="quarter" idx="4"/>
-          </p:nvPr>
-        </p:nvSpPr>
-        <p:spPr>
-          <a:xfrm>
-            <a:off x="0" y="8685213"/>
-            <a:ext cx="2971800" cy="458787"/>
-          </a:xfrm>
-          <a:prstGeom prst="rect">
-            <a:avLst/>
-          </a:prstGeom>
-        </p:spPr>
-        <p:txBody>
-          <a:bodyPr vert="horz" lIns="91440" tIns="45720" rIns="91440" bIns="45720" rtlCol="0" anchor="b"/>
-          <a:lstStyle>
-            <a:lvl1pPr algn="l">
-              <a:defRPr sz="1200"/>
-            </a:lvl1pPr>
-          </a:lstStyle>
-          <a:p>
-            <a:endParaRPr lang="en-US"/>
-          </a:p>
-        </p:txBody>
-      </p:sp>
-      <p:sp>
-        <p:nvSpPr>
-          <p:cNvPr id="7" name="Slide Number Placeholder 6"/>
-          <p:cNvSpPr>
-            <a:spLocks noGrp="1"/>
-          </p:cNvSpPr>
-          <p:nvPr>
-            <p:ph type="sldNum" sz="quarter" idx="5"/>
-          </p:nvPr>
-        </p:nvSpPr>
-        <p:spPr>
-          <a:xfrm>
-            <a:off x="3884613" y="8685213"/>
-            <a:ext cx="2971800" cy="458787"/>
-          </a:xfrm>
-          <a:prstGeom prst="rect">
-            <a:avLst/>
-          </a:prstGeom>
-        </p:spPr>
-        <p:txBody>
-          <a:bodyPr vert="horz" lIns="91440" tIns="45720" rIns="91440" bIns="45720" rtlCol="0" anchor="b"/>
-          <a:lstStyle>
-            <a:lvl1pPr algn="r">
-              <a:defRPr sz="1200"/>
-            </a:lvl1pPr>
-          </a:lstStyle>
-          <a:p>
-            <a:fld id="{CE5E9CC1-C706-0F49-92D6-E571CC5EEA8F}" type="slidenum">
-              <a:rPr lang="en-US"/>
-              <a:t>‹#›</a:t>
-            </a:fld>
-            <a:endParaRPr lang="en-US"/>
-          </a:p>
-        </p:txBody>
-      </p:sp>
     </p:spTree>
     <p:extLst>
       <p:ext uri="{BB962C8B-B14F-4D97-AF65-F5344CB8AC3E}">
-        <p14:creationId xmlns:p14="http://schemas.microsoft.com/office/powerpoint/2010/main" val="1024086991"/>
+        <p14:creationId xmlns:p14="http://schemas.microsoft.com/office/powerpoint/2010/main" val="3323670591"/>
       </p:ext>
     </p:extLst>
   </p:cSld>
@@ -1310,7 +1092,6 @@
               <a:rPr lang="en-US" dirty="0"/>
               <a:t>Before the session: start the app (fedcast ui), press Pull evidence then Run forecast so the top bar reads 'under an hour ago', open the Forecast view, and have the Evidence graph, Analyst prompts, Analyst results and Scorecard tabs one click away. Open with the one-line thesis: a language model inside an engineered harness gives forecasts that are measurably more repeatable and more faithful to evidence than the same model asked naively, and the way to prove it is to measure the process, not to wait for eight decisions a year to come true.</a:t>
             </a:r>
-            <a:endParaRPr lang="en-US" dirty="0"/>
           </a:p>
         </p:txBody>
       </p:sp>
@@ -1398,7 +1179,6 @@
               <a:rPr lang="en-US" dirty="0"/>
               <a:t>Three things a language model cannot be made to stop doing: it remembers, it varies between runs, and it can invent support. None is removed. Each is designed around, and the design is measured on every snapshot. Walk the three columns top to bottom: the limit, what we do, the proof. The proof numbers are from the 28 October records and the four-snapshot means.</a:t>
             </a:r>
-            <a:endParaRPr lang="en-US" dirty="0"/>
           </a:p>
         </p:txBody>
       </p:sp>
@@ -1486,7 +1266,6 @@
               <a:rPr lang="en-US" dirty="0"/>
               <a:t>One model, the same frozen evidence, eight configurations. Left: analysts 1 to 3 are controls, drawn grey and dashed; they never enter the number. Right: the five specialists that do. Every analyst runs five times on the same snapshot; for 1 to 3 those runs build the benchmark 4 to 8 are measured against. Analyst 1 sets the baseline (variance, numbers from memory, nothing quoted); 2 tests what immutable evidence fixes; 3 tests the answer shape and code verification. Each rung adds one thing, so the change in the measurements is the value of that thing.</a:t>
             </a:r>
-            <a:endParaRPr lang="en-US" dirty="0"/>
           </a:p>
         </p:txBody>
       </p:sp>
@@ -1574,7 +1353,6 @@
               <a:rPr lang="en-US" dirty="0"/>
               <a:t>Every specialist run passes through the same five stages: tools off and one slice only; immutable evidence plus pre-reads computed by code; a fixed answer shape enforced as a JSON schema; verification by code with one repair round; recorded, five identical runs. The band is analysts 4 to 8 on the 28 October snapshot: 25 runs, 263 claims, all 263 verified with no number from memory, five direction calls. Bottom left: four said hike, labour said no hike; the plain mean is +4.0 bp, which moves 4.0 points of probability toward a hike after the pool, +25 bp from 20.2 to 22.4%. Bottom right: one verified claim exactly as recorded.</a:t>
             </a:r>
-            <a:endParaRPr lang="en-US" dirty="0"/>
           </a:p>
         </p:txBody>
       </p:sp>
@@ -1662,7 +1440,6 @@
               <a:rPr lang="en-US" dirty="0"/>
               <a:t>Open analyst 1 first so the contrast with analyst 6 lands. Scroll the full prompt slowly past the schema and the pre-read; do not read it out.</a:t>
             </a:r>
-            <a:endParaRPr lang="en-US" dirty="0"/>
           </a:p>
         </p:txBody>
       </p:sp>
@@ -1750,7 +1527,6 @@
               <a:rPr lang="en-US" dirty="0"/>
               <a:t>Three charts, one per dimension, averaged over the four snapshots. Left: how much the answer moves between identical runs. The step that matters is analyst 2 to analyst 3: the answer shape and the verifier take the wobble from three and a half points to under one. Middle: numbers from memory, gone as soon as the evidence is shown. Right: share of claims whose quote code found verbatim; analyst 2 cannot be measured because it quotes nothing. The specialists keep what analyst 3 achieved. For analysts 3 to 8 the wobble is in their lean, which maps one basis point to one percentage point of probability, so the four bars are comparable.</a:t>
             </a:r>
-            <a:endParaRPr lang="en-US" dirty="0"/>
           </a:p>
         </p:txBody>
       </p:sp>
@@ -1838,7 +1614,6 @@
               <a:rPr lang="en-US" dirty="0"/>
               <a:t>Make it concrete: the five leans behind entry #18, and one real claim with the quote code matched. The labour analyst is the one that does not lean hawkish, and because it is a separate reader that dissent is visible rather than averaged away.</a:t>
             </a:r>
-            <a:endParaRPr lang="en-US" dirty="0"/>
           </a:p>
         </p:txBody>
       </p:sp>
@@ -1926,7 +1701,6 @@
               <a:rPr lang="en-US" dirty="0"/>
               <a:t>If asked where a quote comes from, open the statement claim on analyst 4: the quote is the statement's own line, found by code in item fed.statement.2026-09-16.</a:t>
             </a:r>
-            <a:endParaRPr lang="en-US" dirty="0"/>
           </a:p>
         </p:txBody>
       </p:sp>
@@ -2014,7 +1788,6 @@
               <a:rPr lang="en-US" dirty="0"/>
               <a:t>Ten dimensions fixed before any forecasting code existed. Eight are now measured automatically on each new snapshot. The over-time table is the drift check: the marks never move, so a cell that turns red is a change in the system. It has already caught two things, bottom right.</a:t>
             </a:r>
-            <a:endParaRPr lang="en-US" dirty="0"/>
           </a:p>
         </p:txBody>
       </p:sp>
@@ -2102,7 +1875,6 @@
               <a:rPr lang="en-US" dirty="0"/>
               <a:t>If time is short, skip the dropdown and go straight to the over-time table.</a:t>
             </a:r>
-            <a:endParaRPr lang="en-US" dirty="0"/>
           </a:p>
         </p:txBody>
       </p:sp>
@@ -2190,7 +1962,6 @@
               <a:rPr lang="en-US" dirty="0"/>
               <a:t>One minute. Press the button, read the result line, move on.</a:t>
             </a:r>
-            <a:endParaRPr lang="en-US" dirty="0"/>
           </a:p>
         </p:txBody>
       </p:sp>
@@ -2276,9 +2047,8 @@
           <a:p>
             <a:r>
               <a:rPr lang="en-US" dirty="0"/>
-              <a:t>One minute. The thread to pull: every system on the right had to put a model's output in front of people making live decisions, and the hard part was never the model, it was earning trust in what it said. FedCast is that problem made explicit and measurable.</a:t>
-            </a:r>
-            <a:endParaRPr lang="en-US" dirty="0"/>
+              <a:t>One minute. The thread: every system on the right put a model's output in front of people making live decisions, and the hard part was never the model, it was earning trust in what it said. FedCast is that problem made explicit and measurable.</a:t>
+            </a:r>
           </a:p>
         </p:txBody>
       </p:sp>
@@ -2308,7 +2078,7 @@
     </p:spTree>
     <p:extLst>
       <p:ext uri="{BB962C8B-B14F-4D97-AF65-F5344CB8AC3E}">
-        <p14:creationId xmlns:p14="http://schemas.microsoft.com/office/powerpoint/2010/main" val="1024086991"/>
+        <p14:creationId xmlns:p14="http://schemas.microsoft.com/office/powerpoint/2010/main" val="2757727718"/>
       </p:ext>
     </p:extLst>
   </p:cSld>
@@ -2366,7 +2136,6 @@
               <a:rPr lang="en-US" dirty="0"/>
               <a:t>Left, the limits, said before anyone asks: one scored decision; weights by judgement; the fitted model outside; the market is the anchor. Right, what is next, in order of value: the December window is already running on the same chain; pre-registered weight sets scored live; an events agent for the regime shifts the models cannot read (1987, 1998, 2008, 2020 were financial-stress cuts); the reasoning grader and a second model family.</a:t>
             </a:r>
-            <a:endParaRPr lang="en-US" dirty="0"/>
           </a:p>
         </p:txBody>
       </p:sp>
@@ -2454,7 +2223,6 @@
               <a:rPr lang="en-US" dirty="0"/>
               <a:t>Close on the ask. The forecast for 28 October is on file; the scoring is automatic from here; what the room can add is scrutiny and the next target.</a:t>
             </a:r>
-            <a:endParaRPr lang="en-US" dirty="0"/>
           </a:p>
         </p:txBody>
       </p:sp>
@@ -2542,7 +2310,6 @@
               <a:rPr lang="en-US" dirty="0"/>
               <a:t>Read left to right as an evolution. Analyst 1 wobbles by three to five points between identical runs, cites nothing, and leaks three dozen numbers from memory; it still thinks the Fed is cutting. Adding the evidence (analyst 2) removes the leaks but not the wobble, and nothing can be checked. Adding the answer shape and the verifier (analyst 3) is the step that makes the output stable and fully verifiable. Specialists (4 to 8) keep that and add attribution. Same model, same day; the difference at each step is the one thing added.</a:t>
             </a:r>
-            <a:endParaRPr lang="en-US" dirty="0"/>
           </a:p>
         </p:txBody>
       </p:sp>
@@ -2630,7 +2397,6 @@
               <a:rPr lang="en-US" dirty="0"/>
               <a:t>The question is narrow on purpose: what will the FOMC decide at its next scheduled meeting, as probabilities over five outcomes. The final entry before the meeting said no change at 67.6%, hike at 22.4%, with the specialists leaning hawkish by four basis points. The Fed held, ten votes to two, and both dissents wanted the quarter-point hike the specialists were leaning toward. Say plainly that the market alone was more confident (90/10) and we do not claim to beat it at five weeks; what the system adds is the reasons, and the vote bore the reasons out. Then: one decision proves little, which is why the rest of the talk is about process.</a:t>
             </a:r>
-            <a:endParaRPr lang="en-US" dirty="0"/>
           </a:p>
         </p:txBody>
       </p:sp>
@@ -2718,7 +2484,6 @@
               <a:rPr lang="en-US" dirty="0"/>
               <a:t>Keep this to one minute. The point is only that the number exists, is dated, and is traceable. Do not explain the models yet.</a:t>
             </a:r>
-            <a:endParaRPr lang="en-US" dirty="0"/>
           </a:p>
         </p:txBody>
       </p:sp>
@@ -2806,7 +2571,6 @@
               <a:rPr lang="en-US" dirty="0"/>
               <a:t>Three reasons, the first is the one to land. Eight decisions a year cannot tell skill from luck, so we judge the process with a scorecard fixed before any code. Second, auditable means concrete: an analyst that says inflation is elevated must quote the line it read and code must find it. Third, because everything is quotable and the analysts can read only the evidence, a wrong call is a traceable wrong call, and because the harness is repeatable it goes wrong the same way every time, so a fix can be tested and stays fixed. Details later in the deck: the ladder, the scorecard, the drift table.</a:t>
             </a:r>
-            <a:endParaRPr lang="en-US" dirty="0"/>
           </a:p>
         </p:txBody>
       </p:sp>
@@ -2894,7 +2658,6 @@
               <a:rPr lang="en-US" dirty="0"/>
               <a:t>Four kinds of signal exist already; each is good at one thing. Market prices are the best single predictor at thirty days and are the anchor of the pool. Surveys carry judgement; FedCast takes the data the committee reads instead, as history and a fitted model. The rules are the Fed's own benchmarks. The LLM papers show a model can read the Fed, on sixteen meetings. FedCast's claim is not a better guess but the combination: one of each kind, pooled by code at fixed weights, every number traceable to frozen evidence.</a:t>
             </a:r>
-            <a:endParaRPr lang="en-US" dirty="0"/>
           </a:p>
         </p:txBody>
       </p:sp>
@@ -2982,7 +2745,6 @@
               <a:rPr lang="en-US" dirty="0"/>
               <a:t>Left: the diagram from the brief. Four families of input, combined by code with fixed, published weights; no model writes the number. The language-model family enters only as a bounded lean. Right: the chain in order, each line a view in the app. Walk the diagram first, then the chain.</a:t>
             </a:r>
-            <a:endParaRPr lang="en-US" dirty="0"/>
           </a:p>
         </p:txBody>
       </p:sp>
@@ -3070,7 +2832,6 @@
               <a:rPr lang="en-US" dirty="0"/>
               <a:t>Entry 18, the final one before the meeting. The pool is a weighted average, then the floor. The specialists' mean lean of +4.0 basis points becomes 4.0 points of probability moved toward a hike, through the same capped mechanism a human view uses. The lean row is tinted and labelled 'after pooling': it is a modifier on the pooled number, not a model in the pool. Then the footer: the weights are judgement, logged; ideally they would be backtested, but there is no live record yet, so live scores from 28 October onward decide them by amendment.</a:t>
             </a:r>
-            <a:endParaRPr lang="en-US" dirty="0"/>
           </a:p>
         </p:txBody>
       </p:sp>
@@ -3158,7 +2919,6 @@
               <a:rPr lang="en-US" dirty="0"/>
               <a:t>This is the longest demo. Start at the raw futures price so the audience sees arithmetic, not a black box. Then the pool box, then one click into an evidence item to show the frozen text.</a:t>
             </a:r>
-            <a:endParaRPr lang="en-US" dirty="0"/>
           </a:p>
         </p:txBody>
       </p:sp>
@@ -3236,6 +2996,7 @@
         <a:solidFill>
           <a:srgbClr val="1E2761"/>
         </a:solidFill>
+        <a:effectLst/>
       </p:bgPr>
     </p:bg>
     <p:spTree>
@@ -3255,9 +3016,11 @@
       <p:sp>
         <p:nvSpPr>
           <p:cNvPr id="2" name="Text 0"/>
-          <p:cNvSpPr/>
+          <p:cNvSpPr>
+            <a:spLocks noGrp="1"/>
+          </p:cNvSpPr>
           <p:nvPr>
-            <p:ph idx="100" type="title" hasCustomPrompt="1"/>
+            <p:ph type="title" idx="100" hasCustomPrompt="1"/>
           </p:nvPr>
         </p:nvSpPr>
         <p:spPr>
@@ -3274,7 +3037,7 @@
         <p:txBody>
           <a:bodyPr wrap="square" rtlCol="0"/>
           <a:lstStyle>
-            <a:lvl1pPr algn="l" indent="0" marL="0">
+            <a:lvl1pPr marL="0" indent="0" algn="l">
               <a:buNone/>
               <a:defRPr lang="en-US" sz="4000" b="1" dirty="0">
                 <a:solidFill>
@@ -3284,7 +3047,7 @@
             </a:lvl1pPr>
           </a:lstStyle>
           <a:p>
-            <a:pPr algn="l" indent="0" marL="0">
+            <a:pPr marL="0" indent="0" algn="l">
               <a:buNone/>
             </a:pPr>
             <a:endParaRPr lang="en-US" sz="4000" dirty="0"/>
@@ -3294,9 +3057,11 @@
       <p:sp>
         <p:nvSpPr>
           <p:cNvPr id="3" name="Text 0"/>
-          <p:cNvSpPr/>
+          <p:cNvSpPr>
+            <a:spLocks noGrp="1"/>
+          </p:cNvSpPr>
           <p:nvPr>
-            <p:ph idx="101" type="body" hasCustomPrompt="1"/>
+            <p:ph type="body" idx="101" hasCustomPrompt="1"/>
           </p:nvPr>
         </p:nvSpPr>
         <p:spPr>
@@ -3313,7 +3078,7 @@
         <p:txBody>
           <a:bodyPr wrap="square" rtlCol="0"/>
           <a:lstStyle>
-            <a:lvl1pPr algn="l" indent="0" marL="0">
+            <a:lvl1pPr marL="0" indent="0" algn="l">
               <a:buNone/>
               <a:defRPr lang="en-US" sz="2000" dirty="0">
                 <a:solidFill>
@@ -3323,7 +3088,7 @@
             </a:lvl1pPr>
           </a:lstStyle>
           <a:p>
-            <a:pPr algn="l" indent="0" marL="0">
+            <a:pPr marL="0" indent="0" algn="l">
               <a:buNone/>
             </a:pPr>
             <a:endParaRPr lang="en-US" sz="2000" dirty="0"/>
@@ -3346,6 +3111,7 @@
         <a:solidFill>
           <a:srgbClr val="FFFFFF"/>
         </a:solidFill>
+        <a:effectLst/>
       </p:bgPr>
     </p:bg>
     <p:spTree>
@@ -3365,9 +3131,11 @@
       <p:sp>
         <p:nvSpPr>
           <p:cNvPr id="2" name="Text 0"/>
-          <p:cNvSpPr/>
+          <p:cNvSpPr>
+            <a:spLocks noGrp="1"/>
+          </p:cNvSpPr>
           <p:nvPr>
-            <p:ph idx="100" type="title" hasCustomPrompt="1"/>
+            <p:ph type="title" idx="100" hasCustomPrompt="1"/>
           </p:nvPr>
         </p:nvSpPr>
         <p:spPr>
@@ -3384,7 +3152,7 @@
         <p:txBody>
           <a:bodyPr wrap="square" rtlCol="0"/>
           <a:lstStyle>
-            <a:lvl1pPr algn="l" indent="0" marL="0">
+            <a:lvl1pPr marL="0" indent="0" algn="l">
               <a:buNone/>
               <a:defRPr lang="en-US" sz="3200" b="1" dirty="0">
                 <a:solidFill>
@@ -3394,7 +3162,7 @@
             </a:lvl1pPr>
           </a:lstStyle>
           <a:p>
-            <a:pPr algn="l" indent="0" marL="0">
+            <a:pPr marL="0" indent="0" algn="l">
               <a:buNone/>
             </a:pPr>
             <a:endParaRPr lang="en-US" sz="3200" dirty="0"/>
@@ -3422,7 +3190,7 @@
           <a:bodyPr wrap="square" lIns="0" tIns="0" rIns="0" bIns="0" rtlCol="0" anchor="ctr"/>
           <a:lstStyle/>
           <a:p>
-            <a:pPr indent="0" marL="0">
+            <a:pPr marL="0" indent="0">
               <a:buNone/>
             </a:pPr>
             <a:r>
@@ -3457,7 +3225,7 @@
           </a:prstGeom>
           <a:extLst>
             <a:ext uri="{C572A759-6A51-4108-AA02-DFA0A04FC94B}">
-              <ma14:wrappingTextBoxFlag xmlns:ma14="http://schemas.microsoft.com/office/mac/drawingml/2011/main" val="0"/>
+              <ma14:wrappingTextBoxFlag xmlns:ma14="http://schemas.microsoft.com/office/mac/drawingml/2011/main" xmlns="" val="0"/>
             </a:ext>
           </a:extLst>
         </p:spPr>
@@ -3475,8 +3243,8 @@
           <a:p>
             <a:pPr algn="r"/>
             <a:fld id="{F7021451-1387-4CA6-816F-3879F97B5CBC}" type="slidenum">
-              <a:rPr b="0" lang="en-US"/>
-              <a:t>1003</a:t>
+              <a:rPr lang="en-US" b="0"/>
+              <a:t>‹#›</a:t>
             </a:fld>
             <a:endParaRPr lang="en-US"/>
           </a:p>
@@ -3498,6 +3266,7 @@
         <a:solidFill>
           <a:srgbClr val="1B1F2A"/>
         </a:solidFill>
+        <a:effectLst/>
       </p:bgPr>
     </p:bg>
     <p:spTree>
@@ -3517,9 +3286,11 @@
       <p:sp>
         <p:nvSpPr>
           <p:cNvPr id="2" name="Text 0"/>
-          <p:cNvSpPr/>
+          <p:cNvSpPr>
+            <a:spLocks noGrp="1"/>
+          </p:cNvSpPr>
           <p:nvPr>
-            <p:ph idx="100" type="title" hasCustomPrompt="1"/>
+            <p:ph type="title" idx="100" hasCustomPrompt="1"/>
           </p:nvPr>
         </p:nvSpPr>
         <p:spPr>
@@ -3536,7 +3307,7 @@
         <p:txBody>
           <a:bodyPr wrap="square" rtlCol="0"/>
           <a:lstStyle>
-            <a:lvl1pPr algn="l" indent="0" marL="0">
+            <a:lvl1pPr marL="0" indent="0" algn="l">
               <a:buNone/>
               <a:defRPr lang="en-US" sz="3000" b="1" dirty="0">
                 <a:solidFill>
@@ -3546,7 +3317,7 @@
             </a:lvl1pPr>
           </a:lstStyle>
           <a:p>
-            <a:pPr algn="l" indent="0" marL="0">
+            <a:pPr marL="0" indent="0" algn="l">
               <a:buNone/>
             </a:pPr>
             <a:endParaRPr lang="en-US" sz="3000" dirty="0"/>
@@ -3574,7 +3345,7 @@
           <a:bodyPr wrap="square" lIns="0" tIns="0" rIns="0" bIns="0" rtlCol="0" anchor="ctr"/>
           <a:lstStyle/>
           <a:p>
-            <a:pPr indent="0" marL="0">
+            <a:pPr marL="0" indent="0">
               <a:buNone/>
             </a:pPr>
             <a:r>
@@ -3600,6 +3371,11 @@
 <file path=ppt/slideMasters/slideMaster1.xml><?xml version="1.0" encoding="utf-8"?>
 <p:sldMaster xmlns:a="http://schemas.openxmlformats.org/drawingml/2006/main" xmlns:r="http://schemas.openxmlformats.org/officeDocument/2006/relationships" xmlns:p="http://schemas.openxmlformats.org/presentationml/2006/main">
   <p:cSld>
+    <p:bg>
+      <p:bgRef idx="1001">
+        <a:schemeClr val="bg1"/>
+      </p:bgRef>
+    </p:bg>
     <p:spTree>
       <p:nvGrpSpPr>
         <p:cNvPr id="1" name=""/>
@@ -3634,7 +3410,7 @@
           </a:prstGeom>
           <a:extLst>
             <a:ext uri="{C572A759-6A51-4108-AA02-DFA0A04FC94B}">
-              <ma14:wrappingTextBoxFlag xmlns:ma14="http://schemas.microsoft.com/office/mac/drawingml/2011/main" val="0"/>
+              <ma14:wrappingTextBoxFlag xmlns:ma14="http://schemas.microsoft.com/office/mac/drawingml/2011/main" xmlns="" val="0"/>
             </a:ext>
           </a:extLst>
         </p:spPr>
@@ -3652,8 +3428,8 @@
           <a:p>
             <a:pPr algn="r"/>
             <a:fld id="{F7021451-1387-4CA6-816F-3879F97B5CBC}" type="slidenum">
-              <a:rPr b="0" lang="en-US"/>
-              <a:t>null</a:t>
+              <a:rPr lang="en-US" b="0"/>
+              <a:t>‹#›</a:t>
             </a:fld>
             <a:endParaRPr lang="en-US"/>
           </a:p>
@@ -3942,9 +3718,11 @@
       <p:sp>
         <p:nvSpPr>
           <p:cNvPr id="2" name="Text 0"/>
-          <p:cNvSpPr/>
+          <p:cNvSpPr>
+            <a:spLocks noGrp="1"/>
+          </p:cNvSpPr>
           <p:nvPr>
-            <p:ph idx="100" type="title" hasCustomPrompt="1"/>
+            <p:ph type="title" idx="100" hasCustomPrompt="1"/>
           </p:nvPr>
         </p:nvSpPr>
         <p:spPr>
@@ -3962,7 +3740,7 @@
           <a:bodyPr wrap="square" lIns="0" tIns="0" rIns="0" bIns="0" rtlCol="0" anchor="b"/>
           <a:lstStyle/>
           <a:p>
-            <a:pPr algn="l" indent="0" marL="0">
+            <a:pPr marL="0" indent="0" algn="l">
               <a:buNone/>
             </a:pPr>
             <a:r>
@@ -3980,9 +3758,11 @@
       <p:sp>
         <p:nvSpPr>
           <p:cNvPr id="3" name="Text 0"/>
-          <p:cNvSpPr/>
+          <p:cNvSpPr>
+            <a:spLocks noGrp="1"/>
+          </p:cNvSpPr>
           <p:nvPr>
-            <p:ph idx="101" type="body" hasCustomPrompt="1"/>
+            <p:ph type="body" idx="101" hasCustomPrompt="1"/>
           </p:nvPr>
         </p:nvSpPr>
         <p:spPr>
@@ -4000,7 +3780,7 @@
           <a:bodyPr wrap="square" lIns="0" tIns="0" rIns="0" bIns="0" rtlCol="0" anchor="t"/>
           <a:lstStyle/>
           <a:p>
-            <a:pPr algn="l" indent="0" marL="0">
+            <a:pPr marL="0" indent="0" algn="l">
               <a:buNone/>
             </a:pPr>
             <a:r>
@@ -4036,7 +3816,7 @@
           <a:bodyPr wrap="square" lIns="0" tIns="0" rIns="0" bIns="0" rtlCol="0" anchor="t"/>
           <a:lstStyle/>
           <a:p>
-            <a:pPr indent="0" marL="0">
+            <a:pPr marL="0" indent="0">
               <a:buNone/>
             </a:pPr>
             <a:r>
@@ -4079,9 +3859,11 @@
       <p:sp>
         <p:nvSpPr>
           <p:cNvPr id="2" name="Text 0"/>
-          <p:cNvSpPr/>
+          <p:cNvSpPr>
+            <a:spLocks noGrp="1"/>
+          </p:cNvSpPr>
           <p:nvPr>
-            <p:ph idx="100" type="title" hasCustomPrompt="1"/>
+            <p:ph type="title" idx="100" hasCustomPrompt="1"/>
           </p:nvPr>
         </p:nvSpPr>
         <p:spPr>
@@ -4099,7 +3881,7 @@
           <a:bodyPr wrap="square" lIns="0" tIns="0" rIns="0" bIns="0" rtlCol="0" anchor="ctr"/>
           <a:lstStyle/>
           <a:p>
-            <a:pPr algn="l" indent="0" marL="0">
+            <a:pPr marL="0" indent="0" algn="l">
               <a:buNone/>
             </a:pPr>
             <a:r>
@@ -4135,7 +3917,7 @@
           <a:bodyPr wrap="square" lIns="0" tIns="0" rIns="0" bIns="0" rtlCol="0" anchor="t"/>
           <a:lstStyle/>
           <a:p>
-            <a:pPr indent="0" marL="0">
+            <a:pPr marL="0" indent="0">
               <a:buNone/>
             </a:pPr>
             <a:r>
@@ -4223,11 +4005,11 @@
           <a:bodyPr wrap="square" lIns="0" tIns="0" rIns="0" bIns="0" rtlCol="0" anchor="t"/>
           <a:lstStyle/>
           <a:p>
-            <a:pPr indent="0" marL="0">
-              <a:buNone/>
-            </a:pPr>
-            <a:r>
-              <a:rPr lang="en-US" sz="900" b="1" spc="100" kern="0" dirty="0">
+            <a:pPr marL="0" indent="0">
+              <a:buNone/>
+            </a:pPr>
+            <a:r>
+              <a:rPr lang="en-US" sz="900" b="1" kern="0" spc="100" dirty="0">
                 <a:solidFill>
                   <a:srgbClr val="F8D7CE"/>
                 </a:solidFill>
@@ -4259,7 +4041,7 @@
           <a:bodyPr wrap="square" lIns="0" tIns="0" rIns="0" bIns="0" rtlCol="0" anchor="t"/>
           <a:lstStyle/>
           <a:p>
-            <a:pPr indent="0" marL="0">
+            <a:pPr marL="0" indent="0">
               <a:buNone/>
             </a:pPr>
             <a:r>
@@ -4295,7 +4077,7 @@
           <a:bodyPr wrap="square" lIns="0" tIns="0" rIns="0" bIns="0" rtlCol="0" anchor="t"/>
           <a:lstStyle/>
           <a:p>
-            <a:pPr indent="0" marL="0">
+            <a:pPr marL="0" indent="0">
               <a:buNone/>
             </a:pPr>
             <a:r>
@@ -4356,11 +4138,11 @@
           <a:bodyPr wrap="square" lIns="0" tIns="0" rIns="0" bIns="0" rtlCol="0" anchor="t"/>
           <a:lstStyle/>
           <a:p>
-            <a:pPr indent="0" marL="0">
-              <a:buNone/>
-            </a:pPr>
-            <a:r>
-              <a:rPr lang="en-US" sz="900" b="1" spc="100" kern="0" dirty="0">
+            <a:pPr marL="0" indent="0">
+              <a:buNone/>
+            </a:pPr>
+            <a:r>
+              <a:rPr lang="en-US" sz="900" b="1" kern="0" spc="100" dirty="0">
                 <a:solidFill>
                   <a:schemeClr val="accent4"/>
                 </a:solidFill>
@@ -4404,12 +4186,6 @@
               </a:rPr>
               <a:t>Prompt engineering: </a:t>
             </a:r>
-            <a:pPr indent="0" marL="0">
-              <a:spcAft>
-                <a:spcPts val="500"/>
-              </a:spcAft>
-              <a:buNone/>
-            </a:pPr>
             <a:r>
               <a:rPr lang="en-US" sz="1050" dirty="0">
                 <a:solidFill>
@@ -4433,12 +4209,6 @@
               </a:rPr>
               <a:t>Answer shape: </a:t>
             </a:r>
-            <a:pPr indent="0" marL="0">
-              <a:spcAft>
-                <a:spcPts val="500"/>
-              </a:spcAft>
-              <a:buNone/>
-            </a:pPr>
             <a:r>
               <a:rPr lang="en-US" sz="1050" dirty="0">
                 <a:solidFill>
@@ -4462,12 +4232,6 @@
               </a:rPr>
               <a:t>Harness: </a:t>
             </a:r>
-            <a:pPr indent="0" marL="0">
-              <a:spcAft>
-                <a:spcPts val="500"/>
-              </a:spcAft>
-              <a:buNone/>
-            </a:pPr>
             <a:r>
               <a:rPr lang="en-US" sz="1050" dirty="0">
                 <a:solidFill>
@@ -4528,11 +4292,11 @@
           <a:bodyPr wrap="square" lIns="0" tIns="0" rIns="0" bIns="0" rtlCol="0" anchor="t"/>
           <a:lstStyle/>
           <a:p>
-            <a:pPr indent="0" marL="0">
-              <a:buNone/>
-            </a:pPr>
-            <a:r>
-              <a:rPr lang="en-US" sz="900" b="1" spc="100" kern="0" dirty="0">
+            <a:pPr marL="0" indent="0">
+              <a:buNone/>
+            </a:pPr>
+            <a:r>
+              <a:rPr lang="en-US" sz="900" b="1" kern="0" spc="100" dirty="0">
                 <a:solidFill>
                   <a:schemeClr val="accent4"/>
                 </a:solidFill>
@@ -4564,7 +4328,7 @@
           <a:bodyPr wrap="square" lIns="0" tIns="0" rIns="0" bIns="0" rtlCol="0" anchor="ctr"/>
           <a:lstStyle/>
           <a:p>
-            <a:pPr indent="0" marL="0">
+            <a:pPr marL="0" indent="0">
               <a:buNone/>
             </a:pPr>
             <a:r>
@@ -4603,7 +4367,7 @@
           <a:bodyPr wrap="square" lIns="0" tIns="0" rIns="0" bIns="0" rtlCol="0" anchor="ctr"/>
           <a:lstStyle/>
           <a:p>
-            <a:pPr indent="0" marL="0">
+            <a:pPr marL="0" indent="0">
               <a:buNone/>
             </a:pPr>
             <a:r>
@@ -4691,11 +4455,11 @@
           <a:bodyPr wrap="square" lIns="0" tIns="0" rIns="0" bIns="0" rtlCol="0" anchor="t"/>
           <a:lstStyle/>
           <a:p>
-            <a:pPr indent="0" marL="0">
-              <a:buNone/>
-            </a:pPr>
-            <a:r>
-              <a:rPr lang="en-US" sz="900" b="1" spc="100" kern="0" dirty="0">
+            <a:pPr marL="0" indent="0">
+              <a:buNone/>
+            </a:pPr>
+            <a:r>
+              <a:rPr lang="en-US" sz="900" b="1" kern="0" spc="100" dirty="0">
                 <a:solidFill>
                   <a:srgbClr val="F8D7CE"/>
                 </a:solidFill>
@@ -4727,7 +4491,7 @@
           <a:bodyPr wrap="square" lIns="0" tIns="0" rIns="0" bIns="0" rtlCol="0" anchor="t"/>
           <a:lstStyle/>
           <a:p>
-            <a:pPr indent="0" marL="0">
+            <a:pPr marL="0" indent="0">
               <a:buNone/>
             </a:pPr>
             <a:r>
@@ -4763,7 +4527,7 @@
           <a:bodyPr wrap="square" lIns="0" tIns="0" rIns="0" bIns="0" rtlCol="0" anchor="t"/>
           <a:lstStyle/>
           <a:p>
-            <a:pPr indent="0" marL="0">
+            <a:pPr marL="0" indent="0">
               <a:buNone/>
             </a:pPr>
             <a:r>
@@ -4824,11 +4588,11 @@
           <a:bodyPr wrap="square" lIns="0" tIns="0" rIns="0" bIns="0" rtlCol="0" anchor="t"/>
           <a:lstStyle/>
           <a:p>
-            <a:pPr indent="0" marL="0">
-              <a:buNone/>
-            </a:pPr>
-            <a:r>
-              <a:rPr lang="en-US" sz="900" b="1" spc="100" kern="0" dirty="0">
+            <a:pPr marL="0" indent="0">
+              <a:buNone/>
+            </a:pPr>
+            <a:r>
+              <a:rPr lang="en-US" sz="900" b="1" kern="0" spc="100" dirty="0">
                 <a:solidFill>
                   <a:schemeClr val="accent4"/>
                 </a:solidFill>
@@ -4872,12 +4636,6 @@
               </a:rPr>
               <a:t>Answer shape: </a:t>
             </a:r>
-            <a:pPr indent="0" marL="0">
-              <a:spcAft>
-                <a:spcPts val="500"/>
-              </a:spcAft>
-              <a:buNone/>
-            </a:pPr>
             <a:r>
               <a:rPr lang="en-US" sz="1050" dirty="0">
                 <a:solidFill>
@@ -4901,12 +4659,6 @@
               </a:rPr>
               <a:t>Five identical runs </a:t>
             </a:r>
-            <a:pPr indent="0" marL="0">
-              <a:spcAft>
-                <a:spcPts val="500"/>
-              </a:spcAft>
-              <a:buNone/>
-            </a:pPr>
             <a:r>
               <a:rPr lang="en-US" sz="1050" dirty="0">
                 <a:solidFill>
@@ -4930,12 +4682,6 @@
               </a:rPr>
               <a:t>Repeatability is measured: </a:t>
             </a:r>
-            <a:pPr indent="0" marL="0">
-              <a:spcAft>
-                <a:spcPts val="500"/>
-              </a:spcAft>
-              <a:buNone/>
-            </a:pPr>
             <a:r>
               <a:rPr lang="en-US" sz="1050" dirty="0">
                 <a:solidFill>
@@ -4996,11 +4742,11 @@
           <a:bodyPr wrap="square" lIns="0" tIns="0" rIns="0" bIns="0" rtlCol="0" anchor="t"/>
           <a:lstStyle/>
           <a:p>
-            <a:pPr indent="0" marL="0">
-              <a:buNone/>
-            </a:pPr>
-            <a:r>
-              <a:rPr lang="en-US" sz="900" b="1" spc="100" kern="0" dirty="0">
+            <a:pPr marL="0" indent="0">
+              <a:buNone/>
+            </a:pPr>
+            <a:r>
+              <a:rPr lang="en-US" sz="900" b="1" kern="0" spc="100" dirty="0">
                 <a:solidFill>
                   <a:schemeClr val="accent4"/>
                 </a:solidFill>
@@ -5032,7 +4778,7 @@
           <a:bodyPr wrap="square" lIns="0" tIns="0" rIns="0" bIns="0" rtlCol="0" anchor="ctr"/>
           <a:lstStyle/>
           <a:p>
-            <a:pPr indent="0" marL="0">
+            <a:pPr marL="0" indent="0">
               <a:buNone/>
             </a:pPr>
             <a:r>
@@ -5071,7 +4817,7 @@
           <a:bodyPr wrap="square" lIns="0" tIns="0" rIns="0" bIns="0" rtlCol="0" anchor="ctr"/>
           <a:lstStyle/>
           <a:p>
-            <a:pPr indent="0" marL="0">
+            <a:pPr marL="0" indent="0">
               <a:buNone/>
             </a:pPr>
             <a:r>
@@ -5159,11 +4905,11 @@
           <a:bodyPr wrap="square" lIns="0" tIns="0" rIns="0" bIns="0" rtlCol="0" anchor="t"/>
           <a:lstStyle/>
           <a:p>
-            <a:pPr indent="0" marL="0">
-              <a:buNone/>
-            </a:pPr>
-            <a:r>
-              <a:rPr lang="en-US" sz="900" b="1" spc="100" kern="0" dirty="0">
+            <a:pPr marL="0" indent="0">
+              <a:buNone/>
+            </a:pPr>
+            <a:r>
+              <a:rPr lang="en-US" sz="900" b="1" kern="0" spc="100" dirty="0">
                 <a:solidFill>
                   <a:srgbClr val="F8D7CE"/>
                 </a:solidFill>
@@ -5195,7 +4941,7 @@
           <a:bodyPr wrap="square" lIns="0" tIns="0" rIns="0" bIns="0" rtlCol="0" anchor="t"/>
           <a:lstStyle/>
           <a:p>
-            <a:pPr indent="0" marL="0">
+            <a:pPr marL="0" indent="0">
               <a:buNone/>
             </a:pPr>
             <a:r>
@@ -5231,7 +4977,7 @@
           <a:bodyPr wrap="square" lIns="0" tIns="0" rIns="0" bIns="0" rtlCol="0" anchor="t"/>
           <a:lstStyle/>
           <a:p>
-            <a:pPr indent="0" marL="0">
+            <a:pPr marL="0" indent="0">
               <a:buNone/>
             </a:pPr>
             <a:r>
@@ -5292,11 +5038,11 @@
           <a:bodyPr wrap="square" lIns="0" tIns="0" rIns="0" bIns="0" rtlCol="0" anchor="t"/>
           <a:lstStyle/>
           <a:p>
-            <a:pPr indent="0" marL="0">
-              <a:buNone/>
-            </a:pPr>
-            <a:r>
-              <a:rPr lang="en-US" sz="900" b="1" spc="100" kern="0" dirty="0">
+            <a:pPr marL="0" indent="0">
+              <a:buNone/>
+            </a:pPr>
+            <a:r>
+              <a:rPr lang="en-US" sz="900" b="1" kern="0" spc="100" dirty="0">
                 <a:solidFill>
                   <a:schemeClr val="accent4"/>
                 </a:solidFill>
@@ -5340,12 +5086,6 @@
               </a:rPr>
               <a:t>Harness: </a:t>
             </a:r>
-            <a:pPr indent="0" marL="0">
-              <a:spcAft>
-                <a:spcPts val="500"/>
-              </a:spcAft>
-              <a:buNone/>
-            </a:pPr>
             <a:r>
               <a:rPr lang="en-US" sz="1050" dirty="0">
                 <a:solidFill>
@@ -5369,12 +5109,6 @@
               </a:rPr>
               <a:t>Bounds: </a:t>
             </a:r>
-            <a:pPr indent="0" marL="0">
-              <a:spcAft>
-                <a:spcPts val="500"/>
-              </a:spcAft>
-              <a:buNone/>
-            </a:pPr>
             <a:r>
               <a:rPr lang="en-US" sz="1050" dirty="0">
                 <a:solidFill>
@@ -5398,12 +5132,6 @@
               </a:rPr>
               <a:t>One repair round </a:t>
             </a:r>
-            <a:pPr indent="0" marL="0">
-              <a:spcAft>
-                <a:spcPts val="500"/>
-              </a:spcAft>
-              <a:buNone/>
-            </a:pPr>
             <a:r>
               <a:rPr lang="en-US" sz="1050" dirty="0">
                 <a:solidFill>
@@ -5464,11 +5192,11 @@
           <a:bodyPr wrap="square" lIns="0" tIns="0" rIns="0" bIns="0" rtlCol="0" anchor="t"/>
           <a:lstStyle/>
           <a:p>
-            <a:pPr indent="0" marL="0">
-              <a:buNone/>
-            </a:pPr>
-            <a:r>
-              <a:rPr lang="en-US" sz="900" b="1" spc="100" kern="0" dirty="0">
+            <a:pPr marL="0" indent="0">
+              <a:buNone/>
+            </a:pPr>
+            <a:r>
+              <a:rPr lang="en-US" sz="900" b="1" kern="0" spc="100" dirty="0">
                 <a:solidFill>
                   <a:schemeClr val="accent4"/>
                 </a:solidFill>
@@ -5500,7 +5228,7 @@
           <a:bodyPr wrap="square" lIns="0" tIns="0" rIns="0" bIns="0" rtlCol="0" anchor="ctr"/>
           <a:lstStyle/>
           <a:p>
-            <a:pPr indent="0" marL="0">
+            <a:pPr marL="0" indent="0">
               <a:buNone/>
             </a:pPr>
             <a:r>
@@ -5539,7 +5267,7 @@
           <a:bodyPr wrap="square" lIns="0" tIns="0" rIns="0" bIns="0" rtlCol="0" anchor="ctr"/>
           <a:lstStyle/>
           <a:p>
-            <a:pPr indent="0" marL="0">
+            <a:pPr marL="0" indent="0">
               <a:buNone/>
             </a:pPr>
             <a:r>
@@ -5556,7 +5284,7 @@
       </p:sp>
       <p:sp>
         <p:nvSpPr>
-          <p:cNvPr id="25" name="Slide Number Placeholder 0"/>
+          <p:cNvPr id="3" name="Slide Number Placeholder 0"/>
           <p:cNvSpPr>
             <a:spLocks noGrp="1"/>
           </p:cNvSpPr>
@@ -5574,7 +5302,7 @@
           </a:prstGeom>
           <a:extLst>
             <a:ext uri="{C572A759-6A51-4108-AA02-DFA0A04FC94B}">
-              <ma14:wrappingTextBoxFlag xmlns:ma14="http://schemas.microsoft.com/office/mac/drawingml/2011/main" val="0"/>
+              <ma14:wrappingTextBoxFlag xmlns:ma14="http://schemas.microsoft.com/office/mac/drawingml/2011/main" xmlns="" val="0"/>
             </a:ext>
           </a:extLst>
         </p:spPr>
@@ -5592,7 +5320,7 @@
           <a:p>
             <a:pPr algn="r"/>
             <a:fld id="{F7021451-1387-4CA6-816F-3879F97B5CBC}" type="slidenum">
-              <a:rPr b="0" lang="en-US"/>
+              <a:rPr lang="en-US" b="0"/>
               <a:t>10</a:t>
             </a:fld>
             <a:endParaRPr lang="en-US"/>
@@ -5627,9 +5355,11 @@
       <p:sp>
         <p:nvSpPr>
           <p:cNvPr id="2" name="Text 0"/>
-          <p:cNvSpPr/>
+          <p:cNvSpPr>
+            <a:spLocks noGrp="1"/>
+          </p:cNvSpPr>
           <p:nvPr>
-            <p:ph idx="100" type="title" hasCustomPrompt="1"/>
+            <p:ph type="title" idx="100" hasCustomPrompt="1"/>
           </p:nvPr>
         </p:nvSpPr>
         <p:spPr>
@@ -5647,7 +5377,7 @@
           <a:bodyPr wrap="square" lIns="0" tIns="0" rIns="0" bIns="0" rtlCol="0" anchor="ctr"/>
           <a:lstStyle/>
           <a:p>
-            <a:pPr algn="l" indent="0" marL="0">
+            <a:pPr marL="0" indent="0" algn="l">
               <a:buNone/>
             </a:pPr>
             <a:r>
@@ -5683,11 +5413,11 @@
           <a:bodyPr wrap="square" lIns="0" tIns="0" rIns="0" bIns="0" rtlCol="0" anchor="ctr"/>
           <a:lstStyle/>
           <a:p>
-            <a:pPr indent="0" marL="0">
-              <a:buNone/>
-            </a:pPr>
-            <a:r>
-              <a:rPr lang="en-US" sz="950" b="1" spc="100" kern="0" dirty="0">
+            <a:pPr marL="0" indent="0">
+              <a:buNone/>
+            </a:pPr>
+            <a:r>
+              <a:rPr lang="en-US" sz="950" b="1" kern="0" spc="100" dirty="0">
                 <a:solidFill>
                   <a:schemeClr val="accent4"/>
                 </a:solidFill>
@@ -5746,11 +5476,11 @@
           <a:bodyPr wrap="square" lIns="0" tIns="0" rIns="0" bIns="0" rtlCol="0" anchor="ctr"/>
           <a:lstStyle/>
           <a:p>
-            <a:pPr algn="ctr" indent="0" marL="0">
-              <a:buNone/>
-            </a:pPr>
-            <a:r>
-              <a:rPr lang="en-US" sz="800" b="1" spc="100" kern="0" dirty="0">
+            <a:pPr marL="0" indent="0" algn="ctr">
+              <a:buNone/>
+            </a:pPr>
+            <a:r>
+              <a:rPr lang="en-US" sz="800" b="1" kern="0" spc="100" dirty="0">
                 <a:solidFill>
                   <a:srgbClr val="4B5563"/>
                 </a:solidFill>
@@ -5836,7 +5566,7 @@
           <a:bodyPr wrap="square" lIns="0" tIns="0" rIns="0" bIns="0" rtlCol="0" anchor="ctr"/>
           <a:lstStyle/>
           <a:p>
-            <a:pPr algn="ctr" indent="0" marL="0">
+            <a:pPr marL="0" indent="0" algn="ctr">
               <a:buNone/>
             </a:pPr>
             <a:r>
@@ -5875,7 +5605,7 @@
           <a:bodyPr wrap="square" lIns="0" tIns="0" rIns="0" bIns="0" rtlCol="0" anchor="t"/>
           <a:lstStyle/>
           <a:p>
-            <a:pPr indent="0" marL="0">
+            <a:pPr marL="0" indent="0">
               <a:buNone/>
             </a:pPr>
             <a:r>
@@ -5898,8 +5628,8 @@
         </p:nvSpPr>
         <p:spPr>
           <a:xfrm>
-            <a:off x="1207008" y="1984248"/>
-            <a:ext cx="3017520" cy="292608"/>
+            <a:off x="1207008" y="1965960"/>
+            <a:ext cx="3017520" cy="384048"/>
           </a:xfrm>
           <a:prstGeom prst="rect">
             <a:avLst/>
@@ -5911,18 +5641,18 @@
           <a:bodyPr wrap="square" lIns="0" tIns="0" rIns="0" bIns="0" rtlCol="0" anchor="t"/>
           <a:lstStyle/>
           <a:p>
-            <a:pPr indent="0" marL="0">
-              <a:buNone/>
-            </a:pPr>
-            <a:r>
-              <a:rPr lang="en-US" sz="1100" dirty="0">
+            <a:pPr marL="0" indent="0">
+              <a:buNone/>
+            </a:pPr>
+            <a:r>
+              <a:rPr lang="en-US" sz="1050" dirty="0">
                 <a:solidFill>
                   <a:schemeClr val="tx1"/>
                 </a:solidFill>
               </a:rPr>
               <a:t>The question and the date. Nothing else.</a:t>
             </a:r>
-            <a:endParaRPr lang="en-US" sz="1100" dirty="0"/>
+            <a:endParaRPr lang="en-US" sz="1050" dirty="0"/>
           </a:p>
         </p:txBody>
       </p:sp>
@@ -5934,8 +5664,8 @@
         </p:nvSpPr>
         <p:spPr>
           <a:xfrm>
-            <a:off x="1207008" y="2276856"/>
-            <a:ext cx="3017520" cy="438912"/>
+            <a:off x="1207008" y="2368296"/>
+            <a:ext cx="3017520" cy="347472"/>
           </a:xfrm>
           <a:prstGeom prst="rect">
             <a:avLst/>
@@ -5947,7 +5677,7 @@
           <a:bodyPr wrap="square" lIns="0" tIns="0" rIns="0" bIns="0" rtlCol="0" anchor="t"/>
           <a:lstStyle/>
           <a:p>
-            <a:pPr indent="0" marL="0">
+            <a:pPr marL="0" indent="0">
               <a:buNone/>
             </a:pPr>
             <a:r>
@@ -5958,9 +5688,6 @@
               </a:rPr>
               <a:t>Intent: </a:t>
             </a:r>
-            <a:pPr indent="0" marL="0">
-              <a:buNone/>
-            </a:pPr>
             <a:r>
               <a:rPr lang="en-US" sz="1050" dirty="0">
                 <a:solidFill>
@@ -6048,7 +5775,7 @@
           <a:bodyPr wrap="square" lIns="0" tIns="0" rIns="0" bIns="0" rtlCol="0" anchor="ctr"/>
           <a:lstStyle/>
           <a:p>
-            <a:pPr algn="ctr" indent="0" marL="0">
+            <a:pPr marL="0" indent="0" algn="ctr">
               <a:buNone/>
             </a:pPr>
             <a:r>
@@ -6087,7 +5814,7 @@
           <a:bodyPr wrap="square" lIns="0" tIns="0" rIns="0" bIns="0" rtlCol="0" anchor="t"/>
           <a:lstStyle/>
           <a:p>
-            <a:pPr indent="0" marL="0">
+            <a:pPr marL="0" indent="0">
               <a:buNone/>
             </a:pPr>
             <a:r>
@@ -6110,8 +5837,8 @@
         </p:nvSpPr>
         <p:spPr>
           <a:xfrm>
-            <a:off x="1207008" y="3227832"/>
-            <a:ext cx="3017520" cy="292608"/>
+            <a:off x="1207008" y="3209544"/>
+            <a:ext cx="3017520" cy="384048"/>
           </a:xfrm>
           <a:prstGeom prst="rect">
             <a:avLst/>
@@ -6123,18 +5850,18 @@
           <a:bodyPr wrap="square" lIns="0" tIns="0" rIns="0" bIns="0" rtlCol="0" anchor="t"/>
           <a:lstStyle/>
           <a:p>
-            <a:pPr indent="0" marL="0">
-              <a:buNone/>
-            </a:pPr>
-            <a:r>
-              <a:rPr lang="en-US" sz="1100" dirty="0">
+            <a:pPr marL="0" indent="0">
+              <a:buNone/>
+            </a:pPr>
+            <a:r>
+              <a:rPr lang="en-US" sz="1050" dirty="0">
                 <a:solidFill>
                   <a:schemeClr val="tx1"/>
                 </a:solidFill>
               </a:rPr>
               <a:t>Every document and pre-read, 128,000 characters. Free-form answer.</a:t>
             </a:r>
-            <a:endParaRPr lang="en-US" sz="1100" dirty="0"/>
+            <a:endParaRPr lang="en-US" sz="1050" dirty="0"/>
           </a:p>
         </p:txBody>
       </p:sp>
@@ -6146,8 +5873,8 @@
         </p:nvSpPr>
         <p:spPr>
           <a:xfrm>
-            <a:off x="1207008" y="3520440"/>
-            <a:ext cx="3017520" cy="438912"/>
+            <a:off x="1207008" y="3611880"/>
+            <a:ext cx="3017520" cy="347472"/>
           </a:xfrm>
           <a:prstGeom prst="rect">
             <a:avLst/>
@@ -6159,7 +5886,7 @@
           <a:bodyPr wrap="square" lIns="0" tIns="0" rIns="0" bIns="0" rtlCol="0" anchor="t"/>
           <a:lstStyle/>
           <a:p>
-            <a:pPr indent="0" marL="0">
+            <a:pPr marL="0" indent="0">
               <a:buNone/>
             </a:pPr>
             <a:r>
@@ -6170,9 +5897,6 @@
               </a:rPr>
               <a:t>Intent: </a:t>
             </a:r>
-            <a:pPr indent="0" marL="0">
-              <a:buNone/>
-            </a:pPr>
             <a:r>
               <a:rPr lang="en-US" sz="1050" dirty="0">
                 <a:solidFill>
@@ -6260,7 +5984,7 @@
           <a:bodyPr wrap="square" lIns="0" tIns="0" rIns="0" bIns="0" rtlCol="0" anchor="ctr"/>
           <a:lstStyle/>
           <a:p>
-            <a:pPr algn="ctr" indent="0" marL="0">
+            <a:pPr marL="0" indent="0" algn="ctr">
               <a:buNone/>
             </a:pPr>
             <a:r>
@@ -6299,7 +6023,7 @@
           <a:bodyPr wrap="square" lIns="0" tIns="0" rIns="0" bIns="0" rtlCol="0" anchor="t"/>
           <a:lstStyle/>
           <a:p>
-            <a:pPr indent="0" marL="0">
+            <a:pPr marL="0" indent="0">
               <a:buNone/>
             </a:pPr>
             <a:r>
@@ -6322,8 +6046,8 @@
         </p:nvSpPr>
         <p:spPr>
           <a:xfrm>
-            <a:off x="1207008" y="4471416"/>
-            <a:ext cx="3017520" cy="292608"/>
+            <a:off x="1207008" y="4453128"/>
+            <a:ext cx="3017520" cy="384048"/>
           </a:xfrm>
           <a:prstGeom prst="rect">
             <a:avLst/>
@@ -6335,18 +6059,18 @@
           <a:bodyPr wrap="square" lIns="0" tIns="0" rIns="0" bIns="0" rtlCol="0" anchor="t"/>
           <a:lstStyle/>
           <a:p>
-            <a:pPr indent="0" marL="0">
-              <a:buNone/>
-            </a:pPr>
-            <a:r>
-              <a:rPr lang="en-US" sz="1100" dirty="0">
+            <a:pPr marL="0" indent="0">
+              <a:buNone/>
+            </a:pPr>
+            <a:r>
+              <a:rPr lang="en-US" sz="1050" dirty="0">
                 <a:solidFill>
                   <a:schemeClr val="tx1"/>
                 </a:solidFill>
               </a:rPr>
               <a:t>Same evidence; a fixed answer shape, a quote per claim, code checks every quote and number.</a:t>
             </a:r>
-            <a:endParaRPr lang="en-US" sz="1100" dirty="0"/>
+            <a:endParaRPr lang="en-US" sz="1050" dirty="0"/>
           </a:p>
         </p:txBody>
       </p:sp>
@@ -6358,8 +6082,8 @@
         </p:nvSpPr>
         <p:spPr>
           <a:xfrm>
-            <a:off x="1207008" y="4764024"/>
-            <a:ext cx="3017520" cy="438912"/>
+            <a:off x="1207008" y="4855464"/>
+            <a:ext cx="3017520" cy="347472"/>
           </a:xfrm>
           <a:prstGeom prst="rect">
             <a:avLst/>
@@ -6371,7 +6095,7 @@
           <a:bodyPr wrap="square" lIns="0" tIns="0" rIns="0" bIns="0" rtlCol="0" anchor="t"/>
           <a:lstStyle/>
           <a:p>
-            <a:pPr indent="0" marL="0">
+            <a:pPr marL="0" indent="0">
               <a:buNone/>
             </a:pPr>
             <a:r>
@@ -6382,9 +6106,6 @@
               </a:rPr>
               <a:t>Intent: </a:t>
             </a:r>
-            <a:pPr indent="0" marL="0">
-              <a:buNone/>
-            </a:pPr>
             <a:r>
               <a:rPr lang="en-US" sz="1050" dirty="0">
                 <a:solidFill>
@@ -6442,11 +6163,11 @@
           <a:bodyPr wrap="square" lIns="0" tIns="0" rIns="0" bIns="0" rtlCol="0" anchor="ctr"/>
           <a:lstStyle/>
           <a:p>
-            <a:pPr indent="0" marL="0">
-              <a:buNone/>
-            </a:pPr>
-            <a:r>
-              <a:rPr lang="en-US" sz="950" b="1" spc="100" kern="0" dirty="0">
+            <a:pPr marL="0" indent="0">
+              <a:buNone/>
+            </a:pPr>
+            <a:r>
+              <a:rPr lang="en-US" sz="950" b="1" kern="0" spc="100" dirty="0">
                 <a:solidFill>
                   <a:schemeClr val="accent4"/>
                 </a:solidFill>
@@ -6505,11 +6226,11 @@
           <a:bodyPr wrap="square" lIns="0" tIns="0" rIns="0" bIns="0" rtlCol="0" anchor="ctr"/>
           <a:lstStyle/>
           <a:p>
-            <a:pPr algn="ctr" indent="0" marL="0">
-              <a:buNone/>
-            </a:pPr>
-            <a:r>
-              <a:rPr lang="en-US" sz="800" b="1" spc="100" kern="0" dirty="0">
+            <a:pPr marL="0" indent="0" algn="ctr">
+              <a:buNone/>
+            </a:pPr>
+            <a:r>
+              <a:rPr lang="en-US" sz="800" b="1" kern="0" spc="100" dirty="0">
                 <a:solidFill>
                   <a:srgbClr val="FFFFFF"/>
                 </a:solidFill>
@@ -6568,7 +6289,7 @@
           <a:bodyPr wrap="square" lIns="0" tIns="0" rIns="0" bIns="0" rtlCol="0" anchor="t"/>
           <a:lstStyle/>
           <a:p>
-            <a:pPr indent="0" marL="0">
+            <a:pPr marL="0" indent="0">
               <a:buNone/>
             </a:pPr>
             <a:r>
@@ -6579,9 +6300,6 @@
               </a:rPr>
               <a:t>Analyst 3's shape and verifier, with one change: each reader gets </a:t>
             </a:r>
-            <a:pPr indent="0" marL="0">
-              <a:buNone/>
-            </a:pPr>
             <a:r>
               <a:rPr lang="en-US" sz="1150" b="1" dirty="0">
                 <a:solidFill>
@@ -6590,9 +6308,6 @@
               </a:rPr>
               <a:t>one slice of evidence</a:t>
             </a:r>
-            <a:pPr indent="0" marL="0">
-              <a:buNone/>
-            </a:pPr>
             <a:r>
               <a:rPr lang="en-US" sz="1150" dirty="0">
                 <a:solidFill>
@@ -6684,7 +6399,7 @@
           <a:bodyPr wrap="square" lIns="0" tIns="0" rIns="0" bIns="0" rtlCol="0" anchor="ctr"/>
           <a:lstStyle/>
           <a:p>
-            <a:pPr algn="ctr" indent="0" marL="0">
+            <a:pPr marL="0" indent="0" algn="ctr">
               <a:buNone/>
             </a:pPr>
             <a:r>
@@ -6723,7 +6438,7 @@
           <a:bodyPr wrap="square" lIns="0" tIns="0" rIns="0" bIns="0" rtlCol="0" anchor="t"/>
           <a:lstStyle/>
           <a:p>
-            <a:pPr indent="0" marL="0">
+            <a:pPr marL="0" indent="0">
               <a:buNone/>
             </a:pPr>
             <a:r>
@@ -6759,7 +6474,7 @@
           <a:bodyPr wrap="square" lIns="0" tIns="0" rIns="0" bIns="0" rtlCol="0" anchor="t"/>
           <a:lstStyle/>
           <a:p>
-            <a:pPr indent="0" marL="0">
+            <a:pPr marL="0" indent="0">
               <a:buNone/>
             </a:pPr>
             <a:r>
@@ -6773,7 +6488,7 @@
             <a:endParaRPr lang="en-US" sz="950" dirty="0"/>
           </a:p>
           <a:p>
-            <a:pPr indent="0" marL="0">
+            <a:pPr marL="0" indent="0">
               <a:buNone/>
             </a:pPr>
             <a:r>
@@ -6784,9 +6499,6 @@
               </a:rPr>
               <a:t>Intent: </a:t>
             </a:r>
-            <a:pPr indent="0" marL="0">
-              <a:buNone/>
-            </a:pPr>
             <a:r>
               <a:rPr lang="en-US" sz="950" dirty="0">
                 <a:solidFill>
@@ -6878,7 +6590,7 @@
           <a:bodyPr wrap="square" lIns="0" tIns="0" rIns="0" bIns="0" rtlCol="0" anchor="ctr"/>
           <a:lstStyle/>
           <a:p>
-            <a:pPr algn="ctr" indent="0" marL="0">
+            <a:pPr marL="0" indent="0" algn="ctr">
               <a:buNone/>
             </a:pPr>
             <a:r>
@@ -6917,7 +6629,7 @@
           <a:bodyPr wrap="square" lIns="0" tIns="0" rIns="0" bIns="0" rtlCol="0" anchor="t"/>
           <a:lstStyle/>
           <a:p>
-            <a:pPr indent="0" marL="0">
+            <a:pPr marL="0" indent="0">
               <a:buNone/>
             </a:pPr>
             <a:r>
@@ -6953,7 +6665,7 @@
           <a:bodyPr wrap="square" lIns="0" tIns="0" rIns="0" bIns="0" rtlCol="0" anchor="t"/>
           <a:lstStyle/>
           <a:p>
-            <a:pPr indent="0" marL="0">
+            <a:pPr marL="0" indent="0">
               <a:buNone/>
             </a:pPr>
             <a:r>
@@ -6967,7 +6679,7 @@
             <a:endParaRPr lang="en-US" sz="950" dirty="0"/>
           </a:p>
           <a:p>
-            <a:pPr indent="0" marL="0">
+            <a:pPr marL="0" indent="0">
               <a:buNone/>
             </a:pPr>
             <a:r>
@@ -6978,9 +6690,6 @@
               </a:rPr>
               <a:t>Intent: </a:t>
             </a:r>
-            <a:pPr indent="0" marL="0">
-              <a:buNone/>
-            </a:pPr>
             <a:r>
               <a:rPr lang="en-US" sz="950" dirty="0">
                 <a:solidFill>
@@ -7072,7 +6781,7 @@
           <a:bodyPr wrap="square" lIns="0" tIns="0" rIns="0" bIns="0" rtlCol="0" anchor="ctr"/>
           <a:lstStyle/>
           <a:p>
-            <a:pPr algn="ctr" indent="0" marL="0">
+            <a:pPr marL="0" indent="0" algn="ctr">
               <a:buNone/>
             </a:pPr>
             <a:r>
@@ -7111,7 +6820,7 @@
           <a:bodyPr wrap="square" lIns="0" tIns="0" rIns="0" bIns="0" rtlCol="0" anchor="t"/>
           <a:lstStyle/>
           <a:p>
-            <a:pPr indent="0" marL="0">
+            <a:pPr marL="0" indent="0">
               <a:buNone/>
             </a:pPr>
             <a:r>
@@ -7147,7 +6856,7 @@
           <a:bodyPr wrap="square" lIns="0" tIns="0" rIns="0" bIns="0" rtlCol="0" anchor="t"/>
           <a:lstStyle/>
           <a:p>
-            <a:pPr indent="0" marL="0">
+            <a:pPr marL="0" indent="0">
               <a:buNone/>
             </a:pPr>
             <a:r>
@@ -7161,7 +6870,7 @@
             <a:endParaRPr lang="en-US" sz="950" dirty="0"/>
           </a:p>
           <a:p>
-            <a:pPr indent="0" marL="0">
+            <a:pPr marL="0" indent="0">
               <a:buNone/>
             </a:pPr>
             <a:r>
@@ -7172,9 +6881,6 @@
               </a:rPr>
               <a:t>Intent: </a:t>
             </a:r>
-            <a:pPr indent="0" marL="0">
-              <a:buNone/>
-            </a:pPr>
             <a:r>
               <a:rPr lang="en-US" sz="950" dirty="0">
                 <a:solidFill>
@@ -7266,7 +6972,7 @@
           <a:bodyPr wrap="square" lIns="0" tIns="0" rIns="0" bIns="0" rtlCol="0" anchor="ctr"/>
           <a:lstStyle/>
           <a:p>
-            <a:pPr algn="ctr" indent="0" marL="0">
+            <a:pPr marL="0" indent="0" algn="ctr">
               <a:buNone/>
             </a:pPr>
             <a:r>
@@ -7305,7 +7011,7 @@
           <a:bodyPr wrap="square" lIns="0" tIns="0" rIns="0" bIns="0" rtlCol="0" anchor="t"/>
           <a:lstStyle/>
           <a:p>
-            <a:pPr indent="0" marL="0">
+            <a:pPr marL="0" indent="0">
               <a:buNone/>
             </a:pPr>
             <a:r>
@@ -7341,7 +7047,7 @@
           <a:bodyPr wrap="square" lIns="0" tIns="0" rIns="0" bIns="0" rtlCol="0" anchor="t"/>
           <a:lstStyle/>
           <a:p>
-            <a:pPr indent="0" marL="0">
+            <a:pPr marL="0" indent="0">
               <a:buNone/>
             </a:pPr>
             <a:r>
@@ -7355,7 +7061,7 @@
             <a:endParaRPr lang="en-US" sz="950" dirty="0"/>
           </a:p>
           <a:p>
-            <a:pPr indent="0" marL="0">
+            <a:pPr marL="0" indent="0">
               <a:buNone/>
             </a:pPr>
             <a:r>
@@ -7366,9 +7072,6 @@
               </a:rPr>
               <a:t>Intent: </a:t>
             </a:r>
-            <a:pPr indent="0" marL="0">
-              <a:buNone/>
-            </a:pPr>
             <a:r>
               <a:rPr lang="en-US" sz="950" dirty="0">
                 <a:solidFill>
@@ -7460,7 +7163,7 @@
           <a:bodyPr wrap="square" lIns="0" tIns="0" rIns="0" bIns="0" rtlCol="0" anchor="ctr"/>
           <a:lstStyle/>
           <a:p>
-            <a:pPr algn="ctr" indent="0" marL="0">
+            <a:pPr marL="0" indent="0" algn="ctr">
               <a:buNone/>
             </a:pPr>
             <a:r>
@@ -7499,7 +7202,7 @@
           <a:bodyPr wrap="square" lIns="0" tIns="0" rIns="0" bIns="0" rtlCol="0" anchor="t"/>
           <a:lstStyle/>
           <a:p>
-            <a:pPr indent="0" marL="0">
+            <a:pPr marL="0" indent="0">
               <a:buNone/>
             </a:pPr>
             <a:r>
@@ -7535,7 +7238,7 @@
           <a:bodyPr wrap="square" lIns="0" tIns="0" rIns="0" bIns="0" rtlCol="0" anchor="t"/>
           <a:lstStyle/>
           <a:p>
-            <a:pPr indent="0" marL="0">
+            <a:pPr marL="0" indent="0">
               <a:buNone/>
             </a:pPr>
             <a:r>
@@ -7549,7 +7252,7 @@
             <a:endParaRPr lang="en-US" sz="950" dirty="0"/>
           </a:p>
           <a:p>
-            <a:pPr indent="0" marL="0">
+            <a:pPr marL="0" indent="0">
               <a:buNone/>
             </a:pPr>
             <a:r>
@@ -7560,9 +7263,6 @@
               </a:rPr>
               <a:t>Intent: </a:t>
             </a:r>
-            <a:pPr indent="0" marL="0">
-              <a:buNone/>
-            </a:pPr>
             <a:r>
               <a:rPr lang="en-US" sz="950" dirty="0">
                 <a:solidFill>
@@ -7596,7 +7296,7 @@
           <a:bodyPr wrap="square" lIns="0" tIns="0" rIns="0" bIns="0" rtlCol="0" anchor="t"/>
           <a:lstStyle/>
           <a:p>
-            <a:pPr indent="0" marL="0">
+            <a:pPr marL="0" indent="0">
               <a:buNone/>
             </a:pPr>
             <a:r>
@@ -7637,7 +7337,7 @@
             <a:prstDash val="solid"/>
           </a:ln>
           <a:effectLst>
-            <a:outerShdw sx="100000" sy="100000" kx="0" ky="0" algn="bl" rotWithShape="0" blurRad="50800" dist="12700" dir="5400000">
+            <a:outerShdw blurRad="50800" dist="12700" dir="5400000" algn="bl" rotWithShape="0">
               <a:srgbClr val="000000">
                 <a:alpha val="8000"/>
               </a:srgbClr>
@@ -7666,7 +7366,7 @@
           <a:bodyPr wrap="square" lIns="0" tIns="0" rIns="0" bIns="0" rtlCol="0" anchor="ctr"/>
           <a:lstStyle/>
           <a:p>
-            <a:pPr indent="0" marL="0">
+            <a:pPr marL="0" indent="0">
               <a:buNone/>
             </a:pPr>
             <a:r>
@@ -7677,9 +7377,6 @@
               </a:rPr>
               <a:t>Every analyst runs five times on the same snapshot. </a:t>
             </a:r>
-            <a:pPr indent="0" marL="0">
-              <a:buNone/>
-            </a:pPr>
             <a:r>
               <a:rPr lang="en-US" sz="1150" dirty="0">
                 <a:solidFill>
@@ -7713,7 +7410,7 @@
           <a:bodyPr wrap="square" lIns="0" tIns="0" rIns="0" bIns="0" rtlCol="0" anchor="t"/>
           <a:lstStyle/>
           <a:p>
-            <a:pPr indent="0" marL="0">
+            <a:pPr marL="0" indent="0">
               <a:buNone/>
             </a:pPr>
             <a:r>
@@ -7724,9 +7421,6 @@
               </a:rPr>
               <a:t>1 sets the baseline: </a:t>
             </a:r>
-            <a:pPr indent="0" marL="0">
-              <a:buNone/>
-            </a:pPr>
             <a:r>
               <a:rPr lang="en-US" sz="1000" dirty="0">
                 <a:solidFill>
@@ -7760,7 +7454,7 @@
           <a:bodyPr wrap="square" lIns="0" tIns="0" rIns="0" bIns="0" rtlCol="0" anchor="t"/>
           <a:lstStyle/>
           <a:p>
-            <a:pPr indent="0" marL="0">
+            <a:pPr marL="0" indent="0">
               <a:buNone/>
             </a:pPr>
             <a:r>
@@ -7771,9 +7465,6 @@
               </a:rPr>
               <a:t>2 tests immutable evidence: </a:t>
             </a:r>
-            <a:pPr indent="0" marL="0">
-              <a:buNone/>
-            </a:pPr>
             <a:r>
               <a:rPr lang="en-US" sz="1000" dirty="0">
                 <a:solidFill>
@@ -7807,7 +7498,7 @@
           <a:bodyPr wrap="square" lIns="0" tIns="0" rIns="0" bIns="0" rtlCol="0" anchor="t"/>
           <a:lstStyle/>
           <a:p>
-            <a:pPr indent="0" marL="0">
+            <a:pPr marL="0" indent="0">
               <a:buNone/>
             </a:pPr>
             <a:r>
@@ -7818,9 +7509,6 @@
               </a:rPr>
               <a:t>3 tests the answer shape and code verification: </a:t>
             </a:r>
-            <a:pPr indent="0" marL="0">
-              <a:buNone/>
-            </a:pPr>
             <a:r>
               <a:rPr lang="en-US" sz="1000" dirty="0">
                 <a:solidFill>
@@ -7835,7 +7523,7 @@
       </p:sp>
       <p:sp>
         <p:nvSpPr>
-          <p:cNvPr id="25" name="Slide Number Placeholder 0"/>
+          <p:cNvPr id="3" name="Slide Number Placeholder 0"/>
           <p:cNvSpPr>
             <a:spLocks noGrp="1"/>
           </p:cNvSpPr>
@@ -7853,7 +7541,7 @@
           </a:prstGeom>
           <a:extLst>
             <a:ext uri="{C572A759-6A51-4108-AA02-DFA0A04FC94B}">
-              <ma14:wrappingTextBoxFlag xmlns:ma14="http://schemas.microsoft.com/office/mac/drawingml/2011/main" val="0"/>
+              <ma14:wrappingTextBoxFlag xmlns:ma14="http://schemas.microsoft.com/office/mac/drawingml/2011/main" xmlns="" val="0"/>
             </a:ext>
           </a:extLst>
         </p:spPr>
@@ -7871,7 +7559,7 @@
           <a:p>
             <a:pPr algn="r"/>
             <a:fld id="{F7021451-1387-4CA6-816F-3879F97B5CBC}" type="slidenum">
-              <a:rPr b="0" lang="en-US"/>
+              <a:rPr lang="en-US" b="0"/>
               <a:t>11</a:t>
             </a:fld>
             <a:endParaRPr lang="en-US"/>
@@ -7906,9 +7594,11 @@
       <p:sp>
         <p:nvSpPr>
           <p:cNvPr id="2" name="Text 0"/>
-          <p:cNvSpPr/>
+          <p:cNvSpPr>
+            <a:spLocks noGrp="1"/>
+          </p:cNvSpPr>
           <p:nvPr>
-            <p:ph idx="100" type="title" hasCustomPrompt="1"/>
+            <p:ph type="title" idx="100" hasCustomPrompt="1"/>
           </p:nvPr>
         </p:nvSpPr>
         <p:spPr>
@@ -7926,7 +7616,7 @@
           <a:bodyPr wrap="square" lIns="0" tIns="0" rIns="0" bIns="0" rtlCol="0" anchor="ctr"/>
           <a:lstStyle/>
           <a:p>
-            <a:pPr algn="l" indent="0" marL="0">
+            <a:pPr marL="0" indent="0" algn="l">
               <a:buNone/>
             </a:pPr>
             <a:r>
@@ -7989,11 +7679,11 @@
           <a:bodyPr wrap="square" lIns="0" tIns="0" rIns="0" bIns="0" rtlCol="0" anchor="t"/>
           <a:lstStyle/>
           <a:p>
-            <a:pPr indent="0" marL="0">
-              <a:buNone/>
-            </a:pPr>
-            <a:r>
-              <a:rPr lang="en-US" sz="900" b="1" spc="100" kern="0" dirty="0">
+            <a:pPr marL="0" indent="0">
+              <a:buNone/>
+            </a:pPr>
+            <a:r>
+              <a:rPr lang="en-US" sz="900" b="1" kern="0" spc="100" dirty="0">
                 <a:solidFill>
                   <a:srgbClr val="E9B44C"/>
                 </a:solidFill>
@@ -8025,7 +7715,7 @@
           <a:bodyPr wrap="square" lIns="0" tIns="0" rIns="0" bIns="0" rtlCol="0" anchor="t"/>
           <a:lstStyle/>
           <a:p>
-            <a:pPr indent="0" marL="0">
+            <a:pPr marL="0" indent="0">
               <a:buNone/>
             </a:pPr>
             <a:r>
@@ -8061,7 +7751,7 @@
           <a:bodyPr wrap="square" lIns="0" tIns="0" rIns="0" bIns="0" rtlCol="0" anchor="t"/>
           <a:lstStyle/>
           <a:p>
-            <a:pPr indent="0" marL="0">
+            <a:pPr marL="0" indent="0">
               <a:buNone/>
             </a:pPr>
             <a:r>
@@ -8124,11 +7814,11 @@
           <a:bodyPr wrap="square" lIns="0" tIns="0" rIns="0" bIns="0" rtlCol="0" anchor="t"/>
           <a:lstStyle/>
           <a:p>
-            <a:pPr indent="0" marL="0">
-              <a:buNone/>
-            </a:pPr>
-            <a:r>
-              <a:rPr lang="en-US" sz="900" b="1" spc="100" kern="0" dirty="0">
+            <a:pPr marL="0" indent="0">
+              <a:buNone/>
+            </a:pPr>
+            <a:r>
+              <a:rPr lang="en-US" sz="900" b="1" kern="0" spc="100" dirty="0">
                 <a:solidFill>
                   <a:srgbClr val="E9B44C"/>
                 </a:solidFill>
@@ -8160,7 +7850,7 @@
           <a:bodyPr wrap="square" lIns="0" tIns="0" rIns="0" bIns="0" rtlCol="0" anchor="t"/>
           <a:lstStyle/>
           <a:p>
-            <a:pPr indent="0" marL="0">
+            <a:pPr marL="0" indent="0">
               <a:buNone/>
             </a:pPr>
             <a:r>
@@ -8196,7 +7886,7 @@
           <a:bodyPr wrap="square" lIns="0" tIns="0" rIns="0" bIns="0" rtlCol="0" anchor="t"/>
           <a:lstStyle/>
           <a:p>
-            <a:pPr indent="0" marL="0">
+            <a:pPr marL="0" indent="0">
               <a:buNone/>
             </a:pPr>
             <a:r>
@@ -8259,11 +7949,11 @@
           <a:bodyPr wrap="square" lIns="0" tIns="0" rIns="0" bIns="0" rtlCol="0" anchor="t"/>
           <a:lstStyle/>
           <a:p>
-            <a:pPr indent="0" marL="0">
-              <a:buNone/>
-            </a:pPr>
-            <a:r>
-              <a:rPr lang="en-US" sz="900" b="1" spc="100" kern="0" dirty="0">
+            <a:pPr marL="0" indent="0">
+              <a:buNone/>
+            </a:pPr>
+            <a:r>
+              <a:rPr lang="en-US" sz="900" b="1" kern="0" spc="100" dirty="0">
                 <a:solidFill>
                   <a:srgbClr val="E9B44C"/>
                 </a:solidFill>
@@ -8295,7 +7985,7 @@
           <a:bodyPr wrap="square" lIns="0" tIns="0" rIns="0" bIns="0" rtlCol="0" anchor="t"/>
           <a:lstStyle/>
           <a:p>
-            <a:pPr indent="0" marL="0">
+            <a:pPr marL="0" indent="0">
               <a:buNone/>
             </a:pPr>
             <a:r>
@@ -8331,7 +8021,7 @@
           <a:bodyPr wrap="square" lIns="0" tIns="0" rIns="0" bIns="0" rtlCol="0" anchor="t"/>
           <a:lstStyle/>
           <a:p>
-            <a:pPr indent="0" marL="0">
+            <a:pPr marL="0" indent="0">
               <a:buNone/>
             </a:pPr>
             <a:r>
@@ -8394,11 +8084,11 @@
           <a:bodyPr wrap="square" lIns="0" tIns="0" rIns="0" bIns="0" rtlCol="0" anchor="t"/>
           <a:lstStyle/>
           <a:p>
-            <a:pPr indent="0" marL="0">
-              <a:buNone/>
-            </a:pPr>
-            <a:r>
-              <a:rPr lang="en-US" sz="900" b="1" spc="100" kern="0" dirty="0">
+            <a:pPr marL="0" indent="0">
+              <a:buNone/>
+            </a:pPr>
+            <a:r>
+              <a:rPr lang="en-US" sz="900" b="1" kern="0" spc="100" dirty="0">
                 <a:solidFill>
                   <a:srgbClr val="E9B44C"/>
                 </a:solidFill>
@@ -8430,7 +8120,7 @@
           <a:bodyPr wrap="square" lIns="0" tIns="0" rIns="0" bIns="0" rtlCol="0" anchor="t"/>
           <a:lstStyle/>
           <a:p>
-            <a:pPr indent="0" marL="0">
+            <a:pPr marL="0" indent="0">
               <a:buNone/>
             </a:pPr>
             <a:r>
@@ -8466,7 +8156,7 @@
           <a:bodyPr wrap="square" lIns="0" tIns="0" rIns="0" bIns="0" rtlCol="0" anchor="t"/>
           <a:lstStyle/>
           <a:p>
-            <a:pPr indent="0" marL="0">
+            <a:pPr marL="0" indent="0">
               <a:buNone/>
             </a:pPr>
             <a:r>
@@ -8529,11 +8219,11 @@
           <a:bodyPr wrap="square" lIns="0" tIns="0" rIns="0" bIns="0" rtlCol="0" anchor="t"/>
           <a:lstStyle/>
           <a:p>
-            <a:pPr indent="0" marL="0">
-              <a:buNone/>
-            </a:pPr>
-            <a:r>
-              <a:rPr lang="en-US" sz="900" b="1" spc="100" kern="0" dirty="0">
+            <a:pPr marL="0" indent="0">
+              <a:buNone/>
+            </a:pPr>
+            <a:r>
+              <a:rPr lang="en-US" sz="900" b="1" kern="0" spc="100" dirty="0">
                 <a:solidFill>
                   <a:srgbClr val="E9B44C"/>
                 </a:solidFill>
@@ -8565,7 +8255,7 @@
           <a:bodyPr wrap="square" lIns="0" tIns="0" rIns="0" bIns="0" rtlCol="0" anchor="t"/>
           <a:lstStyle/>
           <a:p>
-            <a:pPr indent="0" marL="0">
+            <a:pPr marL="0" indent="0">
               <a:buNone/>
             </a:pPr>
             <a:r>
@@ -8601,7 +8291,7 @@
           <a:bodyPr wrap="square" lIns="0" tIns="0" rIns="0" bIns="0" rtlCol="0" anchor="t"/>
           <a:lstStyle/>
           <a:p>
-            <a:pPr indent="0" marL="0">
+            <a:pPr marL="0" indent="0">
               <a:buNone/>
             </a:pPr>
             <a:r>
@@ -8662,7 +8352,7 @@
           <a:bodyPr wrap="square" lIns="0" tIns="0" rIns="0" bIns="0" rtlCol="0" anchor="ctr"/>
           <a:lstStyle/>
           <a:p>
-            <a:pPr algn="ctr" indent="0" marL="0">
+            <a:pPr marL="0" indent="0" algn="ctr">
               <a:buNone/>
             </a:pPr>
             <a:r>
@@ -8698,7 +8388,7 @@
           <a:bodyPr wrap="square" lIns="0" tIns="0" rIns="0" bIns="0" rtlCol="0" anchor="ctr"/>
           <a:lstStyle/>
           <a:p>
-            <a:pPr algn="ctr" indent="0" marL="0">
+            <a:pPr marL="0" indent="0" algn="ctr">
               <a:buNone/>
             </a:pPr>
             <a:r>
@@ -8759,7 +8449,7 @@
           <a:bodyPr wrap="square" lIns="0" tIns="0" rIns="0" bIns="0" rtlCol="0" anchor="ctr"/>
           <a:lstStyle/>
           <a:p>
-            <a:pPr algn="ctr" indent="0" marL="0">
+            <a:pPr marL="0" indent="0" algn="ctr">
               <a:buNone/>
             </a:pPr>
             <a:r>
@@ -8795,7 +8485,7 @@
           <a:bodyPr wrap="square" lIns="0" tIns="0" rIns="0" bIns="0" rtlCol="0" anchor="ctr"/>
           <a:lstStyle/>
           <a:p>
-            <a:pPr algn="ctr" indent="0" marL="0">
+            <a:pPr marL="0" indent="0" algn="ctr">
               <a:buNone/>
             </a:pPr>
             <a:r>
@@ -8856,7 +8546,7 @@
           <a:bodyPr wrap="square" lIns="0" tIns="0" rIns="0" bIns="0" rtlCol="0" anchor="ctr"/>
           <a:lstStyle/>
           <a:p>
-            <a:pPr algn="ctr" indent="0" marL="0">
+            <a:pPr marL="0" indent="0" algn="ctr">
               <a:buNone/>
             </a:pPr>
             <a:r>
@@ -8892,7 +8582,7 @@
           <a:bodyPr wrap="square" lIns="0" tIns="0" rIns="0" bIns="0" rtlCol="0" anchor="ctr"/>
           <a:lstStyle/>
           <a:p>
-            <a:pPr algn="ctr" indent="0" marL="0">
+            <a:pPr marL="0" indent="0" algn="ctr">
               <a:buNone/>
             </a:pPr>
             <a:r>
@@ -8953,7 +8643,7 @@
           <a:bodyPr wrap="square" lIns="0" tIns="0" rIns="0" bIns="0" rtlCol="0" anchor="ctr"/>
           <a:lstStyle/>
           <a:p>
-            <a:pPr algn="ctr" indent="0" marL="0">
+            <a:pPr marL="0" indent="0" algn="ctr">
               <a:buNone/>
             </a:pPr>
             <a:r>
@@ -8989,7 +8679,7 @@
           <a:bodyPr wrap="square" lIns="0" tIns="0" rIns="0" bIns="0" rtlCol="0" anchor="ctr"/>
           <a:lstStyle/>
           <a:p>
-            <a:pPr algn="ctr" indent="0" marL="0">
+            <a:pPr marL="0" indent="0" algn="ctr">
               <a:buNone/>
             </a:pPr>
             <a:r>
@@ -9050,7 +8740,7 @@
           <a:bodyPr wrap="square" lIns="0" tIns="0" rIns="0" bIns="0" rtlCol="0" anchor="ctr"/>
           <a:lstStyle/>
           <a:p>
-            <a:pPr algn="ctr" indent="0" marL="0">
+            <a:pPr marL="0" indent="0" algn="ctr">
               <a:buNone/>
             </a:pPr>
             <a:r>
@@ -9086,7 +8776,7 @@
           <a:bodyPr wrap="square" lIns="0" tIns="0" rIns="0" bIns="0" rtlCol="0" anchor="ctr"/>
           <a:lstStyle/>
           <a:p>
-            <a:pPr algn="ctr" indent="0" marL="0">
+            <a:pPr marL="0" indent="0" algn="ctr">
               <a:buNone/>
             </a:pPr>
             <a:r>
@@ -9127,7 +8817,7 @@
             <a:prstDash val="solid"/>
           </a:ln>
           <a:effectLst>
-            <a:outerShdw sx="100000" sy="100000" kx="0" ky="0" algn="bl" rotWithShape="0" blurRad="50800" dist="12700" dir="5400000">
+            <a:outerShdw blurRad="50800" dist="12700" dir="5400000" algn="bl" rotWithShape="0">
               <a:srgbClr val="000000">
                 <a:alpha val="8000"/>
               </a:srgbClr>
@@ -9156,11 +8846,11 @@
           <a:bodyPr wrap="square" lIns="0" tIns="0" rIns="0" bIns="0" rtlCol="0" anchor="t"/>
           <a:lstStyle/>
           <a:p>
-            <a:pPr indent="0" marL="0">
-              <a:buNone/>
-            </a:pPr>
-            <a:r>
-              <a:rPr lang="en-US" sz="900" b="1" spc="100" kern="0" dirty="0">
+            <a:pPr marL="0" indent="0">
+              <a:buNone/>
+            </a:pPr>
+            <a:r>
+              <a:rPr lang="en-US" sz="900" b="1" kern="0" spc="100" dirty="0">
                 <a:solidFill>
                   <a:srgbClr val="C8553D"/>
                 </a:solidFill>
@@ -9173,7 +8863,7 @@
       </p:sp>
       <p:graphicFrame>
         <p:nvGraphicFramePr>
-          <p:cNvPr id="13" name="Table 0"/>
+          <p:cNvPr id="3" name="Table 0"/>
           <p:cNvGraphicFramePr>
             <a:graphicFrameLocks noGrp="1"/>
           </p:cNvGraphicFramePr>
@@ -9194,8 +8884,20 @@
             <a:tbl>
               <a:tblPr/>
               <a:tblGrid>
-                <a:gridCol w="1325880"/>
-                <a:gridCol w="731520"/>
+                <a:gridCol w="1325880">
+                  <a:extLst>
+                    <a:ext uri="{9D8B030D-6E8A-4147-A177-3AD203B41FA5}">
+                      <a16:colId xmlns:a16="http://schemas.microsoft.com/office/drawing/2014/main" val="20000"/>
+                    </a:ext>
+                  </a:extLst>
+                </a:gridCol>
+                <a:gridCol w="731520">
+                  <a:extLst>
+                    <a:ext uri="{9D8B030D-6E8A-4147-A177-3AD203B41FA5}">
+                      <a16:colId xmlns:a16="http://schemas.microsoft.com/office/drawing/2014/main" val="20001"/>
+                    </a:ext>
+                  </a:extLst>
+                </a:gridCol>
               </a:tblGrid>
               <a:tr h="201168">
                 <a:tc>
@@ -9203,7 +8905,7 @@
                     <a:bodyPr/>
                     <a:lstStyle/>
                     <a:p>
-                      <a:pPr indent="0" marL="0">
+                      <a:pPr marL="0" indent="0">
                         <a:buNone/>
                       </a:pPr>
                       <a:r>
@@ -9237,7 +8939,7 @@
                     <a:bodyPr/>
                     <a:lstStyle/>
                     <a:p>
-                      <a:pPr algn="r" indent="0" marL="0">
+                      <a:pPr marL="0" indent="0" algn="r">
                         <a:buNone/>
                       </a:pPr>
                       <a:r>
@@ -9266,6 +8968,11 @@
                     </a:lnB>
                   </a:tcPr>
                 </a:tc>
+                <a:extLst>
+                  <a:ext uri="{0D108BD9-81ED-4DB2-BD59-A6C34878D82A}">
+                    <a16:rowId xmlns:a16="http://schemas.microsoft.com/office/drawing/2014/main" val="10000"/>
+                  </a:ext>
+                </a:extLst>
               </a:tr>
               <a:tr h="201168">
                 <a:tc>
@@ -9273,7 +8980,7 @@
                     <a:bodyPr/>
                     <a:lstStyle/>
                     <a:p>
-                      <a:pPr indent="0" marL="0">
+                      <a:pPr marL="0" indent="0">
                         <a:buNone/>
                       </a:pPr>
                       <a:r>
@@ -9307,7 +9014,7 @@
                     <a:bodyPr/>
                     <a:lstStyle/>
                     <a:p>
-                      <a:pPr algn="r" indent="0" marL="0">
+                      <a:pPr marL="0" indent="0" algn="r">
                         <a:buNone/>
                       </a:pPr>
                       <a:r>
@@ -9336,6 +9043,11 @@
                     </a:lnB>
                   </a:tcPr>
                 </a:tc>
+                <a:extLst>
+                  <a:ext uri="{0D108BD9-81ED-4DB2-BD59-A6C34878D82A}">
+                    <a16:rowId xmlns:a16="http://schemas.microsoft.com/office/drawing/2014/main" val="10001"/>
+                  </a:ext>
+                </a:extLst>
               </a:tr>
               <a:tr h="201168">
                 <a:tc>
@@ -9343,7 +9055,7 @@
                     <a:bodyPr/>
                     <a:lstStyle/>
                     <a:p>
-                      <a:pPr indent="0" marL="0">
+                      <a:pPr marL="0" indent="0">
                         <a:buNone/>
                       </a:pPr>
                       <a:r>
@@ -9377,7 +9089,7 @@
                     <a:bodyPr/>
                     <a:lstStyle/>
                     <a:p>
-                      <a:pPr algn="r" indent="0" marL="0">
+                      <a:pPr marL="0" indent="0" algn="r">
                         <a:buNone/>
                       </a:pPr>
                       <a:r>
@@ -9406,6 +9118,11 @@
                     </a:lnB>
                   </a:tcPr>
                 </a:tc>
+                <a:extLst>
+                  <a:ext uri="{0D108BD9-81ED-4DB2-BD59-A6C34878D82A}">
+                    <a16:rowId xmlns:a16="http://schemas.microsoft.com/office/drawing/2014/main" val="10002"/>
+                  </a:ext>
+                </a:extLst>
               </a:tr>
               <a:tr h="201168">
                 <a:tc>
@@ -9413,7 +9130,7 @@
                     <a:bodyPr/>
                     <a:lstStyle/>
                     <a:p>
-                      <a:pPr indent="0" marL="0">
+                      <a:pPr marL="0" indent="0">
                         <a:buNone/>
                       </a:pPr>
                       <a:r>
@@ -9447,7 +9164,7 @@
                     <a:bodyPr/>
                     <a:lstStyle/>
                     <a:p>
-                      <a:pPr algn="r" indent="0" marL="0">
+                      <a:pPr marL="0" indent="0" algn="r">
                         <a:buNone/>
                       </a:pPr>
                       <a:r>
@@ -9476,6 +9193,11 @@
                     </a:lnB>
                   </a:tcPr>
                 </a:tc>
+                <a:extLst>
+                  <a:ext uri="{0D108BD9-81ED-4DB2-BD59-A6C34878D82A}">
+                    <a16:rowId xmlns:a16="http://schemas.microsoft.com/office/drawing/2014/main" val="10003"/>
+                  </a:ext>
+                </a:extLst>
               </a:tr>
               <a:tr h="201168">
                 <a:tc>
@@ -9483,7 +9205,7 @@
                     <a:bodyPr/>
                     <a:lstStyle/>
                     <a:p>
-                      <a:pPr indent="0" marL="0">
+                      <a:pPr marL="0" indent="0">
                         <a:buNone/>
                       </a:pPr>
                       <a:r>
@@ -9517,7 +9239,7 @@
                     <a:bodyPr/>
                     <a:lstStyle/>
                     <a:p>
-                      <a:pPr algn="r" indent="0" marL="0">
+                      <a:pPr marL="0" indent="0" algn="r">
                         <a:buNone/>
                       </a:pPr>
                       <a:r>
@@ -9546,6 +9268,11 @@
                     </a:lnB>
                   </a:tcPr>
                 </a:tc>
+                <a:extLst>
+                  <a:ext uri="{0D108BD9-81ED-4DB2-BD59-A6C34878D82A}">
+                    <a16:rowId xmlns:a16="http://schemas.microsoft.com/office/drawing/2014/main" val="10004"/>
+                  </a:ext>
+                </a:extLst>
               </a:tr>
               <a:tr h="201168">
                 <a:tc>
@@ -9553,7 +9280,7 @@
                     <a:bodyPr/>
                     <a:lstStyle/>
                     <a:p>
-                      <a:pPr indent="0" marL="0">
+                      <a:pPr marL="0" indent="0">
                         <a:buNone/>
                       </a:pPr>
                       <a:r>
@@ -9587,7 +9314,7 @@
                     <a:bodyPr/>
                     <a:lstStyle/>
                     <a:p>
-                      <a:pPr algn="r" indent="0" marL="0">
+                      <a:pPr marL="0" indent="0" algn="r">
                         <a:buNone/>
                       </a:pPr>
                       <a:r>
@@ -9616,6 +9343,11 @@
                     </a:lnB>
                   </a:tcPr>
                 </a:tc>
+                <a:extLst>
+                  <a:ext uri="{0D108BD9-81ED-4DB2-BD59-A6C34878D82A}">
+                    <a16:rowId xmlns:a16="http://schemas.microsoft.com/office/drawing/2014/main" val="10005"/>
+                  </a:ext>
+                </a:extLst>
               </a:tr>
             </a:tbl>
           </a:graphicData>
@@ -9642,7 +9374,7 @@
           <a:bodyPr wrap="square" lIns="0" tIns="0" rIns="0" bIns="0" rtlCol="0" anchor="t"/>
           <a:lstStyle/>
           <a:p>
-            <a:pPr indent="0" marL="0">
+            <a:pPr marL="0" indent="0">
               <a:buNone/>
             </a:pPr>
             <a:r>
@@ -9653,9 +9385,6 @@
               </a:rPr>
               <a:t>Four say hike, one says hold back. </a:t>
             </a:r>
-            <a:pPr indent="0" marL="0">
-              <a:buNone/>
-            </a:pPr>
             <a:r>
               <a:rPr lang="en-US" sz="950" dirty="0">
                 <a:solidFill>
@@ -9667,7 +9396,7 @@
             <a:endParaRPr lang="en-US" sz="950" dirty="0"/>
           </a:p>
           <a:p>
-            <a:pPr indent="0" marL="0">
+            <a:pPr marL="0" indent="0">
               <a:buNone/>
             </a:pPr>
             <a:r>
@@ -9678,9 +9407,6 @@
               </a:rPr>
               <a:t>+4.0 bp = 4.0 points of probability </a:t>
             </a:r>
-            <a:pPr indent="0" marL="0">
-              <a:buNone/>
-            </a:pPr>
             <a:r>
               <a:rPr lang="en-US" sz="950" dirty="0">
                 <a:solidFill>
@@ -9714,7 +9440,7 @@
           <a:bodyPr wrap="square" lIns="0" tIns="0" rIns="0" bIns="0" rtlCol="0" anchor="t"/>
           <a:lstStyle/>
           <a:p>
-            <a:pPr indent="0" marL="0">
+            <a:pPr marL="0" indent="0">
               <a:buNone/>
             </a:pPr>
             <a:r>
@@ -9753,7 +9479,7 @@
           <a:bodyPr wrap="square" lIns="0" tIns="0" rIns="0" bIns="0" rtlCol="0" anchor="t"/>
           <a:lstStyle/>
           <a:p>
-            <a:pPr indent="0" marL="0">
+            <a:pPr marL="0" indent="0">
               <a:buNone/>
             </a:pPr>
             <a:r>
@@ -9794,7 +9520,7 @@
             <a:prstDash val="solid"/>
           </a:ln>
           <a:effectLst>
-            <a:outerShdw sx="100000" sy="100000" kx="0" ky="0" algn="bl" rotWithShape="0" blurRad="50800" dist="12700" dir="5400000">
+            <a:outerShdw blurRad="50800" dist="12700" dir="5400000" algn="bl" rotWithShape="0">
               <a:srgbClr val="000000">
                 <a:alpha val="8000"/>
               </a:srgbClr>
@@ -9823,11 +9549,11 @@
           <a:bodyPr wrap="square" lIns="0" tIns="0" rIns="0" bIns="0" rtlCol="0" anchor="t"/>
           <a:lstStyle/>
           <a:p>
-            <a:pPr indent="0" marL="0">
-              <a:buNone/>
-            </a:pPr>
-            <a:r>
-              <a:rPr lang="en-US" sz="900" b="1" spc="100" kern="0" dirty="0">
+            <a:pPr marL="0" indent="0">
+              <a:buNone/>
+            </a:pPr>
+            <a:r>
+              <a:rPr lang="en-US" sz="900" b="1" kern="0" spc="100" dirty="0">
                 <a:solidFill>
                   <a:schemeClr val="accent4"/>
                 </a:solidFill>
@@ -9859,7 +9585,7 @@
           <a:bodyPr wrap="square" lIns="0" tIns="0" rIns="0" bIns="0" rtlCol="0" anchor="t"/>
           <a:lstStyle/>
           <a:p>
-            <a:pPr indent="0" marL="0">
+            <a:pPr marL="0" indent="0">
               <a:buNone/>
             </a:pPr>
             <a:r>
@@ -9870,9 +9596,6 @@
               </a:rPr>
               <a:t>Claim </a:t>
             </a:r>
-            <a:pPr indent="0" marL="0">
-              <a:buNone/>
-            </a:pPr>
             <a:r>
               <a:rPr lang="en-US" sz="1100" dirty="0">
                 <a:solidFill>
@@ -9906,7 +9629,7 @@
           <a:bodyPr wrap="square" lIns="0" tIns="0" rIns="0" bIns="0" rtlCol="0" anchor="t"/>
           <a:lstStyle/>
           <a:p>
-            <a:pPr indent="0" marL="0">
+            <a:pPr marL="0" indent="0">
               <a:buNone/>
             </a:pPr>
             <a:r>
@@ -9945,7 +9668,7 @@
           <a:bodyPr wrap="square" lIns="0" tIns="0" rIns="0" bIns="0" rtlCol="0" anchor="t"/>
           <a:lstStyle/>
           <a:p>
-            <a:pPr indent="0" marL="0">
+            <a:pPr marL="0" indent="0">
               <a:buNone/>
             </a:pPr>
             <a:r>
@@ -9956,9 +9679,6 @@
               </a:rPr>
               <a:t>Item </a:t>
             </a:r>
-            <a:pPr indent="0" marL="0">
-              <a:buNone/>
-            </a:pPr>
             <a:r>
               <a:rPr lang="en-US" sz="1000" b="1" dirty="0">
                 <a:solidFill>
@@ -9967,9 +9687,6 @@
               </a:rPr>
               <a:t>fed.statement.2026-09-16</a:t>
             </a:r>
-            <a:pPr indent="0" marL="0">
-              <a:buNone/>
-            </a:pPr>
             <a:r>
               <a:rPr lang="en-US" sz="1000" dirty="0">
                 <a:solidFill>
@@ -9984,7 +9701,7 @@
       </p:sp>
       <p:sp>
         <p:nvSpPr>
-          <p:cNvPr id="25" name="Slide Number Placeholder 0"/>
+          <p:cNvPr id="41" name="Slide Number Placeholder 0"/>
           <p:cNvSpPr>
             <a:spLocks noGrp="1"/>
           </p:cNvSpPr>
@@ -10002,7 +9719,7 @@
           </a:prstGeom>
           <a:extLst>
             <a:ext uri="{C572A759-6A51-4108-AA02-DFA0A04FC94B}">
-              <ma14:wrappingTextBoxFlag xmlns:ma14="http://schemas.microsoft.com/office/mac/drawingml/2011/main" val="0"/>
+              <ma14:wrappingTextBoxFlag xmlns:ma14="http://schemas.microsoft.com/office/mac/drawingml/2011/main" xmlns="" val="0"/>
             </a:ext>
           </a:extLst>
         </p:spPr>
@@ -10020,7 +9737,7 @@
           <a:p>
             <a:pPr algn="r"/>
             <a:fld id="{F7021451-1387-4CA6-816F-3879F97B5CBC}" type="slidenum">
-              <a:rPr b="0" lang="en-US"/>
+              <a:rPr lang="en-US" b="0"/>
               <a:t>12</a:t>
             </a:fld>
             <a:endParaRPr lang="en-US"/>
@@ -10055,9 +9772,11 @@
       <p:sp>
         <p:nvSpPr>
           <p:cNvPr id="2" name="Text 0"/>
-          <p:cNvSpPr/>
+          <p:cNvSpPr>
+            <a:spLocks noGrp="1"/>
+          </p:cNvSpPr>
           <p:nvPr>
-            <p:ph idx="100" type="title" hasCustomPrompt="1"/>
+            <p:ph type="title" idx="100" hasCustomPrompt="1"/>
           </p:nvPr>
         </p:nvSpPr>
         <p:spPr>
@@ -10075,7 +9794,7 @@
           <a:bodyPr wrap="square" lIns="0" tIns="0" rIns="0" bIns="0" rtlCol="0" anchor="ctr"/>
           <a:lstStyle/>
           <a:p>
-            <a:pPr algn="l" indent="0" marL="0">
+            <a:pPr marL="0" indent="0" algn="l">
               <a:buNone/>
             </a:pPr>
             <a:r>
@@ -10138,7 +9857,7 @@
           <a:bodyPr wrap="square" lIns="0" tIns="0" rIns="0" bIns="0" rtlCol="0" anchor="ctr"/>
           <a:lstStyle/>
           <a:p>
-            <a:pPr algn="ctr" indent="0" marL="0">
+            <a:pPr marL="0" indent="0" algn="ctr">
               <a:buNone/>
             </a:pPr>
             <a:r>
@@ -10201,7 +9920,7 @@
           <a:bodyPr wrap="square" lIns="0" tIns="0" rIns="0" bIns="0" rtlCol="0" anchor="ctr"/>
           <a:lstStyle/>
           <a:p>
-            <a:pPr indent="0" marL="0">
+            <a:pPr marL="0" indent="0">
               <a:buNone/>
             </a:pPr>
             <a:r>
@@ -10340,7 +10059,7 @@
           <a:bodyPr wrap="square" lIns="0" tIns="0" rIns="0" bIns="0" rtlCol="0" anchor="ctr"/>
           <a:lstStyle/>
           <a:p>
-            <a:pPr indent="0" marL="0">
+            <a:pPr marL="0" indent="0">
               <a:buNone/>
             </a:pPr>
             <a:r>
@@ -10479,7 +10198,7 @@
           <a:bodyPr wrap="square" lIns="0" tIns="0" rIns="0" bIns="0" rtlCol="0" anchor="ctr"/>
           <a:lstStyle/>
           <a:p>
-            <a:pPr indent="0" marL="0">
+            <a:pPr marL="0" indent="0">
               <a:buNone/>
             </a:pPr>
             <a:r>
@@ -10580,9 +10299,11 @@
       <p:sp>
         <p:nvSpPr>
           <p:cNvPr id="2" name="Text 0"/>
-          <p:cNvSpPr/>
+          <p:cNvSpPr>
+            <a:spLocks noGrp="1"/>
+          </p:cNvSpPr>
           <p:nvPr>
-            <p:ph idx="100" type="title" hasCustomPrompt="1"/>
+            <p:ph type="title" idx="100" hasCustomPrompt="1"/>
           </p:nvPr>
         </p:nvSpPr>
         <p:spPr>
@@ -10600,7 +10321,7 @@
           <a:bodyPr wrap="square" lIns="0" tIns="0" rIns="0" bIns="0" rtlCol="0" anchor="ctr"/>
           <a:lstStyle/>
           <a:p>
-            <a:pPr algn="l" indent="0" marL="0">
+            <a:pPr marL="0" indent="0" algn="l">
               <a:buNone/>
             </a:pPr>
             <a:r>
@@ -10636,7 +10357,7 @@
           <a:bodyPr wrap="square" lIns="0" tIns="0" rIns="0" bIns="0" rtlCol="0" anchor="t"/>
           <a:lstStyle/>
           <a:p>
-            <a:pPr indent="0" marL="0">
+            <a:pPr marL="0" indent="0">
               <a:buNone/>
             </a:pPr>
             <a:r>
@@ -10653,7 +10374,7 @@
       </p:sp>
       <p:graphicFrame>
         <p:nvGraphicFramePr>
-          <p:cNvPr id="5" name="Chart 0" descr=""/>
+          <p:cNvPr id="5" name="Chart 0"/>
           <p:cNvGraphicFramePr/>
           <p:nvPr/>
         </p:nvGraphicFramePr>
@@ -10661,9 +10382,9 @@
           <a:off x="548640" y="1691640"/>
           <a:ext cx="3544824" cy="3566160"/>
         </p:xfrm>
-        <a:graphic xmlns:a="http://schemas.openxmlformats.org/drawingml/2006/main">
+        <a:graphic>
           <a:graphicData uri="http://schemas.openxmlformats.org/drawingml/2006/chart">
-            <c:chart xmlns:c="http://schemas.openxmlformats.org/drawingml/2006/chart" r:id="rId1"/>
+            <c:chart xmlns:c="http://schemas.openxmlformats.org/drawingml/2006/chart" xmlns:r="http://schemas.openxmlformats.org/officeDocument/2006/relationships" r:id="rId3"/>
           </a:graphicData>
         </a:graphic>
       </p:graphicFrame>
@@ -10688,7 +10409,7 @@
           <a:bodyPr wrap="square" lIns="0" tIns="0" rIns="0" bIns="0" rtlCol="0" anchor="t"/>
           <a:lstStyle/>
           <a:p>
-            <a:pPr indent="0" marL="0">
+            <a:pPr marL="0" indent="0">
               <a:buNone/>
             </a:pPr>
             <a:r>
@@ -10724,7 +10445,7 @@
           <a:bodyPr wrap="square" lIns="0" tIns="0" rIns="0" bIns="0" rtlCol="0" anchor="t"/>
           <a:lstStyle/>
           <a:p>
-            <a:pPr indent="0" marL="0">
+            <a:pPr marL="0" indent="0">
               <a:buNone/>
             </a:pPr>
             <a:r>
@@ -10741,7 +10462,7 @@
       </p:sp>
       <p:graphicFrame>
         <p:nvGraphicFramePr>
-          <p:cNvPr id="8" name="Chart 1" descr=""/>
+          <p:cNvPr id="8" name="Chart 1"/>
           <p:cNvGraphicFramePr/>
           <p:nvPr/>
         </p:nvGraphicFramePr>
@@ -10749,9 +10470,9 @@
           <a:off x="4322064" y="1691640"/>
           <a:ext cx="3544824" cy="3566160"/>
         </p:xfrm>
-        <a:graphic xmlns:a="http://schemas.openxmlformats.org/drawingml/2006/main">
+        <a:graphic>
           <a:graphicData uri="http://schemas.openxmlformats.org/drawingml/2006/chart">
-            <c:chart xmlns:c="http://schemas.openxmlformats.org/drawingml/2006/chart" r:id="rId2"/>
+            <c:chart xmlns:c="http://schemas.openxmlformats.org/drawingml/2006/chart" xmlns:r="http://schemas.openxmlformats.org/officeDocument/2006/relationships" r:id="rId4"/>
           </a:graphicData>
         </a:graphic>
       </p:graphicFrame>
@@ -10776,7 +10497,7 @@
           <a:bodyPr wrap="square" lIns="0" tIns="0" rIns="0" bIns="0" rtlCol="0" anchor="t"/>
           <a:lstStyle/>
           <a:p>
-            <a:pPr indent="0" marL="0">
+            <a:pPr marL="0" indent="0">
               <a:buNone/>
             </a:pPr>
             <a:r>
@@ -10812,7 +10533,7 @@
           <a:bodyPr wrap="square" lIns="0" tIns="0" rIns="0" bIns="0" rtlCol="0" anchor="t"/>
           <a:lstStyle/>
           <a:p>
-            <a:pPr indent="0" marL="0">
+            <a:pPr marL="0" indent="0">
               <a:buNone/>
             </a:pPr>
             <a:r>
@@ -10829,7 +10550,7 @@
       </p:sp>
       <p:graphicFrame>
         <p:nvGraphicFramePr>
-          <p:cNvPr id="11" name="Chart 2" descr=""/>
+          <p:cNvPr id="11" name="Chart 2"/>
           <p:cNvGraphicFramePr/>
           <p:nvPr/>
         </p:nvGraphicFramePr>
@@ -10837,9 +10558,9 @@
           <a:off x="8095488" y="1691640"/>
           <a:ext cx="3544824" cy="3566160"/>
         </p:xfrm>
-        <a:graphic xmlns:a="http://schemas.openxmlformats.org/drawingml/2006/main">
+        <a:graphic>
           <a:graphicData uri="http://schemas.openxmlformats.org/drawingml/2006/chart">
-            <c:chart xmlns:c="http://schemas.openxmlformats.org/drawingml/2006/chart" r:id="rId3"/>
+            <c:chart xmlns:c="http://schemas.openxmlformats.org/drawingml/2006/chart" xmlns:r="http://schemas.openxmlformats.org/officeDocument/2006/relationships" r:id="rId5"/>
           </a:graphicData>
         </a:graphic>
       </p:graphicFrame>
@@ -10864,7 +10585,7 @@
           <a:bodyPr wrap="square" lIns="0" tIns="0" rIns="0" bIns="0" rtlCol="0" anchor="t"/>
           <a:lstStyle/>
           <a:p>
-            <a:pPr indent="0" marL="0">
+            <a:pPr marL="0" indent="0">
               <a:buNone/>
             </a:pPr>
             <a:r>
@@ -10900,7 +10621,7 @@
           <a:bodyPr wrap="square" lIns="0" tIns="0" rIns="0" bIns="0" rtlCol="0" anchor="t"/>
           <a:lstStyle/>
           <a:p>
-            <a:pPr indent="0" marL="0">
+            <a:pPr marL="0" indent="0">
               <a:buNone/>
             </a:pPr>
             <a:r>
@@ -10935,7 +10656,7 @@
           </a:prstGeom>
           <a:extLst>
             <a:ext uri="{C572A759-6A51-4108-AA02-DFA0A04FC94B}">
-              <ma14:wrappingTextBoxFlag xmlns:ma14="http://schemas.microsoft.com/office/mac/drawingml/2011/main" val="0"/>
+              <ma14:wrappingTextBoxFlag xmlns:ma14="http://schemas.microsoft.com/office/mac/drawingml/2011/main" xmlns="" val="0"/>
             </a:ext>
           </a:extLst>
         </p:spPr>
@@ -10953,7 +10674,7 @@
           <a:p>
             <a:pPr algn="r"/>
             <a:fld id="{F7021451-1387-4CA6-816F-3879F97B5CBC}" type="slidenum">
-              <a:rPr b="0" lang="en-US"/>
+              <a:rPr lang="en-US" b="0"/>
               <a:t>14</a:t>
             </a:fld>
             <a:endParaRPr lang="en-US"/>
@@ -10988,9 +10709,11 @@
       <p:sp>
         <p:nvSpPr>
           <p:cNvPr id="2" name="Text 0"/>
-          <p:cNvSpPr/>
+          <p:cNvSpPr>
+            <a:spLocks noGrp="1"/>
+          </p:cNvSpPr>
           <p:nvPr>
-            <p:ph idx="100" type="title" hasCustomPrompt="1"/>
+            <p:ph type="title" idx="100" hasCustomPrompt="1"/>
           </p:nvPr>
         </p:nvSpPr>
         <p:spPr>
@@ -11008,7 +10731,7 @@
           <a:bodyPr wrap="square" lIns="0" tIns="0" rIns="0" bIns="0" rtlCol="0" anchor="ctr"/>
           <a:lstStyle/>
           <a:p>
-            <a:pPr algn="l" indent="0" marL="0">
+            <a:pPr marL="0" indent="0" algn="l">
               <a:buNone/>
             </a:pPr>
             <a:r>
@@ -11046,10 +10769,34 @@
             <a:tbl>
               <a:tblPr/>
               <a:tblGrid>
-                <a:gridCol w="1737360"/>
-                <a:gridCol w="2743200"/>
-                <a:gridCol w="1280160"/>
-                <a:gridCol w="1005840"/>
+                <a:gridCol w="1737360">
+                  <a:extLst>
+                    <a:ext uri="{9D8B030D-6E8A-4147-A177-3AD203B41FA5}">
+                      <a16:colId xmlns:a16="http://schemas.microsoft.com/office/drawing/2014/main" val="20000"/>
+                    </a:ext>
+                  </a:extLst>
+                </a:gridCol>
+                <a:gridCol w="2743200">
+                  <a:extLst>
+                    <a:ext uri="{9D8B030D-6E8A-4147-A177-3AD203B41FA5}">
+                      <a16:colId xmlns:a16="http://schemas.microsoft.com/office/drawing/2014/main" val="20001"/>
+                    </a:ext>
+                  </a:extLst>
+                </a:gridCol>
+                <a:gridCol w="1280160">
+                  <a:extLst>
+                    <a:ext uri="{9D8B030D-6E8A-4147-A177-3AD203B41FA5}">
+                      <a16:colId xmlns:a16="http://schemas.microsoft.com/office/drawing/2014/main" val="20002"/>
+                    </a:ext>
+                  </a:extLst>
+                </a:gridCol>
+                <a:gridCol w="1005840">
+                  <a:extLst>
+                    <a:ext uri="{9D8B030D-6E8A-4147-A177-3AD203B41FA5}">
+                      <a16:colId xmlns:a16="http://schemas.microsoft.com/office/drawing/2014/main" val="20003"/>
+                    </a:ext>
+                  </a:extLst>
+                </a:gridCol>
               </a:tblGrid>
               <a:tr h="502920">
                 <a:tc>
@@ -11057,7 +10804,7 @@
                     <a:bodyPr/>
                     <a:lstStyle/>
                     <a:p>
-                      <a:pPr indent="0" marL="0">
+                      <a:pPr marL="0" indent="0">
                         <a:buNone/>
                       </a:pPr>
                       <a:r>
@@ -11118,7 +10865,7 @@
                     <a:bodyPr/>
                     <a:lstStyle/>
                     <a:p>
-                      <a:pPr indent="0" marL="0">
+                      <a:pPr marL="0" indent="0">
                         <a:buNone/>
                       </a:pPr>
                       <a:r>
@@ -11179,7 +10926,7 @@
                     <a:bodyPr/>
                     <a:lstStyle/>
                     <a:p>
-                      <a:pPr algn="ctr" indent="0" marL="0">
+                      <a:pPr marL="0" indent="0" algn="ctr">
                         <a:buNone/>
                       </a:pPr>
                       <a:r>
@@ -11240,7 +10987,7 @@
                     <a:bodyPr/>
                     <a:lstStyle/>
                     <a:p>
-                      <a:pPr algn="ctr" indent="0" marL="0">
+                      <a:pPr marL="0" indent="0" algn="ctr">
                         <a:buNone/>
                       </a:pPr>
                       <a:r>
@@ -11296,6 +11043,11 @@
                     </a:solidFill>
                   </a:tcPr>
                 </a:tc>
+                <a:extLst>
+                  <a:ext uri="{0D108BD9-81ED-4DB2-BD59-A6C34878D82A}">
+                    <a16:rowId xmlns:a16="http://schemas.microsoft.com/office/drawing/2014/main" val="10000"/>
+                  </a:ext>
+                </a:extLst>
               </a:tr>
               <a:tr h="502920">
                 <a:tc>
@@ -11303,7 +11055,7 @@
                     <a:bodyPr/>
                     <a:lstStyle/>
                     <a:p>
-                      <a:pPr indent="0" marL="0">
+                      <a:pPr marL="0" indent="0">
                         <a:buNone/>
                       </a:pPr>
                       <a:r>
@@ -11361,7 +11113,7 @@
                     <a:bodyPr/>
                     <a:lstStyle/>
                     <a:p>
-                      <a:pPr indent="0" marL="0">
+                      <a:pPr marL="0" indent="0">
                         <a:buNone/>
                       </a:pPr>
                       <a:r>
@@ -11419,7 +11171,7 @@
                     <a:bodyPr/>
                     <a:lstStyle/>
                     <a:p>
-                      <a:pPr algn="ctr" indent="0" marL="0">
+                      <a:pPr marL="0" indent="0" algn="ctr">
                         <a:buNone/>
                       </a:pPr>
                       <a:r>
@@ -11477,7 +11229,7 @@
                     <a:bodyPr/>
                     <a:lstStyle/>
                     <a:p>
-                      <a:pPr algn="ctr" indent="0" marL="0">
+                      <a:pPr marL="0" indent="0" algn="ctr">
                         <a:buNone/>
                       </a:pPr>
                       <a:r>
@@ -11530,6 +11282,11 @@
                     </a:lnB>
                   </a:tcPr>
                 </a:tc>
+                <a:extLst>
+                  <a:ext uri="{0D108BD9-81ED-4DB2-BD59-A6C34878D82A}">
+                    <a16:rowId xmlns:a16="http://schemas.microsoft.com/office/drawing/2014/main" val="10001"/>
+                  </a:ext>
+                </a:extLst>
               </a:tr>
               <a:tr h="502920">
                 <a:tc>
@@ -11537,7 +11294,7 @@
                     <a:bodyPr/>
                     <a:lstStyle/>
                     <a:p>
-                      <a:pPr indent="0" marL="0">
+                      <a:pPr marL="0" indent="0">
                         <a:buNone/>
                       </a:pPr>
                       <a:r>
@@ -11595,7 +11352,7 @@
                     <a:bodyPr/>
                     <a:lstStyle/>
                     <a:p>
-                      <a:pPr indent="0" marL="0">
+                      <a:pPr marL="0" indent="0">
                         <a:buNone/>
                       </a:pPr>
                       <a:r>
@@ -11653,7 +11410,7 @@
                     <a:bodyPr/>
                     <a:lstStyle/>
                     <a:p>
-                      <a:pPr algn="ctr" indent="0" marL="0">
+                      <a:pPr marL="0" indent="0" algn="ctr">
                         <a:buNone/>
                       </a:pPr>
                       <a:r>
@@ -11711,7 +11468,7 @@
                     <a:bodyPr/>
                     <a:lstStyle/>
                     <a:p>
-                      <a:pPr algn="ctr" indent="0" marL="0">
+                      <a:pPr marL="0" indent="0" algn="ctr">
                         <a:buNone/>
                       </a:pPr>
                       <a:r>
@@ -11764,6 +11521,11 @@
                     </a:lnB>
                   </a:tcPr>
                 </a:tc>
+                <a:extLst>
+                  <a:ext uri="{0D108BD9-81ED-4DB2-BD59-A6C34878D82A}">
+                    <a16:rowId xmlns:a16="http://schemas.microsoft.com/office/drawing/2014/main" val="10002"/>
+                  </a:ext>
+                </a:extLst>
               </a:tr>
               <a:tr h="502920">
                 <a:tc>
@@ -11771,7 +11533,7 @@
                     <a:bodyPr/>
                     <a:lstStyle/>
                     <a:p>
-                      <a:pPr indent="0" marL="0">
+                      <a:pPr marL="0" indent="0">
                         <a:buNone/>
                       </a:pPr>
                       <a:r>
@@ -11829,7 +11591,7 @@
                     <a:bodyPr/>
                     <a:lstStyle/>
                     <a:p>
-                      <a:pPr indent="0" marL="0">
+                      <a:pPr marL="0" indent="0">
                         <a:buNone/>
                       </a:pPr>
                       <a:r>
@@ -11887,7 +11649,7 @@
                     <a:bodyPr/>
                     <a:lstStyle/>
                     <a:p>
-                      <a:pPr algn="ctr" indent="0" marL="0">
+                      <a:pPr marL="0" indent="0" algn="ctr">
                         <a:buNone/>
                       </a:pPr>
                       <a:r>
@@ -11945,7 +11707,7 @@
                     <a:bodyPr/>
                     <a:lstStyle/>
                     <a:p>
-                      <a:pPr algn="ctr" indent="0" marL="0">
+                      <a:pPr marL="0" indent="0" algn="ctr">
                         <a:buNone/>
                       </a:pPr>
                       <a:r>
@@ -11998,6 +11760,11 @@
                     </a:lnB>
                   </a:tcPr>
                 </a:tc>
+                <a:extLst>
+                  <a:ext uri="{0D108BD9-81ED-4DB2-BD59-A6C34878D82A}">
+                    <a16:rowId xmlns:a16="http://schemas.microsoft.com/office/drawing/2014/main" val="10003"/>
+                  </a:ext>
+                </a:extLst>
               </a:tr>
               <a:tr h="502920">
                 <a:tc>
@@ -12005,7 +11772,7 @@
                     <a:bodyPr/>
                     <a:lstStyle/>
                     <a:p>
-                      <a:pPr indent="0" marL="0">
+                      <a:pPr marL="0" indent="0">
                         <a:buNone/>
                       </a:pPr>
                       <a:r>
@@ -12063,7 +11830,7 @@
                     <a:bodyPr/>
                     <a:lstStyle/>
                     <a:p>
-                      <a:pPr indent="0" marL="0">
+                      <a:pPr marL="0" indent="0">
                         <a:buNone/>
                       </a:pPr>
                       <a:r>
@@ -12121,7 +11888,7 @@
                     <a:bodyPr/>
                     <a:lstStyle/>
                     <a:p>
-                      <a:pPr algn="ctr" indent="0" marL="0">
+                      <a:pPr marL="0" indent="0" algn="ctr">
                         <a:buNone/>
                       </a:pPr>
                       <a:r>
@@ -12179,7 +11946,7 @@
                     <a:bodyPr/>
                     <a:lstStyle/>
                     <a:p>
-                      <a:pPr algn="ctr" indent="0" marL="0">
+                      <a:pPr marL="0" indent="0" algn="ctr">
                         <a:buNone/>
                       </a:pPr>
                       <a:r>
@@ -12232,6 +11999,11 @@
                     </a:lnB>
                   </a:tcPr>
                 </a:tc>
+                <a:extLst>
+                  <a:ext uri="{0D108BD9-81ED-4DB2-BD59-A6C34878D82A}">
+                    <a16:rowId xmlns:a16="http://schemas.microsoft.com/office/drawing/2014/main" val="10004"/>
+                  </a:ext>
+                </a:extLst>
               </a:tr>
               <a:tr h="502920">
                 <a:tc>
@@ -12239,7 +12011,7 @@
                     <a:bodyPr/>
                     <a:lstStyle/>
                     <a:p>
-                      <a:pPr indent="0" marL="0">
+                      <a:pPr marL="0" indent="0">
                         <a:buNone/>
                       </a:pPr>
                       <a:r>
@@ -12297,7 +12069,7 @@
                     <a:bodyPr/>
                     <a:lstStyle/>
                     <a:p>
-                      <a:pPr indent="0" marL="0">
+                      <a:pPr marL="0" indent="0">
                         <a:buNone/>
                       </a:pPr>
                       <a:r>
@@ -12355,7 +12127,7 @@
                     <a:bodyPr/>
                     <a:lstStyle/>
                     <a:p>
-                      <a:pPr algn="ctr" indent="0" marL="0">
+                      <a:pPr marL="0" indent="0" algn="ctr">
                         <a:buNone/>
                       </a:pPr>
                       <a:r>
@@ -12413,7 +12185,7 @@
                     <a:bodyPr/>
                     <a:lstStyle/>
                     <a:p>
-                      <a:pPr algn="ctr" indent="0" marL="0">
+                      <a:pPr marL="0" indent="0" algn="ctr">
                         <a:buNone/>
                       </a:pPr>
                       <a:r>
@@ -12466,6 +12238,11 @@
                     </a:lnB>
                   </a:tcPr>
                 </a:tc>
+                <a:extLst>
+                  <a:ext uri="{0D108BD9-81ED-4DB2-BD59-A6C34878D82A}">
+                    <a16:rowId xmlns:a16="http://schemas.microsoft.com/office/drawing/2014/main" val="10005"/>
+                  </a:ext>
+                </a:extLst>
               </a:tr>
             </a:tbl>
           </a:graphicData>
@@ -12497,7 +12274,7 @@
             <a:prstDash val="solid"/>
           </a:ln>
           <a:effectLst>
-            <a:outerShdw sx="100000" sy="100000" kx="0" ky="0" algn="bl" rotWithShape="0" blurRad="50800" dist="12700" dir="5400000">
+            <a:outerShdw blurRad="50800" dist="12700" dir="5400000" algn="bl" rotWithShape="0">
               <a:srgbClr val="000000">
                 <a:alpha val="8000"/>
               </a:srgbClr>
@@ -12526,7 +12303,7 @@
           <a:bodyPr wrap="square" lIns="0" tIns="0" rIns="0" bIns="0" rtlCol="0" anchor="t"/>
           <a:lstStyle/>
           <a:p>
-            <a:pPr indent="0" marL="0">
+            <a:pPr marL="0" indent="0">
               <a:buNone/>
             </a:pPr>
             <a:r>
@@ -12562,7 +12339,7 @@
           <a:bodyPr wrap="square" lIns="0" tIns="0" rIns="0" bIns="0" rtlCol="0" anchor="t"/>
           <a:lstStyle/>
           <a:p>
-            <a:pPr indent="0" marL="0">
+            <a:pPr marL="0" indent="0">
               <a:buNone/>
             </a:pPr>
             <a:r>
@@ -12598,7 +12375,7 @@
           <a:bodyPr wrap="square" lIns="0" tIns="0" rIns="0" bIns="0" rtlCol="0" anchor="t"/>
           <a:lstStyle/>
           <a:p>
-            <a:pPr indent="0" marL="0">
+            <a:pPr marL="0" indent="0">
               <a:buNone/>
             </a:pPr>
             <a:r>
@@ -12637,7 +12414,7 @@
           <a:bodyPr wrap="square" lIns="0" tIns="0" rIns="0" bIns="0" rtlCol="0" anchor="t"/>
           <a:lstStyle/>
           <a:p>
-            <a:pPr indent="0" marL="0">
+            <a:pPr marL="0" indent="0">
               <a:buNone/>
             </a:pPr>
             <a:r>
@@ -12672,7 +12449,7 @@
           </a:prstGeom>
           <a:extLst>
             <a:ext uri="{C572A759-6A51-4108-AA02-DFA0A04FC94B}">
-              <ma14:wrappingTextBoxFlag xmlns:ma14="http://schemas.microsoft.com/office/mac/drawingml/2011/main" val="0"/>
+              <ma14:wrappingTextBoxFlag xmlns:ma14="http://schemas.microsoft.com/office/mac/drawingml/2011/main" xmlns="" val="0"/>
             </a:ext>
           </a:extLst>
         </p:spPr>
@@ -12690,7 +12467,7 @@
           <a:p>
             <a:pPr algn="r"/>
             <a:fld id="{F7021451-1387-4CA6-816F-3879F97B5CBC}" type="slidenum">
-              <a:rPr b="0" lang="en-US"/>
+              <a:rPr lang="en-US" b="0"/>
               <a:t>15</a:t>
             </a:fld>
             <a:endParaRPr lang="en-US"/>
@@ -12725,9 +12502,11 @@
       <p:sp>
         <p:nvSpPr>
           <p:cNvPr id="2" name="Text 0"/>
-          <p:cNvSpPr/>
+          <p:cNvSpPr>
+            <a:spLocks noGrp="1"/>
+          </p:cNvSpPr>
           <p:nvPr>
-            <p:ph idx="100" type="title" hasCustomPrompt="1"/>
+            <p:ph type="title" idx="100" hasCustomPrompt="1"/>
           </p:nvPr>
         </p:nvSpPr>
         <p:spPr>
@@ -12745,7 +12524,7 @@
           <a:bodyPr wrap="square" lIns="0" tIns="0" rIns="0" bIns="0" rtlCol="0" anchor="ctr"/>
           <a:lstStyle/>
           <a:p>
-            <a:pPr algn="l" indent="0" marL="0">
+            <a:pPr marL="0" indent="0" algn="l">
               <a:buNone/>
             </a:pPr>
             <a:r>
@@ -12808,7 +12587,7 @@
           <a:bodyPr wrap="square" lIns="0" tIns="0" rIns="0" bIns="0" rtlCol="0" anchor="ctr"/>
           <a:lstStyle/>
           <a:p>
-            <a:pPr algn="ctr" indent="0" marL="0">
+            <a:pPr marL="0" indent="0" algn="ctr">
               <a:buNone/>
             </a:pPr>
             <a:r>
@@ -12871,7 +12650,7 @@
           <a:bodyPr wrap="square" lIns="0" tIns="0" rIns="0" bIns="0" rtlCol="0" anchor="ctr"/>
           <a:lstStyle/>
           <a:p>
-            <a:pPr indent="0" marL="0">
+            <a:pPr marL="0" indent="0">
               <a:buNone/>
             </a:pPr>
             <a:r>
@@ -13010,7 +12789,7 @@
           <a:bodyPr wrap="square" lIns="0" tIns="0" rIns="0" bIns="0" rtlCol="0" anchor="ctr"/>
           <a:lstStyle/>
           <a:p>
-            <a:pPr indent="0" marL="0">
+            <a:pPr marL="0" indent="0">
               <a:buNone/>
             </a:pPr>
             <a:r>
@@ -13149,7 +12928,7 @@
           <a:bodyPr wrap="square" lIns="0" tIns="0" rIns="0" bIns="0" rtlCol="0" anchor="ctr"/>
           <a:lstStyle/>
           <a:p>
-            <a:pPr indent="0" marL="0">
+            <a:pPr marL="0" indent="0">
               <a:buNone/>
             </a:pPr>
             <a:r>
@@ -13250,9 +13029,11 @@
       <p:sp>
         <p:nvSpPr>
           <p:cNvPr id="2" name="Text 0"/>
-          <p:cNvSpPr/>
+          <p:cNvSpPr>
+            <a:spLocks noGrp="1"/>
+          </p:cNvSpPr>
           <p:nvPr>
-            <p:ph idx="100" type="title" hasCustomPrompt="1"/>
+            <p:ph type="title" idx="100" hasCustomPrompt="1"/>
           </p:nvPr>
         </p:nvSpPr>
         <p:spPr>
@@ -13270,7 +13051,7 @@
           <a:bodyPr wrap="square" lIns="0" tIns="0" rIns="0" bIns="0" rtlCol="0" anchor="ctr"/>
           <a:lstStyle/>
           <a:p>
-            <a:pPr algn="l" indent="0" marL="0">
+            <a:pPr marL="0" indent="0" algn="l">
               <a:buNone/>
             </a:pPr>
             <a:r>
@@ -13311,7 +13092,7 @@
             <a:prstDash val="solid"/>
           </a:ln>
           <a:effectLst>
-            <a:outerShdw sx="100000" sy="100000" kx="0" ky="0" algn="bl" rotWithShape="0" blurRad="50800" dist="12700" dir="5400000">
+            <a:outerShdw blurRad="50800" dist="12700" dir="5400000" algn="bl" rotWithShape="0">
               <a:srgbClr val="000000">
                 <a:alpha val="8000"/>
               </a:srgbClr>
@@ -13365,7 +13146,7 @@
           <a:bodyPr wrap="square" lIns="0" tIns="0" rIns="0" bIns="0" rtlCol="0" anchor="ctr"/>
           <a:lstStyle/>
           <a:p>
-            <a:pPr algn="ctr" indent="0" marL="0">
+            <a:pPr marL="0" indent="0" algn="ctr">
               <a:buNone/>
             </a:pPr>
             <a:r>
@@ -13401,7 +13182,7 @@
           <a:bodyPr wrap="square" lIns="0" tIns="0" rIns="0" bIns="0" rtlCol="0" anchor="ctr"/>
           <a:lstStyle/>
           <a:p>
-            <a:pPr indent="0" marL="0">
+            <a:pPr marL="0" indent="0">
               <a:buNone/>
             </a:pPr>
             <a:r>
@@ -13437,7 +13218,7 @@
           <a:bodyPr wrap="square" lIns="0" tIns="0" rIns="0" bIns="0" rtlCol="0" anchor="t"/>
           <a:lstStyle/>
           <a:p>
-            <a:pPr indent="0" marL="0">
+            <a:pPr marL="0" indent="0">
               <a:buNone/>
             </a:pPr>
             <a:r>
@@ -13478,7 +13259,7 @@
             <a:prstDash val="solid"/>
           </a:ln>
           <a:effectLst>
-            <a:outerShdw sx="100000" sy="100000" kx="0" ky="0" algn="bl" rotWithShape="0" blurRad="50800" dist="12700" dir="5400000">
+            <a:outerShdw blurRad="50800" dist="12700" dir="5400000" algn="bl" rotWithShape="0">
               <a:srgbClr val="000000">
                 <a:alpha val="8000"/>
               </a:srgbClr>
@@ -13532,7 +13313,7 @@
           <a:bodyPr wrap="square" lIns="0" tIns="0" rIns="0" bIns="0" rtlCol="0" anchor="ctr"/>
           <a:lstStyle/>
           <a:p>
-            <a:pPr algn="ctr" indent="0" marL="0">
+            <a:pPr marL="0" indent="0" algn="ctr">
               <a:buNone/>
             </a:pPr>
             <a:r>
@@ -13568,7 +13349,7 @@
           <a:bodyPr wrap="square" lIns="0" tIns="0" rIns="0" bIns="0" rtlCol="0" anchor="ctr"/>
           <a:lstStyle/>
           <a:p>
-            <a:pPr indent="0" marL="0">
+            <a:pPr marL="0" indent="0">
               <a:buNone/>
             </a:pPr>
             <a:r>
@@ -13604,7 +13385,7 @@
           <a:bodyPr wrap="square" lIns="0" tIns="0" rIns="0" bIns="0" rtlCol="0" anchor="t"/>
           <a:lstStyle/>
           <a:p>
-            <a:pPr indent="0" marL="0">
+            <a:pPr marL="0" indent="0">
               <a:buNone/>
             </a:pPr>
             <a:r>
@@ -13645,7 +13426,7 @@
             <a:prstDash val="solid"/>
           </a:ln>
           <a:effectLst>
-            <a:outerShdw sx="100000" sy="100000" kx="0" ky="0" algn="bl" rotWithShape="0" blurRad="50800" dist="12700" dir="5400000">
+            <a:outerShdw blurRad="50800" dist="12700" dir="5400000" algn="bl" rotWithShape="0">
               <a:srgbClr val="000000">
                 <a:alpha val="8000"/>
               </a:srgbClr>
@@ -13699,7 +13480,7 @@
           <a:bodyPr wrap="square" lIns="0" tIns="0" rIns="0" bIns="0" rtlCol="0" anchor="ctr"/>
           <a:lstStyle/>
           <a:p>
-            <a:pPr algn="ctr" indent="0" marL="0">
+            <a:pPr marL="0" indent="0" algn="ctr">
               <a:buNone/>
             </a:pPr>
             <a:r>
@@ -13735,7 +13516,7 @@
           <a:bodyPr wrap="square" lIns="0" tIns="0" rIns="0" bIns="0" rtlCol="0" anchor="ctr"/>
           <a:lstStyle/>
           <a:p>
-            <a:pPr indent="0" marL="0">
+            <a:pPr marL="0" indent="0">
               <a:buNone/>
             </a:pPr>
             <a:r>
@@ -13771,7 +13552,7 @@
           <a:bodyPr wrap="square" lIns="0" tIns="0" rIns="0" bIns="0" rtlCol="0" anchor="t"/>
           <a:lstStyle/>
           <a:p>
-            <a:pPr indent="0" marL="0">
+            <a:pPr marL="0" indent="0">
               <a:buNone/>
             </a:pPr>
             <a:r>
@@ -13812,7 +13593,7 @@
             <a:prstDash val="solid"/>
           </a:ln>
           <a:effectLst>
-            <a:outerShdw sx="100000" sy="100000" kx="0" ky="0" algn="bl" rotWithShape="0" blurRad="50800" dist="12700" dir="5400000">
+            <a:outerShdw blurRad="50800" dist="12700" dir="5400000" algn="bl" rotWithShape="0">
               <a:srgbClr val="000000">
                 <a:alpha val="8000"/>
               </a:srgbClr>
@@ -13866,7 +13647,7 @@
           <a:bodyPr wrap="square" lIns="0" tIns="0" rIns="0" bIns="0" rtlCol="0" anchor="ctr"/>
           <a:lstStyle/>
           <a:p>
-            <a:pPr algn="ctr" indent="0" marL="0">
+            <a:pPr marL="0" indent="0" algn="ctr">
               <a:buNone/>
             </a:pPr>
             <a:r>
@@ -13902,7 +13683,7 @@
           <a:bodyPr wrap="square" lIns="0" tIns="0" rIns="0" bIns="0" rtlCol="0" anchor="ctr"/>
           <a:lstStyle/>
           <a:p>
-            <a:pPr indent="0" marL="0">
+            <a:pPr marL="0" indent="0">
               <a:buNone/>
             </a:pPr>
             <a:r>
@@ -13938,7 +13719,7 @@
           <a:bodyPr wrap="square" lIns="0" tIns="0" rIns="0" bIns="0" rtlCol="0" anchor="t"/>
           <a:lstStyle/>
           <a:p>
-            <a:pPr indent="0" marL="0">
+            <a:pPr marL="0" indent="0">
               <a:buNone/>
             </a:pPr>
             <a:r>
@@ -13979,7 +13760,7 @@
             <a:prstDash val="solid"/>
           </a:ln>
           <a:effectLst>
-            <a:outerShdw sx="100000" sy="100000" kx="0" ky="0" algn="bl" rotWithShape="0" blurRad="50800" dist="12700" dir="5400000">
+            <a:outerShdw blurRad="50800" dist="12700" dir="5400000" algn="bl" rotWithShape="0">
               <a:srgbClr val="000000">
                 <a:alpha val="8000"/>
               </a:srgbClr>
@@ -14033,7 +13814,7 @@
           <a:bodyPr wrap="square" lIns="0" tIns="0" rIns="0" bIns="0" rtlCol="0" anchor="ctr"/>
           <a:lstStyle/>
           <a:p>
-            <a:pPr algn="ctr" indent="0" marL="0">
+            <a:pPr marL="0" indent="0" algn="ctr">
               <a:buNone/>
             </a:pPr>
             <a:r>
@@ -14069,7 +13850,7 @@
           <a:bodyPr wrap="square" lIns="0" tIns="0" rIns="0" bIns="0" rtlCol="0" anchor="ctr"/>
           <a:lstStyle/>
           <a:p>
-            <a:pPr indent="0" marL="0">
+            <a:pPr marL="0" indent="0">
               <a:buNone/>
             </a:pPr>
             <a:r>
@@ -14105,7 +13886,7 @@
           <a:bodyPr wrap="square" lIns="0" tIns="0" rIns="0" bIns="0" rtlCol="0" anchor="t"/>
           <a:lstStyle/>
           <a:p>
-            <a:pPr indent="0" marL="0">
+            <a:pPr marL="0" indent="0">
               <a:buNone/>
             </a:pPr>
             <a:r>
@@ -14146,7 +13927,7 @@
             <a:prstDash val="solid"/>
           </a:ln>
           <a:effectLst>
-            <a:outerShdw sx="100000" sy="100000" kx="0" ky="0" algn="bl" rotWithShape="0" blurRad="50800" dist="12700" dir="5400000">
+            <a:outerShdw blurRad="50800" dist="12700" dir="5400000" algn="bl" rotWithShape="0">
               <a:srgbClr val="000000">
                 <a:alpha val="8000"/>
               </a:srgbClr>
@@ -14200,7 +13981,7 @@
           <a:bodyPr wrap="square" lIns="0" tIns="0" rIns="0" bIns="0" rtlCol="0" anchor="ctr"/>
           <a:lstStyle/>
           <a:p>
-            <a:pPr algn="ctr" indent="0" marL="0">
+            <a:pPr marL="0" indent="0" algn="ctr">
               <a:buNone/>
             </a:pPr>
             <a:r>
@@ -14236,7 +14017,7 @@
           <a:bodyPr wrap="square" lIns="0" tIns="0" rIns="0" bIns="0" rtlCol="0" anchor="ctr"/>
           <a:lstStyle/>
           <a:p>
-            <a:pPr indent="0" marL="0">
+            <a:pPr marL="0" indent="0">
               <a:buNone/>
             </a:pPr>
             <a:r>
@@ -14272,7 +14053,7 @@
           <a:bodyPr wrap="square" lIns="0" tIns="0" rIns="0" bIns="0" rtlCol="0" anchor="t"/>
           <a:lstStyle/>
           <a:p>
-            <a:pPr indent="0" marL="0">
+            <a:pPr marL="0" indent="0">
               <a:buNone/>
             </a:pPr>
             <a:r>
@@ -14313,7 +14094,7 @@
             <a:prstDash val="solid"/>
           </a:ln>
           <a:effectLst>
-            <a:outerShdw sx="100000" sy="100000" kx="0" ky="0" algn="bl" rotWithShape="0" blurRad="50800" dist="12700" dir="5400000">
+            <a:outerShdw blurRad="50800" dist="12700" dir="5400000" algn="bl" rotWithShape="0">
               <a:srgbClr val="000000">
                 <a:alpha val="8000"/>
               </a:srgbClr>
@@ -14367,7 +14148,7 @@
           <a:bodyPr wrap="square" lIns="0" tIns="0" rIns="0" bIns="0" rtlCol="0" anchor="ctr"/>
           <a:lstStyle/>
           <a:p>
-            <a:pPr algn="ctr" indent="0" marL="0">
+            <a:pPr marL="0" indent="0" algn="ctr">
               <a:buNone/>
             </a:pPr>
             <a:r>
@@ -14403,7 +14184,7 @@
           <a:bodyPr wrap="square" lIns="0" tIns="0" rIns="0" bIns="0" rtlCol="0" anchor="ctr"/>
           <a:lstStyle/>
           <a:p>
-            <a:pPr indent="0" marL="0">
+            <a:pPr marL="0" indent="0">
               <a:buNone/>
             </a:pPr>
             <a:r>
@@ -14439,7 +14220,7 @@
           <a:bodyPr wrap="square" lIns="0" tIns="0" rIns="0" bIns="0" rtlCol="0" anchor="t"/>
           <a:lstStyle/>
           <a:p>
-            <a:pPr indent="0" marL="0">
+            <a:pPr marL="0" indent="0">
               <a:buNone/>
             </a:pPr>
             <a:r>
@@ -14480,7 +14261,7 @@
             <a:prstDash val="solid"/>
           </a:ln>
           <a:effectLst>
-            <a:outerShdw sx="100000" sy="100000" kx="0" ky="0" algn="bl" rotWithShape="0" blurRad="50800" dist="12700" dir="5400000">
+            <a:outerShdw blurRad="50800" dist="12700" dir="5400000" algn="bl" rotWithShape="0">
               <a:srgbClr val="000000">
                 <a:alpha val="8000"/>
               </a:srgbClr>
@@ -14534,7 +14315,7 @@
           <a:bodyPr wrap="square" lIns="0" tIns="0" rIns="0" bIns="0" rtlCol="0" anchor="ctr"/>
           <a:lstStyle/>
           <a:p>
-            <a:pPr algn="ctr" indent="0" marL="0">
+            <a:pPr marL="0" indent="0" algn="ctr">
               <a:buNone/>
             </a:pPr>
             <a:r>
@@ -14570,7 +14351,7 @@
           <a:bodyPr wrap="square" lIns="0" tIns="0" rIns="0" bIns="0" rtlCol="0" anchor="ctr"/>
           <a:lstStyle/>
           <a:p>
-            <a:pPr indent="0" marL="0">
+            <a:pPr marL="0" indent="0">
               <a:buNone/>
             </a:pPr>
             <a:r>
@@ -14606,7 +14387,7 @@
           <a:bodyPr wrap="square" lIns="0" tIns="0" rIns="0" bIns="0" rtlCol="0" anchor="t"/>
           <a:lstStyle/>
           <a:p>
-            <a:pPr indent="0" marL="0">
+            <a:pPr marL="0" indent="0">
               <a:buNone/>
             </a:pPr>
             <a:r>
@@ -14647,7 +14428,7 @@
             <a:prstDash val="solid"/>
           </a:ln>
           <a:effectLst>
-            <a:outerShdw sx="100000" sy="100000" kx="0" ky="0" algn="bl" rotWithShape="0" blurRad="50800" dist="12700" dir="5400000">
+            <a:outerShdw blurRad="50800" dist="12700" dir="5400000" algn="bl" rotWithShape="0">
               <a:srgbClr val="000000">
                 <a:alpha val="8000"/>
               </a:srgbClr>
@@ -14701,7 +14482,7 @@
           <a:bodyPr wrap="square" lIns="0" tIns="0" rIns="0" bIns="0" rtlCol="0" anchor="ctr"/>
           <a:lstStyle/>
           <a:p>
-            <a:pPr algn="ctr" indent="0" marL="0">
+            <a:pPr marL="0" indent="0" algn="ctr">
               <a:buNone/>
             </a:pPr>
             <a:r>
@@ -14737,7 +14518,7 @@
           <a:bodyPr wrap="square" lIns="0" tIns="0" rIns="0" bIns="0" rtlCol="0" anchor="ctr"/>
           <a:lstStyle/>
           <a:p>
-            <a:pPr indent="0" marL="0">
+            <a:pPr marL="0" indent="0">
               <a:buNone/>
             </a:pPr>
             <a:r>
@@ -14773,7 +14554,7 @@
           <a:bodyPr wrap="square" lIns="0" tIns="0" rIns="0" bIns="0" rtlCol="0" anchor="t"/>
           <a:lstStyle/>
           <a:p>
-            <a:pPr indent="0" marL="0">
+            <a:pPr marL="0" indent="0">
               <a:buNone/>
             </a:pPr>
             <a:r>
@@ -14814,7 +14595,7 @@
             <a:prstDash val="solid"/>
           </a:ln>
           <a:effectLst>
-            <a:outerShdw sx="100000" sy="100000" kx="0" ky="0" algn="bl" rotWithShape="0" blurRad="50800" dist="12700" dir="5400000">
+            <a:outerShdw blurRad="50800" dist="12700" dir="5400000" algn="bl" rotWithShape="0">
               <a:srgbClr val="000000">
                 <a:alpha val="8000"/>
               </a:srgbClr>
@@ -14868,7 +14649,7 @@
           <a:bodyPr wrap="square" lIns="0" tIns="0" rIns="0" bIns="0" rtlCol="0" anchor="ctr"/>
           <a:lstStyle/>
           <a:p>
-            <a:pPr algn="ctr" indent="0" marL="0">
+            <a:pPr marL="0" indent="0" algn="ctr">
               <a:buNone/>
             </a:pPr>
             <a:r>
@@ -14904,7 +14685,7 @@
           <a:bodyPr wrap="square" lIns="0" tIns="0" rIns="0" bIns="0" rtlCol="0" anchor="ctr"/>
           <a:lstStyle/>
           <a:p>
-            <a:pPr indent="0" marL="0">
+            <a:pPr marL="0" indent="0">
               <a:buNone/>
             </a:pPr>
             <a:r>
@@ -14940,7 +14721,7 @@
           <a:bodyPr wrap="square" lIns="0" tIns="0" rIns="0" bIns="0" rtlCol="0" anchor="t"/>
           <a:lstStyle/>
           <a:p>
-            <a:pPr indent="0" marL="0">
+            <a:pPr marL="0" indent="0">
               <a:buNone/>
             </a:pPr>
             <a:r>
@@ -14981,7 +14762,7 @@
             <a:prstDash val="solid"/>
           </a:ln>
           <a:effectLst>
-            <a:outerShdw sx="100000" sy="100000" kx="0" ky="0" algn="bl" rotWithShape="0" blurRad="50800" dist="12700" dir="5400000">
+            <a:outerShdw blurRad="50800" dist="12700" dir="5400000" algn="bl" rotWithShape="0">
               <a:srgbClr val="000000">
                 <a:alpha val="8000"/>
               </a:srgbClr>
@@ -15010,7 +14791,7 @@
           <a:bodyPr wrap="square" lIns="0" tIns="0" rIns="0" bIns="0" rtlCol="0" anchor="t"/>
           <a:lstStyle/>
           <a:p>
-            <a:pPr indent="0" marL="0">
+            <a:pPr marL="0" indent="0">
               <a:buNone/>
             </a:pPr>
             <a:r>
@@ -15145,7 +14926,7 @@
             <a:prstDash val="solid"/>
           </a:ln>
           <a:effectLst>
-            <a:outerShdw sx="100000" sy="100000" kx="0" ky="0" algn="bl" rotWithShape="0" blurRad="50800" dist="12700" dir="5400000">
+            <a:outerShdw blurRad="50800" dist="12700" dir="5400000" algn="bl" rotWithShape="0">
               <a:srgbClr val="000000">
                 <a:alpha val="8000"/>
               </a:srgbClr>
@@ -15174,7 +14955,7 @@
           <a:bodyPr wrap="square" lIns="0" tIns="0" rIns="0" bIns="0" rtlCol="0" anchor="t"/>
           <a:lstStyle/>
           <a:p>
-            <a:pPr indent="0" marL="0">
+            <a:pPr marL="0" indent="0">
               <a:buNone/>
             </a:pPr>
             <a:r>
@@ -15285,7 +15066,7 @@
       </p:sp>
       <p:sp>
         <p:nvSpPr>
-          <p:cNvPr id="25" name="Slide Number Placeholder 0"/>
+          <p:cNvPr id="3" name="Slide Number Placeholder 0"/>
           <p:cNvSpPr>
             <a:spLocks noGrp="1"/>
           </p:cNvSpPr>
@@ -15303,7 +15084,7 @@
           </a:prstGeom>
           <a:extLst>
             <a:ext uri="{C572A759-6A51-4108-AA02-DFA0A04FC94B}">
-              <ma14:wrappingTextBoxFlag xmlns:ma14="http://schemas.microsoft.com/office/mac/drawingml/2011/main" val="0"/>
+              <ma14:wrappingTextBoxFlag xmlns:ma14="http://schemas.microsoft.com/office/mac/drawingml/2011/main" xmlns="" val="0"/>
             </a:ext>
           </a:extLst>
         </p:spPr>
@@ -15321,7 +15102,7 @@
           <a:p>
             <a:pPr algn="r"/>
             <a:fld id="{F7021451-1387-4CA6-816F-3879F97B5CBC}" type="slidenum">
-              <a:rPr b="0" lang="en-US"/>
+              <a:rPr lang="en-US" b="0"/>
               <a:t>17</a:t>
             </a:fld>
             <a:endParaRPr lang="en-US"/>
@@ -15356,9 +15137,11 @@
       <p:sp>
         <p:nvSpPr>
           <p:cNvPr id="2" name="Text 0"/>
-          <p:cNvSpPr/>
+          <p:cNvSpPr>
+            <a:spLocks noGrp="1"/>
+          </p:cNvSpPr>
           <p:nvPr>
-            <p:ph idx="100" type="title" hasCustomPrompt="1"/>
+            <p:ph type="title" idx="100" hasCustomPrompt="1"/>
           </p:nvPr>
         </p:nvSpPr>
         <p:spPr>
@@ -15376,7 +15159,7 @@
           <a:bodyPr wrap="square" lIns="0" tIns="0" rIns="0" bIns="0" rtlCol="0" anchor="ctr"/>
           <a:lstStyle/>
           <a:p>
-            <a:pPr algn="l" indent="0" marL="0">
+            <a:pPr marL="0" indent="0" algn="l">
               <a:buNone/>
             </a:pPr>
             <a:r>
@@ -15439,7 +15222,7 @@
           <a:bodyPr wrap="square" lIns="0" tIns="0" rIns="0" bIns="0" rtlCol="0" anchor="ctr"/>
           <a:lstStyle/>
           <a:p>
-            <a:pPr algn="ctr" indent="0" marL="0">
+            <a:pPr marL="0" indent="0" algn="ctr">
               <a:buNone/>
             </a:pPr>
             <a:r>
@@ -15502,7 +15285,7 @@
           <a:bodyPr wrap="square" lIns="0" tIns="0" rIns="0" bIns="0" rtlCol="0" anchor="ctr"/>
           <a:lstStyle/>
           <a:p>
-            <a:pPr indent="0" marL="0">
+            <a:pPr marL="0" indent="0">
               <a:buNone/>
             </a:pPr>
             <a:r>
@@ -15659,7 +15442,7 @@
           <a:bodyPr wrap="square" lIns="0" tIns="0" rIns="0" bIns="0" rtlCol="0" anchor="ctr"/>
           <a:lstStyle/>
           <a:p>
-            <a:pPr indent="0" marL="0">
+            <a:pPr marL="0" indent="0">
               <a:buNone/>
             </a:pPr>
             <a:r>
@@ -15798,7 +15581,7 @@
           <a:bodyPr wrap="square" lIns="0" tIns="0" rIns="0" bIns="0" rtlCol="0" anchor="ctr"/>
           <a:lstStyle/>
           <a:p>
-            <a:pPr indent="0" marL="0">
+            <a:pPr marL="0" indent="0">
               <a:buNone/>
             </a:pPr>
             <a:r>
@@ -15899,9 +15682,11 @@
       <p:sp>
         <p:nvSpPr>
           <p:cNvPr id="2" name="Text 0"/>
-          <p:cNvSpPr/>
+          <p:cNvSpPr>
+            <a:spLocks noGrp="1"/>
+          </p:cNvSpPr>
           <p:nvPr>
-            <p:ph idx="100" type="title" hasCustomPrompt="1"/>
+            <p:ph type="title" idx="100" hasCustomPrompt="1"/>
           </p:nvPr>
         </p:nvSpPr>
         <p:spPr>
@@ -15919,7 +15704,7 @@
           <a:bodyPr wrap="square" lIns="0" tIns="0" rIns="0" bIns="0" rtlCol="0" anchor="ctr"/>
           <a:lstStyle/>
           <a:p>
-            <a:pPr algn="l" indent="0" marL="0">
+            <a:pPr marL="0" indent="0" algn="l">
               <a:buNone/>
             </a:pPr>
             <a:r>
@@ -15982,7 +15767,7 @@
           <a:bodyPr wrap="square" lIns="0" tIns="0" rIns="0" bIns="0" rtlCol="0" anchor="ctr"/>
           <a:lstStyle/>
           <a:p>
-            <a:pPr algn="ctr" indent="0" marL="0">
+            <a:pPr marL="0" indent="0" algn="ctr">
               <a:buNone/>
             </a:pPr>
             <a:r>
@@ -16045,7 +15830,7 @@
           <a:bodyPr wrap="square" lIns="0" tIns="0" rIns="0" bIns="0" rtlCol="0" anchor="ctr"/>
           <a:lstStyle/>
           <a:p>
-            <a:pPr indent="0" marL="0">
+            <a:pPr marL="0" indent="0">
               <a:buNone/>
             </a:pPr>
             <a:r>
@@ -16166,7 +15951,7 @@
           <a:bodyPr wrap="square" lIns="0" tIns="0" rIns="0" bIns="0" rtlCol="0" anchor="ctr"/>
           <a:lstStyle/>
           <a:p>
-            <a:pPr indent="0" marL="0">
+            <a:pPr marL="0" indent="0">
               <a:buNone/>
             </a:pPr>
             <a:r>
@@ -16305,7 +16090,7 @@
           <a:bodyPr wrap="square" lIns="0" tIns="0" rIns="0" bIns="0" rtlCol="0" anchor="ctr"/>
           <a:lstStyle/>
           <a:p>
-            <a:pPr indent="0" marL="0">
+            <a:pPr marL="0" indent="0">
               <a:buNone/>
             </a:pPr>
             <a:r>
@@ -16763,7 +16548,7 @@
                   <a:schemeClr val="tx2"/>
                 </a:solidFill>
               </a:rPr>
-              <a:t>Things I have built that models had to earn trust in</a:t>
+              <a:t>Things I have built that models/Applications in</a:t>
             </a:r>
             <a:endParaRPr lang="en-US" sz="1600" dirty="0"/>
           </a:p>
@@ -17306,7 +17091,7 @@
     </p:spTree>
     <p:extLst>
       <p:ext uri="{BB962C8B-B14F-4D97-AF65-F5344CB8AC3E}">
-        <p14:creationId xmlns:p14="http://schemas.microsoft.com/office/powerpoint/2010/main" val="566174866"/>
+        <p14:creationId xmlns:p14="http://schemas.microsoft.com/office/powerpoint/2010/main" val="2361110334"/>
       </p:ext>
     </p:extLst>
   </p:cSld>
@@ -17336,9 +17121,11 @@
       <p:sp>
         <p:nvSpPr>
           <p:cNvPr id="2" name="Text 0"/>
-          <p:cNvSpPr/>
+          <p:cNvSpPr>
+            <a:spLocks noGrp="1"/>
+          </p:cNvSpPr>
           <p:nvPr>
-            <p:ph idx="100" type="title" hasCustomPrompt="1"/>
+            <p:ph type="title" idx="100" hasCustomPrompt="1"/>
           </p:nvPr>
         </p:nvSpPr>
         <p:spPr>
@@ -17356,7 +17143,7 @@
           <a:bodyPr wrap="square" lIns="0" tIns="0" rIns="0" bIns="0" rtlCol="0" anchor="ctr"/>
           <a:lstStyle/>
           <a:p>
-            <a:pPr algn="l" indent="0" marL="0">
+            <a:pPr marL="0" indent="0" algn="l">
               <a:buNone/>
             </a:pPr>
             <a:r>
@@ -17392,7 +17179,7 @@
           <a:bodyPr wrap="square" lIns="0" tIns="0" rIns="0" bIns="0" rtlCol="0" anchor="t"/>
           <a:lstStyle/>
           <a:p>
-            <a:pPr indent="0" marL="0">
+            <a:pPr marL="0" indent="0">
               <a:buNone/>
             </a:pPr>
             <a:r>
@@ -17433,7 +17220,7 @@
             <a:prstDash val="solid"/>
           </a:ln>
           <a:effectLst>
-            <a:outerShdw sx="100000" sy="100000" kx="0" ky="0" algn="bl" rotWithShape="0" blurRad="50800" dist="12700" dir="5400000">
+            <a:outerShdw blurRad="50800" dist="12700" dir="5400000" algn="bl" rotWithShape="0">
               <a:srgbClr val="000000">
                 <a:alpha val="8000"/>
               </a:srgbClr>
@@ -17462,7 +17249,7 @@
           <a:bodyPr wrap="square" lIns="0" tIns="0" rIns="0" bIns="0" rtlCol="0" anchor="t"/>
           <a:lstStyle/>
           <a:p>
-            <a:pPr indent="0" marL="0">
+            <a:pPr marL="0" indent="0">
               <a:buNone/>
             </a:pPr>
             <a:r>
@@ -17498,7 +17285,7 @@
           <a:bodyPr wrap="square" lIns="0" tIns="0" rIns="0" bIns="0" rtlCol="0" anchor="t"/>
           <a:lstStyle/>
           <a:p>
-            <a:pPr indent="0" marL="0">
+            <a:pPr marL="0" indent="0">
               <a:buNone/>
             </a:pPr>
             <a:r>
@@ -17539,7 +17326,7 @@
             <a:prstDash val="solid"/>
           </a:ln>
           <a:effectLst>
-            <a:outerShdw sx="100000" sy="100000" kx="0" ky="0" algn="bl" rotWithShape="0" blurRad="50800" dist="12700" dir="5400000">
+            <a:outerShdw blurRad="50800" dist="12700" dir="5400000" algn="bl" rotWithShape="0">
               <a:srgbClr val="000000">
                 <a:alpha val="8000"/>
               </a:srgbClr>
@@ -17568,7 +17355,7 @@
           <a:bodyPr wrap="square" lIns="0" tIns="0" rIns="0" bIns="0" rtlCol="0" anchor="t"/>
           <a:lstStyle/>
           <a:p>
-            <a:pPr indent="0" marL="0">
+            <a:pPr marL="0" indent="0">
               <a:buNone/>
             </a:pPr>
             <a:r>
@@ -17604,7 +17391,7 @@
           <a:bodyPr wrap="square" lIns="0" tIns="0" rIns="0" bIns="0" rtlCol="0" anchor="t"/>
           <a:lstStyle/>
           <a:p>
-            <a:pPr indent="0" marL="0">
+            <a:pPr marL="0" indent="0">
               <a:buNone/>
             </a:pPr>
             <a:r>
@@ -17645,7 +17432,7 @@
             <a:prstDash val="solid"/>
           </a:ln>
           <a:effectLst>
-            <a:outerShdw sx="100000" sy="100000" kx="0" ky="0" algn="bl" rotWithShape="0" blurRad="50800" dist="12700" dir="5400000">
+            <a:outerShdw blurRad="50800" dist="12700" dir="5400000" algn="bl" rotWithShape="0">
               <a:srgbClr val="000000">
                 <a:alpha val="8000"/>
               </a:srgbClr>
@@ -17674,7 +17461,7 @@
           <a:bodyPr wrap="square" lIns="0" tIns="0" rIns="0" bIns="0" rtlCol="0" anchor="t"/>
           <a:lstStyle/>
           <a:p>
-            <a:pPr indent="0" marL="0">
+            <a:pPr marL="0" indent="0">
               <a:buNone/>
             </a:pPr>
             <a:r>
@@ -17710,7 +17497,7 @@
           <a:bodyPr wrap="square" lIns="0" tIns="0" rIns="0" bIns="0" rtlCol="0" anchor="t"/>
           <a:lstStyle/>
           <a:p>
-            <a:pPr indent="0" marL="0">
+            <a:pPr marL="0" indent="0">
               <a:buNone/>
             </a:pPr>
             <a:r>
@@ -17751,7 +17538,7 @@
             <a:prstDash val="solid"/>
           </a:ln>
           <a:effectLst>
-            <a:outerShdw sx="100000" sy="100000" kx="0" ky="0" algn="bl" rotWithShape="0" blurRad="50800" dist="12700" dir="5400000">
+            <a:outerShdw blurRad="50800" dist="12700" dir="5400000" algn="bl" rotWithShape="0">
               <a:srgbClr val="000000">
                 <a:alpha val="8000"/>
               </a:srgbClr>
@@ -17780,7 +17567,7 @@
           <a:bodyPr wrap="square" lIns="0" tIns="0" rIns="0" bIns="0" rtlCol="0" anchor="t"/>
           <a:lstStyle/>
           <a:p>
-            <a:pPr indent="0" marL="0">
+            <a:pPr marL="0" indent="0">
               <a:buNone/>
             </a:pPr>
             <a:r>
@@ -17816,7 +17603,7 @@
           <a:bodyPr wrap="square" lIns="0" tIns="0" rIns="0" bIns="0" rtlCol="0" anchor="t"/>
           <a:lstStyle/>
           <a:p>
-            <a:pPr indent="0" marL="0">
+            <a:pPr marL="0" indent="0">
               <a:buNone/>
             </a:pPr>
             <a:r>
@@ -17852,7 +17639,7 @@
           <a:bodyPr wrap="square" lIns="0" tIns="0" rIns="0" bIns="0" rtlCol="0" anchor="t"/>
           <a:lstStyle/>
           <a:p>
-            <a:pPr indent="0" marL="0">
+            <a:pPr marL="0" indent="0">
               <a:buNone/>
             </a:pPr>
             <a:r>
@@ -17913,7 +17700,7 @@
           <a:bodyPr wrap="square" lIns="0" tIns="0" rIns="0" bIns="0" rtlCol="0" anchor="ctr"/>
           <a:lstStyle/>
           <a:p>
-            <a:pPr algn="ctr" indent="0" marL="0">
+            <a:pPr marL="0" indent="0" algn="ctr">
               <a:buNone/>
             </a:pPr>
             <a:r>
@@ -17949,7 +17736,7 @@
           <a:bodyPr wrap="square" lIns="0" tIns="0" rIns="0" bIns="0" rtlCol="0" anchor="ctr"/>
           <a:lstStyle/>
           <a:p>
-            <a:pPr indent="0" marL="0">
+            <a:pPr marL="0" indent="0">
               <a:buNone/>
             </a:pPr>
             <a:r>
@@ -17958,7 +17745,7 @@
                   <a:schemeClr val="tx2"/>
                 </a:solidFill>
               </a:rPr>
-              <a:t>The December window, same chain: running now</a:t>
+              <a:t>The December window, same chain: on file</a:t>
             </a:r>
             <a:endParaRPr lang="en-US" sz="1300" dirty="0"/>
           </a:p>
@@ -17985,7 +17772,7 @@
           <a:bodyPr wrap="square" lIns="0" tIns="0" rIns="0" bIns="0" rtlCol="0" anchor="t"/>
           <a:lstStyle/>
           <a:p>
-            <a:pPr indent="0" marL="0">
+            <a:pPr marL="0" indent="0">
               <a:buNone/>
             </a:pPr>
             <a:r>
@@ -17994,7 +17781,7 @@
                   <a:schemeClr val="tx1"/>
                 </a:solidFill>
               </a:rPr>
-              <a:t>The 9 December meeting is less certain (the market prices a hike at about 85%), so reading the evidence has more to add. The chain needed only a new target.</a:t>
+              <a:t>Entry #23 for the 9 December meeting: +25 bps 73.6%, no change 16.7%, +50 bps 7.8%. Futures 84.5% and Polymarket 77.4% for a hike; the specialists lean +4.0 bp, labour again the lone dove. The chain needed only a new target, and the repair round fired twice on the inflation reader, both fixed.</a:t>
             </a:r>
             <a:endParaRPr lang="en-US" sz="1050" dirty="0"/>
           </a:p>
@@ -18046,7 +17833,7 @@
           <a:bodyPr wrap="square" lIns="0" tIns="0" rIns="0" bIns="0" rtlCol="0" anchor="ctr"/>
           <a:lstStyle/>
           <a:p>
-            <a:pPr algn="ctr" indent="0" marL="0">
+            <a:pPr marL="0" indent="0" algn="ctr">
               <a:buNone/>
             </a:pPr>
             <a:r>
@@ -18082,7 +17869,7 @@
           <a:bodyPr wrap="square" lIns="0" tIns="0" rIns="0" bIns="0" rtlCol="0" anchor="ctr"/>
           <a:lstStyle/>
           <a:p>
-            <a:pPr indent="0" marL="0">
+            <a:pPr marL="0" indent="0">
               <a:buNone/>
             </a:pPr>
             <a:r>
@@ -18118,7 +17905,7 @@
           <a:bodyPr wrap="square" lIns="0" tIns="0" rIns="0" bIns="0" rtlCol="0" anchor="t"/>
           <a:lstStyle/>
           <a:p>
-            <a:pPr indent="0" marL="0">
+            <a:pPr marL="0" indent="0">
               <a:buNone/>
             </a:pPr>
             <a:r>
@@ -18179,7 +17966,7 @@
           <a:bodyPr wrap="square" lIns="0" tIns="0" rIns="0" bIns="0" rtlCol="0" anchor="ctr"/>
           <a:lstStyle/>
           <a:p>
-            <a:pPr algn="ctr" indent="0" marL="0">
+            <a:pPr marL="0" indent="0" algn="ctr">
               <a:buNone/>
             </a:pPr>
             <a:r>
@@ -18215,7 +18002,7 @@
           <a:bodyPr wrap="square" lIns="0" tIns="0" rIns="0" bIns="0" rtlCol="0" anchor="ctr"/>
           <a:lstStyle/>
           <a:p>
-            <a:pPr indent="0" marL="0">
+            <a:pPr marL="0" indent="0">
               <a:buNone/>
             </a:pPr>
             <a:r>
@@ -18251,7 +18038,7 @@
           <a:bodyPr wrap="square" lIns="0" tIns="0" rIns="0" bIns="0" rtlCol="0" anchor="t"/>
           <a:lstStyle/>
           <a:p>
-            <a:pPr indent="0" marL="0">
+            <a:pPr marL="0" indent="0">
               <a:buNone/>
             </a:pPr>
             <a:r>
@@ -18312,7 +18099,7 @@
           <a:bodyPr wrap="square" lIns="0" tIns="0" rIns="0" bIns="0" rtlCol="0" anchor="ctr"/>
           <a:lstStyle/>
           <a:p>
-            <a:pPr algn="ctr" indent="0" marL="0">
+            <a:pPr marL="0" indent="0" algn="ctr">
               <a:buNone/>
             </a:pPr>
             <a:r>
@@ -18348,7 +18135,7 @@
           <a:bodyPr wrap="square" lIns="0" tIns="0" rIns="0" bIns="0" rtlCol="0" anchor="ctr"/>
           <a:lstStyle/>
           <a:p>
-            <a:pPr indent="0" marL="0">
+            <a:pPr marL="0" indent="0">
               <a:buNone/>
             </a:pPr>
             <a:r>
@@ -18384,7 +18171,7 @@
           <a:bodyPr wrap="square" lIns="0" tIns="0" rIns="0" bIns="0" rtlCol="0" anchor="t"/>
           <a:lstStyle/>
           <a:p>
-            <a:pPr indent="0" marL="0">
+            <a:pPr marL="0" indent="0">
               <a:buNone/>
             </a:pPr>
             <a:r>
@@ -18401,7 +18188,7 @@
       </p:sp>
       <p:sp>
         <p:nvSpPr>
-          <p:cNvPr id="25" name="Slide Number Placeholder 0"/>
+          <p:cNvPr id="3" name="Slide Number Placeholder 0"/>
           <p:cNvSpPr>
             <a:spLocks noGrp="1"/>
           </p:cNvSpPr>
@@ -18419,7 +18206,7 @@
           </a:prstGeom>
           <a:extLst>
             <a:ext uri="{C572A759-6A51-4108-AA02-DFA0A04FC94B}">
-              <ma14:wrappingTextBoxFlag xmlns:ma14="http://schemas.microsoft.com/office/mac/drawingml/2011/main" val="0"/>
+              <ma14:wrappingTextBoxFlag xmlns:ma14="http://schemas.microsoft.com/office/mac/drawingml/2011/main" xmlns="" val="0"/>
             </a:ext>
           </a:extLst>
         </p:spPr>
@@ -18437,7 +18224,7 @@
           <a:p>
             <a:pPr algn="r"/>
             <a:fld id="{F7021451-1387-4CA6-816F-3879F97B5CBC}" type="slidenum">
-              <a:rPr b="0" lang="en-US"/>
+              <a:rPr lang="en-US" b="0"/>
               <a:t>20</a:t>
             </a:fld>
             <a:endParaRPr lang="en-US"/>
@@ -18472,9 +18259,11 @@
       <p:sp>
         <p:nvSpPr>
           <p:cNvPr id="2" name="Text 0"/>
-          <p:cNvSpPr/>
+          <p:cNvSpPr>
+            <a:spLocks noGrp="1"/>
+          </p:cNvSpPr>
           <p:nvPr>
-            <p:ph idx="100" type="title" hasCustomPrompt="1"/>
+            <p:ph type="title" idx="100" hasCustomPrompt="1"/>
           </p:nvPr>
         </p:nvSpPr>
         <p:spPr>
@@ -18492,7 +18281,7 @@
           <a:bodyPr wrap="square" lIns="0" tIns="0" rIns="0" bIns="0" rtlCol="0" anchor="b"/>
           <a:lstStyle/>
           <a:p>
-            <a:pPr algn="l" indent="0" marL="0">
+            <a:pPr marL="0" indent="0" algn="l">
               <a:buNone/>
             </a:pPr>
             <a:r>
@@ -18510,9 +18299,11 @@
       <p:sp>
         <p:nvSpPr>
           <p:cNvPr id="3" name="Text 0"/>
-          <p:cNvSpPr/>
+          <p:cNvSpPr>
+            <a:spLocks noGrp="1"/>
+          </p:cNvSpPr>
           <p:nvPr>
-            <p:ph idx="101" type="body" hasCustomPrompt="1"/>
+            <p:ph type="body" idx="101" hasCustomPrompt="1"/>
           </p:nvPr>
         </p:nvSpPr>
         <p:spPr>
@@ -18530,7 +18321,7 @@
           <a:bodyPr wrap="square" lIns="0" tIns="0" rIns="0" bIns="0" rtlCol="0" anchor="t"/>
           <a:lstStyle/>
           <a:p>
-            <a:pPr algn="l" marL="342900" indent="-342900">
+            <a:pPr marL="342900" indent="-342900" algn="l">
               <a:spcAft>
                 <a:spcPts val="800"/>
               </a:spcAft>
@@ -18548,7 +18339,7 @@
             <a:endParaRPr lang="en-US" sz="2000" dirty="0"/>
           </a:p>
           <a:p>
-            <a:pPr algn="l" marL="342900" indent="-342900">
+            <a:pPr marL="342900" indent="-342900" algn="l">
               <a:spcAft>
                 <a:spcPts val="800"/>
               </a:spcAft>
@@ -18566,7 +18357,7 @@
             <a:endParaRPr lang="en-US" sz="2000" dirty="0"/>
           </a:p>
           <a:p>
-            <a:pPr algn="l" marL="342900" indent="-342900">
+            <a:pPr marL="342900" indent="-342900" algn="l">
               <a:buSzPct val="100000"/>
               <a:buChar char="•"/>
             </a:pPr>
@@ -18576,7 +18367,7 @@
                   <a:srgbClr val="CADCFC"/>
                 </a:solidFill>
               </a:rPr>
-              <a:t>The ask: scrutinise the scorecard, challenge a quote, and tell us which other decisions deserve the same chain. The 28 October call is on file; December is already running.</a:t>
+              <a:t>The ask: scrutinise the scorecard, challenge a quote, and tell us which other decisions deserve the same chain. The 28 October call is on file; the 9 December forecast is too.</a:t>
             </a:r>
             <a:endParaRPr lang="en-US" sz="2000" dirty="0"/>
           </a:p>
@@ -18610,9 +18401,11 @@
       <p:sp>
         <p:nvSpPr>
           <p:cNvPr id="2" name="Text 0"/>
-          <p:cNvSpPr/>
+          <p:cNvSpPr>
+            <a:spLocks noGrp="1"/>
+          </p:cNvSpPr>
           <p:nvPr>
-            <p:ph idx="100" type="title" hasCustomPrompt="1"/>
+            <p:ph type="title" idx="100" hasCustomPrompt="1"/>
           </p:nvPr>
         </p:nvSpPr>
         <p:spPr>
@@ -18630,7 +18423,7 @@
           <a:bodyPr wrap="square" lIns="0" tIns="0" rIns="0" bIns="0" rtlCol="0" anchor="ctr"/>
           <a:lstStyle/>
           <a:p>
-            <a:pPr algn="l" indent="0" marL="0">
+            <a:pPr marL="0" indent="0" algn="l">
               <a:buNone/>
             </a:pPr>
             <a:r>
@@ -18668,11 +18461,41 @@
             <a:tbl>
               <a:tblPr/>
               <a:tblGrid>
-                <a:gridCol w="3017520"/>
-                <a:gridCol w="2011680"/>
-                <a:gridCol w="2011680"/>
-                <a:gridCol w="2011680"/>
-                <a:gridCol w="2039112"/>
+                <a:gridCol w="3017520">
+                  <a:extLst>
+                    <a:ext uri="{9D8B030D-6E8A-4147-A177-3AD203B41FA5}">
+                      <a16:colId xmlns:a16="http://schemas.microsoft.com/office/drawing/2014/main" val="20000"/>
+                    </a:ext>
+                  </a:extLst>
+                </a:gridCol>
+                <a:gridCol w="2011680">
+                  <a:extLst>
+                    <a:ext uri="{9D8B030D-6E8A-4147-A177-3AD203B41FA5}">
+                      <a16:colId xmlns:a16="http://schemas.microsoft.com/office/drawing/2014/main" val="20001"/>
+                    </a:ext>
+                  </a:extLst>
+                </a:gridCol>
+                <a:gridCol w="2011680">
+                  <a:extLst>
+                    <a:ext uri="{9D8B030D-6E8A-4147-A177-3AD203B41FA5}">
+                      <a16:colId xmlns:a16="http://schemas.microsoft.com/office/drawing/2014/main" val="20002"/>
+                    </a:ext>
+                  </a:extLst>
+                </a:gridCol>
+                <a:gridCol w="2011680">
+                  <a:extLst>
+                    <a:ext uri="{9D8B030D-6E8A-4147-A177-3AD203B41FA5}">
+                      <a16:colId xmlns:a16="http://schemas.microsoft.com/office/drawing/2014/main" val="20003"/>
+                    </a:ext>
+                  </a:extLst>
+                </a:gridCol>
+                <a:gridCol w="2039112">
+                  <a:extLst>
+                    <a:ext uri="{9D8B030D-6E8A-4147-A177-3AD203B41FA5}">
+                      <a16:colId xmlns:a16="http://schemas.microsoft.com/office/drawing/2014/main" val="20004"/>
+                    </a:ext>
+                  </a:extLst>
+                </a:gridCol>
               </a:tblGrid>
               <a:tr h="777240">
                 <a:tc>
@@ -18680,7 +18503,7 @@
                     <a:bodyPr/>
                     <a:lstStyle/>
                     <a:p>
-                      <a:pPr indent="0" marL="0">
+                      <a:pPr marL="0" indent="0">
                         <a:buNone/>
                       </a:pPr>
                       <a:r>
@@ -18741,7 +18564,7 @@
                     <a:bodyPr/>
                     <a:lstStyle/>
                     <a:p>
-                      <a:pPr algn="ctr" indent="0" marL="0">
+                      <a:pPr marL="0" indent="0" algn="ctr">
                         <a:buNone/>
                       </a:pPr>
                       <a:r>
@@ -18802,7 +18625,7 @@
                     <a:bodyPr/>
                     <a:lstStyle/>
                     <a:p>
-                      <a:pPr algn="ctr" indent="0" marL="0">
+                      <a:pPr marL="0" indent="0" algn="ctr">
                         <a:buNone/>
                       </a:pPr>
                       <a:r>
@@ -18863,7 +18686,7 @@
                     <a:bodyPr/>
                     <a:lstStyle/>
                     <a:p>
-                      <a:pPr algn="ctr" indent="0" marL="0">
+                      <a:pPr marL="0" indent="0" algn="ctr">
                         <a:buNone/>
                       </a:pPr>
                       <a:r>
@@ -18924,7 +18747,7 @@
                     <a:bodyPr/>
                     <a:lstStyle/>
                     <a:p>
-                      <a:pPr algn="ctr" indent="0" marL="0">
+                      <a:pPr marL="0" indent="0" algn="ctr">
                         <a:buNone/>
                       </a:pPr>
                       <a:r>
@@ -18980,6 +18803,11 @@
                     </a:solidFill>
                   </a:tcPr>
                 </a:tc>
+                <a:extLst>
+                  <a:ext uri="{0D108BD9-81ED-4DB2-BD59-A6C34878D82A}">
+                    <a16:rowId xmlns:a16="http://schemas.microsoft.com/office/drawing/2014/main" val="10000"/>
+                  </a:ext>
+                </a:extLst>
               </a:tr>
               <a:tr h="777240">
                 <a:tc>
@@ -18987,7 +18815,7 @@
                     <a:bodyPr/>
                     <a:lstStyle/>
                     <a:p>
-                      <a:pPr indent="0" marL="0">
+                      <a:pPr marL="0" indent="0">
                         <a:buNone/>
                       </a:pPr>
                       <a:r>
@@ -19001,7 +18829,7 @@
                       <a:endParaRPr lang="en-US" sz="1150" dirty="0"/>
                     </a:p>
                     <a:p>
-                      <a:pPr indent="0" marL="0">
+                      <a:pPr marL="0" indent="0">
                         <a:buNone/>
                       </a:pPr>
                       <a:r>
@@ -19059,7 +18887,7 @@
                     <a:bodyPr/>
                     <a:lstStyle/>
                     <a:p>
-                      <a:pPr algn="ctr" indent="0" marL="0">
+                      <a:pPr marL="0" indent="0" algn="ctr">
                         <a:buNone/>
                       </a:pPr>
                       <a:r>
@@ -19117,7 +18945,7 @@
                     <a:bodyPr/>
                     <a:lstStyle/>
                     <a:p>
-                      <a:pPr algn="ctr" indent="0" marL="0">
+                      <a:pPr marL="0" indent="0" algn="ctr">
                         <a:buNone/>
                       </a:pPr>
                       <a:r>
@@ -19175,7 +19003,7 @@
                     <a:bodyPr/>
                     <a:lstStyle/>
                     <a:p>
-                      <a:pPr algn="ctr" indent="0" marL="0">
+                      <a:pPr marL="0" indent="0" algn="ctr">
                         <a:buNone/>
                       </a:pPr>
                       <a:r>
@@ -19233,7 +19061,7 @@
                     <a:bodyPr/>
                     <a:lstStyle/>
                     <a:p>
-                      <a:pPr algn="ctr" indent="0" marL="0">
+                      <a:pPr marL="0" indent="0" algn="ctr">
                         <a:buNone/>
                       </a:pPr>
                       <a:r>
@@ -19286,6 +19114,11 @@
                     </a:lnB>
                   </a:tcPr>
                 </a:tc>
+                <a:extLst>
+                  <a:ext uri="{0D108BD9-81ED-4DB2-BD59-A6C34878D82A}">
+                    <a16:rowId xmlns:a16="http://schemas.microsoft.com/office/drawing/2014/main" val="10001"/>
+                  </a:ext>
+                </a:extLst>
               </a:tr>
               <a:tr h="777240">
                 <a:tc>
@@ -19293,7 +19126,7 @@
                     <a:bodyPr/>
                     <a:lstStyle/>
                     <a:p>
-                      <a:pPr indent="0" marL="0">
+                      <a:pPr marL="0" indent="0">
                         <a:buNone/>
                       </a:pPr>
                       <a:r>
@@ -19307,7 +19140,7 @@
                       <a:endParaRPr lang="en-US" sz="1150" dirty="0"/>
                     </a:p>
                     <a:p>
-                      <a:pPr indent="0" marL="0">
+                      <a:pPr marL="0" indent="0">
                         <a:buNone/>
                       </a:pPr>
                       <a:r>
@@ -19365,7 +19198,7 @@
                     <a:bodyPr/>
                     <a:lstStyle/>
                     <a:p>
-                      <a:pPr algn="ctr" indent="0" marL="0">
+                      <a:pPr marL="0" indent="0" algn="ctr">
                         <a:buNone/>
                       </a:pPr>
                       <a:r>
@@ -19423,7 +19256,7 @@
                     <a:bodyPr/>
                     <a:lstStyle/>
                     <a:p>
-                      <a:pPr algn="ctr" indent="0" marL="0">
+                      <a:pPr marL="0" indent="0" algn="ctr">
                         <a:buNone/>
                       </a:pPr>
                       <a:r>
@@ -19481,7 +19314,7 @@
                     <a:bodyPr/>
                     <a:lstStyle/>
                     <a:p>
-                      <a:pPr algn="ctr" indent="0" marL="0">
+                      <a:pPr marL="0" indent="0" algn="ctr">
                         <a:buNone/>
                       </a:pPr>
                       <a:r>
@@ -19539,7 +19372,7 @@
                     <a:bodyPr/>
                     <a:lstStyle/>
                     <a:p>
-                      <a:pPr algn="ctr" indent="0" marL="0">
+                      <a:pPr marL="0" indent="0" algn="ctr">
                         <a:buNone/>
                       </a:pPr>
                       <a:r>
@@ -19592,6 +19425,11 @@
                     </a:lnB>
                   </a:tcPr>
                 </a:tc>
+                <a:extLst>
+                  <a:ext uri="{0D108BD9-81ED-4DB2-BD59-A6C34878D82A}">
+                    <a16:rowId xmlns:a16="http://schemas.microsoft.com/office/drawing/2014/main" val="10002"/>
+                  </a:ext>
+                </a:extLst>
               </a:tr>
               <a:tr h="777240">
                 <a:tc>
@@ -19599,7 +19437,7 @@
                     <a:bodyPr/>
                     <a:lstStyle/>
                     <a:p>
-                      <a:pPr indent="0" marL="0">
+                      <a:pPr marL="0" indent="0">
                         <a:buNone/>
                       </a:pPr>
                       <a:r>
@@ -19613,7 +19451,7 @@
                       <a:endParaRPr lang="en-US" sz="1150" dirty="0"/>
                     </a:p>
                     <a:p>
-                      <a:pPr indent="0" marL="0">
+                      <a:pPr marL="0" indent="0">
                         <a:buNone/>
                       </a:pPr>
                       <a:r>
@@ -19671,7 +19509,7 @@
                     <a:bodyPr/>
                     <a:lstStyle/>
                     <a:p>
-                      <a:pPr algn="ctr" indent="0" marL="0">
+                      <a:pPr marL="0" indent="0" algn="ctr">
                         <a:buNone/>
                       </a:pPr>
                       <a:r>
@@ -19729,7 +19567,7 @@
                     <a:bodyPr/>
                     <a:lstStyle/>
                     <a:p>
-                      <a:pPr algn="ctr" indent="0" marL="0">
+                      <a:pPr marL="0" indent="0" algn="ctr">
                         <a:buNone/>
                       </a:pPr>
                       <a:r>
@@ -19787,7 +19625,7 @@
                     <a:bodyPr/>
                     <a:lstStyle/>
                     <a:p>
-                      <a:pPr algn="ctr" indent="0" marL="0">
+                      <a:pPr marL="0" indent="0" algn="ctr">
                         <a:buNone/>
                       </a:pPr>
                       <a:r>
@@ -19845,7 +19683,7 @@
                     <a:bodyPr/>
                     <a:lstStyle/>
                     <a:p>
-                      <a:pPr algn="ctr" indent="0" marL="0">
+                      <a:pPr marL="0" indent="0" algn="ctr">
                         <a:buNone/>
                       </a:pPr>
                       <a:r>
@@ -19898,6 +19736,11 @@
                     </a:lnB>
                   </a:tcPr>
                 </a:tc>
+                <a:extLst>
+                  <a:ext uri="{0D108BD9-81ED-4DB2-BD59-A6C34878D82A}">
+                    <a16:rowId xmlns:a16="http://schemas.microsoft.com/office/drawing/2014/main" val="10003"/>
+                  </a:ext>
+                </a:extLst>
               </a:tr>
               <a:tr h="777240">
                 <a:tc>
@@ -19905,7 +19748,7 @@
                     <a:bodyPr/>
                     <a:lstStyle/>
                     <a:p>
-                      <a:pPr indent="0" marL="0">
+                      <a:pPr marL="0" indent="0">
                         <a:buNone/>
                       </a:pPr>
                       <a:r>
@@ -19963,7 +19806,7 @@
                     <a:bodyPr/>
                     <a:lstStyle/>
                     <a:p>
-                      <a:pPr algn="ctr" indent="0" marL="0">
+                      <a:pPr marL="0" indent="0" algn="ctr">
                         <a:buNone/>
                       </a:pPr>
                       <a:r>
@@ -20021,7 +19864,7 @@
                     <a:bodyPr/>
                     <a:lstStyle/>
                     <a:p>
-                      <a:pPr algn="ctr" indent="0" marL="0">
+                      <a:pPr marL="0" indent="0" algn="ctr">
                         <a:buNone/>
                       </a:pPr>
                       <a:r>
@@ -20079,7 +19922,7 @@
                     <a:bodyPr/>
                     <a:lstStyle/>
                     <a:p>
-                      <a:pPr algn="ctr" indent="0" marL="0">
+                      <a:pPr marL="0" indent="0" algn="ctr">
                         <a:buNone/>
                       </a:pPr>
                       <a:r>
@@ -20137,7 +19980,7 @@
                     <a:bodyPr/>
                     <a:lstStyle/>
                     <a:p>
-                      <a:pPr algn="ctr" indent="0" marL="0">
+                      <a:pPr marL="0" indent="0" algn="ctr">
                         <a:buNone/>
                       </a:pPr>
                       <a:r>
@@ -20190,6 +20033,11 @@
                     </a:lnB>
                   </a:tcPr>
                 </a:tc>
+                <a:extLst>
+                  <a:ext uri="{0D108BD9-81ED-4DB2-BD59-A6C34878D82A}">
+                    <a16:rowId xmlns:a16="http://schemas.microsoft.com/office/drawing/2014/main" val="10004"/>
+                  </a:ext>
+                </a:extLst>
               </a:tr>
             </a:tbl>
           </a:graphicData>
@@ -20216,7 +20064,7 @@
           <a:bodyPr wrap="square" lIns="0" tIns="0" rIns="0" bIns="0" rtlCol="0" anchor="t"/>
           <a:lstStyle/>
           <a:p>
-            <a:pPr indent="0" marL="0">
+            <a:pPr marL="0" indent="0">
               <a:buNone/>
             </a:pPr>
             <a:r>
@@ -20251,7 +20099,7 @@
           </a:prstGeom>
           <a:extLst>
             <a:ext uri="{C572A759-6A51-4108-AA02-DFA0A04FC94B}">
-              <ma14:wrappingTextBoxFlag xmlns:ma14="http://schemas.microsoft.com/office/mac/drawingml/2011/main" val="0"/>
+              <ma14:wrappingTextBoxFlag xmlns:ma14="http://schemas.microsoft.com/office/mac/drawingml/2011/main" xmlns="" val="0"/>
             </a:ext>
           </a:extLst>
         </p:spPr>
@@ -20269,7 +20117,7 @@
           <a:p>
             <a:pPr algn="r"/>
             <a:fld id="{F7021451-1387-4CA6-816F-3879F97B5CBC}" type="slidenum">
-              <a:rPr b="0" lang="en-US"/>
+              <a:rPr lang="en-US" b="0"/>
               <a:t>22</a:t>
             </a:fld>
             <a:endParaRPr lang="en-US"/>
@@ -20304,9 +20152,11 @@
       <p:sp>
         <p:nvSpPr>
           <p:cNvPr id="2" name="Text 0"/>
-          <p:cNvSpPr/>
+          <p:cNvSpPr>
+            <a:spLocks noGrp="1"/>
+          </p:cNvSpPr>
           <p:nvPr>
-            <p:ph idx="100" type="title" hasCustomPrompt="1"/>
+            <p:ph type="title" idx="100" hasCustomPrompt="1"/>
           </p:nvPr>
         </p:nvSpPr>
         <p:spPr>
@@ -20324,7 +20174,7 @@
           <a:bodyPr wrap="square" lIns="0" tIns="0" rIns="0" bIns="0" rtlCol="0" anchor="ctr"/>
           <a:lstStyle/>
           <a:p>
-            <a:pPr algn="l" indent="0" marL="0">
+            <a:pPr marL="0" indent="0" algn="l">
               <a:buNone/>
             </a:pPr>
             <a:r>
@@ -20360,7 +20210,7 @@
           <a:bodyPr wrap="square" lIns="0" tIns="0" rIns="0" bIns="0" rtlCol="0" anchor="t"/>
           <a:lstStyle/>
           <a:p>
-            <a:pPr indent="0" marL="0">
+            <a:pPr marL="0" indent="0">
               <a:buNone/>
             </a:pPr>
             <a:r>
@@ -20399,7 +20249,7 @@
           <a:bodyPr wrap="square" lIns="0" tIns="0" rIns="0" bIns="0" rtlCol="0" anchor="t"/>
           <a:lstStyle/>
           <a:p>
-            <a:pPr indent="0" marL="0">
+            <a:pPr marL="0" indent="0">
               <a:buNone/>
             </a:pPr>
             <a:r>
@@ -20435,7 +20285,7 @@
           <a:bodyPr wrap="square" lIns="0" tIns="0" rIns="0" bIns="0" rtlCol="0" anchor="t"/>
           <a:lstStyle/>
           <a:p>
-            <a:pPr indent="0" marL="0">
+            <a:pPr marL="0" indent="0">
               <a:buNone/>
             </a:pPr>
             <a:r>
@@ -20474,7 +20324,7 @@
           <a:bodyPr wrap="square" lIns="0" tIns="0" rIns="0" bIns="0" rtlCol="0" anchor="t"/>
           <a:lstStyle/>
           <a:p>
-            <a:pPr indent="0" marL="0">
+            <a:pPr marL="0" indent="0">
               <a:buNone/>
             </a:pPr>
             <a:r>
@@ -20510,7 +20360,7 @@
           <a:bodyPr wrap="square" lIns="0" tIns="0" rIns="0" bIns="0" rtlCol="0" anchor="t"/>
           <a:lstStyle/>
           <a:p>
-            <a:pPr indent="0" marL="0">
+            <a:pPr marL="0" indent="0">
               <a:buNone/>
             </a:pPr>
             <a:r>
@@ -20549,7 +20399,7 @@
           <a:bodyPr wrap="square" lIns="0" tIns="0" rIns="0" bIns="0" rtlCol="0" anchor="t"/>
           <a:lstStyle/>
           <a:p>
-            <a:pPr indent="0" marL="0">
+            <a:pPr marL="0" indent="0">
               <a:buNone/>
             </a:pPr>
             <a:r>
@@ -20585,7 +20435,7 @@
           <a:bodyPr wrap="square" lIns="0" tIns="0" rIns="0" bIns="0" rtlCol="0" anchor="t"/>
           <a:lstStyle/>
           <a:p>
-            <a:pPr indent="0" marL="0">
+            <a:pPr marL="0" indent="0">
               <a:buNone/>
             </a:pPr>
             <a:r>
@@ -20624,7 +20474,7 @@
           <a:bodyPr wrap="square" lIns="0" tIns="0" rIns="0" bIns="0" rtlCol="0" anchor="t"/>
           <a:lstStyle/>
           <a:p>
-            <a:pPr indent="0" marL="0">
+            <a:pPr marL="0" indent="0">
               <a:buNone/>
             </a:pPr>
             <a:r>
@@ -20665,7 +20515,7 @@
             <a:prstDash val="solid"/>
           </a:ln>
           <a:effectLst>
-            <a:outerShdw sx="100000" sy="100000" kx="0" ky="0" algn="bl" rotWithShape="0" blurRad="50800" dist="12700" dir="5400000">
+            <a:outerShdw blurRad="50800" dist="12700" dir="5400000" algn="bl" rotWithShape="0">
               <a:srgbClr val="000000">
                 <a:alpha val="8000"/>
               </a:srgbClr>
@@ -20694,7 +20544,7 @@
           <a:bodyPr wrap="square" lIns="0" tIns="0" rIns="0" bIns="0" rtlCol="0" anchor="t"/>
           <a:lstStyle/>
           <a:p>
-            <a:pPr indent="0" marL="0">
+            <a:pPr marL="0" indent="0">
               <a:buNone/>
             </a:pPr>
             <a:r>
@@ -20829,7 +20679,7 @@
             <a:prstDash val="solid"/>
           </a:ln>
           <a:effectLst>
-            <a:outerShdw sx="100000" sy="100000" kx="0" ky="0" algn="bl" rotWithShape="0" blurRad="50800" dist="12700" dir="5400000">
+            <a:outerShdw blurRad="50800" dist="12700" dir="5400000" algn="bl" rotWithShape="0">
               <a:srgbClr val="000000">
                 <a:alpha val="8000"/>
               </a:srgbClr>
@@ -20858,7 +20708,7 @@
           <a:bodyPr wrap="square" lIns="0" tIns="0" rIns="0" bIns="0" rtlCol="0" anchor="t"/>
           <a:lstStyle/>
           <a:p>
-            <a:pPr indent="0" marL="0">
+            <a:pPr marL="0" indent="0">
               <a:buNone/>
             </a:pPr>
             <a:r>
@@ -20987,7 +20837,7 @@
           </a:prstGeom>
           <a:extLst>
             <a:ext uri="{C572A759-6A51-4108-AA02-DFA0A04FC94B}">
-              <ma14:wrappingTextBoxFlag xmlns:ma14="http://schemas.microsoft.com/office/mac/drawingml/2011/main" val="0"/>
+              <ma14:wrappingTextBoxFlag xmlns:ma14="http://schemas.microsoft.com/office/mac/drawingml/2011/main" xmlns="" val="0"/>
             </a:ext>
           </a:extLst>
         </p:spPr>
@@ -21005,7 +20855,7 @@
           <a:p>
             <a:pPr algn="r"/>
             <a:fld id="{F7021451-1387-4CA6-816F-3879F97B5CBC}" type="slidenum">
-              <a:rPr b="0" lang="en-US"/>
+              <a:rPr lang="en-US" b="0"/>
               <a:t>3</a:t>
             </a:fld>
             <a:endParaRPr lang="en-US"/>
@@ -21040,9 +20890,11 @@
       <p:sp>
         <p:nvSpPr>
           <p:cNvPr id="2" name="Text 0"/>
-          <p:cNvSpPr/>
+          <p:cNvSpPr>
+            <a:spLocks noGrp="1"/>
+          </p:cNvSpPr>
           <p:nvPr>
-            <p:ph idx="100" type="title" hasCustomPrompt="1"/>
+            <p:ph type="title" idx="100" hasCustomPrompt="1"/>
           </p:nvPr>
         </p:nvSpPr>
         <p:spPr>
@@ -21060,7 +20912,7 @@
           <a:bodyPr wrap="square" lIns="0" tIns="0" rIns="0" bIns="0" rtlCol="0" anchor="ctr"/>
           <a:lstStyle/>
           <a:p>
-            <a:pPr algn="l" indent="0" marL="0">
+            <a:pPr marL="0" indent="0" algn="l">
               <a:buNone/>
             </a:pPr>
             <a:r>
@@ -21123,7 +20975,7 @@
           <a:bodyPr wrap="square" lIns="0" tIns="0" rIns="0" bIns="0" rtlCol="0" anchor="ctr"/>
           <a:lstStyle/>
           <a:p>
-            <a:pPr algn="ctr" indent="0" marL="0">
+            <a:pPr marL="0" indent="0" algn="ctr">
               <a:buNone/>
             </a:pPr>
             <a:r>
@@ -21186,7 +21038,7 @@
           <a:bodyPr wrap="square" lIns="0" tIns="0" rIns="0" bIns="0" rtlCol="0" anchor="ctr"/>
           <a:lstStyle/>
           <a:p>
-            <a:pPr indent="0" marL="0">
+            <a:pPr marL="0" indent="0">
               <a:buNone/>
             </a:pPr>
             <a:r>
@@ -21307,7 +21159,7 @@
           <a:bodyPr wrap="square" lIns="0" tIns="0" rIns="0" bIns="0" rtlCol="0" anchor="ctr"/>
           <a:lstStyle/>
           <a:p>
-            <a:pPr indent="0" marL="0">
+            <a:pPr marL="0" indent="0">
               <a:buNone/>
             </a:pPr>
             <a:r>
@@ -21446,7 +21298,7 @@
           <a:bodyPr wrap="square" lIns="0" tIns="0" rIns="0" bIns="0" rtlCol="0" anchor="ctr"/>
           <a:lstStyle/>
           <a:p>
-            <a:pPr indent="0" marL="0">
+            <a:pPr marL="0" indent="0">
               <a:buNone/>
             </a:pPr>
             <a:r>
@@ -21529,9 +21381,11 @@
       <p:sp>
         <p:nvSpPr>
           <p:cNvPr id="2" name="Text 0"/>
-          <p:cNvSpPr/>
+          <p:cNvSpPr>
+            <a:spLocks noGrp="1"/>
+          </p:cNvSpPr>
           <p:nvPr>
-            <p:ph idx="100" type="title" hasCustomPrompt="1"/>
+            <p:ph type="title" idx="100" hasCustomPrompt="1"/>
           </p:nvPr>
         </p:nvSpPr>
         <p:spPr>
@@ -21549,7 +21403,7 @@
           <a:bodyPr wrap="square" lIns="0" tIns="0" rIns="0" bIns="0" rtlCol="0" anchor="ctr"/>
           <a:lstStyle/>
           <a:p>
-            <a:pPr algn="l" indent="0" marL="0">
+            <a:pPr marL="0" indent="0" algn="l">
               <a:buNone/>
             </a:pPr>
             <a:r>
@@ -21590,7 +21444,7 @@
             <a:prstDash val="solid"/>
           </a:ln>
           <a:effectLst>
-            <a:outerShdw sx="100000" sy="100000" kx="0" ky="0" algn="bl" rotWithShape="0" blurRad="50800" dist="12700" dir="5400000">
+            <a:outerShdw blurRad="50800" dist="12700" dir="5400000" algn="bl" rotWithShape="0">
               <a:srgbClr val="000000">
                 <a:alpha val="8000"/>
               </a:srgbClr>
@@ -21644,7 +21498,7 @@
           <a:bodyPr wrap="square" lIns="0" tIns="0" rIns="0" bIns="0" rtlCol="0" anchor="ctr"/>
           <a:lstStyle/>
           <a:p>
-            <a:pPr algn="ctr" indent="0" marL="0">
+            <a:pPr marL="0" indent="0" algn="ctr">
               <a:buNone/>
             </a:pPr>
             <a:r>
@@ -21680,7 +21534,7 @@
           <a:bodyPr wrap="square" lIns="0" tIns="0" rIns="0" bIns="0" rtlCol="0" anchor="ctr"/>
           <a:lstStyle/>
           <a:p>
-            <a:pPr indent="0" marL="0">
+            <a:pPr marL="0" indent="0">
               <a:buNone/>
             </a:pPr>
             <a:r>
@@ -21797,7 +21651,7 @@
             <a:prstDash val="solid"/>
           </a:ln>
           <a:effectLst>
-            <a:outerShdw sx="100000" sy="100000" kx="0" ky="0" algn="bl" rotWithShape="0" blurRad="50800" dist="12700" dir="5400000">
+            <a:outerShdw blurRad="50800" dist="12700" dir="5400000" algn="bl" rotWithShape="0">
               <a:srgbClr val="000000">
                 <a:alpha val="8000"/>
               </a:srgbClr>
@@ -21851,7 +21705,7 @@
           <a:bodyPr wrap="square" lIns="0" tIns="0" rIns="0" bIns="0" rtlCol="0" anchor="ctr"/>
           <a:lstStyle/>
           <a:p>
-            <a:pPr algn="ctr" indent="0" marL="0">
+            <a:pPr marL="0" indent="0" algn="ctr">
               <a:buNone/>
             </a:pPr>
             <a:r>
@@ -21887,7 +21741,7 @@
           <a:bodyPr wrap="square" lIns="0" tIns="0" rIns="0" bIns="0" rtlCol="0" anchor="ctr"/>
           <a:lstStyle/>
           <a:p>
-            <a:pPr indent="0" marL="0">
+            <a:pPr marL="0" indent="0">
               <a:buNone/>
             </a:pPr>
             <a:r>
@@ -22004,7 +21858,7 @@
             <a:prstDash val="solid"/>
           </a:ln>
           <a:effectLst>
-            <a:outerShdw sx="100000" sy="100000" kx="0" ky="0" algn="bl" rotWithShape="0" blurRad="50800" dist="12700" dir="5400000">
+            <a:outerShdw blurRad="50800" dist="12700" dir="5400000" algn="bl" rotWithShape="0">
               <a:srgbClr val="000000">
                 <a:alpha val="8000"/>
               </a:srgbClr>
@@ -22058,7 +21912,7 @@
           <a:bodyPr wrap="square" lIns="0" tIns="0" rIns="0" bIns="0" rtlCol="0" anchor="ctr"/>
           <a:lstStyle/>
           <a:p>
-            <a:pPr algn="ctr" indent="0" marL="0">
+            <a:pPr marL="0" indent="0" algn="ctr">
               <a:buNone/>
             </a:pPr>
             <a:r>
@@ -22094,7 +21948,7 @@
           <a:bodyPr wrap="square" lIns="0" tIns="0" rIns="0" bIns="0" rtlCol="0" anchor="ctr"/>
           <a:lstStyle/>
           <a:p>
-            <a:pPr indent="0" marL="0">
+            <a:pPr marL="0" indent="0">
               <a:buNone/>
             </a:pPr>
             <a:r>
@@ -22205,7 +22059,7 @@
           </a:prstGeom>
           <a:extLst>
             <a:ext uri="{C572A759-6A51-4108-AA02-DFA0A04FC94B}">
-              <ma14:wrappingTextBoxFlag xmlns:ma14="http://schemas.microsoft.com/office/mac/drawingml/2011/main" val="0"/>
+              <ma14:wrappingTextBoxFlag xmlns:ma14="http://schemas.microsoft.com/office/mac/drawingml/2011/main" xmlns="" val="0"/>
             </a:ext>
           </a:extLst>
         </p:spPr>
@@ -22223,7 +22077,7 @@
           <a:p>
             <a:pPr algn="r"/>
             <a:fld id="{F7021451-1387-4CA6-816F-3879F97B5CBC}" type="slidenum">
-              <a:rPr b="0" lang="en-US"/>
+              <a:rPr lang="en-US" b="0"/>
               <a:t>5</a:t>
             </a:fld>
             <a:endParaRPr lang="en-US"/>
@@ -22258,9 +22112,11 @@
       <p:sp>
         <p:nvSpPr>
           <p:cNvPr id="2" name="Text 0"/>
-          <p:cNvSpPr/>
+          <p:cNvSpPr>
+            <a:spLocks noGrp="1"/>
+          </p:cNvSpPr>
           <p:nvPr>
-            <p:ph idx="100" type="title" hasCustomPrompt="1"/>
+            <p:ph type="title" idx="100" hasCustomPrompt="1"/>
           </p:nvPr>
         </p:nvSpPr>
         <p:spPr>
@@ -22278,7 +22134,7 @@
           <a:bodyPr wrap="square" lIns="0" tIns="0" rIns="0" bIns="0" rtlCol="0" anchor="ctr"/>
           <a:lstStyle/>
           <a:p>
-            <a:pPr algn="l" indent="0" marL="0">
+            <a:pPr marL="0" indent="0" algn="l">
               <a:buNone/>
             </a:pPr>
             <a:r>
@@ -22319,7 +22175,7 @@
             <a:prstDash val="solid"/>
           </a:ln>
           <a:effectLst>
-            <a:outerShdw sx="100000" sy="100000" kx="0" ky="0" algn="bl" rotWithShape="0" blurRad="50800" dist="12700" dir="5400000">
+            <a:outerShdw blurRad="50800" dist="12700" dir="5400000" algn="bl" rotWithShape="0">
               <a:srgbClr val="000000">
                 <a:alpha val="8000"/>
               </a:srgbClr>
@@ -22373,7 +22229,7 @@
           <a:bodyPr wrap="square" lIns="0" tIns="0" rIns="0" bIns="0" rtlCol="0" anchor="t"/>
           <a:lstStyle/>
           <a:p>
-            <a:pPr indent="0" marL="0">
+            <a:pPr marL="0" indent="0">
               <a:buNone/>
             </a:pPr>
             <a:r>
@@ -22409,7 +22265,7 @@
           <a:bodyPr wrap="square" lIns="0" tIns="0" rIns="0" bIns="0" rtlCol="0" anchor="t"/>
           <a:lstStyle/>
           <a:p>
-            <a:pPr indent="0" marL="0">
+            <a:pPr marL="0" indent="0">
               <a:buNone/>
             </a:pPr>
             <a:r>
@@ -22445,7 +22301,7 @@
           <a:bodyPr wrap="square" lIns="0" tIns="0" rIns="0" bIns="0" rtlCol="0" anchor="t"/>
           <a:lstStyle/>
           <a:p>
-            <a:pPr indent="0" marL="0">
+            <a:pPr marL="0" indent="0">
               <a:buNone/>
             </a:pPr>
             <a:r>
@@ -22456,9 +22312,6 @@
               </a:rPr>
               <a:t>What it is  </a:t>
             </a:r>
-            <a:pPr indent="0" marL="0">
-              <a:buNone/>
-            </a:pPr>
             <a:r>
               <a:rPr lang="en-US" sz="1150" dirty="0">
                 <a:solidFill>
@@ -22492,7 +22345,7 @@
           <a:bodyPr wrap="square" lIns="0" tIns="0" rIns="0" bIns="0" rtlCol="0" anchor="t"/>
           <a:lstStyle/>
           <a:p>
-            <a:pPr indent="0" marL="0">
+            <a:pPr marL="0" indent="0">
               <a:buNone/>
             </a:pPr>
             <a:r>
@@ -22503,9 +22356,6 @@
               </a:rPr>
               <a:t>Strength  </a:t>
             </a:r>
-            <a:pPr indent="0" marL="0">
-              <a:buNone/>
-            </a:pPr>
             <a:r>
               <a:rPr lang="en-US" sz="1150" dirty="0">
                 <a:solidFill>
@@ -22544,7 +22394,7 @@
             <a:prstDash val="solid"/>
           </a:ln>
           <a:effectLst>
-            <a:outerShdw sx="100000" sy="100000" kx="0" ky="0" algn="bl" rotWithShape="0" blurRad="50800" dist="12700" dir="5400000">
+            <a:outerShdw blurRad="50800" dist="12700" dir="5400000" algn="bl" rotWithShape="0">
               <a:srgbClr val="000000">
                 <a:alpha val="8000"/>
               </a:srgbClr>
@@ -22598,7 +22448,7 @@
           <a:bodyPr wrap="square" lIns="0" tIns="0" rIns="0" bIns="0" rtlCol="0" anchor="t"/>
           <a:lstStyle/>
           <a:p>
-            <a:pPr indent="0" marL="0">
+            <a:pPr marL="0" indent="0">
               <a:buNone/>
             </a:pPr>
             <a:r>
@@ -22634,7 +22484,7 @@
           <a:bodyPr wrap="square" lIns="0" tIns="0" rIns="0" bIns="0" rtlCol="0" anchor="t"/>
           <a:lstStyle/>
           <a:p>
-            <a:pPr indent="0" marL="0">
+            <a:pPr marL="0" indent="0">
               <a:buNone/>
             </a:pPr>
             <a:r>
@@ -22670,7 +22520,7 @@
           <a:bodyPr wrap="square" lIns="0" tIns="0" rIns="0" bIns="0" rtlCol="0" anchor="t"/>
           <a:lstStyle/>
           <a:p>
-            <a:pPr indent="0" marL="0">
+            <a:pPr marL="0" indent="0">
               <a:buNone/>
             </a:pPr>
             <a:r>
@@ -22681,9 +22531,6 @@
               </a:rPr>
               <a:t>What it is  </a:t>
             </a:r>
-            <a:pPr indent="0" marL="0">
-              <a:buNone/>
-            </a:pPr>
             <a:r>
               <a:rPr lang="en-US" sz="1150" dirty="0">
                 <a:solidFill>
@@ -22717,7 +22564,7 @@
           <a:bodyPr wrap="square" lIns="0" tIns="0" rIns="0" bIns="0" rtlCol="0" anchor="t"/>
           <a:lstStyle/>
           <a:p>
-            <a:pPr indent="0" marL="0">
+            <a:pPr marL="0" indent="0">
               <a:buNone/>
             </a:pPr>
             <a:r>
@@ -22728,9 +22575,6 @@
               </a:rPr>
               <a:t>Strength  </a:t>
             </a:r>
-            <a:pPr indent="0" marL="0">
-              <a:buNone/>
-            </a:pPr>
             <a:r>
               <a:rPr lang="en-US" sz="1150" dirty="0">
                 <a:solidFill>
@@ -22769,7 +22613,7 @@
             <a:prstDash val="solid"/>
           </a:ln>
           <a:effectLst>
-            <a:outerShdw sx="100000" sy="100000" kx="0" ky="0" algn="bl" rotWithShape="0" blurRad="50800" dist="12700" dir="5400000">
+            <a:outerShdw blurRad="50800" dist="12700" dir="5400000" algn="bl" rotWithShape="0">
               <a:srgbClr val="000000">
                 <a:alpha val="8000"/>
               </a:srgbClr>
@@ -22823,7 +22667,7 @@
           <a:bodyPr wrap="square" lIns="0" tIns="0" rIns="0" bIns="0" rtlCol="0" anchor="t"/>
           <a:lstStyle/>
           <a:p>
-            <a:pPr indent="0" marL="0">
+            <a:pPr marL="0" indent="0">
               <a:buNone/>
             </a:pPr>
             <a:r>
@@ -22859,7 +22703,7 @@
           <a:bodyPr wrap="square" lIns="0" tIns="0" rIns="0" bIns="0" rtlCol="0" anchor="t"/>
           <a:lstStyle/>
           <a:p>
-            <a:pPr indent="0" marL="0">
+            <a:pPr marL="0" indent="0">
               <a:buNone/>
             </a:pPr>
             <a:r>
@@ -22895,7 +22739,7 @@
           <a:bodyPr wrap="square" lIns="0" tIns="0" rIns="0" bIns="0" rtlCol="0" anchor="t"/>
           <a:lstStyle/>
           <a:p>
-            <a:pPr indent="0" marL="0">
+            <a:pPr marL="0" indent="0">
               <a:buNone/>
             </a:pPr>
             <a:r>
@@ -22906,9 +22750,6 @@
               </a:rPr>
               <a:t>What it is  </a:t>
             </a:r>
-            <a:pPr indent="0" marL="0">
-              <a:buNone/>
-            </a:pPr>
             <a:r>
               <a:rPr lang="en-US" sz="1150" dirty="0">
                 <a:solidFill>
@@ -22942,7 +22783,7 @@
           <a:bodyPr wrap="square" lIns="0" tIns="0" rIns="0" bIns="0" rtlCol="0" anchor="t"/>
           <a:lstStyle/>
           <a:p>
-            <a:pPr indent="0" marL="0">
+            <a:pPr marL="0" indent="0">
               <a:buNone/>
             </a:pPr>
             <a:r>
@@ -22953,9 +22794,6 @@
               </a:rPr>
               <a:t>Strength  </a:t>
             </a:r>
-            <a:pPr indent="0" marL="0">
-              <a:buNone/>
-            </a:pPr>
             <a:r>
               <a:rPr lang="en-US" sz="1150" dirty="0">
                 <a:solidFill>
@@ -22994,7 +22832,7 @@
             <a:prstDash val="solid"/>
           </a:ln>
           <a:effectLst>
-            <a:outerShdw sx="100000" sy="100000" kx="0" ky="0" algn="bl" rotWithShape="0" blurRad="50800" dist="12700" dir="5400000">
+            <a:outerShdw blurRad="50800" dist="12700" dir="5400000" algn="bl" rotWithShape="0">
               <a:srgbClr val="000000">
                 <a:alpha val="8000"/>
               </a:srgbClr>
@@ -23048,7 +22886,7 @@
           <a:bodyPr wrap="square" lIns="0" tIns="0" rIns="0" bIns="0" rtlCol="0" anchor="t"/>
           <a:lstStyle/>
           <a:p>
-            <a:pPr indent="0" marL="0">
+            <a:pPr marL="0" indent="0">
               <a:buNone/>
             </a:pPr>
             <a:r>
@@ -23084,7 +22922,7 @@
           <a:bodyPr wrap="square" lIns="0" tIns="0" rIns="0" bIns="0" rtlCol="0" anchor="t"/>
           <a:lstStyle/>
           <a:p>
-            <a:pPr indent="0" marL="0">
+            <a:pPr marL="0" indent="0">
               <a:buNone/>
             </a:pPr>
             <a:r>
@@ -23120,7 +22958,7 @@
           <a:bodyPr wrap="square" lIns="0" tIns="0" rIns="0" bIns="0" rtlCol="0" anchor="t"/>
           <a:lstStyle/>
           <a:p>
-            <a:pPr indent="0" marL="0">
+            <a:pPr marL="0" indent="0">
               <a:buNone/>
             </a:pPr>
             <a:r>
@@ -23131,9 +22969,6 @@
               </a:rPr>
               <a:t>What it is  </a:t>
             </a:r>
-            <a:pPr indent="0" marL="0">
-              <a:buNone/>
-            </a:pPr>
             <a:r>
               <a:rPr lang="en-US" sz="1150" dirty="0">
                 <a:solidFill>
@@ -23167,7 +23002,7 @@
           <a:bodyPr wrap="square" lIns="0" tIns="0" rIns="0" bIns="0" rtlCol="0" anchor="t"/>
           <a:lstStyle/>
           <a:p>
-            <a:pPr indent="0" marL="0">
+            <a:pPr marL="0" indent="0">
               <a:buNone/>
             </a:pPr>
             <a:r>
@@ -23178,9 +23013,6 @@
               </a:rPr>
               <a:t>Strength  </a:t>
             </a:r>
-            <a:pPr indent="0" marL="0">
-              <a:buNone/>
-            </a:pPr>
             <a:r>
               <a:rPr lang="en-US" sz="1150" dirty="0">
                 <a:solidFill>
@@ -23239,7 +23071,7 @@
           <a:bodyPr wrap="square" lIns="0" tIns="0" rIns="0" bIns="0" rtlCol="0" anchor="t"/>
           <a:lstStyle/>
           <a:p>
-            <a:pPr indent="0" marL="0">
+            <a:pPr marL="0" indent="0">
               <a:buNone/>
             </a:pPr>
             <a:r>
@@ -23275,7 +23107,7 @@
           <a:bodyPr wrap="square" lIns="0" tIns="0" rIns="0" bIns="0" rtlCol="0" anchor="t"/>
           <a:lstStyle/>
           <a:p>
-            <a:pPr indent="0" marL="0">
+            <a:pPr marL="0" indent="0">
               <a:buNone/>
             </a:pPr>
             <a:r>
@@ -23311,7 +23143,7 @@
           <a:bodyPr wrap="square" lIns="0" tIns="0" rIns="0" bIns="0" rtlCol="0" anchor="t"/>
           <a:lstStyle/>
           <a:p>
-            <a:pPr algn="r" indent="0" marL="0">
+            <a:pPr marL="0" indent="0" algn="r">
               <a:buNone/>
             </a:pPr>
             <a:r>
@@ -23347,7 +23179,7 @@
           <a:bodyPr wrap="square" lIns="0" tIns="0" rIns="0" bIns="0" rtlCol="0" anchor="t"/>
           <a:lstStyle/>
           <a:p>
-            <a:pPr algn="r" indent="0" marL="0">
+            <a:pPr marL="0" indent="0" algn="r">
               <a:buNone/>
             </a:pPr>
             <a:r>
@@ -23408,7 +23240,7 @@
           <a:bodyPr wrap="square" lIns="0" tIns="0" rIns="0" bIns="0" rtlCol="0" anchor="b"/>
           <a:lstStyle/>
           <a:p>
-            <a:pPr algn="ctr" indent="0" marL="0">
+            <a:pPr marL="0" indent="0" algn="ctr">
               <a:buNone/>
             </a:pPr>
             <a:r>
@@ -23469,7 +23301,7 @@
           <a:bodyPr wrap="square" lIns="0" tIns="0" rIns="0" bIns="0" rtlCol="0" anchor="b"/>
           <a:lstStyle/>
           <a:p>
-            <a:pPr algn="ctr" indent="0" marL="0">
+            <a:pPr marL="0" indent="0" algn="ctr">
               <a:buNone/>
             </a:pPr>
             <a:r>
@@ -23530,7 +23362,7 @@
           <a:bodyPr wrap="square" lIns="0" tIns="0" rIns="0" bIns="0" rtlCol="0" anchor="b"/>
           <a:lstStyle/>
           <a:p>
-            <a:pPr algn="ctr" indent="0" marL="0">
+            <a:pPr marL="0" indent="0" algn="ctr">
               <a:buNone/>
             </a:pPr>
             <a:r>
@@ -23591,7 +23423,7 @@
           <a:bodyPr wrap="square" lIns="0" tIns="0" rIns="0" bIns="0" rtlCol="0" anchor="b"/>
           <a:lstStyle/>
           <a:p>
-            <a:pPr algn="ctr" indent="0" marL="0">
+            <a:pPr marL="0" indent="0" algn="ctr">
               <a:buNone/>
             </a:pPr>
             <a:r>
@@ -23677,7 +23509,7 @@
           <a:bodyPr wrap="square" lIns="0" tIns="0" rIns="0" bIns="0" rtlCol="0" anchor="ctr"/>
           <a:lstStyle/>
           <a:p>
-            <a:pPr algn="ctr" indent="0" marL="0">
+            <a:pPr marL="0" indent="0" algn="ctr">
               <a:buNone/>
             </a:pPr>
             <a:r>
@@ -23716,7 +23548,7 @@
           <a:bodyPr wrap="square" lIns="0" tIns="0" rIns="0" bIns="0" rtlCol="0" anchor="t"/>
           <a:lstStyle/>
           <a:p>
-            <a:pPr algn="ctr" indent="0" marL="0">
+            <a:pPr marL="0" indent="0" algn="ctr">
               <a:buNone/>
             </a:pPr>
             <a:r>
@@ -23752,7 +23584,7 @@
           <a:bodyPr wrap="square" lIns="0" tIns="0" rIns="0" bIns="0" rtlCol="0" anchor="t"/>
           <a:lstStyle/>
           <a:p>
-            <a:pPr indent="0" marL="0">
+            <a:pPr marL="0" indent="0">
               <a:buNone/>
             </a:pPr>
             <a:r>
@@ -23769,7 +23601,7 @@
       </p:sp>
       <p:sp>
         <p:nvSpPr>
-          <p:cNvPr id="25" name="Slide Number Placeholder 0"/>
+          <p:cNvPr id="3" name="Slide Number Placeholder 0"/>
           <p:cNvSpPr>
             <a:spLocks noGrp="1"/>
           </p:cNvSpPr>
@@ -23787,7 +23619,7 @@
           </a:prstGeom>
           <a:extLst>
             <a:ext uri="{C572A759-6A51-4108-AA02-DFA0A04FC94B}">
-              <ma14:wrappingTextBoxFlag xmlns:ma14="http://schemas.microsoft.com/office/mac/drawingml/2011/main" val="0"/>
+              <ma14:wrappingTextBoxFlag xmlns:ma14="http://schemas.microsoft.com/office/mac/drawingml/2011/main" xmlns="" val="0"/>
             </a:ext>
           </a:extLst>
         </p:spPr>
@@ -23805,7 +23637,7 @@
           <a:p>
             <a:pPr algn="r"/>
             <a:fld id="{F7021451-1387-4CA6-816F-3879F97B5CBC}" type="slidenum">
-              <a:rPr b="0" lang="en-US"/>
+              <a:rPr lang="en-US" b="0"/>
               <a:t>6</a:t>
             </a:fld>
             <a:endParaRPr lang="en-US"/>
@@ -23840,9 +23672,11 @@
       <p:sp>
         <p:nvSpPr>
           <p:cNvPr id="2" name="Text 0"/>
-          <p:cNvSpPr/>
+          <p:cNvSpPr>
+            <a:spLocks noGrp="1"/>
+          </p:cNvSpPr>
           <p:nvPr>
-            <p:ph idx="100" type="title" hasCustomPrompt="1"/>
+            <p:ph type="title" idx="100" hasCustomPrompt="1"/>
           </p:nvPr>
         </p:nvSpPr>
         <p:spPr>
@@ -23860,7 +23694,7 @@
           <a:bodyPr wrap="square" lIns="0" tIns="0" rIns="0" bIns="0" rtlCol="0" anchor="ctr"/>
           <a:lstStyle/>
           <a:p>
-            <a:pPr algn="l" indent="0" marL="0">
+            <a:pPr marL="0" indent="0" algn="l">
               <a:buNone/>
             </a:pPr>
             <a:r>
@@ -23923,7 +23757,7 @@
           <a:bodyPr wrap="square" lIns="0" tIns="0" rIns="0" bIns="0" rtlCol="0" anchor="t"/>
           <a:lstStyle/>
           <a:p>
-            <a:pPr indent="0" marL="0">
+            <a:pPr marL="0" indent="0">
               <a:buNone/>
             </a:pPr>
             <a:r>
@@ -23959,7 +23793,7 @@
           <a:bodyPr wrap="square" lIns="0" tIns="0" rIns="0" bIns="0" rtlCol="0" anchor="t"/>
           <a:lstStyle/>
           <a:p>
-            <a:pPr indent="0" marL="0">
+            <a:pPr marL="0" indent="0">
               <a:buNone/>
             </a:pPr>
             <a:r>
@@ -24046,7 +23880,7 @@
           <a:bodyPr wrap="square" lIns="0" tIns="0" rIns="0" bIns="0" rtlCol="0" anchor="t"/>
           <a:lstStyle/>
           <a:p>
-            <a:pPr indent="0" marL="0">
+            <a:pPr marL="0" indent="0">
               <a:buNone/>
             </a:pPr>
             <a:r>
@@ -24082,7 +23916,7 @@
           <a:bodyPr wrap="square" lIns="0" tIns="0" rIns="0" bIns="0" rtlCol="0" anchor="t"/>
           <a:lstStyle/>
           <a:p>
-            <a:pPr indent="0" marL="0">
+            <a:pPr marL="0" indent="0">
               <a:buNone/>
             </a:pPr>
             <a:r>
@@ -24169,7 +24003,7 @@
           <a:bodyPr wrap="square" lIns="0" tIns="0" rIns="0" bIns="0" rtlCol="0" anchor="t"/>
           <a:lstStyle/>
           <a:p>
-            <a:pPr indent="0" marL="0">
+            <a:pPr marL="0" indent="0">
               <a:buNone/>
             </a:pPr>
             <a:r>
@@ -24205,7 +24039,7 @@
           <a:bodyPr wrap="square" lIns="0" tIns="0" rIns="0" bIns="0" rtlCol="0" anchor="t"/>
           <a:lstStyle/>
           <a:p>
-            <a:pPr indent="0" marL="0">
+            <a:pPr marL="0" indent="0">
               <a:buNone/>
             </a:pPr>
             <a:r>
@@ -24292,7 +24126,7 @@
           <a:bodyPr wrap="square" lIns="0" tIns="0" rIns="0" bIns="0" rtlCol="0" anchor="t"/>
           <a:lstStyle/>
           <a:p>
-            <a:pPr indent="0" marL="0">
+            <a:pPr marL="0" indent="0">
               <a:buNone/>
             </a:pPr>
             <a:r>
@@ -24328,7 +24162,7 @@
           <a:bodyPr wrap="square" lIns="0" tIns="0" rIns="0" bIns="0" rtlCol="0" anchor="t"/>
           <a:lstStyle/>
           <a:p>
-            <a:pPr indent="0" marL="0">
+            <a:pPr marL="0" indent="0">
               <a:buNone/>
             </a:pPr>
             <a:r>
@@ -24415,7 +24249,7 @@
           <a:bodyPr wrap="square" lIns="0" tIns="0" rIns="0" bIns="0" rtlCol="0" anchor="t"/>
           <a:lstStyle/>
           <a:p>
-            <a:pPr algn="ctr" indent="0" marL="0">
+            <a:pPr marL="0" indent="0" algn="ctr">
               <a:buNone/>
             </a:pPr>
             <a:r>
@@ -24451,7 +24285,7 @@
           <a:bodyPr wrap="square" lIns="0" tIns="0" rIns="0" bIns="0" rtlCol="0" anchor="t"/>
           <a:lstStyle/>
           <a:p>
-            <a:pPr algn="ctr" indent="0" marL="0">
+            <a:pPr marL="0" indent="0" algn="ctr">
               <a:buNone/>
             </a:pPr>
             <a:r>
@@ -24538,7 +24372,7 @@
           <a:bodyPr wrap="square" lIns="0" tIns="0" rIns="0" bIns="0" rtlCol="0" anchor="t"/>
           <a:lstStyle/>
           <a:p>
-            <a:pPr algn="ctr" indent="0" marL="0">
+            <a:pPr marL="0" indent="0" algn="ctr">
               <a:buNone/>
             </a:pPr>
             <a:r>
@@ -24574,7 +24408,7 @@
           <a:bodyPr wrap="square" lIns="0" tIns="0" rIns="0" bIns="0" rtlCol="0" anchor="t"/>
           <a:lstStyle/>
           <a:p>
-            <a:pPr algn="ctr" indent="0" marL="0">
+            <a:pPr marL="0" indent="0" algn="ctr">
               <a:buNone/>
             </a:pPr>
             <a:r>
@@ -24588,7 +24422,7 @@
             <a:endParaRPr lang="en-US" sz="1050" dirty="0"/>
           </a:p>
           <a:p>
-            <a:pPr algn="ctr" indent="0" marL="0">
+            <a:pPr marL="0" indent="0" algn="ctr">
               <a:buNone/>
             </a:pPr>
             <a:r>
@@ -24602,7 +24436,7 @@
             <a:endParaRPr lang="en-US" sz="1050" dirty="0"/>
           </a:p>
           <a:p>
-            <a:pPr algn="ctr" indent="0" marL="0">
+            <a:pPr marL="0" indent="0" algn="ctr">
               <a:buNone/>
             </a:pPr>
             <a:r>
@@ -24638,7 +24472,7 @@
           <a:bodyPr wrap="square" lIns="0" tIns="0" rIns="0" bIns="0" rtlCol="0" anchor="t"/>
           <a:lstStyle/>
           <a:p>
-            <a:pPr indent="0" marL="0">
+            <a:pPr marL="0" indent="0">
               <a:buNone/>
             </a:pPr>
             <a:r>
@@ -24699,7 +24533,7 @@
           <a:bodyPr wrap="square" lIns="0" tIns="0" rIns="0" bIns="0" rtlCol="0" anchor="ctr"/>
           <a:lstStyle/>
           <a:p>
-            <a:pPr indent="0" marL="0">
+            <a:pPr marL="0" indent="0">
               <a:buNone/>
             </a:pPr>
             <a:r>
@@ -24735,7 +24569,7 @@
           <a:bodyPr wrap="square" lIns="0" tIns="0" rIns="0" bIns="0" rtlCol="0" anchor="ctr"/>
           <a:lstStyle/>
           <a:p>
-            <a:pPr indent="0" marL="0">
+            <a:pPr marL="0" indent="0">
               <a:buNone/>
             </a:pPr>
             <a:r>
@@ -24796,7 +24630,7 @@
           <a:bodyPr wrap="square" lIns="0" tIns="0" rIns="0" bIns="0" rtlCol="0" anchor="ctr"/>
           <a:lstStyle/>
           <a:p>
-            <a:pPr indent="0" marL="0">
+            <a:pPr marL="0" indent="0">
               <a:buNone/>
             </a:pPr>
             <a:r>
@@ -24832,7 +24666,7 @@
           <a:bodyPr wrap="square" lIns="0" tIns="0" rIns="0" bIns="0" rtlCol="0" anchor="ctr"/>
           <a:lstStyle/>
           <a:p>
-            <a:pPr indent="0" marL="0">
+            <a:pPr marL="0" indent="0">
               <a:buNone/>
             </a:pPr>
             <a:r>
@@ -24893,7 +24727,7 @@
           <a:bodyPr wrap="square" lIns="0" tIns="0" rIns="0" bIns="0" rtlCol="0" anchor="ctr"/>
           <a:lstStyle/>
           <a:p>
-            <a:pPr indent="0" marL="0">
+            <a:pPr marL="0" indent="0">
               <a:buNone/>
             </a:pPr>
             <a:r>
@@ -24929,7 +24763,7 @@
           <a:bodyPr wrap="square" lIns="0" tIns="0" rIns="0" bIns="0" rtlCol="0" anchor="ctr"/>
           <a:lstStyle/>
           <a:p>
-            <a:pPr indent="0" marL="0">
+            <a:pPr marL="0" indent="0">
               <a:buNone/>
             </a:pPr>
             <a:r>
@@ -24990,7 +24824,7 @@
           <a:bodyPr wrap="square" lIns="0" tIns="0" rIns="0" bIns="0" rtlCol="0" anchor="ctr"/>
           <a:lstStyle/>
           <a:p>
-            <a:pPr indent="0" marL="0">
+            <a:pPr marL="0" indent="0">
               <a:buNone/>
             </a:pPr>
             <a:r>
@@ -25026,7 +24860,7 @@
           <a:bodyPr wrap="square" lIns="0" tIns="0" rIns="0" bIns="0" rtlCol="0" anchor="ctr"/>
           <a:lstStyle/>
           <a:p>
-            <a:pPr indent="0" marL="0">
+            <a:pPr marL="0" indent="0">
               <a:buNone/>
             </a:pPr>
             <a:r>
@@ -25087,7 +24921,7 @@
           <a:bodyPr wrap="square" lIns="0" tIns="0" rIns="0" bIns="0" rtlCol="0" anchor="ctr"/>
           <a:lstStyle/>
           <a:p>
-            <a:pPr indent="0" marL="0">
+            <a:pPr marL="0" indent="0">
               <a:buNone/>
             </a:pPr>
             <a:r>
@@ -25123,7 +24957,7 @@
           <a:bodyPr wrap="square" lIns="0" tIns="0" rIns="0" bIns="0" rtlCol="0" anchor="ctr"/>
           <a:lstStyle/>
           <a:p>
-            <a:pPr indent="0" marL="0">
+            <a:pPr marL="0" indent="0">
               <a:buNone/>
             </a:pPr>
             <a:r>
@@ -25184,7 +25018,7 @@
           <a:bodyPr wrap="square" lIns="0" tIns="0" rIns="0" bIns="0" rtlCol="0" anchor="ctr"/>
           <a:lstStyle/>
           <a:p>
-            <a:pPr indent="0" marL="0">
+            <a:pPr marL="0" indent="0">
               <a:buNone/>
             </a:pPr>
             <a:r>
@@ -25220,7 +25054,7 @@
           <a:bodyPr wrap="square" lIns="0" tIns="0" rIns="0" bIns="0" rtlCol="0" anchor="ctr"/>
           <a:lstStyle/>
           <a:p>
-            <a:pPr indent="0" marL="0">
+            <a:pPr marL="0" indent="0">
               <a:buNone/>
             </a:pPr>
             <a:r>
@@ -25237,7 +25071,7 @@
       </p:sp>
       <p:sp>
         <p:nvSpPr>
-          <p:cNvPr id="25" name="Slide Number Placeholder 0"/>
+          <p:cNvPr id="3" name="Slide Number Placeholder 0"/>
           <p:cNvSpPr>
             <a:spLocks noGrp="1"/>
           </p:cNvSpPr>
@@ -25255,7 +25089,7 @@
           </a:prstGeom>
           <a:extLst>
             <a:ext uri="{C572A759-6A51-4108-AA02-DFA0A04FC94B}">
-              <ma14:wrappingTextBoxFlag xmlns:ma14="http://schemas.microsoft.com/office/mac/drawingml/2011/main" val="0"/>
+              <ma14:wrappingTextBoxFlag xmlns:ma14="http://schemas.microsoft.com/office/mac/drawingml/2011/main" xmlns="" val="0"/>
             </a:ext>
           </a:extLst>
         </p:spPr>
@@ -25273,7 +25107,7 @@
           <a:p>
             <a:pPr algn="r"/>
             <a:fld id="{F7021451-1387-4CA6-816F-3879F97B5CBC}" type="slidenum">
-              <a:rPr b="0" lang="en-US"/>
+              <a:rPr lang="en-US" b="0"/>
               <a:t>7</a:t>
             </a:fld>
             <a:endParaRPr lang="en-US"/>
@@ -25308,9 +25142,11 @@
       <p:sp>
         <p:nvSpPr>
           <p:cNvPr id="2" name="Text 0"/>
-          <p:cNvSpPr/>
+          <p:cNvSpPr>
+            <a:spLocks noGrp="1"/>
+          </p:cNvSpPr>
           <p:nvPr>
-            <p:ph idx="100" type="title" hasCustomPrompt="1"/>
+            <p:ph type="title" idx="100" hasCustomPrompt="1"/>
           </p:nvPr>
         </p:nvSpPr>
         <p:spPr>
@@ -25328,7 +25164,7 @@
           <a:bodyPr wrap="square" lIns="0" tIns="0" rIns="0" bIns="0" rtlCol="0" anchor="ctr"/>
           <a:lstStyle/>
           <a:p>
-            <a:pPr algn="l" indent="0" marL="0">
+            <a:pPr marL="0" indent="0" algn="l">
               <a:buNone/>
             </a:pPr>
             <a:r>
@@ -25366,13 +25202,55 @@
             <a:tbl>
               <a:tblPr/>
               <a:tblGrid>
-                <a:gridCol w="1828800"/>
-                <a:gridCol w="4325112"/>
-                <a:gridCol w="822960"/>
-                <a:gridCol w="1188720"/>
-                <a:gridCol w="822960"/>
-                <a:gridCol w="822960"/>
-                <a:gridCol w="1280160"/>
+                <a:gridCol w="1828800">
+                  <a:extLst>
+                    <a:ext uri="{9D8B030D-6E8A-4147-A177-3AD203B41FA5}">
+                      <a16:colId xmlns:a16="http://schemas.microsoft.com/office/drawing/2014/main" val="20000"/>
+                    </a:ext>
+                  </a:extLst>
+                </a:gridCol>
+                <a:gridCol w="4325112">
+                  <a:extLst>
+                    <a:ext uri="{9D8B030D-6E8A-4147-A177-3AD203B41FA5}">
+                      <a16:colId xmlns:a16="http://schemas.microsoft.com/office/drawing/2014/main" val="20001"/>
+                    </a:ext>
+                  </a:extLst>
+                </a:gridCol>
+                <a:gridCol w="822960">
+                  <a:extLst>
+                    <a:ext uri="{9D8B030D-6E8A-4147-A177-3AD203B41FA5}">
+                      <a16:colId xmlns:a16="http://schemas.microsoft.com/office/drawing/2014/main" val="20002"/>
+                    </a:ext>
+                  </a:extLst>
+                </a:gridCol>
+                <a:gridCol w="1188720">
+                  <a:extLst>
+                    <a:ext uri="{9D8B030D-6E8A-4147-A177-3AD203B41FA5}">
+                      <a16:colId xmlns:a16="http://schemas.microsoft.com/office/drawing/2014/main" val="20003"/>
+                    </a:ext>
+                  </a:extLst>
+                </a:gridCol>
+                <a:gridCol w="822960">
+                  <a:extLst>
+                    <a:ext uri="{9D8B030D-6E8A-4147-A177-3AD203B41FA5}">
+                      <a16:colId xmlns:a16="http://schemas.microsoft.com/office/drawing/2014/main" val="20004"/>
+                    </a:ext>
+                  </a:extLst>
+                </a:gridCol>
+                <a:gridCol w="822960">
+                  <a:extLst>
+                    <a:ext uri="{9D8B030D-6E8A-4147-A177-3AD203B41FA5}">
+                      <a16:colId xmlns:a16="http://schemas.microsoft.com/office/drawing/2014/main" val="20005"/>
+                    </a:ext>
+                  </a:extLst>
+                </a:gridCol>
+                <a:gridCol w="1280160">
+                  <a:extLst>
+                    <a:ext uri="{9D8B030D-6E8A-4147-A177-3AD203B41FA5}">
+                      <a16:colId xmlns:a16="http://schemas.microsoft.com/office/drawing/2014/main" val="20006"/>
+                    </a:ext>
+                  </a:extLst>
+                </a:gridCol>
               </a:tblGrid>
               <a:tr h="402336">
                 <a:tc>
@@ -25380,7 +25258,7 @@
                     <a:bodyPr/>
                     <a:lstStyle/>
                     <a:p>
-                      <a:pPr indent="0" marL="0">
+                      <a:pPr marL="0" indent="0">
                         <a:buNone/>
                       </a:pPr>
                       <a:r>
@@ -25441,7 +25319,7 @@
                     <a:bodyPr/>
                     <a:lstStyle/>
                     <a:p>
-                      <a:pPr indent="0" marL="0">
+                      <a:pPr marL="0" indent="0">
                         <a:buNone/>
                       </a:pPr>
                       <a:r>
@@ -25502,7 +25380,7 @@
                     <a:bodyPr/>
                     <a:lstStyle/>
                     <a:p>
-                      <a:pPr algn="ctr" indent="0" marL="0">
+                      <a:pPr marL="0" indent="0" algn="ctr">
                         <a:buNone/>
                       </a:pPr>
                       <a:r>
@@ -25563,7 +25441,7 @@
                     <a:bodyPr/>
                     <a:lstStyle/>
                     <a:p>
-                      <a:pPr algn="ctr" indent="0" marL="0">
+                      <a:pPr marL="0" indent="0" algn="ctr">
                         <a:buNone/>
                       </a:pPr>
                       <a:r>
@@ -25624,7 +25502,7 @@
                     <a:bodyPr/>
                     <a:lstStyle/>
                     <a:p>
-                      <a:pPr algn="ctr" indent="0" marL="0">
+                      <a:pPr marL="0" indent="0" algn="ctr">
                         <a:buNone/>
                       </a:pPr>
                       <a:r>
@@ -25685,7 +25563,7 @@
                     <a:bodyPr/>
                     <a:lstStyle/>
                     <a:p>
-                      <a:pPr algn="ctr" indent="0" marL="0">
+                      <a:pPr marL="0" indent="0" algn="ctr">
                         <a:buNone/>
                       </a:pPr>
                       <a:r>
@@ -25746,7 +25624,7 @@
                     <a:bodyPr/>
                     <a:lstStyle/>
                     <a:p>
-                      <a:pPr algn="ctr" indent="0" marL="0">
+                      <a:pPr marL="0" indent="0" algn="ctr">
                         <a:buNone/>
                       </a:pPr>
                       <a:r>
@@ -25802,6 +25680,11 @@
                     </a:solidFill>
                   </a:tcPr>
                 </a:tc>
+                <a:extLst>
+                  <a:ext uri="{0D108BD9-81ED-4DB2-BD59-A6C34878D82A}">
+                    <a16:rowId xmlns:a16="http://schemas.microsoft.com/office/drawing/2014/main" val="10000"/>
+                  </a:ext>
+                </a:extLst>
               </a:tr>
               <a:tr h="402336">
                 <a:tc>
@@ -25809,7 +25692,7 @@
                     <a:bodyPr/>
                     <a:lstStyle/>
                     <a:p>
-                      <a:pPr indent="0" marL="0">
+                      <a:pPr marL="0" indent="0">
                         <a:buNone/>
                       </a:pPr>
                       <a:r>
@@ -25867,7 +25750,7 @@
                     <a:bodyPr/>
                     <a:lstStyle/>
                     <a:p>
-                      <a:pPr indent="0" marL="0">
+                      <a:pPr marL="0" indent="0">
                         <a:buNone/>
                       </a:pPr>
                       <a:r>
@@ -25925,7 +25808,7 @@
                     <a:bodyPr/>
                     <a:lstStyle/>
                     <a:p>
-                      <a:pPr algn="ctr" indent="0" marL="0">
+                      <a:pPr marL="0" indent="0" algn="ctr">
                         <a:buNone/>
                       </a:pPr>
                       <a:r>
@@ -25983,7 +25866,7 @@
                     <a:bodyPr/>
                     <a:lstStyle/>
                     <a:p>
-                      <a:pPr algn="ctr" indent="0" marL="0">
+                      <a:pPr marL="0" indent="0" algn="ctr">
                         <a:buNone/>
                       </a:pPr>
                       <a:r>
@@ -26041,7 +25924,7 @@
                     <a:bodyPr/>
                     <a:lstStyle/>
                     <a:p>
-                      <a:pPr algn="ctr" indent="0" marL="0">
+                      <a:pPr marL="0" indent="0" algn="ctr">
                         <a:buNone/>
                       </a:pPr>
                       <a:r>
@@ -26099,7 +25982,7 @@
                     <a:bodyPr/>
                     <a:lstStyle/>
                     <a:p>
-                      <a:pPr algn="ctr" indent="0" marL="0">
+                      <a:pPr marL="0" indent="0" algn="ctr">
                         <a:buNone/>
                       </a:pPr>
                       <a:r>
@@ -26157,7 +26040,7 @@
                     <a:bodyPr/>
                     <a:lstStyle/>
                     <a:p>
-                      <a:pPr algn="ctr" indent="0" marL="0">
+                      <a:pPr marL="0" indent="0" algn="ctr">
                         <a:buNone/>
                       </a:pPr>
                       <a:r>
@@ -26210,6 +26093,11 @@
                     </a:lnB>
                   </a:tcPr>
                 </a:tc>
+                <a:extLst>
+                  <a:ext uri="{0D108BD9-81ED-4DB2-BD59-A6C34878D82A}">
+                    <a16:rowId xmlns:a16="http://schemas.microsoft.com/office/drawing/2014/main" val="10001"/>
+                  </a:ext>
+                </a:extLst>
               </a:tr>
               <a:tr h="402336">
                 <a:tc>
@@ -26217,7 +26105,7 @@
                     <a:bodyPr/>
                     <a:lstStyle/>
                     <a:p>
-                      <a:pPr indent="0" marL="0">
+                      <a:pPr marL="0" indent="0">
                         <a:buNone/>
                       </a:pPr>
                       <a:r>
@@ -26275,7 +26163,7 @@
                     <a:bodyPr/>
                     <a:lstStyle/>
                     <a:p>
-                      <a:pPr indent="0" marL="0">
+                      <a:pPr marL="0" indent="0">
                         <a:buNone/>
                       </a:pPr>
                       <a:r>
@@ -26333,7 +26221,7 @@
                     <a:bodyPr/>
                     <a:lstStyle/>
                     <a:p>
-                      <a:pPr algn="ctr" indent="0" marL="0">
+                      <a:pPr marL="0" indent="0" algn="ctr">
                         <a:buNone/>
                       </a:pPr>
                       <a:r>
@@ -26391,7 +26279,7 @@
                     <a:bodyPr/>
                     <a:lstStyle/>
                     <a:p>
-                      <a:pPr algn="ctr" indent="0" marL="0">
+                      <a:pPr marL="0" indent="0" algn="ctr">
                         <a:buNone/>
                       </a:pPr>
                       <a:r>
@@ -26449,7 +26337,7 @@
                     <a:bodyPr/>
                     <a:lstStyle/>
                     <a:p>
-                      <a:pPr algn="ctr" indent="0" marL="0">
+                      <a:pPr marL="0" indent="0" algn="ctr">
                         <a:buNone/>
                       </a:pPr>
                       <a:r>
@@ -26507,7 +26395,7 @@
                     <a:bodyPr/>
                     <a:lstStyle/>
                     <a:p>
-                      <a:pPr algn="ctr" indent="0" marL="0">
+                      <a:pPr marL="0" indent="0" algn="ctr">
                         <a:buNone/>
                       </a:pPr>
                       <a:r>
@@ -26565,7 +26453,7 @@
                     <a:bodyPr/>
                     <a:lstStyle/>
                     <a:p>
-                      <a:pPr algn="ctr" indent="0" marL="0">
+                      <a:pPr marL="0" indent="0" algn="ctr">
                         <a:buNone/>
                       </a:pPr>
                       <a:r>
@@ -26618,6 +26506,11 @@
                     </a:lnB>
                   </a:tcPr>
                 </a:tc>
+                <a:extLst>
+                  <a:ext uri="{0D108BD9-81ED-4DB2-BD59-A6C34878D82A}">
+                    <a16:rowId xmlns:a16="http://schemas.microsoft.com/office/drawing/2014/main" val="10002"/>
+                  </a:ext>
+                </a:extLst>
               </a:tr>
               <a:tr h="402336">
                 <a:tc>
@@ -26625,7 +26518,7 @@
                     <a:bodyPr/>
                     <a:lstStyle/>
                     <a:p>
-                      <a:pPr indent="0" marL="0">
+                      <a:pPr marL="0" indent="0">
                         <a:buNone/>
                       </a:pPr>
                       <a:r>
@@ -26683,7 +26576,7 @@
                     <a:bodyPr/>
                     <a:lstStyle/>
                     <a:p>
-                      <a:pPr indent="0" marL="0">
+                      <a:pPr marL="0" indent="0">
                         <a:buNone/>
                       </a:pPr>
                       <a:r>
@@ -26741,7 +26634,7 @@
                     <a:bodyPr/>
                     <a:lstStyle/>
                     <a:p>
-                      <a:pPr algn="ctr" indent="0" marL="0">
+                      <a:pPr marL="0" indent="0" algn="ctr">
                         <a:buNone/>
                       </a:pPr>
                       <a:r>
@@ -26799,7 +26692,7 @@
                     <a:bodyPr/>
                     <a:lstStyle/>
                     <a:p>
-                      <a:pPr algn="ctr" indent="0" marL="0">
+                      <a:pPr marL="0" indent="0" algn="ctr">
                         <a:buNone/>
                       </a:pPr>
                       <a:r>
@@ -26857,7 +26750,7 @@
                     <a:bodyPr/>
                     <a:lstStyle/>
                     <a:p>
-                      <a:pPr algn="ctr" indent="0" marL="0">
+                      <a:pPr marL="0" indent="0" algn="ctr">
                         <a:buNone/>
                       </a:pPr>
                       <a:r>
@@ -26915,7 +26808,7 @@
                     <a:bodyPr/>
                     <a:lstStyle/>
                     <a:p>
-                      <a:pPr algn="ctr" indent="0" marL="0">
+                      <a:pPr marL="0" indent="0" algn="ctr">
                         <a:buNone/>
                       </a:pPr>
                       <a:r>
@@ -26973,7 +26866,7 @@
                     <a:bodyPr/>
                     <a:lstStyle/>
                     <a:p>
-                      <a:pPr algn="ctr" indent="0" marL="0">
+                      <a:pPr marL="0" indent="0" algn="ctr">
                         <a:buNone/>
                       </a:pPr>
                       <a:r>
@@ -27026,6 +26919,11 @@
                     </a:lnB>
                   </a:tcPr>
                 </a:tc>
+                <a:extLst>
+                  <a:ext uri="{0D108BD9-81ED-4DB2-BD59-A6C34878D82A}">
+                    <a16:rowId xmlns:a16="http://schemas.microsoft.com/office/drawing/2014/main" val="10003"/>
+                  </a:ext>
+                </a:extLst>
               </a:tr>
               <a:tr h="402336">
                 <a:tc>
@@ -27033,7 +26931,7 @@
                     <a:bodyPr/>
                     <a:lstStyle/>
                     <a:p>
-                      <a:pPr indent="0" marL="0">
+                      <a:pPr marL="0" indent="0">
                         <a:buNone/>
                       </a:pPr>
                       <a:r>
@@ -27091,7 +26989,7 @@
                     <a:bodyPr/>
                     <a:lstStyle/>
                     <a:p>
-                      <a:pPr indent="0" marL="0">
+                      <a:pPr marL="0" indent="0">
                         <a:buNone/>
                       </a:pPr>
                       <a:r>
@@ -27149,7 +27047,7 @@
                     <a:bodyPr/>
                     <a:lstStyle/>
                     <a:p>
-                      <a:pPr algn="ctr" indent="0" marL="0">
+                      <a:pPr marL="0" indent="0" algn="ctr">
                         <a:buNone/>
                       </a:pPr>
                       <a:r>
@@ -27207,7 +27105,7 @@
                     <a:bodyPr/>
                     <a:lstStyle/>
                     <a:p>
-                      <a:pPr algn="ctr" indent="0" marL="0">
+                      <a:pPr marL="0" indent="0" algn="ctr">
                         <a:buNone/>
                       </a:pPr>
                       <a:r>
@@ -27265,7 +27163,7 @@
                     <a:bodyPr/>
                     <a:lstStyle/>
                     <a:p>
-                      <a:pPr algn="ctr" indent="0" marL="0">
+                      <a:pPr marL="0" indent="0" algn="ctr">
                         <a:buNone/>
                       </a:pPr>
                       <a:r>
@@ -27323,7 +27221,7 @@
                     <a:bodyPr/>
                     <a:lstStyle/>
                     <a:p>
-                      <a:pPr algn="ctr" indent="0" marL="0">
+                      <a:pPr marL="0" indent="0" algn="ctr">
                         <a:buNone/>
                       </a:pPr>
                       <a:r>
@@ -27381,7 +27279,7 @@
                     <a:bodyPr/>
                     <a:lstStyle/>
                     <a:p>
-                      <a:pPr algn="ctr" indent="0" marL="0">
+                      <a:pPr marL="0" indent="0" algn="ctr">
                         <a:buNone/>
                       </a:pPr>
                       <a:r>
@@ -27434,6 +27332,11 @@
                     </a:lnB>
                   </a:tcPr>
                 </a:tc>
+                <a:extLst>
+                  <a:ext uri="{0D108BD9-81ED-4DB2-BD59-A6C34878D82A}">
+                    <a16:rowId xmlns:a16="http://schemas.microsoft.com/office/drawing/2014/main" val="10004"/>
+                  </a:ext>
+                </a:extLst>
               </a:tr>
               <a:tr h="402336">
                 <a:tc>
@@ -27441,7 +27344,7 @@
                     <a:bodyPr/>
                     <a:lstStyle/>
                     <a:p>
-                      <a:pPr indent="0" marL="0">
+                      <a:pPr marL="0" indent="0">
                         <a:buNone/>
                       </a:pPr>
                       <a:r>
@@ -27499,7 +27402,7 @@
                     <a:bodyPr/>
                     <a:lstStyle/>
                     <a:p>
-                      <a:pPr indent="0" marL="0">
+                      <a:pPr marL="0" indent="0">
                         <a:buNone/>
                       </a:pPr>
                       <a:r>
@@ -27557,7 +27460,7 @@
                     <a:bodyPr/>
                     <a:lstStyle/>
                     <a:p>
-                      <a:pPr algn="ctr" indent="0" marL="0">
+                      <a:pPr marL="0" indent="0" algn="ctr">
                         <a:buNone/>
                       </a:pPr>
                       <a:r>
@@ -27615,7 +27518,7 @@
                     <a:bodyPr/>
                     <a:lstStyle/>
                     <a:p>
-                      <a:pPr algn="ctr" indent="0" marL="0">
+                      <a:pPr marL="0" indent="0" algn="ctr">
                         <a:buNone/>
                       </a:pPr>
                       <a:r>
@@ -27673,7 +27576,7 @@
                     <a:bodyPr/>
                     <a:lstStyle/>
                     <a:p>
-                      <a:pPr algn="ctr" indent="0" marL="0">
+                      <a:pPr marL="0" indent="0" algn="ctr">
                         <a:buNone/>
                       </a:pPr>
                       <a:r>
@@ -27731,7 +27634,7 @@
                     <a:bodyPr/>
                     <a:lstStyle/>
                     <a:p>
-                      <a:pPr algn="ctr" indent="0" marL="0">
+                      <a:pPr marL="0" indent="0" algn="ctr">
                         <a:buNone/>
                       </a:pPr>
                       <a:r>
@@ -27789,7 +27692,7 @@
                     <a:bodyPr/>
                     <a:lstStyle/>
                     <a:p>
-                      <a:pPr algn="ctr" indent="0" marL="0">
+                      <a:pPr marL="0" indent="0" algn="ctr">
                         <a:buNone/>
                       </a:pPr>
                       <a:r>
@@ -27842,6 +27745,11 @@
                     </a:lnB>
                   </a:tcPr>
                 </a:tc>
+                <a:extLst>
+                  <a:ext uri="{0D108BD9-81ED-4DB2-BD59-A6C34878D82A}">
+                    <a16:rowId xmlns:a16="http://schemas.microsoft.com/office/drawing/2014/main" val="10005"/>
+                  </a:ext>
+                </a:extLst>
               </a:tr>
               <a:tr h="402336">
                 <a:tc>
@@ -27849,7 +27757,7 @@
                     <a:bodyPr/>
                     <a:lstStyle/>
                     <a:p>
-                      <a:pPr indent="0" marL="0">
+                      <a:pPr marL="0" indent="0">
                         <a:buNone/>
                       </a:pPr>
                       <a:r>
@@ -27907,7 +27815,7 @@
                     <a:bodyPr/>
                     <a:lstStyle/>
                     <a:p>
-                      <a:pPr indent="0" marL="0">
+                      <a:pPr marL="0" indent="0">
                         <a:buNone/>
                       </a:pPr>
                       <a:r>
@@ -27965,7 +27873,7 @@
                     <a:bodyPr/>
                     <a:lstStyle/>
                     <a:p>
-                      <a:pPr algn="ctr" indent="0" marL="0">
+                      <a:pPr marL="0" indent="0" algn="ctr">
                         <a:buNone/>
                       </a:pPr>
                       <a:r>
@@ -28023,7 +27931,7 @@
                     <a:bodyPr/>
                     <a:lstStyle/>
                     <a:p>
-                      <a:pPr algn="ctr" indent="0" marL="0">
+                      <a:pPr marL="0" indent="0" algn="ctr">
                         <a:buNone/>
                       </a:pPr>
                       <a:r>
@@ -28081,7 +27989,7 @@
                     <a:bodyPr/>
                     <a:lstStyle/>
                     <a:p>
-                      <a:pPr algn="ctr" indent="0" marL="0">
+                      <a:pPr marL="0" indent="0" algn="ctr">
                         <a:buNone/>
                       </a:pPr>
                       <a:r>
@@ -28139,7 +28047,7 @@
                     <a:bodyPr/>
                     <a:lstStyle/>
                     <a:p>
-                      <a:pPr algn="ctr" indent="0" marL="0">
+                      <a:pPr marL="0" indent="0" algn="ctr">
                         <a:buNone/>
                       </a:pPr>
                       <a:r>
@@ -28197,7 +28105,7 @@
                     <a:bodyPr/>
                     <a:lstStyle/>
                     <a:p>
-                      <a:pPr algn="ctr" indent="0" marL="0">
+                      <a:pPr marL="0" indent="0" algn="ctr">
                         <a:buNone/>
                       </a:pPr>
                       <a:endParaRPr lang="en-US" sz="1100" dirty="0"/>
@@ -28242,6 +28150,11 @@
                     </a:lnB>
                   </a:tcPr>
                 </a:tc>
+                <a:extLst>
+                  <a:ext uri="{0D108BD9-81ED-4DB2-BD59-A6C34878D82A}">
+                    <a16:rowId xmlns:a16="http://schemas.microsoft.com/office/drawing/2014/main" val="10006"/>
+                  </a:ext>
+                </a:extLst>
               </a:tr>
               <a:tr h="402336">
                 <a:tc>
@@ -28249,7 +28162,7 @@
                     <a:bodyPr/>
                     <a:lstStyle/>
                     <a:p>
-                      <a:pPr indent="0" marL="0">
+                      <a:pPr marL="0" indent="0">
                         <a:buNone/>
                       </a:pPr>
                       <a:r>
@@ -28310,7 +28223,7 @@
                     <a:bodyPr/>
                     <a:lstStyle/>
                     <a:p>
-                      <a:pPr indent="0" marL="0">
+                      <a:pPr marL="0" indent="0">
                         <a:buNone/>
                       </a:pPr>
                       <a:r>
@@ -28321,9 +28234,6 @@
                         </a:rPr>
                         <a:t>Specialists' lean: a modifier on the pooled number, not a model in the pool. </a:t>
                       </a:r>
-                      <a:pPr indent="0" marL="0">
-                        <a:buNone/>
-                      </a:pPr>
                       <a:r>
                         <a:rPr lang="en-US" sz="1000" dirty="0">
                           <a:solidFill>
@@ -28382,7 +28292,7 @@
                     <a:bodyPr/>
                     <a:lstStyle/>
                     <a:p>
-                      <a:pPr algn="ctr" indent="0" marL="0">
+                      <a:pPr marL="0" indent="0" algn="ctr">
                         <a:buNone/>
                       </a:pPr>
                       <a:r>
@@ -28443,7 +28353,7 @@
                     <a:bodyPr/>
                     <a:lstStyle/>
                     <a:p>
-                      <a:pPr algn="ctr" indent="0" marL="0">
+                      <a:pPr marL="0" indent="0" algn="ctr">
                         <a:buNone/>
                       </a:pPr>
                       <a:r>
@@ -28504,7 +28414,7 @@
                     <a:bodyPr/>
                     <a:lstStyle/>
                     <a:p>
-                      <a:pPr algn="ctr" indent="0" marL="0">
+                      <a:pPr marL="0" indent="0" algn="ctr">
                         <a:buNone/>
                       </a:pPr>
                       <a:r>
@@ -28565,7 +28475,7 @@
                     <a:bodyPr/>
                     <a:lstStyle/>
                     <a:p>
-                      <a:pPr algn="ctr" indent="0" marL="0">
+                      <a:pPr marL="0" indent="0" algn="ctr">
                         <a:buNone/>
                       </a:pPr>
                       <a:r>
@@ -28626,7 +28536,7 @@
                     <a:bodyPr/>
                     <a:lstStyle/>
                     <a:p>
-                      <a:pPr algn="ctr" indent="0" marL="0">
+                      <a:pPr marL="0" indent="0" algn="ctr">
                         <a:buNone/>
                       </a:pPr>
                       <a:r>
@@ -28682,6 +28592,11 @@
                     </a:solidFill>
                   </a:tcPr>
                 </a:tc>
+                <a:extLst>
+                  <a:ext uri="{0D108BD9-81ED-4DB2-BD59-A6C34878D82A}">
+                    <a16:rowId xmlns:a16="http://schemas.microsoft.com/office/drawing/2014/main" val="10007"/>
+                  </a:ext>
+                </a:extLst>
               </a:tr>
               <a:tr h="402336">
                 <a:tc>
@@ -28689,7 +28604,7 @@
                     <a:bodyPr/>
                     <a:lstStyle/>
                     <a:p>
-                      <a:pPr indent="0" marL="0">
+                      <a:pPr marL="0" indent="0">
                         <a:buNone/>
                       </a:pPr>
                       <a:r>
@@ -28747,7 +28662,7 @@
                     <a:bodyPr/>
                     <a:lstStyle/>
                     <a:p>
-                      <a:pPr indent="0" marL="0">
+                      <a:pPr marL="0" indent="0">
                         <a:buNone/>
                       </a:pPr>
                       <a:r>
@@ -28805,7 +28720,7 @@
                     <a:bodyPr/>
                     <a:lstStyle/>
                     <a:p>
-                      <a:pPr algn="ctr" indent="0" marL="0">
+                      <a:pPr marL="0" indent="0" algn="ctr">
                         <a:buNone/>
                       </a:pPr>
                       <a:r>
@@ -28863,7 +28778,7 @@
                     <a:bodyPr/>
                     <a:lstStyle/>
                     <a:p>
-                      <a:pPr algn="ctr" indent="0" marL="0">
+                      <a:pPr marL="0" indent="0" algn="ctr">
                         <a:buNone/>
                       </a:pPr>
                       <a:r>
@@ -28921,7 +28836,7 @@
                     <a:bodyPr/>
                     <a:lstStyle/>
                     <a:p>
-                      <a:pPr algn="ctr" indent="0" marL="0">
+                      <a:pPr marL="0" indent="0" algn="ctr">
                         <a:buNone/>
                       </a:pPr>
                       <a:r>
@@ -28979,7 +28894,7 @@
                     <a:bodyPr/>
                     <a:lstStyle/>
                     <a:p>
-                      <a:pPr algn="ctr" indent="0" marL="0">
+                      <a:pPr marL="0" indent="0" algn="ctr">
                         <a:buNone/>
                       </a:pPr>
                       <a:r>
@@ -29037,7 +28952,7 @@
                     <a:bodyPr/>
                     <a:lstStyle/>
                     <a:p>
-                      <a:pPr algn="ctr" indent="0" marL="0">
+                      <a:pPr marL="0" indent="0" algn="ctr">
                         <a:buNone/>
                       </a:pPr>
                       <a:endParaRPr lang="en-US" sz="1100" dirty="0"/>
@@ -29082,6 +28997,11 @@
                     </a:lnB>
                   </a:tcPr>
                 </a:tc>
+                <a:extLst>
+                  <a:ext uri="{0D108BD9-81ED-4DB2-BD59-A6C34878D82A}">
+                    <a16:rowId xmlns:a16="http://schemas.microsoft.com/office/drawing/2014/main" val="10008"/>
+                  </a:ext>
+                </a:extLst>
               </a:tr>
             </a:tbl>
           </a:graphicData>
@@ -29113,7 +29033,7 @@
             <a:prstDash val="solid"/>
           </a:ln>
           <a:effectLst>
-            <a:outerShdw sx="100000" sy="100000" kx="0" ky="0" algn="bl" rotWithShape="0" blurRad="50800" dist="12700" dir="5400000">
+            <a:outerShdw blurRad="50800" dist="12700" dir="5400000" algn="bl" rotWithShape="0">
               <a:srgbClr val="000000">
                 <a:alpha val="8000"/>
               </a:srgbClr>
@@ -29142,7 +29062,7 @@
           <a:bodyPr wrap="square" lIns="0" tIns="0" rIns="0" bIns="0" rtlCol="0" anchor="ctr"/>
           <a:lstStyle/>
           <a:p>
-            <a:pPr indent="0" marL="0">
+            <a:pPr marL="0" indent="0">
               <a:buNone/>
             </a:pPr>
             <a:r>
@@ -29178,7 +29098,7 @@
           <a:bodyPr wrap="square" lIns="0" tIns="0" rIns="0" bIns="0" rtlCol="0" anchor="ctr"/>
           <a:lstStyle/>
           <a:p>
-            <a:pPr indent="0" marL="0">
+            <a:pPr marL="0" indent="0">
               <a:buNone/>
             </a:pPr>
             <a:r>
@@ -29213,7 +29133,7 @@
           </a:prstGeom>
           <a:extLst>
             <a:ext uri="{C572A759-6A51-4108-AA02-DFA0A04FC94B}">
-              <ma14:wrappingTextBoxFlag xmlns:ma14="http://schemas.microsoft.com/office/mac/drawingml/2011/main" val="0"/>
+              <ma14:wrappingTextBoxFlag xmlns:ma14="http://schemas.microsoft.com/office/mac/drawingml/2011/main" xmlns="" val="0"/>
             </a:ext>
           </a:extLst>
         </p:spPr>
@@ -29231,7 +29151,7 @@
           <a:p>
             <a:pPr algn="r"/>
             <a:fld id="{F7021451-1387-4CA6-816F-3879F97B5CBC}" type="slidenum">
-              <a:rPr b="0" lang="en-US"/>
+              <a:rPr lang="en-US" b="0"/>
               <a:t>8</a:t>
             </a:fld>
             <a:endParaRPr lang="en-US"/>
@@ -29266,9 +29186,11 @@
       <p:sp>
         <p:nvSpPr>
           <p:cNvPr id="2" name="Text 0"/>
-          <p:cNvSpPr/>
+          <p:cNvSpPr>
+            <a:spLocks noGrp="1"/>
+          </p:cNvSpPr>
           <p:nvPr>
-            <p:ph idx="100" type="title" hasCustomPrompt="1"/>
+            <p:ph type="title" idx="100" hasCustomPrompt="1"/>
           </p:nvPr>
         </p:nvSpPr>
         <p:spPr>
@@ -29286,7 +29208,7 @@
           <a:bodyPr wrap="square" lIns="0" tIns="0" rIns="0" bIns="0" rtlCol="0" anchor="ctr"/>
           <a:lstStyle/>
           <a:p>
-            <a:pPr algn="l" indent="0" marL="0">
+            <a:pPr marL="0" indent="0" algn="l">
               <a:buNone/>
             </a:pPr>
             <a:r>
@@ -29349,7 +29271,7 @@
           <a:bodyPr wrap="square" lIns="0" tIns="0" rIns="0" bIns="0" rtlCol="0" anchor="ctr"/>
           <a:lstStyle/>
           <a:p>
-            <a:pPr algn="ctr" indent="0" marL="0">
+            <a:pPr marL="0" indent="0" algn="ctr">
               <a:buNone/>
             </a:pPr>
             <a:r>
@@ -29412,7 +29334,7 @@
           <a:bodyPr wrap="square" lIns="0" tIns="0" rIns="0" bIns="0" rtlCol="0" anchor="ctr"/>
           <a:lstStyle/>
           <a:p>
-            <a:pPr indent="0" marL="0">
+            <a:pPr marL="0" indent="0">
               <a:buNone/>
             </a:pPr>
             <a:r>
@@ -29569,7 +29491,7 @@
           <a:bodyPr wrap="square" lIns="0" tIns="0" rIns="0" bIns="0" rtlCol="0" anchor="ctr"/>
           <a:lstStyle/>
           <a:p>
-            <a:pPr indent="0" marL="0">
+            <a:pPr marL="0" indent="0">
               <a:buNone/>
             </a:pPr>
             <a:r>
@@ -29708,7 +29630,7 @@
           <a:bodyPr wrap="square" lIns="0" tIns="0" rIns="0" bIns="0" rtlCol="0" anchor="ctr"/>
           <a:lstStyle/>
           <a:p>
-            <a:pPr indent="0" marL="0">
+            <a:pPr marL="0" indent="0">
               <a:buNone/>
             </a:pPr>
             <a:r>
@@ -30082,4 +30004,299 @@
     </a:ext>
   </a:extLst>
 </a:theme>
+</file>
+
+<file path=ppt/theme/theme2.xml><?xml version="1.0" encoding="utf-8"?>
+<a:theme xmlns:a="http://schemas.openxmlformats.org/drawingml/2006/main" name="Office Theme">
+  <a:themeElements>
+    <a:clrScheme name="Office">
+      <a:dk1>
+        <a:sysClr val="windowText" lastClr="000000"/>
+      </a:dk1>
+      <a:lt1>
+        <a:sysClr val="window" lastClr="FFFFFF"/>
+      </a:lt1>
+      <a:dk2>
+        <a:srgbClr val="44546A"/>
+      </a:dk2>
+      <a:lt2>
+        <a:srgbClr val="E7E6E6"/>
+      </a:lt2>
+      <a:accent1>
+        <a:srgbClr val="4472C4"/>
+      </a:accent1>
+      <a:accent2>
+        <a:srgbClr val="ED7D31"/>
+      </a:accent2>
+      <a:accent3>
+        <a:srgbClr val="A5A5A5"/>
+      </a:accent3>
+      <a:accent4>
+        <a:srgbClr val="FFC000"/>
+      </a:accent4>
+      <a:accent5>
+        <a:srgbClr val="5B9BD5"/>
+      </a:accent5>
+      <a:accent6>
+        <a:srgbClr val="70AD47"/>
+      </a:accent6>
+      <a:hlink>
+        <a:srgbClr val="0563C1"/>
+      </a:hlink>
+      <a:folHlink>
+        <a:srgbClr val="954F72"/>
+      </a:folHlink>
+    </a:clrScheme>
+    <a:fontScheme name="Office">
+      <a:majorFont>
+        <a:latin typeface="Calibri Light" panose="020F0302020204030204"/>
+        <a:ea typeface=""/>
+        <a:cs typeface=""/>
+        <a:font script="Jpan" typeface="游ゴシック Light"/>
+        <a:font script="Hang" typeface="맑은 고딕"/>
+        <a:font script="Hans" typeface="等线 Light"/>
+        <a:font script="Hant" typeface="新細明體"/>
+        <a:font script="Arab" typeface="Times New Roman"/>
+        <a:font script="Hebr" typeface="Times New Roman"/>
+        <a:font script="Thai" typeface="Angsana New"/>
+        <a:font script="Ethi" typeface="Nyala"/>
+        <a:font script="Beng" typeface="Vrinda"/>
+        <a:font script="Gujr" typeface="Shruti"/>
+        <a:font script="Khmr" typeface="MoolBoran"/>
+        <a:font script="Knda" typeface="Tunga"/>
+        <a:font script="Guru" typeface="Raavi"/>
+        <a:font script="Cans" typeface="Euphemia"/>
+        <a:font script="Cher" typeface="Plantagenet Cherokee"/>
+        <a:font script="Yiii" typeface="Microsoft Yi Baiti"/>
+        <a:font script="Tibt" typeface="Microsoft Himalaya"/>
+        <a:font script="Thaa" typeface="MV Boli"/>
+        <a:font script="Deva" typeface="Mangal"/>
+        <a:font script="Telu" typeface="Gautami"/>
+        <a:font script="Taml" typeface="Latha"/>
+        <a:font script="Syrc" typeface="Estrangelo Edessa"/>
+        <a:font script="Orya" typeface="Kalinga"/>
+        <a:font script="Mlym" typeface="Kartika"/>
+        <a:font script="Laoo" typeface="DokChampa"/>
+        <a:font script="Sinh" typeface="Iskoola Pota"/>
+        <a:font script="Mong" typeface="Mongolian Baiti"/>
+        <a:font script="Viet" typeface="Times New Roman"/>
+        <a:font script="Uigh" typeface="Microsoft Uighur"/>
+        <a:font script="Geor" typeface="Sylfaen"/>
+        <a:font script="Armn" typeface="Arial"/>
+        <a:font script="Bugi" typeface="Leelawadee UI"/>
+        <a:font script="Bopo" typeface="Microsoft JhengHei"/>
+        <a:font script="Java" typeface="Javanese Text"/>
+        <a:font script="Lisu" typeface="Segoe UI"/>
+        <a:font script="Mymr" typeface="Myanmar Text"/>
+        <a:font script="Nkoo" typeface="Ebrima"/>
+        <a:font script="Olck" typeface="Nirmala UI"/>
+        <a:font script="Osma" typeface="Ebrima"/>
+        <a:font script="Phag" typeface="Phagspa"/>
+        <a:font script="Syrn" typeface="Estrangelo Edessa"/>
+        <a:font script="Syrj" typeface="Estrangelo Edessa"/>
+        <a:font script="Syre" typeface="Estrangelo Edessa"/>
+        <a:font script="Sora" typeface="Nirmala UI"/>
+        <a:font script="Tale" typeface="Microsoft Tai Le"/>
+        <a:font script="Talu" typeface="Microsoft New Tai Lue"/>
+        <a:font script="Tfng" typeface="Ebrima"/>
+      </a:majorFont>
+      <a:minorFont>
+        <a:latin typeface="Calibri" panose="020F0502020204030204"/>
+        <a:ea typeface=""/>
+        <a:cs typeface=""/>
+        <a:font script="Jpan" typeface="游ゴシック"/>
+        <a:font script="Hang" typeface="맑은 고딕"/>
+        <a:font script="Hans" typeface="等线"/>
+        <a:font script="Hant" typeface="新細明體"/>
+        <a:font script="Arab" typeface="Arial"/>
+        <a:font script="Hebr" typeface="Arial"/>
+        <a:font script="Thai" typeface="Cordia New"/>
+        <a:font script="Ethi" typeface="Nyala"/>
+        <a:font script="Beng" typeface="Vrinda"/>
+        <a:font script="Gujr" typeface="Shruti"/>
+        <a:font script="Khmr" typeface="DaunPenh"/>
+        <a:font script="Knda" typeface="Tunga"/>
+        <a:font script="Guru" typeface="Raavi"/>
+        <a:font script="Cans" typeface="Euphemia"/>
+        <a:font script="Cher" typeface="Plantagenet Cherokee"/>
+        <a:font script="Yiii" typeface="Microsoft Yi Baiti"/>
+        <a:font script="Tibt" typeface="Microsoft Himalaya"/>
+        <a:font script="Thaa" typeface="MV Boli"/>
+        <a:font script="Deva" typeface="Mangal"/>
+        <a:font script="Telu" typeface="Gautami"/>
+        <a:font script="Taml" typeface="Latha"/>
+        <a:font script="Syrc" typeface="Estrangelo Edessa"/>
+        <a:font script="Orya" typeface="Kalinga"/>
+        <a:font script="Mlym" typeface="Kartika"/>
+        <a:font script="Laoo" typeface="DokChampa"/>
+        <a:font script="Sinh" typeface="Iskoola Pota"/>
+        <a:font script="Mong" typeface="Mongolian Baiti"/>
+        <a:font script="Viet" typeface="Arial"/>
+        <a:font script="Uigh" typeface="Microsoft Uighur"/>
+        <a:font script="Geor" typeface="Sylfaen"/>
+        <a:font script="Armn" typeface="Arial"/>
+        <a:font script="Bugi" typeface="Leelawadee UI"/>
+        <a:font script="Bopo" typeface="Microsoft JhengHei"/>
+        <a:font script="Java" typeface="Javanese Text"/>
+        <a:font script="Lisu" typeface="Segoe UI"/>
+        <a:font script="Mymr" typeface="Myanmar Text"/>
+        <a:font script="Nkoo" typeface="Ebrima"/>
+        <a:font script="Olck" typeface="Nirmala UI"/>
+        <a:font script="Osma" typeface="Ebrima"/>
+        <a:font script="Phag" typeface="Phagspa"/>
+        <a:font script="Syrn" typeface="Estrangelo Edessa"/>
+        <a:font script="Syrj" typeface="Estrangelo Edessa"/>
+        <a:font script="Syre" typeface="Estrangelo Edessa"/>
+        <a:font script="Sora" typeface="Nirmala UI"/>
+        <a:font script="Tale" typeface="Microsoft Tai Le"/>
+        <a:font script="Talu" typeface="Microsoft New Tai Lue"/>
+        <a:font script="Tfng" typeface="Ebrima"/>
+      </a:minorFont>
+    </a:fontScheme>
+    <a:fmtScheme name="Office">
+      <a:fillStyleLst>
+        <a:solidFill>
+          <a:schemeClr val="phClr"/>
+        </a:solidFill>
+        <a:gradFill rotWithShape="1">
+          <a:gsLst>
+            <a:gs pos="0">
+              <a:schemeClr val="phClr">
+                <a:lumMod val="110000"/>
+                <a:satMod val="105000"/>
+                <a:tint val="67000"/>
+              </a:schemeClr>
+            </a:gs>
+            <a:gs pos="50000">
+              <a:schemeClr val="phClr">
+                <a:lumMod val="105000"/>
+                <a:satMod val="103000"/>
+                <a:tint val="73000"/>
+              </a:schemeClr>
+            </a:gs>
+            <a:gs pos="100000">
+              <a:schemeClr val="phClr">
+                <a:lumMod val="105000"/>
+                <a:satMod val="109000"/>
+                <a:tint val="81000"/>
+              </a:schemeClr>
+            </a:gs>
+          </a:gsLst>
+          <a:lin ang="5400000" scaled="0"/>
+        </a:gradFill>
+        <a:gradFill rotWithShape="1">
+          <a:gsLst>
+            <a:gs pos="0">
+              <a:schemeClr val="phClr">
+                <a:satMod val="103000"/>
+                <a:lumMod val="102000"/>
+                <a:tint val="94000"/>
+              </a:schemeClr>
+            </a:gs>
+            <a:gs pos="50000">
+              <a:schemeClr val="phClr">
+                <a:satMod val="110000"/>
+                <a:lumMod val="100000"/>
+                <a:shade val="100000"/>
+              </a:schemeClr>
+            </a:gs>
+            <a:gs pos="100000">
+              <a:schemeClr val="phClr">
+                <a:lumMod val="99000"/>
+                <a:satMod val="120000"/>
+                <a:shade val="78000"/>
+              </a:schemeClr>
+            </a:gs>
+          </a:gsLst>
+          <a:lin ang="5400000" scaled="0"/>
+        </a:gradFill>
+      </a:fillStyleLst>
+      <a:lnStyleLst>
+        <a:ln w="6350" cap="flat" cmpd="sng" algn="ctr">
+          <a:solidFill>
+            <a:schemeClr val="phClr"/>
+          </a:solidFill>
+          <a:prstDash val="solid"/>
+          <a:miter lim="800000"/>
+        </a:ln>
+        <a:ln w="12700" cap="flat" cmpd="sng" algn="ctr">
+          <a:solidFill>
+            <a:schemeClr val="phClr"/>
+          </a:solidFill>
+          <a:prstDash val="solid"/>
+          <a:miter lim="800000"/>
+        </a:ln>
+        <a:ln w="19050" cap="flat" cmpd="sng" algn="ctr">
+          <a:solidFill>
+            <a:schemeClr val="phClr"/>
+          </a:solidFill>
+          <a:prstDash val="solid"/>
+          <a:miter lim="800000"/>
+        </a:ln>
+      </a:lnStyleLst>
+      <a:effectStyleLst>
+        <a:effectStyle>
+          <a:effectLst/>
+        </a:effectStyle>
+        <a:effectStyle>
+          <a:effectLst/>
+        </a:effectStyle>
+        <a:effectStyle>
+          <a:effectLst>
+            <a:outerShdw blurRad="57150" dist="19050" dir="5400000" algn="ctr" rotWithShape="0">
+              <a:srgbClr val="000000">
+                <a:alpha val="63000"/>
+              </a:srgbClr>
+            </a:outerShdw>
+          </a:effectLst>
+        </a:effectStyle>
+      </a:effectStyleLst>
+      <a:bgFillStyleLst>
+        <a:solidFill>
+          <a:schemeClr val="phClr"/>
+        </a:solidFill>
+        <a:solidFill>
+          <a:schemeClr val="phClr">
+            <a:tint val="95000"/>
+            <a:satMod val="170000"/>
+          </a:schemeClr>
+        </a:solidFill>
+        <a:gradFill rotWithShape="1">
+          <a:gsLst>
+            <a:gs pos="0">
+              <a:schemeClr val="phClr">
+                <a:tint val="93000"/>
+                <a:satMod val="150000"/>
+                <a:shade val="98000"/>
+                <a:lumMod val="102000"/>
+              </a:schemeClr>
+            </a:gs>
+            <a:gs pos="50000">
+              <a:schemeClr val="phClr">
+                <a:tint val="98000"/>
+                <a:satMod val="130000"/>
+                <a:shade val="90000"/>
+                <a:lumMod val="103000"/>
+              </a:schemeClr>
+            </a:gs>
+            <a:gs pos="100000">
+              <a:schemeClr val="phClr">
+                <a:shade val="63000"/>
+                <a:satMod val="120000"/>
+              </a:schemeClr>
+            </a:gs>
+          </a:gsLst>
+          <a:lin ang="5400000" scaled="0"/>
+        </a:gradFill>
+      </a:bgFillStyleLst>
+    </a:fmtScheme>
+  </a:themeElements>
+  <a:objectDefaults/>
+  <a:extraClrSchemeLst/>
+  <a:extLst>
+    <a:ext uri="{05A4C25C-085E-4340-85A3-A5531E510DB2}">
+      <thm15:themeFamily xmlns:thm15="http://schemas.microsoft.com/office/thememl/2012/main" name="Office Theme" id="{62F939B6-93AF-4DB8-9C6B-D6C7DFDC589F}" vid="{4A3C46E8-61CC-4603-A589-7422A47A8E4A}"/>
+    </a:ext>
+  </a:extLst>
+</a:theme>
 </file>
--- a/docs/FedCast_Fullerton.pptx
+++ b/docs/FedCast_Fullerton.pptx
@@ -12,16 +12,16 @@
     <p:sldId id="257" r:id="rId3"/>
     <p:sldId id="258" r:id="rId4"/>
     <p:sldId id="259" r:id="rId5"/>
-    <p:sldId id="260" r:id="rId6"/>
-    <p:sldId id="261" r:id="rId7"/>
+    <p:sldId id="261" r:id="rId6"/>
+    <p:sldId id="260" r:id="rId7"/>
     <p:sldId id="262" r:id="rId8"/>
     <p:sldId id="263" r:id="rId9"/>
     <p:sldId id="264" r:id="rId10"/>
     <p:sldId id="265" r:id="rId11"/>
     <p:sldId id="266" r:id="rId12"/>
-    <p:sldId id="267" r:id="rId13"/>
-    <p:sldId id="268" r:id="rId14"/>
-    <p:sldId id="269" r:id="rId15"/>
+    <p:sldId id="268" r:id="rId13"/>
+    <p:sldId id="269" r:id="rId14"/>
+    <p:sldId id="267" r:id="rId15"/>
     <p:sldId id="270" r:id="rId16"/>
     <p:sldId id="271" r:id="rId17"/>
     <p:sldId id="272" r:id="rId18"/>
@@ -138,8 +138,8 @@
           <p14:sldIdLst>
             <p14:sldId id="258"/>
             <p14:sldId id="259"/>
+            <p14:sldId id="261"/>
             <p14:sldId id="260"/>
-            <p14:sldId id="261"/>
           </p14:sldIdLst>
         </p14:section>
         <p14:section name="How it works" id="{51E39E62-D42A-5461-E95E-6B45ACE96CC0}">
@@ -153,13 +153,13 @@
           <p14:sldIdLst>
             <p14:sldId id="265"/>
             <p14:sldId id="266"/>
-            <p14:sldId id="267"/>
             <p14:sldId id="268"/>
           </p14:sldIdLst>
         </p14:section>
         <p14:section name="Evidence" id="{5A3B821E-E9C2-E8B2-83B3-FA9E97777045}">
           <p14:sldIdLst>
             <p14:sldId id="269"/>
+            <p14:sldId id="267"/>
             <p14:sldId id="270"/>
             <p14:sldId id="271"/>
             <p14:sldId id="272"/>
@@ -1351,7 +1351,7 @@
           <a:p>
             <a:r>
               <a:rPr lang="en-US" dirty="0"/>
-              <a:t>Every specialist run passes through the same five stages: tools off and one slice only; immutable evidence plus pre-reads computed by code; a fixed answer shape enforced as a JSON schema; verification by code with one repair round; recorded, five identical runs. The band is analysts 4 to 8 on the 28 October snapshot: 25 runs, 263 claims, all 263 verified with no number from memory, five direction calls. Bottom left: four said hike, labour said no hike; the plain mean is +4.0 bp, which moves 4.0 points of probability toward a hike after the pool, +25 bp from 20.2 to 22.4%. Bottom right: one verified claim exactly as recorded.</a:t>
+              <a:t>Open analyst 1 first so the contrast with analyst 6 lands. Scroll the full prompt slowly past the schema and the pre-read; do not read it out.</a:t>
             </a:r>
           </a:p>
         </p:txBody>
@@ -1438,7 +1438,7 @@
           <a:p>
             <a:r>
               <a:rPr lang="en-US" dirty="0"/>
-              <a:t>Open analyst 1 first so the contrast with analyst 6 lands. Scroll the full prompt slowly past the schema and the pre-read; do not read it out.</a:t>
+              <a:t>Three charts, one per dimension, averaged over the four snapshots. Left: how much the answer moves between identical runs. The step that matters is analyst 2 to analyst 3: the answer shape and the verifier take the wobble from three and a half points to under one. Middle: numbers from memory, gone as soon as the evidence is shown. Right: share of claims whose quote code found verbatim; analyst 2 cannot be measured because it quotes nothing. The specialists keep what analyst 3 achieved. For analysts 3 to 8 the wobble is in their lean, which maps one basis point to one percentage point of probability, so the four bars are comparable.</a:t>
             </a:r>
           </a:p>
         </p:txBody>
@@ -1525,7 +1525,7 @@
           <a:p>
             <a:r>
               <a:rPr lang="en-US" dirty="0"/>
-              <a:t>Three charts, one per dimension, averaged over the four snapshots. Left: how much the answer moves between identical runs. The step that matters is analyst 2 to analyst 3: the answer shape and the verifier take the wobble from three and a half points to under one. Middle: numbers from memory, gone as soon as the evidence is shown. Right: share of claims whose quote code found verbatim; analyst 2 cannot be measured because it quotes nothing. The specialists keep what analyst 3 achieved. For analysts 3 to 8 the wobble is in their lean, which maps one basis point to one percentage point of probability, so the four bars are comparable.</a:t>
+              <a:t>One line of method, then the outcome. Each specialist runs five times on the same frozen snapshot; the five answers must sit within the variance pass mark, every claim must carry a quote code finds, and no number may come from memory. Only then does the lean count. The band is the 28 October run; bottom left is what the five said and what it did to the number; bottom right is one claim as recorded, with the quote code found.</a:t>
             </a:r>
           </a:p>
         </p:txBody>
@@ -1556,7 +1556,7 @@
     </p:spTree>
     <p:extLst>
       <p:ext uri="{BB962C8B-B14F-4D97-AF65-F5344CB8AC3E}">
-        <p14:creationId xmlns:p14="http://schemas.microsoft.com/office/powerpoint/2010/main" val="1024086991"/>
+        <p14:creationId xmlns:p14="http://schemas.microsoft.com/office/powerpoint/2010/main" val="1868112504"/>
       </p:ext>
     </p:extLst>
   </p:cSld>
@@ -2569,7 +2569,7 @@
           <a:p>
             <a:r>
               <a:rPr lang="en-US" dirty="0"/>
-              <a:t>Three reasons, the first is the one to land. Eight decisions a year cannot tell skill from luck, so we judge the process with a scorecard fixed before any code. Second, auditable means concrete: an analyst that says inflation is elevated must quote the line it read and code must find it. Third, because everything is quotable and the analysts can read only the evidence, a wrong call is a traceable wrong call, and because the harness is repeatable it goes wrong the same way every time, so a fix can be tested and stays fixed. Details later in the deck: the ladder, the scorecard, the drift table.</a:t>
+              <a:t>Four kinds of signal exist already; each is good at one thing. Market prices are the best single predictor at thirty days and are the anchor of the pool. Surveys carry judgement; FedCast takes the data the committee reads instead, as history and a fitted model. The rules are the Fed's own benchmarks. The LLM papers show a model can read the Fed, on sixteen meetings. FedCast's claim is not a better guess but the combination: one of each kind, pooled by code at fixed weights, every number traceable to frozen evidence.</a:t>
             </a:r>
           </a:p>
         </p:txBody>
@@ -2656,7 +2656,7 @@
           <a:p>
             <a:r>
               <a:rPr lang="en-US" dirty="0"/>
-              <a:t>Four kinds of signal exist already; each is good at one thing. Market prices are the best single predictor at thirty days and are the anchor of the pool. Surveys carry judgement; FedCast takes the data the committee reads instead, as history and a fitted model. The rules are the Fed's own benchmarks. The LLM papers show a model can read the Fed, on sixteen meetings. FedCast's claim is not a better guess but the combination: one of each kind, pooled by code at fixed weights, every number traceable to frozen evidence.</a:t>
+              <a:t>Three reasons, the first is the one to land. Eight decisions a year cannot tell skill from luck, so we judge the process with a scorecard fixed before any code. Second, auditable means concrete: an analyst that says inflation is elevated must quote the line it read and code must find it. Third, because everything is quotable and the analysts can read only the evidence, a wrong call is a traceable wrong call, and because the harness is repeatable it goes wrong the same way every time, so a fix can be tested and stays fixed. Details later in the deck: the ladder, the scorecard, the drift table.</a:t>
             </a:r>
           </a:p>
         </p:txBody>
@@ -4950,7 +4950,7 @@
                   <a:schemeClr val="bg1"/>
                 </a:solidFill>
               </a:rPr>
-              <a:t>It can invent its own support</a:t>
+              <a:t>It can invent its own “evidence”(hallucinate)</a:t>
             </a:r>
             <a:endParaRPr lang="en-US" sz="1400" dirty="0"/>
           </a:p>
@@ -5454,6 +5454,13 @@
             <a:prstDash val="solid"/>
           </a:ln>
         </p:spPr>
+        <p:txBody>
+          <a:bodyPr/>
+          <a:lstStyle/>
+          <a:p>
+            <a:endParaRPr lang="en-US"/>
+          </a:p>
+        </p:txBody>
       </p:sp>
       <p:sp>
         <p:nvSpPr>
@@ -5517,6 +5524,13 @@
             <a:prstDash val="dash"/>
           </a:ln>
         </p:spPr>
+        <p:txBody>
+          <a:bodyPr/>
+          <a:lstStyle/>
+          <a:p>
+            <a:endParaRPr lang="en-US"/>
+          </a:p>
+        </p:txBody>
       </p:sp>
       <p:sp>
         <p:nvSpPr>
@@ -5544,6 +5558,13 @@
             <a:prstDash val="solid"/>
           </a:ln>
         </p:spPr>
+        <p:txBody>
+          <a:bodyPr/>
+          <a:lstStyle/>
+          <a:p>
+            <a:endParaRPr lang="en-US"/>
+          </a:p>
+        </p:txBody>
       </p:sp>
       <p:sp>
         <p:nvSpPr>
@@ -5726,6 +5747,13 @@
             <a:prstDash val="dash"/>
           </a:ln>
         </p:spPr>
+        <p:txBody>
+          <a:bodyPr/>
+          <a:lstStyle/>
+          <a:p>
+            <a:endParaRPr lang="en-US"/>
+          </a:p>
+        </p:txBody>
       </p:sp>
       <p:sp>
         <p:nvSpPr>
@@ -5753,6 +5781,13 @@
             <a:prstDash val="solid"/>
           </a:ln>
         </p:spPr>
+        <p:txBody>
+          <a:bodyPr/>
+          <a:lstStyle/>
+          <a:p>
+            <a:endParaRPr lang="en-US"/>
+          </a:p>
+        </p:txBody>
       </p:sp>
       <p:sp>
         <p:nvSpPr>
@@ -5935,6 +5970,13 @@
             <a:prstDash val="dash"/>
           </a:ln>
         </p:spPr>
+        <p:txBody>
+          <a:bodyPr/>
+          <a:lstStyle/>
+          <a:p>
+            <a:endParaRPr lang="en-US"/>
+          </a:p>
+        </p:txBody>
       </p:sp>
       <p:sp>
         <p:nvSpPr>
@@ -5962,6 +6004,13 @@
             <a:prstDash val="solid"/>
           </a:ln>
         </p:spPr>
+        <p:txBody>
+          <a:bodyPr/>
+          <a:lstStyle/>
+          <a:p>
+            <a:endParaRPr lang="en-US"/>
+          </a:p>
+        </p:txBody>
       </p:sp>
       <p:sp>
         <p:nvSpPr>
@@ -6141,6 +6190,13 @@
             <a:tailEnd type="triangle"/>
           </a:ln>
         </p:spPr>
+        <p:txBody>
+          <a:bodyPr/>
+          <a:lstStyle/>
+          <a:p>
+            <a:endParaRPr lang="en-US"/>
+          </a:p>
+        </p:txBody>
       </p:sp>
       <p:sp>
         <p:nvSpPr>
@@ -6204,6 +6260,13 @@
             <a:prstDash val="solid"/>
           </a:ln>
         </p:spPr>
+        <p:txBody>
+          <a:bodyPr/>
+          <a:lstStyle/>
+          <a:p>
+            <a:endParaRPr lang="en-US"/>
+          </a:p>
+        </p:txBody>
       </p:sp>
       <p:sp>
         <p:nvSpPr>
@@ -6267,6 +6330,13 @@
             <a:prstDash val="solid"/>
           </a:ln>
         </p:spPr>
+        <p:txBody>
+          <a:bodyPr/>
+          <a:lstStyle/>
+          <a:p>
+            <a:endParaRPr lang="en-US"/>
+          </a:p>
+        </p:txBody>
       </p:sp>
       <p:sp>
         <p:nvSpPr>
@@ -6350,6 +6420,13 @@
             <a:prstDash val="solid"/>
           </a:ln>
         </p:spPr>
+        <p:txBody>
+          <a:bodyPr/>
+          <a:lstStyle/>
+          <a:p>
+            <a:endParaRPr lang="en-US"/>
+          </a:p>
+        </p:txBody>
       </p:sp>
       <p:sp>
         <p:nvSpPr>
@@ -6377,6 +6454,13 @@
             <a:prstDash val="solid"/>
           </a:ln>
         </p:spPr>
+        <p:txBody>
+          <a:bodyPr/>
+          <a:lstStyle/>
+          <a:p>
+            <a:endParaRPr lang="en-US"/>
+          </a:p>
+        </p:txBody>
       </p:sp>
       <p:sp>
         <p:nvSpPr>
@@ -6541,6 +6625,13 @@
             <a:prstDash val="solid"/>
           </a:ln>
         </p:spPr>
+        <p:txBody>
+          <a:bodyPr/>
+          <a:lstStyle/>
+          <a:p>
+            <a:endParaRPr lang="en-US"/>
+          </a:p>
+        </p:txBody>
       </p:sp>
       <p:sp>
         <p:nvSpPr>
@@ -6568,6 +6659,13 @@
             <a:prstDash val="solid"/>
           </a:ln>
         </p:spPr>
+        <p:txBody>
+          <a:bodyPr/>
+          <a:lstStyle/>
+          <a:p>
+            <a:endParaRPr lang="en-US"/>
+          </a:p>
+        </p:txBody>
       </p:sp>
       <p:sp>
         <p:nvSpPr>
@@ -6732,6 +6830,13 @@
             <a:prstDash val="solid"/>
           </a:ln>
         </p:spPr>
+        <p:txBody>
+          <a:bodyPr/>
+          <a:lstStyle/>
+          <a:p>
+            <a:endParaRPr lang="en-US"/>
+          </a:p>
+        </p:txBody>
       </p:sp>
       <p:sp>
         <p:nvSpPr>
@@ -6759,6 +6864,13 @@
             <a:prstDash val="solid"/>
           </a:ln>
         </p:spPr>
+        <p:txBody>
+          <a:bodyPr/>
+          <a:lstStyle/>
+          <a:p>
+            <a:endParaRPr lang="en-US"/>
+          </a:p>
+        </p:txBody>
       </p:sp>
       <p:sp>
         <p:nvSpPr>
@@ -6923,6 +7035,13 @@
             <a:prstDash val="solid"/>
           </a:ln>
         </p:spPr>
+        <p:txBody>
+          <a:bodyPr/>
+          <a:lstStyle/>
+          <a:p>
+            <a:endParaRPr lang="en-US"/>
+          </a:p>
+        </p:txBody>
       </p:sp>
       <p:sp>
         <p:nvSpPr>
@@ -6950,6 +7069,13 @@
             <a:prstDash val="solid"/>
           </a:ln>
         </p:spPr>
+        <p:txBody>
+          <a:bodyPr/>
+          <a:lstStyle/>
+          <a:p>
+            <a:endParaRPr lang="en-US"/>
+          </a:p>
+        </p:txBody>
       </p:sp>
       <p:sp>
         <p:nvSpPr>
@@ -7114,6 +7240,13 @@
             <a:prstDash val="solid"/>
           </a:ln>
         </p:spPr>
+        <p:txBody>
+          <a:bodyPr/>
+          <a:lstStyle/>
+          <a:p>
+            <a:endParaRPr lang="en-US"/>
+          </a:p>
+        </p:txBody>
       </p:sp>
       <p:sp>
         <p:nvSpPr>
@@ -7141,6 +7274,13 @@
             <a:prstDash val="solid"/>
           </a:ln>
         </p:spPr>
+        <p:txBody>
+          <a:bodyPr/>
+          <a:lstStyle/>
+          <a:p>
+            <a:endParaRPr lang="en-US"/>
+          </a:p>
+        </p:txBody>
       </p:sp>
       <p:sp>
         <p:nvSpPr>
@@ -7300,12 +7440,12 @@
               <a:buNone/>
             </a:pPr>
             <a:r>
-              <a:rPr lang="en-US" sz="1150" dirty="0">
+              <a:rPr lang="en-US" sz="1150">
                 <a:solidFill>
                   <a:srgbClr val="CADCFC"/>
                 </a:solidFill>
               </a:rPr>
-              <a:t>Output per specialist: all claims with verbatim quotes, and a decision on interest-rate direction of at most ±10 bp. The mean of the five model outputs becomes a modifier on the pooled number.</a:t>
+              <a:t>Each specialist is asked one question about its own slice (above), never for a probability. It returns claims, each with a verbatim quote and item id, and a lean of at most 10 bp either way: direction and strength, positive toward a hike. Code averages the five leans; each point of lean moves one point of probability, capped at 10.</a:t>
             </a:r>
             <a:endParaRPr lang="en-US" sz="1150" dirty="0"/>
           </a:p>
@@ -7344,6 +7484,13 @@
             </a:outerShdw>
           </a:effectLst>
         </p:spPr>
+        <p:txBody>
+          <a:bodyPr/>
+          <a:lstStyle/>
+          <a:p>
+            <a:endParaRPr lang="en-US"/>
+          </a:p>
+        </p:txBody>
       </p:sp>
       <p:sp>
         <p:nvSpPr>
@@ -7576,7 +7723,7 @@
 
 <file path=ppt/slides/slide12.xml><?xml version="1.0" encoding="utf-8"?>
 <p:sld xmlns:a="http://schemas.openxmlformats.org/drawingml/2006/main" xmlns:r="http://schemas.openxmlformats.org/officeDocument/2006/relationships" xmlns:p="http://schemas.openxmlformats.org/presentationml/2006/main">
-  <p:cSld name="Slide 12">
+  <p:cSld name="Slide 13">
     <p:spTree>
       <p:nvGrpSpPr>
         <p:cNvPr id="1" name=""/>
@@ -7603,7 +7750,7 @@
         </p:nvSpPr>
         <p:spPr>
           <a:xfrm>
-            <a:off x="548640" y="411480"/>
+            <a:off x="548640" y="548640"/>
             <a:ext cx="11091672" cy="822960"/>
           </a:xfrm>
           <a:prstGeom prst="rect">
@@ -7620,31 +7767,94 @@
               <a:buNone/>
             </a:pPr>
             <a:r>
-              <a:rPr lang="en-US" sz="3200" b="1" dirty="0">
-                <a:solidFill>
-                  <a:schemeClr val="tx2"/>
-                </a:solidFill>
-              </a:rPr>
-              <a:t>How the five specialists are run, end to end</a:t>
-            </a:r>
-            <a:endParaRPr lang="en-US" sz="3200" dirty="0"/>
-          </a:p>
-        </p:txBody>
-      </p:sp>
-      <p:sp>
-        <p:nvSpPr>
-          <p:cNvPr id="4" name="Shape 1"/>
+              <a:rPr lang="en-US" sz="3000" b="1" dirty="0">
+                <a:solidFill>
+                  <a:schemeClr val="bg1"/>
+                </a:solidFill>
+              </a:rPr>
+              <a:t>Live demo 3: what each analyst is asked and given</a:t>
+            </a:r>
+            <a:endParaRPr lang="en-US" sz="3000" dirty="0"/>
+          </a:p>
+        </p:txBody>
+      </p:sp>
+      <p:sp>
+        <p:nvSpPr>
+          <p:cNvPr id="3" name="Shape 1"/>
           <p:cNvSpPr/>
           <p:nvPr/>
         </p:nvSpPr>
         <p:spPr>
           <a:xfrm>
-            <a:off x="548640" y="1298448"/>
-            <a:ext cx="2111532" cy="1463040"/>
+            <a:off x="10177272" y="685800"/>
+            <a:ext cx="1463040" cy="548640"/>
           </a:xfrm>
           <a:prstGeom prst="roundRect">
             <a:avLst>
-              <a:gd name="adj" fmla="val 6250"/>
+              <a:gd name="adj" fmla="val 16667"/>
+            </a:avLst>
+          </a:prstGeom>
+          <a:solidFill>
+            <a:srgbClr val="E9B44C"/>
+          </a:solidFill>
+          <a:ln w="12700">
+            <a:solidFill>
+              <a:srgbClr val="E9B44C"/>
+            </a:solidFill>
+            <a:prstDash val="solid"/>
+          </a:ln>
+        </p:spPr>
+      </p:sp>
+      <p:sp>
+        <p:nvSpPr>
+          <p:cNvPr id="4" name="Text 2"/>
+          <p:cNvSpPr txBox="1"/>
+          <p:nvPr/>
+        </p:nvSpPr>
+        <p:spPr>
+          <a:xfrm>
+            <a:off x="10177272" y="685800"/>
+            <a:ext cx="1463040" cy="548640"/>
+          </a:xfrm>
+          <a:prstGeom prst="rect">
+            <a:avLst/>
+          </a:prstGeom>
+          <a:noFill/>
+          <a:ln/>
+        </p:spPr>
+        <p:txBody>
+          <a:bodyPr wrap="square" lIns="0" tIns="0" rIns="0" bIns="0" rtlCol="0" anchor="ctr"/>
+          <a:lstStyle/>
+          <a:p>
+            <a:pPr marL="0" indent="0" algn="ctr">
+              <a:buNone/>
+            </a:pPr>
+            <a:r>
+              <a:rPr lang="en-US" sz="1600" b="1" dirty="0">
+                <a:solidFill>
+                  <a:srgbClr val="1B1F2A"/>
+                </a:solidFill>
+              </a:rPr>
+              <a:t>2 min</a:t>
+            </a:r>
+            <a:endParaRPr lang="en-US" sz="1600" dirty="0"/>
+          </a:p>
+        </p:txBody>
+      </p:sp>
+      <p:sp>
+        <p:nvSpPr>
+          <p:cNvPr id="5" name="Shape 3"/>
+          <p:cNvSpPr/>
+          <p:nvPr/>
+        </p:nvSpPr>
+        <p:spPr>
+          <a:xfrm>
+            <a:off x="548640" y="1737360"/>
+            <a:ext cx="3520440" cy="3200400"/>
+          </a:xfrm>
+          <a:prstGeom prst="roundRect">
+            <a:avLst>
+              <a:gd name="adj" fmla="val 3429"/>
             </a:avLst>
           </a:prstGeom>
           <a:solidFill>
@@ -7660,50 +7870,50 @@
       </p:sp>
       <p:sp>
         <p:nvSpPr>
-          <p:cNvPr id="5" name="Text 2"/>
+          <p:cNvPr id="6" name="Text 4"/>
           <p:cNvSpPr txBox="1"/>
           <p:nvPr/>
         </p:nvSpPr>
         <p:spPr>
           <a:xfrm>
-            <a:off x="685800" y="1389888"/>
-            <a:ext cx="1837212" cy="182880"/>
-          </a:xfrm>
-          <a:prstGeom prst="rect">
-            <a:avLst/>
-          </a:prstGeom>
-          <a:noFill/>
-          <a:ln/>
-        </p:spPr>
-        <p:txBody>
-          <a:bodyPr wrap="square" lIns="0" tIns="0" rIns="0" bIns="0" rtlCol="0" anchor="t"/>
+            <a:off x="822960" y="1920240"/>
+            <a:ext cx="2926080" cy="457200"/>
+          </a:xfrm>
+          <a:prstGeom prst="rect">
+            <a:avLst/>
+          </a:prstGeom>
+          <a:noFill/>
+          <a:ln/>
+        </p:spPr>
+        <p:txBody>
+          <a:bodyPr wrap="square" lIns="0" tIns="0" rIns="0" bIns="0" rtlCol="0" anchor="ctr"/>
           <a:lstStyle/>
           <a:p>
             <a:pPr marL="0" indent="0">
               <a:buNone/>
             </a:pPr>
             <a:r>
-              <a:rPr lang="en-US" sz="900" b="1" kern="0" spc="100" dirty="0">
+              <a:rPr lang="en-US" sz="1800" b="1" dirty="0">
                 <a:solidFill>
                   <a:srgbClr val="E9B44C"/>
                 </a:solidFill>
               </a:rPr>
-              <a:t>STAGE 1</a:t>
-            </a:r>
-            <a:endParaRPr lang="en-US" sz="900" dirty="0"/>
-          </a:p>
-        </p:txBody>
-      </p:sp>
-      <p:sp>
-        <p:nvSpPr>
-          <p:cNvPr id="6" name="Text 3"/>
+              <a:t>Open</a:t>
+            </a:r>
+            <a:endParaRPr lang="en-US" sz="1800" dirty="0"/>
+          </a:p>
+        </p:txBody>
+      </p:sp>
+      <p:sp>
+        <p:nvSpPr>
+          <p:cNvPr id="7" name="Text 5"/>
           <p:cNvSpPr txBox="1"/>
           <p:nvPr/>
         </p:nvSpPr>
         <p:spPr>
           <a:xfrm>
-            <a:off x="685800" y="1572768"/>
-            <a:ext cx="1837212" cy="274320"/>
+            <a:off x="822960" y="2468880"/>
+            <a:ext cx="2971800" cy="2377440"/>
           </a:xfrm>
           <a:prstGeom prst="rect">
             <a:avLst/>
@@ -7715,71 +7925,75 @@
           <a:bodyPr wrap="square" lIns="0" tIns="0" rIns="0" bIns="0" rtlCol="0" anchor="t"/>
           <a:lstStyle/>
           <a:p>
-            <a:pPr marL="0" indent="0">
-              <a:buNone/>
-            </a:pPr>
-            <a:r>
-              <a:rPr lang="en-US" sz="1250" b="1" dirty="0">
-                <a:solidFill>
-                  <a:schemeClr val="bg1"/>
-                </a:solidFill>
-              </a:rPr>
-              <a:t>Tools off, slice only</a:t>
-            </a:r>
-            <a:endParaRPr lang="en-US" sz="1250" dirty="0"/>
-          </a:p>
-        </p:txBody>
-      </p:sp>
-      <p:sp>
-        <p:nvSpPr>
-          <p:cNvPr id="7" name="Text 4"/>
-          <p:cNvSpPr txBox="1"/>
-          <p:nvPr/>
-        </p:nvSpPr>
-        <p:spPr>
-          <a:xfrm>
-            <a:off x="685800" y="1847088"/>
-            <a:ext cx="1837212" cy="868680"/>
-          </a:xfrm>
-          <a:prstGeom prst="rect">
-            <a:avLst/>
-          </a:prstGeom>
-          <a:noFill/>
-          <a:ln/>
-        </p:spPr>
-        <p:txBody>
-          <a:bodyPr wrap="square" lIns="0" tIns="0" rIns="0" bIns="0" rtlCol="0" anchor="t"/>
-          <a:lstStyle/>
-          <a:p>
-            <a:pPr marL="0" indent="0">
-              <a:buNone/>
-            </a:pPr>
-            <a:r>
-              <a:rPr lang="en-US" sz="950" dirty="0">
-                <a:solidFill>
-                  <a:srgbClr val="CADCFC"/>
-                </a:solidFill>
-              </a:rPr>
-              <a:t>No browsing, no files, no session: enforced by the runtime. Each specialist sees only its slice of the frozen snapshot. Memory is not off; it is detected: every number is checked against the evidence.</a:t>
-            </a:r>
-            <a:endParaRPr lang="en-US" sz="950" dirty="0"/>
-          </a:p>
-        </p:txBody>
-      </p:sp>
-      <p:sp>
-        <p:nvSpPr>
-          <p:cNvPr id="8" name="Shape 5"/>
+            <a:pPr marL="342900" indent="-342900">
+              <a:spcAft>
+                <a:spcPts val="800"/>
+              </a:spcAft>
+              <a:buSzPct val="100000"/>
+              <a:buChar char="•"/>
+            </a:pPr>
+            <a:r>
+              <a:rPr lang="en-US" sz="1300" dirty="0">
+                <a:solidFill>
+                  <a:srgbClr val="FFFFFF"/>
+                </a:solidFill>
+              </a:rPr>
+              <a:t>Analyst prompts view</a:t>
+            </a:r>
+            <a:endParaRPr lang="en-US" sz="1300" dirty="0"/>
+          </a:p>
+          <a:p>
+            <a:pPr marL="342900" indent="-342900">
+              <a:spcAft>
+                <a:spcPts val="800"/>
+              </a:spcAft>
+              <a:buSzPct val="100000"/>
+              <a:buChar char="•"/>
+            </a:pPr>
+            <a:r>
+              <a:rPr lang="en-US" sz="1300" dirty="0">
+                <a:solidFill>
+                  <a:srgbClr val="FFFFFF"/>
+                </a:solidFill>
+              </a:rPr>
+              <a:t>Analyst 1: open the full prompt</a:t>
+            </a:r>
+            <a:endParaRPr lang="en-US" sz="1300" dirty="0"/>
+          </a:p>
+          <a:p>
+            <a:pPr marL="342900" indent="-342900">
+              <a:spcAft>
+                <a:spcPts val="800"/>
+              </a:spcAft>
+              <a:buSzPct val="100000"/>
+              <a:buChar char="•"/>
+            </a:pPr>
+            <a:r>
+              <a:rPr lang="en-US" sz="1300" dirty="0">
+                <a:solidFill>
+                  <a:srgbClr val="FFFFFF"/>
+                </a:solidFill>
+              </a:rPr>
+              <a:t>Analyst 6: open the full prompt</a:t>
+            </a:r>
+            <a:endParaRPr lang="en-US" sz="1300" dirty="0"/>
+          </a:p>
+        </p:txBody>
+      </p:sp>
+      <p:sp>
+        <p:nvSpPr>
+          <p:cNvPr id="8" name="Shape 6"/>
           <p:cNvSpPr/>
           <p:nvPr/>
         </p:nvSpPr>
         <p:spPr>
           <a:xfrm>
-            <a:off x="2793675" y="1298448"/>
-            <a:ext cx="2111532" cy="1463040"/>
+            <a:off x="4297680" y="1737360"/>
+            <a:ext cx="3520440" cy="3200400"/>
           </a:xfrm>
           <a:prstGeom prst="roundRect">
             <a:avLst>
-              <a:gd name="adj" fmla="val 6250"/>
+              <a:gd name="adj" fmla="val 3429"/>
             </a:avLst>
           </a:prstGeom>
           <a:solidFill>
@@ -7795,50 +8009,50 @@
       </p:sp>
       <p:sp>
         <p:nvSpPr>
-          <p:cNvPr id="9" name="Text 6"/>
+          <p:cNvPr id="9" name="Text 7"/>
           <p:cNvSpPr txBox="1"/>
           <p:nvPr/>
         </p:nvSpPr>
         <p:spPr>
           <a:xfrm>
-            <a:off x="2930835" y="1389888"/>
-            <a:ext cx="1837212" cy="182880"/>
-          </a:xfrm>
-          <a:prstGeom prst="rect">
-            <a:avLst/>
-          </a:prstGeom>
-          <a:noFill/>
-          <a:ln/>
-        </p:spPr>
-        <p:txBody>
-          <a:bodyPr wrap="square" lIns="0" tIns="0" rIns="0" bIns="0" rtlCol="0" anchor="t"/>
+            <a:off x="4572000" y="1920240"/>
+            <a:ext cx="2926080" cy="457200"/>
+          </a:xfrm>
+          <a:prstGeom prst="rect">
+            <a:avLst/>
+          </a:prstGeom>
+          <a:noFill/>
+          <a:ln/>
+        </p:spPr>
+        <p:txBody>
+          <a:bodyPr wrap="square" lIns="0" tIns="0" rIns="0" bIns="0" rtlCol="0" anchor="ctr"/>
           <a:lstStyle/>
           <a:p>
             <a:pPr marL="0" indent="0">
               <a:buNone/>
             </a:pPr>
             <a:r>
-              <a:rPr lang="en-US" sz="900" b="1" kern="0" spc="100" dirty="0">
+              <a:rPr lang="en-US" sz="1800" b="1" dirty="0">
                 <a:solidFill>
                   <a:srgbClr val="E9B44C"/>
                 </a:solidFill>
               </a:rPr>
-              <a:t>STAGE 2</a:t>
-            </a:r>
-            <a:endParaRPr lang="en-US" sz="900" dirty="0"/>
-          </a:p>
-        </p:txBody>
-      </p:sp>
-      <p:sp>
-        <p:nvSpPr>
-          <p:cNvPr id="10" name="Text 7"/>
+              <a:t>Point at</a:t>
+            </a:r>
+            <a:endParaRPr lang="en-US" sz="1800" dirty="0"/>
+          </a:p>
+        </p:txBody>
+      </p:sp>
+      <p:sp>
+        <p:nvSpPr>
+          <p:cNvPr id="10" name="Text 8"/>
           <p:cNvSpPr txBox="1"/>
           <p:nvPr/>
         </p:nvSpPr>
         <p:spPr>
           <a:xfrm>
-            <a:off x="2930835" y="1572768"/>
-            <a:ext cx="1837212" cy="274320"/>
+            <a:off x="4572000" y="2468880"/>
+            <a:ext cx="2971800" cy="2377440"/>
           </a:xfrm>
           <a:prstGeom prst="rect">
             <a:avLst/>
@@ -7850,71 +8064,75 @@
           <a:bodyPr wrap="square" lIns="0" tIns="0" rIns="0" bIns="0" rtlCol="0" anchor="t"/>
           <a:lstStyle/>
           <a:p>
-            <a:pPr marL="0" indent="0">
-              <a:buNone/>
-            </a:pPr>
-            <a:r>
-              <a:rPr lang="en-US" sz="1250" b="1" dirty="0">
-                <a:solidFill>
-                  <a:schemeClr val="bg1"/>
-                </a:solidFill>
-              </a:rPr>
-              <a:t>Immutable evidence</a:t>
-            </a:r>
-            <a:endParaRPr lang="en-US" sz="1250" dirty="0"/>
-          </a:p>
-        </p:txBody>
-      </p:sp>
-      <p:sp>
-        <p:nvSpPr>
-          <p:cNvPr id="11" name="Text 8"/>
-          <p:cNvSpPr txBox="1"/>
-          <p:nvPr/>
-        </p:nvSpPr>
-        <p:spPr>
-          <a:xfrm>
-            <a:off x="2930835" y="1847088"/>
-            <a:ext cx="1837212" cy="868680"/>
-          </a:xfrm>
-          <a:prstGeom prst="rect">
-            <a:avLst/>
-          </a:prstGeom>
-          <a:noFill/>
-          <a:ln/>
-        </p:spPr>
-        <p:txBody>
-          <a:bodyPr wrap="square" lIns="0" tIns="0" rIns="0" bIns="0" rtlCol="0" anchor="t"/>
-          <a:lstStyle/>
-          <a:p>
-            <a:pPr marL="0" indent="0">
-              <a:buNone/>
-            </a:pPr>
-            <a:r>
-              <a:rPr lang="en-US" sz="950" dirty="0">
-                <a:solidFill>
-                  <a:srgbClr val="CADCFC"/>
-                </a:solidFill>
-              </a:rPr>
-              <a:t>One frozen, hashed snapshot; each analyst gets only its slice. Pre-reads are numbers computed by code and handed over as text: the model never does sums.</a:t>
-            </a:r>
-            <a:endParaRPr lang="en-US" sz="950" dirty="0"/>
-          </a:p>
-        </p:txBody>
-      </p:sp>
-      <p:sp>
-        <p:nvSpPr>
-          <p:cNvPr id="12" name="Shape 9"/>
+            <a:pPr marL="342900" indent="-342900">
+              <a:spcAft>
+                <a:spcPts val="800"/>
+              </a:spcAft>
+              <a:buSzPct val="100000"/>
+              <a:buChar char="•"/>
+            </a:pPr>
+            <a:r>
+              <a:rPr lang="en-US" sz="1300" dirty="0">
+                <a:solidFill>
+                  <a:srgbClr val="FFFFFF"/>
+                </a:solidFill>
+              </a:rPr>
+              <a:t>Analyst 1: 195 characters, no evidence</a:t>
+            </a:r>
+            <a:endParaRPr lang="en-US" sz="1300" dirty="0"/>
+          </a:p>
+          <a:p>
+            <a:pPr marL="342900" indent="-342900">
+              <a:spcAft>
+                <a:spcPts val="800"/>
+              </a:spcAft>
+              <a:buSzPct val="100000"/>
+              <a:buChar char="•"/>
+            </a:pPr>
+            <a:r>
+              <a:rPr lang="en-US" sz="1300" dirty="0">
+                <a:solidFill>
+                  <a:srgbClr val="FFFFFF"/>
+                </a:solidFill>
+              </a:rPr>
+              <a:t>Analyst 6: the system prompt, the enforced answer schema, the inflation pre-read, the item ids</a:t>
+            </a:r>
+            <a:endParaRPr lang="en-US" sz="1300" dirty="0"/>
+          </a:p>
+          <a:p>
+            <a:pPr marL="342900" indent="-342900">
+              <a:spcAft>
+                <a:spcPts val="800"/>
+              </a:spcAft>
+              <a:buSzPct val="100000"/>
+              <a:buChar char="•"/>
+            </a:pPr>
+            <a:r>
+              <a:rPr lang="en-US" sz="1300" dirty="0">
+                <a:solidFill>
+                  <a:srgbClr val="FFFFFF"/>
+                </a:solidFill>
+              </a:rPr>
+              <a:t>The prompt hash: five repeats share it</a:t>
+            </a:r>
+            <a:endParaRPr lang="en-US" sz="1300" dirty="0"/>
+          </a:p>
+        </p:txBody>
+      </p:sp>
+      <p:sp>
+        <p:nvSpPr>
+          <p:cNvPr id="11" name="Shape 9"/>
           <p:cNvSpPr/>
           <p:nvPr/>
         </p:nvSpPr>
         <p:spPr>
           <a:xfrm>
-            <a:off x="5038710" y="1298448"/>
-            <a:ext cx="2111532" cy="1463040"/>
+            <a:off x="8046720" y="1737360"/>
+            <a:ext cx="3520440" cy="3200400"/>
           </a:xfrm>
           <a:prstGeom prst="roundRect">
             <a:avLst>
-              <a:gd name="adj" fmla="val 6250"/>
+              <a:gd name="adj" fmla="val 3429"/>
             </a:avLst>
           </a:prstGeom>
           <a:solidFill>
@@ -7930,37 +8148,903 @@
       </p:sp>
       <p:sp>
         <p:nvSpPr>
+          <p:cNvPr id="12" name="Text 10"/>
+          <p:cNvSpPr txBox="1"/>
+          <p:nvPr/>
+        </p:nvSpPr>
+        <p:spPr>
+          <a:xfrm>
+            <a:off x="8321040" y="1920240"/>
+            <a:ext cx="2926080" cy="457200"/>
+          </a:xfrm>
+          <a:prstGeom prst="rect">
+            <a:avLst/>
+          </a:prstGeom>
+          <a:noFill/>
+          <a:ln/>
+        </p:spPr>
+        <p:txBody>
+          <a:bodyPr wrap="square" lIns="0" tIns="0" rIns="0" bIns="0" rtlCol="0" anchor="ctr"/>
+          <a:lstStyle/>
+          <a:p>
+            <a:pPr marL="0" indent="0">
+              <a:buNone/>
+            </a:pPr>
+            <a:r>
+              <a:rPr lang="en-US" sz="1800" b="1" dirty="0">
+                <a:solidFill>
+                  <a:srgbClr val="E9B44C"/>
+                </a:solidFill>
+              </a:rPr>
+              <a:t>Say</a:t>
+            </a:r>
+            <a:endParaRPr lang="en-US" sz="1800" dirty="0"/>
+          </a:p>
+        </p:txBody>
+      </p:sp>
+      <p:sp>
+        <p:nvSpPr>
+          <p:cNvPr id="13" name="Text 11"/>
+          <p:cNvSpPr txBox="1"/>
+          <p:nvPr/>
+        </p:nvSpPr>
+        <p:spPr>
+          <a:xfrm>
+            <a:off x="8321040" y="2468880"/>
+            <a:ext cx="2971800" cy="2377440"/>
+          </a:xfrm>
+          <a:prstGeom prst="rect">
+            <a:avLst/>
+          </a:prstGeom>
+          <a:noFill/>
+          <a:ln/>
+        </p:spPr>
+        <p:txBody>
+          <a:bodyPr wrap="square" lIns="0" tIns="0" rIns="0" bIns="0" rtlCol="0" anchor="t"/>
+          <a:lstStyle/>
+          <a:p>
+            <a:pPr marL="342900" indent="-342900">
+              <a:spcAft>
+                <a:spcPts val="800"/>
+              </a:spcAft>
+              <a:buSzPct val="100000"/>
+              <a:buChar char="•"/>
+            </a:pPr>
+            <a:r>
+              <a:rPr lang="en-US" sz="1300" dirty="0">
+                <a:solidFill>
+                  <a:srgbClr val="FFFFFF"/>
+                </a:solidFill>
+              </a:rPr>
+              <a:t>If it is not on this page, the analyst does not get it.</a:t>
+            </a:r>
+            <a:endParaRPr lang="en-US" sz="1300" dirty="0"/>
+          </a:p>
+          <a:p>
+            <a:pPr marL="342900" indent="-342900">
+              <a:spcAft>
+                <a:spcPts val="800"/>
+              </a:spcAft>
+              <a:buSzPct val="100000"/>
+              <a:buChar char="•"/>
+            </a:pPr>
+            <a:r>
+              <a:rPr lang="en-US" sz="1300" dirty="0">
+                <a:solidFill>
+                  <a:srgbClr val="FFFFFF"/>
+                </a:solidFill>
+              </a:rPr>
+              <a:t>Same model. The only difference between analyst 1 and analyst 6 is this page.</a:t>
+            </a:r>
+            <a:endParaRPr lang="en-US" sz="1300" dirty="0"/>
+          </a:p>
+        </p:txBody>
+      </p:sp>
+    </p:spTree>
+  </p:cSld>
+  <p:clrMapOvr>
+    <a:masterClrMapping/>
+  </p:clrMapOvr>
+</p:sld>
+</file>
+
+<file path=ppt/slides/slide13.xml><?xml version="1.0" encoding="utf-8"?>
+<p:sld xmlns:a="http://schemas.openxmlformats.org/drawingml/2006/main" xmlns:r="http://schemas.openxmlformats.org/officeDocument/2006/relationships" xmlns:p="http://schemas.openxmlformats.org/presentationml/2006/main">
+  <p:cSld name="Slide 14">
+    <p:spTree>
+      <p:nvGrpSpPr>
+        <p:cNvPr id="1" name=""/>
+        <p:cNvGrpSpPr/>
+        <p:nvPr/>
+      </p:nvGrpSpPr>
+      <p:grpSpPr>
+        <a:xfrm>
+          <a:off x="0" y="0"/>
+          <a:ext cx="0" cy="0"/>
+          <a:chOff x="0" y="0"/>
+          <a:chExt cx="0" cy="0"/>
+        </a:xfrm>
+      </p:grpSpPr>
+      <p:sp>
+        <p:nvSpPr>
+          <p:cNvPr id="2" name="Text 0"/>
+          <p:cNvSpPr>
+            <a:spLocks noGrp="1"/>
+          </p:cNvSpPr>
+          <p:nvPr>
+            <p:ph type="title" idx="100" hasCustomPrompt="1"/>
+          </p:nvPr>
+        </p:nvSpPr>
+        <p:spPr>
+          <a:xfrm>
+            <a:off x="548640" y="411480"/>
+            <a:ext cx="11091672" cy="822960"/>
+          </a:xfrm>
+          <a:prstGeom prst="rect">
+            <a:avLst/>
+          </a:prstGeom>
+          <a:noFill/>
+          <a:ln/>
+        </p:spPr>
+        <p:txBody>
+          <a:bodyPr wrap="square" lIns="0" tIns="0" rIns="0" bIns="0" rtlCol="0" anchor="ctr"/>
+          <a:lstStyle/>
+          <a:p>
+            <a:pPr marL="0" indent="0" algn="l">
+              <a:buNone/>
+            </a:pPr>
+            <a:r>
+              <a:rPr lang="en-US" sz="3200" b="1" dirty="0">
+                <a:solidFill>
+                  <a:schemeClr val="tx2"/>
+                </a:solidFill>
+              </a:rPr>
+              <a:t>How good is the harness: what each step bought</a:t>
+            </a:r>
+            <a:endParaRPr lang="en-US" sz="3200" dirty="0"/>
+          </a:p>
+        </p:txBody>
+      </p:sp>
+      <p:sp>
+        <p:nvSpPr>
+          <p:cNvPr id="4" name="Text 1"/>
+          <p:cNvSpPr txBox="1"/>
+          <p:nvPr/>
+        </p:nvSpPr>
+        <p:spPr>
+          <a:xfrm>
+            <a:off x="548640" y="1325880"/>
+            <a:ext cx="3544824" cy="365760"/>
+          </a:xfrm>
+          <a:prstGeom prst="rect">
+            <a:avLst/>
+          </a:prstGeom>
+          <a:noFill/>
+          <a:ln/>
+        </p:spPr>
+        <p:txBody>
+          <a:bodyPr wrap="square" lIns="0" tIns="0" rIns="0" bIns="0" rtlCol="0" anchor="t"/>
+          <a:lstStyle/>
+          <a:p>
+            <a:pPr marL="0" indent="0">
+              <a:buNone/>
+            </a:pPr>
+            <a:r>
+              <a:rPr lang="en-US" sz="1300" b="1" dirty="0">
+                <a:solidFill>
+                  <a:schemeClr val="tx2"/>
+                </a:solidFill>
+              </a:rPr>
+              <a:t>Repeatability: variance between identical runs (pp)</a:t>
+            </a:r>
+            <a:endParaRPr lang="en-US" sz="1300" dirty="0"/>
+          </a:p>
+        </p:txBody>
+      </p:sp>
+      <p:graphicFrame>
+        <p:nvGraphicFramePr>
+          <p:cNvPr id="5" name="Chart 0"/>
+          <p:cNvGraphicFramePr/>
+          <p:nvPr/>
+        </p:nvGraphicFramePr>
+        <p:xfrm>
+          <a:off x="548640" y="1691640"/>
+          <a:ext cx="3544824" cy="3566160"/>
+        </p:xfrm>
+        <a:graphic>
+          <a:graphicData uri="http://schemas.openxmlformats.org/drawingml/2006/chart">
+            <c:chart xmlns:c="http://schemas.openxmlformats.org/drawingml/2006/chart" xmlns:r="http://schemas.openxmlformats.org/officeDocument/2006/relationships" r:id="rId3"/>
+          </a:graphicData>
+        </a:graphic>
+      </p:graphicFrame>
+      <p:sp>
+        <p:nvSpPr>
+          <p:cNvPr id="6" name="Text 2"/>
+          <p:cNvSpPr txBox="1"/>
+          <p:nvPr/>
+        </p:nvSpPr>
+        <p:spPr>
+          <a:xfrm>
+            <a:off x="548640" y="5303520"/>
+            <a:ext cx="3544824" cy="640080"/>
+          </a:xfrm>
+          <a:prstGeom prst="rect">
+            <a:avLst/>
+          </a:prstGeom>
+          <a:noFill/>
+          <a:ln/>
+        </p:spPr>
+        <p:txBody>
+          <a:bodyPr wrap="square" lIns="0" tIns="0" rIns="0" bIns="0" rtlCol="0" anchor="t"/>
+          <a:lstStyle/>
+          <a:p>
+            <a:pPr marL="0" indent="0">
+              <a:buNone/>
+            </a:pPr>
+            <a:r>
+              <a:rPr lang="en-US" sz="950" dirty="0">
+                <a:solidFill>
+                  <a:schemeClr val="accent4"/>
+                </a:solidFill>
+              </a:rPr>
+              <a:t>Largest standard deviation across five runs, mean of four snapshots. Pass mark 2 pp. Analysts 3 to 8: standard deviation of the lean, 1 bp = 1 pp.</a:t>
+            </a:r>
+            <a:endParaRPr lang="en-US" sz="950" dirty="0"/>
+          </a:p>
+        </p:txBody>
+      </p:sp>
+      <p:sp>
+        <p:nvSpPr>
+          <p:cNvPr id="7" name="Text 3"/>
+          <p:cNvSpPr txBox="1"/>
+          <p:nvPr/>
+        </p:nvSpPr>
+        <p:spPr>
+          <a:xfrm>
+            <a:off x="4322064" y="1325880"/>
+            <a:ext cx="3544824" cy="365760"/>
+          </a:xfrm>
+          <a:prstGeom prst="rect">
+            <a:avLst/>
+          </a:prstGeom>
+          <a:noFill/>
+          <a:ln/>
+        </p:spPr>
+        <p:txBody>
+          <a:bodyPr wrap="square" lIns="0" tIns="0" rIns="0" bIns="0" rtlCol="0" anchor="t"/>
+          <a:lstStyle/>
+          <a:p>
+            <a:pPr marL="0" indent="0">
+              <a:buNone/>
+            </a:pPr>
+            <a:r>
+              <a:rPr lang="en-US" sz="1300" b="1" dirty="0">
+                <a:solidFill>
+                  <a:schemeClr val="tx2"/>
+                </a:solidFill>
+              </a:rPr>
+              <a:t>Numbers from memory (count)</a:t>
+            </a:r>
+            <a:endParaRPr lang="en-US" sz="1300" dirty="0"/>
+          </a:p>
+        </p:txBody>
+      </p:sp>
+      <p:graphicFrame>
+        <p:nvGraphicFramePr>
+          <p:cNvPr id="8" name="Chart 1"/>
+          <p:cNvGraphicFramePr/>
+          <p:nvPr/>
+        </p:nvGraphicFramePr>
+        <p:xfrm>
+          <a:off x="4322064" y="1691640"/>
+          <a:ext cx="3544824" cy="3566160"/>
+        </p:xfrm>
+        <a:graphic>
+          <a:graphicData uri="http://schemas.openxmlformats.org/drawingml/2006/chart">
+            <c:chart xmlns:c="http://schemas.openxmlformats.org/drawingml/2006/chart" xmlns:r="http://schemas.openxmlformats.org/officeDocument/2006/relationships" r:id="rId4"/>
+          </a:graphicData>
+        </a:graphic>
+      </p:graphicFrame>
+      <p:sp>
+        <p:nvSpPr>
+          <p:cNvPr id="9" name="Text 4"/>
+          <p:cNvSpPr txBox="1"/>
+          <p:nvPr/>
+        </p:nvSpPr>
+        <p:spPr>
+          <a:xfrm>
+            <a:off x="4322064" y="5303520"/>
+            <a:ext cx="3544824" cy="640080"/>
+          </a:xfrm>
+          <a:prstGeom prst="rect">
+            <a:avLst/>
+          </a:prstGeom>
+          <a:noFill/>
+          <a:ln/>
+        </p:spPr>
+        <p:txBody>
+          <a:bodyPr wrap="square" lIns="0" tIns="0" rIns="0" bIns="0" rtlCol="0" anchor="t"/>
+          <a:lstStyle/>
+          <a:p>
+            <a:pPr marL="0" indent="0">
+              <a:buNone/>
+            </a:pPr>
+            <a:r>
+              <a:rPr lang="en-US" sz="950" dirty="0">
+                <a:solidFill>
+                  <a:schemeClr val="accent4"/>
+                </a:solidFill>
+              </a:rPr>
+              <a:t>Numbers in the answer that exist nowhere in the frozen evidence, summed over five runs. Pass mark: exactly 0.</a:t>
+            </a:r>
+            <a:endParaRPr lang="en-US" sz="950" dirty="0"/>
+          </a:p>
+        </p:txBody>
+      </p:sp>
+      <p:sp>
+        <p:nvSpPr>
+          <p:cNvPr id="10" name="Text 5"/>
+          <p:cNvSpPr txBox="1"/>
+          <p:nvPr/>
+        </p:nvSpPr>
+        <p:spPr>
+          <a:xfrm>
+            <a:off x="8095488" y="1325880"/>
+            <a:ext cx="3544824" cy="365760"/>
+          </a:xfrm>
+          <a:prstGeom prst="rect">
+            <a:avLst/>
+          </a:prstGeom>
+          <a:noFill/>
+          <a:ln/>
+        </p:spPr>
+        <p:txBody>
+          <a:bodyPr wrap="square" lIns="0" tIns="0" rIns="0" bIns="0" rtlCol="0" anchor="t"/>
+          <a:lstStyle/>
+          <a:p>
+            <a:pPr marL="0" indent="0">
+              <a:buNone/>
+            </a:pPr>
+            <a:r>
+              <a:rPr lang="en-US" sz="1300" b="1" dirty="0">
+                <a:solidFill>
+                  <a:schemeClr val="tx2"/>
+                </a:solidFill>
+              </a:rPr>
+              <a:t>Claims with a verbatim quote (%)</a:t>
+            </a:r>
+            <a:endParaRPr lang="en-US" sz="1300" dirty="0"/>
+          </a:p>
+        </p:txBody>
+      </p:sp>
+      <p:graphicFrame>
+        <p:nvGraphicFramePr>
+          <p:cNvPr id="11" name="Chart 2"/>
+          <p:cNvGraphicFramePr/>
+          <p:nvPr/>
+        </p:nvGraphicFramePr>
+        <p:xfrm>
+          <a:off x="8095488" y="1691640"/>
+          <a:ext cx="3544824" cy="3566160"/>
+        </p:xfrm>
+        <a:graphic>
+          <a:graphicData uri="http://schemas.openxmlformats.org/drawingml/2006/chart">
+            <c:chart xmlns:c="http://schemas.openxmlformats.org/drawingml/2006/chart" xmlns:r="http://schemas.openxmlformats.org/officeDocument/2006/relationships" r:id="rId5"/>
+          </a:graphicData>
+        </a:graphic>
+      </p:graphicFrame>
+      <p:sp>
+        <p:nvSpPr>
+          <p:cNvPr id="12" name="Text 6"/>
+          <p:cNvSpPr txBox="1"/>
+          <p:nvPr/>
+        </p:nvSpPr>
+        <p:spPr>
+          <a:xfrm>
+            <a:off x="8095488" y="5303520"/>
+            <a:ext cx="3544824" cy="640080"/>
+          </a:xfrm>
+          <a:prstGeom prst="rect">
+            <a:avLst/>
+          </a:prstGeom>
+          <a:noFill/>
+          <a:ln/>
+        </p:spPr>
+        <p:txBody>
+          <a:bodyPr wrap="square" lIns="0" tIns="0" rIns="0" bIns="0" rtlCol="0" anchor="t"/>
+          <a:lstStyle/>
+          <a:p>
+            <a:pPr marL="0" indent="0">
+              <a:buNone/>
+            </a:pPr>
+            <a:r>
+              <a:rPr lang="en-US" sz="950" dirty="0">
+                <a:solidFill>
+                  <a:schemeClr val="accent4"/>
+                </a:solidFill>
+              </a:rPr>
+              <a:t>Share of claims whose quote code found character for character in the item named. Pass mark 95%. Analyst 2 is not shown: it quotes nothing, so it cannot be measured.</a:t>
+            </a:r>
+            <a:endParaRPr lang="en-US" sz="950" dirty="0"/>
+          </a:p>
+        </p:txBody>
+      </p:sp>
+      <p:sp>
+        <p:nvSpPr>
+          <p:cNvPr id="13" name="Text 7"/>
+          <p:cNvSpPr txBox="1"/>
+          <p:nvPr/>
+        </p:nvSpPr>
+        <p:spPr>
+          <a:xfrm>
+            <a:off x="548640" y="5870448"/>
+            <a:ext cx="11091672" cy="502920"/>
+          </a:xfrm>
+          <a:prstGeom prst="rect">
+            <a:avLst/>
+          </a:prstGeom>
+          <a:noFill/>
+          <a:ln/>
+        </p:spPr>
+        <p:txBody>
+          <a:bodyPr wrap="square" lIns="0" tIns="0" rIns="0" bIns="0" rtlCol="0" anchor="t"/>
+          <a:lstStyle/>
+          <a:p>
+            <a:pPr marL="0" indent="0">
+              <a:buNone/>
+            </a:pPr>
+            <a:r>
+              <a:rPr lang="en-US" sz="1050" i="1" dirty="0">
+                <a:solidFill>
+                  <a:schemeClr val="accent2"/>
+                </a:solidFill>
+              </a:rPr>
+              <a:t>The step from analyst 2 to analyst 3 is the harness: a fixed answer shape with a quote per claim, checked by code. Specialists keep both and add attribution. What they concluded, four snapshots: analyst 1 a cut at 57 to 67%; analyst 2 +25 bp at 50 to 57%; analyst 3 +5.8 to +7.0 bp hawkish; specialists +4.0 to +4.4 bp, labour the lone non-hawk.</a:t>
+            </a:r>
+            <a:endParaRPr lang="en-US" sz="1050" dirty="0"/>
+          </a:p>
+        </p:txBody>
+      </p:sp>
+      <p:sp>
+        <p:nvSpPr>
+          <p:cNvPr id="25" name="Slide Number Placeholder 0"/>
+          <p:cNvSpPr>
+            <a:spLocks noGrp="1"/>
+          </p:cNvSpPr>
+          <p:nvPr>
+            <p:ph type="sldNum" sz="quarter" idx="4294967295"/>
+          </p:nvPr>
+        </p:nvSpPr>
+        <p:spPr>
+          <a:xfrm>
+            <a:off x="11091672" y="6400800"/>
+            <a:ext cx="548640" cy="274320"/>
+          </a:xfrm>
+          <a:prstGeom prst="rect">
+            <a:avLst/>
+          </a:prstGeom>
+          <a:extLst>
+            <a:ext uri="{C572A759-6A51-4108-AA02-DFA0A04FC94B}">
+              <ma14:wrappingTextBoxFlag xmlns:ma14="http://schemas.microsoft.com/office/mac/drawingml/2011/main" xmlns="" val="0"/>
+            </a:ext>
+          </a:extLst>
+        </p:spPr>
+        <p:txBody>
+          <a:bodyPr/>
+          <a:lstStyle>
+            <a:lvl1pPr>
+              <a:defRPr sz="1000">
+                <a:solidFill>
+                  <a:srgbClr val="6B7280"/>
+                </a:solidFill>
+              </a:defRPr>
+            </a:lvl1pPr>
+          </a:lstStyle>
+          <a:p>
+            <a:pPr algn="r"/>
+            <a:fld id="{F7021451-1387-4CA6-816F-3879F97B5CBC}" type="slidenum">
+              <a:rPr lang="en-US" b="0"/>
+              <a:t>13</a:t>
+            </a:fld>
+            <a:endParaRPr lang="en-US"/>
+          </a:p>
+        </p:txBody>
+      </p:sp>
+    </p:spTree>
+  </p:cSld>
+  <p:clrMapOvr>
+    <a:masterClrMapping/>
+  </p:clrMapOvr>
+</p:sld>
+</file>
+
+<file path=ppt/slides/slide14.xml><?xml version="1.0" encoding="utf-8"?>
+<p:sld xmlns:a="http://schemas.openxmlformats.org/drawingml/2006/main" xmlns:r="http://schemas.openxmlformats.org/officeDocument/2006/relationships" xmlns:p="http://schemas.openxmlformats.org/presentationml/2006/main">
+  <p:cSld>
+    <p:spTree>
+      <p:nvGrpSpPr>
+        <p:cNvPr id="1" name=""/>
+        <p:cNvGrpSpPr/>
+        <p:nvPr/>
+      </p:nvGrpSpPr>
+      <p:grpSpPr>
+        <a:xfrm>
+          <a:off x="0" y="0"/>
+          <a:ext cx="0" cy="0"/>
+          <a:chOff x="0" y="0"/>
+          <a:chExt cx="0" cy="0"/>
+        </a:xfrm>
+      </p:grpSpPr>
+      <p:sp>
+        <p:nvSpPr>
+          <p:cNvPr id="2" name="Text 0"/>
+          <p:cNvSpPr>
+            <a:spLocks noGrp="1"/>
+          </p:cNvSpPr>
+          <p:nvPr>
+            <p:ph type="title" idx="100" hasCustomPrompt="1"/>
+          </p:nvPr>
+        </p:nvSpPr>
+        <p:spPr>
+          <a:xfrm>
+            <a:off x="548640" y="411480"/>
+            <a:ext cx="11091672" cy="822960"/>
+          </a:xfrm>
+          <a:prstGeom prst="rect">
+            <a:avLst/>
+          </a:prstGeom>
+          <a:noFill/>
+          <a:ln/>
+        </p:spPr>
+        <p:txBody>
+          <a:bodyPr wrap="square" lIns="0" tIns="0" rIns="0" bIns="0" rtlCol="0" anchor="ctr"/>
+          <a:lstStyle/>
+          <a:p>
+            <a:pPr marL="0" indent="0" algn="l">
+              <a:buNone/>
+            </a:pPr>
+            <a:r>
+              <a:rPr lang="en-US" sz="3200" b="1" dirty="0">
+                <a:solidFill>
+                  <a:schemeClr val="tx2"/>
+                </a:solidFill>
+              </a:rPr>
+              <a:t>LLM analysts: outcome</a:t>
+            </a:r>
+            <a:endParaRPr lang="en-US" sz="3200" dirty="0"/>
+          </a:p>
+        </p:txBody>
+      </p:sp>
+      <p:sp>
+        <p:nvSpPr>
+          <p:cNvPr id="4" name="Shape 1"/>
+          <p:cNvSpPr/>
+          <p:nvPr/>
+        </p:nvSpPr>
+        <p:spPr>
+          <a:xfrm>
+            <a:off x="548640" y="1298448"/>
+            <a:ext cx="11091672" cy="713232"/>
+          </a:xfrm>
+          <a:prstGeom prst="roundRect">
+            <a:avLst>
+              <a:gd name="adj" fmla="val 15385"/>
+            </a:avLst>
+          </a:prstGeom>
+          <a:solidFill>
+            <a:srgbClr val="EEF2F7"/>
+          </a:solidFill>
+          <a:ln w="12700">
+            <a:solidFill>
+              <a:srgbClr val="EEF2F7"/>
+            </a:solidFill>
+            <a:prstDash val="solid"/>
+          </a:ln>
+          <a:effectLst>
+            <a:outerShdw blurRad="50800" dist="12700" dir="5400000" algn="bl" rotWithShape="0">
+              <a:srgbClr val="000000">
+                <a:alpha val="8000"/>
+              </a:srgbClr>
+            </a:outerShdw>
+          </a:effectLst>
+        </p:spPr>
+      </p:sp>
+      <p:sp>
+        <p:nvSpPr>
+          <p:cNvPr id="5" name="Text 2"/>
+          <p:cNvSpPr txBox="1"/>
+          <p:nvPr/>
+        </p:nvSpPr>
+        <p:spPr>
+          <a:xfrm>
+            <a:off x="749808" y="1371600"/>
+            <a:ext cx="10689336" cy="566928"/>
+          </a:xfrm>
+          <a:prstGeom prst="rect">
+            <a:avLst/>
+          </a:prstGeom>
+          <a:noFill/>
+          <a:ln/>
+        </p:spPr>
+        <p:txBody>
+          <a:bodyPr wrap="square" lIns="0" tIns="0" rIns="0" bIns="0" rtlCol="0" anchor="ctr"/>
+          <a:lstStyle/>
+          <a:p>
+            <a:pPr marL="0" indent="0">
+              <a:buNone/>
+            </a:pPr>
+            <a:r>
+              <a:rPr lang="en-US" sz="1250" b="1" dirty="0">
+                <a:solidFill>
+                  <a:srgbClr val="1E2761"/>
+                </a:solidFill>
+              </a:rPr>
+              <a:t>Each specialist runs five times on the same frozen snapshot. </a:t>
+            </a:r>
+            <a:r>
+              <a:rPr lang="en-US" sz="1250" dirty="0">
+                <a:solidFill>
+                  <a:schemeClr val="tx1"/>
+                </a:solidFill>
+              </a:rPr>
+              <a:t>The five answers must sit within the variance pass mark (2 points), every claim must carry a quote that code finds in the evidence, character for character, and no number may come from memory. Only then does the lean count toward the number.</a:t>
+            </a:r>
+            <a:endParaRPr lang="en-US" sz="1250" dirty="0"/>
+          </a:p>
+        </p:txBody>
+      </p:sp>
+      <p:sp>
+        <p:nvSpPr>
+          <p:cNvPr id="6" name="Shape 3"/>
+          <p:cNvSpPr/>
+          <p:nvPr/>
+        </p:nvSpPr>
+        <p:spPr>
+          <a:xfrm>
+            <a:off x="548640" y="2231136"/>
+            <a:ext cx="2245035" cy="1481328"/>
+          </a:xfrm>
+          <a:prstGeom prst="rect">
+            <a:avLst/>
+          </a:prstGeom>
+          <a:solidFill>
+            <a:srgbClr val="CADCFC"/>
+          </a:solidFill>
+          <a:ln w="12700">
+            <a:solidFill>
+              <a:srgbClr val="CADCFC"/>
+            </a:solidFill>
+            <a:prstDash val="solid"/>
+          </a:ln>
+        </p:spPr>
+      </p:sp>
+      <p:sp>
+        <p:nvSpPr>
+          <p:cNvPr id="7" name="Text 4"/>
+          <p:cNvSpPr txBox="1"/>
+          <p:nvPr/>
+        </p:nvSpPr>
+        <p:spPr>
+          <a:xfrm>
+            <a:off x="548640" y="2587752"/>
+            <a:ext cx="2245035" cy="402336"/>
+          </a:xfrm>
+          <a:prstGeom prst="rect">
+            <a:avLst/>
+          </a:prstGeom>
+          <a:noFill/>
+          <a:ln/>
+        </p:spPr>
+        <p:txBody>
+          <a:bodyPr wrap="square" lIns="0" tIns="0" rIns="0" bIns="0" rtlCol="0" anchor="ctr"/>
+          <a:lstStyle/>
+          <a:p>
+            <a:pPr marL="0" indent="0" algn="ctr">
+              <a:buNone/>
+            </a:pPr>
+            <a:r>
+              <a:rPr lang="en-US" sz="2000" b="1" dirty="0">
+                <a:solidFill>
+                  <a:schemeClr val="tx1"/>
+                </a:solidFill>
+              </a:rPr>
+              <a:t>25 runs</a:t>
+            </a:r>
+            <a:endParaRPr lang="en-US" sz="2000" dirty="0"/>
+          </a:p>
+        </p:txBody>
+      </p:sp>
+      <p:sp>
+        <p:nvSpPr>
+          <p:cNvPr id="8" name="Text 5"/>
+          <p:cNvSpPr txBox="1"/>
+          <p:nvPr/>
+        </p:nvSpPr>
+        <p:spPr>
+          <a:xfrm>
+            <a:off x="548640" y="3008376"/>
+            <a:ext cx="2245035" cy="292608"/>
+          </a:xfrm>
+          <a:prstGeom prst="rect">
+            <a:avLst/>
+          </a:prstGeom>
+          <a:noFill/>
+          <a:ln/>
+        </p:spPr>
+        <p:txBody>
+          <a:bodyPr wrap="square" lIns="0" tIns="0" rIns="0" bIns="0" rtlCol="0" anchor="ctr"/>
+          <a:lstStyle/>
+          <a:p>
+            <a:pPr marL="0" indent="0" algn="ctr">
+              <a:buNone/>
+            </a:pPr>
+            <a:r>
+              <a:rPr lang="en-US" sz="1050" dirty="0">
+                <a:solidFill>
+                  <a:schemeClr val="tx1"/>
+                </a:solidFill>
+              </a:rPr>
+              <a:t>5 specialists × 5 identical runs</a:t>
+            </a:r>
+            <a:endParaRPr lang="en-US" sz="1050" dirty="0"/>
+          </a:p>
+        </p:txBody>
+      </p:sp>
+      <p:sp>
+        <p:nvSpPr>
+          <p:cNvPr id="9" name="Shape 6"/>
+          <p:cNvSpPr/>
+          <p:nvPr/>
+        </p:nvSpPr>
+        <p:spPr>
+          <a:xfrm>
+            <a:off x="2793675" y="2286000"/>
+            <a:ext cx="2245035" cy="1371600"/>
+          </a:xfrm>
+          <a:prstGeom prst="rect">
+            <a:avLst/>
+          </a:prstGeom>
+          <a:solidFill>
+            <a:srgbClr val="B9CEF3"/>
+          </a:solidFill>
+          <a:ln w="12700">
+            <a:solidFill>
+              <a:srgbClr val="B9CEF3"/>
+            </a:solidFill>
+            <a:prstDash val="solid"/>
+          </a:ln>
+        </p:spPr>
+      </p:sp>
+      <p:sp>
+        <p:nvSpPr>
+          <p:cNvPr id="10" name="Text 7"/>
+          <p:cNvSpPr txBox="1"/>
+          <p:nvPr/>
+        </p:nvSpPr>
+        <p:spPr>
+          <a:xfrm>
+            <a:off x="2793675" y="2587752"/>
+            <a:ext cx="2245035" cy="402336"/>
+          </a:xfrm>
+          <a:prstGeom prst="rect">
+            <a:avLst/>
+          </a:prstGeom>
+          <a:noFill/>
+          <a:ln/>
+        </p:spPr>
+        <p:txBody>
+          <a:bodyPr wrap="square" lIns="0" tIns="0" rIns="0" bIns="0" rtlCol="0" anchor="ctr"/>
+          <a:lstStyle/>
+          <a:p>
+            <a:pPr marL="0" indent="0" algn="ctr">
+              <a:buNone/>
+            </a:pPr>
+            <a:r>
+              <a:rPr lang="en-US" sz="2000" b="1" dirty="0">
+                <a:solidFill>
+                  <a:schemeClr val="tx1"/>
+                </a:solidFill>
+              </a:rPr>
+              <a:t>25 prompts</a:t>
+            </a:r>
+            <a:endParaRPr lang="en-US" sz="2000" dirty="0"/>
+          </a:p>
+        </p:txBody>
+      </p:sp>
+      <p:sp>
+        <p:nvSpPr>
+          <p:cNvPr id="11" name="Text 8"/>
+          <p:cNvSpPr txBox="1"/>
+          <p:nvPr/>
+        </p:nvSpPr>
+        <p:spPr>
+          <a:xfrm>
+            <a:off x="2793675" y="3008376"/>
+            <a:ext cx="2245035" cy="292608"/>
+          </a:xfrm>
+          <a:prstGeom prst="rect">
+            <a:avLst/>
+          </a:prstGeom>
+          <a:noFill/>
+          <a:ln/>
+        </p:spPr>
+        <p:txBody>
+          <a:bodyPr wrap="square" lIns="0" tIns="0" rIns="0" bIns="0" rtlCol="0" anchor="ctr"/>
+          <a:lstStyle/>
+          <a:p>
+            <a:pPr marL="0" indent="0" algn="ctr">
+              <a:buNone/>
+            </a:pPr>
+            <a:r>
+              <a:rPr lang="en-US" sz="1050" dirty="0">
+                <a:solidFill>
+                  <a:schemeClr val="tx1"/>
+                </a:solidFill>
+              </a:rPr>
+              <a:t>one slice each, hashed</a:t>
+            </a:r>
+            <a:endParaRPr lang="en-US" sz="1050" dirty="0"/>
+          </a:p>
+        </p:txBody>
+      </p:sp>
+      <p:sp>
+        <p:nvSpPr>
+          <p:cNvPr id="12" name="Shape 9"/>
+          <p:cNvSpPr/>
+          <p:nvPr/>
+        </p:nvSpPr>
+        <p:spPr>
+          <a:xfrm>
+            <a:off x="5038710" y="2340864"/>
+            <a:ext cx="2245035" cy="1261872"/>
+          </a:xfrm>
+          <a:prstGeom prst="rect">
+            <a:avLst/>
+          </a:prstGeom>
+          <a:solidFill>
+            <a:srgbClr val="A8C3EC"/>
+          </a:solidFill>
+          <a:ln w="12700">
+            <a:solidFill>
+              <a:srgbClr val="A8C3EC"/>
+            </a:solidFill>
+            <a:prstDash val="solid"/>
+          </a:ln>
+        </p:spPr>
+      </p:sp>
+      <p:sp>
+        <p:nvSpPr>
           <p:cNvPr id="13" name="Text 10"/>
           <p:cNvSpPr txBox="1"/>
           <p:nvPr/>
         </p:nvSpPr>
         <p:spPr>
           <a:xfrm>
-            <a:off x="5175870" y="1389888"/>
-            <a:ext cx="1837212" cy="182880"/>
-          </a:xfrm>
-          <a:prstGeom prst="rect">
-            <a:avLst/>
-          </a:prstGeom>
-          <a:noFill/>
-          <a:ln/>
-        </p:spPr>
-        <p:txBody>
-          <a:bodyPr wrap="square" lIns="0" tIns="0" rIns="0" bIns="0" rtlCol="0" anchor="t"/>
-          <a:lstStyle/>
-          <a:p>
-            <a:pPr marL="0" indent="0">
+            <a:off x="5038710" y="2587752"/>
+            <a:ext cx="2245035" cy="402336"/>
+          </a:xfrm>
+          <a:prstGeom prst="rect">
+            <a:avLst/>
+          </a:prstGeom>
+          <a:noFill/>
+          <a:ln/>
+        </p:spPr>
+        <p:txBody>
+          <a:bodyPr wrap="square" lIns="0" tIns="0" rIns="0" bIns="0" rtlCol="0" anchor="ctr"/>
+          <a:lstStyle/>
+          <a:p>
+            <a:pPr marL="0" indent="0" algn="ctr">
               <a:buNone/>
             </a:pPr>
             <a:r>
-              <a:rPr lang="en-US" sz="900" b="1" kern="0" spc="100" dirty="0">
-                <a:solidFill>
-                  <a:srgbClr val="E9B44C"/>
-                </a:solidFill>
-              </a:rPr>
-              <a:t>STAGE 3</a:t>
-            </a:r>
-            <a:endParaRPr lang="en-US" sz="900" dirty="0"/>
+              <a:rPr lang="en-US" sz="2000" b="1" dirty="0">
+                <a:solidFill>
+                  <a:schemeClr val="tx1"/>
+                </a:solidFill>
+              </a:rPr>
+              <a:t>263 claims</a:t>
+            </a:r>
+            <a:endParaRPr lang="en-US" sz="2000" dirty="0"/>
           </a:p>
         </p:txBody>
       </p:sp>
@@ -7972,85 +9056,144 @@
         </p:nvSpPr>
         <p:spPr>
           <a:xfrm>
-            <a:off x="5175870" y="1572768"/>
-            <a:ext cx="1837212" cy="274320"/>
-          </a:xfrm>
-          <a:prstGeom prst="rect">
-            <a:avLst/>
-          </a:prstGeom>
-          <a:noFill/>
-          <a:ln/>
-        </p:spPr>
-        <p:txBody>
-          <a:bodyPr wrap="square" lIns="0" tIns="0" rIns="0" bIns="0" rtlCol="0" anchor="t"/>
-          <a:lstStyle/>
-          <a:p>
-            <a:pPr marL="0" indent="0">
+            <a:off x="5038710" y="3008376"/>
+            <a:ext cx="2245035" cy="292608"/>
+          </a:xfrm>
+          <a:prstGeom prst="rect">
+            <a:avLst/>
+          </a:prstGeom>
+          <a:noFill/>
+          <a:ln/>
+        </p:spPr>
+        <p:txBody>
+          <a:bodyPr wrap="square" lIns="0" tIns="0" rIns="0" bIns="0" rtlCol="0" anchor="ctr"/>
+          <a:lstStyle/>
+          <a:p>
+            <a:pPr marL="0" indent="0" algn="ctr">
               <a:buNone/>
             </a:pPr>
             <a:r>
-              <a:rPr lang="en-US" sz="1250" b="1" dirty="0">
-                <a:solidFill>
-                  <a:schemeClr val="bg1"/>
-                </a:solidFill>
-              </a:rPr>
-              <a:t>Fixed answer shape</a:t>
-            </a:r>
-            <a:endParaRPr lang="en-US" sz="1250" dirty="0"/>
-          </a:p>
-        </p:txBody>
-      </p:sp>
-      <p:sp>
-        <p:nvSpPr>
-          <p:cNvPr id="15" name="Text 12"/>
+              <a:rPr lang="en-US" sz="1050" dirty="0">
+                <a:solidFill>
+                  <a:schemeClr val="tx1"/>
+                </a:solidFill>
+              </a:rPr>
+              <a:t>every one with a verbatim quote</a:t>
+            </a:r>
+            <a:endParaRPr lang="en-US" sz="1050" dirty="0"/>
+          </a:p>
+        </p:txBody>
+      </p:sp>
+      <p:sp>
+        <p:nvSpPr>
+          <p:cNvPr id="15" name="Shape 12"/>
+          <p:cNvSpPr/>
+          <p:nvPr/>
+        </p:nvSpPr>
+        <p:spPr>
+          <a:xfrm>
+            <a:off x="7283745" y="2395728"/>
+            <a:ext cx="2245035" cy="1152144"/>
+          </a:xfrm>
+          <a:prstGeom prst="rect">
+            <a:avLst/>
+          </a:prstGeom>
+          <a:solidFill>
+            <a:srgbClr val="97B7E5"/>
+          </a:solidFill>
+          <a:ln w="12700">
+            <a:solidFill>
+              <a:srgbClr val="97B7E5"/>
+            </a:solidFill>
+            <a:prstDash val="solid"/>
+          </a:ln>
+        </p:spPr>
+      </p:sp>
+      <p:sp>
+        <p:nvSpPr>
+          <p:cNvPr id="16" name="Text 13"/>
           <p:cNvSpPr txBox="1"/>
           <p:nvPr/>
         </p:nvSpPr>
         <p:spPr>
           <a:xfrm>
-            <a:off x="5175870" y="1847088"/>
-            <a:ext cx="1837212" cy="868680"/>
-          </a:xfrm>
-          <a:prstGeom prst="rect">
-            <a:avLst/>
-          </a:prstGeom>
-          <a:noFill/>
-          <a:ln/>
-        </p:spPr>
-        <p:txBody>
-          <a:bodyPr wrap="square" lIns="0" tIns="0" rIns="0" bIns="0" rtlCol="0" anchor="t"/>
-          <a:lstStyle/>
-          <a:p>
-            <a:pPr marL="0" indent="0">
+            <a:off x="7283745" y="2587752"/>
+            <a:ext cx="2245035" cy="402336"/>
+          </a:xfrm>
+          <a:prstGeom prst="rect">
+            <a:avLst/>
+          </a:prstGeom>
+          <a:noFill/>
+          <a:ln/>
+        </p:spPr>
+        <p:txBody>
+          <a:bodyPr wrap="square" lIns="0" tIns="0" rIns="0" bIns="0" rtlCol="0" anchor="ctr"/>
+          <a:lstStyle/>
+          <a:p>
+            <a:pPr marL="0" indent="0" algn="ctr">
               <a:buNone/>
             </a:pPr>
             <a:r>
-              <a:rPr lang="en-US" sz="950" dirty="0">
-                <a:solidFill>
-                  <a:srgbClr val="CADCFC"/>
-                </a:solidFill>
-              </a:rPr>
-              <a:t>A JSON schema enforced by the runtime: claims with a verbatim quote and item id, a report on each watch-out, a lean within ±10 bp. Anything else is rejected unread.</a:t>
-            </a:r>
-            <a:endParaRPr lang="en-US" sz="950" dirty="0"/>
-          </a:p>
-        </p:txBody>
-      </p:sp>
-      <p:sp>
-        <p:nvSpPr>
-          <p:cNvPr id="16" name="Shape 13"/>
+              <a:rPr lang="en-US" sz="2000" b="1" dirty="0">
+                <a:solidFill>
+                  <a:schemeClr val="tx1"/>
+                </a:solidFill>
+              </a:rPr>
+              <a:t>263 verified</a:t>
+            </a:r>
+            <a:endParaRPr lang="en-US" sz="2000" dirty="0"/>
+          </a:p>
+        </p:txBody>
+      </p:sp>
+      <p:sp>
+        <p:nvSpPr>
+          <p:cNvPr id="17" name="Text 14"/>
+          <p:cNvSpPr txBox="1"/>
+          <p:nvPr/>
+        </p:nvSpPr>
+        <p:spPr>
+          <a:xfrm>
+            <a:off x="7283745" y="3008376"/>
+            <a:ext cx="2245035" cy="292608"/>
+          </a:xfrm>
+          <a:prstGeom prst="rect">
+            <a:avLst/>
+          </a:prstGeom>
+          <a:noFill/>
+          <a:ln/>
+        </p:spPr>
+        <p:txBody>
+          <a:bodyPr wrap="square" lIns="0" tIns="0" rIns="0" bIns="0" rtlCol="0" anchor="ctr"/>
+          <a:lstStyle/>
+          <a:p>
+            <a:pPr marL="0" indent="0" algn="ctr">
+              <a:buNone/>
+            </a:pPr>
+            <a:r>
+              <a:rPr lang="en-US" sz="1050" dirty="0">
+                <a:solidFill>
+                  <a:schemeClr val="tx1"/>
+                </a:solidFill>
+              </a:rPr>
+              <a:t>100%; 0 numbers from memory</a:t>
+            </a:r>
+            <a:endParaRPr lang="en-US" sz="1050" dirty="0"/>
+          </a:p>
+        </p:txBody>
+      </p:sp>
+      <p:sp>
+        <p:nvSpPr>
+          <p:cNvPr id="18" name="Shape 15"/>
           <p:cNvSpPr/>
           <p:nvPr/>
         </p:nvSpPr>
         <p:spPr>
           <a:xfrm>
-            <a:off x="7283745" y="1298448"/>
-            <a:ext cx="2111532" cy="1463040"/>
-          </a:xfrm>
-          <a:prstGeom prst="roundRect">
-            <a:avLst>
-              <a:gd name="adj" fmla="val 6250"/>
-            </a:avLst>
+            <a:off x="9528780" y="2514600"/>
+            <a:ext cx="2111532" cy="914400"/>
+          </a:xfrm>
+          <a:prstGeom prst="rect">
+            <a:avLst/>
           </a:prstGeom>
           <a:solidFill>
             <a:srgbClr val="1E2761"/>
@@ -8065,746 +9208,90 @@
       </p:sp>
       <p:sp>
         <p:nvSpPr>
-          <p:cNvPr id="17" name="Text 14"/>
-          <p:cNvSpPr txBox="1"/>
-          <p:nvPr/>
-        </p:nvSpPr>
-        <p:spPr>
-          <a:xfrm>
-            <a:off x="7420905" y="1389888"/>
-            <a:ext cx="1837212" cy="182880"/>
-          </a:xfrm>
-          <a:prstGeom prst="rect">
-            <a:avLst/>
-          </a:prstGeom>
-          <a:noFill/>
-          <a:ln/>
-        </p:spPr>
-        <p:txBody>
-          <a:bodyPr wrap="square" lIns="0" tIns="0" rIns="0" bIns="0" rtlCol="0" anchor="t"/>
-          <a:lstStyle/>
-          <a:p>
-            <a:pPr marL="0" indent="0">
-              <a:buNone/>
-            </a:pPr>
-            <a:r>
-              <a:rPr lang="en-US" sz="900" b="1" kern="0" spc="100" dirty="0">
-                <a:solidFill>
-                  <a:srgbClr val="E9B44C"/>
-                </a:solidFill>
-              </a:rPr>
-              <a:t>STAGE 4</a:t>
-            </a:r>
-            <a:endParaRPr lang="en-US" sz="900" dirty="0"/>
-          </a:p>
-        </p:txBody>
-      </p:sp>
-      <p:sp>
-        <p:nvSpPr>
-          <p:cNvPr id="18" name="Text 15"/>
-          <p:cNvSpPr txBox="1"/>
-          <p:nvPr/>
-        </p:nvSpPr>
-        <p:spPr>
-          <a:xfrm>
-            <a:off x="7420905" y="1572768"/>
-            <a:ext cx="1837212" cy="274320"/>
-          </a:xfrm>
-          <a:prstGeom prst="rect">
-            <a:avLst/>
-          </a:prstGeom>
-          <a:noFill/>
-          <a:ln/>
-        </p:spPr>
-        <p:txBody>
-          <a:bodyPr wrap="square" lIns="0" tIns="0" rIns="0" bIns="0" rtlCol="0" anchor="t"/>
-          <a:lstStyle/>
-          <a:p>
-            <a:pPr marL="0" indent="0">
-              <a:buNone/>
-            </a:pPr>
-            <a:r>
-              <a:rPr lang="en-US" sz="1250" b="1" dirty="0">
-                <a:solidFill>
-                  <a:schemeClr val="bg1"/>
-                </a:solidFill>
-              </a:rPr>
-              <a:t>Verified by code, no LLM</a:t>
-            </a:r>
-            <a:endParaRPr lang="en-US" sz="1250" dirty="0"/>
-          </a:p>
-        </p:txBody>
-      </p:sp>
-      <p:sp>
-        <p:nvSpPr>
           <p:cNvPr id="19" name="Text 16"/>
           <p:cNvSpPr txBox="1"/>
           <p:nvPr/>
         </p:nvSpPr>
         <p:spPr>
           <a:xfrm>
-            <a:off x="7420905" y="1847088"/>
-            <a:ext cx="1837212" cy="868680"/>
-          </a:xfrm>
-          <a:prstGeom prst="rect">
-            <a:avLst/>
-          </a:prstGeom>
-          <a:noFill/>
-          <a:ln/>
-        </p:spPr>
-        <p:txBody>
-          <a:bodyPr wrap="square" lIns="0" tIns="0" rIns="0" bIns="0" rtlCol="0" anchor="t"/>
-          <a:lstStyle/>
-          <a:p>
-            <a:pPr marL="0" indent="0">
+            <a:off x="9528780" y="2587752"/>
+            <a:ext cx="2111532" cy="402336"/>
+          </a:xfrm>
+          <a:prstGeom prst="rect">
+            <a:avLst/>
+          </a:prstGeom>
+          <a:noFill/>
+          <a:ln/>
+        </p:spPr>
+        <p:txBody>
+          <a:bodyPr wrap="square" lIns="0" tIns="0" rIns="0" bIns="0" rtlCol="0" anchor="ctr"/>
+          <a:lstStyle/>
+          <a:p>
+            <a:pPr marL="0" indent="0" algn="ctr">
               <a:buNone/>
             </a:pPr>
             <a:r>
-              <a:rPr lang="en-US" sz="950" dirty="0">
+              <a:rPr lang="en-US" sz="2000" b="1" dirty="0">
+                <a:solidFill>
+                  <a:schemeClr val="bg1"/>
+                </a:solidFill>
+              </a:rPr>
+              <a:t>5 leans, ±10 bp</a:t>
+            </a:r>
+            <a:endParaRPr lang="en-US" sz="2000" dirty="0"/>
+          </a:p>
+        </p:txBody>
+      </p:sp>
+      <p:sp>
+        <p:nvSpPr>
+          <p:cNvPr id="20" name="Text 17"/>
+          <p:cNvSpPr txBox="1"/>
+          <p:nvPr/>
+        </p:nvSpPr>
+        <p:spPr>
+          <a:xfrm>
+            <a:off x="9528780" y="3008376"/>
+            <a:ext cx="2111532" cy="292608"/>
+          </a:xfrm>
+          <a:prstGeom prst="rect">
+            <a:avLst/>
+          </a:prstGeom>
+          <a:noFill/>
+          <a:ln/>
+        </p:spPr>
+        <p:txBody>
+          <a:bodyPr wrap="square" lIns="0" tIns="0" rIns="0" bIns="0" rtlCol="0" anchor="ctr"/>
+          <a:lstStyle/>
+          <a:p>
+            <a:pPr marL="0" indent="0" algn="ctr">
+              <a:buNone/>
+            </a:pPr>
+            <a:r>
+              <a:rPr lang="en-US" sz="1050" dirty="0">
                 <a:solidFill>
                   <a:srgbClr val="CADCFC"/>
                 </a:solidFill>
               </a:rPr>
-              <a:t>Each quote string-matched to its item; each number matched to the snapshot; watch-outs by id; lean clipped. A failure goes back once with the report, then stands as it is.</a:t>
-            </a:r>
-            <a:endParaRPr lang="en-US" sz="950" dirty="0"/>
-          </a:p>
-        </p:txBody>
-      </p:sp>
-      <p:sp>
-        <p:nvSpPr>
-          <p:cNvPr id="20" name="Shape 17"/>
+              <a:t>+6.0 · +6.2 · +5.8 · −1.4 · +3.4 bp</a:t>
+            </a:r>
+            <a:endParaRPr lang="en-US" sz="1050" dirty="0"/>
+          </a:p>
+        </p:txBody>
+      </p:sp>
+      <p:sp>
+        <p:nvSpPr>
+          <p:cNvPr id="21" name="Shape 18"/>
           <p:cNvSpPr/>
           <p:nvPr/>
         </p:nvSpPr>
         <p:spPr>
           <a:xfrm>
-            <a:off x="9528780" y="1298448"/>
-            <a:ext cx="2111532" cy="1463040"/>
+            <a:off x="548640" y="3931920"/>
+            <a:ext cx="4434840" cy="2377440"/>
           </a:xfrm>
           <a:prstGeom prst="roundRect">
             <a:avLst>
-              <a:gd name="adj" fmla="val 6250"/>
-            </a:avLst>
-          </a:prstGeom>
-          <a:solidFill>
-            <a:srgbClr val="1E2761"/>
-          </a:solidFill>
-          <a:ln w="12700">
-            <a:solidFill>
-              <a:srgbClr val="1E2761"/>
-            </a:solidFill>
-            <a:prstDash val="solid"/>
-          </a:ln>
-        </p:spPr>
-      </p:sp>
-      <p:sp>
-        <p:nvSpPr>
-          <p:cNvPr id="21" name="Text 18"/>
-          <p:cNvSpPr txBox="1"/>
-          <p:nvPr/>
-        </p:nvSpPr>
-        <p:spPr>
-          <a:xfrm>
-            <a:off x="9665940" y="1389888"/>
-            <a:ext cx="1837212" cy="182880"/>
-          </a:xfrm>
-          <a:prstGeom prst="rect">
-            <a:avLst/>
-          </a:prstGeom>
-          <a:noFill/>
-          <a:ln/>
-        </p:spPr>
-        <p:txBody>
-          <a:bodyPr wrap="square" lIns="0" tIns="0" rIns="0" bIns="0" rtlCol="0" anchor="t"/>
-          <a:lstStyle/>
-          <a:p>
-            <a:pPr marL="0" indent="0">
-              <a:buNone/>
-            </a:pPr>
-            <a:r>
-              <a:rPr lang="en-US" sz="900" b="1" kern="0" spc="100" dirty="0">
-                <a:solidFill>
-                  <a:srgbClr val="E9B44C"/>
-                </a:solidFill>
-              </a:rPr>
-              <a:t>STAGE 5</a:t>
-            </a:r>
-            <a:endParaRPr lang="en-US" sz="900" dirty="0"/>
-          </a:p>
-        </p:txBody>
-      </p:sp>
-      <p:sp>
-        <p:nvSpPr>
-          <p:cNvPr id="22" name="Text 19"/>
-          <p:cNvSpPr txBox="1"/>
-          <p:nvPr/>
-        </p:nvSpPr>
-        <p:spPr>
-          <a:xfrm>
-            <a:off x="9665940" y="1572768"/>
-            <a:ext cx="1837212" cy="274320"/>
-          </a:xfrm>
-          <a:prstGeom prst="rect">
-            <a:avLst/>
-          </a:prstGeom>
-          <a:noFill/>
-          <a:ln/>
-        </p:spPr>
-        <p:txBody>
-          <a:bodyPr wrap="square" lIns="0" tIns="0" rIns="0" bIns="0" rtlCol="0" anchor="t"/>
-          <a:lstStyle/>
-          <a:p>
-            <a:pPr marL="0" indent="0">
-              <a:buNone/>
-            </a:pPr>
-            <a:r>
-              <a:rPr lang="en-US" sz="1250" b="1" dirty="0">
-                <a:solidFill>
-                  <a:schemeClr val="bg1"/>
-                </a:solidFill>
-              </a:rPr>
-              <a:t>Recorded, five times</a:t>
-            </a:r>
-            <a:endParaRPr lang="en-US" sz="1250" dirty="0"/>
-          </a:p>
-        </p:txBody>
-      </p:sp>
-      <p:sp>
-        <p:nvSpPr>
-          <p:cNvPr id="23" name="Text 20"/>
-          <p:cNvSpPr txBox="1"/>
-          <p:nvPr/>
-        </p:nvSpPr>
-        <p:spPr>
-          <a:xfrm>
-            <a:off x="9665940" y="1847088"/>
-            <a:ext cx="1837212" cy="868680"/>
-          </a:xfrm>
-          <a:prstGeom prst="rect">
-            <a:avLst/>
-          </a:prstGeom>
-          <a:noFill/>
-          <a:ln/>
-        </p:spPr>
-        <p:txBody>
-          <a:bodyPr wrap="square" lIns="0" tIns="0" rIns="0" bIns="0" rtlCol="0" anchor="t"/>
-          <a:lstStyle/>
-          <a:p>
-            <a:pPr marL="0" indent="0">
-              <a:buNone/>
-            </a:pPr>
-            <a:r>
-              <a:rPr lang="en-US" sz="950" dirty="0">
-                <a:solidFill>
-                  <a:srgbClr val="CADCFC"/>
-                </a:solidFill>
-              </a:rPr>
-              <a:t>Stored under a hash of the prompt with the full output; replays exactly. Five identical runs measure repeatability. Only then may a lean touch the number.</a:t>
-            </a:r>
-            <a:endParaRPr lang="en-US" sz="950" dirty="0"/>
-          </a:p>
-        </p:txBody>
-      </p:sp>
-      <p:sp>
-        <p:nvSpPr>
-          <p:cNvPr id="24" name="Shape 21"/>
-          <p:cNvSpPr/>
-          <p:nvPr/>
-        </p:nvSpPr>
-        <p:spPr>
-          <a:xfrm>
-            <a:off x="548640" y="2948940"/>
-            <a:ext cx="2245035" cy="1234440"/>
-          </a:xfrm>
-          <a:prstGeom prst="rect">
-            <a:avLst/>
-          </a:prstGeom>
-          <a:solidFill>
-            <a:srgbClr val="CADCFC"/>
-          </a:solidFill>
-          <a:ln w="12700">
-            <a:solidFill>
-              <a:srgbClr val="CADCFC"/>
-            </a:solidFill>
-            <a:prstDash val="solid"/>
-          </a:ln>
-        </p:spPr>
-      </p:sp>
-      <p:sp>
-        <p:nvSpPr>
-          <p:cNvPr id="25" name="Text 22"/>
-          <p:cNvSpPr txBox="1"/>
-          <p:nvPr/>
-        </p:nvSpPr>
-        <p:spPr>
-          <a:xfrm>
-            <a:off x="548640" y="3218688"/>
-            <a:ext cx="2245035" cy="365760"/>
-          </a:xfrm>
-          <a:prstGeom prst="rect">
-            <a:avLst/>
-          </a:prstGeom>
-          <a:noFill/>
-          <a:ln/>
-        </p:spPr>
-        <p:txBody>
-          <a:bodyPr wrap="square" lIns="0" tIns="0" rIns="0" bIns="0" rtlCol="0" anchor="ctr"/>
-          <a:lstStyle/>
-          <a:p>
-            <a:pPr marL="0" indent="0" algn="ctr">
-              <a:buNone/>
-            </a:pPr>
-            <a:r>
-              <a:rPr lang="en-US" sz="1800" b="1" dirty="0">
-                <a:solidFill>
-                  <a:schemeClr val="tx1"/>
-                </a:solidFill>
-              </a:rPr>
-              <a:t>25 runs</a:t>
-            </a:r>
-            <a:endParaRPr lang="en-US" sz="1800" dirty="0"/>
-          </a:p>
-        </p:txBody>
-      </p:sp>
-      <p:sp>
-        <p:nvSpPr>
-          <p:cNvPr id="26" name="Text 23"/>
-          <p:cNvSpPr txBox="1"/>
-          <p:nvPr/>
-        </p:nvSpPr>
-        <p:spPr>
-          <a:xfrm>
-            <a:off x="548640" y="3584448"/>
-            <a:ext cx="2245035" cy="274320"/>
-          </a:xfrm>
-          <a:prstGeom prst="rect">
-            <a:avLst/>
-          </a:prstGeom>
-          <a:noFill/>
-          <a:ln/>
-        </p:spPr>
-        <p:txBody>
-          <a:bodyPr wrap="square" lIns="0" tIns="0" rIns="0" bIns="0" rtlCol="0" anchor="ctr"/>
-          <a:lstStyle/>
-          <a:p>
-            <a:pPr marL="0" indent="0" algn="ctr">
-              <a:buNone/>
-            </a:pPr>
-            <a:r>
-              <a:rPr lang="en-US" sz="1000" dirty="0">
-                <a:solidFill>
-                  <a:schemeClr val="tx1"/>
-                </a:solidFill>
-              </a:rPr>
-              <a:t>5 specialists × 5 identical runs</a:t>
-            </a:r>
-            <a:endParaRPr lang="en-US" sz="1000" dirty="0"/>
-          </a:p>
-        </p:txBody>
-      </p:sp>
-      <p:sp>
-        <p:nvSpPr>
-          <p:cNvPr id="27" name="Shape 24"/>
-          <p:cNvSpPr/>
-          <p:nvPr/>
-        </p:nvSpPr>
-        <p:spPr>
-          <a:xfrm>
-            <a:off x="2793675" y="2985516"/>
-            <a:ext cx="2245035" cy="1161288"/>
-          </a:xfrm>
-          <a:prstGeom prst="rect">
-            <a:avLst/>
-          </a:prstGeom>
-          <a:solidFill>
-            <a:srgbClr val="B9CEF3"/>
-          </a:solidFill>
-          <a:ln w="12700">
-            <a:solidFill>
-              <a:srgbClr val="B9CEF3"/>
-            </a:solidFill>
-            <a:prstDash val="solid"/>
-          </a:ln>
-        </p:spPr>
-      </p:sp>
-      <p:sp>
-        <p:nvSpPr>
-          <p:cNvPr id="28" name="Text 25"/>
-          <p:cNvSpPr txBox="1"/>
-          <p:nvPr/>
-        </p:nvSpPr>
-        <p:spPr>
-          <a:xfrm>
-            <a:off x="2793675" y="3218688"/>
-            <a:ext cx="2245035" cy="365760"/>
-          </a:xfrm>
-          <a:prstGeom prst="rect">
-            <a:avLst/>
-          </a:prstGeom>
-          <a:noFill/>
-          <a:ln/>
-        </p:spPr>
-        <p:txBody>
-          <a:bodyPr wrap="square" lIns="0" tIns="0" rIns="0" bIns="0" rtlCol="0" anchor="ctr"/>
-          <a:lstStyle/>
-          <a:p>
-            <a:pPr marL="0" indent="0" algn="ctr">
-              <a:buNone/>
-            </a:pPr>
-            <a:r>
-              <a:rPr lang="en-US" sz="1800" b="1" dirty="0">
-                <a:solidFill>
-                  <a:schemeClr val="tx1"/>
-                </a:solidFill>
-              </a:rPr>
-              <a:t>25 prompts</a:t>
-            </a:r>
-            <a:endParaRPr lang="en-US" sz="1800" dirty="0"/>
-          </a:p>
-        </p:txBody>
-      </p:sp>
-      <p:sp>
-        <p:nvSpPr>
-          <p:cNvPr id="29" name="Text 26"/>
-          <p:cNvSpPr txBox="1"/>
-          <p:nvPr/>
-        </p:nvSpPr>
-        <p:spPr>
-          <a:xfrm>
-            <a:off x="2793675" y="3584448"/>
-            <a:ext cx="2245035" cy="274320"/>
-          </a:xfrm>
-          <a:prstGeom prst="rect">
-            <a:avLst/>
-          </a:prstGeom>
-          <a:noFill/>
-          <a:ln/>
-        </p:spPr>
-        <p:txBody>
-          <a:bodyPr wrap="square" lIns="0" tIns="0" rIns="0" bIns="0" rtlCol="0" anchor="ctr"/>
-          <a:lstStyle/>
-          <a:p>
-            <a:pPr marL="0" indent="0" algn="ctr">
-              <a:buNone/>
-            </a:pPr>
-            <a:r>
-              <a:rPr lang="en-US" sz="1000" dirty="0">
-                <a:solidFill>
-                  <a:schemeClr val="tx1"/>
-                </a:solidFill>
-              </a:rPr>
-              <a:t>one slice each, hashed</a:t>
-            </a:r>
-            <a:endParaRPr lang="en-US" sz="1000" dirty="0"/>
-          </a:p>
-        </p:txBody>
-      </p:sp>
-      <p:sp>
-        <p:nvSpPr>
-          <p:cNvPr id="30" name="Shape 27"/>
-          <p:cNvSpPr/>
-          <p:nvPr/>
-        </p:nvSpPr>
-        <p:spPr>
-          <a:xfrm>
-            <a:off x="5038710" y="3031236"/>
-            <a:ext cx="2245035" cy="1069848"/>
-          </a:xfrm>
-          <a:prstGeom prst="rect">
-            <a:avLst/>
-          </a:prstGeom>
-          <a:solidFill>
-            <a:srgbClr val="A8C3EC"/>
-          </a:solidFill>
-          <a:ln w="12700">
-            <a:solidFill>
-              <a:srgbClr val="A8C3EC"/>
-            </a:solidFill>
-            <a:prstDash val="solid"/>
-          </a:ln>
-        </p:spPr>
-      </p:sp>
-      <p:sp>
-        <p:nvSpPr>
-          <p:cNvPr id="31" name="Text 28"/>
-          <p:cNvSpPr txBox="1"/>
-          <p:nvPr/>
-        </p:nvSpPr>
-        <p:spPr>
-          <a:xfrm>
-            <a:off x="5038710" y="3218688"/>
-            <a:ext cx="2245035" cy="365760"/>
-          </a:xfrm>
-          <a:prstGeom prst="rect">
-            <a:avLst/>
-          </a:prstGeom>
-          <a:noFill/>
-          <a:ln/>
-        </p:spPr>
-        <p:txBody>
-          <a:bodyPr wrap="square" lIns="0" tIns="0" rIns="0" bIns="0" rtlCol="0" anchor="ctr"/>
-          <a:lstStyle/>
-          <a:p>
-            <a:pPr marL="0" indent="0" algn="ctr">
-              <a:buNone/>
-            </a:pPr>
-            <a:r>
-              <a:rPr lang="en-US" sz="1800" b="1" dirty="0">
-                <a:solidFill>
-                  <a:schemeClr val="tx1"/>
-                </a:solidFill>
-              </a:rPr>
-              <a:t>263 claims</a:t>
-            </a:r>
-            <a:endParaRPr lang="en-US" sz="1800" dirty="0"/>
-          </a:p>
-        </p:txBody>
-      </p:sp>
-      <p:sp>
-        <p:nvSpPr>
-          <p:cNvPr id="32" name="Text 29"/>
-          <p:cNvSpPr txBox="1"/>
-          <p:nvPr/>
-        </p:nvSpPr>
-        <p:spPr>
-          <a:xfrm>
-            <a:off x="5038710" y="3584448"/>
-            <a:ext cx="2245035" cy="274320"/>
-          </a:xfrm>
-          <a:prstGeom prst="rect">
-            <a:avLst/>
-          </a:prstGeom>
-          <a:noFill/>
-          <a:ln/>
-        </p:spPr>
-        <p:txBody>
-          <a:bodyPr wrap="square" lIns="0" tIns="0" rIns="0" bIns="0" rtlCol="0" anchor="ctr"/>
-          <a:lstStyle/>
-          <a:p>
-            <a:pPr marL="0" indent="0" algn="ctr">
-              <a:buNone/>
-            </a:pPr>
-            <a:r>
-              <a:rPr lang="en-US" sz="1000" dirty="0">
-                <a:solidFill>
-                  <a:schemeClr val="tx1"/>
-                </a:solidFill>
-              </a:rPr>
-              <a:t>every one with a verbatim quote</a:t>
-            </a:r>
-            <a:endParaRPr lang="en-US" sz="1000" dirty="0"/>
-          </a:p>
-        </p:txBody>
-      </p:sp>
-      <p:sp>
-        <p:nvSpPr>
-          <p:cNvPr id="33" name="Shape 30"/>
-          <p:cNvSpPr/>
-          <p:nvPr/>
-        </p:nvSpPr>
-        <p:spPr>
-          <a:xfrm>
-            <a:off x="7283745" y="3063240"/>
-            <a:ext cx="2245035" cy="1005840"/>
-          </a:xfrm>
-          <a:prstGeom prst="rect">
-            <a:avLst/>
-          </a:prstGeom>
-          <a:solidFill>
-            <a:srgbClr val="97B7E5"/>
-          </a:solidFill>
-          <a:ln w="12700">
-            <a:solidFill>
-              <a:srgbClr val="97B7E5"/>
-            </a:solidFill>
-            <a:prstDash val="solid"/>
-          </a:ln>
-        </p:spPr>
-      </p:sp>
-      <p:sp>
-        <p:nvSpPr>
-          <p:cNvPr id="34" name="Text 31"/>
-          <p:cNvSpPr txBox="1"/>
-          <p:nvPr/>
-        </p:nvSpPr>
-        <p:spPr>
-          <a:xfrm>
-            <a:off x="7283745" y="3218688"/>
-            <a:ext cx="2245035" cy="365760"/>
-          </a:xfrm>
-          <a:prstGeom prst="rect">
-            <a:avLst/>
-          </a:prstGeom>
-          <a:noFill/>
-          <a:ln/>
-        </p:spPr>
-        <p:txBody>
-          <a:bodyPr wrap="square" lIns="0" tIns="0" rIns="0" bIns="0" rtlCol="0" anchor="ctr"/>
-          <a:lstStyle/>
-          <a:p>
-            <a:pPr marL="0" indent="0" algn="ctr">
-              <a:buNone/>
-            </a:pPr>
-            <a:r>
-              <a:rPr lang="en-US" sz="1800" b="1" dirty="0">
-                <a:solidFill>
-                  <a:schemeClr val="tx1"/>
-                </a:solidFill>
-              </a:rPr>
-              <a:t>263 verified</a:t>
-            </a:r>
-            <a:endParaRPr lang="en-US" sz="1800" dirty="0"/>
-          </a:p>
-        </p:txBody>
-      </p:sp>
-      <p:sp>
-        <p:nvSpPr>
-          <p:cNvPr id="35" name="Text 32"/>
-          <p:cNvSpPr txBox="1"/>
-          <p:nvPr/>
-        </p:nvSpPr>
-        <p:spPr>
-          <a:xfrm>
-            <a:off x="7283745" y="3584448"/>
-            <a:ext cx="2245035" cy="274320"/>
-          </a:xfrm>
-          <a:prstGeom prst="rect">
-            <a:avLst/>
-          </a:prstGeom>
-          <a:noFill/>
-          <a:ln/>
-        </p:spPr>
-        <p:txBody>
-          <a:bodyPr wrap="square" lIns="0" tIns="0" rIns="0" bIns="0" rtlCol="0" anchor="ctr"/>
-          <a:lstStyle/>
-          <a:p>
-            <a:pPr marL="0" indent="0" algn="ctr">
-              <a:buNone/>
-            </a:pPr>
-            <a:r>
-              <a:rPr lang="en-US" sz="1000" dirty="0">
-                <a:solidFill>
-                  <a:schemeClr val="tx1"/>
-                </a:solidFill>
-              </a:rPr>
-              <a:t>100%; 0 numbers from memory</a:t>
-            </a:r>
-            <a:endParaRPr lang="en-US" sz="1000" dirty="0"/>
-          </a:p>
-        </p:txBody>
-      </p:sp>
-      <p:sp>
-        <p:nvSpPr>
-          <p:cNvPr id="36" name="Shape 33"/>
-          <p:cNvSpPr/>
-          <p:nvPr/>
-        </p:nvSpPr>
-        <p:spPr>
-          <a:xfrm>
-            <a:off x="9528780" y="3191256"/>
-            <a:ext cx="2111532" cy="749808"/>
-          </a:xfrm>
-          <a:prstGeom prst="rect">
-            <a:avLst/>
-          </a:prstGeom>
-          <a:solidFill>
-            <a:srgbClr val="1E2761"/>
-          </a:solidFill>
-          <a:ln w="12700">
-            <a:solidFill>
-              <a:srgbClr val="1E2761"/>
-            </a:solidFill>
-            <a:prstDash val="solid"/>
-          </a:ln>
-        </p:spPr>
-      </p:sp>
-      <p:sp>
-        <p:nvSpPr>
-          <p:cNvPr id="37" name="Text 34"/>
-          <p:cNvSpPr txBox="1"/>
-          <p:nvPr/>
-        </p:nvSpPr>
-        <p:spPr>
-          <a:xfrm>
-            <a:off x="9528780" y="3218688"/>
-            <a:ext cx="2111532" cy="365760"/>
-          </a:xfrm>
-          <a:prstGeom prst="rect">
-            <a:avLst/>
-          </a:prstGeom>
-          <a:noFill/>
-          <a:ln/>
-        </p:spPr>
-        <p:txBody>
-          <a:bodyPr wrap="square" lIns="0" tIns="0" rIns="0" bIns="0" rtlCol="0" anchor="ctr"/>
-          <a:lstStyle/>
-          <a:p>
-            <a:pPr marL="0" indent="0" algn="ctr">
-              <a:buNone/>
-            </a:pPr>
-            <a:r>
-              <a:rPr lang="en-US" sz="1800" b="1" dirty="0">
-                <a:solidFill>
-                  <a:schemeClr val="bg1"/>
-                </a:solidFill>
-              </a:rPr>
-              <a:t>5 direction calls</a:t>
-            </a:r>
-            <a:endParaRPr lang="en-US" sz="1800" dirty="0"/>
-          </a:p>
-        </p:txBody>
-      </p:sp>
-      <p:sp>
-        <p:nvSpPr>
-          <p:cNvPr id="38" name="Text 35"/>
-          <p:cNvSpPr txBox="1"/>
-          <p:nvPr/>
-        </p:nvSpPr>
-        <p:spPr>
-          <a:xfrm>
-            <a:off x="9528780" y="3584448"/>
-            <a:ext cx="2111532" cy="274320"/>
-          </a:xfrm>
-          <a:prstGeom prst="rect">
-            <a:avLst/>
-          </a:prstGeom>
-          <a:noFill/>
-          <a:ln/>
-        </p:spPr>
-        <p:txBody>
-          <a:bodyPr wrap="square" lIns="0" tIns="0" rIns="0" bIns="0" rtlCol="0" anchor="ctr"/>
-          <a:lstStyle/>
-          <a:p>
-            <a:pPr marL="0" indent="0" algn="ctr">
-              <a:buNone/>
-            </a:pPr>
-            <a:r>
-              <a:rPr lang="en-US" sz="1000" dirty="0">
-                <a:solidFill>
-                  <a:srgbClr val="CADCFC"/>
-                </a:solidFill>
-              </a:rPr>
-              <a:t>+6.0 · +6.2 · +5.8 · −1.4 · +3.4 bp</a:t>
-            </a:r>
-            <a:endParaRPr lang="en-US" sz="1000" dirty="0"/>
-          </a:p>
-        </p:txBody>
-      </p:sp>
-      <p:sp>
-        <p:nvSpPr>
-          <p:cNvPr id="39" name="Shape 36"/>
-          <p:cNvSpPr/>
-          <p:nvPr/>
-        </p:nvSpPr>
-        <p:spPr>
-          <a:xfrm>
-            <a:off x="548640" y="4526280"/>
-            <a:ext cx="4434840" cy="1737360"/>
-          </a:xfrm>
-          <a:prstGeom prst="roundRect">
-            <a:avLst>
-              <a:gd name="adj" fmla="val 6316"/>
+              <a:gd name="adj" fmla="val 4615"/>
             </a:avLst>
           </a:prstGeom>
           <a:solidFill>
@@ -8827,13 +9314,13 @@
       </p:sp>
       <p:sp>
         <p:nvSpPr>
-          <p:cNvPr id="40" name="Text 37"/>
+          <p:cNvPr id="22" name="Text 19"/>
           <p:cNvSpPr txBox="1"/>
           <p:nvPr/>
         </p:nvSpPr>
         <p:spPr>
           <a:xfrm>
-            <a:off x="704088" y="4617720"/>
+            <a:off x="704088" y="4041648"/>
             <a:ext cx="4114800" cy="182880"/>
           </a:xfrm>
           <a:prstGeom prst="rect">
@@ -8876,22 +9363,22 @@
           </p:nvPr>
         </p:nvGraphicFramePr>
         <p:xfrm>
-          <a:off x="704088" y="4873752"/>
-          <a:ext cx="2057400" cy="914400"/>
+          <a:off x="704088" y="4315968"/>
+          <a:ext cx="2103120" cy="914400"/>
         </p:xfrm>
         <a:graphic>
           <a:graphicData uri="http://schemas.openxmlformats.org/drawingml/2006/table">
             <a:tbl>
               <a:tblPr/>
               <a:tblGrid>
-                <a:gridCol w="1325880">
+                <a:gridCol w="1280160">
                   <a:extLst>
                     <a:ext uri="{9D8B030D-6E8A-4147-A177-3AD203B41FA5}">
                       <a16:colId xmlns:a16="http://schemas.microsoft.com/office/drawing/2014/main" val="20000"/>
                     </a:ext>
                   </a:extLst>
                 </a:gridCol>
-                <a:gridCol w="731520">
+                <a:gridCol w="822960">
                   <a:extLst>
                     <a:ext uri="{9D8B030D-6E8A-4147-A177-3AD203B41FA5}">
                       <a16:colId xmlns:a16="http://schemas.microsoft.com/office/drawing/2014/main" val="20001"/>
@@ -8899,7 +9386,7 @@
                   </a:extLst>
                 </a:gridCol>
               </a:tblGrid>
-              <a:tr h="201168">
+              <a:tr h="274320">
                 <a:tc>
                   <a:txBody>
                     <a:bodyPr/>
@@ -8909,14 +9396,14 @@
                         <a:buNone/>
                       </a:pPr>
                       <a:r>
-                        <a:rPr lang="en-US" sz="950" dirty="0">
+                        <a:rPr lang="en-US" sz="1100" dirty="0">
                           <a:solidFill>
                             <a:srgbClr val="1B1F2A"/>
                           </a:solidFill>
                         </a:rPr>
                         <a:t>Communications</a:t>
                       </a:r>
-                      <a:endParaRPr lang="en-US" sz="950" dirty="0"/>
+                      <a:endParaRPr lang="en-US" sz="1100" dirty="0"/>
                     </a:p>
                   </a:txBody>
                   <a:tcPr marL="18288" marR="18288" marT="18288" marB="18288">
@@ -8943,14 +9430,14 @@
                         <a:buNone/>
                       </a:pPr>
                       <a:r>
-                        <a:rPr lang="en-US" sz="950" b="1" dirty="0">
+                        <a:rPr lang="en-US" sz="1100" b="1" dirty="0">
                           <a:solidFill>
                             <a:srgbClr val="1B1F2A"/>
                           </a:solidFill>
                         </a:rPr>
                         <a:t>+6.0 hike</a:t>
                       </a:r>
-                      <a:endParaRPr lang="en-US" sz="950" dirty="0"/>
+                      <a:endParaRPr lang="en-US" sz="1100" dirty="0"/>
                     </a:p>
                   </a:txBody>
                   <a:tcPr marL="18288" marR="18288" marT="18288" marB="18288">
@@ -8974,7 +9461,7 @@
                   </a:ext>
                 </a:extLst>
               </a:tr>
-              <a:tr h="201168">
+              <a:tr h="274320">
                 <a:tc>
                   <a:txBody>
                     <a:bodyPr/>
@@ -8984,14 +9471,14 @@
                         <a:buNone/>
                       </a:pPr>
                       <a:r>
-                        <a:rPr lang="en-US" sz="950" dirty="0">
+                        <a:rPr lang="en-US" sz="1100" dirty="0">
                           <a:solidFill>
                             <a:srgbClr val="1B1F2A"/>
                           </a:solidFill>
                         </a:rPr>
                         <a:t>Minutes</a:t>
                       </a:r>
-                      <a:endParaRPr lang="en-US" sz="950" dirty="0"/>
+                      <a:endParaRPr lang="en-US" sz="1100" dirty="0"/>
                     </a:p>
                   </a:txBody>
                   <a:tcPr marL="18288" marR="18288" marT="18288" marB="18288">
@@ -9018,14 +9505,14 @@
                         <a:buNone/>
                       </a:pPr>
                       <a:r>
-                        <a:rPr lang="en-US" sz="950" b="1" dirty="0">
+                        <a:rPr lang="en-US" sz="1100" b="1" dirty="0">
                           <a:solidFill>
                             <a:srgbClr val="1B1F2A"/>
                           </a:solidFill>
                         </a:rPr>
                         <a:t>+6.2 hike</a:t>
                       </a:r>
-                      <a:endParaRPr lang="en-US" sz="950" dirty="0"/>
+                      <a:endParaRPr lang="en-US" sz="1100" dirty="0"/>
                     </a:p>
                   </a:txBody>
                   <a:tcPr marL="18288" marR="18288" marT="18288" marB="18288">
@@ -9049,7 +9536,7 @@
                   </a:ext>
                 </a:extLst>
               </a:tr>
-              <a:tr h="201168">
+              <a:tr h="274320">
                 <a:tc>
                   <a:txBody>
                     <a:bodyPr/>
@@ -9059,14 +9546,14 @@
                         <a:buNone/>
                       </a:pPr>
                       <a:r>
-                        <a:rPr lang="en-US" sz="950" dirty="0">
+                        <a:rPr lang="en-US" sz="1100" dirty="0">
                           <a:solidFill>
                             <a:srgbClr val="1B1F2A"/>
                           </a:solidFill>
                         </a:rPr>
                         <a:t>Inflation</a:t>
                       </a:r>
-                      <a:endParaRPr lang="en-US" sz="950" dirty="0"/>
+                      <a:endParaRPr lang="en-US" sz="1100" dirty="0"/>
                     </a:p>
                   </a:txBody>
                   <a:tcPr marL="18288" marR="18288" marT="18288" marB="18288">
@@ -9093,14 +9580,14 @@
                         <a:buNone/>
                       </a:pPr>
                       <a:r>
-                        <a:rPr lang="en-US" sz="950" b="1" dirty="0">
+                        <a:rPr lang="en-US" sz="1100" b="1" dirty="0">
                           <a:solidFill>
                             <a:srgbClr val="1B1F2A"/>
                           </a:solidFill>
                         </a:rPr>
                         <a:t>+5.8 hike</a:t>
                       </a:r>
-                      <a:endParaRPr lang="en-US" sz="950" dirty="0"/>
+                      <a:endParaRPr lang="en-US" sz="1100" dirty="0"/>
                     </a:p>
                   </a:txBody>
                   <a:tcPr marL="18288" marR="18288" marT="18288" marB="18288">
@@ -9124,7 +9611,7 @@
                   </a:ext>
                 </a:extLst>
               </a:tr>
-              <a:tr h="201168">
+              <a:tr h="274320">
                 <a:tc>
                   <a:txBody>
                     <a:bodyPr/>
@@ -9134,14 +9621,14 @@
                         <a:buNone/>
                       </a:pPr>
                       <a:r>
-                        <a:rPr lang="en-US" sz="950" dirty="0">
+                        <a:rPr lang="en-US" sz="1100" dirty="0">
                           <a:solidFill>
                             <a:srgbClr val="1B1F2A"/>
                           </a:solidFill>
                         </a:rPr>
                         <a:t>Financial conditions</a:t>
                       </a:r>
-                      <a:endParaRPr lang="en-US" sz="950" dirty="0"/>
+                      <a:endParaRPr lang="en-US" sz="1100" dirty="0"/>
                     </a:p>
                   </a:txBody>
                   <a:tcPr marL="18288" marR="18288" marT="18288" marB="18288">
@@ -9168,14 +9655,14 @@
                         <a:buNone/>
                       </a:pPr>
                       <a:r>
-                        <a:rPr lang="en-US" sz="950" b="1" dirty="0">
+                        <a:rPr lang="en-US" sz="1100" b="1" dirty="0">
                           <a:solidFill>
                             <a:srgbClr val="1B1F2A"/>
                           </a:solidFill>
                         </a:rPr>
                         <a:t>+3.4 hike</a:t>
                       </a:r>
-                      <a:endParaRPr lang="en-US" sz="950" dirty="0"/>
+                      <a:endParaRPr lang="en-US" sz="1100" dirty="0"/>
                     </a:p>
                   </a:txBody>
                   <a:tcPr marL="18288" marR="18288" marT="18288" marB="18288">
@@ -9199,7 +9686,7 @@
                   </a:ext>
                 </a:extLst>
               </a:tr>
-              <a:tr h="201168">
+              <a:tr h="274320">
                 <a:tc>
                   <a:txBody>
                     <a:bodyPr/>
@@ -9209,14 +9696,14 @@
                         <a:buNone/>
                       </a:pPr>
                       <a:r>
-                        <a:rPr lang="en-US" sz="950" dirty="0">
+                        <a:rPr lang="en-US" sz="1100" dirty="0">
                           <a:solidFill>
                             <a:srgbClr val="2C6E49"/>
                           </a:solidFill>
                         </a:rPr>
                         <a:t>Labour market</a:t>
                       </a:r>
-                      <a:endParaRPr lang="en-US" sz="950" dirty="0"/>
+                      <a:endParaRPr lang="en-US" sz="1100" dirty="0"/>
                     </a:p>
                   </a:txBody>
                   <a:tcPr marL="18288" marR="18288" marT="18288" marB="18288">
@@ -9243,14 +9730,14 @@
                         <a:buNone/>
                       </a:pPr>
                       <a:r>
-                        <a:rPr lang="en-US" sz="950" b="1" dirty="0">
+                        <a:rPr lang="en-US" sz="1100" b="1" dirty="0">
                           <a:solidFill>
                             <a:srgbClr val="2C6E49"/>
                           </a:solidFill>
                         </a:rPr>
-                        <a:t>−1.4 no hike</a:t>
+                        <a:t>−1.4 hold</a:t>
                       </a:r>
-                      <a:endParaRPr lang="en-US" sz="950" dirty="0"/>
+                      <a:endParaRPr lang="en-US" sz="1100" dirty="0"/>
                     </a:p>
                   </a:txBody>
                   <a:tcPr marL="18288" marR="18288" marT="18288" marB="18288">
@@ -9274,7 +9761,7 @@
                   </a:ext>
                 </a:extLst>
               </a:tr>
-              <a:tr h="201168">
+              <a:tr h="274320">
                 <a:tc>
                   <a:txBody>
                     <a:bodyPr/>
@@ -9284,14 +9771,14 @@
                         <a:buNone/>
                       </a:pPr>
                       <a:r>
-                        <a:rPr lang="en-US" sz="950" b="1" dirty="0">
+                        <a:rPr lang="en-US" sz="1100" b="1" dirty="0">
                           <a:solidFill>
                             <a:srgbClr val="1B1F2A"/>
                           </a:solidFill>
                         </a:rPr>
                         <a:t>Equal-weight mean</a:t>
                       </a:r>
-                      <a:endParaRPr lang="en-US" sz="950" dirty="0"/>
+                      <a:endParaRPr lang="en-US" sz="1100" dirty="0"/>
                     </a:p>
                   </a:txBody>
                   <a:tcPr marL="18288" marR="18288" marT="18288" marB="18288">
@@ -9318,14 +9805,14 @@
                         <a:buNone/>
                       </a:pPr>
                       <a:r>
-                        <a:rPr lang="en-US" sz="950" b="1" dirty="0">
+                        <a:rPr lang="en-US" sz="1100" b="1" dirty="0">
                           <a:solidFill>
                             <a:srgbClr val="1B1F2A"/>
                           </a:solidFill>
                         </a:rPr>
                         <a:t>+4.0 bp</a:t>
                       </a:r>
-                      <a:endParaRPr lang="en-US" sz="950" dirty="0"/>
+                      <a:endParaRPr lang="en-US" sz="1100" dirty="0"/>
                     </a:p>
                   </a:txBody>
                   <a:tcPr marL="18288" marR="18288" marT="18288" marB="18288">
@@ -9355,14 +9842,14 @@
       </p:graphicFrame>
       <p:sp>
         <p:nvSpPr>
-          <p:cNvPr id="42" name="Text 38"/>
+          <p:cNvPr id="24" name="Text 20"/>
           <p:cNvSpPr txBox="1"/>
           <p:nvPr/>
         </p:nvSpPr>
         <p:spPr>
           <a:xfrm>
-            <a:off x="2880360" y="4873752"/>
-            <a:ext cx="1965960" cy="822960"/>
+            <a:off x="2880360" y="4315968"/>
+            <a:ext cx="1965960" cy="1188720"/>
           </a:xfrm>
           <a:prstGeom prst="rect">
             <a:avLst/>
@@ -9378,7 +9865,7 @@
               <a:buNone/>
             </a:pPr>
             <a:r>
-              <a:rPr lang="en-US" sz="950" b="1" dirty="0">
+              <a:rPr lang="en-US" sz="1050" b="1" dirty="0">
                 <a:solidFill>
                   <a:schemeClr val="tx1"/>
                 </a:solidFill>
@@ -9386,49 +9873,49 @@
               <a:t>Four say hike, one says hold back. </a:t>
             </a:r>
             <a:r>
-              <a:rPr lang="en-US" sz="950" dirty="0">
+              <a:rPr lang="en-US" sz="1050" dirty="0">
                 <a:solidFill>
                   <a:schemeClr val="tx1"/>
                 </a:solidFill>
               </a:rPr>
-              <a:t>Plain average, one vote each: +4.0 bp.</a:t>
-            </a:r>
-            <a:endParaRPr lang="en-US" sz="950" dirty="0"/>
+              <a:t>Plain average, one vote each: +4.0.</a:t>
+            </a:r>
+            <a:endParaRPr lang="en-US" sz="1050" dirty="0"/>
           </a:p>
           <a:p>
             <a:pPr marL="0" indent="0">
               <a:buNone/>
             </a:pPr>
             <a:r>
-              <a:rPr lang="en-US" sz="950" b="1" dirty="0">
+              <a:rPr lang="en-US" sz="1050" b="1" dirty="0">
                 <a:solidFill>
                   <a:schemeClr val="tx1"/>
                 </a:solidFill>
               </a:rPr>
-              <a:t>+4.0 bp = 4.0 points of probability </a:t>
-            </a:r>
-            <a:r>
-              <a:rPr lang="en-US" sz="950" dirty="0">
+              <a:t>Each point of lean moves one point of probability </a:t>
+            </a:r>
+            <a:r>
+              <a:rPr lang="en-US" sz="1050" dirty="0">
                 <a:solidFill>
                   <a:schemeClr val="tx1"/>
                 </a:solidFill>
               </a:rPr>
-              <a:t>moved toward a hike, after the pool:</a:t>
-            </a:r>
-            <a:endParaRPr lang="en-US" sz="950" dirty="0"/>
-          </a:p>
-        </p:txBody>
-      </p:sp>
-      <p:sp>
-        <p:nvSpPr>
-          <p:cNvPr id="43" name="Text 39"/>
+              <a:t>from the hold side to the hike side, by rule, capped at 10. So +4.0 moves 4.0 points, after the pool:</a:t>
+            </a:r>
+            <a:endParaRPr lang="en-US" sz="1050" dirty="0"/>
+          </a:p>
+        </p:txBody>
+      </p:sp>
+      <p:sp>
+        <p:nvSpPr>
+          <p:cNvPr id="25" name="Text 21"/>
           <p:cNvSpPr txBox="1"/>
           <p:nvPr/>
         </p:nvSpPr>
         <p:spPr>
           <a:xfrm>
-            <a:off x="2880360" y="5715000"/>
-            <a:ext cx="2011680" cy="274320"/>
+            <a:off x="2880360" y="5559552"/>
+            <a:ext cx="2011680" cy="329184"/>
           </a:xfrm>
           <a:prstGeom prst="rect">
             <a:avLst/>
@@ -9444,7 +9931,7 @@
               <a:buNone/>
             </a:pPr>
             <a:r>
-              <a:rPr lang="en-US" sz="1300" b="1" dirty="0">
+              <a:rPr lang="en-US" sz="1400" b="1" dirty="0">
                 <a:solidFill>
                   <a:schemeClr val="tx2"/>
                 </a:solidFill>
@@ -9454,20 +9941,20 @@
               </a:rPr>
               <a:t>+25 bp: 20.2% → 22.4%</a:t>
             </a:r>
-            <a:endParaRPr lang="en-US" sz="1300" dirty="0"/>
-          </a:p>
-        </p:txBody>
-      </p:sp>
-      <p:sp>
-        <p:nvSpPr>
-          <p:cNvPr id="44" name="Text 40"/>
+            <a:endParaRPr lang="en-US" sz="1400" dirty="0"/>
+          </a:p>
+        </p:txBody>
+      </p:sp>
+      <p:sp>
+        <p:nvSpPr>
+          <p:cNvPr id="26" name="Text 22"/>
           <p:cNvSpPr txBox="1"/>
           <p:nvPr/>
         </p:nvSpPr>
         <p:spPr>
           <a:xfrm>
-            <a:off x="2880360" y="5989320"/>
-            <a:ext cx="2011680" cy="237744"/>
+            <a:off x="2880360" y="5897880"/>
+            <a:ext cx="2011680" cy="365760"/>
           </a:xfrm>
           <a:prstGeom prst="rect">
             <a:avLst/>
@@ -9483,31 +9970,31 @@
               <a:buNone/>
             </a:pPr>
             <a:r>
-              <a:rPr lang="en-US" sz="900" dirty="0">
+              <a:rPr lang="en-US" sz="950" dirty="0">
                 <a:solidFill>
                   <a:schemeClr val="accent4"/>
                 </a:solidFill>
               </a:rPr>
               <a:t>+50 bp 6.0 → 7.7; no change 70.9 → 67.6; cuts 3.0 → 2.3</a:t>
             </a:r>
-            <a:endParaRPr lang="en-US" sz="900" dirty="0"/>
-          </a:p>
-        </p:txBody>
-      </p:sp>
-      <p:sp>
-        <p:nvSpPr>
-          <p:cNvPr id="45" name="Shape 41"/>
+            <a:endParaRPr lang="en-US" sz="950" dirty="0"/>
+          </a:p>
+        </p:txBody>
+      </p:sp>
+      <p:sp>
+        <p:nvSpPr>
+          <p:cNvPr id="27" name="Shape 23"/>
           <p:cNvSpPr/>
           <p:nvPr/>
         </p:nvSpPr>
         <p:spPr>
           <a:xfrm>
-            <a:off x="5120640" y="4526280"/>
-            <a:ext cx="6519672" cy="1737360"/>
+            <a:off x="5120640" y="3931920"/>
+            <a:ext cx="6519672" cy="2377440"/>
           </a:xfrm>
           <a:prstGeom prst="roundRect">
             <a:avLst>
-              <a:gd name="adj" fmla="val 6316"/>
+              <a:gd name="adj" fmla="val 4615"/>
             </a:avLst>
           </a:prstGeom>
           <a:solidFill>
@@ -9530,13 +10017,13 @@
       </p:sp>
       <p:sp>
         <p:nvSpPr>
-          <p:cNvPr id="46" name="Text 42"/>
+          <p:cNvPr id="28" name="Text 24"/>
           <p:cNvSpPr txBox="1"/>
           <p:nvPr/>
         </p:nvSpPr>
         <p:spPr>
           <a:xfrm>
-            <a:off x="5276088" y="4617720"/>
+            <a:off x="5276088" y="4023360"/>
             <a:ext cx="6208776" cy="182880"/>
           </a:xfrm>
           <a:prstGeom prst="rect">
@@ -9566,13 +10053,13 @@
       </p:sp>
       <p:sp>
         <p:nvSpPr>
-          <p:cNvPr id="47" name="Text 43"/>
+          <p:cNvPr id="29" name="Text 25"/>
           <p:cNvSpPr txBox="1"/>
           <p:nvPr/>
         </p:nvSpPr>
         <p:spPr>
           <a:xfrm>
-            <a:off x="5276088" y="4873752"/>
+            <a:off x="5276088" y="4279392"/>
             <a:ext cx="6208776" cy="365760"/>
           </a:xfrm>
           <a:prstGeom prst="rect">
@@ -9610,13 +10097,13 @@
       </p:sp>
       <p:sp>
         <p:nvSpPr>
-          <p:cNvPr id="48" name="Text 44"/>
+          <p:cNvPr id="30" name="Text 26"/>
           <p:cNvSpPr txBox="1"/>
           <p:nvPr/>
         </p:nvSpPr>
         <p:spPr>
           <a:xfrm>
-            <a:off x="5276088" y="5276088"/>
+            <a:off x="5276088" y="4681728"/>
             <a:ext cx="6208776" cy="457200"/>
           </a:xfrm>
           <a:prstGeom prst="rect">
@@ -9649,13 +10136,13 @@
       </p:sp>
       <p:sp>
         <p:nvSpPr>
-          <p:cNvPr id="49" name="Text 45"/>
+          <p:cNvPr id="31" name="Text 27"/>
           <p:cNvSpPr txBox="1"/>
           <p:nvPr/>
         </p:nvSpPr>
         <p:spPr>
           <a:xfrm>
-            <a:off x="5276088" y="5806440"/>
+            <a:off x="5276088" y="5212080"/>
             <a:ext cx="6208776" cy="365760"/>
           </a:xfrm>
           <a:prstGeom prst="rect">
@@ -9701,7 +10188,7 @@
       </p:sp>
       <p:sp>
         <p:nvSpPr>
-          <p:cNvPr id="41" name="Slide Number Placeholder 0"/>
+          <p:cNvPr id="23" name="Slide Number Placeholder 0"/>
           <p:cNvSpPr>
             <a:spLocks noGrp="1"/>
           </p:cNvSpPr>
@@ -9738,943 +10225,6 @@
             <a:pPr algn="r"/>
             <a:fld id="{F7021451-1387-4CA6-816F-3879F97B5CBC}" type="slidenum">
               <a:rPr lang="en-US" b="0"/>
-              <a:t>12</a:t>
-            </a:fld>
-            <a:endParaRPr lang="en-US"/>
-          </a:p>
-        </p:txBody>
-      </p:sp>
-    </p:spTree>
-  </p:cSld>
-  <p:clrMapOvr>
-    <a:masterClrMapping/>
-  </p:clrMapOvr>
-</p:sld>
-</file>
-
-<file path=ppt/slides/slide13.xml><?xml version="1.0" encoding="utf-8"?>
-<p:sld xmlns:a="http://schemas.openxmlformats.org/drawingml/2006/main" xmlns:r="http://schemas.openxmlformats.org/officeDocument/2006/relationships" xmlns:p="http://schemas.openxmlformats.org/presentationml/2006/main">
-  <p:cSld name="Slide 13">
-    <p:spTree>
-      <p:nvGrpSpPr>
-        <p:cNvPr id="1" name=""/>
-        <p:cNvGrpSpPr/>
-        <p:nvPr/>
-      </p:nvGrpSpPr>
-      <p:grpSpPr>
-        <a:xfrm>
-          <a:off x="0" y="0"/>
-          <a:ext cx="0" cy="0"/>
-          <a:chOff x="0" y="0"/>
-          <a:chExt cx="0" cy="0"/>
-        </a:xfrm>
-      </p:grpSpPr>
-      <p:sp>
-        <p:nvSpPr>
-          <p:cNvPr id="2" name="Text 0"/>
-          <p:cNvSpPr>
-            <a:spLocks noGrp="1"/>
-          </p:cNvSpPr>
-          <p:nvPr>
-            <p:ph type="title" idx="100" hasCustomPrompt="1"/>
-          </p:nvPr>
-        </p:nvSpPr>
-        <p:spPr>
-          <a:xfrm>
-            <a:off x="548640" y="548640"/>
-            <a:ext cx="11091672" cy="822960"/>
-          </a:xfrm>
-          <a:prstGeom prst="rect">
-            <a:avLst/>
-          </a:prstGeom>
-          <a:noFill/>
-          <a:ln/>
-        </p:spPr>
-        <p:txBody>
-          <a:bodyPr wrap="square" lIns="0" tIns="0" rIns="0" bIns="0" rtlCol="0" anchor="ctr"/>
-          <a:lstStyle/>
-          <a:p>
-            <a:pPr marL="0" indent="0" algn="l">
-              <a:buNone/>
-            </a:pPr>
-            <a:r>
-              <a:rPr lang="en-US" sz="3000" b="1" dirty="0">
-                <a:solidFill>
-                  <a:schemeClr val="bg1"/>
-                </a:solidFill>
-              </a:rPr>
-              <a:t>Live demo 3: what each analyst is asked and given</a:t>
-            </a:r>
-            <a:endParaRPr lang="en-US" sz="3000" dirty="0"/>
-          </a:p>
-        </p:txBody>
-      </p:sp>
-      <p:sp>
-        <p:nvSpPr>
-          <p:cNvPr id="3" name="Shape 1"/>
-          <p:cNvSpPr/>
-          <p:nvPr/>
-        </p:nvSpPr>
-        <p:spPr>
-          <a:xfrm>
-            <a:off x="10177272" y="685800"/>
-            <a:ext cx="1463040" cy="548640"/>
-          </a:xfrm>
-          <a:prstGeom prst="roundRect">
-            <a:avLst>
-              <a:gd name="adj" fmla="val 16667"/>
-            </a:avLst>
-          </a:prstGeom>
-          <a:solidFill>
-            <a:srgbClr val="E9B44C"/>
-          </a:solidFill>
-          <a:ln w="12700">
-            <a:solidFill>
-              <a:srgbClr val="E9B44C"/>
-            </a:solidFill>
-            <a:prstDash val="solid"/>
-          </a:ln>
-        </p:spPr>
-      </p:sp>
-      <p:sp>
-        <p:nvSpPr>
-          <p:cNvPr id="4" name="Text 2"/>
-          <p:cNvSpPr txBox="1"/>
-          <p:nvPr/>
-        </p:nvSpPr>
-        <p:spPr>
-          <a:xfrm>
-            <a:off x="10177272" y="685800"/>
-            <a:ext cx="1463040" cy="548640"/>
-          </a:xfrm>
-          <a:prstGeom prst="rect">
-            <a:avLst/>
-          </a:prstGeom>
-          <a:noFill/>
-          <a:ln/>
-        </p:spPr>
-        <p:txBody>
-          <a:bodyPr wrap="square" lIns="0" tIns="0" rIns="0" bIns="0" rtlCol="0" anchor="ctr"/>
-          <a:lstStyle/>
-          <a:p>
-            <a:pPr marL="0" indent="0" algn="ctr">
-              <a:buNone/>
-            </a:pPr>
-            <a:r>
-              <a:rPr lang="en-US" sz="1600" b="1" dirty="0">
-                <a:solidFill>
-                  <a:srgbClr val="1B1F2A"/>
-                </a:solidFill>
-              </a:rPr>
-              <a:t>2 min</a:t>
-            </a:r>
-            <a:endParaRPr lang="en-US" sz="1600" dirty="0"/>
-          </a:p>
-        </p:txBody>
-      </p:sp>
-      <p:sp>
-        <p:nvSpPr>
-          <p:cNvPr id="5" name="Shape 3"/>
-          <p:cNvSpPr/>
-          <p:nvPr/>
-        </p:nvSpPr>
-        <p:spPr>
-          <a:xfrm>
-            <a:off x="548640" y="1737360"/>
-            <a:ext cx="3520440" cy="3200400"/>
-          </a:xfrm>
-          <a:prstGeom prst="roundRect">
-            <a:avLst>
-              <a:gd name="adj" fmla="val 3429"/>
-            </a:avLst>
-          </a:prstGeom>
-          <a:solidFill>
-            <a:srgbClr val="1E2761"/>
-          </a:solidFill>
-          <a:ln w="12700">
-            <a:solidFill>
-              <a:srgbClr val="1E2761"/>
-            </a:solidFill>
-            <a:prstDash val="solid"/>
-          </a:ln>
-        </p:spPr>
-      </p:sp>
-      <p:sp>
-        <p:nvSpPr>
-          <p:cNvPr id="6" name="Text 4"/>
-          <p:cNvSpPr txBox="1"/>
-          <p:nvPr/>
-        </p:nvSpPr>
-        <p:spPr>
-          <a:xfrm>
-            <a:off x="822960" y="1920240"/>
-            <a:ext cx="2926080" cy="457200"/>
-          </a:xfrm>
-          <a:prstGeom prst="rect">
-            <a:avLst/>
-          </a:prstGeom>
-          <a:noFill/>
-          <a:ln/>
-        </p:spPr>
-        <p:txBody>
-          <a:bodyPr wrap="square" lIns="0" tIns="0" rIns="0" bIns="0" rtlCol="0" anchor="ctr"/>
-          <a:lstStyle/>
-          <a:p>
-            <a:pPr marL="0" indent="0">
-              <a:buNone/>
-            </a:pPr>
-            <a:r>
-              <a:rPr lang="en-US" sz="1800" b="1" dirty="0">
-                <a:solidFill>
-                  <a:srgbClr val="E9B44C"/>
-                </a:solidFill>
-              </a:rPr>
-              <a:t>Open</a:t>
-            </a:r>
-            <a:endParaRPr lang="en-US" sz="1800" dirty="0"/>
-          </a:p>
-        </p:txBody>
-      </p:sp>
-      <p:sp>
-        <p:nvSpPr>
-          <p:cNvPr id="7" name="Text 5"/>
-          <p:cNvSpPr txBox="1"/>
-          <p:nvPr/>
-        </p:nvSpPr>
-        <p:spPr>
-          <a:xfrm>
-            <a:off x="822960" y="2468880"/>
-            <a:ext cx="2971800" cy="2377440"/>
-          </a:xfrm>
-          <a:prstGeom prst="rect">
-            <a:avLst/>
-          </a:prstGeom>
-          <a:noFill/>
-          <a:ln/>
-        </p:spPr>
-        <p:txBody>
-          <a:bodyPr wrap="square" lIns="0" tIns="0" rIns="0" bIns="0" rtlCol="0" anchor="t"/>
-          <a:lstStyle/>
-          <a:p>
-            <a:pPr marL="342900" indent="-342900">
-              <a:spcAft>
-                <a:spcPts val="800"/>
-              </a:spcAft>
-              <a:buSzPct val="100000"/>
-              <a:buChar char="•"/>
-            </a:pPr>
-            <a:r>
-              <a:rPr lang="en-US" sz="1300" dirty="0">
-                <a:solidFill>
-                  <a:srgbClr val="FFFFFF"/>
-                </a:solidFill>
-              </a:rPr>
-              <a:t>Analyst prompts view</a:t>
-            </a:r>
-            <a:endParaRPr lang="en-US" sz="1300" dirty="0"/>
-          </a:p>
-          <a:p>
-            <a:pPr marL="342900" indent="-342900">
-              <a:spcAft>
-                <a:spcPts val="800"/>
-              </a:spcAft>
-              <a:buSzPct val="100000"/>
-              <a:buChar char="•"/>
-            </a:pPr>
-            <a:r>
-              <a:rPr lang="en-US" sz="1300" dirty="0">
-                <a:solidFill>
-                  <a:srgbClr val="FFFFFF"/>
-                </a:solidFill>
-              </a:rPr>
-              <a:t>Analyst 1: open the full prompt</a:t>
-            </a:r>
-            <a:endParaRPr lang="en-US" sz="1300" dirty="0"/>
-          </a:p>
-          <a:p>
-            <a:pPr marL="342900" indent="-342900">
-              <a:spcAft>
-                <a:spcPts val="800"/>
-              </a:spcAft>
-              <a:buSzPct val="100000"/>
-              <a:buChar char="•"/>
-            </a:pPr>
-            <a:r>
-              <a:rPr lang="en-US" sz="1300" dirty="0">
-                <a:solidFill>
-                  <a:srgbClr val="FFFFFF"/>
-                </a:solidFill>
-              </a:rPr>
-              <a:t>Analyst 6: open the full prompt</a:t>
-            </a:r>
-            <a:endParaRPr lang="en-US" sz="1300" dirty="0"/>
-          </a:p>
-        </p:txBody>
-      </p:sp>
-      <p:sp>
-        <p:nvSpPr>
-          <p:cNvPr id="8" name="Shape 6"/>
-          <p:cNvSpPr/>
-          <p:nvPr/>
-        </p:nvSpPr>
-        <p:spPr>
-          <a:xfrm>
-            <a:off x="4297680" y="1737360"/>
-            <a:ext cx="3520440" cy="3200400"/>
-          </a:xfrm>
-          <a:prstGeom prst="roundRect">
-            <a:avLst>
-              <a:gd name="adj" fmla="val 3429"/>
-            </a:avLst>
-          </a:prstGeom>
-          <a:solidFill>
-            <a:srgbClr val="1E2761"/>
-          </a:solidFill>
-          <a:ln w="12700">
-            <a:solidFill>
-              <a:srgbClr val="1E2761"/>
-            </a:solidFill>
-            <a:prstDash val="solid"/>
-          </a:ln>
-        </p:spPr>
-      </p:sp>
-      <p:sp>
-        <p:nvSpPr>
-          <p:cNvPr id="9" name="Text 7"/>
-          <p:cNvSpPr txBox="1"/>
-          <p:nvPr/>
-        </p:nvSpPr>
-        <p:spPr>
-          <a:xfrm>
-            <a:off x="4572000" y="1920240"/>
-            <a:ext cx="2926080" cy="457200"/>
-          </a:xfrm>
-          <a:prstGeom prst="rect">
-            <a:avLst/>
-          </a:prstGeom>
-          <a:noFill/>
-          <a:ln/>
-        </p:spPr>
-        <p:txBody>
-          <a:bodyPr wrap="square" lIns="0" tIns="0" rIns="0" bIns="0" rtlCol="0" anchor="ctr"/>
-          <a:lstStyle/>
-          <a:p>
-            <a:pPr marL="0" indent="0">
-              <a:buNone/>
-            </a:pPr>
-            <a:r>
-              <a:rPr lang="en-US" sz="1800" b="1" dirty="0">
-                <a:solidFill>
-                  <a:srgbClr val="E9B44C"/>
-                </a:solidFill>
-              </a:rPr>
-              <a:t>Point at</a:t>
-            </a:r>
-            <a:endParaRPr lang="en-US" sz="1800" dirty="0"/>
-          </a:p>
-        </p:txBody>
-      </p:sp>
-      <p:sp>
-        <p:nvSpPr>
-          <p:cNvPr id="10" name="Text 8"/>
-          <p:cNvSpPr txBox="1"/>
-          <p:nvPr/>
-        </p:nvSpPr>
-        <p:spPr>
-          <a:xfrm>
-            <a:off x="4572000" y="2468880"/>
-            <a:ext cx="2971800" cy="2377440"/>
-          </a:xfrm>
-          <a:prstGeom prst="rect">
-            <a:avLst/>
-          </a:prstGeom>
-          <a:noFill/>
-          <a:ln/>
-        </p:spPr>
-        <p:txBody>
-          <a:bodyPr wrap="square" lIns="0" tIns="0" rIns="0" bIns="0" rtlCol="0" anchor="t"/>
-          <a:lstStyle/>
-          <a:p>
-            <a:pPr marL="342900" indent="-342900">
-              <a:spcAft>
-                <a:spcPts val="800"/>
-              </a:spcAft>
-              <a:buSzPct val="100000"/>
-              <a:buChar char="•"/>
-            </a:pPr>
-            <a:r>
-              <a:rPr lang="en-US" sz="1300" dirty="0">
-                <a:solidFill>
-                  <a:srgbClr val="FFFFFF"/>
-                </a:solidFill>
-              </a:rPr>
-              <a:t>Analyst 1: 195 characters, no evidence</a:t>
-            </a:r>
-            <a:endParaRPr lang="en-US" sz="1300" dirty="0"/>
-          </a:p>
-          <a:p>
-            <a:pPr marL="342900" indent="-342900">
-              <a:spcAft>
-                <a:spcPts val="800"/>
-              </a:spcAft>
-              <a:buSzPct val="100000"/>
-              <a:buChar char="•"/>
-            </a:pPr>
-            <a:r>
-              <a:rPr lang="en-US" sz="1300" dirty="0">
-                <a:solidFill>
-                  <a:srgbClr val="FFFFFF"/>
-                </a:solidFill>
-              </a:rPr>
-              <a:t>Analyst 6: the system prompt, the enforced answer schema, the inflation pre-read, the item ids</a:t>
-            </a:r>
-            <a:endParaRPr lang="en-US" sz="1300" dirty="0"/>
-          </a:p>
-          <a:p>
-            <a:pPr marL="342900" indent="-342900">
-              <a:spcAft>
-                <a:spcPts val="800"/>
-              </a:spcAft>
-              <a:buSzPct val="100000"/>
-              <a:buChar char="•"/>
-            </a:pPr>
-            <a:r>
-              <a:rPr lang="en-US" sz="1300" dirty="0">
-                <a:solidFill>
-                  <a:srgbClr val="FFFFFF"/>
-                </a:solidFill>
-              </a:rPr>
-              <a:t>The prompt hash: five repeats share it</a:t>
-            </a:r>
-            <a:endParaRPr lang="en-US" sz="1300" dirty="0"/>
-          </a:p>
-        </p:txBody>
-      </p:sp>
-      <p:sp>
-        <p:nvSpPr>
-          <p:cNvPr id="11" name="Shape 9"/>
-          <p:cNvSpPr/>
-          <p:nvPr/>
-        </p:nvSpPr>
-        <p:spPr>
-          <a:xfrm>
-            <a:off x="8046720" y="1737360"/>
-            <a:ext cx="3520440" cy="3200400"/>
-          </a:xfrm>
-          <a:prstGeom prst="roundRect">
-            <a:avLst>
-              <a:gd name="adj" fmla="val 3429"/>
-            </a:avLst>
-          </a:prstGeom>
-          <a:solidFill>
-            <a:srgbClr val="1E2761"/>
-          </a:solidFill>
-          <a:ln w="12700">
-            <a:solidFill>
-              <a:srgbClr val="1E2761"/>
-            </a:solidFill>
-            <a:prstDash val="solid"/>
-          </a:ln>
-        </p:spPr>
-      </p:sp>
-      <p:sp>
-        <p:nvSpPr>
-          <p:cNvPr id="12" name="Text 10"/>
-          <p:cNvSpPr txBox="1"/>
-          <p:nvPr/>
-        </p:nvSpPr>
-        <p:spPr>
-          <a:xfrm>
-            <a:off x="8321040" y="1920240"/>
-            <a:ext cx="2926080" cy="457200"/>
-          </a:xfrm>
-          <a:prstGeom prst="rect">
-            <a:avLst/>
-          </a:prstGeom>
-          <a:noFill/>
-          <a:ln/>
-        </p:spPr>
-        <p:txBody>
-          <a:bodyPr wrap="square" lIns="0" tIns="0" rIns="0" bIns="0" rtlCol="0" anchor="ctr"/>
-          <a:lstStyle/>
-          <a:p>
-            <a:pPr marL="0" indent="0">
-              <a:buNone/>
-            </a:pPr>
-            <a:r>
-              <a:rPr lang="en-US" sz="1800" b="1" dirty="0">
-                <a:solidFill>
-                  <a:srgbClr val="E9B44C"/>
-                </a:solidFill>
-              </a:rPr>
-              <a:t>Say</a:t>
-            </a:r>
-            <a:endParaRPr lang="en-US" sz="1800" dirty="0"/>
-          </a:p>
-        </p:txBody>
-      </p:sp>
-      <p:sp>
-        <p:nvSpPr>
-          <p:cNvPr id="13" name="Text 11"/>
-          <p:cNvSpPr txBox="1"/>
-          <p:nvPr/>
-        </p:nvSpPr>
-        <p:spPr>
-          <a:xfrm>
-            <a:off x="8321040" y="2468880"/>
-            <a:ext cx="2971800" cy="2377440"/>
-          </a:xfrm>
-          <a:prstGeom prst="rect">
-            <a:avLst/>
-          </a:prstGeom>
-          <a:noFill/>
-          <a:ln/>
-        </p:spPr>
-        <p:txBody>
-          <a:bodyPr wrap="square" lIns="0" tIns="0" rIns="0" bIns="0" rtlCol="0" anchor="t"/>
-          <a:lstStyle/>
-          <a:p>
-            <a:pPr marL="342900" indent="-342900">
-              <a:spcAft>
-                <a:spcPts val="800"/>
-              </a:spcAft>
-              <a:buSzPct val="100000"/>
-              <a:buChar char="•"/>
-            </a:pPr>
-            <a:r>
-              <a:rPr lang="en-US" sz="1300" dirty="0">
-                <a:solidFill>
-                  <a:srgbClr val="FFFFFF"/>
-                </a:solidFill>
-              </a:rPr>
-              <a:t>If it is not on this page, the analyst does not get it.</a:t>
-            </a:r>
-            <a:endParaRPr lang="en-US" sz="1300" dirty="0"/>
-          </a:p>
-          <a:p>
-            <a:pPr marL="342900" indent="-342900">
-              <a:spcAft>
-                <a:spcPts val="800"/>
-              </a:spcAft>
-              <a:buSzPct val="100000"/>
-              <a:buChar char="•"/>
-            </a:pPr>
-            <a:r>
-              <a:rPr lang="en-US" sz="1300" dirty="0">
-                <a:solidFill>
-                  <a:srgbClr val="FFFFFF"/>
-                </a:solidFill>
-              </a:rPr>
-              <a:t>Same model. The only difference between analyst 1 and analyst 6 is this page.</a:t>
-            </a:r>
-            <a:endParaRPr lang="en-US" sz="1300" dirty="0"/>
-          </a:p>
-        </p:txBody>
-      </p:sp>
-    </p:spTree>
-  </p:cSld>
-  <p:clrMapOvr>
-    <a:masterClrMapping/>
-  </p:clrMapOvr>
-</p:sld>
-</file>
-
-<file path=ppt/slides/slide14.xml><?xml version="1.0" encoding="utf-8"?>
-<p:sld xmlns:a="http://schemas.openxmlformats.org/drawingml/2006/main" xmlns:r="http://schemas.openxmlformats.org/officeDocument/2006/relationships" xmlns:p="http://schemas.openxmlformats.org/presentationml/2006/main">
-  <p:cSld name="Slide 14">
-    <p:spTree>
-      <p:nvGrpSpPr>
-        <p:cNvPr id="1" name=""/>
-        <p:cNvGrpSpPr/>
-        <p:nvPr/>
-      </p:nvGrpSpPr>
-      <p:grpSpPr>
-        <a:xfrm>
-          <a:off x="0" y="0"/>
-          <a:ext cx="0" cy="0"/>
-          <a:chOff x="0" y="0"/>
-          <a:chExt cx="0" cy="0"/>
-        </a:xfrm>
-      </p:grpSpPr>
-      <p:sp>
-        <p:nvSpPr>
-          <p:cNvPr id="2" name="Text 0"/>
-          <p:cNvSpPr>
-            <a:spLocks noGrp="1"/>
-          </p:cNvSpPr>
-          <p:nvPr>
-            <p:ph type="title" idx="100" hasCustomPrompt="1"/>
-          </p:nvPr>
-        </p:nvSpPr>
-        <p:spPr>
-          <a:xfrm>
-            <a:off x="548640" y="411480"/>
-            <a:ext cx="11091672" cy="822960"/>
-          </a:xfrm>
-          <a:prstGeom prst="rect">
-            <a:avLst/>
-          </a:prstGeom>
-          <a:noFill/>
-          <a:ln/>
-        </p:spPr>
-        <p:txBody>
-          <a:bodyPr wrap="square" lIns="0" tIns="0" rIns="0" bIns="0" rtlCol="0" anchor="ctr"/>
-          <a:lstStyle/>
-          <a:p>
-            <a:pPr marL="0" indent="0" algn="l">
-              <a:buNone/>
-            </a:pPr>
-            <a:r>
-              <a:rPr lang="en-US" sz="3200" b="1" dirty="0">
-                <a:solidFill>
-                  <a:schemeClr val="tx2"/>
-                </a:solidFill>
-              </a:rPr>
-              <a:t>How good is the harness: what each step bought</a:t>
-            </a:r>
-            <a:endParaRPr lang="en-US" sz="3200" dirty="0"/>
-          </a:p>
-        </p:txBody>
-      </p:sp>
-      <p:sp>
-        <p:nvSpPr>
-          <p:cNvPr id="4" name="Text 1"/>
-          <p:cNvSpPr txBox="1"/>
-          <p:nvPr/>
-        </p:nvSpPr>
-        <p:spPr>
-          <a:xfrm>
-            <a:off x="548640" y="1325880"/>
-            <a:ext cx="3544824" cy="365760"/>
-          </a:xfrm>
-          <a:prstGeom prst="rect">
-            <a:avLst/>
-          </a:prstGeom>
-          <a:noFill/>
-          <a:ln/>
-        </p:spPr>
-        <p:txBody>
-          <a:bodyPr wrap="square" lIns="0" tIns="0" rIns="0" bIns="0" rtlCol="0" anchor="t"/>
-          <a:lstStyle/>
-          <a:p>
-            <a:pPr marL="0" indent="0">
-              <a:buNone/>
-            </a:pPr>
-            <a:r>
-              <a:rPr lang="en-US" sz="1300" b="1" dirty="0">
-                <a:solidFill>
-                  <a:schemeClr val="tx2"/>
-                </a:solidFill>
-              </a:rPr>
-              <a:t>Repeatability: variance between identical runs (pp)</a:t>
-            </a:r>
-            <a:endParaRPr lang="en-US" sz="1300" dirty="0"/>
-          </a:p>
-        </p:txBody>
-      </p:sp>
-      <p:graphicFrame>
-        <p:nvGraphicFramePr>
-          <p:cNvPr id="5" name="Chart 0"/>
-          <p:cNvGraphicFramePr/>
-          <p:nvPr/>
-        </p:nvGraphicFramePr>
-        <p:xfrm>
-          <a:off x="548640" y="1691640"/>
-          <a:ext cx="3544824" cy="3566160"/>
-        </p:xfrm>
-        <a:graphic>
-          <a:graphicData uri="http://schemas.openxmlformats.org/drawingml/2006/chart">
-            <c:chart xmlns:c="http://schemas.openxmlformats.org/drawingml/2006/chart" xmlns:r="http://schemas.openxmlformats.org/officeDocument/2006/relationships" r:id="rId3"/>
-          </a:graphicData>
-        </a:graphic>
-      </p:graphicFrame>
-      <p:sp>
-        <p:nvSpPr>
-          <p:cNvPr id="6" name="Text 2"/>
-          <p:cNvSpPr txBox="1"/>
-          <p:nvPr/>
-        </p:nvSpPr>
-        <p:spPr>
-          <a:xfrm>
-            <a:off x="548640" y="5303520"/>
-            <a:ext cx="3544824" cy="640080"/>
-          </a:xfrm>
-          <a:prstGeom prst="rect">
-            <a:avLst/>
-          </a:prstGeom>
-          <a:noFill/>
-          <a:ln/>
-        </p:spPr>
-        <p:txBody>
-          <a:bodyPr wrap="square" lIns="0" tIns="0" rIns="0" bIns="0" rtlCol="0" anchor="t"/>
-          <a:lstStyle/>
-          <a:p>
-            <a:pPr marL="0" indent="0">
-              <a:buNone/>
-            </a:pPr>
-            <a:r>
-              <a:rPr lang="en-US" sz="950" dirty="0">
-                <a:solidFill>
-                  <a:schemeClr val="accent4"/>
-                </a:solidFill>
-              </a:rPr>
-              <a:t>Largest standard deviation across five runs, mean of four snapshots. Pass mark 2 pp. Analysts 3 to 8: standard deviation of the lean, 1 bp = 1 pp.</a:t>
-            </a:r>
-            <a:endParaRPr lang="en-US" sz="950" dirty="0"/>
-          </a:p>
-        </p:txBody>
-      </p:sp>
-      <p:sp>
-        <p:nvSpPr>
-          <p:cNvPr id="7" name="Text 3"/>
-          <p:cNvSpPr txBox="1"/>
-          <p:nvPr/>
-        </p:nvSpPr>
-        <p:spPr>
-          <a:xfrm>
-            <a:off x="4322064" y="1325880"/>
-            <a:ext cx="3544824" cy="365760"/>
-          </a:xfrm>
-          <a:prstGeom prst="rect">
-            <a:avLst/>
-          </a:prstGeom>
-          <a:noFill/>
-          <a:ln/>
-        </p:spPr>
-        <p:txBody>
-          <a:bodyPr wrap="square" lIns="0" tIns="0" rIns="0" bIns="0" rtlCol="0" anchor="t"/>
-          <a:lstStyle/>
-          <a:p>
-            <a:pPr marL="0" indent="0">
-              <a:buNone/>
-            </a:pPr>
-            <a:r>
-              <a:rPr lang="en-US" sz="1300" b="1" dirty="0">
-                <a:solidFill>
-                  <a:schemeClr val="tx2"/>
-                </a:solidFill>
-              </a:rPr>
-              <a:t>Numbers from memory (count)</a:t>
-            </a:r>
-            <a:endParaRPr lang="en-US" sz="1300" dirty="0"/>
-          </a:p>
-        </p:txBody>
-      </p:sp>
-      <p:graphicFrame>
-        <p:nvGraphicFramePr>
-          <p:cNvPr id="8" name="Chart 1"/>
-          <p:cNvGraphicFramePr/>
-          <p:nvPr/>
-        </p:nvGraphicFramePr>
-        <p:xfrm>
-          <a:off x="4322064" y="1691640"/>
-          <a:ext cx="3544824" cy="3566160"/>
-        </p:xfrm>
-        <a:graphic>
-          <a:graphicData uri="http://schemas.openxmlformats.org/drawingml/2006/chart">
-            <c:chart xmlns:c="http://schemas.openxmlformats.org/drawingml/2006/chart" xmlns:r="http://schemas.openxmlformats.org/officeDocument/2006/relationships" r:id="rId4"/>
-          </a:graphicData>
-        </a:graphic>
-      </p:graphicFrame>
-      <p:sp>
-        <p:nvSpPr>
-          <p:cNvPr id="9" name="Text 4"/>
-          <p:cNvSpPr txBox="1"/>
-          <p:nvPr/>
-        </p:nvSpPr>
-        <p:spPr>
-          <a:xfrm>
-            <a:off x="4322064" y="5303520"/>
-            <a:ext cx="3544824" cy="640080"/>
-          </a:xfrm>
-          <a:prstGeom prst="rect">
-            <a:avLst/>
-          </a:prstGeom>
-          <a:noFill/>
-          <a:ln/>
-        </p:spPr>
-        <p:txBody>
-          <a:bodyPr wrap="square" lIns="0" tIns="0" rIns="0" bIns="0" rtlCol="0" anchor="t"/>
-          <a:lstStyle/>
-          <a:p>
-            <a:pPr marL="0" indent="0">
-              <a:buNone/>
-            </a:pPr>
-            <a:r>
-              <a:rPr lang="en-US" sz="950" dirty="0">
-                <a:solidFill>
-                  <a:schemeClr val="accent4"/>
-                </a:solidFill>
-              </a:rPr>
-              <a:t>Numbers in the answer that exist nowhere in the frozen evidence, summed over five runs. Pass mark: exactly 0.</a:t>
-            </a:r>
-            <a:endParaRPr lang="en-US" sz="950" dirty="0"/>
-          </a:p>
-        </p:txBody>
-      </p:sp>
-      <p:sp>
-        <p:nvSpPr>
-          <p:cNvPr id="10" name="Text 5"/>
-          <p:cNvSpPr txBox="1"/>
-          <p:nvPr/>
-        </p:nvSpPr>
-        <p:spPr>
-          <a:xfrm>
-            <a:off x="8095488" y="1325880"/>
-            <a:ext cx="3544824" cy="365760"/>
-          </a:xfrm>
-          <a:prstGeom prst="rect">
-            <a:avLst/>
-          </a:prstGeom>
-          <a:noFill/>
-          <a:ln/>
-        </p:spPr>
-        <p:txBody>
-          <a:bodyPr wrap="square" lIns="0" tIns="0" rIns="0" bIns="0" rtlCol="0" anchor="t"/>
-          <a:lstStyle/>
-          <a:p>
-            <a:pPr marL="0" indent="0">
-              <a:buNone/>
-            </a:pPr>
-            <a:r>
-              <a:rPr lang="en-US" sz="1300" b="1" dirty="0">
-                <a:solidFill>
-                  <a:schemeClr val="tx2"/>
-                </a:solidFill>
-              </a:rPr>
-              <a:t>Claims with a verbatim quote (%)</a:t>
-            </a:r>
-            <a:endParaRPr lang="en-US" sz="1300" dirty="0"/>
-          </a:p>
-        </p:txBody>
-      </p:sp>
-      <p:graphicFrame>
-        <p:nvGraphicFramePr>
-          <p:cNvPr id="11" name="Chart 2"/>
-          <p:cNvGraphicFramePr/>
-          <p:nvPr/>
-        </p:nvGraphicFramePr>
-        <p:xfrm>
-          <a:off x="8095488" y="1691640"/>
-          <a:ext cx="3544824" cy="3566160"/>
-        </p:xfrm>
-        <a:graphic>
-          <a:graphicData uri="http://schemas.openxmlformats.org/drawingml/2006/chart">
-            <c:chart xmlns:c="http://schemas.openxmlformats.org/drawingml/2006/chart" xmlns:r="http://schemas.openxmlformats.org/officeDocument/2006/relationships" r:id="rId5"/>
-          </a:graphicData>
-        </a:graphic>
-      </p:graphicFrame>
-      <p:sp>
-        <p:nvSpPr>
-          <p:cNvPr id="12" name="Text 6"/>
-          <p:cNvSpPr txBox="1"/>
-          <p:nvPr/>
-        </p:nvSpPr>
-        <p:spPr>
-          <a:xfrm>
-            <a:off x="8095488" y="5303520"/>
-            <a:ext cx="3544824" cy="640080"/>
-          </a:xfrm>
-          <a:prstGeom prst="rect">
-            <a:avLst/>
-          </a:prstGeom>
-          <a:noFill/>
-          <a:ln/>
-        </p:spPr>
-        <p:txBody>
-          <a:bodyPr wrap="square" lIns="0" tIns="0" rIns="0" bIns="0" rtlCol="0" anchor="t"/>
-          <a:lstStyle/>
-          <a:p>
-            <a:pPr marL="0" indent="0">
-              <a:buNone/>
-            </a:pPr>
-            <a:r>
-              <a:rPr lang="en-US" sz="950" dirty="0">
-                <a:solidFill>
-                  <a:schemeClr val="accent4"/>
-                </a:solidFill>
-              </a:rPr>
-              <a:t>Share of claims whose quote code found character for character in the item named. Pass mark 95%. Analyst 2 is not shown: it quotes nothing, so it cannot be measured.</a:t>
-            </a:r>
-            <a:endParaRPr lang="en-US" sz="950" dirty="0"/>
-          </a:p>
-        </p:txBody>
-      </p:sp>
-      <p:sp>
-        <p:nvSpPr>
-          <p:cNvPr id="13" name="Text 7"/>
-          <p:cNvSpPr txBox="1"/>
-          <p:nvPr/>
-        </p:nvSpPr>
-        <p:spPr>
-          <a:xfrm>
-            <a:off x="548640" y="5870448"/>
-            <a:ext cx="11091672" cy="502920"/>
-          </a:xfrm>
-          <a:prstGeom prst="rect">
-            <a:avLst/>
-          </a:prstGeom>
-          <a:noFill/>
-          <a:ln/>
-        </p:spPr>
-        <p:txBody>
-          <a:bodyPr wrap="square" lIns="0" tIns="0" rIns="0" bIns="0" rtlCol="0" anchor="t"/>
-          <a:lstStyle/>
-          <a:p>
-            <a:pPr marL="0" indent="0">
-              <a:buNone/>
-            </a:pPr>
-            <a:r>
-              <a:rPr lang="en-US" sz="1050" i="1" dirty="0">
-                <a:solidFill>
-                  <a:schemeClr val="accent2"/>
-                </a:solidFill>
-              </a:rPr>
-              <a:t>The step from analyst 2 to analyst 3 is the harness: a fixed answer shape with a quote per claim, checked by code. Specialists keep both and add attribution. What they concluded, four snapshots: analyst 1 a cut at 57 to 67%; analyst 2 +25 bp at 50 to 57%; analyst 3 +5.8 to +7.0 bp hawkish; specialists +4.0 to +4.4 bp, labour the lone non-hawk.</a:t>
-            </a:r>
-            <a:endParaRPr lang="en-US" sz="1050" dirty="0"/>
-          </a:p>
-        </p:txBody>
-      </p:sp>
-      <p:sp>
-        <p:nvSpPr>
-          <p:cNvPr id="25" name="Slide Number Placeholder 0"/>
-          <p:cNvSpPr>
-            <a:spLocks noGrp="1"/>
-          </p:cNvSpPr>
-          <p:nvPr>
-            <p:ph type="sldNum" sz="quarter" idx="4294967295"/>
-          </p:nvPr>
-        </p:nvSpPr>
-        <p:spPr>
-          <a:xfrm>
-            <a:off x="11091672" y="6400800"/>
-            <a:ext cx="548640" cy="274320"/>
-          </a:xfrm>
-          <a:prstGeom prst="rect">
-            <a:avLst/>
-          </a:prstGeom>
-          <a:extLst>
-            <a:ext uri="{C572A759-6A51-4108-AA02-DFA0A04FC94B}">
-              <ma14:wrappingTextBoxFlag xmlns:ma14="http://schemas.microsoft.com/office/mac/drawingml/2011/main" xmlns="" val="0"/>
-            </a:ext>
-          </a:extLst>
-        </p:spPr>
-        <p:txBody>
-          <a:bodyPr/>
-          <a:lstStyle>
-            <a:lvl1pPr>
-              <a:defRPr sz="1000">
-                <a:solidFill>
-                  <a:srgbClr val="6B7280"/>
-                </a:solidFill>
-              </a:defRPr>
-            </a:lvl1pPr>
-          </a:lstStyle>
-          <a:p>
-            <a:pPr algn="r"/>
-            <a:fld id="{F7021451-1387-4CA6-816F-3879F97B5CBC}" type="slidenum">
-              <a:rPr lang="en-US" b="0"/>
               <a:t>14</a:t>
             </a:fld>
             <a:endParaRPr lang="en-US"/>
@@ -10682,6 +10232,11 @@
         </p:txBody>
       </p:sp>
     </p:spTree>
+    <p:extLst>
+      <p:ext uri="{BB962C8B-B14F-4D97-AF65-F5344CB8AC3E}">
+        <p14:creationId xmlns:p14="http://schemas.microsoft.com/office/powerpoint/2010/main" val="2067537323"/>
+      </p:ext>
+    </p:extLst>
   </p:cSld>
   <p:clrMapOvr>
     <a:masterClrMapping/>
@@ -10762,7 +10317,7 @@
         </p:nvGraphicFramePr>
         <p:xfrm>
           <a:off x="548640" y="1417320"/>
-          <a:ext cx="6766560" cy="914400"/>
+          <a:ext cx="6766560" cy="3017520"/>
         </p:xfrm>
         <a:graphic>
           <a:graphicData uri="http://schemas.openxmlformats.org/drawingml/2006/table">
@@ -18454,7 +18009,7 @@
         </p:nvGraphicFramePr>
         <p:xfrm>
           <a:off x="548640" y="1417320"/>
-          <a:ext cx="11091672" cy="914400"/>
+          <a:ext cx="11091672" cy="3886200"/>
         </p:xfrm>
         <a:graphic>
           <a:graphicData uri="http://schemas.openxmlformats.org/drawingml/2006/table">
@@ -21363,7 +20918,7 @@
 
 <file path=ppt/slides/slide5.xml><?xml version="1.0" encoding="utf-8"?>
 <p:sld xmlns:a="http://schemas.openxmlformats.org/drawingml/2006/main" xmlns:r="http://schemas.openxmlformats.org/officeDocument/2006/relationships" xmlns:p="http://schemas.openxmlformats.org/presentationml/2006/main">
-  <p:cSld name="Slide 5">
+  <p:cSld name="Slide 6">
     <p:spTree>
       <p:nvGrpSpPr>
         <p:cNvPr id="1" name=""/>
@@ -21412,7 +20967,7 @@
                   <a:schemeClr val="tx2"/>
                 </a:solidFill>
               </a:rPr>
-              <a:t>Why build this</a:t>
+              <a:t>Four kinds of signal, and where FedCast sits</a:t>
             </a:r>
             <a:endParaRPr lang="en-US" sz="3200" dirty="0"/>
           </a:p>
@@ -21427,11 +20982,11 @@
         <p:spPr>
           <a:xfrm>
             <a:off x="548640" y="1417320"/>
-            <a:ext cx="3520440" cy="3977640"/>
+            <a:ext cx="2615184" cy="2331720"/>
           </a:xfrm>
           <a:prstGeom prst="roundRect">
             <a:avLst>
-              <a:gd name="adj" fmla="val 3117"/>
+              <a:gd name="adj" fmla="val 4706"/>
             </a:avLst>
           </a:prstGeom>
           <a:solidFill>
@@ -21460,10 +21015,10 @@
         </p:nvSpPr>
         <p:spPr>
           <a:xfrm>
-            <a:off x="822960" y="1600200"/>
-            <a:ext cx="384048" cy="384048"/>
-          </a:xfrm>
-          <a:prstGeom prst="ellipse">
+            <a:off x="777240" y="1691640"/>
+            <a:ext cx="146304" cy="146304"/>
+          </a:xfrm>
+          <a:prstGeom prst="rect">
             <a:avLst/>
           </a:prstGeom>
           <a:solidFill>
@@ -21485,31 +21040,31 @@
         </p:nvSpPr>
         <p:spPr>
           <a:xfrm>
-            <a:off x="822960" y="1600200"/>
-            <a:ext cx="384048" cy="384048"/>
-          </a:xfrm>
-          <a:prstGeom prst="rect">
-            <a:avLst/>
-          </a:prstGeom>
-          <a:noFill/>
-          <a:ln/>
-        </p:spPr>
-        <p:txBody>
-          <a:bodyPr wrap="square" lIns="0" tIns="0" rIns="0" bIns="0" rtlCol="0" anchor="ctr"/>
-          <a:lstStyle/>
-          <a:p>
-            <a:pPr marL="0" indent="0" algn="ctr">
+            <a:off x="1005840" y="1581912"/>
+            <a:ext cx="1975104" cy="365760"/>
+          </a:xfrm>
+          <a:prstGeom prst="rect">
+            <a:avLst/>
+          </a:prstGeom>
+          <a:noFill/>
+          <a:ln/>
+        </p:spPr>
+        <p:txBody>
+          <a:bodyPr wrap="square" lIns="0" tIns="0" rIns="0" bIns="0" rtlCol="0" anchor="t"/>
+          <a:lstStyle/>
+          <a:p>
+            <a:pPr marL="0" indent="0">
               <a:buNone/>
             </a:pPr>
             <a:r>
-              <a:rPr lang="en-US" sz="1400" b="1" dirty="0">
-                <a:solidFill>
-                  <a:schemeClr val="bg1"/>
-                </a:solidFill>
-              </a:rPr>
-              <a:t>1</a:t>
-            </a:r>
-            <a:endParaRPr lang="en-US" sz="1400" dirty="0"/>
+              <a:rPr lang="en-US" sz="1500" b="1" dirty="0">
+                <a:solidFill>
+                  <a:schemeClr val="tx2"/>
+                </a:solidFill>
+              </a:rPr>
+              <a:t>Market signals</a:t>
+            </a:r>
+            <a:endParaRPr lang="en-US" sz="1500" dirty="0"/>
           </a:p>
         </p:txBody>
       </p:sp>
@@ -21521,31 +21076,31 @@
         </p:nvSpPr>
         <p:spPr>
           <a:xfrm>
-            <a:off x="1325880" y="1554480"/>
-            <a:ext cx="2560320" cy="502920"/>
-          </a:xfrm>
-          <a:prstGeom prst="rect">
-            <a:avLst/>
-          </a:prstGeom>
-          <a:noFill/>
-          <a:ln/>
-        </p:spPr>
-        <p:txBody>
-          <a:bodyPr wrap="square" lIns="0" tIns="0" rIns="0" bIns="0" rtlCol="0" anchor="ctr"/>
+            <a:off x="777240" y="2039112"/>
+            <a:ext cx="2157984" cy="566928"/>
+          </a:xfrm>
+          <a:prstGeom prst="rect">
+            <a:avLst/>
+          </a:prstGeom>
+          <a:noFill/>
+          <a:ln/>
+        </p:spPr>
+        <p:txBody>
+          <a:bodyPr wrap="square" lIns="0" tIns="0" rIns="0" bIns="0" rtlCol="0" anchor="t"/>
           <a:lstStyle/>
           <a:p>
             <a:pPr marL="0" indent="0">
               <a:buNone/>
             </a:pPr>
             <a:r>
-              <a:rPr lang="en-US" sz="1500" b="1" dirty="0">
-                <a:solidFill>
-                  <a:schemeClr val="tx2"/>
-                </a:solidFill>
-              </a:rPr>
-              <a:t>We judge the process, not the luck</a:t>
-            </a:r>
-            <a:endParaRPr lang="en-US" sz="1500" dirty="0"/>
+              <a:rPr lang="en-US" sz="1200" b="1" dirty="0">
+                <a:solidFill>
+                  <a:schemeClr val="tx1"/>
+                </a:solidFill>
+              </a:rPr>
+              <a:t>Fed funds futures (CME FedWatch); prediction markets (Polymarket, Kalshi)</a:t>
+            </a:r>
+            <a:endParaRPr lang="en-US" sz="1200" dirty="0"/>
           </a:p>
         </p:txBody>
       </p:sp>
@@ -21557,8 +21112,8 @@
         </p:nvSpPr>
         <p:spPr>
           <a:xfrm>
-            <a:off x="822960" y="2240280"/>
-            <a:ext cx="3017520" cy="3063240"/>
+            <a:off x="777240" y="2624328"/>
+            <a:ext cx="2157984" cy="548640"/>
           </a:xfrm>
           <a:prstGeom prst="rect">
             <a:avLst/>
@@ -21570,75 +21125,87 @@
           <a:bodyPr wrap="square" lIns="0" tIns="0" rIns="0" bIns="0" rtlCol="0" anchor="t"/>
           <a:lstStyle/>
           <a:p>
-            <a:pPr marL="342900" indent="-342900">
-              <a:spcAft>
-                <a:spcPts val="800"/>
-              </a:spcAft>
-              <a:buSzPct val="100000"/>
-              <a:buChar char="•"/>
-            </a:pPr>
-            <a:r>
-              <a:rPr lang="en-US" sz="1300" dirty="0">
+            <a:pPr marL="0" indent="0">
+              <a:buNone/>
+            </a:pPr>
+            <a:r>
+              <a:rPr lang="en-US" sz="1150" b="1" dirty="0">
+                <a:solidFill>
+                  <a:srgbClr val="6B7280"/>
+                </a:solidFill>
+              </a:rPr>
+              <a:t>What it is  </a:t>
+            </a:r>
+            <a:r>
+              <a:rPr lang="en-US" sz="1150" dirty="0">
                 <a:solidFill>
                   <a:schemeClr val="tx1"/>
                 </a:solidFill>
               </a:rPr>
-              <a:t>Eight decisions a year: a good year proves nothing</a:t>
-            </a:r>
-            <a:endParaRPr lang="en-US" sz="1300" dirty="0"/>
-          </a:p>
-          <a:p>
-            <a:pPr marL="342900" indent="-342900">
-              <a:spcAft>
-                <a:spcPts val="800"/>
-              </a:spcAft>
-              <a:buSzPct val="100000"/>
-              <a:buChar char="•"/>
-            </a:pPr>
-            <a:r>
-              <a:rPr lang="en-US" sz="1300" dirty="0">
+              <a:t>Prices and crowd odds on each outcome</a:t>
+            </a:r>
+            <a:endParaRPr lang="en-US" sz="1150" dirty="0"/>
+          </a:p>
+        </p:txBody>
+      </p:sp>
+      <p:sp>
+        <p:nvSpPr>
+          <p:cNvPr id="9" name="Text 6"/>
+          <p:cNvSpPr txBox="1"/>
+          <p:nvPr/>
+        </p:nvSpPr>
+        <p:spPr>
+          <a:xfrm>
+            <a:off x="777240" y="3191256"/>
+            <a:ext cx="2157984" cy="530352"/>
+          </a:xfrm>
+          <a:prstGeom prst="rect">
+            <a:avLst/>
+          </a:prstGeom>
+          <a:noFill/>
+          <a:ln/>
+        </p:spPr>
+        <p:txBody>
+          <a:bodyPr wrap="square" lIns="0" tIns="0" rIns="0" bIns="0" rtlCol="0" anchor="t"/>
+          <a:lstStyle/>
+          <a:p>
+            <a:pPr marL="0" indent="0">
+              <a:buNone/>
+            </a:pPr>
+            <a:r>
+              <a:rPr lang="en-US" sz="1150" b="1" dirty="0">
+                <a:solidFill>
+                  <a:srgbClr val="6B7280"/>
+                </a:solidFill>
+              </a:rPr>
+              <a:t>Strength  </a:t>
+            </a:r>
+            <a:r>
+              <a:rPr lang="en-US" sz="1150" dirty="0">
                 <a:solidFill>
                   <a:schemeClr val="tx1"/>
                 </a:solidFill>
               </a:rPr>
-              <a:t>The yardstick is a ten-point scorecard, fixed before any code: same evidence, same answer? every claim quoted? any number from memory? a shock moves the number the right way?</a:t>
-            </a:r>
-            <a:endParaRPr lang="en-US" sz="1300" dirty="0"/>
-          </a:p>
-          <a:p>
-            <a:pPr marL="342900" indent="-342900">
-              <a:spcAft>
-                <a:spcPts val="800"/>
-              </a:spcAft>
-              <a:buSzPct val="100000"/>
-              <a:buChar char="•"/>
-            </a:pPr>
-            <a:r>
-              <a:rPr lang="en-US" sz="1300" dirty="0">
-                <a:solidFill>
-                  <a:schemeClr val="tx1"/>
-                </a:solidFill>
-              </a:rPr>
-              <a:t>Outcomes are logged after each decision and never used to tune</a:t>
-            </a:r>
-            <a:endParaRPr lang="en-US" sz="1300" dirty="0"/>
-          </a:p>
-        </p:txBody>
-      </p:sp>
-      <p:sp>
-        <p:nvSpPr>
-          <p:cNvPr id="9" name="Shape 6"/>
+              <a:t>Futures about 88% right at 30 days, 1994 to 2024; odds move fast</a:t>
+            </a:r>
+            <a:endParaRPr lang="en-US" sz="1150" dirty="0"/>
+          </a:p>
+        </p:txBody>
+      </p:sp>
+      <p:sp>
+        <p:nvSpPr>
+          <p:cNvPr id="10" name="Shape 7"/>
           <p:cNvSpPr/>
           <p:nvPr/>
         </p:nvSpPr>
         <p:spPr>
           <a:xfrm>
-            <a:off x="4297680" y="1417320"/>
-            <a:ext cx="3520440" cy="3977640"/>
+            <a:off x="3374136" y="1417320"/>
+            <a:ext cx="2615184" cy="2331720"/>
           </a:xfrm>
           <a:prstGeom prst="roundRect">
             <a:avLst>
-              <a:gd name="adj" fmla="val 3117"/>
+              <a:gd name="adj" fmla="val 4706"/>
             </a:avLst>
           </a:prstGeom>
           <a:solidFill>
@@ -21661,24 +21228,24 @@
       </p:sp>
       <p:sp>
         <p:nvSpPr>
-          <p:cNvPr id="10" name="Shape 7"/>
+          <p:cNvPr id="11" name="Shape 8"/>
           <p:cNvSpPr/>
           <p:nvPr/>
         </p:nvSpPr>
         <p:spPr>
           <a:xfrm>
-            <a:off x="4572000" y="1600200"/>
-            <a:ext cx="384048" cy="384048"/>
-          </a:xfrm>
-          <a:prstGeom prst="ellipse">
+            <a:off x="3602736" y="1691640"/>
+            <a:ext cx="146304" cy="146304"/>
+          </a:xfrm>
+          <a:prstGeom prst="rect">
             <a:avLst/>
           </a:prstGeom>
           <a:solidFill>
-            <a:srgbClr val="1E2761"/>
+            <a:srgbClr val="2C6E49"/>
           </a:solidFill>
           <a:ln w="12700">
             <a:solidFill>
-              <a:srgbClr val="1E2761"/>
+              <a:srgbClr val="2C6E49"/>
             </a:solidFill>
             <a:prstDash val="solid"/>
           </a:ln>
@@ -21686,59 +21253,23 @@
       </p:sp>
       <p:sp>
         <p:nvSpPr>
-          <p:cNvPr id="11" name="Text 8"/>
-          <p:cNvSpPr txBox="1"/>
-          <p:nvPr/>
-        </p:nvSpPr>
-        <p:spPr>
-          <a:xfrm>
-            <a:off x="4572000" y="1600200"/>
-            <a:ext cx="384048" cy="384048"/>
-          </a:xfrm>
-          <a:prstGeom prst="rect">
-            <a:avLst/>
-          </a:prstGeom>
-          <a:noFill/>
-          <a:ln/>
-        </p:spPr>
-        <p:txBody>
-          <a:bodyPr wrap="square" lIns="0" tIns="0" rIns="0" bIns="0" rtlCol="0" anchor="ctr"/>
-          <a:lstStyle/>
-          <a:p>
-            <a:pPr marL="0" indent="0" algn="ctr">
-              <a:buNone/>
-            </a:pPr>
-            <a:r>
-              <a:rPr lang="en-US" sz="1400" b="1" dirty="0">
-                <a:solidFill>
-                  <a:schemeClr val="bg1"/>
-                </a:solidFill>
-              </a:rPr>
-              <a:t>2</a:t>
-            </a:r>
-            <a:endParaRPr lang="en-US" sz="1400" dirty="0"/>
-          </a:p>
-        </p:txBody>
-      </p:sp>
-      <p:sp>
-        <p:nvSpPr>
           <p:cNvPr id="12" name="Text 9"/>
           <p:cNvSpPr txBox="1"/>
           <p:nvPr/>
         </p:nvSpPr>
         <p:spPr>
           <a:xfrm>
-            <a:off x="5074920" y="1554480"/>
-            <a:ext cx="2560320" cy="502920"/>
-          </a:xfrm>
-          <a:prstGeom prst="rect">
-            <a:avLst/>
-          </a:prstGeom>
-          <a:noFill/>
-          <a:ln/>
-        </p:spPr>
-        <p:txBody>
-          <a:bodyPr wrap="square" lIns="0" tIns="0" rIns="0" bIns="0" rtlCol="0" anchor="ctr"/>
+            <a:off x="3831336" y="1581912"/>
+            <a:ext cx="1975104" cy="365760"/>
+          </a:xfrm>
+          <a:prstGeom prst="rect">
+            <a:avLst/>
+          </a:prstGeom>
+          <a:noFill/>
+          <a:ln/>
+        </p:spPr>
+        <p:txBody>
+          <a:bodyPr wrap="square" lIns="0" tIns="0" rIns="0" bIns="0" rtlCol="0" anchor="t"/>
           <a:lstStyle/>
           <a:p>
             <a:pPr marL="0" indent="0">
@@ -21750,7 +21281,7 @@
                   <a:schemeClr val="tx2"/>
                 </a:solidFill>
               </a:rPr>
-              <a:t>Every step is auditable</a:t>
+              <a:t>Economic signals</a:t>
             </a:r>
             <a:endParaRPr lang="en-US" sz="1500" dirty="0"/>
           </a:p>
@@ -21764,8 +21295,8 @@
         </p:nvSpPr>
         <p:spPr>
           <a:xfrm>
-            <a:off x="4572000" y="2240280"/>
-            <a:ext cx="3017520" cy="3063240"/>
+            <a:off x="3602736" y="2039112"/>
+            <a:ext cx="2157984" cy="566928"/>
           </a:xfrm>
           <a:prstGeom prst="rect">
             <a:avLst/>
@@ -21777,75 +21308,123 @@
           <a:bodyPr wrap="square" lIns="0" tIns="0" rIns="0" bIns="0" rtlCol="0" anchor="t"/>
           <a:lstStyle/>
           <a:p>
-            <a:pPr marL="342900" indent="-342900">
-              <a:spcAft>
-                <a:spcPts val="800"/>
-              </a:spcAft>
-              <a:buSzPct val="100000"/>
-              <a:buChar char="•"/>
-            </a:pPr>
-            <a:r>
-              <a:rPr lang="en-US" sz="1300" dirty="0">
+            <a:pPr marL="0" indent="0">
+              <a:buNone/>
+            </a:pPr>
+            <a:r>
+              <a:rPr lang="en-US" sz="1200" b="1" dirty="0">
                 <a:solidFill>
                   <a:schemeClr val="tx1"/>
                 </a:solidFill>
               </a:rPr>
-              <a:t>An analyst that says 'inflation remains elevated' must quote the statement line it read, and code checks the quote is there, character for character</a:t>
-            </a:r>
-            <a:endParaRPr lang="en-US" sz="1300" dirty="0"/>
-          </a:p>
-          <a:p>
-            <a:pPr marL="342900" indent="-342900">
-              <a:spcAft>
-                <a:spcPts val="800"/>
-              </a:spcAft>
-              <a:buSzPct val="100000"/>
-              <a:buChar char="•"/>
-            </a:pPr>
-            <a:r>
-              <a:rPr lang="en-US" sz="1300" dirty="0">
+              <a:t>Economist surveys; the macro data itself</a:t>
+            </a:r>
+            <a:endParaRPr lang="en-US" sz="1200" dirty="0"/>
+          </a:p>
+        </p:txBody>
+      </p:sp>
+      <p:sp>
+        <p:nvSpPr>
+          <p:cNvPr id="14" name="Text 11"/>
+          <p:cNvSpPr txBox="1"/>
+          <p:nvPr/>
+        </p:nvSpPr>
+        <p:spPr>
+          <a:xfrm>
+            <a:off x="3602736" y="2624328"/>
+            <a:ext cx="2157984" cy="548640"/>
+          </a:xfrm>
+          <a:prstGeom prst="rect">
+            <a:avLst/>
+          </a:prstGeom>
+          <a:noFill/>
+          <a:ln/>
+        </p:spPr>
+        <p:txBody>
+          <a:bodyPr wrap="square" lIns="0" tIns="0" rIns="0" bIns="0" rtlCol="0" anchor="t"/>
+          <a:lstStyle/>
+          <a:p>
+            <a:pPr marL="0" indent="0">
+              <a:buNone/>
+            </a:pPr>
+            <a:r>
+              <a:rPr lang="en-US" sz="1150" b="1" dirty="0">
+                <a:solidFill>
+                  <a:srgbClr val="6B7280"/>
+                </a:solidFill>
+              </a:rPr>
+              <a:t>What it is  </a:t>
+            </a:r>
+            <a:r>
+              <a:rPr lang="en-US" sz="1150" dirty="0">
                 <a:solidFill>
                   <a:schemeClr val="tx1"/>
                 </a:solidFill>
               </a:rPr>
-              <a:t>Every number it uses must exist in the frozen evidence, or it is flagged as from memory</a:t>
-            </a:r>
-            <a:endParaRPr lang="en-US" sz="1300" dirty="0"/>
-          </a:p>
-          <a:p>
-            <a:pPr marL="342900" indent="-342900">
-              <a:spcAft>
-                <a:spcPts val="800"/>
-              </a:spcAft>
-              <a:buSzPct val="100000"/>
-              <a:buChar char="•"/>
-            </a:pPr>
-            <a:r>
-              <a:rPr lang="en-US" sz="1300" dirty="0">
+              <a:t>The median of polled forecasters; the data the committee reads</a:t>
+            </a:r>
+            <a:endParaRPr lang="en-US" sz="1150" dirty="0"/>
+          </a:p>
+        </p:txBody>
+      </p:sp>
+      <p:sp>
+        <p:nvSpPr>
+          <p:cNvPr id="15" name="Text 12"/>
+          <p:cNvSpPr txBox="1"/>
+          <p:nvPr/>
+        </p:nvSpPr>
+        <p:spPr>
+          <a:xfrm>
+            <a:off x="3602736" y="3191256"/>
+            <a:ext cx="2157984" cy="530352"/>
+          </a:xfrm>
+          <a:prstGeom prst="rect">
+            <a:avLst/>
+          </a:prstGeom>
+          <a:noFill/>
+          <a:ln/>
+        </p:spPr>
+        <p:txBody>
+          <a:bodyPr wrap="square" lIns="0" tIns="0" rIns="0" bIns="0" rtlCol="0" anchor="t"/>
+          <a:lstStyle/>
+          <a:p>
+            <a:pPr marL="0" indent="0">
+              <a:buNone/>
+            </a:pPr>
+            <a:r>
+              <a:rPr lang="en-US" sz="1150" b="1" dirty="0">
+                <a:solidFill>
+                  <a:srgbClr val="6B7280"/>
+                </a:solidFill>
+              </a:rPr>
+              <a:t>Strength  </a:t>
+            </a:r>
+            <a:r>
+              <a:rPr lang="en-US" sz="1150" dirty="0">
                 <a:solidFill>
                   <a:schemeClr val="tx1"/>
                 </a:solidFill>
               </a:rPr>
-              <a:t>Every model lists the items it read; every ledger entry recomputes from its snapshot. If it is not quoted, it does not count</a:t>
-            </a:r>
-            <a:endParaRPr lang="en-US" sz="1300" dirty="0"/>
-          </a:p>
-        </p:txBody>
-      </p:sp>
-      <p:sp>
-        <p:nvSpPr>
-          <p:cNvPr id="14" name="Shape 11"/>
+              <a:t>Broad human judgement; the data is the Fed's own input</a:t>
+            </a:r>
+            <a:endParaRPr lang="en-US" sz="1150" dirty="0"/>
+          </a:p>
+        </p:txBody>
+      </p:sp>
+      <p:sp>
+        <p:nvSpPr>
+          <p:cNvPr id="16" name="Shape 13"/>
           <p:cNvSpPr/>
           <p:nvPr/>
         </p:nvSpPr>
         <p:spPr>
           <a:xfrm>
-            <a:off x="8046720" y="1417320"/>
-            <a:ext cx="3520440" cy="3977640"/>
+            <a:off x="6199632" y="1417320"/>
+            <a:ext cx="2615184" cy="2331720"/>
           </a:xfrm>
           <a:prstGeom prst="roundRect">
             <a:avLst>
-              <a:gd name="adj" fmla="val 3117"/>
+              <a:gd name="adj" fmla="val 4706"/>
             </a:avLst>
           </a:prstGeom>
           <a:solidFill>
@@ -21868,24 +21447,24 @@
       </p:sp>
       <p:sp>
         <p:nvSpPr>
-          <p:cNvPr id="15" name="Shape 12"/>
+          <p:cNvPr id="17" name="Shape 14"/>
           <p:cNvSpPr/>
           <p:nvPr/>
         </p:nvSpPr>
         <p:spPr>
           <a:xfrm>
-            <a:off x="8321040" y="1600200"/>
-            <a:ext cx="384048" cy="384048"/>
-          </a:xfrm>
-          <a:prstGeom prst="ellipse">
+            <a:off x="6428232" y="1691640"/>
+            <a:ext cx="146304" cy="146304"/>
+          </a:xfrm>
+          <a:prstGeom prst="rect">
             <a:avLst/>
           </a:prstGeom>
           <a:solidFill>
-            <a:srgbClr val="1E2761"/>
+            <a:srgbClr val="E9B44C"/>
           </a:solidFill>
           <a:ln w="12700">
             <a:solidFill>
-              <a:srgbClr val="1E2761"/>
+              <a:srgbClr val="E9B44C"/>
             </a:solidFill>
             <a:prstDash val="solid"/>
           </a:ln>
@@ -21893,59 +21472,23 @@
       </p:sp>
       <p:sp>
         <p:nvSpPr>
-          <p:cNvPr id="16" name="Text 13"/>
+          <p:cNvPr id="18" name="Text 15"/>
           <p:cNvSpPr txBox="1"/>
           <p:nvPr/>
         </p:nvSpPr>
         <p:spPr>
           <a:xfrm>
-            <a:off x="8321040" y="1600200"/>
-            <a:ext cx="384048" cy="384048"/>
-          </a:xfrm>
-          <a:prstGeom prst="rect">
-            <a:avLst/>
-          </a:prstGeom>
-          <a:noFill/>
-          <a:ln/>
-        </p:spPr>
-        <p:txBody>
-          <a:bodyPr wrap="square" lIns="0" tIns="0" rIns="0" bIns="0" rtlCol="0" anchor="ctr"/>
-          <a:lstStyle/>
-          <a:p>
-            <a:pPr marL="0" indent="0" algn="ctr">
-              <a:buNone/>
-            </a:pPr>
-            <a:r>
-              <a:rPr lang="en-US" sz="1400" b="1" dirty="0">
-                <a:solidFill>
-                  <a:schemeClr val="bg1"/>
-                </a:solidFill>
-              </a:rPr>
-              <a:t>3</a:t>
-            </a:r>
-            <a:endParaRPr lang="en-US" sz="1400" dirty="0"/>
-          </a:p>
-        </p:txBody>
-      </p:sp>
-      <p:sp>
-        <p:nvSpPr>
-          <p:cNvPr id="17" name="Text 14"/>
-          <p:cNvSpPr txBox="1"/>
-          <p:nvPr/>
-        </p:nvSpPr>
-        <p:spPr>
-          <a:xfrm>
-            <a:off x="8823960" y="1554480"/>
-            <a:ext cx="2560320" cy="502920"/>
-          </a:xfrm>
-          <a:prstGeom prst="rect">
-            <a:avLst/>
-          </a:prstGeom>
-          <a:noFill/>
-          <a:ln/>
-        </p:spPr>
-        <p:txBody>
-          <a:bodyPr wrap="square" lIns="0" tIns="0" rIns="0" bIns="0" rtlCol="0" anchor="ctr"/>
+            <a:off x="6656832" y="1581912"/>
+            <a:ext cx="1975104" cy="365760"/>
+          </a:xfrm>
+          <a:prstGeom prst="rect">
+            <a:avLst/>
+          </a:prstGeom>
+          <a:noFill/>
+          <a:ln/>
+        </p:spPr>
+        <p:txBody>
+          <a:bodyPr wrap="square" lIns="0" tIns="0" rIns="0" bIns="0" rtlCol="0" anchor="t"/>
           <a:lstStyle/>
           <a:p>
             <a:pPr marL="0" indent="0">
@@ -21957,7 +21500,7 @@
                   <a:schemeClr val="tx2"/>
                 </a:solidFill>
               </a:rPr>
-              <a:t>A harness that compounds</a:t>
+              <a:t>Policy rules</a:t>
             </a:r>
             <a:endParaRPr lang="en-US" sz="1500" dirty="0"/>
           </a:p>
@@ -21965,14 +21508,14 @@
       </p:sp>
       <p:sp>
         <p:nvSpPr>
-          <p:cNvPr id="18" name="Text 15"/>
+          <p:cNvPr id="19" name="Text 16"/>
           <p:cNvSpPr txBox="1"/>
           <p:nvPr/>
         </p:nvSpPr>
         <p:spPr>
           <a:xfrm>
-            <a:off x="8321040" y="2240280"/>
-            <a:ext cx="3017520" cy="3063240"/>
+            <a:off x="6428232" y="2039112"/>
+            <a:ext cx="2157984" cy="566928"/>
           </a:xfrm>
           <a:prstGeom prst="rect">
             <a:avLst/>
@@ -21984,180 +21527,118 @@
           <a:bodyPr wrap="square" lIns="0" tIns="0" rIns="0" bIns="0" rtlCol="0" anchor="t"/>
           <a:lstStyle/>
           <a:p>
-            <a:pPr marL="342900" indent="-342900">
-              <a:spcAft>
-                <a:spcPts val="800"/>
-              </a:spcAft>
-              <a:buSzPct val="100000"/>
-              <a:buChar char="•"/>
-            </a:pPr>
-            <a:r>
-              <a:rPr lang="en-US" sz="1300" dirty="0">
+            <a:pPr marL="0" indent="0">
+              <a:buNone/>
+            </a:pPr>
+            <a:r>
+              <a:rPr lang="en-US" sz="1200" b="1" dirty="0">
                 <a:solidFill>
                   <a:schemeClr val="tx1"/>
                 </a:solidFill>
               </a:rPr>
-              <a:t>Everything is quotable and the analysts can read only the evidence, so a wrong call is a traceable wrong call: we see which quote led where</a:t>
-            </a:r>
-            <a:endParaRPr lang="en-US" sz="1300" dirty="0"/>
-          </a:p>
-          <a:p>
-            <a:pPr marL="342900" indent="-342900">
-              <a:spcAft>
-                <a:spcPts val="800"/>
-              </a:spcAft>
-              <a:buSzPct val="100000"/>
-              <a:buChar char="•"/>
-            </a:pPr>
-            <a:r>
-              <a:rPr lang="en-US" sz="1300" dirty="0">
+              <a:t>The Taylor family</a:t>
+            </a:r>
+            <a:endParaRPr lang="en-US" sz="1200" dirty="0"/>
+          </a:p>
+        </p:txBody>
+      </p:sp>
+      <p:sp>
+        <p:nvSpPr>
+          <p:cNvPr id="20" name="Text 17"/>
+          <p:cNvSpPr txBox="1"/>
+          <p:nvPr/>
+        </p:nvSpPr>
+        <p:spPr>
+          <a:xfrm>
+            <a:off x="6428232" y="2624328"/>
+            <a:ext cx="2157984" cy="548640"/>
+          </a:xfrm>
+          <a:prstGeom prst="rect">
+            <a:avLst/>
+          </a:prstGeom>
+          <a:noFill/>
+          <a:ln/>
+        </p:spPr>
+        <p:txBody>
+          <a:bodyPr wrap="square" lIns="0" tIns="0" rIns="0" bIns="0" rtlCol="0" anchor="t"/>
+          <a:lstStyle/>
+          <a:p>
+            <a:pPr marL="0" indent="0">
+              <a:buNone/>
+            </a:pPr>
+            <a:r>
+              <a:rPr lang="en-US" sz="1150" b="1" dirty="0">
+                <a:solidFill>
+                  <a:srgbClr val="6B7280"/>
+                </a:solidFill>
+              </a:rPr>
+              <a:t>What it is  </a:t>
+            </a:r>
+            <a:r>
+              <a:rPr lang="en-US" sz="1150" dirty="0">
                 <a:solidFill>
                   <a:schemeClr val="tx1"/>
                 </a:solidFill>
               </a:rPr>
-              <a:t>The harness is repeatable, so it goes wrong the same way every time; a fix can be tested, and the drift table shows it stayed fixed</a:t>
-            </a:r>
-            <a:endParaRPr lang="en-US" sz="1300" dirty="0"/>
-          </a:p>
-          <a:p>
-            <a:pPr marL="342900" indent="-342900">
-              <a:spcAft>
-                <a:spcPts val="800"/>
-              </a:spcAft>
-              <a:buSzPct val="100000"/>
-              <a:buChar char="•"/>
-            </a:pPr>
-            <a:r>
-              <a:rPr lang="en-US" sz="1300" dirty="0">
+              <a:t>The rate a formula says is appropriate given inflation and unemployment</a:t>
+            </a:r>
+            <a:endParaRPr lang="en-US" sz="1150" dirty="0"/>
+          </a:p>
+        </p:txBody>
+      </p:sp>
+      <p:sp>
+        <p:nvSpPr>
+          <p:cNvPr id="21" name="Text 18"/>
+          <p:cNvSpPr txBox="1"/>
+          <p:nvPr/>
+        </p:nvSpPr>
+        <p:spPr>
+          <a:xfrm>
+            <a:off x="6428232" y="3191256"/>
+            <a:ext cx="2157984" cy="530352"/>
+          </a:xfrm>
+          <a:prstGeom prst="rect">
+            <a:avLst/>
+          </a:prstGeom>
+          <a:noFill/>
+          <a:ln/>
+        </p:spPr>
+        <p:txBody>
+          <a:bodyPr wrap="square" lIns="0" tIns="0" rIns="0" bIns="0" rtlCol="0" anchor="t"/>
+          <a:lstStyle/>
+          <a:p>
+            <a:pPr marL="0" indent="0">
+              <a:buNone/>
+            </a:pPr>
+            <a:r>
+              <a:rPr lang="en-US" sz="1150" b="1" dirty="0">
+                <a:solidFill>
+                  <a:srgbClr val="6B7280"/>
+                </a:solidFill>
+              </a:rPr>
+              <a:t>Strength  </a:t>
+            </a:r>
+            <a:r>
+              <a:rPr lang="en-US" sz="1150" dirty="0">
                 <a:solidFill>
                   <a:schemeClr val="tx1"/>
                 </a:solidFill>
               </a:rPr>
-              <a:t>That is the virtuous cycle: audit, fix, re-measure. The ladder, the scorecard and the drift table later in the deck are that cycle</a:t>
-            </a:r>
-            <a:endParaRPr lang="en-US" sz="1300" dirty="0"/>
-          </a:p>
-        </p:txBody>
-      </p:sp>
-      <p:sp>
-        <p:nvSpPr>
-          <p:cNvPr id="25" name="Slide Number Placeholder 0"/>
-          <p:cNvSpPr>
-            <a:spLocks noGrp="1"/>
-          </p:cNvSpPr>
-          <p:nvPr>
-            <p:ph type="sldNum" sz="quarter" idx="4294967295"/>
-          </p:nvPr>
-        </p:nvSpPr>
-        <p:spPr>
-          <a:xfrm>
-            <a:off x="11091672" y="6400800"/>
-            <a:ext cx="548640" cy="274320"/>
-          </a:xfrm>
-          <a:prstGeom prst="rect">
-            <a:avLst/>
-          </a:prstGeom>
-          <a:extLst>
-            <a:ext uri="{C572A759-6A51-4108-AA02-DFA0A04FC94B}">
-              <ma14:wrappingTextBoxFlag xmlns:ma14="http://schemas.microsoft.com/office/mac/drawingml/2011/main" xmlns="" val="0"/>
-            </a:ext>
-          </a:extLst>
-        </p:spPr>
-        <p:txBody>
-          <a:bodyPr/>
-          <a:lstStyle>
-            <a:lvl1pPr>
-              <a:defRPr sz="1000">
-                <a:solidFill>
-                  <a:srgbClr val="6B7280"/>
-                </a:solidFill>
-              </a:defRPr>
-            </a:lvl1pPr>
-          </a:lstStyle>
-          <a:p>
-            <a:pPr algn="r"/>
-            <a:fld id="{F7021451-1387-4CA6-816F-3879F97B5CBC}" type="slidenum">
-              <a:rPr lang="en-US" b="0"/>
-              <a:t>5</a:t>
-            </a:fld>
-            <a:endParaRPr lang="en-US"/>
-          </a:p>
-        </p:txBody>
-      </p:sp>
-    </p:spTree>
-  </p:cSld>
-  <p:clrMapOvr>
-    <a:masterClrMapping/>
-  </p:clrMapOvr>
-</p:sld>
-</file>
-
-<file path=ppt/slides/slide6.xml><?xml version="1.0" encoding="utf-8"?>
-<p:sld xmlns:a="http://schemas.openxmlformats.org/drawingml/2006/main" xmlns:r="http://schemas.openxmlformats.org/officeDocument/2006/relationships" xmlns:p="http://schemas.openxmlformats.org/presentationml/2006/main">
-  <p:cSld name="Slide 6">
-    <p:spTree>
-      <p:nvGrpSpPr>
-        <p:cNvPr id="1" name=""/>
-        <p:cNvGrpSpPr/>
-        <p:nvPr/>
-      </p:nvGrpSpPr>
-      <p:grpSpPr>
-        <a:xfrm>
-          <a:off x="0" y="0"/>
-          <a:ext cx="0" cy="0"/>
-          <a:chOff x="0" y="0"/>
-          <a:chExt cx="0" cy="0"/>
-        </a:xfrm>
-      </p:grpSpPr>
-      <p:sp>
-        <p:nvSpPr>
-          <p:cNvPr id="2" name="Text 0"/>
-          <p:cNvSpPr>
-            <a:spLocks noGrp="1"/>
-          </p:cNvSpPr>
-          <p:nvPr>
-            <p:ph type="title" idx="100" hasCustomPrompt="1"/>
-          </p:nvPr>
-        </p:nvSpPr>
-        <p:spPr>
-          <a:xfrm>
-            <a:off x="548640" y="411480"/>
-            <a:ext cx="11091672" cy="822960"/>
-          </a:xfrm>
-          <a:prstGeom prst="rect">
-            <a:avLst/>
-          </a:prstGeom>
-          <a:noFill/>
-          <a:ln/>
-        </p:spPr>
-        <p:txBody>
-          <a:bodyPr wrap="square" lIns="0" tIns="0" rIns="0" bIns="0" rtlCol="0" anchor="ctr"/>
-          <a:lstStyle/>
-          <a:p>
-            <a:pPr marL="0" indent="0" algn="l">
-              <a:buNone/>
-            </a:pPr>
-            <a:r>
-              <a:rPr lang="en-US" sz="3200" b="1" dirty="0">
-                <a:solidFill>
-                  <a:schemeClr val="tx2"/>
-                </a:solidFill>
-              </a:rPr>
-              <a:t>Four kinds of signal, and where FedCast sits</a:t>
-            </a:r>
-            <a:endParaRPr lang="en-US" sz="3200" dirty="0"/>
-          </a:p>
-        </p:txBody>
-      </p:sp>
-      <p:sp>
-        <p:nvSpPr>
-          <p:cNvPr id="4" name="Shape 1"/>
+              <a:t>Transparent; the Fed's own published benchmarks</a:t>
+            </a:r>
+            <a:endParaRPr lang="en-US" sz="1150" dirty="0"/>
+          </a:p>
+        </p:txBody>
+      </p:sp>
+      <p:sp>
+        <p:nvSpPr>
+          <p:cNvPr id="22" name="Shape 19"/>
           <p:cNvSpPr/>
           <p:nvPr/>
         </p:nvSpPr>
         <p:spPr>
           <a:xfrm>
-            <a:off x="548640" y="1417320"/>
+            <a:off x="9025128" y="1417320"/>
             <a:ext cx="2615184" cy="2331720"/>
           </a:xfrm>
           <a:prstGeom prst="roundRect">
@@ -22185,17 +21666,640 @@
       </p:sp>
       <p:sp>
         <p:nvSpPr>
-          <p:cNvPr id="5" name="Shape 2"/>
+          <p:cNvPr id="23" name="Shape 20"/>
           <p:cNvSpPr/>
           <p:nvPr/>
         </p:nvSpPr>
         <p:spPr>
           <a:xfrm>
-            <a:off x="777240" y="1691640"/>
+            <a:off x="9253728" y="1691640"/>
             <a:ext cx="146304" cy="146304"/>
           </a:xfrm>
           <a:prstGeom prst="rect">
             <a:avLst/>
+          </a:prstGeom>
+          <a:solidFill>
+            <a:srgbClr val="C8553D"/>
+          </a:solidFill>
+          <a:ln w="12700">
+            <a:solidFill>
+              <a:srgbClr val="C8553D"/>
+            </a:solidFill>
+            <a:prstDash val="solid"/>
+          </a:ln>
+        </p:spPr>
+      </p:sp>
+      <p:sp>
+        <p:nvSpPr>
+          <p:cNvPr id="24" name="Text 21"/>
+          <p:cNvSpPr txBox="1"/>
+          <p:nvPr/>
+        </p:nvSpPr>
+        <p:spPr>
+          <a:xfrm>
+            <a:off x="9482328" y="1581912"/>
+            <a:ext cx="1975104" cy="365760"/>
+          </a:xfrm>
+          <a:prstGeom prst="rect">
+            <a:avLst/>
+          </a:prstGeom>
+          <a:noFill/>
+          <a:ln/>
+        </p:spPr>
+        <p:txBody>
+          <a:bodyPr wrap="square" lIns="0" tIns="0" rIns="0" bIns="0" rtlCol="0" anchor="t"/>
+          <a:lstStyle/>
+          <a:p>
+            <a:pPr marL="0" indent="0">
+              <a:buNone/>
+            </a:pPr>
+            <a:r>
+              <a:rPr lang="en-US" sz="1500" b="1" dirty="0">
+                <a:solidFill>
+                  <a:schemeClr val="tx2"/>
+                </a:solidFill>
+              </a:rPr>
+              <a:t>ML / AI signals</a:t>
+            </a:r>
+            <a:endParaRPr lang="en-US" sz="1500" dirty="0"/>
+          </a:p>
+        </p:txBody>
+      </p:sp>
+      <p:sp>
+        <p:nvSpPr>
+          <p:cNvPr id="25" name="Text 22"/>
+          <p:cNvSpPr txBox="1"/>
+          <p:nvPr/>
+        </p:nvSpPr>
+        <p:spPr>
+          <a:xfrm>
+            <a:off x="9253728" y="2039112"/>
+            <a:ext cx="2157984" cy="566928"/>
+          </a:xfrm>
+          <a:prstGeom prst="rect">
+            <a:avLst/>
+          </a:prstGeom>
+          <a:noFill/>
+          <a:ln/>
+        </p:spPr>
+        <p:txBody>
+          <a:bodyPr wrap="square" lIns="0" tIns="0" rIns="0" bIns="0" rtlCol="0" anchor="t"/>
+          <a:lstStyle/>
+          <a:p>
+            <a:pPr marL="0" indent="0">
+              <a:buNone/>
+            </a:pPr>
+            <a:r>
+              <a:rPr lang="en-US" sz="1200" b="1" dirty="0">
+                <a:solidFill>
+                  <a:schemeClr val="tx1"/>
+                </a:solidFill>
+              </a:rPr>
+              <a:t>LLM 'FOMC agent' papers (2025)</a:t>
+            </a:r>
+            <a:endParaRPr lang="en-US" sz="1200" dirty="0"/>
+          </a:p>
+        </p:txBody>
+      </p:sp>
+      <p:sp>
+        <p:nvSpPr>
+          <p:cNvPr id="26" name="Text 23"/>
+          <p:cNvSpPr txBox="1"/>
+          <p:nvPr/>
+        </p:nvSpPr>
+        <p:spPr>
+          <a:xfrm>
+            <a:off x="9253728" y="2624328"/>
+            <a:ext cx="2157984" cy="548640"/>
+          </a:xfrm>
+          <a:prstGeom prst="rect">
+            <a:avLst/>
+          </a:prstGeom>
+          <a:noFill/>
+          <a:ln/>
+        </p:spPr>
+        <p:txBody>
+          <a:bodyPr wrap="square" lIns="0" tIns="0" rIns="0" bIns="0" rtlCol="0" anchor="t"/>
+          <a:lstStyle/>
+          <a:p>
+            <a:pPr marL="0" indent="0">
+              <a:buNone/>
+            </a:pPr>
+            <a:r>
+              <a:rPr lang="en-US" sz="1150" b="1" dirty="0">
+                <a:solidFill>
+                  <a:srgbClr val="6B7280"/>
+                </a:solidFill>
+              </a:rPr>
+              <a:t>What it is  </a:t>
+            </a:r>
+            <a:r>
+              <a:rPr lang="en-US" sz="1150" dirty="0">
+                <a:solidFill>
+                  <a:schemeClr val="tx1"/>
+                </a:solidFill>
+              </a:rPr>
+              <a:t>Models that read the Fed's text and vote</a:t>
+            </a:r>
+            <a:endParaRPr lang="en-US" sz="1150" dirty="0"/>
+          </a:p>
+        </p:txBody>
+      </p:sp>
+      <p:sp>
+        <p:nvSpPr>
+          <p:cNvPr id="27" name="Text 24"/>
+          <p:cNvSpPr txBox="1"/>
+          <p:nvPr/>
+        </p:nvSpPr>
+        <p:spPr>
+          <a:xfrm>
+            <a:off x="9253728" y="3191256"/>
+            <a:ext cx="2157984" cy="530352"/>
+          </a:xfrm>
+          <a:prstGeom prst="rect">
+            <a:avLst/>
+          </a:prstGeom>
+          <a:noFill/>
+          <a:ln/>
+        </p:spPr>
+        <p:txBody>
+          <a:bodyPr wrap="square" lIns="0" tIns="0" rIns="0" bIns="0" rtlCol="0" anchor="t"/>
+          <a:lstStyle/>
+          <a:p>
+            <a:pPr marL="0" indent="0">
+              <a:buNone/>
+            </a:pPr>
+            <a:r>
+              <a:rPr lang="en-US" sz="1150" b="1" dirty="0">
+                <a:solidFill>
+                  <a:srgbClr val="6B7280"/>
+                </a:solidFill>
+              </a:rPr>
+              <a:t>Strength  </a:t>
+            </a:r>
+            <a:r>
+              <a:rPr lang="en-US" sz="1150" dirty="0">
+                <a:solidFill>
+                  <a:schemeClr val="tx1"/>
+                </a:solidFill>
+              </a:rPr>
+              <a:t>Reported 90%+ accuracy on 2023 to 2024</a:t>
+            </a:r>
+            <a:endParaRPr lang="en-US" sz="1150" dirty="0"/>
+          </a:p>
+        </p:txBody>
+      </p:sp>
+      <p:sp>
+        <p:nvSpPr>
+          <p:cNvPr id="28" name="Shape 25"/>
+          <p:cNvSpPr/>
+          <p:nvPr/>
+        </p:nvSpPr>
+        <p:spPr>
+          <a:xfrm>
+            <a:off x="731520" y="4553712"/>
+            <a:ext cx="10725912" cy="0"/>
+          </a:xfrm>
+          <a:prstGeom prst="line">
+            <a:avLst/>
+          </a:prstGeom>
+          <a:noFill/>
+          <a:ln w="22225">
+            <a:solidFill>
+              <a:srgbClr val="6B7280"/>
+            </a:solidFill>
+            <a:prstDash val="solid"/>
+            <a:headEnd type="triangle"/>
+            <a:tailEnd type="triangle"/>
+          </a:ln>
+        </p:spPr>
+      </p:sp>
+      <p:sp>
+        <p:nvSpPr>
+          <p:cNvPr id="29" name="Text 26"/>
+          <p:cNvSpPr txBox="1"/>
+          <p:nvPr/>
+        </p:nvSpPr>
+        <p:spPr>
+          <a:xfrm>
+            <a:off x="548640" y="4663440"/>
+            <a:ext cx="2194560" cy="274320"/>
+          </a:xfrm>
+          <a:prstGeom prst="rect">
+            <a:avLst/>
+          </a:prstGeom>
+          <a:noFill/>
+          <a:ln/>
+        </p:spPr>
+        <p:txBody>
+          <a:bodyPr wrap="square" lIns="0" tIns="0" rIns="0" bIns="0" rtlCol="0" anchor="t"/>
+          <a:lstStyle/>
+          <a:p>
+            <a:pPr marL="0" indent="0">
+              <a:buNone/>
+            </a:pPr>
+            <a:r>
+              <a:rPr lang="en-US" sz="1200" b="1" dirty="0">
+                <a:solidFill>
+                  <a:schemeClr val="accent4"/>
+                </a:solidFill>
+              </a:rPr>
+              <a:t>Pure data</a:t>
+            </a:r>
+            <a:endParaRPr lang="en-US" sz="1200" dirty="0"/>
+          </a:p>
+        </p:txBody>
+      </p:sp>
+      <p:sp>
+        <p:nvSpPr>
+          <p:cNvPr id="30" name="Text 27"/>
+          <p:cNvSpPr txBox="1"/>
+          <p:nvPr/>
+        </p:nvSpPr>
+        <p:spPr>
+          <a:xfrm>
+            <a:off x="548640" y="4919472"/>
+            <a:ext cx="2377440" cy="457200"/>
+          </a:xfrm>
+          <a:prstGeom prst="rect">
+            <a:avLst/>
+          </a:prstGeom>
+          <a:noFill/>
+          <a:ln/>
+        </p:spPr>
+        <p:txBody>
+          <a:bodyPr wrap="square" lIns="0" tIns="0" rIns="0" bIns="0" rtlCol="0" anchor="t"/>
+          <a:lstStyle/>
+          <a:p>
+            <a:pPr marL="0" indent="0">
+              <a:buNone/>
+            </a:pPr>
+            <a:r>
+              <a:rPr lang="en-US" sz="1050" dirty="0">
+                <a:solidFill>
+                  <a:schemeClr val="accent4"/>
+                </a:solidFill>
+              </a:rPr>
+              <a:t>prices and formulas; no reading of the Fed's words</a:t>
+            </a:r>
+            <a:endParaRPr lang="en-US" sz="1050" dirty="0"/>
+          </a:p>
+        </p:txBody>
+      </p:sp>
+      <p:sp>
+        <p:nvSpPr>
+          <p:cNvPr id="31" name="Text 28"/>
+          <p:cNvSpPr txBox="1"/>
+          <p:nvPr/>
+        </p:nvSpPr>
+        <p:spPr>
+          <a:xfrm>
+            <a:off x="9445752" y="4663440"/>
+            <a:ext cx="2194560" cy="274320"/>
+          </a:xfrm>
+          <a:prstGeom prst="rect">
+            <a:avLst/>
+          </a:prstGeom>
+          <a:noFill/>
+          <a:ln/>
+        </p:spPr>
+        <p:txBody>
+          <a:bodyPr wrap="square" lIns="0" tIns="0" rIns="0" bIns="0" rtlCol="0" anchor="t"/>
+          <a:lstStyle/>
+          <a:p>
+            <a:pPr marL="0" indent="0" algn="r">
+              <a:buNone/>
+            </a:pPr>
+            <a:r>
+              <a:rPr lang="en-US" sz="1200" b="1" dirty="0">
+                <a:solidFill>
+                  <a:schemeClr val="accent4"/>
+                </a:solidFill>
+              </a:rPr>
+              <a:t>Pure model</a:t>
+            </a:r>
+            <a:endParaRPr lang="en-US" sz="1200" dirty="0"/>
+          </a:p>
+        </p:txBody>
+      </p:sp>
+      <p:sp>
+        <p:nvSpPr>
+          <p:cNvPr id="32" name="Text 29"/>
+          <p:cNvSpPr txBox="1"/>
+          <p:nvPr/>
+        </p:nvSpPr>
+        <p:spPr>
+          <a:xfrm>
+            <a:off x="9262872" y="4919472"/>
+            <a:ext cx="2377440" cy="457200"/>
+          </a:xfrm>
+          <a:prstGeom prst="rect">
+            <a:avLst/>
+          </a:prstGeom>
+          <a:noFill/>
+          <a:ln/>
+        </p:spPr>
+        <p:txBody>
+          <a:bodyPr wrap="square" lIns="0" tIns="0" rIns="0" bIns="0" rtlCol="0" anchor="t"/>
+          <a:lstStyle/>
+          <a:p>
+            <a:pPr marL="0" indent="0" algn="r">
+              <a:buNone/>
+            </a:pPr>
+            <a:r>
+              <a:rPr lang="en-US" sz="1050" dirty="0">
+                <a:solidFill>
+                  <a:schemeClr val="accent4"/>
+                </a:solidFill>
+              </a:rPr>
+              <a:t>one model's judgement; nothing it reads is checked</a:t>
+            </a:r>
+            <a:endParaRPr lang="en-US" sz="1050" dirty="0"/>
+          </a:p>
+        </p:txBody>
+      </p:sp>
+      <p:sp>
+        <p:nvSpPr>
+          <p:cNvPr id="33" name="Shape 30"/>
+          <p:cNvSpPr/>
+          <p:nvPr/>
+        </p:nvSpPr>
+        <p:spPr>
+          <a:xfrm>
+            <a:off x="1819930" y="4462272"/>
+            <a:ext cx="182880" cy="182880"/>
+          </a:xfrm>
+          <a:prstGeom prst="ellipse">
+            <a:avLst/>
+          </a:prstGeom>
+          <a:solidFill>
+            <a:srgbClr val="1E2761"/>
+          </a:solidFill>
+          <a:ln w="12700">
+            <a:solidFill>
+              <a:srgbClr val="FFFFFF"/>
+            </a:solidFill>
+            <a:prstDash val="solid"/>
+          </a:ln>
+        </p:spPr>
+      </p:sp>
+      <p:sp>
+        <p:nvSpPr>
+          <p:cNvPr id="34" name="Text 31"/>
+          <p:cNvSpPr txBox="1"/>
+          <p:nvPr/>
+        </p:nvSpPr>
+        <p:spPr>
+          <a:xfrm>
+            <a:off x="859810" y="4078224"/>
+            <a:ext cx="2103120" cy="274320"/>
+          </a:xfrm>
+          <a:prstGeom prst="rect">
+            <a:avLst/>
+          </a:prstGeom>
+          <a:noFill/>
+          <a:ln/>
+        </p:spPr>
+        <p:txBody>
+          <a:bodyPr wrap="square" lIns="0" tIns="0" rIns="0" bIns="0" rtlCol="0" anchor="b"/>
+          <a:lstStyle/>
+          <a:p>
+            <a:pPr marL="0" indent="0" algn="ctr">
+              <a:buNone/>
+            </a:pPr>
+            <a:r>
+              <a:rPr lang="en-US" sz="1150" b="1" dirty="0">
+                <a:solidFill>
+                  <a:schemeClr val="tx1"/>
+                </a:solidFill>
+              </a:rPr>
+              <a:t>Futures, prediction markets</a:t>
+            </a:r>
+            <a:endParaRPr lang="en-US" sz="1150" dirty="0"/>
+          </a:p>
+        </p:txBody>
+      </p:sp>
+      <p:sp>
+        <p:nvSpPr>
+          <p:cNvPr id="35" name="Shape 32"/>
+          <p:cNvSpPr/>
+          <p:nvPr/>
+        </p:nvSpPr>
+        <p:spPr>
+          <a:xfrm>
+            <a:off x="3857854" y="4462272"/>
+            <a:ext cx="182880" cy="182880"/>
+          </a:xfrm>
+          <a:prstGeom prst="ellipse">
+            <a:avLst/>
+          </a:prstGeom>
+          <a:solidFill>
+            <a:srgbClr val="E9B44C"/>
+          </a:solidFill>
+          <a:ln w="12700">
+            <a:solidFill>
+              <a:srgbClr val="FFFFFF"/>
+            </a:solidFill>
+            <a:prstDash val="solid"/>
+          </a:ln>
+        </p:spPr>
+      </p:sp>
+      <p:sp>
+        <p:nvSpPr>
+          <p:cNvPr id="36" name="Text 33"/>
+          <p:cNvSpPr txBox="1"/>
+          <p:nvPr/>
+        </p:nvSpPr>
+        <p:spPr>
+          <a:xfrm>
+            <a:off x="2897734" y="4078224"/>
+            <a:ext cx="2103120" cy="274320"/>
+          </a:xfrm>
+          <a:prstGeom prst="rect">
+            <a:avLst/>
+          </a:prstGeom>
+          <a:noFill/>
+          <a:ln/>
+        </p:spPr>
+        <p:txBody>
+          <a:bodyPr wrap="square" lIns="0" tIns="0" rIns="0" bIns="0" rtlCol="0" anchor="b"/>
+          <a:lstStyle/>
+          <a:p>
+            <a:pPr marL="0" indent="0" algn="ctr">
+              <a:buNone/>
+            </a:pPr>
+            <a:r>
+              <a:rPr lang="en-US" sz="1150" b="1" dirty="0">
+                <a:solidFill>
+                  <a:schemeClr val="tx1"/>
+                </a:solidFill>
+              </a:rPr>
+              <a:t>Policy rules</a:t>
+            </a:r>
+            <a:endParaRPr lang="en-US" sz="1150" dirty="0"/>
+          </a:p>
+        </p:txBody>
+      </p:sp>
+      <p:sp>
+        <p:nvSpPr>
+          <p:cNvPr id="37" name="Shape 34"/>
+          <p:cNvSpPr/>
+          <p:nvPr/>
+        </p:nvSpPr>
+        <p:spPr>
+          <a:xfrm>
+            <a:off x="8148218" y="4462272"/>
+            <a:ext cx="182880" cy="182880"/>
+          </a:xfrm>
+          <a:prstGeom prst="ellipse">
+            <a:avLst/>
+          </a:prstGeom>
+          <a:solidFill>
+            <a:srgbClr val="2C6E49"/>
+          </a:solidFill>
+          <a:ln w="12700">
+            <a:solidFill>
+              <a:srgbClr val="FFFFFF"/>
+            </a:solidFill>
+            <a:prstDash val="solid"/>
+          </a:ln>
+        </p:spPr>
+      </p:sp>
+      <p:sp>
+        <p:nvSpPr>
+          <p:cNvPr id="38" name="Text 35"/>
+          <p:cNvSpPr txBox="1"/>
+          <p:nvPr/>
+        </p:nvSpPr>
+        <p:spPr>
+          <a:xfrm>
+            <a:off x="7188098" y="4078224"/>
+            <a:ext cx="2103120" cy="274320"/>
+          </a:xfrm>
+          <a:prstGeom prst="rect">
+            <a:avLst/>
+          </a:prstGeom>
+          <a:noFill/>
+          <a:ln/>
+        </p:spPr>
+        <p:txBody>
+          <a:bodyPr wrap="square" lIns="0" tIns="0" rIns="0" bIns="0" rtlCol="0" anchor="b"/>
+          <a:lstStyle/>
+          <a:p>
+            <a:pPr marL="0" indent="0" algn="ctr">
+              <a:buNone/>
+            </a:pPr>
+            <a:r>
+              <a:rPr lang="en-US" sz="1150" b="1" dirty="0">
+                <a:solidFill>
+                  <a:schemeClr val="tx1"/>
+                </a:solidFill>
+              </a:rPr>
+              <a:t>Economist surveys</a:t>
+            </a:r>
+            <a:endParaRPr lang="en-US" sz="1150" dirty="0"/>
+          </a:p>
+        </p:txBody>
+      </p:sp>
+      <p:sp>
+        <p:nvSpPr>
+          <p:cNvPr id="39" name="Shape 36"/>
+          <p:cNvSpPr/>
+          <p:nvPr/>
+        </p:nvSpPr>
+        <p:spPr>
+          <a:xfrm>
+            <a:off x="10293401" y="4462272"/>
+            <a:ext cx="182880" cy="182880"/>
+          </a:xfrm>
+          <a:prstGeom prst="ellipse">
+            <a:avLst/>
+          </a:prstGeom>
+          <a:solidFill>
+            <a:srgbClr val="C8553D"/>
+          </a:solidFill>
+          <a:ln w="12700">
+            <a:solidFill>
+              <a:srgbClr val="FFFFFF"/>
+            </a:solidFill>
+            <a:prstDash val="solid"/>
+          </a:ln>
+        </p:spPr>
+      </p:sp>
+      <p:sp>
+        <p:nvSpPr>
+          <p:cNvPr id="40" name="Text 37"/>
+          <p:cNvSpPr txBox="1"/>
+          <p:nvPr/>
+        </p:nvSpPr>
+        <p:spPr>
+          <a:xfrm>
+            <a:off x="9333281" y="4078224"/>
+            <a:ext cx="2103120" cy="274320"/>
+          </a:xfrm>
+          <a:prstGeom prst="rect">
+            <a:avLst/>
+          </a:prstGeom>
+          <a:noFill/>
+          <a:ln/>
+        </p:spPr>
+        <p:txBody>
+          <a:bodyPr wrap="square" lIns="0" tIns="0" rIns="0" bIns="0" rtlCol="0" anchor="b"/>
+          <a:lstStyle/>
+          <a:p>
+            <a:pPr marL="0" indent="0" algn="ctr">
+              <a:buNone/>
+            </a:pPr>
+            <a:r>
+              <a:rPr lang="en-US" sz="1150" b="1" dirty="0">
+                <a:solidFill>
+                  <a:schemeClr val="tx1"/>
+                </a:solidFill>
+              </a:rPr>
+              <a:t>LLM 'FOMC agents'</a:t>
+            </a:r>
+            <a:endParaRPr lang="en-US" sz="1150" dirty="0"/>
+          </a:p>
+        </p:txBody>
+      </p:sp>
+      <p:sp>
+        <p:nvSpPr>
+          <p:cNvPr id="41" name="Shape 38"/>
+          <p:cNvSpPr/>
+          <p:nvPr/>
+        </p:nvSpPr>
+        <p:spPr>
+          <a:xfrm>
+            <a:off x="6094476" y="4553712"/>
+            <a:ext cx="0" cy="256032"/>
+          </a:xfrm>
+          <a:prstGeom prst="line">
+            <a:avLst/>
+          </a:prstGeom>
+          <a:noFill/>
+          <a:ln w="22225">
+            <a:solidFill>
+              <a:srgbClr val="1E2761"/>
+            </a:solidFill>
+            <a:prstDash val="solid"/>
+          </a:ln>
+        </p:spPr>
+      </p:sp>
+      <p:sp>
+        <p:nvSpPr>
+          <p:cNvPr id="42" name="Shape 39"/>
+          <p:cNvSpPr/>
+          <p:nvPr/>
+        </p:nvSpPr>
+        <p:spPr>
+          <a:xfrm>
+            <a:off x="5454396" y="4809744"/>
+            <a:ext cx="1280160" cy="365760"/>
+          </a:xfrm>
+          <a:prstGeom prst="roundRect">
+            <a:avLst>
+              <a:gd name="adj" fmla="val 50000"/>
+            </a:avLst>
           </a:prstGeom>
           <a:solidFill>
             <a:srgbClr val="1E2761"/>
@@ -22210,14 +22314,89 @@
       </p:sp>
       <p:sp>
         <p:nvSpPr>
-          <p:cNvPr id="6" name="Text 3"/>
+          <p:cNvPr id="43" name="Text 40"/>
           <p:cNvSpPr txBox="1"/>
           <p:nvPr/>
         </p:nvSpPr>
         <p:spPr>
           <a:xfrm>
-            <a:off x="1005840" y="1581912"/>
-            <a:ext cx="1975104" cy="365760"/>
+            <a:off x="5454396" y="4809744"/>
+            <a:ext cx="1280160" cy="365760"/>
+          </a:xfrm>
+          <a:prstGeom prst="rect">
+            <a:avLst/>
+          </a:prstGeom>
+          <a:noFill/>
+          <a:ln/>
+        </p:spPr>
+        <p:txBody>
+          <a:bodyPr wrap="square" lIns="0" tIns="0" rIns="0" bIns="0" rtlCol="0" anchor="ctr"/>
+          <a:lstStyle/>
+          <a:p>
+            <a:pPr marL="0" indent="0" algn="ctr">
+              <a:buNone/>
+            </a:pPr>
+            <a:r>
+              <a:rPr lang="en-US" sz="1300" b="1" dirty="0">
+                <a:solidFill>
+                  <a:schemeClr val="bg1"/>
+                </a:solidFill>
+                <a:latin typeface="Cambria" pitchFamily="34" charset="0"/>
+                <a:ea typeface="Cambria" pitchFamily="34" charset="-122"/>
+                <a:cs typeface="Cambria" pitchFamily="34" charset="-120"/>
+              </a:rPr>
+              <a:t>FedCast</a:t>
+            </a:r>
+            <a:endParaRPr lang="en-US" sz="1300" dirty="0"/>
+          </a:p>
+        </p:txBody>
+      </p:sp>
+      <p:sp>
+        <p:nvSpPr>
+          <p:cNvPr id="44" name="Text 41"/>
+          <p:cNvSpPr txBox="1"/>
+          <p:nvPr/>
+        </p:nvSpPr>
+        <p:spPr>
+          <a:xfrm>
+            <a:off x="2528316" y="5285232"/>
+            <a:ext cx="7132320" cy="548640"/>
+          </a:xfrm>
+          <a:prstGeom prst="rect">
+            <a:avLst/>
+          </a:prstGeom>
+          <a:noFill/>
+          <a:ln/>
+        </p:spPr>
+        <p:txBody>
+          <a:bodyPr wrap="square" lIns="0" tIns="0" rIns="0" bIns="0" rtlCol="0" anchor="t"/>
+          <a:lstStyle/>
+          <a:p>
+            <a:pPr marL="0" indent="0" algn="ctr">
+              <a:buNone/>
+            </a:pPr>
+            <a:r>
+              <a:rPr lang="en-US" sz="1150" dirty="0">
+                <a:solidFill>
+                  <a:schemeClr val="tx1"/>
+                </a:solidFill>
+              </a:rPr>
+              <a:t>Takes one input from each area, prices, 32 years of decisions, the Fed's own rules and a language model that must quote what it reads, and combines them by code at fixed weights. Neither a formula nor an oracle.</a:t>
+            </a:r>
+            <a:endParaRPr lang="en-US" sz="1150" dirty="0"/>
+          </a:p>
+        </p:txBody>
+      </p:sp>
+      <p:sp>
+        <p:nvSpPr>
+          <p:cNvPr id="45" name="Text 42"/>
+          <p:cNvSpPr txBox="1"/>
+          <p:nvPr/>
+        </p:nvSpPr>
+        <p:spPr>
+          <a:xfrm>
+            <a:off x="548640" y="6053328"/>
+            <a:ext cx="11091672" cy="274320"/>
           </a:xfrm>
           <a:prstGeom prst="rect">
             <a:avLst/>
@@ -22233,155 +22412,141 @@
               <a:buNone/>
             </a:pPr>
             <a:r>
-              <a:rPr lang="en-US" sz="1500" b="1" dirty="0">
+              <a:rPr lang="en-US" sz="950" dirty="0">
+                <a:solidFill>
+                  <a:schemeClr val="accent4"/>
+                </a:solidFill>
+              </a:rPr>
+              <a:t>Sources: Bonini, Huang and Simaan, 'Watching the FedWatch' (232 meetings, May 1994 to March 2024); FedSight AI preprint, December 2025; Takano, Hirano and Nakagawa, arXiv 2511.02469.</a:t>
+            </a:r>
+            <a:endParaRPr lang="en-US" sz="950" dirty="0"/>
+          </a:p>
+        </p:txBody>
+      </p:sp>
+      <p:sp>
+        <p:nvSpPr>
+          <p:cNvPr id="3" name="Slide Number Placeholder 0"/>
+          <p:cNvSpPr>
+            <a:spLocks noGrp="1"/>
+          </p:cNvSpPr>
+          <p:nvPr>
+            <p:ph type="sldNum" sz="quarter" idx="4294967295"/>
+          </p:nvPr>
+        </p:nvSpPr>
+        <p:spPr>
+          <a:xfrm>
+            <a:off x="11091672" y="6400800"/>
+            <a:ext cx="548640" cy="274320"/>
+          </a:xfrm>
+          <a:prstGeom prst="rect">
+            <a:avLst/>
+          </a:prstGeom>
+          <a:extLst>
+            <a:ext uri="{C572A759-6A51-4108-AA02-DFA0A04FC94B}">
+              <ma14:wrappingTextBoxFlag xmlns:ma14="http://schemas.microsoft.com/office/mac/drawingml/2011/main" xmlns="" val="0"/>
+            </a:ext>
+          </a:extLst>
+        </p:spPr>
+        <p:txBody>
+          <a:bodyPr/>
+          <a:lstStyle>
+            <a:lvl1pPr>
+              <a:defRPr sz="1000">
+                <a:solidFill>
+                  <a:srgbClr val="6B7280"/>
+                </a:solidFill>
+              </a:defRPr>
+            </a:lvl1pPr>
+          </a:lstStyle>
+          <a:p>
+            <a:pPr algn="r"/>
+            <a:fld id="{F7021451-1387-4CA6-816F-3879F97B5CBC}" type="slidenum">
+              <a:rPr lang="en-US" b="0"/>
+              <a:t>5</a:t>
+            </a:fld>
+            <a:endParaRPr lang="en-US"/>
+          </a:p>
+        </p:txBody>
+      </p:sp>
+    </p:spTree>
+  </p:cSld>
+  <p:clrMapOvr>
+    <a:masterClrMapping/>
+  </p:clrMapOvr>
+</p:sld>
+</file>
+
+<file path=ppt/slides/slide6.xml><?xml version="1.0" encoding="utf-8"?>
+<p:sld xmlns:a="http://schemas.openxmlformats.org/drawingml/2006/main" xmlns:r="http://schemas.openxmlformats.org/officeDocument/2006/relationships" xmlns:p="http://schemas.openxmlformats.org/presentationml/2006/main">
+  <p:cSld name="Slide 5">
+    <p:spTree>
+      <p:nvGrpSpPr>
+        <p:cNvPr id="1" name=""/>
+        <p:cNvGrpSpPr/>
+        <p:nvPr/>
+      </p:nvGrpSpPr>
+      <p:grpSpPr>
+        <a:xfrm>
+          <a:off x="0" y="0"/>
+          <a:ext cx="0" cy="0"/>
+          <a:chOff x="0" y="0"/>
+          <a:chExt cx="0" cy="0"/>
+        </a:xfrm>
+      </p:grpSpPr>
+      <p:sp>
+        <p:nvSpPr>
+          <p:cNvPr id="2" name="Text 0"/>
+          <p:cNvSpPr>
+            <a:spLocks noGrp="1"/>
+          </p:cNvSpPr>
+          <p:nvPr>
+            <p:ph type="title" idx="100" hasCustomPrompt="1"/>
+          </p:nvPr>
+        </p:nvSpPr>
+        <p:spPr>
+          <a:xfrm>
+            <a:off x="548640" y="411480"/>
+            <a:ext cx="11091672" cy="822960"/>
+          </a:xfrm>
+          <a:prstGeom prst="rect">
+            <a:avLst/>
+          </a:prstGeom>
+          <a:noFill/>
+          <a:ln/>
+        </p:spPr>
+        <p:txBody>
+          <a:bodyPr wrap="square" lIns="0" tIns="0" rIns="0" bIns="0" rtlCol="0" anchor="ctr"/>
+          <a:lstStyle/>
+          <a:p>
+            <a:pPr marL="0" indent="0" algn="l">
+              <a:buNone/>
+            </a:pPr>
+            <a:r>
+              <a:rPr lang="en-US" sz="3200" b="1" dirty="0">
                 <a:solidFill>
                   <a:schemeClr val="tx2"/>
                 </a:solidFill>
               </a:rPr>
-              <a:t>Market signals</a:t>
-            </a:r>
-            <a:endParaRPr lang="en-US" sz="1500" dirty="0"/>
-          </a:p>
-        </p:txBody>
-      </p:sp>
-      <p:sp>
-        <p:nvSpPr>
-          <p:cNvPr id="7" name="Text 4"/>
-          <p:cNvSpPr txBox="1"/>
-          <p:nvPr/>
-        </p:nvSpPr>
-        <p:spPr>
-          <a:xfrm>
-            <a:off x="777240" y="2039112"/>
-            <a:ext cx="2157984" cy="566928"/>
-          </a:xfrm>
-          <a:prstGeom prst="rect">
-            <a:avLst/>
-          </a:prstGeom>
-          <a:noFill/>
-          <a:ln/>
-        </p:spPr>
-        <p:txBody>
-          <a:bodyPr wrap="square" lIns="0" tIns="0" rIns="0" bIns="0" rtlCol="0" anchor="t"/>
-          <a:lstStyle/>
-          <a:p>
-            <a:pPr marL="0" indent="0">
-              <a:buNone/>
-            </a:pPr>
-            <a:r>
-              <a:rPr lang="en-US" sz="1200" b="1" dirty="0">
-                <a:solidFill>
-                  <a:schemeClr val="tx1"/>
-                </a:solidFill>
-              </a:rPr>
-              <a:t>Fed funds futures (CME FedWatch); prediction markets (Polymarket, Kalshi)</a:t>
-            </a:r>
-            <a:endParaRPr lang="en-US" sz="1200" dirty="0"/>
-          </a:p>
-        </p:txBody>
-      </p:sp>
-      <p:sp>
-        <p:nvSpPr>
-          <p:cNvPr id="8" name="Text 5"/>
-          <p:cNvSpPr txBox="1"/>
-          <p:nvPr/>
-        </p:nvSpPr>
-        <p:spPr>
-          <a:xfrm>
-            <a:off x="777240" y="2624328"/>
-            <a:ext cx="2157984" cy="548640"/>
-          </a:xfrm>
-          <a:prstGeom prst="rect">
-            <a:avLst/>
-          </a:prstGeom>
-          <a:noFill/>
-          <a:ln/>
-        </p:spPr>
-        <p:txBody>
-          <a:bodyPr wrap="square" lIns="0" tIns="0" rIns="0" bIns="0" rtlCol="0" anchor="t"/>
-          <a:lstStyle/>
-          <a:p>
-            <a:pPr marL="0" indent="0">
-              <a:buNone/>
-            </a:pPr>
-            <a:r>
-              <a:rPr lang="en-US" sz="1150" b="1" dirty="0">
-                <a:solidFill>
-                  <a:srgbClr val="6B7280"/>
-                </a:solidFill>
-              </a:rPr>
-              <a:t>What it is  </a:t>
-            </a:r>
-            <a:r>
-              <a:rPr lang="en-US" sz="1150" dirty="0">
-                <a:solidFill>
-                  <a:schemeClr val="tx1"/>
-                </a:solidFill>
-              </a:rPr>
-              <a:t>Prices and crowd odds on each outcome</a:t>
-            </a:r>
-            <a:endParaRPr lang="en-US" sz="1150" dirty="0"/>
-          </a:p>
-        </p:txBody>
-      </p:sp>
-      <p:sp>
-        <p:nvSpPr>
-          <p:cNvPr id="9" name="Text 6"/>
-          <p:cNvSpPr txBox="1"/>
-          <p:nvPr/>
-        </p:nvSpPr>
-        <p:spPr>
-          <a:xfrm>
-            <a:off x="777240" y="3191256"/>
-            <a:ext cx="2157984" cy="530352"/>
-          </a:xfrm>
-          <a:prstGeom prst="rect">
-            <a:avLst/>
-          </a:prstGeom>
-          <a:noFill/>
-          <a:ln/>
-        </p:spPr>
-        <p:txBody>
-          <a:bodyPr wrap="square" lIns="0" tIns="0" rIns="0" bIns="0" rtlCol="0" anchor="t"/>
-          <a:lstStyle/>
-          <a:p>
-            <a:pPr marL="0" indent="0">
-              <a:buNone/>
-            </a:pPr>
-            <a:r>
-              <a:rPr lang="en-US" sz="1150" b="1" dirty="0">
-                <a:solidFill>
-                  <a:srgbClr val="6B7280"/>
-                </a:solidFill>
-              </a:rPr>
-              <a:t>Strength  </a:t>
-            </a:r>
-            <a:r>
-              <a:rPr lang="en-US" sz="1150" dirty="0">
-                <a:solidFill>
-                  <a:schemeClr val="tx1"/>
-                </a:solidFill>
-              </a:rPr>
-              <a:t>Futures about 88% right at 30 days, 1994 to 2024; odds move fast</a:t>
-            </a:r>
-            <a:endParaRPr lang="en-US" sz="1150" dirty="0"/>
-          </a:p>
-        </p:txBody>
-      </p:sp>
-      <p:sp>
-        <p:nvSpPr>
-          <p:cNvPr id="10" name="Shape 7"/>
+              <a:t>Why this approach ?</a:t>
+            </a:r>
+            <a:endParaRPr lang="en-US" sz="3200" dirty="0"/>
+          </a:p>
+        </p:txBody>
+      </p:sp>
+      <p:sp>
+        <p:nvSpPr>
+          <p:cNvPr id="4" name="Shape 1"/>
           <p:cNvSpPr/>
           <p:nvPr/>
         </p:nvSpPr>
         <p:spPr>
           <a:xfrm>
-            <a:off x="3374136" y="1417320"/>
-            <a:ext cx="2615184" cy="2331720"/>
+            <a:off x="548640" y="1417320"/>
+            <a:ext cx="3520440" cy="3977640"/>
           </a:xfrm>
           <a:prstGeom prst="roundRect">
             <a:avLst>
-              <a:gd name="adj" fmla="val 4706"/>
+              <a:gd name="adj" fmla="val 3117"/>
             </a:avLst>
           </a:prstGeom>
           <a:solidFill>
@@ -22404,24 +22569,24 @@
       </p:sp>
       <p:sp>
         <p:nvSpPr>
-          <p:cNvPr id="11" name="Shape 8"/>
+          <p:cNvPr id="5" name="Shape 2"/>
           <p:cNvSpPr/>
           <p:nvPr/>
         </p:nvSpPr>
         <p:spPr>
           <a:xfrm>
-            <a:off x="3602736" y="1691640"/>
-            <a:ext cx="146304" cy="146304"/>
-          </a:xfrm>
-          <a:prstGeom prst="rect">
+            <a:off x="822960" y="1600200"/>
+            <a:ext cx="384048" cy="384048"/>
+          </a:xfrm>
+          <a:prstGeom prst="ellipse">
             <a:avLst/>
           </a:prstGeom>
           <a:solidFill>
-            <a:srgbClr val="2C6E49"/>
+            <a:srgbClr val="1E2761"/>
           </a:solidFill>
           <a:ln w="12700">
             <a:solidFill>
-              <a:srgbClr val="2C6E49"/>
+              <a:srgbClr val="1E2761"/>
             </a:solidFill>
             <a:prstDash val="solid"/>
           </a:ln>
@@ -22429,23 +22594,59 @@
       </p:sp>
       <p:sp>
         <p:nvSpPr>
-          <p:cNvPr id="12" name="Text 9"/>
+          <p:cNvPr id="6" name="Text 3"/>
           <p:cNvSpPr txBox="1"/>
           <p:nvPr/>
         </p:nvSpPr>
         <p:spPr>
           <a:xfrm>
-            <a:off x="3831336" y="1581912"/>
-            <a:ext cx="1975104" cy="365760"/>
-          </a:xfrm>
-          <a:prstGeom prst="rect">
-            <a:avLst/>
-          </a:prstGeom>
-          <a:noFill/>
-          <a:ln/>
-        </p:spPr>
-        <p:txBody>
-          <a:bodyPr wrap="square" lIns="0" tIns="0" rIns="0" bIns="0" rtlCol="0" anchor="t"/>
+            <a:off x="822960" y="1600200"/>
+            <a:ext cx="384048" cy="384048"/>
+          </a:xfrm>
+          <a:prstGeom prst="rect">
+            <a:avLst/>
+          </a:prstGeom>
+          <a:noFill/>
+          <a:ln/>
+        </p:spPr>
+        <p:txBody>
+          <a:bodyPr wrap="square" lIns="0" tIns="0" rIns="0" bIns="0" rtlCol="0" anchor="ctr"/>
+          <a:lstStyle/>
+          <a:p>
+            <a:pPr marL="0" indent="0" algn="ctr">
+              <a:buNone/>
+            </a:pPr>
+            <a:r>
+              <a:rPr lang="en-US" sz="1400" b="1" dirty="0">
+                <a:solidFill>
+                  <a:schemeClr val="bg1"/>
+                </a:solidFill>
+              </a:rPr>
+              <a:t>1</a:t>
+            </a:r>
+            <a:endParaRPr lang="en-US" sz="1400" dirty="0"/>
+          </a:p>
+        </p:txBody>
+      </p:sp>
+      <p:sp>
+        <p:nvSpPr>
+          <p:cNvPr id="7" name="Text 4"/>
+          <p:cNvSpPr txBox="1"/>
+          <p:nvPr/>
+        </p:nvSpPr>
+        <p:spPr>
+          <a:xfrm>
+            <a:off x="1325880" y="1554480"/>
+            <a:ext cx="2560320" cy="502920"/>
+          </a:xfrm>
+          <a:prstGeom prst="rect">
+            <a:avLst/>
+          </a:prstGeom>
+          <a:noFill/>
+          <a:ln/>
+        </p:spPr>
+        <p:txBody>
+          <a:bodyPr wrap="square" lIns="0" tIns="0" rIns="0" bIns="0" rtlCol="0" anchor="ctr"/>
           <a:lstStyle/>
           <a:p>
             <a:pPr marL="0" indent="0">
@@ -22457,7 +22658,7 @@
                   <a:schemeClr val="tx2"/>
                 </a:solidFill>
               </a:rPr>
-              <a:t>Economic signals</a:t>
+              <a:t>We judge the process, not the luck</a:t>
             </a:r>
             <a:endParaRPr lang="en-US" sz="1500" dirty="0"/>
           </a:p>
@@ -22465,14 +22666,14 @@
       </p:sp>
       <p:sp>
         <p:nvSpPr>
-          <p:cNvPr id="13" name="Text 10"/>
+          <p:cNvPr id="8" name="Text 5"/>
           <p:cNvSpPr txBox="1"/>
           <p:nvPr/>
         </p:nvSpPr>
         <p:spPr>
           <a:xfrm>
-            <a:off x="3602736" y="2039112"/>
-            <a:ext cx="2157984" cy="566928"/>
+            <a:off x="822960" y="2240280"/>
+            <a:ext cx="3017520" cy="3063240"/>
           </a:xfrm>
           <a:prstGeom prst="rect">
             <a:avLst/>
@@ -22484,123 +22685,75 @@
           <a:bodyPr wrap="square" lIns="0" tIns="0" rIns="0" bIns="0" rtlCol="0" anchor="t"/>
           <a:lstStyle/>
           <a:p>
-            <a:pPr marL="0" indent="0">
-              <a:buNone/>
-            </a:pPr>
-            <a:r>
-              <a:rPr lang="en-US" sz="1200" b="1" dirty="0">
+            <a:pPr marL="342900" indent="-342900">
+              <a:spcAft>
+                <a:spcPts val="800"/>
+              </a:spcAft>
+              <a:buSzPct val="100000"/>
+              <a:buChar char="•"/>
+            </a:pPr>
+            <a:r>
+              <a:rPr lang="en-US" sz="1300" dirty="0">
                 <a:solidFill>
                   <a:schemeClr val="tx1"/>
                 </a:solidFill>
               </a:rPr>
-              <a:t>Economist surveys; the macro data itself</a:t>
-            </a:r>
-            <a:endParaRPr lang="en-US" sz="1200" dirty="0"/>
-          </a:p>
-        </p:txBody>
-      </p:sp>
-      <p:sp>
-        <p:nvSpPr>
-          <p:cNvPr id="14" name="Text 11"/>
-          <p:cNvSpPr txBox="1"/>
-          <p:nvPr/>
-        </p:nvSpPr>
-        <p:spPr>
-          <a:xfrm>
-            <a:off x="3602736" y="2624328"/>
-            <a:ext cx="2157984" cy="548640"/>
-          </a:xfrm>
-          <a:prstGeom prst="rect">
-            <a:avLst/>
-          </a:prstGeom>
-          <a:noFill/>
-          <a:ln/>
-        </p:spPr>
-        <p:txBody>
-          <a:bodyPr wrap="square" lIns="0" tIns="0" rIns="0" bIns="0" rtlCol="0" anchor="t"/>
-          <a:lstStyle/>
-          <a:p>
-            <a:pPr marL="0" indent="0">
-              <a:buNone/>
-            </a:pPr>
-            <a:r>
-              <a:rPr lang="en-US" sz="1150" b="1" dirty="0">
-                <a:solidFill>
-                  <a:srgbClr val="6B7280"/>
-                </a:solidFill>
-              </a:rPr>
-              <a:t>What it is  </a:t>
-            </a:r>
-            <a:r>
-              <a:rPr lang="en-US" sz="1150" dirty="0">
+              <a:t>Eight decisions a year: a good year proves nothing</a:t>
+            </a:r>
+            <a:endParaRPr lang="en-US" sz="1300" dirty="0"/>
+          </a:p>
+          <a:p>
+            <a:pPr marL="342900" indent="-342900">
+              <a:spcAft>
+                <a:spcPts val="800"/>
+              </a:spcAft>
+              <a:buSzPct val="100000"/>
+              <a:buChar char="•"/>
+            </a:pPr>
+            <a:r>
+              <a:rPr lang="en-US" sz="1300" dirty="0">
                 <a:solidFill>
                   <a:schemeClr val="tx1"/>
                 </a:solidFill>
               </a:rPr>
-              <a:t>The median of polled forecasters; the data the committee reads</a:t>
-            </a:r>
-            <a:endParaRPr lang="en-US" sz="1150" dirty="0"/>
-          </a:p>
-        </p:txBody>
-      </p:sp>
-      <p:sp>
-        <p:nvSpPr>
-          <p:cNvPr id="15" name="Text 12"/>
-          <p:cNvSpPr txBox="1"/>
-          <p:nvPr/>
-        </p:nvSpPr>
-        <p:spPr>
-          <a:xfrm>
-            <a:off x="3602736" y="3191256"/>
-            <a:ext cx="2157984" cy="530352"/>
-          </a:xfrm>
-          <a:prstGeom prst="rect">
-            <a:avLst/>
-          </a:prstGeom>
-          <a:noFill/>
-          <a:ln/>
-        </p:spPr>
-        <p:txBody>
-          <a:bodyPr wrap="square" lIns="0" tIns="0" rIns="0" bIns="0" rtlCol="0" anchor="t"/>
-          <a:lstStyle/>
-          <a:p>
-            <a:pPr marL="0" indent="0">
-              <a:buNone/>
-            </a:pPr>
-            <a:r>
-              <a:rPr lang="en-US" sz="1150" b="1" dirty="0">
-                <a:solidFill>
-                  <a:srgbClr val="6B7280"/>
-                </a:solidFill>
-              </a:rPr>
-              <a:t>Strength  </a:t>
-            </a:r>
-            <a:r>
-              <a:rPr lang="en-US" sz="1150" dirty="0">
+              <a:t>The yardstick is a ten-point scorecard, fixed before any code: same evidence, same answer? every claim quoted? any number from memory? a shock moves the number the right way?</a:t>
+            </a:r>
+            <a:endParaRPr lang="en-US" sz="1300" dirty="0"/>
+          </a:p>
+          <a:p>
+            <a:pPr marL="342900" indent="-342900">
+              <a:spcAft>
+                <a:spcPts val="800"/>
+              </a:spcAft>
+              <a:buSzPct val="100000"/>
+              <a:buChar char="•"/>
+            </a:pPr>
+            <a:r>
+              <a:rPr lang="en-US" sz="1300" dirty="0">
                 <a:solidFill>
                   <a:schemeClr val="tx1"/>
                 </a:solidFill>
               </a:rPr>
-              <a:t>Broad human judgement; the data is the Fed's own input</a:t>
-            </a:r>
-            <a:endParaRPr lang="en-US" sz="1150" dirty="0"/>
-          </a:p>
-        </p:txBody>
-      </p:sp>
-      <p:sp>
-        <p:nvSpPr>
-          <p:cNvPr id="16" name="Shape 13"/>
+              <a:t>Outcomes are logged after each decision and never used to tune</a:t>
+            </a:r>
+            <a:endParaRPr lang="en-US" sz="1300" dirty="0"/>
+          </a:p>
+        </p:txBody>
+      </p:sp>
+      <p:sp>
+        <p:nvSpPr>
+          <p:cNvPr id="9" name="Shape 6"/>
           <p:cNvSpPr/>
           <p:nvPr/>
         </p:nvSpPr>
         <p:spPr>
           <a:xfrm>
-            <a:off x="6199632" y="1417320"/>
-            <a:ext cx="2615184" cy="2331720"/>
+            <a:off x="4297680" y="1417320"/>
+            <a:ext cx="3520440" cy="3977640"/>
           </a:xfrm>
           <a:prstGeom prst="roundRect">
             <a:avLst>
-              <a:gd name="adj" fmla="val 4706"/>
+              <a:gd name="adj" fmla="val 3117"/>
             </a:avLst>
           </a:prstGeom>
           <a:solidFill>
@@ -22623,24 +22776,24 @@
       </p:sp>
       <p:sp>
         <p:nvSpPr>
-          <p:cNvPr id="17" name="Shape 14"/>
+          <p:cNvPr id="10" name="Shape 7"/>
           <p:cNvSpPr/>
           <p:nvPr/>
         </p:nvSpPr>
         <p:spPr>
           <a:xfrm>
-            <a:off x="6428232" y="1691640"/>
-            <a:ext cx="146304" cy="146304"/>
-          </a:xfrm>
-          <a:prstGeom prst="rect">
+            <a:off x="4572000" y="1600200"/>
+            <a:ext cx="384048" cy="384048"/>
+          </a:xfrm>
+          <a:prstGeom prst="ellipse">
             <a:avLst/>
           </a:prstGeom>
           <a:solidFill>
-            <a:srgbClr val="E9B44C"/>
+            <a:srgbClr val="1E2761"/>
           </a:solidFill>
           <a:ln w="12700">
             <a:solidFill>
-              <a:srgbClr val="E9B44C"/>
+              <a:srgbClr val="1E2761"/>
             </a:solidFill>
             <a:prstDash val="solid"/>
           </a:ln>
@@ -22648,23 +22801,59 @@
       </p:sp>
       <p:sp>
         <p:nvSpPr>
-          <p:cNvPr id="18" name="Text 15"/>
+          <p:cNvPr id="11" name="Text 8"/>
           <p:cNvSpPr txBox="1"/>
           <p:nvPr/>
         </p:nvSpPr>
         <p:spPr>
           <a:xfrm>
-            <a:off x="6656832" y="1581912"/>
-            <a:ext cx="1975104" cy="365760"/>
-          </a:xfrm>
-          <a:prstGeom prst="rect">
-            <a:avLst/>
-          </a:prstGeom>
-          <a:noFill/>
-          <a:ln/>
-        </p:spPr>
-        <p:txBody>
-          <a:bodyPr wrap="square" lIns="0" tIns="0" rIns="0" bIns="0" rtlCol="0" anchor="t"/>
+            <a:off x="4572000" y="1600200"/>
+            <a:ext cx="384048" cy="384048"/>
+          </a:xfrm>
+          <a:prstGeom prst="rect">
+            <a:avLst/>
+          </a:prstGeom>
+          <a:noFill/>
+          <a:ln/>
+        </p:spPr>
+        <p:txBody>
+          <a:bodyPr wrap="square" lIns="0" tIns="0" rIns="0" bIns="0" rtlCol="0" anchor="ctr"/>
+          <a:lstStyle/>
+          <a:p>
+            <a:pPr marL="0" indent="0" algn="ctr">
+              <a:buNone/>
+            </a:pPr>
+            <a:r>
+              <a:rPr lang="en-US" sz="1400" b="1" dirty="0">
+                <a:solidFill>
+                  <a:schemeClr val="bg1"/>
+                </a:solidFill>
+              </a:rPr>
+              <a:t>2</a:t>
+            </a:r>
+            <a:endParaRPr lang="en-US" sz="1400" dirty="0"/>
+          </a:p>
+        </p:txBody>
+      </p:sp>
+      <p:sp>
+        <p:nvSpPr>
+          <p:cNvPr id="12" name="Text 9"/>
+          <p:cNvSpPr txBox="1"/>
+          <p:nvPr/>
+        </p:nvSpPr>
+        <p:spPr>
+          <a:xfrm>
+            <a:off x="5074920" y="1554480"/>
+            <a:ext cx="2560320" cy="502920"/>
+          </a:xfrm>
+          <a:prstGeom prst="rect">
+            <a:avLst/>
+          </a:prstGeom>
+          <a:noFill/>
+          <a:ln/>
+        </p:spPr>
+        <p:txBody>
+          <a:bodyPr wrap="square" lIns="0" tIns="0" rIns="0" bIns="0" rtlCol="0" anchor="ctr"/>
           <a:lstStyle/>
           <a:p>
             <a:pPr marL="0" indent="0">
@@ -22676,7 +22865,7 @@
                   <a:schemeClr val="tx2"/>
                 </a:solidFill>
               </a:rPr>
-              <a:t>Policy rules</a:t>
+              <a:t>Every step is auditable</a:t>
             </a:r>
             <a:endParaRPr lang="en-US" sz="1500" dirty="0"/>
           </a:p>
@@ -22684,14 +22873,14 @@
       </p:sp>
       <p:sp>
         <p:nvSpPr>
-          <p:cNvPr id="19" name="Text 16"/>
+          <p:cNvPr id="13" name="Text 10"/>
           <p:cNvSpPr txBox="1"/>
           <p:nvPr/>
         </p:nvSpPr>
         <p:spPr>
           <a:xfrm>
-            <a:off x="6428232" y="2039112"/>
-            <a:ext cx="2157984" cy="566928"/>
+            <a:off x="4572000" y="2240280"/>
+            <a:ext cx="3017520" cy="3063240"/>
           </a:xfrm>
           <a:prstGeom prst="rect">
             <a:avLst/>
@@ -22703,123 +22892,75 @@
           <a:bodyPr wrap="square" lIns="0" tIns="0" rIns="0" bIns="0" rtlCol="0" anchor="t"/>
           <a:lstStyle/>
           <a:p>
-            <a:pPr marL="0" indent="0">
-              <a:buNone/>
-            </a:pPr>
-            <a:r>
-              <a:rPr lang="en-US" sz="1200" b="1" dirty="0">
+            <a:pPr marL="342900" indent="-342900">
+              <a:spcAft>
+                <a:spcPts val="800"/>
+              </a:spcAft>
+              <a:buSzPct val="100000"/>
+              <a:buChar char="•"/>
+            </a:pPr>
+            <a:r>
+              <a:rPr lang="en-US" sz="1300" dirty="0">
                 <a:solidFill>
                   <a:schemeClr val="tx1"/>
                 </a:solidFill>
               </a:rPr>
-              <a:t>The Taylor family</a:t>
-            </a:r>
-            <a:endParaRPr lang="en-US" sz="1200" dirty="0"/>
-          </a:p>
-        </p:txBody>
-      </p:sp>
-      <p:sp>
-        <p:nvSpPr>
-          <p:cNvPr id="20" name="Text 17"/>
-          <p:cNvSpPr txBox="1"/>
-          <p:nvPr/>
-        </p:nvSpPr>
-        <p:spPr>
-          <a:xfrm>
-            <a:off x="6428232" y="2624328"/>
-            <a:ext cx="2157984" cy="548640"/>
-          </a:xfrm>
-          <a:prstGeom prst="rect">
-            <a:avLst/>
-          </a:prstGeom>
-          <a:noFill/>
-          <a:ln/>
-        </p:spPr>
-        <p:txBody>
-          <a:bodyPr wrap="square" lIns="0" tIns="0" rIns="0" bIns="0" rtlCol="0" anchor="t"/>
-          <a:lstStyle/>
-          <a:p>
-            <a:pPr marL="0" indent="0">
-              <a:buNone/>
-            </a:pPr>
-            <a:r>
-              <a:rPr lang="en-US" sz="1150" b="1" dirty="0">
-                <a:solidFill>
-                  <a:srgbClr val="6B7280"/>
-                </a:solidFill>
-              </a:rPr>
-              <a:t>What it is  </a:t>
-            </a:r>
-            <a:r>
-              <a:rPr lang="en-US" sz="1150" dirty="0">
+              <a:t>An analyst that says 'inflation remains elevated' must quote the statement line it read, and code checks the quote is there, character for character</a:t>
+            </a:r>
+            <a:endParaRPr lang="en-US" sz="1300" dirty="0"/>
+          </a:p>
+          <a:p>
+            <a:pPr marL="342900" indent="-342900">
+              <a:spcAft>
+                <a:spcPts val="800"/>
+              </a:spcAft>
+              <a:buSzPct val="100000"/>
+              <a:buChar char="•"/>
+            </a:pPr>
+            <a:r>
+              <a:rPr lang="en-US" sz="1300" dirty="0">
                 <a:solidFill>
                   <a:schemeClr val="tx1"/>
                 </a:solidFill>
               </a:rPr>
-              <a:t>The rate a formula says is appropriate given inflation and unemployment</a:t>
-            </a:r>
-            <a:endParaRPr lang="en-US" sz="1150" dirty="0"/>
-          </a:p>
-        </p:txBody>
-      </p:sp>
-      <p:sp>
-        <p:nvSpPr>
-          <p:cNvPr id="21" name="Text 18"/>
-          <p:cNvSpPr txBox="1"/>
-          <p:nvPr/>
-        </p:nvSpPr>
-        <p:spPr>
-          <a:xfrm>
-            <a:off x="6428232" y="3191256"/>
-            <a:ext cx="2157984" cy="530352"/>
-          </a:xfrm>
-          <a:prstGeom prst="rect">
-            <a:avLst/>
-          </a:prstGeom>
-          <a:noFill/>
-          <a:ln/>
-        </p:spPr>
-        <p:txBody>
-          <a:bodyPr wrap="square" lIns="0" tIns="0" rIns="0" bIns="0" rtlCol="0" anchor="t"/>
-          <a:lstStyle/>
-          <a:p>
-            <a:pPr marL="0" indent="0">
-              <a:buNone/>
-            </a:pPr>
-            <a:r>
-              <a:rPr lang="en-US" sz="1150" b="1" dirty="0">
-                <a:solidFill>
-                  <a:srgbClr val="6B7280"/>
-                </a:solidFill>
-              </a:rPr>
-              <a:t>Strength  </a:t>
-            </a:r>
-            <a:r>
-              <a:rPr lang="en-US" sz="1150" dirty="0">
+              <a:t>Every number it uses must exist in the frozen evidence, or it is flagged as from memory</a:t>
+            </a:r>
+            <a:endParaRPr lang="en-US" sz="1300" dirty="0"/>
+          </a:p>
+          <a:p>
+            <a:pPr marL="342900" indent="-342900">
+              <a:spcAft>
+                <a:spcPts val="800"/>
+              </a:spcAft>
+              <a:buSzPct val="100000"/>
+              <a:buChar char="•"/>
+            </a:pPr>
+            <a:r>
+              <a:rPr lang="en-US" sz="1300" dirty="0">
                 <a:solidFill>
                   <a:schemeClr val="tx1"/>
                 </a:solidFill>
               </a:rPr>
-              <a:t>Transparent; the Fed's own published benchmarks</a:t>
-            </a:r>
-            <a:endParaRPr lang="en-US" sz="1150" dirty="0"/>
-          </a:p>
-        </p:txBody>
-      </p:sp>
-      <p:sp>
-        <p:nvSpPr>
-          <p:cNvPr id="22" name="Shape 19"/>
+              <a:t>Every model lists the items it read; every ledger entry recomputes from its snapshot. If it is not quoted, it does not count</a:t>
+            </a:r>
+            <a:endParaRPr lang="en-US" sz="1300" dirty="0"/>
+          </a:p>
+        </p:txBody>
+      </p:sp>
+      <p:sp>
+        <p:nvSpPr>
+          <p:cNvPr id="14" name="Shape 11"/>
           <p:cNvSpPr/>
           <p:nvPr/>
         </p:nvSpPr>
         <p:spPr>
           <a:xfrm>
-            <a:off x="9025128" y="1417320"/>
-            <a:ext cx="2615184" cy="2331720"/>
+            <a:off x="8046720" y="1417320"/>
+            <a:ext cx="3520440" cy="3977640"/>
           </a:xfrm>
           <a:prstGeom prst="roundRect">
             <a:avLst>
-              <a:gd name="adj" fmla="val 4706"/>
+              <a:gd name="adj" fmla="val 3117"/>
             </a:avLst>
           </a:prstGeom>
           <a:solidFill>
@@ -22842,640 +22983,17 @@
       </p:sp>
       <p:sp>
         <p:nvSpPr>
-          <p:cNvPr id="23" name="Shape 20"/>
+          <p:cNvPr id="15" name="Shape 12"/>
           <p:cNvSpPr/>
           <p:nvPr/>
         </p:nvSpPr>
         <p:spPr>
           <a:xfrm>
-            <a:off x="9253728" y="1691640"/>
-            <a:ext cx="146304" cy="146304"/>
-          </a:xfrm>
-          <a:prstGeom prst="rect">
-            <a:avLst/>
-          </a:prstGeom>
-          <a:solidFill>
-            <a:srgbClr val="C8553D"/>
-          </a:solidFill>
-          <a:ln w="12700">
-            <a:solidFill>
-              <a:srgbClr val="C8553D"/>
-            </a:solidFill>
-            <a:prstDash val="solid"/>
-          </a:ln>
-        </p:spPr>
-      </p:sp>
-      <p:sp>
-        <p:nvSpPr>
-          <p:cNvPr id="24" name="Text 21"/>
-          <p:cNvSpPr txBox="1"/>
-          <p:nvPr/>
-        </p:nvSpPr>
-        <p:spPr>
-          <a:xfrm>
-            <a:off x="9482328" y="1581912"/>
-            <a:ext cx="1975104" cy="365760"/>
-          </a:xfrm>
-          <a:prstGeom prst="rect">
-            <a:avLst/>
-          </a:prstGeom>
-          <a:noFill/>
-          <a:ln/>
-        </p:spPr>
-        <p:txBody>
-          <a:bodyPr wrap="square" lIns="0" tIns="0" rIns="0" bIns="0" rtlCol="0" anchor="t"/>
-          <a:lstStyle/>
-          <a:p>
-            <a:pPr marL="0" indent="0">
-              <a:buNone/>
-            </a:pPr>
-            <a:r>
-              <a:rPr lang="en-US" sz="1500" b="1" dirty="0">
-                <a:solidFill>
-                  <a:schemeClr val="tx2"/>
-                </a:solidFill>
-              </a:rPr>
-              <a:t>ML / AI signals</a:t>
-            </a:r>
-            <a:endParaRPr lang="en-US" sz="1500" dirty="0"/>
-          </a:p>
-        </p:txBody>
-      </p:sp>
-      <p:sp>
-        <p:nvSpPr>
-          <p:cNvPr id="25" name="Text 22"/>
-          <p:cNvSpPr txBox="1"/>
-          <p:nvPr/>
-        </p:nvSpPr>
-        <p:spPr>
-          <a:xfrm>
-            <a:off x="9253728" y="2039112"/>
-            <a:ext cx="2157984" cy="566928"/>
-          </a:xfrm>
-          <a:prstGeom prst="rect">
-            <a:avLst/>
-          </a:prstGeom>
-          <a:noFill/>
-          <a:ln/>
-        </p:spPr>
-        <p:txBody>
-          <a:bodyPr wrap="square" lIns="0" tIns="0" rIns="0" bIns="0" rtlCol="0" anchor="t"/>
-          <a:lstStyle/>
-          <a:p>
-            <a:pPr marL="0" indent="0">
-              <a:buNone/>
-            </a:pPr>
-            <a:r>
-              <a:rPr lang="en-US" sz="1200" b="1" dirty="0">
-                <a:solidFill>
-                  <a:schemeClr val="tx1"/>
-                </a:solidFill>
-              </a:rPr>
-              <a:t>LLM 'FOMC agent' papers (2025)</a:t>
-            </a:r>
-            <a:endParaRPr lang="en-US" sz="1200" dirty="0"/>
-          </a:p>
-        </p:txBody>
-      </p:sp>
-      <p:sp>
-        <p:nvSpPr>
-          <p:cNvPr id="26" name="Text 23"/>
-          <p:cNvSpPr txBox="1"/>
-          <p:nvPr/>
-        </p:nvSpPr>
-        <p:spPr>
-          <a:xfrm>
-            <a:off x="9253728" y="2624328"/>
-            <a:ext cx="2157984" cy="548640"/>
-          </a:xfrm>
-          <a:prstGeom prst="rect">
-            <a:avLst/>
-          </a:prstGeom>
-          <a:noFill/>
-          <a:ln/>
-        </p:spPr>
-        <p:txBody>
-          <a:bodyPr wrap="square" lIns="0" tIns="0" rIns="0" bIns="0" rtlCol="0" anchor="t"/>
-          <a:lstStyle/>
-          <a:p>
-            <a:pPr marL="0" indent="0">
-              <a:buNone/>
-            </a:pPr>
-            <a:r>
-              <a:rPr lang="en-US" sz="1150" b="1" dirty="0">
-                <a:solidFill>
-                  <a:srgbClr val="6B7280"/>
-                </a:solidFill>
-              </a:rPr>
-              <a:t>What it is  </a:t>
-            </a:r>
-            <a:r>
-              <a:rPr lang="en-US" sz="1150" dirty="0">
-                <a:solidFill>
-                  <a:schemeClr val="tx1"/>
-                </a:solidFill>
-              </a:rPr>
-              <a:t>Models that read the Fed's text and vote</a:t>
-            </a:r>
-            <a:endParaRPr lang="en-US" sz="1150" dirty="0"/>
-          </a:p>
-        </p:txBody>
-      </p:sp>
-      <p:sp>
-        <p:nvSpPr>
-          <p:cNvPr id="27" name="Text 24"/>
-          <p:cNvSpPr txBox="1"/>
-          <p:nvPr/>
-        </p:nvSpPr>
-        <p:spPr>
-          <a:xfrm>
-            <a:off x="9253728" y="3191256"/>
-            <a:ext cx="2157984" cy="530352"/>
-          </a:xfrm>
-          <a:prstGeom prst="rect">
-            <a:avLst/>
-          </a:prstGeom>
-          <a:noFill/>
-          <a:ln/>
-        </p:spPr>
-        <p:txBody>
-          <a:bodyPr wrap="square" lIns="0" tIns="0" rIns="0" bIns="0" rtlCol="0" anchor="t"/>
-          <a:lstStyle/>
-          <a:p>
-            <a:pPr marL="0" indent="0">
-              <a:buNone/>
-            </a:pPr>
-            <a:r>
-              <a:rPr lang="en-US" sz="1150" b="1" dirty="0">
-                <a:solidFill>
-                  <a:srgbClr val="6B7280"/>
-                </a:solidFill>
-              </a:rPr>
-              <a:t>Strength  </a:t>
-            </a:r>
-            <a:r>
-              <a:rPr lang="en-US" sz="1150" dirty="0">
-                <a:solidFill>
-                  <a:schemeClr val="tx1"/>
-                </a:solidFill>
-              </a:rPr>
-              <a:t>Reported 90%+ accuracy on 2023 to 2024</a:t>
-            </a:r>
-            <a:endParaRPr lang="en-US" sz="1150" dirty="0"/>
-          </a:p>
-        </p:txBody>
-      </p:sp>
-      <p:sp>
-        <p:nvSpPr>
-          <p:cNvPr id="28" name="Shape 25"/>
-          <p:cNvSpPr/>
-          <p:nvPr/>
-        </p:nvSpPr>
-        <p:spPr>
-          <a:xfrm>
-            <a:off x="731520" y="4553712"/>
-            <a:ext cx="10725912" cy="0"/>
-          </a:xfrm>
-          <a:prstGeom prst="line">
-            <a:avLst/>
-          </a:prstGeom>
-          <a:noFill/>
-          <a:ln w="22225">
-            <a:solidFill>
-              <a:srgbClr val="6B7280"/>
-            </a:solidFill>
-            <a:prstDash val="solid"/>
-            <a:headEnd type="triangle"/>
-            <a:tailEnd type="triangle"/>
-          </a:ln>
-        </p:spPr>
-      </p:sp>
-      <p:sp>
-        <p:nvSpPr>
-          <p:cNvPr id="29" name="Text 26"/>
-          <p:cNvSpPr txBox="1"/>
-          <p:nvPr/>
-        </p:nvSpPr>
-        <p:spPr>
-          <a:xfrm>
-            <a:off x="548640" y="4663440"/>
-            <a:ext cx="2194560" cy="274320"/>
-          </a:xfrm>
-          <a:prstGeom prst="rect">
-            <a:avLst/>
-          </a:prstGeom>
-          <a:noFill/>
-          <a:ln/>
-        </p:spPr>
-        <p:txBody>
-          <a:bodyPr wrap="square" lIns="0" tIns="0" rIns="0" bIns="0" rtlCol="0" anchor="t"/>
-          <a:lstStyle/>
-          <a:p>
-            <a:pPr marL="0" indent="0">
-              <a:buNone/>
-            </a:pPr>
-            <a:r>
-              <a:rPr lang="en-US" sz="1200" b="1" dirty="0">
-                <a:solidFill>
-                  <a:schemeClr val="accent4"/>
-                </a:solidFill>
-              </a:rPr>
-              <a:t>Pure data</a:t>
-            </a:r>
-            <a:endParaRPr lang="en-US" sz="1200" dirty="0"/>
-          </a:p>
-        </p:txBody>
-      </p:sp>
-      <p:sp>
-        <p:nvSpPr>
-          <p:cNvPr id="30" name="Text 27"/>
-          <p:cNvSpPr txBox="1"/>
-          <p:nvPr/>
-        </p:nvSpPr>
-        <p:spPr>
-          <a:xfrm>
-            <a:off x="548640" y="4919472"/>
-            <a:ext cx="2377440" cy="457200"/>
-          </a:xfrm>
-          <a:prstGeom prst="rect">
-            <a:avLst/>
-          </a:prstGeom>
-          <a:noFill/>
-          <a:ln/>
-        </p:spPr>
-        <p:txBody>
-          <a:bodyPr wrap="square" lIns="0" tIns="0" rIns="0" bIns="0" rtlCol="0" anchor="t"/>
-          <a:lstStyle/>
-          <a:p>
-            <a:pPr marL="0" indent="0">
-              <a:buNone/>
-            </a:pPr>
-            <a:r>
-              <a:rPr lang="en-US" sz="1050" dirty="0">
-                <a:solidFill>
-                  <a:schemeClr val="accent4"/>
-                </a:solidFill>
-              </a:rPr>
-              <a:t>prices and formulas; no reading of the Fed's words</a:t>
-            </a:r>
-            <a:endParaRPr lang="en-US" sz="1050" dirty="0"/>
-          </a:p>
-        </p:txBody>
-      </p:sp>
-      <p:sp>
-        <p:nvSpPr>
-          <p:cNvPr id="31" name="Text 28"/>
-          <p:cNvSpPr txBox="1"/>
-          <p:nvPr/>
-        </p:nvSpPr>
-        <p:spPr>
-          <a:xfrm>
-            <a:off x="9445752" y="4663440"/>
-            <a:ext cx="2194560" cy="274320"/>
-          </a:xfrm>
-          <a:prstGeom prst="rect">
-            <a:avLst/>
-          </a:prstGeom>
-          <a:noFill/>
-          <a:ln/>
-        </p:spPr>
-        <p:txBody>
-          <a:bodyPr wrap="square" lIns="0" tIns="0" rIns="0" bIns="0" rtlCol="0" anchor="t"/>
-          <a:lstStyle/>
-          <a:p>
-            <a:pPr marL="0" indent="0" algn="r">
-              <a:buNone/>
-            </a:pPr>
-            <a:r>
-              <a:rPr lang="en-US" sz="1200" b="1" dirty="0">
-                <a:solidFill>
-                  <a:schemeClr val="accent4"/>
-                </a:solidFill>
-              </a:rPr>
-              <a:t>Pure model</a:t>
-            </a:r>
-            <a:endParaRPr lang="en-US" sz="1200" dirty="0"/>
-          </a:p>
-        </p:txBody>
-      </p:sp>
-      <p:sp>
-        <p:nvSpPr>
-          <p:cNvPr id="32" name="Text 29"/>
-          <p:cNvSpPr txBox="1"/>
-          <p:nvPr/>
-        </p:nvSpPr>
-        <p:spPr>
-          <a:xfrm>
-            <a:off x="9262872" y="4919472"/>
-            <a:ext cx="2377440" cy="457200"/>
-          </a:xfrm>
-          <a:prstGeom prst="rect">
-            <a:avLst/>
-          </a:prstGeom>
-          <a:noFill/>
-          <a:ln/>
-        </p:spPr>
-        <p:txBody>
-          <a:bodyPr wrap="square" lIns="0" tIns="0" rIns="0" bIns="0" rtlCol="0" anchor="t"/>
-          <a:lstStyle/>
-          <a:p>
-            <a:pPr marL="0" indent="0" algn="r">
-              <a:buNone/>
-            </a:pPr>
-            <a:r>
-              <a:rPr lang="en-US" sz="1050" dirty="0">
-                <a:solidFill>
-                  <a:schemeClr val="accent4"/>
-                </a:solidFill>
-              </a:rPr>
-              <a:t>one model's judgement; nothing it reads is checked</a:t>
-            </a:r>
-            <a:endParaRPr lang="en-US" sz="1050" dirty="0"/>
-          </a:p>
-        </p:txBody>
-      </p:sp>
-      <p:sp>
-        <p:nvSpPr>
-          <p:cNvPr id="33" name="Shape 30"/>
-          <p:cNvSpPr/>
-          <p:nvPr/>
-        </p:nvSpPr>
-        <p:spPr>
-          <a:xfrm>
-            <a:off x="1819930" y="4462272"/>
-            <a:ext cx="182880" cy="182880"/>
+            <a:off x="8321040" y="1600200"/>
+            <a:ext cx="384048" cy="384048"/>
           </a:xfrm>
           <a:prstGeom prst="ellipse">
             <a:avLst/>
-          </a:prstGeom>
-          <a:solidFill>
-            <a:srgbClr val="1E2761"/>
-          </a:solidFill>
-          <a:ln w="12700">
-            <a:solidFill>
-              <a:srgbClr val="FFFFFF"/>
-            </a:solidFill>
-            <a:prstDash val="solid"/>
-          </a:ln>
-        </p:spPr>
-      </p:sp>
-      <p:sp>
-        <p:nvSpPr>
-          <p:cNvPr id="34" name="Text 31"/>
-          <p:cNvSpPr txBox="1"/>
-          <p:nvPr/>
-        </p:nvSpPr>
-        <p:spPr>
-          <a:xfrm>
-            <a:off x="859810" y="4078224"/>
-            <a:ext cx="2103120" cy="274320"/>
-          </a:xfrm>
-          <a:prstGeom prst="rect">
-            <a:avLst/>
-          </a:prstGeom>
-          <a:noFill/>
-          <a:ln/>
-        </p:spPr>
-        <p:txBody>
-          <a:bodyPr wrap="square" lIns="0" tIns="0" rIns="0" bIns="0" rtlCol="0" anchor="b"/>
-          <a:lstStyle/>
-          <a:p>
-            <a:pPr marL="0" indent="0" algn="ctr">
-              <a:buNone/>
-            </a:pPr>
-            <a:r>
-              <a:rPr lang="en-US" sz="1150" b="1" dirty="0">
-                <a:solidFill>
-                  <a:schemeClr val="tx1"/>
-                </a:solidFill>
-              </a:rPr>
-              <a:t>Futures, prediction markets</a:t>
-            </a:r>
-            <a:endParaRPr lang="en-US" sz="1150" dirty="0"/>
-          </a:p>
-        </p:txBody>
-      </p:sp>
-      <p:sp>
-        <p:nvSpPr>
-          <p:cNvPr id="35" name="Shape 32"/>
-          <p:cNvSpPr/>
-          <p:nvPr/>
-        </p:nvSpPr>
-        <p:spPr>
-          <a:xfrm>
-            <a:off x="3857854" y="4462272"/>
-            <a:ext cx="182880" cy="182880"/>
-          </a:xfrm>
-          <a:prstGeom prst="ellipse">
-            <a:avLst/>
-          </a:prstGeom>
-          <a:solidFill>
-            <a:srgbClr val="E9B44C"/>
-          </a:solidFill>
-          <a:ln w="12700">
-            <a:solidFill>
-              <a:srgbClr val="FFFFFF"/>
-            </a:solidFill>
-            <a:prstDash val="solid"/>
-          </a:ln>
-        </p:spPr>
-      </p:sp>
-      <p:sp>
-        <p:nvSpPr>
-          <p:cNvPr id="36" name="Text 33"/>
-          <p:cNvSpPr txBox="1"/>
-          <p:nvPr/>
-        </p:nvSpPr>
-        <p:spPr>
-          <a:xfrm>
-            <a:off x="2897734" y="4078224"/>
-            <a:ext cx="2103120" cy="274320"/>
-          </a:xfrm>
-          <a:prstGeom prst="rect">
-            <a:avLst/>
-          </a:prstGeom>
-          <a:noFill/>
-          <a:ln/>
-        </p:spPr>
-        <p:txBody>
-          <a:bodyPr wrap="square" lIns="0" tIns="0" rIns="0" bIns="0" rtlCol="0" anchor="b"/>
-          <a:lstStyle/>
-          <a:p>
-            <a:pPr marL="0" indent="0" algn="ctr">
-              <a:buNone/>
-            </a:pPr>
-            <a:r>
-              <a:rPr lang="en-US" sz="1150" b="1" dirty="0">
-                <a:solidFill>
-                  <a:schemeClr val="tx1"/>
-                </a:solidFill>
-              </a:rPr>
-              <a:t>Policy rules</a:t>
-            </a:r>
-            <a:endParaRPr lang="en-US" sz="1150" dirty="0"/>
-          </a:p>
-        </p:txBody>
-      </p:sp>
-      <p:sp>
-        <p:nvSpPr>
-          <p:cNvPr id="37" name="Shape 34"/>
-          <p:cNvSpPr/>
-          <p:nvPr/>
-        </p:nvSpPr>
-        <p:spPr>
-          <a:xfrm>
-            <a:off x="8148218" y="4462272"/>
-            <a:ext cx="182880" cy="182880"/>
-          </a:xfrm>
-          <a:prstGeom prst="ellipse">
-            <a:avLst/>
-          </a:prstGeom>
-          <a:solidFill>
-            <a:srgbClr val="2C6E49"/>
-          </a:solidFill>
-          <a:ln w="12700">
-            <a:solidFill>
-              <a:srgbClr val="FFFFFF"/>
-            </a:solidFill>
-            <a:prstDash val="solid"/>
-          </a:ln>
-        </p:spPr>
-      </p:sp>
-      <p:sp>
-        <p:nvSpPr>
-          <p:cNvPr id="38" name="Text 35"/>
-          <p:cNvSpPr txBox="1"/>
-          <p:nvPr/>
-        </p:nvSpPr>
-        <p:spPr>
-          <a:xfrm>
-            <a:off x="7188098" y="4078224"/>
-            <a:ext cx="2103120" cy="274320"/>
-          </a:xfrm>
-          <a:prstGeom prst="rect">
-            <a:avLst/>
-          </a:prstGeom>
-          <a:noFill/>
-          <a:ln/>
-        </p:spPr>
-        <p:txBody>
-          <a:bodyPr wrap="square" lIns="0" tIns="0" rIns="0" bIns="0" rtlCol="0" anchor="b"/>
-          <a:lstStyle/>
-          <a:p>
-            <a:pPr marL="0" indent="0" algn="ctr">
-              <a:buNone/>
-            </a:pPr>
-            <a:r>
-              <a:rPr lang="en-US" sz="1150" b="1" dirty="0">
-                <a:solidFill>
-                  <a:schemeClr val="tx1"/>
-                </a:solidFill>
-              </a:rPr>
-              <a:t>Economist surveys</a:t>
-            </a:r>
-            <a:endParaRPr lang="en-US" sz="1150" dirty="0"/>
-          </a:p>
-        </p:txBody>
-      </p:sp>
-      <p:sp>
-        <p:nvSpPr>
-          <p:cNvPr id="39" name="Shape 36"/>
-          <p:cNvSpPr/>
-          <p:nvPr/>
-        </p:nvSpPr>
-        <p:spPr>
-          <a:xfrm>
-            <a:off x="10293401" y="4462272"/>
-            <a:ext cx="182880" cy="182880"/>
-          </a:xfrm>
-          <a:prstGeom prst="ellipse">
-            <a:avLst/>
-          </a:prstGeom>
-          <a:solidFill>
-            <a:srgbClr val="C8553D"/>
-          </a:solidFill>
-          <a:ln w="12700">
-            <a:solidFill>
-              <a:srgbClr val="FFFFFF"/>
-            </a:solidFill>
-            <a:prstDash val="solid"/>
-          </a:ln>
-        </p:spPr>
-      </p:sp>
-      <p:sp>
-        <p:nvSpPr>
-          <p:cNvPr id="40" name="Text 37"/>
-          <p:cNvSpPr txBox="1"/>
-          <p:nvPr/>
-        </p:nvSpPr>
-        <p:spPr>
-          <a:xfrm>
-            <a:off x="9333281" y="4078224"/>
-            <a:ext cx="2103120" cy="274320"/>
-          </a:xfrm>
-          <a:prstGeom prst="rect">
-            <a:avLst/>
-          </a:prstGeom>
-          <a:noFill/>
-          <a:ln/>
-        </p:spPr>
-        <p:txBody>
-          <a:bodyPr wrap="square" lIns="0" tIns="0" rIns="0" bIns="0" rtlCol="0" anchor="b"/>
-          <a:lstStyle/>
-          <a:p>
-            <a:pPr marL="0" indent="0" algn="ctr">
-              <a:buNone/>
-            </a:pPr>
-            <a:r>
-              <a:rPr lang="en-US" sz="1150" b="1" dirty="0">
-                <a:solidFill>
-                  <a:schemeClr val="tx1"/>
-                </a:solidFill>
-              </a:rPr>
-              <a:t>LLM 'FOMC agents'</a:t>
-            </a:r>
-            <a:endParaRPr lang="en-US" sz="1150" dirty="0"/>
-          </a:p>
-        </p:txBody>
-      </p:sp>
-      <p:sp>
-        <p:nvSpPr>
-          <p:cNvPr id="41" name="Shape 38"/>
-          <p:cNvSpPr/>
-          <p:nvPr/>
-        </p:nvSpPr>
-        <p:spPr>
-          <a:xfrm>
-            <a:off x="6094476" y="4553712"/>
-            <a:ext cx="0" cy="256032"/>
-          </a:xfrm>
-          <a:prstGeom prst="line">
-            <a:avLst/>
-          </a:prstGeom>
-          <a:noFill/>
-          <a:ln w="22225">
-            <a:solidFill>
-              <a:srgbClr val="1E2761"/>
-            </a:solidFill>
-            <a:prstDash val="solid"/>
-          </a:ln>
-        </p:spPr>
-      </p:sp>
-      <p:sp>
-        <p:nvSpPr>
-          <p:cNvPr id="42" name="Shape 39"/>
-          <p:cNvSpPr/>
-          <p:nvPr/>
-        </p:nvSpPr>
-        <p:spPr>
-          <a:xfrm>
-            <a:off x="5454396" y="4809744"/>
-            <a:ext cx="1280160" cy="365760"/>
-          </a:xfrm>
-          <a:prstGeom prst="roundRect">
-            <a:avLst>
-              <a:gd name="adj" fmla="val 50000"/>
-            </a:avLst>
           </a:prstGeom>
           <a:solidFill>
             <a:srgbClr val="1E2761"/>
@@ -23490,14 +23008,14 @@
       </p:sp>
       <p:sp>
         <p:nvSpPr>
-          <p:cNvPr id="43" name="Text 40"/>
+          <p:cNvPr id="16" name="Text 13"/>
           <p:cNvSpPr txBox="1"/>
           <p:nvPr/>
         </p:nvSpPr>
         <p:spPr>
           <a:xfrm>
-            <a:off x="5454396" y="4809744"/>
-            <a:ext cx="1280160" cy="365760"/>
+            <a:off x="8321040" y="1600200"/>
+            <a:ext cx="384048" cy="384048"/>
           </a:xfrm>
           <a:prstGeom prst="rect">
             <a:avLst/>
@@ -23513,95 +23031,132 @@
               <a:buNone/>
             </a:pPr>
             <a:r>
-              <a:rPr lang="en-US" sz="1300" b="1" dirty="0">
+              <a:rPr lang="en-US" sz="1400" b="1" dirty="0">
                 <a:solidFill>
                   <a:schemeClr val="bg1"/>
                 </a:solidFill>
-                <a:latin typeface="Cambria" pitchFamily="34" charset="0"/>
-                <a:ea typeface="Cambria" pitchFamily="34" charset="-122"/>
-                <a:cs typeface="Cambria" pitchFamily="34" charset="-120"/>
-              </a:rPr>
-              <a:t>FedCast</a:t>
-            </a:r>
-            <a:endParaRPr lang="en-US" sz="1300" dirty="0"/>
-          </a:p>
-        </p:txBody>
-      </p:sp>
-      <p:sp>
-        <p:nvSpPr>
-          <p:cNvPr id="44" name="Text 41"/>
+              </a:rPr>
+              <a:t>3</a:t>
+            </a:r>
+            <a:endParaRPr lang="en-US" sz="1400" dirty="0"/>
+          </a:p>
+        </p:txBody>
+      </p:sp>
+      <p:sp>
+        <p:nvSpPr>
+          <p:cNvPr id="17" name="Text 14"/>
           <p:cNvSpPr txBox="1"/>
           <p:nvPr/>
         </p:nvSpPr>
         <p:spPr>
           <a:xfrm>
-            <a:off x="2528316" y="5285232"/>
-            <a:ext cx="7132320" cy="548640"/>
-          </a:xfrm>
-          <a:prstGeom prst="rect">
-            <a:avLst/>
-          </a:prstGeom>
-          <a:noFill/>
-          <a:ln/>
-        </p:spPr>
-        <p:txBody>
-          <a:bodyPr wrap="square" lIns="0" tIns="0" rIns="0" bIns="0" rtlCol="0" anchor="t"/>
-          <a:lstStyle/>
-          <a:p>
-            <a:pPr marL="0" indent="0" algn="ctr">
-              <a:buNone/>
-            </a:pPr>
-            <a:r>
-              <a:rPr lang="en-US" sz="1150" dirty="0">
-                <a:solidFill>
-                  <a:schemeClr val="tx1"/>
-                </a:solidFill>
-              </a:rPr>
-              <a:t>Takes one input from each area, prices, 32 years of decisions, the Fed's own rules and a language model that must quote what it reads, and combines them by code at fixed weights. Neither a formula nor an oracle.</a:t>
-            </a:r>
-            <a:endParaRPr lang="en-US" sz="1150" dirty="0"/>
-          </a:p>
-        </p:txBody>
-      </p:sp>
-      <p:sp>
-        <p:nvSpPr>
-          <p:cNvPr id="45" name="Text 42"/>
-          <p:cNvSpPr txBox="1"/>
-          <p:nvPr/>
-        </p:nvSpPr>
-        <p:spPr>
-          <a:xfrm>
-            <a:off x="548640" y="6053328"/>
-            <a:ext cx="11091672" cy="274320"/>
-          </a:xfrm>
-          <a:prstGeom prst="rect">
-            <a:avLst/>
-          </a:prstGeom>
-          <a:noFill/>
-          <a:ln/>
-        </p:spPr>
-        <p:txBody>
-          <a:bodyPr wrap="square" lIns="0" tIns="0" rIns="0" bIns="0" rtlCol="0" anchor="t"/>
+            <a:off x="8823960" y="1554480"/>
+            <a:ext cx="2560320" cy="502920"/>
+          </a:xfrm>
+          <a:prstGeom prst="rect">
+            <a:avLst/>
+          </a:prstGeom>
+          <a:noFill/>
+          <a:ln/>
+        </p:spPr>
+        <p:txBody>
+          <a:bodyPr wrap="square" lIns="0" tIns="0" rIns="0" bIns="0" rtlCol="0" anchor="ctr"/>
           <a:lstStyle/>
           <a:p>
             <a:pPr marL="0" indent="0">
               <a:buNone/>
             </a:pPr>
             <a:r>
-              <a:rPr lang="en-US" sz="950" dirty="0">
-                <a:solidFill>
-                  <a:schemeClr val="accent4"/>
-                </a:solidFill>
-              </a:rPr>
-              <a:t>Sources: Bonini, Huang and Simaan, 'Watching the FedWatch' (232 meetings, May 1994 to March 2024); FedSight AI preprint, December 2025; Takano, Hirano and Nakagawa, arXiv 2511.02469.</a:t>
-            </a:r>
-            <a:endParaRPr lang="en-US" sz="950" dirty="0"/>
-          </a:p>
-        </p:txBody>
-      </p:sp>
-      <p:sp>
-        <p:nvSpPr>
-          <p:cNvPr id="3" name="Slide Number Placeholder 0"/>
+              <a:rPr lang="en-US" sz="1500" b="1" dirty="0">
+                <a:solidFill>
+                  <a:schemeClr val="tx2"/>
+                </a:solidFill>
+              </a:rPr>
+              <a:t>A harness that compounds</a:t>
+            </a:r>
+            <a:endParaRPr lang="en-US" sz="1500" dirty="0"/>
+          </a:p>
+        </p:txBody>
+      </p:sp>
+      <p:sp>
+        <p:nvSpPr>
+          <p:cNvPr id="18" name="Text 15"/>
+          <p:cNvSpPr txBox="1"/>
+          <p:nvPr/>
+        </p:nvSpPr>
+        <p:spPr>
+          <a:xfrm>
+            <a:off x="8321040" y="2240280"/>
+            <a:ext cx="3017520" cy="3063240"/>
+          </a:xfrm>
+          <a:prstGeom prst="rect">
+            <a:avLst/>
+          </a:prstGeom>
+          <a:noFill/>
+          <a:ln/>
+        </p:spPr>
+        <p:txBody>
+          <a:bodyPr wrap="square" lIns="0" tIns="0" rIns="0" bIns="0" rtlCol="0" anchor="t"/>
+          <a:lstStyle/>
+          <a:p>
+            <a:pPr marL="342900" indent="-342900">
+              <a:spcAft>
+                <a:spcPts val="800"/>
+              </a:spcAft>
+              <a:buSzPct val="100000"/>
+              <a:buChar char="•"/>
+            </a:pPr>
+            <a:r>
+              <a:rPr lang="en-US" sz="1300" dirty="0">
+                <a:solidFill>
+                  <a:schemeClr val="tx1"/>
+                </a:solidFill>
+              </a:rPr>
+              <a:t>Everything is quotable and the analysts can read only the evidence, so a wrong call is a traceable wrong call: we see which quote led where</a:t>
+            </a:r>
+            <a:endParaRPr lang="en-US" sz="1300" dirty="0"/>
+          </a:p>
+          <a:p>
+            <a:pPr marL="342900" indent="-342900">
+              <a:spcAft>
+                <a:spcPts val="800"/>
+              </a:spcAft>
+              <a:buSzPct val="100000"/>
+              <a:buChar char="•"/>
+            </a:pPr>
+            <a:r>
+              <a:rPr lang="en-US" sz="1300" dirty="0">
+                <a:solidFill>
+                  <a:schemeClr val="tx1"/>
+                </a:solidFill>
+              </a:rPr>
+              <a:t>The harness is repeatable, so it goes wrong the same way every time; a fix can be tested, and the drift table shows it stayed fixed</a:t>
+            </a:r>
+            <a:endParaRPr lang="en-US" sz="1300" dirty="0"/>
+          </a:p>
+          <a:p>
+            <a:pPr marL="342900" indent="-342900">
+              <a:spcAft>
+                <a:spcPts val="800"/>
+              </a:spcAft>
+              <a:buSzPct val="100000"/>
+              <a:buChar char="•"/>
+            </a:pPr>
+            <a:r>
+              <a:rPr lang="en-US" sz="1300" dirty="0">
+                <a:solidFill>
+                  <a:schemeClr val="tx1"/>
+                </a:solidFill>
+              </a:rPr>
+              <a:t>That is the virtuous cycle: audit, fix, re-measure. The ladder, the scorecard and the drift table later in the deck are that cycle</a:t>
+            </a:r>
+            <a:endParaRPr lang="en-US" sz="1300" dirty="0"/>
+          </a:p>
+        </p:txBody>
+      </p:sp>
+      <p:sp>
+        <p:nvSpPr>
+          <p:cNvPr id="25" name="Slide Number Placeholder 0"/>
           <p:cNvSpPr>
             <a:spLocks noGrp="1"/>
           </p:cNvSpPr>
@@ -23703,7 +23258,7 @@
                   <a:schemeClr val="tx2"/>
                 </a:solidFill>
               </a:rPr>
-              <a:t>Four families, one pool, one number</a:t>
+              <a:t>Model Architecture</a:t>
             </a:r>
             <a:endParaRPr lang="en-US" sz="3200" dirty="0"/>
           </a:p>
@@ -25195,7 +24750,7 @@
         </p:nvGraphicFramePr>
         <p:xfrm>
           <a:off x="548640" y="1325880"/>
-          <a:ext cx="11091672" cy="914400"/>
+          <a:ext cx="11091672" cy="3899916"/>
         </p:xfrm>
         <a:graphic>
           <a:graphicData uri="http://schemas.openxmlformats.org/drawingml/2006/table">

--- a/docs/FedCast_Fullerton.pptx
+++ b/docs/FedCast_Fullerton.pptx
@@ -5,7 +5,7 @@
     <p:sldMasterId id="2147483648" r:id="rId1"/>
   </p:sldMasterIdLst>
   <p:notesMasterIdLst>
-    <p:notesMasterId r:id="rId24"/>
+    <p:notesMasterId r:id="rId22"/>
   </p:notesMasterIdLst>
   <p:sldIdLst>
     <p:sldId id="256" r:id="rId2"/>
@@ -22,14 +22,12 @@
     <p:sldId id="268" r:id="rId13"/>
     <p:sldId id="269" r:id="rId14"/>
     <p:sldId id="267" r:id="rId15"/>
-    <p:sldId id="270" r:id="rId16"/>
-    <p:sldId id="271" r:id="rId17"/>
-    <p:sldId id="272" r:id="rId18"/>
-    <p:sldId id="273" r:id="rId19"/>
-    <p:sldId id="274" r:id="rId20"/>
-    <p:sldId id="275" r:id="rId21"/>
-    <p:sldId id="276" r:id="rId22"/>
-    <p:sldId id="277" r:id="rId23"/>
+    <p:sldId id="271" r:id="rId16"/>
+    <p:sldId id="273" r:id="rId17"/>
+    <p:sldId id="274" r:id="rId18"/>
+    <p:sldId id="275" r:id="rId19"/>
+    <p:sldId id="276" r:id="rId20"/>
+    <p:sldId id="277" r:id="rId21"/>
   </p:sldIdLst>
   <p:sldSz cx="12192000" cy="6858000"/>
   <p:notesSz cx="6858000" cy="12192000"/>
@@ -160,16 +158,14 @@
           <p14:sldIdLst>
             <p14:sldId id="269"/>
             <p14:sldId id="267"/>
-            <p14:sldId id="270"/>
             <p14:sldId id="271"/>
-            <p14:sldId id="272"/>
             <p14:sldId id="273"/>
             <p14:sldId id="274"/>
+            <p14:sldId id="275"/>
           </p14:sldIdLst>
         </p14:section>
         <p14:section name="Limits and next" id="{A86175A9-6A09-739A-6218-CDC852B09B1B}">
           <p14:sldIdLst>
-            <p14:sldId id="275"/>
             <p14:sldId id="276"/>
           </p14:sldIdLst>
         </p14:section>
@@ -1612,7 +1608,7 @@
           <a:p>
             <a:r>
               <a:rPr lang="en-US" dirty="0"/>
-              <a:t>Make it concrete: the five leans behind entry #18, and one real claim with the quote code matched. The labour analyst is the one that does not lean hawkish, and because it is a separate reader that dissent is visible rather than averaged away.</a:t>
+              <a:t>If asked where a quote comes from, open the statement claim on analyst 4: the quote is the statement's own line, found by code in item fed.statement.2026-09-16.</a:t>
             </a:r>
           </a:p>
         </p:txBody>
@@ -1699,7 +1695,7 @@
           <a:p>
             <a:r>
               <a:rPr lang="en-US" dirty="0"/>
-              <a:t>If asked where a quote comes from, open the statement claim on analyst 4: the quote is the statement's own line, found by code in item fed.statement.2026-09-16.</a:t>
+              <a:t>If time is short, skip the dropdown and go straight to the over-time table.</a:t>
             </a:r>
           </a:p>
         </p:txBody>
@@ -1786,7 +1782,7 @@
           <a:p>
             <a:r>
               <a:rPr lang="en-US" dirty="0"/>
-              <a:t>Ten dimensions fixed before any forecasting code existed. Eight are now measured automatically on each new snapshot. The over-time table is the drift check: the marks never move, so a cell that turns red is a change in the system. It has already caught two things, bottom right.</a:t>
+              <a:t>One minute. Press the button, read the result line, move on.</a:t>
             </a:r>
           </a:p>
         </p:txBody>
@@ -1873,7 +1869,7 @@
           <a:p>
             <a:r>
               <a:rPr lang="en-US" dirty="0"/>
-              <a:t>If time is short, skip the dropdown and go straight to the over-time table.</a:t>
+              <a:t>Six follow-ups, in order of value. One: pre-registered weight sets scored on every live decision, so the weights stop being judgement. Two: reasoning quality graded by people in the app, which becomes the tenth measured dimension and a gate. Three: an events agent for the regime shifts the models cannot read. Four: a second model family to show the harness, not the model, does the work. Five: other central banks; the chain needs a calendar, a rate series, the statements and a curve, and the scorecard transfers unchanged. Six: better classical models, judged by the expanding window only.</a:t>
             </a:r>
           </a:p>
         </p:txBody>
@@ -1904,7 +1900,7 @@
     </p:spTree>
     <p:extLst>
       <p:ext uri="{BB962C8B-B14F-4D97-AF65-F5344CB8AC3E}">
-        <p14:creationId xmlns:p14="http://schemas.microsoft.com/office/powerpoint/2010/main" val="1024086991"/>
+        <p14:creationId xmlns:p14="http://schemas.microsoft.com/office/powerpoint/2010/main" val="956866070"/>
       </p:ext>
     </p:extLst>
   </p:cSld>
@@ -1960,7 +1956,7 @@
           <a:p>
             <a:r>
               <a:rPr lang="en-US" dirty="0"/>
-              <a:t>One minute. Press the button, read the result line, move on.</a:t>
+              <a:t>Close on the ask. The forecast for 28 October is on file; the scoring is automatic from here; what the room can add is scrutiny and the next target.</a:t>
             </a:r>
           </a:p>
         </p:txBody>
@@ -2134,7 +2130,7 @@
           <a:p>
             <a:r>
               <a:rPr lang="en-US" dirty="0"/>
-              <a:t>Left, the limits, said before anyone asks: one scored decision; weights by judgement; the fitted model outside; the market is the anchor. Right, what is next, in order of value: the December window is already running on the same chain; pre-registered weight sets scored live; an events agent for the regime shifts the models cannot read (1987, 1998, 2008, 2020 were financial-stress cuts); the reasoning grader and a second model family.</a:t>
+              <a:t>Read left to right as an evolution. Analyst 1 wobbles by three to five points between identical runs, cites nothing, and leaks three dozen numbers from memory; it still thinks the Fed is cutting. Adding the evidence (analyst 2) removes the leaks but not the wobble, and nothing can be checked. Adding the answer shape and the verifier (analyst 3) is the step that makes the output stable and fully verifiable. Specialists (4 to 8) keep that and add attribution. Same model, same day; the difference at each step is the one thing added.</a:t>
             </a:r>
           </a:p>
         </p:txBody>
@@ -2157,180 +2153,6 @@
             <a:fld id="{F7021451-1387-4CA6-816F-3879F97B5CBC}" type="slidenum">
               <a:rPr lang="en-US"/>
               <a:t>20</a:t>
-            </a:fld>
-            <a:endParaRPr lang="en-US"/>
-          </a:p>
-        </p:txBody>
-      </p:sp>
-    </p:spTree>
-    <p:extLst>
-      <p:ext uri="{BB962C8B-B14F-4D97-AF65-F5344CB8AC3E}">
-        <p14:creationId xmlns:p14="http://schemas.microsoft.com/office/powerpoint/2010/main" val="1024086991"/>
-      </p:ext>
-    </p:extLst>
-  </p:cSld>
-  <p:clrMapOvr>
-    <a:masterClrMapping/>
-  </p:clrMapOvr>
-</p:notes>
-</file>
-
-<file path=ppt/notesSlides/notesSlide21.xml><?xml version="1.0" encoding="utf-8"?>
-<p:notes xmlns:a="http://schemas.openxmlformats.org/drawingml/2006/main" xmlns:r="http://schemas.openxmlformats.org/officeDocument/2006/relationships" xmlns:p="http://schemas.openxmlformats.org/presentationml/2006/main">
-  <p:cSld>
-    <p:spTree>
-      <p:nvGrpSpPr>
-        <p:cNvPr id="1" name=""/>
-        <p:cNvGrpSpPr/>
-        <p:nvPr/>
-      </p:nvGrpSpPr>
-      <p:grpSpPr>
-        <a:xfrm>
-          <a:off x="0" y="0"/>
-          <a:ext cx="0" cy="0"/>
-          <a:chOff x="0" y="0"/>
-          <a:chExt cx="0" cy="0"/>
-        </a:xfrm>
-      </p:grpSpPr>
-      <p:sp>
-        <p:nvSpPr>
-          <p:cNvPr id="2" name="Slide Image Placeholder 1"/>
-          <p:cNvSpPr>
-            <a:spLocks noGrp="1" noRot="1" noChangeAspect="1"/>
-          </p:cNvSpPr>
-          <p:nvPr>
-            <p:ph type="sldImg"/>
-          </p:nvPr>
-        </p:nvSpPr>
-        <p:spPr/>
-      </p:sp>
-      <p:sp>
-        <p:nvSpPr>
-          <p:cNvPr id="3" name="Notes Placeholder 2"/>
-          <p:cNvSpPr>
-            <a:spLocks noGrp="1"/>
-          </p:cNvSpPr>
-          <p:nvPr>
-            <p:ph type="body" idx="1"/>
-          </p:nvPr>
-        </p:nvSpPr>
-        <p:spPr/>
-        <p:txBody>
-          <a:bodyPr/>
-          <a:lstStyle/>
-          <a:p>
-            <a:r>
-              <a:rPr lang="en-US" dirty="0"/>
-              <a:t>Close on the ask. The forecast for 28 October is on file; the scoring is automatic from here; what the room can add is scrutiny and the next target.</a:t>
-            </a:r>
-          </a:p>
-        </p:txBody>
-      </p:sp>
-      <p:sp>
-        <p:nvSpPr>
-          <p:cNvPr id="4" name="Slide Number Placeholder 3"/>
-          <p:cNvSpPr>
-            <a:spLocks noGrp="1"/>
-          </p:cNvSpPr>
-          <p:nvPr>
-            <p:ph type="sldNum" sz="quarter" idx="10"/>
-          </p:nvPr>
-        </p:nvSpPr>
-        <p:spPr/>
-        <p:txBody>
-          <a:bodyPr/>
-          <a:lstStyle/>
-          <a:p>
-            <a:fld id="{F7021451-1387-4CA6-816F-3879F97B5CBC}" type="slidenum">
-              <a:rPr lang="en-US"/>
-              <a:t>21</a:t>
-            </a:fld>
-            <a:endParaRPr lang="en-US"/>
-          </a:p>
-        </p:txBody>
-      </p:sp>
-    </p:spTree>
-    <p:extLst>
-      <p:ext uri="{BB962C8B-B14F-4D97-AF65-F5344CB8AC3E}">
-        <p14:creationId xmlns:p14="http://schemas.microsoft.com/office/powerpoint/2010/main" val="1024086991"/>
-      </p:ext>
-    </p:extLst>
-  </p:cSld>
-  <p:clrMapOvr>
-    <a:masterClrMapping/>
-  </p:clrMapOvr>
-</p:notes>
-</file>
-
-<file path=ppt/notesSlides/notesSlide22.xml><?xml version="1.0" encoding="utf-8"?>
-<p:notes xmlns:a="http://schemas.openxmlformats.org/drawingml/2006/main" xmlns:r="http://schemas.openxmlformats.org/officeDocument/2006/relationships" xmlns:p="http://schemas.openxmlformats.org/presentationml/2006/main">
-  <p:cSld>
-    <p:spTree>
-      <p:nvGrpSpPr>
-        <p:cNvPr id="1" name=""/>
-        <p:cNvGrpSpPr/>
-        <p:nvPr/>
-      </p:nvGrpSpPr>
-      <p:grpSpPr>
-        <a:xfrm>
-          <a:off x="0" y="0"/>
-          <a:ext cx="0" cy="0"/>
-          <a:chOff x="0" y="0"/>
-          <a:chExt cx="0" cy="0"/>
-        </a:xfrm>
-      </p:grpSpPr>
-      <p:sp>
-        <p:nvSpPr>
-          <p:cNvPr id="2" name="Slide Image Placeholder 1"/>
-          <p:cNvSpPr>
-            <a:spLocks noGrp="1" noRot="1" noChangeAspect="1"/>
-          </p:cNvSpPr>
-          <p:nvPr>
-            <p:ph type="sldImg"/>
-          </p:nvPr>
-        </p:nvSpPr>
-        <p:spPr/>
-      </p:sp>
-      <p:sp>
-        <p:nvSpPr>
-          <p:cNvPr id="3" name="Notes Placeholder 2"/>
-          <p:cNvSpPr>
-            <a:spLocks noGrp="1"/>
-          </p:cNvSpPr>
-          <p:nvPr>
-            <p:ph type="body" idx="1"/>
-          </p:nvPr>
-        </p:nvSpPr>
-        <p:spPr/>
-        <p:txBody>
-          <a:bodyPr/>
-          <a:lstStyle/>
-          <a:p>
-            <a:r>
-              <a:rPr lang="en-US" dirty="0"/>
-              <a:t>Read left to right as an evolution. Analyst 1 wobbles by three to five points between identical runs, cites nothing, and leaks three dozen numbers from memory; it still thinks the Fed is cutting. Adding the evidence (analyst 2) removes the leaks but not the wobble, and nothing can be checked. Adding the answer shape and the verifier (analyst 3) is the step that makes the output stable and fully verifiable. Specialists (4 to 8) keep that and add attribution. Same model, same day; the difference at each step is the one thing added.</a:t>
-            </a:r>
-          </a:p>
-        </p:txBody>
-      </p:sp>
-      <p:sp>
-        <p:nvSpPr>
-          <p:cNvPr id="4" name="Slide Number Placeholder 3"/>
-          <p:cNvSpPr>
-            <a:spLocks noGrp="1"/>
-          </p:cNvSpPr>
-          <p:nvPr>
-            <p:ph type="sldNum" sz="quarter" idx="10"/>
-          </p:nvPr>
-        </p:nvSpPr>
-        <p:spPr/>
-        <p:txBody>
-          <a:bodyPr/>
-          <a:lstStyle/>
-          <a:p>
-            <a:fld id="{F7021451-1387-4CA6-816F-3879F97B5CBC}" type="slidenum">
-              <a:rPr lang="en-US"/>
-              <a:t>22</a:t>
             </a:fld>
             <a:endParaRPr lang="en-US"/>
           </a:p>
@@ -3225,7 +3047,7 @@
           </a:prstGeom>
           <a:extLst>
             <a:ext uri="{C572A759-6A51-4108-AA02-DFA0A04FC94B}">
-              <ma14:wrappingTextBoxFlag xmlns:ma14="http://schemas.microsoft.com/office/mac/drawingml/2011/main" xmlns="" val="0"/>
+              <ma14:wrappingTextBoxFlag xmlns="" xmlns:ma14="http://schemas.microsoft.com/office/mac/drawingml/2011/main" val="0"/>
             </a:ext>
           </a:extLst>
         </p:spPr>
@@ -3410,7 +3232,7 @@
           </a:prstGeom>
           <a:extLst>
             <a:ext uri="{C572A759-6A51-4108-AA02-DFA0A04FC94B}">
-              <ma14:wrappingTextBoxFlag xmlns:ma14="http://schemas.microsoft.com/office/mac/drawingml/2011/main" xmlns="" val="0"/>
+              <ma14:wrappingTextBoxFlag xmlns="" xmlns:ma14="http://schemas.microsoft.com/office/mac/drawingml/2011/main" val="0"/>
             </a:ext>
           </a:extLst>
         </p:spPr>
@@ -5302,7 +5124,7 @@
           </a:prstGeom>
           <a:extLst>
             <a:ext uri="{C572A759-6A51-4108-AA02-DFA0A04FC94B}">
-              <ma14:wrappingTextBoxFlag xmlns:ma14="http://schemas.microsoft.com/office/mac/drawingml/2011/main" xmlns="" val="0"/>
+              <ma14:wrappingTextBoxFlag xmlns="" xmlns:ma14="http://schemas.microsoft.com/office/mac/drawingml/2011/main" val="0"/>
             </a:ext>
           </a:extLst>
         </p:spPr>
@@ -7688,7 +7510,7 @@
           </a:prstGeom>
           <a:extLst>
             <a:ext uri="{C572A759-6A51-4108-AA02-DFA0A04FC94B}">
-              <ma14:wrappingTextBoxFlag xmlns:ma14="http://schemas.microsoft.com/office/mac/drawingml/2011/main" xmlns="" val="0"/>
+              <ma14:wrappingTextBoxFlag xmlns="" xmlns:ma14="http://schemas.microsoft.com/office/mac/drawingml/2011/main" val="0"/>
             </a:ext>
           </a:extLst>
         </p:spPr>
@@ -8625,7 +8447,7 @@
           </a:prstGeom>
           <a:extLst>
             <a:ext uri="{C572A759-6A51-4108-AA02-DFA0A04FC94B}">
-              <ma14:wrappingTextBoxFlag xmlns:ma14="http://schemas.microsoft.com/office/mac/drawingml/2011/main" xmlns="" val="0"/>
+              <ma14:wrappingTextBoxFlag xmlns="" xmlns:ma14="http://schemas.microsoft.com/office/mac/drawingml/2011/main" val="0"/>
             </a:ext>
           </a:extLst>
         </p:spPr>
@@ -10206,7 +10028,7 @@
           </a:prstGeom>
           <a:extLst>
             <a:ext uri="{C572A759-6A51-4108-AA02-DFA0A04FC94B}">
-              <ma14:wrappingTextBoxFlag xmlns:ma14="http://schemas.microsoft.com/office/mac/drawingml/2011/main" xmlns="" val="0"/>
+              <ma14:wrappingTextBoxFlag xmlns="" xmlns:ma14="http://schemas.microsoft.com/office/mac/drawingml/2011/main" val="0"/>
             </a:ext>
           </a:extLst>
         </p:spPr>
@@ -10246,7 +10068,7 @@
 
 <file path=ppt/slides/slide15.xml><?xml version="1.0" encoding="utf-8"?>
 <p:sld xmlns:a="http://schemas.openxmlformats.org/drawingml/2006/main" xmlns:r="http://schemas.openxmlformats.org/officeDocument/2006/relationships" xmlns:p="http://schemas.openxmlformats.org/presentationml/2006/main">
-  <p:cSld name="Slide 15">
+  <p:cSld name="Slide 16">
     <p:spTree>
       <p:nvGrpSpPr>
         <p:cNvPr id="1" name=""/>
@@ -10273,6 +10095,1587 @@
         </p:nvSpPr>
         <p:spPr>
           <a:xfrm>
+            <a:off x="548640" y="548640"/>
+            <a:ext cx="11091672" cy="822960"/>
+          </a:xfrm>
+          <a:prstGeom prst="rect">
+            <a:avLst/>
+          </a:prstGeom>
+          <a:noFill/>
+          <a:ln/>
+        </p:spPr>
+        <p:txBody>
+          <a:bodyPr wrap="square" lIns="0" tIns="0" rIns="0" bIns="0" rtlCol="0" anchor="ctr"/>
+          <a:lstStyle/>
+          <a:p>
+            <a:pPr marL="0" indent="0" algn="l">
+              <a:buNone/>
+            </a:pPr>
+            <a:r>
+              <a:rPr lang="en-US" sz="3000" b="1" dirty="0">
+                <a:solidFill>
+                  <a:schemeClr val="bg1"/>
+                </a:solidFill>
+              </a:rPr>
+              <a:t>Live demo 4: what the analysts concluded</a:t>
+            </a:r>
+            <a:endParaRPr lang="en-US" sz="3000" dirty="0"/>
+          </a:p>
+        </p:txBody>
+      </p:sp>
+      <p:sp>
+        <p:nvSpPr>
+          <p:cNvPr id="3" name="Shape 1"/>
+          <p:cNvSpPr/>
+          <p:nvPr/>
+        </p:nvSpPr>
+        <p:spPr>
+          <a:xfrm>
+            <a:off x="10177272" y="685800"/>
+            <a:ext cx="1463040" cy="548640"/>
+          </a:xfrm>
+          <a:prstGeom prst="roundRect">
+            <a:avLst>
+              <a:gd name="adj" fmla="val 16667"/>
+            </a:avLst>
+          </a:prstGeom>
+          <a:solidFill>
+            <a:srgbClr val="E9B44C"/>
+          </a:solidFill>
+          <a:ln w="12700">
+            <a:solidFill>
+              <a:srgbClr val="E9B44C"/>
+            </a:solidFill>
+            <a:prstDash val="solid"/>
+          </a:ln>
+        </p:spPr>
+      </p:sp>
+      <p:sp>
+        <p:nvSpPr>
+          <p:cNvPr id="4" name="Text 2"/>
+          <p:cNvSpPr txBox="1"/>
+          <p:nvPr/>
+        </p:nvSpPr>
+        <p:spPr>
+          <a:xfrm>
+            <a:off x="10177272" y="685800"/>
+            <a:ext cx="1463040" cy="548640"/>
+          </a:xfrm>
+          <a:prstGeom prst="rect">
+            <a:avLst/>
+          </a:prstGeom>
+          <a:noFill/>
+          <a:ln/>
+        </p:spPr>
+        <p:txBody>
+          <a:bodyPr wrap="square" lIns="0" tIns="0" rIns="0" bIns="0" rtlCol="0" anchor="ctr"/>
+          <a:lstStyle/>
+          <a:p>
+            <a:pPr marL="0" indent="0" algn="ctr">
+              <a:buNone/>
+            </a:pPr>
+            <a:r>
+              <a:rPr lang="en-US" sz="1600" b="1" dirty="0">
+                <a:solidFill>
+                  <a:srgbClr val="1B1F2A"/>
+                </a:solidFill>
+              </a:rPr>
+              <a:t>2 min</a:t>
+            </a:r>
+            <a:endParaRPr lang="en-US" sz="1600" dirty="0"/>
+          </a:p>
+        </p:txBody>
+      </p:sp>
+      <p:sp>
+        <p:nvSpPr>
+          <p:cNvPr id="5" name="Shape 3"/>
+          <p:cNvSpPr/>
+          <p:nvPr/>
+        </p:nvSpPr>
+        <p:spPr>
+          <a:xfrm>
+            <a:off x="548640" y="1737360"/>
+            <a:ext cx="3520440" cy="3200400"/>
+          </a:xfrm>
+          <a:prstGeom prst="roundRect">
+            <a:avLst>
+              <a:gd name="adj" fmla="val 3429"/>
+            </a:avLst>
+          </a:prstGeom>
+          <a:solidFill>
+            <a:srgbClr val="1E2761"/>
+          </a:solidFill>
+          <a:ln w="12700">
+            <a:solidFill>
+              <a:srgbClr val="1E2761"/>
+            </a:solidFill>
+            <a:prstDash val="solid"/>
+          </a:ln>
+        </p:spPr>
+      </p:sp>
+      <p:sp>
+        <p:nvSpPr>
+          <p:cNvPr id="6" name="Text 4"/>
+          <p:cNvSpPr txBox="1"/>
+          <p:nvPr/>
+        </p:nvSpPr>
+        <p:spPr>
+          <a:xfrm>
+            <a:off x="822960" y="1920240"/>
+            <a:ext cx="2926080" cy="457200"/>
+          </a:xfrm>
+          <a:prstGeom prst="rect">
+            <a:avLst/>
+          </a:prstGeom>
+          <a:noFill/>
+          <a:ln/>
+        </p:spPr>
+        <p:txBody>
+          <a:bodyPr wrap="square" lIns="0" tIns="0" rIns="0" bIns="0" rtlCol="0" anchor="ctr"/>
+          <a:lstStyle/>
+          <a:p>
+            <a:pPr marL="0" indent="0">
+              <a:buNone/>
+            </a:pPr>
+            <a:r>
+              <a:rPr lang="en-US" sz="1800" b="1" dirty="0">
+                <a:solidFill>
+                  <a:srgbClr val="E9B44C"/>
+                </a:solidFill>
+              </a:rPr>
+              <a:t>Open</a:t>
+            </a:r>
+            <a:endParaRPr lang="en-US" sz="1800" dirty="0"/>
+          </a:p>
+        </p:txBody>
+      </p:sp>
+      <p:sp>
+        <p:nvSpPr>
+          <p:cNvPr id="7" name="Text 5"/>
+          <p:cNvSpPr txBox="1"/>
+          <p:nvPr/>
+        </p:nvSpPr>
+        <p:spPr>
+          <a:xfrm>
+            <a:off x="822960" y="2468880"/>
+            <a:ext cx="2971800" cy="2377440"/>
+          </a:xfrm>
+          <a:prstGeom prst="rect">
+            <a:avLst/>
+          </a:prstGeom>
+          <a:noFill/>
+          <a:ln/>
+        </p:spPr>
+        <p:txBody>
+          <a:bodyPr wrap="square" lIns="0" tIns="0" rIns="0" bIns="0" rtlCol="0" anchor="t"/>
+          <a:lstStyle/>
+          <a:p>
+            <a:pPr marL="342900" indent="-342900">
+              <a:spcAft>
+                <a:spcPts val="800"/>
+              </a:spcAft>
+              <a:buSzPct val="100000"/>
+              <a:buChar char="•"/>
+            </a:pPr>
+            <a:r>
+              <a:rPr lang="en-US" sz="1300" dirty="0">
+                <a:solidFill>
+                  <a:srgbClr val="FFFFFF"/>
+                </a:solidFill>
+              </a:rPr>
+              <a:t>Analyst results view</a:t>
+            </a:r>
+            <a:endParaRPr lang="en-US" sz="1300" dirty="0"/>
+          </a:p>
+          <a:p>
+            <a:pPr marL="342900" indent="-342900">
+              <a:spcAft>
+                <a:spcPts val="800"/>
+              </a:spcAft>
+              <a:buSzPct val="100000"/>
+              <a:buChar char="•"/>
+            </a:pPr>
+            <a:r>
+              <a:rPr lang="en-US" sz="1300" dirty="0">
+                <a:solidFill>
+                  <a:srgbClr val="FFFFFF"/>
+                </a:solidFill>
+              </a:rPr>
+              <a:t>Analyst 1 (naive) card</a:t>
+            </a:r>
+            <a:endParaRPr lang="en-US" sz="1300" dirty="0"/>
+          </a:p>
+          <a:p>
+            <a:pPr marL="342900" indent="-342900">
+              <a:spcAft>
+                <a:spcPts val="800"/>
+              </a:spcAft>
+              <a:buSzPct val="100000"/>
+              <a:buChar char="•"/>
+            </a:pPr>
+            <a:r>
+              <a:rPr lang="en-US" sz="1300" dirty="0">
+                <a:solidFill>
+                  <a:srgbClr val="FFFFFF"/>
+                </a:solidFill>
+              </a:rPr>
+              <a:t>Analyst 4 (communications) card</a:t>
+            </a:r>
+            <a:endParaRPr lang="en-US" sz="1300" dirty="0"/>
+          </a:p>
+        </p:txBody>
+      </p:sp>
+      <p:sp>
+        <p:nvSpPr>
+          <p:cNvPr id="8" name="Shape 6"/>
+          <p:cNvSpPr/>
+          <p:nvPr/>
+        </p:nvSpPr>
+        <p:spPr>
+          <a:xfrm>
+            <a:off x="4297680" y="1737360"/>
+            <a:ext cx="3520440" cy="3200400"/>
+          </a:xfrm>
+          <a:prstGeom prst="roundRect">
+            <a:avLst>
+              <a:gd name="adj" fmla="val 3429"/>
+            </a:avLst>
+          </a:prstGeom>
+          <a:solidFill>
+            <a:srgbClr val="1E2761"/>
+          </a:solidFill>
+          <a:ln w="12700">
+            <a:solidFill>
+              <a:srgbClr val="1E2761"/>
+            </a:solidFill>
+            <a:prstDash val="solid"/>
+          </a:ln>
+        </p:spPr>
+      </p:sp>
+      <p:sp>
+        <p:nvSpPr>
+          <p:cNvPr id="9" name="Text 7"/>
+          <p:cNvSpPr txBox="1"/>
+          <p:nvPr/>
+        </p:nvSpPr>
+        <p:spPr>
+          <a:xfrm>
+            <a:off x="4572000" y="1920240"/>
+            <a:ext cx="2926080" cy="457200"/>
+          </a:xfrm>
+          <a:prstGeom prst="rect">
+            <a:avLst/>
+          </a:prstGeom>
+          <a:noFill/>
+          <a:ln/>
+        </p:spPr>
+        <p:txBody>
+          <a:bodyPr wrap="square" lIns="0" tIns="0" rIns="0" bIns="0" rtlCol="0" anchor="ctr"/>
+          <a:lstStyle/>
+          <a:p>
+            <a:pPr marL="0" indent="0">
+              <a:buNone/>
+            </a:pPr>
+            <a:r>
+              <a:rPr lang="en-US" sz="1800" b="1" dirty="0">
+                <a:solidFill>
+                  <a:srgbClr val="E9B44C"/>
+                </a:solidFill>
+              </a:rPr>
+              <a:t>Point at</a:t>
+            </a:r>
+            <a:endParaRPr lang="en-US" sz="1800" dirty="0"/>
+          </a:p>
+        </p:txBody>
+      </p:sp>
+      <p:sp>
+        <p:nvSpPr>
+          <p:cNvPr id="10" name="Text 8"/>
+          <p:cNvSpPr txBox="1"/>
+          <p:nvPr/>
+        </p:nvSpPr>
+        <p:spPr>
+          <a:xfrm>
+            <a:off x="4572000" y="2468880"/>
+            <a:ext cx="2971800" cy="2377440"/>
+          </a:xfrm>
+          <a:prstGeom prst="rect">
+            <a:avLst/>
+          </a:prstGeom>
+          <a:noFill/>
+          <a:ln/>
+        </p:spPr>
+        <p:txBody>
+          <a:bodyPr wrap="square" lIns="0" tIns="0" rIns="0" bIns="0" rtlCol="0" anchor="t"/>
+          <a:lstStyle/>
+          <a:p>
+            <a:pPr marL="342900" indent="-342900">
+              <a:spcAft>
+                <a:spcPts val="800"/>
+              </a:spcAft>
+              <a:buSzPct val="100000"/>
+              <a:buChar char="•"/>
+            </a:pPr>
+            <a:r>
+              <a:rPr lang="en-US" sz="1300" dirty="0">
+                <a:solidFill>
+                  <a:srgbClr val="FFFFFF"/>
+                </a:solidFill>
+              </a:rPr>
+              <a:t>Analyst 1: cut 25 at 57%, numbers from memory flagged</a:t>
+            </a:r>
+            <a:endParaRPr lang="en-US" sz="1300" dirty="0"/>
+          </a:p>
+          <a:p>
+            <a:pPr marL="342900" indent="-342900">
+              <a:spcAft>
+                <a:spcPts val="800"/>
+              </a:spcAft>
+              <a:buSzPct val="100000"/>
+              <a:buChar char="•"/>
+            </a:pPr>
+            <a:r>
+              <a:rPr lang="en-US" sz="1300" dirty="0">
+                <a:solidFill>
+                  <a:srgbClr val="FFFFFF"/>
+                </a:solidFill>
+              </a:rPr>
+              <a:t>Analyst 4: the lean, grounded, leaked, watch-outs badges; one claim with its quote and the 'quote verified' mark</a:t>
+            </a:r>
+            <a:endParaRPr lang="en-US" sz="1300" dirty="0"/>
+          </a:p>
+          <a:p>
+            <a:pPr marL="342900" indent="-342900">
+              <a:spcAft>
+                <a:spcPts val="800"/>
+              </a:spcAft>
+              <a:buSzPct val="100000"/>
+              <a:buChar char="•"/>
+            </a:pPr>
+            <a:r>
+              <a:rPr lang="en-US" sz="1300" dirty="0">
+                <a:solidFill>
+                  <a:srgbClr val="FFFFFF"/>
+                </a:solidFill>
+              </a:rPr>
+              <a:t>Hover a badge for its definition</a:t>
+            </a:r>
+            <a:endParaRPr lang="en-US" sz="1300" dirty="0"/>
+          </a:p>
+        </p:txBody>
+      </p:sp>
+      <p:sp>
+        <p:nvSpPr>
+          <p:cNvPr id="11" name="Shape 9"/>
+          <p:cNvSpPr/>
+          <p:nvPr/>
+        </p:nvSpPr>
+        <p:spPr>
+          <a:xfrm>
+            <a:off x="8046720" y="1737360"/>
+            <a:ext cx="3520440" cy="3200400"/>
+          </a:xfrm>
+          <a:prstGeom prst="roundRect">
+            <a:avLst>
+              <a:gd name="adj" fmla="val 3429"/>
+            </a:avLst>
+          </a:prstGeom>
+          <a:solidFill>
+            <a:srgbClr val="1E2761"/>
+          </a:solidFill>
+          <a:ln w="12700">
+            <a:solidFill>
+              <a:srgbClr val="1E2761"/>
+            </a:solidFill>
+            <a:prstDash val="solid"/>
+          </a:ln>
+        </p:spPr>
+      </p:sp>
+      <p:sp>
+        <p:nvSpPr>
+          <p:cNvPr id="12" name="Text 10"/>
+          <p:cNvSpPr txBox="1"/>
+          <p:nvPr/>
+        </p:nvSpPr>
+        <p:spPr>
+          <a:xfrm>
+            <a:off x="8321040" y="1920240"/>
+            <a:ext cx="2926080" cy="457200"/>
+          </a:xfrm>
+          <a:prstGeom prst="rect">
+            <a:avLst/>
+          </a:prstGeom>
+          <a:noFill/>
+          <a:ln/>
+        </p:spPr>
+        <p:txBody>
+          <a:bodyPr wrap="square" lIns="0" tIns="0" rIns="0" bIns="0" rtlCol="0" anchor="ctr"/>
+          <a:lstStyle/>
+          <a:p>
+            <a:pPr marL="0" indent="0">
+              <a:buNone/>
+            </a:pPr>
+            <a:r>
+              <a:rPr lang="en-US" sz="1800" b="1" dirty="0">
+                <a:solidFill>
+                  <a:srgbClr val="E9B44C"/>
+                </a:solidFill>
+              </a:rPr>
+              <a:t>Say</a:t>
+            </a:r>
+            <a:endParaRPr lang="en-US" sz="1800" dirty="0"/>
+          </a:p>
+        </p:txBody>
+      </p:sp>
+      <p:sp>
+        <p:nvSpPr>
+          <p:cNvPr id="13" name="Text 11"/>
+          <p:cNvSpPr txBox="1"/>
+          <p:nvPr/>
+        </p:nvSpPr>
+        <p:spPr>
+          <a:xfrm>
+            <a:off x="8321040" y="2468880"/>
+            <a:ext cx="2971800" cy="2377440"/>
+          </a:xfrm>
+          <a:prstGeom prst="rect">
+            <a:avLst/>
+          </a:prstGeom>
+          <a:noFill/>
+          <a:ln/>
+        </p:spPr>
+        <p:txBody>
+          <a:bodyPr wrap="square" lIns="0" tIns="0" rIns="0" bIns="0" rtlCol="0" anchor="t"/>
+          <a:lstStyle/>
+          <a:p>
+            <a:pPr marL="342900" indent="-342900">
+              <a:spcAft>
+                <a:spcPts val="800"/>
+              </a:spcAft>
+              <a:buSzPct val="100000"/>
+              <a:buChar char="•"/>
+            </a:pPr>
+            <a:r>
+              <a:rPr lang="en-US" sz="1300" dirty="0">
+                <a:solidFill>
+                  <a:srgbClr val="FFFFFF"/>
+                </a:solidFill>
+              </a:rPr>
+              <a:t>Every claim you see has a quote that code found character for character in the item named.</a:t>
+            </a:r>
+            <a:endParaRPr lang="en-US" sz="1300" dirty="0"/>
+          </a:p>
+          <a:p>
+            <a:pPr marL="342900" indent="-342900">
+              <a:spcAft>
+                <a:spcPts val="800"/>
+              </a:spcAft>
+              <a:buSzPct val="100000"/>
+              <a:buChar char="•"/>
+            </a:pPr>
+            <a:r>
+              <a:rPr lang="en-US" sz="1300" dirty="0">
+                <a:solidFill>
+                  <a:srgbClr val="FFFFFF"/>
+                </a:solidFill>
+              </a:rPr>
+              <a:t>The naive analyst still thinks the Fed is cutting. Same model, no evidence.</a:t>
+            </a:r>
+            <a:endParaRPr lang="en-US" sz="1300" dirty="0"/>
+          </a:p>
+        </p:txBody>
+      </p:sp>
+    </p:spTree>
+  </p:cSld>
+  <p:clrMapOvr>
+    <a:masterClrMapping/>
+  </p:clrMapOvr>
+</p:sld>
+</file>
+
+<file path=ppt/slides/slide16.xml><?xml version="1.0" encoding="utf-8"?>
+<p:sld xmlns:a="http://schemas.openxmlformats.org/drawingml/2006/main" xmlns:r="http://schemas.openxmlformats.org/officeDocument/2006/relationships" xmlns:p="http://schemas.openxmlformats.org/presentationml/2006/main">
+  <p:cSld name="Slide 18">
+    <p:spTree>
+      <p:nvGrpSpPr>
+        <p:cNvPr id="1" name=""/>
+        <p:cNvGrpSpPr/>
+        <p:nvPr/>
+      </p:nvGrpSpPr>
+      <p:grpSpPr>
+        <a:xfrm>
+          <a:off x="0" y="0"/>
+          <a:ext cx="0" cy="0"/>
+          <a:chOff x="0" y="0"/>
+          <a:chExt cx="0" cy="0"/>
+        </a:xfrm>
+      </p:grpSpPr>
+      <p:sp>
+        <p:nvSpPr>
+          <p:cNvPr id="2" name="Text 0"/>
+          <p:cNvSpPr>
+            <a:spLocks noGrp="1"/>
+          </p:cNvSpPr>
+          <p:nvPr>
+            <p:ph type="title" idx="100" hasCustomPrompt="1"/>
+          </p:nvPr>
+        </p:nvSpPr>
+        <p:spPr>
+          <a:xfrm>
+            <a:off x="548640" y="548640"/>
+            <a:ext cx="11091672" cy="822960"/>
+          </a:xfrm>
+          <a:prstGeom prst="rect">
+            <a:avLst/>
+          </a:prstGeom>
+          <a:noFill/>
+          <a:ln/>
+        </p:spPr>
+        <p:txBody>
+          <a:bodyPr wrap="square" lIns="0" tIns="0" rIns="0" bIns="0" rtlCol="0" anchor="ctr"/>
+          <a:lstStyle/>
+          <a:p>
+            <a:pPr marL="0" indent="0" algn="l">
+              <a:buNone/>
+            </a:pPr>
+            <a:r>
+              <a:rPr lang="en-US" sz="3000" b="1" dirty="0">
+                <a:solidFill>
+                  <a:schemeClr val="bg1"/>
+                </a:solidFill>
+              </a:rPr>
+              <a:t>Live demo 5: the scorecard and the drift table</a:t>
+            </a:r>
+            <a:endParaRPr lang="en-US" sz="3000" dirty="0"/>
+          </a:p>
+        </p:txBody>
+      </p:sp>
+      <p:sp>
+        <p:nvSpPr>
+          <p:cNvPr id="3" name="Shape 1"/>
+          <p:cNvSpPr/>
+          <p:nvPr/>
+        </p:nvSpPr>
+        <p:spPr>
+          <a:xfrm>
+            <a:off x="10177272" y="685800"/>
+            <a:ext cx="1463040" cy="548640"/>
+          </a:xfrm>
+          <a:prstGeom prst="roundRect">
+            <a:avLst>
+              <a:gd name="adj" fmla="val 16667"/>
+            </a:avLst>
+          </a:prstGeom>
+          <a:solidFill>
+            <a:srgbClr val="E9B44C"/>
+          </a:solidFill>
+          <a:ln w="12700">
+            <a:solidFill>
+              <a:srgbClr val="E9B44C"/>
+            </a:solidFill>
+            <a:prstDash val="solid"/>
+          </a:ln>
+        </p:spPr>
+      </p:sp>
+      <p:sp>
+        <p:nvSpPr>
+          <p:cNvPr id="4" name="Text 2"/>
+          <p:cNvSpPr txBox="1"/>
+          <p:nvPr/>
+        </p:nvSpPr>
+        <p:spPr>
+          <a:xfrm>
+            <a:off x="10177272" y="685800"/>
+            <a:ext cx="1463040" cy="548640"/>
+          </a:xfrm>
+          <a:prstGeom prst="rect">
+            <a:avLst/>
+          </a:prstGeom>
+          <a:noFill/>
+          <a:ln/>
+        </p:spPr>
+        <p:txBody>
+          <a:bodyPr wrap="square" lIns="0" tIns="0" rIns="0" bIns="0" rtlCol="0" anchor="ctr"/>
+          <a:lstStyle/>
+          <a:p>
+            <a:pPr marL="0" indent="0" algn="ctr">
+              <a:buNone/>
+            </a:pPr>
+            <a:r>
+              <a:rPr lang="en-US" sz="1600" b="1" dirty="0">
+                <a:solidFill>
+                  <a:srgbClr val="1B1F2A"/>
+                </a:solidFill>
+              </a:rPr>
+              <a:t>2 min</a:t>
+            </a:r>
+            <a:endParaRPr lang="en-US" sz="1600" dirty="0"/>
+          </a:p>
+        </p:txBody>
+      </p:sp>
+      <p:sp>
+        <p:nvSpPr>
+          <p:cNvPr id="5" name="Shape 3"/>
+          <p:cNvSpPr/>
+          <p:nvPr/>
+        </p:nvSpPr>
+        <p:spPr>
+          <a:xfrm>
+            <a:off x="548640" y="1737360"/>
+            <a:ext cx="3520440" cy="3200400"/>
+          </a:xfrm>
+          <a:prstGeom prst="roundRect">
+            <a:avLst>
+              <a:gd name="adj" fmla="val 3429"/>
+            </a:avLst>
+          </a:prstGeom>
+          <a:solidFill>
+            <a:srgbClr val="1E2761"/>
+          </a:solidFill>
+          <a:ln w="12700">
+            <a:solidFill>
+              <a:srgbClr val="1E2761"/>
+            </a:solidFill>
+            <a:prstDash val="solid"/>
+          </a:ln>
+        </p:spPr>
+      </p:sp>
+      <p:sp>
+        <p:nvSpPr>
+          <p:cNvPr id="6" name="Text 4"/>
+          <p:cNvSpPr txBox="1"/>
+          <p:nvPr/>
+        </p:nvSpPr>
+        <p:spPr>
+          <a:xfrm>
+            <a:off x="822960" y="1920240"/>
+            <a:ext cx="2926080" cy="457200"/>
+          </a:xfrm>
+          <a:prstGeom prst="rect">
+            <a:avLst/>
+          </a:prstGeom>
+          <a:noFill/>
+          <a:ln/>
+        </p:spPr>
+        <p:txBody>
+          <a:bodyPr wrap="square" lIns="0" tIns="0" rIns="0" bIns="0" rtlCol="0" anchor="ctr"/>
+          <a:lstStyle/>
+          <a:p>
+            <a:pPr marL="0" indent="0">
+              <a:buNone/>
+            </a:pPr>
+            <a:r>
+              <a:rPr lang="en-US" sz="1800" b="1" dirty="0">
+                <a:solidFill>
+                  <a:srgbClr val="E9B44C"/>
+                </a:solidFill>
+              </a:rPr>
+              <a:t>Open</a:t>
+            </a:r>
+            <a:endParaRPr lang="en-US" sz="1800" dirty="0"/>
+          </a:p>
+        </p:txBody>
+      </p:sp>
+      <p:sp>
+        <p:nvSpPr>
+          <p:cNvPr id="7" name="Text 5"/>
+          <p:cNvSpPr txBox="1"/>
+          <p:nvPr/>
+        </p:nvSpPr>
+        <p:spPr>
+          <a:xfrm>
+            <a:off x="822960" y="2468880"/>
+            <a:ext cx="2971800" cy="2377440"/>
+          </a:xfrm>
+          <a:prstGeom prst="rect">
+            <a:avLst/>
+          </a:prstGeom>
+          <a:noFill/>
+          <a:ln/>
+        </p:spPr>
+        <p:txBody>
+          <a:bodyPr wrap="square" lIns="0" tIns="0" rIns="0" bIns="0" rtlCol="0" anchor="t"/>
+          <a:lstStyle/>
+          <a:p>
+            <a:pPr marL="342900" indent="-342900">
+              <a:spcAft>
+                <a:spcPts val="800"/>
+              </a:spcAft>
+              <a:buSzPct val="100000"/>
+              <a:buChar char="•"/>
+            </a:pPr>
+            <a:r>
+              <a:rPr lang="en-US" sz="1300" dirty="0">
+                <a:solidFill>
+                  <a:srgbClr val="FFFFFF"/>
+                </a:solidFill>
+              </a:rPr>
+              <a:t>Scorecard view</a:t>
+            </a:r>
+            <a:endParaRPr lang="en-US" sz="1300" dirty="0"/>
+          </a:p>
+          <a:p>
+            <a:pPr marL="342900" indent="-342900">
+              <a:spcAft>
+                <a:spcPts val="800"/>
+              </a:spcAft>
+              <a:buSzPct val="100000"/>
+              <a:buChar char="•"/>
+            </a:pPr>
+            <a:r>
+              <a:rPr lang="en-US" sz="1300" dirty="0">
+                <a:solidFill>
+                  <a:srgbClr val="FFFFFF"/>
+                </a:solidFill>
+              </a:rPr>
+              <a:t>The snapshot dropdown: pick 24 October, then 26 October</a:t>
+            </a:r>
+            <a:endParaRPr lang="en-US" sz="1300" dirty="0"/>
+          </a:p>
+          <a:p>
+            <a:pPr marL="342900" indent="-342900">
+              <a:spcAft>
+                <a:spcPts val="800"/>
+              </a:spcAft>
+              <a:buSzPct val="100000"/>
+              <a:buChar char="•"/>
+            </a:pPr>
+            <a:r>
+              <a:rPr lang="en-US" sz="1300" dirty="0">
+                <a:solidFill>
+                  <a:srgbClr val="FFFFFF"/>
+                </a:solidFill>
+              </a:rPr>
+              <a:t>Expand 'what was checked' under Shock direction</a:t>
+            </a:r>
+            <a:endParaRPr lang="en-US" sz="1300" dirty="0"/>
+          </a:p>
+          <a:p>
+            <a:pPr marL="342900" indent="-342900">
+              <a:spcAft>
+                <a:spcPts val="800"/>
+              </a:spcAft>
+              <a:buSzPct val="100000"/>
+              <a:buChar char="•"/>
+            </a:pPr>
+            <a:r>
+              <a:rPr lang="en-US" sz="1300" dirty="0">
+                <a:solidFill>
+                  <a:srgbClr val="FFFFFF"/>
+                </a:solidFill>
+              </a:rPr>
+              <a:t>Scroll to the over-time table</a:t>
+            </a:r>
+            <a:endParaRPr lang="en-US" sz="1300" dirty="0"/>
+          </a:p>
+        </p:txBody>
+      </p:sp>
+      <p:sp>
+        <p:nvSpPr>
+          <p:cNvPr id="8" name="Shape 6"/>
+          <p:cNvSpPr/>
+          <p:nvPr/>
+        </p:nvSpPr>
+        <p:spPr>
+          <a:xfrm>
+            <a:off x="4297680" y="1737360"/>
+            <a:ext cx="3520440" cy="3200400"/>
+          </a:xfrm>
+          <a:prstGeom prst="roundRect">
+            <a:avLst>
+              <a:gd name="adj" fmla="val 3429"/>
+            </a:avLst>
+          </a:prstGeom>
+          <a:solidFill>
+            <a:srgbClr val="1E2761"/>
+          </a:solidFill>
+          <a:ln w="12700">
+            <a:solidFill>
+              <a:srgbClr val="1E2761"/>
+            </a:solidFill>
+            <a:prstDash val="solid"/>
+          </a:ln>
+        </p:spPr>
+      </p:sp>
+      <p:sp>
+        <p:nvSpPr>
+          <p:cNvPr id="9" name="Text 7"/>
+          <p:cNvSpPr txBox="1"/>
+          <p:nvPr/>
+        </p:nvSpPr>
+        <p:spPr>
+          <a:xfrm>
+            <a:off x="4572000" y="1920240"/>
+            <a:ext cx="2926080" cy="457200"/>
+          </a:xfrm>
+          <a:prstGeom prst="rect">
+            <a:avLst/>
+          </a:prstGeom>
+          <a:noFill/>
+          <a:ln/>
+        </p:spPr>
+        <p:txBody>
+          <a:bodyPr wrap="square" lIns="0" tIns="0" rIns="0" bIns="0" rtlCol="0" anchor="ctr"/>
+          <a:lstStyle/>
+          <a:p>
+            <a:pPr marL="0" indent="0">
+              <a:buNone/>
+            </a:pPr>
+            <a:r>
+              <a:rPr lang="en-US" sz="1800" b="1" dirty="0">
+                <a:solidFill>
+                  <a:srgbClr val="E9B44C"/>
+                </a:solidFill>
+              </a:rPr>
+              <a:t>Point at</a:t>
+            </a:r>
+            <a:endParaRPr lang="en-US" sz="1800" dirty="0"/>
+          </a:p>
+        </p:txBody>
+      </p:sp>
+      <p:sp>
+        <p:nvSpPr>
+          <p:cNvPr id="10" name="Text 8"/>
+          <p:cNvSpPr txBox="1"/>
+          <p:nvPr/>
+        </p:nvSpPr>
+        <p:spPr>
+          <a:xfrm>
+            <a:off x="4572000" y="2468880"/>
+            <a:ext cx="2971800" cy="2377440"/>
+          </a:xfrm>
+          <a:prstGeom prst="rect">
+            <a:avLst/>
+          </a:prstGeom>
+          <a:noFill/>
+          <a:ln/>
+        </p:spPr>
+        <p:txBody>
+          <a:bodyPr wrap="square" lIns="0" tIns="0" rIns="0" bIns="0" rtlCol="0" anchor="t"/>
+          <a:lstStyle/>
+          <a:p>
+            <a:pPr marL="342900" indent="-342900">
+              <a:spcAft>
+                <a:spcPts val="800"/>
+              </a:spcAft>
+              <a:buSzPct val="100000"/>
+              <a:buChar char="•"/>
+            </a:pPr>
+            <a:r>
+              <a:rPr lang="en-US" sz="1300" dirty="0">
+                <a:solidFill>
+                  <a:srgbClr val="FFFFFF"/>
+                </a:solidFill>
+              </a:rPr>
+              <a:t>The grid: red in the control columns, green in the judged columns</a:t>
+            </a:r>
+            <a:endParaRPr lang="en-US" sz="1300" dirty="0"/>
+          </a:p>
+          <a:p>
+            <a:pPr marL="342900" indent="-342900">
+              <a:spcAft>
+                <a:spcPts val="800"/>
+              </a:spcAft>
+              <a:buSzPct val="100000"/>
+              <a:buChar char="•"/>
+            </a:pPr>
+            <a:r>
+              <a:rPr lang="en-US" sz="1300" dirty="0">
+                <a:solidFill>
+                  <a:srgbClr val="FFFFFF"/>
+                </a:solidFill>
+              </a:rPr>
+              <a:t>The seven shocks with their deltas</a:t>
+            </a:r>
+            <a:endParaRPr lang="en-US" sz="1300" dirty="0"/>
+          </a:p>
+          <a:p>
+            <a:pPr marL="342900" indent="-342900">
+              <a:spcAft>
+                <a:spcPts val="800"/>
+              </a:spcAft>
+              <a:buSzPct val="100000"/>
+              <a:buChar char="•"/>
+            </a:pPr>
+            <a:r>
+              <a:rPr lang="en-US" sz="1300" dirty="0">
+                <a:solidFill>
+                  <a:srgbClr val="FFFFFF"/>
+                </a:solidFill>
+              </a:rPr>
+              <a:t>The over-time table: one row per snapshot, the marks never move</a:t>
+            </a:r>
+            <a:endParaRPr lang="en-US" sz="1300" dirty="0"/>
+          </a:p>
+        </p:txBody>
+      </p:sp>
+      <p:sp>
+        <p:nvSpPr>
+          <p:cNvPr id="11" name="Shape 9"/>
+          <p:cNvSpPr/>
+          <p:nvPr/>
+        </p:nvSpPr>
+        <p:spPr>
+          <a:xfrm>
+            <a:off x="8046720" y="1737360"/>
+            <a:ext cx="3520440" cy="3200400"/>
+          </a:xfrm>
+          <a:prstGeom prst="roundRect">
+            <a:avLst>
+              <a:gd name="adj" fmla="val 3429"/>
+            </a:avLst>
+          </a:prstGeom>
+          <a:solidFill>
+            <a:srgbClr val="1E2761"/>
+          </a:solidFill>
+          <a:ln w="12700">
+            <a:solidFill>
+              <a:srgbClr val="1E2761"/>
+            </a:solidFill>
+            <a:prstDash val="solid"/>
+          </a:ln>
+        </p:spPr>
+      </p:sp>
+      <p:sp>
+        <p:nvSpPr>
+          <p:cNvPr id="12" name="Text 10"/>
+          <p:cNvSpPr txBox="1"/>
+          <p:nvPr/>
+        </p:nvSpPr>
+        <p:spPr>
+          <a:xfrm>
+            <a:off x="8321040" y="1920240"/>
+            <a:ext cx="2926080" cy="457200"/>
+          </a:xfrm>
+          <a:prstGeom prst="rect">
+            <a:avLst/>
+          </a:prstGeom>
+          <a:noFill/>
+          <a:ln/>
+        </p:spPr>
+        <p:txBody>
+          <a:bodyPr wrap="square" lIns="0" tIns="0" rIns="0" bIns="0" rtlCol="0" anchor="ctr"/>
+          <a:lstStyle/>
+          <a:p>
+            <a:pPr marL="0" indent="0">
+              <a:buNone/>
+            </a:pPr>
+            <a:r>
+              <a:rPr lang="en-US" sz="1800" b="1" dirty="0">
+                <a:solidFill>
+                  <a:srgbClr val="E9B44C"/>
+                </a:solidFill>
+              </a:rPr>
+              <a:t>Say</a:t>
+            </a:r>
+            <a:endParaRPr lang="en-US" sz="1800" dirty="0"/>
+          </a:p>
+        </p:txBody>
+      </p:sp>
+      <p:sp>
+        <p:nvSpPr>
+          <p:cNvPr id="13" name="Text 11"/>
+          <p:cNvSpPr txBox="1"/>
+          <p:nvPr/>
+        </p:nvSpPr>
+        <p:spPr>
+          <a:xfrm>
+            <a:off x="8321040" y="2468880"/>
+            <a:ext cx="2971800" cy="2377440"/>
+          </a:xfrm>
+          <a:prstGeom prst="rect">
+            <a:avLst/>
+          </a:prstGeom>
+          <a:noFill/>
+          <a:ln/>
+        </p:spPr>
+        <p:txBody>
+          <a:bodyPr wrap="square" lIns="0" tIns="0" rIns="0" bIns="0" rtlCol="0" anchor="t"/>
+          <a:lstStyle/>
+          <a:p>
+            <a:pPr marL="342900" indent="-342900">
+              <a:spcAft>
+                <a:spcPts val="800"/>
+              </a:spcAft>
+              <a:buSzPct val="100000"/>
+              <a:buChar char="•"/>
+            </a:pPr>
+            <a:r>
+              <a:rPr lang="en-US" sz="1300" dirty="0">
+                <a:solidFill>
+                  <a:srgbClr val="FFFFFF"/>
+                </a:solidFill>
+              </a:rPr>
+              <a:t>Analysts 1 and 2 are meant to fail. A red cell on the right would be a defect.</a:t>
+            </a:r>
+            <a:endParaRPr lang="en-US" sz="1300" dirty="0"/>
+          </a:p>
+          <a:p>
+            <a:pPr marL="342900" indent="-342900">
+              <a:spcAft>
+                <a:spcPts val="800"/>
+              </a:spcAft>
+              <a:buSzPct val="100000"/>
+              <a:buChar char="•"/>
+            </a:pPr>
+            <a:r>
+              <a:rPr lang="en-US" sz="1300" dirty="0">
+                <a:solidFill>
+                  <a:srgbClr val="FFFFFF"/>
+                </a:solidFill>
+              </a:rPr>
+              <a:t>This is the drift check. Two red cells have already pointed at defects and both are fixed.</a:t>
+            </a:r>
+            <a:endParaRPr lang="en-US" sz="1300" dirty="0"/>
+          </a:p>
+        </p:txBody>
+      </p:sp>
+    </p:spTree>
+  </p:cSld>
+  <p:clrMapOvr>
+    <a:masterClrMapping/>
+  </p:clrMapOvr>
+</p:sld>
+</file>
+
+<file path=ppt/slides/slide17.xml><?xml version="1.0" encoding="utf-8"?>
+<p:sld xmlns:a="http://schemas.openxmlformats.org/drawingml/2006/main" xmlns:r="http://schemas.openxmlformats.org/officeDocument/2006/relationships" xmlns:p="http://schemas.openxmlformats.org/presentationml/2006/main">
+  <p:cSld name="Slide 19">
+    <p:spTree>
+      <p:nvGrpSpPr>
+        <p:cNvPr id="1" name=""/>
+        <p:cNvGrpSpPr/>
+        <p:nvPr/>
+      </p:nvGrpSpPr>
+      <p:grpSpPr>
+        <a:xfrm>
+          <a:off x="0" y="0"/>
+          <a:ext cx="0" cy="0"/>
+          <a:chOff x="0" y="0"/>
+          <a:chExt cx="0" cy="0"/>
+        </a:xfrm>
+      </p:grpSpPr>
+      <p:sp>
+        <p:nvSpPr>
+          <p:cNvPr id="2" name="Text 0"/>
+          <p:cNvSpPr>
+            <a:spLocks noGrp="1"/>
+          </p:cNvSpPr>
+          <p:nvPr>
+            <p:ph type="title" idx="100" hasCustomPrompt="1"/>
+          </p:nvPr>
+        </p:nvSpPr>
+        <p:spPr>
+          <a:xfrm>
+            <a:off x="548640" y="548640"/>
+            <a:ext cx="11091672" cy="822960"/>
+          </a:xfrm>
+          <a:prstGeom prst="rect">
+            <a:avLst/>
+          </a:prstGeom>
+          <a:noFill/>
+          <a:ln/>
+        </p:spPr>
+        <p:txBody>
+          <a:bodyPr wrap="square" lIns="0" tIns="0" rIns="0" bIns="0" rtlCol="0" anchor="ctr"/>
+          <a:lstStyle/>
+          <a:p>
+            <a:pPr marL="0" indent="0" algn="l">
+              <a:buNone/>
+            </a:pPr>
+            <a:r>
+              <a:rPr lang="en-US" sz="3000" b="1" dirty="0">
+                <a:solidFill>
+                  <a:schemeClr val="bg1"/>
+                </a:solidFill>
+              </a:rPr>
+              <a:t>Live demo 6: the ledger and replay</a:t>
+            </a:r>
+            <a:endParaRPr lang="en-US" sz="3000" dirty="0"/>
+          </a:p>
+        </p:txBody>
+      </p:sp>
+      <p:sp>
+        <p:nvSpPr>
+          <p:cNvPr id="3" name="Shape 1"/>
+          <p:cNvSpPr/>
+          <p:nvPr/>
+        </p:nvSpPr>
+        <p:spPr>
+          <a:xfrm>
+            <a:off x="10177272" y="685800"/>
+            <a:ext cx="1463040" cy="548640"/>
+          </a:xfrm>
+          <a:prstGeom prst="roundRect">
+            <a:avLst>
+              <a:gd name="adj" fmla="val 16667"/>
+            </a:avLst>
+          </a:prstGeom>
+          <a:solidFill>
+            <a:srgbClr val="E9B44C"/>
+          </a:solidFill>
+          <a:ln w="12700">
+            <a:solidFill>
+              <a:srgbClr val="E9B44C"/>
+            </a:solidFill>
+            <a:prstDash val="solid"/>
+          </a:ln>
+        </p:spPr>
+      </p:sp>
+      <p:sp>
+        <p:nvSpPr>
+          <p:cNvPr id="4" name="Text 2"/>
+          <p:cNvSpPr txBox="1"/>
+          <p:nvPr/>
+        </p:nvSpPr>
+        <p:spPr>
+          <a:xfrm>
+            <a:off x="10177272" y="685800"/>
+            <a:ext cx="1463040" cy="548640"/>
+          </a:xfrm>
+          <a:prstGeom prst="rect">
+            <a:avLst/>
+          </a:prstGeom>
+          <a:noFill/>
+          <a:ln/>
+        </p:spPr>
+        <p:txBody>
+          <a:bodyPr wrap="square" lIns="0" tIns="0" rIns="0" bIns="0" rtlCol="0" anchor="ctr"/>
+          <a:lstStyle/>
+          <a:p>
+            <a:pPr marL="0" indent="0" algn="ctr">
+              <a:buNone/>
+            </a:pPr>
+            <a:r>
+              <a:rPr lang="en-US" sz="1600" b="1" dirty="0">
+                <a:solidFill>
+                  <a:srgbClr val="1B1F2A"/>
+                </a:solidFill>
+              </a:rPr>
+              <a:t>1 min</a:t>
+            </a:r>
+            <a:endParaRPr lang="en-US" sz="1600" dirty="0"/>
+          </a:p>
+        </p:txBody>
+      </p:sp>
+      <p:sp>
+        <p:nvSpPr>
+          <p:cNvPr id="5" name="Shape 3"/>
+          <p:cNvSpPr/>
+          <p:nvPr/>
+        </p:nvSpPr>
+        <p:spPr>
+          <a:xfrm>
+            <a:off x="548640" y="1737360"/>
+            <a:ext cx="3520440" cy="3200400"/>
+          </a:xfrm>
+          <a:prstGeom prst="roundRect">
+            <a:avLst>
+              <a:gd name="adj" fmla="val 3429"/>
+            </a:avLst>
+          </a:prstGeom>
+          <a:solidFill>
+            <a:srgbClr val="1E2761"/>
+          </a:solidFill>
+          <a:ln w="12700">
+            <a:solidFill>
+              <a:srgbClr val="1E2761"/>
+            </a:solidFill>
+            <a:prstDash val="solid"/>
+          </a:ln>
+        </p:spPr>
+      </p:sp>
+      <p:sp>
+        <p:nvSpPr>
+          <p:cNvPr id="6" name="Text 4"/>
+          <p:cNvSpPr txBox="1"/>
+          <p:nvPr/>
+        </p:nvSpPr>
+        <p:spPr>
+          <a:xfrm>
+            <a:off x="822960" y="1920240"/>
+            <a:ext cx="2926080" cy="457200"/>
+          </a:xfrm>
+          <a:prstGeom prst="rect">
+            <a:avLst/>
+          </a:prstGeom>
+          <a:noFill/>
+          <a:ln/>
+        </p:spPr>
+        <p:txBody>
+          <a:bodyPr wrap="square" lIns="0" tIns="0" rIns="0" bIns="0" rtlCol="0" anchor="ctr"/>
+          <a:lstStyle/>
+          <a:p>
+            <a:pPr marL="0" indent="0">
+              <a:buNone/>
+            </a:pPr>
+            <a:r>
+              <a:rPr lang="en-US" sz="1800" b="1" dirty="0">
+                <a:solidFill>
+                  <a:srgbClr val="E9B44C"/>
+                </a:solidFill>
+              </a:rPr>
+              <a:t>Open</a:t>
+            </a:r>
+            <a:endParaRPr lang="en-US" sz="1800" dirty="0"/>
+          </a:p>
+        </p:txBody>
+      </p:sp>
+      <p:sp>
+        <p:nvSpPr>
+          <p:cNvPr id="7" name="Text 5"/>
+          <p:cNvSpPr txBox="1"/>
+          <p:nvPr/>
+        </p:nvSpPr>
+        <p:spPr>
+          <a:xfrm>
+            <a:off x="822960" y="2468880"/>
+            <a:ext cx="2971800" cy="2377440"/>
+          </a:xfrm>
+          <a:prstGeom prst="rect">
+            <a:avLst/>
+          </a:prstGeom>
+          <a:noFill/>
+          <a:ln/>
+        </p:spPr>
+        <p:txBody>
+          <a:bodyPr wrap="square" lIns="0" tIns="0" rIns="0" bIns="0" rtlCol="0" anchor="t"/>
+          <a:lstStyle/>
+          <a:p>
+            <a:pPr marL="342900" indent="-342900">
+              <a:spcAft>
+                <a:spcPts val="800"/>
+              </a:spcAft>
+              <a:buSzPct val="100000"/>
+              <a:buChar char="•"/>
+            </a:pPr>
+            <a:r>
+              <a:rPr lang="en-US" sz="1300" dirty="0">
+                <a:solidFill>
+                  <a:srgbClr val="FFFFFF"/>
+                </a:solidFill>
+              </a:rPr>
+              <a:t>Ledger view</a:t>
+            </a:r>
+            <a:endParaRPr lang="en-US" sz="1300" dirty="0"/>
+          </a:p>
+          <a:p>
+            <a:pPr marL="342900" indent="-342900">
+              <a:spcAft>
+                <a:spcPts val="800"/>
+              </a:spcAft>
+              <a:buSzPct val="100000"/>
+              <a:buChar char="•"/>
+            </a:pPr>
+            <a:r>
+              <a:rPr lang="en-US" sz="1300" dirty="0">
+                <a:solidFill>
+                  <a:srgbClr val="FFFFFF"/>
+                </a:solidFill>
+              </a:rPr>
+              <a:t>Press Verify ledger</a:t>
+            </a:r>
+            <a:endParaRPr lang="en-US" sz="1300" dirty="0"/>
+          </a:p>
+        </p:txBody>
+      </p:sp>
+      <p:sp>
+        <p:nvSpPr>
+          <p:cNvPr id="8" name="Shape 6"/>
+          <p:cNvSpPr/>
+          <p:nvPr/>
+        </p:nvSpPr>
+        <p:spPr>
+          <a:xfrm>
+            <a:off x="4297680" y="1737360"/>
+            <a:ext cx="3520440" cy="3200400"/>
+          </a:xfrm>
+          <a:prstGeom prst="roundRect">
+            <a:avLst>
+              <a:gd name="adj" fmla="val 3429"/>
+            </a:avLst>
+          </a:prstGeom>
+          <a:solidFill>
+            <a:srgbClr val="1E2761"/>
+          </a:solidFill>
+          <a:ln w="12700">
+            <a:solidFill>
+              <a:srgbClr val="1E2761"/>
+            </a:solidFill>
+            <a:prstDash val="solid"/>
+          </a:ln>
+        </p:spPr>
+      </p:sp>
+      <p:sp>
+        <p:nvSpPr>
+          <p:cNvPr id="9" name="Text 7"/>
+          <p:cNvSpPr txBox="1"/>
+          <p:nvPr/>
+        </p:nvSpPr>
+        <p:spPr>
+          <a:xfrm>
+            <a:off x="4572000" y="1920240"/>
+            <a:ext cx="2926080" cy="457200"/>
+          </a:xfrm>
+          <a:prstGeom prst="rect">
+            <a:avLst/>
+          </a:prstGeom>
+          <a:noFill/>
+          <a:ln/>
+        </p:spPr>
+        <p:txBody>
+          <a:bodyPr wrap="square" lIns="0" tIns="0" rIns="0" bIns="0" rtlCol="0" anchor="ctr"/>
+          <a:lstStyle/>
+          <a:p>
+            <a:pPr marL="0" indent="0">
+              <a:buNone/>
+            </a:pPr>
+            <a:r>
+              <a:rPr lang="en-US" sz="1800" b="1" dirty="0">
+                <a:solidFill>
+                  <a:srgbClr val="E9B44C"/>
+                </a:solidFill>
+              </a:rPr>
+              <a:t>Point at</a:t>
+            </a:r>
+            <a:endParaRPr lang="en-US" sz="1800" dirty="0"/>
+          </a:p>
+        </p:txBody>
+      </p:sp>
+      <p:sp>
+        <p:nvSpPr>
+          <p:cNvPr id="10" name="Text 8"/>
+          <p:cNvSpPr txBox="1"/>
+          <p:nvPr/>
+        </p:nvSpPr>
+        <p:spPr>
+          <a:xfrm>
+            <a:off x="4572000" y="2468880"/>
+            <a:ext cx="2971800" cy="2377440"/>
+          </a:xfrm>
+          <a:prstGeom prst="rect">
+            <a:avLst/>
+          </a:prstGeom>
+          <a:noFill/>
+          <a:ln/>
+        </p:spPr>
+        <p:txBody>
+          <a:bodyPr wrap="square" lIns="0" tIns="0" rIns="0" bIns="0" rtlCol="0" anchor="t"/>
+          <a:lstStyle/>
+          <a:p>
+            <a:pPr marL="342900" indent="-342900">
+              <a:spcAft>
+                <a:spcPts val="800"/>
+              </a:spcAft>
+              <a:buSzPct val="100000"/>
+              <a:buChar char="•"/>
+            </a:pPr>
+            <a:r>
+              <a:rPr lang="en-US" sz="1300" dirty="0">
+                <a:solidFill>
+                  <a:srgbClr val="FFFFFF"/>
+                </a:solidFill>
+              </a:rPr>
+              <a:t>Every entry with its snapshot hash, spec hash and code version</a:t>
+            </a:r>
+            <a:endParaRPr lang="en-US" sz="1300" dirty="0"/>
+          </a:p>
+          <a:p>
+            <a:pPr marL="342900" indent="-342900">
+              <a:spcAft>
+                <a:spcPts val="800"/>
+              </a:spcAft>
+              <a:buSzPct val="100000"/>
+              <a:buChar char="•"/>
+            </a:pPr>
+            <a:r>
+              <a:rPr lang="en-US" sz="1300" dirty="0">
+                <a:solidFill>
+                  <a:srgbClr val="FFFFFF"/>
+                </a:solidFill>
+              </a:rPr>
+              <a:t>The replay result: chain intact, entries under the current spec recompute exactly</a:t>
+            </a:r>
+            <a:endParaRPr lang="en-US" sz="1300" dirty="0"/>
+          </a:p>
+          <a:p>
+            <a:pPr marL="342900" indent="-342900">
+              <a:spcAft>
+                <a:spcPts val="800"/>
+              </a:spcAft>
+              <a:buSzPct val="100000"/>
+              <a:buChar char="•"/>
+            </a:pPr>
+            <a:r>
+              <a:rPr lang="en-US" sz="1300" dirty="0">
+                <a:solidFill>
+                  <a:srgbClr val="FFFFFF"/>
+                </a:solidFill>
+              </a:rPr>
+              <a:t>Eight numbered amendments, each with its reason, each a new spec hash pinned in the tests</a:t>
+            </a:r>
+            <a:endParaRPr lang="en-US" sz="1300" dirty="0"/>
+          </a:p>
+        </p:txBody>
+      </p:sp>
+      <p:sp>
+        <p:nvSpPr>
+          <p:cNvPr id="11" name="Shape 9"/>
+          <p:cNvSpPr/>
+          <p:nvPr/>
+        </p:nvSpPr>
+        <p:spPr>
+          <a:xfrm>
+            <a:off x="8046720" y="1737360"/>
+            <a:ext cx="3520440" cy="3200400"/>
+          </a:xfrm>
+          <a:prstGeom prst="roundRect">
+            <a:avLst>
+              <a:gd name="adj" fmla="val 3429"/>
+            </a:avLst>
+          </a:prstGeom>
+          <a:solidFill>
+            <a:srgbClr val="1E2761"/>
+          </a:solidFill>
+          <a:ln w="12700">
+            <a:solidFill>
+              <a:srgbClr val="1E2761"/>
+            </a:solidFill>
+            <a:prstDash val="solid"/>
+          </a:ln>
+        </p:spPr>
+      </p:sp>
+      <p:sp>
+        <p:nvSpPr>
+          <p:cNvPr id="12" name="Text 10"/>
+          <p:cNvSpPr txBox="1"/>
+          <p:nvPr/>
+        </p:nvSpPr>
+        <p:spPr>
+          <a:xfrm>
+            <a:off x="8321040" y="1920240"/>
+            <a:ext cx="2926080" cy="457200"/>
+          </a:xfrm>
+          <a:prstGeom prst="rect">
+            <a:avLst/>
+          </a:prstGeom>
+          <a:noFill/>
+          <a:ln/>
+        </p:spPr>
+        <p:txBody>
+          <a:bodyPr wrap="square" lIns="0" tIns="0" rIns="0" bIns="0" rtlCol="0" anchor="ctr"/>
+          <a:lstStyle/>
+          <a:p>
+            <a:pPr marL="0" indent="0">
+              <a:buNone/>
+            </a:pPr>
+            <a:r>
+              <a:rPr lang="en-US" sz="1800" b="1" dirty="0">
+                <a:solidFill>
+                  <a:srgbClr val="E9B44C"/>
+                </a:solidFill>
+              </a:rPr>
+              <a:t>Say</a:t>
+            </a:r>
+            <a:endParaRPr lang="en-US" sz="1800" dirty="0"/>
+          </a:p>
+        </p:txBody>
+      </p:sp>
+      <p:sp>
+        <p:nvSpPr>
+          <p:cNvPr id="13" name="Text 11"/>
+          <p:cNvSpPr txBox="1"/>
+          <p:nvPr/>
+        </p:nvSpPr>
+        <p:spPr>
+          <a:xfrm>
+            <a:off x="8321040" y="2468880"/>
+            <a:ext cx="2971800" cy="2377440"/>
+          </a:xfrm>
+          <a:prstGeom prst="rect">
+            <a:avLst/>
+          </a:prstGeom>
+          <a:noFill/>
+          <a:ln/>
+        </p:spPr>
+        <p:txBody>
+          <a:bodyPr wrap="square" lIns="0" tIns="0" rIns="0" bIns="0" rtlCol="0" anchor="t"/>
+          <a:lstStyle/>
+          <a:p>
+            <a:pPr marL="342900" indent="-342900">
+              <a:spcAft>
+                <a:spcPts val="800"/>
+              </a:spcAft>
+              <a:buSzPct val="100000"/>
+              <a:buChar char="•"/>
+            </a:pPr>
+            <a:r>
+              <a:rPr lang="en-US" sz="1300" dirty="0">
+                <a:solidFill>
+                  <a:srgbClr val="FFFFFF"/>
+                </a:solidFill>
+              </a:rPr>
+              <a:t>Nothing in this ledger can be edited or deleted without the chain breaking.</a:t>
+            </a:r>
+            <a:endParaRPr lang="en-US" sz="1300" dirty="0"/>
+          </a:p>
+          <a:p>
+            <a:pPr marL="342900" indent="-342900">
+              <a:spcAft>
+                <a:spcPts val="800"/>
+              </a:spcAft>
+              <a:buSzPct val="100000"/>
+              <a:buChar char="•"/>
+            </a:pPr>
+            <a:r>
+              <a:rPr lang="en-US" sz="1300" dirty="0">
+                <a:solidFill>
+                  <a:srgbClr val="FFFFFF"/>
+                </a:solidFill>
+              </a:rPr>
+              <a:t>Any entry can be recomputed from its snapshot. That is what auditable means here.</a:t>
+            </a:r>
+            <a:endParaRPr lang="en-US" sz="1300" dirty="0"/>
+          </a:p>
+        </p:txBody>
+      </p:sp>
+    </p:spTree>
+  </p:cSld>
+  <p:clrMapOvr>
+    <a:masterClrMapping/>
+  </p:clrMapOvr>
+</p:sld>
+</file>
+
+<file path=ppt/slides/slide18.xml><?xml version="1.0" encoding="utf-8"?>
+<p:sld xmlns:a="http://schemas.openxmlformats.org/drawingml/2006/main" xmlns:r="http://schemas.openxmlformats.org/officeDocument/2006/relationships" xmlns:p="http://schemas.openxmlformats.org/presentationml/2006/main">
+  <p:cSld>
+    <p:spTree>
+      <p:nvGrpSpPr>
+        <p:cNvPr id="1" name=""/>
+        <p:cNvGrpSpPr/>
+        <p:nvPr/>
+      </p:nvGrpSpPr>
+      <p:grpSpPr>
+        <a:xfrm>
+          <a:off x="0" y="0"/>
+          <a:ext cx="0" cy="0"/>
+          <a:chOff x="0" y="0"/>
+          <a:chExt cx="0" cy="0"/>
+        </a:xfrm>
+      </p:grpSpPr>
+      <p:sp>
+        <p:nvSpPr>
+          <p:cNvPr id="2" name="Text 0"/>
+          <p:cNvSpPr>
+            <a:spLocks noGrp="1"/>
+          </p:cNvSpPr>
+          <p:nvPr>
+            <p:ph type="title" idx="100" hasCustomPrompt="1"/>
+          </p:nvPr>
+        </p:nvSpPr>
+        <p:spPr>
+          <a:xfrm>
             <a:off x="548640" y="411480"/>
             <a:ext cx="11091672" cy="822960"/>
           </a:xfrm>
@@ -10295,1528 +11698,62 @@
                   <a:schemeClr val="tx2"/>
                 </a:solidFill>
               </a:rPr>
-              <a:t>What the specialists said on 28 October</a:t>
+              <a:t>What comes next</a:t>
             </a:r>
             <a:endParaRPr lang="en-US" sz="3200" dirty="0"/>
           </a:p>
         </p:txBody>
       </p:sp>
-      <p:graphicFrame>
-        <p:nvGraphicFramePr>
-          <p:cNvPr id="16" name="Table 0"/>
-          <p:cNvGraphicFramePr>
-            <a:graphicFrameLocks noGrp="1"/>
-          </p:cNvGraphicFramePr>
-          <p:nvPr>
-            <p:extLst>
-              <p:ext uri="{D42A27DB-BD31-4B8C-83A1-F6EECF244321}">
-                <p14:modId xmlns:p14="http://schemas.microsoft.com/office/powerpoint/2010/main" val="1579011935"/>
-              </p:ext>
-            </p:extLst>
-          </p:nvPr>
-        </p:nvGraphicFramePr>
-        <p:xfrm>
-          <a:off x="548640" y="1417320"/>
-          <a:ext cx="6766560" cy="3017520"/>
-        </p:xfrm>
-        <a:graphic>
-          <a:graphicData uri="http://schemas.openxmlformats.org/drawingml/2006/table">
-            <a:tbl>
-              <a:tblPr/>
-              <a:tblGrid>
-                <a:gridCol w="1737360">
-                  <a:extLst>
-                    <a:ext uri="{9D8B030D-6E8A-4147-A177-3AD203B41FA5}">
-                      <a16:colId xmlns:a16="http://schemas.microsoft.com/office/drawing/2014/main" val="20000"/>
-                    </a:ext>
-                  </a:extLst>
-                </a:gridCol>
-                <a:gridCol w="2743200">
-                  <a:extLst>
-                    <a:ext uri="{9D8B030D-6E8A-4147-A177-3AD203B41FA5}">
-                      <a16:colId xmlns:a16="http://schemas.microsoft.com/office/drawing/2014/main" val="20001"/>
-                    </a:ext>
-                  </a:extLst>
-                </a:gridCol>
-                <a:gridCol w="1280160">
-                  <a:extLst>
-                    <a:ext uri="{9D8B030D-6E8A-4147-A177-3AD203B41FA5}">
-                      <a16:colId xmlns:a16="http://schemas.microsoft.com/office/drawing/2014/main" val="20002"/>
-                    </a:ext>
-                  </a:extLst>
-                </a:gridCol>
-                <a:gridCol w="1005840">
-                  <a:extLst>
-                    <a:ext uri="{9D8B030D-6E8A-4147-A177-3AD203B41FA5}">
-                      <a16:colId xmlns:a16="http://schemas.microsoft.com/office/drawing/2014/main" val="20003"/>
-                    </a:ext>
-                  </a:extLst>
-                </a:gridCol>
-              </a:tblGrid>
-              <a:tr h="502920">
-                <a:tc>
-                  <a:txBody>
-                    <a:bodyPr/>
-                    <a:lstStyle/>
-                    <a:p>
-                      <a:pPr marL="0" indent="0">
-                        <a:buNone/>
-                      </a:pPr>
-                      <a:r>
-                        <a:rPr lang="en-US" sz="1150" b="1" dirty="0">
-                          <a:solidFill>
-                            <a:srgbClr val="FFFFFF"/>
-                          </a:solidFill>
-                        </a:rPr>
-                        <a:t>Analyst</a:t>
-                      </a:r>
-                      <a:endParaRPr lang="en-US" sz="1150" dirty="0"/>
-                    </a:p>
-                  </a:txBody>
-                  <a:tcPr marL="54864" marR="54864" marT="54864" marB="54864" anchor="ctr">
-                    <a:lnL w="6350" cap="flat" cmpd="sng" algn="ctr">
-                      <a:solidFill>
-                        <a:srgbClr val="D5DBE5"/>
-                      </a:solidFill>
-                      <a:prstDash val="solid"/>
-                      <a:round/>
-                      <a:headEnd type="none" w="med" len="med"/>
-                      <a:tailEnd type="none" w="med" len="med"/>
-                    </a:lnL>
-                    <a:lnR w="6350" cap="flat" cmpd="sng" algn="ctr">
-                      <a:solidFill>
-                        <a:srgbClr val="D5DBE5"/>
-                      </a:solidFill>
-                      <a:prstDash val="solid"/>
-                      <a:round/>
-                      <a:headEnd type="none" w="med" len="med"/>
-                      <a:tailEnd type="none" w="med" len="med"/>
-                    </a:lnR>
-                    <a:lnT w="6350" cap="flat" cmpd="sng" algn="ctr">
-                      <a:solidFill>
-                        <a:srgbClr val="D5DBE5"/>
-                      </a:solidFill>
-                      <a:prstDash val="solid"/>
-                      <a:round/>
-                      <a:headEnd type="none" w="med" len="med"/>
-                      <a:tailEnd type="none" w="med" len="med"/>
-                    </a:lnT>
-                    <a:lnB w="6350" cap="flat" cmpd="sng" algn="ctr">
-                      <a:solidFill>
-                        <a:srgbClr val="D5DBE5"/>
-                      </a:solidFill>
-                      <a:prstDash val="solid"/>
-                      <a:round/>
-                      <a:headEnd type="none" w="med" len="med"/>
-                      <a:tailEnd type="none" w="med" len="med"/>
-                    </a:lnB>
-                    <a:solidFill>
-                      <a:srgbClr val="1E2761"/>
-                    </a:solidFill>
-                  </a:tcPr>
-                </a:tc>
-                <a:tc>
-                  <a:txBody>
-                    <a:bodyPr/>
-                    <a:lstStyle/>
-                    <a:p>
-                      <a:pPr marL="0" indent="0">
-                        <a:buNone/>
-                      </a:pPr>
-                      <a:r>
-                        <a:rPr lang="en-US" sz="1150" b="1" dirty="0">
-                          <a:solidFill>
-                            <a:srgbClr val="FFFFFF"/>
-                          </a:solidFill>
-                        </a:rPr>
-                        <a:t>Reads</a:t>
-                      </a:r>
-                      <a:endParaRPr lang="en-US" sz="1150" dirty="0"/>
-                    </a:p>
-                  </a:txBody>
-                  <a:tcPr marL="54864" marR="54864" marT="54864" marB="54864" anchor="ctr">
-                    <a:lnL w="6350" cap="flat" cmpd="sng" algn="ctr">
-                      <a:solidFill>
-                        <a:srgbClr val="D5DBE5"/>
-                      </a:solidFill>
-                      <a:prstDash val="solid"/>
-                      <a:round/>
-                      <a:headEnd type="none" w="med" len="med"/>
-                      <a:tailEnd type="none" w="med" len="med"/>
-                    </a:lnL>
-                    <a:lnR w="6350" cap="flat" cmpd="sng" algn="ctr">
-                      <a:solidFill>
-                        <a:srgbClr val="D5DBE5"/>
-                      </a:solidFill>
-                      <a:prstDash val="solid"/>
-                      <a:round/>
-                      <a:headEnd type="none" w="med" len="med"/>
-                      <a:tailEnd type="none" w="med" len="med"/>
-                    </a:lnR>
-                    <a:lnT w="6350" cap="flat" cmpd="sng" algn="ctr">
-                      <a:solidFill>
-                        <a:srgbClr val="D5DBE5"/>
-                      </a:solidFill>
-                      <a:prstDash val="solid"/>
-                      <a:round/>
-                      <a:headEnd type="none" w="med" len="med"/>
-                      <a:tailEnd type="none" w="med" len="med"/>
-                    </a:lnT>
-                    <a:lnB w="6350" cap="flat" cmpd="sng" algn="ctr">
-                      <a:solidFill>
-                        <a:srgbClr val="D5DBE5"/>
-                      </a:solidFill>
-                      <a:prstDash val="solid"/>
-                      <a:round/>
-                      <a:headEnd type="none" w="med" len="med"/>
-                      <a:tailEnd type="none" w="med" len="med"/>
-                    </a:lnB>
-                    <a:solidFill>
-                      <a:srgbClr val="1E2761"/>
-                    </a:solidFill>
-                  </a:tcPr>
-                </a:tc>
-                <a:tc>
-                  <a:txBody>
-                    <a:bodyPr/>
-                    <a:lstStyle/>
-                    <a:p>
-                      <a:pPr marL="0" indent="0" algn="ctr">
-                        <a:buNone/>
-                      </a:pPr>
-                      <a:r>
-                        <a:rPr lang="en-US" sz="1150" b="1" dirty="0">
-                          <a:solidFill>
-                            <a:srgbClr val="FFFFFF"/>
-                          </a:solidFill>
-                        </a:rPr>
-                        <a:t>Lean (5 runs)</a:t>
-                      </a:r>
-                      <a:endParaRPr lang="en-US" sz="1150" dirty="0"/>
-                    </a:p>
-                  </a:txBody>
-                  <a:tcPr marL="54864" marR="54864" marT="54864" marB="54864" anchor="ctr">
-                    <a:lnL w="6350" cap="flat" cmpd="sng" algn="ctr">
-                      <a:solidFill>
-                        <a:srgbClr val="D5DBE5"/>
-                      </a:solidFill>
-                      <a:prstDash val="solid"/>
-                      <a:round/>
-                      <a:headEnd type="none" w="med" len="med"/>
-                      <a:tailEnd type="none" w="med" len="med"/>
-                    </a:lnL>
-                    <a:lnR w="6350" cap="flat" cmpd="sng" algn="ctr">
-                      <a:solidFill>
-                        <a:srgbClr val="D5DBE5"/>
-                      </a:solidFill>
-                      <a:prstDash val="solid"/>
-                      <a:round/>
-                      <a:headEnd type="none" w="med" len="med"/>
-                      <a:tailEnd type="none" w="med" len="med"/>
-                    </a:lnR>
-                    <a:lnT w="6350" cap="flat" cmpd="sng" algn="ctr">
-                      <a:solidFill>
-                        <a:srgbClr val="D5DBE5"/>
-                      </a:solidFill>
-                      <a:prstDash val="solid"/>
-                      <a:round/>
-                      <a:headEnd type="none" w="med" len="med"/>
-                      <a:tailEnd type="none" w="med" len="med"/>
-                    </a:lnT>
-                    <a:lnB w="6350" cap="flat" cmpd="sng" algn="ctr">
-                      <a:solidFill>
-                        <a:srgbClr val="D5DBE5"/>
-                      </a:solidFill>
-                      <a:prstDash val="solid"/>
-                      <a:round/>
-                      <a:headEnd type="none" w="med" len="med"/>
-                      <a:tailEnd type="none" w="med" len="med"/>
-                    </a:lnB>
-                    <a:solidFill>
-                      <a:srgbClr val="1E2761"/>
-                    </a:solidFill>
-                  </a:tcPr>
-                </a:tc>
-                <a:tc>
-                  <a:txBody>
-                    <a:bodyPr/>
-                    <a:lstStyle/>
-                    <a:p>
-                      <a:pPr marL="0" indent="0" algn="ctr">
-                        <a:buNone/>
-                      </a:pPr>
-                      <a:r>
-                        <a:rPr lang="en-US" sz="1150" b="1" dirty="0">
-                          <a:solidFill>
-                            <a:srgbClr val="FFFFFF"/>
-                          </a:solidFill>
-                        </a:rPr>
-                        <a:t>Verified</a:t>
-                      </a:r>
-                      <a:endParaRPr lang="en-US" sz="1150" dirty="0"/>
-                    </a:p>
-                  </a:txBody>
-                  <a:tcPr marL="54864" marR="54864" marT="54864" marB="54864" anchor="ctr">
-                    <a:lnL w="6350" cap="flat" cmpd="sng" algn="ctr">
-                      <a:solidFill>
-                        <a:srgbClr val="D5DBE5"/>
-                      </a:solidFill>
-                      <a:prstDash val="solid"/>
-                      <a:round/>
-                      <a:headEnd type="none" w="med" len="med"/>
-                      <a:tailEnd type="none" w="med" len="med"/>
-                    </a:lnL>
-                    <a:lnR w="6350" cap="flat" cmpd="sng" algn="ctr">
-                      <a:solidFill>
-                        <a:srgbClr val="D5DBE5"/>
-                      </a:solidFill>
-                      <a:prstDash val="solid"/>
-                      <a:round/>
-                      <a:headEnd type="none" w="med" len="med"/>
-                      <a:tailEnd type="none" w="med" len="med"/>
-                    </a:lnR>
-                    <a:lnT w="6350" cap="flat" cmpd="sng" algn="ctr">
-                      <a:solidFill>
-                        <a:srgbClr val="D5DBE5"/>
-                      </a:solidFill>
-                      <a:prstDash val="solid"/>
-                      <a:round/>
-                      <a:headEnd type="none" w="med" len="med"/>
-                      <a:tailEnd type="none" w="med" len="med"/>
-                    </a:lnT>
-                    <a:lnB w="6350" cap="flat" cmpd="sng" algn="ctr">
-                      <a:solidFill>
-                        <a:srgbClr val="D5DBE5"/>
-                      </a:solidFill>
-                      <a:prstDash val="solid"/>
-                      <a:round/>
-                      <a:headEnd type="none" w="med" len="med"/>
-                      <a:tailEnd type="none" w="med" len="med"/>
-                    </a:lnB>
-                    <a:solidFill>
-                      <a:srgbClr val="1E2761"/>
-                    </a:solidFill>
-                  </a:tcPr>
-                </a:tc>
-                <a:extLst>
-                  <a:ext uri="{0D108BD9-81ED-4DB2-BD59-A6C34878D82A}">
-                    <a16:rowId xmlns:a16="http://schemas.microsoft.com/office/drawing/2014/main" val="10000"/>
-                  </a:ext>
-                </a:extLst>
-              </a:tr>
-              <a:tr h="502920">
-                <a:tc>
-                  <a:txBody>
-                    <a:bodyPr/>
-                    <a:lstStyle/>
-                    <a:p>
-                      <a:pPr marL="0" indent="0">
-                        <a:buNone/>
-                      </a:pPr>
-                      <a:r>
-                        <a:rPr lang="en-US" sz="1150" dirty="0">
-                          <a:solidFill>
-                            <a:srgbClr val="1B1F2A"/>
-                          </a:solidFill>
-                        </a:rPr>
-                        <a:t>4 Communications</a:t>
-                      </a:r>
-                      <a:endParaRPr lang="en-US" sz="1150" dirty="0"/>
-                    </a:p>
-                  </a:txBody>
-                  <a:tcPr marL="54864" marR="54864" marT="54864" marB="54864" anchor="ctr">
-                    <a:lnL w="6350" cap="flat" cmpd="sng" algn="ctr">
-                      <a:solidFill>
-                        <a:srgbClr val="D5DBE5"/>
-                      </a:solidFill>
-                      <a:prstDash val="solid"/>
-                      <a:round/>
-                      <a:headEnd type="none" w="med" len="med"/>
-                      <a:tailEnd type="none" w="med" len="med"/>
-                    </a:lnL>
-                    <a:lnR w="6350" cap="flat" cmpd="sng" algn="ctr">
-                      <a:solidFill>
-                        <a:srgbClr val="D5DBE5"/>
-                      </a:solidFill>
-                      <a:prstDash val="solid"/>
-                      <a:round/>
-                      <a:headEnd type="none" w="med" len="med"/>
-                      <a:tailEnd type="none" w="med" len="med"/>
-                    </a:lnR>
-                    <a:lnT w="6350" cap="flat" cmpd="sng" algn="ctr">
-                      <a:solidFill>
-                        <a:srgbClr val="D5DBE5"/>
-                      </a:solidFill>
-                      <a:prstDash val="solid"/>
-                      <a:round/>
-                      <a:headEnd type="none" w="med" len="med"/>
-                      <a:tailEnd type="none" w="med" len="med"/>
-                    </a:lnT>
-                    <a:lnB w="6350" cap="flat" cmpd="sng" algn="ctr">
-                      <a:solidFill>
-                        <a:srgbClr val="D5DBE5"/>
-                      </a:solidFill>
-                      <a:prstDash val="solid"/>
-                      <a:round/>
-                      <a:headEnd type="none" w="med" len="med"/>
-                      <a:tailEnd type="none" w="med" len="med"/>
-                    </a:lnB>
-                  </a:tcPr>
-                </a:tc>
-                <a:tc>
-                  <a:txBody>
-                    <a:bodyPr/>
-                    <a:lstStyle/>
-                    <a:p>
-                      <a:pPr marL="0" indent="0">
-                        <a:buNone/>
-                      </a:pPr>
-                      <a:r>
-                        <a:rPr lang="en-US" sz="1150" dirty="0">
-                          <a:solidFill>
-                            <a:srgbClr val="1B1F2A"/>
-                          </a:solidFill>
-                        </a:rPr>
-                        <a:t>Both statements, minutes, transcript, speeches, tone pre-read</a:t>
-                      </a:r>
-                      <a:endParaRPr lang="en-US" sz="1150" dirty="0"/>
-                    </a:p>
-                  </a:txBody>
-                  <a:tcPr marL="54864" marR="54864" marT="54864" marB="54864" anchor="ctr">
-                    <a:lnL w="6350" cap="flat" cmpd="sng" algn="ctr">
-                      <a:solidFill>
-                        <a:srgbClr val="D5DBE5"/>
-                      </a:solidFill>
-                      <a:prstDash val="solid"/>
-                      <a:round/>
-                      <a:headEnd type="none" w="med" len="med"/>
-                      <a:tailEnd type="none" w="med" len="med"/>
-                    </a:lnL>
-                    <a:lnR w="6350" cap="flat" cmpd="sng" algn="ctr">
-                      <a:solidFill>
-                        <a:srgbClr val="D5DBE5"/>
-                      </a:solidFill>
-                      <a:prstDash val="solid"/>
-                      <a:round/>
-                      <a:headEnd type="none" w="med" len="med"/>
-                      <a:tailEnd type="none" w="med" len="med"/>
-                    </a:lnR>
-                    <a:lnT w="6350" cap="flat" cmpd="sng" algn="ctr">
-                      <a:solidFill>
-                        <a:srgbClr val="D5DBE5"/>
-                      </a:solidFill>
-                      <a:prstDash val="solid"/>
-                      <a:round/>
-                      <a:headEnd type="none" w="med" len="med"/>
-                      <a:tailEnd type="none" w="med" len="med"/>
-                    </a:lnT>
-                    <a:lnB w="6350" cap="flat" cmpd="sng" algn="ctr">
-                      <a:solidFill>
-                        <a:srgbClr val="D5DBE5"/>
-                      </a:solidFill>
-                      <a:prstDash val="solid"/>
-                      <a:round/>
-                      <a:headEnd type="none" w="med" len="med"/>
-                      <a:tailEnd type="none" w="med" len="med"/>
-                    </a:lnB>
-                  </a:tcPr>
-                </a:tc>
-                <a:tc>
-                  <a:txBody>
-                    <a:bodyPr/>
-                    <a:lstStyle/>
-                    <a:p>
-                      <a:pPr marL="0" indent="0" algn="ctr">
-                        <a:buNone/>
-                      </a:pPr>
-                      <a:r>
-                        <a:rPr lang="en-US" sz="1150" b="1" dirty="0">
-                          <a:solidFill>
-                            <a:srgbClr val="C8553D"/>
-                          </a:solidFill>
-                        </a:rPr>
-                        <a:t>+6.0 bp hawkish</a:t>
-                      </a:r>
-                      <a:endParaRPr lang="en-US" sz="1150" dirty="0"/>
-                    </a:p>
-                  </a:txBody>
-                  <a:tcPr marL="54864" marR="54864" marT="54864" marB="54864" anchor="ctr">
-                    <a:lnL w="6350" cap="flat" cmpd="sng" algn="ctr">
-                      <a:solidFill>
-                        <a:srgbClr val="D5DBE5"/>
-                      </a:solidFill>
-                      <a:prstDash val="solid"/>
-                      <a:round/>
-                      <a:headEnd type="none" w="med" len="med"/>
-                      <a:tailEnd type="none" w="med" len="med"/>
-                    </a:lnL>
-                    <a:lnR w="6350" cap="flat" cmpd="sng" algn="ctr">
-                      <a:solidFill>
-                        <a:srgbClr val="D5DBE5"/>
-                      </a:solidFill>
-                      <a:prstDash val="solid"/>
-                      <a:round/>
-                      <a:headEnd type="none" w="med" len="med"/>
-                      <a:tailEnd type="none" w="med" len="med"/>
-                    </a:lnR>
-                    <a:lnT w="6350" cap="flat" cmpd="sng" algn="ctr">
-                      <a:solidFill>
-                        <a:srgbClr val="D5DBE5"/>
-                      </a:solidFill>
-                      <a:prstDash val="solid"/>
-                      <a:round/>
-                      <a:headEnd type="none" w="med" len="med"/>
-                      <a:tailEnd type="none" w="med" len="med"/>
-                    </a:lnT>
-                    <a:lnB w="6350" cap="flat" cmpd="sng" algn="ctr">
-                      <a:solidFill>
-                        <a:srgbClr val="D5DBE5"/>
-                      </a:solidFill>
-                      <a:prstDash val="solid"/>
-                      <a:round/>
-                      <a:headEnd type="none" w="med" len="med"/>
-                      <a:tailEnd type="none" w="med" len="med"/>
-                    </a:lnB>
-                  </a:tcPr>
-                </a:tc>
-                <a:tc>
-                  <a:txBody>
-                    <a:bodyPr/>
-                    <a:lstStyle/>
-                    <a:p>
-                      <a:pPr marL="0" indent="0" algn="ctr">
-                        <a:buNone/>
-                      </a:pPr>
-                      <a:r>
-                        <a:rPr lang="en-US" sz="1150" dirty="0">
-                          <a:solidFill>
-                            <a:srgbClr val="1B1F2A"/>
-                          </a:solidFill>
-                        </a:rPr>
-                        <a:t>100%, 0 leaked</a:t>
-                      </a:r>
-                      <a:endParaRPr lang="en-US" sz="1150" dirty="0"/>
-                    </a:p>
-                  </a:txBody>
-                  <a:tcPr marL="54864" marR="54864" marT="54864" marB="54864" anchor="ctr">
-                    <a:lnL w="6350" cap="flat" cmpd="sng" algn="ctr">
-                      <a:solidFill>
-                        <a:srgbClr val="D5DBE5"/>
-                      </a:solidFill>
-                      <a:prstDash val="solid"/>
-                      <a:round/>
-                      <a:headEnd type="none" w="med" len="med"/>
-                      <a:tailEnd type="none" w="med" len="med"/>
-                    </a:lnL>
-                    <a:lnR w="6350" cap="flat" cmpd="sng" algn="ctr">
-                      <a:solidFill>
-                        <a:srgbClr val="D5DBE5"/>
-                      </a:solidFill>
-                      <a:prstDash val="solid"/>
-                      <a:round/>
-                      <a:headEnd type="none" w="med" len="med"/>
-                      <a:tailEnd type="none" w="med" len="med"/>
-                    </a:lnR>
-                    <a:lnT w="6350" cap="flat" cmpd="sng" algn="ctr">
-                      <a:solidFill>
-                        <a:srgbClr val="D5DBE5"/>
-                      </a:solidFill>
-                      <a:prstDash val="solid"/>
-                      <a:round/>
-                      <a:headEnd type="none" w="med" len="med"/>
-                      <a:tailEnd type="none" w="med" len="med"/>
-                    </a:lnT>
-                    <a:lnB w="6350" cap="flat" cmpd="sng" algn="ctr">
-                      <a:solidFill>
-                        <a:srgbClr val="D5DBE5"/>
-                      </a:solidFill>
-                      <a:prstDash val="solid"/>
-                      <a:round/>
-                      <a:headEnd type="none" w="med" len="med"/>
-                      <a:tailEnd type="none" w="med" len="med"/>
-                    </a:lnB>
-                  </a:tcPr>
-                </a:tc>
-                <a:extLst>
-                  <a:ext uri="{0D108BD9-81ED-4DB2-BD59-A6C34878D82A}">
-                    <a16:rowId xmlns:a16="http://schemas.microsoft.com/office/drawing/2014/main" val="10001"/>
-                  </a:ext>
-                </a:extLst>
-              </a:tr>
-              <a:tr h="502920">
-                <a:tc>
-                  <a:txBody>
-                    <a:bodyPr/>
-                    <a:lstStyle/>
-                    <a:p>
-                      <a:pPr marL="0" indent="0">
-                        <a:buNone/>
-                      </a:pPr>
-                      <a:r>
-                        <a:rPr lang="en-US" sz="1150" dirty="0">
-                          <a:solidFill>
-                            <a:srgbClr val="1B1F2A"/>
-                          </a:solidFill>
-                        </a:rPr>
-                        <a:t>5 Minutes digest</a:t>
-                      </a:r>
-                      <a:endParaRPr lang="en-US" sz="1150" dirty="0"/>
-                    </a:p>
-                  </a:txBody>
-                  <a:tcPr marL="54864" marR="54864" marT="54864" marB="54864" anchor="ctr">
-                    <a:lnL w="6350" cap="flat" cmpd="sng" algn="ctr">
-                      <a:solidFill>
-                        <a:srgbClr val="D5DBE5"/>
-                      </a:solidFill>
-                      <a:prstDash val="solid"/>
-                      <a:round/>
-                      <a:headEnd type="none" w="med" len="med"/>
-                      <a:tailEnd type="none" w="med" len="med"/>
-                    </a:lnL>
-                    <a:lnR w="6350" cap="flat" cmpd="sng" algn="ctr">
-                      <a:solidFill>
-                        <a:srgbClr val="D5DBE5"/>
-                      </a:solidFill>
-                      <a:prstDash val="solid"/>
-                      <a:round/>
-                      <a:headEnd type="none" w="med" len="med"/>
-                      <a:tailEnd type="none" w="med" len="med"/>
-                    </a:lnR>
-                    <a:lnT w="6350" cap="flat" cmpd="sng" algn="ctr">
-                      <a:solidFill>
-                        <a:srgbClr val="D5DBE5"/>
-                      </a:solidFill>
-                      <a:prstDash val="solid"/>
-                      <a:round/>
-                      <a:headEnd type="none" w="med" len="med"/>
-                      <a:tailEnd type="none" w="med" len="med"/>
-                    </a:lnT>
-                    <a:lnB w="6350" cap="flat" cmpd="sng" algn="ctr">
-                      <a:solidFill>
-                        <a:srgbClr val="D5DBE5"/>
-                      </a:solidFill>
-                      <a:prstDash val="solid"/>
-                      <a:round/>
-                      <a:headEnd type="none" w="med" len="med"/>
-                      <a:tailEnd type="none" w="med" len="med"/>
-                    </a:lnB>
-                  </a:tcPr>
-                </a:tc>
-                <a:tc>
-                  <a:txBody>
-                    <a:bodyPr/>
-                    <a:lstStyle/>
-                    <a:p>
-                      <a:pPr marL="0" indent="0">
-                        <a:buNone/>
-                      </a:pPr>
-                      <a:r>
-                        <a:rPr lang="en-US" sz="1150" dirty="0">
-                          <a:solidFill>
-                            <a:srgbClr val="1B1F2A"/>
-                          </a:solidFill>
-                        </a:rPr>
-                        <a:t>The minutes only</a:t>
-                      </a:r>
-                      <a:endParaRPr lang="en-US" sz="1150" dirty="0"/>
-                    </a:p>
-                  </a:txBody>
-                  <a:tcPr marL="54864" marR="54864" marT="54864" marB="54864" anchor="ctr">
-                    <a:lnL w="6350" cap="flat" cmpd="sng" algn="ctr">
-                      <a:solidFill>
-                        <a:srgbClr val="D5DBE5"/>
-                      </a:solidFill>
-                      <a:prstDash val="solid"/>
-                      <a:round/>
-                      <a:headEnd type="none" w="med" len="med"/>
-                      <a:tailEnd type="none" w="med" len="med"/>
-                    </a:lnL>
-                    <a:lnR w="6350" cap="flat" cmpd="sng" algn="ctr">
-                      <a:solidFill>
-                        <a:srgbClr val="D5DBE5"/>
-                      </a:solidFill>
-                      <a:prstDash val="solid"/>
-                      <a:round/>
-                      <a:headEnd type="none" w="med" len="med"/>
-                      <a:tailEnd type="none" w="med" len="med"/>
-                    </a:lnR>
-                    <a:lnT w="6350" cap="flat" cmpd="sng" algn="ctr">
-                      <a:solidFill>
-                        <a:srgbClr val="D5DBE5"/>
-                      </a:solidFill>
-                      <a:prstDash val="solid"/>
-                      <a:round/>
-                      <a:headEnd type="none" w="med" len="med"/>
-                      <a:tailEnd type="none" w="med" len="med"/>
-                    </a:lnT>
-                    <a:lnB w="6350" cap="flat" cmpd="sng" algn="ctr">
-                      <a:solidFill>
-                        <a:srgbClr val="D5DBE5"/>
-                      </a:solidFill>
-                      <a:prstDash val="solid"/>
-                      <a:round/>
-                      <a:headEnd type="none" w="med" len="med"/>
-                      <a:tailEnd type="none" w="med" len="med"/>
-                    </a:lnB>
-                  </a:tcPr>
-                </a:tc>
-                <a:tc>
-                  <a:txBody>
-                    <a:bodyPr/>
-                    <a:lstStyle/>
-                    <a:p>
-                      <a:pPr marL="0" indent="0" algn="ctr">
-                        <a:buNone/>
-                      </a:pPr>
-                      <a:r>
-                        <a:rPr lang="en-US" sz="1150" b="1" dirty="0">
-                          <a:solidFill>
-                            <a:srgbClr val="C8553D"/>
-                          </a:solidFill>
-                        </a:rPr>
-                        <a:t>+6.2 bp hawkish</a:t>
-                      </a:r>
-                      <a:endParaRPr lang="en-US" sz="1150" dirty="0"/>
-                    </a:p>
-                  </a:txBody>
-                  <a:tcPr marL="54864" marR="54864" marT="54864" marB="54864" anchor="ctr">
-                    <a:lnL w="6350" cap="flat" cmpd="sng" algn="ctr">
-                      <a:solidFill>
-                        <a:srgbClr val="D5DBE5"/>
-                      </a:solidFill>
-                      <a:prstDash val="solid"/>
-                      <a:round/>
-                      <a:headEnd type="none" w="med" len="med"/>
-                      <a:tailEnd type="none" w="med" len="med"/>
-                    </a:lnL>
-                    <a:lnR w="6350" cap="flat" cmpd="sng" algn="ctr">
-                      <a:solidFill>
-                        <a:srgbClr val="D5DBE5"/>
-                      </a:solidFill>
-                      <a:prstDash val="solid"/>
-                      <a:round/>
-                      <a:headEnd type="none" w="med" len="med"/>
-                      <a:tailEnd type="none" w="med" len="med"/>
-                    </a:lnR>
-                    <a:lnT w="6350" cap="flat" cmpd="sng" algn="ctr">
-                      <a:solidFill>
-                        <a:srgbClr val="D5DBE5"/>
-                      </a:solidFill>
-                      <a:prstDash val="solid"/>
-                      <a:round/>
-                      <a:headEnd type="none" w="med" len="med"/>
-                      <a:tailEnd type="none" w="med" len="med"/>
-                    </a:lnT>
-                    <a:lnB w="6350" cap="flat" cmpd="sng" algn="ctr">
-                      <a:solidFill>
-                        <a:srgbClr val="D5DBE5"/>
-                      </a:solidFill>
-                      <a:prstDash val="solid"/>
-                      <a:round/>
-                      <a:headEnd type="none" w="med" len="med"/>
-                      <a:tailEnd type="none" w="med" len="med"/>
-                    </a:lnB>
-                  </a:tcPr>
-                </a:tc>
-                <a:tc>
-                  <a:txBody>
-                    <a:bodyPr/>
-                    <a:lstStyle/>
-                    <a:p>
-                      <a:pPr marL="0" indent="0" algn="ctr">
-                        <a:buNone/>
-                      </a:pPr>
-                      <a:r>
-                        <a:rPr lang="en-US" sz="1150" dirty="0">
-                          <a:solidFill>
-                            <a:srgbClr val="1B1F2A"/>
-                          </a:solidFill>
-                        </a:rPr>
-                        <a:t>100%, 0 leaked</a:t>
-                      </a:r>
-                      <a:endParaRPr lang="en-US" sz="1150" dirty="0"/>
-                    </a:p>
-                  </a:txBody>
-                  <a:tcPr marL="54864" marR="54864" marT="54864" marB="54864" anchor="ctr">
-                    <a:lnL w="6350" cap="flat" cmpd="sng" algn="ctr">
-                      <a:solidFill>
-                        <a:srgbClr val="D5DBE5"/>
-                      </a:solidFill>
-                      <a:prstDash val="solid"/>
-                      <a:round/>
-                      <a:headEnd type="none" w="med" len="med"/>
-                      <a:tailEnd type="none" w="med" len="med"/>
-                    </a:lnL>
-                    <a:lnR w="6350" cap="flat" cmpd="sng" algn="ctr">
-                      <a:solidFill>
-                        <a:srgbClr val="D5DBE5"/>
-                      </a:solidFill>
-                      <a:prstDash val="solid"/>
-                      <a:round/>
-                      <a:headEnd type="none" w="med" len="med"/>
-                      <a:tailEnd type="none" w="med" len="med"/>
-                    </a:lnR>
-                    <a:lnT w="6350" cap="flat" cmpd="sng" algn="ctr">
-                      <a:solidFill>
-                        <a:srgbClr val="D5DBE5"/>
-                      </a:solidFill>
-                      <a:prstDash val="solid"/>
-                      <a:round/>
-                      <a:headEnd type="none" w="med" len="med"/>
-                      <a:tailEnd type="none" w="med" len="med"/>
-                    </a:lnT>
-                    <a:lnB w="6350" cap="flat" cmpd="sng" algn="ctr">
-                      <a:solidFill>
-                        <a:srgbClr val="D5DBE5"/>
-                      </a:solidFill>
-                      <a:prstDash val="solid"/>
-                      <a:round/>
-                      <a:headEnd type="none" w="med" len="med"/>
-                      <a:tailEnd type="none" w="med" len="med"/>
-                    </a:lnB>
-                  </a:tcPr>
-                </a:tc>
-                <a:extLst>
-                  <a:ext uri="{0D108BD9-81ED-4DB2-BD59-A6C34878D82A}">
-                    <a16:rowId xmlns:a16="http://schemas.microsoft.com/office/drawing/2014/main" val="10002"/>
-                  </a:ext>
-                </a:extLst>
-              </a:tr>
-              <a:tr h="502920">
-                <a:tc>
-                  <a:txBody>
-                    <a:bodyPr/>
-                    <a:lstStyle/>
-                    <a:p>
-                      <a:pPr marL="0" indent="0">
-                        <a:buNone/>
-                      </a:pPr>
-                      <a:r>
-                        <a:rPr lang="en-US" sz="1150" dirty="0">
-                          <a:solidFill>
-                            <a:srgbClr val="1B1F2A"/>
-                          </a:solidFill>
-                        </a:rPr>
-                        <a:t>6 Inflation</a:t>
-                      </a:r>
-                      <a:endParaRPr lang="en-US" sz="1150" dirty="0"/>
-                    </a:p>
-                  </a:txBody>
-                  <a:tcPr marL="54864" marR="54864" marT="54864" marB="54864" anchor="ctr">
-                    <a:lnL w="6350" cap="flat" cmpd="sng" algn="ctr">
-                      <a:solidFill>
-                        <a:srgbClr val="D5DBE5"/>
-                      </a:solidFill>
-                      <a:prstDash val="solid"/>
-                      <a:round/>
-                      <a:headEnd type="none" w="med" len="med"/>
-                      <a:tailEnd type="none" w="med" len="med"/>
-                    </a:lnL>
-                    <a:lnR w="6350" cap="flat" cmpd="sng" algn="ctr">
-                      <a:solidFill>
-                        <a:srgbClr val="D5DBE5"/>
-                      </a:solidFill>
-                      <a:prstDash val="solid"/>
-                      <a:round/>
-                      <a:headEnd type="none" w="med" len="med"/>
-                      <a:tailEnd type="none" w="med" len="med"/>
-                    </a:lnR>
-                    <a:lnT w="6350" cap="flat" cmpd="sng" algn="ctr">
-                      <a:solidFill>
-                        <a:srgbClr val="D5DBE5"/>
-                      </a:solidFill>
-                      <a:prstDash val="solid"/>
-                      <a:round/>
-                      <a:headEnd type="none" w="med" len="med"/>
-                      <a:tailEnd type="none" w="med" len="med"/>
-                    </a:lnT>
-                    <a:lnB w="6350" cap="flat" cmpd="sng" algn="ctr">
-                      <a:solidFill>
-                        <a:srgbClr val="D5DBE5"/>
-                      </a:solidFill>
-                      <a:prstDash val="solid"/>
-                      <a:round/>
-                      <a:headEnd type="none" w="med" len="med"/>
-                      <a:tailEnd type="none" w="med" len="med"/>
-                    </a:lnB>
-                  </a:tcPr>
-                </a:tc>
-                <a:tc>
-                  <a:txBody>
-                    <a:bodyPr/>
-                    <a:lstStyle/>
-                    <a:p>
-                      <a:pPr marL="0" indent="0">
-                        <a:buNone/>
-                      </a:pPr>
-                      <a:r>
-                        <a:rPr lang="en-US" sz="1150" dirty="0">
-                          <a:solidFill>
-                            <a:srgbClr val="1B1F2A"/>
-                          </a:solidFill>
-                        </a:rPr>
-                        <a:t>Inflation pre-read, projections, both statements</a:t>
-                      </a:r>
-                      <a:endParaRPr lang="en-US" sz="1150" dirty="0"/>
-                    </a:p>
-                  </a:txBody>
-                  <a:tcPr marL="54864" marR="54864" marT="54864" marB="54864" anchor="ctr">
-                    <a:lnL w="6350" cap="flat" cmpd="sng" algn="ctr">
-                      <a:solidFill>
-                        <a:srgbClr val="D5DBE5"/>
-                      </a:solidFill>
-                      <a:prstDash val="solid"/>
-                      <a:round/>
-                      <a:headEnd type="none" w="med" len="med"/>
-                      <a:tailEnd type="none" w="med" len="med"/>
-                    </a:lnL>
-                    <a:lnR w="6350" cap="flat" cmpd="sng" algn="ctr">
-                      <a:solidFill>
-                        <a:srgbClr val="D5DBE5"/>
-                      </a:solidFill>
-                      <a:prstDash val="solid"/>
-                      <a:round/>
-                      <a:headEnd type="none" w="med" len="med"/>
-                      <a:tailEnd type="none" w="med" len="med"/>
-                    </a:lnR>
-                    <a:lnT w="6350" cap="flat" cmpd="sng" algn="ctr">
-                      <a:solidFill>
-                        <a:srgbClr val="D5DBE5"/>
-                      </a:solidFill>
-                      <a:prstDash val="solid"/>
-                      <a:round/>
-                      <a:headEnd type="none" w="med" len="med"/>
-                      <a:tailEnd type="none" w="med" len="med"/>
-                    </a:lnT>
-                    <a:lnB w="6350" cap="flat" cmpd="sng" algn="ctr">
-                      <a:solidFill>
-                        <a:srgbClr val="D5DBE5"/>
-                      </a:solidFill>
-                      <a:prstDash val="solid"/>
-                      <a:round/>
-                      <a:headEnd type="none" w="med" len="med"/>
-                      <a:tailEnd type="none" w="med" len="med"/>
-                    </a:lnB>
-                  </a:tcPr>
-                </a:tc>
-                <a:tc>
-                  <a:txBody>
-                    <a:bodyPr/>
-                    <a:lstStyle/>
-                    <a:p>
-                      <a:pPr marL="0" indent="0" algn="ctr">
-                        <a:buNone/>
-                      </a:pPr>
-                      <a:r>
-                        <a:rPr lang="en-US" sz="1150" b="1" dirty="0">
-                          <a:solidFill>
-                            <a:srgbClr val="C8553D"/>
-                          </a:solidFill>
-                        </a:rPr>
-                        <a:t>+5.8 bp hawkish</a:t>
-                      </a:r>
-                      <a:endParaRPr lang="en-US" sz="1150" dirty="0"/>
-                    </a:p>
-                  </a:txBody>
-                  <a:tcPr marL="54864" marR="54864" marT="54864" marB="54864" anchor="ctr">
-                    <a:lnL w="6350" cap="flat" cmpd="sng" algn="ctr">
-                      <a:solidFill>
-                        <a:srgbClr val="D5DBE5"/>
-                      </a:solidFill>
-                      <a:prstDash val="solid"/>
-                      <a:round/>
-                      <a:headEnd type="none" w="med" len="med"/>
-                      <a:tailEnd type="none" w="med" len="med"/>
-                    </a:lnL>
-                    <a:lnR w="6350" cap="flat" cmpd="sng" algn="ctr">
-                      <a:solidFill>
-                        <a:srgbClr val="D5DBE5"/>
-                      </a:solidFill>
-                      <a:prstDash val="solid"/>
-                      <a:round/>
-                      <a:headEnd type="none" w="med" len="med"/>
-                      <a:tailEnd type="none" w="med" len="med"/>
-                    </a:lnR>
-                    <a:lnT w="6350" cap="flat" cmpd="sng" algn="ctr">
-                      <a:solidFill>
-                        <a:srgbClr val="D5DBE5"/>
-                      </a:solidFill>
-                      <a:prstDash val="solid"/>
-                      <a:round/>
-                      <a:headEnd type="none" w="med" len="med"/>
-                      <a:tailEnd type="none" w="med" len="med"/>
-                    </a:lnT>
-                    <a:lnB w="6350" cap="flat" cmpd="sng" algn="ctr">
-                      <a:solidFill>
-                        <a:srgbClr val="D5DBE5"/>
-                      </a:solidFill>
-                      <a:prstDash val="solid"/>
-                      <a:round/>
-                      <a:headEnd type="none" w="med" len="med"/>
-                      <a:tailEnd type="none" w="med" len="med"/>
-                    </a:lnB>
-                  </a:tcPr>
-                </a:tc>
-                <a:tc>
-                  <a:txBody>
-                    <a:bodyPr/>
-                    <a:lstStyle/>
-                    <a:p>
-                      <a:pPr marL="0" indent="0" algn="ctr">
-                        <a:buNone/>
-                      </a:pPr>
-                      <a:r>
-                        <a:rPr lang="en-US" sz="1150" dirty="0">
-                          <a:solidFill>
-                            <a:srgbClr val="1B1F2A"/>
-                          </a:solidFill>
-                        </a:rPr>
-                        <a:t>100%, 0 leaked</a:t>
-                      </a:r>
-                      <a:endParaRPr lang="en-US" sz="1150" dirty="0"/>
-                    </a:p>
-                  </a:txBody>
-                  <a:tcPr marL="54864" marR="54864" marT="54864" marB="54864" anchor="ctr">
-                    <a:lnL w="6350" cap="flat" cmpd="sng" algn="ctr">
-                      <a:solidFill>
-                        <a:srgbClr val="D5DBE5"/>
-                      </a:solidFill>
-                      <a:prstDash val="solid"/>
-                      <a:round/>
-                      <a:headEnd type="none" w="med" len="med"/>
-                      <a:tailEnd type="none" w="med" len="med"/>
-                    </a:lnL>
-                    <a:lnR w="6350" cap="flat" cmpd="sng" algn="ctr">
-                      <a:solidFill>
-                        <a:srgbClr val="D5DBE5"/>
-                      </a:solidFill>
-                      <a:prstDash val="solid"/>
-                      <a:round/>
-                      <a:headEnd type="none" w="med" len="med"/>
-                      <a:tailEnd type="none" w="med" len="med"/>
-                    </a:lnR>
-                    <a:lnT w="6350" cap="flat" cmpd="sng" algn="ctr">
-                      <a:solidFill>
-                        <a:srgbClr val="D5DBE5"/>
-                      </a:solidFill>
-                      <a:prstDash val="solid"/>
-                      <a:round/>
-                      <a:headEnd type="none" w="med" len="med"/>
-                      <a:tailEnd type="none" w="med" len="med"/>
-                    </a:lnT>
-                    <a:lnB w="6350" cap="flat" cmpd="sng" algn="ctr">
-                      <a:solidFill>
-                        <a:srgbClr val="D5DBE5"/>
-                      </a:solidFill>
-                      <a:prstDash val="solid"/>
-                      <a:round/>
-                      <a:headEnd type="none" w="med" len="med"/>
-                      <a:tailEnd type="none" w="med" len="med"/>
-                    </a:lnB>
-                  </a:tcPr>
-                </a:tc>
-                <a:extLst>
-                  <a:ext uri="{0D108BD9-81ED-4DB2-BD59-A6C34878D82A}">
-                    <a16:rowId xmlns:a16="http://schemas.microsoft.com/office/drawing/2014/main" val="10003"/>
-                  </a:ext>
-                </a:extLst>
-              </a:tr>
-              <a:tr h="502920">
-                <a:tc>
-                  <a:txBody>
-                    <a:bodyPr/>
-                    <a:lstStyle/>
-                    <a:p>
-                      <a:pPr marL="0" indent="0">
-                        <a:buNone/>
-                      </a:pPr>
-                      <a:r>
-                        <a:rPr lang="en-US" sz="1150" dirty="0">
-                          <a:solidFill>
-                            <a:srgbClr val="1B1F2A"/>
-                          </a:solidFill>
-                        </a:rPr>
-                        <a:t>7 Labour market</a:t>
-                      </a:r>
-                      <a:endParaRPr lang="en-US" sz="1150" dirty="0"/>
-                    </a:p>
-                  </a:txBody>
-                  <a:tcPr marL="54864" marR="54864" marT="54864" marB="54864" anchor="ctr">
-                    <a:lnL w="6350" cap="flat" cmpd="sng" algn="ctr">
-                      <a:solidFill>
-                        <a:srgbClr val="D5DBE5"/>
-                      </a:solidFill>
-                      <a:prstDash val="solid"/>
-                      <a:round/>
-                      <a:headEnd type="none" w="med" len="med"/>
-                      <a:tailEnd type="none" w="med" len="med"/>
-                    </a:lnL>
-                    <a:lnR w="6350" cap="flat" cmpd="sng" algn="ctr">
-                      <a:solidFill>
-                        <a:srgbClr val="D5DBE5"/>
-                      </a:solidFill>
-                      <a:prstDash val="solid"/>
-                      <a:round/>
-                      <a:headEnd type="none" w="med" len="med"/>
-                      <a:tailEnd type="none" w="med" len="med"/>
-                    </a:lnR>
-                    <a:lnT w="6350" cap="flat" cmpd="sng" algn="ctr">
-                      <a:solidFill>
-                        <a:srgbClr val="D5DBE5"/>
-                      </a:solidFill>
-                      <a:prstDash val="solid"/>
-                      <a:round/>
-                      <a:headEnd type="none" w="med" len="med"/>
-                      <a:tailEnd type="none" w="med" len="med"/>
-                    </a:lnT>
-                    <a:lnB w="6350" cap="flat" cmpd="sng" algn="ctr">
-                      <a:solidFill>
-                        <a:srgbClr val="D5DBE5"/>
-                      </a:solidFill>
-                      <a:prstDash val="solid"/>
-                      <a:round/>
-                      <a:headEnd type="none" w="med" len="med"/>
-                      <a:tailEnd type="none" w="med" len="med"/>
-                    </a:lnB>
-                  </a:tcPr>
-                </a:tc>
-                <a:tc>
-                  <a:txBody>
-                    <a:bodyPr/>
-                    <a:lstStyle/>
-                    <a:p>
-                      <a:pPr marL="0" indent="0">
-                        <a:buNone/>
-                      </a:pPr>
-                      <a:r>
-                        <a:rPr lang="en-US" sz="1150" dirty="0">
-                          <a:solidFill>
-                            <a:srgbClr val="1B1F2A"/>
-                          </a:solidFill>
-                        </a:rPr>
-                        <a:t>Labour pre-read, projections, both statements</a:t>
-                      </a:r>
-                      <a:endParaRPr lang="en-US" sz="1150" dirty="0"/>
-                    </a:p>
-                  </a:txBody>
-                  <a:tcPr marL="54864" marR="54864" marT="54864" marB="54864" anchor="ctr">
-                    <a:lnL w="6350" cap="flat" cmpd="sng" algn="ctr">
-                      <a:solidFill>
-                        <a:srgbClr val="D5DBE5"/>
-                      </a:solidFill>
-                      <a:prstDash val="solid"/>
-                      <a:round/>
-                      <a:headEnd type="none" w="med" len="med"/>
-                      <a:tailEnd type="none" w="med" len="med"/>
-                    </a:lnL>
-                    <a:lnR w="6350" cap="flat" cmpd="sng" algn="ctr">
-                      <a:solidFill>
-                        <a:srgbClr val="D5DBE5"/>
-                      </a:solidFill>
-                      <a:prstDash val="solid"/>
-                      <a:round/>
-                      <a:headEnd type="none" w="med" len="med"/>
-                      <a:tailEnd type="none" w="med" len="med"/>
-                    </a:lnR>
-                    <a:lnT w="6350" cap="flat" cmpd="sng" algn="ctr">
-                      <a:solidFill>
-                        <a:srgbClr val="D5DBE5"/>
-                      </a:solidFill>
-                      <a:prstDash val="solid"/>
-                      <a:round/>
-                      <a:headEnd type="none" w="med" len="med"/>
-                      <a:tailEnd type="none" w="med" len="med"/>
-                    </a:lnT>
-                    <a:lnB w="6350" cap="flat" cmpd="sng" algn="ctr">
-                      <a:solidFill>
-                        <a:srgbClr val="D5DBE5"/>
-                      </a:solidFill>
-                      <a:prstDash val="solid"/>
-                      <a:round/>
-                      <a:headEnd type="none" w="med" len="med"/>
-                      <a:tailEnd type="none" w="med" len="med"/>
-                    </a:lnB>
-                  </a:tcPr>
-                </a:tc>
-                <a:tc>
-                  <a:txBody>
-                    <a:bodyPr/>
-                    <a:lstStyle/>
-                    <a:p>
-                      <a:pPr marL="0" indent="0" algn="ctr">
-                        <a:buNone/>
-                      </a:pPr>
-                      <a:r>
-                        <a:rPr lang="en-US" sz="1150" b="1" dirty="0">
-                          <a:solidFill>
-                            <a:srgbClr val="2C6E49"/>
-                          </a:solidFill>
-                        </a:rPr>
-                        <a:t>−1.4 bp, no hike</a:t>
-                      </a:r>
-                      <a:endParaRPr lang="en-US" sz="1150" dirty="0"/>
-                    </a:p>
-                  </a:txBody>
-                  <a:tcPr marL="54864" marR="54864" marT="54864" marB="54864" anchor="ctr">
-                    <a:lnL w="6350" cap="flat" cmpd="sng" algn="ctr">
-                      <a:solidFill>
-                        <a:srgbClr val="D5DBE5"/>
-                      </a:solidFill>
-                      <a:prstDash val="solid"/>
-                      <a:round/>
-                      <a:headEnd type="none" w="med" len="med"/>
-                      <a:tailEnd type="none" w="med" len="med"/>
-                    </a:lnL>
-                    <a:lnR w="6350" cap="flat" cmpd="sng" algn="ctr">
-                      <a:solidFill>
-                        <a:srgbClr val="D5DBE5"/>
-                      </a:solidFill>
-                      <a:prstDash val="solid"/>
-                      <a:round/>
-                      <a:headEnd type="none" w="med" len="med"/>
-                      <a:tailEnd type="none" w="med" len="med"/>
-                    </a:lnR>
-                    <a:lnT w="6350" cap="flat" cmpd="sng" algn="ctr">
-                      <a:solidFill>
-                        <a:srgbClr val="D5DBE5"/>
-                      </a:solidFill>
-                      <a:prstDash val="solid"/>
-                      <a:round/>
-                      <a:headEnd type="none" w="med" len="med"/>
-                      <a:tailEnd type="none" w="med" len="med"/>
-                    </a:lnT>
-                    <a:lnB w="6350" cap="flat" cmpd="sng" algn="ctr">
-                      <a:solidFill>
-                        <a:srgbClr val="D5DBE5"/>
-                      </a:solidFill>
-                      <a:prstDash val="solid"/>
-                      <a:round/>
-                      <a:headEnd type="none" w="med" len="med"/>
-                      <a:tailEnd type="none" w="med" len="med"/>
-                    </a:lnB>
-                  </a:tcPr>
-                </a:tc>
-                <a:tc>
-                  <a:txBody>
-                    <a:bodyPr/>
-                    <a:lstStyle/>
-                    <a:p>
-                      <a:pPr marL="0" indent="0" algn="ctr">
-                        <a:buNone/>
-                      </a:pPr>
-                      <a:r>
-                        <a:rPr lang="en-US" sz="1150" dirty="0">
-                          <a:solidFill>
-                            <a:srgbClr val="1B1F2A"/>
-                          </a:solidFill>
-                        </a:rPr>
-                        <a:t>100%, 0 leaked</a:t>
-                      </a:r>
-                      <a:endParaRPr lang="en-US" sz="1150" dirty="0"/>
-                    </a:p>
-                  </a:txBody>
-                  <a:tcPr marL="54864" marR="54864" marT="54864" marB="54864" anchor="ctr">
-                    <a:lnL w="6350" cap="flat" cmpd="sng" algn="ctr">
-                      <a:solidFill>
-                        <a:srgbClr val="D5DBE5"/>
-                      </a:solidFill>
-                      <a:prstDash val="solid"/>
-                      <a:round/>
-                      <a:headEnd type="none" w="med" len="med"/>
-                      <a:tailEnd type="none" w="med" len="med"/>
-                    </a:lnL>
-                    <a:lnR w="6350" cap="flat" cmpd="sng" algn="ctr">
-                      <a:solidFill>
-                        <a:srgbClr val="D5DBE5"/>
-                      </a:solidFill>
-                      <a:prstDash val="solid"/>
-                      <a:round/>
-                      <a:headEnd type="none" w="med" len="med"/>
-                      <a:tailEnd type="none" w="med" len="med"/>
-                    </a:lnR>
-                    <a:lnT w="6350" cap="flat" cmpd="sng" algn="ctr">
-                      <a:solidFill>
-                        <a:srgbClr val="D5DBE5"/>
-                      </a:solidFill>
-                      <a:prstDash val="solid"/>
-                      <a:round/>
-                      <a:headEnd type="none" w="med" len="med"/>
-                      <a:tailEnd type="none" w="med" len="med"/>
-                    </a:lnT>
-                    <a:lnB w="6350" cap="flat" cmpd="sng" algn="ctr">
-                      <a:solidFill>
-                        <a:srgbClr val="D5DBE5"/>
-                      </a:solidFill>
-                      <a:prstDash val="solid"/>
-                      <a:round/>
-                      <a:headEnd type="none" w="med" len="med"/>
-                      <a:tailEnd type="none" w="med" len="med"/>
-                    </a:lnB>
-                  </a:tcPr>
-                </a:tc>
-                <a:extLst>
-                  <a:ext uri="{0D108BD9-81ED-4DB2-BD59-A6C34878D82A}">
-                    <a16:rowId xmlns:a16="http://schemas.microsoft.com/office/drawing/2014/main" val="10004"/>
-                  </a:ext>
-                </a:extLst>
-              </a:tr>
-              <a:tr h="502920">
-                <a:tc>
-                  <a:txBody>
-                    <a:bodyPr/>
-                    <a:lstStyle/>
-                    <a:p>
-                      <a:pPr marL="0" indent="0">
-                        <a:buNone/>
-                      </a:pPr>
-                      <a:r>
-                        <a:rPr lang="en-US" sz="1150" dirty="0">
-                          <a:solidFill>
-                            <a:srgbClr val="1B1F2A"/>
-                          </a:solidFill>
-                        </a:rPr>
-                        <a:t>8 Financial conditions</a:t>
-                      </a:r>
-                      <a:endParaRPr lang="en-US" sz="1150" dirty="0"/>
-                    </a:p>
-                  </a:txBody>
-                  <a:tcPr marL="54864" marR="54864" marT="54864" marB="54864" anchor="ctr">
-                    <a:lnL w="6350" cap="flat" cmpd="sng" algn="ctr">
-                      <a:solidFill>
-                        <a:srgbClr val="D5DBE5"/>
-                      </a:solidFill>
-                      <a:prstDash val="solid"/>
-                      <a:round/>
-                      <a:headEnd type="none" w="med" len="med"/>
-                      <a:tailEnd type="none" w="med" len="med"/>
-                    </a:lnL>
-                    <a:lnR w="6350" cap="flat" cmpd="sng" algn="ctr">
-                      <a:solidFill>
-                        <a:srgbClr val="D5DBE5"/>
-                      </a:solidFill>
-                      <a:prstDash val="solid"/>
-                      <a:round/>
-                      <a:headEnd type="none" w="med" len="med"/>
-                      <a:tailEnd type="none" w="med" len="med"/>
-                    </a:lnR>
-                    <a:lnT w="6350" cap="flat" cmpd="sng" algn="ctr">
-                      <a:solidFill>
-                        <a:srgbClr val="D5DBE5"/>
-                      </a:solidFill>
-                      <a:prstDash val="solid"/>
-                      <a:round/>
-                      <a:headEnd type="none" w="med" len="med"/>
-                      <a:tailEnd type="none" w="med" len="med"/>
-                    </a:lnT>
-                    <a:lnB w="6350" cap="flat" cmpd="sng" algn="ctr">
-                      <a:solidFill>
-                        <a:srgbClr val="D5DBE5"/>
-                      </a:solidFill>
-                      <a:prstDash val="solid"/>
-                      <a:round/>
-                      <a:headEnd type="none" w="med" len="med"/>
-                      <a:tailEnd type="none" w="med" len="med"/>
-                    </a:lnB>
-                  </a:tcPr>
-                </a:tc>
-                <a:tc>
-                  <a:txBody>
-                    <a:bodyPr/>
-                    <a:lstStyle/>
-                    <a:p>
-                      <a:pPr marL="0" indent="0">
-                        <a:buNone/>
-                      </a:pPr>
-                      <a:r>
-                        <a:rPr lang="en-US" sz="1150" dirty="0">
-                          <a:solidFill>
-                            <a:srgbClr val="1B1F2A"/>
-                          </a:solidFill>
-                        </a:rPr>
-                        <a:t>Financial pre-read, base rates, both statements</a:t>
-                      </a:r>
-                      <a:endParaRPr lang="en-US" sz="1150" dirty="0"/>
-                    </a:p>
-                  </a:txBody>
-                  <a:tcPr marL="54864" marR="54864" marT="54864" marB="54864" anchor="ctr">
-                    <a:lnL w="6350" cap="flat" cmpd="sng" algn="ctr">
-                      <a:solidFill>
-                        <a:srgbClr val="D5DBE5"/>
-                      </a:solidFill>
-                      <a:prstDash val="solid"/>
-                      <a:round/>
-                      <a:headEnd type="none" w="med" len="med"/>
-                      <a:tailEnd type="none" w="med" len="med"/>
-                    </a:lnL>
-                    <a:lnR w="6350" cap="flat" cmpd="sng" algn="ctr">
-                      <a:solidFill>
-                        <a:srgbClr val="D5DBE5"/>
-                      </a:solidFill>
-                      <a:prstDash val="solid"/>
-                      <a:round/>
-                      <a:headEnd type="none" w="med" len="med"/>
-                      <a:tailEnd type="none" w="med" len="med"/>
-                    </a:lnR>
-                    <a:lnT w="6350" cap="flat" cmpd="sng" algn="ctr">
-                      <a:solidFill>
-                        <a:srgbClr val="D5DBE5"/>
-                      </a:solidFill>
-                      <a:prstDash val="solid"/>
-                      <a:round/>
-                      <a:headEnd type="none" w="med" len="med"/>
-                      <a:tailEnd type="none" w="med" len="med"/>
-                    </a:lnT>
-                    <a:lnB w="6350" cap="flat" cmpd="sng" algn="ctr">
-                      <a:solidFill>
-                        <a:srgbClr val="D5DBE5"/>
-                      </a:solidFill>
-                      <a:prstDash val="solid"/>
-                      <a:round/>
-                      <a:headEnd type="none" w="med" len="med"/>
-                      <a:tailEnd type="none" w="med" len="med"/>
-                    </a:lnB>
-                  </a:tcPr>
-                </a:tc>
-                <a:tc>
-                  <a:txBody>
-                    <a:bodyPr/>
-                    <a:lstStyle/>
-                    <a:p>
-                      <a:pPr marL="0" indent="0" algn="ctr">
-                        <a:buNone/>
-                      </a:pPr>
-                      <a:r>
-                        <a:rPr lang="en-US" sz="1150" b="1" dirty="0">
-                          <a:solidFill>
-                            <a:srgbClr val="C8553D"/>
-                          </a:solidFill>
-                        </a:rPr>
-                        <a:t>+3.4 bp hawkish</a:t>
-                      </a:r>
-                      <a:endParaRPr lang="en-US" sz="1150" dirty="0"/>
-                    </a:p>
-                  </a:txBody>
-                  <a:tcPr marL="54864" marR="54864" marT="54864" marB="54864" anchor="ctr">
-                    <a:lnL w="6350" cap="flat" cmpd="sng" algn="ctr">
-                      <a:solidFill>
-                        <a:srgbClr val="D5DBE5"/>
-                      </a:solidFill>
-                      <a:prstDash val="solid"/>
-                      <a:round/>
-                      <a:headEnd type="none" w="med" len="med"/>
-                      <a:tailEnd type="none" w="med" len="med"/>
-                    </a:lnL>
-                    <a:lnR w="6350" cap="flat" cmpd="sng" algn="ctr">
-                      <a:solidFill>
-                        <a:srgbClr val="D5DBE5"/>
-                      </a:solidFill>
-                      <a:prstDash val="solid"/>
-                      <a:round/>
-                      <a:headEnd type="none" w="med" len="med"/>
-                      <a:tailEnd type="none" w="med" len="med"/>
-                    </a:lnR>
-                    <a:lnT w="6350" cap="flat" cmpd="sng" algn="ctr">
-                      <a:solidFill>
-                        <a:srgbClr val="D5DBE5"/>
-                      </a:solidFill>
-                      <a:prstDash val="solid"/>
-                      <a:round/>
-                      <a:headEnd type="none" w="med" len="med"/>
-                      <a:tailEnd type="none" w="med" len="med"/>
-                    </a:lnT>
-                    <a:lnB w="6350" cap="flat" cmpd="sng" algn="ctr">
-                      <a:solidFill>
-                        <a:srgbClr val="D5DBE5"/>
-                      </a:solidFill>
-                      <a:prstDash val="solid"/>
-                      <a:round/>
-                      <a:headEnd type="none" w="med" len="med"/>
-                      <a:tailEnd type="none" w="med" len="med"/>
-                    </a:lnB>
-                  </a:tcPr>
-                </a:tc>
-                <a:tc>
-                  <a:txBody>
-                    <a:bodyPr/>
-                    <a:lstStyle/>
-                    <a:p>
-                      <a:pPr marL="0" indent="0" algn="ctr">
-                        <a:buNone/>
-                      </a:pPr>
-                      <a:r>
-                        <a:rPr lang="en-US" sz="1150" dirty="0">
-                          <a:solidFill>
-                            <a:srgbClr val="1B1F2A"/>
-                          </a:solidFill>
-                        </a:rPr>
-                        <a:t>100%, 0 leaked</a:t>
-                      </a:r>
-                      <a:endParaRPr lang="en-US" sz="1150" dirty="0"/>
-                    </a:p>
-                  </a:txBody>
-                  <a:tcPr marL="54864" marR="54864" marT="54864" marB="54864" anchor="ctr">
-                    <a:lnL w="6350" cap="flat" cmpd="sng" algn="ctr">
-                      <a:solidFill>
-                        <a:srgbClr val="D5DBE5"/>
-                      </a:solidFill>
-                      <a:prstDash val="solid"/>
-                      <a:round/>
-                      <a:headEnd type="none" w="med" len="med"/>
-                      <a:tailEnd type="none" w="med" len="med"/>
-                    </a:lnL>
-                    <a:lnR w="6350" cap="flat" cmpd="sng" algn="ctr">
-                      <a:solidFill>
-                        <a:srgbClr val="D5DBE5"/>
-                      </a:solidFill>
-                      <a:prstDash val="solid"/>
-                      <a:round/>
-                      <a:headEnd type="none" w="med" len="med"/>
-                      <a:tailEnd type="none" w="med" len="med"/>
-                    </a:lnR>
-                    <a:lnT w="6350" cap="flat" cmpd="sng" algn="ctr">
-                      <a:solidFill>
-                        <a:srgbClr val="D5DBE5"/>
-                      </a:solidFill>
-                      <a:prstDash val="solid"/>
-                      <a:round/>
-                      <a:headEnd type="none" w="med" len="med"/>
-                      <a:tailEnd type="none" w="med" len="med"/>
-                    </a:lnT>
-                    <a:lnB w="6350" cap="flat" cmpd="sng" algn="ctr">
-                      <a:solidFill>
-                        <a:srgbClr val="D5DBE5"/>
-                      </a:solidFill>
-                      <a:prstDash val="solid"/>
-                      <a:round/>
-                      <a:headEnd type="none" w="med" len="med"/>
-                      <a:tailEnd type="none" w="med" len="med"/>
-                    </a:lnB>
-                  </a:tcPr>
-                </a:tc>
-                <a:extLst>
-                  <a:ext uri="{0D108BD9-81ED-4DB2-BD59-A6C34878D82A}">
-                    <a16:rowId xmlns:a16="http://schemas.microsoft.com/office/drawing/2014/main" val="10005"/>
-                  </a:ext>
-                </a:extLst>
-              </a:tr>
-            </a:tbl>
-          </a:graphicData>
-        </a:graphic>
-      </p:graphicFrame>
-      <p:sp>
-        <p:nvSpPr>
-          <p:cNvPr id="5" name="Shape 1"/>
+      <p:sp>
+        <p:nvSpPr>
+          <p:cNvPr id="4" name="Text 1"/>
+          <p:cNvSpPr txBox="1"/>
+          <p:nvPr/>
+        </p:nvSpPr>
+        <p:spPr>
+          <a:xfrm>
+            <a:off x="548640" y="1280160"/>
+            <a:ext cx="11091672" cy="365760"/>
+          </a:xfrm>
+          <a:prstGeom prst="rect">
+            <a:avLst/>
+          </a:prstGeom>
+          <a:noFill/>
+          <a:ln/>
+        </p:spPr>
+        <p:txBody>
+          <a:bodyPr wrap="square" lIns="0" tIns="0" rIns="0" bIns="0" rtlCol="0" anchor="t"/>
+          <a:lstStyle/>
+          <a:p>
+            <a:pPr marL="0" indent="0">
+              <a:buNone/>
+            </a:pPr>
+            <a:r>
+              <a:rPr lang="en-US" sz="1150" dirty="0">
+                <a:solidFill>
+                  <a:schemeClr val="accent4"/>
+                </a:solidFill>
+              </a:rPr>
+              <a:t>December is on file: entry #23 for the 9 December meeting, +25 bps 73.6%, no change 16.7%, specialists +4.0 bp. The 28 October call is scored the moment the post-meeting rate row lands.</a:t>
+            </a:r>
+            <a:endParaRPr lang="en-US" sz="1150" dirty="0"/>
+          </a:p>
+        </p:txBody>
+      </p:sp>
+      <p:sp>
+        <p:nvSpPr>
+          <p:cNvPr id="5" name="Shape 2"/>
           <p:cNvSpPr/>
           <p:nvPr/>
         </p:nvSpPr>
         <p:spPr>
           <a:xfrm>
-            <a:off x="7680960" y="1417320"/>
-            <a:ext cx="3959352" cy="3429000"/>
+            <a:off x="548640" y="1783080"/>
+            <a:ext cx="5440680" cy="1325880"/>
           </a:xfrm>
           <a:prstGeom prst="roundRect">
             <a:avLst>
-              <a:gd name="adj" fmla="val 3200"/>
+              <a:gd name="adj" fmla="val 8276"/>
             </a:avLst>
           </a:prstGeom>
           <a:solidFill>
@@ -11839,339 +11776,17 @@
       </p:sp>
       <p:sp>
         <p:nvSpPr>
-          <p:cNvPr id="6" name="Text 2"/>
-          <p:cNvSpPr txBox="1"/>
-          <p:nvPr/>
-        </p:nvSpPr>
-        <p:spPr>
-          <a:xfrm>
-            <a:off x="7955280" y="1600200"/>
-            <a:ext cx="3474720" cy="365760"/>
-          </a:xfrm>
-          <a:prstGeom prst="rect">
-            <a:avLst/>
-          </a:prstGeom>
-          <a:noFill/>
-          <a:ln/>
-        </p:spPr>
-        <p:txBody>
-          <a:bodyPr wrap="square" lIns="0" tIns="0" rIns="0" bIns="0" rtlCol="0" anchor="t"/>
-          <a:lstStyle/>
-          <a:p>
-            <a:pPr marL="0" indent="0">
-              <a:buNone/>
-            </a:pPr>
-            <a:r>
-              <a:rPr lang="en-US" sz="1400" b="1" dirty="0">
-                <a:solidFill>
-                  <a:schemeClr val="tx2"/>
-                </a:solidFill>
-              </a:rPr>
-              <a:t>One claim, as recorded</a:t>
-            </a:r>
-            <a:endParaRPr lang="en-US" sz="1400" dirty="0"/>
-          </a:p>
-        </p:txBody>
-      </p:sp>
-      <p:sp>
-        <p:nvSpPr>
-          <p:cNvPr id="7" name="Text 3"/>
-          <p:cNvSpPr txBox="1"/>
-          <p:nvPr/>
-        </p:nvSpPr>
-        <p:spPr>
-          <a:xfrm>
-            <a:off x="7955280" y="2011680"/>
-            <a:ext cx="3474720" cy="822960"/>
-          </a:xfrm>
-          <a:prstGeom prst="rect">
-            <a:avLst/>
-          </a:prstGeom>
-          <a:noFill/>
-          <a:ln/>
-        </p:spPr>
-        <p:txBody>
-          <a:bodyPr wrap="square" lIns="0" tIns="0" rIns="0" bIns="0" rtlCol="0" anchor="t"/>
-          <a:lstStyle/>
-          <a:p>
-            <a:pPr marL="0" indent="0">
-              <a:buNone/>
-            </a:pPr>
-            <a:r>
-              <a:rPr lang="en-US" sz="1200" dirty="0">
-                <a:solidFill>
-                  <a:schemeClr val="tx1"/>
-                </a:solidFill>
-              </a:rPr>
-              <a:t>Communications analyst, run 1 of 5: the September statement stressed elevated inflation and a resolve to return to target on a timelier basis.</a:t>
-            </a:r>
-            <a:endParaRPr lang="en-US" sz="1200" dirty="0"/>
-          </a:p>
-        </p:txBody>
-      </p:sp>
-      <p:sp>
-        <p:nvSpPr>
-          <p:cNvPr id="8" name="Text 4"/>
-          <p:cNvSpPr txBox="1"/>
-          <p:nvPr/>
-        </p:nvSpPr>
-        <p:spPr>
-          <a:xfrm>
-            <a:off x="7955280" y="2834640"/>
-            <a:ext cx="3474720" cy="822960"/>
-          </a:xfrm>
-          <a:prstGeom prst="rect">
-            <a:avLst/>
-          </a:prstGeom>
-          <a:noFill/>
-          <a:ln/>
-        </p:spPr>
-        <p:txBody>
-          <a:bodyPr wrap="square" lIns="0" tIns="0" rIns="0" bIns="0" rtlCol="0" anchor="t"/>
-          <a:lstStyle/>
-          <a:p>
-            <a:pPr marL="0" indent="0">
-              <a:buNone/>
-            </a:pPr>
-            <a:r>
-              <a:rPr lang="en-US" sz="1000" dirty="0">
-                <a:solidFill>
-                  <a:srgbClr val="374151"/>
-                </a:solidFill>
-                <a:latin typeface="Courier New" pitchFamily="34" charset="0"/>
-                <a:ea typeface="Courier New" pitchFamily="34" charset="-122"/>
-                <a:cs typeface="Courier New" pitchFamily="34" charset="-120"/>
-              </a:rPr>
-              <a:t>“Inflation remains elevated. Today's policy action will support a timelier return to the Committee's 2 percent goal. The Committee will deliver price stability.”</a:t>
-            </a:r>
-            <a:endParaRPr lang="en-US" sz="1000" dirty="0"/>
-          </a:p>
-        </p:txBody>
-      </p:sp>
-      <p:sp>
-        <p:nvSpPr>
-          <p:cNvPr id="9" name="Text 5"/>
-          <p:cNvSpPr txBox="1"/>
-          <p:nvPr/>
-        </p:nvSpPr>
-        <p:spPr>
-          <a:xfrm>
-            <a:off x="7955280" y="3703320"/>
-            <a:ext cx="3474720" cy="1005840"/>
-          </a:xfrm>
-          <a:prstGeom prst="rect">
-            <a:avLst/>
-          </a:prstGeom>
-          <a:noFill/>
-          <a:ln/>
-        </p:spPr>
-        <p:txBody>
-          <a:bodyPr wrap="square" lIns="0" tIns="0" rIns="0" bIns="0" rtlCol="0" anchor="t"/>
-          <a:lstStyle/>
-          <a:p>
-            <a:pPr marL="0" indent="0">
-              <a:buNone/>
-            </a:pPr>
-            <a:r>
-              <a:rPr lang="en-US" sz="1100" dirty="0">
-                <a:solidFill>
-                  <a:schemeClr val="tx1"/>
-                </a:solidFill>
-              </a:rPr>
-              <a:t>Item fed.statement.2026-09-16 · quote found by code, character for character · 12 of 12 claims in this run verified, none from memory.</a:t>
-            </a:r>
-            <a:endParaRPr lang="en-US" sz="1100" dirty="0"/>
-          </a:p>
-        </p:txBody>
-      </p:sp>
-      <p:sp>
-        <p:nvSpPr>
-          <p:cNvPr id="25" name="Slide Number Placeholder 0"/>
-          <p:cNvSpPr>
-            <a:spLocks noGrp="1"/>
-          </p:cNvSpPr>
-          <p:nvPr>
-            <p:ph type="sldNum" sz="quarter" idx="4294967295"/>
-          </p:nvPr>
-        </p:nvSpPr>
-        <p:spPr>
-          <a:xfrm>
-            <a:off x="11091672" y="6400800"/>
-            <a:ext cx="548640" cy="274320"/>
-          </a:xfrm>
-          <a:prstGeom prst="rect">
-            <a:avLst/>
-          </a:prstGeom>
-          <a:extLst>
-            <a:ext uri="{C572A759-6A51-4108-AA02-DFA0A04FC94B}">
-              <ma14:wrappingTextBoxFlag xmlns:ma14="http://schemas.microsoft.com/office/mac/drawingml/2011/main" xmlns="" val="0"/>
-            </a:ext>
-          </a:extLst>
-        </p:spPr>
-        <p:txBody>
-          <a:bodyPr/>
-          <a:lstStyle>
-            <a:lvl1pPr>
-              <a:defRPr sz="1000">
-                <a:solidFill>
-                  <a:srgbClr val="6B7280"/>
-                </a:solidFill>
-              </a:defRPr>
-            </a:lvl1pPr>
-          </a:lstStyle>
-          <a:p>
-            <a:pPr algn="r"/>
-            <a:fld id="{F7021451-1387-4CA6-816F-3879F97B5CBC}" type="slidenum">
-              <a:rPr lang="en-US" b="0"/>
-              <a:t>15</a:t>
-            </a:fld>
-            <a:endParaRPr lang="en-US"/>
-          </a:p>
-        </p:txBody>
-      </p:sp>
-    </p:spTree>
-  </p:cSld>
-  <p:clrMapOvr>
-    <a:masterClrMapping/>
-  </p:clrMapOvr>
-</p:sld>
-</file>
-
-<file path=ppt/slides/slide16.xml><?xml version="1.0" encoding="utf-8"?>
-<p:sld xmlns:a="http://schemas.openxmlformats.org/drawingml/2006/main" xmlns:r="http://schemas.openxmlformats.org/officeDocument/2006/relationships" xmlns:p="http://schemas.openxmlformats.org/presentationml/2006/main">
-  <p:cSld name="Slide 16">
-    <p:spTree>
-      <p:nvGrpSpPr>
-        <p:cNvPr id="1" name=""/>
-        <p:cNvGrpSpPr/>
-        <p:nvPr/>
-      </p:nvGrpSpPr>
-      <p:grpSpPr>
-        <a:xfrm>
-          <a:off x="0" y="0"/>
-          <a:ext cx="0" cy="0"/>
-          <a:chOff x="0" y="0"/>
-          <a:chExt cx="0" cy="0"/>
-        </a:xfrm>
-      </p:grpSpPr>
-      <p:sp>
-        <p:nvSpPr>
-          <p:cNvPr id="2" name="Text 0"/>
-          <p:cNvSpPr>
-            <a:spLocks noGrp="1"/>
-          </p:cNvSpPr>
-          <p:nvPr>
-            <p:ph type="title" idx="100" hasCustomPrompt="1"/>
-          </p:nvPr>
-        </p:nvSpPr>
-        <p:spPr>
-          <a:xfrm>
-            <a:off x="548640" y="548640"/>
-            <a:ext cx="11091672" cy="822960"/>
-          </a:xfrm>
-          <a:prstGeom prst="rect">
-            <a:avLst/>
-          </a:prstGeom>
-          <a:noFill/>
-          <a:ln/>
-        </p:spPr>
-        <p:txBody>
-          <a:bodyPr wrap="square" lIns="0" tIns="0" rIns="0" bIns="0" rtlCol="0" anchor="ctr"/>
-          <a:lstStyle/>
-          <a:p>
-            <a:pPr marL="0" indent="0" algn="l">
-              <a:buNone/>
-            </a:pPr>
-            <a:r>
-              <a:rPr lang="en-US" sz="3000" b="1" dirty="0">
-                <a:solidFill>
-                  <a:schemeClr val="bg1"/>
-                </a:solidFill>
-              </a:rPr>
-              <a:t>Live demo 4: what the analysts concluded</a:t>
-            </a:r>
-            <a:endParaRPr lang="en-US" sz="3000" dirty="0"/>
-          </a:p>
-        </p:txBody>
-      </p:sp>
-      <p:sp>
-        <p:nvSpPr>
-          <p:cNvPr id="3" name="Shape 1"/>
+          <p:cNvPr id="6" name="Shape 3"/>
           <p:cNvSpPr/>
           <p:nvPr/>
         </p:nvSpPr>
         <p:spPr>
           <a:xfrm>
-            <a:off x="10177272" y="685800"/>
-            <a:ext cx="1463040" cy="548640"/>
-          </a:xfrm>
-          <a:prstGeom prst="roundRect">
-            <a:avLst>
-              <a:gd name="adj" fmla="val 16667"/>
-            </a:avLst>
-          </a:prstGeom>
-          <a:solidFill>
-            <a:srgbClr val="E9B44C"/>
-          </a:solidFill>
-          <a:ln w="12700">
-            <a:solidFill>
-              <a:srgbClr val="E9B44C"/>
-            </a:solidFill>
-            <a:prstDash val="solid"/>
-          </a:ln>
-        </p:spPr>
-      </p:sp>
-      <p:sp>
-        <p:nvSpPr>
-          <p:cNvPr id="4" name="Text 2"/>
-          <p:cNvSpPr txBox="1"/>
-          <p:nvPr/>
-        </p:nvSpPr>
-        <p:spPr>
-          <a:xfrm>
-            <a:off x="10177272" y="685800"/>
-            <a:ext cx="1463040" cy="548640"/>
-          </a:xfrm>
-          <a:prstGeom prst="rect">
-            <a:avLst/>
-          </a:prstGeom>
-          <a:noFill/>
-          <a:ln/>
-        </p:spPr>
-        <p:txBody>
-          <a:bodyPr wrap="square" lIns="0" tIns="0" rIns="0" bIns="0" rtlCol="0" anchor="ctr"/>
-          <a:lstStyle/>
-          <a:p>
-            <a:pPr marL="0" indent="0" algn="ctr">
-              <a:buNone/>
-            </a:pPr>
-            <a:r>
-              <a:rPr lang="en-US" sz="1600" b="1" dirty="0">
-                <a:solidFill>
-                  <a:srgbClr val="1B1F2A"/>
-                </a:solidFill>
-              </a:rPr>
-              <a:t>2 min</a:t>
-            </a:r>
-            <a:endParaRPr lang="en-US" sz="1600" dirty="0"/>
-          </a:p>
-        </p:txBody>
-      </p:sp>
-      <p:sp>
-        <p:nvSpPr>
-          <p:cNvPr id="5" name="Shape 3"/>
-          <p:cNvSpPr/>
-          <p:nvPr/>
-        </p:nvSpPr>
-        <p:spPr>
-          <a:xfrm>
-            <a:off x="548640" y="1737360"/>
-            <a:ext cx="3520440" cy="3200400"/>
-          </a:xfrm>
-          <a:prstGeom prst="roundRect">
-            <a:avLst>
-              <a:gd name="adj" fmla="val 3429"/>
-            </a:avLst>
+            <a:off x="731520" y="1947672"/>
+            <a:ext cx="384048" cy="384048"/>
+          </a:xfrm>
+          <a:prstGeom prst="ellipse">
+            <a:avLst/>
           </a:prstGeom>
           <a:solidFill>
             <a:srgbClr val="1E2761"/>
@@ -12186,14 +11801,50 @@
       </p:sp>
       <p:sp>
         <p:nvSpPr>
-          <p:cNvPr id="6" name="Text 4"/>
+          <p:cNvPr id="7" name="Text 4"/>
           <p:cNvSpPr txBox="1"/>
           <p:nvPr/>
         </p:nvSpPr>
         <p:spPr>
           <a:xfrm>
-            <a:off x="822960" y="1920240"/>
-            <a:ext cx="2926080" cy="457200"/>
+            <a:off x="731520" y="1947672"/>
+            <a:ext cx="384048" cy="384048"/>
+          </a:xfrm>
+          <a:prstGeom prst="rect">
+            <a:avLst/>
+          </a:prstGeom>
+          <a:noFill/>
+          <a:ln/>
+        </p:spPr>
+        <p:txBody>
+          <a:bodyPr wrap="square" lIns="0" tIns="0" rIns="0" bIns="0" rtlCol="0" anchor="ctr"/>
+          <a:lstStyle/>
+          <a:p>
+            <a:pPr marL="0" indent="0" algn="ctr">
+              <a:buNone/>
+            </a:pPr>
+            <a:r>
+              <a:rPr lang="en-US" sz="1400" b="1" dirty="0">
+                <a:solidFill>
+                  <a:schemeClr val="bg1"/>
+                </a:solidFill>
+              </a:rPr>
+              <a:t>1</a:t>
+            </a:r>
+            <a:endParaRPr lang="en-US" sz="1400" dirty="0"/>
+          </a:p>
+        </p:txBody>
+      </p:sp>
+      <p:sp>
+        <p:nvSpPr>
+          <p:cNvPr id="8" name="Text 5"/>
+          <p:cNvSpPr txBox="1"/>
+          <p:nvPr/>
+        </p:nvSpPr>
+        <p:spPr>
+          <a:xfrm>
+            <a:off x="1234440" y="1892808"/>
+            <a:ext cx="4572000" cy="365760"/>
           </a:xfrm>
           <a:prstGeom prst="rect">
             <a:avLst/>
@@ -12209,27 +11860,27 @@
               <a:buNone/>
             </a:pPr>
             <a:r>
-              <a:rPr lang="en-US" sz="1800" b="1" dirty="0">
-                <a:solidFill>
-                  <a:srgbClr val="E9B44C"/>
-                </a:solidFill>
-              </a:rPr>
-              <a:t>Open</a:t>
-            </a:r>
-            <a:endParaRPr lang="en-US" sz="1800" dirty="0"/>
-          </a:p>
-        </p:txBody>
-      </p:sp>
-      <p:sp>
-        <p:nvSpPr>
-          <p:cNvPr id="7" name="Text 5"/>
+              <a:rPr lang="en-US" sz="1300" b="1" dirty="0">
+                <a:solidFill>
+                  <a:schemeClr val="tx2"/>
+                </a:solidFill>
+              </a:rPr>
+              <a:t>Pre-registered weight sets, scored live</a:t>
+            </a:r>
+            <a:endParaRPr lang="en-US" sz="1300" dirty="0"/>
+          </a:p>
+        </p:txBody>
+      </p:sp>
+      <p:sp>
+        <p:nvSpPr>
+          <p:cNvPr id="9" name="Text 6"/>
           <p:cNvSpPr txBox="1"/>
           <p:nvPr/>
         </p:nvSpPr>
         <p:spPr>
           <a:xfrm>
-            <a:off x="822960" y="2468880"/>
-            <a:ext cx="2971800" cy="2377440"/>
+            <a:off x="731520" y="2286000"/>
+            <a:ext cx="5074920" cy="804672"/>
           </a:xfrm>
           <a:prstGeom prst="rect">
             <a:avLst/>
@@ -12241,400 +11892,35 @@
           <a:bodyPr wrap="square" lIns="0" tIns="0" rIns="0" bIns="0" rtlCol="0" anchor="t"/>
           <a:lstStyle/>
           <a:p>
-            <a:pPr marL="342900" indent="-342900">
-              <a:spcAft>
-                <a:spcPts val="800"/>
-              </a:spcAft>
-              <a:buSzPct val="100000"/>
-              <a:buChar char="•"/>
-            </a:pPr>
-            <a:r>
-              <a:rPr lang="en-US" sz="1300" dirty="0">
-                <a:solidFill>
-                  <a:srgbClr val="FFFFFF"/>
-                </a:solidFill>
-              </a:rPr>
-              <a:t>Analyst results view</a:t>
-            </a:r>
-            <a:endParaRPr lang="en-US" sz="1300" dirty="0"/>
-          </a:p>
-          <a:p>
-            <a:pPr marL="342900" indent="-342900">
-              <a:spcAft>
-                <a:spcPts val="800"/>
-              </a:spcAft>
-              <a:buSzPct val="100000"/>
-              <a:buChar char="•"/>
-            </a:pPr>
-            <a:r>
-              <a:rPr lang="en-US" sz="1300" dirty="0">
-                <a:solidFill>
-                  <a:srgbClr val="FFFFFF"/>
-                </a:solidFill>
-              </a:rPr>
-              <a:t>Analyst 1 (naive) card</a:t>
-            </a:r>
-            <a:endParaRPr lang="en-US" sz="1300" dirty="0"/>
-          </a:p>
-          <a:p>
-            <a:pPr marL="342900" indent="-342900">
-              <a:spcAft>
-                <a:spcPts val="800"/>
-              </a:spcAft>
-              <a:buSzPct val="100000"/>
-              <a:buChar char="•"/>
-            </a:pPr>
-            <a:r>
-              <a:rPr lang="en-US" sz="1300" dirty="0">
-                <a:solidFill>
-                  <a:srgbClr val="FFFFFF"/>
-                </a:solidFill>
-              </a:rPr>
-              <a:t>Analyst 4 (communications) card</a:t>
-            </a:r>
-            <a:endParaRPr lang="en-US" sz="1300" dirty="0"/>
-          </a:p>
-        </p:txBody>
-      </p:sp>
-      <p:sp>
-        <p:nvSpPr>
-          <p:cNvPr id="8" name="Shape 6"/>
+            <a:pPr marL="0" indent="0">
+              <a:buNone/>
+            </a:pPr>
+            <a:r>
+              <a:rPr lang="en-US" sz="1000" dirty="0">
+                <a:solidFill>
+                  <a:schemeClr val="tx1"/>
+                </a:solidFill>
+              </a:rPr>
+              <a:t>Write down three or four candidate weight sets now (for example market 0.6 / 0.5 / 0.7 with the rest redistributed). Score every set on every live decision with the same log score and Brier. The live set changes only by amendment, on that record. Weights stop being judgement without ever being fitted to the past.</a:t>
+            </a:r>
+            <a:endParaRPr lang="en-US" sz="1000" dirty="0"/>
+          </a:p>
+        </p:txBody>
+      </p:sp>
+      <p:sp>
+        <p:nvSpPr>
+          <p:cNvPr id="10" name="Shape 7"/>
           <p:cNvSpPr/>
           <p:nvPr/>
         </p:nvSpPr>
         <p:spPr>
           <a:xfrm>
-            <a:off x="4297680" y="1737360"/>
-            <a:ext cx="3520440" cy="3200400"/>
+            <a:off x="6217920" y="1783080"/>
+            <a:ext cx="5440680" cy="1325880"/>
           </a:xfrm>
           <a:prstGeom prst="roundRect">
             <a:avLst>
-              <a:gd name="adj" fmla="val 3429"/>
-            </a:avLst>
-          </a:prstGeom>
-          <a:solidFill>
-            <a:srgbClr val="1E2761"/>
-          </a:solidFill>
-          <a:ln w="12700">
-            <a:solidFill>
-              <a:srgbClr val="1E2761"/>
-            </a:solidFill>
-            <a:prstDash val="solid"/>
-          </a:ln>
-        </p:spPr>
-      </p:sp>
-      <p:sp>
-        <p:nvSpPr>
-          <p:cNvPr id="9" name="Text 7"/>
-          <p:cNvSpPr txBox="1"/>
-          <p:nvPr/>
-        </p:nvSpPr>
-        <p:spPr>
-          <a:xfrm>
-            <a:off x="4572000" y="1920240"/>
-            <a:ext cx="2926080" cy="457200"/>
-          </a:xfrm>
-          <a:prstGeom prst="rect">
-            <a:avLst/>
-          </a:prstGeom>
-          <a:noFill/>
-          <a:ln/>
-        </p:spPr>
-        <p:txBody>
-          <a:bodyPr wrap="square" lIns="0" tIns="0" rIns="0" bIns="0" rtlCol="0" anchor="ctr"/>
-          <a:lstStyle/>
-          <a:p>
-            <a:pPr marL="0" indent="0">
-              <a:buNone/>
-            </a:pPr>
-            <a:r>
-              <a:rPr lang="en-US" sz="1800" b="1" dirty="0">
-                <a:solidFill>
-                  <a:srgbClr val="E9B44C"/>
-                </a:solidFill>
-              </a:rPr>
-              <a:t>Point at</a:t>
-            </a:r>
-            <a:endParaRPr lang="en-US" sz="1800" dirty="0"/>
-          </a:p>
-        </p:txBody>
-      </p:sp>
-      <p:sp>
-        <p:nvSpPr>
-          <p:cNvPr id="10" name="Text 8"/>
-          <p:cNvSpPr txBox="1"/>
-          <p:nvPr/>
-        </p:nvSpPr>
-        <p:spPr>
-          <a:xfrm>
-            <a:off x="4572000" y="2468880"/>
-            <a:ext cx="2971800" cy="2377440"/>
-          </a:xfrm>
-          <a:prstGeom prst="rect">
-            <a:avLst/>
-          </a:prstGeom>
-          <a:noFill/>
-          <a:ln/>
-        </p:spPr>
-        <p:txBody>
-          <a:bodyPr wrap="square" lIns="0" tIns="0" rIns="0" bIns="0" rtlCol="0" anchor="t"/>
-          <a:lstStyle/>
-          <a:p>
-            <a:pPr marL="342900" indent="-342900">
-              <a:spcAft>
-                <a:spcPts val="800"/>
-              </a:spcAft>
-              <a:buSzPct val="100000"/>
-              <a:buChar char="•"/>
-            </a:pPr>
-            <a:r>
-              <a:rPr lang="en-US" sz="1300" dirty="0">
-                <a:solidFill>
-                  <a:srgbClr val="FFFFFF"/>
-                </a:solidFill>
-              </a:rPr>
-              <a:t>Analyst 1: cut 25 at 57%, numbers from memory flagged</a:t>
-            </a:r>
-            <a:endParaRPr lang="en-US" sz="1300" dirty="0"/>
-          </a:p>
-          <a:p>
-            <a:pPr marL="342900" indent="-342900">
-              <a:spcAft>
-                <a:spcPts val="800"/>
-              </a:spcAft>
-              <a:buSzPct val="100000"/>
-              <a:buChar char="•"/>
-            </a:pPr>
-            <a:r>
-              <a:rPr lang="en-US" sz="1300" dirty="0">
-                <a:solidFill>
-                  <a:srgbClr val="FFFFFF"/>
-                </a:solidFill>
-              </a:rPr>
-              <a:t>Analyst 4: the lean, grounded, leaked, watch-outs badges; one claim with its quote and the 'quote verified' mark</a:t>
-            </a:r>
-            <a:endParaRPr lang="en-US" sz="1300" dirty="0"/>
-          </a:p>
-          <a:p>
-            <a:pPr marL="342900" indent="-342900">
-              <a:spcAft>
-                <a:spcPts val="800"/>
-              </a:spcAft>
-              <a:buSzPct val="100000"/>
-              <a:buChar char="•"/>
-            </a:pPr>
-            <a:r>
-              <a:rPr lang="en-US" sz="1300" dirty="0">
-                <a:solidFill>
-                  <a:srgbClr val="FFFFFF"/>
-                </a:solidFill>
-              </a:rPr>
-              <a:t>Hover a badge for its definition</a:t>
-            </a:r>
-            <a:endParaRPr lang="en-US" sz="1300" dirty="0"/>
-          </a:p>
-        </p:txBody>
-      </p:sp>
-      <p:sp>
-        <p:nvSpPr>
-          <p:cNvPr id="11" name="Shape 9"/>
-          <p:cNvSpPr/>
-          <p:nvPr/>
-        </p:nvSpPr>
-        <p:spPr>
-          <a:xfrm>
-            <a:off x="8046720" y="1737360"/>
-            <a:ext cx="3520440" cy="3200400"/>
-          </a:xfrm>
-          <a:prstGeom prst="roundRect">
-            <a:avLst>
-              <a:gd name="adj" fmla="val 3429"/>
-            </a:avLst>
-          </a:prstGeom>
-          <a:solidFill>
-            <a:srgbClr val="1E2761"/>
-          </a:solidFill>
-          <a:ln w="12700">
-            <a:solidFill>
-              <a:srgbClr val="1E2761"/>
-            </a:solidFill>
-            <a:prstDash val="solid"/>
-          </a:ln>
-        </p:spPr>
-      </p:sp>
-      <p:sp>
-        <p:nvSpPr>
-          <p:cNvPr id="12" name="Text 10"/>
-          <p:cNvSpPr txBox="1"/>
-          <p:nvPr/>
-        </p:nvSpPr>
-        <p:spPr>
-          <a:xfrm>
-            <a:off x="8321040" y="1920240"/>
-            <a:ext cx="2926080" cy="457200"/>
-          </a:xfrm>
-          <a:prstGeom prst="rect">
-            <a:avLst/>
-          </a:prstGeom>
-          <a:noFill/>
-          <a:ln/>
-        </p:spPr>
-        <p:txBody>
-          <a:bodyPr wrap="square" lIns="0" tIns="0" rIns="0" bIns="0" rtlCol="0" anchor="ctr"/>
-          <a:lstStyle/>
-          <a:p>
-            <a:pPr marL="0" indent="0">
-              <a:buNone/>
-            </a:pPr>
-            <a:r>
-              <a:rPr lang="en-US" sz="1800" b="1" dirty="0">
-                <a:solidFill>
-                  <a:srgbClr val="E9B44C"/>
-                </a:solidFill>
-              </a:rPr>
-              <a:t>Say</a:t>
-            </a:r>
-            <a:endParaRPr lang="en-US" sz="1800" dirty="0"/>
-          </a:p>
-        </p:txBody>
-      </p:sp>
-      <p:sp>
-        <p:nvSpPr>
-          <p:cNvPr id="13" name="Text 11"/>
-          <p:cNvSpPr txBox="1"/>
-          <p:nvPr/>
-        </p:nvSpPr>
-        <p:spPr>
-          <a:xfrm>
-            <a:off x="8321040" y="2468880"/>
-            <a:ext cx="2971800" cy="2377440"/>
-          </a:xfrm>
-          <a:prstGeom prst="rect">
-            <a:avLst/>
-          </a:prstGeom>
-          <a:noFill/>
-          <a:ln/>
-        </p:spPr>
-        <p:txBody>
-          <a:bodyPr wrap="square" lIns="0" tIns="0" rIns="0" bIns="0" rtlCol="0" anchor="t"/>
-          <a:lstStyle/>
-          <a:p>
-            <a:pPr marL="342900" indent="-342900">
-              <a:spcAft>
-                <a:spcPts val="800"/>
-              </a:spcAft>
-              <a:buSzPct val="100000"/>
-              <a:buChar char="•"/>
-            </a:pPr>
-            <a:r>
-              <a:rPr lang="en-US" sz="1300" dirty="0">
-                <a:solidFill>
-                  <a:srgbClr val="FFFFFF"/>
-                </a:solidFill>
-              </a:rPr>
-              <a:t>Every claim you see has a quote that code found character for character in the item named.</a:t>
-            </a:r>
-            <a:endParaRPr lang="en-US" sz="1300" dirty="0"/>
-          </a:p>
-          <a:p>
-            <a:pPr marL="342900" indent="-342900">
-              <a:spcAft>
-                <a:spcPts val="800"/>
-              </a:spcAft>
-              <a:buSzPct val="100000"/>
-              <a:buChar char="•"/>
-            </a:pPr>
-            <a:r>
-              <a:rPr lang="en-US" sz="1300" dirty="0">
-                <a:solidFill>
-                  <a:srgbClr val="FFFFFF"/>
-                </a:solidFill>
-              </a:rPr>
-              <a:t>The naive analyst still thinks the Fed is cutting. Same model, no evidence.</a:t>
-            </a:r>
-            <a:endParaRPr lang="en-US" sz="1300" dirty="0"/>
-          </a:p>
-        </p:txBody>
-      </p:sp>
-    </p:spTree>
-  </p:cSld>
-  <p:clrMapOvr>
-    <a:masterClrMapping/>
-  </p:clrMapOvr>
-</p:sld>
-</file>
-
-<file path=ppt/slides/slide17.xml><?xml version="1.0" encoding="utf-8"?>
-<p:sld xmlns:a="http://schemas.openxmlformats.org/drawingml/2006/main" xmlns:r="http://schemas.openxmlformats.org/officeDocument/2006/relationships" xmlns:p="http://schemas.openxmlformats.org/presentationml/2006/main">
-  <p:cSld name="Slide 17">
-    <p:spTree>
-      <p:nvGrpSpPr>
-        <p:cNvPr id="1" name=""/>
-        <p:cNvGrpSpPr/>
-        <p:nvPr/>
-      </p:nvGrpSpPr>
-      <p:grpSpPr>
-        <a:xfrm>
-          <a:off x="0" y="0"/>
-          <a:ext cx="0" cy="0"/>
-          <a:chOff x="0" y="0"/>
-          <a:chExt cx="0" cy="0"/>
-        </a:xfrm>
-      </p:grpSpPr>
-      <p:sp>
-        <p:nvSpPr>
-          <p:cNvPr id="2" name="Text 0"/>
-          <p:cNvSpPr>
-            <a:spLocks noGrp="1"/>
-          </p:cNvSpPr>
-          <p:nvPr>
-            <p:ph type="title" idx="100" hasCustomPrompt="1"/>
-          </p:nvPr>
-        </p:nvSpPr>
-        <p:spPr>
-          <a:xfrm>
-            <a:off x="548640" y="411480"/>
-            <a:ext cx="11091672" cy="822960"/>
-          </a:xfrm>
-          <a:prstGeom prst="rect">
-            <a:avLst/>
-          </a:prstGeom>
-          <a:noFill/>
-          <a:ln/>
-        </p:spPr>
-        <p:txBody>
-          <a:bodyPr wrap="square" lIns="0" tIns="0" rIns="0" bIns="0" rtlCol="0" anchor="ctr"/>
-          <a:lstStyle/>
-          <a:p>
-            <a:pPr marL="0" indent="0" algn="l">
-              <a:buNone/>
-            </a:pPr>
-            <a:r>
-              <a:rPr lang="en-US" sz="3200" b="1" dirty="0">
-                <a:solidFill>
-                  <a:schemeClr val="tx2"/>
-                </a:solidFill>
-              </a:rPr>
-              <a:t>The scorecard: eight of ten dimensions measured by code</a:t>
-            </a:r>
-            <a:endParaRPr lang="en-US" sz="3200" dirty="0"/>
-          </a:p>
-        </p:txBody>
-      </p:sp>
-      <p:sp>
-        <p:nvSpPr>
-          <p:cNvPr id="4" name="Shape 1"/>
-          <p:cNvSpPr/>
-          <p:nvPr/>
-        </p:nvSpPr>
-        <p:spPr>
-          <a:xfrm>
-            <a:off x="548640" y="1463040"/>
-            <a:ext cx="2103120" cy="960120"/>
-          </a:xfrm>
-          <a:prstGeom prst="roundRect">
-            <a:avLst>
-              <a:gd name="adj" fmla="val 11429"/>
+              <a:gd name="adj" fmla="val 8276"/>
             </a:avLst>
           </a:prstGeom>
           <a:solidFill>
@@ -12657,24 +11943,24 @@
       </p:sp>
       <p:sp>
         <p:nvSpPr>
-          <p:cNvPr id="5" name="Shape 2"/>
+          <p:cNvPr id="11" name="Shape 8"/>
           <p:cNvSpPr/>
           <p:nvPr/>
         </p:nvSpPr>
         <p:spPr>
           <a:xfrm>
-            <a:off x="685800" y="1737360"/>
+            <a:off x="6400800" y="1947672"/>
             <a:ext cx="384048" cy="384048"/>
           </a:xfrm>
           <a:prstGeom prst="ellipse">
             <a:avLst/>
           </a:prstGeom>
           <a:solidFill>
-            <a:srgbClr val="2C6E49"/>
+            <a:srgbClr val="1E2761"/>
           </a:solidFill>
           <a:ln w="12700">
             <a:solidFill>
-              <a:srgbClr val="2C6E49"/>
+              <a:srgbClr val="1E2761"/>
             </a:solidFill>
             <a:prstDash val="solid"/>
           </a:ln>
@@ -12682,13 +11968,13 @@
       </p:sp>
       <p:sp>
         <p:nvSpPr>
-          <p:cNvPr id="6" name="Text 3"/>
+          <p:cNvPr id="12" name="Text 9"/>
           <p:cNvSpPr txBox="1"/>
           <p:nvPr/>
         </p:nvSpPr>
         <p:spPr>
           <a:xfrm>
-            <a:off x="685800" y="1737360"/>
+            <a:off x="6400800" y="1947672"/>
             <a:ext cx="384048" cy="384048"/>
           </a:xfrm>
           <a:prstGeom prst="rect">
@@ -12705,27 +11991,27 @@
               <a:buNone/>
             </a:pPr>
             <a:r>
-              <a:rPr lang="en-US" sz="1000" b="1" dirty="0">
+              <a:rPr lang="en-US" sz="1400" b="1" dirty="0">
                 <a:solidFill>
                   <a:schemeClr val="bg1"/>
                 </a:solidFill>
               </a:rPr>
-              <a:t>1</a:t>
-            </a:r>
-            <a:endParaRPr lang="en-US" sz="1000" dirty="0"/>
-          </a:p>
-        </p:txBody>
-      </p:sp>
-      <p:sp>
-        <p:nvSpPr>
-          <p:cNvPr id="7" name="Text 4"/>
+              <a:t>2</a:t>
+            </a:r>
+            <a:endParaRPr lang="en-US" sz="1400" dirty="0"/>
+          </a:p>
+        </p:txBody>
+      </p:sp>
+      <p:sp>
+        <p:nvSpPr>
+          <p:cNvPr id="13" name="Text 10"/>
           <p:cNvSpPr txBox="1"/>
           <p:nvPr/>
         </p:nvSpPr>
         <p:spPr>
           <a:xfrm>
-            <a:off x="1170432" y="1572768"/>
-            <a:ext cx="1417320" cy="411480"/>
+            <a:off x="6903720" y="1892808"/>
+            <a:ext cx="4572000" cy="365760"/>
           </a:xfrm>
           <a:prstGeom prst="rect">
             <a:avLst/>
@@ -12741,27 +12027,27 @@
               <a:buNone/>
             </a:pPr>
             <a:r>
-              <a:rPr lang="en-US" sz="1200" b="1" dirty="0">
+              <a:rPr lang="en-US" sz="1300" b="1" dirty="0">
                 <a:solidFill>
                   <a:schemeClr val="tx2"/>
                 </a:solidFill>
               </a:rPr>
-              <a:t>Repeatability</a:t>
-            </a:r>
-            <a:endParaRPr lang="en-US" sz="1200" dirty="0"/>
-          </a:p>
-        </p:txBody>
-      </p:sp>
-      <p:sp>
-        <p:nvSpPr>
-          <p:cNvPr id="8" name="Text 5"/>
+              <a:t>Reasoning quality, graded by people</a:t>
+            </a:r>
+            <a:endParaRPr lang="en-US" sz="1300" dirty="0"/>
+          </a:p>
+        </p:txBody>
+      </p:sp>
+      <p:sp>
+        <p:nvSpPr>
+          <p:cNvPr id="14" name="Text 11"/>
           <p:cNvSpPr txBox="1"/>
           <p:nvPr/>
         </p:nvSpPr>
         <p:spPr>
           <a:xfrm>
-            <a:off x="1170432" y="1965960"/>
-            <a:ext cx="1417320" cy="411480"/>
+            <a:off x="6400800" y="2286000"/>
+            <a:ext cx="5074920" cy="804672"/>
           </a:xfrm>
           <a:prstGeom prst="rect">
             <a:avLst/>
@@ -12779,10 +12065,10 @@
             <a:r>
               <a:rPr lang="en-US" sz="1000" dirty="0">
                 <a:solidFill>
-                  <a:schemeClr val="accent4"/>
-                </a:solidFill>
-              </a:rPr>
-              <a:t>measured by code</a:t>
+                  <a:schemeClr val="tx1"/>
+                </a:solidFill>
+              </a:rPr>
+              <a:t>A grading form in the app: a user marks an analyst's answer from 1 to 5 on four questions (did it start from the base rate, argue both sides, say what it was unsure of, say what would prove it wrong). Twenty hand grades become the reference; a model grader is trusted only once it agrees with them. The grade becomes the tenth measured dimension and a gate on the lean.</a:t>
             </a:r>
             <a:endParaRPr lang="en-US" sz="1000" dirty="0"/>
           </a:p>
@@ -12790,18 +12076,18 @@
       </p:sp>
       <p:sp>
         <p:nvSpPr>
-          <p:cNvPr id="9" name="Shape 6"/>
+          <p:cNvPr id="15" name="Shape 12"/>
           <p:cNvSpPr/>
           <p:nvPr/>
         </p:nvSpPr>
         <p:spPr>
           <a:xfrm>
-            <a:off x="2788920" y="1463040"/>
-            <a:ext cx="2103120" cy="960120"/>
+            <a:off x="548640" y="3246120"/>
+            <a:ext cx="5440680" cy="1325880"/>
           </a:xfrm>
           <a:prstGeom prst="roundRect">
             <a:avLst>
-              <a:gd name="adj" fmla="val 11429"/>
+              <a:gd name="adj" fmla="val 8276"/>
             </a:avLst>
           </a:prstGeom>
           <a:solidFill>
@@ -12824,24 +12110,24 @@
       </p:sp>
       <p:sp>
         <p:nvSpPr>
-          <p:cNvPr id="10" name="Shape 7"/>
+          <p:cNvPr id="16" name="Shape 13"/>
           <p:cNvSpPr/>
           <p:nvPr/>
         </p:nvSpPr>
         <p:spPr>
           <a:xfrm>
-            <a:off x="2926080" y="1737360"/>
+            <a:off x="731520" y="3410712"/>
             <a:ext cx="384048" cy="384048"/>
           </a:xfrm>
           <a:prstGeom prst="ellipse">
             <a:avLst/>
           </a:prstGeom>
           <a:solidFill>
-            <a:srgbClr val="2C6E49"/>
+            <a:srgbClr val="1E2761"/>
           </a:solidFill>
           <a:ln w="12700">
             <a:solidFill>
-              <a:srgbClr val="2C6E49"/>
+              <a:srgbClr val="1E2761"/>
             </a:solidFill>
             <a:prstDash val="solid"/>
           </a:ln>
@@ -12849,13 +12135,13 @@
       </p:sp>
       <p:sp>
         <p:nvSpPr>
-          <p:cNvPr id="11" name="Text 8"/>
+          <p:cNvPr id="17" name="Text 14"/>
           <p:cNvSpPr txBox="1"/>
           <p:nvPr/>
         </p:nvSpPr>
         <p:spPr>
           <a:xfrm>
-            <a:off x="2926080" y="1737360"/>
+            <a:off x="731520" y="3410712"/>
             <a:ext cx="384048" cy="384048"/>
           </a:xfrm>
           <a:prstGeom prst="rect">
@@ -12872,27 +12158,27 @@
               <a:buNone/>
             </a:pPr>
             <a:r>
-              <a:rPr lang="en-US" sz="1000" b="1" dirty="0">
+              <a:rPr lang="en-US" sz="1400" b="1" dirty="0">
                 <a:solidFill>
                   <a:schemeClr val="bg1"/>
                 </a:solidFill>
               </a:rPr>
-              <a:t>2</a:t>
-            </a:r>
-            <a:endParaRPr lang="en-US" sz="1000" dirty="0"/>
-          </a:p>
-        </p:txBody>
-      </p:sp>
-      <p:sp>
-        <p:nvSpPr>
-          <p:cNvPr id="12" name="Text 9"/>
+              <a:t>3</a:t>
+            </a:r>
+            <a:endParaRPr lang="en-US" sz="1400" dirty="0"/>
+          </a:p>
+        </p:txBody>
+      </p:sp>
+      <p:sp>
+        <p:nvSpPr>
+          <p:cNvPr id="18" name="Text 15"/>
           <p:cNvSpPr txBox="1"/>
           <p:nvPr/>
         </p:nvSpPr>
         <p:spPr>
           <a:xfrm>
-            <a:off x="3410712" y="1572768"/>
-            <a:ext cx="1417320" cy="411480"/>
+            <a:off x="1234440" y="3355848"/>
+            <a:ext cx="4572000" cy="365760"/>
           </a:xfrm>
           <a:prstGeom prst="rect">
             <a:avLst/>
@@ -12908,27 +12194,27 @@
               <a:buNone/>
             </a:pPr>
             <a:r>
-              <a:rPr lang="en-US" sz="1200" b="1" dirty="0">
+              <a:rPr lang="en-US" sz="1300" b="1" dirty="0">
                 <a:solidFill>
                   <a:schemeClr val="tx2"/>
                 </a:solidFill>
               </a:rPr>
-              <a:t>Quotes verified</a:t>
-            </a:r>
-            <a:endParaRPr lang="en-US" sz="1200" dirty="0"/>
-          </a:p>
-        </p:txBody>
-      </p:sp>
-      <p:sp>
-        <p:nvSpPr>
-          <p:cNvPr id="13" name="Text 10"/>
+              <a:t>An events agent for regime shifts</a:t>
+            </a:r>
+            <a:endParaRPr lang="en-US" sz="1300" dirty="0"/>
+          </a:p>
+        </p:txBody>
+      </p:sp>
+      <p:sp>
+        <p:nvSpPr>
+          <p:cNvPr id="19" name="Text 16"/>
           <p:cNvSpPr txBox="1"/>
           <p:nvPr/>
         </p:nvSpPr>
         <p:spPr>
           <a:xfrm>
-            <a:off x="3410712" y="1965960"/>
-            <a:ext cx="1417320" cy="411480"/>
+            <a:off x="731520" y="3749040"/>
+            <a:ext cx="5074920" cy="804672"/>
           </a:xfrm>
           <a:prstGeom prst="rect">
             <a:avLst/>
@@ -12946,10 +12232,10 @@
             <a:r>
               <a:rPr lang="en-US" sz="1000" dirty="0">
                 <a:solidFill>
-                  <a:schemeClr val="accent4"/>
-                </a:solidFill>
-              </a:rPr>
-              <a:t>measured by code</a:t>
+                  <a:schemeClr val="tx1"/>
+                </a:solidFill>
+              </a:rPr>
+              <a:t>1987, 1998, 2008, 2020: the Fed cut on financial stress, not the data the models read. A watch-out agent that scans for bank failures, funding stress and market dislocations and raises a typed watch-out every analyst must answer.</a:t>
             </a:r>
             <a:endParaRPr lang="en-US" sz="1000" dirty="0"/>
           </a:p>
@@ -12957,18 +12243,18 @@
       </p:sp>
       <p:sp>
         <p:nvSpPr>
-          <p:cNvPr id="14" name="Shape 11"/>
+          <p:cNvPr id="20" name="Shape 17"/>
           <p:cNvSpPr/>
           <p:nvPr/>
         </p:nvSpPr>
         <p:spPr>
           <a:xfrm>
-            <a:off x="5029200" y="1463040"/>
-            <a:ext cx="2103120" cy="960120"/>
+            <a:off x="6217920" y="3246120"/>
+            <a:ext cx="5440680" cy="1325880"/>
           </a:xfrm>
           <a:prstGeom prst="roundRect">
             <a:avLst>
-              <a:gd name="adj" fmla="val 11429"/>
+              <a:gd name="adj" fmla="val 8276"/>
             </a:avLst>
           </a:prstGeom>
           <a:solidFill>
@@ -12991,24 +12277,24 @@
       </p:sp>
       <p:sp>
         <p:nvSpPr>
-          <p:cNvPr id="15" name="Shape 12"/>
+          <p:cNvPr id="21" name="Shape 18"/>
           <p:cNvSpPr/>
           <p:nvPr/>
         </p:nvSpPr>
         <p:spPr>
           <a:xfrm>
-            <a:off x="5166360" y="1737360"/>
+            <a:off x="6400800" y="3410712"/>
             <a:ext cx="384048" cy="384048"/>
           </a:xfrm>
           <a:prstGeom prst="ellipse">
             <a:avLst/>
           </a:prstGeom>
           <a:solidFill>
-            <a:srgbClr val="2C6E49"/>
+            <a:srgbClr val="1E2761"/>
           </a:solidFill>
           <a:ln w="12700">
             <a:solidFill>
-              <a:srgbClr val="2C6E49"/>
+              <a:srgbClr val="1E2761"/>
             </a:solidFill>
             <a:prstDash val="solid"/>
           </a:ln>
@@ -13016,13 +12302,13 @@
       </p:sp>
       <p:sp>
         <p:nvSpPr>
-          <p:cNvPr id="16" name="Text 13"/>
+          <p:cNvPr id="22" name="Text 19"/>
           <p:cNvSpPr txBox="1"/>
           <p:nvPr/>
         </p:nvSpPr>
         <p:spPr>
           <a:xfrm>
-            <a:off x="5166360" y="1737360"/>
+            <a:off x="6400800" y="3410712"/>
             <a:ext cx="384048" cy="384048"/>
           </a:xfrm>
           <a:prstGeom prst="rect">
@@ -13039,27 +12325,27 @@
               <a:buNone/>
             </a:pPr>
             <a:r>
-              <a:rPr lang="en-US" sz="1000" b="1" dirty="0">
+              <a:rPr lang="en-US" sz="1400" b="1" dirty="0">
                 <a:solidFill>
                   <a:schemeClr val="bg1"/>
                 </a:solidFill>
               </a:rPr>
-              <a:t>3</a:t>
-            </a:r>
-            <a:endParaRPr lang="en-US" sz="1000" dirty="0"/>
-          </a:p>
-        </p:txBody>
-      </p:sp>
-      <p:sp>
-        <p:nvSpPr>
-          <p:cNvPr id="17" name="Text 14"/>
+              <a:t>4</a:t>
+            </a:r>
+            <a:endParaRPr lang="en-US" sz="1400" dirty="0"/>
+          </a:p>
+        </p:txBody>
+      </p:sp>
+      <p:sp>
+        <p:nvSpPr>
+          <p:cNvPr id="23" name="Text 20"/>
           <p:cNvSpPr txBox="1"/>
           <p:nvPr/>
         </p:nvSpPr>
         <p:spPr>
           <a:xfrm>
-            <a:off x="5650992" y="1572768"/>
-            <a:ext cx="1417320" cy="411480"/>
+            <a:off x="6903720" y="3355848"/>
+            <a:ext cx="4572000" cy="365760"/>
           </a:xfrm>
           <a:prstGeom prst="rect">
             <a:avLst/>
@@ -13075,27 +12361,27 @@
               <a:buNone/>
             </a:pPr>
             <a:r>
-              <a:rPr lang="en-US" sz="1200" b="1" dirty="0">
+              <a:rPr lang="en-US" sz="1300" b="1" dirty="0">
                 <a:solidFill>
                   <a:schemeClr val="tx2"/>
                 </a:solidFill>
               </a:rPr>
-              <a:t>Numbers from memory</a:t>
-            </a:r>
-            <a:endParaRPr lang="en-US" sz="1200" dirty="0"/>
-          </a:p>
-        </p:txBody>
-      </p:sp>
-      <p:sp>
-        <p:nvSpPr>
-          <p:cNvPr id="18" name="Text 15"/>
+              <a:t>A second model family</a:t>
+            </a:r>
+            <a:endParaRPr lang="en-US" sz="1300" dirty="0"/>
+          </a:p>
+        </p:txBody>
+      </p:sp>
+      <p:sp>
+        <p:nvSpPr>
+          <p:cNvPr id="24" name="Text 21"/>
           <p:cNvSpPr txBox="1"/>
           <p:nvPr/>
         </p:nvSpPr>
         <p:spPr>
           <a:xfrm>
-            <a:off x="5650992" y="1965960"/>
-            <a:ext cx="1417320" cy="411480"/>
+            <a:off x="6400800" y="3749040"/>
+            <a:ext cx="5074920" cy="804672"/>
           </a:xfrm>
           <a:prstGeom prst="rect">
             <a:avLst/>
@@ -13113,10 +12399,10 @@
             <a:r>
               <a:rPr lang="en-US" sz="1000" dirty="0">
                 <a:solidFill>
-                  <a:schemeClr val="accent4"/>
-                </a:solidFill>
-              </a:rPr>
-              <a:t>measured by code</a:t>
+                  <a:schemeClr val="tx1"/>
+                </a:solidFill>
+              </a:rPr>
+              <a:t>The same harness, the same snapshots, a different language model. If the ladder reads the same, the harness is doing the work, not the model.</a:t>
             </a:r>
             <a:endParaRPr lang="en-US" sz="1000" dirty="0"/>
           </a:p>
@@ -13124,18 +12410,18 @@
       </p:sp>
       <p:sp>
         <p:nvSpPr>
-          <p:cNvPr id="19" name="Shape 16"/>
+          <p:cNvPr id="25" name="Shape 22"/>
           <p:cNvSpPr/>
           <p:nvPr/>
         </p:nvSpPr>
         <p:spPr>
           <a:xfrm>
-            <a:off x="7269480" y="1463040"/>
-            <a:ext cx="2103120" cy="960120"/>
+            <a:off x="548640" y="4709160"/>
+            <a:ext cx="5440680" cy="1325880"/>
           </a:xfrm>
           <a:prstGeom prst="roundRect">
             <a:avLst>
-              <a:gd name="adj" fmla="val 11429"/>
+              <a:gd name="adj" fmla="val 8276"/>
             </a:avLst>
           </a:prstGeom>
           <a:solidFill>
@@ -13158,24 +12444,24 @@
       </p:sp>
       <p:sp>
         <p:nvSpPr>
-          <p:cNvPr id="20" name="Shape 17"/>
+          <p:cNvPr id="26" name="Shape 23"/>
           <p:cNvSpPr/>
           <p:nvPr/>
         </p:nvSpPr>
         <p:spPr>
           <a:xfrm>
-            <a:off x="7406640" y="1737360"/>
+            <a:off x="731520" y="4873752"/>
             <a:ext cx="384048" cy="384048"/>
           </a:xfrm>
           <a:prstGeom prst="ellipse">
             <a:avLst/>
           </a:prstGeom>
           <a:solidFill>
-            <a:srgbClr val="2C6E49"/>
+            <a:srgbClr val="1E2761"/>
           </a:solidFill>
           <a:ln w="12700">
             <a:solidFill>
-              <a:srgbClr val="2C6E49"/>
+              <a:srgbClr val="1E2761"/>
             </a:solidFill>
             <a:prstDash val="solid"/>
           </a:ln>
@@ -13183,13 +12469,13 @@
       </p:sp>
       <p:sp>
         <p:nvSpPr>
-          <p:cNvPr id="21" name="Text 18"/>
+          <p:cNvPr id="27" name="Text 24"/>
           <p:cNvSpPr txBox="1"/>
           <p:nvPr/>
         </p:nvSpPr>
         <p:spPr>
           <a:xfrm>
-            <a:off x="7406640" y="1737360"/>
+            <a:off x="731520" y="4873752"/>
             <a:ext cx="384048" cy="384048"/>
           </a:xfrm>
           <a:prstGeom prst="rect">
@@ -13206,27 +12492,27 @@
               <a:buNone/>
             </a:pPr>
             <a:r>
-              <a:rPr lang="en-US" sz="1000" b="1" dirty="0">
+              <a:rPr lang="en-US" sz="1400" b="1" dirty="0">
                 <a:solidFill>
                   <a:schemeClr val="bg1"/>
                 </a:solidFill>
               </a:rPr>
-              <a:t>4</a:t>
-            </a:r>
-            <a:endParaRPr lang="en-US" sz="1000" dirty="0"/>
-          </a:p>
-        </p:txBody>
-      </p:sp>
-      <p:sp>
-        <p:nvSpPr>
-          <p:cNvPr id="22" name="Text 19"/>
+              <a:t>5</a:t>
+            </a:r>
+            <a:endParaRPr lang="en-US" sz="1400" dirty="0"/>
+          </a:p>
+        </p:txBody>
+      </p:sp>
+      <p:sp>
+        <p:nvSpPr>
+          <p:cNvPr id="28" name="Text 25"/>
           <p:cNvSpPr txBox="1"/>
           <p:nvPr/>
         </p:nvSpPr>
         <p:spPr>
           <a:xfrm>
-            <a:off x="7891272" y="1572768"/>
-            <a:ext cx="1417320" cy="411480"/>
+            <a:off x="1234440" y="4818888"/>
+            <a:ext cx="4572000" cy="365760"/>
           </a:xfrm>
           <a:prstGeom prst="rect">
             <a:avLst/>
@@ -13242,27 +12528,27 @@
               <a:buNone/>
             </a:pPr>
             <a:r>
-              <a:rPr lang="en-US" sz="1200" b="1" dirty="0">
+              <a:rPr lang="en-US" sz="1300" b="1" dirty="0">
                 <a:solidFill>
                   <a:schemeClr val="tx2"/>
                 </a:solidFill>
               </a:rPr>
-              <a:t>Shock direction</a:t>
-            </a:r>
-            <a:endParaRPr lang="en-US" sz="1200" dirty="0"/>
-          </a:p>
-        </p:txBody>
-      </p:sp>
-      <p:sp>
-        <p:nvSpPr>
-          <p:cNvPr id="23" name="Text 20"/>
+              <a:t>Other central banks and geographies</a:t>
+            </a:r>
+            <a:endParaRPr lang="en-US" sz="1300" dirty="0"/>
+          </a:p>
+        </p:txBody>
+      </p:sp>
+      <p:sp>
+        <p:nvSpPr>
+          <p:cNvPr id="29" name="Text 26"/>
           <p:cNvSpPr txBox="1"/>
           <p:nvPr/>
         </p:nvSpPr>
         <p:spPr>
           <a:xfrm>
-            <a:off x="7891272" y="1965960"/>
-            <a:ext cx="1417320" cy="411480"/>
+            <a:off x="731520" y="5212080"/>
+            <a:ext cx="5074920" cy="804672"/>
           </a:xfrm>
           <a:prstGeom prst="rect">
             <a:avLst/>
@@ -13280,10 +12566,10 @@
             <a:r>
               <a:rPr lang="en-US" sz="1000" dirty="0">
                 <a:solidFill>
-                  <a:schemeClr val="accent4"/>
-                </a:solidFill>
-              </a:rPr>
-              <a:t>measured by code</a:t>
+                  <a:schemeClr val="tx1"/>
+                </a:solidFill>
+              </a:rPr>
+              <a:t>ECB, Bank of England, MAS. The chain needs four things: a meeting calendar, a policy-rate series, the bank's own statements and minutes, and a futures or swap curve. The scorecard, the ledger and the analysts transfer unchanged; only the evidence sources change.</a:t>
             </a:r>
             <a:endParaRPr lang="en-US" sz="1000" dirty="0"/>
           </a:p>
@@ -13291,18 +12577,18 @@
       </p:sp>
       <p:sp>
         <p:nvSpPr>
-          <p:cNvPr id="24" name="Shape 21"/>
+          <p:cNvPr id="30" name="Shape 27"/>
           <p:cNvSpPr/>
           <p:nvPr/>
         </p:nvSpPr>
         <p:spPr>
           <a:xfrm>
-            <a:off x="9509760" y="1463040"/>
-            <a:ext cx="2103120" cy="960120"/>
+            <a:off x="6217920" y="4709160"/>
+            <a:ext cx="5440680" cy="1325880"/>
           </a:xfrm>
           <a:prstGeom prst="roundRect">
             <a:avLst>
-              <a:gd name="adj" fmla="val 11429"/>
+              <a:gd name="adj" fmla="val 8276"/>
             </a:avLst>
           </a:prstGeom>
           <a:solidFill>
@@ -13325,24 +12611,24 @@
       </p:sp>
       <p:sp>
         <p:nvSpPr>
-          <p:cNvPr id="25" name="Shape 22"/>
+          <p:cNvPr id="31" name="Shape 28"/>
           <p:cNvSpPr/>
           <p:nvPr/>
         </p:nvSpPr>
         <p:spPr>
           <a:xfrm>
-            <a:off x="9646920" y="1737360"/>
+            <a:off x="6400800" y="4873752"/>
             <a:ext cx="384048" cy="384048"/>
           </a:xfrm>
           <a:prstGeom prst="ellipse">
             <a:avLst/>
           </a:prstGeom>
           <a:solidFill>
-            <a:srgbClr val="2C6E49"/>
+            <a:srgbClr val="1E2761"/>
           </a:solidFill>
           <a:ln w="12700">
             <a:solidFill>
-              <a:srgbClr val="2C6E49"/>
+              <a:srgbClr val="1E2761"/>
             </a:solidFill>
             <a:prstDash val="solid"/>
           </a:ln>
@@ -13350,13 +12636,13 @@
       </p:sp>
       <p:sp>
         <p:nvSpPr>
-          <p:cNvPr id="26" name="Text 23"/>
+          <p:cNvPr id="32" name="Text 29"/>
           <p:cNvSpPr txBox="1"/>
           <p:nvPr/>
         </p:nvSpPr>
         <p:spPr>
           <a:xfrm>
-            <a:off x="9646920" y="1737360"/>
+            <a:off x="6400800" y="4873752"/>
             <a:ext cx="384048" cy="384048"/>
           </a:xfrm>
           <a:prstGeom prst="rect">
@@ -13373,27 +12659,27 @@
               <a:buNone/>
             </a:pPr>
             <a:r>
-              <a:rPr lang="en-US" sz="1000" b="1" dirty="0">
+              <a:rPr lang="en-US" sz="1400" b="1" dirty="0">
                 <a:solidFill>
                   <a:schemeClr val="bg1"/>
                 </a:solidFill>
               </a:rPr>
-              <a:t>5</a:t>
-            </a:r>
-            <a:endParaRPr lang="en-US" sz="1000" dirty="0"/>
-          </a:p>
-        </p:txBody>
-      </p:sp>
-      <p:sp>
-        <p:nvSpPr>
-          <p:cNvPr id="27" name="Text 24"/>
+              <a:t>6</a:t>
+            </a:r>
+            <a:endParaRPr lang="en-US" sz="1400" dirty="0"/>
+          </a:p>
+        </p:txBody>
+      </p:sp>
+      <p:sp>
+        <p:nvSpPr>
+          <p:cNvPr id="33" name="Text 30"/>
           <p:cNvSpPr txBox="1"/>
           <p:nvPr/>
         </p:nvSpPr>
         <p:spPr>
           <a:xfrm>
-            <a:off x="10131552" y="1572768"/>
-            <a:ext cx="1417320" cy="411480"/>
+            <a:off x="6903720" y="4818888"/>
+            <a:ext cx="4572000" cy="365760"/>
           </a:xfrm>
           <a:prstGeom prst="rect">
             <a:avLst/>
@@ -13409,27 +12695,27 @@
               <a:buNone/>
             </a:pPr>
             <a:r>
-              <a:rPr lang="en-US" sz="1200" b="1" dirty="0">
+              <a:rPr lang="en-US" sz="1300" b="1" dirty="0">
                 <a:solidFill>
                   <a:schemeClr val="tx2"/>
                 </a:solidFill>
               </a:rPr>
-              <a:t>Noise invariance</a:t>
-            </a:r>
-            <a:endParaRPr lang="en-US" sz="1200" dirty="0"/>
-          </a:p>
-        </p:txBody>
-      </p:sp>
-      <p:sp>
-        <p:nvSpPr>
-          <p:cNvPr id="28" name="Text 25"/>
+              <a:t>Better classical models</a:t>
+            </a:r>
+            <a:endParaRPr lang="en-US" sz="1300" dirty="0"/>
+          </a:p>
+        </p:txBody>
+      </p:sp>
+      <p:sp>
+        <p:nvSpPr>
+          <p:cNvPr id="34" name="Text 31"/>
           <p:cNvSpPr txBox="1"/>
           <p:nvPr/>
         </p:nvSpPr>
         <p:spPr>
           <a:xfrm>
-            <a:off x="10131552" y="1965960"/>
-            <a:ext cx="1417320" cy="411480"/>
+            <a:off x="6400800" y="5212080"/>
+            <a:ext cx="5074920" cy="804672"/>
           </a:xfrm>
           <a:prstGeom prst="rect">
             <a:avLst/>
@@ -13447,1175 +12733,12 @@
             <a:r>
               <a:rPr lang="en-US" sz="1000" dirty="0">
                 <a:solidFill>
-                  <a:schemeClr val="accent4"/>
-                </a:solidFill>
-              </a:rPr>
-              <a:t>measured by code</a:t>
+                  <a:schemeClr val="tx1"/>
+                </a:solidFill>
+              </a:rPr>
+              <a:t>The probit's successor: features written down before fitting, a regularised ordinal model, a reliability check beside the log score, and the expanding window as the only judge. A regularised boosted model as one pre-registered candidate. About 130 usable decisions, 68% holds: small models, honestly tested, not big ones.</a:t>
             </a:r>
             <a:endParaRPr lang="en-US" sz="1000" dirty="0"/>
-          </a:p>
-        </p:txBody>
-      </p:sp>
-      <p:sp>
-        <p:nvSpPr>
-          <p:cNvPr id="29" name="Shape 26"/>
-          <p:cNvSpPr/>
-          <p:nvPr/>
-        </p:nvSpPr>
-        <p:spPr>
-          <a:xfrm>
-            <a:off x="548640" y="2606040"/>
-            <a:ext cx="2103120" cy="960120"/>
-          </a:xfrm>
-          <a:prstGeom prst="roundRect">
-            <a:avLst>
-              <a:gd name="adj" fmla="val 11429"/>
-            </a:avLst>
-          </a:prstGeom>
-          <a:solidFill>
-            <a:srgbClr val="EEF2F7"/>
-          </a:solidFill>
-          <a:ln w="12700">
-            <a:solidFill>
-              <a:srgbClr val="EEF2F7"/>
-            </a:solidFill>
-            <a:prstDash val="solid"/>
-          </a:ln>
-          <a:effectLst>
-            <a:outerShdw blurRad="50800" dist="12700" dir="5400000" algn="bl" rotWithShape="0">
-              <a:srgbClr val="000000">
-                <a:alpha val="8000"/>
-              </a:srgbClr>
-            </a:outerShdw>
-          </a:effectLst>
-        </p:spPr>
-      </p:sp>
-      <p:sp>
-        <p:nvSpPr>
-          <p:cNvPr id="30" name="Shape 27"/>
-          <p:cNvSpPr/>
-          <p:nvPr/>
-        </p:nvSpPr>
-        <p:spPr>
-          <a:xfrm>
-            <a:off x="685800" y="2880360"/>
-            <a:ext cx="384048" cy="384048"/>
-          </a:xfrm>
-          <a:prstGeom prst="ellipse">
-            <a:avLst/>
-          </a:prstGeom>
-          <a:solidFill>
-            <a:srgbClr val="E9B44C"/>
-          </a:solidFill>
-          <a:ln w="12700">
-            <a:solidFill>
-              <a:srgbClr val="E9B44C"/>
-            </a:solidFill>
-            <a:prstDash val="solid"/>
-          </a:ln>
-        </p:spPr>
-      </p:sp>
-      <p:sp>
-        <p:nvSpPr>
-          <p:cNvPr id="31" name="Text 28"/>
-          <p:cNvSpPr txBox="1"/>
-          <p:nvPr/>
-        </p:nvSpPr>
-        <p:spPr>
-          <a:xfrm>
-            <a:off x="685800" y="2880360"/>
-            <a:ext cx="384048" cy="384048"/>
-          </a:xfrm>
-          <a:prstGeom prst="rect">
-            <a:avLst/>
-          </a:prstGeom>
-          <a:noFill/>
-          <a:ln/>
-        </p:spPr>
-        <p:txBody>
-          <a:bodyPr wrap="square" lIns="0" tIns="0" rIns="0" bIns="0" rtlCol="0" anchor="ctr"/>
-          <a:lstStyle/>
-          <a:p>
-            <a:pPr marL="0" indent="0" algn="ctr">
-              <a:buNone/>
-            </a:pPr>
-            <a:r>
-              <a:rPr lang="en-US" sz="1000" b="1" dirty="0">
-                <a:solidFill>
-                  <a:schemeClr val="bg1"/>
-                </a:solidFill>
-              </a:rPr>
-              <a:t>6</a:t>
-            </a:r>
-            <a:endParaRPr lang="en-US" sz="1000" dirty="0"/>
-          </a:p>
-        </p:txBody>
-      </p:sp>
-      <p:sp>
-        <p:nvSpPr>
-          <p:cNvPr id="32" name="Text 29"/>
-          <p:cNvSpPr txBox="1"/>
-          <p:nvPr/>
-        </p:nvSpPr>
-        <p:spPr>
-          <a:xfrm>
-            <a:off x="1170432" y="2715768"/>
-            <a:ext cx="1417320" cy="411480"/>
-          </a:xfrm>
-          <a:prstGeom prst="rect">
-            <a:avLst/>
-          </a:prstGeom>
-          <a:noFill/>
-          <a:ln/>
-        </p:spPr>
-        <p:txBody>
-          <a:bodyPr wrap="square" lIns="0" tIns="0" rIns="0" bIns="0" rtlCol="0" anchor="ctr"/>
-          <a:lstStyle/>
-          <a:p>
-            <a:pPr marL="0" indent="0">
-              <a:buNone/>
-            </a:pPr>
-            <a:r>
-              <a:rPr lang="en-US" sz="1200" b="1" dirty="0">
-                <a:solidFill>
-                  <a:schemeClr val="tx2"/>
-                </a:solidFill>
-              </a:rPr>
-              <a:t>Rewording</a:t>
-            </a:r>
-            <a:endParaRPr lang="en-US" sz="1200" dirty="0"/>
-          </a:p>
-        </p:txBody>
-      </p:sp>
-      <p:sp>
-        <p:nvSpPr>
-          <p:cNvPr id="33" name="Text 30"/>
-          <p:cNvSpPr txBox="1"/>
-          <p:nvPr/>
-        </p:nvSpPr>
-        <p:spPr>
-          <a:xfrm>
-            <a:off x="1170432" y="3108960"/>
-            <a:ext cx="1417320" cy="411480"/>
-          </a:xfrm>
-          <a:prstGeom prst="rect">
-            <a:avLst/>
-          </a:prstGeom>
-          <a:noFill/>
-          <a:ln/>
-        </p:spPr>
-        <p:txBody>
-          <a:bodyPr wrap="square" lIns="0" tIns="0" rIns="0" bIns="0" rtlCol="0" anchor="t"/>
-          <a:lstStyle/>
-          <a:p>
-            <a:pPr marL="0" indent="0">
-              <a:buNone/>
-            </a:pPr>
-            <a:r>
-              <a:rPr lang="en-US" sz="1000" dirty="0">
-                <a:solidFill>
-                  <a:schemeClr val="accent4"/>
-                </a:solidFill>
-              </a:rPr>
-              <a:t>typed inputs only</a:t>
-            </a:r>
-            <a:endParaRPr lang="en-US" sz="1000" dirty="0"/>
-          </a:p>
-        </p:txBody>
-      </p:sp>
-      <p:sp>
-        <p:nvSpPr>
-          <p:cNvPr id="34" name="Shape 31"/>
-          <p:cNvSpPr/>
-          <p:nvPr/>
-        </p:nvSpPr>
-        <p:spPr>
-          <a:xfrm>
-            <a:off x="2788920" y="2606040"/>
-            <a:ext cx="2103120" cy="960120"/>
-          </a:xfrm>
-          <a:prstGeom prst="roundRect">
-            <a:avLst>
-              <a:gd name="adj" fmla="val 11429"/>
-            </a:avLst>
-          </a:prstGeom>
-          <a:solidFill>
-            <a:srgbClr val="EEF2F7"/>
-          </a:solidFill>
-          <a:ln w="12700">
-            <a:solidFill>
-              <a:srgbClr val="EEF2F7"/>
-            </a:solidFill>
-            <a:prstDash val="solid"/>
-          </a:ln>
-          <a:effectLst>
-            <a:outerShdw blurRad="50800" dist="12700" dir="5400000" algn="bl" rotWithShape="0">
-              <a:srgbClr val="000000">
-                <a:alpha val="8000"/>
-              </a:srgbClr>
-            </a:outerShdw>
-          </a:effectLst>
-        </p:spPr>
-      </p:sp>
-      <p:sp>
-        <p:nvSpPr>
-          <p:cNvPr id="35" name="Shape 32"/>
-          <p:cNvSpPr/>
-          <p:nvPr/>
-        </p:nvSpPr>
-        <p:spPr>
-          <a:xfrm>
-            <a:off x="2926080" y="2880360"/>
-            <a:ext cx="384048" cy="384048"/>
-          </a:xfrm>
-          <a:prstGeom prst="ellipse">
-            <a:avLst/>
-          </a:prstGeom>
-          <a:solidFill>
-            <a:srgbClr val="2C6E49"/>
-          </a:solidFill>
-          <a:ln w="12700">
-            <a:solidFill>
-              <a:srgbClr val="2C6E49"/>
-            </a:solidFill>
-            <a:prstDash val="solid"/>
-          </a:ln>
-        </p:spPr>
-      </p:sp>
-      <p:sp>
-        <p:nvSpPr>
-          <p:cNvPr id="36" name="Text 33"/>
-          <p:cNvSpPr txBox="1"/>
-          <p:nvPr/>
-        </p:nvSpPr>
-        <p:spPr>
-          <a:xfrm>
-            <a:off x="2926080" y="2880360"/>
-            <a:ext cx="384048" cy="384048"/>
-          </a:xfrm>
-          <a:prstGeom prst="rect">
-            <a:avLst/>
-          </a:prstGeom>
-          <a:noFill/>
-          <a:ln/>
-        </p:spPr>
-        <p:txBody>
-          <a:bodyPr wrap="square" lIns="0" tIns="0" rIns="0" bIns="0" rtlCol="0" anchor="ctr"/>
-          <a:lstStyle/>
-          <a:p>
-            <a:pPr marL="0" indent="0" algn="ctr">
-              <a:buNone/>
-            </a:pPr>
-            <a:r>
-              <a:rPr lang="en-US" sz="1000" b="1" dirty="0">
-                <a:solidFill>
-                  <a:schemeClr val="bg1"/>
-                </a:solidFill>
-              </a:rPr>
-              <a:t>7</a:t>
-            </a:r>
-            <a:endParaRPr lang="en-US" sz="1000" dirty="0"/>
-          </a:p>
-        </p:txBody>
-      </p:sp>
-      <p:sp>
-        <p:nvSpPr>
-          <p:cNvPr id="37" name="Text 34"/>
-          <p:cNvSpPr txBox="1"/>
-          <p:nvPr/>
-        </p:nvSpPr>
-        <p:spPr>
-          <a:xfrm>
-            <a:off x="3410712" y="2715768"/>
-            <a:ext cx="1417320" cy="411480"/>
-          </a:xfrm>
-          <a:prstGeom prst="rect">
-            <a:avLst/>
-          </a:prstGeom>
-          <a:noFill/>
-          <a:ln/>
-        </p:spPr>
-        <p:txBody>
-          <a:bodyPr wrap="square" lIns="0" tIns="0" rIns="0" bIns="0" rtlCol="0" anchor="ctr"/>
-          <a:lstStyle/>
-          <a:p>
-            <a:pPr marL="0" indent="0">
-              <a:buNone/>
-            </a:pPr>
-            <a:r>
-              <a:rPr lang="en-US" sz="1200" b="1" dirty="0">
-                <a:solidFill>
-                  <a:schemeClr val="tx2"/>
-                </a:solidFill>
-              </a:rPr>
-              <a:t>Coherence</a:t>
-            </a:r>
-            <a:endParaRPr lang="en-US" sz="1200" dirty="0"/>
-          </a:p>
-        </p:txBody>
-      </p:sp>
-      <p:sp>
-        <p:nvSpPr>
-          <p:cNvPr id="38" name="Text 35"/>
-          <p:cNvSpPr txBox="1"/>
-          <p:nvPr/>
-        </p:nvSpPr>
-        <p:spPr>
-          <a:xfrm>
-            <a:off x="3410712" y="3108960"/>
-            <a:ext cx="1417320" cy="411480"/>
-          </a:xfrm>
-          <a:prstGeom prst="rect">
-            <a:avLst/>
-          </a:prstGeom>
-          <a:noFill/>
-          <a:ln/>
-        </p:spPr>
-        <p:txBody>
-          <a:bodyPr wrap="square" lIns="0" tIns="0" rIns="0" bIns="0" rtlCol="0" anchor="t"/>
-          <a:lstStyle/>
-          <a:p>
-            <a:pPr marL="0" indent="0">
-              <a:buNone/>
-            </a:pPr>
-            <a:r>
-              <a:rPr lang="en-US" sz="1000" dirty="0">
-                <a:solidFill>
-                  <a:schemeClr val="accent4"/>
-                </a:solidFill>
-              </a:rPr>
-              <a:t>measured by code</a:t>
-            </a:r>
-            <a:endParaRPr lang="en-US" sz="1000" dirty="0"/>
-          </a:p>
-        </p:txBody>
-      </p:sp>
-      <p:sp>
-        <p:nvSpPr>
-          <p:cNvPr id="39" name="Shape 36"/>
-          <p:cNvSpPr/>
-          <p:nvPr/>
-        </p:nvSpPr>
-        <p:spPr>
-          <a:xfrm>
-            <a:off x="5029200" y="2606040"/>
-            <a:ext cx="2103120" cy="960120"/>
-          </a:xfrm>
-          <a:prstGeom prst="roundRect">
-            <a:avLst>
-              <a:gd name="adj" fmla="val 11429"/>
-            </a:avLst>
-          </a:prstGeom>
-          <a:solidFill>
-            <a:srgbClr val="EEF2F7"/>
-          </a:solidFill>
-          <a:ln w="12700">
-            <a:solidFill>
-              <a:srgbClr val="EEF2F7"/>
-            </a:solidFill>
-            <a:prstDash val="solid"/>
-          </a:ln>
-          <a:effectLst>
-            <a:outerShdw blurRad="50800" dist="12700" dir="5400000" algn="bl" rotWithShape="0">
-              <a:srgbClr val="000000">
-                <a:alpha val="8000"/>
-              </a:srgbClr>
-            </a:outerShdw>
-          </a:effectLst>
-        </p:spPr>
-      </p:sp>
-      <p:sp>
-        <p:nvSpPr>
-          <p:cNvPr id="40" name="Shape 37"/>
-          <p:cNvSpPr/>
-          <p:nvPr/>
-        </p:nvSpPr>
-        <p:spPr>
-          <a:xfrm>
-            <a:off x="5166360" y="2880360"/>
-            <a:ext cx="384048" cy="384048"/>
-          </a:xfrm>
-          <a:prstGeom prst="ellipse">
-            <a:avLst/>
-          </a:prstGeom>
-          <a:solidFill>
-            <a:srgbClr val="6B7280"/>
-          </a:solidFill>
-          <a:ln w="12700">
-            <a:solidFill>
-              <a:srgbClr val="6B7280"/>
-            </a:solidFill>
-            <a:prstDash val="solid"/>
-          </a:ln>
-        </p:spPr>
-      </p:sp>
-      <p:sp>
-        <p:nvSpPr>
-          <p:cNvPr id="41" name="Text 38"/>
-          <p:cNvSpPr txBox="1"/>
-          <p:nvPr/>
-        </p:nvSpPr>
-        <p:spPr>
-          <a:xfrm>
-            <a:off x="5166360" y="2880360"/>
-            <a:ext cx="384048" cy="384048"/>
-          </a:xfrm>
-          <a:prstGeom prst="rect">
-            <a:avLst/>
-          </a:prstGeom>
-          <a:noFill/>
-          <a:ln/>
-        </p:spPr>
-        <p:txBody>
-          <a:bodyPr wrap="square" lIns="0" tIns="0" rIns="0" bIns="0" rtlCol="0" anchor="ctr"/>
-          <a:lstStyle/>
-          <a:p>
-            <a:pPr marL="0" indent="0" algn="ctr">
-              <a:buNone/>
-            </a:pPr>
-            <a:r>
-              <a:rPr lang="en-US" sz="1000" b="1" dirty="0">
-                <a:solidFill>
-                  <a:schemeClr val="bg1"/>
-                </a:solidFill>
-              </a:rPr>
-              <a:t>8</a:t>
-            </a:r>
-            <a:endParaRPr lang="en-US" sz="1000" dirty="0"/>
-          </a:p>
-        </p:txBody>
-      </p:sp>
-      <p:sp>
-        <p:nvSpPr>
-          <p:cNvPr id="42" name="Text 39"/>
-          <p:cNvSpPr txBox="1"/>
-          <p:nvPr/>
-        </p:nvSpPr>
-        <p:spPr>
-          <a:xfrm>
-            <a:off x="5650992" y="2715768"/>
-            <a:ext cx="1417320" cy="411480"/>
-          </a:xfrm>
-          <a:prstGeom prst="rect">
-            <a:avLst/>
-          </a:prstGeom>
-          <a:noFill/>
-          <a:ln/>
-        </p:spPr>
-        <p:txBody>
-          <a:bodyPr wrap="square" lIns="0" tIns="0" rIns="0" bIns="0" rtlCol="0" anchor="ctr"/>
-          <a:lstStyle/>
-          <a:p>
-            <a:pPr marL="0" indent="0">
-              <a:buNone/>
-            </a:pPr>
-            <a:r>
-              <a:rPr lang="en-US" sz="1200" b="1" dirty="0">
-                <a:solidFill>
-                  <a:schemeClr val="tx2"/>
-                </a:solidFill>
-              </a:rPr>
-              <a:t>Reasoning quality</a:t>
-            </a:r>
-            <a:endParaRPr lang="en-US" sz="1200" dirty="0"/>
-          </a:p>
-        </p:txBody>
-      </p:sp>
-      <p:sp>
-        <p:nvSpPr>
-          <p:cNvPr id="43" name="Text 40"/>
-          <p:cNvSpPr txBox="1"/>
-          <p:nvPr/>
-        </p:nvSpPr>
-        <p:spPr>
-          <a:xfrm>
-            <a:off x="5650992" y="3108960"/>
-            <a:ext cx="1417320" cy="411480"/>
-          </a:xfrm>
-          <a:prstGeom prst="rect">
-            <a:avLst/>
-          </a:prstGeom>
-          <a:noFill/>
-          <a:ln/>
-        </p:spPr>
-        <p:txBody>
-          <a:bodyPr wrap="square" lIns="0" tIns="0" rIns="0" bIns="0" rtlCol="0" anchor="t"/>
-          <a:lstStyle/>
-          <a:p>
-            <a:pPr marL="0" indent="0">
-              <a:buNone/>
-            </a:pPr>
-            <a:r>
-              <a:rPr lang="en-US" sz="1000" dirty="0">
-                <a:solidFill>
-                  <a:schemeClr val="accent4"/>
-                </a:solidFill>
-              </a:rPr>
-              <a:t>not built: rubric grader</a:t>
-            </a:r>
-            <a:endParaRPr lang="en-US" sz="1000" dirty="0"/>
-          </a:p>
-        </p:txBody>
-      </p:sp>
-      <p:sp>
-        <p:nvSpPr>
-          <p:cNvPr id="44" name="Shape 41"/>
-          <p:cNvSpPr/>
-          <p:nvPr/>
-        </p:nvSpPr>
-        <p:spPr>
-          <a:xfrm>
-            <a:off x="7269480" y="2606040"/>
-            <a:ext cx="2103120" cy="960120"/>
-          </a:xfrm>
-          <a:prstGeom prst="roundRect">
-            <a:avLst>
-              <a:gd name="adj" fmla="val 11429"/>
-            </a:avLst>
-          </a:prstGeom>
-          <a:solidFill>
-            <a:srgbClr val="EEF2F7"/>
-          </a:solidFill>
-          <a:ln w="12700">
-            <a:solidFill>
-              <a:srgbClr val="EEF2F7"/>
-            </a:solidFill>
-            <a:prstDash val="solid"/>
-          </a:ln>
-          <a:effectLst>
-            <a:outerShdw blurRad="50800" dist="12700" dir="5400000" algn="bl" rotWithShape="0">
-              <a:srgbClr val="000000">
-                <a:alpha val="8000"/>
-              </a:srgbClr>
-            </a:outerShdw>
-          </a:effectLst>
-        </p:spPr>
-      </p:sp>
-      <p:sp>
-        <p:nvSpPr>
-          <p:cNvPr id="45" name="Shape 42"/>
-          <p:cNvSpPr/>
-          <p:nvPr/>
-        </p:nvSpPr>
-        <p:spPr>
-          <a:xfrm>
-            <a:off x="7406640" y="2880360"/>
-            <a:ext cx="384048" cy="384048"/>
-          </a:xfrm>
-          <a:prstGeom prst="ellipse">
-            <a:avLst/>
-          </a:prstGeom>
-          <a:solidFill>
-            <a:srgbClr val="2C6E49"/>
-          </a:solidFill>
-          <a:ln w="12700">
-            <a:solidFill>
-              <a:srgbClr val="2C6E49"/>
-            </a:solidFill>
-            <a:prstDash val="solid"/>
-          </a:ln>
-        </p:spPr>
-      </p:sp>
-      <p:sp>
-        <p:nvSpPr>
-          <p:cNvPr id="46" name="Text 43"/>
-          <p:cNvSpPr txBox="1"/>
-          <p:nvPr/>
-        </p:nvSpPr>
-        <p:spPr>
-          <a:xfrm>
-            <a:off x="7406640" y="2880360"/>
-            <a:ext cx="384048" cy="384048"/>
-          </a:xfrm>
-          <a:prstGeom prst="rect">
-            <a:avLst/>
-          </a:prstGeom>
-          <a:noFill/>
-          <a:ln/>
-        </p:spPr>
-        <p:txBody>
-          <a:bodyPr wrap="square" lIns="0" tIns="0" rIns="0" bIns="0" rtlCol="0" anchor="ctr"/>
-          <a:lstStyle/>
-          <a:p>
-            <a:pPr marL="0" indent="0" algn="ctr">
-              <a:buNone/>
-            </a:pPr>
-            <a:r>
-              <a:rPr lang="en-US" sz="1000" b="1" dirty="0">
-                <a:solidFill>
-                  <a:schemeClr val="bg1"/>
-                </a:solidFill>
-              </a:rPr>
-              <a:t>9</a:t>
-            </a:r>
-            <a:endParaRPr lang="en-US" sz="1000" dirty="0"/>
-          </a:p>
-        </p:txBody>
-      </p:sp>
-      <p:sp>
-        <p:nvSpPr>
-          <p:cNvPr id="47" name="Text 44"/>
-          <p:cNvSpPr txBox="1"/>
-          <p:nvPr/>
-        </p:nvSpPr>
-        <p:spPr>
-          <a:xfrm>
-            <a:off x="7891272" y="2715768"/>
-            <a:ext cx="1417320" cy="411480"/>
-          </a:xfrm>
-          <a:prstGeom prst="rect">
-            <a:avLst/>
-          </a:prstGeom>
-          <a:noFill/>
-          <a:ln/>
-        </p:spPr>
-        <p:txBody>
-          <a:bodyPr wrap="square" lIns="0" tIns="0" rIns="0" bIns="0" rtlCol="0" anchor="ctr"/>
-          <a:lstStyle/>
-          <a:p>
-            <a:pPr marL="0" indent="0">
-              <a:buNone/>
-            </a:pPr>
-            <a:r>
-              <a:rPr lang="en-US" sz="1200" b="1" dirty="0">
-                <a:solidFill>
-                  <a:schemeClr val="tx2"/>
-                </a:solidFill>
-              </a:rPr>
-              <a:t>Replay</a:t>
-            </a:r>
-            <a:endParaRPr lang="en-US" sz="1200" dirty="0"/>
-          </a:p>
-        </p:txBody>
-      </p:sp>
-      <p:sp>
-        <p:nvSpPr>
-          <p:cNvPr id="48" name="Text 45"/>
-          <p:cNvSpPr txBox="1"/>
-          <p:nvPr/>
-        </p:nvSpPr>
-        <p:spPr>
-          <a:xfrm>
-            <a:off x="7891272" y="3108960"/>
-            <a:ext cx="1417320" cy="411480"/>
-          </a:xfrm>
-          <a:prstGeom prst="rect">
-            <a:avLst/>
-          </a:prstGeom>
-          <a:noFill/>
-          <a:ln/>
-        </p:spPr>
-        <p:txBody>
-          <a:bodyPr wrap="square" lIns="0" tIns="0" rIns="0" bIns="0" rtlCol="0" anchor="t"/>
-          <a:lstStyle/>
-          <a:p>
-            <a:pPr marL="0" indent="0">
-              <a:buNone/>
-            </a:pPr>
-            <a:r>
-              <a:rPr lang="en-US" sz="1000" dirty="0">
-                <a:solidFill>
-                  <a:schemeClr val="accent4"/>
-                </a:solidFill>
-              </a:rPr>
-              <a:t>measured by code</a:t>
-            </a:r>
-            <a:endParaRPr lang="en-US" sz="1000" dirty="0"/>
-          </a:p>
-        </p:txBody>
-      </p:sp>
-      <p:sp>
-        <p:nvSpPr>
-          <p:cNvPr id="49" name="Shape 46"/>
-          <p:cNvSpPr/>
-          <p:nvPr/>
-        </p:nvSpPr>
-        <p:spPr>
-          <a:xfrm>
-            <a:off x="9509760" y="2606040"/>
-            <a:ext cx="2103120" cy="960120"/>
-          </a:xfrm>
-          <a:prstGeom prst="roundRect">
-            <a:avLst>
-              <a:gd name="adj" fmla="val 11429"/>
-            </a:avLst>
-          </a:prstGeom>
-          <a:solidFill>
-            <a:srgbClr val="EEF2F7"/>
-          </a:solidFill>
-          <a:ln w="12700">
-            <a:solidFill>
-              <a:srgbClr val="EEF2F7"/>
-            </a:solidFill>
-            <a:prstDash val="solid"/>
-          </a:ln>
-          <a:effectLst>
-            <a:outerShdw blurRad="50800" dist="12700" dir="5400000" algn="bl" rotWithShape="0">
-              <a:srgbClr val="000000">
-                <a:alpha val="8000"/>
-              </a:srgbClr>
-            </a:outerShdw>
-          </a:effectLst>
-        </p:spPr>
-      </p:sp>
-      <p:sp>
-        <p:nvSpPr>
-          <p:cNvPr id="50" name="Shape 47"/>
-          <p:cNvSpPr/>
-          <p:nvPr/>
-        </p:nvSpPr>
-        <p:spPr>
-          <a:xfrm>
-            <a:off x="9646920" y="2880360"/>
-            <a:ext cx="384048" cy="384048"/>
-          </a:xfrm>
-          <a:prstGeom prst="ellipse">
-            <a:avLst/>
-          </a:prstGeom>
-          <a:solidFill>
-            <a:srgbClr val="2C6E49"/>
-          </a:solidFill>
-          <a:ln w="12700">
-            <a:solidFill>
-              <a:srgbClr val="2C6E49"/>
-            </a:solidFill>
-            <a:prstDash val="solid"/>
-          </a:ln>
-        </p:spPr>
-      </p:sp>
-      <p:sp>
-        <p:nvSpPr>
-          <p:cNvPr id="51" name="Text 48"/>
-          <p:cNvSpPr txBox="1"/>
-          <p:nvPr/>
-        </p:nvSpPr>
-        <p:spPr>
-          <a:xfrm>
-            <a:off x="9646920" y="2880360"/>
-            <a:ext cx="384048" cy="384048"/>
-          </a:xfrm>
-          <a:prstGeom prst="rect">
-            <a:avLst/>
-          </a:prstGeom>
-          <a:noFill/>
-          <a:ln/>
-        </p:spPr>
-        <p:txBody>
-          <a:bodyPr wrap="square" lIns="0" tIns="0" rIns="0" bIns="0" rtlCol="0" anchor="ctr"/>
-          <a:lstStyle/>
-          <a:p>
-            <a:pPr marL="0" indent="0" algn="ctr">
-              <a:buNone/>
-            </a:pPr>
-            <a:r>
-              <a:rPr lang="en-US" sz="1000" b="1" dirty="0">
-                <a:solidFill>
-                  <a:schemeClr val="bg1"/>
-                </a:solidFill>
-              </a:rPr>
-              <a:t>10</a:t>
-            </a:r>
-            <a:endParaRPr lang="en-US" sz="1000" dirty="0"/>
-          </a:p>
-        </p:txBody>
-      </p:sp>
-      <p:sp>
-        <p:nvSpPr>
-          <p:cNvPr id="52" name="Text 49"/>
-          <p:cNvSpPr txBox="1"/>
-          <p:nvPr/>
-        </p:nvSpPr>
-        <p:spPr>
-          <a:xfrm>
-            <a:off x="10131552" y="2715768"/>
-            <a:ext cx="1417320" cy="411480"/>
-          </a:xfrm>
-          <a:prstGeom prst="rect">
-            <a:avLst/>
-          </a:prstGeom>
-          <a:noFill/>
-          <a:ln/>
-        </p:spPr>
-        <p:txBody>
-          <a:bodyPr wrap="square" lIns="0" tIns="0" rIns="0" bIns="0" rtlCol="0" anchor="ctr"/>
-          <a:lstStyle/>
-          <a:p>
-            <a:pPr marL="0" indent="0">
-              <a:buNone/>
-            </a:pPr>
-            <a:r>
-              <a:rPr lang="en-US" sz="1200" b="1" dirty="0">
-                <a:solidFill>
-                  <a:schemeClr val="tx2"/>
-                </a:solidFill>
-              </a:rPr>
-              <a:t>Human-input discipline</a:t>
-            </a:r>
-            <a:endParaRPr lang="en-US" sz="1200" dirty="0"/>
-          </a:p>
-        </p:txBody>
-      </p:sp>
-      <p:sp>
-        <p:nvSpPr>
-          <p:cNvPr id="53" name="Text 50"/>
-          <p:cNvSpPr txBox="1"/>
-          <p:nvPr/>
-        </p:nvSpPr>
-        <p:spPr>
-          <a:xfrm>
-            <a:off x="10131552" y="3108960"/>
-            <a:ext cx="1417320" cy="411480"/>
-          </a:xfrm>
-          <a:prstGeom prst="rect">
-            <a:avLst/>
-          </a:prstGeom>
-          <a:noFill/>
-          <a:ln/>
-        </p:spPr>
-        <p:txBody>
-          <a:bodyPr wrap="square" lIns="0" tIns="0" rIns="0" bIns="0" rtlCol="0" anchor="t"/>
-          <a:lstStyle/>
-          <a:p>
-            <a:pPr marL="0" indent="0">
-              <a:buNone/>
-            </a:pPr>
-            <a:r>
-              <a:rPr lang="en-US" sz="1000" dirty="0">
-                <a:solidFill>
-                  <a:schemeClr val="accent4"/>
-                </a:solidFill>
-              </a:rPr>
-              <a:t>measured by code</a:t>
-            </a:r>
-            <a:endParaRPr lang="en-US" sz="1000" dirty="0"/>
-          </a:p>
-        </p:txBody>
-      </p:sp>
-      <p:sp>
-        <p:nvSpPr>
-          <p:cNvPr id="54" name="Shape 51"/>
-          <p:cNvSpPr/>
-          <p:nvPr/>
-        </p:nvSpPr>
-        <p:spPr>
-          <a:xfrm>
-            <a:off x="548640" y="3931920"/>
-            <a:ext cx="5486400" cy="2194560"/>
-          </a:xfrm>
-          <a:prstGeom prst="roundRect">
-            <a:avLst>
-              <a:gd name="adj" fmla="val 5000"/>
-            </a:avLst>
-          </a:prstGeom>
-          <a:solidFill>
-            <a:srgbClr val="EEF2F7"/>
-          </a:solidFill>
-          <a:ln w="12700">
-            <a:solidFill>
-              <a:srgbClr val="EEF2F7"/>
-            </a:solidFill>
-            <a:prstDash val="solid"/>
-          </a:ln>
-          <a:effectLst>
-            <a:outerShdw blurRad="50800" dist="12700" dir="5400000" algn="bl" rotWithShape="0">
-              <a:srgbClr val="000000">
-                <a:alpha val="8000"/>
-              </a:srgbClr>
-            </a:outerShdw>
-          </a:effectLst>
-        </p:spPr>
-      </p:sp>
-      <p:sp>
-        <p:nvSpPr>
-          <p:cNvPr id="55" name="Text 52"/>
-          <p:cNvSpPr txBox="1"/>
-          <p:nvPr/>
-        </p:nvSpPr>
-        <p:spPr>
-          <a:xfrm>
-            <a:off x="822960" y="4069080"/>
-            <a:ext cx="4937760" cy="365760"/>
-          </a:xfrm>
-          <a:prstGeom prst="rect">
-            <a:avLst/>
-          </a:prstGeom>
-          <a:noFill/>
-          <a:ln/>
-        </p:spPr>
-        <p:txBody>
-          <a:bodyPr wrap="square" lIns="0" tIns="0" rIns="0" bIns="0" rtlCol="0" anchor="t"/>
-          <a:lstStyle/>
-          <a:p>
-            <a:pPr marL="0" indent="0">
-              <a:buNone/>
-            </a:pPr>
-            <a:r>
-              <a:rPr lang="en-US" sz="1400" b="1" dirty="0">
-                <a:solidFill>
-                  <a:schemeClr val="tx2"/>
-                </a:solidFill>
-              </a:rPr>
-              <a:t>Measured by code on the 28 October snapshot</a:t>
-            </a:r>
-            <a:endParaRPr lang="en-US" sz="1400" dirty="0"/>
-          </a:p>
-        </p:txBody>
-      </p:sp>
-      <p:sp>
-        <p:nvSpPr>
-          <p:cNvPr id="56" name="Text 53"/>
-          <p:cNvSpPr txBox="1"/>
-          <p:nvPr/>
-        </p:nvSpPr>
-        <p:spPr>
-          <a:xfrm>
-            <a:off x="822960" y="4480560"/>
-            <a:ext cx="4937760" cy="1554480"/>
-          </a:xfrm>
-          <a:prstGeom prst="rect">
-            <a:avLst/>
-          </a:prstGeom>
-          <a:noFill/>
-          <a:ln/>
-        </p:spPr>
-        <p:txBody>
-          <a:bodyPr wrap="square" lIns="0" tIns="0" rIns="0" bIns="0" rtlCol="0" anchor="t"/>
-          <a:lstStyle/>
-          <a:p>
-            <a:pPr marL="342900" indent="-342900">
-              <a:spcAft>
-                <a:spcPts val="600"/>
-              </a:spcAft>
-              <a:buSzPct val="100000"/>
-              <a:buChar char="•"/>
-            </a:pPr>
-            <a:r>
-              <a:rPr lang="en-US" sz="1200" dirty="0">
-                <a:solidFill>
-                  <a:schemeClr val="tx1"/>
-                </a:solidFill>
-              </a:rPr>
-              <a:t>Shock direction: 7 shocks, one input each, the pool must move the right way: 7 of 7</a:t>
-            </a:r>
-            <a:endParaRPr lang="en-US" sz="1200" dirty="0"/>
-          </a:p>
-          <a:p>
-            <a:pPr marL="342900" indent="-342900">
-              <a:spcAft>
-                <a:spcPts val="600"/>
-              </a:spcAft>
-              <a:buSzPct val="100000"/>
-              <a:buChar char="•"/>
-            </a:pPr>
-            <a:r>
-              <a:rPr lang="en-US" sz="1200" dirty="0">
-                <a:solidFill>
-                  <a:schemeClr val="tx1"/>
-                </a:solidFill>
-              </a:rPr>
-              <a:t>Noise: 5 irrelevant changes to the snapshot: 0.0 points moved</a:t>
-            </a:r>
-            <a:endParaRPr lang="en-US" sz="1200" dirty="0"/>
-          </a:p>
-          <a:p>
-            <a:pPr marL="342900" indent="-342900">
-              <a:spcAft>
-                <a:spcPts val="600"/>
-              </a:spcAft>
-              <a:buSzPct val="100000"/>
-              <a:buChar char="•"/>
-            </a:pPr>
-            <a:r>
-              <a:rPr lang="en-US" sz="1200" dirty="0">
-                <a:solidFill>
-                  <a:schemeClr val="tx1"/>
-                </a:solidFill>
-              </a:rPr>
-              <a:t>Coherence: every ledger entry adds up and every difference is attributable</a:t>
-            </a:r>
-            <a:endParaRPr lang="en-US" sz="1200" dirty="0"/>
-          </a:p>
-          <a:p>
-            <a:pPr marL="342900" indent="-342900">
-              <a:spcAft>
-                <a:spcPts val="600"/>
-              </a:spcAft>
-              <a:buSzPct val="100000"/>
-              <a:buChar char="•"/>
-            </a:pPr>
-            <a:r>
-              <a:rPr lang="en-US" sz="1200" dirty="0">
-                <a:solidFill>
-                  <a:schemeClr val="tx1"/>
-                </a:solidFill>
-              </a:rPr>
-              <a:t>Replay: entries under the current spec recompute exactly, from the analyst runs they name</a:t>
-            </a:r>
-            <a:endParaRPr lang="en-US" sz="1200" dirty="0"/>
-          </a:p>
-        </p:txBody>
-      </p:sp>
-      <p:sp>
-        <p:nvSpPr>
-          <p:cNvPr id="57" name="Shape 54"/>
-          <p:cNvSpPr/>
-          <p:nvPr/>
-        </p:nvSpPr>
-        <p:spPr>
-          <a:xfrm>
-            <a:off x="6309360" y="3931920"/>
-            <a:ext cx="5330952" cy="2194560"/>
-          </a:xfrm>
-          <a:prstGeom prst="roundRect">
-            <a:avLst>
-              <a:gd name="adj" fmla="val 5000"/>
-            </a:avLst>
-          </a:prstGeom>
-          <a:solidFill>
-            <a:srgbClr val="EEF2F7"/>
-          </a:solidFill>
-          <a:ln w="12700">
-            <a:solidFill>
-              <a:srgbClr val="EEF2F7"/>
-            </a:solidFill>
-            <a:prstDash val="solid"/>
-          </a:ln>
-          <a:effectLst>
-            <a:outerShdw blurRad="50800" dist="12700" dir="5400000" algn="bl" rotWithShape="0">
-              <a:srgbClr val="000000">
-                <a:alpha val="8000"/>
-              </a:srgbClr>
-            </a:outerShdw>
-          </a:effectLst>
-        </p:spPr>
-      </p:sp>
-      <p:sp>
-        <p:nvSpPr>
-          <p:cNvPr id="58" name="Text 55"/>
-          <p:cNvSpPr txBox="1"/>
-          <p:nvPr/>
-        </p:nvSpPr>
-        <p:spPr>
-          <a:xfrm>
-            <a:off x="6583680" y="4069080"/>
-            <a:ext cx="4846320" cy="365760"/>
-          </a:xfrm>
-          <a:prstGeom prst="rect">
-            <a:avLst/>
-          </a:prstGeom>
-          <a:noFill/>
-          <a:ln/>
-        </p:spPr>
-        <p:txBody>
-          <a:bodyPr wrap="square" lIns="0" tIns="0" rIns="0" bIns="0" rtlCol="0" anchor="t"/>
-          <a:lstStyle/>
-          <a:p>
-            <a:pPr marL="0" indent="0">
-              <a:buNone/>
-            </a:pPr>
-            <a:r>
-              <a:rPr lang="en-US" sz="1400" b="1" dirty="0">
-                <a:solidFill>
-                  <a:schemeClr val="tx2"/>
-                </a:solidFill>
-              </a:rPr>
-              <a:t>What it has already caught</a:t>
-            </a:r>
-            <a:endParaRPr lang="en-US" sz="1400" dirty="0"/>
-          </a:p>
-        </p:txBody>
-      </p:sp>
-      <p:sp>
-        <p:nvSpPr>
-          <p:cNvPr id="59" name="Text 56"/>
-          <p:cNvSpPr txBox="1"/>
-          <p:nvPr/>
-        </p:nvSpPr>
-        <p:spPr>
-          <a:xfrm>
-            <a:off x="6583680" y="4480560"/>
-            <a:ext cx="4846320" cy="1554480"/>
-          </a:xfrm>
-          <a:prstGeom prst="rect">
-            <a:avLst/>
-          </a:prstGeom>
-          <a:noFill/>
-          <a:ln/>
-        </p:spPr>
-        <p:txBody>
-          <a:bodyPr wrap="square" lIns="0" tIns="0" rIns="0" bIns="0" rtlCol="0" anchor="t"/>
-          <a:lstStyle/>
-          <a:p>
-            <a:pPr marL="342900" indent="-342900">
-              <a:spcAft>
-                <a:spcPts val="600"/>
-              </a:spcAft>
-              <a:buSzPct val="100000"/>
-              <a:buChar char="•"/>
-            </a:pPr>
-            <a:r>
-              <a:rPr lang="en-US" sz="1100" dirty="0">
-                <a:solidFill>
-                  <a:schemeClr val="tx1"/>
-                </a:solidFill>
-              </a:rPr>
-              <a:t>Four ledger entries stopped replaying after a model rule changed outside the hashed spec; amendment #5 put every rule inside the hash.</a:t>
-            </a:r>
-            <a:endParaRPr lang="en-US" sz="1100" dirty="0"/>
-          </a:p>
-          <a:p>
-            <a:pPr marL="342900" indent="-342900">
-              <a:spcAft>
-                <a:spcPts val="600"/>
-              </a:spcAft>
-              <a:buSzPct val="100000"/>
-              <a:buChar char="•"/>
-            </a:pPr>
-            <a:r>
-              <a:rPr lang="en-US" sz="1100" dirty="0">
-                <a:solidFill>
-                  <a:schemeClr val="tx1"/>
-                </a:solidFill>
-              </a:rPr>
-              <a:t>A shock test was perturbing the wrong odds entry once two were on file; a red cell on the drift table pointed at it.</a:t>
-            </a:r>
-            <a:endParaRPr lang="en-US" sz="1100" dirty="0"/>
-          </a:p>
-          <a:p>
-            <a:pPr marL="342900" indent="-342900">
-              <a:spcAft>
-                <a:spcPts val="600"/>
-              </a:spcAft>
-              <a:buSzPct val="100000"/>
-              <a:buChar char="•"/>
-            </a:pPr>
-            <a:r>
-              <a:rPr lang="en-US" sz="1100" dirty="0">
-                <a:solidFill>
-                  <a:schemeClr val="tx1"/>
-                </a:solidFill>
-              </a:rPr>
-              <a:t>Replay was reading the latest analyst runs instead of the runs the entry used; a rerun would have broken an honest entry. Fixed the same day, with a test.</a:t>
-            </a:r>
-            <a:endParaRPr lang="en-US" sz="1100" dirty="0"/>
-          </a:p>
-          <a:p>
-            <a:pPr marL="342900" indent="-342900">
-              <a:spcAft>
-                <a:spcPts val="600"/>
-              </a:spcAft>
-              <a:buSzPct val="100000"/>
-              <a:buChar char="•"/>
-            </a:pPr>
-            <a:r>
-              <a:rPr lang="en-US" sz="1100" dirty="0">
-                <a:solidFill>
-                  <a:schemeClr val="tx1"/>
-                </a:solidFill>
-              </a:rPr>
-              <a:t>A verifier false positive (a zero written as 0 in the evidence); fixed, records re-scored without calling the model.</a:t>
-            </a:r>
-            <a:endParaRPr lang="en-US" sz="1100" dirty="0"/>
           </a:p>
         </p:txBody>
       </p:sp>
@@ -14658,13 +12781,18 @@
             <a:pPr algn="r"/>
             <a:fld id="{F7021451-1387-4CA6-816F-3879F97B5CBC}" type="slidenum">
               <a:rPr lang="en-US" b="0"/>
-              <a:t>17</a:t>
+              <a:t>18</a:t>
             </a:fld>
             <a:endParaRPr lang="en-US"/>
           </a:p>
         </p:txBody>
       </p:sp>
     </p:spTree>
+    <p:extLst>
+      <p:ext uri="{BB962C8B-B14F-4D97-AF65-F5344CB8AC3E}">
+        <p14:creationId xmlns:p14="http://schemas.microsoft.com/office/powerpoint/2010/main" val="651567409"/>
+      </p:ext>
+    </p:extLst>
   </p:cSld>
   <p:clrMapOvr>
     <a:masterClrMapping/>
@@ -14672,9 +12800,9 @@
 </p:sld>
 </file>
 
-<file path=ppt/slides/slide18.xml><?xml version="1.0" encoding="utf-8"?>
+<file path=ppt/slides/slide19.xml><?xml version="1.0" encoding="utf-8"?>
 <p:sld xmlns:a="http://schemas.openxmlformats.org/drawingml/2006/main" xmlns:r="http://schemas.openxmlformats.org/officeDocument/2006/relationships" xmlns:p="http://schemas.openxmlformats.org/presentationml/2006/main">
-  <p:cSld name="Slide 18">
+  <p:cSld name="Slide 21">
     <p:spTree>
       <p:nvGrpSpPr>
         <p:cNvPr id="1" name=""/>
@@ -14701,170 +12829,48 @@
         </p:nvSpPr>
         <p:spPr>
           <a:xfrm>
-            <a:off x="548640" y="548640"/>
-            <a:ext cx="11091672" cy="822960"/>
-          </a:xfrm>
-          <a:prstGeom prst="rect">
-            <a:avLst/>
-          </a:prstGeom>
-          <a:noFill/>
-          <a:ln/>
-        </p:spPr>
-        <p:txBody>
-          <a:bodyPr wrap="square" lIns="0" tIns="0" rIns="0" bIns="0" rtlCol="0" anchor="ctr"/>
+            <a:off x="548640" y="2103120"/>
+            <a:ext cx="11091672" cy="1280160"/>
+          </a:xfrm>
+          <a:prstGeom prst="rect">
+            <a:avLst/>
+          </a:prstGeom>
+          <a:noFill/>
+          <a:ln/>
+        </p:spPr>
+        <p:txBody>
+          <a:bodyPr wrap="square" lIns="0" tIns="0" rIns="0" bIns="0" rtlCol="0" anchor="b"/>
           <a:lstStyle/>
           <a:p>
             <a:pPr marL="0" indent="0" algn="l">
               <a:buNone/>
             </a:pPr>
             <a:r>
-              <a:rPr lang="en-US" sz="3000" b="1" dirty="0">
+              <a:rPr lang="en-US" sz="4000" b="1" dirty="0">
                 <a:solidFill>
                   <a:schemeClr val="bg1"/>
                 </a:solidFill>
               </a:rPr>
-              <a:t>Live demo 5: the scorecard and the drift table</a:t>
-            </a:r>
-            <a:endParaRPr lang="en-US" sz="3000" dirty="0"/>
-          </a:p>
-        </p:txBody>
-      </p:sp>
-      <p:sp>
-        <p:nvSpPr>
-          <p:cNvPr id="3" name="Shape 1"/>
-          <p:cNvSpPr/>
-          <p:nvPr/>
-        </p:nvSpPr>
-        <p:spPr>
-          <a:xfrm>
-            <a:off x="10177272" y="685800"/>
-            <a:ext cx="1463040" cy="548640"/>
-          </a:xfrm>
-          <a:prstGeom prst="roundRect">
-            <a:avLst>
-              <a:gd name="adj" fmla="val 16667"/>
-            </a:avLst>
-          </a:prstGeom>
-          <a:solidFill>
-            <a:srgbClr val="E9B44C"/>
-          </a:solidFill>
-          <a:ln w="12700">
-            <a:solidFill>
-              <a:srgbClr val="E9B44C"/>
-            </a:solidFill>
-            <a:prstDash val="solid"/>
-          </a:ln>
-        </p:spPr>
-      </p:sp>
-      <p:sp>
-        <p:nvSpPr>
-          <p:cNvPr id="4" name="Text 2"/>
-          <p:cNvSpPr txBox="1"/>
-          <p:nvPr/>
-        </p:nvSpPr>
-        <p:spPr>
-          <a:xfrm>
-            <a:off x="10177272" y="685800"/>
-            <a:ext cx="1463040" cy="548640"/>
-          </a:xfrm>
-          <a:prstGeom prst="rect">
-            <a:avLst/>
-          </a:prstGeom>
-          <a:noFill/>
-          <a:ln/>
-        </p:spPr>
-        <p:txBody>
-          <a:bodyPr wrap="square" lIns="0" tIns="0" rIns="0" bIns="0" rtlCol="0" anchor="ctr"/>
-          <a:lstStyle/>
-          <a:p>
-            <a:pPr marL="0" indent="0" algn="ctr">
-              <a:buNone/>
-            </a:pPr>
-            <a:r>
-              <a:rPr lang="en-US" sz="1600" b="1" dirty="0">
-                <a:solidFill>
-                  <a:srgbClr val="1B1F2A"/>
-                </a:solidFill>
-              </a:rPr>
-              <a:t>2 min</a:t>
-            </a:r>
-            <a:endParaRPr lang="en-US" sz="1600" dirty="0"/>
-          </a:p>
-        </p:txBody>
-      </p:sp>
-      <p:sp>
-        <p:nvSpPr>
-          <p:cNvPr id="5" name="Shape 3"/>
-          <p:cNvSpPr/>
-          <p:nvPr/>
-        </p:nvSpPr>
-        <p:spPr>
-          <a:xfrm>
-            <a:off x="548640" y="1737360"/>
-            <a:ext cx="3520440" cy="3200400"/>
-          </a:xfrm>
-          <a:prstGeom prst="roundRect">
-            <a:avLst>
-              <a:gd name="adj" fmla="val 3429"/>
-            </a:avLst>
-          </a:prstGeom>
-          <a:solidFill>
-            <a:srgbClr val="1E2761"/>
-          </a:solidFill>
-          <a:ln w="12700">
-            <a:solidFill>
-              <a:srgbClr val="1E2761"/>
-            </a:solidFill>
-            <a:prstDash val="solid"/>
-          </a:ln>
-        </p:spPr>
-      </p:sp>
-      <p:sp>
-        <p:nvSpPr>
-          <p:cNvPr id="6" name="Text 4"/>
-          <p:cNvSpPr txBox="1"/>
-          <p:nvPr/>
-        </p:nvSpPr>
-        <p:spPr>
-          <a:xfrm>
-            <a:off x="822960" y="1920240"/>
-            <a:ext cx="2926080" cy="457200"/>
-          </a:xfrm>
-          <a:prstGeom prst="rect">
-            <a:avLst/>
-          </a:prstGeom>
-          <a:noFill/>
-          <a:ln/>
-        </p:spPr>
-        <p:txBody>
-          <a:bodyPr wrap="square" lIns="0" tIns="0" rIns="0" bIns="0" rtlCol="0" anchor="ctr"/>
-          <a:lstStyle/>
-          <a:p>
-            <a:pPr marL="0" indent="0">
-              <a:buNone/>
-            </a:pPr>
-            <a:r>
-              <a:rPr lang="en-US" sz="1800" b="1" dirty="0">
-                <a:solidFill>
-                  <a:srgbClr val="E9B44C"/>
-                </a:solidFill>
-              </a:rPr>
-              <a:t>Open</a:t>
-            </a:r>
-            <a:endParaRPr lang="en-US" sz="1800" dirty="0"/>
-          </a:p>
-        </p:txBody>
-      </p:sp>
-      <p:sp>
-        <p:nvSpPr>
-          <p:cNvPr id="7" name="Text 5"/>
-          <p:cNvSpPr txBox="1"/>
-          <p:nvPr/>
-        </p:nvSpPr>
-        <p:spPr>
-          <a:xfrm>
-            <a:off x="822960" y="2468880"/>
-            <a:ext cx="2971800" cy="2377440"/>
+              <a:t>Three things to take away</a:t>
+            </a:r>
+            <a:endParaRPr lang="en-US" sz="4000" dirty="0"/>
+          </a:p>
+        </p:txBody>
+      </p:sp>
+      <p:sp>
+        <p:nvSpPr>
+          <p:cNvPr id="3" name="Text 0"/>
+          <p:cNvSpPr>
+            <a:spLocks noGrp="1"/>
+          </p:cNvSpPr>
+          <p:nvPr>
+            <p:ph type="body" idx="101" hasCustomPrompt="1"/>
+          </p:nvPr>
+        </p:nvSpPr>
+        <p:spPr>
+          <a:xfrm>
+            <a:off x="548640" y="3520440"/>
+            <a:ext cx="11091672" cy="1463040"/>
           </a:xfrm>
           <a:prstGeom prst="rect">
             <a:avLst/>
@@ -14876,7 +12882,7 @@
           <a:bodyPr wrap="square" lIns="0" tIns="0" rIns="0" bIns="0" rtlCol="0" anchor="t"/>
           <a:lstStyle/>
           <a:p>
-            <a:pPr marL="342900" indent="-342900">
+            <a:pPr marL="342900" indent="-342900" algn="l">
               <a:spcAft>
                 <a:spcPts val="800"/>
               </a:spcAft>
@@ -14884,17 +12890,17 @@
               <a:buChar char="•"/>
             </a:pPr>
             <a:r>
-              <a:rPr lang="en-US" sz="1300" dirty="0">
-                <a:solidFill>
-                  <a:srgbClr val="FFFFFF"/>
-                </a:solidFill>
-              </a:rPr>
-              <a:t>Scorecard view</a:t>
-            </a:r>
-            <a:endParaRPr lang="en-US" sz="1300" dirty="0"/>
-          </a:p>
-          <a:p>
-            <a:pPr marL="342900" indent="-342900">
+              <a:rPr lang="en-US" sz="2000" dirty="0">
+                <a:solidFill>
+                  <a:srgbClr val="CADCFC"/>
+                </a:solidFill>
+              </a:rPr>
+              <a:t>The harness is the product. Same model, same evidence, same day: naive it wobbles and leaks; harnessed it is stable, quoted and checked.</a:t>
+            </a:r>
+            <a:endParaRPr lang="en-US" sz="2000" dirty="0"/>
+          </a:p>
+          <a:p>
+            <a:pPr marL="342900" indent="-342900" algn="l">
               <a:spcAft>
                 <a:spcPts val="800"/>
               </a:spcAft>
@@ -14902,819 +12908,29 @@
               <a:buChar char="•"/>
             </a:pPr>
             <a:r>
-              <a:rPr lang="en-US" sz="1300" dirty="0">
-                <a:solidFill>
-                  <a:srgbClr val="FFFFFF"/>
-                </a:solidFill>
-              </a:rPr>
-              <a:t>The snapshot dropdown: pick 24 October, then 26 October</a:t>
-            </a:r>
-            <a:endParaRPr lang="en-US" sz="1300" dirty="0"/>
-          </a:p>
-          <a:p>
-            <a:pPr marL="342900" indent="-342900">
-              <a:spcAft>
-                <a:spcPts val="800"/>
-              </a:spcAft>
+              <a:rPr lang="en-US" sz="2000" dirty="0">
+                <a:solidFill>
+                  <a:srgbClr val="CADCFC"/>
+                </a:solidFill>
+              </a:rPr>
+              <a:t>Judge the process. Eight decisions a year cannot prove skill; a pre-registered scorecard measured on every snapshot can show discipline and catch drift.</a:t>
+            </a:r>
+            <a:endParaRPr lang="en-US" sz="2000" dirty="0"/>
+          </a:p>
+          <a:p>
+            <a:pPr marL="342900" indent="-342900" algn="l">
               <a:buSzPct val="100000"/>
               <a:buChar char="•"/>
             </a:pPr>
             <a:r>
-              <a:rPr lang="en-US" sz="1300" dirty="0">
-                <a:solidFill>
-                  <a:srgbClr val="FFFFFF"/>
-                </a:solidFill>
-              </a:rPr>
-              <a:t>Expand 'what was checked' under Shock direction</a:t>
-            </a:r>
-            <a:endParaRPr lang="en-US" sz="1300" dirty="0"/>
-          </a:p>
-          <a:p>
-            <a:pPr marL="342900" indent="-342900">
-              <a:spcAft>
-                <a:spcPts val="800"/>
-              </a:spcAft>
-              <a:buSzPct val="100000"/>
-              <a:buChar char="•"/>
-            </a:pPr>
-            <a:r>
-              <a:rPr lang="en-US" sz="1300" dirty="0">
-                <a:solidFill>
-                  <a:srgbClr val="FFFFFF"/>
-                </a:solidFill>
-              </a:rPr>
-              <a:t>Scroll to the over-time table</a:t>
-            </a:r>
-            <a:endParaRPr lang="en-US" sz="1300" dirty="0"/>
-          </a:p>
-        </p:txBody>
-      </p:sp>
-      <p:sp>
-        <p:nvSpPr>
-          <p:cNvPr id="8" name="Shape 6"/>
-          <p:cNvSpPr/>
-          <p:nvPr/>
-        </p:nvSpPr>
-        <p:spPr>
-          <a:xfrm>
-            <a:off x="4297680" y="1737360"/>
-            <a:ext cx="3520440" cy="3200400"/>
-          </a:xfrm>
-          <a:prstGeom prst="roundRect">
-            <a:avLst>
-              <a:gd name="adj" fmla="val 3429"/>
-            </a:avLst>
-          </a:prstGeom>
-          <a:solidFill>
-            <a:srgbClr val="1E2761"/>
-          </a:solidFill>
-          <a:ln w="12700">
-            <a:solidFill>
-              <a:srgbClr val="1E2761"/>
-            </a:solidFill>
-            <a:prstDash val="solid"/>
-          </a:ln>
-        </p:spPr>
-      </p:sp>
-      <p:sp>
-        <p:nvSpPr>
-          <p:cNvPr id="9" name="Text 7"/>
-          <p:cNvSpPr txBox="1"/>
-          <p:nvPr/>
-        </p:nvSpPr>
-        <p:spPr>
-          <a:xfrm>
-            <a:off x="4572000" y="1920240"/>
-            <a:ext cx="2926080" cy="457200"/>
-          </a:xfrm>
-          <a:prstGeom prst="rect">
-            <a:avLst/>
-          </a:prstGeom>
-          <a:noFill/>
-          <a:ln/>
-        </p:spPr>
-        <p:txBody>
-          <a:bodyPr wrap="square" lIns="0" tIns="0" rIns="0" bIns="0" rtlCol="0" anchor="ctr"/>
-          <a:lstStyle/>
-          <a:p>
-            <a:pPr marL="0" indent="0">
-              <a:buNone/>
-            </a:pPr>
-            <a:r>
-              <a:rPr lang="en-US" sz="1800" b="1" dirty="0">
-                <a:solidFill>
-                  <a:srgbClr val="E9B44C"/>
-                </a:solidFill>
-              </a:rPr>
-              <a:t>Point at</a:t>
-            </a:r>
-            <a:endParaRPr lang="en-US" sz="1800" dirty="0"/>
-          </a:p>
-        </p:txBody>
-      </p:sp>
-      <p:sp>
-        <p:nvSpPr>
-          <p:cNvPr id="10" name="Text 8"/>
-          <p:cNvSpPr txBox="1"/>
-          <p:nvPr/>
-        </p:nvSpPr>
-        <p:spPr>
-          <a:xfrm>
-            <a:off x="4572000" y="2468880"/>
-            <a:ext cx="2971800" cy="2377440"/>
-          </a:xfrm>
-          <a:prstGeom prst="rect">
-            <a:avLst/>
-          </a:prstGeom>
-          <a:noFill/>
-          <a:ln/>
-        </p:spPr>
-        <p:txBody>
-          <a:bodyPr wrap="square" lIns="0" tIns="0" rIns="0" bIns="0" rtlCol="0" anchor="t"/>
-          <a:lstStyle/>
-          <a:p>
-            <a:pPr marL="342900" indent="-342900">
-              <a:spcAft>
-                <a:spcPts val="800"/>
-              </a:spcAft>
-              <a:buSzPct val="100000"/>
-              <a:buChar char="•"/>
-            </a:pPr>
-            <a:r>
-              <a:rPr lang="en-US" sz="1300" dirty="0">
-                <a:solidFill>
-                  <a:srgbClr val="FFFFFF"/>
-                </a:solidFill>
-              </a:rPr>
-              <a:t>The grid: red in the control columns, green in the judged columns</a:t>
-            </a:r>
-            <a:endParaRPr lang="en-US" sz="1300" dirty="0"/>
-          </a:p>
-          <a:p>
-            <a:pPr marL="342900" indent="-342900">
-              <a:spcAft>
-                <a:spcPts val="800"/>
-              </a:spcAft>
-              <a:buSzPct val="100000"/>
-              <a:buChar char="•"/>
-            </a:pPr>
-            <a:r>
-              <a:rPr lang="en-US" sz="1300" dirty="0">
-                <a:solidFill>
-                  <a:srgbClr val="FFFFFF"/>
-                </a:solidFill>
-              </a:rPr>
-              <a:t>The seven shocks with their deltas</a:t>
-            </a:r>
-            <a:endParaRPr lang="en-US" sz="1300" dirty="0"/>
-          </a:p>
-          <a:p>
-            <a:pPr marL="342900" indent="-342900">
-              <a:spcAft>
-                <a:spcPts val="800"/>
-              </a:spcAft>
-              <a:buSzPct val="100000"/>
-              <a:buChar char="•"/>
-            </a:pPr>
-            <a:r>
-              <a:rPr lang="en-US" sz="1300" dirty="0">
-                <a:solidFill>
-                  <a:srgbClr val="FFFFFF"/>
-                </a:solidFill>
-              </a:rPr>
-              <a:t>The over-time table: one row per snapshot, the marks never move</a:t>
-            </a:r>
-            <a:endParaRPr lang="en-US" sz="1300" dirty="0"/>
-          </a:p>
-        </p:txBody>
-      </p:sp>
-      <p:sp>
-        <p:nvSpPr>
-          <p:cNvPr id="11" name="Shape 9"/>
-          <p:cNvSpPr/>
-          <p:nvPr/>
-        </p:nvSpPr>
-        <p:spPr>
-          <a:xfrm>
-            <a:off x="8046720" y="1737360"/>
-            <a:ext cx="3520440" cy="3200400"/>
-          </a:xfrm>
-          <a:prstGeom prst="roundRect">
-            <a:avLst>
-              <a:gd name="adj" fmla="val 3429"/>
-            </a:avLst>
-          </a:prstGeom>
-          <a:solidFill>
-            <a:srgbClr val="1E2761"/>
-          </a:solidFill>
-          <a:ln w="12700">
-            <a:solidFill>
-              <a:srgbClr val="1E2761"/>
-            </a:solidFill>
-            <a:prstDash val="solid"/>
-          </a:ln>
-        </p:spPr>
-      </p:sp>
-      <p:sp>
-        <p:nvSpPr>
-          <p:cNvPr id="12" name="Text 10"/>
-          <p:cNvSpPr txBox="1"/>
-          <p:nvPr/>
-        </p:nvSpPr>
-        <p:spPr>
-          <a:xfrm>
-            <a:off x="8321040" y="1920240"/>
-            <a:ext cx="2926080" cy="457200"/>
-          </a:xfrm>
-          <a:prstGeom prst="rect">
-            <a:avLst/>
-          </a:prstGeom>
-          <a:noFill/>
-          <a:ln/>
-        </p:spPr>
-        <p:txBody>
-          <a:bodyPr wrap="square" lIns="0" tIns="0" rIns="0" bIns="0" rtlCol="0" anchor="ctr"/>
-          <a:lstStyle/>
-          <a:p>
-            <a:pPr marL="0" indent="0">
-              <a:buNone/>
-            </a:pPr>
-            <a:r>
-              <a:rPr lang="en-US" sz="1800" b="1" dirty="0">
-                <a:solidFill>
-                  <a:srgbClr val="E9B44C"/>
-                </a:solidFill>
-              </a:rPr>
-              <a:t>Say</a:t>
-            </a:r>
-            <a:endParaRPr lang="en-US" sz="1800" dirty="0"/>
-          </a:p>
-        </p:txBody>
-      </p:sp>
-      <p:sp>
-        <p:nvSpPr>
-          <p:cNvPr id="13" name="Text 11"/>
-          <p:cNvSpPr txBox="1"/>
-          <p:nvPr/>
-        </p:nvSpPr>
-        <p:spPr>
-          <a:xfrm>
-            <a:off x="8321040" y="2468880"/>
-            <a:ext cx="2971800" cy="2377440"/>
-          </a:xfrm>
-          <a:prstGeom prst="rect">
-            <a:avLst/>
-          </a:prstGeom>
-          <a:noFill/>
-          <a:ln/>
-        </p:spPr>
-        <p:txBody>
-          <a:bodyPr wrap="square" lIns="0" tIns="0" rIns="0" bIns="0" rtlCol="0" anchor="t"/>
-          <a:lstStyle/>
-          <a:p>
-            <a:pPr marL="342900" indent="-342900">
-              <a:spcAft>
-                <a:spcPts val="800"/>
-              </a:spcAft>
-              <a:buSzPct val="100000"/>
-              <a:buChar char="•"/>
-            </a:pPr>
-            <a:r>
-              <a:rPr lang="en-US" sz="1300" dirty="0">
-                <a:solidFill>
-                  <a:srgbClr val="FFFFFF"/>
-                </a:solidFill>
-              </a:rPr>
-              <a:t>Analysts 1 and 2 are meant to fail. A red cell on the right would be a defect.</a:t>
-            </a:r>
-            <a:endParaRPr lang="en-US" sz="1300" dirty="0"/>
-          </a:p>
-          <a:p>
-            <a:pPr marL="342900" indent="-342900">
-              <a:spcAft>
-                <a:spcPts val="800"/>
-              </a:spcAft>
-              <a:buSzPct val="100000"/>
-              <a:buChar char="•"/>
-            </a:pPr>
-            <a:r>
-              <a:rPr lang="en-US" sz="1300" dirty="0">
-                <a:solidFill>
-                  <a:srgbClr val="FFFFFF"/>
-                </a:solidFill>
-              </a:rPr>
-              <a:t>This is the drift check. Two red cells have already pointed at defects and both are fixed.</a:t>
-            </a:r>
-            <a:endParaRPr lang="en-US" sz="1300" dirty="0"/>
-          </a:p>
-        </p:txBody>
-      </p:sp>
-    </p:spTree>
-  </p:cSld>
-  <p:clrMapOvr>
-    <a:masterClrMapping/>
-  </p:clrMapOvr>
-</p:sld>
-</file>
-
-<file path=ppt/slides/slide19.xml><?xml version="1.0" encoding="utf-8"?>
-<p:sld xmlns:a="http://schemas.openxmlformats.org/drawingml/2006/main" xmlns:r="http://schemas.openxmlformats.org/officeDocument/2006/relationships" xmlns:p="http://schemas.openxmlformats.org/presentationml/2006/main">
-  <p:cSld name="Slide 19">
-    <p:spTree>
-      <p:nvGrpSpPr>
-        <p:cNvPr id="1" name=""/>
-        <p:cNvGrpSpPr/>
-        <p:nvPr/>
-      </p:nvGrpSpPr>
-      <p:grpSpPr>
-        <a:xfrm>
-          <a:off x="0" y="0"/>
-          <a:ext cx="0" cy="0"/>
-          <a:chOff x="0" y="0"/>
-          <a:chExt cx="0" cy="0"/>
-        </a:xfrm>
-      </p:grpSpPr>
-      <p:sp>
-        <p:nvSpPr>
-          <p:cNvPr id="2" name="Text 0"/>
-          <p:cNvSpPr>
-            <a:spLocks noGrp="1"/>
-          </p:cNvSpPr>
-          <p:nvPr>
-            <p:ph type="title" idx="100" hasCustomPrompt="1"/>
-          </p:nvPr>
-        </p:nvSpPr>
-        <p:spPr>
-          <a:xfrm>
-            <a:off x="548640" y="548640"/>
-            <a:ext cx="11091672" cy="822960"/>
-          </a:xfrm>
-          <a:prstGeom prst="rect">
-            <a:avLst/>
-          </a:prstGeom>
-          <a:noFill/>
-          <a:ln/>
-        </p:spPr>
-        <p:txBody>
-          <a:bodyPr wrap="square" lIns="0" tIns="0" rIns="0" bIns="0" rtlCol="0" anchor="ctr"/>
-          <a:lstStyle/>
-          <a:p>
-            <a:pPr marL="0" indent="0" algn="l">
-              <a:buNone/>
-            </a:pPr>
-            <a:r>
-              <a:rPr lang="en-US" sz="3000" b="1" dirty="0">
-                <a:solidFill>
-                  <a:schemeClr val="bg1"/>
-                </a:solidFill>
-              </a:rPr>
-              <a:t>Live demo 6: the ledger and replay</a:t>
-            </a:r>
-            <a:endParaRPr lang="en-US" sz="3000" dirty="0"/>
-          </a:p>
-        </p:txBody>
-      </p:sp>
-      <p:sp>
-        <p:nvSpPr>
-          <p:cNvPr id="3" name="Shape 1"/>
-          <p:cNvSpPr/>
-          <p:nvPr/>
-        </p:nvSpPr>
-        <p:spPr>
-          <a:xfrm>
-            <a:off x="10177272" y="685800"/>
-            <a:ext cx="1463040" cy="548640"/>
-          </a:xfrm>
-          <a:prstGeom prst="roundRect">
-            <a:avLst>
-              <a:gd name="adj" fmla="val 16667"/>
-            </a:avLst>
-          </a:prstGeom>
-          <a:solidFill>
-            <a:srgbClr val="E9B44C"/>
-          </a:solidFill>
-          <a:ln w="12700">
-            <a:solidFill>
-              <a:srgbClr val="E9B44C"/>
-            </a:solidFill>
-            <a:prstDash val="solid"/>
-          </a:ln>
-        </p:spPr>
-      </p:sp>
-      <p:sp>
-        <p:nvSpPr>
-          <p:cNvPr id="4" name="Text 2"/>
-          <p:cNvSpPr txBox="1"/>
-          <p:nvPr/>
-        </p:nvSpPr>
-        <p:spPr>
-          <a:xfrm>
-            <a:off x="10177272" y="685800"/>
-            <a:ext cx="1463040" cy="548640"/>
-          </a:xfrm>
-          <a:prstGeom prst="rect">
-            <a:avLst/>
-          </a:prstGeom>
-          <a:noFill/>
-          <a:ln/>
-        </p:spPr>
-        <p:txBody>
-          <a:bodyPr wrap="square" lIns="0" tIns="0" rIns="0" bIns="0" rtlCol="0" anchor="ctr"/>
-          <a:lstStyle/>
-          <a:p>
-            <a:pPr marL="0" indent="0" algn="ctr">
-              <a:buNone/>
-            </a:pPr>
-            <a:r>
-              <a:rPr lang="en-US" sz="1600" b="1" dirty="0">
-                <a:solidFill>
-                  <a:srgbClr val="1B1F2A"/>
-                </a:solidFill>
-              </a:rPr>
-              <a:t>1 min</a:t>
-            </a:r>
-            <a:endParaRPr lang="en-US" sz="1600" dirty="0"/>
-          </a:p>
-        </p:txBody>
-      </p:sp>
-      <p:sp>
-        <p:nvSpPr>
-          <p:cNvPr id="5" name="Shape 3"/>
-          <p:cNvSpPr/>
-          <p:nvPr/>
-        </p:nvSpPr>
-        <p:spPr>
-          <a:xfrm>
-            <a:off x="548640" y="1737360"/>
-            <a:ext cx="3520440" cy="3200400"/>
-          </a:xfrm>
-          <a:prstGeom prst="roundRect">
-            <a:avLst>
-              <a:gd name="adj" fmla="val 3429"/>
-            </a:avLst>
-          </a:prstGeom>
-          <a:solidFill>
-            <a:srgbClr val="1E2761"/>
-          </a:solidFill>
-          <a:ln w="12700">
-            <a:solidFill>
-              <a:srgbClr val="1E2761"/>
-            </a:solidFill>
-            <a:prstDash val="solid"/>
-          </a:ln>
-        </p:spPr>
-      </p:sp>
-      <p:sp>
-        <p:nvSpPr>
-          <p:cNvPr id="6" name="Text 4"/>
-          <p:cNvSpPr txBox="1"/>
-          <p:nvPr/>
-        </p:nvSpPr>
-        <p:spPr>
-          <a:xfrm>
-            <a:off x="822960" y="1920240"/>
-            <a:ext cx="2926080" cy="457200"/>
-          </a:xfrm>
-          <a:prstGeom prst="rect">
-            <a:avLst/>
-          </a:prstGeom>
-          <a:noFill/>
-          <a:ln/>
-        </p:spPr>
-        <p:txBody>
-          <a:bodyPr wrap="square" lIns="0" tIns="0" rIns="0" bIns="0" rtlCol="0" anchor="ctr"/>
-          <a:lstStyle/>
-          <a:p>
-            <a:pPr marL="0" indent="0">
-              <a:buNone/>
-            </a:pPr>
-            <a:r>
-              <a:rPr lang="en-US" sz="1800" b="1" dirty="0">
-                <a:solidFill>
-                  <a:srgbClr val="E9B44C"/>
-                </a:solidFill>
-              </a:rPr>
-              <a:t>Open</a:t>
-            </a:r>
-            <a:endParaRPr lang="en-US" sz="1800" dirty="0"/>
-          </a:p>
-        </p:txBody>
-      </p:sp>
-      <p:sp>
-        <p:nvSpPr>
-          <p:cNvPr id="7" name="Text 5"/>
-          <p:cNvSpPr txBox="1"/>
-          <p:nvPr/>
-        </p:nvSpPr>
-        <p:spPr>
-          <a:xfrm>
-            <a:off x="822960" y="2468880"/>
-            <a:ext cx="2971800" cy="2377440"/>
-          </a:xfrm>
-          <a:prstGeom prst="rect">
-            <a:avLst/>
-          </a:prstGeom>
-          <a:noFill/>
-          <a:ln/>
-        </p:spPr>
-        <p:txBody>
-          <a:bodyPr wrap="square" lIns="0" tIns="0" rIns="0" bIns="0" rtlCol="0" anchor="t"/>
-          <a:lstStyle/>
-          <a:p>
-            <a:pPr marL="342900" indent="-342900">
-              <a:spcAft>
-                <a:spcPts val="800"/>
-              </a:spcAft>
-              <a:buSzPct val="100000"/>
-              <a:buChar char="•"/>
-            </a:pPr>
-            <a:r>
-              <a:rPr lang="en-US" sz="1300" dirty="0">
-                <a:solidFill>
-                  <a:srgbClr val="FFFFFF"/>
-                </a:solidFill>
-              </a:rPr>
-              <a:t>Ledger view</a:t>
-            </a:r>
-            <a:endParaRPr lang="en-US" sz="1300" dirty="0"/>
-          </a:p>
-          <a:p>
-            <a:pPr marL="342900" indent="-342900">
-              <a:spcAft>
-                <a:spcPts val="800"/>
-              </a:spcAft>
-              <a:buSzPct val="100000"/>
-              <a:buChar char="•"/>
-            </a:pPr>
-            <a:r>
-              <a:rPr lang="en-US" sz="1300" dirty="0">
-                <a:solidFill>
-                  <a:srgbClr val="FFFFFF"/>
-                </a:solidFill>
-              </a:rPr>
-              <a:t>Press Verify ledger</a:t>
-            </a:r>
-            <a:endParaRPr lang="en-US" sz="1300" dirty="0"/>
-          </a:p>
-        </p:txBody>
-      </p:sp>
-      <p:sp>
-        <p:nvSpPr>
-          <p:cNvPr id="8" name="Shape 6"/>
-          <p:cNvSpPr/>
-          <p:nvPr/>
-        </p:nvSpPr>
-        <p:spPr>
-          <a:xfrm>
-            <a:off x="4297680" y="1737360"/>
-            <a:ext cx="3520440" cy="3200400"/>
-          </a:xfrm>
-          <a:prstGeom prst="roundRect">
-            <a:avLst>
-              <a:gd name="adj" fmla="val 3429"/>
-            </a:avLst>
-          </a:prstGeom>
-          <a:solidFill>
-            <a:srgbClr val="1E2761"/>
-          </a:solidFill>
-          <a:ln w="12700">
-            <a:solidFill>
-              <a:srgbClr val="1E2761"/>
-            </a:solidFill>
-            <a:prstDash val="solid"/>
-          </a:ln>
-        </p:spPr>
-      </p:sp>
-      <p:sp>
-        <p:nvSpPr>
-          <p:cNvPr id="9" name="Text 7"/>
-          <p:cNvSpPr txBox="1"/>
-          <p:nvPr/>
-        </p:nvSpPr>
-        <p:spPr>
-          <a:xfrm>
-            <a:off x="4572000" y="1920240"/>
-            <a:ext cx="2926080" cy="457200"/>
-          </a:xfrm>
-          <a:prstGeom prst="rect">
-            <a:avLst/>
-          </a:prstGeom>
-          <a:noFill/>
-          <a:ln/>
-        </p:spPr>
-        <p:txBody>
-          <a:bodyPr wrap="square" lIns="0" tIns="0" rIns="0" bIns="0" rtlCol="0" anchor="ctr"/>
-          <a:lstStyle/>
-          <a:p>
-            <a:pPr marL="0" indent="0">
-              <a:buNone/>
-            </a:pPr>
-            <a:r>
-              <a:rPr lang="en-US" sz="1800" b="1" dirty="0">
-                <a:solidFill>
-                  <a:srgbClr val="E9B44C"/>
-                </a:solidFill>
-              </a:rPr>
-              <a:t>Point at</a:t>
-            </a:r>
-            <a:endParaRPr lang="en-US" sz="1800" dirty="0"/>
-          </a:p>
-        </p:txBody>
-      </p:sp>
-      <p:sp>
-        <p:nvSpPr>
-          <p:cNvPr id="10" name="Text 8"/>
-          <p:cNvSpPr txBox="1"/>
-          <p:nvPr/>
-        </p:nvSpPr>
-        <p:spPr>
-          <a:xfrm>
-            <a:off x="4572000" y="2468880"/>
-            <a:ext cx="2971800" cy="2377440"/>
-          </a:xfrm>
-          <a:prstGeom prst="rect">
-            <a:avLst/>
-          </a:prstGeom>
-          <a:noFill/>
-          <a:ln/>
-        </p:spPr>
-        <p:txBody>
-          <a:bodyPr wrap="square" lIns="0" tIns="0" rIns="0" bIns="0" rtlCol="0" anchor="t"/>
-          <a:lstStyle/>
-          <a:p>
-            <a:pPr marL="342900" indent="-342900">
-              <a:spcAft>
-                <a:spcPts val="800"/>
-              </a:spcAft>
-              <a:buSzPct val="100000"/>
-              <a:buChar char="•"/>
-            </a:pPr>
-            <a:r>
-              <a:rPr lang="en-US" sz="1300" dirty="0">
-                <a:solidFill>
-                  <a:srgbClr val="FFFFFF"/>
-                </a:solidFill>
-              </a:rPr>
-              <a:t>Every entry with its snapshot hash, spec hash and code version</a:t>
-            </a:r>
-            <a:endParaRPr lang="en-US" sz="1300" dirty="0"/>
-          </a:p>
-          <a:p>
-            <a:pPr marL="342900" indent="-342900">
-              <a:spcAft>
-                <a:spcPts val="800"/>
-              </a:spcAft>
-              <a:buSzPct val="100000"/>
-              <a:buChar char="•"/>
-            </a:pPr>
-            <a:r>
-              <a:rPr lang="en-US" sz="1300" dirty="0">
-                <a:solidFill>
-                  <a:srgbClr val="FFFFFF"/>
-                </a:solidFill>
-              </a:rPr>
-              <a:t>The replay result: chain intact, entries under the current spec recompute exactly</a:t>
-            </a:r>
-            <a:endParaRPr lang="en-US" sz="1300" dirty="0"/>
-          </a:p>
-          <a:p>
-            <a:pPr marL="342900" indent="-342900">
-              <a:spcAft>
-                <a:spcPts val="800"/>
-              </a:spcAft>
-              <a:buSzPct val="100000"/>
-              <a:buChar char="•"/>
-            </a:pPr>
-            <a:r>
-              <a:rPr lang="en-US" sz="1300" dirty="0">
-                <a:solidFill>
-                  <a:srgbClr val="FFFFFF"/>
-                </a:solidFill>
-              </a:rPr>
-              <a:t>Eight numbered amendments, each with its reason, each a new spec hash pinned in the tests</a:t>
-            </a:r>
-            <a:endParaRPr lang="en-US" sz="1300" dirty="0"/>
-          </a:p>
-        </p:txBody>
-      </p:sp>
-      <p:sp>
-        <p:nvSpPr>
-          <p:cNvPr id="11" name="Shape 9"/>
-          <p:cNvSpPr/>
-          <p:nvPr/>
-        </p:nvSpPr>
-        <p:spPr>
-          <a:xfrm>
-            <a:off x="8046720" y="1737360"/>
-            <a:ext cx="3520440" cy="3200400"/>
-          </a:xfrm>
-          <a:prstGeom prst="roundRect">
-            <a:avLst>
-              <a:gd name="adj" fmla="val 3429"/>
-            </a:avLst>
-          </a:prstGeom>
-          <a:solidFill>
-            <a:srgbClr val="1E2761"/>
-          </a:solidFill>
-          <a:ln w="12700">
-            <a:solidFill>
-              <a:srgbClr val="1E2761"/>
-            </a:solidFill>
-            <a:prstDash val="solid"/>
-          </a:ln>
-        </p:spPr>
-      </p:sp>
-      <p:sp>
-        <p:nvSpPr>
-          <p:cNvPr id="12" name="Text 10"/>
-          <p:cNvSpPr txBox="1"/>
-          <p:nvPr/>
-        </p:nvSpPr>
-        <p:spPr>
-          <a:xfrm>
-            <a:off x="8321040" y="1920240"/>
-            <a:ext cx="2926080" cy="457200"/>
-          </a:xfrm>
-          <a:prstGeom prst="rect">
-            <a:avLst/>
-          </a:prstGeom>
-          <a:noFill/>
-          <a:ln/>
-        </p:spPr>
-        <p:txBody>
-          <a:bodyPr wrap="square" lIns="0" tIns="0" rIns="0" bIns="0" rtlCol="0" anchor="ctr"/>
-          <a:lstStyle/>
-          <a:p>
-            <a:pPr marL="0" indent="0">
-              <a:buNone/>
-            </a:pPr>
-            <a:r>
-              <a:rPr lang="en-US" sz="1800" b="1" dirty="0">
-                <a:solidFill>
-                  <a:srgbClr val="E9B44C"/>
-                </a:solidFill>
-              </a:rPr>
-              <a:t>Say</a:t>
-            </a:r>
-            <a:endParaRPr lang="en-US" sz="1800" dirty="0"/>
-          </a:p>
-        </p:txBody>
-      </p:sp>
-      <p:sp>
-        <p:nvSpPr>
-          <p:cNvPr id="13" name="Text 11"/>
-          <p:cNvSpPr txBox="1"/>
-          <p:nvPr/>
-        </p:nvSpPr>
-        <p:spPr>
-          <a:xfrm>
-            <a:off x="8321040" y="2468880"/>
-            <a:ext cx="2971800" cy="2377440"/>
-          </a:xfrm>
-          <a:prstGeom prst="rect">
-            <a:avLst/>
-          </a:prstGeom>
-          <a:noFill/>
-          <a:ln/>
-        </p:spPr>
-        <p:txBody>
-          <a:bodyPr wrap="square" lIns="0" tIns="0" rIns="0" bIns="0" rtlCol="0" anchor="t"/>
-          <a:lstStyle/>
-          <a:p>
-            <a:pPr marL="342900" indent="-342900">
-              <a:spcAft>
-                <a:spcPts val="800"/>
-              </a:spcAft>
-              <a:buSzPct val="100000"/>
-              <a:buChar char="•"/>
-            </a:pPr>
-            <a:r>
-              <a:rPr lang="en-US" sz="1300" dirty="0">
-                <a:solidFill>
-                  <a:srgbClr val="FFFFFF"/>
-                </a:solidFill>
-              </a:rPr>
-              <a:t>Nothing in this ledger can be edited or deleted without the chain breaking.</a:t>
-            </a:r>
-            <a:endParaRPr lang="en-US" sz="1300" dirty="0"/>
-          </a:p>
-          <a:p>
-            <a:pPr marL="342900" indent="-342900">
-              <a:spcAft>
-                <a:spcPts val="800"/>
-              </a:spcAft>
-              <a:buSzPct val="100000"/>
-              <a:buChar char="•"/>
-            </a:pPr>
-            <a:r>
-              <a:rPr lang="en-US" sz="1300" dirty="0">
-                <a:solidFill>
-                  <a:srgbClr val="FFFFFF"/>
-                </a:solidFill>
-              </a:rPr>
-              <a:t>Any entry can be recomputed from its snapshot. That is what auditable means here.</a:t>
-            </a:r>
-            <a:endParaRPr lang="en-US" sz="1300" dirty="0"/>
+              <a:rPr lang="en-US" sz="2000" dirty="0">
+                <a:solidFill>
+                  <a:srgbClr val="CADCFC"/>
+                </a:solidFill>
+              </a:rPr>
+              <a:t>The ask: scrutinise the scorecard, challenge a quote, and tell us which other decisions deserve the same chain. The 28 October call is on file; the 9 December forecast is too.</a:t>
+            </a:r>
+            <a:endParaRPr lang="en-US" sz="2000" dirty="0"/>
           </a:p>
         </p:txBody>
       </p:sp>
@@ -16584,7 +13800,7 @@
           </a:prstGeom>
           <a:extLst>
             <a:ext uri="{C572A759-6A51-4108-AA02-DFA0A04FC94B}">
-              <ma14:wrappingTextBoxFlag xmlns:ma14="http://schemas.microsoft.com/office/mac/drawingml/2011/main" xmlns="" val="0"/>
+              <ma14:wrappingTextBoxFlag xmlns="" xmlns:ma14="http://schemas.microsoft.com/office/mac/drawingml/2011/main" val="0"/>
             </a:ext>
           </a:extLst>
         </p:spPr>
@@ -16657,1286 +13873,6 @@
 </file>
 
 <file path=ppt/slides/slide20.xml><?xml version="1.0" encoding="utf-8"?>
-<p:sld xmlns:a="http://schemas.openxmlformats.org/drawingml/2006/main" xmlns:r="http://schemas.openxmlformats.org/officeDocument/2006/relationships" xmlns:p="http://schemas.openxmlformats.org/presentationml/2006/main">
-  <p:cSld name="Slide 20">
-    <p:spTree>
-      <p:nvGrpSpPr>
-        <p:cNvPr id="1" name=""/>
-        <p:cNvGrpSpPr/>
-        <p:nvPr/>
-      </p:nvGrpSpPr>
-      <p:grpSpPr>
-        <a:xfrm>
-          <a:off x="0" y="0"/>
-          <a:ext cx="0" cy="0"/>
-          <a:chOff x="0" y="0"/>
-          <a:chExt cx="0" cy="0"/>
-        </a:xfrm>
-      </p:grpSpPr>
-      <p:sp>
-        <p:nvSpPr>
-          <p:cNvPr id="2" name="Text 0"/>
-          <p:cNvSpPr>
-            <a:spLocks noGrp="1"/>
-          </p:cNvSpPr>
-          <p:nvPr>
-            <p:ph type="title" idx="100" hasCustomPrompt="1"/>
-          </p:nvPr>
-        </p:nvSpPr>
-        <p:spPr>
-          <a:xfrm>
-            <a:off x="548640" y="411480"/>
-            <a:ext cx="11091672" cy="822960"/>
-          </a:xfrm>
-          <a:prstGeom prst="rect">
-            <a:avLst/>
-          </a:prstGeom>
-          <a:noFill/>
-          <a:ln/>
-        </p:spPr>
-        <p:txBody>
-          <a:bodyPr wrap="square" lIns="0" tIns="0" rIns="0" bIns="0" rtlCol="0" anchor="ctr"/>
-          <a:lstStyle/>
-          <a:p>
-            <a:pPr marL="0" indent="0" algn="l">
-              <a:buNone/>
-            </a:pPr>
-            <a:r>
-              <a:rPr lang="en-US" sz="3200" b="1" dirty="0">
-                <a:solidFill>
-                  <a:schemeClr val="tx2"/>
-                </a:solidFill>
-              </a:rPr>
-              <a:t>What this does not claim, and what comes next</a:t>
-            </a:r>
-            <a:endParaRPr lang="en-US" sz="3200" dirty="0"/>
-          </a:p>
-        </p:txBody>
-      </p:sp>
-      <p:sp>
-        <p:nvSpPr>
-          <p:cNvPr id="4" name="Text 1"/>
-          <p:cNvSpPr txBox="1"/>
-          <p:nvPr/>
-        </p:nvSpPr>
-        <p:spPr>
-          <a:xfrm>
-            <a:off x="548640" y="1371600"/>
-            <a:ext cx="5486400" cy="365760"/>
-          </a:xfrm>
-          <a:prstGeom prst="rect">
-            <a:avLst/>
-          </a:prstGeom>
-          <a:noFill/>
-          <a:ln/>
-        </p:spPr>
-        <p:txBody>
-          <a:bodyPr wrap="square" lIns="0" tIns="0" rIns="0" bIns="0" rtlCol="0" anchor="t"/>
-          <a:lstStyle/>
-          <a:p>
-            <a:pPr marL="0" indent="0">
-              <a:buNone/>
-            </a:pPr>
-            <a:r>
-              <a:rPr lang="en-US" sz="1600" b="1" dirty="0">
-                <a:solidFill>
-                  <a:schemeClr val="tx2"/>
-                </a:solidFill>
-              </a:rPr>
-              <a:t>What this does not claim</a:t>
-            </a:r>
-            <a:endParaRPr lang="en-US" sz="1600" dirty="0"/>
-          </a:p>
-        </p:txBody>
-      </p:sp>
-      <p:sp>
-        <p:nvSpPr>
-          <p:cNvPr id="5" name="Shape 2"/>
-          <p:cNvSpPr/>
-          <p:nvPr/>
-        </p:nvSpPr>
-        <p:spPr>
-          <a:xfrm>
-            <a:off x="548640" y="1828800"/>
-            <a:ext cx="5486400" cy="960120"/>
-          </a:xfrm>
-          <a:prstGeom prst="roundRect">
-            <a:avLst>
-              <a:gd name="adj" fmla="val 11429"/>
-            </a:avLst>
-          </a:prstGeom>
-          <a:solidFill>
-            <a:srgbClr val="EEF2F7"/>
-          </a:solidFill>
-          <a:ln w="12700">
-            <a:solidFill>
-              <a:srgbClr val="EEF2F7"/>
-            </a:solidFill>
-            <a:prstDash val="solid"/>
-          </a:ln>
-          <a:effectLst>
-            <a:outerShdw blurRad="50800" dist="12700" dir="5400000" algn="bl" rotWithShape="0">
-              <a:srgbClr val="000000">
-                <a:alpha val="8000"/>
-              </a:srgbClr>
-            </a:outerShdw>
-          </a:effectLst>
-        </p:spPr>
-      </p:sp>
-      <p:sp>
-        <p:nvSpPr>
-          <p:cNvPr id="6" name="Text 3"/>
-          <p:cNvSpPr txBox="1"/>
-          <p:nvPr/>
-        </p:nvSpPr>
-        <p:spPr>
-          <a:xfrm>
-            <a:off x="777240" y="1901952"/>
-            <a:ext cx="5029200" cy="320040"/>
-          </a:xfrm>
-          <a:prstGeom prst="rect">
-            <a:avLst/>
-          </a:prstGeom>
-          <a:noFill/>
-          <a:ln/>
-        </p:spPr>
-        <p:txBody>
-          <a:bodyPr wrap="square" lIns="0" tIns="0" rIns="0" bIns="0" rtlCol="0" anchor="t"/>
-          <a:lstStyle/>
-          <a:p>
-            <a:pPr marL="0" indent="0">
-              <a:buNone/>
-            </a:pPr>
-            <a:r>
-              <a:rPr lang="en-US" sz="1300" b="1" dirty="0">
-                <a:solidFill>
-                  <a:schemeClr val="tx2"/>
-                </a:solidFill>
-              </a:rPr>
-              <a:t>One scored decision</a:t>
-            </a:r>
-            <a:endParaRPr lang="en-US" sz="1300" dirty="0"/>
-          </a:p>
-        </p:txBody>
-      </p:sp>
-      <p:sp>
-        <p:nvSpPr>
-          <p:cNvPr id="7" name="Text 4"/>
-          <p:cNvSpPr txBox="1"/>
-          <p:nvPr/>
-        </p:nvSpPr>
-        <p:spPr>
-          <a:xfrm>
-            <a:off x="777240" y="2212848"/>
-            <a:ext cx="5029200" cy="548640"/>
-          </a:xfrm>
-          <a:prstGeom prst="rect">
-            <a:avLst/>
-          </a:prstGeom>
-          <a:noFill/>
-          <a:ln/>
-        </p:spPr>
-        <p:txBody>
-          <a:bodyPr wrap="square" lIns="0" tIns="0" rIns="0" bIns="0" rtlCol="0" anchor="t"/>
-          <a:lstStyle/>
-          <a:p>
-            <a:pPr marL="0" indent="0">
-              <a:buNone/>
-            </a:pPr>
-            <a:r>
-              <a:rPr lang="en-US" sz="1050" dirty="0">
-                <a:solidFill>
-                  <a:schemeClr val="tx1"/>
-                </a:solidFill>
-              </a:rPr>
-              <a:t>28 October is the first. Everything before it is process evidence, which is the point, but calibration needs a record.</a:t>
-            </a:r>
-            <a:endParaRPr lang="en-US" sz="1050" dirty="0"/>
-          </a:p>
-        </p:txBody>
-      </p:sp>
-      <p:sp>
-        <p:nvSpPr>
-          <p:cNvPr id="8" name="Shape 5"/>
-          <p:cNvSpPr/>
-          <p:nvPr/>
-        </p:nvSpPr>
-        <p:spPr>
-          <a:xfrm>
-            <a:off x="548640" y="2880360"/>
-            <a:ext cx="5486400" cy="960120"/>
-          </a:xfrm>
-          <a:prstGeom prst="roundRect">
-            <a:avLst>
-              <a:gd name="adj" fmla="val 11429"/>
-            </a:avLst>
-          </a:prstGeom>
-          <a:solidFill>
-            <a:srgbClr val="EEF2F7"/>
-          </a:solidFill>
-          <a:ln w="12700">
-            <a:solidFill>
-              <a:srgbClr val="EEF2F7"/>
-            </a:solidFill>
-            <a:prstDash val="solid"/>
-          </a:ln>
-          <a:effectLst>
-            <a:outerShdw blurRad="50800" dist="12700" dir="5400000" algn="bl" rotWithShape="0">
-              <a:srgbClr val="000000">
-                <a:alpha val="8000"/>
-              </a:srgbClr>
-            </a:outerShdw>
-          </a:effectLst>
-        </p:spPr>
-      </p:sp>
-      <p:sp>
-        <p:nvSpPr>
-          <p:cNvPr id="9" name="Text 6"/>
-          <p:cNvSpPr txBox="1"/>
-          <p:nvPr/>
-        </p:nvSpPr>
-        <p:spPr>
-          <a:xfrm>
-            <a:off x="777240" y="2953512"/>
-            <a:ext cx="5029200" cy="320040"/>
-          </a:xfrm>
-          <a:prstGeom prst="rect">
-            <a:avLst/>
-          </a:prstGeom>
-          <a:noFill/>
-          <a:ln/>
-        </p:spPr>
-        <p:txBody>
-          <a:bodyPr wrap="square" lIns="0" tIns="0" rIns="0" bIns="0" rtlCol="0" anchor="t"/>
-          <a:lstStyle/>
-          <a:p>
-            <a:pPr marL="0" indent="0">
-              <a:buNone/>
-            </a:pPr>
-            <a:r>
-              <a:rPr lang="en-US" sz="1300" b="1" dirty="0">
-                <a:solidFill>
-                  <a:schemeClr val="tx2"/>
-                </a:solidFill>
-              </a:rPr>
-              <a:t>Weights are judgement</a:t>
-            </a:r>
-            <a:endParaRPr lang="en-US" sz="1300" dirty="0"/>
-          </a:p>
-        </p:txBody>
-      </p:sp>
-      <p:sp>
-        <p:nvSpPr>
-          <p:cNvPr id="10" name="Text 7"/>
-          <p:cNvSpPr txBox="1"/>
-          <p:nvPr/>
-        </p:nvSpPr>
-        <p:spPr>
-          <a:xfrm>
-            <a:off x="777240" y="3264408"/>
-            <a:ext cx="5029200" cy="548640"/>
-          </a:xfrm>
-          <a:prstGeom prst="rect">
-            <a:avLst/>
-          </a:prstGeom>
-          <a:noFill/>
-          <a:ln/>
-        </p:spPr>
-        <p:txBody>
-          <a:bodyPr wrap="square" lIns="0" tIns="0" rIns="0" bIns="0" rtlCol="0" anchor="t"/>
-          <a:lstStyle/>
-          <a:p>
-            <a:pPr marL="0" indent="0">
-              <a:buNone/>
-            </a:pPr>
-            <a:r>
-              <a:rPr lang="en-US" sz="1050" dirty="0">
-                <a:solidFill>
-                  <a:schemeClr val="tx1"/>
-                </a:solidFill>
-              </a:rPr>
-              <a:t>Market 0.6, Taylor 0.2, odds 0.1, base rates 0.1, the floor and the lean cap were set by reasoning and logged, never fitted.</a:t>
-            </a:r>
-            <a:endParaRPr lang="en-US" sz="1050" dirty="0"/>
-          </a:p>
-        </p:txBody>
-      </p:sp>
-      <p:sp>
-        <p:nvSpPr>
-          <p:cNvPr id="11" name="Shape 8"/>
-          <p:cNvSpPr/>
-          <p:nvPr/>
-        </p:nvSpPr>
-        <p:spPr>
-          <a:xfrm>
-            <a:off x="548640" y="3931920"/>
-            <a:ext cx="5486400" cy="960120"/>
-          </a:xfrm>
-          <a:prstGeom prst="roundRect">
-            <a:avLst>
-              <a:gd name="adj" fmla="val 11429"/>
-            </a:avLst>
-          </a:prstGeom>
-          <a:solidFill>
-            <a:srgbClr val="EEF2F7"/>
-          </a:solidFill>
-          <a:ln w="12700">
-            <a:solidFill>
-              <a:srgbClr val="EEF2F7"/>
-            </a:solidFill>
-            <a:prstDash val="solid"/>
-          </a:ln>
-          <a:effectLst>
-            <a:outerShdw blurRad="50800" dist="12700" dir="5400000" algn="bl" rotWithShape="0">
-              <a:srgbClr val="000000">
-                <a:alpha val="8000"/>
-              </a:srgbClr>
-            </a:outerShdw>
-          </a:effectLst>
-        </p:spPr>
-      </p:sp>
-      <p:sp>
-        <p:nvSpPr>
-          <p:cNvPr id="12" name="Text 9"/>
-          <p:cNvSpPr txBox="1"/>
-          <p:nvPr/>
-        </p:nvSpPr>
-        <p:spPr>
-          <a:xfrm>
-            <a:off x="777240" y="4005072"/>
-            <a:ext cx="5029200" cy="320040"/>
-          </a:xfrm>
-          <a:prstGeom prst="rect">
-            <a:avLst/>
-          </a:prstGeom>
-          <a:noFill/>
-          <a:ln/>
-        </p:spPr>
-        <p:txBody>
-          <a:bodyPr wrap="square" lIns="0" tIns="0" rIns="0" bIns="0" rtlCol="0" anchor="t"/>
-          <a:lstStyle/>
-          <a:p>
-            <a:pPr marL="0" indent="0">
-              <a:buNone/>
-            </a:pPr>
-            <a:r>
-              <a:rPr lang="en-US" sz="1300" b="1" dirty="0">
-                <a:solidFill>
-                  <a:schemeClr val="tx2"/>
-                </a:solidFill>
-              </a:rPr>
-              <a:t>The fitted model is outside</a:t>
-            </a:r>
-            <a:endParaRPr lang="en-US" sz="1300" dirty="0"/>
-          </a:p>
-        </p:txBody>
-      </p:sp>
-      <p:sp>
-        <p:nvSpPr>
-          <p:cNvPr id="13" name="Text 10"/>
-          <p:cNvSpPr txBox="1"/>
-          <p:nvPr/>
-        </p:nvSpPr>
-        <p:spPr>
-          <a:xfrm>
-            <a:off x="777240" y="4315968"/>
-            <a:ext cx="5029200" cy="548640"/>
-          </a:xfrm>
-          <a:prstGeom prst="rect">
-            <a:avLst/>
-          </a:prstGeom>
-          <a:noFill/>
-          <a:ln/>
-        </p:spPr>
-        <p:txBody>
-          <a:bodyPr wrap="square" lIns="0" tIns="0" rIns="0" bIns="0" rtlCol="0" anchor="t"/>
-          <a:lstStyle/>
-          <a:p>
-            <a:pPr marL="0" indent="0">
-              <a:buNone/>
-            </a:pPr>
-            <a:r>
-              <a:rPr lang="en-US" sz="1050" dirty="0">
-                <a:solidFill>
-                  <a:schemeClr val="tx1"/>
-                </a:solidFill>
-              </a:rPr>
-              <a:t>Probit v1 failed its gate and was reported, not tuned; v2 beats the base rate but carries a contamination caveat, so weight 0. About 130 usable decisions, 68% holds: no gradient-boosted anything.</a:t>
-            </a:r>
-            <a:endParaRPr lang="en-US" sz="1050" dirty="0"/>
-          </a:p>
-        </p:txBody>
-      </p:sp>
-      <p:sp>
-        <p:nvSpPr>
-          <p:cNvPr id="14" name="Shape 11"/>
-          <p:cNvSpPr/>
-          <p:nvPr/>
-        </p:nvSpPr>
-        <p:spPr>
-          <a:xfrm>
-            <a:off x="548640" y="4983480"/>
-            <a:ext cx="5486400" cy="960120"/>
-          </a:xfrm>
-          <a:prstGeom prst="roundRect">
-            <a:avLst>
-              <a:gd name="adj" fmla="val 11429"/>
-            </a:avLst>
-          </a:prstGeom>
-          <a:solidFill>
-            <a:srgbClr val="EEF2F7"/>
-          </a:solidFill>
-          <a:ln w="12700">
-            <a:solidFill>
-              <a:srgbClr val="EEF2F7"/>
-            </a:solidFill>
-            <a:prstDash val="solid"/>
-          </a:ln>
-          <a:effectLst>
-            <a:outerShdw blurRad="50800" dist="12700" dir="5400000" algn="bl" rotWithShape="0">
-              <a:srgbClr val="000000">
-                <a:alpha val="8000"/>
-              </a:srgbClr>
-            </a:outerShdw>
-          </a:effectLst>
-        </p:spPr>
-      </p:sp>
-      <p:sp>
-        <p:nvSpPr>
-          <p:cNvPr id="15" name="Text 12"/>
-          <p:cNvSpPr txBox="1"/>
-          <p:nvPr/>
-        </p:nvSpPr>
-        <p:spPr>
-          <a:xfrm>
-            <a:off x="777240" y="5056632"/>
-            <a:ext cx="5029200" cy="320040"/>
-          </a:xfrm>
-          <a:prstGeom prst="rect">
-            <a:avLst/>
-          </a:prstGeom>
-          <a:noFill/>
-          <a:ln/>
-        </p:spPr>
-        <p:txBody>
-          <a:bodyPr wrap="square" lIns="0" tIns="0" rIns="0" bIns="0" rtlCol="0" anchor="t"/>
-          <a:lstStyle/>
-          <a:p>
-            <a:pPr marL="0" indent="0">
-              <a:buNone/>
-            </a:pPr>
-            <a:r>
-              <a:rPr lang="en-US" sz="1300" b="1" dirty="0">
-                <a:solidFill>
-                  <a:schemeClr val="tx2"/>
-                </a:solidFill>
-              </a:rPr>
-              <a:t>The market is the anchor</a:t>
-            </a:r>
-            <a:endParaRPr lang="en-US" sz="1300" dirty="0"/>
-          </a:p>
-        </p:txBody>
-      </p:sp>
-      <p:sp>
-        <p:nvSpPr>
-          <p:cNvPr id="16" name="Text 13"/>
-          <p:cNvSpPr txBox="1"/>
-          <p:nvPr/>
-        </p:nvSpPr>
-        <p:spPr>
-          <a:xfrm>
-            <a:off x="777240" y="5367528"/>
-            <a:ext cx="5029200" cy="548640"/>
-          </a:xfrm>
-          <a:prstGeom prst="rect">
-            <a:avLst/>
-          </a:prstGeom>
-          <a:noFill/>
-          <a:ln/>
-        </p:spPr>
-        <p:txBody>
-          <a:bodyPr wrap="square" lIns="0" tIns="0" rIns="0" bIns="0" rtlCol="0" anchor="t"/>
-          <a:lstStyle/>
-          <a:p>
-            <a:pPr marL="0" indent="0">
-              <a:buNone/>
-            </a:pPr>
-            <a:r>
-              <a:rPr lang="en-US" sz="1050" dirty="0">
-                <a:solidFill>
-                  <a:schemeClr val="tx1"/>
-                </a:solidFill>
-              </a:rPr>
-              <a:t>At five weeks futures call most decisions. The claim is auditability and discipline, not a better hit rate.</a:t>
-            </a:r>
-            <a:endParaRPr lang="en-US" sz="1050" dirty="0"/>
-          </a:p>
-        </p:txBody>
-      </p:sp>
-      <p:sp>
-        <p:nvSpPr>
-          <p:cNvPr id="17" name="Text 14"/>
-          <p:cNvSpPr txBox="1"/>
-          <p:nvPr/>
-        </p:nvSpPr>
-        <p:spPr>
-          <a:xfrm>
-            <a:off x="6355080" y="1371600"/>
-            <a:ext cx="5486400" cy="365760"/>
-          </a:xfrm>
-          <a:prstGeom prst="rect">
-            <a:avLst/>
-          </a:prstGeom>
-          <a:noFill/>
-          <a:ln/>
-        </p:spPr>
-        <p:txBody>
-          <a:bodyPr wrap="square" lIns="0" tIns="0" rIns="0" bIns="0" rtlCol="0" anchor="t"/>
-          <a:lstStyle/>
-          <a:p>
-            <a:pPr marL="0" indent="0">
-              <a:buNone/>
-            </a:pPr>
-            <a:r>
-              <a:rPr lang="en-US" sz="1600" b="1" dirty="0">
-                <a:solidFill>
-                  <a:schemeClr val="tx2"/>
-                </a:solidFill>
-              </a:rPr>
-              <a:t>What comes next, in order of value</a:t>
-            </a:r>
-            <a:endParaRPr lang="en-US" sz="1600" dirty="0"/>
-          </a:p>
-        </p:txBody>
-      </p:sp>
-      <p:sp>
-        <p:nvSpPr>
-          <p:cNvPr id="18" name="Shape 15"/>
-          <p:cNvSpPr/>
-          <p:nvPr/>
-        </p:nvSpPr>
-        <p:spPr>
-          <a:xfrm>
-            <a:off x="6355080" y="1920240"/>
-            <a:ext cx="384048" cy="384048"/>
-          </a:xfrm>
-          <a:prstGeom prst="ellipse">
-            <a:avLst/>
-          </a:prstGeom>
-          <a:solidFill>
-            <a:srgbClr val="1E2761"/>
-          </a:solidFill>
-          <a:ln w="12700">
-            <a:solidFill>
-              <a:srgbClr val="1E2761"/>
-            </a:solidFill>
-            <a:prstDash val="solid"/>
-          </a:ln>
-        </p:spPr>
-      </p:sp>
-      <p:sp>
-        <p:nvSpPr>
-          <p:cNvPr id="19" name="Text 16"/>
-          <p:cNvSpPr txBox="1"/>
-          <p:nvPr/>
-        </p:nvSpPr>
-        <p:spPr>
-          <a:xfrm>
-            <a:off x="6355080" y="1920240"/>
-            <a:ext cx="384048" cy="384048"/>
-          </a:xfrm>
-          <a:prstGeom prst="rect">
-            <a:avLst/>
-          </a:prstGeom>
-          <a:noFill/>
-          <a:ln/>
-        </p:spPr>
-        <p:txBody>
-          <a:bodyPr wrap="square" lIns="0" tIns="0" rIns="0" bIns="0" rtlCol="0" anchor="ctr"/>
-          <a:lstStyle/>
-          <a:p>
-            <a:pPr marL="0" indent="0" algn="ctr">
-              <a:buNone/>
-            </a:pPr>
-            <a:r>
-              <a:rPr lang="en-US" sz="1400" b="1" dirty="0">
-                <a:solidFill>
-                  <a:schemeClr val="bg1"/>
-                </a:solidFill>
-              </a:rPr>
-              <a:t>1</a:t>
-            </a:r>
-            <a:endParaRPr lang="en-US" sz="1400" dirty="0"/>
-          </a:p>
-        </p:txBody>
-      </p:sp>
-      <p:sp>
-        <p:nvSpPr>
-          <p:cNvPr id="20" name="Text 17"/>
-          <p:cNvSpPr txBox="1"/>
-          <p:nvPr/>
-        </p:nvSpPr>
-        <p:spPr>
-          <a:xfrm>
-            <a:off x="6858000" y="1828800"/>
-            <a:ext cx="4800600" cy="365760"/>
-          </a:xfrm>
-          <a:prstGeom prst="rect">
-            <a:avLst/>
-          </a:prstGeom>
-          <a:noFill/>
-          <a:ln/>
-        </p:spPr>
-        <p:txBody>
-          <a:bodyPr wrap="square" lIns="0" tIns="0" rIns="0" bIns="0" rtlCol="0" anchor="ctr"/>
-          <a:lstStyle/>
-          <a:p>
-            <a:pPr marL="0" indent="0">
-              <a:buNone/>
-            </a:pPr>
-            <a:r>
-              <a:rPr lang="en-US" sz="1300" b="1" dirty="0">
-                <a:solidFill>
-                  <a:schemeClr val="tx2"/>
-                </a:solidFill>
-              </a:rPr>
-              <a:t>The December window, same chain: on file</a:t>
-            </a:r>
-            <a:endParaRPr lang="en-US" sz="1300" dirty="0"/>
-          </a:p>
-        </p:txBody>
-      </p:sp>
-      <p:sp>
-        <p:nvSpPr>
-          <p:cNvPr id="21" name="Text 18"/>
-          <p:cNvSpPr txBox="1"/>
-          <p:nvPr/>
-        </p:nvSpPr>
-        <p:spPr>
-          <a:xfrm>
-            <a:off x="6858000" y="2194560"/>
-            <a:ext cx="4800600" cy="640080"/>
-          </a:xfrm>
-          <a:prstGeom prst="rect">
-            <a:avLst/>
-          </a:prstGeom>
-          <a:noFill/>
-          <a:ln/>
-        </p:spPr>
-        <p:txBody>
-          <a:bodyPr wrap="square" lIns="0" tIns="0" rIns="0" bIns="0" rtlCol="0" anchor="t"/>
-          <a:lstStyle/>
-          <a:p>
-            <a:pPr marL="0" indent="0">
-              <a:buNone/>
-            </a:pPr>
-            <a:r>
-              <a:rPr lang="en-US" sz="1050" dirty="0">
-                <a:solidFill>
-                  <a:schemeClr val="tx1"/>
-                </a:solidFill>
-              </a:rPr>
-              <a:t>Entry #23 for the 9 December meeting: +25 bps 73.6%, no change 16.7%, +50 bps 7.8%. Futures 84.5% and Polymarket 77.4% for a hike; the specialists lean +4.0 bp, labour again the lone dove. The chain needed only a new target, and the repair round fired twice on the inflation reader, both fixed.</a:t>
-            </a:r>
-            <a:endParaRPr lang="en-US" sz="1050" dirty="0"/>
-          </a:p>
-        </p:txBody>
-      </p:sp>
-      <p:sp>
-        <p:nvSpPr>
-          <p:cNvPr id="22" name="Shape 19"/>
-          <p:cNvSpPr/>
-          <p:nvPr/>
-        </p:nvSpPr>
-        <p:spPr>
-          <a:xfrm>
-            <a:off x="6355080" y="2971800"/>
-            <a:ext cx="384048" cy="384048"/>
-          </a:xfrm>
-          <a:prstGeom prst="ellipse">
-            <a:avLst/>
-          </a:prstGeom>
-          <a:solidFill>
-            <a:srgbClr val="1E2761"/>
-          </a:solidFill>
-          <a:ln w="12700">
-            <a:solidFill>
-              <a:srgbClr val="1E2761"/>
-            </a:solidFill>
-            <a:prstDash val="solid"/>
-          </a:ln>
-        </p:spPr>
-      </p:sp>
-      <p:sp>
-        <p:nvSpPr>
-          <p:cNvPr id="23" name="Text 20"/>
-          <p:cNvSpPr txBox="1"/>
-          <p:nvPr/>
-        </p:nvSpPr>
-        <p:spPr>
-          <a:xfrm>
-            <a:off x="6355080" y="2971800"/>
-            <a:ext cx="384048" cy="384048"/>
-          </a:xfrm>
-          <a:prstGeom prst="rect">
-            <a:avLst/>
-          </a:prstGeom>
-          <a:noFill/>
-          <a:ln/>
-        </p:spPr>
-        <p:txBody>
-          <a:bodyPr wrap="square" lIns="0" tIns="0" rIns="0" bIns="0" rtlCol="0" anchor="ctr"/>
-          <a:lstStyle/>
-          <a:p>
-            <a:pPr marL="0" indent="0" algn="ctr">
-              <a:buNone/>
-            </a:pPr>
-            <a:r>
-              <a:rPr lang="en-US" sz="1400" b="1" dirty="0">
-                <a:solidFill>
-                  <a:schemeClr val="bg1"/>
-                </a:solidFill>
-              </a:rPr>
-              <a:t>2</a:t>
-            </a:r>
-            <a:endParaRPr lang="en-US" sz="1400" dirty="0"/>
-          </a:p>
-        </p:txBody>
-      </p:sp>
-      <p:sp>
-        <p:nvSpPr>
-          <p:cNvPr id="24" name="Text 21"/>
-          <p:cNvSpPr txBox="1"/>
-          <p:nvPr/>
-        </p:nvSpPr>
-        <p:spPr>
-          <a:xfrm>
-            <a:off x="6858000" y="2880360"/>
-            <a:ext cx="4800600" cy="365760"/>
-          </a:xfrm>
-          <a:prstGeom prst="rect">
-            <a:avLst/>
-          </a:prstGeom>
-          <a:noFill/>
-          <a:ln/>
-        </p:spPr>
-        <p:txBody>
-          <a:bodyPr wrap="square" lIns="0" tIns="0" rIns="0" bIns="0" rtlCol="0" anchor="ctr"/>
-          <a:lstStyle/>
-          <a:p>
-            <a:pPr marL="0" indent="0">
-              <a:buNone/>
-            </a:pPr>
-            <a:r>
-              <a:rPr lang="en-US" sz="1300" b="1" dirty="0">
-                <a:solidFill>
-                  <a:schemeClr val="tx2"/>
-                </a:solidFill>
-              </a:rPr>
-              <a:t>Pre-registered weight sets, scored live</a:t>
-            </a:r>
-            <a:endParaRPr lang="en-US" sz="1300" dirty="0"/>
-          </a:p>
-        </p:txBody>
-      </p:sp>
-      <p:sp>
-        <p:nvSpPr>
-          <p:cNvPr id="25" name="Text 22"/>
-          <p:cNvSpPr txBox="1"/>
-          <p:nvPr/>
-        </p:nvSpPr>
-        <p:spPr>
-          <a:xfrm>
-            <a:off x="6858000" y="3246120"/>
-            <a:ext cx="4800600" cy="640080"/>
-          </a:xfrm>
-          <a:prstGeom prst="rect">
-            <a:avLst/>
-          </a:prstGeom>
-          <a:noFill/>
-          <a:ln/>
-        </p:spPr>
-        <p:txBody>
-          <a:bodyPr wrap="square" lIns="0" tIns="0" rIns="0" bIns="0" rtlCol="0" anchor="t"/>
-          <a:lstStyle/>
-          <a:p>
-            <a:pPr marL="0" indent="0">
-              <a:buNone/>
-            </a:pPr>
-            <a:r>
-              <a:rPr lang="en-US" sz="1050" dirty="0">
-                <a:solidFill>
-                  <a:schemeClr val="tx1"/>
-                </a:solidFill>
-              </a:rPr>
-              <a:t>Three or four candidate sets written down now, all scored on every live decision; the live set changes only by amendment on that record.</a:t>
-            </a:r>
-            <a:endParaRPr lang="en-US" sz="1050" dirty="0"/>
-          </a:p>
-        </p:txBody>
-      </p:sp>
-      <p:sp>
-        <p:nvSpPr>
-          <p:cNvPr id="26" name="Shape 23"/>
-          <p:cNvSpPr/>
-          <p:nvPr/>
-        </p:nvSpPr>
-        <p:spPr>
-          <a:xfrm>
-            <a:off x="6355080" y="4023360"/>
-            <a:ext cx="384048" cy="384048"/>
-          </a:xfrm>
-          <a:prstGeom prst="ellipse">
-            <a:avLst/>
-          </a:prstGeom>
-          <a:solidFill>
-            <a:srgbClr val="1E2761"/>
-          </a:solidFill>
-          <a:ln w="12700">
-            <a:solidFill>
-              <a:srgbClr val="1E2761"/>
-            </a:solidFill>
-            <a:prstDash val="solid"/>
-          </a:ln>
-        </p:spPr>
-      </p:sp>
-      <p:sp>
-        <p:nvSpPr>
-          <p:cNvPr id="27" name="Text 24"/>
-          <p:cNvSpPr txBox="1"/>
-          <p:nvPr/>
-        </p:nvSpPr>
-        <p:spPr>
-          <a:xfrm>
-            <a:off x="6355080" y="4023360"/>
-            <a:ext cx="384048" cy="384048"/>
-          </a:xfrm>
-          <a:prstGeom prst="rect">
-            <a:avLst/>
-          </a:prstGeom>
-          <a:noFill/>
-          <a:ln/>
-        </p:spPr>
-        <p:txBody>
-          <a:bodyPr wrap="square" lIns="0" tIns="0" rIns="0" bIns="0" rtlCol="0" anchor="ctr"/>
-          <a:lstStyle/>
-          <a:p>
-            <a:pPr marL="0" indent="0" algn="ctr">
-              <a:buNone/>
-            </a:pPr>
-            <a:r>
-              <a:rPr lang="en-US" sz="1400" b="1" dirty="0">
-                <a:solidFill>
-                  <a:schemeClr val="bg1"/>
-                </a:solidFill>
-              </a:rPr>
-              <a:t>3</a:t>
-            </a:r>
-            <a:endParaRPr lang="en-US" sz="1400" dirty="0"/>
-          </a:p>
-        </p:txBody>
-      </p:sp>
-      <p:sp>
-        <p:nvSpPr>
-          <p:cNvPr id="28" name="Text 25"/>
-          <p:cNvSpPr txBox="1"/>
-          <p:nvPr/>
-        </p:nvSpPr>
-        <p:spPr>
-          <a:xfrm>
-            <a:off x="6858000" y="3931920"/>
-            <a:ext cx="4800600" cy="365760"/>
-          </a:xfrm>
-          <a:prstGeom prst="rect">
-            <a:avLst/>
-          </a:prstGeom>
-          <a:noFill/>
-          <a:ln/>
-        </p:spPr>
-        <p:txBody>
-          <a:bodyPr wrap="square" lIns="0" tIns="0" rIns="0" bIns="0" rtlCol="0" anchor="ctr"/>
-          <a:lstStyle/>
-          <a:p>
-            <a:pPr marL="0" indent="0">
-              <a:buNone/>
-            </a:pPr>
-            <a:r>
-              <a:rPr lang="en-US" sz="1300" b="1" dirty="0">
-                <a:solidFill>
-                  <a:schemeClr val="tx2"/>
-                </a:solidFill>
-              </a:rPr>
-              <a:t>An events agent for regime shifts</a:t>
-            </a:r>
-            <a:endParaRPr lang="en-US" sz="1300" dirty="0"/>
-          </a:p>
-        </p:txBody>
-      </p:sp>
-      <p:sp>
-        <p:nvSpPr>
-          <p:cNvPr id="29" name="Text 26"/>
-          <p:cNvSpPr txBox="1"/>
-          <p:nvPr/>
-        </p:nvSpPr>
-        <p:spPr>
-          <a:xfrm>
-            <a:off x="6858000" y="4297680"/>
-            <a:ext cx="4800600" cy="640080"/>
-          </a:xfrm>
-          <a:prstGeom prst="rect">
-            <a:avLst/>
-          </a:prstGeom>
-          <a:noFill/>
-          <a:ln/>
-        </p:spPr>
-        <p:txBody>
-          <a:bodyPr wrap="square" lIns="0" tIns="0" rIns="0" bIns="0" rtlCol="0" anchor="t"/>
-          <a:lstStyle/>
-          <a:p>
-            <a:pPr marL="0" indent="0">
-              <a:buNone/>
-            </a:pPr>
-            <a:r>
-              <a:rPr lang="en-US" sz="1050" dirty="0">
-                <a:solidFill>
-                  <a:schemeClr val="tx1"/>
-                </a:solidFill>
-              </a:rPr>
-              <a:t>1987, 1998, 2008, 2020: the Fed cut on financial stress, not the data the models read. A watch-out agent that scans for bank failures, funding stress and dislocations, and raises a watch-out every analyst must answer.</a:t>
-            </a:r>
-            <a:endParaRPr lang="en-US" sz="1050" dirty="0"/>
-          </a:p>
-        </p:txBody>
-      </p:sp>
-      <p:sp>
-        <p:nvSpPr>
-          <p:cNvPr id="30" name="Shape 27"/>
-          <p:cNvSpPr/>
-          <p:nvPr/>
-        </p:nvSpPr>
-        <p:spPr>
-          <a:xfrm>
-            <a:off x="6355080" y="5074920"/>
-            <a:ext cx="384048" cy="384048"/>
-          </a:xfrm>
-          <a:prstGeom prst="ellipse">
-            <a:avLst/>
-          </a:prstGeom>
-          <a:solidFill>
-            <a:srgbClr val="1E2761"/>
-          </a:solidFill>
-          <a:ln w="12700">
-            <a:solidFill>
-              <a:srgbClr val="1E2761"/>
-            </a:solidFill>
-            <a:prstDash val="solid"/>
-          </a:ln>
-        </p:spPr>
-      </p:sp>
-      <p:sp>
-        <p:nvSpPr>
-          <p:cNvPr id="31" name="Text 28"/>
-          <p:cNvSpPr txBox="1"/>
-          <p:nvPr/>
-        </p:nvSpPr>
-        <p:spPr>
-          <a:xfrm>
-            <a:off x="6355080" y="5074920"/>
-            <a:ext cx="384048" cy="384048"/>
-          </a:xfrm>
-          <a:prstGeom prst="rect">
-            <a:avLst/>
-          </a:prstGeom>
-          <a:noFill/>
-          <a:ln/>
-        </p:spPr>
-        <p:txBody>
-          <a:bodyPr wrap="square" lIns="0" tIns="0" rIns="0" bIns="0" rtlCol="0" anchor="ctr"/>
-          <a:lstStyle/>
-          <a:p>
-            <a:pPr marL="0" indent="0" algn="ctr">
-              <a:buNone/>
-            </a:pPr>
-            <a:r>
-              <a:rPr lang="en-US" sz="1400" b="1" dirty="0">
-                <a:solidFill>
-                  <a:schemeClr val="bg1"/>
-                </a:solidFill>
-              </a:rPr>
-              <a:t>4</a:t>
-            </a:r>
-            <a:endParaRPr lang="en-US" sz="1400" dirty="0"/>
-          </a:p>
-        </p:txBody>
-      </p:sp>
-      <p:sp>
-        <p:nvSpPr>
-          <p:cNvPr id="32" name="Text 29"/>
-          <p:cNvSpPr txBox="1"/>
-          <p:nvPr/>
-        </p:nvSpPr>
-        <p:spPr>
-          <a:xfrm>
-            <a:off x="6858000" y="4983480"/>
-            <a:ext cx="4800600" cy="365760"/>
-          </a:xfrm>
-          <a:prstGeom prst="rect">
-            <a:avLst/>
-          </a:prstGeom>
-          <a:noFill/>
-          <a:ln/>
-        </p:spPr>
-        <p:txBody>
-          <a:bodyPr wrap="square" lIns="0" tIns="0" rIns="0" bIns="0" rtlCol="0" anchor="ctr"/>
-          <a:lstStyle/>
-          <a:p>
-            <a:pPr marL="0" indent="0">
-              <a:buNone/>
-            </a:pPr>
-            <a:r>
-              <a:rPr lang="en-US" sz="1300" b="1" dirty="0">
-                <a:solidFill>
-                  <a:schemeClr val="tx2"/>
-                </a:solidFill>
-              </a:rPr>
-              <a:t>Reasoning quality and a second model family</a:t>
-            </a:r>
-            <a:endParaRPr lang="en-US" sz="1300" dirty="0"/>
-          </a:p>
-        </p:txBody>
-      </p:sp>
-      <p:sp>
-        <p:nvSpPr>
-          <p:cNvPr id="33" name="Text 30"/>
-          <p:cNvSpPr txBox="1"/>
-          <p:nvPr/>
-        </p:nvSpPr>
-        <p:spPr>
-          <a:xfrm>
-            <a:off x="6858000" y="5349240"/>
-            <a:ext cx="4800600" cy="640080"/>
-          </a:xfrm>
-          <a:prstGeom prst="rect">
-            <a:avLst/>
-          </a:prstGeom>
-          <a:noFill/>
-          <a:ln/>
-        </p:spPr>
-        <p:txBody>
-          <a:bodyPr wrap="square" lIns="0" tIns="0" rIns="0" bIns="0" rtlCol="0" anchor="t"/>
-          <a:lstStyle/>
-          <a:p>
-            <a:pPr marL="0" indent="0">
-              <a:buNone/>
-            </a:pPr>
-            <a:r>
-              <a:rPr lang="en-US" sz="1050" dirty="0">
-                <a:solidFill>
-                  <a:schemeClr val="tx1"/>
-                </a:solidFill>
-              </a:rPr>
-              <a:t>Twenty traces hand-graded, a model grader trusted only once it agrees; a second model family to show the harness, not the model, does the work.</a:t>
-            </a:r>
-            <a:endParaRPr lang="en-US" sz="1050" dirty="0"/>
-          </a:p>
-        </p:txBody>
-      </p:sp>
-      <p:sp>
-        <p:nvSpPr>
-          <p:cNvPr id="3" name="Slide Number Placeholder 0"/>
-          <p:cNvSpPr>
-            <a:spLocks noGrp="1"/>
-          </p:cNvSpPr>
-          <p:nvPr>
-            <p:ph type="sldNum" sz="quarter" idx="4294967295"/>
-          </p:nvPr>
-        </p:nvSpPr>
-        <p:spPr>
-          <a:xfrm>
-            <a:off x="11091672" y="6400800"/>
-            <a:ext cx="548640" cy="274320"/>
-          </a:xfrm>
-          <a:prstGeom prst="rect">
-            <a:avLst/>
-          </a:prstGeom>
-          <a:extLst>
-            <a:ext uri="{C572A759-6A51-4108-AA02-DFA0A04FC94B}">
-              <ma14:wrappingTextBoxFlag xmlns:ma14="http://schemas.microsoft.com/office/mac/drawingml/2011/main" xmlns="" val="0"/>
-            </a:ext>
-          </a:extLst>
-        </p:spPr>
-        <p:txBody>
-          <a:bodyPr/>
-          <a:lstStyle>
-            <a:lvl1pPr>
-              <a:defRPr sz="1000">
-                <a:solidFill>
-                  <a:srgbClr val="6B7280"/>
-                </a:solidFill>
-              </a:defRPr>
-            </a:lvl1pPr>
-          </a:lstStyle>
-          <a:p>
-            <a:pPr algn="r"/>
-            <a:fld id="{F7021451-1387-4CA6-816F-3879F97B5CBC}" type="slidenum">
-              <a:rPr lang="en-US" b="0"/>
-              <a:t>20</a:t>
-            </a:fld>
-            <a:endParaRPr lang="en-US"/>
-          </a:p>
-        </p:txBody>
-      </p:sp>
-    </p:spTree>
-  </p:cSld>
-  <p:clrMapOvr>
-    <a:masterClrMapping/>
-  </p:clrMapOvr>
-</p:sld>
-</file>
-
-<file path=ppt/slides/slide21.xml><?xml version="1.0" encoding="utf-8"?>
-<p:sld xmlns:a="http://schemas.openxmlformats.org/drawingml/2006/main" xmlns:r="http://schemas.openxmlformats.org/officeDocument/2006/relationships" xmlns:p="http://schemas.openxmlformats.org/presentationml/2006/main">
-  <p:cSld name="Slide 21">
-    <p:spTree>
-      <p:nvGrpSpPr>
-        <p:cNvPr id="1" name=""/>
-        <p:cNvGrpSpPr/>
-        <p:nvPr/>
-      </p:nvGrpSpPr>
-      <p:grpSpPr>
-        <a:xfrm>
-          <a:off x="0" y="0"/>
-          <a:ext cx="0" cy="0"/>
-          <a:chOff x="0" y="0"/>
-          <a:chExt cx="0" cy="0"/>
-        </a:xfrm>
-      </p:grpSpPr>
-      <p:sp>
-        <p:nvSpPr>
-          <p:cNvPr id="2" name="Text 0"/>
-          <p:cNvSpPr>
-            <a:spLocks noGrp="1"/>
-          </p:cNvSpPr>
-          <p:nvPr>
-            <p:ph type="title" idx="100" hasCustomPrompt="1"/>
-          </p:nvPr>
-        </p:nvSpPr>
-        <p:spPr>
-          <a:xfrm>
-            <a:off x="548640" y="2103120"/>
-            <a:ext cx="11091672" cy="1280160"/>
-          </a:xfrm>
-          <a:prstGeom prst="rect">
-            <a:avLst/>
-          </a:prstGeom>
-          <a:noFill/>
-          <a:ln/>
-        </p:spPr>
-        <p:txBody>
-          <a:bodyPr wrap="square" lIns="0" tIns="0" rIns="0" bIns="0" rtlCol="0" anchor="b"/>
-          <a:lstStyle/>
-          <a:p>
-            <a:pPr marL="0" indent="0" algn="l">
-              <a:buNone/>
-            </a:pPr>
-            <a:r>
-              <a:rPr lang="en-US" sz="4000" b="1" dirty="0">
-                <a:solidFill>
-                  <a:schemeClr val="bg1"/>
-                </a:solidFill>
-              </a:rPr>
-              <a:t>Three things to take away</a:t>
-            </a:r>
-            <a:endParaRPr lang="en-US" sz="4000" dirty="0"/>
-          </a:p>
-        </p:txBody>
-      </p:sp>
-      <p:sp>
-        <p:nvSpPr>
-          <p:cNvPr id="3" name="Text 0"/>
-          <p:cNvSpPr>
-            <a:spLocks noGrp="1"/>
-          </p:cNvSpPr>
-          <p:nvPr>
-            <p:ph type="body" idx="101" hasCustomPrompt="1"/>
-          </p:nvPr>
-        </p:nvSpPr>
-        <p:spPr>
-          <a:xfrm>
-            <a:off x="548640" y="3520440"/>
-            <a:ext cx="11091672" cy="1463040"/>
-          </a:xfrm>
-          <a:prstGeom prst="rect">
-            <a:avLst/>
-          </a:prstGeom>
-          <a:noFill/>
-          <a:ln/>
-        </p:spPr>
-        <p:txBody>
-          <a:bodyPr wrap="square" lIns="0" tIns="0" rIns="0" bIns="0" rtlCol="0" anchor="t"/>
-          <a:lstStyle/>
-          <a:p>
-            <a:pPr marL="342900" indent="-342900" algn="l">
-              <a:spcAft>
-                <a:spcPts val="800"/>
-              </a:spcAft>
-              <a:buSzPct val="100000"/>
-              <a:buChar char="•"/>
-            </a:pPr>
-            <a:r>
-              <a:rPr lang="en-US" sz="2000" dirty="0">
-                <a:solidFill>
-                  <a:srgbClr val="CADCFC"/>
-                </a:solidFill>
-              </a:rPr>
-              <a:t>The harness is the product. Same model, same evidence, same day: naive it wobbles and leaks; harnessed it is stable, quoted and checked.</a:t>
-            </a:r>
-            <a:endParaRPr lang="en-US" sz="2000" dirty="0"/>
-          </a:p>
-          <a:p>
-            <a:pPr marL="342900" indent="-342900" algn="l">
-              <a:spcAft>
-                <a:spcPts val="800"/>
-              </a:spcAft>
-              <a:buSzPct val="100000"/>
-              <a:buChar char="•"/>
-            </a:pPr>
-            <a:r>
-              <a:rPr lang="en-US" sz="2000" dirty="0">
-                <a:solidFill>
-                  <a:srgbClr val="CADCFC"/>
-                </a:solidFill>
-              </a:rPr>
-              <a:t>Judge the process. Eight decisions a year cannot prove skill; a pre-registered scorecard measured on every snapshot can show discipline and catch drift.</a:t>
-            </a:r>
-            <a:endParaRPr lang="en-US" sz="2000" dirty="0"/>
-          </a:p>
-          <a:p>
-            <a:pPr marL="342900" indent="-342900" algn="l">
-              <a:buSzPct val="100000"/>
-              <a:buChar char="•"/>
-            </a:pPr>
-            <a:r>
-              <a:rPr lang="en-US" sz="2000" dirty="0">
-                <a:solidFill>
-                  <a:srgbClr val="CADCFC"/>
-                </a:solidFill>
-              </a:rPr>
-              <a:t>The ask: scrutinise the scorecard, challenge a quote, and tell us which other decisions deserve the same chain. The 28 October call is on file; the 9 December forecast is too.</a:t>
-            </a:r>
-            <a:endParaRPr lang="en-US" sz="2000" dirty="0"/>
-          </a:p>
-        </p:txBody>
-      </p:sp>
-    </p:spTree>
-  </p:cSld>
-  <p:clrMapOvr>
-    <a:masterClrMapping/>
-  </p:clrMapOvr>
-</p:sld>
-</file>
-
-<file path=ppt/slides/slide22.xml><?xml version="1.0" encoding="utf-8"?>
 <p:sld xmlns:a="http://schemas.openxmlformats.org/drawingml/2006/main" xmlns:r="http://schemas.openxmlformats.org/officeDocument/2006/relationships" xmlns:p="http://schemas.openxmlformats.org/presentationml/2006/main">
   <p:cSld name="Slide 22">
     <p:spTree>
@@ -19654,7 +15590,7 @@
           </a:prstGeom>
           <a:extLst>
             <a:ext uri="{C572A759-6A51-4108-AA02-DFA0A04FC94B}">
-              <ma14:wrappingTextBoxFlag xmlns:ma14="http://schemas.microsoft.com/office/mac/drawingml/2011/main" xmlns="" val="0"/>
+              <ma14:wrappingTextBoxFlag xmlns="" xmlns:ma14="http://schemas.microsoft.com/office/mac/drawingml/2011/main" val="0"/>
             </a:ext>
           </a:extLst>
         </p:spPr>
@@ -19673,7 +15609,7 @@
             <a:pPr algn="r"/>
             <a:fld id="{F7021451-1387-4CA6-816F-3879F97B5CBC}" type="slidenum">
               <a:rPr lang="en-US" b="0"/>
-              <a:t>22</a:t>
+              <a:t>20</a:t>
             </a:fld>
             <a:endParaRPr lang="en-US"/>
           </a:p>
@@ -20392,7 +16328,7 @@
           </a:prstGeom>
           <a:extLst>
             <a:ext uri="{C572A759-6A51-4108-AA02-DFA0A04FC94B}">
-              <ma14:wrappingTextBoxFlag xmlns:ma14="http://schemas.microsoft.com/office/mac/drawingml/2011/main" xmlns="" val="0"/>
+              <ma14:wrappingTextBoxFlag xmlns="" xmlns:ma14="http://schemas.microsoft.com/office/mac/drawingml/2011/main" val="0"/>
             </a:ext>
           </a:extLst>
         </p:spPr>
@@ -22443,7 +18379,7 @@
           </a:prstGeom>
           <a:extLst>
             <a:ext uri="{C572A759-6A51-4108-AA02-DFA0A04FC94B}">
-              <ma14:wrappingTextBoxFlag xmlns:ma14="http://schemas.microsoft.com/office/mac/drawingml/2011/main" xmlns="" val="0"/>
+              <ma14:wrappingTextBoxFlag xmlns="" xmlns:ma14="http://schemas.microsoft.com/office/mac/drawingml/2011/main" val="0"/>
             </a:ext>
           </a:extLst>
         </p:spPr>
@@ -23174,7 +19110,7 @@
           </a:prstGeom>
           <a:extLst>
             <a:ext uri="{C572A759-6A51-4108-AA02-DFA0A04FC94B}">
-              <ma14:wrappingTextBoxFlag xmlns:ma14="http://schemas.microsoft.com/office/mac/drawingml/2011/main" xmlns="" val="0"/>
+              <ma14:wrappingTextBoxFlag xmlns="" xmlns:ma14="http://schemas.microsoft.com/office/mac/drawingml/2011/main" val="0"/>
             </a:ext>
           </a:extLst>
         </p:spPr>
@@ -24644,7 +20580,7 @@
           </a:prstGeom>
           <a:extLst>
             <a:ext uri="{C572A759-6A51-4108-AA02-DFA0A04FC94B}">
-              <ma14:wrappingTextBoxFlag xmlns:ma14="http://schemas.microsoft.com/office/mac/drawingml/2011/main" xmlns="" val="0"/>
+              <ma14:wrappingTextBoxFlag xmlns="" xmlns:ma14="http://schemas.microsoft.com/office/mac/drawingml/2011/main" val="0"/>
             </a:ext>
           </a:extLst>
         </p:spPr>
@@ -28688,7 +24624,7 @@
           </a:prstGeom>
           <a:extLst>
             <a:ext uri="{C572A759-6A51-4108-AA02-DFA0A04FC94B}">
-              <ma14:wrappingTextBoxFlag xmlns:ma14="http://schemas.microsoft.com/office/mac/drawingml/2011/main" xmlns="" val="0"/>
+              <ma14:wrappingTextBoxFlag xmlns="" xmlns:ma14="http://schemas.microsoft.com/office/mac/drawingml/2011/main" val="0"/>
             </a:ext>
           </a:extLst>
         </p:spPr>

--- a/docs/FedCast_Fullerton.pptx
+++ b/docs/FedCast_Fullerton.pptx
@@ -1900,7 +1900,7 @@
     </p:spTree>
     <p:extLst>
       <p:ext uri="{BB962C8B-B14F-4D97-AF65-F5344CB8AC3E}">
-        <p14:creationId xmlns:p14="http://schemas.microsoft.com/office/powerpoint/2010/main" val="956866070"/>
+        <p14:creationId xmlns:p14="http://schemas.microsoft.com/office/powerpoint/2010/main" val="1508859901"/>
       </p:ext>
     </p:extLst>
   </p:cSld>
@@ -3047,7 +3047,7 @@
           </a:prstGeom>
           <a:extLst>
             <a:ext uri="{C572A759-6A51-4108-AA02-DFA0A04FC94B}">
-              <ma14:wrappingTextBoxFlag xmlns="" xmlns:ma14="http://schemas.microsoft.com/office/mac/drawingml/2011/main" val="0"/>
+              <ma14:wrappingTextBoxFlag xmlns:ma14="http://schemas.microsoft.com/office/mac/drawingml/2011/main" xmlns="" val="0"/>
             </a:ext>
           </a:extLst>
         </p:spPr>
@@ -3232,7 +3232,7 @@
           </a:prstGeom>
           <a:extLst>
             <a:ext uri="{C572A759-6A51-4108-AA02-DFA0A04FC94B}">
-              <ma14:wrappingTextBoxFlag xmlns="" xmlns:ma14="http://schemas.microsoft.com/office/mac/drawingml/2011/main" val="0"/>
+              <ma14:wrappingTextBoxFlag xmlns:ma14="http://schemas.microsoft.com/office/mac/drawingml/2011/main" xmlns="" val="0"/>
             </a:ext>
           </a:extLst>
         </p:spPr>
@@ -5124,7 +5124,7 @@
           </a:prstGeom>
           <a:extLst>
             <a:ext uri="{C572A759-6A51-4108-AA02-DFA0A04FC94B}">
-              <ma14:wrappingTextBoxFlag xmlns="" xmlns:ma14="http://schemas.microsoft.com/office/mac/drawingml/2011/main" val="0"/>
+              <ma14:wrappingTextBoxFlag xmlns:ma14="http://schemas.microsoft.com/office/mac/drawingml/2011/main" xmlns="" val="0"/>
             </a:ext>
           </a:extLst>
         </p:spPr>
@@ -7510,7 +7510,7 @@
           </a:prstGeom>
           <a:extLst>
             <a:ext uri="{C572A759-6A51-4108-AA02-DFA0A04FC94B}">
-              <ma14:wrappingTextBoxFlag xmlns="" xmlns:ma14="http://schemas.microsoft.com/office/mac/drawingml/2011/main" val="0"/>
+              <ma14:wrappingTextBoxFlag xmlns:ma14="http://schemas.microsoft.com/office/mac/drawingml/2011/main" xmlns="" val="0"/>
             </a:ext>
           </a:extLst>
         </p:spPr>
@@ -8447,7 +8447,7 @@
           </a:prstGeom>
           <a:extLst>
             <a:ext uri="{C572A759-6A51-4108-AA02-DFA0A04FC94B}">
-              <ma14:wrappingTextBoxFlag xmlns="" xmlns:ma14="http://schemas.microsoft.com/office/mac/drawingml/2011/main" val="0"/>
+              <ma14:wrappingTextBoxFlag xmlns:ma14="http://schemas.microsoft.com/office/mac/drawingml/2011/main" xmlns="" val="0"/>
             </a:ext>
           </a:extLst>
         </p:spPr>
@@ -10028,7 +10028,7 @@
           </a:prstGeom>
           <a:extLst>
             <a:ext uri="{C572A759-6A51-4108-AA02-DFA0A04FC94B}">
-              <ma14:wrappingTextBoxFlag xmlns="" xmlns:ma14="http://schemas.microsoft.com/office/mac/drawingml/2011/main" val="0"/>
+              <ma14:wrappingTextBoxFlag xmlns:ma14="http://schemas.microsoft.com/office/mac/drawingml/2011/main" xmlns="" val="0"/>
             </a:ext>
           </a:extLst>
         </p:spPr>
@@ -11879,8 +11879,8 @@
         </p:nvSpPr>
         <p:spPr>
           <a:xfrm>
-            <a:off x="731520" y="2286000"/>
-            <a:ext cx="5074920" cy="804672"/>
+            <a:off x="731520" y="2368296"/>
+            <a:ext cx="5074920" cy="731520"/>
           </a:xfrm>
           <a:prstGeom prst="rect">
             <a:avLst/>
@@ -12046,8 +12046,8 @@
         </p:nvSpPr>
         <p:spPr>
           <a:xfrm>
-            <a:off x="6400800" y="2286000"/>
-            <a:ext cx="5074920" cy="804672"/>
+            <a:off x="6400800" y="2368296"/>
+            <a:ext cx="5074920" cy="731520"/>
           </a:xfrm>
           <a:prstGeom prst="rect">
             <a:avLst/>
@@ -12213,8 +12213,8 @@
         </p:nvSpPr>
         <p:spPr>
           <a:xfrm>
-            <a:off x="731520" y="3749040"/>
-            <a:ext cx="5074920" cy="804672"/>
+            <a:off x="731520" y="3831336"/>
+            <a:ext cx="5074920" cy="731520"/>
           </a:xfrm>
           <a:prstGeom prst="rect">
             <a:avLst/>
@@ -12380,8 +12380,8 @@
         </p:nvSpPr>
         <p:spPr>
           <a:xfrm>
-            <a:off x="6400800" y="3749040"/>
-            <a:ext cx="5074920" cy="804672"/>
+            <a:off x="6400800" y="3831336"/>
+            <a:ext cx="5074920" cy="731520"/>
           </a:xfrm>
           <a:prstGeom prst="rect">
             <a:avLst/>
@@ -12547,8 +12547,8 @@
         </p:nvSpPr>
         <p:spPr>
           <a:xfrm>
-            <a:off x="731520" y="5212080"/>
-            <a:ext cx="5074920" cy="804672"/>
+            <a:off x="731520" y="5294376"/>
+            <a:ext cx="5074920" cy="731520"/>
           </a:xfrm>
           <a:prstGeom prst="rect">
             <a:avLst/>
@@ -12714,8 +12714,8 @@
         </p:nvSpPr>
         <p:spPr>
           <a:xfrm>
-            <a:off x="6400800" y="5212080"/>
-            <a:ext cx="5074920" cy="804672"/>
+            <a:off x="6400800" y="5294376"/>
+            <a:ext cx="5074920" cy="731520"/>
           </a:xfrm>
           <a:prstGeom prst="rect">
             <a:avLst/>
@@ -12790,7 +12790,7 @@
     </p:spTree>
     <p:extLst>
       <p:ext uri="{BB962C8B-B14F-4D97-AF65-F5344CB8AC3E}">
-        <p14:creationId xmlns:p14="http://schemas.microsoft.com/office/powerpoint/2010/main" val="651567409"/>
+        <p14:creationId xmlns:p14="http://schemas.microsoft.com/office/powerpoint/2010/main" val="752257888"/>
       </p:ext>
     </p:extLst>
   </p:cSld>
@@ -13800,7 +13800,7 @@
           </a:prstGeom>
           <a:extLst>
             <a:ext uri="{C572A759-6A51-4108-AA02-DFA0A04FC94B}">
-              <ma14:wrappingTextBoxFlag xmlns="" xmlns:ma14="http://schemas.microsoft.com/office/mac/drawingml/2011/main" val="0"/>
+              <ma14:wrappingTextBoxFlag xmlns:ma14="http://schemas.microsoft.com/office/mac/drawingml/2011/main" xmlns="" val="0"/>
             </a:ext>
           </a:extLst>
         </p:spPr>
@@ -15590,7 +15590,7 @@
           </a:prstGeom>
           <a:extLst>
             <a:ext uri="{C572A759-6A51-4108-AA02-DFA0A04FC94B}">
-              <ma14:wrappingTextBoxFlag xmlns="" xmlns:ma14="http://schemas.microsoft.com/office/mac/drawingml/2011/main" val="0"/>
+              <ma14:wrappingTextBoxFlag xmlns:ma14="http://schemas.microsoft.com/office/mac/drawingml/2011/main" xmlns="" val="0"/>
             </a:ext>
           </a:extLst>
         </p:spPr>
@@ -16328,7 +16328,7 @@
           </a:prstGeom>
           <a:extLst>
             <a:ext uri="{C572A759-6A51-4108-AA02-DFA0A04FC94B}">
-              <ma14:wrappingTextBoxFlag xmlns="" xmlns:ma14="http://schemas.microsoft.com/office/mac/drawingml/2011/main" val="0"/>
+              <ma14:wrappingTextBoxFlag xmlns:ma14="http://schemas.microsoft.com/office/mac/drawingml/2011/main" xmlns="" val="0"/>
             </a:ext>
           </a:extLst>
         </p:spPr>
@@ -18379,7 +18379,7 @@
           </a:prstGeom>
           <a:extLst>
             <a:ext uri="{C572A759-6A51-4108-AA02-DFA0A04FC94B}">
-              <ma14:wrappingTextBoxFlag xmlns="" xmlns:ma14="http://schemas.microsoft.com/office/mac/drawingml/2011/main" val="0"/>
+              <ma14:wrappingTextBoxFlag xmlns:ma14="http://schemas.microsoft.com/office/mac/drawingml/2011/main" xmlns="" val="0"/>
             </a:ext>
           </a:extLst>
         </p:spPr>
@@ -19110,7 +19110,7 @@
           </a:prstGeom>
           <a:extLst>
             <a:ext uri="{C572A759-6A51-4108-AA02-DFA0A04FC94B}">
-              <ma14:wrappingTextBoxFlag xmlns="" xmlns:ma14="http://schemas.microsoft.com/office/mac/drawingml/2011/main" val="0"/>
+              <ma14:wrappingTextBoxFlag xmlns:ma14="http://schemas.microsoft.com/office/mac/drawingml/2011/main" xmlns="" val="0"/>
             </a:ext>
           </a:extLst>
         </p:spPr>
@@ -20580,7 +20580,7 @@
           </a:prstGeom>
           <a:extLst>
             <a:ext uri="{C572A759-6A51-4108-AA02-DFA0A04FC94B}">
-              <ma14:wrappingTextBoxFlag xmlns="" xmlns:ma14="http://schemas.microsoft.com/office/mac/drawingml/2011/main" val="0"/>
+              <ma14:wrappingTextBoxFlag xmlns:ma14="http://schemas.microsoft.com/office/mac/drawingml/2011/main" xmlns="" val="0"/>
             </a:ext>
           </a:extLst>
         </p:spPr>
@@ -24624,7 +24624,7 @@
           </a:prstGeom>
           <a:extLst>
             <a:ext uri="{C572A759-6A51-4108-AA02-DFA0A04FC94B}">
-              <ma14:wrappingTextBoxFlag xmlns="" xmlns:ma14="http://schemas.microsoft.com/office/mac/drawingml/2011/main" val="0"/>
+              <ma14:wrappingTextBoxFlag xmlns:ma14="http://schemas.microsoft.com/office/mac/drawingml/2011/main" xmlns="" val="0"/>
             </a:ext>
           </a:extLst>
         </p:spPr>

--- a/docs/FedCast_Fullerton.pptx
+++ b/docs/FedCast_Fullerton.pptx
@@ -5,7 +5,7 @@
     <p:sldMasterId id="2147483648" r:id="rId1"/>
   </p:sldMasterIdLst>
   <p:notesMasterIdLst>
-    <p:notesMasterId r:id="rId22"/>
+    <p:notesMasterId r:id="rId24"/>
   </p:notesMasterIdLst>
   <p:sldIdLst>
     <p:sldId id="256" r:id="rId2"/>
@@ -28,6 +28,8 @@
     <p:sldId id="275" r:id="rId19"/>
     <p:sldId id="276" r:id="rId20"/>
     <p:sldId id="277" r:id="rId21"/>
+    <p:sldId id="278" r:id="rId22"/>
+    <p:sldId id="279" r:id="rId23"/>
   </p:sldIdLst>
   <p:sldSz cx="12192000" cy="6858000"/>
   <p:notesSz cx="6858000" cy="12192000"/>
@@ -172,6 +174,8 @@
         <p14:section name="Backup" id="{C779AD3C-958E-9E55-6CE0-CB67D10A91C1}">
           <p14:sldIdLst>
             <p14:sldId id="277"/>
+            <p14:sldId id="278"/>
+            <p14:sldId id="279"/>
           </p14:sldIdLst>
         </p14:section>
       </p14:sectionLst>
@@ -1434,7 +1438,15 @@
           <a:p>
             <a:r>
               <a:rPr lang="en-US" dirty="0"/>
-              <a:t>Three charts, one per dimension, averaged over the four snapshots. Left: how much the answer moves between identical runs. The step that matters is analyst 2 to analyst 3: the answer shape and the verifier take the wobble from three and a half points to under one. Middle: numbers from memory, gone as soon as the evidence is shown. Right: share of claims whose quote code found verbatim; analyst 2 cannot be measured because it quotes nothing. The specialists keep what analyst 3 achieved. For analysts 3 to 8 the wobble is in their lean, which maps one basis point to one percentage point of probability, so the four bars are comparable.</a:t>
+              <a:t>Three charts, one per dimension, averaged over the four snapshots. Left: how much the answer moves between identical runs. The step that matters is analyst 2 to analyst 3: the answer shape and the verifier take the wobble from three and a half points to under one. Middle: numbers from memory, gone as soon as the evidence is shown. Right: share of claims whose quote code found verbatim; analyst 2 cannot be measured because it quotes nothing. The specialists keep what analyst 3 achieved. For analysts 3 to 8 the wobble is in their lean</a:t>
+            </a:r>
+            <a:r>
+              <a:rPr lang="en-US"/>
+              <a:t>, which is already in points of probability, </a:t>
+            </a:r>
+            <a:r>
+              <a:rPr lang="en-US" dirty="0"/>
+              <a:t>so the four bars are comparable.</a:t>
             </a:r>
           </a:p>
         </p:txBody>
@@ -2171,6 +2183,180 @@
 </p:notes>
 </file>
 
+<file path=ppt/notesSlides/notesSlide21.xml><?xml version="1.0" encoding="utf-8"?>
+<p:notes xmlns:a="http://schemas.openxmlformats.org/drawingml/2006/main" xmlns:r="http://schemas.openxmlformats.org/officeDocument/2006/relationships" xmlns:p="http://schemas.openxmlformats.org/presentationml/2006/main">
+  <p:cSld>
+    <p:spTree>
+      <p:nvGrpSpPr>
+        <p:cNvPr id="1" name=""/>
+        <p:cNvGrpSpPr/>
+        <p:nvPr/>
+      </p:nvGrpSpPr>
+      <p:grpSpPr>
+        <a:xfrm>
+          <a:off x="0" y="0"/>
+          <a:ext cx="0" cy="0"/>
+          <a:chOff x="0" y="0"/>
+          <a:chExt cx="0" cy="0"/>
+        </a:xfrm>
+      </p:grpSpPr>
+      <p:sp>
+        <p:nvSpPr>
+          <p:cNvPr id="2" name="Slide Image Placeholder 1"/>
+          <p:cNvSpPr>
+            <a:spLocks noGrp="1" noRot="1" noChangeAspect="1"/>
+          </p:cNvSpPr>
+          <p:nvPr>
+            <p:ph type="sldImg"/>
+          </p:nvPr>
+        </p:nvSpPr>
+        <p:spPr/>
+      </p:sp>
+      <p:sp>
+        <p:nvSpPr>
+          <p:cNvPr id="3" name="Notes Placeholder 2"/>
+          <p:cNvSpPr>
+            <a:spLocks noGrp="1"/>
+          </p:cNvSpPr>
+          <p:nvPr>
+            <p:ph type="body" idx="1"/>
+          </p:nvPr>
+        </p:nvSpPr>
+        <p:spPr/>
+        <p:txBody>
+          <a:bodyPr/>
+          <a:lstStyle/>
+          <a:p>
+            <a:r>
+              <a:rPr lang="en-US" dirty="0"/>
+              <a:t>Three parts. The score and why it stops at 10: it is already in points of probability, and 10 is the most any single input may move the number, the same cap as a human view; a wider range would let the analysts write the number, which the design forbids. The average: one vote each. The spread: the points leave every bucket on the hold-or-cut side and land on both hike buckets, in proportion to size and distance from the middle, so the shape of the distribution is kept and nothing goes to zero.</a:t>
+            </a:r>
+          </a:p>
+        </p:txBody>
+      </p:sp>
+      <p:sp>
+        <p:nvSpPr>
+          <p:cNvPr id="4" name="Slide Number Placeholder 3"/>
+          <p:cNvSpPr>
+            <a:spLocks noGrp="1"/>
+          </p:cNvSpPr>
+          <p:nvPr>
+            <p:ph type="sldNum" sz="quarter" idx="10"/>
+          </p:nvPr>
+        </p:nvSpPr>
+        <p:spPr/>
+        <p:txBody>
+          <a:bodyPr/>
+          <a:lstStyle/>
+          <a:p>
+            <a:fld id="{F7021451-1387-4CA6-816F-3879F97B5CBC}" type="slidenum">
+              <a:rPr lang="en-US"/>
+              <a:t>21</a:t>
+            </a:fld>
+            <a:endParaRPr lang="en-US"/>
+          </a:p>
+        </p:txBody>
+      </p:sp>
+    </p:spTree>
+    <p:extLst>
+      <p:ext uri="{BB962C8B-B14F-4D97-AF65-F5344CB8AC3E}">
+        <p14:creationId xmlns:p14="http://schemas.microsoft.com/office/powerpoint/2010/main" val="500207554"/>
+      </p:ext>
+    </p:extLst>
+  </p:cSld>
+  <p:clrMapOvr>
+    <a:masterClrMapping/>
+  </p:clrMapOvr>
+</p:notes>
+</file>
+
+<file path=ppt/notesSlides/notesSlide22.xml><?xml version="1.0" encoding="utf-8"?>
+<p:notes xmlns:a="http://schemas.openxmlformats.org/drawingml/2006/main" xmlns:r="http://schemas.openxmlformats.org/officeDocument/2006/relationships" xmlns:p="http://schemas.openxmlformats.org/presentationml/2006/main">
+  <p:cSld>
+    <p:spTree>
+      <p:nvGrpSpPr>
+        <p:cNvPr id="1" name=""/>
+        <p:cNvGrpSpPr/>
+        <p:nvPr/>
+      </p:nvGrpSpPr>
+      <p:grpSpPr>
+        <a:xfrm>
+          <a:off x="0" y="0"/>
+          <a:ext cx="0" cy="0"/>
+          <a:chOff x="0" y="0"/>
+          <a:chExt cx="0" cy="0"/>
+        </a:xfrm>
+      </p:grpSpPr>
+      <p:sp>
+        <p:nvSpPr>
+          <p:cNvPr id="2" name="Slide Image Placeholder 1"/>
+          <p:cNvSpPr>
+            <a:spLocks noGrp="1" noRot="1" noChangeAspect="1"/>
+          </p:cNvSpPr>
+          <p:nvPr>
+            <p:ph type="sldImg"/>
+          </p:nvPr>
+        </p:nvSpPr>
+        <p:spPr/>
+      </p:sp>
+      <p:sp>
+        <p:nvSpPr>
+          <p:cNvPr id="3" name="Notes Placeholder 2"/>
+          <p:cNvSpPr>
+            <a:spLocks noGrp="1"/>
+          </p:cNvSpPr>
+          <p:nvPr>
+            <p:ph type="body" idx="1"/>
+          </p:nvPr>
+        </p:nvSpPr>
+        <p:spPr/>
+        <p:txBody>
+          <a:bodyPr/>
+          <a:lstStyle/>
+          <a:p>
+            <a:r>
+              <a:rPr lang="en-US" dirty="0"/>
+              <a:t>The quant side's own test. A first ordered probit, spec frozen before fitting, failed its out-of-sample gate and was reported, not tuned. A second version beats the base rate on the expanding window but was specified after seeing the first fail, so it carries a contamination caveat and waits for live decisions. The base rates, which need no fitting, beat the fitted model and are the yardstick. Below: why no gradient-boosted anything.</a:t>
+            </a:r>
+          </a:p>
+        </p:txBody>
+      </p:sp>
+      <p:sp>
+        <p:nvSpPr>
+          <p:cNvPr id="4" name="Slide Number Placeholder 3"/>
+          <p:cNvSpPr>
+            <a:spLocks noGrp="1"/>
+          </p:cNvSpPr>
+          <p:nvPr>
+            <p:ph type="sldNum" sz="quarter" idx="10"/>
+          </p:nvPr>
+        </p:nvSpPr>
+        <p:spPr/>
+        <p:txBody>
+          <a:bodyPr/>
+          <a:lstStyle/>
+          <a:p>
+            <a:fld id="{F7021451-1387-4CA6-816F-3879F97B5CBC}" type="slidenum">
+              <a:rPr lang="en-US"/>
+              <a:t>22</a:t>
+            </a:fld>
+            <a:endParaRPr lang="en-US"/>
+          </a:p>
+        </p:txBody>
+      </p:sp>
+    </p:spTree>
+    <p:extLst>
+      <p:ext uri="{BB962C8B-B14F-4D97-AF65-F5344CB8AC3E}">
+        <p14:creationId xmlns:p14="http://schemas.microsoft.com/office/powerpoint/2010/main" val="1949427190"/>
+      </p:ext>
+    </p:extLst>
+  </p:cSld>
+  <p:clrMapOvr>
+    <a:masterClrMapping/>
+  </p:clrMapOvr>
+</p:notes>
+</file>
+
 <file path=ppt/notesSlides/notesSlide3.xml><?xml version="1.0" encoding="utf-8"?>
 <p:notes xmlns:a="http://schemas.openxmlformats.org/drawingml/2006/main" xmlns:r="http://schemas.openxmlformats.org/officeDocument/2006/relationships" xmlns:p="http://schemas.openxmlformats.org/presentationml/2006/main">
   <p:cSld>
@@ -2217,7 +2403,15 @@
           <a:p>
             <a:r>
               <a:rPr lang="en-US" dirty="0"/>
-              <a:t>The question is narrow on purpose: what will the FOMC decide at its next scheduled meeting, as probabilities over five outcomes. The final entry before the meeting said no change at 67.6%, hike at 22.4%, with the specialists leaning hawkish by four basis points. The Fed held, ten votes to two, and both dissents wanted the quarter-point hike the specialists were leaning toward. Say plainly that the market alone was more confident (90/10) and we do not claim to beat it at five weeks; what the system adds is the reasons, and the vote bore the reasons out. Then: one decision proves little, which is why the rest of the talk is about process.</a:t>
+              <a:t>The question is narrow on purpose: what will the FOMC decide at its next scheduled meeting, as probabilities over five outcomes. The final entry before the meeting said no change at 67.6%, hike at 22.4%, with the </a:t>
+            </a:r>
+            <a:r>
+              <a:rPr lang="en-US"/>
+              <a:t>specialists leaning hawkish by four points. </a:t>
+            </a:r>
+            <a:r>
+              <a:rPr lang="en-US" dirty="0"/>
+              <a:t>The Fed held, ten votes to two, and both dissents wanted the quarter-point hike the specialists were leaning toward. Say plainly that the market alone was more confident (90/10) and we do not claim to beat it at five weeks; what the system adds is the reasons, and the vote bore the reasons out. Then: one decision proves little, which is why the rest of the talk is about process.</a:t>
             </a:r>
           </a:p>
         </p:txBody>
@@ -2652,7 +2846,15 @@
           <a:p>
             <a:r>
               <a:rPr lang="en-US" dirty="0"/>
-              <a:t>Entry 18, the final one before the meeting. The pool is a weighted average, then the floor. The specialists' mean lean of +4.0 basis points becomes 4.0 points of probability moved toward a hike, through the same capped mechanism a human view uses. The lean row is tinted and labelled 'after pooling': it is a modifier on the pooled number, not a model in the pool. Then the footer: the weights are judgement, logged; ideally they would be backtested, but there is no live record yet, so live scores from 28 October onward decide them by amendment.</a:t>
+              <a:t>Entry 18, the final one before the meeting. The pool is a weighted average, then the floor. The specialists</a:t>
+            </a:r>
+            <a:r>
+              <a:rPr lang="en-US"/>
+              <a:t>' mean score of +4.0 is 4.0 points of probability </a:t>
+            </a:r>
+            <a:r>
+              <a:rPr lang="en-US" dirty="0"/>
+              <a:t>moved toward a hike, through the same capped mechanism a human view uses. The lean row is tinted and labelled 'after pooling': it is a modifier on the pooled number, not a model in the pool. Then the footer: the weights are judgement, logged; ideally they would be backtested, but there is no live record yet, so live scores from 28 October onward decide them by amendment.</a:t>
             </a:r>
           </a:p>
         </p:txBody>
@@ -3780,6 +3982,13 @@
             <a:prstDash val="solid"/>
           </a:ln>
         </p:spPr>
+        <p:txBody>
+          <a:bodyPr/>
+          <a:lstStyle/>
+          <a:p>
+            <a:endParaRPr lang="en-US"/>
+          </a:p>
+        </p:txBody>
       </p:sp>
       <p:sp>
         <p:nvSpPr>
@@ -3805,6 +4014,13 @@
             <a:prstDash val="solid"/>
           </a:ln>
         </p:spPr>
+        <p:txBody>
+          <a:bodyPr/>
+          <a:lstStyle/>
+          <a:p>
+            <a:endParaRPr lang="en-US"/>
+          </a:p>
+        </p:txBody>
       </p:sp>
       <p:sp>
         <p:nvSpPr>
@@ -3938,6 +4154,13 @@
             <a:prstDash val="solid"/>
           </a:ln>
         </p:spPr>
+        <p:txBody>
+          <a:bodyPr/>
+          <a:lstStyle/>
+          <a:p>
+            <a:endParaRPr lang="en-US"/>
+          </a:p>
+        </p:txBody>
       </p:sp>
       <p:sp>
         <p:nvSpPr>
@@ -4092,6 +4315,13 @@
             <a:prstDash val="solid"/>
           </a:ln>
         </p:spPr>
+        <p:txBody>
+          <a:bodyPr/>
+          <a:lstStyle/>
+          <a:p>
+            <a:endParaRPr lang="en-US"/>
+          </a:p>
+        </p:txBody>
       </p:sp>
       <p:sp>
         <p:nvSpPr>
@@ -4230,6 +4460,13 @@
             <a:prstDash val="solid"/>
           </a:ln>
         </p:spPr>
+        <p:txBody>
+          <a:bodyPr/>
+          <a:lstStyle/>
+          <a:p>
+            <a:endParaRPr lang="en-US"/>
+          </a:p>
+        </p:txBody>
       </p:sp>
       <p:sp>
         <p:nvSpPr>
@@ -4255,6 +4492,13 @@
             <a:prstDash val="solid"/>
           </a:ln>
         </p:spPr>
+        <p:txBody>
+          <a:bodyPr/>
+          <a:lstStyle/>
+          <a:p>
+            <a:endParaRPr lang="en-US"/>
+          </a:p>
+        </p:txBody>
       </p:sp>
       <p:sp>
         <p:nvSpPr>
@@ -4388,6 +4632,13 @@
             <a:prstDash val="solid"/>
           </a:ln>
         </p:spPr>
+        <p:txBody>
+          <a:bodyPr/>
+          <a:lstStyle/>
+          <a:p>
+            <a:endParaRPr lang="en-US"/>
+          </a:p>
+        </p:txBody>
       </p:sp>
       <p:sp>
         <p:nvSpPr>
@@ -4542,6 +4793,13 @@
             <a:prstDash val="solid"/>
           </a:ln>
         </p:spPr>
+        <p:txBody>
+          <a:bodyPr/>
+          <a:lstStyle/>
+          <a:p>
+            <a:endParaRPr lang="en-US"/>
+          </a:p>
+        </p:txBody>
       </p:sp>
       <p:sp>
         <p:nvSpPr>
@@ -4648,7 +4906,15 @@
                   <a:schemeClr val="tx1"/>
                 </a:solidFill>
               </a:rPr>
-              <a:t>how far the answer moves between identical runs: naive 4.2 points, specialists 0.8 bp, mean of four snapshots</a:t>
+              <a:t>how far the answer moves between identical runs: naive 4.2 points</a:t>
+            </a:r>
+            <a:r>
+              <a:rPr lang="en-US" sz="1000">
+                <a:solidFill>
+                  <a:schemeClr val="tx1"/>
+                </a:solidFill>
+              </a:rPr>
+              <a:t>, specialists 0.8 points, mean of four snapshots</a:t>
             </a:r>
             <a:endParaRPr lang="en-US" sz="1000" dirty="0"/>
           </a:p>
@@ -4680,6 +4946,13 @@
             <a:prstDash val="solid"/>
           </a:ln>
         </p:spPr>
+        <p:txBody>
+          <a:bodyPr/>
+          <a:lstStyle/>
+          <a:p>
+            <a:endParaRPr lang="en-US"/>
+          </a:p>
+        </p:txBody>
       </p:sp>
       <p:sp>
         <p:nvSpPr>
@@ -4705,6 +4978,13 @@
             <a:prstDash val="solid"/>
           </a:ln>
         </p:spPr>
+        <p:txBody>
+          <a:bodyPr/>
+          <a:lstStyle/>
+          <a:p>
+            <a:endParaRPr lang="en-US"/>
+          </a:p>
+        </p:txBody>
       </p:sp>
       <p:sp>
         <p:nvSpPr>
@@ -4838,6 +5118,13 @@
             <a:prstDash val="solid"/>
           </a:ln>
         </p:spPr>
+        <p:txBody>
+          <a:bodyPr/>
+          <a:lstStyle/>
+          <a:p>
+            <a:endParaRPr lang="en-US"/>
+          </a:p>
+        </p:txBody>
       </p:sp>
       <p:sp>
         <p:nvSpPr>
@@ -4937,7 +5224,15 @@
                   <a:schemeClr val="tx1"/>
                 </a:solidFill>
               </a:rPr>
-              <a:t>every watch-out must be answered by id; the direction call is clipped to ±10 bp.</a:t>
+              <a:t>every watch-out must be answered by id; the direction call is clipped </a:t>
+            </a:r>
+            <a:r>
+              <a:rPr lang="en-US" sz="1050">
+                <a:solidFill>
+                  <a:schemeClr val="tx1"/>
+                </a:solidFill>
+              </a:rPr>
+              <a:t>to ±10.</a:t>
             </a:r>
             <a:endParaRPr lang="en-US" sz="1050" dirty="0"/>
           </a:p>
@@ -4992,6 +5287,13 @@
             <a:prstDash val="solid"/>
           </a:ln>
         </p:spPr>
+        <p:txBody>
+          <a:bodyPr/>
+          <a:lstStyle/>
+          <a:p>
+            <a:endParaRPr lang="en-US"/>
+          </a:p>
+        </p:txBody>
       </p:sp>
       <p:sp>
         <p:nvSpPr>
@@ -7267,7 +7569,7 @@
                   <a:srgbClr val="CADCFC"/>
                 </a:solidFill>
               </a:rPr>
-              <a:t>Each specialist is asked one question about its own slice (above), never for a probability. It returns claims, each with a verbatim quote and item id, and a lean of at most 10 bp either way: direction and strength, positive toward a hike. Code averages the five leans; each point of lean moves one point of probability, capped at 10.</a:t>
+              <a:t>Each specialist is asked one question about its own slice (above), never for a probability. It returns claims, each with a verbatim quote and item id, and a score from . Code averages the five scores and moves that many points of probability from the hold side to the hike side (or the reverse), capped at 10.</a:t>
             </a:r>
             <a:endParaRPr lang="en-US" sz="1150" dirty="0"/>
           </a:p>
@@ -7476,7 +7778,23 @@
                   <a:schemeClr val="tx1"/>
                 </a:solidFill>
               </a:rPr>
-              <a:t>3 tests the answer shape and code verification: </a:t>
+              <a:t>3 tests the answer shape and code verification</a:t>
+            </a:r>
+            <a:r>
+              <a:rPr lang="en-US" sz="1000" b="1">
+                <a:solidFill>
+                  <a:schemeClr val="tx1"/>
+                </a:solidFill>
+              </a:rPr>
+              <a:t>: </a:t>
+            </a:r>
+            <a:r>
+              <a:rPr lang="en-US" sz="1000">
+                <a:solidFill>
+                  <a:schemeClr val="tx1"/>
+                </a:solidFill>
+              </a:rPr>
+              <a:t>variance falls under 1 point; </a:t>
             </a:r>
             <a:r>
               <a:rPr lang="en-US" sz="1000" dirty="0">
@@ -7484,7 +7802,7 @@
                   <a:schemeClr val="tx1"/>
                 </a:solidFill>
               </a:rPr>
-              <a:t>variance falls under 1 bp; every claim quoted and checked.</a:t>
+              <a:t>every claim quoted and checked.</a:t>
             </a:r>
             <a:endParaRPr lang="en-US" sz="1000" dirty="0"/>
           </a:p>
@@ -7626,6 +7944,13 @@
             <a:prstDash val="solid"/>
           </a:ln>
         </p:spPr>
+        <p:txBody>
+          <a:bodyPr/>
+          <a:lstStyle/>
+          <a:p>
+            <a:endParaRPr lang="en-US"/>
+          </a:p>
+        </p:txBody>
       </p:sp>
       <p:sp>
         <p:nvSpPr>
@@ -7689,6 +8014,13 @@
             <a:prstDash val="solid"/>
           </a:ln>
         </p:spPr>
+        <p:txBody>
+          <a:bodyPr/>
+          <a:lstStyle/>
+          <a:p>
+            <a:endParaRPr lang="en-US"/>
+          </a:p>
+        </p:txBody>
       </p:sp>
       <p:sp>
         <p:nvSpPr>
@@ -7828,6 +8160,13 @@
             <a:prstDash val="solid"/>
           </a:ln>
         </p:spPr>
+        <p:txBody>
+          <a:bodyPr/>
+          <a:lstStyle/>
+          <a:p>
+            <a:endParaRPr lang="en-US"/>
+          </a:p>
+        </p:txBody>
       </p:sp>
       <p:sp>
         <p:nvSpPr>
@@ -7967,6 +8306,13 @@
             <a:prstDash val="solid"/>
           </a:ln>
         </p:spPr>
+        <p:txBody>
+          <a:bodyPr/>
+          <a:lstStyle/>
+          <a:p>
+            <a:endParaRPr lang="en-US"/>
+          </a:p>
+        </p:txBody>
       </p:sp>
       <p:sp>
         <p:nvSpPr>
@@ -8209,7 +8555,15 @@
                   <a:schemeClr val="accent4"/>
                 </a:solidFill>
               </a:rPr>
-              <a:t>Largest standard deviation across five runs, mean of four snapshots. Pass mark 2 pp. Analysts 3 to 8: standard deviation of the lean, 1 bp = 1 pp.</a:t>
+              <a:t>Largest standard deviation across five runs, mean of four snapshots. Pass mark 2 pp. Analysts 3 to 8</a:t>
+            </a:r>
+            <a:r>
+              <a:rPr lang="en-US" sz="950">
+                <a:solidFill>
+                  <a:schemeClr val="accent4"/>
+                </a:solidFill>
+              </a:rPr>
+              <a:t>: standard deviation of the score, in points of probability.</a:t>
             </a:r>
             <a:endParaRPr lang="en-US" sz="950" dirty="0"/>
           </a:p>
@@ -8421,7 +8775,23 @@
                   <a:schemeClr val="accent2"/>
                 </a:solidFill>
               </a:rPr>
-              <a:t>The step from analyst 2 to analyst 3 is the harness: a fixed answer shape with a quote per claim, checked by code. Specialists keep both and add attribution. What they concluded, four snapshots: analyst 1 a cut at 57 to 67%; analyst 2 +25 bp at 50 to 57%; analyst 3 +5.8 to +7.0 bp hawkish; specialists +4.0 to +4.4 bp, labour the lone non-hawk.</a:t>
+              <a:t>The step from analyst 2 to analyst 3 is the harness: a fixed answer shape with a quote per claim, checked by code. Specialists keep both and add attribution. What they concluded, four snapshots: analyst 1 a cut at 57 to 67%; analyst </a:t>
+            </a:r>
+            <a:r>
+              <a:rPr lang="en-US" sz="1050" i="1">
+                <a:solidFill>
+                  <a:schemeClr val="accent2"/>
+                </a:solidFill>
+              </a:rPr>
+              <a:t>2 +25 bps at 50 to 57%; analyst 3 +5.8 to +7.0 hawkish; specialists +4.0 to +4.4, labour </a:t>
+            </a:r>
+            <a:r>
+              <a:rPr lang="en-US" sz="1050" i="1" dirty="0">
+                <a:solidFill>
+                  <a:schemeClr val="accent2"/>
+                </a:solidFill>
+              </a:rPr>
+              <a:t>the lone non-hawk.</a:t>
             </a:r>
             <a:endParaRPr lang="en-US" sz="1050" dirty="0"/>
           </a:p>
@@ -8570,6 +8940,13 @@
             </a:outerShdw>
           </a:effectLst>
         </p:spPr>
+        <p:txBody>
+          <a:bodyPr/>
+          <a:lstStyle/>
+          <a:p>
+            <a:endParaRPr lang="en-US"/>
+          </a:p>
+        </p:txBody>
       </p:sp>
       <p:sp>
         <p:nvSpPr>
@@ -8639,6 +9016,13 @@
             <a:prstDash val="solid"/>
           </a:ln>
         </p:spPr>
+        <p:txBody>
+          <a:bodyPr/>
+          <a:lstStyle/>
+          <a:p>
+            <a:endParaRPr lang="en-US"/>
+          </a:p>
+        </p:txBody>
       </p:sp>
       <p:sp>
         <p:nvSpPr>
@@ -8736,6 +9120,13 @@
             <a:prstDash val="solid"/>
           </a:ln>
         </p:spPr>
+        <p:txBody>
+          <a:bodyPr/>
+          <a:lstStyle/>
+          <a:p>
+            <a:endParaRPr lang="en-US"/>
+          </a:p>
+        </p:txBody>
       </p:sp>
       <p:sp>
         <p:nvSpPr>
@@ -8833,6 +9224,13 @@
             <a:prstDash val="solid"/>
           </a:ln>
         </p:spPr>
+        <p:txBody>
+          <a:bodyPr/>
+          <a:lstStyle/>
+          <a:p>
+            <a:endParaRPr lang="en-US"/>
+          </a:p>
+        </p:txBody>
       </p:sp>
       <p:sp>
         <p:nvSpPr>
@@ -8930,6 +9328,13 @@
             <a:prstDash val="solid"/>
           </a:ln>
         </p:spPr>
+        <p:txBody>
+          <a:bodyPr/>
+          <a:lstStyle/>
+          <a:p>
+            <a:endParaRPr lang="en-US"/>
+          </a:p>
+        </p:txBody>
       </p:sp>
       <p:sp>
         <p:nvSpPr>
@@ -9027,6 +9432,13 @@
             <a:prstDash val="solid"/>
           </a:ln>
         </p:spPr>
+        <p:txBody>
+          <a:bodyPr/>
+          <a:lstStyle/>
+          <a:p>
+            <a:endParaRPr lang="en-US"/>
+          </a:p>
+        </p:txBody>
       </p:sp>
       <p:sp>
         <p:nvSpPr>
@@ -9053,12 +9465,12 @@
               <a:buNone/>
             </a:pPr>
             <a:r>
-              <a:rPr lang="en-US" sz="2000" b="1" dirty="0">
+              <a:rPr lang="en-US" sz="2000" b="1">
                 <a:solidFill>
                   <a:schemeClr val="bg1"/>
                 </a:solidFill>
               </a:rPr>
-              <a:t>5 leans, ±10 bp</a:t>
+              <a:t>5 scores, ±10</a:t>
             </a:r>
             <a:endParaRPr lang="en-US" sz="2000" dirty="0"/>
           </a:p>
@@ -9094,7 +9506,15 @@
                   <a:srgbClr val="CADCFC"/>
                 </a:solidFill>
               </a:rPr>
-              <a:t>+6.0 · +6.2 · +5.8 · −1.4 · +3.4 bp</a:t>
+              <a:t>+6.0 · +6.2 · +5.8 · −1.4 </a:t>
+            </a:r>
+            <a:r>
+              <a:rPr lang="en-US" sz="1050">
+                <a:solidFill>
+                  <a:srgbClr val="CADCFC"/>
+                </a:solidFill>
+              </a:rPr>
+              <a:t>· +3.4</a:t>
             </a:r>
             <a:endParaRPr lang="en-US" sz="1050" dirty="0"/>
           </a:p>
@@ -9133,6 +9553,13 @@
             </a:outerShdw>
           </a:effectLst>
         </p:spPr>
+        <p:txBody>
+          <a:bodyPr/>
+          <a:lstStyle/>
+          <a:p>
+            <a:endParaRPr lang="en-US"/>
+          </a:p>
+        </p:txBody>
       </p:sp>
       <p:sp>
         <p:nvSpPr>
@@ -9179,7 +9606,7 @@
           <p:nvPr>
             <p:extLst>
               <p:ext uri="{D42A27DB-BD31-4B8C-83A1-F6EECF244321}">
-                <p14:modId xmlns:p14="http://schemas.microsoft.com/office/powerpoint/2010/main" val="1579011935"/>
+                <p14:modId xmlns:p14="http://schemas.microsoft.com/office/powerpoint/2010/main" val="3269267274"/>
               </p:ext>
             </p:extLst>
           </p:nvPr>
@@ -9627,12 +10054,12 @@
                         <a:buNone/>
                       </a:pPr>
                       <a:r>
-                        <a:rPr lang="en-US" sz="1100" b="1" dirty="0">
+                        <a:rPr lang="en-US" sz="1100" b="1">
                           <a:solidFill>
                             <a:srgbClr val="1B1F2A"/>
                           </a:solidFill>
                         </a:rPr>
-                        <a:t>+4.0 bp</a:t>
+                        <a:t>+4.0</a:t>
                       </a:r>
                       <a:endParaRPr lang="en-US" sz="1100" dirty="0"/>
                     </a:p>
@@ -9753,7 +10180,7 @@
               <a:buNone/>
             </a:pPr>
             <a:r>
-              <a:rPr lang="en-US" sz="1400" b="1" dirty="0">
+              <a:rPr lang="en-US" sz="1400" b="1">
                 <a:solidFill>
                   <a:schemeClr val="tx2"/>
                 </a:solidFill>
@@ -9761,7 +10188,18 @@
                 <a:ea typeface="Cambria" pitchFamily="34" charset="-122"/>
                 <a:cs typeface="Cambria" pitchFamily="34" charset="-120"/>
               </a:rPr>
-              <a:t>+25 bp: 20.2% → 22.4%</a:t>
+              <a:t>+25 bps: 20.2% </a:t>
+            </a:r>
+            <a:r>
+              <a:rPr lang="en-US" sz="1400" b="1" dirty="0">
+                <a:solidFill>
+                  <a:schemeClr val="tx2"/>
+                </a:solidFill>
+                <a:latin typeface="Cambria" pitchFamily="34" charset="0"/>
+                <a:ea typeface="Cambria" pitchFamily="34" charset="-122"/>
+                <a:cs typeface="Cambria" pitchFamily="34" charset="-120"/>
+              </a:rPr>
+              <a:t>→ 22.4%</a:t>
             </a:r>
             <a:endParaRPr lang="en-US" sz="1400" dirty="0"/>
           </a:p>
@@ -9792,12 +10230,20 @@
               <a:buNone/>
             </a:pPr>
             <a:r>
+              <a:rPr lang="en-US" sz="950">
+                <a:solidFill>
+                  <a:schemeClr val="accent4"/>
+                </a:solidFill>
+              </a:rPr>
+              <a:t>+50 bps 6.0 </a:t>
+            </a:r>
+            <a:r>
               <a:rPr lang="en-US" sz="950" dirty="0">
                 <a:solidFill>
                   <a:schemeClr val="accent4"/>
                 </a:solidFill>
               </a:rPr>
-              <a:t>+50 bp 6.0 → 7.7; no change 70.9 → 67.6; cuts 3.0 → 2.3</a:t>
+              <a:t>→ 7.7; no change 70.9 → 67.6; cuts 3.0 → 2.3</a:t>
             </a:r>
             <a:endParaRPr lang="en-US" sz="950" dirty="0"/>
           </a:p>
@@ -9836,6 +10282,13 @@
             </a:outerShdw>
           </a:effectLst>
         </p:spPr>
+        <p:txBody>
+          <a:bodyPr/>
+          <a:lstStyle/>
+          <a:p>
+            <a:endParaRPr lang="en-US"/>
+          </a:p>
+        </p:txBody>
       </p:sp>
       <p:sp>
         <p:nvSpPr>
@@ -10149,6 +10602,13 @@
             <a:prstDash val="solid"/>
           </a:ln>
         </p:spPr>
+        <p:txBody>
+          <a:bodyPr/>
+          <a:lstStyle/>
+          <a:p>
+            <a:endParaRPr lang="en-US"/>
+          </a:p>
+        </p:txBody>
       </p:sp>
       <p:sp>
         <p:nvSpPr>
@@ -10212,6 +10672,13 @@
             <a:prstDash val="solid"/>
           </a:ln>
         </p:spPr>
+        <p:txBody>
+          <a:bodyPr/>
+          <a:lstStyle/>
+          <a:p>
+            <a:endParaRPr lang="en-US"/>
+          </a:p>
+        </p:txBody>
       </p:sp>
       <p:sp>
         <p:nvSpPr>
@@ -10351,6 +10818,13 @@
             <a:prstDash val="solid"/>
           </a:ln>
         </p:spPr>
+        <p:txBody>
+          <a:bodyPr/>
+          <a:lstStyle/>
+          <a:p>
+            <a:endParaRPr lang="en-US"/>
+          </a:p>
+        </p:txBody>
       </p:sp>
       <p:sp>
         <p:nvSpPr>
@@ -10490,6 +10964,13 @@
             <a:prstDash val="solid"/>
           </a:ln>
         </p:spPr>
+        <p:txBody>
+          <a:bodyPr/>
+          <a:lstStyle/>
+          <a:p>
+            <a:endParaRPr lang="en-US"/>
+          </a:p>
+        </p:txBody>
       </p:sp>
       <p:sp>
         <p:nvSpPr>
@@ -10676,6 +11157,13 @@
             <a:prstDash val="solid"/>
           </a:ln>
         </p:spPr>
+        <p:txBody>
+          <a:bodyPr/>
+          <a:lstStyle/>
+          <a:p>
+            <a:endParaRPr lang="en-US"/>
+          </a:p>
+        </p:txBody>
       </p:sp>
       <p:sp>
         <p:nvSpPr>
@@ -10739,6 +11227,13 @@
             <a:prstDash val="solid"/>
           </a:ln>
         </p:spPr>
+        <p:txBody>
+          <a:bodyPr/>
+          <a:lstStyle/>
+          <a:p>
+            <a:endParaRPr lang="en-US"/>
+          </a:p>
+        </p:txBody>
       </p:sp>
       <p:sp>
         <p:nvSpPr>
@@ -10896,6 +11391,13 @@
             <a:prstDash val="solid"/>
           </a:ln>
         </p:spPr>
+        <p:txBody>
+          <a:bodyPr/>
+          <a:lstStyle/>
+          <a:p>
+            <a:endParaRPr lang="en-US"/>
+          </a:p>
+        </p:txBody>
       </p:sp>
       <p:sp>
         <p:nvSpPr>
@@ -11035,6 +11537,13 @@
             <a:prstDash val="solid"/>
           </a:ln>
         </p:spPr>
+        <p:txBody>
+          <a:bodyPr/>
+          <a:lstStyle/>
+          <a:p>
+            <a:endParaRPr lang="en-US"/>
+          </a:p>
+        </p:txBody>
       </p:sp>
       <p:sp>
         <p:nvSpPr>
@@ -11221,6 +11730,13 @@
             <a:prstDash val="solid"/>
           </a:ln>
         </p:spPr>
+        <p:txBody>
+          <a:bodyPr/>
+          <a:lstStyle/>
+          <a:p>
+            <a:endParaRPr lang="en-US"/>
+          </a:p>
+        </p:txBody>
       </p:sp>
       <p:sp>
         <p:nvSpPr>
@@ -11284,6 +11800,13 @@
             <a:prstDash val="solid"/>
           </a:ln>
         </p:spPr>
+        <p:txBody>
+          <a:bodyPr/>
+          <a:lstStyle/>
+          <a:p>
+            <a:endParaRPr lang="en-US"/>
+          </a:p>
+        </p:txBody>
       </p:sp>
       <p:sp>
         <p:nvSpPr>
@@ -11405,6 +11928,13 @@
             <a:prstDash val="solid"/>
           </a:ln>
         </p:spPr>
+        <p:txBody>
+          <a:bodyPr/>
+          <a:lstStyle/>
+          <a:p>
+            <a:endParaRPr lang="en-US"/>
+          </a:p>
+        </p:txBody>
       </p:sp>
       <p:sp>
         <p:nvSpPr>
@@ -11544,6 +12074,13 @@
             <a:prstDash val="solid"/>
           </a:ln>
         </p:spPr>
+        <p:txBody>
+          <a:bodyPr/>
+          <a:lstStyle/>
+          <a:p>
+            <a:endParaRPr lang="en-US"/>
+          </a:p>
+        </p:txBody>
       </p:sp>
       <p:sp>
         <p:nvSpPr>
@@ -11734,7 +12271,23 @@
                   <a:schemeClr val="accent4"/>
                 </a:solidFill>
               </a:rPr>
-              <a:t>December is on file: entry #23 for the 9 December meeting, +25 bps 73.6%, no change 16.7%, specialists +4.0 bp. The 28 October call is scored the moment the post-meeting rate row lands.</a:t>
+              <a:t>December is on file: entry #23 for the 9 December meeting, +25 bps 73.6%, no change 16.7</a:t>
+            </a:r>
+            <a:r>
+              <a:rPr lang="en-US" sz="1150">
+                <a:solidFill>
+                  <a:schemeClr val="accent4"/>
+                </a:solidFill>
+              </a:rPr>
+              <a:t>%, specialists +4.0. The 28 October call </a:t>
+            </a:r>
+            <a:r>
+              <a:rPr lang="en-US" sz="1150" dirty="0">
+                <a:solidFill>
+                  <a:schemeClr val="accent4"/>
+                </a:solidFill>
+              </a:rPr>
+              <a:t>is scored the moment the post-meeting rate row lands.</a:t>
             </a:r>
             <a:endParaRPr lang="en-US" sz="1150" dirty="0"/>
           </a:p>
@@ -11773,6 +12326,13 @@
             </a:outerShdw>
           </a:effectLst>
         </p:spPr>
+        <p:txBody>
+          <a:bodyPr/>
+          <a:lstStyle/>
+          <a:p>
+            <a:endParaRPr lang="en-US"/>
+          </a:p>
+        </p:txBody>
       </p:sp>
       <p:sp>
         <p:nvSpPr>
@@ -11798,6 +12358,13 @@
             <a:prstDash val="solid"/>
           </a:ln>
         </p:spPr>
+        <p:txBody>
+          <a:bodyPr/>
+          <a:lstStyle/>
+          <a:p>
+            <a:endParaRPr lang="en-US"/>
+          </a:p>
+        </p:txBody>
       </p:sp>
       <p:sp>
         <p:nvSpPr>
@@ -11940,6 +12507,13 @@
             </a:outerShdw>
           </a:effectLst>
         </p:spPr>
+        <p:txBody>
+          <a:bodyPr/>
+          <a:lstStyle/>
+          <a:p>
+            <a:endParaRPr lang="en-US"/>
+          </a:p>
+        </p:txBody>
       </p:sp>
       <p:sp>
         <p:nvSpPr>
@@ -11965,6 +12539,13 @@
             <a:prstDash val="solid"/>
           </a:ln>
         </p:spPr>
+        <p:txBody>
+          <a:bodyPr/>
+          <a:lstStyle/>
+          <a:p>
+            <a:endParaRPr lang="en-US"/>
+          </a:p>
+        </p:txBody>
       </p:sp>
       <p:sp>
         <p:nvSpPr>
@@ -12107,6 +12688,13 @@
             </a:outerShdw>
           </a:effectLst>
         </p:spPr>
+        <p:txBody>
+          <a:bodyPr/>
+          <a:lstStyle/>
+          <a:p>
+            <a:endParaRPr lang="en-US"/>
+          </a:p>
+        </p:txBody>
       </p:sp>
       <p:sp>
         <p:nvSpPr>
@@ -12132,6 +12720,13 @@
             <a:prstDash val="solid"/>
           </a:ln>
         </p:spPr>
+        <p:txBody>
+          <a:bodyPr/>
+          <a:lstStyle/>
+          <a:p>
+            <a:endParaRPr lang="en-US"/>
+          </a:p>
+        </p:txBody>
       </p:sp>
       <p:sp>
         <p:nvSpPr>
@@ -12274,6 +12869,13 @@
             </a:outerShdw>
           </a:effectLst>
         </p:spPr>
+        <p:txBody>
+          <a:bodyPr/>
+          <a:lstStyle/>
+          <a:p>
+            <a:endParaRPr lang="en-US"/>
+          </a:p>
+        </p:txBody>
       </p:sp>
       <p:sp>
         <p:nvSpPr>
@@ -12299,6 +12901,13 @@
             <a:prstDash val="solid"/>
           </a:ln>
         </p:spPr>
+        <p:txBody>
+          <a:bodyPr/>
+          <a:lstStyle/>
+          <a:p>
+            <a:endParaRPr lang="en-US"/>
+          </a:p>
+        </p:txBody>
       </p:sp>
       <p:sp>
         <p:nvSpPr>
@@ -12441,6 +13050,13 @@
             </a:outerShdw>
           </a:effectLst>
         </p:spPr>
+        <p:txBody>
+          <a:bodyPr/>
+          <a:lstStyle/>
+          <a:p>
+            <a:endParaRPr lang="en-US"/>
+          </a:p>
+        </p:txBody>
       </p:sp>
       <p:sp>
         <p:nvSpPr>
@@ -12466,6 +13082,13 @@
             <a:prstDash val="solid"/>
           </a:ln>
         </p:spPr>
+        <p:txBody>
+          <a:bodyPr/>
+          <a:lstStyle/>
+          <a:p>
+            <a:endParaRPr lang="en-US"/>
+          </a:p>
+        </p:txBody>
       </p:sp>
       <p:sp>
         <p:nvSpPr>
@@ -12608,6 +13231,13 @@
             </a:outerShdw>
           </a:effectLst>
         </p:spPr>
+        <p:txBody>
+          <a:bodyPr/>
+          <a:lstStyle/>
+          <a:p>
+            <a:endParaRPr lang="en-US"/>
+          </a:p>
+        </p:txBody>
       </p:sp>
       <p:sp>
         <p:nvSpPr>
@@ -12633,6 +13263,13 @@
             <a:prstDash val="solid"/>
           </a:ln>
         </p:spPr>
+        <p:txBody>
+          <a:bodyPr/>
+          <a:lstStyle/>
+          <a:p>
+            <a:endParaRPr lang="en-US"/>
+          </a:p>
+        </p:txBody>
       </p:sp>
       <p:sp>
         <p:nvSpPr>
@@ -13032,6 +13669,13 @@
             </a:outerShdw>
           </a:effectLst>
         </p:spPr>
+        <p:txBody>
+          <a:bodyPr/>
+          <a:lstStyle/>
+          <a:p>
+            <a:endParaRPr lang="en-US"/>
+          </a:p>
+        </p:txBody>
       </p:sp>
       <p:sp>
         <p:nvSpPr>
@@ -13349,6 +13993,13 @@
             <a:prstDash val="solid"/>
           </a:ln>
         </p:spPr>
+        <p:txBody>
+          <a:bodyPr/>
+          <a:lstStyle/>
+          <a:p>
+            <a:endParaRPr lang="en-US"/>
+          </a:p>
+        </p:txBody>
       </p:sp>
       <p:sp>
         <p:nvSpPr>
@@ -13501,6 +14152,13 @@
             <a:prstDash val="solid"/>
           </a:ln>
         </p:spPr>
+        <p:txBody>
+          <a:bodyPr/>
+          <a:lstStyle/>
+          <a:p>
+            <a:endParaRPr lang="en-US"/>
+          </a:p>
+        </p:txBody>
       </p:sp>
       <p:sp>
         <p:nvSpPr>
@@ -13671,6 +14329,13 @@
             <a:prstDash val="solid"/>
           </a:ln>
         </p:spPr>
+        <p:txBody>
+          <a:bodyPr/>
+          <a:lstStyle/>
+          <a:p>
+            <a:endParaRPr lang="en-US"/>
+          </a:p>
+        </p:txBody>
       </p:sp>
       <p:sp>
         <p:nvSpPr>
@@ -13938,7 +14603,7 @@
           <p:nvPr>
             <p:extLst>
               <p:ext uri="{D42A27DB-BD31-4B8C-83A1-F6EECF244321}">
-                <p14:modId xmlns:p14="http://schemas.microsoft.com/office/powerpoint/2010/main" val="1579011935"/>
+                <p14:modId xmlns:p14="http://schemas.microsoft.com/office/powerpoint/2010/main" val="802794265"/>
               </p:ext>
             </p:extLst>
           </p:nvPr>
@@ -14503,7 +15168,15 @@
                             <a:srgbClr val="2C6E49"/>
                           </a:solidFill>
                         </a:rPr>
-                        <a:t>0.6 / 0.5 / 0.5 / 0.8 bp of tilt, pass</a:t>
+                        <a:t>0.6 / 0.5 / 0.5 </a:t>
+                      </a:r>
+                      <a:r>
+                        <a:rPr lang="en-US" sz="1150" b="1">
+                          <a:solidFill>
+                            <a:srgbClr val="2C6E49"/>
+                          </a:solidFill>
+                        </a:rPr>
+                        <a:t>/ 0.8 points, pass</a:t>
                       </a:r>
                       <a:endParaRPr lang="en-US" sz="1150" dirty="0"/>
                     </a:p>
@@ -14561,7 +15234,15 @@
                             <a:srgbClr val="2C6E49"/>
                           </a:solidFill>
                         </a:rPr>
-                        <a:t>0.5 / 0.8 / 1.2 / 0.8 bp of tilt, pass</a:t>
+                        <a:t>0.5 / 0.8 / 1.2 </a:t>
+                      </a:r>
+                      <a:r>
+                        <a:rPr lang="en-US" sz="1150" b="1">
+                          <a:solidFill>
+                            <a:srgbClr val="2C6E49"/>
+                          </a:solidFill>
+                        </a:rPr>
+                        <a:t>/ 0.8 points, pass</a:t>
                       </a:r>
                       <a:endParaRPr lang="en-US" sz="1150" dirty="0"/>
                     </a:p>
@@ -15422,7 +16103,15 @@
                             <a:srgbClr val="6B7280"/>
                           </a:solidFill>
                         </a:rPr>
-                        <a:t>+7.0 / +6.6 / +6.4 / +5.8 bp hawkish</a:t>
+                        <a:t>+7.0 / +6.6 / +6.4 </a:t>
+                      </a:r>
+                      <a:r>
+                        <a:rPr lang="en-US" sz="1150">
+                          <a:solidFill>
+                            <a:srgbClr val="6B7280"/>
+                          </a:solidFill>
+                        </a:rPr>
+                        <a:t>/ +5.8 hawkish</a:t>
                       </a:r>
                       <a:endParaRPr lang="en-US" sz="1150" dirty="0"/>
                     </a:p>
@@ -15480,7 +16169,23 @@
                             <a:srgbClr val="6B7280"/>
                           </a:solidFill>
                         </a:rPr>
-                        <a:t>+4.4 / +4.1 / +4.4 / +4.0 bp hawkish; labour the lone non-hawk</a:t>
+                        <a:t>+4.4 / +4.1 / +4.4 </a:t>
+                      </a:r>
+                      <a:r>
+                        <a:rPr lang="en-US" sz="1150">
+                          <a:solidFill>
+                            <a:srgbClr val="6B7280"/>
+                          </a:solidFill>
+                        </a:rPr>
+                        <a:t>/ +4.0 hawkish; labour </a:t>
+                      </a:r>
+                      <a:r>
+                        <a:rPr lang="en-US" sz="1150" dirty="0">
+                          <a:solidFill>
+                            <a:srgbClr val="6B7280"/>
+                          </a:solidFill>
+                        </a:rPr>
+                        <a:t>the lone non-hawk</a:t>
                       </a:r>
                       <a:endParaRPr lang="en-US" sz="1150" dirty="0"/>
                     </a:p>
@@ -15564,7 +16269,15 @@
                   <a:schemeClr val="accent4"/>
                 </a:solidFill>
               </a:rPr>
-              <a:t>Snapshots of 15, 24, 26 and 28 October 2026. Analysts 3 to 8 report repeatability in basis points of their direction call because they output a lean, not a distribution.</a:t>
+              <a:t>Snapshots of 15, 24, 26 and 28 October 2026. Analysts 3 to 8 report </a:t>
+            </a:r>
+            <a:r>
+              <a:rPr lang="en-US" sz="1050">
+                <a:solidFill>
+                  <a:schemeClr val="accent4"/>
+                </a:solidFill>
+              </a:rPr>
+              <a:t>repeatability in points of their score because they output a score, not a distribution.</a:t>
             </a:r>
             <a:endParaRPr lang="en-US" sz="1050" dirty="0"/>
           </a:p>
@@ -15616,6 +16329,4925 @@
         </p:txBody>
       </p:sp>
     </p:spTree>
+  </p:cSld>
+  <p:clrMapOvr>
+    <a:masterClrMapping/>
+  </p:clrMapOvr>
+</p:sld>
+</file>
+
+<file path=ppt/slides/slide21.xml><?xml version="1.0" encoding="utf-8"?>
+<p:sld xmlns:a="http://schemas.openxmlformats.org/drawingml/2006/main" xmlns:r="http://schemas.openxmlformats.org/officeDocument/2006/relationships" xmlns:p="http://schemas.openxmlformats.org/presentationml/2006/main">
+  <p:cSld>
+    <p:spTree>
+      <p:nvGrpSpPr>
+        <p:cNvPr id="1" name=""/>
+        <p:cNvGrpSpPr/>
+        <p:nvPr/>
+      </p:nvGrpSpPr>
+      <p:grpSpPr>
+        <a:xfrm>
+          <a:off x="0" y="0"/>
+          <a:ext cx="0" cy="0"/>
+          <a:chOff x="0" y="0"/>
+          <a:chExt cx="0" cy="0"/>
+        </a:xfrm>
+      </p:grpSpPr>
+      <p:sp>
+        <p:nvSpPr>
+          <p:cNvPr id="2" name="Text 0"/>
+          <p:cNvSpPr>
+            <a:spLocks noGrp="1"/>
+          </p:cNvSpPr>
+          <p:nvPr>
+            <p:ph type="title" idx="100" hasCustomPrompt="1"/>
+          </p:nvPr>
+        </p:nvSpPr>
+        <p:spPr>
+          <a:xfrm>
+            <a:off x="548640" y="411480"/>
+            <a:ext cx="11091672" cy="822960"/>
+          </a:xfrm>
+          <a:prstGeom prst="rect">
+            <a:avLst/>
+          </a:prstGeom>
+          <a:noFill/>
+          <a:ln/>
+        </p:spPr>
+        <p:txBody>
+          <a:bodyPr wrap="square" lIns="0" tIns="0" rIns="0" bIns="0" rtlCol="0" anchor="ctr"/>
+          <a:lstStyle/>
+          <a:p>
+            <a:pPr marL="0" indent="0" algn="l">
+              <a:buNone/>
+            </a:pPr>
+            <a:r>
+              <a:rPr lang="en-US" sz="3200" b="1" dirty="0">
+                <a:solidFill>
+                  <a:schemeClr val="tx2"/>
+                </a:solidFill>
+              </a:rPr>
+              <a:t>Appendix: how the analysts' score moves the number</a:t>
+            </a:r>
+            <a:endParaRPr lang="en-US" sz="3200" dirty="0"/>
+          </a:p>
+        </p:txBody>
+      </p:sp>
+      <p:sp>
+        <p:nvSpPr>
+          <p:cNvPr id="4" name="Shape 1"/>
+          <p:cNvSpPr/>
+          <p:nvPr/>
+        </p:nvSpPr>
+        <p:spPr>
+          <a:xfrm>
+            <a:off x="548640" y="1325880"/>
+            <a:ext cx="5394960" cy="4846320"/>
+          </a:xfrm>
+          <a:prstGeom prst="roundRect">
+            <a:avLst>
+              <a:gd name="adj" fmla="val 2264"/>
+            </a:avLst>
+          </a:prstGeom>
+          <a:solidFill>
+            <a:srgbClr val="EEF2F7"/>
+          </a:solidFill>
+          <a:ln w="12700">
+            <a:solidFill>
+              <a:srgbClr val="EEF2F7"/>
+            </a:solidFill>
+            <a:prstDash val="solid"/>
+          </a:ln>
+          <a:effectLst>
+            <a:outerShdw blurRad="50800" dist="12700" dir="5400000" algn="bl" rotWithShape="0">
+              <a:srgbClr val="000000">
+                <a:alpha val="8000"/>
+              </a:srgbClr>
+            </a:outerShdw>
+          </a:effectLst>
+        </p:spPr>
+        <p:txBody>
+          <a:bodyPr/>
+          <a:lstStyle/>
+          <a:p>
+            <a:endParaRPr lang="en-US"/>
+          </a:p>
+        </p:txBody>
+      </p:sp>
+      <p:sp>
+        <p:nvSpPr>
+          <p:cNvPr id="5" name="Text 2"/>
+          <p:cNvSpPr txBox="1"/>
+          <p:nvPr/>
+        </p:nvSpPr>
+        <p:spPr>
+          <a:xfrm>
+            <a:off x="777240" y="1417320"/>
+            <a:ext cx="4937760" cy="320040"/>
+          </a:xfrm>
+          <a:prstGeom prst="rect">
+            <a:avLst/>
+          </a:prstGeom>
+          <a:noFill/>
+          <a:ln/>
+        </p:spPr>
+        <p:txBody>
+          <a:bodyPr wrap="square" lIns="0" tIns="0" rIns="0" bIns="0" rtlCol="0" anchor="t"/>
+          <a:lstStyle/>
+          <a:p>
+            <a:pPr marL="0" indent="0">
+              <a:buNone/>
+            </a:pPr>
+            <a:r>
+              <a:rPr lang="en-US" sz="1400" b="1" dirty="0">
+                <a:solidFill>
+                  <a:schemeClr val="tx2"/>
+                </a:solidFill>
+              </a:rPr>
+              <a:t>1. The score</a:t>
+            </a:r>
+            <a:endParaRPr lang="en-US" sz="1400" dirty="0"/>
+          </a:p>
+        </p:txBody>
+      </p:sp>
+      <p:sp>
+        <p:nvSpPr>
+          <p:cNvPr id="6" name="Text 3"/>
+          <p:cNvSpPr txBox="1"/>
+          <p:nvPr/>
+        </p:nvSpPr>
+        <p:spPr>
+          <a:xfrm>
+            <a:off x="777240" y="1755648"/>
+            <a:ext cx="4937760" cy="1371600"/>
+          </a:xfrm>
+          <a:prstGeom prst="rect">
+            <a:avLst/>
+          </a:prstGeom>
+          <a:noFill/>
+          <a:ln/>
+        </p:spPr>
+        <p:txBody>
+          <a:bodyPr wrap="square" lIns="0" tIns="0" rIns="0" bIns="0" rtlCol="0" anchor="t"/>
+          <a:lstStyle/>
+          <a:p>
+            <a:pPr marL="342900" indent="-342900">
+              <a:spcAft>
+                <a:spcPts val="400"/>
+              </a:spcAft>
+              <a:buSzPct val="100000"/>
+              <a:buChar char="•"/>
+            </a:pPr>
+            <a:r>
+              <a:rPr lang="en-US" sz="1050" dirty="0">
+                <a:solidFill>
+                  <a:schemeClr val="tx1"/>
+                </a:solidFill>
+              </a:rPr>
+              <a:t>Each specialist returns one number from −10 to +10: how many points of probability its evidence says should move toward a hike (positive) or a cut (negative). It is not a probability and not a rate forecast.</a:t>
+            </a:r>
+            <a:endParaRPr lang="en-US" sz="1050" dirty="0"/>
+          </a:p>
+          <a:p>
+            <a:pPr marL="342900" indent="-342900">
+              <a:spcAft>
+                <a:spcPts val="400"/>
+              </a:spcAft>
+              <a:buSzPct val="100000"/>
+              <a:buChar char="•"/>
+            </a:pPr>
+            <a:r>
+              <a:rPr lang="en-US" sz="1050" dirty="0">
+                <a:solidFill>
+                  <a:schemeClr val="tx1"/>
+                </a:solidFill>
+              </a:rPr>
+              <a:t>Why it stops at 10: ten points is the most any single input may move the number, the same cap a human view has. A range of −100 to +100 would let the analysts write the number; the design lets them shift it, never write it.</a:t>
+            </a:r>
+            <a:endParaRPr lang="en-US" sz="1050" dirty="0"/>
+          </a:p>
+        </p:txBody>
+      </p:sp>
+      <p:sp>
+        <p:nvSpPr>
+          <p:cNvPr id="7" name="Text 4"/>
+          <p:cNvSpPr txBox="1"/>
+          <p:nvPr/>
+        </p:nvSpPr>
+        <p:spPr>
+          <a:xfrm>
+            <a:off x="777240" y="3154680"/>
+            <a:ext cx="4937760" cy="320040"/>
+          </a:xfrm>
+          <a:prstGeom prst="rect">
+            <a:avLst/>
+          </a:prstGeom>
+          <a:noFill/>
+          <a:ln/>
+        </p:spPr>
+        <p:txBody>
+          <a:bodyPr wrap="square" lIns="0" tIns="0" rIns="0" bIns="0" rtlCol="0" anchor="t"/>
+          <a:lstStyle/>
+          <a:p>
+            <a:pPr marL="0" indent="0">
+              <a:buNone/>
+            </a:pPr>
+            <a:r>
+              <a:rPr lang="en-US" sz="1400" b="1" dirty="0">
+                <a:solidFill>
+                  <a:schemeClr val="tx2"/>
+                </a:solidFill>
+              </a:rPr>
+              <a:t>2. The average</a:t>
+            </a:r>
+            <a:endParaRPr lang="en-US" sz="1400" dirty="0"/>
+          </a:p>
+        </p:txBody>
+      </p:sp>
+      <p:sp>
+        <p:nvSpPr>
+          <p:cNvPr id="8" name="Text 5"/>
+          <p:cNvSpPr txBox="1"/>
+          <p:nvPr/>
+        </p:nvSpPr>
+        <p:spPr>
+          <a:xfrm>
+            <a:off x="777240" y="3493008"/>
+            <a:ext cx="4937760" cy="1371600"/>
+          </a:xfrm>
+          <a:prstGeom prst="rect">
+            <a:avLst/>
+          </a:prstGeom>
+          <a:noFill/>
+          <a:ln/>
+        </p:spPr>
+        <p:txBody>
+          <a:bodyPr wrap="square" lIns="0" tIns="0" rIns="0" bIns="0" rtlCol="0" anchor="t"/>
+          <a:lstStyle/>
+          <a:p>
+            <a:pPr marL="342900" indent="-342900">
+              <a:spcAft>
+                <a:spcPts val="400"/>
+              </a:spcAft>
+              <a:buSzPct val="100000"/>
+              <a:buChar char="•"/>
+            </a:pPr>
+            <a:r>
+              <a:rPr lang="en-US" sz="1050" dirty="0">
+                <a:solidFill>
+                  <a:schemeClr val="tx1"/>
+                </a:solidFill>
+              </a:rPr>
+              <a:t>Five scores, one vote each, plain mean. 28 October: +6.0, +6.2, +5.8, +3.4, −1.4; mean +4.0.</a:t>
+            </a:r>
+            <a:endParaRPr lang="en-US" sz="1050" dirty="0"/>
+          </a:p>
+          <a:p>
+            <a:pPr marL="342900" indent="-342900">
+              <a:spcAft>
+                <a:spcPts val="400"/>
+              </a:spcAft>
+              <a:buSzPct val="100000"/>
+              <a:buChar char="•"/>
+            </a:pPr>
+            <a:r>
+              <a:rPr lang="en-US" sz="1050" dirty="0">
+                <a:solidFill>
+                  <a:schemeClr val="tx1"/>
+                </a:solidFill>
+              </a:rPr>
+              <a:t>That mean is the number of points that must cross from the hold-or-cut side to the hike side. It is applied after the pool and the floor, by the same mechanism as a human view, and the pool before it is always recorded beside the result.</a:t>
+            </a:r>
+            <a:endParaRPr lang="en-US" sz="1050" dirty="0"/>
+          </a:p>
+        </p:txBody>
+      </p:sp>
+      <p:sp>
+        <p:nvSpPr>
+          <p:cNvPr id="9" name="Text 6"/>
+          <p:cNvSpPr txBox="1"/>
+          <p:nvPr/>
+        </p:nvSpPr>
+        <p:spPr>
+          <a:xfrm>
+            <a:off x="777240" y="4892040"/>
+            <a:ext cx="4937760" cy="320040"/>
+          </a:xfrm>
+          <a:prstGeom prst="rect">
+            <a:avLst/>
+          </a:prstGeom>
+          <a:noFill/>
+          <a:ln/>
+        </p:spPr>
+        <p:txBody>
+          <a:bodyPr wrap="square" lIns="0" tIns="0" rIns="0" bIns="0" rtlCol="0" anchor="t"/>
+          <a:lstStyle/>
+          <a:p>
+            <a:pPr marL="0" indent="0">
+              <a:buNone/>
+            </a:pPr>
+            <a:r>
+              <a:rPr lang="en-US" sz="1400" b="1" dirty="0">
+                <a:solidFill>
+                  <a:schemeClr val="tx2"/>
+                </a:solidFill>
+              </a:rPr>
+              <a:t>3. The spread, in words</a:t>
+            </a:r>
+            <a:endParaRPr lang="en-US" sz="1400" dirty="0"/>
+          </a:p>
+        </p:txBody>
+      </p:sp>
+      <p:sp>
+        <p:nvSpPr>
+          <p:cNvPr id="10" name="Text 7"/>
+          <p:cNvSpPr txBox="1"/>
+          <p:nvPr/>
+        </p:nvSpPr>
+        <p:spPr>
+          <a:xfrm>
+            <a:off x="777240" y="5230368"/>
+            <a:ext cx="4937760" cy="914400"/>
+          </a:xfrm>
+          <a:prstGeom prst="rect">
+            <a:avLst/>
+          </a:prstGeom>
+          <a:noFill/>
+          <a:ln/>
+        </p:spPr>
+        <p:txBody>
+          <a:bodyPr wrap="square" lIns="0" tIns="0" rIns="0" bIns="0" rtlCol="0" anchor="t"/>
+          <a:lstStyle/>
+          <a:p>
+            <a:pPr marL="0" indent="0">
+              <a:buNone/>
+            </a:pPr>
+            <a:r>
+              <a:rPr lang="en-US" sz="1000" dirty="0">
+                <a:solidFill>
+                  <a:schemeClr val="tx1"/>
+                </a:solidFill>
+              </a:rPr>
+              <a:t>Number the five outcomes −2, −1, 0, +1, +2 from most dovish to most hawkish. Multiply each bucket by e raised to (steepness × its number), then rescale so the five sum to one. Code searches for the one steepness at which exactly the mean score's points cross the line; on 28 October it was 0.153. Each bucket moves in proportion to its own size and its distance from the middle, so no bucket is zeroed and the shape is kept.</a:t>
+            </a:r>
+            <a:endParaRPr lang="en-US" sz="1000" dirty="0"/>
+          </a:p>
+        </p:txBody>
+      </p:sp>
+      <p:sp>
+        <p:nvSpPr>
+          <p:cNvPr id="11" name="Text 8"/>
+          <p:cNvSpPr txBox="1"/>
+          <p:nvPr/>
+        </p:nvSpPr>
+        <p:spPr>
+          <a:xfrm>
+            <a:off x="6172200" y="1371600"/>
+            <a:ext cx="5468112" cy="320040"/>
+          </a:xfrm>
+          <a:prstGeom prst="rect">
+            <a:avLst/>
+          </a:prstGeom>
+          <a:noFill/>
+          <a:ln/>
+        </p:spPr>
+        <p:txBody>
+          <a:bodyPr wrap="square" lIns="0" tIns="0" rIns="0" bIns="0" rtlCol="0" anchor="t"/>
+          <a:lstStyle/>
+          <a:p>
+            <a:pPr marL="0" indent="0">
+              <a:buNone/>
+            </a:pPr>
+            <a:r>
+              <a:rPr lang="en-US" sz="1400" b="1" dirty="0">
+                <a:solidFill>
+                  <a:schemeClr val="tx2"/>
+                </a:solidFill>
+              </a:rPr>
+              <a:t>28 October, entry #18: mean score +4.0</a:t>
+            </a:r>
+            <a:endParaRPr lang="en-US" sz="1400" dirty="0"/>
+          </a:p>
+        </p:txBody>
+      </p:sp>
+      <p:graphicFrame>
+        <p:nvGraphicFramePr>
+          <p:cNvPr id="24" name="Table 0"/>
+          <p:cNvGraphicFramePr>
+            <a:graphicFrameLocks noGrp="1"/>
+          </p:cNvGraphicFramePr>
+          <p:nvPr>
+            <p:extLst>
+              <p:ext uri="{D42A27DB-BD31-4B8C-83A1-F6EECF244321}">
+                <p14:modId xmlns:p14="http://schemas.microsoft.com/office/powerpoint/2010/main" val="1579011935"/>
+              </p:ext>
+            </p:extLst>
+          </p:nvPr>
+        </p:nvGraphicFramePr>
+        <p:xfrm>
+          <a:off x="6172200" y="1783080"/>
+          <a:ext cx="5468112" cy="914400"/>
+        </p:xfrm>
+        <a:graphic>
+          <a:graphicData uri="http://schemas.openxmlformats.org/drawingml/2006/table">
+            <a:tbl>
+              <a:tblPr/>
+              <a:tblGrid>
+                <a:gridCol w="1554480">
+                  <a:extLst>
+                    <a:ext uri="{9D8B030D-6E8A-4147-A177-3AD203B41FA5}">
+                      <a16:colId xmlns:a16="http://schemas.microsoft.com/office/drawing/2014/main" val="20000"/>
+                    </a:ext>
+                  </a:extLst>
+                </a:gridCol>
+                <a:gridCol w="1188720">
+                  <a:extLst>
+                    <a:ext uri="{9D8B030D-6E8A-4147-A177-3AD203B41FA5}">
+                      <a16:colId xmlns:a16="http://schemas.microsoft.com/office/drawing/2014/main" val="20001"/>
+                    </a:ext>
+                  </a:extLst>
+                </a:gridCol>
+                <a:gridCol w="1005840">
+                  <a:extLst>
+                    <a:ext uri="{9D8B030D-6E8A-4147-A177-3AD203B41FA5}">
+                      <a16:colId xmlns:a16="http://schemas.microsoft.com/office/drawing/2014/main" val="20002"/>
+                    </a:ext>
+                  </a:extLst>
+                </a:gridCol>
+                <a:gridCol w="1005840">
+                  <a:extLst>
+                    <a:ext uri="{9D8B030D-6E8A-4147-A177-3AD203B41FA5}">
+                      <a16:colId xmlns:a16="http://schemas.microsoft.com/office/drawing/2014/main" val="20003"/>
+                    </a:ext>
+                  </a:extLst>
+                </a:gridCol>
+                <a:gridCol w="987552">
+                  <a:extLst>
+                    <a:ext uri="{9D8B030D-6E8A-4147-A177-3AD203B41FA5}">
+                      <a16:colId xmlns:a16="http://schemas.microsoft.com/office/drawing/2014/main" val="20004"/>
+                    </a:ext>
+                  </a:extLst>
+                </a:gridCol>
+              </a:tblGrid>
+              <a:tr h="384048">
+                <a:tc>
+                  <a:txBody>
+                    <a:bodyPr/>
+                    <a:lstStyle/>
+                    <a:p>
+                      <a:pPr marL="0" indent="0">
+                        <a:buNone/>
+                      </a:pPr>
+                      <a:r>
+                        <a:rPr lang="en-US" sz="1100" b="1" dirty="0">
+                          <a:solidFill>
+                            <a:srgbClr val="FFFFFF"/>
+                          </a:solidFill>
+                        </a:rPr>
+                        <a:t>Outcome</a:t>
+                      </a:r>
+                      <a:endParaRPr lang="en-US" sz="1100" dirty="0"/>
+                    </a:p>
+                  </a:txBody>
+                  <a:tcPr marL="45720" marR="45720" anchor="ctr">
+                    <a:lnL w="6350" cap="flat" cmpd="sng" algn="ctr">
+                      <a:solidFill>
+                        <a:srgbClr val="D5DBE5"/>
+                      </a:solidFill>
+                      <a:prstDash val="solid"/>
+                      <a:round/>
+                      <a:headEnd type="none" w="med" len="med"/>
+                      <a:tailEnd type="none" w="med" len="med"/>
+                    </a:lnL>
+                    <a:lnR w="6350" cap="flat" cmpd="sng" algn="ctr">
+                      <a:solidFill>
+                        <a:srgbClr val="D5DBE5"/>
+                      </a:solidFill>
+                      <a:prstDash val="solid"/>
+                      <a:round/>
+                      <a:headEnd type="none" w="med" len="med"/>
+                      <a:tailEnd type="none" w="med" len="med"/>
+                    </a:lnR>
+                    <a:lnT w="6350" cap="flat" cmpd="sng" algn="ctr">
+                      <a:solidFill>
+                        <a:srgbClr val="D5DBE5"/>
+                      </a:solidFill>
+                      <a:prstDash val="solid"/>
+                      <a:round/>
+                      <a:headEnd type="none" w="med" len="med"/>
+                      <a:tailEnd type="none" w="med" len="med"/>
+                    </a:lnT>
+                    <a:lnB w="6350" cap="flat" cmpd="sng" algn="ctr">
+                      <a:solidFill>
+                        <a:srgbClr val="D5DBE5"/>
+                      </a:solidFill>
+                      <a:prstDash val="solid"/>
+                      <a:round/>
+                      <a:headEnd type="none" w="med" len="med"/>
+                      <a:tailEnd type="none" w="med" len="med"/>
+                    </a:lnB>
+                    <a:solidFill>
+                      <a:srgbClr val="1E2761"/>
+                    </a:solidFill>
+                  </a:tcPr>
+                </a:tc>
+                <a:tc>
+                  <a:txBody>
+                    <a:bodyPr/>
+                    <a:lstStyle/>
+                    <a:p>
+                      <a:pPr marL="0" indent="0" algn="ctr">
+                        <a:buNone/>
+                      </a:pPr>
+                      <a:r>
+                        <a:rPr lang="en-US" sz="1100" b="1" dirty="0">
+                          <a:solidFill>
+                            <a:srgbClr val="FFFFFF"/>
+                          </a:solidFill>
+                        </a:rPr>
+                        <a:t>Pooled, before</a:t>
+                      </a:r>
+                      <a:endParaRPr lang="en-US" sz="1100" dirty="0"/>
+                    </a:p>
+                  </a:txBody>
+                  <a:tcPr marL="45720" marR="45720" anchor="ctr">
+                    <a:lnL w="6350" cap="flat" cmpd="sng" algn="ctr">
+                      <a:solidFill>
+                        <a:srgbClr val="D5DBE5"/>
+                      </a:solidFill>
+                      <a:prstDash val="solid"/>
+                      <a:round/>
+                      <a:headEnd type="none" w="med" len="med"/>
+                      <a:tailEnd type="none" w="med" len="med"/>
+                    </a:lnL>
+                    <a:lnR w="6350" cap="flat" cmpd="sng" algn="ctr">
+                      <a:solidFill>
+                        <a:srgbClr val="D5DBE5"/>
+                      </a:solidFill>
+                      <a:prstDash val="solid"/>
+                      <a:round/>
+                      <a:headEnd type="none" w="med" len="med"/>
+                      <a:tailEnd type="none" w="med" len="med"/>
+                    </a:lnR>
+                    <a:lnT w="6350" cap="flat" cmpd="sng" algn="ctr">
+                      <a:solidFill>
+                        <a:srgbClr val="D5DBE5"/>
+                      </a:solidFill>
+                      <a:prstDash val="solid"/>
+                      <a:round/>
+                      <a:headEnd type="none" w="med" len="med"/>
+                      <a:tailEnd type="none" w="med" len="med"/>
+                    </a:lnT>
+                    <a:lnB w="6350" cap="flat" cmpd="sng" algn="ctr">
+                      <a:solidFill>
+                        <a:srgbClr val="D5DBE5"/>
+                      </a:solidFill>
+                      <a:prstDash val="solid"/>
+                      <a:round/>
+                      <a:headEnd type="none" w="med" len="med"/>
+                      <a:tailEnd type="none" w="med" len="med"/>
+                    </a:lnB>
+                    <a:solidFill>
+                      <a:srgbClr val="1E2761"/>
+                    </a:solidFill>
+                  </a:tcPr>
+                </a:tc>
+                <a:tc>
+                  <a:txBody>
+                    <a:bodyPr/>
+                    <a:lstStyle/>
+                    <a:p>
+                      <a:pPr marL="0" indent="0" algn="ctr">
+                        <a:buNone/>
+                      </a:pPr>
+                      <a:r>
+                        <a:rPr lang="en-US" sz="1100" b="1" dirty="0">
+                          <a:solidFill>
+                            <a:srgbClr val="FFFFFF"/>
+                          </a:solidFill>
+                        </a:rPr>
+                        <a:t>Multiplier</a:t>
+                      </a:r>
+                      <a:endParaRPr lang="en-US" sz="1100" dirty="0"/>
+                    </a:p>
+                  </a:txBody>
+                  <a:tcPr marL="45720" marR="45720" anchor="ctr">
+                    <a:lnL w="6350" cap="flat" cmpd="sng" algn="ctr">
+                      <a:solidFill>
+                        <a:srgbClr val="D5DBE5"/>
+                      </a:solidFill>
+                      <a:prstDash val="solid"/>
+                      <a:round/>
+                      <a:headEnd type="none" w="med" len="med"/>
+                      <a:tailEnd type="none" w="med" len="med"/>
+                    </a:lnL>
+                    <a:lnR w="6350" cap="flat" cmpd="sng" algn="ctr">
+                      <a:solidFill>
+                        <a:srgbClr val="D5DBE5"/>
+                      </a:solidFill>
+                      <a:prstDash val="solid"/>
+                      <a:round/>
+                      <a:headEnd type="none" w="med" len="med"/>
+                      <a:tailEnd type="none" w="med" len="med"/>
+                    </a:lnR>
+                    <a:lnT w="6350" cap="flat" cmpd="sng" algn="ctr">
+                      <a:solidFill>
+                        <a:srgbClr val="D5DBE5"/>
+                      </a:solidFill>
+                      <a:prstDash val="solid"/>
+                      <a:round/>
+                      <a:headEnd type="none" w="med" len="med"/>
+                      <a:tailEnd type="none" w="med" len="med"/>
+                    </a:lnT>
+                    <a:lnB w="6350" cap="flat" cmpd="sng" algn="ctr">
+                      <a:solidFill>
+                        <a:srgbClr val="D5DBE5"/>
+                      </a:solidFill>
+                      <a:prstDash val="solid"/>
+                      <a:round/>
+                      <a:headEnd type="none" w="med" len="med"/>
+                      <a:tailEnd type="none" w="med" len="med"/>
+                    </a:lnB>
+                    <a:solidFill>
+                      <a:srgbClr val="1E2761"/>
+                    </a:solidFill>
+                  </a:tcPr>
+                </a:tc>
+                <a:tc>
+                  <a:txBody>
+                    <a:bodyPr/>
+                    <a:lstStyle/>
+                    <a:p>
+                      <a:pPr marL="0" indent="0" algn="ctr">
+                        <a:buNone/>
+                      </a:pPr>
+                      <a:r>
+                        <a:rPr lang="en-US" sz="1100" b="1" dirty="0">
+                          <a:solidFill>
+                            <a:srgbClr val="FFFFFF"/>
+                          </a:solidFill>
+                        </a:rPr>
+                        <a:t>After</a:t>
+                      </a:r>
+                      <a:endParaRPr lang="en-US" sz="1100" dirty="0"/>
+                    </a:p>
+                  </a:txBody>
+                  <a:tcPr marL="45720" marR="45720" anchor="ctr">
+                    <a:lnL w="6350" cap="flat" cmpd="sng" algn="ctr">
+                      <a:solidFill>
+                        <a:srgbClr val="D5DBE5"/>
+                      </a:solidFill>
+                      <a:prstDash val="solid"/>
+                      <a:round/>
+                      <a:headEnd type="none" w="med" len="med"/>
+                      <a:tailEnd type="none" w="med" len="med"/>
+                    </a:lnL>
+                    <a:lnR w="6350" cap="flat" cmpd="sng" algn="ctr">
+                      <a:solidFill>
+                        <a:srgbClr val="D5DBE5"/>
+                      </a:solidFill>
+                      <a:prstDash val="solid"/>
+                      <a:round/>
+                      <a:headEnd type="none" w="med" len="med"/>
+                      <a:tailEnd type="none" w="med" len="med"/>
+                    </a:lnR>
+                    <a:lnT w="6350" cap="flat" cmpd="sng" algn="ctr">
+                      <a:solidFill>
+                        <a:srgbClr val="D5DBE5"/>
+                      </a:solidFill>
+                      <a:prstDash val="solid"/>
+                      <a:round/>
+                      <a:headEnd type="none" w="med" len="med"/>
+                      <a:tailEnd type="none" w="med" len="med"/>
+                    </a:lnT>
+                    <a:lnB w="6350" cap="flat" cmpd="sng" algn="ctr">
+                      <a:solidFill>
+                        <a:srgbClr val="D5DBE5"/>
+                      </a:solidFill>
+                      <a:prstDash val="solid"/>
+                      <a:round/>
+                      <a:headEnd type="none" w="med" len="med"/>
+                      <a:tailEnd type="none" w="med" len="med"/>
+                    </a:lnB>
+                    <a:solidFill>
+                      <a:srgbClr val="1E2761"/>
+                    </a:solidFill>
+                  </a:tcPr>
+                </a:tc>
+                <a:tc>
+                  <a:txBody>
+                    <a:bodyPr/>
+                    <a:lstStyle/>
+                    <a:p>
+                      <a:pPr marL="0" indent="0" algn="ctr">
+                        <a:buNone/>
+                      </a:pPr>
+                      <a:r>
+                        <a:rPr lang="en-US" sz="1100" b="1" dirty="0">
+                          <a:solidFill>
+                            <a:srgbClr val="FFFFFF"/>
+                          </a:solidFill>
+                        </a:rPr>
+                        <a:t>Change</a:t>
+                      </a:r>
+                      <a:endParaRPr lang="en-US" sz="1100" dirty="0"/>
+                    </a:p>
+                  </a:txBody>
+                  <a:tcPr marL="45720" marR="45720" anchor="ctr">
+                    <a:lnL w="6350" cap="flat" cmpd="sng" algn="ctr">
+                      <a:solidFill>
+                        <a:srgbClr val="D5DBE5"/>
+                      </a:solidFill>
+                      <a:prstDash val="solid"/>
+                      <a:round/>
+                      <a:headEnd type="none" w="med" len="med"/>
+                      <a:tailEnd type="none" w="med" len="med"/>
+                    </a:lnL>
+                    <a:lnR w="6350" cap="flat" cmpd="sng" algn="ctr">
+                      <a:solidFill>
+                        <a:srgbClr val="D5DBE5"/>
+                      </a:solidFill>
+                      <a:prstDash val="solid"/>
+                      <a:round/>
+                      <a:headEnd type="none" w="med" len="med"/>
+                      <a:tailEnd type="none" w="med" len="med"/>
+                    </a:lnR>
+                    <a:lnT w="6350" cap="flat" cmpd="sng" algn="ctr">
+                      <a:solidFill>
+                        <a:srgbClr val="D5DBE5"/>
+                      </a:solidFill>
+                      <a:prstDash val="solid"/>
+                      <a:round/>
+                      <a:headEnd type="none" w="med" len="med"/>
+                      <a:tailEnd type="none" w="med" len="med"/>
+                    </a:lnT>
+                    <a:lnB w="6350" cap="flat" cmpd="sng" algn="ctr">
+                      <a:solidFill>
+                        <a:srgbClr val="D5DBE5"/>
+                      </a:solidFill>
+                      <a:prstDash val="solid"/>
+                      <a:round/>
+                      <a:headEnd type="none" w="med" len="med"/>
+                      <a:tailEnd type="none" w="med" len="med"/>
+                    </a:lnB>
+                    <a:solidFill>
+                      <a:srgbClr val="1E2761"/>
+                    </a:solidFill>
+                  </a:tcPr>
+                </a:tc>
+                <a:extLst>
+                  <a:ext uri="{0D108BD9-81ED-4DB2-BD59-A6C34878D82A}">
+                    <a16:rowId xmlns:a16="http://schemas.microsoft.com/office/drawing/2014/main" val="10000"/>
+                  </a:ext>
+                </a:extLst>
+              </a:tr>
+              <a:tr h="384048">
+                <a:tc>
+                  <a:txBody>
+                    <a:bodyPr/>
+                    <a:lstStyle/>
+                    <a:p>
+                      <a:pPr marL="0" indent="0">
+                        <a:buNone/>
+                      </a:pPr>
+                      <a:r>
+                        <a:rPr lang="en-US" sz="1100" dirty="0">
+                          <a:solidFill>
+                            <a:srgbClr val="1B1F2A"/>
+                          </a:solidFill>
+                        </a:rPr>
+                        <a:t>−50 bps</a:t>
+                      </a:r>
+                      <a:endParaRPr lang="en-US" sz="1100" dirty="0"/>
+                    </a:p>
+                  </a:txBody>
+                  <a:tcPr marL="45720" marR="45720" anchor="ctr">
+                    <a:lnL w="6350" cap="flat" cmpd="sng" algn="ctr">
+                      <a:solidFill>
+                        <a:srgbClr val="D5DBE5"/>
+                      </a:solidFill>
+                      <a:prstDash val="solid"/>
+                      <a:round/>
+                      <a:headEnd type="none" w="med" len="med"/>
+                      <a:tailEnd type="none" w="med" len="med"/>
+                    </a:lnL>
+                    <a:lnR w="6350" cap="flat" cmpd="sng" algn="ctr">
+                      <a:solidFill>
+                        <a:srgbClr val="D5DBE5"/>
+                      </a:solidFill>
+                      <a:prstDash val="solid"/>
+                      <a:round/>
+                      <a:headEnd type="none" w="med" len="med"/>
+                      <a:tailEnd type="none" w="med" len="med"/>
+                    </a:lnR>
+                    <a:lnT w="6350" cap="flat" cmpd="sng" algn="ctr">
+                      <a:solidFill>
+                        <a:srgbClr val="D5DBE5"/>
+                      </a:solidFill>
+                      <a:prstDash val="solid"/>
+                      <a:round/>
+                      <a:headEnd type="none" w="med" len="med"/>
+                      <a:tailEnd type="none" w="med" len="med"/>
+                    </a:lnT>
+                    <a:lnB w="6350" cap="flat" cmpd="sng" algn="ctr">
+                      <a:solidFill>
+                        <a:srgbClr val="D5DBE5"/>
+                      </a:solidFill>
+                      <a:prstDash val="solid"/>
+                      <a:round/>
+                      <a:headEnd type="none" w="med" len="med"/>
+                      <a:tailEnd type="none" w="med" len="med"/>
+                    </a:lnB>
+                  </a:tcPr>
+                </a:tc>
+                <a:tc>
+                  <a:txBody>
+                    <a:bodyPr/>
+                    <a:lstStyle/>
+                    <a:p>
+                      <a:pPr marL="0" indent="0" algn="ctr">
+                        <a:buNone/>
+                      </a:pPr>
+                      <a:r>
+                        <a:rPr lang="en-US" sz="1100" dirty="0">
+                          <a:solidFill>
+                            <a:srgbClr val="1B1F2A"/>
+                          </a:solidFill>
+                        </a:rPr>
+                        <a:t>1.50</a:t>
+                      </a:r>
+                      <a:endParaRPr lang="en-US" sz="1100" dirty="0"/>
+                    </a:p>
+                  </a:txBody>
+                  <a:tcPr marL="45720" marR="45720" anchor="ctr">
+                    <a:lnL w="6350" cap="flat" cmpd="sng" algn="ctr">
+                      <a:solidFill>
+                        <a:srgbClr val="D5DBE5"/>
+                      </a:solidFill>
+                      <a:prstDash val="solid"/>
+                      <a:round/>
+                      <a:headEnd type="none" w="med" len="med"/>
+                      <a:tailEnd type="none" w="med" len="med"/>
+                    </a:lnL>
+                    <a:lnR w="6350" cap="flat" cmpd="sng" algn="ctr">
+                      <a:solidFill>
+                        <a:srgbClr val="D5DBE5"/>
+                      </a:solidFill>
+                      <a:prstDash val="solid"/>
+                      <a:round/>
+                      <a:headEnd type="none" w="med" len="med"/>
+                      <a:tailEnd type="none" w="med" len="med"/>
+                    </a:lnR>
+                    <a:lnT w="6350" cap="flat" cmpd="sng" algn="ctr">
+                      <a:solidFill>
+                        <a:srgbClr val="D5DBE5"/>
+                      </a:solidFill>
+                      <a:prstDash val="solid"/>
+                      <a:round/>
+                      <a:headEnd type="none" w="med" len="med"/>
+                      <a:tailEnd type="none" w="med" len="med"/>
+                    </a:lnT>
+                    <a:lnB w="6350" cap="flat" cmpd="sng" algn="ctr">
+                      <a:solidFill>
+                        <a:srgbClr val="D5DBE5"/>
+                      </a:solidFill>
+                      <a:prstDash val="solid"/>
+                      <a:round/>
+                      <a:headEnd type="none" w="med" len="med"/>
+                      <a:tailEnd type="none" w="med" len="med"/>
+                    </a:lnB>
+                  </a:tcPr>
+                </a:tc>
+                <a:tc>
+                  <a:txBody>
+                    <a:bodyPr/>
+                    <a:lstStyle/>
+                    <a:p>
+                      <a:pPr marL="0" indent="0" algn="ctr">
+                        <a:buNone/>
+                      </a:pPr>
+                      <a:r>
+                        <a:rPr lang="en-US" sz="1100" dirty="0">
+                          <a:solidFill>
+                            <a:srgbClr val="1B1F2A"/>
+                          </a:solidFill>
+                        </a:rPr>
+                        <a:t>× 0.70</a:t>
+                      </a:r>
+                      <a:endParaRPr lang="en-US" sz="1100" dirty="0"/>
+                    </a:p>
+                  </a:txBody>
+                  <a:tcPr marL="45720" marR="45720" anchor="ctr">
+                    <a:lnL w="6350" cap="flat" cmpd="sng" algn="ctr">
+                      <a:solidFill>
+                        <a:srgbClr val="D5DBE5"/>
+                      </a:solidFill>
+                      <a:prstDash val="solid"/>
+                      <a:round/>
+                      <a:headEnd type="none" w="med" len="med"/>
+                      <a:tailEnd type="none" w="med" len="med"/>
+                    </a:lnL>
+                    <a:lnR w="6350" cap="flat" cmpd="sng" algn="ctr">
+                      <a:solidFill>
+                        <a:srgbClr val="D5DBE5"/>
+                      </a:solidFill>
+                      <a:prstDash val="solid"/>
+                      <a:round/>
+                      <a:headEnd type="none" w="med" len="med"/>
+                      <a:tailEnd type="none" w="med" len="med"/>
+                    </a:lnR>
+                    <a:lnT w="6350" cap="flat" cmpd="sng" algn="ctr">
+                      <a:solidFill>
+                        <a:srgbClr val="D5DBE5"/>
+                      </a:solidFill>
+                      <a:prstDash val="solid"/>
+                      <a:round/>
+                      <a:headEnd type="none" w="med" len="med"/>
+                      <a:tailEnd type="none" w="med" len="med"/>
+                    </a:lnT>
+                    <a:lnB w="6350" cap="flat" cmpd="sng" algn="ctr">
+                      <a:solidFill>
+                        <a:srgbClr val="D5DBE5"/>
+                      </a:solidFill>
+                      <a:prstDash val="solid"/>
+                      <a:round/>
+                      <a:headEnd type="none" w="med" len="med"/>
+                      <a:tailEnd type="none" w="med" len="med"/>
+                    </a:lnB>
+                  </a:tcPr>
+                </a:tc>
+                <a:tc>
+                  <a:txBody>
+                    <a:bodyPr/>
+                    <a:lstStyle/>
+                    <a:p>
+                      <a:pPr marL="0" indent="0" algn="ctr">
+                        <a:buNone/>
+                      </a:pPr>
+                      <a:r>
+                        <a:rPr lang="en-US" sz="1100" dirty="0">
+                          <a:solidFill>
+                            <a:srgbClr val="1B1F2A"/>
+                          </a:solidFill>
+                        </a:rPr>
+                        <a:t>1.05</a:t>
+                      </a:r>
+                      <a:endParaRPr lang="en-US" sz="1100" dirty="0"/>
+                    </a:p>
+                  </a:txBody>
+                  <a:tcPr marL="45720" marR="45720" anchor="ctr">
+                    <a:lnL w="6350" cap="flat" cmpd="sng" algn="ctr">
+                      <a:solidFill>
+                        <a:srgbClr val="D5DBE5"/>
+                      </a:solidFill>
+                      <a:prstDash val="solid"/>
+                      <a:round/>
+                      <a:headEnd type="none" w="med" len="med"/>
+                      <a:tailEnd type="none" w="med" len="med"/>
+                    </a:lnL>
+                    <a:lnR w="6350" cap="flat" cmpd="sng" algn="ctr">
+                      <a:solidFill>
+                        <a:srgbClr val="D5DBE5"/>
+                      </a:solidFill>
+                      <a:prstDash val="solid"/>
+                      <a:round/>
+                      <a:headEnd type="none" w="med" len="med"/>
+                      <a:tailEnd type="none" w="med" len="med"/>
+                    </a:lnR>
+                    <a:lnT w="6350" cap="flat" cmpd="sng" algn="ctr">
+                      <a:solidFill>
+                        <a:srgbClr val="D5DBE5"/>
+                      </a:solidFill>
+                      <a:prstDash val="solid"/>
+                      <a:round/>
+                      <a:headEnd type="none" w="med" len="med"/>
+                      <a:tailEnd type="none" w="med" len="med"/>
+                    </a:lnT>
+                    <a:lnB w="6350" cap="flat" cmpd="sng" algn="ctr">
+                      <a:solidFill>
+                        <a:srgbClr val="D5DBE5"/>
+                      </a:solidFill>
+                      <a:prstDash val="solid"/>
+                      <a:round/>
+                      <a:headEnd type="none" w="med" len="med"/>
+                      <a:tailEnd type="none" w="med" len="med"/>
+                    </a:lnB>
+                  </a:tcPr>
+                </a:tc>
+                <a:tc>
+                  <a:txBody>
+                    <a:bodyPr/>
+                    <a:lstStyle/>
+                    <a:p>
+                      <a:pPr marL="0" indent="0" algn="ctr">
+                        <a:buNone/>
+                      </a:pPr>
+                      <a:r>
+                        <a:rPr lang="en-US" sz="1100" dirty="0">
+                          <a:solidFill>
+                            <a:srgbClr val="C8553D"/>
+                          </a:solidFill>
+                        </a:rPr>
+                        <a:t>−0.45</a:t>
+                      </a:r>
+                      <a:endParaRPr lang="en-US" sz="1100" dirty="0"/>
+                    </a:p>
+                  </a:txBody>
+                  <a:tcPr marL="45720" marR="45720" anchor="ctr">
+                    <a:lnL w="6350" cap="flat" cmpd="sng" algn="ctr">
+                      <a:solidFill>
+                        <a:srgbClr val="D5DBE5"/>
+                      </a:solidFill>
+                      <a:prstDash val="solid"/>
+                      <a:round/>
+                      <a:headEnd type="none" w="med" len="med"/>
+                      <a:tailEnd type="none" w="med" len="med"/>
+                    </a:lnL>
+                    <a:lnR w="6350" cap="flat" cmpd="sng" algn="ctr">
+                      <a:solidFill>
+                        <a:srgbClr val="D5DBE5"/>
+                      </a:solidFill>
+                      <a:prstDash val="solid"/>
+                      <a:round/>
+                      <a:headEnd type="none" w="med" len="med"/>
+                      <a:tailEnd type="none" w="med" len="med"/>
+                    </a:lnR>
+                    <a:lnT w="6350" cap="flat" cmpd="sng" algn="ctr">
+                      <a:solidFill>
+                        <a:srgbClr val="D5DBE5"/>
+                      </a:solidFill>
+                      <a:prstDash val="solid"/>
+                      <a:round/>
+                      <a:headEnd type="none" w="med" len="med"/>
+                      <a:tailEnd type="none" w="med" len="med"/>
+                    </a:lnT>
+                    <a:lnB w="6350" cap="flat" cmpd="sng" algn="ctr">
+                      <a:solidFill>
+                        <a:srgbClr val="D5DBE5"/>
+                      </a:solidFill>
+                      <a:prstDash val="solid"/>
+                      <a:round/>
+                      <a:headEnd type="none" w="med" len="med"/>
+                      <a:tailEnd type="none" w="med" len="med"/>
+                    </a:lnB>
+                  </a:tcPr>
+                </a:tc>
+                <a:extLst>
+                  <a:ext uri="{0D108BD9-81ED-4DB2-BD59-A6C34878D82A}">
+                    <a16:rowId xmlns:a16="http://schemas.microsoft.com/office/drawing/2014/main" val="10001"/>
+                  </a:ext>
+                </a:extLst>
+              </a:tr>
+              <a:tr h="384048">
+                <a:tc>
+                  <a:txBody>
+                    <a:bodyPr/>
+                    <a:lstStyle/>
+                    <a:p>
+                      <a:pPr marL="0" indent="0">
+                        <a:buNone/>
+                      </a:pPr>
+                      <a:r>
+                        <a:rPr lang="en-US" sz="1100" dirty="0">
+                          <a:solidFill>
+                            <a:srgbClr val="1B1F2A"/>
+                          </a:solidFill>
+                        </a:rPr>
+                        <a:t>−25 bps</a:t>
+                      </a:r>
+                      <a:endParaRPr lang="en-US" sz="1100" dirty="0"/>
+                    </a:p>
+                  </a:txBody>
+                  <a:tcPr marL="45720" marR="45720" anchor="ctr">
+                    <a:lnL w="6350" cap="flat" cmpd="sng" algn="ctr">
+                      <a:solidFill>
+                        <a:srgbClr val="D5DBE5"/>
+                      </a:solidFill>
+                      <a:prstDash val="solid"/>
+                      <a:round/>
+                      <a:headEnd type="none" w="med" len="med"/>
+                      <a:tailEnd type="none" w="med" len="med"/>
+                    </a:lnL>
+                    <a:lnR w="6350" cap="flat" cmpd="sng" algn="ctr">
+                      <a:solidFill>
+                        <a:srgbClr val="D5DBE5"/>
+                      </a:solidFill>
+                      <a:prstDash val="solid"/>
+                      <a:round/>
+                      <a:headEnd type="none" w="med" len="med"/>
+                      <a:tailEnd type="none" w="med" len="med"/>
+                    </a:lnR>
+                    <a:lnT w="6350" cap="flat" cmpd="sng" algn="ctr">
+                      <a:solidFill>
+                        <a:srgbClr val="D5DBE5"/>
+                      </a:solidFill>
+                      <a:prstDash val="solid"/>
+                      <a:round/>
+                      <a:headEnd type="none" w="med" len="med"/>
+                      <a:tailEnd type="none" w="med" len="med"/>
+                    </a:lnT>
+                    <a:lnB w="6350" cap="flat" cmpd="sng" algn="ctr">
+                      <a:solidFill>
+                        <a:srgbClr val="D5DBE5"/>
+                      </a:solidFill>
+                      <a:prstDash val="solid"/>
+                      <a:round/>
+                      <a:headEnd type="none" w="med" len="med"/>
+                      <a:tailEnd type="none" w="med" len="med"/>
+                    </a:lnB>
+                  </a:tcPr>
+                </a:tc>
+                <a:tc>
+                  <a:txBody>
+                    <a:bodyPr/>
+                    <a:lstStyle/>
+                    <a:p>
+                      <a:pPr marL="0" indent="0" algn="ctr">
+                        <a:buNone/>
+                      </a:pPr>
+                      <a:r>
+                        <a:rPr lang="en-US" sz="1100" dirty="0">
+                          <a:solidFill>
+                            <a:srgbClr val="1B1F2A"/>
+                          </a:solidFill>
+                        </a:rPr>
+                        <a:t>1.50</a:t>
+                      </a:r>
+                      <a:endParaRPr lang="en-US" sz="1100" dirty="0"/>
+                    </a:p>
+                  </a:txBody>
+                  <a:tcPr marL="45720" marR="45720" anchor="ctr">
+                    <a:lnL w="6350" cap="flat" cmpd="sng" algn="ctr">
+                      <a:solidFill>
+                        <a:srgbClr val="D5DBE5"/>
+                      </a:solidFill>
+                      <a:prstDash val="solid"/>
+                      <a:round/>
+                      <a:headEnd type="none" w="med" len="med"/>
+                      <a:tailEnd type="none" w="med" len="med"/>
+                    </a:lnL>
+                    <a:lnR w="6350" cap="flat" cmpd="sng" algn="ctr">
+                      <a:solidFill>
+                        <a:srgbClr val="D5DBE5"/>
+                      </a:solidFill>
+                      <a:prstDash val="solid"/>
+                      <a:round/>
+                      <a:headEnd type="none" w="med" len="med"/>
+                      <a:tailEnd type="none" w="med" len="med"/>
+                    </a:lnR>
+                    <a:lnT w="6350" cap="flat" cmpd="sng" algn="ctr">
+                      <a:solidFill>
+                        <a:srgbClr val="D5DBE5"/>
+                      </a:solidFill>
+                      <a:prstDash val="solid"/>
+                      <a:round/>
+                      <a:headEnd type="none" w="med" len="med"/>
+                      <a:tailEnd type="none" w="med" len="med"/>
+                    </a:lnT>
+                    <a:lnB w="6350" cap="flat" cmpd="sng" algn="ctr">
+                      <a:solidFill>
+                        <a:srgbClr val="D5DBE5"/>
+                      </a:solidFill>
+                      <a:prstDash val="solid"/>
+                      <a:round/>
+                      <a:headEnd type="none" w="med" len="med"/>
+                      <a:tailEnd type="none" w="med" len="med"/>
+                    </a:lnB>
+                  </a:tcPr>
+                </a:tc>
+                <a:tc>
+                  <a:txBody>
+                    <a:bodyPr/>
+                    <a:lstStyle/>
+                    <a:p>
+                      <a:pPr marL="0" indent="0" algn="ctr">
+                        <a:buNone/>
+                      </a:pPr>
+                      <a:r>
+                        <a:rPr lang="en-US" sz="1100" dirty="0">
+                          <a:solidFill>
+                            <a:srgbClr val="1B1F2A"/>
+                          </a:solidFill>
+                        </a:rPr>
+                        <a:t>× 0.82</a:t>
+                      </a:r>
+                      <a:endParaRPr lang="en-US" sz="1100" dirty="0"/>
+                    </a:p>
+                  </a:txBody>
+                  <a:tcPr marL="45720" marR="45720" anchor="ctr">
+                    <a:lnL w="6350" cap="flat" cmpd="sng" algn="ctr">
+                      <a:solidFill>
+                        <a:srgbClr val="D5DBE5"/>
+                      </a:solidFill>
+                      <a:prstDash val="solid"/>
+                      <a:round/>
+                      <a:headEnd type="none" w="med" len="med"/>
+                      <a:tailEnd type="none" w="med" len="med"/>
+                    </a:lnL>
+                    <a:lnR w="6350" cap="flat" cmpd="sng" algn="ctr">
+                      <a:solidFill>
+                        <a:srgbClr val="D5DBE5"/>
+                      </a:solidFill>
+                      <a:prstDash val="solid"/>
+                      <a:round/>
+                      <a:headEnd type="none" w="med" len="med"/>
+                      <a:tailEnd type="none" w="med" len="med"/>
+                    </a:lnR>
+                    <a:lnT w="6350" cap="flat" cmpd="sng" algn="ctr">
+                      <a:solidFill>
+                        <a:srgbClr val="D5DBE5"/>
+                      </a:solidFill>
+                      <a:prstDash val="solid"/>
+                      <a:round/>
+                      <a:headEnd type="none" w="med" len="med"/>
+                      <a:tailEnd type="none" w="med" len="med"/>
+                    </a:lnT>
+                    <a:lnB w="6350" cap="flat" cmpd="sng" algn="ctr">
+                      <a:solidFill>
+                        <a:srgbClr val="D5DBE5"/>
+                      </a:solidFill>
+                      <a:prstDash val="solid"/>
+                      <a:round/>
+                      <a:headEnd type="none" w="med" len="med"/>
+                      <a:tailEnd type="none" w="med" len="med"/>
+                    </a:lnB>
+                  </a:tcPr>
+                </a:tc>
+                <a:tc>
+                  <a:txBody>
+                    <a:bodyPr/>
+                    <a:lstStyle/>
+                    <a:p>
+                      <a:pPr marL="0" indent="0" algn="ctr">
+                        <a:buNone/>
+                      </a:pPr>
+                      <a:r>
+                        <a:rPr lang="en-US" sz="1100" dirty="0">
+                          <a:solidFill>
+                            <a:srgbClr val="1B1F2A"/>
+                          </a:solidFill>
+                        </a:rPr>
+                        <a:t>1.23</a:t>
+                      </a:r>
+                      <a:endParaRPr lang="en-US" sz="1100" dirty="0"/>
+                    </a:p>
+                  </a:txBody>
+                  <a:tcPr marL="45720" marR="45720" anchor="ctr">
+                    <a:lnL w="6350" cap="flat" cmpd="sng" algn="ctr">
+                      <a:solidFill>
+                        <a:srgbClr val="D5DBE5"/>
+                      </a:solidFill>
+                      <a:prstDash val="solid"/>
+                      <a:round/>
+                      <a:headEnd type="none" w="med" len="med"/>
+                      <a:tailEnd type="none" w="med" len="med"/>
+                    </a:lnL>
+                    <a:lnR w="6350" cap="flat" cmpd="sng" algn="ctr">
+                      <a:solidFill>
+                        <a:srgbClr val="D5DBE5"/>
+                      </a:solidFill>
+                      <a:prstDash val="solid"/>
+                      <a:round/>
+                      <a:headEnd type="none" w="med" len="med"/>
+                      <a:tailEnd type="none" w="med" len="med"/>
+                    </a:lnR>
+                    <a:lnT w="6350" cap="flat" cmpd="sng" algn="ctr">
+                      <a:solidFill>
+                        <a:srgbClr val="D5DBE5"/>
+                      </a:solidFill>
+                      <a:prstDash val="solid"/>
+                      <a:round/>
+                      <a:headEnd type="none" w="med" len="med"/>
+                      <a:tailEnd type="none" w="med" len="med"/>
+                    </a:lnT>
+                    <a:lnB w="6350" cap="flat" cmpd="sng" algn="ctr">
+                      <a:solidFill>
+                        <a:srgbClr val="D5DBE5"/>
+                      </a:solidFill>
+                      <a:prstDash val="solid"/>
+                      <a:round/>
+                      <a:headEnd type="none" w="med" len="med"/>
+                      <a:tailEnd type="none" w="med" len="med"/>
+                    </a:lnB>
+                  </a:tcPr>
+                </a:tc>
+                <a:tc>
+                  <a:txBody>
+                    <a:bodyPr/>
+                    <a:lstStyle/>
+                    <a:p>
+                      <a:pPr marL="0" indent="0" algn="ctr">
+                        <a:buNone/>
+                      </a:pPr>
+                      <a:r>
+                        <a:rPr lang="en-US" sz="1100" dirty="0">
+                          <a:solidFill>
+                            <a:srgbClr val="C8553D"/>
+                          </a:solidFill>
+                        </a:rPr>
+                        <a:t>−0.27</a:t>
+                      </a:r>
+                      <a:endParaRPr lang="en-US" sz="1100" dirty="0"/>
+                    </a:p>
+                  </a:txBody>
+                  <a:tcPr marL="45720" marR="45720" anchor="ctr">
+                    <a:lnL w="6350" cap="flat" cmpd="sng" algn="ctr">
+                      <a:solidFill>
+                        <a:srgbClr val="D5DBE5"/>
+                      </a:solidFill>
+                      <a:prstDash val="solid"/>
+                      <a:round/>
+                      <a:headEnd type="none" w="med" len="med"/>
+                      <a:tailEnd type="none" w="med" len="med"/>
+                    </a:lnL>
+                    <a:lnR w="6350" cap="flat" cmpd="sng" algn="ctr">
+                      <a:solidFill>
+                        <a:srgbClr val="D5DBE5"/>
+                      </a:solidFill>
+                      <a:prstDash val="solid"/>
+                      <a:round/>
+                      <a:headEnd type="none" w="med" len="med"/>
+                      <a:tailEnd type="none" w="med" len="med"/>
+                    </a:lnR>
+                    <a:lnT w="6350" cap="flat" cmpd="sng" algn="ctr">
+                      <a:solidFill>
+                        <a:srgbClr val="D5DBE5"/>
+                      </a:solidFill>
+                      <a:prstDash val="solid"/>
+                      <a:round/>
+                      <a:headEnd type="none" w="med" len="med"/>
+                      <a:tailEnd type="none" w="med" len="med"/>
+                    </a:lnT>
+                    <a:lnB w="6350" cap="flat" cmpd="sng" algn="ctr">
+                      <a:solidFill>
+                        <a:srgbClr val="D5DBE5"/>
+                      </a:solidFill>
+                      <a:prstDash val="solid"/>
+                      <a:round/>
+                      <a:headEnd type="none" w="med" len="med"/>
+                      <a:tailEnd type="none" w="med" len="med"/>
+                    </a:lnB>
+                  </a:tcPr>
+                </a:tc>
+                <a:extLst>
+                  <a:ext uri="{0D108BD9-81ED-4DB2-BD59-A6C34878D82A}">
+                    <a16:rowId xmlns:a16="http://schemas.microsoft.com/office/drawing/2014/main" val="10002"/>
+                  </a:ext>
+                </a:extLst>
+              </a:tr>
+              <a:tr h="384048">
+                <a:tc>
+                  <a:txBody>
+                    <a:bodyPr/>
+                    <a:lstStyle/>
+                    <a:p>
+                      <a:pPr marL="0" indent="0">
+                        <a:buNone/>
+                      </a:pPr>
+                      <a:r>
+                        <a:rPr lang="en-US" sz="1100" dirty="0">
+                          <a:solidFill>
+                            <a:srgbClr val="1B1F2A"/>
+                          </a:solidFill>
+                        </a:rPr>
+                        <a:t>no change</a:t>
+                      </a:r>
+                      <a:endParaRPr lang="en-US" sz="1100" dirty="0"/>
+                    </a:p>
+                  </a:txBody>
+                  <a:tcPr marL="45720" marR="45720" anchor="ctr">
+                    <a:lnL w="6350" cap="flat" cmpd="sng" algn="ctr">
+                      <a:solidFill>
+                        <a:srgbClr val="D5DBE5"/>
+                      </a:solidFill>
+                      <a:prstDash val="solid"/>
+                      <a:round/>
+                      <a:headEnd type="none" w="med" len="med"/>
+                      <a:tailEnd type="none" w="med" len="med"/>
+                    </a:lnL>
+                    <a:lnR w="6350" cap="flat" cmpd="sng" algn="ctr">
+                      <a:solidFill>
+                        <a:srgbClr val="D5DBE5"/>
+                      </a:solidFill>
+                      <a:prstDash val="solid"/>
+                      <a:round/>
+                      <a:headEnd type="none" w="med" len="med"/>
+                      <a:tailEnd type="none" w="med" len="med"/>
+                    </a:lnR>
+                    <a:lnT w="6350" cap="flat" cmpd="sng" algn="ctr">
+                      <a:solidFill>
+                        <a:srgbClr val="D5DBE5"/>
+                      </a:solidFill>
+                      <a:prstDash val="solid"/>
+                      <a:round/>
+                      <a:headEnd type="none" w="med" len="med"/>
+                      <a:tailEnd type="none" w="med" len="med"/>
+                    </a:lnT>
+                    <a:lnB w="6350" cap="flat" cmpd="sng" algn="ctr">
+                      <a:solidFill>
+                        <a:srgbClr val="D5DBE5"/>
+                      </a:solidFill>
+                      <a:prstDash val="solid"/>
+                      <a:round/>
+                      <a:headEnd type="none" w="med" len="med"/>
+                      <a:tailEnd type="none" w="med" len="med"/>
+                    </a:lnB>
+                  </a:tcPr>
+                </a:tc>
+                <a:tc>
+                  <a:txBody>
+                    <a:bodyPr/>
+                    <a:lstStyle/>
+                    <a:p>
+                      <a:pPr marL="0" indent="0" algn="ctr">
+                        <a:buNone/>
+                      </a:pPr>
+                      <a:r>
+                        <a:rPr lang="en-US" sz="1100" dirty="0">
+                          <a:solidFill>
+                            <a:srgbClr val="1B1F2A"/>
+                          </a:solidFill>
+                        </a:rPr>
+                        <a:t>70.86</a:t>
+                      </a:r>
+                      <a:endParaRPr lang="en-US" sz="1100" dirty="0"/>
+                    </a:p>
+                  </a:txBody>
+                  <a:tcPr marL="45720" marR="45720" anchor="ctr">
+                    <a:lnL w="6350" cap="flat" cmpd="sng" algn="ctr">
+                      <a:solidFill>
+                        <a:srgbClr val="D5DBE5"/>
+                      </a:solidFill>
+                      <a:prstDash val="solid"/>
+                      <a:round/>
+                      <a:headEnd type="none" w="med" len="med"/>
+                      <a:tailEnd type="none" w="med" len="med"/>
+                    </a:lnL>
+                    <a:lnR w="6350" cap="flat" cmpd="sng" algn="ctr">
+                      <a:solidFill>
+                        <a:srgbClr val="D5DBE5"/>
+                      </a:solidFill>
+                      <a:prstDash val="solid"/>
+                      <a:round/>
+                      <a:headEnd type="none" w="med" len="med"/>
+                      <a:tailEnd type="none" w="med" len="med"/>
+                    </a:lnR>
+                    <a:lnT w="6350" cap="flat" cmpd="sng" algn="ctr">
+                      <a:solidFill>
+                        <a:srgbClr val="D5DBE5"/>
+                      </a:solidFill>
+                      <a:prstDash val="solid"/>
+                      <a:round/>
+                      <a:headEnd type="none" w="med" len="med"/>
+                      <a:tailEnd type="none" w="med" len="med"/>
+                    </a:lnT>
+                    <a:lnB w="6350" cap="flat" cmpd="sng" algn="ctr">
+                      <a:solidFill>
+                        <a:srgbClr val="D5DBE5"/>
+                      </a:solidFill>
+                      <a:prstDash val="solid"/>
+                      <a:round/>
+                      <a:headEnd type="none" w="med" len="med"/>
+                      <a:tailEnd type="none" w="med" len="med"/>
+                    </a:lnB>
+                  </a:tcPr>
+                </a:tc>
+                <a:tc>
+                  <a:txBody>
+                    <a:bodyPr/>
+                    <a:lstStyle/>
+                    <a:p>
+                      <a:pPr marL="0" indent="0" algn="ctr">
+                        <a:buNone/>
+                      </a:pPr>
+                      <a:r>
+                        <a:rPr lang="en-US" sz="1100" dirty="0">
+                          <a:solidFill>
+                            <a:srgbClr val="1B1F2A"/>
+                          </a:solidFill>
+                        </a:rPr>
+                        <a:t>× 0.95</a:t>
+                      </a:r>
+                      <a:endParaRPr lang="en-US" sz="1100" dirty="0"/>
+                    </a:p>
+                  </a:txBody>
+                  <a:tcPr marL="45720" marR="45720" anchor="ctr">
+                    <a:lnL w="6350" cap="flat" cmpd="sng" algn="ctr">
+                      <a:solidFill>
+                        <a:srgbClr val="D5DBE5"/>
+                      </a:solidFill>
+                      <a:prstDash val="solid"/>
+                      <a:round/>
+                      <a:headEnd type="none" w="med" len="med"/>
+                      <a:tailEnd type="none" w="med" len="med"/>
+                    </a:lnL>
+                    <a:lnR w="6350" cap="flat" cmpd="sng" algn="ctr">
+                      <a:solidFill>
+                        <a:srgbClr val="D5DBE5"/>
+                      </a:solidFill>
+                      <a:prstDash val="solid"/>
+                      <a:round/>
+                      <a:headEnd type="none" w="med" len="med"/>
+                      <a:tailEnd type="none" w="med" len="med"/>
+                    </a:lnR>
+                    <a:lnT w="6350" cap="flat" cmpd="sng" algn="ctr">
+                      <a:solidFill>
+                        <a:srgbClr val="D5DBE5"/>
+                      </a:solidFill>
+                      <a:prstDash val="solid"/>
+                      <a:round/>
+                      <a:headEnd type="none" w="med" len="med"/>
+                      <a:tailEnd type="none" w="med" len="med"/>
+                    </a:lnT>
+                    <a:lnB w="6350" cap="flat" cmpd="sng" algn="ctr">
+                      <a:solidFill>
+                        <a:srgbClr val="D5DBE5"/>
+                      </a:solidFill>
+                      <a:prstDash val="solid"/>
+                      <a:round/>
+                      <a:headEnd type="none" w="med" len="med"/>
+                      <a:tailEnd type="none" w="med" len="med"/>
+                    </a:lnB>
+                  </a:tcPr>
+                </a:tc>
+                <a:tc>
+                  <a:txBody>
+                    <a:bodyPr/>
+                    <a:lstStyle/>
+                    <a:p>
+                      <a:pPr marL="0" indent="0" algn="ctr">
+                        <a:buNone/>
+                      </a:pPr>
+                      <a:r>
+                        <a:rPr lang="en-US" sz="1100" dirty="0">
+                          <a:solidFill>
+                            <a:srgbClr val="1B1F2A"/>
+                          </a:solidFill>
+                        </a:rPr>
+                        <a:t>67.58</a:t>
+                      </a:r>
+                      <a:endParaRPr lang="en-US" sz="1100" dirty="0"/>
+                    </a:p>
+                  </a:txBody>
+                  <a:tcPr marL="45720" marR="45720" anchor="ctr">
+                    <a:lnL w="6350" cap="flat" cmpd="sng" algn="ctr">
+                      <a:solidFill>
+                        <a:srgbClr val="D5DBE5"/>
+                      </a:solidFill>
+                      <a:prstDash val="solid"/>
+                      <a:round/>
+                      <a:headEnd type="none" w="med" len="med"/>
+                      <a:tailEnd type="none" w="med" len="med"/>
+                    </a:lnL>
+                    <a:lnR w="6350" cap="flat" cmpd="sng" algn="ctr">
+                      <a:solidFill>
+                        <a:srgbClr val="D5DBE5"/>
+                      </a:solidFill>
+                      <a:prstDash val="solid"/>
+                      <a:round/>
+                      <a:headEnd type="none" w="med" len="med"/>
+                      <a:tailEnd type="none" w="med" len="med"/>
+                    </a:lnR>
+                    <a:lnT w="6350" cap="flat" cmpd="sng" algn="ctr">
+                      <a:solidFill>
+                        <a:srgbClr val="D5DBE5"/>
+                      </a:solidFill>
+                      <a:prstDash val="solid"/>
+                      <a:round/>
+                      <a:headEnd type="none" w="med" len="med"/>
+                      <a:tailEnd type="none" w="med" len="med"/>
+                    </a:lnT>
+                    <a:lnB w="6350" cap="flat" cmpd="sng" algn="ctr">
+                      <a:solidFill>
+                        <a:srgbClr val="D5DBE5"/>
+                      </a:solidFill>
+                      <a:prstDash val="solid"/>
+                      <a:round/>
+                      <a:headEnd type="none" w="med" len="med"/>
+                      <a:tailEnd type="none" w="med" len="med"/>
+                    </a:lnB>
+                  </a:tcPr>
+                </a:tc>
+                <a:tc>
+                  <a:txBody>
+                    <a:bodyPr/>
+                    <a:lstStyle/>
+                    <a:p>
+                      <a:pPr marL="0" indent="0" algn="ctr">
+                        <a:buNone/>
+                      </a:pPr>
+                      <a:r>
+                        <a:rPr lang="en-US" sz="1100" dirty="0">
+                          <a:solidFill>
+                            <a:srgbClr val="C8553D"/>
+                          </a:solidFill>
+                        </a:rPr>
+                        <a:t>−3.28</a:t>
+                      </a:r>
+                      <a:endParaRPr lang="en-US" sz="1100" dirty="0"/>
+                    </a:p>
+                  </a:txBody>
+                  <a:tcPr marL="45720" marR="45720" anchor="ctr">
+                    <a:lnL w="6350" cap="flat" cmpd="sng" algn="ctr">
+                      <a:solidFill>
+                        <a:srgbClr val="D5DBE5"/>
+                      </a:solidFill>
+                      <a:prstDash val="solid"/>
+                      <a:round/>
+                      <a:headEnd type="none" w="med" len="med"/>
+                      <a:tailEnd type="none" w="med" len="med"/>
+                    </a:lnL>
+                    <a:lnR w="6350" cap="flat" cmpd="sng" algn="ctr">
+                      <a:solidFill>
+                        <a:srgbClr val="D5DBE5"/>
+                      </a:solidFill>
+                      <a:prstDash val="solid"/>
+                      <a:round/>
+                      <a:headEnd type="none" w="med" len="med"/>
+                      <a:tailEnd type="none" w="med" len="med"/>
+                    </a:lnR>
+                    <a:lnT w="6350" cap="flat" cmpd="sng" algn="ctr">
+                      <a:solidFill>
+                        <a:srgbClr val="D5DBE5"/>
+                      </a:solidFill>
+                      <a:prstDash val="solid"/>
+                      <a:round/>
+                      <a:headEnd type="none" w="med" len="med"/>
+                      <a:tailEnd type="none" w="med" len="med"/>
+                    </a:lnT>
+                    <a:lnB w="6350" cap="flat" cmpd="sng" algn="ctr">
+                      <a:solidFill>
+                        <a:srgbClr val="D5DBE5"/>
+                      </a:solidFill>
+                      <a:prstDash val="solid"/>
+                      <a:round/>
+                      <a:headEnd type="none" w="med" len="med"/>
+                      <a:tailEnd type="none" w="med" len="med"/>
+                    </a:lnB>
+                  </a:tcPr>
+                </a:tc>
+                <a:extLst>
+                  <a:ext uri="{0D108BD9-81ED-4DB2-BD59-A6C34878D82A}">
+                    <a16:rowId xmlns:a16="http://schemas.microsoft.com/office/drawing/2014/main" val="10003"/>
+                  </a:ext>
+                </a:extLst>
+              </a:tr>
+              <a:tr h="384048">
+                <a:tc>
+                  <a:txBody>
+                    <a:bodyPr/>
+                    <a:lstStyle/>
+                    <a:p>
+                      <a:pPr marL="0" indent="0">
+                        <a:buNone/>
+                      </a:pPr>
+                      <a:r>
+                        <a:rPr lang="en-US" sz="1100" dirty="0">
+                          <a:solidFill>
+                            <a:srgbClr val="1B1F2A"/>
+                          </a:solidFill>
+                        </a:rPr>
+                        <a:t>+25 bps</a:t>
+                      </a:r>
+                      <a:endParaRPr lang="en-US" sz="1100" dirty="0"/>
+                    </a:p>
+                  </a:txBody>
+                  <a:tcPr marL="45720" marR="45720" anchor="ctr">
+                    <a:lnL w="6350" cap="flat" cmpd="sng" algn="ctr">
+                      <a:solidFill>
+                        <a:srgbClr val="D5DBE5"/>
+                      </a:solidFill>
+                      <a:prstDash val="solid"/>
+                      <a:round/>
+                      <a:headEnd type="none" w="med" len="med"/>
+                      <a:tailEnd type="none" w="med" len="med"/>
+                    </a:lnL>
+                    <a:lnR w="6350" cap="flat" cmpd="sng" algn="ctr">
+                      <a:solidFill>
+                        <a:srgbClr val="D5DBE5"/>
+                      </a:solidFill>
+                      <a:prstDash val="solid"/>
+                      <a:round/>
+                      <a:headEnd type="none" w="med" len="med"/>
+                      <a:tailEnd type="none" w="med" len="med"/>
+                    </a:lnR>
+                    <a:lnT w="6350" cap="flat" cmpd="sng" algn="ctr">
+                      <a:solidFill>
+                        <a:srgbClr val="D5DBE5"/>
+                      </a:solidFill>
+                      <a:prstDash val="solid"/>
+                      <a:round/>
+                      <a:headEnd type="none" w="med" len="med"/>
+                      <a:tailEnd type="none" w="med" len="med"/>
+                    </a:lnT>
+                    <a:lnB w="6350" cap="flat" cmpd="sng" algn="ctr">
+                      <a:solidFill>
+                        <a:srgbClr val="D5DBE5"/>
+                      </a:solidFill>
+                      <a:prstDash val="solid"/>
+                      <a:round/>
+                      <a:headEnd type="none" w="med" len="med"/>
+                      <a:tailEnd type="none" w="med" len="med"/>
+                    </a:lnB>
+                  </a:tcPr>
+                </a:tc>
+                <a:tc>
+                  <a:txBody>
+                    <a:bodyPr/>
+                    <a:lstStyle/>
+                    <a:p>
+                      <a:pPr marL="0" indent="0" algn="ctr">
+                        <a:buNone/>
+                      </a:pPr>
+                      <a:r>
+                        <a:rPr lang="en-US" sz="1100" dirty="0">
+                          <a:solidFill>
+                            <a:srgbClr val="1B1F2A"/>
+                          </a:solidFill>
+                        </a:rPr>
+                        <a:t>20.17</a:t>
+                      </a:r>
+                      <a:endParaRPr lang="en-US" sz="1100" dirty="0"/>
+                    </a:p>
+                  </a:txBody>
+                  <a:tcPr marL="45720" marR="45720" anchor="ctr">
+                    <a:lnL w="6350" cap="flat" cmpd="sng" algn="ctr">
+                      <a:solidFill>
+                        <a:srgbClr val="D5DBE5"/>
+                      </a:solidFill>
+                      <a:prstDash val="solid"/>
+                      <a:round/>
+                      <a:headEnd type="none" w="med" len="med"/>
+                      <a:tailEnd type="none" w="med" len="med"/>
+                    </a:lnL>
+                    <a:lnR w="6350" cap="flat" cmpd="sng" algn="ctr">
+                      <a:solidFill>
+                        <a:srgbClr val="D5DBE5"/>
+                      </a:solidFill>
+                      <a:prstDash val="solid"/>
+                      <a:round/>
+                      <a:headEnd type="none" w="med" len="med"/>
+                      <a:tailEnd type="none" w="med" len="med"/>
+                    </a:lnR>
+                    <a:lnT w="6350" cap="flat" cmpd="sng" algn="ctr">
+                      <a:solidFill>
+                        <a:srgbClr val="D5DBE5"/>
+                      </a:solidFill>
+                      <a:prstDash val="solid"/>
+                      <a:round/>
+                      <a:headEnd type="none" w="med" len="med"/>
+                      <a:tailEnd type="none" w="med" len="med"/>
+                    </a:lnT>
+                    <a:lnB w="6350" cap="flat" cmpd="sng" algn="ctr">
+                      <a:solidFill>
+                        <a:srgbClr val="D5DBE5"/>
+                      </a:solidFill>
+                      <a:prstDash val="solid"/>
+                      <a:round/>
+                      <a:headEnd type="none" w="med" len="med"/>
+                      <a:tailEnd type="none" w="med" len="med"/>
+                    </a:lnB>
+                  </a:tcPr>
+                </a:tc>
+                <a:tc>
+                  <a:txBody>
+                    <a:bodyPr/>
+                    <a:lstStyle/>
+                    <a:p>
+                      <a:pPr marL="0" indent="0" algn="ctr">
+                        <a:buNone/>
+                      </a:pPr>
+                      <a:r>
+                        <a:rPr lang="en-US" sz="1100" dirty="0">
+                          <a:solidFill>
+                            <a:srgbClr val="1B1F2A"/>
+                          </a:solidFill>
+                        </a:rPr>
+                        <a:t>× 1.11</a:t>
+                      </a:r>
+                      <a:endParaRPr lang="en-US" sz="1100" dirty="0"/>
+                    </a:p>
+                  </a:txBody>
+                  <a:tcPr marL="45720" marR="45720" anchor="ctr">
+                    <a:lnL w="6350" cap="flat" cmpd="sng" algn="ctr">
+                      <a:solidFill>
+                        <a:srgbClr val="D5DBE5"/>
+                      </a:solidFill>
+                      <a:prstDash val="solid"/>
+                      <a:round/>
+                      <a:headEnd type="none" w="med" len="med"/>
+                      <a:tailEnd type="none" w="med" len="med"/>
+                    </a:lnL>
+                    <a:lnR w="6350" cap="flat" cmpd="sng" algn="ctr">
+                      <a:solidFill>
+                        <a:srgbClr val="D5DBE5"/>
+                      </a:solidFill>
+                      <a:prstDash val="solid"/>
+                      <a:round/>
+                      <a:headEnd type="none" w="med" len="med"/>
+                      <a:tailEnd type="none" w="med" len="med"/>
+                    </a:lnR>
+                    <a:lnT w="6350" cap="flat" cmpd="sng" algn="ctr">
+                      <a:solidFill>
+                        <a:srgbClr val="D5DBE5"/>
+                      </a:solidFill>
+                      <a:prstDash val="solid"/>
+                      <a:round/>
+                      <a:headEnd type="none" w="med" len="med"/>
+                      <a:tailEnd type="none" w="med" len="med"/>
+                    </a:lnT>
+                    <a:lnB w="6350" cap="flat" cmpd="sng" algn="ctr">
+                      <a:solidFill>
+                        <a:srgbClr val="D5DBE5"/>
+                      </a:solidFill>
+                      <a:prstDash val="solid"/>
+                      <a:round/>
+                      <a:headEnd type="none" w="med" len="med"/>
+                      <a:tailEnd type="none" w="med" len="med"/>
+                    </a:lnB>
+                  </a:tcPr>
+                </a:tc>
+                <a:tc>
+                  <a:txBody>
+                    <a:bodyPr/>
+                    <a:lstStyle/>
+                    <a:p>
+                      <a:pPr marL="0" indent="0" algn="ctr">
+                        <a:buNone/>
+                      </a:pPr>
+                      <a:r>
+                        <a:rPr lang="en-US" sz="1100" dirty="0">
+                          <a:solidFill>
+                            <a:srgbClr val="1B1F2A"/>
+                          </a:solidFill>
+                        </a:rPr>
+                        <a:t>22.41</a:t>
+                      </a:r>
+                      <a:endParaRPr lang="en-US" sz="1100" dirty="0"/>
+                    </a:p>
+                  </a:txBody>
+                  <a:tcPr marL="45720" marR="45720" anchor="ctr">
+                    <a:lnL w="6350" cap="flat" cmpd="sng" algn="ctr">
+                      <a:solidFill>
+                        <a:srgbClr val="D5DBE5"/>
+                      </a:solidFill>
+                      <a:prstDash val="solid"/>
+                      <a:round/>
+                      <a:headEnd type="none" w="med" len="med"/>
+                      <a:tailEnd type="none" w="med" len="med"/>
+                    </a:lnL>
+                    <a:lnR w="6350" cap="flat" cmpd="sng" algn="ctr">
+                      <a:solidFill>
+                        <a:srgbClr val="D5DBE5"/>
+                      </a:solidFill>
+                      <a:prstDash val="solid"/>
+                      <a:round/>
+                      <a:headEnd type="none" w="med" len="med"/>
+                      <a:tailEnd type="none" w="med" len="med"/>
+                    </a:lnR>
+                    <a:lnT w="6350" cap="flat" cmpd="sng" algn="ctr">
+                      <a:solidFill>
+                        <a:srgbClr val="D5DBE5"/>
+                      </a:solidFill>
+                      <a:prstDash val="solid"/>
+                      <a:round/>
+                      <a:headEnd type="none" w="med" len="med"/>
+                      <a:tailEnd type="none" w="med" len="med"/>
+                    </a:lnT>
+                    <a:lnB w="6350" cap="flat" cmpd="sng" algn="ctr">
+                      <a:solidFill>
+                        <a:srgbClr val="D5DBE5"/>
+                      </a:solidFill>
+                      <a:prstDash val="solid"/>
+                      <a:round/>
+                      <a:headEnd type="none" w="med" len="med"/>
+                      <a:tailEnd type="none" w="med" len="med"/>
+                    </a:lnB>
+                  </a:tcPr>
+                </a:tc>
+                <a:tc>
+                  <a:txBody>
+                    <a:bodyPr/>
+                    <a:lstStyle/>
+                    <a:p>
+                      <a:pPr marL="0" indent="0" algn="ctr">
+                        <a:buNone/>
+                      </a:pPr>
+                      <a:r>
+                        <a:rPr lang="en-US" sz="1100" dirty="0">
+                          <a:solidFill>
+                            <a:srgbClr val="2C6E49"/>
+                          </a:solidFill>
+                        </a:rPr>
+                        <a:t>+2.24</a:t>
+                      </a:r>
+                      <a:endParaRPr lang="en-US" sz="1100" dirty="0"/>
+                    </a:p>
+                  </a:txBody>
+                  <a:tcPr marL="45720" marR="45720" anchor="ctr">
+                    <a:lnL w="6350" cap="flat" cmpd="sng" algn="ctr">
+                      <a:solidFill>
+                        <a:srgbClr val="D5DBE5"/>
+                      </a:solidFill>
+                      <a:prstDash val="solid"/>
+                      <a:round/>
+                      <a:headEnd type="none" w="med" len="med"/>
+                      <a:tailEnd type="none" w="med" len="med"/>
+                    </a:lnL>
+                    <a:lnR w="6350" cap="flat" cmpd="sng" algn="ctr">
+                      <a:solidFill>
+                        <a:srgbClr val="D5DBE5"/>
+                      </a:solidFill>
+                      <a:prstDash val="solid"/>
+                      <a:round/>
+                      <a:headEnd type="none" w="med" len="med"/>
+                      <a:tailEnd type="none" w="med" len="med"/>
+                    </a:lnR>
+                    <a:lnT w="6350" cap="flat" cmpd="sng" algn="ctr">
+                      <a:solidFill>
+                        <a:srgbClr val="D5DBE5"/>
+                      </a:solidFill>
+                      <a:prstDash val="solid"/>
+                      <a:round/>
+                      <a:headEnd type="none" w="med" len="med"/>
+                      <a:tailEnd type="none" w="med" len="med"/>
+                    </a:lnT>
+                    <a:lnB w="6350" cap="flat" cmpd="sng" algn="ctr">
+                      <a:solidFill>
+                        <a:srgbClr val="D5DBE5"/>
+                      </a:solidFill>
+                      <a:prstDash val="solid"/>
+                      <a:round/>
+                      <a:headEnd type="none" w="med" len="med"/>
+                      <a:tailEnd type="none" w="med" len="med"/>
+                    </a:lnB>
+                  </a:tcPr>
+                </a:tc>
+                <a:extLst>
+                  <a:ext uri="{0D108BD9-81ED-4DB2-BD59-A6C34878D82A}">
+                    <a16:rowId xmlns:a16="http://schemas.microsoft.com/office/drawing/2014/main" val="10004"/>
+                  </a:ext>
+                </a:extLst>
+              </a:tr>
+              <a:tr h="384048">
+                <a:tc>
+                  <a:txBody>
+                    <a:bodyPr/>
+                    <a:lstStyle/>
+                    <a:p>
+                      <a:pPr marL="0" indent="0">
+                        <a:buNone/>
+                      </a:pPr>
+                      <a:r>
+                        <a:rPr lang="en-US" sz="1100" dirty="0">
+                          <a:solidFill>
+                            <a:srgbClr val="1B1F2A"/>
+                          </a:solidFill>
+                        </a:rPr>
+                        <a:t>+50 bps</a:t>
+                      </a:r>
+                      <a:endParaRPr lang="en-US" sz="1100" dirty="0"/>
+                    </a:p>
+                  </a:txBody>
+                  <a:tcPr marL="45720" marR="45720" anchor="ctr">
+                    <a:lnL w="6350" cap="flat" cmpd="sng" algn="ctr">
+                      <a:solidFill>
+                        <a:srgbClr val="D5DBE5"/>
+                      </a:solidFill>
+                      <a:prstDash val="solid"/>
+                      <a:round/>
+                      <a:headEnd type="none" w="med" len="med"/>
+                      <a:tailEnd type="none" w="med" len="med"/>
+                    </a:lnL>
+                    <a:lnR w="6350" cap="flat" cmpd="sng" algn="ctr">
+                      <a:solidFill>
+                        <a:srgbClr val="D5DBE5"/>
+                      </a:solidFill>
+                      <a:prstDash val="solid"/>
+                      <a:round/>
+                      <a:headEnd type="none" w="med" len="med"/>
+                      <a:tailEnd type="none" w="med" len="med"/>
+                    </a:lnR>
+                    <a:lnT w="6350" cap="flat" cmpd="sng" algn="ctr">
+                      <a:solidFill>
+                        <a:srgbClr val="D5DBE5"/>
+                      </a:solidFill>
+                      <a:prstDash val="solid"/>
+                      <a:round/>
+                      <a:headEnd type="none" w="med" len="med"/>
+                      <a:tailEnd type="none" w="med" len="med"/>
+                    </a:lnT>
+                    <a:lnB w="6350" cap="flat" cmpd="sng" algn="ctr">
+                      <a:solidFill>
+                        <a:srgbClr val="D5DBE5"/>
+                      </a:solidFill>
+                      <a:prstDash val="solid"/>
+                      <a:round/>
+                      <a:headEnd type="none" w="med" len="med"/>
+                      <a:tailEnd type="none" w="med" len="med"/>
+                    </a:lnB>
+                  </a:tcPr>
+                </a:tc>
+                <a:tc>
+                  <a:txBody>
+                    <a:bodyPr/>
+                    <a:lstStyle/>
+                    <a:p>
+                      <a:pPr marL="0" indent="0" algn="ctr">
+                        <a:buNone/>
+                      </a:pPr>
+                      <a:r>
+                        <a:rPr lang="en-US" sz="1100" dirty="0">
+                          <a:solidFill>
+                            <a:srgbClr val="1B1F2A"/>
+                          </a:solidFill>
+                        </a:rPr>
+                        <a:t>5.97</a:t>
+                      </a:r>
+                      <a:endParaRPr lang="en-US" sz="1100" dirty="0"/>
+                    </a:p>
+                  </a:txBody>
+                  <a:tcPr marL="45720" marR="45720" anchor="ctr">
+                    <a:lnL w="6350" cap="flat" cmpd="sng" algn="ctr">
+                      <a:solidFill>
+                        <a:srgbClr val="D5DBE5"/>
+                      </a:solidFill>
+                      <a:prstDash val="solid"/>
+                      <a:round/>
+                      <a:headEnd type="none" w="med" len="med"/>
+                      <a:tailEnd type="none" w="med" len="med"/>
+                    </a:lnL>
+                    <a:lnR w="6350" cap="flat" cmpd="sng" algn="ctr">
+                      <a:solidFill>
+                        <a:srgbClr val="D5DBE5"/>
+                      </a:solidFill>
+                      <a:prstDash val="solid"/>
+                      <a:round/>
+                      <a:headEnd type="none" w="med" len="med"/>
+                      <a:tailEnd type="none" w="med" len="med"/>
+                    </a:lnR>
+                    <a:lnT w="6350" cap="flat" cmpd="sng" algn="ctr">
+                      <a:solidFill>
+                        <a:srgbClr val="D5DBE5"/>
+                      </a:solidFill>
+                      <a:prstDash val="solid"/>
+                      <a:round/>
+                      <a:headEnd type="none" w="med" len="med"/>
+                      <a:tailEnd type="none" w="med" len="med"/>
+                    </a:lnT>
+                    <a:lnB w="6350" cap="flat" cmpd="sng" algn="ctr">
+                      <a:solidFill>
+                        <a:srgbClr val="D5DBE5"/>
+                      </a:solidFill>
+                      <a:prstDash val="solid"/>
+                      <a:round/>
+                      <a:headEnd type="none" w="med" len="med"/>
+                      <a:tailEnd type="none" w="med" len="med"/>
+                    </a:lnB>
+                  </a:tcPr>
+                </a:tc>
+                <a:tc>
+                  <a:txBody>
+                    <a:bodyPr/>
+                    <a:lstStyle/>
+                    <a:p>
+                      <a:pPr marL="0" indent="0" algn="ctr">
+                        <a:buNone/>
+                      </a:pPr>
+                      <a:r>
+                        <a:rPr lang="en-US" sz="1100" dirty="0">
+                          <a:solidFill>
+                            <a:srgbClr val="1B1F2A"/>
+                          </a:solidFill>
+                        </a:rPr>
+                        <a:t>× 1.29</a:t>
+                      </a:r>
+                      <a:endParaRPr lang="en-US" sz="1100" dirty="0"/>
+                    </a:p>
+                  </a:txBody>
+                  <a:tcPr marL="45720" marR="45720" anchor="ctr">
+                    <a:lnL w="6350" cap="flat" cmpd="sng" algn="ctr">
+                      <a:solidFill>
+                        <a:srgbClr val="D5DBE5"/>
+                      </a:solidFill>
+                      <a:prstDash val="solid"/>
+                      <a:round/>
+                      <a:headEnd type="none" w="med" len="med"/>
+                      <a:tailEnd type="none" w="med" len="med"/>
+                    </a:lnL>
+                    <a:lnR w="6350" cap="flat" cmpd="sng" algn="ctr">
+                      <a:solidFill>
+                        <a:srgbClr val="D5DBE5"/>
+                      </a:solidFill>
+                      <a:prstDash val="solid"/>
+                      <a:round/>
+                      <a:headEnd type="none" w="med" len="med"/>
+                      <a:tailEnd type="none" w="med" len="med"/>
+                    </a:lnR>
+                    <a:lnT w="6350" cap="flat" cmpd="sng" algn="ctr">
+                      <a:solidFill>
+                        <a:srgbClr val="D5DBE5"/>
+                      </a:solidFill>
+                      <a:prstDash val="solid"/>
+                      <a:round/>
+                      <a:headEnd type="none" w="med" len="med"/>
+                      <a:tailEnd type="none" w="med" len="med"/>
+                    </a:lnT>
+                    <a:lnB w="6350" cap="flat" cmpd="sng" algn="ctr">
+                      <a:solidFill>
+                        <a:srgbClr val="D5DBE5"/>
+                      </a:solidFill>
+                      <a:prstDash val="solid"/>
+                      <a:round/>
+                      <a:headEnd type="none" w="med" len="med"/>
+                      <a:tailEnd type="none" w="med" len="med"/>
+                    </a:lnB>
+                  </a:tcPr>
+                </a:tc>
+                <a:tc>
+                  <a:txBody>
+                    <a:bodyPr/>
+                    <a:lstStyle/>
+                    <a:p>
+                      <a:pPr marL="0" indent="0" algn="ctr">
+                        <a:buNone/>
+                      </a:pPr>
+                      <a:r>
+                        <a:rPr lang="en-US" sz="1100" dirty="0">
+                          <a:solidFill>
+                            <a:srgbClr val="1B1F2A"/>
+                          </a:solidFill>
+                        </a:rPr>
+                        <a:t>7.73</a:t>
+                      </a:r>
+                      <a:endParaRPr lang="en-US" sz="1100" dirty="0"/>
+                    </a:p>
+                  </a:txBody>
+                  <a:tcPr marL="45720" marR="45720" anchor="ctr">
+                    <a:lnL w="6350" cap="flat" cmpd="sng" algn="ctr">
+                      <a:solidFill>
+                        <a:srgbClr val="D5DBE5"/>
+                      </a:solidFill>
+                      <a:prstDash val="solid"/>
+                      <a:round/>
+                      <a:headEnd type="none" w="med" len="med"/>
+                      <a:tailEnd type="none" w="med" len="med"/>
+                    </a:lnL>
+                    <a:lnR w="6350" cap="flat" cmpd="sng" algn="ctr">
+                      <a:solidFill>
+                        <a:srgbClr val="D5DBE5"/>
+                      </a:solidFill>
+                      <a:prstDash val="solid"/>
+                      <a:round/>
+                      <a:headEnd type="none" w="med" len="med"/>
+                      <a:tailEnd type="none" w="med" len="med"/>
+                    </a:lnR>
+                    <a:lnT w="6350" cap="flat" cmpd="sng" algn="ctr">
+                      <a:solidFill>
+                        <a:srgbClr val="D5DBE5"/>
+                      </a:solidFill>
+                      <a:prstDash val="solid"/>
+                      <a:round/>
+                      <a:headEnd type="none" w="med" len="med"/>
+                      <a:tailEnd type="none" w="med" len="med"/>
+                    </a:lnT>
+                    <a:lnB w="6350" cap="flat" cmpd="sng" algn="ctr">
+                      <a:solidFill>
+                        <a:srgbClr val="D5DBE5"/>
+                      </a:solidFill>
+                      <a:prstDash val="solid"/>
+                      <a:round/>
+                      <a:headEnd type="none" w="med" len="med"/>
+                      <a:tailEnd type="none" w="med" len="med"/>
+                    </a:lnB>
+                  </a:tcPr>
+                </a:tc>
+                <a:tc>
+                  <a:txBody>
+                    <a:bodyPr/>
+                    <a:lstStyle/>
+                    <a:p>
+                      <a:pPr marL="0" indent="0" algn="ctr">
+                        <a:buNone/>
+                      </a:pPr>
+                      <a:r>
+                        <a:rPr lang="en-US" sz="1100" dirty="0">
+                          <a:solidFill>
+                            <a:srgbClr val="2C6E49"/>
+                          </a:solidFill>
+                        </a:rPr>
+                        <a:t>+1.76</a:t>
+                      </a:r>
+                      <a:endParaRPr lang="en-US" sz="1100" dirty="0"/>
+                    </a:p>
+                  </a:txBody>
+                  <a:tcPr marL="45720" marR="45720" anchor="ctr">
+                    <a:lnL w="6350" cap="flat" cmpd="sng" algn="ctr">
+                      <a:solidFill>
+                        <a:srgbClr val="D5DBE5"/>
+                      </a:solidFill>
+                      <a:prstDash val="solid"/>
+                      <a:round/>
+                      <a:headEnd type="none" w="med" len="med"/>
+                      <a:tailEnd type="none" w="med" len="med"/>
+                    </a:lnL>
+                    <a:lnR w="6350" cap="flat" cmpd="sng" algn="ctr">
+                      <a:solidFill>
+                        <a:srgbClr val="D5DBE5"/>
+                      </a:solidFill>
+                      <a:prstDash val="solid"/>
+                      <a:round/>
+                      <a:headEnd type="none" w="med" len="med"/>
+                      <a:tailEnd type="none" w="med" len="med"/>
+                    </a:lnR>
+                    <a:lnT w="6350" cap="flat" cmpd="sng" algn="ctr">
+                      <a:solidFill>
+                        <a:srgbClr val="D5DBE5"/>
+                      </a:solidFill>
+                      <a:prstDash val="solid"/>
+                      <a:round/>
+                      <a:headEnd type="none" w="med" len="med"/>
+                      <a:tailEnd type="none" w="med" len="med"/>
+                    </a:lnT>
+                    <a:lnB w="6350" cap="flat" cmpd="sng" algn="ctr">
+                      <a:solidFill>
+                        <a:srgbClr val="D5DBE5"/>
+                      </a:solidFill>
+                      <a:prstDash val="solid"/>
+                      <a:round/>
+                      <a:headEnd type="none" w="med" len="med"/>
+                      <a:tailEnd type="none" w="med" len="med"/>
+                    </a:lnB>
+                  </a:tcPr>
+                </a:tc>
+                <a:extLst>
+                  <a:ext uri="{0D108BD9-81ED-4DB2-BD59-A6C34878D82A}">
+                    <a16:rowId xmlns:a16="http://schemas.microsoft.com/office/drawing/2014/main" val="10005"/>
+                  </a:ext>
+                </a:extLst>
+              </a:tr>
+              <a:tr h="384048">
+                <a:tc>
+                  <a:txBody>
+                    <a:bodyPr/>
+                    <a:lstStyle/>
+                    <a:p>
+                      <a:pPr marL="0" indent="0">
+                        <a:buNone/>
+                      </a:pPr>
+                      <a:r>
+                        <a:rPr lang="en-US" sz="1100" b="1" dirty="0">
+                          <a:solidFill>
+                            <a:srgbClr val="1B1F2A"/>
+                          </a:solidFill>
+                        </a:rPr>
+                        <a:t>Hold-or-cut side</a:t>
+                      </a:r>
+                      <a:endParaRPr lang="en-US" sz="1100" dirty="0"/>
+                    </a:p>
+                  </a:txBody>
+                  <a:tcPr marL="45720" marR="45720" anchor="ctr">
+                    <a:lnL w="6350" cap="flat" cmpd="sng" algn="ctr">
+                      <a:solidFill>
+                        <a:srgbClr val="D5DBE5"/>
+                      </a:solidFill>
+                      <a:prstDash val="solid"/>
+                      <a:round/>
+                      <a:headEnd type="none" w="med" len="med"/>
+                      <a:tailEnd type="none" w="med" len="med"/>
+                    </a:lnL>
+                    <a:lnR w="6350" cap="flat" cmpd="sng" algn="ctr">
+                      <a:solidFill>
+                        <a:srgbClr val="D5DBE5"/>
+                      </a:solidFill>
+                      <a:prstDash val="solid"/>
+                      <a:round/>
+                      <a:headEnd type="none" w="med" len="med"/>
+                      <a:tailEnd type="none" w="med" len="med"/>
+                    </a:lnR>
+                    <a:lnT w="6350" cap="flat" cmpd="sng" algn="ctr">
+                      <a:solidFill>
+                        <a:srgbClr val="D5DBE5"/>
+                      </a:solidFill>
+                      <a:prstDash val="solid"/>
+                      <a:round/>
+                      <a:headEnd type="none" w="med" len="med"/>
+                      <a:tailEnd type="none" w="med" len="med"/>
+                    </a:lnT>
+                    <a:lnB w="6350" cap="flat" cmpd="sng" algn="ctr">
+                      <a:solidFill>
+                        <a:srgbClr val="D5DBE5"/>
+                      </a:solidFill>
+                      <a:prstDash val="solid"/>
+                      <a:round/>
+                      <a:headEnd type="none" w="med" len="med"/>
+                      <a:tailEnd type="none" w="med" len="med"/>
+                    </a:lnB>
+                  </a:tcPr>
+                </a:tc>
+                <a:tc>
+                  <a:txBody>
+                    <a:bodyPr/>
+                    <a:lstStyle/>
+                    <a:p>
+                      <a:pPr marL="0" indent="0" algn="ctr">
+                        <a:buNone/>
+                      </a:pPr>
+                      <a:r>
+                        <a:rPr lang="en-US" sz="1100" b="1" dirty="0">
+                          <a:solidFill>
+                            <a:srgbClr val="1B1F2A"/>
+                          </a:solidFill>
+                        </a:rPr>
+                        <a:t>73.86</a:t>
+                      </a:r>
+                      <a:endParaRPr lang="en-US" sz="1100" dirty="0"/>
+                    </a:p>
+                  </a:txBody>
+                  <a:tcPr marL="45720" marR="45720" anchor="ctr">
+                    <a:lnL w="6350" cap="flat" cmpd="sng" algn="ctr">
+                      <a:solidFill>
+                        <a:srgbClr val="D5DBE5"/>
+                      </a:solidFill>
+                      <a:prstDash val="solid"/>
+                      <a:round/>
+                      <a:headEnd type="none" w="med" len="med"/>
+                      <a:tailEnd type="none" w="med" len="med"/>
+                    </a:lnL>
+                    <a:lnR w="6350" cap="flat" cmpd="sng" algn="ctr">
+                      <a:solidFill>
+                        <a:srgbClr val="D5DBE5"/>
+                      </a:solidFill>
+                      <a:prstDash val="solid"/>
+                      <a:round/>
+                      <a:headEnd type="none" w="med" len="med"/>
+                      <a:tailEnd type="none" w="med" len="med"/>
+                    </a:lnR>
+                    <a:lnT w="6350" cap="flat" cmpd="sng" algn="ctr">
+                      <a:solidFill>
+                        <a:srgbClr val="D5DBE5"/>
+                      </a:solidFill>
+                      <a:prstDash val="solid"/>
+                      <a:round/>
+                      <a:headEnd type="none" w="med" len="med"/>
+                      <a:tailEnd type="none" w="med" len="med"/>
+                    </a:lnT>
+                    <a:lnB w="6350" cap="flat" cmpd="sng" algn="ctr">
+                      <a:solidFill>
+                        <a:srgbClr val="D5DBE5"/>
+                      </a:solidFill>
+                      <a:prstDash val="solid"/>
+                      <a:round/>
+                      <a:headEnd type="none" w="med" len="med"/>
+                      <a:tailEnd type="none" w="med" len="med"/>
+                    </a:lnB>
+                  </a:tcPr>
+                </a:tc>
+                <a:tc>
+                  <a:txBody>
+                    <a:bodyPr/>
+                    <a:lstStyle/>
+                    <a:p>
+                      <a:pPr marL="0" indent="0" algn="ctr">
+                        <a:buNone/>
+                      </a:pPr>
+                      <a:endParaRPr lang="en-US" sz="1100" dirty="0"/>
+                    </a:p>
+                  </a:txBody>
+                  <a:tcPr marL="45720" marR="45720" anchor="ctr">
+                    <a:lnL w="6350" cap="flat" cmpd="sng" algn="ctr">
+                      <a:solidFill>
+                        <a:srgbClr val="D5DBE5"/>
+                      </a:solidFill>
+                      <a:prstDash val="solid"/>
+                      <a:round/>
+                      <a:headEnd type="none" w="med" len="med"/>
+                      <a:tailEnd type="none" w="med" len="med"/>
+                    </a:lnL>
+                    <a:lnR w="6350" cap="flat" cmpd="sng" algn="ctr">
+                      <a:solidFill>
+                        <a:srgbClr val="D5DBE5"/>
+                      </a:solidFill>
+                      <a:prstDash val="solid"/>
+                      <a:round/>
+                      <a:headEnd type="none" w="med" len="med"/>
+                      <a:tailEnd type="none" w="med" len="med"/>
+                    </a:lnR>
+                    <a:lnT w="6350" cap="flat" cmpd="sng" algn="ctr">
+                      <a:solidFill>
+                        <a:srgbClr val="D5DBE5"/>
+                      </a:solidFill>
+                      <a:prstDash val="solid"/>
+                      <a:round/>
+                      <a:headEnd type="none" w="med" len="med"/>
+                      <a:tailEnd type="none" w="med" len="med"/>
+                    </a:lnT>
+                    <a:lnB w="6350" cap="flat" cmpd="sng" algn="ctr">
+                      <a:solidFill>
+                        <a:srgbClr val="D5DBE5"/>
+                      </a:solidFill>
+                      <a:prstDash val="solid"/>
+                      <a:round/>
+                      <a:headEnd type="none" w="med" len="med"/>
+                      <a:tailEnd type="none" w="med" len="med"/>
+                    </a:lnB>
+                  </a:tcPr>
+                </a:tc>
+                <a:tc>
+                  <a:txBody>
+                    <a:bodyPr/>
+                    <a:lstStyle/>
+                    <a:p>
+                      <a:pPr marL="0" indent="0" algn="ctr">
+                        <a:buNone/>
+                      </a:pPr>
+                      <a:r>
+                        <a:rPr lang="en-US" sz="1100" b="1" dirty="0">
+                          <a:solidFill>
+                            <a:srgbClr val="1B1F2A"/>
+                          </a:solidFill>
+                        </a:rPr>
+                        <a:t>69.86</a:t>
+                      </a:r>
+                      <a:endParaRPr lang="en-US" sz="1100" dirty="0"/>
+                    </a:p>
+                  </a:txBody>
+                  <a:tcPr marL="45720" marR="45720" anchor="ctr">
+                    <a:lnL w="6350" cap="flat" cmpd="sng" algn="ctr">
+                      <a:solidFill>
+                        <a:srgbClr val="D5DBE5"/>
+                      </a:solidFill>
+                      <a:prstDash val="solid"/>
+                      <a:round/>
+                      <a:headEnd type="none" w="med" len="med"/>
+                      <a:tailEnd type="none" w="med" len="med"/>
+                    </a:lnL>
+                    <a:lnR w="6350" cap="flat" cmpd="sng" algn="ctr">
+                      <a:solidFill>
+                        <a:srgbClr val="D5DBE5"/>
+                      </a:solidFill>
+                      <a:prstDash val="solid"/>
+                      <a:round/>
+                      <a:headEnd type="none" w="med" len="med"/>
+                      <a:tailEnd type="none" w="med" len="med"/>
+                    </a:lnR>
+                    <a:lnT w="6350" cap="flat" cmpd="sng" algn="ctr">
+                      <a:solidFill>
+                        <a:srgbClr val="D5DBE5"/>
+                      </a:solidFill>
+                      <a:prstDash val="solid"/>
+                      <a:round/>
+                      <a:headEnd type="none" w="med" len="med"/>
+                      <a:tailEnd type="none" w="med" len="med"/>
+                    </a:lnT>
+                    <a:lnB w="6350" cap="flat" cmpd="sng" algn="ctr">
+                      <a:solidFill>
+                        <a:srgbClr val="D5DBE5"/>
+                      </a:solidFill>
+                      <a:prstDash val="solid"/>
+                      <a:round/>
+                      <a:headEnd type="none" w="med" len="med"/>
+                      <a:tailEnd type="none" w="med" len="med"/>
+                    </a:lnB>
+                  </a:tcPr>
+                </a:tc>
+                <a:tc>
+                  <a:txBody>
+                    <a:bodyPr/>
+                    <a:lstStyle/>
+                    <a:p>
+                      <a:pPr marL="0" indent="0" algn="ctr">
+                        <a:buNone/>
+                      </a:pPr>
+                      <a:r>
+                        <a:rPr lang="en-US" sz="1100" b="1" dirty="0">
+                          <a:solidFill>
+                            <a:srgbClr val="C8553D"/>
+                          </a:solidFill>
+                        </a:rPr>
+                        <a:t>−4.00</a:t>
+                      </a:r>
+                      <a:endParaRPr lang="en-US" sz="1100" dirty="0"/>
+                    </a:p>
+                  </a:txBody>
+                  <a:tcPr marL="45720" marR="45720" anchor="ctr">
+                    <a:lnL w="6350" cap="flat" cmpd="sng" algn="ctr">
+                      <a:solidFill>
+                        <a:srgbClr val="D5DBE5"/>
+                      </a:solidFill>
+                      <a:prstDash val="solid"/>
+                      <a:round/>
+                      <a:headEnd type="none" w="med" len="med"/>
+                      <a:tailEnd type="none" w="med" len="med"/>
+                    </a:lnL>
+                    <a:lnR w="6350" cap="flat" cmpd="sng" algn="ctr">
+                      <a:solidFill>
+                        <a:srgbClr val="D5DBE5"/>
+                      </a:solidFill>
+                      <a:prstDash val="solid"/>
+                      <a:round/>
+                      <a:headEnd type="none" w="med" len="med"/>
+                      <a:tailEnd type="none" w="med" len="med"/>
+                    </a:lnR>
+                    <a:lnT w="6350" cap="flat" cmpd="sng" algn="ctr">
+                      <a:solidFill>
+                        <a:srgbClr val="D5DBE5"/>
+                      </a:solidFill>
+                      <a:prstDash val="solid"/>
+                      <a:round/>
+                      <a:headEnd type="none" w="med" len="med"/>
+                      <a:tailEnd type="none" w="med" len="med"/>
+                    </a:lnT>
+                    <a:lnB w="6350" cap="flat" cmpd="sng" algn="ctr">
+                      <a:solidFill>
+                        <a:srgbClr val="D5DBE5"/>
+                      </a:solidFill>
+                      <a:prstDash val="solid"/>
+                      <a:round/>
+                      <a:headEnd type="none" w="med" len="med"/>
+                      <a:tailEnd type="none" w="med" len="med"/>
+                    </a:lnB>
+                  </a:tcPr>
+                </a:tc>
+                <a:extLst>
+                  <a:ext uri="{0D108BD9-81ED-4DB2-BD59-A6C34878D82A}">
+                    <a16:rowId xmlns:a16="http://schemas.microsoft.com/office/drawing/2014/main" val="10006"/>
+                  </a:ext>
+                </a:extLst>
+              </a:tr>
+              <a:tr h="384048">
+                <a:tc>
+                  <a:txBody>
+                    <a:bodyPr/>
+                    <a:lstStyle/>
+                    <a:p>
+                      <a:pPr marL="0" indent="0">
+                        <a:buNone/>
+                      </a:pPr>
+                      <a:r>
+                        <a:rPr lang="en-US" sz="1100" b="1" dirty="0">
+                          <a:solidFill>
+                            <a:srgbClr val="1B1F2A"/>
+                          </a:solidFill>
+                        </a:rPr>
+                        <a:t>Hike side</a:t>
+                      </a:r>
+                      <a:endParaRPr lang="en-US" sz="1100" dirty="0"/>
+                    </a:p>
+                  </a:txBody>
+                  <a:tcPr marL="45720" marR="45720" anchor="ctr">
+                    <a:lnL w="6350" cap="flat" cmpd="sng" algn="ctr">
+                      <a:solidFill>
+                        <a:srgbClr val="D5DBE5"/>
+                      </a:solidFill>
+                      <a:prstDash val="solid"/>
+                      <a:round/>
+                      <a:headEnd type="none" w="med" len="med"/>
+                      <a:tailEnd type="none" w="med" len="med"/>
+                    </a:lnL>
+                    <a:lnR w="6350" cap="flat" cmpd="sng" algn="ctr">
+                      <a:solidFill>
+                        <a:srgbClr val="D5DBE5"/>
+                      </a:solidFill>
+                      <a:prstDash val="solid"/>
+                      <a:round/>
+                      <a:headEnd type="none" w="med" len="med"/>
+                      <a:tailEnd type="none" w="med" len="med"/>
+                    </a:lnR>
+                    <a:lnT w="6350" cap="flat" cmpd="sng" algn="ctr">
+                      <a:solidFill>
+                        <a:srgbClr val="D5DBE5"/>
+                      </a:solidFill>
+                      <a:prstDash val="solid"/>
+                      <a:round/>
+                      <a:headEnd type="none" w="med" len="med"/>
+                      <a:tailEnd type="none" w="med" len="med"/>
+                    </a:lnT>
+                    <a:lnB w="6350" cap="flat" cmpd="sng" algn="ctr">
+                      <a:solidFill>
+                        <a:srgbClr val="D5DBE5"/>
+                      </a:solidFill>
+                      <a:prstDash val="solid"/>
+                      <a:round/>
+                      <a:headEnd type="none" w="med" len="med"/>
+                      <a:tailEnd type="none" w="med" len="med"/>
+                    </a:lnB>
+                  </a:tcPr>
+                </a:tc>
+                <a:tc>
+                  <a:txBody>
+                    <a:bodyPr/>
+                    <a:lstStyle/>
+                    <a:p>
+                      <a:pPr marL="0" indent="0" algn="ctr">
+                        <a:buNone/>
+                      </a:pPr>
+                      <a:r>
+                        <a:rPr lang="en-US" sz="1100" b="1" dirty="0">
+                          <a:solidFill>
+                            <a:srgbClr val="1B1F2A"/>
+                          </a:solidFill>
+                        </a:rPr>
+                        <a:t>26.14</a:t>
+                      </a:r>
+                      <a:endParaRPr lang="en-US" sz="1100" dirty="0"/>
+                    </a:p>
+                  </a:txBody>
+                  <a:tcPr marL="45720" marR="45720" anchor="ctr">
+                    <a:lnL w="6350" cap="flat" cmpd="sng" algn="ctr">
+                      <a:solidFill>
+                        <a:srgbClr val="D5DBE5"/>
+                      </a:solidFill>
+                      <a:prstDash val="solid"/>
+                      <a:round/>
+                      <a:headEnd type="none" w="med" len="med"/>
+                      <a:tailEnd type="none" w="med" len="med"/>
+                    </a:lnL>
+                    <a:lnR w="6350" cap="flat" cmpd="sng" algn="ctr">
+                      <a:solidFill>
+                        <a:srgbClr val="D5DBE5"/>
+                      </a:solidFill>
+                      <a:prstDash val="solid"/>
+                      <a:round/>
+                      <a:headEnd type="none" w="med" len="med"/>
+                      <a:tailEnd type="none" w="med" len="med"/>
+                    </a:lnR>
+                    <a:lnT w="6350" cap="flat" cmpd="sng" algn="ctr">
+                      <a:solidFill>
+                        <a:srgbClr val="D5DBE5"/>
+                      </a:solidFill>
+                      <a:prstDash val="solid"/>
+                      <a:round/>
+                      <a:headEnd type="none" w="med" len="med"/>
+                      <a:tailEnd type="none" w="med" len="med"/>
+                    </a:lnT>
+                    <a:lnB w="6350" cap="flat" cmpd="sng" algn="ctr">
+                      <a:solidFill>
+                        <a:srgbClr val="D5DBE5"/>
+                      </a:solidFill>
+                      <a:prstDash val="solid"/>
+                      <a:round/>
+                      <a:headEnd type="none" w="med" len="med"/>
+                      <a:tailEnd type="none" w="med" len="med"/>
+                    </a:lnB>
+                  </a:tcPr>
+                </a:tc>
+                <a:tc>
+                  <a:txBody>
+                    <a:bodyPr/>
+                    <a:lstStyle/>
+                    <a:p>
+                      <a:pPr marL="0" indent="0" algn="ctr">
+                        <a:buNone/>
+                      </a:pPr>
+                      <a:endParaRPr lang="en-US" sz="1100" dirty="0"/>
+                    </a:p>
+                  </a:txBody>
+                  <a:tcPr marL="45720" marR="45720" anchor="ctr">
+                    <a:lnL w="6350" cap="flat" cmpd="sng" algn="ctr">
+                      <a:solidFill>
+                        <a:srgbClr val="D5DBE5"/>
+                      </a:solidFill>
+                      <a:prstDash val="solid"/>
+                      <a:round/>
+                      <a:headEnd type="none" w="med" len="med"/>
+                      <a:tailEnd type="none" w="med" len="med"/>
+                    </a:lnL>
+                    <a:lnR w="6350" cap="flat" cmpd="sng" algn="ctr">
+                      <a:solidFill>
+                        <a:srgbClr val="D5DBE5"/>
+                      </a:solidFill>
+                      <a:prstDash val="solid"/>
+                      <a:round/>
+                      <a:headEnd type="none" w="med" len="med"/>
+                      <a:tailEnd type="none" w="med" len="med"/>
+                    </a:lnR>
+                    <a:lnT w="6350" cap="flat" cmpd="sng" algn="ctr">
+                      <a:solidFill>
+                        <a:srgbClr val="D5DBE5"/>
+                      </a:solidFill>
+                      <a:prstDash val="solid"/>
+                      <a:round/>
+                      <a:headEnd type="none" w="med" len="med"/>
+                      <a:tailEnd type="none" w="med" len="med"/>
+                    </a:lnT>
+                    <a:lnB w="6350" cap="flat" cmpd="sng" algn="ctr">
+                      <a:solidFill>
+                        <a:srgbClr val="D5DBE5"/>
+                      </a:solidFill>
+                      <a:prstDash val="solid"/>
+                      <a:round/>
+                      <a:headEnd type="none" w="med" len="med"/>
+                      <a:tailEnd type="none" w="med" len="med"/>
+                    </a:lnB>
+                  </a:tcPr>
+                </a:tc>
+                <a:tc>
+                  <a:txBody>
+                    <a:bodyPr/>
+                    <a:lstStyle/>
+                    <a:p>
+                      <a:pPr marL="0" indent="0" algn="ctr">
+                        <a:buNone/>
+                      </a:pPr>
+                      <a:r>
+                        <a:rPr lang="en-US" sz="1100" b="1" dirty="0">
+                          <a:solidFill>
+                            <a:srgbClr val="1B1F2A"/>
+                          </a:solidFill>
+                        </a:rPr>
+                        <a:t>30.14</a:t>
+                      </a:r>
+                      <a:endParaRPr lang="en-US" sz="1100" dirty="0"/>
+                    </a:p>
+                  </a:txBody>
+                  <a:tcPr marL="45720" marR="45720" anchor="ctr">
+                    <a:lnL w="6350" cap="flat" cmpd="sng" algn="ctr">
+                      <a:solidFill>
+                        <a:srgbClr val="D5DBE5"/>
+                      </a:solidFill>
+                      <a:prstDash val="solid"/>
+                      <a:round/>
+                      <a:headEnd type="none" w="med" len="med"/>
+                      <a:tailEnd type="none" w="med" len="med"/>
+                    </a:lnL>
+                    <a:lnR w="6350" cap="flat" cmpd="sng" algn="ctr">
+                      <a:solidFill>
+                        <a:srgbClr val="D5DBE5"/>
+                      </a:solidFill>
+                      <a:prstDash val="solid"/>
+                      <a:round/>
+                      <a:headEnd type="none" w="med" len="med"/>
+                      <a:tailEnd type="none" w="med" len="med"/>
+                    </a:lnR>
+                    <a:lnT w="6350" cap="flat" cmpd="sng" algn="ctr">
+                      <a:solidFill>
+                        <a:srgbClr val="D5DBE5"/>
+                      </a:solidFill>
+                      <a:prstDash val="solid"/>
+                      <a:round/>
+                      <a:headEnd type="none" w="med" len="med"/>
+                      <a:tailEnd type="none" w="med" len="med"/>
+                    </a:lnT>
+                    <a:lnB w="6350" cap="flat" cmpd="sng" algn="ctr">
+                      <a:solidFill>
+                        <a:srgbClr val="D5DBE5"/>
+                      </a:solidFill>
+                      <a:prstDash val="solid"/>
+                      <a:round/>
+                      <a:headEnd type="none" w="med" len="med"/>
+                      <a:tailEnd type="none" w="med" len="med"/>
+                    </a:lnB>
+                  </a:tcPr>
+                </a:tc>
+                <a:tc>
+                  <a:txBody>
+                    <a:bodyPr/>
+                    <a:lstStyle/>
+                    <a:p>
+                      <a:pPr marL="0" indent="0" algn="ctr">
+                        <a:buNone/>
+                      </a:pPr>
+                      <a:r>
+                        <a:rPr lang="en-US" sz="1100" b="1" dirty="0">
+                          <a:solidFill>
+                            <a:srgbClr val="2C6E49"/>
+                          </a:solidFill>
+                        </a:rPr>
+                        <a:t>+4.00</a:t>
+                      </a:r>
+                      <a:endParaRPr lang="en-US" sz="1100" dirty="0"/>
+                    </a:p>
+                  </a:txBody>
+                  <a:tcPr marL="45720" marR="45720" anchor="ctr">
+                    <a:lnL w="6350" cap="flat" cmpd="sng" algn="ctr">
+                      <a:solidFill>
+                        <a:srgbClr val="D5DBE5"/>
+                      </a:solidFill>
+                      <a:prstDash val="solid"/>
+                      <a:round/>
+                      <a:headEnd type="none" w="med" len="med"/>
+                      <a:tailEnd type="none" w="med" len="med"/>
+                    </a:lnL>
+                    <a:lnR w="6350" cap="flat" cmpd="sng" algn="ctr">
+                      <a:solidFill>
+                        <a:srgbClr val="D5DBE5"/>
+                      </a:solidFill>
+                      <a:prstDash val="solid"/>
+                      <a:round/>
+                      <a:headEnd type="none" w="med" len="med"/>
+                      <a:tailEnd type="none" w="med" len="med"/>
+                    </a:lnR>
+                    <a:lnT w="6350" cap="flat" cmpd="sng" algn="ctr">
+                      <a:solidFill>
+                        <a:srgbClr val="D5DBE5"/>
+                      </a:solidFill>
+                      <a:prstDash val="solid"/>
+                      <a:round/>
+                      <a:headEnd type="none" w="med" len="med"/>
+                      <a:tailEnd type="none" w="med" len="med"/>
+                    </a:lnT>
+                    <a:lnB w="6350" cap="flat" cmpd="sng" algn="ctr">
+                      <a:solidFill>
+                        <a:srgbClr val="D5DBE5"/>
+                      </a:solidFill>
+                      <a:prstDash val="solid"/>
+                      <a:round/>
+                      <a:headEnd type="none" w="med" len="med"/>
+                      <a:tailEnd type="none" w="med" len="med"/>
+                    </a:lnB>
+                  </a:tcPr>
+                </a:tc>
+                <a:extLst>
+                  <a:ext uri="{0D108BD9-81ED-4DB2-BD59-A6C34878D82A}">
+                    <a16:rowId xmlns:a16="http://schemas.microsoft.com/office/drawing/2014/main" val="10007"/>
+                  </a:ext>
+                </a:extLst>
+              </a:tr>
+            </a:tbl>
+          </a:graphicData>
+        </a:graphic>
+      </p:graphicFrame>
+      <p:sp>
+        <p:nvSpPr>
+          <p:cNvPr id="13" name="Text 9"/>
+          <p:cNvSpPr txBox="1"/>
+          <p:nvPr/>
+        </p:nvSpPr>
+        <p:spPr>
+          <a:xfrm>
+            <a:off x="6172200" y="4983480"/>
+            <a:ext cx="5468112" cy="1097280"/>
+          </a:xfrm>
+          <a:prstGeom prst="rect">
+            <a:avLst/>
+          </a:prstGeom>
+          <a:noFill/>
+          <a:ln/>
+        </p:spPr>
+        <p:txBody>
+          <a:bodyPr wrap="square" lIns="0" tIns="0" rIns="0" bIns="0" rtlCol="0" anchor="t"/>
+          <a:lstStyle/>
+          <a:p>
+            <a:pPr marL="0" indent="0">
+              <a:buNone/>
+            </a:pPr>
+            <a:r>
+              <a:rPr lang="en-US" sz="1000" dirty="0">
+                <a:solidFill>
+                  <a:schemeClr val="accent4"/>
+                </a:solidFill>
+              </a:rPr>
+              <a:t>Multiplier = e^(0.153 × bucket number) ÷ 1.0486, the rescaling total. Exactly 4.00 points crossed; the after column is the machine forecast recorded as entry #18. The cruder alternative, taking all 4 points from no change and giving them to +25, is easier to say and would be amendment #9 if preferred.</a:t>
+            </a:r>
+            <a:endParaRPr lang="en-US" sz="1000" dirty="0"/>
+          </a:p>
+        </p:txBody>
+      </p:sp>
+      <p:sp>
+        <p:nvSpPr>
+          <p:cNvPr id="25" name="Slide Number Placeholder 0"/>
+          <p:cNvSpPr>
+            <a:spLocks noGrp="1"/>
+          </p:cNvSpPr>
+          <p:nvPr>
+            <p:ph type="sldNum" sz="quarter" idx="4294967295"/>
+          </p:nvPr>
+        </p:nvSpPr>
+        <p:spPr>
+          <a:xfrm>
+            <a:off x="11091672" y="6400800"/>
+            <a:ext cx="548640" cy="274320"/>
+          </a:xfrm>
+          <a:prstGeom prst="rect">
+            <a:avLst/>
+          </a:prstGeom>
+          <a:extLst>
+            <a:ext uri="{C572A759-6A51-4108-AA02-DFA0A04FC94B}">
+              <ma14:wrappingTextBoxFlag xmlns="" xmlns:ma14="http://schemas.microsoft.com/office/mac/drawingml/2011/main" val="0"/>
+            </a:ext>
+          </a:extLst>
+        </p:spPr>
+        <p:txBody>
+          <a:bodyPr/>
+          <a:lstStyle>
+            <a:lvl1pPr>
+              <a:defRPr sz="1000">
+                <a:solidFill>
+                  <a:srgbClr val="6B7280"/>
+                </a:solidFill>
+              </a:defRPr>
+            </a:lvl1pPr>
+          </a:lstStyle>
+          <a:p>
+            <a:pPr algn="r"/>
+            <a:fld id="{F7021451-1387-4CA6-816F-3879F97B5CBC}" type="slidenum">
+              <a:rPr lang="en-US" b="0"/>
+              <a:t>21</a:t>
+            </a:fld>
+            <a:endParaRPr lang="en-US"/>
+          </a:p>
+        </p:txBody>
+      </p:sp>
+    </p:spTree>
+    <p:extLst>
+      <p:ext uri="{BB962C8B-B14F-4D97-AF65-F5344CB8AC3E}">
+        <p14:creationId xmlns:p14="http://schemas.microsoft.com/office/powerpoint/2010/main" val="2272862402"/>
+      </p:ext>
+    </p:extLst>
+  </p:cSld>
+  <p:clrMapOvr>
+    <a:masterClrMapping/>
+  </p:clrMapOvr>
+</p:sld>
+</file>
+
+<file path=ppt/slides/slide22.xml><?xml version="1.0" encoding="utf-8"?>
+<p:sld xmlns:a="http://schemas.openxmlformats.org/drawingml/2006/main" xmlns:r="http://schemas.openxmlformats.org/officeDocument/2006/relationships" xmlns:p="http://schemas.openxmlformats.org/presentationml/2006/main">
+  <p:cSld>
+    <p:spTree>
+      <p:nvGrpSpPr>
+        <p:cNvPr id="1" name=""/>
+        <p:cNvGrpSpPr/>
+        <p:nvPr/>
+      </p:nvGrpSpPr>
+      <p:grpSpPr>
+        <a:xfrm>
+          <a:off x="0" y="0"/>
+          <a:ext cx="0" cy="0"/>
+          <a:chOff x="0" y="0"/>
+          <a:chExt cx="0" cy="0"/>
+        </a:xfrm>
+      </p:grpSpPr>
+      <p:sp>
+        <p:nvSpPr>
+          <p:cNvPr id="2" name="Text 0"/>
+          <p:cNvSpPr>
+            <a:spLocks noGrp="1"/>
+          </p:cNvSpPr>
+          <p:nvPr>
+            <p:ph type="title" idx="100" hasCustomPrompt="1"/>
+          </p:nvPr>
+        </p:nvSpPr>
+        <p:spPr>
+          <a:xfrm>
+            <a:off x="548640" y="411480"/>
+            <a:ext cx="11091672" cy="822960"/>
+          </a:xfrm>
+          <a:prstGeom prst="rect">
+            <a:avLst/>
+          </a:prstGeom>
+          <a:noFill/>
+          <a:ln/>
+        </p:spPr>
+        <p:txBody>
+          <a:bodyPr wrap="square" lIns="0" tIns="0" rIns="0" bIns="0" rtlCol="0" anchor="ctr"/>
+          <a:lstStyle/>
+          <a:p>
+            <a:pPr marL="0" indent="0" algn="l">
+              <a:buNone/>
+            </a:pPr>
+            <a:r>
+              <a:rPr lang="en-US" sz="3200" b="1" dirty="0">
+                <a:solidFill>
+                  <a:schemeClr val="tx2"/>
+                </a:solidFill>
+              </a:rPr>
+              <a:t>Appendix: the ordered probit, and why it sits at weight 0</a:t>
+            </a:r>
+            <a:endParaRPr lang="en-US" sz="3200" dirty="0"/>
+          </a:p>
+        </p:txBody>
+      </p:sp>
+      <p:sp>
+        <p:nvSpPr>
+          <p:cNvPr id="4" name="Shape 1"/>
+          <p:cNvSpPr/>
+          <p:nvPr/>
+        </p:nvSpPr>
+        <p:spPr>
+          <a:xfrm>
+            <a:off x="548640" y="1325880"/>
+            <a:ext cx="5394960" cy="4846320"/>
+          </a:xfrm>
+          <a:prstGeom prst="roundRect">
+            <a:avLst>
+              <a:gd name="adj" fmla="val 2264"/>
+            </a:avLst>
+          </a:prstGeom>
+          <a:solidFill>
+            <a:srgbClr val="EEF2F7"/>
+          </a:solidFill>
+          <a:ln w="12700">
+            <a:solidFill>
+              <a:srgbClr val="EEF2F7"/>
+            </a:solidFill>
+            <a:prstDash val="solid"/>
+          </a:ln>
+          <a:effectLst>
+            <a:outerShdw blurRad="50800" dist="12700" dir="5400000" algn="bl" rotWithShape="0">
+              <a:srgbClr val="000000">
+                <a:alpha val="8000"/>
+              </a:srgbClr>
+            </a:outerShdw>
+          </a:effectLst>
+        </p:spPr>
+        <p:txBody>
+          <a:bodyPr/>
+          <a:lstStyle/>
+          <a:p>
+            <a:endParaRPr lang="en-US"/>
+          </a:p>
+        </p:txBody>
+      </p:sp>
+      <p:sp>
+        <p:nvSpPr>
+          <p:cNvPr id="5" name="Text 2"/>
+          <p:cNvSpPr txBox="1"/>
+          <p:nvPr/>
+        </p:nvSpPr>
+        <p:spPr>
+          <a:xfrm>
+            <a:off x="777240" y="1417320"/>
+            <a:ext cx="4937760" cy="320040"/>
+          </a:xfrm>
+          <a:prstGeom prst="rect">
+            <a:avLst/>
+          </a:prstGeom>
+          <a:noFill/>
+          <a:ln/>
+        </p:spPr>
+        <p:txBody>
+          <a:bodyPr wrap="square" lIns="0" tIns="0" rIns="0" bIns="0" rtlCol="0" anchor="t"/>
+          <a:lstStyle/>
+          <a:p>
+            <a:pPr marL="0" indent="0">
+              <a:buNone/>
+            </a:pPr>
+            <a:r>
+              <a:rPr lang="en-US" sz="1400" b="1" dirty="0">
+                <a:solidFill>
+                  <a:schemeClr val="tx2"/>
+                </a:solidFill>
+              </a:rPr>
+              <a:t>What it is</a:t>
+            </a:r>
+            <a:endParaRPr lang="en-US" sz="1400" dirty="0"/>
+          </a:p>
+        </p:txBody>
+      </p:sp>
+      <p:sp>
+        <p:nvSpPr>
+          <p:cNvPr id="6" name="Text 3"/>
+          <p:cNvSpPr txBox="1"/>
+          <p:nvPr/>
+        </p:nvSpPr>
+        <p:spPr>
+          <a:xfrm>
+            <a:off x="777240" y="1755648"/>
+            <a:ext cx="4937760" cy="4297680"/>
+          </a:xfrm>
+          <a:prstGeom prst="rect">
+            <a:avLst/>
+          </a:prstGeom>
+          <a:noFill/>
+          <a:ln/>
+        </p:spPr>
+        <p:txBody>
+          <a:bodyPr wrap="square" lIns="0" tIns="0" rIns="0" bIns="0" rtlCol="0" anchor="t"/>
+          <a:lstStyle/>
+          <a:p>
+            <a:pPr marL="342900" indent="-342900">
+              <a:spcAft>
+                <a:spcPts val="500"/>
+              </a:spcAft>
+              <a:buSzPct val="100000"/>
+              <a:buChar char="•"/>
+            </a:pPr>
+            <a:r>
+              <a:rPr lang="en-US" sz="1050" dirty="0">
+                <a:solidFill>
+                  <a:schemeClr val="tx1"/>
+                </a:solidFill>
+              </a:rPr>
+              <a:t>An ordered probit: the decision (cut, hold, hike) as a function of signals, with two cutpoints. Fitted on every scheduled decision since August 2000, each read with the data as first published (ALFRED vintages), never today's revised figures.</a:t>
+            </a:r>
+            <a:endParaRPr lang="en-US" sz="1050" dirty="0"/>
+          </a:p>
+          <a:p>
+            <a:pPr marL="342900" indent="-342900">
+              <a:spcAft>
+                <a:spcPts val="500"/>
+              </a:spcAft>
+              <a:buSzPct val="100000"/>
+              <a:buChar char="•"/>
+            </a:pPr>
+            <a:r>
+              <a:rPr lang="en-US" sz="1050" dirty="0">
+                <a:solidFill>
+                  <a:schemeClr val="tx1"/>
+                </a:solidFill>
+              </a:rPr>
+              <a:t>Version 1, seven features (inflation gap and momentum, unemployment and its 12-month change, payrolls, the 2-year yield gap, the previous decision). Spec frozen before fitting; single split at 2018. Result: log score −1.14 against −0.71 for a base rate. Failed, reported as such.</a:t>
+            </a:r>
+            <a:endParaRPr lang="en-US" sz="1050" dirty="0"/>
+          </a:p>
+          <a:p>
+            <a:pPr marL="342900" indent="-342900">
+              <a:spcAft>
+                <a:spcPts val="500"/>
+              </a:spcAft>
+              <a:buSzPct val="100000"/>
+              <a:buChar char="•"/>
+            </a:pPr>
+            <a:r>
+              <a:rPr lang="en-US" sz="1050" dirty="0">
+                <a:solidFill>
+                  <a:schemeClr val="tx1"/>
+                </a:solidFill>
+              </a:rPr>
+              <a:t>Version 2 adds two features (at the zero bound; the streak of same-direction moves) and shrinks 50% toward the base rate. Written after seeing v1 fail, so its score on 2018 onward is optimistic: a declared contamination caveat.</a:t>
+            </a:r>
+            <a:endParaRPr lang="en-US" sz="1050" dirty="0"/>
+          </a:p>
+          <a:p>
+            <a:pPr marL="342900" indent="-342900">
+              <a:spcAft>
+                <a:spcPts val="500"/>
+              </a:spcAft>
+              <a:buSzPct val="100000"/>
+              <a:buChar char="•"/>
+            </a:pPr>
+            <a:r>
+              <a:rPr lang="en-US" sz="1050" dirty="0">
+                <a:solidFill>
+                  <a:schemeClr val="tx1"/>
+                </a:solidFill>
+              </a:rPr>
+              <a:t>Weight 0 until live decisions judge it. Computed and shown on every snapshot, never hidden.</a:t>
+            </a:r>
+            <a:endParaRPr lang="en-US" sz="1050" dirty="0"/>
+          </a:p>
+        </p:txBody>
+      </p:sp>
+      <p:sp>
+        <p:nvSpPr>
+          <p:cNvPr id="7" name="Text 4"/>
+          <p:cNvSpPr txBox="1"/>
+          <p:nvPr/>
+        </p:nvSpPr>
+        <p:spPr>
+          <a:xfrm>
+            <a:off x="6172200" y="1371600"/>
+            <a:ext cx="5468112" cy="320040"/>
+          </a:xfrm>
+          <a:prstGeom prst="rect">
+            <a:avLst/>
+          </a:prstGeom>
+          <a:noFill/>
+          <a:ln/>
+        </p:spPr>
+        <p:txBody>
+          <a:bodyPr wrap="square" lIns="0" tIns="0" rIns="0" bIns="0" rtlCol="0" anchor="t"/>
+          <a:lstStyle/>
+          <a:p>
+            <a:pPr marL="0" indent="0">
+              <a:buNone/>
+            </a:pPr>
+            <a:r>
+              <a:rPr lang="en-US" sz="1400" b="1" dirty="0">
+                <a:solidFill>
+                  <a:schemeClr val="tx2"/>
+                </a:solidFill>
+              </a:rPr>
+              <a:t>The gate: expanding window, 129 decisions since 2010</a:t>
+            </a:r>
+            <a:endParaRPr lang="en-US" sz="1400" dirty="0"/>
+          </a:p>
+        </p:txBody>
+      </p:sp>
+      <p:graphicFrame>
+        <p:nvGraphicFramePr>
+          <p:cNvPr id="25" name="Table 0"/>
+          <p:cNvGraphicFramePr>
+            <a:graphicFrameLocks noGrp="1"/>
+          </p:cNvGraphicFramePr>
+          <p:nvPr>
+            <p:extLst>
+              <p:ext uri="{D42A27DB-BD31-4B8C-83A1-F6EECF244321}">
+                <p14:modId xmlns:p14="http://schemas.microsoft.com/office/powerpoint/2010/main" val="1579011935"/>
+              </p:ext>
+            </p:extLst>
+          </p:nvPr>
+        </p:nvGraphicFramePr>
+        <p:xfrm>
+          <a:off x="6172200" y="1783080"/>
+          <a:ext cx="5468112" cy="914400"/>
+        </p:xfrm>
+        <a:graphic>
+          <a:graphicData uri="http://schemas.openxmlformats.org/drawingml/2006/table">
+            <a:tbl>
+              <a:tblPr/>
+              <a:tblGrid>
+                <a:gridCol w="2194560">
+                  <a:extLst>
+                    <a:ext uri="{9D8B030D-6E8A-4147-A177-3AD203B41FA5}">
+                      <a16:colId xmlns:a16="http://schemas.microsoft.com/office/drawing/2014/main" val="20000"/>
+                    </a:ext>
+                  </a:extLst>
+                </a:gridCol>
+                <a:gridCol w="1005840">
+                  <a:extLst>
+                    <a:ext uri="{9D8B030D-6E8A-4147-A177-3AD203B41FA5}">
+                      <a16:colId xmlns:a16="http://schemas.microsoft.com/office/drawing/2014/main" val="20001"/>
+                    </a:ext>
+                  </a:extLst>
+                </a:gridCol>
+                <a:gridCol w="1005840">
+                  <a:extLst>
+                    <a:ext uri="{9D8B030D-6E8A-4147-A177-3AD203B41FA5}">
+                      <a16:colId xmlns:a16="http://schemas.microsoft.com/office/drawing/2014/main" val="20002"/>
+                    </a:ext>
+                  </a:extLst>
+                </a:gridCol>
+                <a:gridCol w="914400">
+                  <a:extLst>
+                    <a:ext uri="{9D8B030D-6E8A-4147-A177-3AD203B41FA5}">
+                      <a16:colId xmlns:a16="http://schemas.microsoft.com/office/drawing/2014/main" val="20003"/>
+                    </a:ext>
+                  </a:extLst>
+                </a:gridCol>
+                <a:gridCol w="621792">
+                  <a:extLst>
+                    <a:ext uri="{9D8B030D-6E8A-4147-A177-3AD203B41FA5}">
+                      <a16:colId xmlns:a16="http://schemas.microsoft.com/office/drawing/2014/main" val="20004"/>
+                    </a:ext>
+                  </a:extLst>
+                </a:gridCol>
+              </a:tblGrid>
+              <a:tr h="384048">
+                <a:tc>
+                  <a:txBody>
+                    <a:bodyPr/>
+                    <a:lstStyle/>
+                    <a:p>
+                      <a:pPr marL="0" indent="0">
+                        <a:buNone/>
+                      </a:pPr>
+                      <a:r>
+                        <a:rPr lang="en-US" sz="1050" b="1" dirty="0">
+                          <a:solidFill>
+                            <a:srgbClr val="FFFFFF"/>
+                          </a:solidFill>
+                        </a:rPr>
+                        <a:t>Candidate</a:t>
+                      </a:r>
+                      <a:endParaRPr lang="en-US" sz="1050" dirty="0"/>
+                    </a:p>
+                  </a:txBody>
+                  <a:tcPr marL="45720" marR="45720" anchor="ctr">
+                    <a:lnL w="6350" cap="flat" cmpd="sng" algn="ctr">
+                      <a:solidFill>
+                        <a:srgbClr val="D5DBE5"/>
+                      </a:solidFill>
+                      <a:prstDash val="solid"/>
+                      <a:round/>
+                      <a:headEnd type="none" w="med" len="med"/>
+                      <a:tailEnd type="none" w="med" len="med"/>
+                    </a:lnL>
+                    <a:lnR w="6350" cap="flat" cmpd="sng" algn="ctr">
+                      <a:solidFill>
+                        <a:srgbClr val="D5DBE5"/>
+                      </a:solidFill>
+                      <a:prstDash val="solid"/>
+                      <a:round/>
+                      <a:headEnd type="none" w="med" len="med"/>
+                      <a:tailEnd type="none" w="med" len="med"/>
+                    </a:lnR>
+                    <a:lnT w="6350" cap="flat" cmpd="sng" algn="ctr">
+                      <a:solidFill>
+                        <a:srgbClr val="D5DBE5"/>
+                      </a:solidFill>
+                      <a:prstDash val="solid"/>
+                      <a:round/>
+                      <a:headEnd type="none" w="med" len="med"/>
+                      <a:tailEnd type="none" w="med" len="med"/>
+                    </a:lnT>
+                    <a:lnB w="6350" cap="flat" cmpd="sng" algn="ctr">
+                      <a:solidFill>
+                        <a:srgbClr val="D5DBE5"/>
+                      </a:solidFill>
+                      <a:prstDash val="solid"/>
+                      <a:round/>
+                      <a:headEnd type="none" w="med" len="med"/>
+                      <a:tailEnd type="none" w="med" len="med"/>
+                    </a:lnB>
+                    <a:solidFill>
+                      <a:srgbClr val="1E2761"/>
+                    </a:solidFill>
+                  </a:tcPr>
+                </a:tc>
+                <a:tc>
+                  <a:txBody>
+                    <a:bodyPr/>
+                    <a:lstStyle/>
+                    <a:p>
+                      <a:pPr marL="0" indent="0" algn="ctr">
+                        <a:buNone/>
+                      </a:pPr>
+                      <a:r>
+                        <a:rPr lang="en-US" sz="1050" b="1" dirty="0">
+                          <a:solidFill>
+                            <a:srgbClr val="FFFFFF"/>
+                          </a:solidFill>
+                        </a:rPr>
+                        <a:t>Log score, all</a:t>
+                      </a:r>
+                      <a:endParaRPr lang="en-US" sz="1050" dirty="0"/>
+                    </a:p>
+                  </a:txBody>
+                  <a:tcPr marL="45720" marR="45720" anchor="ctr">
+                    <a:lnL w="6350" cap="flat" cmpd="sng" algn="ctr">
+                      <a:solidFill>
+                        <a:srgbClr val="D5DBE5"/>
+                      </a:solidFill>
+                      <a:prstDash val="solid"/>
+                      <a:round/>
+                      <a:headEnd type="none" w="med" len="med"/>
+                      <a:tailEnd type="none" w="med" len="med"/>
+                    </a:lnL>
+                    <a:lnR w="6350" cap="flat" cmpd="sng" algn="ctr">
+                      <a:solidFill>
+                        <a:srgbClr val="D5DBE5"/>
+                      </a:solidFill>
+                      <a:prstDash val="solid"/>
+                      <a:round/>
+                      <a:headEnd type="none" w="med" len="med"/>
+                      <a:tailEnd type="none" w="med" len="med"/>
+                    </a:lnR>
+                    <a:lnT w="6350" cap="flat" cmpd="sng" algn="ctr">
+                      <a:solidFill>
+                        <a:srgbClr val="D5DBE5"/>
+                      </a:solidFill>
+                      <a:prstDash val="solid"/>
+                      <a:round/>
+                      <a:headEnd type="none" w="med" len="med"/>
+                      <a:tailEnd type="none" w="med" len="med"/>
+                    </a:lnT>
+                    <a:lnB w="6350" cap="flat" cmpd="sng" algn="ctr">
+                      <a:solidFill>
+                        <a:srgbClr val="D5DBE5"/>
+                      </a:solidFill>
+                      <a:prstDash val="solid"/>
+                      <a:round/>
+                      <a:headEnd type="none" w="med" len="med"/>
+                      <a:tailEnd type="none" w="med" len="med"/>
+                    </a:lnB>
+                    <a:solidFill>
+                      <a:srgbClr val="1E2761"/>
+                    </a:solidFill>
+                  </a:tcPr>
+                </a:tc>
+                <a:tc>
+                  <a:txBody>
+                    <a:bodyPr/>
+                    <a:lstStyle/>
+                    <a:p>
+                      <a:pPr marL="0" indent="0" algn="ctr">
+                        <a:buNone/>
+                      </a:pPr>
+                      <a:r>
+                        <a:rPr lang="en-US" sz="1050" b="1" dirty="0">
+                          <a:solidFill>
+                            <a:srgbClr val="FFFFFF"/>
+                          </a:solidFill>
+                        </a:rPr>
+                        <a:t>2010 to 2017</a:t>
+                      </a:r>
+                      <a:endParaRPr lang="en-US" sz="1050" dirty="0"/>
+                    </a:p>
+                  </a:txBody>
+                  <a:tcPr marL="45720" marR="45720" anchor="ctr">
+                    <a:lnL w="6350" cap="flat" cmpd="sng" algn="ctr">
+                      <a:solidFill>
+                        <a:srgbClr val="D5DBE5"/>
+                      </a:solidFill>
+                      <a:prstDash val="solid"/>
+                      <a:round/>
+                      <a:headEnd type="none" w="med" len="med"/>
+                      <a:tailEnd type="none" w="med" len="med"/>
+                    </a:lnL>
+                    <a:lnR w="6350" cap="flat" cmpd="sng" algn="ctr">
+                      <a:solidFill>
+                        <a:srgbClr val="D5DBE5"/>
+                      </a:solidFill>
+                      <a:prstDash val="solid"/>
+                      <a:round/>
+                      <a:headEnd type="none" w="med" len="med"/>
+                      <a:tailEnd type="none" w="med" len="med"/>
+                    </a:lnR>
+                    <a:lnT w="6350" cap="flat" cmpd="sng" algn="ctr">
+                      <a:solidFill>
+                        <a:srgbClr val="D5DBE5"/>
+                      </a:solidFill>
+                      <a:prstDash val="solid"/>
+                      <a:round/>
+                      <a:headEnd type="none" w="med" len="med"/>
+                      <a:tailEnd type="none" w="med" len="med"/>
+                    </a:lnT>
+                    <a:lnB w="6350" cap="flat" cmpd="sng" algn="ctr">
+                      <a:solidFill>
+                        <a:srgbClr val="D5DBE5"/>
+                      </a:solidFill>
+                      <a:prstDash val="solid"/>
+                      <a:round/>
+                      <a:headEnd type="none" w="med" len="med"/>
+                      <a:tailEnd type="none" w="med" len="med"/>
+                    </a:lnB>
+                    <a:solidFill>
+                      <a:srgbClr val="1E2761"/>
+                    </a:solidFill>
+                  </a:tcPr>
+                </a:tc>
+                <a:tc>
+                  <a:txBody>
+                    <a:bodyPr/>
+                    <a:lstStyle/>
+                    <a:p>
+                      <a:pPr marL="0" indent="0" algn="ctr">
+                        <a:buNone/>
+                      </a:pPr>
+                      <a:r>
+                        <a:rPr lang="en-US" sz="1050" b="1" dirty="0">
+                          <a:solidFill>
+                            <a:srgbClr val="FFFFFF"/>
+                          </a:solidFill>
+                        </a:rPr>
+                        <a:t>2018 on</a:t>
+                      </a:r>
+                      <a:endParaRPr lang="en-US" sz="1050" dirty="0"/>
+                    </a:p>
+                  </a:txBody>
+                  <a:tcPr marL="45720" marR="45720" anchor="ctr">
+                    <a:lnL w="6350" cap="flat" cmpd="sng" algn="ctr">
+                      <a:solidFill>
+                        <a:srgbClr val="D5DBE5"/>
+                      </a:solidFill>
+                      <a:prstDash val="solid"/>
+                      <a:round/>
+                      <a:headEnd type="none" w="med" len="med"/>
+                      <a:tailEnd type="none" w="med" len="med"/>
+                    </a:lnL>
+                    <a:lnR w="6350" cap="flat" cmpd="sng" algn="ctr">
+                      <a:solidFill>
+                        <a:srgbClr val="D5DBE5"/>
+                      </a:solidFill>
+                      <a:prstDash val="solid"/>
+                      <a:round/>
+                      <a:headEnd type="none" w="med" len="med"/>
+                      <a:tailEnd type="none" w="med" len="med"/>
+                    </a:lnR>
+                    <a:lnT w="6350" cap="flat" cmpd="sng" algn="ctr">
+                      <a:solidFill>
+                        <a:srgbClr val="D5DBE5"/>
+                      </a:solidFill>
+                      <a:prstDash val="solid"/>
+                      <a:round/>
+                      <a:headEnd type="none" w="med" len="med"/>
+                      <a:tailEnd type="none" w="med" len="med"/>
+                    </a:lnT>
+                    <a:lnB w="6350" cap="flat" cmpd="sng" algn="ctr">
+                      <a:solidFill>
+                        <a:srgbClr val="D5DBE5"/>
+                      </a:solidFill>
+                      <a:prstDash val="solid"/>
+                      <a:round/>
+                      <a:headEnd type="none" w="med" len="med"/>
+                      <a:tailEnd type="none" w="med" len="med"/>
+                    </a:lnB>
+                    <a:solidFill>
+                      <a:srgbClr val="1E2761"/>
+                    </a:solidFill>
+                  </a:tcPr>
+                </a:tc>
+                <a:tc>
+                  <a:txBody>
+                    <a:bodyPr/>
+                    <a:lstStyle/>
+                    <a:p>
+                      <a:pPr marL="0" indent="0" algn="ctr">
+                        <a:buNone/>
+                      </a:pPr>
+                      <a:r>
+                        <a:rPr lang="en-US" sz="1050" b="1" dirty="0">
+                          <a:solidFill>
+                            <a:srgbClr val="FFFFFF"/>
+                          </a:solidFill>
+                        </a:rPr>
+                        <a:t>Accuracy</a:t>
+                      </a:r>
+                      <a:endParaRPr lang="en-US" sz="1050" dirty="0"/>
+                    </a:p>
+                  </a:txBody>
+                  <a:tcPr marL="45720" marR="45720" anchor="ctr">
+                    <a:lnL w="6350" cap="flat" cmpd="sng" algn="ctr">
+                      <a:solidFill>
+                        <a:srgbClr val="D5DBE5"/>
+                      </a:solidFill>
+                      <a:prstDash val="solid"/>
+                      <a:round/>
+                      <a:headEnd type="none" w="med" len="med"/>
+                      <a:tailEnd type="none" w="med" len="med"/>
+                    </a:lnL>
+                    <a:lnR w="6350" cap="flat" cmpd="sng" algn="ctr">
+                      <a:solidFill>
+                        <a:srgbClr val="D5DBE5"/>
+                      </a:solidFill>
+                      <a:prstDash val="solid"/>
+                      <a:round/>
+                      <a:headEnd type="none" w="med" len="med"/>
+                      <a:tailEnd type="none" w="med" len="med"/>
+                    </a:lnR>
+                    <a:lnT w="6350" cap="flat" cmpd="sng" algn="ctr">
+                      <a:solidFill>
+                        <a:srgbClr val="D5DBE5"/>
+                      </a:solidFill>
+                      <a:prstDash val="solid"/>
+                      <a:round/>
+                      <a:headEnd type="none" w="med" len="med"/>
+                      <a:tailEnd type="none" w="med" len="med"/>
+                    </a:lnT>
+                    <a:lnB w="6350" cap="flat" cmpd="sng" algn="ctr">
+                      <a:solidFill>
+                        <a:srgbClr val="D5DBE5"/>
+                      </a:solidFill>
+                      <a:prstDash val="solid"/>
+                      <a:round/>
+                      <a:headEnd type="none" w="med" len="med"/>
+                      <a:tailEnd type="none" w="med" len="med"/>
+                    </a:lnB>
+                    <a:solidFill>
+                      <a:srgbClr val="1E2761"/>
+                    </a:solidFill>
+                  </a:tcPr>
+                </a:tc>
+                <a:extLst>
+                  <a:ext uri="{0D108BD9-81ED-4DB2-BD59-A6C34878D82A}">
+                    <a16:rowId xmlns:a16="http://schemas.microsoft.com/office/drawing/2014/main" val="10000"/>
+                  </a:ext>
+                </a:extLst>
+              </a:tr>
+              <a:tr h="384048">
+                <a:tc>
+                  <a:txBody>
+                    <a:bodyPr/>
+                    <a:lstStyle/>
+                    <a:p>
+                      <a:pPr marL="0" indent="0">
+                        <a:buNone/>
+                      </a:pPr>
+                      <a:r>
+                        <a:rPr lang="en-US" sz="1050" dirty="0">
+                          <a:solidFill>
+                            <a:srgbClr val="1B1F2A"/>
+                          </a:solidFill>
+                        </a:rPr>
+                        <a:t>Base rate, unconditional</a:t>
+                      </a:r>
+                      <a:endParaRPr lang="en-US" sz="1050" dirty="0"/>
+                    </a:p>
+                  </a:txBody>
+                  <a:tcPr marL="45720" marR="45720" anchor="ctr">
+                    <a:lnL w="6350" cap="flat" cmpd="sng" algn="ctr">
+                      <a:solidFill>
+                        <a:srgbClr val="D5DBE5"/>
+                      </a:solidFill>
+                      <a:prstDash val="solid"/>
+                      <a:round/>
+                      <a:headEnd type="none" w="med" len="med"/>
+                      <a:tailEnd type="none" w="med" len="med"/>
+                    </a:lnL>
+                    <a:lnR w="6350" cap="flat" cmpd="sng" algn="ctr">
+                      <a:solidFill>
+                        <a:srgbClr val="D5DBE5"/>
+                      </a:solidFill>
+                      <a:prstDash val="solid"/>
+                      <a:round/>
+                      <a:headEnd type="none" w="med" len="med"/>
+                      <a:tailEnd type="none" w="med" len="med"/>
+                    </a:lnR>
+                    <a:lnT w="6350" cap="flat" cmpd="sng" algn="ctr">
+                      <a:solidFill>
+                        <a:srgbClr val="D5DBE5"/>
+                      </a:solidFill>
+                      <a:prstDash val="solid"/>
+                      <a:round/>
+                      <a:headEnd type="none" w="med" len="med"/>
+                      <a:tailEnd type="none" w="med" len="med"/>
+                    </a:lnT>
+                    <a:lnB w="6350" cap="flat" cmpd="sng" algn="ctr">
+                      <a:solidFill>
+                        <a:srgbClr val="D5DBE5"/>
+                      </a:solidFill>
+                      <a:prstDash val="solid"/>
+                      <a:round/>
+                      <a:headEnd type="none" w="med" len="med"/>
+                      <a:tailEnd type="none" w="med" len="med"/>
+                    </a:lnB>
+                  </a:tcPr>
+                </a:tc>
+                <a:tc>
+                  <a:txBody>
+                    <a:bodyPr/>
+                    <a:lstStyle/>
+                    <a:p>
+                      <a:pPr marL="0" indent="0" algn="ctr">
+                        <a:buNone/>
+                      </a:pPr>
+                      <a:r>
+                        <a:rPr lang="en-US" sz="1050" dirty="0">
+                          <a:solidFill>
+                            <a:srgbClr val="1B1F2A"/>
+                          </a:solidFill>
+                        </a:rPr>
+                        <a:t>−0.744</a:t>
+                      </a:r>
+                      <a:endParaRPr lang="en-US" sz="1050" dirty="0"/>
+                    </a:p>
+                  </a:txBody>
+                  <a:tcPr marL="45720" marR="45720" anchor="ctr">
+                    <a:lnL w="6350" cap="flat" cmpd="sng" algn="ctr">
+                      <a:solidFill>
+                        <a:srgbClr val="D5DBE5"/>
+                      </a:solidFill>
+                      <a:prstDash val="solid"/>
+                      <a:round/>
+                      <a:headEnd type="none" w="med" len="med"/>
+                      <a:tailEnd type="none" w="med" len="med"/>
+                    </a:lnL>
+                    <a:lnR w="6350" cap="flat" cmpd="sng" algn="ctr">
+                      <a:solidFill>
+                        <a:srgbClr val="D5DBE5"/>
+                      </a:solidFill>
+                      <a:prstDash val="solid"/>
+                      <a:round/>
+                      <a:headEnd type="none" w="med" len="med"/>
+                      <a:tailEnd type="none" w="med" len="med"/>
+                    </a:lnR>
+                    <a:lnT w="6350" cap="flat" cmpd="sng" algn="ctr">
+                      <a:solidFill>
+                        <a:srgbClr val="D5DBE5"/>
+                      </a:solidFill>
+                      <a:prstDash val="solid"/>
+                      <a:round/>
+                      <a:headEnd type="none" w="med" len="med"/>
+                      <a:tailEnd type="none" w="med" len="med"/>
+                    </a:lnT>
+                    <a:lnB w="6350" cap="flat" cmpd="sng" algn="ctr">
+                      <a:solidFill>
+                        <a:srgbClr val="D5DBE5"/>
+                      </a:solidFill>
+                      <a:prstDash val="solid"/>
+                      <a:round/>
+                      <a:headEnd type="none" w="med" len="med"/>
+                      <a:tailEnd type="none" w="med" len="med"/>
+                    </a:lnB>
+                  </a:tcPr>
+                </a:tc>
+                <a:tc>
+                  <a:txBody>
+                    <a:bodyPr/>
+                    <a:lstStyle/>
+                    <a:p>
+                      <a:pPr marL="0" indent="0" algn="ctr">
+                        <a:buNone/>
+                      </a:pPr>
+                      <a:r>
+                        <a:rPr lang="en-US" sz="1050" dirty="0">
+                          <a:solidFill>
+                            <a:srgbClr val="1B1F2A"/>
+                          </a:solidFill>
+                        </a:rPr>
+                        <a:t>−0.550</a:t>
+                      </a:r>
+                      <a:endParaRPr lang="en-US" sz="1050" dirty="0"/>
+                    </a:p>
+                  </a:txBody>
+                  <a:tcPr marL="45720" marR="45720" anchor="ctr">
+                    <a:lnL w="6350" cap="flat" cmpd="sng" algn="ctr">
+                      <a:solidFill>
+                        <a:srgbClr val="D5DBE5"/>
+                      </a:solidFill>
+                      <a:prstDash val="solid"/>
+                      <a:round/>
+                      <a:headEnd type="none" w="med" len="med"/>
+                      <a:tailEnd type="none" w="med" len="med"/>
+                    </a:lnL>
+                    <a:lnR w="6350" cap="flat" cmpd="sng" algn="ctr">
+                      <a:solidFill>
+                        <a:srgbClr val="D5DBE5"/>
+                      </a:solidFill>
+                      <a:prstDash val="solid"/>
+                      <a:round/>
+                      <a:headEnd type="none" w="med" len="med"/>
+                      <a:tailEnd type="none" w="med" len="med"/>
+                    </a:lnR>
+                    <a:lnT w="6350" cap="flat" cmpd="sng" algn="ctr">
+                      <a:solidFill>
+                        <a:srgbClr val="D5DBE5"/>
+                      </a:solidFill>
+                      <a:prstDash val="solid"/>
+                      <a:round/>
+                      <a:headEnd type="none" w="med" len="med"/>
+                      <a:tailEnd type="none" w="med" len="med"/>
+                    </a:lnT>
+                    <a:lnB w="6350" cap="flat" cmpd="sng" algn="ctr">
+                      <a:solidFill>
+                        <a:srgbClr val="D5DBE5"/>
+                      </a:solidFill>
+                      <a:prstDash val="solid"/>
+                      <a:round/>
+                      <a:headEnd type="none" w="med" len="med"/>
+                      <a:tailEnd type="none" w="med" len="med"/>
+                    </a:lnB>
+                  </a:tcPr>
+                </a:tc>
+                <a:tc>
+                  <a:txBody>
+                    <a:bodyPr/>
+                    <a:lstStyle/>
+                    <a:p>
+                      <a:pPr marL="0" indent="0" algn="ctr">
+                        <a:buNone/>
+                      </a:pPr>
+                      <a:r>
+                        <a:rPr lang="en-US" sz="1050" dirty="0">
+                          <a:solidFill>
+                            <a:srgbClr val="1B1F2A"/>
+                          </a:solidFill>
+                        </a:rPr>
+                        <a:t>−0.918</a:t>
+                      </a:r>
+                      <a:endParaRPr lang="en-US" sz="1050" dirty="0"/>
+                    </a:p>
+                  </a:txBody>
+                  <a:tcPr marL="45720" marR="45720" anchor="ctr">
+                    <a:lnL w="6350" cap="flat" cmpd="sng" algn="ctr">
+                      <a:solidFill>
+                        <a:srgbClr val="D5DBE5"/>
+                      </a:solidFill>
+                      <a:prstDash val="solid"/>
+                      <a:round/>
+                      <a:headEnd type="none" w="med" len="med"/>
+                      <a:tailEnd type="none" w="med" len="med"/>
+                    </a:lnL>
+                    <a:lnR w="6350" cap="flat" cmpd="sng" algn="ctr">
+                      <a:solidFill>
+                        <a:srgbClr val="D5DBE5"/>
+                      </a:solidFill>
+                      <a:prstDash val="solid"/>
+                      <a:round/>
+                      <a:headEnd type="none" w="med" len="med"/>
+                      <a:tailEnd type="none" w="med" len="med"/>
+                    </a:lnR>
+                    <a:lnT w="6350" cap="flat" cmpd="sng" algn="ctr">
+                      <a:solidFill>
+                        <a:srgbClr val="D5DBE5"/>
+                      </a:solidFill>
+                      <a:prstDash val="solid"/>
+                      <a:round/>
+                      <a:headEnd type="none" w="med" len="med"/>
+                      <a:tailEnd type="none" w="med" len="med"/>
+                    </a:lnT>
+                    <a:lnB w="6350" cap="flat" cmpd="sng" algn="ctr">
+                      <a:solidFill>
+                        <a:srgbClr val="D5DBE5"/>
+                      </a:solidFill>
+                      <a:prstDash val="solid"/>
+                      <a:round/>
+                      <a:headEnd type="none" w="med" len="med"/>
+                      <a:tailEnd type="none" w="med" len="med"/>
+                    </a:lnB>
+                  </a:tcPr>
+                </a:tc>
+                <a:tc>
+                  <a:txBody>
+                    <a:bodyPr/>
+                    <a:lstStyle/>
+                    <a:p>
+                      <a:pPr marL="0" indent="0" algn="ctr">
+                        <a:buNone/>
+                      </a:pPr>
+                      <a:r>
+                        <a:rPr lang="en-US" sz="1050" dirty="0">
+                          <a:solidFill>
+                            <a:srgbClr val="1B1F2A"/>
+                          </a:solidFill>
+                        </a:rPr>
+                        <a:t>77%</a:t>
+                      </a:r>
+                      <a:endParaRPr lang="en-US" sz="1050" dirty="0"/>
+                    </a:p>
+                  </a:txBody>
+                  <a:tcPr marL="45720" marR="45720" anchor="ctr">
+                    <a:lnL w="6350" cap="flat" cmpd="sng" algn="ctr">
+                      <a:solidFill>
+                        <a:srgbClr val="D5DBE5"/>
+                      </a:solidFill>
+                      <a:prstDash val="solid"/>
+                      <a:round/>
+                      <a:headEnd type="none" w="med" len="med"/>
+                      <a:tailEnd type="none" w="med" len="med"/>
+                    </a:lnL>
+                    <a:lnR w="6350" cap="flat" cmpd="sng" algn="ctr">
+                      <a:solidFill>
+                        <a:srgbClr val="D5DBE5"/>
+                      </a:solidFill>
+                      <a:prstDash val="solid"/>
+                      <a:round/>
+                      <a:headEnd type="none" w="med" len="med"/>
+                      <a:tailEnd type="none" w="med" len="med"/>
+                    </a:lnR>
+                    <a:lnT w="6350" cap="flat" cmpd="sng" algn="ctr">
+                      <a:solidFill>
+                        <a:srgbClr val="D5DBE5"/>
+                      </a:solidFill>
+                      <a:prstDash val="solid"/>
+                      <a:round/>
+                      <a:headEnd type="none" w="med" len="med"/>
+                      <a:tailEnd type="none" w="med" len="med"/>
+                    </a:lnT>
+                    <a:lnB w="6350" cap="flat" cmpd="sng" algn="ctr">
+                      <a:solidFill>
+                        <a:srgbClr val="D5DBE5"/>
+                      </a:solidFill>
+                      <a:prstDash val="solid"/>
+                      <a:round/>
+                      <a:headEnd type="none" w="med" len="med"/>
+                      <a:tailEnd type="none" w="med" len="med"/>
+                    </a:lnB>
+                  </a:tcPr>
+                </a:tc>
+                <a:extLst>
+                  <a:ext uri="{0D108BD9-81ED-4DB2-BD59-A6C34878D82A}">
+                    <a16:rowId xmlns:a16="http://schemas.microsoft.com/office/drawing/2014/main" val="10001"/>
+                  </a:ext>
+                </a:extLst>
+              </a:tr>
+              <a:tr h="384048">
+                <a:tc>
+                  <a:txBody>
+                    <a:bodyPr/>
+                    <a:lstStyle/>
+                    <a:p>
+                      <a:pPr marL="0" indent="0">
+                        <a:buNone/>
+                      </a:pPr>
+                      <a:r>
+                        <a:rPr lang="en-US" sz="1050" b="1" dirty="0">
+                          <a:solidFill>
+                            <a:srgbClr val="2C6E49"/>
+                          </a:solidFill>
+                        </a:rPr>
+                        <a:t>Base rate given the previous decision</a:t>
+                      </a:r>
+                      <a:endParaRPr lang="en-US" sz="1050" dirty="0"/>
+                    </a:p>
+                  </a:txBody>
+                  <a:tcPr marL="45720" marR="45720" anchor="ctr">
+                    <a:lnL w="6350" cap="flat" cmpd="sng" algn="ctr">
+                      <a:solidFill>
+                        <a:srgbClr val="D5DBE5"/>
+                      </a:solidFill>
+                      <a:prstDash val="solid"/>
+                      <a:round/>
+                      <a:headEnd type="none" w="med" len="med"/>
+                      <a:tailEnd type="none" w="med" len="med"/>
+                    </a:lnL>
+                    <a:lnR w="6350" cap="flat" cmpd="sng" algn="ctr">
+                      <a:solidFill>
+                        <a:srgbClr val="D5DBE5"/>
+                      </a:solidFill>
+                      <a:prstDash val="solid"/>
+                      <a:round/>
+                      <a:headEnd type="none" w="med" len="med"/>
+                      <a:tailEnd type="none" w="med" len="med"/>
+                    </a:lnR>
+                    <a:lnT w="6350" cap="flat" cmpd="sng" algn="ctr">
+                      <a:solidFill>
+                        <a:srgbClr val="D5DBE5"/>
+                      </a:solidFill>
+                      <a:prstDash val="solid"/>
+                      <a:round/>
+                      <a:headEnd type="none" w="med" len="med"/>
+                      <a:tailEnd type="none" w="med" len="med"/>
+                    </a:lnT>
+                    <a:lnB w="6350" cap="flat" cmpd="sng" algn="ctr">
+                      <a:solidFill>
+                        <a:srgbClr val="D5DBE5"/>
+                      </a:solidFill>
+                      <a:prstDash val="solid"/>
+                      <a:round/>
+                      <a:headEnd type="none" w="med" len="med"/>
+                      <a:tailEnd type="none" w="med" len="med"/>
+                    </a:lnB>
+                  </a:tcPr>
+                </a:tc>
+                <a:tc>
+                  <a:txBody>
+                    <a:bodyPr/>
+                    <a:lstStyle/>
+                    <a:p>
+                      <a:pPr marL="0" indent="0" algn="ctr">
+                        <a:buNone/>
+                      </a:pPr>
+                      <a:r>
+                        <a:rPr lang="en-US" sz="1050" dirty="0">
+                          <a:solidFill>
+                            <a:srgbClr val="2C6E49"/>
+                          </a:solidFill>
+                        </a:rPr>
+                        <a:t>−0.584</a:t>
+                      </a:r>
+                      <a:endParaRPr lang="en-US" sz="1050" dirty="0"/>
+                    </a:p>
+                  </a:txBody>
+                  <a:tcPr marL="45720" marR="45720" anchor="ctr">
+                    <a:lnL w="6350" cap="flat" cmpd="sng" algn="ctr">
+                      <a:solidFill>
+                        <a:srgbClr val="D5DBE5"/>
+                      </a:solidFill>
+                      <a:prstDash val="solid"/>
+                      <a:round/>
+                      <a:headEnd type="none" w="med" len="med"/>
+                      <a:tailEnd type="none" w="med" len="med"/>
+                    </a:lnL>
+                    <a:lnR w="6350" cap="flat" cmpd="sng" algn="ctr">
+                      <a:solidFill>
+                        <a:srgbClr val="D5DBE5"/>
+                      </a:solidFill>
+                      <a:prstDash val="solid"/>
+                      <a:round/>
+                      <a:headEnd type="none" w="med" len="med"/>
+                      <a:tailEnd type="none" w="med" len="med"/>
+                    </a:lnR>
+                    <a:lnT w="6350" cap="flat" cmpd="sng" algn="ctr">
+                      <a:solidFill>
+                        <a:srgbClr val="D5DBE5"/>
+                      </a:solidFill>
+                      <a:prstDash val="solid"/>
+                      <a:round/>
+                      <a:headEnd type="none" w="med" len="med"/>
+                      <a:tailEnd type="none" w="med" len="med"/>
+                    </a:lnT>
+                    <a:lnB w="6350" cap="flat" cmpd="sng" algn="ctr">
+                      <a:solidFill>
+                        <a:srgbClr val="D5DBE5"/>
+                      </a:solidFill>
+                      <a:prstDash val="solid"/>
+                      <a:round/>
+                      <a:headEnd type="none" w="med" len="med"/>
+                      <a:tailEnd type="none" w="med" len="med"/>
+                    </a:lnB>
+                  </a:tcPr>
+                </a:tc>
+                <a:tc>
+                  <a:txBody>
+                    <a:bodyPr/>
+                    <a:lstStyle/>
+                    <a:p>
+                      <a:pPr marL="0" indent="0" algn="ctr">
+                        <a:buNone/>
+                      </a:pPr>
+                      <a:r>
+                        <a:rPr lang="en-US" sz="1050" dirty="0">
+                          <a:solidFill>
+                            <a:srgbClr val="2C6E49"/>
+                          </a:solidFill>
+                        </a:rPr>
+                        <a:t>−0.449</a:t>
+                      </a:r>
+                      <a:endParaRPr lang="en-US" sz="1050" dirty="0"/>
+                    </a:p>
+                  </a:txBody>
+                  <a:tcPr marL="45720" marR="45720" anchor="ctr">
+                    <a:lnL w="6350" cap="flat" cmpd="sng" algn="ctr">
+                      <a:solidFill>
+                        <a:srgbClr val="D5DBE5"/>
+                      </a:solidFill>
+                      <a:prstDash val="solid"/>
+                      <a:round/>
+                      <a:headEnd type="none" w="med" len="med"/>
+                      <a:tailEnd type="none" w="med" len="med"/>
+                    </a:lnL>
+                    <a:lnR w="6350" cap="flat" cmpd="sng" algn="ctr">
+                      <a:solidFill>
+                        <a:srgbClr val="D5DBE5"/>
+                      </a:solidFill>
+                      <a:prstDash val="solid"/>
+                      <a:round/>
+                      <a:headEnd type="none" w="med" len="med"/>
+                      <a:tailEnd type="none" w="med" len="med"/>
+                    </a:lnR>
+                    <a:lnT w="6350" cap="flat" cmpd="sng" algn="ctr">
+                      <a:solidFill>
+                        <a:srgbClr val="D5DBE5"/>
+                      </a:solidFill>
+                      <a:prstDash val="solid"/>
+                      <a:round/>
+                      <a:headEnd type="none" w="med" len="med"/>
+                      <a:tailEnd type="none" w="med" len="med"/>
+                    </a:lnT>
+                    <a:lnB w="6350" cap="flat" cmpd="sng" algn="ctr">
+                      <a:solidFill>
+                        <a:srgbClr val="D5DBE5"/>
+                      </a:solidFill>
+                      <a:prstDash val="solid"/>
+                      <a:round/>
+                      <a:headEnd type="none" w="med" len="med"/>
+                      <a:tailEnd type="none" w="med" len="med"/>
+                    </a:lnB>
+                  </a:tcPr>
+                </a:tc>
+                <a:tc>
+                  <a:txBody>
+                    <a:bodyPr/>
+                    <a:lstStyle/>
+                    <a:p>
+                      <a:pPr marL="0" indent="0" algn="ctr">
+                        <a:buNone/>
+                      </a:pPr>
+                      <a:r>
+                        <a:rPr lang="en-US" sz="1050" dirty="0">
+                          <a:solidFill>
+                            <a:srgbClr val="2C6E49"/>
+                          </a:solidFill>
+                        </a:rPr>
+                        <a:t>−0.704</a:t>
+                      </a:r>
+                      <a:endParaRPr lang="en-US" sz="1050" dirty="0"/>
+                    </a:p>
+                  </a:txBody>
+                  <a:tcPr marL="45720" marR="45720" anchor="ctr">
+                    <a:lnL w="6350" cap="flat" cmpd="sng" algn="ctr">
+                      <a:solidFill>
+                        <a:srgbClr val="D5DBE5"/>
+                      </a:solidFill>
+                      <a:prstDash val="solid"/>
+                      <a:round/>
+                      <a:headEnd type="none" w="med" len="med"/>
+                      <a:tailEnd type="none" w="med" len="med"/>
+                    </a:lnL>
+                    <a:lnR w="6350" cap="flat" cmpd="sng" algn="ctr">
+                      <a:solidFill>
+                        <a:srgbClr val="D5DBE5"/>
+                      </a:solidFill>
+                      <a:prstDash val="solid"/>
+                      <a:round/>
+                      <a:headEnd type="none" w="med" len="med"/>
+                      <a:tailEnd type="none" w="med" len="med"/>
+                    </a:lnR>
+                    <a:lnT w="6350" cap="flat" cmpd="sng" algn="ctr">
+                      <a:solidFill>
+                        <a:srgbClr val="D5DBE5"/>
+                      </a:solidFill>
+                      <a:prstDash val="solid"/>
+                      <a:round/>
+                      <a:headEnd type="none" w="med" len="med"/>
+                      <a:tailEnd type="none" w="med" len="med"/>
+                    </a:lnT>
+                    <a:lnB w="6350" cap="flat" cmpd="sng" algn="ctr">
+                      <a:solidFill>
+                        <a:srgbClr val="D5DBE5"/>
+                      </a:solidFill>
+                      <a:prstDash val="solid"/>
+                      <a:round/>
+                      <a:headEnd type="none" w="med" len="med"/>
+                      <a:tailEnd type="none" w="med" len="med"/>
+                    </a:lnB>
+                  </a:tcPr>
+                </a:tc>
+                <a:tc>
+                  <a:txBody>
+                    <a:bodyPr/>
+                    <a:lstStyle/>
+                    <a:p>
+                      <a:pPr marL="0" indent="0" algn="ctr">
+                        <a:buNone/>
+                      </a:pPr>
+                      <a:r>
+                        <a:rPr lang="en-US" sz="1050" dirty="0">
+                          <a:solidFill>
+                            <a:srgbClr val="2C6E49"/>
+                          </a:solidFill>
+                        </a:rPr>
+                        <a:t>81%</a:t>
+                      </a:r>
+                      <a:endParaRPr lang="en-US" sz="1050" dirty="0"/>
+                    </a:p>
+                  </a:txBody>
+                  <a:tcPr marL="45720" marR="45720" anchor="ctr">
+                    <a:lnL w="6350" cap="flat" cmpd="sng" algn="ctr">
+                      <a:solidFill>
+                        <a:srgbClr val="D5DBE5"/>
+                      </a:solidFill>
+                      <a:prstDash val="solid"/>
+                      <a:round/>
+                      <a:headEnd type="none" w="med" len="med"/>
+                      <a:tailEnd type="none" w="med" len="med"/>
+                    </a:lnL>
+                    <a:lnR w="6350" cap="flat" cmpd="sng" algn="ctr">
+                      <a:solidFill>
+                        <a:srgbClr val="D5DBE5"/>
+                      </a:solidFill>
+                      <a:prstDash val="solid"/>
+                      <a:round/>
+                      <a:headEnd type="none" w="med" len="med"/>
+                      <a:tailEnd type="none" w="med" len="med"/>
+                    </a:lnR>
+                    <a:lnT w="6350" cap="flat" cmpd="sng" algn="ctr">
+                      <a:solidFill>
+                        <a:srgbClr val="D5DBE5"/>
+                      </a:solidFill>
+                      <a:prstDash val="solid"/>
+                      <a:round/>
+                      <a:headEnd type="none" w="med" len="med"/>
+                      <a:tailEnd type="none" w="med" len="med"/>
+                    </a:lnT>
+                    <a:lnB w="6350" cap="flat" cmpd="sng" algn="ctr">
+                      <a:solidFill>
+                        <a:srgbClr val="D5DBE5"/>
+                      </a:solidFill>
+                      <a:prstDash val="solid"/>
+                      <a:round/>
+                      <a:headEnd type="none" w="med" len="med"/>
+                      <a:tailEnd type="none" w="med" len="med"/>
+                    </a:lnB>
+                  </a:tcPr>
+                </a:tc>
+                <a:extLst>
+                  <a:ext uri="{0D108BD9-81ED-4DB2-BD59-A6C34878D82A}">
+                    <a16:rowId xmlns:a16="http://schemas.microsoft.com/office/drawing/2014/main" val="10002"/>
+                  </a:ext>
+                </a:extLst>
+              </a:tr>
+              <a:tr h="384048">
+                <a:tc>
+                  <a:txBody>
+                    <a:bodyPr/>
+                    <a:lstStyle/>
+                    <a:p>
+                      <a:pPr marL="0" indent="0">
+                        <a:buNone/>
+                      </a:pPr>
+                      <a:r>
+                        <a:rPr lang="en-US" sz="1050" dirty="0">
+                          <a:solidFill>
+                            <a:srgbClr val="C8553D"/>
+                          </a:solidFill>
+                        </a:rPr>
+                        <a:t>Probit v1</a:t>
+                      </a:r>
+                      <a:endParaRPr lang="en-US" sz="1050" dirty="0"/>
+                    </a:p>
+                  </a:txBody>
+                  <a:tcPr marL="45720" marR="45720" anchor="ctr">
+                    <a:lnL w="6350" cap="flat" cmpd="sng" algn="ctr">
+                      <a:solidFill>
+                        <a:srgbClr val="D5DBE5"/>
+                      </a:solidFill>
+                      <a:prstDash val="solid"/>
+                      <a:round/>
+                      <a:headEnd type="none" w="med" len="med"/>
+                      <a:tailEnd type="none" w="med" len="med"/>
+                    </a:lnL>
+                    <a:lnR w="6350" cap="flat" cmpd="sng" algn="ctr">
+                      <a:solidFill>
+                        <a:srgbClr val="D5DBE5"/>
+                      </a:solidFill>
+                      <a:prstDash val="solid"/>
+                      <a:round/>
+                      <a:headEnd type="none" w="med" len="med"/>
+                      <a:tailEnd type="none" w="med" len="med"/>
+                    </a:lnR>
+                    <a:lnT w="6350" cap="flat" cmpd="sng" algn="ctr">
+                      <a:solidFill>
+                        <a:srgbClr val="D5DBE5"/>
+                      </a:solidFill>
+                      <a:prstDash val="solid"/>
+                      <a:round/>
+                      <a:headEnd type="none" w="med" len="med"/>
+                      <a:tailEnd type="none" w="med" len="med"/>
+                    </a:lnT>
+                    <a:lnB w="6350" cap="flat" cmpd="sng" algn="ctr">
+                      <a:solidFill>
+                        <a:srgbClr val="D5DBE5"/>
+                      </a:solidFill>
+                      <a:prstDash val="solid"/>
+                      <a:round/>
+                      <a:headEnd type="none" w="med" len="med"/>
+                      <a:tailEnd type="none" w="med" len="med"/>
+                    </a:lnB>
+                  </a:tcPr>
+                </a:tc>
+                <a:tc>
+                  <a:txBody>
+                    <a:bodyPr/>
+                    <a:lstStyle/>
+                    <a:p>
+                      <a:pPr marL="0" indent="0" algn="ctr">
+                        <a:buNone/>
+                      </a:pPr>
+                      <a:r>
+                        <a:rPr lang="en-US" sz="1050" dirty="0">
+                          <a:solidFill>
+                            <a:srgbClr val="C8553D"/>
+                          </a:solidFill>
+                        </a:rPr>
+                        <a:t>−0.788</a:t>
+                      </a:r>
+                      <a:endParaRPr lang="en-US" sz="1050" dirty="0"/>
+                    </a:p>
+                  </a:txBody>
+                  <a:tcPr marL="45720" marR="45720" anchor="ctr">
+                    <a:lnL w="6350" cap="flat" cmpd="sng" algn="ctr">
+                      <a:solidFill>
+                        <a:srgbClr val="D5DBE5"/>
+                      </a:solidFill>
+                      <a:prstDash val="solid"/>
+                      <a:round/>
+                      <a:headEnd type="none" w="med" len="med"/>
+                      <a:tailEnd type="none" w="med" len="med"/>
+                    </a:lnL>
+                    <a:lnR w="6350" cap="flat" cmpd="sng" algn="ctr">
+                      <a:solidFill>
+                        <a:srgbClr val="D5DBE5"/>
+                      </a:solidFill>
+                      <a:prstDash val="solid"/>
+                      <a:round/>
+                      <a:headEnd type="none" w="med" len="med"/>
+                      <a:tailEnd type="none" w="med" len="med"/>
+                    </a:lnR>
+                    <a:lnT w="6350" cap="flat" cmpd="sng" algn="ctr">
+                      <a:solidFill>
+                        <a:srgbClr val="D5DBE5"/>
+                      </a:solidFill>
+                      <a:prstDash val="solid"/>
+                      <a:round/>
+                      <a:headEnd type="none" w="med" len="med"/>
+                      <a:tailEnd type="none" w="med" len="med"/>
+                    </a:lnT>
+                    <a:lnB w="6350" cap="flat" cmpd="sng" algn="ctr">
+                      <a:solidFill>
+                        <a:srgbClr val="D5DBE5"/>
+                      </a:solidFill>
+                      <a:prstDash val="solid"/>
+                      <a:round/>
+                      <a:headEnd type="none" w="med" len="med"/>
+                      <a:tailEnd type="none" w="med" len="med"/>
+                    </a:lnB>
+                  </a:tcPr>
+                </a:tc>
+                <a:tc>
+                  <a:txBody>
+                    <a:bodyPr/>
+                    <a:lstStyle/>
+                    <a:p>
+                      <a:pPr marL="0" indent="0" algn="ctr">
+                        <a:buNone/>
+                      </a:pPr>
+                      <a:r>
+                        <a:rPr lang="en-US" sz="1050" dirty="0">
+                          <a:solidFill>
+                            <a:srgbClr val="C8553D"/>
+                          </a:solidFill>
+                        </a:rPr>
+                        <a:t>−0.293</a:t>
+                      </a:r>
+                      <a:endParaRPr lang="en-US" sz="1050" dirty="0"/>
+                    </a:p>
+                  </a:txBody>
+                  <a:tcPr marL="45720" marR="45720" anchor="ctr">
+                    <a:lnL w="6350" cap="flat" cmpd="sng" algn="ctr">
+                      <a:solidFill>
+                        <a:srgbClr val="D5DBE5"/>
+                      </a:solidFill>
+                      <a:prstDash val="solid"/>
+                      <a:round/>
+                      <a:headEnd type="none" w="med" len="med"/>
+                      <a:tailEnd type="none" w="med" len="med"/>
+                    </a:lnL>
+                    <a:lnR w="6350" cap="flat" cmpd="sng" algn="ctr">
+                      <a:solidFill>
+                        <a:srgbClr val="D5DBE5"/>
+                      </a:solidFill>
+                      <a:prstDash val="solid"/>
+                      <a:round/>
+                      <a:headEnd type="none" w="med" len="med"/>
+                      <a:tailEnd type="none" w="med" len="med"/>
+                    </a:lnR>
+                    <a:lnT w="6350" cap="flat" cmpd="sng" algn="ctr">
+                      <a:solidFill>
+                        <a:srgbClr val="D5DBE5"/>
+                      </a:solidFill>
+                      <a:prstDash val="solid"/>
+                      <a:round/>
+                      <a:headEnd type="none" w="med" len="med"/>
+                      <a:tailEnd type="none" w="med" len="med"/>
+                    </a:lnT>
+                    <a:lnB w="6350" cap="flat" cmpd="sng" algn="ctr">
+                      <a:solidFill>
+                        <a:srgbClr val="D5DBE5"/>
+                      </a:solidFill>
+                      <a:prstDash val="solid"/>
+                      <a:round/>
+                      <a:headEnd type="none" w="med" len="med"/>
+                      <a:tailEnd type="none" w="med" len="med"/>
+                    </a:lnB>
+                  </a:tcPr>
+                </a:tc>
+                <a:tc>
+                  <a:txBody>
+                    <a:bodyPr/>
+                    <a:lstStyle/>
+                    <a:p>
+                      <a:pPr marL="0" indent="0" algn="ctr">
+                        <a:buNone/>
+                      </a:pPr>
+                      <a:r>
+                        <a:rPr lang="en-US" sz="1050" dirty="0">
+                          <a:solidFill>
+                            <a:srgbClr val="C8553D"/>
+                          </a:solidFill>
+                        </a:rPr>
+                        <a:t>−1.232</a:t>
+                      </a:r>
+                      <a:endParaRPr lang="en-US" sz="1050" dirty="0"/>
+                    </a:p>
+                  </a:txBody>
+                  <a:tcPr marL="45720" marR="45720" anchor="ctr">
+                    <a:lnL w="6350" cap="flat" cmpd="sng" algn="ctr">
+                      <a:solidFill>
+                        <a:srgbClr val="D5DBE5"/>
+                      </a:solidFill>
+                      <a:prstDash val="solid"/>
+                      <a:round/>
+                      <a:headEnd type="none" w="med" len="med"/>
+                      <a:tailEnd type="none" w="med" len="med"/>
+                    </a:lnL>
+                    <a:lnR w="6350" cap="flat" cmpd="sng" algn="ctr">
+                      <a:solidFill>
+                        <a:srgbClr val="D5DBE5"/>
+                      </a:solidFill>
+                      <a:prstDash val="solid"/>
+                      <a:round/>
+                      <a:headEnd type="none" w="med" len="med"/>
+                      <a:tailEnd type="none" w="med" len="med"/>
+                    </a:lnR>
+                    <a:lnT w="6350" cap="flat" cmpd="sng" algn="ctr">
+                      <a:solidFill>
+                        <a:srgbClr val="D5DBE5"/>
+                      </a:solidFill>
+                      <a:prstDash val="solid"/>
+                      <a:round/>
+                      <a:headEnd type="none" w="med" len="med"/>
+                      <a:tailEnd type="none" w="med" len="med"/>
+                    </a:lnT>
+                    <a:lnB w="6350" cap="flat" cmpd="sng" algn="ctr">
+                      <a:solidFill>
+                        <a:srgbClr val="D5DBE5"/>
+                      </a:solidFill>
+                      <a:prstDash val="solid"/>
+                      <a:round/>
+                      <a:headEnd type="none" w="med" len="med"/>
+                      <a:tailEnd type="none" w="med" len="med"/>
+                    </a:lnB>
+                  </a:tcPr>
+                </a:tc>
+                <a:tc>
+                  <a:txBody>
+                    <a:bodyPr/>
+                    <a:lstStyle/>
+                    <a:p>
+                      <a:pPr marL="0" indent="0" algn="ctr">
+                        <a:buNone/>
+                      </a:pPr>
+                      <a:r>
+                        <a:rPr lang="en-US" sz="1050" dirty="0">
+                          <a:solidFill>
+                            <a:srgbClr val="C8553D"/>
+                          </a:solidFill>
+                        </a:rPr>
+                        <a:t>78%</a:t>
+                      </a:r>
+                      <a:endParaRPr lang="en-US" sz="1050" dirty="0"/>
+                    </a:p>
+                  </a:txBody>
+                  <a:tcPr marL="45720" marR="45720" anchor="ctr">
+                    <a:lnL w="6350" cap="flat" cmpd="sng" algn="ctr">
+                      <a:solidFill>
+                        <a:srgbClr val="D5DBE5"/>
+                      </a:solidFill>
+                      <a:prstDash val="solid"/>
+                      <a:round/>
+                      <a:headEnd type="none" w="med" len="med"/>
+                      <a:tailEnd type="none" w="med" len="med"/>
+                    </a:lnL>
+                    <a:lnR w="6350" cap="flat" cmpd="sng" algn="ctr">
+                      <a:solidFill>
+                        <a:srgbClr val="D5DBE5"/>
+                      </a:solidFill>
+                      <a:prstDash val="solid"/>
+                      <a:round/>
+                      <a:headEnd type="none" w="med" len="med"/>
+                      <a:tailEnd type="none" w="med" len="med"/>
+                    </a:lnR>
+                    <a:lnT w="6350" cap="flat" cmpd="sng" algn="ctr">
+                      <a:solidFill>
+                        <a:srgbClr val="D5DBE5"/>
+                      </a:solidFill>
+                      <a:prstDash val="solid"/>
+                      <a:round/>
+                      <a:headEnd type="none" w="med" len="med"/>
+                      <a:tailEnd type="none" w="med" len="med"/>
+                    </a:lnT>
+                    <a:lnB w="6350" cap="flat" cmpd="sng" algn="ctr">
+                      <a:solidFill>
+                        <a:srgbClr val="D5DBE5"/>
+                      </a:solidFill>
+                      <a:prstDash val="solid"/>
+                      <a:round/>
+                      <a:headEnd type="none" w="med" len="med"/>
+                      <a:tailEnd type="none" w="med" len="med"/>
+                    </a:lnB>
+                  </a:tcPr>
+                </a:tc>
+                <a:extLst>
+                  <a:ext uri="{0D108BD9-81ED-4DB2-BD59-A6C34878D82A}">
+                    <a16:rowId xmlns:a16="http://schemas.microsoft.com/office/drawing/2014/main" val="10003"/>
+                  </a:ext>
+                </a:extLst>
+              </a:tr>
+              <a:tr h="384048">
+                <a:tc>
+                  <a:txBody>
+                    <a:bodyPr/>
+                    <a:lstStyle/>
+                    <a:p>
+                      <a:pPr marL="0" indent="0">
+                        <a:buNone/>
+                      </a:pPr>
+                      <a:r>
+                        <a:rPr lang="en-US" sz="1050" dirty="0">
+                          <a:solidFill>
+                            <a:srgbClr val="1B1F2A"/>
+                          </a:solidFill>
+                        </a:rPr>
+                        <a:t>Probit v2 (caveated)</a:t>
+                      </a:r>
+                      <a:endParaRPr lang="en-US" sz="1050" dirty="0"/>
+                    </a:p>
+                  </a:txBody>
+                  <a:tcPr marL="45720" marR="45720" anchor="ctr">
+                    <a:lnL w="6350" cap="flat" cmpd="sng" algn="ctr">
+                      <a:solidFill>
+                        <a:srgbClr val="D5DBE5"/>
+                      </a:solidFill>
+                      <a:prstDash val="solid"/>
+                      <a:round/>
+                      <a:headEnd type="none" w="med" len="med"/>
+                      <a:tailEnd type="none" w="med" len="med"/>
+                    </a:lnL>
+                    <a:lnR w="6350" cap="flat" cmpd="sng" algn="ctr">
+                      <a:solidFill>
+                        <a:srgbClr val="D5DBE5"/>
+                      </a:solidFill>
+                      <a:prstDash val="solid"/>
+                      <a:round/>
+                      <a:headEnd type="none" w="med" len="med"/>
+                      <a:tailEnd type="none" w="med" len="med"/>
+                    </a:lnR>
+                    <a:lnT w="6350" cap="flat" cmpd="sng" algn="ctr">
+                      <a:solidFill>
+                        <a:srgbClr val="D5DBE5"/>
+                      </a:solidFill>
+                      <a:prstDash val="solid"/>
+                      <a:round/>
+                      <a:headEnd type="none" w="med" len="med"/>
+                      <a:tailEnd type="none" w="med" len="med"/>
+                    </a:lnT>
+                    <a:lnB w="6350" cap="flat" cmpd="sng" algn="ctr">
+                      <a:solidFill>
+                        <a:srgbClr val="D5DBE5"/>
+                      </a:solidFill>
+                      <a:prstDash val="solid"/>
+                      <a:round/>
+                      <a:headEnd type="none" w="med" len="med"/>
+                      <a:tailEnd type="none" w="med" len="med"/>
+                    </a:lnB>
+                  </a:tcPr>
+                </a:tc>
+                <a:tc>
+                  <a:txBody>
+                    <a:bodyPr/>
+                    <a:lstStyle/>
+                    <a:p>
+                      <a:pPr marL="0" indent="0" algn="ctr">
+                        <a:buNone/>
+                      </a:pPr>
+                      <a:r>
+                        <a:rPr lang="en-US" sz="1050" dirty="0">
+                          <a:solidFill>
+                            <a:srgbClr val="1B1F2A"/>
+                          </a:solidFill>
+                        </a:rPr>
+                        <a:t>−0.469</a:t>
+                      </a:r>
+                      <a:endParaRPr lang="en-US" sz="1050" dirty="0"/>
+                    </a:p>
+                  </a:txBody>
+                  <a:tcPr marL="45720" marR="45720" anchor="ctr">
+                    <a:lnL w="6350" cap="flat" cmpd="sng" algn="ctr">
+                      <a:solidFill>
+                        <a:srgbClr val="D5DBE5"/>
+                      </a:solidFill>
+                      <a:prstDash val="solid"/>
+                      <a:round/>
+                      <a:headEnd type="none" w="med" len="med"/>
+                      <a:tailEnd type="none" w="med" len="med"/>
+                    </a:lnL>
+                    <a:lnR w="6350" cap="flat" cmpd="sng" algn="ctr">
+                      <a:solidFill>
+                        <a:srgbClr val="D5DBE5"/>
+                      </a:solidFill>
+                      <a:prstDash val="solid"/>
+                      <a:round/>
+                      <a:headEnd type="none" w="med" len="med"/>
+                      <a:tailEnd type="none" w="med" len="med"/>
+                    </a:lnR>
+                    <a:lnT w="6350" cap="flat" cmpd="sng" algn="ctr">
+                      <a:solidFill>
+                        <a:srgbClr val="D5DBE5"/>
+                      </a:solidFill>
+                      <a:prstDash val="solid"/>
+                      <a:round/>
+                      <a:headEnd type="none" w="med" len="med"/>
+                      <a:tailEnd type="none" w="med" len="med"/>
+                    </a:lnT>
+                    <a:lnB w="6350" cap="flat" cmpd="sng" algn="ctr">
+                      <a:solidFill>
+                        <a:srgbClr val="D5DBE5"/>
+                      </a:solidFill>
+                      <a:prstDash val="solid"/>
+                      <a:round/>
+                      <a:headEnd type="none" w="med" len="med"/>
+                      <a:tailEnd type="none" w="med" len="med"/>
+                    </a:lnB>
+                  </a:tcPr>
+                </a:tc>
+                <a:tc>
+                  <a:txBody>
+                    <a:bodyPr/>
+                    <a:lstStyle/>
+                    <a:p>
+                      <a:pPr marL="0" indent="0" algn="ctr">
+                        <a:buNone/>
+                      </a:pPr>
+                      <a:r>
+                        <a:rPr lang="en-US" sz="1050" dirty="0">
+                          <a:solidFill>
+                            <a:srgbClr val="1B1F2A"/>
+                          </a:solidFill>
+                        </a:rPr>
+                        <a:t>−0.353</a:t>
+                      </a:r>
+                      <a:endParaRPr lang="en-US" sz="1050" dirty="0"/>
+                    </a:p>
+                  </a:txBody>
+                  <a:tcPr marL="45720" marR="45720" anchor="ctr">
+                    <a:lnL w="6350" cap="flat" cmpd="sng" algn="ctr">
+                      <a:solidFill>
+                        <a:srgbClr val="D5DBE5"/>
+                      </a:solidFill>
+                      <a:prstDash val="solid"/>
+                      <a:round/>
+                      <a:headEnd type="none" w="med" len="med"/>
+                      <a:tailEnd type="none" w="med" len="med"/>
+                    </a:lnL>
+                    <a:lnR w="6350" cap="flat" cmpd="sng" algn="ctr">
+                      <a:solidFill>
+                        <a:srgbClr val="D5DBE5"/>
+                      </a:solidFill>
+                      <a:prstDash val="solid"/>
+                      <a:round/>
+                      <a:headEnd type="none" w="med" len="med"/>
+                      <a:tailEnd type="none" w="med" len="med"/>
+                    </a:lnR>
+                    <a:lnT w="6350" cap="flat" cmpd="sng" algn="ctr">
+                      <a:solidFill>
+                        <a:srgbClr val="D5DBE5"/>
+                      </a:solidFill>
+                      <a:prstDash val="solid"/>
+                      <a:round/>
+                      <a:headEnd type="none" w="med" len="med"/>
+                      <a:tailEnd type="none" w="med" len="med"/>
+                    </a:lnT>
+                    <a:lnB w="6350" cap="flat" cmpd="sng" algn="ctr">
+                      <a:solidFill>
+                        <a:srgbClr val="D5DBE5"/>
+                      </a:solidFill>
+                      <a:prstDash val="solid"/>
+                      <a:round/>
+                      <a:headEnd type="none" w="med" len="med"/>
+                      <a:tailEnd type="none" w="med" len="med"/>
+                    </a:lnB>
+                  </a:tcPr>
+                </a:tc>
+                <a:tc>
+                  <a:txBody>
+                    <a:bodyPr/>
+                    <a:lstStyle/>
+                    <a:p>
+                      <a:pPr marL="0" indent="0" algn="ctr">
+                        <a:buNone/>
+                      </a:pPr>
+                      <a:r>
+                        <a:rPr lang="en-US" sz="1050" dirty="0">
+                          <a:solidFill>
+                            <a:srgbClr val="1B1F2A"/>
+                          </a:solidFill>
+                        </a:rPr>
+                        <a:t>−0.572</a:t>
+                      </a:r>
+                      <a:endParaRPr lang="en-US" sz="1050" dirty="0"/>
+                    </a:p>
+                  </a:txBody>
+                  <a:tcPr marL="45720" marR="45720" anchor="ctr">
+                    <a:lnL w="6350" cap="flat" cmpd="sng" algn="ctr">
+                      <a:solidFill>
+                        <a:srgbClr val="D5DBE5"/>
+                      </a:solidFill>
+                      <a:prstDash val="solid"/>
+                      <a:round/>
+                      <a:headEnd type="none" w="med" len="med"/>
+                      <a:tailEnd type="none" w="med" len="med"/>
+                    </a:lnL>
+                    <a:lnR w="6350" cap="flat" cmpd="sng" algn="ctr">
+                      <a:solidFill>
+                        <a:srgbClr val="D5DBE5"/>
+                      </a:solidFill>
+                      <a:prstDash val="solid"/>
+                      <a:round/>
+                      <a:headEnd type="none" w="med" len="med"/>
+                      <a:tailEnd type="none" w="med" len="med"/>
+                    </a:lnR>
+                    <a:lnT w="6350" cap="flat" cmpd="sng" algn="ctr">
+                      <a:solidFill>
+                        <a:srgbClr val="D5DBE5"/>
+                      </a:solidFill>
+                      <a:prstDash val="solid"/>
+                      <a:round/>
+                      <a:headEnd type="none" w="med" len="med"/>
+                      <a:tailEnd type="none" w="med" len="med"/>
+                    </a:lnT>
+                    <a:lnB w="6350" cap="flat" cmpd="sng" algn="ctr">
+                      <a:solidFill>
+                        <a:srgbClr val="D5DBE5"/>
+                      </a:solidFill>
+                      <a:prstDash val="solid"/>
+                      <a:round/>
+                      <a:headEnd type="none" w="med" len="med"/>
+                      <a:tailEnd type="none" w="med" len="med"/>
+                    </a:lnB>
+                  </a:tcPr>
+                </a:tc>
+                <a:tc>
+                  <a:txBody>
+                    <a:bodyPr/>
+                    <a:lstStyle/>
+                    <a:p>
+                      <a:pPr marL="0" indent="0" algn="ctr">
+                        <a:buNone/>
+                      </a:pPr>
+                      <a:r>
+                        <a:rPr lang="en-US" sz="1050" dirty="0">
+                          <a:solidFill>
+                            <a:srgbClr val="1B1F2A"/>
+                          </a:solidFill>
+                        </a:rPr>
+                        <a:t>80%</a:t>
+                      </a:r>
+                      <a:endParaRPr lang="en-US" sz="1050" dirty="0"/>
+                    </a:p>
+                  </a:txBody>
+                  <a:tcPr marL="45720" marR="45720" anchor="ctr">
+                    <a:lnL w="6350" cap="flat" cmpd="sng" algn="ctr">
+                      <a:solidFill>
+                        <a:srgbClr val="D5DBE5"/>
+                      </a:solidFill>
+                      <a:prstDash val="solid"/>
+                      <a:round/>
+                      <a:headEnd type="none" w="med" len="med"/>
+                      <a:tailEnd type="none" w="med" len="med"/>
+                    </a:lnL>
+                    <a:lnR w="6350" cap="flat" cmpd="sng" algn="ctr">
+                      <a:solidFill>
+                        <a:srgbClr val="D5DBE5"/>
+                      </a:solidFill>
+                      <a:prstDash val="solid"/>
+                      <a:round/>
+                      <a:headEnd type="none" w="med" len="med"/>
+                      <a:tailEnd type="none" w="med" len="med"/>
+                    </a:lnR>
+                    <a:lnT w="6350" cap="flat" cmpd="sng" algn="ctr">
+                      <a:solidFill>
+                        <a:srgbClr val="D5DBE5"/>
+                      </a:solidFill>
+                      <a:prstDash val="solid"/>
+                      <a:round/>
+                      <a:headEnd type="none" w="med" len="med"/>
+                      <a:tailEnd type="none" w="med" len="med"/>
+                    </a:lnT>
+                    <a:lnB w="6350" cap="flat" cmpd="sng" algn="ctr">
+                      <a:solidFill>
+                        <a:srgbClr val="D5DBE5"/>
+                      </a:solidFill>
+                      <a:prstDash val="solid"/>
+                      <a:round/>
+                      <a:headEnd type="none" w="med" len="med"/>
+                      <a:tailEnd type="none" w="med" len="med"/>
+                    </a:lnB>
+                  </a:tcPr>
+                </a:tc>
+                <a:extLst>
+                  <a:ext uri="{0D108BD9-81ED-4DB2-BD59-A6C34878D82A}">
+                    <a16:rowId xmlns:a16="http://schemas.microsoft.com/office/drawing/2014/main" val="10004"/>
+                  </a:ext>
+                </a:extLst>
+              </a:tr>
+            </a:tbl>
+          </a:graphicData>
+        </a:graphic>
+      </p:graphicFrame>
+      <p:sp>
+        <p:nvSpPr>
+          <p:cNvPr id="9" name="Text 5"/>
+          <p:cNvSpPr txBox="1"/>
+          <p:nvPr/>
+        </p:nvSpPr>
+        <p:spPr>
+          <a:xfrm>
+            <a:off x="6172200" y="3794760"/>
+            <a:ext cx="5468112" cy="685800"/>
+          </a:xfrm>
+          <a:prstGeom prst="rect">
+            <a:avLst/>
+          </a:prstGeom>
+          <a:noFill/>
+          <a:ln/>
+        </p:spPr>
+        <p:txBody>
+          <a:bodyPr wrap="square" lIns="0" tIns="0" rIns="0" bIns="0" rtlCol="0" anchor="t"/>
+          <a:lstStyle/>
+          <a:p>
+            <a:pPr marL="0" indent="0">
+              <a:buNone/>
+            </a:pPr>
+            <a:r>
+              <a:rPr lang="en-US" sz="1000" dirty="0">
+                <a:solidFill>
+                  <a:schemeClr val="accent4"/>
+                </a:solidFill>
+              </a:rPr>
+              <a:t>For each decision from 2010 on: fit on all decisions before it, predict it. Log score: ln of the probability given to what happened (0 is perfect). The base rate given the previous decision beat the fitted model and joined the pool at 0.1 (amendment #6).</a:t>
+            </a:r>
+            <a:endParaRPr lang="en-US" sz="1000" dirty="0"/>
+          </a:p>
+        </p:txBody>
+      </p:sp>
+      <p:sp>
+        <p:nvSpPr>
+          <p:cNvPr id="10" name="Text 6"/>
+          <p:cNvSpPr txBox="1"/>
+          <p:nvPr/>
+        </p:nvSpPr>
+        <p:spPr>
+          <a:xfrm>
+            <a:off x="6172200" y="4526280"/>
+            <a:ext cx="5468112" cy="320040"/>
+          </a:xfrm>
+          <a:prstGeom prst="rect">
+            <a:avLst/>
+          </a:prstGeom>
+          <a:noFill/>
+          <a:ln/>
+        </p:spPr>
+        <p:txBody>
+          <a:bodyPr wrap="square" lIns="0" tIns="0" rIns="0" bIns="0" rtlCol="0" anchor="t"/>
+          <a:lstStyle/>
+          <a:p>
+            <a:pPr marL="0" indent="0">
+              <a:buNone/>
+            </a:pPr>
+            <a:r>
+              <a:rPr lang="en-US" sz="1400" b="1" dirty="0">
+                <a:solidFill>
+                  <a:schemeClr val="tx2"/>
+                </a:solidFill>
+              </a:rPr>
+              <a:t>Why not a bigger model</a:t>
+            </a:r>
+            <a:endParaRPr lang="en-US" sz="1400" dirty="0"/>
+          </a:p>
+        </p:txBody>
+      </p:sp>
+      <p:sp>
+        <p:nvSpPr>
+          <p:cNvPr id="11" name="Text 7"/>
+          <p:cNvSpPr txBox="1"/>
+          <p:nvPr/>
+        </p:nvSpPr>
+        <p:spPr>
+          <a:xfrm>
+            <a:off x="6172200" y="4846320"/>
+            <a:ext cx="5468112" cy="1325880"/>
+          </a:xfrm>
+          <a:prstGeom prst="rect">
+            <a:avLst/>
+          </a:prstGeom>
+          <a:noFill/>
+          <a:ln/>
+        </p:spPr>
+        <p:txBody>
+          <a:bodyPr wrap="square" lIns="0" tIns="0" rIns="0" bIns="0" rtlCol="0" anchor="t"/>
+          <a:lstStyle/>
+          <a:p>
+            <a:pPr marL="0" indent="0">
+              <a:buNone/>
+            </a:pPr>
+            <a:r>
+              <a:rPr lang="en-US" sz="1000" dirty="0">
+                <a:solidFill>
+                  <a:schemeClr val="tx1"/>
+                </a:solidFill>
+              </a:rPr>
+              <a:t>About 130 scheduled decisions with full features, roughly 250 in all; 68% are holds and the cuts cluster in three short episodes. On a sample that small and that unbalanced a boosted tree or a random forest memorises the episodes and a calibration curve on a few dozen non-hold cases is noise. The route is a better-specified small model: features written down before fitting, heavy regularisation, a reliability check beside the log score, the expanding window as the only judge. A regularised boosted model can be one pre-registered candidate, judged the same way.</a:t>
+            </a:r>
+            <a:endParaRPr lang="en-US" sz="1000" dirty="0"/>
+          </a:p>
+        </p:txBody>
+      </p:sp>
+      <p:sp>
+        <p:nvSpPr>
+          <p:cNvPr id="3" name="Slide Number Placeholder 0"/>
+          <p:cNvSpPr>
+            <a:spLocks noGrp="1"/>
+          </p:cNvSpPr>
+          <p:nvPr>
+            <p:ph type="sldNum" sz="quarter" idx="4294967295"/>
+          </p:nvPr>
+        </p:nvSpPr>
+        <p:spPr>
+          <a:xfrm>
+            <a:off x="11091672" y="6400800"/>
+            <a:ext cx="548640" cy="274320"/>
+          </a:xfrm>
+          <a:prstGeom prst="rect">
+            <a:avLst/>
+          </a:prstGeom>
+          <a:extLst>
+            <a:ext uri="{C572A759-6A51-4108-AA02-DFA0A04FC94B}">
+              <ma14:wrappingTextBoxFlag xmlns="" xmlns:ma14="http://schemas.microsoft.com/office/mac/drawingml/2011/main" val="0"/>
+            </a:ext>
+          </a:extLst>
+        </p:spPr>
+        <p:txBody>
+          <a:bodyPr/>
+          <a:lstStyle>
+            <a:lvl1pPr>
+              <a:defRPr sz="1000">
+                <a:solidFill>
+                  <a:srgbClr val="6B7280"/>
+                </a:solidFill>
+              </a:defRPr>
+            </a:lvl1pPr>
+          </a:lstStyle>
+          <a:p>
+            <a:pPr algn="r"/>
+            <a:fld id="{F7021451-1387-4CA6-816F-3879F97B5CBC}" type="slidenum">
+              <a:rPr lang="en-US" b="0"/>
+              <a:t>22</a:t>
+            </a:fld>
+            <a:endParaRPr lang="en-US"/>
+          </a:p>
+        </p:txBody>
+      </p:sp>
+    </p:spTree>
+    <p:extLst>
+      <p:ext uri="{BB962C8B-B14F-4D97-AF65-F5344CB8AC3E}">
+        <p14:creationId xmlns:p14="http://schemas.microsoft.com/office/powerpoint/2010/main" val="742894264"/>
+      </p:ext>
+    </p:extLst>
   </p:cSld>
   <p:clrMapOvr>
     <a:masterClrMapping/>
@@ -16013,6 +21645,13 @@
             </a:outerShdw>
           </a:effectLst>
         </p:spPr>
+        <p:txBody>
+          <a:bodyPr/>
+          <a:lstStyle/>
+          <a:p>
+            <a:endParaRPr lang="en-US"/>
+          </a:p>
+        </p:txBody>
       </p:sp>
       <p:sp>
         <p:nvSpPr>
@@ -16120,7 +21759,23 @@
                   <a:schemeClr val="tx1"/>
                 </a:solidFill>
               </a:rPr>
-              <a:t>Five specialist analysts, every claim quoted and verified by code, lean the number +4.0 bp toward a hike: no change 67.6%, +25 bps 22.4%, +50 bps 7.7%</a:t>
+              <a:t>Five specialist analysts, every claim quoted and verified by code</a:t>
+            </a:r>
+            <a:r>
+              <a:rPr lang="en-US" sz="1200">
+                <a:solidFill>
+                  <a:schemeClr val="tx1"/>
+                </a:solidFill>
+              </a:rPr>
+              <a:t>, move the number 4.0 points toward a hike: </a:t>
+            </a:r>
+            <a:r>
+              <a:rPr lang="en-US" sz="1200" dirty="0">
+                <a:solidFill>
+                  <a:schemeClr val="tx1"/>
+                </a:solidFill>
+              </a:rPr>
+              <a:t>no change 67.6%, +25 bps 22.4%, +50 bps 7.7%</a:t>
             </a:r>
             <a:endParaRPr lang="en-US" sz="1200" dirty="0"/>
           </a:p>
@@ -16177,6 +21832,13 @@
             </a:outerShdw>
           </a:effectLst>
         </p:spPr>
+        <p:txBody>
+          <a:bodyPr/>
+          <a:lstStyle/>
+          <a:p>
+            <a:endParaRPr lang="en-US"/>
+          </a:p>
+        </p:txBody>
       </p:sp>
       <p:sp>
         <p:nvSpPr>
@@ -16444,6 +22106,13 @@
             <a:prstDash val="solid"/>
           </a:ln>
         </p:spPr>
+        <p:txBody>
+          <a:bodyPr/>
+          <a:lstStyle/>
+          <a:p>
+            <a:endParaRPr lang="en-US"/>
+          </a:p>
+        </p:txBody>
       </p:sp>
       <p:sp>
         <p:nvSpPr>
@@ -16507,6 +22176,13 @@
             <a:prstDash val="solid"/>
           </a:ln>
         </p:spPr>
+        <p:txBody>
+          <a:bodyPr/>
+          <a:lstStyle/>
+          <a:p>
+            <a:endParaRPr lang="en-US"/>
+          </a:p>
+        </p:txBody>
       </p:sp>
       <p:sp>
         <p:nvSpPr>
@@ -16628,6 +22304,13 @@
             <a:prstDash val="solid"/>
           </a:ln>
         </p:spPr>
+        <p:txBody>
+          <a:bodyPr/>
+          <a:lstStyle/>
+          <a:p>
+            <a:endParaRPr lang="en-US"/>
+          </a:p>
+        </p:txBody>
       </p:sp>
       <p:sp>
         <p:nvSpPr>
@@ -16767,6 +22450,13 @@
             <a:prstDash val="solid"/>
           </a:ln>
         </p:spPr>
+        <p:txBody>
+          <a:bodyPr/>
+          <a:lstStyle/>
+          <a:p>
+            <a:endParaRPr lang="en-US"/>
+          </a:p>
+        </p:txBody>
       </p:sp>
       <p:sp>
         <p:nvSpPr>
@@ -16942,6 +22632,13 @@
             </a:outerShdw>
           </a:effectLst>
         </p:spPr>
+        <p:txBody>
+          <a:bodyPr/>
+          <a:lstStyle/>
+          <a:p>
+            <a:endParaRPr lang="en-US"/>
+          </a:p>
+        </p:txBody>
       </p:sp>
       <p:sp>
         <p:nvSpPr>
@@ -16967,6 +22664,13 @@
             <a:prstDash val="solid"/>
           </a:ln>
         </p:spPr>
+        <p:txBody>
+          <a:bodyPr/>
+          <a:lstStyle/>
+          <a:p>
+            <a:endParaRPr lang="en-US"/>
+          </a:p>
+        </p:txBody>
       </p:sp>
       <p:sp>
         <p:nvSpPr>
@@ -17161,6 +22865,13 @@
             </a:outerShdw>
           </a:effectLst>
         </p:spPr>
+        <p:txBody>
+          <a:bodyPr/>
+          <a:lstStyle/>
+          <a:p>
+            <a:endParaRPr lang="en-US"/>
+          </a:p>
+        </p:txBody>
       </p:sp>
       <p:sp>
         <p:nvSpPr>
@@ -17186,6 +22897,13 @@
             <a:prstDash val="solid"/>
           </a:ln>
         </p:spPr>
+        <p:txBody>
+          <a:bodyPr/>
+          <a:lstStyle/>
+          <a:p>
+            <a:endParaRPr lang="en-US"/>
+          </a:p>
+        </p:txBody>
       </p:sp>
       <p:sp>
         <p:nvSpPr>
@@ -17380,6 +23098,13 @@
             </a:outerShdw>
           </a:effectLst>
         </p:spPr>
+        <p:txBody>
+          <a:bodyPr/>
+          <a:lstStyle/>
+          <a:p>
+            <a:endParaRPr lang="en-US"/>
+          </a:p>
+        </p:txBody>
       </p:sp>
       <p:sp>
         <p:nvSpPr>
@@ -17405,6 +23130,13 @@
             <a:prstDash val="solid"/>
           </a:ln>
         </p:spPr>
+        <p:txBody>
+          <a:bodyPr/>
+          <a:lstStyle/>
+          <a:p>
+            <a:endParaRPr lang="en-US"/>
+          </a:p>
+        </p:txBody>
       </p:sp>
       <p:sp>
         <p:nvSpPr>
@@ -17599,6 +23331,13 @@
             </a:outerShdw>
           </a:effectLst>
         </p:spPr>
+        <p:txBody>
+          <a:bodyPr/>
+          <a:lstStyle/>
+          <a:p>
+            <a:endParaRPr lang="en-US"/>
+          </a:p>
+        </p:txBody>
       </p:sp>
       <p:sp>
         <p:nvSpPr>
@@ -17624,6 +23363,13 @@
             <a:prstDash val="solid"/>
           </a:ln>
         </p:spPr>
+        <p:txBody>
+          <a:bodyPr/>
+          <a:lstStyle/>
+          <a:p>
+            <a:endParaRPr lang="en-US"/>
+          </a:p>
+        </p:txBody>
       </p:sp>
       <p:sp>
         <p:nvSpPr>
@@ -17809,6 +23555,13 @@
             <a:tailEnd type="triangle"/>
           </a:ln>
         </p:spPr>
+        <p:txBody>
+          <a:bodyPr/>
+          <a:lstStyle/>
+          <a:p>
+            <a:endParaRPr lang="en-US"/>
+          </a:p>
+        </p:txBody>
       </p:sp>
       <p:sp>
         <p:nvSpPr>
@@ -17978,6 +23731,13 @@
             <a:prstDash val="solid"/>
           </a:ln>
         </p:spPr>
+        <p:txBody>
+          <a:bodyPr/>
+          <a:lstStyle/>
+          <a:p>
+            <a:endParaRPr lang="en-US"/>
+          </a:p>
+        </p:txBody>
       </p:sp>
       <p:sp>
         <p:nvSpPr>
@@ -18039,6 +23799,13 @@
             <a:prstDash val="solid"/>
           </a:ln>
         </p:spPr>
+        <p:txBody>
+          <a:bodyPr/>
+          <a:lstStyle/>
+          <a:p>
+            <a:endParaRPr lang="en-US"/>
+          </a:p>
+        </p:txBody>
       </p:sp>
       <p:sp>
         <p:nvSpPr>
@@ -18100,6 +23867,13 @@
             <a:prstDash val="solid"/>
           </a:ln>
         </p:spPr>
+        <p:txBody>
+          <a:bodyPr/>
+          <a:lstStyle/>
+          <a:p>
+            <a:endParaRPr lang="en-US"/>
+          </a:p>
+        </p:txBody>
       </p:sp>
       <p:sp>
         <p:nvSpPr>
@@ -18161,6 +23935,13 @@
             <a:prstDash val="solid"/>
           </a:ln>
         </p:spPr>
+        <p:txBody>
+          <a:bodyPr/>
+          <a:lstStyle/>
+          <a:p>
+            <a:endParaRPr lang="en-US"/>
+          </a:p>
+        </p:txBody>
       </p:sp>
       <p:sp>
         <p:nvSpPr>
@@ -18220,6 +24001,13 @@
             <a:prstDash val="solid"/>
           </a:ln>
         </p:spPr>
+        <p:txBody>
+          <a:bodyPr/>
+          <a:lstStyle/>
+          <a:p>
+            <a:endParaRPr lang="en-US"/>
+          </a:p>
+        </p:txBody>
       </p:sp>
       <p:sp>
         <p:nvSpPr>
@@ -18247,6 +24035,13 @@
             <a:prstDash val="solid"/>
           </a:ln>
         </p:spPr>
+        <p:txBody>
+          <a:bodyPr/>
+          <a:lstStyle/>
+          <a:p>
+            <a:endParaRPr lang="en-US"/>
+          </a:p>
+        </p:txBody>
       </p:sp>
       <p:sp>
         <p:nvSpPr>
@@ -18502,6 +24297,13 @@
             </a:outerShdw>
           </a:effectLst>
         </p:spPr>
+        <p:txBody>
+          <a:bodyPr/>
+          <a:lstStyle/>
+          <a:p>
+            <a:endParaRPr lang="en-US"/>
+          </a:p>
+        </p:txBody>
       </p:sp>
       <p:sp>
         <p:nvSpPr>
@@ -18527,6 +24329,13 @@
             <a:prstDash val="solid"/>
           </a:ln>
         </p:spPr>
+        <p:txBody>
+          <a:bodyPr/>
+          <a:lstStyle/>
+          <a:p>
+            <a:endParaRPr lang="en-US"/>
+          </a:p>
+        </p:txBody>
       </p:sp>
       <p:sp>
         <p:nvSpPr>
@@ -18709,6 +24518,13 @@
             </a:outerShdw>
           </a:effectLst>
         </p:spPr>
+        <p:txBody>
+          <a:bodyPr/>
+          <a:lstStyle/>
+          <a:p>
+            <a:endParaRPr lang="en-US"/>
+          </a:p>
+        </p:txBody>
       </p:sp>
       <p:sp>
         <p:nvSpPr>
@@ -18734,6 +24550,13 @@
             <a:prstDash val="solid"/>
           </a:ln>
         </p:spPr>
+        <p:txBody>
+          <a:bodyPr/>
+          <a:lstStyle/>
+          <a:p>
+            <a:endParaRPr lang="en-US"/>
+          </a:p>
+        </p:txBody>
       </p:sp>
       <p:sp>
         <p:nvSpPr>
@@ -18916,6 +24739,13 @@
             </a:outerShdw>
           </a:effectLst>
         </p:spPr>
+        <p:txBody>
+          <a:bodyPr/>
+          <a:lstStyle/>
+          <a:p>
+            <a:endParaRPr lang="en-US"/>
+          </a:p>
+        </p:txBody>
       </p:sp>
       <p:sp>
         <p:nvSpPr>
@@ -18941,6 +24771,13 @@
             <a:prstDash val="solid"/>
           </a:ln>
         </p:spPr>
+        <p:txBody>
+          <a:bodyPr/>
+          <a:lstStyle/>
+          <a:p>
+            <a:endParaRPr lang="en-US"/>
+          </a:p>
+        </p:txBody>
       </p:sp>
       <p:sp>
         <p:nvSpPr>
@@ -19226,6 +25063,13 @@
             <a:prstDash val="solid"/>
           </a:ln>
         </p:spPr>
+        <p:txBody>
+          <a:bodyPr/>
+          <a:lstStyle/>
+          <a:p>
+            <a:endParaRPr lang="en-US"/>
+          </a:p>
+        </p:txBody>
       </p:sp>
       <p:sp>
         <p:nvSpPr>
@@ -19322,6 +25166,13 @@
             <a:tailEnd type="triangle"/>
           </a:ln>
         </p:spPr>
+        <p:txBody>
+          <a:bodyPr/>
+          <a:lstStyle/>
+          <a:p>
+            <a:endParaRPr lang="en-US"/>
+          </a:p>
+        </p:txBody>
       </p:sp>
       <p:sp>
         <p:nvSpPr>
@@ -19349,6 +25200,13 @@
             <a:prstDash val="solid"/>
           </a:ln>
         </p:spPr>
+        <p:txBody>
+          <a:bodyPr/>
+          <a:lstStyle/>
+          <a:p>
+            <a:endParaRPr lang="en-US"/>
+          </a:p>
+        </p:txBody>
       </p:sp>
       <p:sp>
         <p:nvSpPr>
@@ -19445,6 +25303,13 @@
             <a:tailEnd type="triangle"/>
           </a:ln>
         </p:spPr>
+        <p:txBody>
+          <a:bodyPr/>
+          <a:lstStyle/>
+          <a:p>
+            <a:endParaRPr lang="en-US"/>
+          </a:p>
+        </p:txBody>
       </p:sp>
       <p:sp>
         <p:nvSpPr>
@@ -19472,6 +25337,13 @@
             <a:prstDash val="solid"/>
           </a:ln>
         </p:spPr>
+        <p:txBody>
+          <a:bodyPr/>
+          <a:lstStyle/>
+          <a:p>
+            <a:endParaRPr lang="en-US"/>
+          </a:p>
+        </p:txBody>
       </p:sp>
       <p:sp>
         <p:nvSpPr>
@@ -19568,6 +25440,13 @@
             <a:tailEnd type="triangle"/>
           </a:ln>
         </p:spPr>
+        <p:txBody>
+          <a:bodyPr/>
+          <a:lstStyle/>
+          <a:p>
+            <a:endParaRPr lang="en-US"/>
+          </a:p>
+        </p:txBody>
       </p:sp>
       <p:sp>
         <p:nvSpPr>
@@ -19595,6 +25474,13 @@
             <a:prstDash val="solid"/>
           </a:ln>
         </p:spPr>
+        <p:txBody>
+          <a:bodyPr/>
+          <a:lstStyle/>
+          <a:p>
+            <a:endParaRPr lang="en-US"/>
+          </a:p>
+        </p:txBody>
       </p:sp>
       <p:sp>
         <p:nvSpPr>
@@ -19691,6 +25577,13 @@
             <a:tailEnd type="triangle"/>
           </a:ln>
         </p:spPr>
+        <p:txBody>
+          <a:bodyPr/>
+          <a:lstStyle/>
+          <a:p>
+            <a:endParaRPr lang="en-US"/>
+          </a:p>
+        </p:txBody>
       </p:sp>
       <p:sp>
         <p:nvSpPr>
@@ -19718,6 +25611,13 @@
             <a:prstDash val="solid"/>
           </a:ln>
         </p:spPr>
+        <p:txBody>
+          <a:bodyPr/>
+          <a:lstStyle/>
+          <a:p>
+            <a:endParaRPr lang="en-US"/>
+          </a:p>
+        </p:txBody>
       </p:sp>
       <p:sp>
         <p:nvSpPr>
@@ -19814,6 +25714,13 @@
             <a:tailEnd type="triangle"/>
           </a:ln>
         </p:spPr>
+        <p:txBody>
+          <a:bodyPr/>
+          <a:lstStyle/>
+          <a:p>
+            <a:endParaRPr lang="en-US"/>
+          </a:p>
+        </p:txBody>
       </p:sp>
       <p:sp>
         <p:nvSpPr>
@@ -19841,6 +25748,13 @@
             <a:prstDash val="solid"/>
           </a:ln>
         </p:spPr>
+        <p:txBody>
+          <a:bodyPr/>
+          <a:lstStyle/>
+          <a:p>
+            <a:endParaRPr lang="en-US"/>
+          </a:p>
+        </p:txBody>
       </p:sp>
       <p:sp>
         <p:nvSpPr>
@@ -20002,6 +25916,13 @@
             <a:prstDash val="solid"/>
           </a:ln>
         </p:spPr>
+        <p:txBody>
+          <a:bodyPr/>
+          <a:lstStyle/>
+          <a:p>
+            <a:endParaRPr lang="en-US"/>
+          </a:p>
+        </p:txBody>
       </p:sp>
       <p:sp>
         <p:nvSpPr>
@@ -20099,6 +26020,13 @@
             <a:prstDash val="solid"/>
           </a:ln>
         </p:spPr>
+        <p:txBody>
+          <a:bodyPr/>
+          <a:lstStyle/>
+          <a:p>
+            <a:endParaRPr lang="en-US"/>
+          </a:p>
+        </p:txBody>
       </p:sp>
       <p:sp>
         <p:nvSpPr>
@@ -20196,6 +26124,13 @@
             <a:prstDash val="solid"/>
           </a:ln>
         </p:spPr>
+        <p:txBody>
+          <a:bodyPr/>
+          <a:lstStyle/>
+          <a:p>
+            <a:endParaRPr lang="en-US"/>
+          </a:p>
+        </p:txBody>
       </p:sp>
       <p:sp>
         <p:nvSpPr>
@@ -20293,6 +26228,13 @@
             <a:prstDash val="solid"/>
           </a:ln>
         </p:spPr>
+        <p:txBody>
+          <a:bodyPr/>
+          <a:lstStyle/>
+          <a:p>
+            <a:endParaRPr lang="en-US"/>
+          </a:p>
+        </p:txBody>
       </p:sp>
       <p:sp>
         <p:nvSpPr>
@@ -20390,6 +26332,13 @@
             <a:prstDash val="solid"/>
           </a:ln>
         </p:spPr>
+        <p:txBody>
+          <a:bodyPr/>
+          <a:lstStyle/>
+          <a:p>
+            <a:endParaRPr lang="en-US"/>
+          </a:p>
+        </p:txBody>
       </p:sp>
       <p:sp>
         <p:nvSpPr>
@@ -20487,6 +26436,13 @@
             <a:prstDash val="solid"/>
           </a:ln>
         </p:spPr>
+        <p:txBody>
+          <a:bodyPr/>
+          <a:lstStyle/>
+          <a:p>
+            <a:endParaRPr lang="en-US"/>
+          </a:p>
+        </p:txBody>
       </p:sp>
       <p:sp>
         <p:nvSpPr>
@@ -20679,7 +26635,7 @@
           <p:nvPr>
             <p:extLst>
               <p:ext uri="{D42A27DB-BD31-4B8C-83A1-F6EECF244321}">
-                <p14:modId xmlns:p14="http://schemas.microsoft.com/office/powerpoint/2010/main" val="1579011935"/>
+                <p14:modId xmlns:p14="http://schemas.microsoft.com/office/powerpoint/2010/main" val="1142723790"/>
               </p:ext>
             </p:extLst>
           </p:nvPr>
@@ -23731,7 +29687,23 @@
                             <a:srgbClr val="1B1F2A"/>
                           </a:solidFill>
                         </a:rPr>
-                        <a:t>Mean of analysts 4 to 8, +4.0 bp hawkish = 4.0 points of probability moved toward a hike, capped at 10.</a:t>
+                        <a:t>Mean of analysts 4 to 8</a:t>
+                      </a:r>
+                      <a:r>
+                        <a:rPr lang="en-US" sz="1000">
+                          <a:solidFill>
+                            <a:srgbClr val="1B1F2A"/>
+                          </a:solidFill>
+                        </a:rPr>
+                        <a:t>, +4.0, hawkish: 4.0 points of probability </a:t>
+                      </a:r>
+                      <a:r>
+                        <a:rPr lang="en-US" sz="1000" dirty="0">
+                          <a:solidFill>
+                            <a:srgbClr val="1B1F2A"/>
+                          </a:solidFill>
+                        </a:rPr>
+                        <a:t>moved toward a hike, capped at 10.</a:t>
                       </a:r>
                       <a:endParaRPr lang="en-US" sz="1000" dirty="0"/>
                     </a:p>
@@ -24531,6 +30503,13 @@
             </a:outerShdw>
           </a:effectLst>
         </p:spPr>
+        <p:txBody>
+          <a:bodyPr/>
+          <a:lstStyle/>
+          <a:p>
+            <a:endParaRPr lang="en-US"/>
+          </a:p>
+        </p:txBody>
       </p:sp>
       <p:sp>
         <p:nvSpPr>
@@ -24740,6 +30719,13 @@
             <a:prstDash val="solid"/>
           </a:ln>
         </p:spPr>
+        <p:txBody>
+          <a:bodyPr/>
+          <a:lstStyle/>
+          <a:p>
+            <a:endParaRPr lang="en-US"/>
+          </a:p>
+        </p:txBody>
       </p:sp>
       <p:sp>
         <p:nvSpPr>
@@ -24803,6 +30789,13 @@
             <a:prstDash val="solid"/>
           </a:ln>
         </p:spPr>
+        <p:txBody>
+          <a:bodyPr/>
+          <a:lstStyle/>
+          <a:p>
+            <a:endParaRPr lang="en-US"/>
+          </a:p>
+        </p:txBody>
       </p:sp>
       <p:sp>
         <p:nvSpPr>
@@ -24960,6 +30953,13 @@
             <a:prstDash val="solid"/>
           </a:ln>
         </p:spPr>
+        <p:txBody>
+          <a:bodyPr/>
+          <a:lstStyle/>
+          <a:p>
+            <a:endParaRPr lang="en-US"/>
+          </a:p>
+        </p:txBody>
       </p:sp>
       <p:sp>
         <p:nvSpPr>
@@ -25099,6 +31099,13 @@
             <a:prstDash val="solid"/>
           </a:ln>
         </p:spPr>
+        <p:txBody>
+          <a:bodyPr/>
+          <a:lstStyle/>
+          <a:p>
+            <a:endParaRPr lang="en-US"/>
+          </a:p>
+        </p:txBody>
       </p:sp>
       <p:sp>
         <p:nvSpPr>

--- a/docs/FedCast_Fullerton.pptx
+++ b/docs/FedCast_Fullerton.pptx
@@ -2229,7 +2229,7 @@
           <a:p>
             <a:r>
               <a:rPr lang="en-US" dirty="0"/>
-              <a:t>Three parts. The score and why it stops at 10: it is already in points of probability, and 10 is the most any single input may move the number, the same cap as a human view; a wider range would let the analysts write the number, which the design forbids. The average: one vote each. The spread: the points leave every bucket on the hold-or-cut side and land on both hike buckets, in proportion to size and distance from the middle, so the shape of the distribution is kept and nothing goes to zero.</a:t>
+              <a:t>Three parts. The score: already in points of probability, capped at 10 like a human view. The average: one vote each. The spread: the points leave every bucket on the hold-or-cut side and land on both hike buckets, in proportion to size and distance from the middle, so the shape of the distribution is kept and nothing goes to zero.</a:t>
             </a:r>
           </a:p>
         </p:txBody>
@@ -2260,7 +2260,7 @@
     </p:spTree>
     <p:extLst>
       <p:ext uri="{BB962C8B-B14F-4D97-AF65-F5344CB8AC3E}">
-        <p14:creationId xmlns:p14="http://schemas.microsoft.com/office/powerpoint/2010/main" val="500207554"/>
+        <p14:creationId xmlns:p14="http://schemas.microsoft.com/office/powerpoint/2010/main" val="471727733"/>
       </p:ext>
     </p:extLst>
   </p:cSld>
@@ -3249,7 +3249,7 @@
           </a:prstGeom>
           <a:extLst>
             <a:ext uri="{C572A759-6A51-4108-AA02-DFA0A04FC94B}">
-              <ma14:wrappingTextBoxFlag xmlns:ma14="http://schemas.microsoft.com/office/mac/drawingml/2011/main" xmlns="" val="0"/>
+              <ma14:wrappingTextBoxFlag xmlns="" xmlns:ma14="http://schemas.microsoft.com/office/mac/drawingml/2011/main" val="0"/>
             </a:ext>
           </a:extLst>
         </p:spPr>
@@ -3434,7 +3434,7 @@
           </a:prstGeom>
           <a:extLst>
             <a:ext uri="{C572A759-6A51-4108-AA02-DFA0A04FC94B}">
-              <ma14:wrappingTextBoxFlag xmlns:ma14="http://schemas.microsoft.com/office/mac/drawingml/2011/main" xmlns="" val="0"/>
+              <ma14:wrappingTextBoxFlag xmlns="" xmlns:ma14="http://schemas.microsoft.com/office/mac/drawingml/2011/main" val="0"/>
             </a:ext>
           </a:extLst>
         </p:spPr>
@@ -5426,7 +5426,7 @@
           </a:prstGeom>
           <a:extLst>
             <a:ext uri="{C572A759-6A51-4108-AA02-DFA0A04FC94B}">
-              <ma14:wrappingTextBoxFlag xmlns:ma14="http://schemas.microsoft.com/office/mac/drawingml/2011/main" xmlns="" val="0"/>
+              <ma14:wrappingTextBoxFlag xmlns="" xmlns:ma14="http://schemas.microsoft.com/office/mac/drawingml/2011/main" val="0"/>
             </a:ext>
           </a:extLst>
         </p:spPr>
@@ -7828,7 +7828,7 @@
           </a:prstGeom>
           <a:extLst>
             <a:ext uri="{C572A759-6A51-4108-AA02-DFA0A04FC94B}">
-              <ma14:wrappingTextBoxFlag xmlns:ma14="http://schemas.microsoft.com/office/mac/drawingml/2011/main" xmlns="" val="0"/>
+              <ma14:wrappingTextBoxFlag xmlns="" xmlns:ma14="http://schemas.microsoft.com/office/mac/drawingml/2011/main" val="0"/>
             </a:ext>
           </a:extLst>
         </p:spPr>
@@ -8817,7 +8817,7 @@
           </a:prstGeom>
           <a:extLst>
             <a:ext uri="{C572A759-6A51-4108-AA02-DFA0A04FC94B}">
-              <ma14:wrappingTextBoxFlag xmlns:ma14="http://schemas.microsoft.com/office/mac/drawingml/2011/main" xmlns="" val="0"/>
+              <ma14:wrappingTextBoxFlag xmlns="" xmlns:ma14="http://schemas.microsoft.com/office/mac/drawingml/2011/main" val="0"/>
             </a:ext>
           </a:extLst>
         </p:spPr>
@@ -10481,7 +10481,7 @@
           </a:prstGeom>
           <a:extLst>
             <a:ext uri="{C572A759-6A51-4108-AA02-DFA0A04FC94B}">
-              <ma14:wrappingTextBoxFlag xmlns:ma14="http://schemas.microsoft.com/office/mac/drawingml/2011/main" xmlns="" val="0"/>
+              <ma14:wrappingTextBoxFlag xmlns="" xmlns:ma14="http://schemas.microsoft.com/office/mac/drawingml/2011/main" val="0"/>
             </a:ext>
           </a:extLst>
         </p:spPr>
@@ -13399,7 +13399,7 @@
           </a:prstGeom>
           <a:extLst>
             <a:ext uri="{C572A759-6A51-4108-AA02-DFA0A04FC94B}">
-              <ma14:wrappingTextBoxFlag xmlns:ma14="http://schemas.microsoft.com/office/mac/drawingml/2011/main" xmlns="" val="0"/>
+              <ma14:wrappingTextBoxFlag xmlns="" xmlns:ma14="http://schemas.microsoft.com/office/mac/drawingml/2011/main" val="0"/>
             </a:ext>
           </a:extLst>
         </p:spPr>
@@ -14465,7 +14465,7 @@
           </a:prstGeom>
           <a:extLst>
             <a:ext uri="{C572A759-6A51-4108-AA02-DFA0A04FC94B}">
-              <ma14:wrappingTextBoxFlag xmlns:ma14="http://schemas.microsoft.com/office/mac/drawingml/2011/main" xmlns="" val="0"/>
+              <ma14:wrappingTextBoxFlag xmlns="" xmlns:ma14="http://schemas.microsoft.com/office/mac/drawingml/2011/main" val="0"/>
             </a:ext>
           </a:extLst>
         </p:spPr>
@@ -16303,7 +16303,7 @@
           </a:prstGeom>
           <a:extLst>
             <a:ext uri="{C572A759-6A51-4108-AA02-DFA0A04FC94B}">
-              <ma14:wrappingTextBoxFlag xmlns:ma14="http://schemas.microsoft.com/office/mac/drawingml/2011/main" xmlns="" val="0"/>
+              <ma14:wrappingTextBoxFlag xmlns="" xmlns:ma14="http://schemas.microsoft.com/office/mac/drawingml/2011/main" val="0"/>
             </a:ext>
           </a:extLst>
         </p:spPr>
@@ -16426,13 +16426,6 @@
             </a:outerShdw>
           </a:effectLst>
         </p:spPr>
-        <p:txBody>
-          <a:bodyPr/>
-          <a:lstStyle/>
-          <a:p>
-            <a:endParaRPr lang="en-US"/>
-          </a:p>
-        </p:txBody>
       </p:sp>
       <p:sp>
         <p:nvSpPr>
@@ -16522,7 +16515,7 @@
                   <a:schemeClr val="tx1"/>
                 </a:solidFill>
               </a:rPr>
-              <a:t>Why it stops at 10: ten points is the most any single input may move the number, the same cap a human view has. A range of −100 to +100 would let the analysts write the number; the design lets them shift it, never write it.</a:t>
+              <a:t>Ten is the cap any single input has on the number, the same as a human view.</a:t>
             </a:r>
             <a:endParaRPr lang="en-US" sz="1050" dirty="0"/>
           </a:p>
@@ -19198,7 +19191,7 @@
                   <a:schemeClr val="accent4"/>
                 </a:solidFill>
               </a:rPr>
-              <a:t>Multiplier = e^(0.153 × bucket number) ÷ 1.0486, the rescaling total. Exactly 4.00 points crossed; the after column is the machine forecast recorded as entry #18. The cruder alternative, taking all 4 points from no change and giving them to +25, is easier to say and would be amendment #9 if preferred.</a:t>
+              <a:t>Multiplier = e^(0.153 × position) ÷ 1.0486, where position is −2, −1, 0, +1, +2 and 1.0486 is what the five re-weighted buckets add up to before rescaling. Exactly 4.00 points crossed; the after column is the machine forecast recorded as entry #18.</a:t>
             </a:r>
             <a:endParaRPr lang="en-US" sz="1000" dirty="0"/>
           </a:p>
@@ -19224,7 +19217,7 @@
           </a:prstGeom>
           <a:extLst>
             <a:ext uri="{C572A759-6A51-4108-AA02-DFA0A04FC94B}">
-              <ma14:wrappingTextBoxFlag xmlns="" xmlns:ma14="http://schemas.microsoft.com/office/mac/drawingml/2011/main" val="0"/>
+              <ma14:wrappingTextBoxFlag xmlns:ma14="http://schemas.microsoft.com/office/mac/drawingml/2011/main" xmlns="" val="0"/>
             </a:ext>
           </a:extLst>
         </p:spPr>
@@ -19252,7 +19245,7 @@
     </p:spTree>
     <p:extLst>
       <p:ext uri="{BB962C8B-B14F-4D97-AF65-F5344CB8AC3E}">
-        <p14:creationId xmlns:p14="http://schemas.microsoft.com/office/powerpoint/2010/main" val="2272862402"/>
+        <p14:creationId xmlns:p14="http://schemas.microsoft.com/office/powerpoint/2010/main" val="3859886456"/>
       </p:ext>
     </p:extLst>
   </p:cSld>
@@ -21217,7 +21210,7 @@
           </a:prstGeom>
           <a:extLst>
             <a:ext uri="{C572A759-6A51-4108-AA02-DFA0A04FC94B}">
-              <ma14:wrappingTextBoxFlag xmlns="" xmlns:ma14="http://schemas.microsoft.com/office/mac/drawingml/2011/main" val="0"/>
+              <ma14:wrappingTextBoxFlag xmlns:ma14="http://schemas.microsoft.com/office/mac/drawingml/2011/main" xmlns="" val="0"/>
             </a:ext>
           </a:extLst>
         </p:spPr>
@@ -21990,7 +21983,7 @@
           </a:prstGeom>
           <a:extLst>
             <a:ext uri="{C572A759-6A51-4108-AA02-DFA0A04FC94B}">
-              <ma14:wrappingTextBoxFlag xmlns:ma14="http://schemas.microsoft.com/office/mac/drawingml/2011/main" xmlns="" val="0"/>
+              <ma14:wrappingTextBoxFlag xmlns="" xmlns:ma14="http://schemas.microsoft.com/office/mac/drawingml/2011/main" val="0"/>
             </a:ext>
           </a:extLst>
         </p:spPr>
@@ -24174,7 +24167,7 @@
           </a:prstGeom>
           <a:extLst>
             <a:ext uri="{C572A759-6A51-4108-AA02-DFA0A04FC94B}">
-              <ma14:wrappingTextBoxFlag xmlns:ma14="http://schemas.microsoft.com/office/mac/drawingml/2011/main" xmlns="" val="0"/>
+              <ma14:wrappingTextBoxFlag xmlns="" xmlns:ma14="http://schemas.microsoft.com/office/mac/drawingml/2011/main" val="0"/>
             </a:ext>
           </a:extLst>
         </p:spPr>
@@ -24947,7 +24940,7 @@
           </a:prstGeom>
           <a:extLst>
             <a:ext uri="{C572A759-6A51-4108-AA02-DFA0A04FC94B}">
-              <ma14:wrappingTextBoxFlag xmlns:ma14="http://schemas.microsoft.com/office/mac/drawingml/2011/main" xmlns="" val="0"/>
+              <ma14:wrappingTextBoxFlag xmlns="" xmlns:ma14="http://schemas.microsoft.com/office/mac/drawingml/2011/main" val="0"/>
             </a:ext>
           </a:extLst>
         </p:spPr>
@@ -26536,7 +26529,7 @@
           </a:prstGeom>
           <a:extLst>
             <a:ext uri="{C572A759-6A51-4108-AA02-DFA0A04FC94B}">
-              <ma14:wrappingTextBoxFlag xmlns:ma14="http://schemas.microsoft.com/office/mac/drawingml/2011/main" xmlns="" val="0"/>
+              <ma14:wrappingTextBoxFlag xmlns="" xmlns:ma14="http://schemas.microsoft.com/office/mac/drawingml/2011/main" val="0"/>
             </a:ext>
           </a:extLst>
         </p:spPr>
@@ -30603,7 +30596,7 @@
           </a:prstGeom>
           <a:extLst>
             <a:ext uri="{C572A759-6A51-4108-AA02-DFA0A04FC94B}">
-              <ma14:wrappingTextBoxFlag xmlns:ma14="http://schemas.microsoft.com/office/mac/drawingml/2011/main" xmlns="" val="0"/>
+              <ma14:wrappingTextBoxFlag xmlns="" xmlns:ma14="http://schemas.microsoft.com/office/mac/drawingml/2011/main" val="0"/>
             </a:ext>
           </a:extLst>
         </p:spPr>

--- a/docs/FedCast_Fullerton.pptx
+++ b/docs/FedCast_Fullerton.pptx
@@ -5,31 +5,32 @@
     <p:sldMasterId id="2147483648" r:id="rId1"/>
   </p:sldMasterIdLst>
   <p:notesMasterIdLst>
-    <p:notesMasterId r:id="rId24"/>
+    <p:notesMasterId r:id="rId25"/>
   </p:notesMasterIdLst>
   <p:sldIdLst>
     <p:sldId id="256" r:id="rId2"/>
     <p:sldId id="257" r:id="rId3"/>
-    <p:sldId id="258" r:id="rId4"/>
-    <p:sldId id="259" r:id="rId5"/>
-    <p:sldId id="261" r:id="rId6"/>
-    <p:sldId id="260" r:id="rId7"/>
-    <p:sldId id="262" r:id="rId8"/>
-    <p:sldId id="263" r:id="rId9"/>
-    <p:sldId id="264" r:id="rId10"/>
-    <p:sldId id="265" r:id="rId11"/>
-    <p:sldId id="266" r:id="rId12"/>
-    <p:sldId id="268" r:id="rId13"/>
-    <p:sldId id="269" r:id="rId14"/>
-    <p:sldId id="267" r:id="rId15"/>
-    <p:sldId id="271" r:id="rId16"/>
-    <p:sldId id="273" r:id="rId17"/>
-    <p:sldId id="274" r:id="rId18"/>
-    <p:sldId id="275" r:id="rId19"/>
-    <p:sldId id="276" r:id="rId20"/>
-    <p:sldId id="277" r:id="rId21"/>
-    <p:sldId id="278" r:id="rId22"/>
-    <p:sldId id="279" r:id="rId23"/>
+    <p:sldId id="282" r:id="rId4"/>
+    <p:sldId id="284" r:id="rId5"/>
+    <p:sldId id="259" r:id="rId6"/>
+    <p:sldId id="261" r:id="rId7"/>
+    <p:sldId id="260" r:id="rId8"/>
+    <p:sldId id="281" r:id="rId9"/>
+    <p:sldId id="263" r:id="rId10"/>
+    <p:sldId id="264" r:id="rId11"/>
+    <p:sldId id="283" r:id="rId12"/>
+    <p:sldId id="266" r:id="rId13"/>
+    <p:sldId id="268" r:id="rId14"/>
+    <p:sldId id="269" r:id="rId15"/>
+    <p:sldId id="267" r:id="rId16"/>
+    <p:sldId id="271" r:id="rId17"/>
+    <p:sldId id="273" r:id="rId18"/>
+    <p:sldId id="274" r:id="rId19"/>
+    <p:sldId id="275" r:id="rId20"/>
+    <p:sldId id="276" r:id="rId21"/>
+    <p:sldId id="277" r:id="rId22"/>
+    <p:sldId id="278" r:id="rId23"/>
+    <p:sldId id="279" r:id="rId24"/>
   </p:sldIdLst>
   <p:sldSz cx="12192000" cy="6858000"/>
   <p:notesSz cx="6858000" cy="12192000"/>
@@ -132,26 +133,27 @@
           <p14:sldIdLst>
             <p14:sldId id="256"/>
             <p14:sldId id="257"/>
+            <p14:sldId id="282"/>
+            <p14:sldId id="284"/>
           </p14:sldIdLst>
         </p14:section>
         <p14:section name="Objective" id="{A15A7BD8-DE7C-6B45-BFCB-6F6BC3F0EA31}">
           <p14:sldIdLst>
-            <p14:sldId id="258"/>
             <p14:sldId id="259"/>
             <p14:sldId id="261"/>
             <p14:sldId id="260"/>
+            <p14:sldId id="281"/>
           </p14:sldIdLst>
         </p14:section>
         <p14:section name="How it works" id="{51E39E62-D42A-5461-E95E-6B45ACE96CC0}">
           <p14:sldIdLst>
-            <p14:sldId id="262"/>
             <p14:sldId id="263"/>
             <p14:sldId id="264"/>
+            <p14:sldId id="283"/>
           </p14:sldIdLst>
         </p14:section>
         <p14:section name="The harness" id="{92928B70-AC41-17EA-8015-68E5296D82D9}">
           <p14:sldIdLst>
-            <p14:sldId id="265"/>
             <p14:sldId id="266"/>
             <p14:sldId id="268"/>
           </p14:sldIdLst>
@@ -1177,7 +1179,7 @@
           <a:p>
             <a:r>
               <a:rPr lang="en-US" dirty="0"/>
-              <a:t>Three things a language model cannot be made to stop doing: it remembers, it varies between runs, and it can invent support. None is removed. Each is designed around, and the design is measured on every snapshot. Walk the three columns top to bottom: the limit, what we do, the proof. The proof numbers are from the 28 October records and the four-snapshot means.</a:t>
+              <a:t>This is the longest demo. Start at the raw futures price so the audience sees arithmetic, not a black box. Then the pool box, then one click into an evidence item to show the frozen text.</a:t>
             </a:r>
           </a:p>
         </p:txBody>
@@ -1264,7 +1266,7 @@
           <a:p>
             <a:r>
               <a:rPr lang="en-US" dirty="0"/>
-              <a:t>One model, the same frozen evidence, eight configurations. Left: analysts 1 to 3 are controls, drawn grey and dashed; they never enter the number. Right: the five specialists that do. Every analyst runs five times on the same snapshot; for 1 to 3 those runs build the benchmark 4 to 8 are measured against. Analyst 1 sets the baseline (variance, numbers from memory, nothing quoted); 2 tests what immutable evidence fixes; 3 tests the answer shape and code verification. Each rung adds one thing, so the change in the measurements is the value of that thing.</a:t>
+              <a:t>Three things a language model cannot be made to stop doing: it remembers, it varies between runs, and it can invent support. None is removed; each is designed around. The proof is on the harness slide later.</a:t>
             </a:r>
           </a:p>
         </p:txBody>
@@ -1295,7 +1297,7 @@
     </p:spTree>
     <p:extLst>
       <p:ext uri="{BB962C8B-B14F-4D97-AF65-F5344CB8AC3E}">
-        <p14:creationId xmlns:p14="http://schemas.microsoft.com/office/powerpoint/2010/main" val="1024086991"/>
+        <p14:creationId xmlns:p14="http://schemas.microsoft.com/office/powerpoint/2010/main" val="51336607"/>
       </p:ext>
     </p:extLst>
   </p:cSld>
@@ -1351,7 +1353,7 @@
           <a:p>
             <a:r>
               <a:rPr lang="en-US" dirty="0"/>
-              <a:t>Open analyst 1 first so the contrast with analyst 6 lands. Scroll the full prompt slowly past the schema and the pre-read; do not read it out.</a:t>
+              <a:t>One model, the same frozen evidence, eight configurations. Left: analysts 1 to 3 are controls, drawn grey and dashed; they never enter the number. Right: the five specialists that do. Every analyst runs five times on the same snapshot; for 1 to 3 those runs build the benchmark 4 to 8 are measured against. Analyst 1 sets the baseline (variance, numbers from memory, nothing quoted); 2 tests what immutable evidence fixes; 3 tests the answer shape and code verification. Each rung adds one thing, so the change in the measurements is the value of that thing.</a:t>
             </a:r>
           </a:p>
         </p:txBody>
@@ -1438,15 +1440,7 @@
           <a:p>
             <a:r>
               <a:rPr lang="en-US" dirty="0"/>
-              <a:t>Three charts, one per dimension, averaged over the four snapshots. Left: how much the answer moves between identical runs. The step that matters is analyst 2 to analyst 3: the answer shape and the verifier take the wobble from three and a half points to under one. Middle: numbers from memory, gone as soon as the evidence is shown. Right: share of claims whose quote code found verbatim; analyst 2 cannot be measured because it quotes nothing. The specialists keep what analyst 3 achieved. For analysts 3 to 8 the wobble is in their lean</a:t>
-            </a:r>
-            <a:r>
-              <a:rPr lang="en-US"/>
-              <a:t>, which is already in points of probability, </a:t>
-            </a:r>
-            <a:r>
-              <a:rPr lang="en-US" dirty="0"/>
-              <a:t>so the four bars are comparable.</a:t>
+              <a:t>Open analyst 1 first so the contrast with analyst 6 lands. Scroll the full prompt slowly past the schema and the pre-read; do not read it out.</a:t>
             </a:r>
           </a:p>
         </p:txBody>
@@ -1533,7 +1527,15 @@
           <a:p>
             <a:r>
               <a:rPr lang="en-US" dirty="0"/>
-              <a:t>One line of method, then the outcome. Each specialist runs five times on the same frozen snapshot; the five answers must sit within the variance pass mark, every claim must carry a quote code finds, and no number may come from memory. Only then does the lean count. The band is the 28 October run; bottom left is what the five said and what it did to the number; bottom right is one claim as recorded, with the quote code found.</a:t>
+              <a:t>Three charts, one per dimension, averaged over the four snapshots. Left: how much the answer moves between identical runs. The step that matters is analyst 2 to analyst 3: the answer shape and the verifier take the wobble from three and a half points to under one. Middle: numbers from memory, gone as soon as the evidence is shown. Right: share of claims whose quote code found verbatim; analyst 2 cannot be measured because it quotes nothing. The specialists keep what analyst 3 achieved. For analysts 3 to 8 the wobble is </a:t>
+            </a:r>
+            <a:r>
+              <a:rPr lang="en-US"/>
+              <a:t>in their opinion, which is already in points of probability, </a:t>
+            </a:r>
+            <a:r>
+              <a:rPr lang="en-US" dirty="0"/>
+              <a:t>so the four bars are comparable.</a:t>
             </a:r>
           </a:p>
         </p:txBody>
@@ -1564,7 +1566,7 @@
     </p:spTree>
     <p:extLst>
       <p:ext uri="{BB962C8B-B14F-4D97-AF65-F5344CB8AC3E}">
-        <p14:creationId xmlns:p14="http://schemas.microsoft.com/office/powerpoint/2010/main" val="1868112504"/>
+        <p14:creationId xmlns:p14="http://schemas.microsoft.com/office/powerpoint/2010/main" val="1024086991"/>
       </p:ext>
     </p:extLst>
   </p:cSld>
@@ -1620,7 +1622,15 @@
           <a:p>
             <a:r>
               <a:rPr lang="en-US" dirty="0"/>
-              <a:t>If asked where a quote comes from, open the statement claim on analyst 4: the quote is the statement's own line, found by code in item fed.statement.2026-09-16.</a:t>
+              <a:t>One line of method, then the outcome. Each specialist runs five times on the same frozen snapshot; the five answers must sit within the variance pass mark, every claim must carry a quote code finds, and no number may come from memory. Only then </a:t>
+            </a:r>
+            <a:r>
+              <a:rPr lang="en-US"/>
+              <a:t>does the opinion count. </a:t>
+            </a:r>
+            <a:r>
+              <a:rPr lang="en-US" dirty="0"/>
+              <a:t>The band is the 28 October run; bottom left is what the five said and what it did to the number; bottom right is one claim as recorded, with the quote code found.</a:t>
             </a:r>
           </a:p>
         </p:txBody>
@@ -1651,7 +1661,7 @@
     </p:spTree>
     <p:extLst>
       <p:ext uri="{BB962C8B-B14F-4D97-AF65-F5344CB8AC3E}">
-        <p14:creationId xmlns:p14="http://schemas.microsoft.com/office/powerpoint/2010/main" val="1024086991"/>
+        <p14:creationId xmlns:p14="http://schemas.microsoft.com/office/powerpoint/2010/main" val="1868112504"/>
       </p:ext>
     </p:extLst>
   </p:cSld>
@@ -1707,7 +1717,7 @@
           <a:p>
             <a:r>
               <a:rPr lang="en-US" dirty="0"/>
-              <a:t>If time is short, skip the dropdown and go straight to the over-time table.</a:t>
+              <a:t>If asked where a quote comes from, open the statement claim on analyst 4: the quote is the statement's own line, found by code in item fed.statement.2026-09-16.</a:t>
             </a:r>
           </a:p>
         </p:txBody>
@@ -1794,7 +1804,7 @@
           <a:p>
             <a:r>
               <a:rPr lang="en-US" dirty="0"/>
-              <a:t>One minute. Press the button, read the result line, move on.</a:t>
+              <a:t>If time is short, skip the dropdown and go straight to the over-time table.</a:t>
             </a:r>
           </a:p>
         </p:txBody>
@@ -1881,7 +1891,7 @@
           <a:p>
             <a:r>
               <a:rPr lang="en-US" dirty="0"/>
-              <a:t>Six follow-ups, in order of value. One: pre-registered weight sets scored on every live decision, so the weights stop being judgement. Two: reasoning quality graded by people in the app, which becomes the tenth measured dimension and a gate. Three: an events agent for the regime shifts the models cannot read. Four: a second model family to show the harness, not the model, does the work. Five: other central banks; the chain needs a calendar, a rate series, the statements and a curve, and the scorecard transfers unchanged. Six: better classical models, judged by the expanding window only.</a:t>
+              <a:t>One minute. Press the button, read the result line, move on.</a:t>
             </a:r>
           </a:p>
         </p:txBody>
@@ -1912,7 +1922,7 @@
     </p:spTree>
     <p:extLst>
       <p:ext uri="{BB962C8B-B14F-4D97-AF65-F5344CB8AC3E}">
-        <p14:creationId xmlns:p14="http://schemas.microsoft.com/office/powerpoint/2010/main" val="1508859901"/>
+        <p14:creationId xmlns:p14="http://schemas.microsoft.com/office/powerpoint/2010/main" val="1024086991"/>
       </p:ext>
     </p:extLst>
   </p:cSld>
@@ -1968,7 +1978,7 @@
           <a:p>
             <a:r>
               <a:rPr lang="en-US" dirty="0"/>
-              <a:t>Close on the ask. The forecast for 28 October is on file; the scoring is automatic from here; what the room can add is scrutiny and the next target.</a:t>
+              <a:t>Six follow-ups, in order of value. One: pre-registered weight sets scored on every live decision, so the weights stop being judgement. Two: reasoning quality graded by people in the app, which becomes the tenth measured dimension and a gate. Three: an events agent for the regime shifts the models cannot read. Four: a second model family to show the harness, not the model, does the work. Five: other central banks; the chain needs a calendar, a rate series, the statements and a curve, and the scorecard transfers unchanged. Six: better classical models, judged by the expanding window only.</a:t>
             </a:r>
           </a:p>
         </p:txBody>
@@ -1999,7 +2009,7 @@
     </p:spTree>
     <p:extLst>
       <p:ext uri="{BB962C8B-B14F-4D97-AF65-F5344CB8AC3E}">
-        <p14:creationId xmlns:p14="http://schemas.microsoft.com/office/powerpoint/2010/main" val="1024086991"/>
+        <p14:creationId xmlns:p14="http://schemas.microsoft.com/office/powerpoint/2010/main" val="1508859901"/>
       </p:ext>
     </p:extLst>
   </p:cSld>
@@ -2142,7 +2152,7 @@
           <a:p>
             <a:r>
               <a:rPr lang="en-US" dirty="0"/>
-              <a:t>Read left to right as an evolution. Analyst 1 wobbles by three to five points between identical runs, cites nothing, and leaks three dozen numbers from memory; it still thinks the Fed is cutting. Adding the evidence (analyst 2) removes the leaks but not the wobble, and nothing can be checked. Adding the answer shape and the verifier (analyst 3) is the step that makes the output stable and fully verifiable. Specialists (4 to 8) keep that and add attribution. Same model, same day; the difference at each step is the one thing added.</a:t>
+              <a:t>Close on the ask. The forecast for 28 October is on file; the scoring is automatic from here; what the room can add is scrutiny and the next target.</a:t>
             </a:r>
           </a:p>
         </p:txBody>
@@ -2229,7 +2239,7 @@
           <a:p>
             <a:r>
               <a:rPr lang="en-US" dirty="0"/>
-              <a:t>Three parts. The score: already in points of probability, capped at 10 like a human view. The average: one vote each. The spread: the points leave every bucket on the hold-or-cut side and land on both hike buckets, in proportion to size and distance from the middle, so the shape of the distribution is kept and nothing goes to zero.</a:t>
+              <a:t>Read left to right as an evolution. Analyst 1 wobbles by three to five points between identical runs, cites nothing, and leaks three dozen numbers from memory; it still thinks the Fed is cutting. Adding the evidence (analyst 2) removes the leaks but not the wobble, and nothing can be checked. Adding the answer shape and the verifier (analyst 3) is the step that makes the output stable and fully verifiable. Specialists (4 to 8) keep that and add attribution. Same model, same day; the difference at each step is the one thing added.</a:t>
             </a:r>
           </a:p>
         </p:txBody>
@@ -2260,7 +2270,7 @@
     </p:spTree>
     <p:extLst>
       <p:ext uri="{BB962C8B-B14F-4D97-AF65-F5344CB8AC3E}">
-        <p14:creationId xmlns:p14="http://schemas.microsoft.com/office/powerpoint/2010/main" val="471727733"/>
+        <p14:creationId xmlns:p14="http://schemas.microsoft.com/office/powerpoint/2010/main" val="1024086991"/>
       </p:ext>
     </p:extLst>
   </p:cSld>
@@ -2316,7 +2326,7 @@
           <a:p>
             <a:r>
               <a:rPr lang="en-US" dirty="0"/>
-              <a:t>The quant side's own test. A first ordered probit, spec frozen before fitting, failed its out-of-sample gate and was reported, not tuned. A second version beats the base rate on the expanding window but was specified after seeing the first fail, so it carries a contamination caveat and waits for live decisions. The base rates, which need no fitting, beat the fitted model and are the yardstick. Below: why no gradient-boosted anything.</a:t>
+              <a:t>Three parts. The score: already in points of probability, capped at 10 like a human view. The average: one vote each. The spread: the points leave every bucket on the hold-or-cut side and land on both hike buckets, in proportion to size and distance from the middle, so the shape of the distribution is kept and nothing goes to zero.</a:t>
             </a:r>
           </a:p>
         </p:txBody>
@@ -2339,6 +2349,93 @@
             <a:fld id="{F7021451-1387-4CA6-816F-3879F97B5CBC}" type="slidenum">
               <a:rPr lang="en-US"/>
               <a:t>22</a:t>
+            </a:fld>
+            <a:endParaRPr lang="en-US"/>
+          </a:p>
+        </p:txBody>
+      </p:sp>
+    </p:spTree>
+    <p:extLst>
+      <p:ext uri="{BB962C8B-B14F-4D97-AF65-F5344CB8AC3E}">
+        <p14:creationId xmlns:p14="http://schemas.microsoft.com/office/powerpoint/2010/main" val="471727733"/>
+      </p:ext>
+    </p:extLst>
+  </p:cSld>
+  <p:clrMapOvr>
+    <a:masterClrMapping/>
+  </p:clrMapOvr>
+</p:notes>
+</file>
+
+<file path=ppt/notesSlides/notesSlide23.xml><?xml version="1.0" encoding="utf-8"?>
+<p:notes xmlns:a="http://schemas.openxmlformats.org/drawingml/2006/main" xmlns:r="http://schemas.openxmlformats.org/officeDocument/2006/relationships" xmlns:p="http://schemas.openxmlformats.org/presentationml/2006/main">
+  <p:cSld>
+    <p:spTree>
+      <p:nvGrpSpPr>
+        <p:cNvPr id="1" name=""/>
+        <p:cNvGrpSpPr/>
+        <p:nvPr/>
+      </p:nvGrpSpPr>
+      <p:grpSpPr>
+        <a:xfrm>
+          <a:off x="0" y="0"/>
+          <a:ext cx="0" cy="0"/>
+          <a:chOff x="0" y="0"/>
+          <a:chExt cx="0" cy="0"/>
+        </a:xfrm>
+      </p:grpSpPr>
+      <p:sp>
+        <p:nvSpPr>
+          <p:cNvPr id="2" name="Slide Image Placeholder 1"/>
+          <p:cNvSpPr>
+            <a:spLocks noGrp="1" noRot="1" noChangeAspect="1"/>
+          </p:cNvSpPr>
+          <p:nvPr>
+            <p:ph type="sldImg"/>
+          </p:nvPr>
+        </p:nvSpPr>
+        <p:spPr/>
+      </p:sp>
+      <p:sp>
+        <p:nvSpPr>
+          <p:cNvPr id="3" name="Notes Placeholder 2"/>
+          <p:cNvSpPr>
+            <a:spLocks noGrp="1"/>
+          </p:cNvSpPr>
+          <p:nvPr>
+            <p:ph type="body" idx="1"/>
+          </p:nvPr>
+        </p:nvSpPr>
+        <p:spPr/>
+        <p:txBody>
+          <a:bodyPr/>
+          <a:lstStyle/>
+          <a:p>
+            <a:r>
+              <a:rPr lang="en-US" dirty="0"/>
+              <a:t>The quant side's own test. A first ordered probit, spec frozen before fitting, failed its out-of-sample gate and was reported, not tuned. A second version beats the base rate on the expanding window but was specified after seeing the first fail, so it carries a contamination caveat and waits for live decisions. The base rates, which need no fitting, beat the fitted model and are the yardstick. Below: why no gradient-boosted anything.</a:t>
+            </a:r>
+          </a:p>
+        </p:txBody>
+      </p:sp>
+      <p:sp>
+        <p:nvSpPr>
+          <p:cNvPr id="4" name="Slide Number Placeholder 3"/>
+          <p:cNvSpPr>
+            <a:spLocks noGrp="1"/>
+          </p:cNvSpPr>
+          <p:nvPr>
+            <p:ph type="sldNum" sz="quarter" idx="10"/>
+          </p:nvPr>
+        </p:nvSpPr>
+        <p:spPr/>
+        <p:txBody>
+          <a:bodyPr/>
+          <a:lstStyle/>
+          <a:p>
+            <a:fld id="{F7021451-1387-4CA6-816F-3879F97B5CBC}" type="slidenum">
+              <a:rPr lang="en-US"/>
+              <a:t>23</a:t>
             </a:fld>
             <a:endParaRPr lang="en-US"/>
           </a:p>
@@ -2403,15 +2500,7 @@
           <a:p>
             <a:r>
               <a:rPr lang="en-US" dirty="0"/>
-              <a:t>The question is narrow on purpose: what will the FOMC decide at its next scheduled meeting, as probabilities over five outcomes. The final entry before the meeting said no change at 67.6%, hike at 22.4%, with the </a:t>
-            </a:r>
-            <a:r>
-              <a:rPr lang="en-US"/>
-              <a:t>specialists leaning hawkish by four points. </a:t>
-            </a:r>
-            <a:r>
-              <a:rPr lang="en-US" dirty="0"/>
-              <a:t>The Fed held, ten votes to two, and both dissents wanted the quarter-point hike the specialists were leaning toward. Say plainly that the market alone was more confident (90/10) and we do not claim to beat it at five weeks; what the system adds is the reasons, and the vote bore the reasons out. Then: one decision proves little, which is why the rest of the talk is about process.</a:t>
+              <a:t>One minute. The thread: a decision was made, here is how we called it, why we built the tool this way, how the number is put together, what the language model is allowed to do and how we prove it behaves, and what comes next. Six stops, with the app opened between them.</a:t>
             </a:r>
           </a:p>
         </p:txBody>
@@ -2442,7 +2531,7 @@
     </p:spTree>
     <p:extLst>
       <p:ext uri="{BB962C8B-B14F-4D97-AF65-F5344CB8AC3E}">
-        <p14:creationId xmlns:p14="http://schemas.microsoft.com/office/powerpoint/2010/main" val="1024086991"/>
+        <p14:creationId xmlns:p14="http://schemas.microsoft.com/office/powerpoint/2010/main" val="2491336763"/>
       </p:ext>
     </p:extLst>
   </p:cSld>
@@ -2498,7 +2587,7 @@
           <a:p>
             <a:r>
               <a:rPr lang="en-US" dirty="0"/>
-              <a:t>Keep this to one minute. The point is only that the number exists, is dated, and is traceable. Do not explain the models yet.</a:t>
+              <a:t>Left, three points: where the numbers come from, the pool of classic models, the LLM analysts on top. Right, three points: we hit the target but so did the market and the odds, and we do not claim to beat them at five weeks; the LLM analysts got the direction right, and the table shows each one's opinion against the vote; every reason is a quote found in the evidence, and one decision proves little, so the scoring is formal and the rest of the talk is about process.</a:t>
             </a:r>
           </a:p>
         </p:txBody>
@@ -2529,7 +2618,7 @@
     </p:spTree>
     <p:extLst>
       <p:ext uri="{BB962C8B-B14F-4D97-AF65-F5344CB8AC3E}">
-        <p14:creationId xmlns:p14="http://schemas.microsoft.com/office/powerpoint/2010/main" val="1024086991"/>
+        <p14:creationId xmlns:p14="http://schemas.microsoft.com/office/powerpoint/2010/main" val="694709229"/>
       </p:ext>
     </p:extLst>
   </p:cSld>
@@ -2585,7 +2674,7 @@
           <a:p>
             <a:r>
               <a:rPr lang="en-US" dirty="0"/>
-              <a:t>Four kinds of signal exist already; each is good at one thing. Market prices are the best single predictor at thirty days and are the anchor of the pool. Surveys carry judgement; FedCast takes the data the committee reads instead, as history and a fitted model. The rules are the Fed's own benchmarks. The LLM papers show a model can read the Fed, on sixteen meetings. FedCast's claim is not a better guess but the combination: one of each kind, pooled by code at fixed weights, every number traceable to frozen evidence.</a:t>
+              <a:t>Keep this to one minute. The point is only that the number exists, is dated, and is traceable. Do not explain the models yet.</a:t>
             </a:r>
           </a:p>
         </p:txBody>
@@ -2672,7 +2761,7 @@
           <a:p>
             <a:r>
               <a:rPr lang="en-US" dirty="0"/>
-              <a:t>Three reasons, the first is the one to land. Eight decisions a year cannot tell skill from luck, so we judge the process with a scorecard fixed before any code. Second, auditable means concrete: an analyst that says inflation is elevated must quote the line it read and code must find it. Third, because everything is quotable and the analysts can read only the evidence, a wrong call is a traceable wrong call, and because the harness is repeatable it goes wrong the same way every time, so a fix can be tested and stays fixed. Details later in the deck: the ladder, the scorecard, the drift table.</a:t>
+              <a:t>Four kinds of signal exist already; each is good at one thing. Market prices are the best single predictor at thirty days and are the anchor of the pool. Surveys carry judgement; FedCast takes the data the committee reads instead, as history and a fitted model. The rules are the Fed's own benchmarks. The LLM papers show a model can read the Fed, on sixteen meetings. FedCast's claim is not a better guess but the combination: one of each kind, pooled by code at fixed weights, every number traceable to frozen evidence.</a:t>
             </a:r>
           </a:p>
         </p:txBody>
@@ -2759,7 +2848,7 @@
           <a:p>
             <a:r>
               <a:rPr lang="en-US" dirty="0"/>
-              <a:t>Left: the diagram from the brief. Four families of input, combined by code with fixed, published weights; no model writes the number. The language-model family enters only as a bounded lean. Right: the chain in order, each line a view in the app. Walk the diagram first, then the chain.</a:t>
+              <a:t>Three reasons, the first is the one to land. Eight decisions a year cannot tell skill from luck, so we judge the process with a scorecard fixed before any code. Second, auditable means concrete: an analyst that says inflation is elevated must quote the line it read and code must find it. Third, because everything is quotable and the analysts can read only the evidence, a wrong call is a traceable wrong call, and because the harness is repeatable it goes wrong the same way every time, so a fix can be tested and stays fixed. Details later in the deck: the ladder, the scorecard, the drift table.</a:t>
             </a:r>
           </a:p>
         </p:txBody>
@@ -2846,15 +2935,7 @@
           <a:p>
             <a:r>
               <a:rPr lang="en-US" dirty="0"/>
-              <a:t>Entry 18, the final one before the meeting. The pool is a weighted average, then the floor. The specialists</a:t>
-            </a:r>
-            <a:r>
-              <a:rPr lang="en-US"/>
-              <a:t>' mean score of +4.0 is 4.0 points of probability </a:t>
-            </a:r>
-            <a:r>
-              <a:rPr lang="en-US" dirty="0"/>
-              <a:t>moved toward a hike, through the same capped mechanism a human view uses. The lean row is tinted and labelled 'after pooling': it is a modifier on the pooled number, not a model in the pool. Then the footer: the weights are judgement, logged; ideally they would be backtested, but there is no live record yet, so live scores from 28 October onward decide them by amendment.</a:t>
+              <a:t>Left: the diagram from the brief. Four families of input, combined by code with fixed, published weights; no model writes the number. The language-model family enters only as a bounded opinion. Right: the chain in order, each line a view in the app. Walk the diagram first, then the chain.</a:t>
             </a:r>
           </a:p>
         </p:txBody>
@@ -2885,7 +2966,7 @@
     </p:spTree>
     <p:extLst>
       <p:ext uri="{BB962C8B-B14F-4D97-AF65-F5344CB8AC3E}">
-        <p14:creationId xmlns:p14="http://schemas.microsoft.com/office/powerpoint/2010/main" val="1024086991"/>
+        <p14:creationId xmlns:p14="http://schemas.microsoft.com/office/powerpoint/2010/main" val="1803683850"/>
       </p:ext>
     </p:extLst>
   </p:cSld>
@@ -2941,7 +3022,23 @@
           <a:p>
             <a:r>
               <a:rPr lang="en-US" dirty="0"/>
-              <a:t>This is the longest demo. Start at the raw futures price so the audience sees arithmetic, not a black box. Then the pool box, then one click into an evidence item to show the frozen text.</a:t>
+              <a:t>Entry 18, the final one before the meeting. The pool is a weighted average, then the floor. The specialists</a:t>
+            </a:r>
+            <a:r>
+              <a:rPr lang="en-US"/>
+              <a:t>' mean score of +4.0 is 4.0 points of probability </a:t>
+            </a:r>
+            <a:r>
+              <a:rPr lang="en-US" dirty="0"/>
+              <a:t>moved toward a hike, through the same capped mechanism a human view uses</a:t>
+            </a:r>
+            <a:r>
+              <a:rPr lang="en-US"/>
+              <a:t>. The opinion </a:t>
+            </a:r>
+            <a:r>
+              <a:rPr lang="en-US" dirty="0"/>
+              <a:t>row is tinted and labelled 'after pooling': it is a modifier on the pooled number, not a model in the pool. Then the footer: the weights are judgement, logged; ideally they would be backtested, but there is no live record yet, so live scores from 28 October onward decide them by amendment.</a:t>
             </a:r>
           </a:p>
         </p:txBody>
@@ -3865,7 +3962,7 @@
 
 <file path=ppt/slides/slide10.xml><?xml version="1.0" encoding="utf-8"?>
 <p:sld xmlns:a="http://schemas.openxmlformats.org/drawingml/2006/main" xmlns:r="http://schemas.openxmlformats.org/officeDocument/2006/relationships" xmlns:p="http://schemas.openxmlformats.org/presentationml/2006/main">
-  <p:cSld name="Slide 10">
+  <p:cSld name="Slide 9">
     <p:spTree>
       <p:nvGrpSpPr>
         <p:cNvPr id="1" name=""/>
@@ -3892,6 +3989,587 @@
         </p:nvSpPr>
         <p:spPr>
           <a:xfrm>
+            <a:off x="548640" y="548640"/>
+            <a:ext cx="11091672" cy="822960"/>
+          </a:xfrm>
+          <a:prstGeom prst="rect">
+            <a:avLst/>
+          </a:prstGeom>
+          <a:noFill/>
+          <a:ln/>
+        </p:spPr>
+        <p:txBody>
+          <a:bodyPr wrap="square" lIns="0" tIns="0" rIns="0" bIns="0" rtlCol="0" anchor="ctr"/>
+          <a:lstStyle/>
+          <a:p>
+            <a:pPr marL="0" indent="0" algn="l">
+              <a:buNone/>
+            </a:pPr>
+            <a:r>
+              <a:rPr lang="en-US" sz="3000" b="1" dirty="0">
+                <a:solidFill>
+                  <a:schemeClr val="bg1"/>
+                </a:solidFill>
+              </a:rPr>
+              <a:t>Live demo 2: the evidence graph and the pool</a:t>
+            </a:r>
+            <a:endParaRPr lang="en-US" sz="3000" dirty="0"/>
+          </a:p>
+        </p:txBody>
+      </p:sp>
+      <p:sp>
+        <p:nvSpPr>
+          <p:cNvPr id="3" name="Shape 1"/>
+          <p:cNvSpPr/>
+          <p:nvPr/>
+        </p:nvSpPr>
+        <p:spPr>
+          <a:xfrm>
+            <a:off x="10177272" y="685800"/>
+            <a:ext cx="1463040" cy="548640"/>
+          </a:xfrm>
+          <a:prstGeom prst="roundRect">
+            <a:avLst>
+              <a:gd name="adj" fmla="val 16667"/>
+            </a:avLst>
+          </a:prstGeom>
+          <a:solidFill>
+            <a:srgbClr val="E9B44C"/>
+          </a:solidFill>
+          <a:ln w="12700">
+            <a:solidFill>
+              <a:srgbClr val="E9B44C"/>
+            </a:solidFill>
+            <a:prstDash val="solid"/>
+          </a:ln>
+        </p:spPr>
+        <p:txBody>
+          <a:bodyPr/>
+          <a:lstStyle/>
+          <a:p>
+            <a:endParaRPr lang="en-US"/>
+          </a:p>
+        </p:txBody>
+      </p:sp>
+      <p:sp>
+        <p:nvSpPr>
+          <p:cNvPr id="4" name="Text 2"/>
+          <p:cNvSpPr txBox="1"/>
+          <p:nvPr/>
+        </p:nvSpPr>
+        <p:spPr>
+          <a:xfrm>
+            <a:off x="10177272" y="685800"/>
+            <a:ext cx="1463040" cy="548640"/>
+          </a:xfrm>
+          <a:prstGeom prst="rect">
+            <a:avLst/>
+          </a:prstGeom>
+          <a:noFill/>
+          <a:ln/>
+        </p:spPr>
+        <p:txBody>
+          <a:bodyPr wrap="square" lIns="0" tIns="0" rIns="0" bIns="0" rtlCol="0" anchor="ctr"/>
+          <a:lstStyle/>
+          <a:p>
+            <a:pPr marL="0" indent="0" algn="ctr">
+              <a:buNone/>
+            </a:pPr>
+            <a:r>
+              <a:rPr lang="en-US" sz="1600" b="1" dirty="0">
+                <a:solidFill>
+                  <a:srgbClr val="1B1F2A"/>
+                </a:solidFill>
+              </a:rPr>
+              <a:t>3 min</a:t>
+            </a:r>
+            <a:endParaRPr lang="en-US" sz="1600" dirty="0"/>
+          </a:p>
+        </p:txBody>
+      </p:sp>
+      <p:sp>
+        <p:nvSpPr>
+          <p:cNvPr id="5" name="Shape 3"/>
+          <p:cNvSpPr/>
+          <p:nvPr/>
+        </p:nvSpPr>
+        <p:spPr>
+          <a:xfrm>
+            <a:off x="548640" y="1737360"/>
+            <a:ext cx="3520440" cy="3200400"/>
+          </a:xfrm>
+          <a:prstGeom prst="roundRect">
+            <a:avLst>
+              <a:gd name="adj" fmla="val 3429"/>
+            </a:avLst>
+          </a:prstGeom>
+          <a:solidFill>
+            <a:srgbClr val="1E2761"/>
+          </a:solidFill>
+          <a:ln w="12700">
+            <a:solidFill>
+              <a:srgbClr val="1E2761"/>
+            </a:solidFill>
+            <a:prstDash val="solid"/>
+          </a:ln>
+        </p:spPr>
+        <p:txBody>
+          <a:bodyPr/>
+          <a:lstStyle/>
+          <a:p>
+            <a:endParaRPr lang="en-US"/>
+          </a:p>
+        </p:txBody>
+      </p:sp>
+      <p:sp>
+        <p:nvSpPr>
+          <p:cNvPr id="6" name="Text 4"/>
+          <p:cNvSpPr txBox="1"/>
+          <p:nvPr/>
+        </p:nvSpPr>
+        <p:spPr>
+          <a:xfrm>
+            <a:off x="822960" y="1920240"/>
+            <a:ext cx="2926080" cy="457200"/>
+          </a:xfrm>
+          <a:prstGeom prst="rect">
+            <a:avLst/>
+          </a:prstGeom>
+          <a:noFill/>
+          <a:ln/>
+        </p:spPr>
+        <p:txBody>
+          <a:bodyPr wrap="square" lIns="0" tIns="0" rIns="0" bIns="0" rtlCol="0" anchor="ctr"/>
+          <a:lstStyle/>
+          <a:p>
+            <a:pPr marL="0" indent="0">
+              <a:buNone/>
+            </a:pPr>
+            <a:r>
+              <a:rPr lang="en-US" sz="1800" b="1" dirty="0">
+                <a:solidFill>
+                  <a:srgbClr val="E9B44C"/>
+                </a:solidFill>
+              </a:rPr>
+              <a:t>Open</a:t>
+            </a:r>
+            <a:endParaRPr lang="en-US" sz="1800" dirty="0"/>
+          </a:p>
+        </p:txBody>
+      </p:sp>
+      <p:sp>
+        <p:nvSpPr>
+          <p:cNvPr id="7" name="Text 5"/>
+          <p:cNvSpPr txBox="1"/>
+          <p:nvPr/>
+        </p:nvSpPr>
+        <p:spPr>
+          <a:xfrm>
+            <a:off x="822960" y="2468880"/>
+            <a:ext cx="2971800" cy="2377440"/>
+          </a:xfrm>
+          <a:prstGeom prst="rect">
+            <a:avLst/>
+          </a:prstGeom>
+          <a:noFill/>
+          <a:ln/>
+        </p:spPr>
+        <p:txBody>
+          <a:bodyPr wrap="square" lIns="0" tIns="0" rIns="0" bIns="0" rtlCol="0" anchor="t"/>
+          <a:lstStyle/>
+          <a:p>
+            <a:pPr marL="342900" indent="-342900">
+              <a:spcAft>
+                <a:spcPts val="800"/>
+              </a:spcAft>
+              <a:buSzPct val="100000"/>
+              <a:buChar char="•"/>
+            </a:pPr>
+            <a:r>
+              <a:rPr lang="en-US" sz="1300" dirty="0">
+                <a:solidFill>
+                  <a:srgbClr val="FFFFFF"/>
+                </a:solidFill>
+              </a:rPr>
+              <a:t>Evidence graph</a:t>
+            </a:r>
+            <a:endParaRPr lang="en-US" sz="1300" dirty="0"/>
+          </a:p>
+          <a:p>
+            <a:pPr marL="342900" indent="-342900">
+              <a:spcAft>
+                <a:spcPts val="800"/>
+              </a:spcAft>
+              <a:buSzPct val="100000"/>
+              <a:buChar char="•"/>
+            </a:pPr>
+            <a:r>
+              <a:rPr lang="en-US" sz="1300" dirty="0">
+                <a:solidFill>
+                  <a:srgbClr val="FFFFFF"/>
+                </a:solidFill>
+              </a:rPr>
+              <a:t>Click the Market-implied box</a:t>
+            </a:r>
+            <a:endParaRPr lang="en-US" sz="1300" dirty="0"/>
+          </a:p>
+          <a:p>
+            <a:pPr marL="342900" indent="-342900">
+              <a:spcAft>
+                <a:spcPts val="800"/>
+              </a:spcAft>
+              <a:buSzPct val="100000"/>
+              <a:buChar char="•"/>
+            </a:pPr>
+            <a:r>
+              <a:rPr lang="en-US" sz="1300" dirty="0">
+                <a:solidFill>
+                  <a:srgbClr val="FFFFFF"/>
+                </a:solidFill>
+              </a:rPr>
+              <a:t>Click the Pool box</a:t>
+            </a:r>
+            <a:endParaRPr lang="en-US" sz="1300" dirty="0"/>
+          </a:p>
+          <a:p>
+            <a:pPr marL="342900" indent="-342900">
+              <a:spcAft>
+                <a:spcPts val="800"/>
+              </a:spcAft>
+              <a:buSzPct val="100000"/>
+              <a:buChar char="•"/>
+            </a:pPr>
+            <a:r>
+              <a:rPr lang="en-US" sz="1300" dirty="0">
+                <a:solidFill>
+                  <a:srgbClr val="FFFFFF"/>
+                </a:solidFill>
+              </a:rPr>
+              <a:t>Methodology, scroll to the worked example</a:t>
+            </a:r>
+            <a:endParaRPr lang="en-US" sz="1300" dirty="0"/>
+          </a:p>
+        </p:txBody>
+      </p:sp>
+      <p:sp>
+        <p:nvSpPr>
+          <p:cNvPr id="8" name="Shape 6"/>
+          <p:cNvSpPr/>
+          <p:nvPr/>
+        </p:nvSpPr>
+        <p:spPr>
+          <a:xfrm>
+            <a:off x="4297680" y="1737360"/>
+            <a:ext cx="3520440" cy="3200400"/>
+          </a:xfrm>
+          <a:prstGeom prst="roundRect">
+            <a:avLst>
+              <a:gd name="adj" fmla="val 3429"/>
+            </a:avLst>
+          </a:prstGeom>
+          <a:solidFill>
+            <a:srgbClr val="1E2761"/>
+          </a:solidFill>
+          <a:ln w="12700">
+            <a:solidFill>
+              <a:srgbClr val="1E2761"/>
+            </a:solidFill>
+            <a:prstDash val="solid"/>
+          </a:ln>
+        </p:spPr>
+        <p:txBody>
+          <a:bodyPr/>
+          <a:lstStyle/>
+          <a:p>
+            <a:endParaRPr lang="en-US"/>
+          </a:p>
+        </p:txBody>
+      </p:sp>
+      <p:sp>
+        <p:nvSpPr>
+          <p:cNvPr id="9" name="Text 7"/>
+          <p:cNvSpPr txBox="1"/>
+          <p:nvPr/>
+        </p:nvSpPr>
+        <p:spPr>
+          <a:xfrm>
+            <a:off x="4572000" y="1920240"/>
+            <a:ext cx="2926080" cy="457200"/>
+          </a:xfrm>
+          <a:prstGeom prst="rect">
+            <a:avLst/>
+          </a:prstGeom>
+          <a:noFill/>
+          <a:ln/>
+        </p:spPr>
+        <p:txBody>
+          <a:bodyPr wrap="square" lIns="0" tIns="0" rIns="0" bIns="0" rtlCol="0" anchor="ctr"/>
+          <a:lstStyle/>
+          <a:p>
+            <a:pPr marL="0" indent="0">
+              <a:buNone/>
+            </a:pPr>
+            <a:r>
+              <a:rPr lang="en-US" sz="1800" b="1" dirty="0">
+                <a:solidFill>
+                  <a:srgbClr val="E9B44C"/>
+                </a:solidFill>
+              </a:rPr>
+              <a:t>Point at</a:t>
+            </a:r>
+            <a:endParaRPr lang="en-US" sz="1800" dirty="0"/>
+          </a:p>
+        </p:txBody>
+      </p:sp>
+      <p:sp>
+        <p:nvSpPr>
+          <p:cNvPr id="10" name="Text 8"/>
+          <p:cNvSpPr txBox="1"/>
+          <p:nvPr/>
+        </p:nvSpPr>
+        <p:spPr>
+          <a:xfrm>
+            <a:off x="4572000" y="2468880"/>
+            <a:ext cx="2971800" cy="2377440"/>
+          </a:xfrm>
+          <a:prstGeom prst="rect">
+            <a:avLst/>
+          </a:prstGeom>
+          <a:noFill/>
+          <a:ln/>
+        </p:spPr>
+        <p:txBody>
+          <a:bodyPr wrap="square" lIns="0" tIns="0" rIns="0" bIns="0" rtlCol="0" anchor="t"/>
+          <a:lstStyle/>
+          <a:p>
+            <a:pPr marL="342900" indent="-342900">
+              <a:spcAft>
+                <a:spcPts val="800"/>
+              </a:spcAft>
+              <a:buSzPct val="100000"/>
+              <a:buChar char="•"/>
+            </a:pPr>
+            <a:r>
+              <a:rPr lang="en-US" sz="1300" dirty="0">
+                <a:solidFill>
+                  <a:srgbClr val="FFFFFF"/>
+                </a:solidFill>
+              </a:rPr>
+              <a:t>Market-implied: the futures price, 100 minus price, the expected change, the 90/10 split</a:t>
+            </a:r>
+            <a:endParaRPr lang="en-US" sz="1300" dirty="0"/>
+          </a:p>
+          <a:p>
+            <a:pPr marL="342900" indent="-342900">
+              <a:spcAft>
+                <a:spcPts val="800"/>
+              </a:spcAft>
+              <a:buSzPct val="100000"/>
+              <a:buChar char="•"/>
+            </a:pPr>
+            <a:r>
+              <a:rPr lang="en-US" sz="1300" dirty="0">
+                <a:solidFill>
+                  <a:srgbClr val="FFFFFF"/>
+                </a:solidFill>
+              </a:rPr>
+              <a:t>Pool: the four weights, the pooled line, the specialists' tilt line, Machine track</a:t>
+            </a:r>
+            <a:endParaRPr lang="en-US" sz="1300" dirty="0"/>
+          </a:p>
+          <a:p>
+            <a:pPr marL="342900" indent="-342900">
+              <a:spcAft>
+                <a:spcPts val="800"/>
+              </a:spcAft>
+              <a:buSzPct val="100000"/>
+              <a:buChar char="•"/>
+            </a:pPr>
+            <a:r>
+              <a:rPr lang="en-US" sz="1300" dirty="0">
+                <a:solidFill>
+                  <a:srgbClr val="FFFFFF"/>
+                </a:solidFill>
+              </a:rPr>
+              <a:t>Any evidence item: the frozen text and the link to the original</a:t>
+            </a:r>
+            <a:endParaRPr lang="en-US" sz="1300" dirty="0"/>
+          </a:p>
+        </p:txBody>
+      </p:sp>
+      <p:sp>
+        <p:nvSpPr>
+          <p:cNvPr id="11" name="Shape 9"/>
+          <p:cNvSpPr/>
+          <p:nvPr/>
+        </p:nvSpPr>
+        <p:spPr>
+          <a:xfrm>
+            <a:off x="8046720" y="1737360"/>
+            <a:ext cx="3520440" cy="3200400"/>
+          </a:xfrm>
+          <a:prstGeom prst="roundRect">
+            <a:avLst>
+              <a:gd name="adj" fmla="val 3429"/>
+            </a:avLst>
+          </a:prstGeom>
+          <a:solidFill>
+            <a:srgbClr val="1E2761"/>
+          </a:solidFill>
+          <a:ln w="12700">
+            <a:solidFill>
+              <a:srgbClr val="1E2761"/>
+            </a:solidFill>
+            <a:prstDash val="solid"/>
+          </a:ln>
+        </p:spPr>
+        <p:txBody>
+          <a:bodyPr/>
+          <a:lstStyle/>
+          <a:p>
+            <a:endParaRPr lang="en-US"/>
+          </a:p>
+        </p:txBody>
+      </p:sp>
+      <p:sp>
+        <p:nvSpPr>
+          <p:cNvPr id="12" name="Text 10"/>
+          <p:cNvSpPr txBox="1"/>
+          <p:nvPr/>
+        </p:nvSpPr>
+        <p:spPr>
+          <a:xfrm>
+            <a:off x="8321040" y="1920240"/>
+            <a:ext cx="2926080" cy="457200"/>
+          </a:xfrm>
+          <a:prstGeom prst="rect">
+            <a:avLst/>
+          </a:prstGeom>
+          <a:noFill/>
+          <a:ln/>
+        </p:spPr>
+        <p:txBody>
+          <a:bodyPr wrap="square" lIns="0" tIns="0" rIns="0" bIns="0" rtlCol="0" anchor="ctr"/>
+          <a:lstStyle/>
+          <a:p>
+            <a:pPr marL="0" indent="0">
+              <a:buNone/>
+            </a:pPr>
+            <a:r>
+              <a:rPr lang="en-US" sz="1800" b="1" dirty="0">
+                <a:solidFill>
+                  <a:srgbClr val="E9B44C"/>
+                </a:solidFill>
+              </a:rPr>
+              <a:t>Say</a:t>
+            </a:r>
+            <a:endParaRPr lang="en-US" sz="1800" dirty="0"/>
+          </a:p>
+        </p:txBody>
+      </p:sp>
+      <p:sp>
+        <p:nvSpPr>
+          <p:cNvPr id="13" name="Text 11"/>
+          <p:cNvSpPr txBox="1"/>
+          <p:nvPr/>
+        </p:nvSpPr>
+        <p:spPr>
+          <a:xfrm>
+            <a:off x="8321040" y="2468880"/>
+            <a:ext cx="2971800" cy="2377440"/>
+          </a:xfrm>
+          <a:prstGeom prst="rect">
+            <a:avLst/>
+          </a:prstGeom>
+          <a:noFill/>
+          <a:ln/>
+        </p:spPr>
+        <p:txBody>
+          <a:bodyPr wrap="square" lIns="0" tIns="0" rIns="0" bIns="0" rtlCol="0" anchor="t"/>
+          <a:lstStyle/>
+          <a:p>
+            <a:pPr marL="342900" indent="-342900">
+              <a:spcAft>
+                <a:spcPts val="800"/>
+              </a:spcAft>
+              <a:buSzPct val="100000"/>
+              <a:buChar char="•"/>
+            </a:pPr>
+            <a:r>
+              <a:rPr lang="en-US" sz="1300" dirty="0">
+                <a:solidFill>
+                  <a:srgbClr val="FFFFFF"/>
+                </a:solidFill>
+              </a:rPr>
+              <a:t>Blue is in the number, grey is computed but not in it. Click a model and you see only what it read.</a:t>
+            </a:r>
+            <a:endParaRPr lang="en-US" sz="1300" dirty="0"/>
+          </a:p>
+          <a:p>
+            <a:pPr marL="342900" indent="-342900">
+              <a:spcAft>
+                <a:spcPts val="800"/>
+              </a:spcAft>
+              <a:buSzPct val="100000"/>
+              <a:buChar char="•"/>
+            </a:pPr>
+            <a:r>
+              <a:rPr lang="en-US" sz="1300">
+                <a:solidFill>
+                  <a:srgbClr val="FFFFFF"/>
+                </a:solidFill>
+              </a:rPr>
+              <a:t>The language model's opinion </a:t>
+            </a:r>
+            <a:r>
+              <a:rPr lang="en-US" sz="1300" dirty="0">
+                <a:solidFill>
+                  <a:srgbClr val="FFFFFF"/>
+                </a:solidFill>
+              </a:rPr>
+              <a:t>is the one line between Pooled and Machine track. It can tilt, it cannot write.</a:t>
+            </a:r>
+            <a:endParaRPr lang="en-US" sz="1300" dirty="0"/>
+          </a:p>
+        </p:txBody>
+      </p:sp>
+    </p:spTree>
+  </p:cSld>
+  <p:clrMapOvr>
+    <a:masterClrMapping/>
+  </p:clrMapOvr>
+</p:sld>
+</file>
+
+<file path=ppt/slides/slide11.xml><?xml version="1.0" encoding="utf-8"?>
+<p:sld xmlns:a="http://schemas.openxmlformats.org/drawingml/2006/main" xmlns:r="http://schemas.openxmlformats.org/officeDocument/2006/relationships" xmlns:p="http://schemas.openxmlformats.org/presentationml/2006/main">
+  <p:cSld>
+    <p:spTree>
+      <p:nvGrpSpPr>
+        <p:cNvPr id="1" name=""/>
+        <p:cNvGrpSpPr/>
+        <p:nvPr/>
+      </p:nvGrpSpPr>
+      <p:grpSpPr>
+        <a:xfrm>
+          <a:off x="0" y="0"/>
+          <a:ext cx="0" cy="0"/>
+          <a:chOff x="0" y="0"/>
+          <a:chExt cx="0" cy="0"/>
+        </a:xfrm>
+      </p:grpSpPr>
+      <p:sp>
+        <p:nvSpPr>
+          <p:cNvPr id="2" name="Text 0"/>
+          <p:cNvSpPr>
+            <a:spLocks noGrp="1"/>
+          </p:cNvSpPr>
+          <p:nvPr>
+            <p:ph type="title" idx="100" hasCustomPrompt="1"/>
+          </p:nvPr>
+        </p:nvSpPr>
+        <p:spPr>
+          <a:xfrm>
             <a:off x="548640" y="411480"/>
             <a:ext cx="11091672" cy="822960"/>
           </a:xfrm>
@@ -3964,12 +4642,12 @@
         </p:nvSpPr>
         <p:spPr>
           <a:xfrm>
-            <a:off x="548640" y="1627632"/>
-            <a:ext cx="3593592" cy="960120"/>
+            <a:off x="548640" y="1645920"/>
+            <a:ext cx="3593592" cy="1051560"/>
           </a:xfrm>
           <a:prstGeom prst="roundRect">
             <a:avLst>
-              <a:gd name="adj" fmla="val 9524"/>
+              <a:gd name="adj" fmla="val 8696"/>
             </a:avLst>
           </a:prstGeom>
           <a:solidFill>
@@ -3982,13 +4660,6 @@
             <a:prstDash val="solid"/>
           </a:ln>
         </p:spPr>
-        <p:txBody>
-          <a:bodyPr/>
-          <a:lstStyle/>
-          <a:p>
-            <a:endParaRPr lang="en-US"/>
-          </a:p>
-        </p:txBody>
       </p:sp>
       <p:sp>
         <p:nvSpPr>
@@ -3998,7 +4669,7 @@
         </p:nvSpPr>
         <p:spPr>
           <a:xfrm>
-            <a:off x="548640" y="2404872"/>
+            <a:off x="548640" y="2514600"/>
             <a:ext cx="3593592" cy="182880"/>
           </a:xfrm>
           <a:prstGeom prst="rect">
@@ -4014,13 +4685,6 @@
             <a:prstDash val="solid"/>
           </a:ln>
         </p:spPr>
-        <p:txBody>
-          <a:bodyPr/>
-          <a:lstStyle/>
-          <a:p>
-            <a:endParaRPr lang="en-US"/>
-          </a:p>
-        </p:txBody>
       </p:sp>
       <p:sp>
         <p:nvSpPr>
@@ -4030,8 +4694,8 @@
         </p:nvSpPr>
         <p:spPr>
           <a:xfrm>
-            <a:off x="704088" y="1719072"/>
-            <a:ext cx="3319272" cy="182880"/>
+            <a:off x="731520" y="1755648"/>
+            <a:ext cx="3227832" cy="182880"/>
           </a:xfrm>
           <a:prstGeom prst="rect">
             <a:avLst/>
@@ -4066,8 +4730,8 @@
         </p:nvSpPr>
         <p:spPr>
           <a:xfrm>
-            <a:off x="704088" y="1901952"/>
-            <a:ext cx="3319272" cy="292608"/>
+            <a:off x="731520" y="1956816"/>
+            <a:ext cx="3227832" cy="329184"/>
           </a:xfrm>
           <a:prstGeom prst="rect">
             <a:avLst/>
@@ -4083,14 +4747,14 @@
               <a:buNone/>
             </a:pPr>
             <a:r>
-              <a:rPr lang="en-US" sz="1400" b="1" dirty="0">
+              <a:rPr lang="en-US" sz="1500" b="1" dirty="0">
                 <a:solidFill>
                   <a:schemeClr val="bg1"/>
                 </a:solidFill>
               </a:rPr>
               <a:t>Memory cannot be switched off</a:t>
             </a:r>
-            <a:endParaRPr lang="en-US" sz="1400" dirty="0"/>
+            <a:endParaRPr lang="en-US" sz="1500" dirty="0"/>
           </a:p>
         </p:txBody>
       </p:sp>
@@ -4102,8 +4766,8 @@
         </p:nvSpPr>
         <p:spPr>
           <a:xfrm>
-            <a:off x="704088" y="2194560"/>
-            <a:ext cx="3319272" cy="365760"/>
+            <a:off x="731520" y="2286000"/>
+            <a:ext cx="3227832" cy="384048"/>
           </a:xfrm>
           <a:prstGeom prst="rect">
             <a:avLst/>
@@ -4119,14 +4783,14 @@
               <a:buNone/>
             </a:pPr>
             <a:r>
-              <a:rPr lang="en-US" sz="1050" dirty="0">
+              <a:rPr lang="en-US" sz="1100" dirty="0">
                 <a:solidFill>
                   <a:srgbClr val="F8D7CE"/>
                 </a:solidFill>
               </a:rPr>
-              <a:t>Everything it knows about the Fed is in its weights, and it will use it unless something stops it.</a:t>
-            </a:r>
-            <a:endParaRPr lang="en-US" sz="1050" dirty="0"/>
+              <a:t>It knows the Fed from its training and will use that unless stopped.</a:t>
+            </a:r>
+            <a:endParaRPr lang="en-US" sz="1100" dirty="0"/>
           </a:p>
         </p:txBody>
       </p:sp>
@@ -4138,8 +4802,8 @@
         </p:nvSpPr>
         <p:spPr>
           <a:xfrm>
-            <a:off x="548640" y="2587752"/>
-            <a:ext cx="3593592" cy="2011680"/>
+            <a:off x="548640" y="2697480"/>
+            <a:ext cx="3593592" cy="2743200"/>
           </a:xfrm>
           <a:prstGeom prst="rect">
             <a:avLst/>
@@ -4154,13 +4818,6 @@
             <a:prstDash val="solid"/>
           </a:ln>
         </p:spPr>
-        <p:txBody>
-          <a:bodyPr/>
-          <a:lstStyle/>
-          <a:p>
-            <a:endParaRPr lang="en-US"/>
-          </a:p>
-        </p:txBody>
       </p:sp>
       <p:sp>
         <p:nvSpPr>
@@ -4170,8 +4827,8 @@
         </p:nvSpPr>
         <p:spPr>
           <a:xfrm>
-            <a:off x="704088" y="2697480"/>
-            <a:ext cx="3319272" cy="182880"/>
+            <a:off x="731520" y="2834640"/>
+            <a:ext cx="3227832" cy="182880"/>
           </a:xfrm>
           <a:prstGeom prst="rect">
             <a:avLst/>
@@ -4206,8 +4863,8 @@
         </p:nvSpPr>
         <p:spPr>
           <a:xfrm>
-            <a:off x="704088" y="2935224"/>
-            <a:ext cx="3319272" cy="1627632"/>
+            <a:off x="731520" y="3108960"/>
+            <a:ext cx="3227832" cy="2240280"/>
           </a:xfrm>
           <a:prstGeom prst="rect">
             <a:avLst/>
@@ -4224,22 +4881,22 @@
               <a:buChar char="•"/>
             </a:pPr>
             <a:r>
-              <a:rPr lang="en-US" sz="1050" b="1" dirty="0">
+              <a:rPr lang="en-US" sz="1300" b="1" dirty="0">
                 <a:solidFill>
                   <a:srgbClr val="1B1F2A"/>
                 </a:solidFill>
               </a:rPr>
-              <a:t>Prompt engineering: </a:t>
-            </a:r>
-            <a:r>
-              <a:rPr lang="en-US" sz="1050" dirty="0">
+              <a:t>Instruction: </a:t>
+            </a:r>
+            <a:r>
+              <a:rPr lang="en-US" sz="1300" dirty="0">
                 <a:solidFill>
                   <a:schemeClr val="tx1"/>
                 </a:solidFill>
               </a:rPr>
-              <a:t>use only the evidence; do not use anything you remember about the economy, the Fed or markets.</a:t>
-            </a:r>
-            <a:endParaRPr lang="en-US" sz="1050" dirty="0"/>
+              <a:t>use only the evidence; nothing remembered about the economy, the Fed or markets.</a:t>
+            </a:r>
+            <a:endParaRPr lang="en-US" sz="1300" dirty="0"/>
           </a:p>
           <a:p>
             <a:pPr marL="342900" indent="-342900">
@@ -4247,7 +4904,7 @@
               <a:buChar char="•"/>
             </a:pPr>
             <a:r>
-              <a:rPr lang="en-US" sz="1050" b="1" dirty="0">
+              <a:rPr lang="en-US" sz="1300" b="1" dirty="0">
                 <a:solidFill>
                   <a:srgbClr val="1B1F2A"/>
                 </a:solidFill>
@@ -4255,14 +4912,14 @@
               <a:t>Answer shape: </a:t>
             </a:r>
             <a:r>
-              <a:rPr lang="en-US" sz="1050" dirty="0">
+              <a:rPr lang="en-US" sz="1300" dirty="0">
                 <a:solidFill>
                   <a:schemeClr val="tx1"/>
                 </a:solidFill>
               </a:rPr>
-              <a:t>every claim must carry a verbatim quote from a named item, so a remembered fact has nowhere to stand.</a:t>
-            </a:r>
-            <a:endParaRPr lang="en-US" sz="1050" dirty="0"/>
+              <a:t>every claim carries a verbatim quote from a named item, so a remembered fact has nowhere to stand.</a:t>
+            </a:r>
+            <a:endParaRPr lang="en-US" sz="1300" dirty="0"/>
           </a:p>
           <a:p>
             <a:pPr marL="342900" indent="-342900">
@@ -4270,22 +4927,22 @@
               <a:buChar char="•"/>
             </a:pPr>
             <a:r>
-              <a:rPr lang="en-US" sz="1050" b="1" dirty="0">
+              <a:rPr lang="en-US" sz="1300" b="1" dirty="0">
                 <a:solidFill>
                   <a:srgbClr val="1B1F2A"/>
                 </a:solidFill>
               </a:rPr>
-              <a:t>Harness: </a:t>
-            </a:r>
-            <a:r>
-              <a:rPr lang="en-US" sz="1050" dirty="0">
+              <a:t>Check: </a:t>
+            </a:r>
+            <a:r>
+              <a:rPr lang="en-US" sz="1300" dirty="0">
                 <a:solidFill>
                   <a:schemeClr val="tx1"/>
                 </a:solidFill>
               </a:rPr>
-              <a:t>every number in the answer is matched to the snapshot by code; one that is not found is flagged as from memory and sent back once to be removed.</a:t>
-            </a:r>
-            <a:endParaRPr lang="en-US" sz="1050" dirty="0"/>
+              <a:t>every number is matched to the snapshot by code; one not found is flagged as from memory and sent back once.</a:t>
+            </a:r>
+            <a:endParaRPr lang="en-US" sz="1300" dirty="0"/>
           </a:p>
         </p:txBody>
       </p:sp>
@@ -4297,157 +4954,12 @@
         </p:nvSpPr>
         <p:spPr>
           <a:xfrm>
-            <a:off x="548640" y="4599432"/>
-            <a:ext cx="3593592" cy="960120"/>
+            <a:off x="4297680" y="1645920"/>
+            <a:ext cx="3593592" cy="1051560"/>
           </a:xfrm>
           <a:prstGeom prst="roundRect">
             <a:avLst>
-              <a:gd name="adj" fmla="val 9524"/>
-            </a:avLst>
-          </a:prstGeom>
-          <a:solidFill>
-            <a:srgbClr val="FFFFFF"/>
-          </a:solidFill>
-          <a:ln w="12700">
-            <a:solidFill>
-              <a:srgbClr val="D5DBE5"/>
-            </a:solidFill>
-            <a:prstDash val="solid"/>
-          </a:ln>
-        </p:spPr>
-        <p:txBody>
-          <a:bodyPr/>
-          <a:lstStyle/>
-          <a:p>
-            <a:endParaRPr lang="en-US"/>
-          </a:p>
-        </p:txBody>
-      </p:sp>
-      <p:sp>
-        <p:nvSpPr>
-          <p:cNvPr id="14" name="Text 11"/>
-          <p:cNvSpPr txBox="1"/>
-          <p:nvPr/>
-        </p:nvSpPr>
-        <p:spPr>
-          <a:xfrm>
-            <a:off x="704088" y="4690872"/>
-            <a:ext cx="3319272" cy="182880"/>
-          </a:xfrm>
-          <a:prstGeom prst="rect">
-            <a:avLst/>
-          </a:prstGeom>
-          <a:noFill/>
-          <a:ln/>
-        </p:spPr>
-        <p:txBody>
-          <a:bodyPr wrap="square" lIns="0" tIns="0" rIns="0" bIns="0" rtlCol="0" anchor="t"/>
-          <a:lstStyle/>
-          <a:p>
-            <a:pPr marL="0" indent="0">
-              <a:buNone/>
-            </a:pPr>
-            <a:r>
-              <a:rPr lang="en-US" sz="900" b="1" kern="0" spc="100" dirty="0">
-                <a:solidFill>
-                  <a:schemeClr val="accent4"/>
-                </a:solidFill>
-              </a:rPr>
-              <a:t>PROOF, 28 OCTOBER</a:t>
-            </a:r>
-            <a:endParaRPr lang="en-US" sz="900" dirty="0"/>
-          </a:p>
-        </p:txBody>
-      </p:sp>
-      <p:sp>
-        <p:nvSpPr>
-          <p:cNvPr id="15" name="Text 12"/>
-          <p:cNvSpPr txBox="1"/>
-          <p:nvPr/>
-        </p:nvSpPr>
-        <p:spPr>
-          <a:xfrm>
-            <a:off x="704088" y="4919472"/>
-            <a:ext cx="1417320" cy="548640"/>
-          </a:xfrm>
-          <a:prstGeom prst="rect">
-            <a:avLst/>
-          </a:prstGeom>
-          <a:noFill/>
-          <a:ln/>
-        </p:spPr>
-        <p:txBody>
-          <a:bodyPr wrap="square" lIns="0" tIns="0" rIns="0" bIns="0" rtlCol="0" anchor="ctr"/>
-          <a:lstStyle/>
-          <a:p>
-            <a:pPr marL="0" indent="0">
-              <a:buNone/>
-            </a:pPr>
-            <a:r>
-              <a:rPr lang="en-US" sz="2200" b="1" dirty="0">
-                <a:solidFill>
-                  <a:srgbClr val="2C6E49"/>
-                </a:solidFill>
-                <a:latin typeface="Cambria" pitchFamily="34" charset="0"/>
-                <a:ea typeface="Cambria" pitchFamily="34" charset="-122"/>
-                <a:cs typeface="Cambria" pitchFamily="34" charset="-120"/>
-              </a:rPr>
-              <a:t>38 → 0</a:t>
-            </a:r>
-            <a:endParaRPr lang="en-US" sz="2200" dirty="0"/>
-          </a:p>
-        </p:txBody>
-      </p:sp>
-      <p:sp>
-        <p:nvSpPr>
-          <p:cNvPr id="16" name="Text 13"/>
-          <p:cNvSpPr txBox="1"/>
-          <p:nvPr/>
-        </p:nvSpPr>
-        <p:spPr>
-          <a:xfrm>
-            <a:off x="2148840" y="4892040"/>
-            <a:ext cx="1856232" cy="621792"/>
-          </a:xfrm>
-          <a:prstGeom prst="rect">
-            <a:avLst/>
-          </a:prstGeom>
-          <a:noFill/>
-          <a:ln/>
-        </p:spPr>
-        <p:txBody>
-          <a:bodyPr wrap="square" lIns="0" tIns="0" rIns="0" bIns="0" rtlCol="0" anchor="ctr"/>
-          <a:lstStyle/>
-          <a:p>
-            <a:pPr marL="0" indent="0">
-              <a:buNone/>
-            </a:pPr>
-            <a:r>
-              <a:rPr lang="en-US" sz="1000" dirty="0">
-                <a:solidFill>
-                  <a:schemeClr val="tx1"/>
-                </a:solidFill>
-              </a:rPr>
-              <a:t>figures in the answer that appear nowhere in the evidence: analyst 1, which sees no evidence, against analysts 2 to 8, five runs each</a:t>
-            </a:r>
-            <a:endParaRPr lang="en-US" sz="1000" dirty="0"/>
-          </a:p>
-        </p:txBody>
-      </p:sp>
-      <p:sp>
-        <p:nvSpPr>
-          <p:cNvPr id="17" name="Shape 14"/>
-          <p:cNvSpPr/>
-          <p:nvPr/>
-        </p:nvSpPr>
-        <p:spPr>
-          <a:xfrm>
-            <a:off x="4297680" y="1627632"/>
-            <a:ext cx="3593592" cy="960120"/>
-          </a:xfrm>
-          <a:prstGeom prst="roundRect">
-            <a:avLst>
-              <a:gd name="adj" fmla="val 9524"/>
+              <a:gd name="adj" fmla="val 8696"/>
             </a:avLst>
           </a:prstGeom>
           <a:solidFill>
@@ -4460,23 +4972,16 @@
             <a:prstDash val="solid"/>
           </a:ln>
         </p:spPr>
-        <p:txBody>
-          <a:bodyPr/>
-          <a:lstStyle/>
-          <a:p>
-            <a:endParaRPr lang="en-US"/>
-          </a:p>
-        </p:txBody>
-      </p:sp>
-      <p:sp>
-        <p:nvSpPr>
-          <p:cNvPr id="18" name="Shape 15"/>
+      </p:sp>
+      <p:sp>
+        <p:nvSpPr>
+          <p:cNvPr id="14" name="Shape 11"/>
           <p:cNvSpPr/>
           <p:nvPr/>
         </p:nvSpPr>
         <p:spPr>
           <a:xfrm>
-            <a:off x="4297680" y="2404872"/>
+            <a:off x="4297680" y="2514600"/>
             <a:ext cx="3593592" cy="182880"/>
           </a:xfrm>
           <a:prstGeom prst="rect">
@@ -4492,24 +4997,17 @@
             <a:prstDash val="solid"/>
           </a:ln>
         </p:spPr>
-        <p:txBody>
-          <a:bodyPr/>
-          <a:lstStyle/>
-          <a:p>
-            <a:endParaRPr lang="en-US"/>
-          </a:p>
-        </p:txBody>
-      </p:sp>
-      <p:sp>
-        <p:nvSpPr>
-          <p:cNvPr id="19" name="Text 16"/>
+      </p:sp>
+      <p:sp>
+        <p:nvSpPr>
+          <p:cNvPr id="15" name="Text 12"/>
           <p:cNvSpPr txBox="1"/>
           <p:nvPr/>
         </p:nvSpPr>
         <p:spPr>
           <a:xfrm>
-            <a:off x="4453128" y="1719072"/>
-            <a:ext cx="3319272" cy="182880"/>
+            <a:off x="4480560" y="1755648"/>
+            <a:ext cx="3227832" cy="182880"/>
           </a:xfrm>
           <a:prstGeom prst="rect">
             <a:avLst/>
@@ -4538,14 +5036,14 @@
       </p:sp>
       <p:sp>
         <p:nvSpPr>
-          <p:cNvPr id="20" name="Text 17"/>
+          <p:cNvPr id="16" name="Text 13"/>
           <p:cNvSpPr txBox="1"/>
           <p:nvPr/>
         </p:nvSpPr>
         <p:spPr>
           <a:xfrm>
-            <a:off x="4453128" y="1901952"/>
-            <a:ext cx="3319272" cy="292608"/>
+            <a:off x="4480560" y="1956816"/>
+            <a:ext cx="3227832" cy="329184"/>
           </a:xfrm>
           <a:prstGeom prst="rect">
             <a:avLst/>
@@ -4561,27 +5059,27 @@
               <a:buNone/>
             </a:pPr>
             <a:r>
-              <a:rPr lang="en-US" sz="1400" b="1" dirty="0">
+              <a:rPr lang="en-US" sz="1500" b="1" dirty="0">
                 <a:solidFill>
                   <a:schemeClr val="bg1"/>
                 </a:solidFill>
               </a:rPr>
-              <a:t>The same question gets different answers</a:t>
-            </a:r>
-            <a:endParaRPr lang="en-US" sz="1400" dirty="0"/>
-          </a:p>
-        </p:txBody>
-      </p:sp>
-      <p:sp>
-        <p:nvSpPr>
-          <p:cNvPr id="21" name="Text 18"/>
+              <a:t>Answers vary between runs</a:t>
+            </a:r>
+            <a:endParaRPr lang="en-US" sz="1500" dirty="0"/>
+          </a:p>
+        </p:txBody>
+      </p:sp>
+      <p:sp>
+        <p:nvSpPr>
+          <p:cNvPr id="17" name="Text 14"/>
           <p:cNvSpPr txBox="1"/>
           <p:nvPr/>
         </p:nvSpPr>
         <p:spPr>
           <a:xfrm>
-            <a:off x="4453128" y="2194560"/>
-            <a:ext cx="3319272" cy="365760"/>
+            <a:off x="4480560" y="2286000"/>
+            <a:ext cx="3227832" cy="384048"/>
           </a:xfrm>
           <a:prstGeom prst="rect">
             <a:avLst/>
@@ -4597,27 +5095,27 @@
               <a:buNone/>
             </a:pPr>
             <a:r>
-              <a:rPr lang="en-US" sz="1050" dirty="0">
+              <a:rPr lang="en-US" sz="1100" dirty="0">
                 <a:solidFill>
                   <a:srgbClr val="F8D7CE"/>
                 </a:solidFill>
               </a:rPr>
               <a:t>Ask twice and the number moves.</a:t>
             </a:r>
-            <a:endParaRPr lang="en-US" sz="1050" dirty="0"/>
-          </a:p>
-        </p:txBody>
-      </p:sp>
-      <p:sp>
-        <p:nvSpPr>
-          <p:cNvPr id="22" name="Shape 19"/>
+            <a:endParaRPr lang="en-US" sz="1100" dirty="0"/>
+          </a:p>
+        </p:txBody>
+      </p:sp>
+      <p:sp>
+        <p:nvSpPr>
+          <p:cNvPr id="18" name="Shape 15"/>
           <p:cNvSpPr/>
           <p:nvPr/>
         </p:nvSpPr>
         <p:spPr>
           <a:xfrm>
-            <a:off x="4297680" y="2587752"/>
-            <a:ext cx="3593592" cy="2011680"/>
+            <a:off x="4297680" y="2697480"/>
+            <a:ext cx="3593592" cy="2743200"/>
           </a:xfrm>
           <a:prstGeom prst="rect">
             <a:avLst/>
@@ -4632,24 +5130,17 @@
             <a:prstDash val="solid"/>
           </a:ln>
         </p:spPr>
-        <p:txBody>
-          <a:bodyPr/>
-          <a:lstStyle/>
-          <a:p>
-            <a:endParaRPr lang="en-US"/>
-          </a:p>
-        </p:txBody>
-      </p:sp>
-      <p:sp>
-        <p:nvSpPr>
-          <p:cNvPr id="23" name="Text 20"/>
+      </p:sp>
+      <p:sp>
+        <p:nvSpPr>
+          <p:cNvPr id="19" name="Text 16"/>
           <p:cNvSpPr txBox="1"/>
           <p:nvPr/>
         </p:nvSpPr>
         <p:spPr>
           <a:xfrm>
-            <a:off x="4453128" y="2697480"/>
-            <a:ext cx="3319272" cy="182880"/>
+            <a:off x="4480560" y="2834640"/>
+            <a:ext cx="3227832" cy="182880"/>
           </a:xfrm>
           <a:prstGeom prst="rect">
             <a:avLst/>
@@ -4678,14 +5169,14 @@
       </p:sp>
       <p:sp>
         <p:nvSpPr>
-          <p:cNvPr id="24" name="Text 21"/>
+          <p:cNvPr id="20" name="Text 17"/>
           <p:cNvSpPr txBox="1"/>
           <p:nvPr/>
         </p:nvSpPr>
         <p:spPr>
           <a:xfrm>
-            <a:off x="4453128" y="2935224"/>
-            <a:ext cx="3319272" cy="1627632"/>
+            <a:off x="4480560" y="3108960"/>
+            <a:ext cx="3227832" cy="2240280"/>
           </a:xfrm>
           <a:prstGeom prst="rect">
             <a:avLst/>
@@ -4702,7 +5193,7 @@
               <a:buChar char="•"/>
             </a:pPr>
             <a:r>
-              <a:rPr lang="en-US" sz="1050" b="1" dirty="0">
+              <a:rPr lang="en-US" sz="1300" b="1" dirty="0">
                 <a:solidFill>
                   <a:srgbClr val="1B1F2A"/>
                 </a:solidFill>
@@ -4710,14 +5201,14 @@
               <a:t>Answer shape: </a:t>
             </a:r>
             <a:r>
-              <a:rPr lang="en-US" sz="1050" dirty="0">
+              <a:rPr lang="en-US" sz="1300" dirty="0">
                 <a:solidFill>
                   <a:schemeClr val="tx1"/>
                 </a:solidFill>
               </a:rPr>
-              <a:t>a JSON schema fixes the form of the answer; the runtime rejects anything else before anyone reads it.</a:t>
-            </a:r>
-            <a:endParaRPr lang="en-US" sz="1050" dirty="0"/>
+              <a:t>a fixed JSON schema; anything else is rejected unread.</a:t>
+            </a:r>
+            <a:endParaRPr lang="en-US" sz="1300" dirty="0"/>
           </a:p>
           <a:p>
             <a:pPr marL="342900" indent="-342900">
@@ -4725,7 +5216,7 @@
               <a:buChar char="•"/>
             </a:pPr>
             <a:r>
-              <a:rPr lang="en-US" sz="1050" b="1" dirty="0">
+              <a:rPr lang="en-US" sz="1300" b="1" dirty="0">
                 <a:solidFill>
                   <a:srgbClr val="1B1F2A"/>
                 </a:solidFill>
@@ -4733,14 +5224,14 @@
               <a:t>Five identical runs </a:t>
             </a:r>
             <a:r>
-              <a:rPr lang="en-US" sz="1050" dirty="0">
+              <a:rPr lang="en-US" sz="1300" dirty="0">
                 <a:solidFill>
                   <a:schemeClr val="tx1"/>
                 </a:solidFill>
               </a:rPr>
-              <a:t>per analyst per snapshot: the same evidence, the same question, the same schema, only the run number differs. Each is stored and hashed, so it can be audited later.</a:t>
-            </a:r>
-            <a:endParaRPr lang="en-US" sz="1050" dirty="0"/>
+              <a:t>per analyst per snapshot, each stored under its prompt hash.</a:t>
+            </a:r>
+            <a:endParaRPr lang="en-US" sz="1300" dirty="0"/>
           </a:p>
           <a:p>
             <a:pPr marL="342900" indent="-342900">
@@ -4748,192 +5239,39 @@
               <a:buChar char="•"/>
             </a:pPr>
             <a:r>
-              <a:rPr lang="en-US" sz="1050" b="1" dirty="0">
+              <a:rPr lang="en-US" sz="1300" b="1" dirty="0">
                 <a:solidFill>
                   <a:srgbClr val="1B1F2A"/>
                 </a:solidFill>
               </a:rPr>
-              <a:t>Repeatability is measured: </a:t>
-            </a:r>
-            <a:r>
-              <a:rPr lang="en-US" sz="1050" dirty="0">
+              <a:t>Measured: </a:t>
+            </a:r>
+            <a:r>
+              <a:rPr lang="en-US" sz="1300" dirty="0">
                 <a:solidFill>
                   <a:schemeClr val="tx1"/>
                 </a:solidFill>
               </a:rPr>
-              <a:t>how far the answer moves between those five runs. Pass mark: 2 points.</a:t>
-            </a:r>
-            <a:endParaRPr lang="en-US" sz="1050" dirty="0"/>
-          </a:p>
-        </p:txBody>
-      </p:sp>
-      <p:sp>
-        <p:nvSpPr>
-          <p:cNvPr id="25" name="Shape 22"/>
+              <a:t>the spread of the five answers. Pass mark: 2 points.</a:t>
+            </a:r>
+            <a:endParaRPr lang="en-US" sz="1300" dirty="0"/>
+          </a:p>
+        </p:txBody>
+      </p:sp>
+      <p:sp>
+        <p:nvSpPr>
+          <p:cNvPr id="21" name="Shape 18"/>
           <p:cNvSpPr/>
           <p:nvPr/>
         </p:nvSpPr>
         <p:spPr>
           <a:xfrm>
-            <a:off x="4297680" y="4599432"/>
-            <a:ext cx="3593592" cy="960120"/>
+            <a:off x="8046720" y="1645920"/>
+            <a:ext cx="3593592" cy="1051560"/>
           </a:xfrm>
           <a:prstGeom prst="roundRect">
             <a:avLst>
-              <a:gd name="adj" fmla="val 9524"/>
-            </a:avLst>
-          </a:prstGeom>
-          <a:solidFill>
-            <a:srgbClr val="FFFFFF"/>
-          </a:solidFill>
-          <a:ln w="12700">
-            <a:solidFill>
-              <a:srgbClr val="D5DBE5"/>
-            </a:solidFill>
-            <a:prstDash val="solid"/>
-          </a:ln>
-        </p:spPr>
-        <p:txBody>
-          <a:bodyPr/>
-          <a:lstStyle/>
-          <a:p>
-            <a:endParaRPr lang="en-US"/>
-          </a:p>
-        </p:txBody>
-      </p:sp>
-      <p:sp>
-        <p:nvSpPr>
-          <p:cNvPr id="26" name="Text 23"/>
-          <p:cNvSpPr txBox="1"/>
-          <p:nvPr/>
-        </p:nvSpPr>
-        <p:spPr>
-          <a:xfrm>
-            <a:off x="4453128" y="4690872"/>
-            <a:ext cx="3319272" cy="182880"/>
-          </a:xfrm>
-          <a:prstGeom prst="rect">
-            <a:avLst/>
-          </a:prstGeom>
-          <a:noFill/>
-          <a:ln/>
-        </p:spPr>
-        <p:txBody>
-          <a:bodyPr wrap="square" lIns="0" tIns="0" rIns="0" bIns="0" rtlCol="0" anchor="t"/>
-          <a:lstStyle/>
-          <a:p>
-            <a:pPr marL="0" indent="0">
-              <a:buNone/>
-            </a:pPr>
-            <a:r>
-              <a:rPr lang="en-US" sz="900" b="1" kern="0" spc="100" dirty="0">
-                <a:solidFill>
-                  <a:schemeClr val="accent4"/>
-                </a:solidFill>
-              </a:rPr>
-              <a:t>PROOF, FOUR SNAPSHOTS</a:t>
-            </a:r>
-            <a:endParaRPr lang="en-US" sz="900" dirty="0"/>
-          </a:p>
-        </p:txBody>
-      </p:sp>
-      <p:sp>
-        <p:nvSpPr>
-          <p:cNvPr id="27" name="Text 24"/>
-          <p:cNvSpPr txBox="1"/>
-          <p:nvPr/>
-        </p:nvSpPr>
-        <p:spPr>
-          <a:xfrm>
-            <a:off x="4453128" y="4919472"/>
-            <a:ext cx="1417320" cy="548640"/>
-          </a:xfrm>
-          <a:prstGeom prst="rect">
-            <a:avLst/>
-          </a:prstGeom>
-          <a:noFill/>
-          <a:ln/>
-        </p:spPr>
-        <p:txBody>
-          <a:bodyPr wrap="square" lIns="0" tIns="0" rIns="0" bIns="0" rtlCol="0" anchor="ctr"/>
-          <a:lstStyle/>
-          <a:p>
-            <a:pPr marL="0" indent="0">
-              <a:buNone/>
-            </a:pPr>
-            <a:r>
-              <a:rPr lang="en-US" sz="2200" b="1" dirty="0">
-                <a:solidFill>
-                  <a:srgbClr val="2C6E49"/>
-                </a:solidFill>
-                <a:latin typeface="Cambria" pitchFamily="34" charset="0"/>
-                <a:ea typeface="Cambria" pitchFamily="34" charset="-122"/>
-                <a:cs typeface="Cambria" pitchFamily="34" charset="-120"/>
-              </a:rPr>
-              <a:t>4.2 → 0.8</a:t>
-            </a:r>
-            <a:endParaRPr lang="en-US" sz="2200" dirty="0"/>
-          </a:p>
-        </p:txBody>
-      </p:sp>
-      <p:sp>
-        <p:nvSpPr>
-          <p:cNvPr id="28" name="Text 25"/>
-          <p:cNvSpPr txBox="1"/>
-          <p:nvPr/>
-        </p:nvSpPr>
-        <p:spPr>
-          <a:xfrm>
-            <a:off x="5897880" y="4892040"/>
-            <a:ext cx="1856232" cy="621792"/>
-          </a:xfrm>
-          <a:prstGeom prst="rect">
-            <a:avLst/>
-          </a:prstGeom>
-          <a:noFill/>
-          <a:ln/>
-        </p:spPr>
-        <p:txBody>
-          <a:bodyPr wrap="square" lIns="0" tIns="0" rIns="0" bIns="0" rtlCol="0" anchor="ctr"/>
-          <a:lstStyle/>
-          <a:p>
-            <a:pPr marL="0" indent="0">
-              <a:buNone/>
-            </a:pPr>
-            <a:r>
-              <a:rPr lang="en-US" sz="1000" dirty="0">
-                <a:solidFill>
-                  <a:schemeClr val="tx1"/>
-                </a:solidFill>
-              </a:rPr>
-              <a:t>how far the answer moves between identical runs: naive 4.2 points</a:t>
-            </a:r>
-            <a:r>
-              <a:rPr lang="en-US" sz="1000">
-                <a:solidFill>
-                  <a:schemeClr val="tx1"/>
-                </a:solidFill>
-              </a:rPr>
-              <a:t>, specialists 0.8 points, mean of four snapshots</a:t>
-            </a:r>
-            <a:endParaRPr lang="en-US" sz="1000" dirty="0"/>
-          </a:p>
-        </p:txBody>
-      </p:sp>
-      <p:sp>
-        <p:nvSpPr>
-          <p:cNvPr id="29" name="Shape 26"/>
-          <p:cNvSpPr/>
-          <p:nvPr/>
-        </p:nvSpPr>
-        <p:spPr>
-          <a:xfrm>
-            <a:off x="8046720" y="1627632"/>
-            <a:ext cx="3593592" cy="960120"/>
-          </a:xfrm>
-          <a:prstGeom prst="roundRect">
-            <a:avLst>
-              <a:gd name="adj" fmla="val 9524"/>
+              <a:gd name="adj" fmla="val 8696"/>
             </a:avLst>
           </a:prstGeom>
           <a:solidFill>
@@ -4946,23 +5284,16 @@
             <a:prstDash val="solid"/>
           </a:ln>
         </p:spPr>
-        <p:txBody>
-          <a:bodyPr/>
-          <a:lstStyle/>
-          <a:p>
-            <a:endParaRPr lang="en-US"/>
-          </a:p>
-        </p:txBody>
-      </p:sp>
-      <p:sp>
-        <p:nvSpPr>
-          <p:cNvPr id="30" name="Shape 27"/>
+      </p:sp>
+      <p:sp>
+        <p:nvSpPr>
+          <p:cNvPr id="22" name="Shape 19"/>
           <p:cNvSpPr/>
           <p:nvPr/>
         </p:nvSpPr>
         <p:spPr>
           <a:xfrm>
-            <a:off x="8046720" y="2404872"/>
+            <a:off x="8046720" y="2514600"/>
             <a:ext cx="3593592" cy="182880"/>
           </a:xfrm>
           <a:prstGeom prst="rect">
@@ -4978,24 +5309,17 @@
             <a:prstDash val="solid"/>
           </a:ln>
         </p:spPr>
-        <p:txBody>
-          <a:bodyPr/>
-          <a:lstStyle/>
-          <a:p>
-            <a:endParaRPr lang="en-US"/>
-          </a:p>
-        </p:txBody>
-      </p:sp>
-      <p:sp>
-        <p:nvSpPr>
-          <p:cNvPr id="31" name="Text 28"/>
+      </p:sp>
+      <p:sp>
+        <p:nvSpPr>
+          <p:cNvPr id="23" name="Text 20"/>
           <p:cNvSpPr txBox="1"/>
           <p:nvPr/>
         </p:nvSpPr>
         <p:spPr>
           <a:xfrm>
-            <a:off x="8202168" y="1719072"/>
-            <a:ext cx="3319272" cy="182880"/>
+            <a:off x="8229600" y="1755648"/>
+            <a:ext cx="3227832" cy="182880"/>
           </a:xfrm>
           <a:prstGeom prst="rect">
             <a:avLst/>
@@ -5024,14 +5348,14 @@
       </p:sp>
       <p:sp>
         <p:nvSpPr>
-          <p:cNvPr id="32" name="Text 29"/>
+          <p:cNvPr id="24" name="Text 21"/>
           <p:cNvSpPr txBox="1"/>
           <p:nvPr/>
         </p:nvSpPr>
         <p:spPr>
           <a:xfrm>
-            <a:off x="8202168" y="1901952"/>
-            <a:ext cx="3319272" cy="292608"/>
+            <a:off x="8229600" y="1956816"/>
+            <a:ext cx="3227832" cy="329184"/>
           </a:xfrm>
           <a:prstGeom prst="rect">
             <a:avLst/>
@@ -5047,27 +5371,27 @@
               <a:buNone/>
             </a:pPr>
             <a:r>
-              <a:rPr lang="en-US" sz="1400" b="1" dirty="0">
+              <a:rPr lang="en-US" sz="1500" b="1" dirty="0">
                 <a:solidFill>
                   <a:schemeClr val="bg1"/>
                 </a:solidFill>
               </a:rPr>
-              <a:t>It can invent its own “evidence”(hallucinate)</a:t>
-            </a:r>
-            <a:endParaRPr lang="en-US" sz="1400" dirty="0"/>
-          </a:p>
-        </p:txBody>
-      </p:sp>
-      <p:sp>
-        <p:nvSpPr>
-          <p:cNvPr id="33" name="Text 30"/>
+              <a:t>It can invent its own support</a:t>
+            </a:r>
+            <a:endParaRPr lang="en-US" sz="1500" dirty="0"/>
+          </a:p>
+        </p:txBody>
+      </p:sp>
+      <p:sp>
+        <p:nvSpPr>
+          <p:cNvPr id="25" name="Text 22"/>
           <p:cNvSpPr txBox="1"/>
           <p:nvPr/>
         </p:nvSpPr>
         <p:spPr>
           <a:xfrm>
-            <a:off x="8202168" y="2194560"/>
-            <a:ext cx="3319272" cy="365760"/>
+            <a:off x="8229600" y="2286000"/>
+            <a:ext cx="3227832" cy="384048"/>
           </a:xfrm>
           <a:prstGeom prst="rect">
             <a:avLst/>
@@ -5083,27 +5407,27 @@
               <a:buNone/>
             </a:pPr>
             <a:r>
-              <a:rPr lang="en-US" sz="1050" dirty="0">
+              <a:rPr lang="en-US" sz="1100" dirty="0">
                 <a:solidFill>
                   <a:srgbClr val="F8D7CE"/>
                 </a:solidFill>
               </a:rPr>
               <a:t>A fluent quote or figure that was never in the document.</a:t>
             </a:r>
-            <a:endParaRPr lang="en-US" sz="1050" dirty="0"/>
-          </a:p>
-        </p:txBody>
-      </p:sp>
-      <p:sp>
-        <p:nvSpPr>
-          <p:cNvPr id="34" name="Shape 31"/>
+            <a:endParaRPr lang="en-US" sz="1100" dirty="0"/>
+          </a:p>
+        </p:txBody>
+      </p:sp>
+      <p:sp>
+        <p:nvSpPr>
+          <p:cNvPr id="26" name="Shape 23"/>
           <p:cNvSpPr/>
           <p:nvPr/>
         </p:nvSpPr>
         <p:spPr>
           <a:xfrm>
-            <a:off x="8046720" y="2587752"/>
-            <a:ext cx="3593592" cy="2011680"/>
+            <a:off x="8046720" y="2697480"/>
+            <a:ext cx="3593592" cy="2743200"/>
           </a:xfrm>
           <a:prstGeom prst="rect">
             <a:avLst/>
@@ -5118,24 +5442,17 @@
             <a:prstDash val="solid"/>
           </a:ln>
         </p:spPr>
-        <p:txBody>
-          <a:bodyPr/>
-          <a:lstStyle/>
-          <a:p>
-            <a:endParaRPr lang="en-US"/>
-          </a:p>
-        </p:txBody>
-      </p:sp>
-      <p:sp>
-        <p:nvSpPr>
-          <p:cNvPr id="35" name="Text 32"/>
+      </p:sp>
+      <p:sp>
+        <p:nvSpPr>
+          <p:cNvPr id="27" name="Text 24"/>
           <p:cNvSpPr txBox="1"/>
           <p:nvPr/>
         </p:nvSpPr>
         <p:spPr>
           <a:xfrm>
-            <a:off x="8202168" y="2697480"/>
-            <a:ext cx="3319272" cy="182880"/>
+            <a:off x="8229600" y="2834640"/>
+            <a:ext cx="3227832" cy="182880"/>
           </a:xfrm>
           <a:prstGeom prst="rect">
             <a:avLst/>
@@ -5164,14 +5481,14 @@
       </p:sp>
       <p:sp>
         <p:nvSpPr>
-          <p:cNvPr id="36" name="Text 33"/>
+          <p:cNvPr id="28" name="Text 25"/>
           <p:cNvSpPr txBox="1"/>
           <p:nvPr/>
         </p:nvSpPr>
         <p:spPr>
           <a:xfrm>
-            <a:off x="8202168" y="2935224"/>
-            <a:ext cx="3319272" cy="1627632"/>
+            <a:off x="8229600" y="3108960"/>
+            <a:ext cx="3227832" cy="2240280"/>
           </a:xfrm>
           <a:prstGeom prst="rect">
             <a:avLst/>
@@ -5188,22 +5505,22 @@
               <a:buChar char="•"/>
             </a:pPr>
             <a:r>
-              <a:rPr lang="en-US" sz="1050" b="1" dirty="0">
+              <a:rPr lang="en-US" sz="1300" b="1" dirty="0">
                 <a:solidFill>
                   <a:srgbClr val="1B1F2A"/>
                 </a:solidFill>
               </a:rPr>
-              <a:t>Harness: </a:t>
-            </a:r>
-            <a:r>
-              <a:rPr lang="en-US" sz="1050" dirty="0">
+              <a:t>Check: </a:t>
+            </a:r>
+            <a:r>
+              <a:rPr lang="en-US" sz="1300" dirty="0">
                 <a:solidFill>
                   <a:schemeClr val="tx1"/>
                 </a:solidFill>
               </a:rPr>
-              <a:t>every quote and every number in a claim is verified by code, not by a model. A quote must match its item character for character; a quote stitched from two places fails.</a:t>
-            </a:r>
-            <a:endParaRPr lang="en-US" sz="1050" dirty="0"/>
+              <a:t>every quote matched to its item character for character, by code; a quote stitched from two places fails.</a:t>
+            </a:r>
+            <a:endParaRPr lang="en-US" sz="1300" dirty="0"/>
           </a:p>
           <a:p>
             <a:pPr marL="342900" indent="-342900">
@@ -5211,7 +5528,7 @@
               <a:buChar char="•"/>
             </a:pPr>
             <a:r>
-              <a:rPr lang="en-US" sz="1050" b="1" dirty="0">
+              <a:rPr lang="en-US" sz="1300" b="1" dirty="0">
                 <a:solidFill>
                   <a:srgbClr val="1B1F2A"/>
                 </a:solidFill>
@@ -5219,22 +5536,14 @@
               <a:t>Bounds: </a:t>
             </a:r>
             <a:r>
-              <a:rPr lang="en-US" sz="1050" dirty="0">
+              <a:rPr lang="en-US" sz="1300" dirty="0">
                 <a:solidFill>
                   <a:schemeClr val="tx1"/>
                 </a:solidFill>
               </a:rPr>
-              <a:t>every watch-out must be answered by id; the direction call is clipped </a:t>
-            </a:r>
-            <a:r>
-              <a:rPr lang="en-US" sz="1050">
-                <a:solidFill>
-                  <a:schemeClr val="tx1"/>
-                </a:solidFill>
-              </a:rPr>
-              <a:t>to ±10.</a:t>
-            </a:r>
-            <a:endParaRPr lang="en-US" sz="1050" dirty="0"/>
+              <a:t>every watch-out answered by id; the opinion clipped to −10 to +10.</a:t>
+            </a:r>
+            <a:endParaRPr lang="en-US" sz="1300" dirty="0"/>
           </a:p>
           <a:p>
             <a:pPr marL="342900" indent="-342900">
@@ -5242,167 +5551,22 @@
               <a:buChar char="•"/>
             </a:pPr>
             <a:r>
-              <a:rPr lang="en-US" sz="1050" b="1" dirty="0">
+              <a:rPr lang="en-US" sz="1300" b="1" dirty="0">
                 <a:solidFill>
                   <a:srgbClr val="1B1F2A"/>
                 </a:solidFill>
               </a:rPr>
-              <a:t>One repair round </a:t>
-            </a:r>
-            <a:r>
-              <a:rPr lang="en-US" sz="1050" dirty="0">
+              <a:t>One repair round: </a:t>
+            </a:r>
+            <a:r>
+              <a:rPr lang="en-US" sz="1300" dirty="0">
                 <a:solidFill>
                   <a:schemeClr val="tx1"/>
                 </a:solidFill>
               </a:rPr>
-              <a:t>with the verifier's report; both answers are kept. What still fails is recorded as unverified, never hidden.</a:t>
-            </a:r>
-            <a:endParaRPr lang="en-US" sz="1050" dirty="0"/>
-          </a:p>
-        </p:txBody>
-      </p:sp>
-      <p:sp>
-        <p:nvSpPr>
-          <p:cNvPr id="37" name="Shape 34"/>
-          <p:cNvSpPr/>
-          <p:nvPr/>
-        </p:nvSpPr>
-        <p:spPr>
-          <a:xfrm>
-            <a:off x="8046720" y="4599432"/>
-            <a:ext cx="3593592" cy="960120"/>
-          </a:xfrm>
-          <a:prstGeom prst="roundRect">
-            <a:avLst>
-              <a:gd name="adj" fmla="val 9524"/>
-            </a:avLst>
-          </a:prstGeom>
-          <a:solidFill>
-            <a:srgbClr val="FFFFFF"/>
-          </a:solidFill>
-          <a:ln w="12700">
-            <a:solidFill>
-              <a:srgbClr val="D5DBE5"/>
-            </a:solidFill>
-            <a:prstDash val="solid"/>
-          </a:ln>
-        </p:spPr>
-        <p:txBody>
-          <a:bodyPr/>
-          <a:lstStyle/>
-          <a:p>
-            <a:endParaRPr lang="en-US"/>
-          </a:p>
-        </p:txBody>
-      </p:sp>
-      <p:sp>
-        <p:nvSpPr>
-          <p:cNvPr id="38" name="Text 35"/>
-          <p:cNvSpPr txBox="1"/>
-          <p:nvPr/>
-        </p:nvSpPr>
-        <p:spPr>
-          <a:xfrm>
-            <a:off x="8202168" y="4690872"/>
-            <a:ext cx="3319272" cy="182880"/>
-          </a:xfrm>
-          <a:prstGeom prst="rect">
-            <a:avLst/>
-          </a:prstGeom>
-          <a:noFill/>
-          <a:ln/>
-        </p:spPr>
-        <p:txBody>
-          <a:bodyPr wrap="square" lIns="0" tIns="0" rIns="0" bIns="0" rtlCol="0" anchor="t"/>
-          <a:lstStyle/>
-          <a:p>
-            <a:pPr marL="0" indent="0">
-              <a:buNone/>
-            </a:pPr>
-            <a:r>
-              <a:rPr lang="en-US" sz="900" b="1" kern="0" spc="100" dirty="0">
-                <a:solidFill>
-                  <a:schemeClr val="accent4"/>
-                </a:solidFill>
-              </a:rPr>
-              <a:t>PROOF, 28 OCTOBER</a:t>
-            </a:r>
-            <a:endParaRPr lang="en-US" sz="900" dirty="0"/>
-          </a:p>
-        </p:txBody>
-      </p:sp>
-      <p:sp>
-        <p:nvSpPr>
-          <p:cNvPr id="39" name="Text 36"/>
-          <p:cNvSpPr txBox="1"/>
-          <p:nvPr/>
-        </p:nvSpPr>
-        <p:spPr>
-          <a:xfrm>
-            <a:off x="8202168" y="4919472"/>
-            <a:ext cx="1417320" cy="548640"/>
-          </a:xfrm>
-          <a:prstGeom prst="rect">
-            <a:avLst/>
-          </a:prstGeom>
-          <a:noFill/>
-          <a:ln/>
-        </p:spPr>
-        <p:txBody>
-          <a:bodyPr wrap="square" lIns="0" tIns="0" rIns="0" bIns="0" rtlCol="0" anchor="ctr"/>
-          <a:lstStyle/>
-          <a:p>
-            <a:pPr marL="0" indent="0">
-              <a:buNone/>
-            </a:pPr>
-            <a:r>
-              <a:rPr lang="en-US" sz="2200" b="1" dirty="0">
-                <a:solidFill>
-                  <a:srgbClr val="2C6E49"/>
-                </a:solidFill>
-                <a:latin typeface="Cambria" pitchFamily="34" charset="0"/>
-                <a:ea typeface="Cambria" pitchFamily="34" charset="-122"/>
-                <a:cs typeface="Cambria" pitchFamily="34" charset="-120"/>
-              </a:rPr>
-              <a:t>326 / 327</a:t>
-            </a:r>
-            <a:endParaRPr lang="en-US" sz="2200" dirty="0"/>
-          </a:p>
-        </p:txBody>
-      </p:sp>
-      <p:sp>
-        <p:nvSpPr>
-          <p:cNvPr id="40" name="Text 37"/>
-          <p:cNvSpPr txBox="1"/>
-          <p:nvPr/>
-        </p:nvSpPr>
-        <p:spPr>
-          <a:xfrm>
-            <a:off x="9646920" y="4892040"/>
-            <a:ext cx="1856232" cy="621792"/>
-          </a:xfrm>
-          <a:prstGeom prst="rect">
-            <a:avLst/>
-          </a:prstGeom>
-          <a:noFill/>
-          <a:ln/>
-        </p:spPr>
-        <p:txBody>
-          <a:bodyPr wrap="square" lIns="0" tIns="0" rIns="0" bIns="0" rtlCol="0" anchor="ctr"/>
-          <a:lstStyle/>
-          <a:p>
-            <a:pPr marL="0" indent="0">
-              <a:buNone/>
-            </a:pPr>
-            <a:r>
-              <a:rPr lang="en-US" sz="1000" dirty="0">
-                <a:solidFill>
-                  <a:schemeClr val="tx1"/>
-                </a:solidFill>
-              </a:rPr>
-              <a:t>claims whose quote code found verbatim, analysts 3 to 8, 30 runs; the one miss is on the record</a:t>
-            </a:r>
-            <a:endParaRPr lang="en-US" sz="1000" dirty="0"/>
+              <a:t>the verifier's report goes back once; both answers are kept; what still fails stays unverified.</a:t>
+            </a:r>
+            <a:endParaRPr lang="en-US" sz="1300" dirty="0"/>
           </a:p>
         </p:txBody>
       </p:sp>
@@ -5445,13 +5609,18 @@
             <a:pPr algn="r"/>
             <a:fld id="{F7021451-1387-4CA6-816F-3879F97B5CBC}" type="slidenum">
               <a:rPr lang="en-US" b="0"/>
-              <a:t>10</a:t>
+              <a:t>11</a:t>
             </a:fld>
             <a:endParaRPr lang="en-US"/>
           </a:p>
         </p:txBody>
       </p:sp>
     </p:spTree>
+    <p:extLst>
+      <p:ext uri="{BB962C8B-B14F-4D97-AF65-F5344CB8AC3E}">
+        <p14:creationId xmlns:p14="http://schemas.microsoft.com/office/powerpoint/2010/main" val="603732033"/>
+      </p:ext>
+    </p:extLst>
   </p:cSld>
   <p:clrMapOvr>
     <a:masterClrMapping/>
@@ -5459,7 +5628,7 @@
 </p:sld>
 </file>
 
-<file path=ppt/slides/slide11.xml><?xml version="1.0" encoding="utf-8"?>
+<file path=ppt/slides/slide12.xml><?xml version="1.0" encoding="utf-8"?>
 <p:sld xmlns:a="http://schemas.openxmlformats.org/drawingml/2006/main" xmlns:r="http://schemas.openxmlformats.org/officeDocument/2006/relationships" xmlns:p="http://schemas.openxmlformats.org/presentationml/2006/main">
   <p:cSld name="Slide 11">
     <p:spTree>
@@ -7847,7 +8016,7 @@
             <a:pPr algn="r"/>
             <a:fld id="{F7021451-1387-4CA6-816F-3879F97B5CBC}" type="slidenum">
               <a:rPr lang="en-US" b="0"/>
-              <a:t>11</a:t>
+              <a:t>12</a:t>
             </a:fld>
             <a:endParaRPr lang="en-US"/>
           </a:p>
@@ -7861,7 +8030,7 @@
 </p:sld>
 </file>
 
-<file path=ppt/slides/slide12.xml><?xml version="1.0" encoding="utf-8"?>
+<file path=ppt/slides/slide13.xml><?xml version="1.0" encoding="utf-8"?>
 <p:sld xmlns:a="http://schemas.openxmlformats.org/drawingml/2006/main" xmlns:r="http://schemas.openxmlformats.org/officeDocument/2006/relationships" xmlns:p="http://schemas.openxmlformats.org/presentationml/2006/main">
   <p:cSld name="Slide 13">
     <p:spTree>
@@ -8416,7 +8585,7 @@
 </p:sld>
 </file>
 
-<file path=ppt/slides/slide13.xml><?xml version="1.0" encoding="utf-8"?>
+<file path=ppt/slides/slide14.xml><?xml version="1.0" encoding="utf-8"?>
 <p:sld xmlns:a="http://schemas.openxmlformats.org/drawingml/2006/main" xmlns:r="http://schemas.openxmlformats.org/officeDocument/2006/relationships" xmlns:p="http://schemas.openxmlformats.org/presentationml/2006/main">
   <p:cSld name="Slide 14">
     <p:spTree>
@@ -8836,7 +9005,7 @@
             <a:pPr algn="r"/>
             <a:fld id="{F7021451-1387-4CA6-816F-3879F97B5CBC}" type="slidenum">
               <a:rPr lang="en-US" b="0"/>
-              <a:t>13</a:t>
+              <a:t>14</a:t>
             </a:fld>
             <a:endParaRPr lang="en-US"/>
           </a:p>
@@ -8850,7 +9019,7 @@
 </p:sld>
 </file>
 
-<file path=ppt/slides/slide14.xml><?xml version="1.0" encoding="utf-8"?>
+<file path=ppt/slides/slide15.xml><?xml version="1.0" encoding="utf-8"?>
 <p:sld xmlns:a="http://schemas.openxmlformats.org/drawingml/2006/main" xmlns:r="http://schemas.openxmlformats.org/officeDocument/2006/relationships" xmlns:p="http://schemas.openxmlformats.org/presentationml/2006/main">
   <p:cSld>
     <p:spTree>
@@ -8986,7 +9155,23 @@
                   <a:schemeClr val="tx1"/>
                 </a:solidFill>
               </a:rPr>
-              <a:t>The five answers must sit within the variance pass mark (2 points), every claim must carry a quote that code finds in the evidence, character for character, and no number may come from memory. Only then does the lean count toward the number.</a:t>
+              <a:t>The five answers must sit within the variance pass mark (2 points), every claim must carry a quote that code finds in the evidence, character for character, and no number may come from memory. Only then </a:t>
+            </a:r>
+            <a:r>
+              <a:rPr lang="en-US" sz="1250">
+                <a:solidFill>
+                  <a:schemeClr val="tx1"/>
+                </a:solidFill>
+              </a:rPr>
+              <a:t>does the opinion count </a:t>
+            </a:r>
+            <a:r>
+              <a:rPr lang="en-US" sz="1250" dirty="0">
+                <a:solidFill>
+                  <a:schemeClr val="tx1"/>
+                </a:solidFill>
+              </a:rPr>
+              <a:t>toward the number.</a:t>
             </a:r>
             <a:endParaRPr lang="en-US" sz="1250" dirty="0"/>
           </a:p>
@@ -9613,7 +9798,7 @@
         </p:nvGraphicFramePr>
         <p:xfrm>
           <a:off x="704088" y="4315968"/>
-          <a:ext cx="2103120" cy="914400"/>
+          <a:ext cx="2103120" cy="1645920"/>
         </p:xfrm>
         <a:graphic>
           <a:graphicData uri="http://schemas.openxmlformats.org/drawingml/2006/table">
@@ -10136,12 +10321,20 @@
               <a:buNone/>
             </a:pPr>
             <a:r>
+              <a:rPr lang="en-US" sz="1050" b="1">
+                <a:solidFill>
+                  <a:schemeClr val="tx1"/>
+                </a:solidFill>
+              </a:rPr>
+              <a:t>Each point of opinion </a:t>
+            </a:r>
+            <a:r>
               <a:rPr lang="en-US" sz="1050" b="1" dirty="0">
                 <a:solidFill>
                   <a:schemeClr val="tx1"/>
                 </a:solidFill>
               </a:rPr>
-              <a:t>Each point of lean moves one point of probability </a:t>
+              <a:t>moves one point of probability </a:t>
             </a:r>
             <a:r>
               <a:rPr lang="en-US" sz="1050" dirty="0">
@@ -10455,7 +10648,23 @@
                   <a:schemeClr val="accent4"/>
                 </a:solidFill>
               </a:rPr>
-              <a:t> · quote found by code, character for character · lean hawkish · 12 of 12 claims in this run verified</a:t>
+              <a:t> · quote found by code, character for character </a:t>
+            </a:r>
+            <a:r>
+              <a:rPr lang="en-US" sz="1000">
+                <a:solidFill>
+                  <a:schemeClr val="accent4"/>
+                </a:solidFill>
+              </a:rPr>
+              <a:t>· opinion hawkish </a:t>
+            </a:r>
+            <a:r>
+              <a:rPr lang="en-US" sz="1000" dirty="0">
+                <a:solidFill>
+                  <a:schemeClr val="accent4"/>
+                </a:solidFill>
+              </a:rPr>
+              <a:t>· 12 of 12 claims in this run verified</a:t>
             </a:r>
             <a:endParaRPr lang="en-US" sz="1000" dirty="0"/>
           </a:p>
@@ -10500,7 +10709,7 @@
             <a:pPr algn="r"/>
             <a:fld id="{F7021451-1387-4CA6-816F-3879F97B5CBC}" type="slidenum">
               <a:rPr lang="en-US" b="0"/>
-              <a:t>14</a:t>
+              <a:t>15</a:t>
             </a:fld>
             <a:endParaRPr lang="en-US"/>
           </a:p>
@@ -10519,7 +10728,7 @@
 </p:sld>
 </file>
 
-<file path=ppt/slides/slide15.xml><?xml version="1.0" encoding="utf-8"?>
+<file path=ppt/slides/slide16.xml><?xml version="1.0" encoding="utf-8"?>
 <p:sld xmlns:a="http://schemas.openxmlformats.org/drawingml/2006/main" xmlns:r="http://schemas.openxmlformats.org/officeDocument/2006/relationships" xmlns:p="http://schemas.openxmlformats.org/presentationml/2006/main">
   <p:cSld name="Slide 16">
     <p:spTree>
@@ -10914,7 +11123,23 @@
                   <a:srgbClr val="FFFFFF"/>
                 </a:solidFill>
               </a:rPr>
-              <a:t>Analyst 4: the lean, grounded, leaked, watch-outs badges; one claim with its quote and the 'quote verified' mark</a:t>
+              <a:t>Analyst 4</a:t>
+            </a:r>
+            <a:r>
+              <a:rPr lang="en-US" sz="1300">
+                <a:solidFill>
+                  <a:srgbClr val="FFFFFF"/>
+                </a:solidFill>
+              </a:rPr>
+              <a:t>: the opinion, grounded, </a:t>
+            </a:r>
+            <a:r>
+              <a:rPr lang="en-US" sz="1300" dirty="0">
+                <a:solidFill>
+                  <a:srgbClr val="FFFFFF"/>
+                </a:solidFill>
+              </a:rPr>
+              <a:t>leaked, watch-outs badges; one claim with its quote and the 'quote verified' mark</a:t>
             </a:r>
             <a:endParaRPr lang="en-US" sz="1300" dirty="0"/>
           </a:p>
@@ -11074,7 +11299,7 @@
 </p:sld>
 </file>
 
-<file path=ppt/slides/slide16.xml><?xml version="1.0" encoding="utf-8"?>
+<file path=ppt/slides/slide17.xml><?xml version="1.0" encoding="utf-8"?>
 <p:sld xmlns:a="http://schemas.openxmlformats.org/drawingml/2006/main" xmlns:r="http://schemas.openxmlformats.org/officeDocument/2006/relationships" xmlns:p="http://schemas.openxmlformats.org/presentationml/2006/main">
   <p:cSld name="Slide 18">
     <p:spTree>
@@ -11647,7 +11872,7 @@
 </p:sld>
 </file>
 
-<file path=ppt/slides/slide17.xml><?xml version="1.0" encoding="utf-8"?>
+<file path=ppt/slides/slide18.xml><?xml version="1.0" encoding="utf-8"?>
 <p:sld xmlns:a="http://schemas.openxmlformats.org/drawingml/2006/main" xmlns:r="http://schemas.openxmlformats.org/officeDocument/2006/relationships" xmlns:p="http://schemas.openxmlformats.org/presentationml/2006/main">
   <p:cSld name="Slide 19">
     <p:spTree>
@@ -12184,7 +12409,7 @@
 </p:sld>
 </file>
 
-<file path=ppt/slides/slide18.xml><?xml version="1.0" encoding="utf-8"?>
+<file path=ppt/slides/slide19.xml><?xml version="1.0" encoding="utf-8"?>
 <p:sld xmlns:a="http://schemas.openxmlformats.org/drawingml/2006/main" xmlns:r="http://schemas.openxmlformats.org/officeDocument/2006/relationships" xmlns:p="http://schemas.openxmlformats.org/presentationml/2006/main">
   <p:cSld>
     <p:spTree>
@@ -12649,7 +12874,15 @@
                   <a:schemeClr val="tx1"/>
                 </a:solidFill>
               </a:rPr>
-              <a:t>A grading form in the app: a user marks an analyst's answer from 1 to 5 on four questions (did it start from the base rate, argue both sides, say what it was unsure of, say what would prove it wrong). Twenty hand grades become the reference; a model grader is trusted only once it agrees with them. The grade becomes the tenth measured dimension and a gate on the lean.</a:t>
+              <a:t>A grading form in the app: a user marks an analyst's answer from 1 to 5 on four questions (did it start from the base rate, argue both sides, say what it was unsure of, say what would prove it wrong). Twenty hand grades become the reference; a model grader is trusted only once it agrees with them. The grade becomes the tenth measured dimension and a </a:t>
+            </a:r>
+            <a:r>
+              <a:rPr lang="en-US" sz="1000">
+                <a:solidFill>
+                  <a:schemeClr val="tx1"/>
+                </a:solidFill>
+              </a:rPr>
+              <a:t>gate on the opinion.</a:t>
             </a:r>
             <a:endParaRPr lang="en-US" sz="1000" dirty="0"/>
           </a:p>
@@ -13418,7 +13651,7 @@
             <a:pPr algn="r"/>
             <a:fld id="{F7021451-1387-4CA6-816F-3879F97B5CBC}" type="slidenum">
               <a:rPr lang="en-US" b="0"/>
-              <a:t>18</a:t>
+              <a:t>19</a:t>
             </a:fld>
             <a:endParaRPr lang="en-US"/>
           </a:p>
@@ -13430,148 +13663,6 @@
         <p14:creationId xmlns:p14="http://schemas.microsoft.com/office/powerpoint/2010/main" val="752257888"/>
       </p:ext>
     </p:extLst>
-  </p:cSld>
-  <p:clrMapOvr>
-    <a:masterClrMapping/>
-  </p:clrMapOvr>
-</p:sld>
-</file>
-
-<file path=ppt/slides/slide19.xml><?xml version="1.0" encoding="utf-8"?>
-<p:sld xmlns:a="http://schemas.openxmlformats.org/drawingml/2006/main" xmlns:r="http://schemas.openxmlformats.org/officeDocument/2006/relationships" xmlns:p="http://schemas.openxmlformats.org/presentationml/2006/main">
-  <p:cSld name="Slide 21">
-    <p:spTree>
-      <p:nvGrpSpPr>
-        <p:cNvPr id="1" name=""/>
-        <p:cNvGrpSpPr/>
-        <p:nvPr/>
-      </p:nvGrpSpPr>
-      <p:grpSpPr>
-        <a:xfrm>
-          <a:off x="0" y="0"/>
-          <a:ext cx="0" cy="0"/>
-          <a:chOff x="0" y="0"/>
-          <a:chExt cx="0" cy="0"/>
-        </a:xfrm>
-      </p:grpSpPr>
-      <p:sp>
-        <p:nvSpPr>
-          <p:cNvPr id="2" name="Text 0"/>
-          <p:cNvSpPr>
-            <a:spLocks noGrp="1"/>
-          </p:cNvSpPr>
-          <p:nvPr>
-            <p:ph type="title" idx="100" hasCustomPrompt="1"/>
-          </p:nvPr>
-        </p:nvSpPr>
-        <p:spPr>
-          <a:xfrm>
-            <a:off x="548640" y="2103120"/>
-            <a:ext cx="11091672" cy="1280160"/>
-          </a:xfrm>
-          <a:prstGeom prst="rect">
-            <a:avLst/>
-          </a:prstGeom>
-          <a:noFill/>
-          <a:ln/>
-        </p:spPr>
-        <p:txBody>
-          <a:bodyPr wrap="square" lIns="0" tIns="0" rIns="0" bIns="0" rtlCol="0" anchor="b"/>
-          <a:lstStyle/>
-          <a:p>
-            <a:pPr marL="0" indent="0" algn="l">
-              <a:buNone/>
-            </a:pPr>
-            <a:r>
-              <a:rPr lang="en-US" sz="4000" b="1" dirty="0">
-                <a:solidFill>
-                  <a:schemeClr val="bg1"/>
-                </a:solidFill>
-              </a:rPr>
-              <a:t>Three things to take away</a:t>
-            </a:r>
-            <a:endParaRPr lang="en-US" sz="4000" dirty="0"/>
-          </a:p>
-        </p:txBody>
-      </p:sp>
-      <p:sp>
-        <p:nvSpPr>
-          <p:cNvPr id="3" name="Text 0"/>
-          <p:cNvSpPr>
-            <a:spLocks noGrp="1"/>
-          </p:cNvSpPr>
-          <p:nvPr>
-            <p:ph type="body" idx="101" hasCustomPrompt="1"/>
-          </p:nvPr>
-        </p:nvSpPr>
-        <p:spPr>
-          <a:xfrm>
-            <a:off x="548640" y="3520440"/>
-            <a:ext cx="11091672" cy="1463040"/>
-          </a:xfrm>
-          <a:prstGeom prst="rect">
-            <a:avLst/>
-          </a:prstGeom>
-          <a:noFill/>
-          <a:ln/>
-        </p:spPr>
-        <p:txBody>
-          <a:bodyPr wrap="square" lIns="0" tIns="0" rIns="0" bIns="0" rtlCol="0" anchor="t"/>
-          <a:lstStyle/>
-          <a:p>
-            <a:pPr marL="342900" indent="-342900" algn="l">
-              <a:spcAft>
-                <a:spcPts val="800"/>
-              </a:spcAft>
-              <a:buSzPct val="100000"/>
-              <a:buChar char="•"/>
-            </a:pPr>
-            <a:r>
-              <a:rPr lang="en-US" sz="2000" dirty="0">
-                <a:solidFill>
-                  <a:srgbClr val="CADCFC"/>
-                </a:solidFill>
-              </a:rPr>
-              <a:t>The harness is the product. Same model, same evidence, same day: naive it wobbles and leaks; harnessed it is stable, quoted and checked.</a:t>
-            </a:r>
-            <a:endParaRPr lang="en-US" sz="2000" dirty="0"/>
-          </a:p>
-          <a:p>
-            <a:pPr marL="342900" indent="-342900" algn="l">
-              <a:spcAft>
-                <a:spcPts val="800"/>
-              </a:spcAft>
-              <a:buSzPct val="100000"/>
-              <a:buChar char="•"/>
-            </a:pPr>
-            <a:r>
-              <a:rPr lang="en-US" sz="2000" dirty="0">
-                <a:solidFill>
-                  <a:srgbClr val="CADCFC"/>
-                </a:solidFill>
-              </a:rPr>
-              <a:t>Judge the process. Eight decisions a year cannot prove skill; a pre-registered scorecard measured on every snapshot can show discipline and catch drift.</a:t>
-            </a:r>
-            <a:endParaRPr lang="en-US" sz="2000" dirty="0"/>
-          </a:p>
-          <a:p>
-            <a:pPr marL="342900" indent="-342900" algn="l">
-              <a:buSzPct val="100000"/>
-              <a:buChar char="•"/>
-            </a:pPr>
-            <a:r>
-              <a:rPr lang="en-US" sz="2000" dirty="0">
-                <a:solidFill>
-                  <a:srgbClr val="CADCFC"/>
-                </a:solidFill>
-              </a:rPr>
-              <a:t>The ask: scrutinise the scorecard, challenge a quote, and tell us which other decisions deserve the same chain. The 28 October call is on file; the 9 December forecast is too.</a:t>
-            </a:r>
-            <a:endParaRPr lang="en-US" sz="2000" dirty="0"/>
-          </a:p>
-        </p:txBody>
-      </p:sp>
-    </p:spTree>
   </p:cSld>
   <p:clrMapOvr>
     <a:masterClrMapping/>
@@ -14538,6 +14629,148 @@
 </file>
 
 <file path=ppt/slides/slide20.xml><?xml version="1.0" encoding="utf-8"?>
+<p:sld xmlns:a="http://schemas.openxmlformats.org/drawingml/2006/main" xmlns:r="http://schemas.openxmlformats.org/officeDocument/2006/relationships" xmlns:p="http://schemas.openxmlformats.org/presentationml/2006/main">
+  <p:cSld name="Slide 21">
+    <p:spTree>
+      <p:nvGrpSpPr>
+        <p:cNvPr id="1" name=""/>
+        <p:cNvGrpSpPr/>
+        <p:nvPr/>
+      </p:nvGrpSpPr>
+      <p:grpSpPr>
+        <a:xfrm>
+          <a:off x="0" y="0"/>
+          <a:ext cx="0" cy="0"/>
+          <a:chOff x="0" y="0"/>
+          <a:chExt cx="0" cy="0"/>
+        </a:xfrm>
+      </p:grpSpPr>
+      <p:sp>
+        <p:nvSpPr>
+          <p:cNvPr id="2" name="Text 0"/>
+          <p:cNvSpPr>
+            <a:spLocks noGrp="1"/>
+          </p:cNvSpPr>
+          <p:nvPr>
+            <p:ph type="title" idx="100" hasCustomPrompt="1"/>
+          </p:nvPr>
+        </p:nvSpPr>
+        <p:spPr>
+          <a:xfrm>
+            <a:off x="548640" y="2103120"/>
+            <a:ext cx="11091672" cy="1280160"/>
+          </a:xfrm>
+          <a:prstGeom prst="rect">
+            <a:avLst/>
+          </a:prstGeom>
+          <a:noFill/>
+          <a:ln/>
+        </p:spPr>
+        <p:txBody>
+          <a:bodyPr wrap="square" lIns="0" tIns="0" rIns="0" bIns="0" rtlCol="0" anchor="b"/>
+          <a:lstStyle/>
+          <a:p>
+            <a:pPr marL="0" indent="0" algn="l">
+              <a:buNone/>
+            </a:pPr>
+            <a:r>
+              <a:rPr lang="en-US" sz="4000" b="1" dirty="0">
+                <a:solidFill>
+                  <a:schemeClr val="bg1"/>
+                </a:solidFill>
+              </a:rPr>
+              <a:t>Three things to take away</a:t>
+            </a:r>
+            <a:endParaRPr lang="en-US" sz="4000" dirty="0"/>
+          </a:p>
+        </p:txBody>
+      </p:sp>
+      <p:sp>
+        <p:nvSpPr>
+          <p:cNvPr id="3" name="Text 0"/>
+          <p:cNvSpPr>
+            <a:spLocks noGrp="1"/>
+          </p:cNvSpPr>
+          <p:nvPr>
+            <p:ph type="body" idx="101" hasCustomPrompt="1"/>
+          </p:nvPr>
+        </p:nvSpPr>
+        <p:spPr>
+          <a:xfrm>
+            <a:off x="548640" y="3520440"/>
+            <a:ext cx="11091672" cy="1463040"/>
+          </a:xfrm>
+          <a:prstGeom prst="rect">
+            <a:avLst/>
+          </a:prstGeom>
+          <a:noFill/>
+          <a:ln/>
+        </p:spPr>
+        <p:txBody>
+          <a:bodyPr wrap="square" lIns="0" tIns="0" rIns="0" bIns="0" rtlCol="0" anchor="t"/>
+          <a:lstStyle/>
+          <a:p>
+            <a:pPr marL="342900" indent="-342900" algn="l">
+              <a:spcAft>
+                <a:spcPts val="800"/>
+              </a:spcAft>
+              <a:buSzPct val="100000"/>
+              <a:buChar char="•"/>
+            </a:pPr>
+            <a:r>
+              <a:rPr lang="en-US" sz="2000" dirty="0">
+                <a:solidFill>
+                  <a:srgbClr val="CADCFC"/>
+                </a:solidFill>
+              </a:rPr>
+              <a:t>The harness is the product. Same model, same evidence, same day: naive it wobbles and leaks; harnessed it is stable, quoted and checked.</a:t>
+            </a:r>
+            <a:endParaRPr lang="en-US" sz="2000" dirty="0"/>
+          </a:p>
+          <a:p>
+            <a:pPr marL="342900" indent="-342900" algn="l">
+              <a:spcAft>
+                <a:spcPts val="800"/>
+              </a:spcAft>
+              <a:buSzPct val="100000"/>
+              <a:buChar char="•"/>
+            </a:pPr>
+            <a:r>
+              <a:rPr lang="en-US" sz="2000" dirty="0">
+                <a:solidFill>
+                  <a:srgbClr val="CADCFC"/>
+                </a:solidFill>
+              </a:rPr>
+              <a:t>Judge the process. Eight decisions a year cannot prove skill; a pre-registered scorecard measured on every snapshot can show discipline and catch drift.</a:t>
+            </a:r>
+            <a:endParaRPr lang="en-US" sz="2000" dirty="0"/>
+          </a:p>
+          <a:p>
+            <a:pPr marL="342900" indent="-342900" algn="l">
+              <a:buSzPct val="100000"/>
+              <a:buChar char="•"/>
+            </a:pPr>
+            <a:r>
+              <a:rPr lang="en-US" sz="2000" dirty="0">
+                <a:solidFill>
+                  <a:srgbClr val="CADCFC"/>
+                </a:solidFill>
+              </a:rPr>
+              <a:t>The ask: scrutinise the scorecard, challenge a quote, and tell us which other decisions deserve the same chain. The 28 October call is on file; the 9 December forecast is too.</a:t>
+            </a:r>
+            <a:endParaRPr lang="en-US" sz="2000" dirty="0"/>
+          </a:p>
+        </p:txBody>
+      </p:sp>
+    </p:spTree>
+  </p:cSld>
+  <p:clrMapOvr>
+    <a:masterClrMapping/>
+  </p:clrMapOvr>
+</p:sld>
+</file>
+
+<file path=ppt/slides/slide21.xml><?xml version="1.0" encoding="utf-8"?>
 <p:sld xmlns:a="http://schemas.openxmlformats.org/drawingml/2006/main" xmlns:r="http://schemas.openxmlformats.org/officeDocument/2006/relationships" xmlns:p="http://schemas.openxmlformats.org/presentationml/2006/main">
   <p:cSld name="Slide 22">
     <p:spTree>
@@ -16322,7 +16555,7 @@
             <a:pPr algn="r"/>
             <a:fld id="{F7021451-1387-4CA6-816F-3879F97B5CBC}" type="slidenum">
               <a:rPr lang="en-US" b="0"/>
-              <a:t>20</a:t>
+              <a:t>21</a:t>
             </a:fld>
             <a:endParaRPr lang="en-US"/>
           </a:p>
@@ -16336,7 +16569,7 @@
 </p:sld>
 </file>
 
-<file path=ppt/slides/slide21.xml><?xml version="1.0" encoding="utf-8"?>
+<file path=ppt/slides/slide22.xml><?xml version="1.0" encoding="utf-8"?>
 <p:sld xmlns:a="http://schemas.openxmlformats.org/drawingml/2006/main" xmlns:r="http://schemas.openxmlformats.org/officeDocument/2006/relationships" xmlns:p="http://schemas.openxmlformats.org/presentationml/2006/main">
   <p:cSld>
     <p:spTree>
@@ -16426,6 +16659,13 @@
             </a:outerShdw>
           </a:effectLst>
         </p:spPr>
+        <p:txBody>
+          <a:bodyPr/>
+          <a:lstStyle/>
+          <a:p>
+            <a:endParaRPr lang="en-US"/>
+          </a:p>
+        </p:txBody>
       </p:sp>
       <p:sp>
         <p:nvSpPr>
@@ -19236,7 +19476,7 @@
             <a:pPr algn="r"/>
             <a:fld id="{F7021451-1387-4CA6-816F-3879F97B5CBC}" type="slidenum">
               <a:rPr lang="en-US" b="0"/>
-              <a:t>21</a:t>
+              <a:t>22</a:t>
             </a:fld>
             <a:endParaRPr lang="en-US"/>
           </a:p>
@@ -19255,7 +19495,7 @@
 </p:sld>
 </file>
 
-<file path=ppt/slides/slide22.xml><?xml version="1.0" encoding="utf-8"?>
+<file path=ppt/slides/slide23.xml><?xml version="1.0" encoding="utf-8"?>
 <p:sld xmlns:a="http://schemas.openxmlformats.org/drawingml/2006/main" xmlns:r="http://schemas.openxmlformats.org/officeDocument/2006/relationships" xmlns:p="http://schemas.openxmlformats.org/presentationml/2006/main">
   <p:cSld>
     <p:spTree>
@@ -21229,7 +21469,7 @@
             <a:pPr algn="r"/>
             <a:fld id="{F7021451-1387-4CA6-816F-3879F97B5CBC}" type="slidenum">
               <a:rPr lang="en-US" b="0"/>
-              <a:t>22</a:t>
+              <a:t>23</a:t>
             </a:fld>
             <a:endParaRPr lang="en-US"/>
           </a:p>
@@ -21250,7 +21490,7 @@
 
 <file path=ppt/slides/slide3.xml><?xml version="1.0" encoding="utf-8"?>
 <p:sld xmlns:a="http://schemas.openxmlformats.org/drawingml/2006/main" xmlns:r="http://schemas.openxmlformats.org/officeDocument/2006/relationships" xmlns:p="http://schemas.openxmlformats.org/presentationml/2006/main">
-  <p:cSld name="Slide 3">
+  <p:cSld>
     <p:spTree>
       <p:nvGrpSpPr>
         <p:cNvPr id="1" name=""/>
@@ -21299,6 +21539,991 @@
                   <a:schemeClr val="tx2"/>
                 </a:solidFill>
               </a:rPr>
+              <a:t>What we will cover</a:t>
+            </a:r>
+            <a:endParaRPr lang="en-US" sz="3200" dirty="0"/>
+          </a:p>
+        </p:txBody>
+      </p:sp>
+      <p:sp>
+        <p:nvSpPr>
+          <p:cNvPr id="4" name="Shape 1"/>
+          <p:cNvSpPr/>
+          <p:nvPr/>
+        </p:nvSpPr>
+        <p:spPr>
+          <a:xfrm>
+            <a:off x="1014984" y="1600200"/>
+            <a:ext cx="0" cy="4343400"/>
+          </a:xfrm>
+          <a:prstGeom prst="line">
+            <a:avLst/>
+          </a:prstGeom>
+          <a:noFill/>
+          <a:ln w="38100">
+            <a:solidFill>
+              <a:srgbClr val="CADCFC"/>
+            </a:solidFill>
+            <a:prstDash val="solid"/>
+          </a:ln>
+        </p:spPr>
+        <p:txBody>
+          <a:bodyPr/>
+          <a:lstStyle/>
+          <a:p>
+            <a:endParaRPr lang="en-US"/>
+          </a:p>
+        </p:txBody>
+      </p:sp>
+      <p:sp>
+        <p:nvSpPr>
+          <p:cNvPr id="5" name="Shape 2"/>
+          <p:cNvSpPr/>
+          <p:nvPr/>
+        </p:nvSpPr>
+        <p:spPr>
+          <a:xfrm>
+            <a:off x="822960" y="1490472"/>
+            <a:ext cx="384048" cy="384048"/>
+          </a:xfrm>
+          <a:prstGeom prst="ellipse">
+            <a:avLst/>
+          </a:prstGeom>
+          <a:solidFill>
+            <a:srgbClr val="1E2761"/>
+          </a:solidFill>
+          <a:ln w="12700">
+            <a:solidFill>
+              <a:srgbClr val="1E2761"/>
+            </a:solidFill>
+            <a:prstDash val="solid"/>
+          </a:ln>
+        </p:spPr>
+        <p:txBody>
+          <a:bodyPr/>
+          <a:lstStyle/>
+          <a:p>
+            <a:endParaRPr lang="en-US"/>
+          </a:p>
+        </p:txBody>
+      </p:sp>
+      <p:sp>
+        <p:nvSpPr>
+          <p:cNvPr id="6" name="Text 3"/>
+          <p:cNvSpPr txBox="1"/>
+          <p:nvPr/>
+        </p:nvSpPr>
+        <p:spPr>
+          <a:xfrm>
+            <a:off x="822960" y="1490472"/>
+            <a:ext cx="384048" cy="384048"/>
+          </a:xfrm>
+          <a:prstGeom prst="rect">
+            <a:avLst/>
+          </a:prstGeom>
+          <a:noFill/>
+          <a:ln/>
+        </p:spPr>
+        <p:txBody>
+          <a:bodyPr wrap="square" lIns="0" tIns="0" rIns="0" bIns="0" rtlCol="0" anchor="ctr"/>
+          <a:lstStyle/>
+          <a:p>
+            <a:pPr marL="0" indent="0" algn="ctr">
+              <a:buNone/>
+            </a:pPr>
+            <a:r>
+              <a:rPr lang="en-US" sz="1400" b="1" dirty="0">
+                <a:solidFill>
+                  <a:schemeClr val="bg1"/>
+                </a:solidFill>
+              </a:rPr>
+              <a:t>1</a:t>
+            </a:r>
+            <a:endParaRPr lang="en-US" sz="1400" dirty="0"/>
+          </a:p>
+        </p:txBody>
+      </p:sp>
+      <p:sp>
+        <p:nvSpPr>
+          <p:cNvPr id="7" name="Text 4"/>
+          <p:cNvSpPr txBox="1"/>
+          <p:nvPr/>
+        </p:nvSpPr>
+        <p:spPr>
+          <a:xfrm>
+            <a:off x="1463040" y="1417320"/>
+            <a:ext cx="3840480" cy="502920"/>
+          </a:xfrm>
+          <a:prstGeom prst="rect">
+            <a:avLst/>
+          </a:prstGeom>
+          <a:noFill/>
+          <a:ln/>
+        </p:spPr>
+        <p:txBody>
+          <a:bodyPr wrap="square" lIns="0" tIns="0" rIns="0" bIns="0" rtlCol="0" anchor="ctr"/>
+          <a:lstStyle/>
+          <a:p>
+            <a:pPr marL="0" indent="0">
+              <a:buNone/>
+            </a:pPr>
+            <a:r>
+              <a:rPr lang="en-US" sz="1600" b="1" dirty="0">
+                <a:solidFill>
+                  <a:schemeClr val="tx2"/>
+                </a:solidFill>
+              </a:rPr>
+              <a:t>The question, and what happened</a:t>
+            </a:r>
+            <a:endParaRPr lang="en-US" sz="1600" dirty="0"/>
+          </a:p>
+        </p:txBody>
+      </p:sp>
+      <p:sp>
+        <p:nvSpPr>
+          <p:cNvPr id="8" name="Text 5"/>
+          <p:cNvSpPr txBox="1"/>
+          <p:nvPr/>
+        </p:nvSpPr>
+        <p:spPr>
+          <a:xfrm>
+            <a:off x="5120640" y="1435608"/>
+            <a:ext cx="6519672" cy="777240"/>
+          </a:xfrm>
+          <a:prstGeom prst="rect">
+            <a:avLst/>
+          </a:prstGeom>
+          <a:noFill/>
+          <a:ln/>
+        </p:spPr>
+        <p:txBody>
+          <a:bodyPr wrap="square" lIns="0" tIns="0" rIns="0" bIns="0" rtlCol="0" anchor="ctr"/>
+          <a:lstStyle/>
+          <a:p>
+            <a:pPr marL="0" indent="0">
+              <a:buNone/>
+            </a:pPr>
+            <a:r>
+              <a:rPr lang="en-US" sz="1150" dirty="0">
+                <a:solidFill>
+                  <a:schemeClr val="tx1"/>
+                </a:solidFill>
+              </a:rPr>
+              <a:t>The 28 October decision, our final number before it, and what the outcome says. The app: the forecast as it stands today.</a:t>
+            </a:r>
+            <a:endParaRPr lang="en-US" sz="1150" dirty="0"/>
+          </a:p>
+        </p:txBody>
+      </p:sp>
+      <p:sp>
+        <p:nvSpPr>
+          <p:cNvPr id="9" name="Shape 6"/>
+          <p:cNvSpPr/>
+          <p:nvPr/>
+        </p:nvSpPr>
+        <p:spPr>
+          <a:xfrm>
+            <a:off x="822960" y="2359152"/>
+            <a:ext cx="384048" cy="384048"/>
+          </a:xfrm>
+          <a:prstGeom prst="ellipse">
+            <a:avLst/>
+          </a:prstGeom>
+          <a:solidFill>
+            <a:srgbClr val="1E2761"/>
+          </a:solidFill>
+          <a:ln w="12700">
+            <a:solidFill>
+              <a:srgbClr val="1E2761"/>
+            </a:solidFill>
+            <a:prstDash val="solid"/>
+          </a:ln>
+        </p:spPr>
+        <p:txBody>
+          <a:bodyPr/>
+          <a:lstStyle/>
+          <a:p>
+            <a:endParaRPr lang="en-US"/>
+          </a:p>
+        </p:txBody>
+      </p:sp>
+      <p:sp>
+        <p:nvSpPr>
+          <p:cNvPr id="10" name="Text 7"/>
+          <p:cNvSpPr txBox="1"/>
+          <p:nvPr/>
+        </p:nvSpPr>
+        <p:spPr>
+          <a:xfrm>
+            <a:off x="822960" y="2359152"/>
+            <a:ext cx="384048" cy="384048"/>
+          </a:xfrm>
+          <a:prstGeom prst="rect">
+            <a:avLst/>
+          </a:prstGeom>
+          <a:noFill/>
+          <a:ln/>
+        </p:spPr>
+        <p:txBody>
+          <a:bodyPr wrap="square" lIns="0" tIns="0" rIns="0" bIns="0" rtlCol="0" anchor="ctr"/>
+          <a:lstStyle/>
+          <a:p>
+            <a:pPr marL="0" indent="0" algn="ctr">
+              <a:buNone/>
+            </a:pPr>
+            <a:r>
+              <a:rPr lang="en-US" sz="1400" b="1" dirty="0">
+                <a:solidFill>
+                  <a:schemeClr val="bg1"/>
+                </a:solidFill>
+              </a:rPr>
+              <a:t>2</a:t>
+            </a:r>
+            <a:endParaRPr lang="en-US" sz="1400" dirty="0"/>
+          </a:p>
+        </p:txBody>
+      </p:sp>
+      <p:sp>
+        <p:nvSpPr>
+          <p:cNvPr id="11" name="Text 8"/>
+          <p:cNvSpPr txBox="1"/>
+          <p:nvPr/>
+        </p:nvSpPr>
+        <p:spPr>
+          <a:xfrm>
+            <a:off x="1463040" y="2286000"/>
+            <a:ext cx="3840480" cy="502920"/>
+          </a:xfrm>
+          <a:prstGeom prst="rect">
+            <a:avLst/>
+          </a:prstGeom>
+          <a:noFill/>
+          <a:ln/>
+        </p:spPr>
+        <p:txBody>
+          <a:bodyPr wrap="square" lIns="0" tIns="0" rIns="0" bIns="0" rtlCol="0" anchor="ctr"/>
+          <a:lstStyle/>
+          <a:p>
+            <a:pPr marL="0" indent="0">
+              <a:buNone/>
+            </a:pPr>
+            <a:r>
+              <a:rPr lang="en-US" sz="1600" b="1" dirty="0">
+                <a:solidFill>
+                  <a:schemeClr val="tx2"/>
+                </a:solidFill>
+              </a:rPr>
+              <a:t>Why this approach</a:t>
+            </a:r>
+            <a:endParaRPr lang="en-US" sz="1600" dirty="0"/>
+          </a:p>
+        </p:txBody>
+      </p:sp>
+      <p:sp>
+        <p:nvSpPr>
+          <p:cNvPr id="12" name="Text 9"/>
+          <p:cNvSpPr txBox="1"/>
+          <p:nvPr/>
+        </p:nvSpPr>
+        <p:spPr>
+          <a:xfrm>
+            <a:off x="5120640" y="2304288"/>
+            <a:ext cx="6519672" cy="777240"/>
+          </a:xfrm>
+          <a:prstGeom prst="rect">
+            <a:avLst/>
+          </a:prstGeom>
+          <a:noFill/>
+          <a:ln/>
+        </p:spPr>
+        <p:txBody>
+          <a:bodyPr wrap="square" lIns="0" tIns="0" rIns="0" bIns="0" rtlCol="0" anchor="ctr"/>
+          <a:lstStyle/>
+          <a:p>
+            <a:pPr marL="0" indent="0">
+              <a:buNone/>
+            </a:pPr>
+            <a:r>
+              <a:rPr lang="en-US" sz="1150" dirty="0">
+                <a:solidFill>
+                  <a:schemeClr val="tx1"/>
+                </a:solidFill>
+              </a:rPr>
+              <a:t>Four kinds of signal already exist; where FedCast sits among them, and the three reasons we built it this way.</a:t>
+            </a:r>
+            <a:endParaRPr lang="en-US" sz="1150" dirty="0"/>
+          </a:p>
+        </p:txBody>
+      </p:sp>
+      <p:sp>
+        <p:nvSpPr>
+          <p:cNvPr id="13" name="Shape 10"/>
+          <p:cNvSpPr/>
+          <p:nvPr/>
+        </p:nvSpPr>
+        <p:spPr>
+          <a:xfrm>
+            <a:off x="822960" y="3227832"/>
+            <a:ext cx="384048" cy="384048"/>
+          </a:xfrm>
+          <a:prstGeom prst="ellipse">
+            <a:avLst/>
+          </a:prstGeom>
+          <a:solidFill>
+            <a:srgbClr val="1E2761"/>
+          </a:solidFill>
+          <a:ln w="12700">
+            <a:solidFill>
+              <a:srgbClr val="1E2761"/>
+            </a:solidFill>
+            <a:prstDash val="solid"/>
+          </a:ln>
+        </p:spPr>
+        <p:txBody>
+          <a:bodyPr/>
+          <a:lstStyle/>
+          <a:p>
+            <a:endParaRPr lang="en-US"/>
+          </a:p>
+        </p:txBody>
+      </p:sp>
+      <p:sp>
+        <p:nvSpPr>
+          <p:cNvPr id="14" name="Text 11"/>
+          <p:cNvSpPr txBox="1"/>
+          <p:nvPr/>
+        </p:nvSpPr>
+        <p:spPr>
+          <a:xfrm>
+            <a:off x="822960" y="3227832"/>
+            <a:ext cx="384048" cy="384048"/>
+          </a:xfrm>
+          <a:prstGeom prst="rect">
+            <a:avLst/>
+          </a:prstGeom>
+          <a:noFill/>
+          <a:ln/>
+        </p:spPr>
+        <p:txBody>
+          <a:bodyPr wrap="square" lIns="0" tIns="0" rIns="0" bIns="0" rtlCol="0" anchor="ctr"/>
+          <a:lstStyle/>
+          <a:p>
+            <a:pPr marL="0" indent="0" algn="ctr">
+              <a:buNone/>
+            </a:pPr>
+            <a:r>
+              <a:rPr lang="en-US" sz="1400" b="1" dirty="0">
+                <a:solidFill>
+                  <a:schemeClr val="bg1"/>
+                </a:solidFill>
+              </a:rPr>
+              <a:t>3</a:t>
+            </a:r>
+            <a:endParaRPr lang="en-US" sz="1400" dirty="0"/>
+          </a:p>
+        </p:txBody>
+      </p:sp>
+      <p:sp>
+        <p:nvSpPr>
+          <p:cNvPr id="15" name="Text 12"/>
+          <p:cNvSpPr txBox="1"/>
+          <p:nvPr/>
+        </p:nvSpPr>
+        <p:spPr>
+          <a:xfrm>
+            <a:off x="1463040" y="3154680"/>
+            <a:ext cx="3840480" cy="502920"/>
+          </a:xfrm>
+          <a:prstGeom prst="rect">
+            <a:avLst/>
+          </a:prstGeom>
+          <a:noFill/>
+          <a:ln/>
+        </p:spPr>
+        <p:txBody>
+          <a:bodyPr wrap="square" lIns="0" tIns="0" rIns="0" bIns="0" rtlCol="0" anchor="ctr"/>
+          <a:lstStyle/>
+          <a:p>
+            <a:pPr marL="0" indent="0">
+              <a:buNone/>
+            </a:pPr>
+            <a:r>
+              <a:rPr lang="en-US" sz="1600" b="1" dirty="0">
+                <a:solidFill>
+                  <a:schemeClr val="tx2"/>
+                </a:solidFill>
+              </a:rPr>
+              <a:t>How the number is built</a:t>
+            </a:r>
+            <a:endParaRPr lang="en-US" sz="1600" dirty="0"/>
+          </a:p>
+        </p:txBody>
+      </p:sp>
+      <p:sp>
+        <p:nvSpPr>
+          <p:cNvPr id="16" name="Text 13"/>
+          <p:cNvSpPr txBox="1"/>
+          <p:nvPr/>
+        </p:nvSpPr>
+        <p:spPr>
+          <a:xfrm>
+            <a:off x="5120640" y="3172968"/>
+            <a:ext cx="6519672" cy="777240"/>
+          </a:xfrm>
+          <a:prstGeom prst="rect">
+            <a:avLst/>
+          </a:prstGeom>
+          <a:noFill/>
+          <a:ln/>
+        </p:spPr>
+        <p:txBody>
+          <a:bodyPr wrap="square" lIns="0" tIns="0" rIns="0" bIns="0" rtlCol="0" anchor="ctr"/>
+          <a:lstStyle/>
+          <a:p>
+            <a:pPr marL="0" indent="0">
+              <a:buNone/>
+            </a:pPr>
+            <a:r>
+              <a:rPr lang="en-US" sz="1150" dirty="0">
+                <a:solidFill>
+                  <a:schemeClr val="tx1"/>
+                </a:solidFill>
+              </a:rPr>
+              <a:t>Four families of input pooled by code at fixed weights, and the arithmetic from five models to one number. The app: the evidence graph and the pool.</a:t>
+            </a:r>
+            <a:endParaRPr lang="en-US" sz="1150" dirty="0"/>
+          </a:p>
+        </p:txBody>
+      </p:sp>
+      <p:sp>
+        <p:nvSpPr>
+          <p:cNvPr id="17" name="Shape 14"/>
+          <p:cNvSpPr/>
+          <p:nvPr/>
+        </p:nvSpPr>
+        <p:spPr>
+          <a:xfrm>
+            <a:off x="822960" y="4096512"/>
+            <a:ext cx="384048" cy="384048"/>
+          </a:xfrm>
+          <a:prstGeom prst="ellipse">
+            <a:avLst/>
+          </a:prstGeom>
+          <a:solidFill>
+            <a:srgbClr val="1E2761"/>
+          </a:solidFill>
+          <a:ln w="12700">
+            <a:solidFill>
+              <a:srgbClr val="1E2761"/>
+            </a:solidFill>
+            <a:prstDash val="solid"/>
+          </a:ln>
+        </p:spPr>
+        <p:txBody>
+          <a:bodyPr/>
+          <a:lstStyle/>
+          <a:p>
+            <a:endParaRPr lang="en-US"/>
+          </a:p>
+        </p:txBody>
+      </p:sp>
+      <p:sp>
+        <p:nvSpPr>
+          <p:cNvPr id="18" name="Text 15"/>
+          <p:cNvSpPr txBox="1"/>
+          <p:nvPr/>
+        </p:nvSpPr>
+        <p:spPr>
+          <a:xfrm>
+            <a:off x="822960" y="4096512"/>
+            <a:ext cx="384048" cy="384048"/>
+          </a:xfrm>
+          <a:prstGeom prst="rect">
+            <a:avLst/>
+          </a:prstGeom>
+          <a:noFill/>
+          <a:ln/>
+        </p:spPr>
+        <p:txBody>
+          <a:bodyPr wrap="square" lIns="0" tIns="0" rIns="0" bIns="0" rtlCol="0" anchor="ctr"/>
+          <a:lstStyle/>
+          <a:p>
+            <a:pPr marL="0" indent="0" algn="ctr">
+              <a:buNone/>
+            </a:pPr>
+            <a:r>
+              <a:rPr lang="en-US" sz="1400" b="1" dirty="0">
+                <a:solidFill>
+                  <a:schemeClr val="bg1"/>
+                </a:solidFill>
+              </a:rPr>
+              <a:t>4</a:t>
+            </a:r>
+            <a:endParaRPr lang="en-US" sz="1400" dirty="0"/>
+          </a:p>
+        </p:txBody>
+      </p:sp>
+      <p:sp>
+        <p:nvSpPr>
+          <p:cNvPr id="19" name="Text 16"/>
+          <p:cNvSpPr txBox="1"/>
+          <p:nvPr/>
+        </p:nvSpPr>
+        <p:spPr>
+          <a:xfrm>
+            <a:off x="1463040" y="4023360"/>
+            <a:ext cx="3840480" cy="502920"/>
+          </a:xfrm>
+          <a:prstGeom prst="rect">
+            <a:avLst/>
+          </a:prstGeom>
+          <a:noFill/>
+          <a:ln/>
+        </p:spPr>
+        <p:txBody>
+          <a:bodyPr wrap="square" lIns="0" tIns="0" rIns="0" bIns="0" rtlCol="0" anchor="ctr"/>
+          <a:lstStyle/>
+          <a:p>
+            <a:pPr marL="0" indent="0">
+              <a:buNone/>
+            </a:pPr>
+            <a:r>
+              <a:rPr lang="en-US" sz="1600" b="1" dirty="0">
+                <a:solidFill>
+                  <a:schemeClr val="tx2"/>
+                </a:solidFill>
+              </a:rPr>
+              <a:t>The LLM analysts</a:t>
+            </a:r>
+            <a:endParaRPr lang="en-US" sz="1600" dirty="0"/>
+          </a:p>
+        </p:txBody>
+      </p:sp>
+      <p:sp>
+        <p:nvSpPr>
+          <p:cNvPr id="20" name="Text 17"/>
+          <p:cNvSpPr txBox="1"/>
+          <p:nvPr/>
+        </p:nvSpPr>
+        <p:spPr>
+          <a:xfrm>
+            <a:off x="5120640" y="4041648"/>
+            <a:ext cx="6519672" cy="777240"/>
+          </a:xfrm>
+          <a:prstGeom prst="rect">
+            <a:avLst/>
+          </a:prstGeom>
+          <a:noFill/>
+          <a:ln/>
+        </p:spPr>
+        <p:txBody>
+          <a:bodyPr wrap="square" lIns="0" tIns="0" rIns="0" bIns="0" rtlCol="0" anchor="ctr"/>
+          <a:lstStyle/>
+          <a:p>
+            <a:pPr marL="0" indent="0">
+              <a:buNone/>
+            </a:pPr>
+            <a:r>
+              <a:rPr lang="en-US" sz="1150" dirty="0">
+                <a:solidFill>
+                  <a:schemeClr val="tx1"/>
+                </a:solidFill>
+              </a:rPr>
+              <a:t>What a language model cannot stop doing and how the harness works around it; the eight analysts; what each is asked and what it returned. The app: the prompts and the results.</a:t>
+            </a:r>
+            <a:endParaRPr lang="en-US" sz="1150" dirty="0"/>
+          </a:p>
+        </p:txBody>
+      </p:sp>
+      <p:sp>
+        <p:nvSpPr>
+          <p:cNvPr id="21" name="Shape 18"/>
+          <p:cNvSpPr/>
+          <p:nvPr/>
+        </p:nvSpPr>
+        <p:spPr>
+          <a:xfrm>
+            <a:off x="822960" y="4965192"/>
+            <a:ext cx="384048" cy="384048"/>
+          </a:xfrm>
+          <a:prstGeom prst="ellipse">
+            <a:avLst/>
+          </a:prstGeom>
+          <a:solidFill>
+            <a:srgbClr val="1E2761"/>
+          </a:solidFill>
+          <a:ln w="12700">
+            <a:solidFill>
+              <a:srgbClr val="1E2761"/>
+            </a:solidFill>
+            <a:prstDash val="solid"/>
+          </a:ln>
+        </p:spPr>
+        <p:txBody>
+          <a:bodyPr/>
+          <a:lstStyle/>
+          <a:p>
+            <a:endParaRPr lang="en-US"/>
+          </a:p>
+        </p:txBody>
+      </p:sp>
+      <p:sp>
+        <p:nvSpPr>
+          <p:cNvPr id="22" name="Text 19"/>
+          <p:cNvSpPr txBox="1"/>
+          <p:nvPr/>
+        </p:nvSpPr>
+        <p:spPr>
+          <a:xfrm>
+            <a:off x="822960" y="4965192"/>
+            <a:ext cx="384048" cy="384048"/>
+          </a:xfrm>
+          <a:prstGeom prst="rect">
+            <a:avLst/>
+          </a:prstGeom>
+          <a:noFill/>
+          <a:ln/>
+        </p:spPr>
+        <p:txBody>
+          <a:bodyPr wrap="square" lIns="0" tIns="0" rIns="0" bIns="0" rtlCol="0" anchor="ctr"/>
+          <a:lstStyle/>
+          <a:p>
+            <a:pPr marL="0" indent="0" algn="ctr">
+              <a:buNone/>
+            </a:pPr>
+            <a:r>
+              <a:rPr lang="en-US" sz="1400" b="1" dirty="0">
+                <a:solidFill>
+                  <a:schemeClr val="bg1"/>
+                </a:solidFill>
+              </a:rPr>
+              <a:t>5</a:t>
+            </a:r>
+            <a:endParaRPr lang="en-US" sz="1400" dirty="0"/>
+          </a:p>
+        </p:txBody>
+      </p:sp>
+      <p:sp>
+        <p:nvSpPr>
+          <p:cNvPr id="23" name="Text 20"/>
+          <p:cNvSpPr txBox="1"/>
+          <p:nvPr/>
+        </p:nvSpPr>
+        <p:spPr>
+          <a:xfrm>
+            <a:off x="1463040" y="4892040"/>
+            <a:ext cx="3840480" cy="502920"/>
+          </a:xfrm>
+          <a:prstGeom prst="rect">
+            <a:avLst/>
+          </a:prstGeom>
+          <a:noFill/>
+          <a:ln/>
+        </p:spPr>
+        <p:txBody>
+          <a:bodyPr wrap="square" lIns="0" tIns="0" rIns="0" bIns="0" rtlCol="0" anchor="ctr"/>
+          <a:lstStyle/>
+          <a:p>
+            <a:pPr marL="0" indent="0">
+              <a:buNone/>
+            </a:pPr>
+            <a:r>
+              <a:rPr lang="en-US" sz="1600" b="1" dirty="0">
+                <a:solidFill>
+                  <a:schemeClr val="tx2"/>
+                </a:solidFill>
+              </a:rPr>
+              <a:t>How good is the harness</a:t>
+            </a:r>
+            <a:endParaRPr lang="en-US" sz="1600" dirty="0"/>
+          </a:p>
+        </p:txBody>
+      </p:sp>
+      <p:sp>
+        <p:nvSpPr>
+          <p:cNvPr id="24" name="Text 21"/>
+          <p:cNvSpPr txBox="1"/>
+          <p:nvPr/>
+        </p:nvSpPr>
+        <p:spPr>
+          <a:xfrm>
+            <a:off x="5120640" y="4910328"/>
+            <a:ext cx="6519672" cy="777240"/>
+          </a:xfrm>
+          <a:prstGeom prst="rect">
+            <a:avLst/>
+          </a:prstGeom>
+          <a:noFill/>
+          <a:ln/>
+        </p:spPr>
+        <p:txBody>
+          <a:bodyPr wrap="square" lIns="0" tIns="0" rIns="0" bIns="0" rtlCol="0" anchor="ctr"/>
+          <a:lstStyle/>
+          <a:p>
+            <a:pPr marL="0" indent="0">
+              <a:buNone/>
+            </a:pPr>
+            <a:r>
+              <a:rPr lang="en-US" sz="1150" dirty="0">
+                <a:solidFill>
+                  <a:schemeClr val="tx1"/>
+                </a:solidFill>
+              </a:rPr>
+              <a:t>What each step of the harness bought, measured on four snapshots. The app: the scorecard, the drift table, the ledger and replay.</a:t>
+            </a:r>
+            <a:endParaRPr lang="en-US" sz="1150" dirty="0"/>
+          </a:p>
+        </p:txBody>
+      </p:sp>
+      <p:sp>
+        <p:nvSpPr>
+          <p:cNvPr id="25" name="Shape 22"/>
+          <p:cNvSpPr/>
+          <p:nvPr/>
+        </p:nvSpPr>
+        <p:spPr>
+          <a:xfrm>
+            <a:off x="822960" y="5833872"/>
+            <a:ext cx="384048" cy="384048"/>
+          </a:xfrm>
+          <a:prstGeom prst="ellipse">
+            <a:avLst/>
+          </a:prstGeom>
+          <a:solidFill>
+            <a:srgbClr val="1E2761"/>
+          </a:solidFill>
+          <a:ln w="12700">
+            <a:solidFill>
+              <a:srgbClr val="1E2761"/>
+            </a:solidFill>
+            <a:prstDash val="solid"/>
+          </a:ln>
+        </p:spPr>
+        <p:txBody>
+          <a:bodyPr/>
+          <a:lstStyle/>
+          <a:p>
+            <a:endParaRPr lang="en-US"/>
+          </a:p>
+        </p:txBody>
+      </p:sp>
+      <p:sp>
+        <p:nvSpPr>
+          <p:cNvPr id="26" name="Text 23"/>
+          <p:cNvSpPr txBox="1"/>
+          <p:nvPr/>
+        </p:nvSpPr>
+        <p:spPr>
+          <a:xfrm>
+            <a:off x="822960" y="5833872"/>
+            <a:ext cx="384048" cy="384048"/>
+          </a:xfrm>
+          <a:prstGeom prst="rect">
+            <a:avLst/>
+          </a:prstGeom>
+          <a:noFill/>
+          <a:ln/>
+        </p:spPr>
+        <p:txBody>
+          <a:bodyPr wrap="square" lIns="0" tIns="0" rIns="0" bIns="0" rtlCol="0" anchor="ctr"/>
+          <a:lstStyle/>
+          <a:p>
+            <a:pPr marL="0" indent="0" algn="ctr">
+              <a:buNone/>
+            </a:pPr>
+            <a:r>
+              <a:rPr lang="en-US" sz="1400" b="1" dirty="0">
+                <a:solidFill>
+                  <a:schemeClr val="bg1"/>
+                </a:solidFill>
+              </a:rPr>
+              <a:t>6</a:t>
+            </a:r>
+            <a:endParaRPr lang="en-US" sz="1400" dirty="0"/>
+          </a:p>
+        </p:txBody>
+      </p:sp>
+      <p:sp>
+        <p:nvSpPr>
+          <p:cNvPr id="27" name="Text 24"/>
+          <p:cNvSpPr txBox="1"/>
+          <p:nvPr/>
+        </p:nvSpPr>
+        <p:spPr>
+          <a:xfrm>
+            <a:off x="1463040" y="5760720"/>
+            <a:ext cx="3840480" cy="502920"/>
+          </a:xfrm>
+          <a:prstGeom prst="rect">
+            <a:avLst/>
+          </a:prstGeom>
+          <a:noFill/>
+          <a:ln/>
+        </p:spPr>
+        <p:txBody>
+          <a:bodyPr wrap="square" lIns="0" tIns="0" rIns="0" bIns="0" rtlCol="0" anchor="ctr"/>
+          <a:lstStyle/>
+          <a:p>
+            <a:pPr marL="0" indent="0">
+              <a:buNone/>
+            </a:pPr>
+            <a:r>
+              <a:rPr lang="en-US" sz="1600" b="1" dirty="0">
+                <a:solidFill>
+                  <a:schemeClr val="tx2"/>
+                </a:solidFill>
+              </a:rPr>
+              <a:t>What comes next</a:t>
+            </a:r>
+            <a:endParaRPr lang="en-US" sz="1600" dirty="0"/>
+          </a:p>
+        </p:txBody>
+      </p:sp>
+      <p:sp>
+        <p:nvSpPr>
+          <p:cNvPr id="28" name="Text 25"/>
+          <p:cNvSpPr txBox="1"/>
+          <p:nvPr/>
+        </p:nvSpPr>
+        <p:spPr>
+          <a:xfrm>
+            <a:off x="5120640" y="5779008"/>
+            <a:ext cx="6519672" cy="777240"/>
+          </a:xfrm>
+          <a:prstGeom prst="rect">
+            <a:avLst/>
+          </a:prstGeom>
+          <a:noFill/>
+          <a:ln/>
+        </p:spPr>
+        <p:txBody>
+          <a:bodyPr wrap="square" lIns="0" tIns="0" rIns="0" bIns="0" rtlCol="0" anchor="ctr"/>
+          <a:lstStyle/>
+          <a:p>
+            <a:pPr marL="0" indent="0">
+              <a:buNone/>
+            </a:pPr>
+            <a:r>
+              <a:rPr lang="en-US" sz="1150" dirty="0">
+                <a:solidFill>
+                  <a:schemeClr val="tx1"/>
+                </a:solidFill>
+              </a:rPr>
+              <a:t>Six follow-ups in order of value. Appendix: how the analysts' opinion moves the number; the probit.</a:t>
+            </a:r>
+            <a:endParaRPr lang="en-US" sz="1150" dirty="0"/>
+          </a:p>
+        </p:txBody>
+      </p:sp>
+      <p:sp>
+        <p:nvSpPr>
+          <p:cNvPr id="3" name="Slide Number Placeholder 0"/>
+          <p:cNvSpPr>
+            <a:spLocks noGrp="1"/>
+          </p:cNvSpPr>
+          <p:nvPr>
+            <p:ph type="sldNum" sz="quarter" idx="4294967295"/>
+          </p:nvPr>
+        </p:nvSpPr>
+        <p:spPr>
+          <a:xfrm>
+            <a:off x="11091672" y="6400800"/>
+            <a:ext cx="548640" cy="274320"/>
+          </a:xfrm>
+          <a:prstGeom prst="rect">
+            <a:avLst/>
+          </a:prstGeom>
+          <a:extLst>
+            <a:ext uri="{C572A759-6A51-4108-AA02-DFA0A04FC94B}">
+              <ma14:wrappingTextBoxFlag xmlns:ma14="http://schemas.microsoft.com/office/mac/drawingml/2011/main" xmlns="" val="0"/>
+            </a:ext>
+          </a:extLst>
+        </p:spPr>
+        <p:txBody>
+          <a:bodyPr/>
+          <a:lstStyle>
+            <a:lvl1pPr>
+              <a:defRPr sz="1000">
+                <a:solidFill>
+                  <a:srgbClr val="6B7280"/>
+                </a:solidFill>
+              </a:defRPr>
+            </a:lvl1pPr>
+          </a:lstStyle>
+          <a:p>
+            <a:pPr algn="r"/>
+            <a:fld id="{F7021451-1387-4CA6-816F-3879F97B5CBC}" type="slidenum">
+              <a:rPr lang="en-US" b="0"/>
+              <a:t>3</a:t>
+            </a:fld>
+            <a:endParaRPr lang="en-US"/>
+          </a:p>
+        </p:txBody>
+      </p:sp>
+    </p:spTree>
+    <p:extLst>
+      <p:ext uri="{BB962C8B-B14F-4D97-AF65-F5344CB8AC3E}">
+        <p14:creationId xmlns:p14="http://schemas.microsoft.com/office/powerpoint/2010/main" val="3836837545"/>
+      </p:ext>
+    </p:extLst>
+  </p:cSld>
+  <p:clrMapOvr>
+    <a:masterClrMapping/>
+  </p:clrMapOvr>
+</p:sld>
+</file>
+
+<file path=ppt/slides/slide4.xml><?xml version="1.0" encoding="utf-8"?>
+<p:sld xmlns:a="http://schemas.openxmlformats.org/drawingml/2006/main" xmlns:r="http://schemas.openxmlformats.org/officeDocument/2006/relationships" xmlns:p="http://schemas.openxmlformats.org/presentationml/2006/main">
+  <p:cSld>
+    <p:spTree>
+      <p:nvGrpSpPr>
+        <p:cNvPr id="1" name=""/>
+        <p:cNvGrpSpPr/>
+        <p:nvPr/>
+      </p:nvGrpSpPr>
+      <p:grpSpPr>
+        <a:xfrm>
+          <a:off x="0" y="0"/>
+          <a:ext cx="0" cy="0"/>
+          <a:chOff x="0" y="0"/>
+          <a:chExt cx="0" cy="0"/>
+        </a:xfrm>
+      </p:grpSpPr>
+      <p:sp>
+        <p:nvSpPr>
+          <p:cNvPr id="2" name="Text 0"/>
+          <p:cNvSpPr>
+            <a:spLocks noGrp="1"/>
+          </p:cNvSpPr>
+          <p:nvPr>
+            <p:ph type="title" idx="100" hasCustomPrompt="1"/>
+          </p:nvPr>
+        </p:nvSpPr>
+        <p:spPr>
+          <a:xfrm>
+            <a:off x="548640" y="411480"/>
+            <a:ext cx="11091672" cy="822960"/>
+          </a:xfrm>
+          <a:prstGeom prst="rect">
+            <a:avLst/>
+          </a:prstGeom>
+          <a:noFill/>
+          <a:ln/>
+        </p:spPr>
+        <p:txBody>
+          <a:bodyPr wrap="square" lIns="0" tIns="0" rIns="0" bIns="0" rtlCol="0" anchor="ctr"/>
+          <a:lstStyle/>
+          <a:p>
+            <a:pPr marL="0" indent="0" algn="l">
+              <a:buNone/>
+            </a:pPr>
+            <a:r>
+              <a:rPr lang="en-US" sz="3200" b="1" dirty="0">
+                <a:solidFill>
+                  <a:schemeClr val="tx2"/>
+                </a:solidFill>
+              </a:rPr>
               <a:t>The question, the answer, and what happened</a:t>
             </a:r>
             <a:endParaRPr lang="en-US" sz="3200" dirty="0"/>
@@ -21313,7 +22538,7 @@
         </p:nvSpPr>
         <p:spPr>
           <a:xfrm>
-            <a:off x="548640" y="1417320"/>
+            <a:off x="548640" y="1371600"/>
             <a:ext cx="2743200" cy="822960"/>
           </a:xfrm>
           <a:prstGeom prst="rect">
@@ -21352,7 +22577,7 @@
         </p:nvSpPr>
         <p:spPr>
           <a:xfrm>
-            <a:off x="548640" y="2258568"/>
+            <a:off x="548640" y="2212848"/>
             <a:ext cx="2743200" cy="548640"/>
           </a:xfrm>
           <a:prstGeom prst="rect">
@@ -21388,7 +22613,7 @@
         </p:nvSpPr>
         <p:spPr>
           <a:xfrm>
-            <a:off x="3383280" y="1417320"/>
+            <a:off x="3383280" y="1371600"/>
             <a:ext cx="2743200" cy="822960"/>
           </a:xfrm>
           <a:prstGeom prst="rect">
@@ -21427,7 +22652,7 @@
         </p:nvSpPr>
         <p:spPr>
           <a:xfrm>
-            <a:off x="3383280" y="2258568"/>
+            <a:off x="3383280" y="2212848"/>
             <a:ext cx="2743200" cy="548640"/>
           </a:xfrm>
           <a:prstGeom prst="rect">
@@ -21463,7 +22688,7 @@
         </p:nvSpPr>
         <p:spPr>
           <a:xfrm>
-            <a:off x="6309360" y="1417320"/>
+            <a:off x="6309360" y="1371600"/>
             <a:ext cx="2743200" cy="822960"/>
           </a:xfrm>
           <a:prstGeom prst="rect">
@@ -21502,7 +22727,7 @@
         </p:nvSpPr>
         <p:spPr>
           <a:xfrm>
-            <a:off x="6309360" y="2258568"/>
+            <a:off x="6309360" y="2212848"/>
             <a:ext cx="2743200" cy="548640"/>
           </a:xfrm>
           <a:prstGeom prst="rect">
@@ -21538,7 +22763,7 @@
         </p:nvSpPr>
         <p:spPr>
           <a:xfrm>
-            <a:off x="9235440" y="1417320"/>
+            <a:off x="9235440" y="1371600"/>
             <a:ext cx="2377440" cy="822960"/>
           </a:xfrm>
           <a:prstGeom prst="rect">
@@ -21577,7 +22802,7 @@
         </p:nvSpPr>
         <p:spPr>
           <a:xfrm>
-            <a:off x="9235440" y="2258568"/>
+            <a:off x="9235440" y="2212848"/>
             <a:ext cx="2377440" cy="548640"/>
           </a:xfrm>
           <a:prstGeom prst="rect">
@@ -21613,12 +22838,12 @@
         </p:nvSpPr>
         <p:spPr>
           <a:xfrm>
-            <a:off x="548640" y="3063240"/>
-            <a:ext cx="5486400" cy="3063240"/>
+            <a:off x="548640" y="2926080"/>
+            <a:ext cx="5394960" cy="3246120"/>
           </a:xfrm>
           <a:prstGeom prst="roundRect">
             <a:avLst>
-              <a:gd name="adj" fmla="val 3582"/>
+              <a:gd name="adj" fmla="val 3380"/>
             </a:avLst>
           </a:prstGeom>
           <a:solidFill>
@@ -21638,13 +22863,6 @@
             </a:outerShdw>
           </a:effectLst>
         </p:spPr>
-        <p:txBody>
-          <a:bodyPr/>
-          <a:lstStyle/>
-          <a:p>
-            <a:endParaRPr lang="en-US"/>
-          </a:p>
-        </p:txBody>
       </p:sp>
       <p:sp>
         <p:nvSpPr>
@@ -21654,8 +22872,8 @@
         </p:nvSpPr>
         <p:spPr>
           <a:xfrm>
-            <a:off x="822960" y="3200400"/>
-            <a:ext cx="5029200" cy="365760"/>
+            <a:off x="777240" y="3035808"/>
+            <a:ext cx="4937760" cy="320040"/>
           </a:xfrm>
           <a:prstGeom prst="rect">
             <a:avLst/>
@@ -21671,14 +22889,14 @@
               <a:buNone/>
             </a:pPr>
             <a:r>
-              <a:rPr lang="en-US" sz="1500" b="1" dirty="0">
+              <a:rPr lang="en-US" sz="1400" b="1" dirty="0">
                 <a:solidFill>
                   <a:schemeClr val="tx2"/>
                 </a:solidFill>
               </a:rPr>
               <a:t>How the number was made</a:t>
             </a:r>
-            <a:endParaRPr lang="en-US" sz="1500" dirty="0"/>
+            <a:endParaRPr lang="en-US" sz="1400" dirty="0"/>
           </a:p>
         </p:txBody>
       </p:sp>
@@ -21690,8 +22908,8 @@
         </p:nvSpPr>
         <p:spPr>
           <a:xfrm>
-            <a:off x="822960" y="3566160"/>
-            <a:ext cx="5029200" cy="2514600"/>
+            <a:off x="777240" y="3401568"/>
+            <a:ext cx="4937760" cy="256032"/>
           </a:xfrm>
           <a:prstGeom prst="rect">
             <a:avLst/>
@@ -21703,109 +22921,215 @@
           <a:bodyPr wrap="square" lIns="0" tIns="0" rIns="0" bIns="0" rtlCol="0" anchor="t"/>
           <a:lstStyle/>
           <a:p>
-            <a:pPr marL="342900" indent="-342900">
-              <a:spcAft>
-                <a:spcPts val="400"/>
-              </a:spcAft>
-              <a:buSzPct val="100000"/>
-              <a:buChar char="•"/>
-            </a:pPr>
-            <a:r>
-              <a:rPr lang="en-US" sz="1200" dirty="0">
+            <a:pPr marL="0" indent="0">
+              <a:buNone/>
+            </a:pPr>
+            <a:r>
+              <a:rPr lang="en-US" sz="1150" b="1" dirty="0">
+                <a:solidFill>
+                  <a:schemeClr val="tx2"/>
+                </a:solidFill>
+              </a:rPr>
+              <a:t>Evidence</a:t>
+            </a:r>
+            <a:endParaRPr lang="en-US" sz="1150" dirty="0"/>
+          </a:p>
+        </p:txBody>
+      </p:sp>
+      <p:sp>
+        <p:nvSpPr>
+          <p:cNvPr id="15" name="Text 12"/>
+          <p:cNvSpPr txBox="1"/>
+          <p:nvPr/>
+        </p:nvSpPr>
+        <p:spPr>
+          <a:xfrm>
+            <a:off x="777240" y="3657600"/>
+            <a:ext cx="4937760" cy="658368"/>
+          </a:xfrm>
+          <a:prstGeom prst="rect">
+            <a:avLst/>
+          </a:prstGeom>
+          <a:noFill/>
+          <a:ln/>
+        </p:spPr>
+        <p:txBody>
+          <a:bodyPr wrap="square" lIns="0" tIns="0" rIns="0" bIns="0" rtlCol="0" anchor="t"/>
+          <a:lstStyle/>
+          <a:p>
+            <a:pPr marL="0" indent="0">
+              <a:buNone/>
+            </a:pPr>
+            <a:r>
+              <a:rPr lang="en-US" sz="1000" dirty="0">
                 <a:solidFill>
                   <a:schemeClr val="tx1"/>
                 </a:solidFill>
               </a:rPr>
-              <a:t>One frozen snapshot of 23 evidence items, pulled 28 October: futures, eight FRED series, both statements, minutes, transcript, projections, speeches, 32 years of decisions, the NY Fed natural rate, prediction-market odds</a:t>
-            </a:r>
-            <a:endParaRPr lang="en-US" sz="1200" dirty="0"/>
-          </a:p>
-          <a:p>
-            <a:pPr marL="342900" indent="-342900">
-              <a:spcAft>
-                <a:spcPts val="400"/>
-              </a:spcAft>
-              <a:buSzPct val="100000"/>
-              <a:buChar char="•"/>
-            </a:pPr>
-            <a:r>
-              <a:rPr lang="en-US" sz="1200" dirty="0">
+              <a:t>23 items frozen on 28 October: futures, eight FRED series as first published, both statements, minutes, transcript, projections, speeches, 32 years of decisions, the NY Fed natural rate, prediction-market odds.</a:t>
+            </a:r>
+            <a:endParaRPr lang="en-US" sz="1000" dirty="0"/>
+          </a:p>
+        </p:txBody>
+      </p:sp>
+      <p:sp>
+        <p:nvSpPr>
+          <p:cNvPr id="16" name="Text 13"/>
+          <p:cNvSpPr txBox="1"/>
+          <p:nvPr/>
+        </p:nvSpPr>
+        <p:spPr>
+          <a:xfrm>
+            <a:off x="777240" y="4315968"/>
+            <a:ext cx="4937760" cy="256032"/>
+          </a:xfrm>
+          <a:prstGeom prst="rect">
+            <a:avLst/>
+          </a:prstGeom>
+          <a:noFill/>
+          <a:ln/>
+        </p:spPr>
+        <p:txBody>
+          <a:bodyPr wrap="square" lIns="0" tIns="0" rIns="0" bIns="0" rtlCol="0" anchor="t"/>
+          <a:lstStyle/>
+          <a:p>
+            <a:pPr marL="0" indent="0">
+              <a:buNone/>
+            </a:pPr>
+            <a:r>
+              <a:rPr lang="en-US" sz="1150" b="1" dirty="0">
+                <a:solidFill>
+                  <a:schemeClr val="tx2"/>
+                </a:solidFill>
+              </a:rPr>
+              <a:t>Classic models, pooled by code</a:t>
+            </a:r>
+            <a:endParaRPr lang="en-US" sz="1150" dirty="0"/>
+          </a:p>
+        </p:txBody>
+      </p:sp>
+      <p:sp>
+        <p:nvSpPr>
+          <p:cNvPr id="17" name="Text 14"/>
+          <p:cNvSpPr txBox="1"/>
+          <p:nvPr/>
+        </p:nvSpPr>
+        <p:spPr>
+          <a:xfrm>
+            <a:off x="777240" y="4572000"/>
+            <a:ext cx="4937760" cy="658368"/>
+          </a:xfrm>
+          <a:prstGeom prst="rect">
+            <a:avLst/>
+          </a:prstGeom>
+          <a:noFill/>
+          <a:ln/>
+        </p:spPr>
+        <p:txBody>
+          <a:bodyPr wrap="square" lIns="0" tIns="0" rIns="0" bIns="0" rtlCol="0" anchor="t"/>
+          <a:lstStyle/>
+          <a:p>
+            <a:pPr marL="0" indent="0">
+              <a:buNone/>
+            </a:pPr>
+            <a:r>
+              <a:rPr lang="en-US" sz="1000" dirty="0">
                 <a:solidFill>
                   <a:schemeClr val="tx1"/>
                 </a:solidFill>
               </a:rPr>
-              <a:t>Four models pooled by code at fixed weights (market 0.6, Taylor rules 0.2, odds 0.1, base rates 0.1), then a 1.5% floor on every outcome: no change 70.9%, hike 26.2%</a:t>
-            </a:r>
-            <a:endParaRPr lang="en-US" sz="1200" dirty="0"/>
-          </a:p>
-          <a:p>
-            <a:pPr marL="342900" indent="-342900">
-              <a:spcAft>
-                <a:spcPts val="400"/>
-              </a:spcAft>
-              <a:buSzPct val="100000"/>
-              <a:buChar char="•"/>
-            </a:pPr>
-            <a:r>
-              <a:rPr lang="en-US" sz="1200" dirty="0">
+              <a:t>Futures-implied 0.6, the Fed's Taylor rules 0.2, prediction-market odds 0.1, historical base rates 0.1; a 1.5% floor on every outcome. Pooled: no change 70.9%, hike 26.2%.</a:t>
+            </a:r>
+            <a:endParaRPr lang="en-US" sz="1000" dirty="0"/>
+          </a:p>
+        </p:txBody>
+      </p:sp>
+      <p:sp>
+        <p:nvSpPr>
+          <p:cNvPr id="18" name="Text 15"/>
+          <p:cNvSpPr txBox="1"/>
+          <p:nvPr/>
+        </p:nvSpPr>
+        <p:spPr>
+          <a:xfrm>
+            <a:off x="777240" y="5230368"/>
+            <a:ext cx="4937760" cy="256032"/>
+          </a:xfrm>
+          <a:prstGeom prst="rect">
+            <a:avLst/>
+          </a:prstGeom>
+          <a:noFill/>
+          <a:ln/>
+        </p:spPr>
+        <p:txBody>
+          <a:bodyPr wrap="square" lIns="0" tIns="0" rIns="0" bIns="0" rtlCol="0" anchor="t"/>
+          <a:lstStyle/>
+          <a:p>
+            <a:pPr marL="0" indent="0">
+              <a:buNone/>
+            </a:pPr>
+            <a:r>
+              <a:rPr lang="en-US" sz="1150" b="1" dirty="0">
+                <a:solidFill>
+                  <a:schemeClr val="tx2"/>
+                </a:solidFill>
+              </a:rPr>
+              <a:t>LLM analysts on top</a:t>
+            </a:r>
+            <a:endParaRPr lang="en-US" sz="1150" dirty="0"/>
+          </a:p>
+        </p:txBody>
+      </p:sp>
+      <p:sp>
+        <p:nvSpPr>
+          <p:cNvPr id="19" name="Text 16"/>
+          <p:cNvSpPr txBox="1"/>
+          <p:nvPr/>
+        </p:nvSpPr>
+        <p:spPr>
+          <a:xfrm>
+            <a:off x="777240" y="5486400"/>
+            <a:ext cx="4937760" cy="658368"/>
+          </a:xfrm>
+          <a:prstGeom prst="rect">
+            <a:avLst/>
+          </a:prstGeom>
+          <a:noFill/>
+          <a:ln/>
+        </p:spPr>
+        <p:txBody>
+          <a:bodyPr wrap="square" lIns="0" tIns="0" rIns="0" bIns="0" rtlCol="0" anchor="t"/>
+          <a:lstStyle/>
+          <a:p>
+            <a:pPr marL="0" indent="0">
+              <a:buNone/>
+            </a:pPr>
+            <a:r>
+              <a:rPr lang="en-US" sz="1000" dirty="0">
                 <a:solidFill>
                   <a:schemeClr val="tx1"/>
                 </a:solidFill>
               </a:rPr>
-              <a:t>Five specialist analysts, every claim quoted and verified by code</a:t>
-            </a:r>
-            <a:r>
-              <a:rPr lang="en-US" sz="1200">
-                <a:solidFill>
-                  <a:schemeClr val="tx1"/>
-                </a:solidFill>
-              </a:rPr>
-              <a:t>, move the number 4.0 points toward a hike: </a:t>
-            </a:r>
-            <a:r>
-              <a:rPr lang="en-US" sz="1200" dirty="0">
-                <a:solidFill>
-                  <a:schemeClr val="tx1"/>
-                </a:solidFill>
-              </a:rPr>
-              <a:t>no change 67.6%, +25 bps 22.4%, +50 bps 7.7%</a:t>
-            </a:r>
-            <a:endParaRPr lang="en-US" sz="1200" dirty="0"/>
-          </a:p>
-          <a:p>
-            <a:pPr marL="342900" indent="-342900">
-              <a:spcAft>
-                <a:spcPts val="400"/>
-              </a:spcAft>
-              <a:buSzPct val="100000"/>
-              <a:buChar char="•"/>
-            </a:pPr>
-            <a:r>
-              <a:rPr lang="en-US" sz="1200" dirty="0">
-                <a:solidFill>
-                  <a:schemeClr val="tx1"/>
-                </a:solidFill>
-              </a:rPr>
-              <a:t>Hash-chained ledger entry #18; recomputes exactly from its snapshot and the analyst runs it names</a:t>
-            </a:r>
-            <a:endParaRPr lang="en-US" sz="1200" dirty="0"/>
-          </a:p>
-        </p:txBody>
-      </p:sp>
-      <p:sp>
-        <p:nvSpPr>
-          <p:cNvPr id="15" name="Shape 12"/>
+              <a:t>Five specialists read the Fed's words; every claim quoted and verified by code. Their mean opinion, +4.0, moves 4 points toward a hike: no change 67.6%, +25 bps 22.4%, +50 bps 7.7%.</a:t>
+            </a:r>
+            <a:endParaRPr lang="en-US" sz="1000" dirty="0"/>
+          </a:p>
+        </p:txBody>
+      </p:sp>
+      <p:sp>
+        <p:nvSpPr>
+          <p:cNvPr id="20" name="Shape 17"/>
           <p:cNvSpPr/>
           <p:nvPr/>
         </p:nvSpPr>
         <p:spPr>
           <a:xfrm>
-            <a:off x="6263640" y="3063240"/>
-            <a:ext cx="5376672" cy="3063240"/>
+            <a:off x="6172200" y="2926080"/>
+            <a:ext cx="5468112" cy="3246120"/>
           </a:xfrm>
           <a:prstGeom prst="roundRect">
             <a:avLst>
-              <a:gd name="adj" fmla="val 3582"/>
+              <a:gd name="adj" fmla="val 3380"/>
             </a:avLst>
           </a:prstGeom>
           <a:solidFill>
@@ -21825,24 +23149,17 @@
             </a:outerShdw>
           </a:effectLst>
         </p:spPr>
-        <p:txBody>
-          <a:bodyPr/>
-          <a:lstStyle/>
-          <a:p>
-            <a:endParaRPr lang="en-US"/>
-          </a:p>
-        </p:txBody>
-      </p:sp>
-      <p:sp>
-        <p:nvSpPr>
-          <p:cNvPr id="16" name="Text 13"/>
+      </p:sp>
+      <p:sp>
+        <p:nvSpPr>
+          <p:cNvPr id="21" name="Text 18"/>
           <p:cNvSpPr txBox="1"/>
           <p:nvPr/>
         </p:nvSpPr>
         <p:spPr>
           <a:xfrm>
-            <a:off x="6537960" y="3200400"/>
-            <a:ext cx="5029200" cy="365760"/>
+            <a:off x="6400800" y="3035808"/>
+            <a:ext cx="5010912" cy="320040"/>
           </a:xfrm>
           <a:prstGeom prst="rect">
             <a:avLst/>
@@ -21858,27 +23175,27 @@
               <a:buNone/>
             </a:pPr>
             <a:r>
-              <a:rPr lang="en-US" sz="1500" b="1" dirty="0">
+              <a:rPr lang="en-US" sz="1400" b="1" dirty="0">
                 <a:solidFill>
                   <a:schemeClr val="tx2"/>
                 </a:solidFill>
               </a:rPr>
               <a:t>What the outcome says</a:t>
             </a:r>
-            <a:endParaRPr lang="en-US" sz="1500" dirty="0"/>
-          </a:p>
-        </p:txBody>
-      </p:sp>
-      <p:sp>
-        <p:nvSpPr>
-          <p:cNvPr id="17" name="Text 14"/>
+            <a:endParaRPr lang="en-US" sz="1400" dirty="0"/>
+          </a:p>
+        </p:txBody>
+      </p:sp>
+      <p:sp>
+        <p:nvSpPr>
+          <p:cNvPr id="22" name="Text 19"/>
           <p:cNvSpPr txBox="1"/>
           <p:nvPr/>
         </p:nvSpPr>
         <p:spPr>
           <a:xfrm>
-            <a:off x="6537960" y="3566160"/>
-            <a:ext cx="5102352" cy="2514600"/>
+            <a:off x="6400800" y="3401568"/>
+            <a:ext cx="5010912" cy="457200"/>
           </a:xfrm>
           <a:prstGeom prst="rect">
             <a:avLst/>
@@ -21890,82 +23207,1421 @@
           <a:bodyPr wrap="square" lIns="0" tIns="0" rIns="0" bIns="0" rtlCol="0" anchor="t"/>
           <a:lstStyle/>
           <a:p>
-            <a:pPr marL="342900" indent="-342900">
-              <a:spcAft>
-                <a:spcPts val="400"/>
-              </a:spcAft>
-              <a:buSzPct val="100000"/>
-              <a:buChar char="•"/>
-            </a:pPr>
-            <a:r>
-              <a:rPr lang="en-US" sz="1200" dirty="0">
+            <a:pPr marL="0" indent="0">
+              <a:buNone/>
+            </a:pPr>
+            <a:r>
+              <a:rPr lang="en-US" sz="1000" dirty="0">
                 <a:solidFill>
                   <a:schemeClr val="tx1"/>
                 </a:solidFill>
               </a:rPr>
-              <a:t>The most likely outcome was the outcome. The market alone was more confident (90/10); at five weeks we do not claim to beat it</a:t>
-            </a:r>
-            <a:endParaRPr lang="en-US" sz="1200" dirty="0"/>
-          </a:p>
-          <a:p>
-            <a:pPr marL="342900" indent="-342900">
-              <a:spcAft>
-                <a:spcPts val="400"/>
-              </a:spcAft>
-              <a:buSzPct val="100000"/>
-              <a:buChar char="•"/>
-            </a:pPr>
-            <a:r>
-              <a:rPr lang="en-US" sz="1200" dirty="0">
+              <a:t>1. We hit the target. So did the market (90/10) and the odds (95/5); at five weeks we do not claim to beat them.</a:t>
+            </a:r>
+            <a:endParaRPr lang="en-US" sz="1000" dirty="0"/>
+          </a:p>
+        </p:txBody>
+      </p:sp>
+      <p:sp>
+        <p:nvSpPr>
+          <p:cNvPr id="23" name="Text 20"/>
+          <p:cNvSpPr txBox="1"/>
+          <p:nvPr/>
+        </p:nvSpPr>
+        <p:spPr>
+          <a:xfrm>
+            <a:off x="6400800" y="3840480"/>
+            <a:ext cx="5010912" cy="256032"/>
+          </a:xfrm>
+          <a:prstGeom prst="rect">
+            <a:avLst/>
+          </a:prstGeom>
+          <a:noFill/>
+          <a:ln/>
+        </p:spPr>
+        <p:txBody>
+          <a:bodyPr wrap="square" lIns="0" tIns="0" rIns="0" bIns="0" rtlCol="0" anchor="t"/>
+          <a:lstStyle/>
+          <a:p>
+            <a:pPr marL="0" indent="0">
+              <a:buNone/>
+            </a:pPr>
+            <a:r>
+              <a:rPr lang="en-US" sz="1000" dirty="0">
                 <a:solidFill>
                   <a:schemeClr val="tx1"/>
                 </a:solidFill>
               </a:rPr>
-              <a:t>What the system added was the reasons: the hawkish lean came from the communications, minutes and inflation readers; the labour reader was the lone dove. Two dissents for a hike is that lean, in the vote</a:t>
-            </a:r>
-            <a:endParaRPr lang="en-US" sz="1200" dirty="0"/>
-          </a:p>
-          <a:p>
-            <a:pPr marL="342900" indent="-342900">
-              <a:spcAft>
-                <a:spcPts val="400"/>
-              </a:spcAft>
-              <a:buSzPct val="100000"/>
-              <a:buChar char="•"/>
-            </a:pPr>
-            <a:r>
-              <a:rPr lang="en-US" sz="1200" dirty="0">
+              <a:t>2. The LLM analysts got the direction right, and the vote agreed:</a:t>
+            </a:r>
+            <a:endParaRPr lang="en-US" sz="1000" dirty="0"/>
+          </a:p>
+        </p:txBody>
+      </p:sp>
+      <p:graphicFrame>
+        <p:nvGraphicFramePr>
+          <p:cNvPr id="3" name="Table 0"/>
+          <p:cNvGraphicFramePr>
+            <a:graphicFrameLocks noGrp="1"/>
+          </p:cNvGraphicFramePr>
+          <p:nvPr>
+            <p:extLst>
+              <p:ext uri="{D42A27DB-BD31-4B8C-83A1-F6EECF244321}">
+                <p14:modId xmlns:p14="http://schemas.microsoft.com/office/powerpoint/2010/main" val="1579011935"/>
+              </p:ext>
+            </p:extLst>
+          </p:nvPr>
+        </p:nvGraphicFramePr>
+        <p:xfrm>
+          <a:off x="6400800" y="4114800"/>
+          <a:ext cx="5010912" cy="914400"/>
+        </p:xfrm>
+        <a:graphic>
+          <a:graphicData uri="http://schemas.openxmlformats.org/drawingml/2006/table">
+            <a:tbl>
+              <a:tblPr/>
+              <a:tblGrid>
+                <a:gridCol w="1554480">
+                  <a:extLst>
+                    <a:ext uri="{9D8B030D-6E8A-4147-A177-3AD203B41FA5}">
+                      <a16:colId xmlns:a16="http://schemas.microsoft.com/office/drawing/2014/main" val="20000"/>
+                    </a:ext>
+                  </a:extLst>
+                </a:gridCol>
+                <a:gridCol w="914400">
+                  <a:extLst>
+                    <a:ext uri="{9D8B030D-6E8A-4147-A177-3AD203B41FA5}">
+                      <a16:colId xmlns:a16="http://schemas.microsoft.com/office/drawing/2014/main" val="20001"/>
+                    </a:ext>
+                  </a:extLst>
+                </a:gridCol>
+                <a:gridCol w="2587752">
+                  <a:extLst>
+                    <a:ext uri="{9D8B030D-6E8A-4147-A177-3AD203B41FA5}">
+                      <a16:colId xmlns:a16="http://schemas.microsoft.com/office/drawing/2014/main" val="20002"/>
+                    </a:ext>
+                  </a:extLst>
+                </a:gridCol>
+              </a:tblGrid>
+              <a:tr h="219456">
+                <a:tc>
+                  <a:txBody>
+                    <a:bodyPr/>
+                    <a:lstStyle/>
+                    <a:p>
+                      <a:pPr marL="0" indent="0">
+                        <a:buNone/>
+                      </a:pPr>
+                      <a:r>
+                        <a:rPr lang="en-US" sz="900" b="1" dirty="0">
+                          <a:solidFill>
+                            <a:srgbClr val="FFFFFF"/>
+                          </a:solidFill>
+                        </a:rPr>
+                        <a:t>Analyst</a:t>
+                      </a:r>
+                      <a:endParaRPr lang="en-US" sz="900" dirty="0"/>
+                    </a:p>
+                  </a:txBody>
+                  <a:tcPr marL="27432" marR="27432" marT="27432" marB="27432" anchor="ctr">
+                    <a:lnL w="6350" cap="flat" cmpd="sng" algn="ctr">
+                      <a:solidFill>
+                        <a:srgbClr val="D5DBE5"/>
+                      </a:solidFill>
+                      <a:prstDash val="solid"/>
+                      <a:round/>
+                      <a:headEnd type="none" w="med" len="med"/>
+                      <a:tailEnd type="none" w="med" len="med"/>
+                    </a:lnL>
+                    <a:lnR w="6350" cap="flat" cmpd="sng" algn="ctr">
+                      <a:solidFill>
+                        <a:srgbClr val="D5DBE5"/>
+                      </a:solidFill>
+                      <a:prstDash val="solid"/>
+                      <a:round/>
+                      <a:headEnd type="none" w="med" len="med"/>
+                      <a:tailEnd type="none" w="med" len="med"/>
+                    </a:lnR>
+                    <a:lnT w="6350" cap="flat" cmpd="sng" algn="ctr">
+                      <a:solidFill>
+                        <a:srgbClr val="D5DBE5"/>
+                      </a:solidFill>
+                      <a:prstDash val="solid"/>
+                      <a:round/>
+                      <a:headEnd type="none" w="med" len="med"/>
+                      <a:tailEnd type="none" w="med" len="med"/>
+                    </a:lnT>
+                    <a:lnB w="6350" cap="flat" cmpd="sng" algn="ctr">
+                      <a:solidFill>
+                        <a:srgbClr val="D5DBE5"/>
+                      </a:solidFill>
+                      <a:prstDash val="solid"/>
+                      <a:round/>
+                      <a:headEnd type="none" w="med" len="med"/>
+                      <a:tailEnd type="none" w="med" len="med"/>
+                    </a:lnB>
+                    <a:solidFill>
+                      <a:srgbClr val="1E2761"/>
+                    </a:solidFill>
+                  </a:tcPr>
+                </a:tc>
+                <a:tc>
+                  <a:txBody>
+                    <a:bodyPr/>
+                    <a:lstStyle/>
+                    <a:p>
+                      <a:pPr marL="0" indent="0" algn="ctr">
+                        <a:buNone/>
+                      </a:pPr>
+                      <a:r>
+                        <a:rPr lang="en-US" sz="900" b="1" dirty="0">
+                          <a:solidFill>
+                            <a:srgbClr val="FFFFFF"/>
+                          </a:solidFill>
+                        </a:rPr>
+                        <a:t>Opinion</a:t>
+                      </a:r>
+                      <a:endParaRPr lang="en-US" sz="900" dirty="0"/>
+                    </a:p>
+                  </a:txBody>
+                  <a:tcPr marL="27432" marR="27432" marT="27432" marB="27432" anchor="ctr">
+                    <a:lnL w="6350" cap="flat" cmpd="sng" algn="ctr">
+                      <a:solidFill>
+                        <a:srgbClr val="D5DBE5"/>
+                      </a:solidFill>
+                      <a:prstDash val="solid"/>
+                      <a:round/>
+                      <a:headEnd type="none" w="med" len="med"/>
+                      <a:tailEnd type="none" w="med" len="med"/>
+                    </a:lnL>
+                    <a:lnR w="6350" cap="flat" cmpd="sng" algn="ctr">
+                      <a:solidFill>
+                        <a:srgbClr val="D5DBE5"/>
+                      </a:solidFill>
+                      <a:prstDash val="solid"/>
+                      <a:round/>
+                      <a:headEnd type="none" w="med" len="med"/>
+                      <a:tailEnd type="none" w="med" len="med"/>
+                    </a:lnR>
+                    <a:lnT w="6350" cap="flat" cmpd="sng" algn="ctr">
+                      <a:solidFill>
+                        <a:srgbClr val="D5DBE5"/>
+                      </a:solidFill>
+                      <a:prstDash val="solid"/>
+                      <a:round/>
+                      <a:headEnd type="none" w="med" len="med"/>
+                      <a:tailEnd type="none" w="med" len="med"/>
+                    </a:lnT>
+                    <a:lnB w="6350" cap="flat" cmpd="sng" algn="ctr">
+                      <a:solidFill>
+                        <a:srgbClr val="D5DBE5"/>
+                      </a:solidFill>
+                      <a:prstDash val="solid"/>
+                      <a:round/>
+                      <a:headEnd type="none" w="med" len="med"/>
+                      <a:tailEnd type="none" w="med" len="med"/>
+                    </a:lnB>
+                    <a:solidFill>
+                      <a:srgbClr val="1E2761"/>
+                    </a:solidFill>
+                  </a:tcPr>
+                </a:tc>
+                <a:tc>
+                  <a:txBody>
+                    <a:bodyPr/>
+                    <a:lstStyle/>
+                    <a:p>
+                      <a:pPr marL="0" indent="0" algn="ctr">
+                        <a:buNone/>
+                      </a:pPr>
+                      <a:r>
+                        <a:rPr lang="en-US" sz="900" b="1" dirty="0">
+                          <a:solidFill>
+                            <a:srgbClr val="FFFFFF"/>
+                          </a:solidFill>
+                        </a:rPr>
+                        <a:t>Reads</a:t>
+                      </a:r>
+                      <a:endParaRPr lang="en-US" sz="900" dirty="0"/>
+                    </a:p>
+                  </a:txBody>
+                  <a:tcPr marL="27432" marR="27432" marT="27432" marB="27432" anchor="ctr">
+                    <a:lnL w="6350" cap="flat" cmpd="sng" algn="ctr">
+                      <a:solidFill>
+                        <a:srgbClr val="D5DBE5"/>
+                      </a:solidFill>
+                      <a:prstDash val="solid"/>
+                      <a:round/>
+                      <a:headEnd type="none" w="med" len="med"/>
+                      <a:tailEnd type="none" w="med" len="med"/>
+                    </a:lnL>
+                    <a:lnR w="6350" cap="flat" cmpd="sng" algn="ctr">
+                      <a:solidFill>
+                        <a:srgbClr val="D5DBE5"/>
+                      </a:solidFill>
+                      <a:prstDash val="solid"/>
+                      <a:round/>
+                      <a:headEnd type="none" w="med" len="med"/>
+                      <a:tailEnd type="none" w="med" len="med"/>
+                    </a:lnR>
+                    <a:lnT w="6350" cap="flat" cmpd="sng" algn="ctr">
+                      <a:solidFill>
+                        <a:srgbClr val="D5DBE5"/>
+                      </a:solidFill>
+                      <a:prstDash val="solid"/>
+                      <a:round/>
+                      <a:headEnd type="none" w="med" len="med"/>
+                      <a:tailEnd type="none" w="med" len="med"/>
+                    </a:lnT>
+                    <a:lnB w="6350" cap="flat" cmpd="sng" algn="ctr">
+                      <a:solidFill>
+                        <a:srgbClr val="D5DBE5"/>
+                      </a:solidFill>
+                      <a:prstDash val="solid"/>
+                      <a:round/>
+                      <a:headEnd type="none" w="med" len="med"/>
+                      <a:tailEnd type="none" w="med" len="med"/>
+                    </a:lnB>
+                    <a:solidFill>
+                      <a:srgbClr val="1E2761"/>
+                    </a:solidFill>
+                  </a:tcPr>
+                </a:tc>
+                <a:extLst>
+                  <a:ext uri="{0D108BD9-81ED-4DB2-BD59-A6C34878D82A}">
+                    <a16:rowId xmlns:a16="http://schemas.microsoft.com/office/drawing/2014/main" val="10000"/>
+                  </a:ext>
+                </a:extLst>
+              </a:tr>
+              <a:tr h="219456">
+                <a:tc>
+                  <a:txBody>
+                    <a:bodyPr/>
+                    <a:lstStyle/>
+                    <a:p>
+                      <a:pPr marL="0" indent="0">
+                        <a:buNone/>
+                      </a:pPr>
+                      <a:r>
+                        <a:rPr lang="en-US" sz="900" dirty="0">
+                          <a:solidFill>
+                            <a:srgbClr val="1B1F2A"/>
+                          </a:solidFill>
+                        </a:rPr>
+                        <a:t>4 Communications</a:t>
+                      </a:r>
+                      <a:endParaRPr lang="en-US" sz="900" dirty="0"/>
+                    </a:p>
+                  </a:txBody>
+                  <a:tcPr marL="27432" marR="27432" marT="27432" marB="27432" anchor="ctr">
+                    <a:lnL w="6350" cap="flat" cmpd="sng" algn="ctr">
+                      <a:solidFill>
+                        <a:srgbClr val="D5DBE5"/>
+                      </a:solidFill>
+                      <a:prstDash val="solid"/>
+                      <a:round/>
+                      <a:headEnd type="none" w="med" len="med"/>
+                      <a:tailEnd type="none" w="med" len="med"/>
+                    </a:lnL>
+                    <a:lnR w="6350" cap="flat" cmpd="sng" algn="ctr">
+                      <a:solidFill>
+                        <a:srgbClr val="D5DBE5"/>
+                      </a:solidFill>
+                      <a:prstDash val="solid"/>
+                      <a:round/>
+                      <a:headEnd type="none" w="med" len="med"/>
+                      <a:tailEnd type="none" w="med" len="med"/>
+                    </a:lnR>
+                    <a:lnT w="6350" cap="flat" cmpd="sng" algn="ctr">
+                      <a:solidFill>
+                        <a:srgbClr val="D5DBE5"/>
+                      </a:solidFill>
+                      <a:prstDash val="solid"/>
+                      <a:round/>
+                      <a:headEnd type="none" w="med" len="med"/>
+                      <a:tailEnd type="none" w="med" len="med"/>
+                    </a:lnT>
+                    <a:lnB w="6350" cap="flat" cmpd="sng" algn="ctr">
+                      <a:solidFill>
+                        <a:srgbClr val="D5DBE5"/>
+                      </a:solidFill>
+                      <a:prstDash val="solid"/>
+                      <a:round/>
+                      <a:headEnd type="none" w="med" len="med"/>
+                      <a:tailEnd type="none" w="med" len="med"/>
+                    </a:lnB>
+                  </a:tcPr>
+                </a:tc>
+                <a:tc>
+                  <a:txBody>
+                    <a:bodyPr/>
+                    <a:lstStyle/>
+                    <a:p>
+                      <a:pPr marL="0" indent="0" algn="ctr">
+                        <a:buNone/>
+                      </a:pPr>
+                      <a:r>
+                        <a:rPr lang="en-US" sz="900" b="1" dirty="0">
+                          <a:solidFill>
+                            <a:srgbClr val="C8553D"/>
+                          </a:solidFill>
+                        </a:rPr>
+                        <a:t>+6.0 hike</a:t>
+                      </a:r>
+                      <a:endParaRPr lang="en-US" sz="900" dirty="0"/>
+                    </a:p>
+                  </a:txBody>
+                  <a:tcPr marL="27432" marR="27432" marT="27432" marB="27432" anchor="ctr">
+                    <a:lnL w="6350" cap="flat" cmpd="sng" algn="ctr">
+                      <a:solidFill>
+                        <a:srgbClr val="D5DBE5"/>
+                      </a:solidFill>
+                      <a:prstDash val="solid"/>
+                      <a:round/>
+                      <a:headEnd type="none" w="med" len="med"/>
+                      <a:tailEnd type="none" w="med" len="med"/>
+                    </a:lnL>
+                    <a:lnR w="6350" cap="flat" cmpd="sng" algn="ctr">
+                      <a:solidFill>
+                        <a:srgbClr val="D5DBE5"/>
+                      </a:solidFill>
+                      <a:prstDash val="solid"/>
+                      <a:round/>
+                      <a:headEnd type="none" w="med" len="med"/>
+                      <a:tailEnd type="none" w="med" len="med"/>
+                    </a:lnR>
+                    <a:lnT w="6350" cap="flat" cmpd="sng" algn="ctr">
+                      <a:solidFill>
+                        <a:srgbClr val="D5DBE5"/>
+                      </a:solidFill>
+                      <a:prstDash val="solid"/>
+                      <a:round/>
+                      <a:headEnd type="none" w="med" len="med"/>
+                      <a:tailEnd type="none" w="med" len="med"/>
+                    </a:lnT>
+                    <a:lnB w="6350" cap="flat" cmpd="sng" algn="ctr">
+                      <a:solidFill>
+                        <a:srgbClr val="D5DBE5"/>
+                      </a:solidFill>
+                      <a:prstDash val="solid"/>
+                      <a:round/>
+                      <a:headEnd type="none" w="med" len="med"/>
+                      <a:tailEnd type="none" w="med" len="med"/>
+                    </a:lnB>
+                  </a:tcPr>
+                </a:tc>
+                <a:tc>
+                  <a:txBody>
+                    <a:bodyPr/>
+                    <a:lstStyle/>
+                    <a:p>
+                      <a:pPr marL="0" indent="0" algn="ctr">
+                        <a:buNone/>
+                      </a:pPr>
+                      <a:r>
+                        <a:rPr lang="en-US" sz="900" dirty="0">
+                          <a:solidFill>
+                            <a:srgbClr val="1B1F2A"/>
+                          </a:solidFill>
+                        </a:rPr>
+                        <a:t>statements, minutes, transcript, speeches</a:t>
+                      </a:r>
+                      <a:endParaRPr lang="en-US" sz="900" dirty="0"/>
+                    </a:p>
+                  </a:txBody>
+                  <a:tcPr marL="27432" marR="27432" marT="27432" marB="27432" anchor="ctr">
+                    <a:lnL w="6350" cap="flat" cmpd="sng" algn="ctr">
+                      <a:solidFill>
+                        <a:srgbClr val="D5DBE5"/>
+                      </a:solidFill>
+                      <a:prstDash val="solid"/>
+                      <a:round/>
+                      <a:headEnd type="none" w="med" len="med"/>
+                      <a:tailEnd type="none" w="med" len="med"/>
+                    </a:lnL>
+                    <a:lnR w="6350" cap="flat" cmpd="sng" algn="ctr">
+                      <a:solidFill>
+                        <a:srgbClr val="D5DBE5"/>
+                      </a:solidFill>
+                      <a:prstDash val="solid"/>
+                      <a:round/>
+                      <a:headEnd type="none" w="med" len="med"/>
+                      <a:tailEnd type="none" w="med" len="med"/>
+                    </a:lnR>
+                    <a:lnT w="6350" cap="flat" cmpd="sng" algn="ctr">
+                      <a:solidFill>
+                        <a:srgbClr val="D5DBE5"/>
+                      </a:solidFill>
+                      <a:prstDash val="solid"/>
+                      <a:round/>
+                      <a:headEnd type="none" w="med" len="med"/>
+                      <a:tailEnd type="none" w="med" len="med"/>
+                    </a:lnT>
+                    <a:lnB w="6350" cap="flat" cmpd="sng" algn="ctr">
+                      <a:solidFill>
+                        <a:srgbClr val="D5DBE5"/>
+                      </a:solidFill>
+                      <a:prstDash val="solid"/>
+                      <a:round/>
+                      <a:headEnd type="none" w="med" len="med"/>
+                      <a:tailEnd type="none" w="med" len="med"/>
+                    </a:lnB>
+                  </a:tcPr>
+                </a:tc>
+                <a:extLst>
+                  <a:ext uri="{0D108BD9-81ED-4DB2-BD59-A6C34878D82A}">
+                    <a16:rowId xmlns:a16="http://schemas.microsoft.com/office/drawing/2014/main" val="10001"/>
+                  </a:ext>
+                </a:extLst>
+              </a:tr>
+              <a:tr h="219456">
+                <a:tc>
+                  <a:txBody>
+                    <a:bodyPr/>
+                    <a:lstStyle/>
+                    <a:p>
+                      <a:pPr marL="0" indent="0">
+                        <a:buNone/>
+                      </a:pPr>
+                      <a:r>
+                        <a:rPr lang="en-US" sz="900" dirty="0">
+                          <a:solidFill>
+                            <a:srgbClr val="1B1F2A"/>
+                          </a:solidFill>
+                        </a:rPr>
+                        <a:t>5 Minutes</a:t>
+                      </a:r>
+                      <a:endParaRPr lang="en-US" sz="900" dirty="0"/>
+                    </a:p>
+                  </a:txBody>
+                  <a:tcPr marL="27432" marR="27432" marT="27432" marB="27432" anchor="ctr">
+                    <a:lnL w="6350" cap="flat" cmpd="sng" algn="ctr">
+                      <a:solidFill>
+                        <a:srgbClr val="D5DBE5"/>
+                      </a:solidFill>
+                      <a:prstDash val="solid"/>
+                      <a:round/>
+                      <a:headEnd type="none" w="med" len="med"/>
+                      <a:tailEnd type="none" w="med" len="med"/>
+                    </a:lnL>
+                    <a:lnR w="6350" cap="flat" cmpd="sng" algn="ctr">
+                      <a:solidFill>
+                        <a:srgbClr val="D5DBE5"/>
+                      </a:solidFill>
+                      <a:prstDash val="solid"/>
+                      <a:round/>
+                      <a:headEnd type="none" w="med" len="med"/>
+                      <a:tailEnd type="none" w="med" len="med"/>
+                    </a:lnR>
+                    <a:lnT w="6350" cap="flat" cmpd="sng" algn="ctr">
+                      <a:solidFill>
+                        <a:srgbClr val="D5DBE5"/>
+                      </a:solidFill>
+                      <a:prstDash val="solid"/>
+                      <a:round/>
+                      <a:headEnd type="none" w="med" len="med"/>
+                      <a:tailEnd type="none" w="med" len="med"/>
+                    </a:lnT>
+                    <a:lnB w="6350" cap="flat" cmpd="sng" algn="ctr">
+                      <a:solidFill>
+                        <a:srgbClr val="D5DBE5"/>
+                      </a:solidFill>
+                      <a:prstDash val="solid"/>
+                      <a:round/>
+                      <a:headEnd type="none" w="med" len="med"/>
+                      <a:tailEnd type="none" w="med" len="med"/>
+                    </a:lnB>
+                  </a:tcPr>
+                </a:tc>
+                <a:tc>
+                  <a:txBody>
+                    <a:bodyPr/>
+                    <a:lstStyle/>
+                    <a:p>
+                      <a:pPr marL="0" indent="0" algn="ctr">
+                        <a:buNone/>
+                      </a:pPr>
+                      <a:r>
+                        <a:rPr lang="en-US" sz="900" b="1" dirty="0">
+                          <a:solidFill>
+                            <a:srgbClr val="C8553D"/>
+                          </a:solidFill>
+                        </a:rPr>
+                        <a:t>+6.2 hike</a:t>
+                      </a:r>
+                      <a:endParaRPr lang="en-US" sz="900" dirty="0"/>
+                    </a:p>
+                  </a:txBody>
+                  <a:tcPr marL="27432" marR="27432" marT="27432" marB="27432" anchor="ctr">
+                    <a:lnL w="6350" cap="flat" cmpd="sng" algn="ctr">
+                      <a:solidFill>
+                        <a:srgbClr val="D5DBE5"/>
+                      </a:solidFill>
+                      <a:prstDash val="solid"/>
+                      <a:round/>
+                      <a:headEnd type="none" w="med" len="med"/>
+                      <a:tailEnd type="none" w="med" len="med"/>
+                    </a:lnL>
+                    <a:lnR w="6350" cap="flat" cmpd="sng" algn="ctr">
+                      <a:solidFill>
+                        <a:srgbClr val="D5DBE5"/>
+                      </a:solidFill>
+                      <a:prstDash val="solid"/>
+                      <a:round/>
+                      <a:headEnd type="none" w="med" len="med"/>
+                      <a:tailEnd type="none" w="med" len="med"/>
+                    </a:lnR>
+                    <a:lnT w="6350" cap="flat" cmpd="sng" algn="ctr">
+                      <a:solidFill>
+                        <a:srgbClr val="D5DBE5"/>
+                      </a:solidFill>
+                      <a:prstDash val="solid"/>
+                      <a:round/>
+                      <a:headEnd type="none" w="med" len="med"/>
+                      <a:tailEnd type="none" w="med" len="med"/>
+                    </a:lnT>
+                    <a:lnB w="6350" cap="flat" cmpd="sng" algn="ctr">
+                      <a:solidFill>
+                        <a:srgbClr val="D5DBE5"/>
+                      </a:solidFill>
+                      <a:prstDash val="solid"/>
+                      <a:round/>
+                      <a:headEnd type="none" w="med" len="med"/>
+                      <a:tailEnd type="none" w="med" len="med"/>
+                    </a:lnB>
+                  </a:tcPr>
+                </a:tc>
+                <a:tc>
+                  <a:txBody>
+                    <a:bodyPr/>
+                    <a:lstStyle/>
+                    <a:p>
+                      <a:pPr marL="0" indent="0" algn="ctr">
+                        <a:buNone/>
+                      </a:pPr>
+                      <a:r>
+                        <a:rPr lang="en-US" sz="900" dirty="0">
+                          <a:solidFill>
+                            <a:srgbClr val="1B1F2A"/>
+                          </a:solidFill>
+                        </a:rPr>
+                        <a:t>the minutes only</a:t>
+                      </a:r>
+                      <a:endParaRPr lang="en-US" sz="900" dirty="0"/>
+                    </a:p>
+                  </a:txBody>
+                  <a:tcPr marL="27432" marR="27432" marT="27432" marB="27432" anchor="ctr">
+                    <a:lnL w="6350" cap="flat" cmpd="sng" algn="ctr">
+                      <a:solidFill>
+                        <a:srgbClr val="D5DBE5"/>
+                      </a:solidFill>
+                      <a:prstDash val="solid"/>
+                      <a:round/>
+                      <a:headEnd type="none" w="med" len="med"/>
+                      <a:tailEnd type="none" w="med" len="med"/>
+                    </a:lnL>
+                    <a:lnR w="6350" cap="flat" cmpd="sng" algn="ctr">
+                      <a:solidFill>
+                        <a:srgbClr val="D5DBE5"/>
+                      </a:solidFill>
+                      <a:prstDash val="solid"/>
+                      <a:round/>
+                      <a:headEnd type="none" w="med" len="med"/>
+                      <a:tailEnd type="none" w="med" len="med"/>
+                    </a:lnR>
+                    <a:lnT w="6350" cap="flat" cmpd="sng" algn="ctr">
+                      <a:solidFill>
+                        <a:srgbClr val="D5DBE5"/>
+                      </a:solidFill>
+                      <a:prstDash val="solid"/>
+                      <a:round/>
+                      <a:headEnd type="none" w="med" len="med"/>
+                      <a:tailEnd type="none" w="med" len="med"/>
+                    </a:lnT>
+                    <a:lnB w="6350" cap="flat" cmpd="sng" algn="ctr">
+                      <a:solidFill>
+                        <a:srgbClr val="D5DBE5"/>
+                      </a:solidFill>
+                      <a:prstDash val="solid"/>
+                      <a:round/>
+                      <a:headEnd type="none" w="med" len="med"/>
+                      <a:tailEnd type="none" w="med" len="med"/>
+                    </a:lnB>
+                  </a:tcPr>
+                </a:tc>
+                <a:extLst>
+                  <a:ext uri="{0D108BD9-81ED-4DB2-BD59-A6C34878D82A}">
+                    <a16:rowId xmlns:a16="http://schemas.microsoft.com/office/drawing/2014/main" val="10002"/>
+                  </a:ext>
+                </a:extLst>
+              </a:tr>
+              <a:tr h="219456">
+                <a:tc>
+                  <a:txBody>
+                    <a:bodyPr/>
+                    <a:lstStyle/>
+                    <a:p>
+                      <a:pPr marL="0" indent="0">
+                        <a:buNone/>
+                      </a:pPr>
+                      <a:r>
+                        <a:rPr lang="en-US" sz="900" dirty="0">
+                          <a:solidFill>
+                            <a:srgbClr val="1B1F2A"/>
+                          </a:solidFill>
+                        </a:rPr>
+                        <a:t>6 Inflation</a:t>
+                      </a:r>
+                      <a:endParaRPr lang="en-US" sz="900" dirty="0"/>
+                    </a:p>
+                  </a:txBody>
+                  <a:tcPr marL="27432" marR="27432" marT="27432" marB="27432" anchor="ctr">
+                    <a:lnL w="6350" cap="flat" cmpd="sng" algn="ctr">
+                      <a:solidFill>
+                        <a:srgbClr val="D5DBE5"/>
+                      </a:solidFill>
+                      <a:prstDash val="solid"/>
+                      <a:round/>
+                      <a:headEnd type="none" w="med" len="med"/>
+                      <a:tailEnd type="none" w="med" len="med"/>
+                    </a:lnL>
+                    <a:lnR w="6350" cap="flat" cmpd="sng" algn="ctr">
+                      <a:solidFill>
+                        <a:srgbClr val="D5DBE5"/>
+                      </a:solidFill>
+                      <a:prstDash val="solid"/>
+                      <a:round/>
+                      <a:headEnd type="none" w="med" len="med"/>
+                      <a:tailEnd type="none" w="med" len="med"/>
+                    </a:lnR>
+                    <a:lnT w="6350" cap="flat" cmpd="sng" algn="ctr">
+                      <a:solidFill>
+                        <a:srgbClr val="D5DBE5"/>
+                      </a:solidFill>
+                      <a:prstDash val="solid"/>
+                      <a:round/>
+                      <a:headEnd type="none" w="med" len="med"/>
+                      <a:tailEnd type="none" w="med" len="med"/>
+                    </a:lnT>
+                    <a:lnB w="6350" cap="flat" cmpd="sng" algn="ctr">
+                      <a:solidFill>
+                        <a:srgbClr val="D5DBE5"/>
+                      </a:solidFill>
+                      <a:prstDash val="solid"/>
+                      <a:round/>
+                      <a:headEnd type="none" w="med" len="med"/>
+                      <a:tailEnd type="none" w="med" len="med"/>
+                    </a:lnB>
+                  </a:tcPr>
+                </a:tc>
+                <a:tc>
+                  <a:txBody>
+                    <a:bodyPr/>
+                    <a:lstStyle/>
+                    <a:p>
+                      <a:pPr marL="0" indent="0" algn="ctr">
+                        <a:buNone/>
+                      </a:pPr>
+                      <a:r>
+                        <a:rPr lang="en-US" sz="900" b="1" dirty="0">
+                          <a:solidFill>
+                            <a:srgbClr val="C8553D"/>
+                          </a:solidFill>
+                        </a:rPr>
+                        <a:t>+5.8 hike</a:t>
+                      </a:r>
+                      <a:endParaRPr lang="en-US" sz="900" dirty="0"/>
+                    </a:p>
+                  </a:txBody>
+                  <a:tcPr marL="27432" marR="27432" marT="27432" marB="27432" anchor="ctr">
+                    <a:lnL w="6350" cap="flat" cmpd="sng" algn="ctr">
+                      <a:solidFill>
+                        <a:srgbClr val="D5DBE5"/>
+                      </a:solidFill>
+                      <a:prstDash val="solid"/>
+                      <a:round/>
+                      <a:headEnd type="none" w="med" len="med"/>
+                      <a:tailEnd type="none" w="med" len="med"/>
+                    </a:lnL>
+                    <a:lnR w="6350" cap="flat" cmpd="sng" algn="ctr">
+                      <a:solidFill>
+                        <a:srgbClr val="D5DBE5"/>
+                      </a:solidFill>
+                      <a:prstDash val="solid"/>
+                      <a:round/>
+                      <a:headEnd type="none" w="med" len="med"/>
+                      <a:tailEnd type="none" w="med" len="med"/>
+                    </a:lnR>
+                    <a:lnT w="6350" cap="flat" cmpd="sng" algn="ctr">
+                      <a:solidFill>
+                        <a:srgbClr val="D5DBE5"/>
+                      </a:solidFill>
+                      <a:prstDash val="solid"/>
+                      <a:round/>
+                      <a:headEnd type="none" w="med" len="med"/>
+                      <a:tailEnd type="none" w="med" len="med"/>
+                    </a:lnT>
+                    <a:lnB w="6350" cap="flat" cmpd="sng" algn="ctr">
+                      <a:solidFill>
+                        <a:srgbClr val="D5DBE5"/>
+                      </a:solidFill>
+                      <a:prstDash val="solid"/>
+                      <a:round/>
+                      <a:headEnd type="none" w="med" len="med"/>
+                      <a:tailEnd type="none" w="med" len="med"/>
+                    </a:lnB>
+                  </a:tcPr>
+                </a:tc>
+                <a:tc>
+                  <a:txBody>
+                    <a:bodyPr/>
+                    <a:lstStyle/>
+                    <a:p>
+                      <a:pPr marL="0" indent="0" algn="ctr">
+                        <a:buNone/>
+                      </a:pPr>
+                      <a:r>
+                        <a:rPr lang="en-US" sz="900" dirty="0">
+                          <a:solidFill>
+                            <a:srgbClr val="1B1F2A"/>
+                          </a:solidFill>
+                        </a:rPr>
+                        <a:t>inflation pre-read, projections</a:t>
+                      </a:r>
+                      <a:endParaRPr lang="en-US" sz="900" dirty="0"/>
+                    </a:p>
+                  </a:txBody>
+                  <a:tcPr marL="27432" marR="27432" marT="27432" marB="27432" anchor="ctr">
+                    <a:lnL w="6350" cap="flat" cmpd="sng" algn="ctr">
+                      <a:solidFill>
+                        <a:srgbClr val="D5DBE5"/>
+                      </a:solidFill>
+                      <a:prstDash val="solid"/>
+                      <a:round/>
+                      <a:headEnd type="none" w="med" len="med"/>
+                      <a:tailEnd type="none" w="med" len="med"/>
+                    </a:lnL>
+                    <a:lnR w="6350" cap="flat" cmpd="sng" algn="ctr">
+                      <a:solidFill>
+                        <a:srgbClr val="D5DBE5"/>
+                      </a:solidFill>
+                      <a:prstDash val="solid"/>
+                      <a:round/>
+                      <a:headEnd type="none" w="med" len="med"/>
+                      <a:tailEnd type="none" w="med" len="med"/>
+                    </a:lnR>
+                    <a:lnT w="6350" cap="flat" cmpd="sng" algn="ctr">
+                      <a:solidFill>
+                        <a:srgbClr val="D5DBE5"/>
+                      </a:solidFill>
+                      <a:prstDash val="solid"/>
+                      <a:round/>
+                      <a:headEnd type="none" w="med" len="med"/>
+                      <a:tailEnd type="none" w="med" len="med"/>
+                    </a:lnT>
+                    <a:lnB w="6350" cap="flat" cmpd="sng" algn="ctr">
+                      <a:solidFill>
+                        <a:srgbClr val="D5DBE5"/>
+                      </a:solidFill>
+                      <a:prstDash val="solid"/>
+                      <a:round/>
+                      <a:headEnd type="none" w="med" len="med"/>
+                      <a:tailEnd type="none" w="med" len="med"/>
+                    </a:lnB>
+                  </a:tcPr>
+                </a:tc>
+                <a:extLst>
+                  <a:ext uri="{0D108BD9-81ED-4DB2-BD59-A6C34878D82A}">
+                    <a16:rowId xmlns:a16="http://schemas.microsoft.com/office/drawing/2014/main" val="10003"/>
+                  </a:ext>
+                </a:extLst>
+              </a:tr>
+              <a:tr h="219456">
+                <a:tc>
+                  <a:txBody>
+                    <a:bodyPr/>
+                    <a:lstStyle/>
+                    <a:p>
+                      <a:pPr marL="0" indent="0">
+                        <a:buNone/>
+                      </a:pPr>
+                      <a:r>
+                        <a:rPr lang="en-US" sz="900" dirty="0">
+                          <a:solidFill>
+                            <a:srgbClr val="1B1F2A"/>
+                          </a:solidFill>
+                        </a:rPr>
+                        <a:t>8 Financial conditions</a:t>
+                      </a:r>
+                      <a:endParaRPr lang="en-US" sz="900" dirty="0"/>
+                    </a:p>
+                  </a:txBody>
+                  <a:tcPr marL="27432" marR="27432" marT="27432" marB="27432" anchor="ctr">
+                    <a:lnL w="6350" cap="flat" cmpd="sng" algn="ctr">
+                      <a:solidFill>
+                        <a:srgbClr val="D5DBE5"/>
+                      </a:solidFill>
+                      <a:prstDash val="solid"/>
+                      <a:round/>
+                      <a:headEnd type="none" w="med" len="med"/>
+                      <a:tailEnd type="none" w="med" len="med"/>
+                    </a:lnL>
+                    <a:lnR w="6350" cap="flat" cmpd="sng" algn="ctr">
+                      <a:solidFill>
+                        <a:srgbClr val="D5DBE5"/>
+                      </a:solidFill>
+                      <a:prstDash val="solid"/>
+                      <a:round/>
+                      <a:headEnd type="none" w="med" len="med"/>
+                      <a:tailEnd type="none" w="med" len="med"/>
+                    </a:lnR>
+                    <a:lnT w="6350" cap="flat" cmpd="sng" algn="ctr">
+                      <a:solidFill>
+                        <a:srgbClr val="D5DBE5"/>
+                      </a:solidFill>
+                      <a:prstDash val="solid"/>
+                      <a:round/>
+                      <a:headEnd type="none" w="med" len="med"/>
+                      <a:tailEnd type="none" w="med" len="med"/>
+                    </a:lnT>
+                    <a:lnB w="6350" cap="flat" cmpd="sng" algn="ctr">
+                      <a:solidFill>
+                        <a:srgbClr val="D5DBE5"/>
+                      </a:solidFill>
+                      <a:prstDash val="solid"/>
+                      <a:round/>
+                      <a:headEnd type="none" w="med" len="med"/>
+                      <a:tailEnd type="none" w="med" len="med"/>
+                    </a:lnB>
+                  </a:tcPr>
+                </a:tc>
+                <a:tc>
+                  <a:txBody>
+                    <a:bodyPr/>
+                    <a:lstStyle/>
+                    <a:p>
+                      <a:pPr marL="0" indent="0" algn="ctr">
+                        <a:buNone/>
+                      </a:pPr>
+                      <a:r>
+                        <a:rPr lang="en-US" sz="900" b="1" dirty="0">
+                          <a:solidFill>
+                            <a:srgbClr val="C8553D"/>
+                          </a:solidFill>
+                        </a:rPr>
+                        <a:t>+3.4 hike</a:t>
+                      </a:r>
+                      <a:endParaRPr lang="en-US" sz="900" dirty="0"/>
+                    </a:p>
+                  </a:txBody>
+                  <a:tcPr marL="27432" marR="27432" marT="27432" marB="27432" anchor="ctr">
+                    <a:lnL w="6350" cap="flat" cmpd="sng" algn="ctr">
+                      <a:solidFill>
+                        <a:srgbClr val="D5DBE5"/>
+                      </a:solidFill>
+                      <a:prstDash val="solid"/>
+                      <a:round/>
+                      <a:headEnd type="none" w="med" len="med"/>
+                      <a:tailEnd type="none" w="med" len="med"/>
+                    </a:lnL>
+                    <a:lnR w="6350" cap="flat" cmpd="sng" algn="ctr">
+                      <a:solidFill>
+                        <a:srgbClr val="D5DBE5"/>
+                      </a:solidFill>
+                      <a:prstDash val="solid"/>
+                      <a:round/>
+                      <a:headEnd type="none" w="med" len="med"/>
+                      <a:tailEnd type="none" w="med" len="med"/>
+                    </a:lnR>
+                    <a:lnT w="6350" cap="flat" cmpd="sng" algn="ctr">
+                      <a:solidFill>
+                        <a:srgbClr val="D5DBE5"/>
+                      </a:solidFill>
+                      <a:prstDash val="solid"/>
+                      <a:round/>
+                      <a:headEnd type="none" w="med" len="med"/>
+                      <a:tailEnd type="none" w="med" len="med"/>
+                    </a:lnT>
+                    <a:lnB w="6350" cap="flat" cmpd="sng" algn="ctr">
+                      <a:solidFill>
+                        <a:srgbClr val="D5DBE5"/>
+                      </a:solidFill>
+                      <a:prstDash val="solid"/>
+                      <a:round/>
+                      <a:headEnd type="none" w="med" len="med"/>
+                      <a:tailEnd type="none" w="med" len="med"/>
+                    </a:lnB>
+                  </a:tcPr>
+                </a:tc>
+                <a:tc>
+                  <a:txBody>
+                    <a:bodyPr/>
+                    <a:lstStyle/>
+                    <a:p>
+                      <a:pPr marL="0" indent="0" algn="ctr">
+                        <a:buNone/>
+                      </a:pPr>
+                      <a:r>
+                        <a:rPr lang="en-US" sz="900" dirty="0">
+                          <a:solidFill>
+                            <a:srgbClr val="1B1F2A"/>
+                          </a:solidFill>
+                        </a:rPr>
+                        <a:t>2-year gap, breakevens, NFCI</a:t>
+                      </a:r>
+                      <a:endParaRPr lang="en-US" sz="900" dirty="0"/>
+                    </a:p>
+                  </a:txBody>
+                  <a:tcPr marL="27432" marR="27432" marT="27432" marB="27432" anchor="ctr">
+                    <a:lnL w="6350" cap="flat" cmpd="sng" algn="ctr">
+                      <a:solidFill>
+                        <a:srgbClr val="D5DBE5"/>
+                      </a:solidFill>
+                      <a:prstDash val="solid"/>
+                      <a:round/>
+                      <a:headEnd type="none" w="med" len="med"/>
+                      <a:tailEnd type="none" w="med" len="med"/>
+                    </a:lnL>
+                    <a:lnR w="6350" cap="flat" cmpd="sng" algn="ctr">
+                      <a:solidFill>
+                        <a:srgbClr val="D5DBE5"/>
+                      </a:solidFill>
+                      <a:prstDash val="solid"/>
+                      <a:round/>
+                      <a:headEnd type="none" w="med" len="med"/>
+                      <a:tailEnd type="none" w="med" len="med"/>
+                    </a:lnR>
+                    <a:lnT w="6350" cap="flat" cmpd="sng" algn="ctr">
+                      <a:solidFill>
+                        <a:srgbClr val="D5DBE5"/>
+                      </a:solidFill>
+                      <a:prstDash val="solid"/>
+                      <a:round/>
+                      <a:headEnd type="none" w="med" len="med"/>
+                      <a:tailEnd type="none" w="med" len="med"/>
+                    </a:lnT>
+                    <a:lnB w="6350" cap="flat" cmpd="sng" algn="ctr">
+                      <a:solidFill>
+                        <a:srgbClr val="D5DBE5"/>
+                      </a:solidFill>
+                      <a:prstDash val="solid"/>
+                      <a:round/>
+                      <a:headEnd type="none" w="med" len="med"/>
+                      <a:tailEnd type="none" w="med" len="med"/>
+                    </a:lnB>
+                  </a:tcPr>
+                </a:tc>
+                <a:extLst>
+                  <a:ext uri="{0D108BD9-81ED-4DB2-BD59-A6C34878D82A}">
+                    <a16:rowId xmlns:a16="http://schemas.microsoft.com/office/drawing/2014/main" val="10004"/>
+                  </a:ext>
+                </a:extLst>
+              </a:tr>
+              <a:tr h="219456">
+                <a:tc>
+                  <a:txBody>
+                    <a:bodyPr/>
+                    <a:lstStyle/>
+                    <a:p>
+                      <a:pPr marL="0" indent="0">
+                        <a:buNone/>
+                      </a:pPr>
+                      <a:r>
+                        <a:rPr lang="en-US" sz="900" dirty="0">
+                          <a:solidFill>
+                            <a:srgbClr val="1B1F2A"/>
+                          </a:solidFill>
+                        </a:rPr>
+                        <a:t>7 Labour market</a:t>
+                      </a:r>
+                      <a:endParaRPr lang="en-US" sz="900" dirty="0"/>
+                    </a:p>
+                  </a:txBody>
+                  <a:tcPr marL="27432" marR="27432" marT="27432" marB="27432" anchor="ctr">
+                    <a:lnL w="6350" cap="flat" cmpd="sng" algn="ctr">
+                      <a:solidFill>
+                        <a:srgbClr val="D5DBE5"/>
+                      </a:solidFill>
+                      <a:prstDash val="solid"/>
+                      <a:round/>
+                      <a:headEnd type="none" w="med" len="med"/>
+                      <a:tailEnd type="none" w="med" len="med"/>
+                    </a:lnL>
+                    <a:lnR w="6350" cap="flat" cmpd="sng" algn="ctr">
+                      <a:solidFill>
+                        <a:srgbClr val="D5DBE5"/>
+                      </a:solidFill>
+                      <a:prstDash val="solid"/>
+                      <a:round/>
+                      <a:headEnd type="none" w="med" len="med"/>
+                      <a:tailEnd type="none" w="med" len="med"/>
+                    </a:lnR>
+                    <a:lnT w="6350" cap="flat" cmpd="sng" algn="ctr">
+                      <a:solidFill>
+                        <a:srgbClr val="D5DBE5"/>
+                      </a:solidFill>
+                      <a:prstDash val="solid"/>
+                      <a:round/>
+                      <a:headEnd type="none" w="med" len="med"/>
+                      <a:tailEnd type="none" w="med" len="med"/>
+                    </a:lnT>
+                    <a:lnB w="6350" cap="flat" cmpd="sng" algn="ctr">
+                      <a:solidFill>
+                        <a:srgbClr val="D5DBE5"/>
+                      </a:solidFill>
+                      <a:prstDash val="solid"/>
+                      <a:round/>
+                      <a:headEnd type="none" w="med" len="med"/>
+                      <a:tailEnd type="none" w="med" len="med"/>
+                    </a:lnB>
+                  </a:tcPr>
+                </a:tc>
+                <a:tc>
+                  <a:txBody>
+                    <a:bodyPr/>
+                    <a:lstStyle/>
+                    <a:p>
+                      <a:pPr marL="0" indent="0" algn="ctr">
+                        <a:buNone/>
+                      </a:pPr>
+                      <a:r>
+                        <a:rPr lang="en-US" sz="900" b="1" dirty="0">
+                          <a:solidFill>
+                            <a:srgbClr val="2C6E49"/>
+                          </a:solidFill>
+                        </a:rPr>
+                        <a:t>−1.4 hold</a:t>
+                      </a:r>
+                      <a:endParaRPr lang="en-US" sz="900" dirty="0"/>
+                    </a:p>
+                  </a:txBody>
+                  <a:tcPr marL="27432" marR="27432" marT="27432" marB="27432" anchor="ctr">
+                    <a:lnL w="6350" cap="flat" cmpd="sng" algn="ctr">
+                      <a:solidFill>
+                        <a:srgbClr val="D5DBE5"/>
+                      </a:solidFill>
+                      <a:prstDash val="solid"/>
+                      <a:round/>
+                      <a:headEnd type="none" w="med" len="med"/>
+                      <a:tailEnd type="none" w="med" len="med"/>
+                    </a:lnL>
+                    <a:lnR w="6350" cap="flat" cmpd="sng" algn="ctr">
+                      <a:solidFill>
+                        <a:srgbClr val="D5DBE5"/>
+                      </a:solidFill>
+                      <a:prstDash val="solid"/>
+                      <a:round/>
+                      <a:headEnd type="none" w="med" len="med"/>
+                      <a:tailEnd type="none" w="med" len="med"/>
+                    </a:lnR>
+                    <a:lnT w="6350" cap="flat" cmpd="sng" algn="ctr">
+                      <a:solidFill>
+                        <a:srgbClr val="D5DBE5"/>
+                      </a:solidFill>
+                      <a:prstDash val="solid"/>
+                      <a:round/>
+                      <a:headEnd type="none" w="med" len="med"/>
+                      <a:tailEnd type="none" w="med" len="med"/>
+                    </a:lnT>
+                    <a:lnB w="6350" cap="flat" cmpd="sng" algn="ctr">
+                      <a:solidFill>
+                        <a:srgbClr val="D5DBE5"/>
+                      </a:solidFill>
+                      <a:prstDash val="solid"/>
+                      <a:round/>
+                      <a:headEnd type="none" w="med" len="med"/>
+                      <a:tailEnd type="none" w="med" len="med"/>
+                    </a:lnB>
+                  </a:tcPr>
+                </a:tc>
+                <a:tc>
+                  <a:txBody>
+                    <a:bodyPr/>
+                    <a:lstStyle/>
+                    <a:p>
+                      <a:pPr marL="0" indent="0" algn="ctr">
+                        <a:buNone/>
+                      </a:pPr>
+                      <a:r>
+                        <a:rPr lang="en-US" sz="900" dirty="0">
+                          <a:solidFill>
+                            <a:srgbClr val="1B1F2A"/>
+                          </a:solidFill>
+                        </a:rPr>
+                        <a:t>labour pre-read, projections</a:t>
+                      </a:r>
+                      <a:endParaRPr lang="en-US" sz="900" dirty="0"/>
+                    </a:p>
+                  </a:txBody>
+                  <a:tcPr marL="27432" marR="27432" marT="27432" marB="27432" anchor="ctr">
+                    <a:lnL w="6350" cap="flat" cmpd="sng" algn="ctr">
+                      <a:solidFill>
+                        <a:srgbClr val="D5DBE5"/>
+                      </a:solidFill>
+                      <a:prstDash val="solid"/>
+                      <a:round/>
+                      <a:headEnd type="none" w="med" len="med"/>
+                      <a:tailEnd type="none" w="med" len="med"/>
+                    </a:lnL>
+                    <a:lnR w="6350" cap="flat" cmpd="sng" algn="ctr">
+                      <a:solidFill>
+                        <a:srgbClr val="D5DBE5"/>
+                      </a:solidFill>
+                      <a:prstDash val="solid"/>
+                      <a:round/>
+                      <a:headEnd type="none" w="med" len="med"/>
+                      <a:tailEnd type="none" w="med" len="med"/>
+                    </a:lnR>
+                    <a:lnT w="6350" cap="flat" cmpd="sng" algn="ctr">
+                      <a:solidFill>
+                        <a:srgbClr val="D5DBE5"/>
+                      </a:solidFill>
+                      <a:prstDash val="solid"/>
+                      <a:round/>
+                      <a:headEnd type="none" w="med" len="med"/>
+                      <a:tailEnd type="none" w="med" len="med"/>
+                    </a:lnT>
+                    <a:lnB w="6350" cap="flat" cmpd="sng" algn="ctr">
+                      <a:solidFill>
+                        <a:srgbClr val="D5DBE5"/>
+                      </a:solidFill>
+                      <a:prstDash val="solid"/>
+                      <a:round/>
+                      <a:headEnd type="none" w="med" len="med"/>
+                      <a:tailEnd type="none" w="med" len="med"/>
+                    </a:lnB>
+                  </a:tcPr>
+                </a:tc>
+                <a:extLst>
+                  <a:ext uri="{0D108BD9-81ED-4DB2-BD59-A6C34878D82A}">
+                    <a16:rowId xmlns:a16="http://schemas.microsoft.com/office/drawing/2014/main" val="10005"/>
+                  </a:ext>
+                </a:extLst>
+              </a:tr>
+              <a:tr h="219456">
+                <a:tc>
+                  <a:txBody>
+                    <a:bodyPr/>
+                    <a:lstStyle/>
+                    <a:p>
+                      <a:pPr marL="0" indent="0">
+                        <a:buNone/>
+                      </a:pPr>
+                      <a:r>
+                        <a:rPr lang="en-US" sz="900" b="1" dirty="0">
+                          <a:solidFill>
+                            <a:srgbClr val="1B1F2A"/>
+                          </a:solidFill>
+                        </a:rPr>
+                        <a:t>Mean, one vote each</a:t>
+                      </a:r>
+                      <a:endParaRPr lang="en-US" sz="900" dirty="0"/>
+                    </a:p>
+                  </a:txBody>
+                  <a:tcPr marL="27432" marR="27432" marT="27432" marB="27432" anchor="ctr">
+                    <a:lnL w="6350" cap="flat" cmpd="sng" algn="ctr">
+                      <a:solidFill>
+                        <a:srgbClr val="D5DBE5"/>
+                      </a:solidFill>
+                      <a:prstDash val="solid"/>
+                      <a:round/>
+                      <a:headEnd type="none" w="med" len="med"/>
+                      <a:tailEnd type="none" w="med" len="med"/>
+                    </a:lnL>
+                    <a:lnR w="6350" cap="flat" cmpd="sng" algn="ctr">
+                      <a:solidFill>
+                        <a:srgbClr val="D5DBE5"/>
+                      </a:solidFill>
+                      <a:prstDash val="solid"/>
+                      <a:round/>
+                      <a:headEnd type="none" w="med" len="med"/>
+                      <a:tailEnd type="none" w="med" len="med"/>
+                    </a:lnR>
+                    <a:lnT w="6350" cap="flat" cmpd="sng" algn="ctr">
+                      <a:solidFill>
+                        <a:srgbClr val="D5DBE5"/>
+                      </a:solidFill>
+                      <a:prstDash val="solid"/>
+                      <a:round/>
+                      <a:headEnd type="none" w="med" len="med"/>
+                      <a:tailEnd type="none" w="med" len="med"/>
+                    </a:lnT>
+                    <a:lnB w="6350" cap="flat" cmpd="sng" algn="ctr">
+                      <a:solidFill>
+                        <a:srgbClr val="D5DBE5"/>
+                      </a:solidFill>
+                      <a:prstDash val="solid"/>
+                      <a:round/>
+                      <a:headEnd type="none" w="med" len="med"/>
+                      <a:tailEnd type="none" w="med" len="med"/>
+                    </a:lnB>
+                  </a:tcPr>
+                </a:tc>
+                <a:tc>
+                  <a:txBody>
+                    <a:bodyPr/>
+                    <a:lstStyle/>
+                    <a:p>
+                      <a:pPr marL="0" indent="0" algn="ctr">
+                        <a:buNone/>
+                      </a:pPr>
+                      <a:r>
+                        <a:rPr lang="en-US" sz="900" b="1" dirty="0">
+                          <a:solidFill>
+                            <a:srgbClr val="1E2761"/>
+                          </a:solidFill>
+                        </a:rPr>
+                        <a:t>+4.0 hike</a:t>
+                      </a:r>
+                      <a:endParaRPr lang="en-US" sz="900" dirty="0"/>
+                    </a:p>
+                  </a:txBody>
+                  <a:tcPr marL="27432" marR="27432" marT="27432" marB="27432" anchor="ctr">
+                    <a:lnL w="6350" cap="flat" cmpd="sng" algn="ctr">
+                      <a:solidFill>
+                        <a:srgbClr val="D5DBE5"/>
+                      </a:solidFill>
+                      <a:prstDash val="solid"/>
+                      <a:round/>
+                      <a:headEnd type="none" w="med" len="med"/>
+                      <a:tailEnd type="none" w="med" len="med"/>
+                    </a:lnL>
+                    <a:lnR w="6350" cap="flat" cmpd="sng" algn="ctr">
+                      <a:solidFill>
+                        <a:srgbClr val="D5DBE5"/>
+                      </a:solidFill>
+                      <a:prstDash val="solid"/>
+                      <a:round/>
+                      <a:headEnd type="none" w="med" len="med"/>
+                      <a:tailEnd type="none" w="med" len="med"/>
+                    </a:lnR>
+                    <a:lnT w="6350" cap="flat" cmpd="sng" algn="ctr">
+                      <a:solidFill>
+                        <a:srgbClr val="D5DBE5"/>
+                      </a:solidFill>
+                      <a:prstDash val="solid"/>
+                      <a:round/>
+                      <a:headEnd type="none" w="med" len="med"/>
+                      <a:tailEnd type="none" w="med" len="med"/>
+                    </a:lnT>
+                    <a:lnB w="6350" cap="flat" cmpd="sng" algn="ctr">
+                      <a:solidFill>
+                        <a:srgbClr val="D5DBE5"/>
+                      </a:solidFill>
+                      <a:prstDash val="solid"/>
+                      <a:round/>
+                      <a:headEnd type="none" w="med" len="med"/>
+                      <a:tailEnd type="none" w="med" len="med"/>
+                    </a:lnB>
+                  </a:tcPr>
+                </a:tc>
+                <a:tc>
+                  <a:txBody>
+                    <a:bodyPr/>
+                    <a:lstStyle/>
+                    <a:p>
+                      <a:pPr marL="0" indent="0" algn="ctr">
+                        <a:buNone/>
+                      </a:pPr>
+                      <a:r>
+                        <a:rPr lang="en-US" sz="900" dirty="0">
+                          <a:solidFill>
+                            <a:srgbClr val="1E2761"/>
+                          </a:solidFill>
+                        </a:rPr>
+                        <a:t>two dissents for a hike in a 10 to 2 vote</a:t>
+                      </a:r>
+                      <a:endParaRPr lang="en-US" sz="900" dirty="0"/>
+                    </a:p>
+                  </a:txBody>
+                  <a:tcPr marL="27432" marR="27432" marT="27432" marB="27432" anchor="ctr">
+                    <a:lnL w="6350" cap="flat" cmpd="sng" algn="ctr">
+                      <a:solidFill>
+                        <a:srgbClr val="D5DBE5"/>
+                      </a:solidFill>
+                      <a:prstDash val="solid"/>
+                      <a:round/>
+                      <a:headEnd type="none" w="med" len="med"/>
+                      <a:tailEnd type="none" w="med" len="med"/>
+                    </a:lnL>
+                    <a:lnR w="6350" cap="flat" cmpd="sng" algn="ctr">
+                      <a:solidFill>
+                        <a:srgbClr val="D5DBE5"/>
+                      </a:solidFill>
+                      <a:prstDash val="solid"/>
+                      <a:round/>
+                      <a:headEnd type="none" w="med" len="med"/>
+                      <a:tailEnd type="none" w="med" len="med"/>
+                    </a:lnR>
+                    <a:lnT w="6350" cap="flat" cmpd="sng" algn="ctr">
+                      <a:solidFill>
+                        <a:srgbClr val="D5DBE5"/>
+                      </a:solidFill>
+                      <a:prstDash val="solid"/>
+                      <a:round/>
+                      <a:headEnd type="none" w="med" len="med"/>
+                      <a:tailEnd type="none" w="med" len="med"/>
+                    </a:lnT>
+                    <a:lnB w="6350" cap="flat" cmpd="sng" algn="ctr">
+                      <a:solidFill>
+                        <a:srgbClr val="D5DBE5"/>
+                      </a:solidFill>
+                      <a:prstDash val="solid"/>
+                      <a:round/>
+                      <a:headEnd type="none" w="med" len="med"/>
+                      <a:tailEnd type="none" w="med" len="med"/>
+                    </a:lnB>
+                  </a:tcPr>
+                </a:tc>
+                <a:extLst>
+                  <a:ext uri="{0D108BD9-81ED-4DB2-BD59-A6C34878D82A}">
+                    <a16:rowId xmlns:a16="http://schemas.microsoft.com/office/drawing/2014/main" val="10006"/>
+                  </a:ext>
+                </a:extLst>
+              </a:tr>
+            </a:tbl>
+          </a:graphicData>
+        </a:graphic>
+      </p:graphicFrame>
+      <p:sp>
+        <p:nvSpPr>
+          <p:cNvPr id="25" name="Text 21"/>
+          <p:cNvSpPr txBox="1"/>
+          <p:nvPr/>
+        </p:nvSpPr>
+        <p:spPr>
+          <a:xfrm>
+            <a:off x="6400800" y="5669280"/>
+            <a:ext cx="5010912" cy="457200"/>
+          </a:xfrm>
+          <a:prstGeom prst="rect">
+            <a:avLst/>
+          </a:prstGeom>
+          <a:noFill/>
+          <a:ln/>
+        </p:spPr>
+        <p:txBody>
+          <a:bodyPr wrap="square" lIns="0" tIns="0" rIns="0" bIns="0" rtlCol="0" anchor="t"/>
+          <a:lstStyle/>
+          <a:p>
+            <a:pPr marL="0" indent="0">
+              <a:buNone/>
+            </a:pPr>
+            <a:r>
+              <a:rPr lang="en-US" sz="1000" dirty="0">
                 <a:solidFill>
                   <a:schemeClr val="tx1"/>
                 </a:solidFill>
               </a:rPr>
-              <a:t>Every reason is a quote code found in the frozen evidence, so the call can be taken apart claim by claim, which the rest of this talk does</a:t>
-            </a:r>
-            <a:endParaRPr lang="en-US" sz="1200" dirty="0"/>
-          </a:p>
-          <a:p>
-            <a:pPr marL="342900" indent="-342900">
-              <a:spcAft>
-                <a:spcPts val="400"/>
-              </a:spcAft>
-              <a:buSzPct val="100000"/>
-              <a:buChar char="•"/>
-            </a:pPr>
-            <a:r>
-              <a:rPr lang="en-US" sz="1200" dirty="0">
-                <a:solidFill>
-                  <a:schemeClr val="tx1"/>
-                </a:solidFill>
-              </a:rPr>
-              <a:t>One decision proves little. It is scored formally (log score, Brier, against the market and two naive baselines) the moment the NY Fed's post-meeting rate row lands, and every weight decision waits on that record</a:t>
-            </a:r>
-            <a:endParaRPr lang="en-US" sz="1200" dirty="0"/>
-          </a:p>
-        </p:txBody>
-      </p:sp>
-      <p:sp>
-        <p:nvSpPr>
-          <p:cNvPr id="25" name="Slide Number Placeholder 0"/>
+              <a:t>3. Every reason is a quote code found in the frozen evidence. One decision proves little: it is scored formally (log score, Brier, against the market and two naive baselines) when the post-meeting rate row lands.</a:t>
+            </a:r>
+            <a:endParaRPr lang="en-US" sz="1000" dirty="0"/>
+          </a:p>
+        </p:txBody>
+      </p:sp>
+      <p:sp>
+        <p:nvSpPr>
+          <p:cNvPr id="24" name="Slide Number Placeholder 0"/>
           <p:cNvSpPr>
             <a:spLocks noGrp="1"/>
           </p:cNvSpPr>
@@ -21983,7 +24639,7 @@
           </a:prstGeom>
           <a:extLst>
             <a:ext uri="{C572A759-6A51-4108-AA02-DFA0A04FC94B}">
-              <ma14:wrappingTextBoxFlag xmlns="" xmlns:ma14="http://schemas.microsoft.com/office/mac/drawingml/2011/main" val="0"/>
+              <ma14:wrappingTextBoxFlag xmlns:ma14="http://schemas.microsoft.com/office/mac/drawingml/2011/main" xmlns="" val="0"/>
             </a:ext>
           </a:extLst>
         </p:spPr>
@@ -22002,13 +24658,18 @@
             <a:pPr algn="r"/>
             <a:fld id="{F7021451-1387-4CA6-816F-3879F97B5CBC}" type="slidenum">
               <a:rPr lang="en-US" b="0"/>
-              <a:t>3</a:t>
+              <a:t>4</a:t>
             </a:fld>
             <a:endParaRPr lang="en-US"/>
           </a:p>
         </p:txBody>
       </p:sp>
     </p:spTree>
+    <p:extLst>
+      <p:ext uri="{BB962C8B-B14F-4D97-AF65-F5344CB8AC3E}">
+        <p14:creationId xmlns:p14="http://schemas.microsoft.com/office/powerpoint/2010/main" val="726031273"/>
+      </p:ext>
+    </p:extLst>
   </p:cSld>
   <p:clrMapOvr>
     <a:masterClrMapping/>
@@ -22016,7 +24677,7 @@
 </p:sld>
 </file>
 
-<file path=ppt/slides/slide4.xml><?xml version="1.0" encoding="utf-8"?>
+<file path=ppt/slides/slide5.xml><?xml version="1.0" encoding="utf-8"?>
 <p:sld xmlns:a="http://schemas.openxmlformats.org/drawingml/2006/main" xmlns:r="http://schemas.openxmlformats.org/officeDocument/2006/relationships" xmlns:p="http://schemas.openxmlformats.org/presentationml/2006/main">
   <p:cSld name="Slide 4">
     <p:spTree>
@@ -22535,7 +25196,7 @@
 </p:sld>
 </file>
 
-<file path=ppt/slides/slide5.xml><?xml version="1.0" encoding="utf-8"?>
+<file path=ppt/slides/slide6.xml><?xml version="1.0" encoding="utf-8"?>
 <p:sld xmlns:a="http://schemas.openxmlformats.org/drawingml/2006/main" xmlns:r="http://schemas.openxmlformats.org/officeDocument/2006/relationships" xmlns:p="http://schemas.openxmlformats.org/presentationml/2006/main">
   <p:cSld name="Slide 6">
     <p:spTree>
@@ -22731,7 +25392,23 @@
                   <a:schemeClr val="tx1"/>
                 </a:solidFill>
               </a:rPr>
-              <a:t>Fed funds futures (CME FedWatch); prediction markets (Polymarket, Kalshi)</a:t>
+              <a:t>Fed funds futures (CME FedWatch); prediction markets (</a:t>
+            </a:r>
+            <a:r>
+              <a:rPr lang="en-US" sz="1200" b="1" dirty="0" err="1">
+                <a:solidFill>
+                  <a:schemeClr val="tx1"/>
+                </a:solidFill>
+              </a:rPr>
+              <a:t>Polymarket</a:t>
+            </a:r>
+            <a:r>
+              <a:rPr lang="en-US" sz="1200" b="1" dirty="0">
+                <a:solidFill>
+                  <a:schemeClr val="tx1"/>
+                </a:solidFill>
+              </a:rPr>
+              <a:t>)</a:t>
             </a:r>
             <a:endParaRPr lang="en-US" sz="1200" dirty="0"/>
           </a:p>
@@ -22767,7 +25444,7 @@
                   <a:srgbClr val="6B7280"/>
                 </a:solidFill>
               </a:rPr>
-              <a:t>What it is  </a:t>
+              <a:t>What it is:  </a:t>
             </a:r>
             <a:r>
               <a:rPr lang="en-US" sz="1150" dirty="0">
@@ -22833,7 +25510,7 @@
         </p:nvSpPr>
         <p:spPr>
           <a:xfrm>
-            <a:off x="3374136" y="1417320"/>
+            <a:off x="6233988" y="1417320"/>
             <a:ext cx="2615184" cy="2331720"/>
           </a:xfrm>
           <a:prstGeom prst="roundRect">
@@ -22874,7 +25551,7 @@
         </p:nvSpPr>
         <p:spPr>
           <a:xfrm>
-            <a:off x="3602736" y="1691640"/>
+            <a:off x="6462588" y="1691640"/>
             <a:ext cx="146304" cy="146304"/>
           </a:xfrm>
           <a:prstGeom prst="rect">
@@ -22906,7 +25583,7 @@
         </p:nvSpPr>
         <p:spPr>
           <a:xfrm>
-            <a:off x="3831336" y="1581912"/>
+            <a:off x="6691188" y="1581912"/>
             <a:ext cx="1975104" cy="365760"/>
           </a:xfrm>
           <a:prstGeom prst="rect">
@@ -22942,7 +25619,7 @@
         </p:nvSpPr>
         <p:spPr>
           <a:xfrm>
-            <a:off x="3602736" y="2039112"/>
+            <a:off x="6462588" y="2039112"/>
             <a:ext cx="2157984" cy="566928"/>
           </a:xfrm>
           <a:prstGeom prst="rect">
@@ -22978,7 +25655,7 @@
         </p:nvSpPr>
         <p:spPr>
           <a:xfrm>
-            <a:off x="3602736" y="2624328"/>
+            <a:off x="6462588" y="2624328"/>
             <a:ext cx="2157984" cy="548640"/>
           </a:xfrm>
           <a:prstGeom prst="rect">
@@ -23022,7 +25699,7 @@
         </p:nvSpPr>
         <p:spPr>
           <a:xfrm>
-            <a:off x="3602736" y="3191256"/>
+            <a:off x="6462588" y="3191256"/>
             <a:ext cx="2157984" cy="530352"/>
           </a:xfrm>
           <a:prstGeom prst="rect">
@@ -23060,13 +25737,13 @@
       </p:sp>
       <p:sp>
         <p:nvSpPr>
-          <p:cNvPr id="16" name="Shape 13"/>
+          <p:cNvPr id="22" name="Shape 19"/>
           <p:cNvSpPr/>
           <p:nvPr/>
         </p:nvSpPr>
         <p:spPr>
           <a:xfrm>
-            <a:off x="6199632" y="1417320"/>
+            <a:off x="9025128" y="1417320"/>
             <a:ext cx="2615184" cy="2331720"/>
           </a:xfrm>
           <a:prstGeom prst="roundRect">
@@ -23101,16 +25778,452 @@
       </p:sp>
       <p:sp>
         <p:nvSpPr>
-          <p:cNvPr id="17" name="Shape 14"/>
+          <p:cNvPr id="23" name="Shape 20"/>
           <p:cNvSpPr/>
           <p:nvPr/>
         </p:nvSpPr>
         <p:spPr>
           <a:xfrm>
-            <a:off x="6428232" y="1691640"/>
+            <a:off x="9253728" y="1691640"/>
             <a:ext cx="146304" cy="146304"/>
           </a:xfrm>
           <a:prstGeom prst="rect">
+            <a:avLst/>
+          </a:prstGeom>
+          <a:solidFill>
+            <a:srgbClr val="C8553D"/>
+          </a:solidFill>
+          <a:ln w="12700">
+            <a:solidFill>
+              <a:srgbClr val="C8553D"/>
+            </a:solidFill>
+            <a:prstDash val="solid"/>
+          </a:ln>
+        </p:spPr>
+        <p:txBody>
+          <a:bodyPr/>
+          <a:lstStyle/>
+          <a:p>
+            <a:endParaRPr lang="en-US"/>
+          </a:p>
+        </p:txBody>
+      </p:sp>
+      <p:sp>
+        <p:nvSpPr>
+          <p:cNvPr id="24" name="Text 21"/>
+          <p:cNvSpPr txBox="1"/>
+          <p:nvPr/>
+        </p:nvSpPr>
+        <p:spPr>
+          <a:xfrm>
+            <a:off x="9482328" y="1581912"/>
+            <a:ext cx="1975104" cy="365760"/>
+          </a:xfrm>
+          <a:prstGeom prst="rect">
+            <a:avLst/>
+          </a:prstGeom>
+          <a:noFill/>
+          <a:ln/>
+        </p:spPr>
+        <p:txBody>
+          <a:bodyPr wrap="square" lIns="0" tIns="0" rIns="0" bIns="0" rtlCol="0" anchor="t"/>
+          <a:lstStyle/>
+          <a:p>
+            <a:pPr marL="0" indent="0">
+              <a:buNone/>
+            </a:pPr>
+            <a:r>
+              <a:rPr lang="en-US" sz="1500" b="1" dirty="0">
+                <a:solidFill>
+                  <a:schemeClr val="tx2"/>
+                </a:solidFill>
+              </a:rPr>
+              <a:t>ML / AI signals</a:t>
+            </a:r>
+            <a:endParaRPr lang="en-US" sz="1500" dirty="0"/>
+          </a:p>
+        </p:txBody>
+      </p:sp>
+      <p:sp>
+        <p:nvSpPr>
+          <p:cNvPr id="25" name="Text 22"/>
+          <p:cNvSpPr txBox="1"/>
+          <p:nvPr/>
+        </p:nvSpPr>
+        <p:spPr>
+          <a:xfrm>
+            <a:off x="9253728" y="2039112"/>
+            <a:ext cx="2157984" cy="566928"/>
+          </a:xfrm>
+          <a:prstGeom prst="rect">
+            <a:avLst/>
+          </a:prstGeom>
+          <a:noFill/>
+          <a:ln/>
+        </p:spPr>
+        <p:txBody>
+          <a:bodyPr wrap="square" lIns="0" tIns="0" rIns="0" bIns="0" rtlCol="0" anchor="t"/>
+          <a:lstStyle/>
+          <a:p>
+            <a:pPr marL="0" indent="0">
+              <a:buNone/>
+            </a:pPr>
+            <a:r>
+              <a:rPr lang="en-US" sz="1200" b="1" dirty="0">
+                <a:solidFill>
+                  <a:schemeClr val="tx1"/>
+                </a:solidFill>
+              </a:rPr>
+              <a:t>LLM 'FOMC agent' papers (2025)</a:t>
+            </a:r>
+            <a:endParaRPr lang="en-US" sz="1200" dirty="0"/>
+          </a:p>
+        </p:txBody>
+      </p:sp>
+      <p:sp>
+        <p:nvSpPr>
+          <p:cNvPr id="26" name="Text 23"/>
+          <p:cNvSpPr txBox="1"/>
+          <p:nvPr/>
+        </p:nvSpPr>
+        <p:spPr>
+          <a:xfrm>
+            <a:off x="9253728" y="2624328"/>
+            <a:ext cx="2157984" cy="548640"/>
+          </a:xfrm>
+          <a:prstGeom prst="rect">
+            <a:avLst/>
+          </a:prstGeom>
+          <a:noFill/>
+          <a:ln/>
+        </p:spPr>
+        <p:txBody>
+          <a:bodyPr wrap="square" lIns="0" tIns="0" rIns="0" bIns="0" rtlCol="0" anchor="t"/>
+          <a:lstStyle/>
+          <a:p>
+            <a:pPr marL="0" indent="0">
+              <a:buNone/>
+            </a:pPr>
+            <a:r>
+              <a:rPr lang="en-US" sz="1150" b="1" dirty="0">
+                <a:solidFill>
+                  <a:srgbClr val="6B7280"/>
+                </a:solidFill>
+              </a:rPr>
+              <a:t>What it is  </a:t>
+            </a:r>
+            <a:r>
+              <a:rPr lang="en-US" sz="1150" dirty="0">
+                <a:solidFill>
+                  <a:schemeClr val="tx1"/>
+                </a:solidFill>
+              </a:rPr>
+              <a:t>Models that read the Fed's text and vote</a:t>
+            </a:r>
+            <a:endParaRPr lang="en-US" sz="1150" dirty="0"/>
+          </a:p>
+        </p:txBody>
+      </p:sp>
+      <p:sp>
+        <p:nvSpPr>
+          <p:cNvPr id="27" name="Text 24"/>
+          <p:cNvSpPr txBox="1"/>
+          <p:nvPr/>
+        </p:nvSpPr>
+        <p:spPr>
+          <a:xfrm>
+            <a:off x="9253728" y="3191256"/>
+            <a:ext cx="2157984" cy="530352"/>
+          </a:xfrm>
+          <a:prstGeom prst="rect">
+            <a:avLst/>
+          </a:prstGeom>
+          <a:noFill/>
+          <a:ln/>
+        </p:spPr>
+        <p:txBody>
+          <a:bodyPr wrap="square" lIns="0" tIns="0" rIns="0" bIns="0" rtlCol="0" anchor="t"/>
+          <a:lstStyle/>
+          <a:p>
+            <a:pPr marL="0" indent="0">
+              <a:buNone/>
+            </a:pPr>
+            <a:r>
+              <a:rPr lang="en-US" sz="1150" b="1" dirty="0">
+                <a:solidFill>
+                  <a:srgbClr val="6B7280"/>
+                </a:solidFill>
+              </a:rPr>
+              <a:t>Strength  </a:t>
+            </a:r>
+            <a:r>
+              <a:rPr lang="en-US" sz="1150" dirty="0">
+                <a:solidFill>
+                  <a:schemeClr val="tx1"/>
+                </a:solidFill>
+              </a:rPr>
+              <a:t>Reported 90%+ accuracy on 2023 to 2024</a:t>
+            </a:r>
+            <a:endParaRPr lang="en-US" sz="1150" dirty="0"/>
+          </a:p>
+        </p:txBody>
+      </p:sp>
+      <p:sp>
+        <p:nvSpPr>
+          <p:cNvPr id="28" name="Shape 25"/>
+          <p:cNvSpPr/>
+          <p:nvPr/>
+        </p:nvSpPr>
+        <p:spPr>
+          <a:xfrm>
+            <a:off x="731520" y="4553712"/>
+            <a:ext cx="10725912" cy="0"/>
+          </a:xfrm>
+          <a:prstGeom prst="line">
+            <a:avLst/>
+          </a:prstGeom>
+          <a:noFill/>
+          <a:ln w="22225">
+            <a:solidFill>
+              <a:srgbClr val="6B7280"/>
+            </a:solidFill>
+            <a:prstDash val="solid"/>
+            <a:headEnd type="triangle"/>
+            <a:tailEnd type="triangle"/>
+          </a:ln>
+        </p:spPr>
+        <p:txBody>
+          <a:bodyPr/>
+          <a:lstStyle/>
+          <a:p>
+            <a:endParaRPr lang="en-US"/>
+          </a:p>
+        </p:txBody>
+      </p:sp>
+      <p:sp>
+        <p:nvSpPr>
+          <p:cNvPr id="29" name="Text 26"/>
+          <p:cNvSpPr txBox="1"/>
+          <p:nvPr/>
+        </p:nvSpPr>
+        <p:spPr>
+          <a:xfrm>
+            <a:off x="548640" y="4663440"/>
+            <a:ext cx="2194560" cy="274320"/>
+          </a:xfrm>
+          <a:prstGeom prst="rect">
+            <a:avLst/>
+          </a:prstGeom>
+          <a:noFill/>
+          <a:ln/>
+        </p:spPr>
+        <p:txBody>
+          <a:bodyPr wrap="square" lIns="0" tIns="0" rIns="0" bIns="0" rtlCol="0" anchor="t"/>
+          <a:lstStyle/>
+          <a:p>
+            <a:pPr marL="0" indent="0">
+              <a:buNone/>
+            </a:pPr>
+            <a:r>
+              <a:rPr lang="en-US" sz="1200" b="1" dirty="0">
+                <a:solidFill>
+                  <a:schemeClr val="accent4"/>
+                </a:solidFill>
+              </a:rPr>
+              <a:t>Pure data</a:t>
+            </a:r>
+            <a:endParaRPr lang="en-US" sz="1200" dirty="0"/>
+          </a:p>
+        </p:txBody>
+      </p:sp>
+      <p:sp>
+        <p:nvSpPr>
+          <p:cNvPr id="30" name="Text 27"/>
+          <p:cNvSpPr txBox="1"/>
+          <p:nvPr/>
+        </p:nvSpPr>
+        <p:spPr>
+          <a:xfrm>
+            <a:off x="548640" y="4919472"/>
+            <a:ext cx="2377440" cy="457200"/>
+          </a:xfrm>
+          <a:prstGeom prst="rect">
+            <a:avLst/>
+          </a:prstGeom>
+          <a:noFill/>
+          <a:ln/>
+        </p:spPr>
+        <p:txBody>
+          <a:bodyPr wrap="square" lIns="0" tIns="0" rIns="0" bIns="0" rtlCol="0" anchor="t"/>
+          <a:lstStyle/>
+          <a:p>
+            <a:pPr marL="0" indent="0">
+              <a:buNone/>
+            </a:pPr>
+            <a:r>
+              <a:rPr lang="en-US" sz="1050" dirty="0">
+                <a:solidFill>
+                  <a:schemeClr val="accent4"/>
+                </a:solidFill>
+              </a:rPr>
+              <a:t>prices and formulas; no reading of the Fed's words</a:t>
+            </a:r>
+            <a:endParaRPr lang="en-US" sz="1050" dirty="0"/>
+          </a:p>
+        </p:txBody>
+      </p:sp>
+      <p:sp>
+        <p:nvSpPr>
+          <p:cNvPr id="31" name="Text 28"/>
+          <p:cNvSpPr txBox="1"/>
+          <p:nvPr/>
+        </p:nvSpPr>
+        <p:spPr>
+          <a:xfrm>
+            <a:off x="9445752" y="4663440"/>
+            <a:ext cx="2194560" cy="274320"/>
+          </a:xfrm>
+          <a:prstGeom prst="rect">
+            <a:avLst/>
+          </a:prstGeom>
+          <a:noFill/>
+          <a:ln/>
+        </p:spPr>
+        <p:txBody>
+          <a:bodyPr wrap="square" lIns="0" tIns="0" rIns="0" bIns="0" rtlCol="0" anchor="t"/>
+          <a:lstStyle/>
+          <a:p>
+            <a:pPr marL="0" indent="0" algn="r">
+              <a:buNone/>
+            </a:pPr>
+            <a:r>
+              <a:rPr lang="en-US" sz="1200" b="1" dirty="0">
+                <a:solidFill>
+                  <a:schemeClr val="accent4"/>
+                </a:solidFill>
+              </a:rPr>
+              <a:t>Pure model</a:t>
+            </a:r>
+            <a:endParaRPr lang="en-US" sz="1200" dirty="0"/>
+          </a:p>
+        </p:txBody>
+      </p:sp>
+      <p:sp>
+        <p:nvSpPr>
+          <p:cNvPr id="32" name="Text 29"/>
+          <p:cNvSpPr txBox="1"/>
+          <p:nvPr/>
+        </p:nvSpPr>
+        <p:spPr>
+          <a:xfrm>
+            <a:off x="9262872" y="4919472"/>
+            <a:ext cx="2377440" cy="457200"/>
+          </a:xfrm>
+          <a:prstGeom prst="rect">
+            <a:avLst/>
+          </a:prstGeom>
+          <a:noFill/>
+          <a:ln/>
+        </p:spPr>
+        <p:txBody>
+          <a:bodyPr wrap="square" lIns="0" tIns="0" rIns="0" bIns="0" rtlCol="0" anchor="t"/>
+          <a:lstStyle/>
+          <a:p>
+            <a:pPr marL="0" indent="0" algn="r">
+              <a:buNone/>
+            </a:pPr>
+            <a:r>
+              <a:rPr lang="en-US" sz="1050" dirty="0">
+                <a:solidFill>
+                  <a:schemeClr val="accent4"/>
+                </a:solidFill>
+              </a:rPr>
+              <a:t>one model's judgement; nothing it reads is checked</a:t>
+            </a:r>
+            <a:endParaRPr lang="en-US" sz="1050" dirty="0"/>
+          </a:p>
+        </p:txBody>
+      </p:sp>
+      <p:sp>
+        <p:nvSpPr>
+          <p:cNvPr id="33" name="Shape 30"/>
+          <p:cNvSpPr/>
+          <p:nvPr/>
+        </p:nvSpPr>
+        <p:spPr>
+          <a:xfrm>
+            <a:off x="1819930" y="4462272"/>
+            <a:ext cx="182880" cy="182880"/>
+          </a:xfrm>
+          <a:prstGeom prst="ellipse">
+            <a:avLst/>
+          </a:prstGeom>
+          <a:solidFill>
+            <a:srgbClr val="1E2761"/>
+          </a:solidFill>
+          <a:ln w="12700">
+            <a:solidFill>
+              <a:srgbClr val="FFFFFF"/>
+            </a:solidFill>
+            <a:prstDash val="solid"/>
+          </a:ln>
+        </p:spPr>
+        <p:txBody>
+          <a:bodyPr/>
+          <a:lstStyle/>
+          <a:p>
+            <a:endParaRPr lang="en-US"/>
+          </a:p>
+        </p:txBody>
+      </p:sp>
+      <p:sp>
+        <p:nvSpPr>
+          <p:cNvPr id="34" name="Text 31"/>
+          <p:cNvSpPr txBox="1"/>
+          <p:nvPr/>
+        </p:nvSpPr>
+        <p:spPr>
+          <a:xfrm>
+            <a:off x="859810" y="4078224"/>
+            <a:ext cx="2103120" cy="274320"/>
+          </a:xfrm>
+          <a:prstGeom prst="rect">
+            <a:avLst/>
+          </a:prstGeom>
+          <a:noFill/>
+          <a:ln/>
+        </p:spPr>
+        <p:txBody>
+          <a:bodyPr wrap="square" lIns="0" tIns="0" rIns="0" bIns="0" rtlCol="0" anchor="b"/>
+          <a:lstStyle/>
+          <a:p>
+            <a:pPr marL="0" indent="0" algn="ctr">
+              <a:buNone/>
+            </a:pPr>
+            <a:r>
+              <a:rPr lang="en-US" sz="1150" b="1" dirty="0">
+                <a:solidFill>
+                  <a:schemeClr val="tx1"/>
+                </a:solidFill>
+              </a:rPr>
+              <a:t>Futures, prediction markets</a:t>
+            </a:r>
+            <a:endParaRPr lang="en-US" sz="1150" dirty="0"/>
+          </a:p>
+        </p:txBody>
+      </p:sp>
+      <p:sp>
+        <p:nvSpPr>
+          <p:cNvPr id="35" name="Shape 32"/>
+          <p:cNvSpPr/>
+          <p:nvPr/>
+        </p:nvSpPr>
+        <p:spPr>
+          <a:xfrm>
+            <a:off x="3857854" y="4462272"/>
+            <a:ext cx="182880" cy="182880"/>
+          </a:xfrm>
+          <a:prstGeom prst="ellipse">
             <a:avLst/>
           </a:prstGeom>
           <a:solidFill>
@@ -23118,7 +26231,7 @@
           </a:solidFill>
           <a:ln w="12700">
             <a:solidFill>
-              <a:srgbClr val="E9B44C"/>
+              <a:srgbClr val="FFFFFF"/>
             </a:solidFill>
             <a:prstDash val="solid"/>
           </a:ln>
@@ -23133,14 +26246,14 @@
       </p:sp>
       <p:sp>
         <p:nvSpPr>
-          <p:cNvPr id="18" name="Text 15"/>
+          <p:cNvPr id="36" name="Text 33"/>
           <p:cNvSpPr txBox="1"/>
           <p:nvPr/>
         </p:nvSpPr>
         <p:spPr>
           <a:xfrm>
-            <a:off x="6656832" y="1581912"/>
-            <a:ext cx="1975104" cy="365760"/>
+            <a:off x="2897734" y="4078224"/>
+            <a:ext cx="2103120" cy="274320"/>
           </a:xfrm>
           <a:prstGeom prst="rect">
             <a:avLst/>
@@ -23149,6 +26262,317 @@
           <a:ln/>
         </p:spPr>
         <p:txBody>
+          <a:bodyPr wrap="square" lIns="0" tIns="0" rIns="0" bIns="0" rtlCol="0" anchor="b"/>
+          <a:lstStyle/>
+          <a:p>
+            <a:pPr marL="0" indent="0" algn="ctr">
+              <a:buNone/>
+            </a:pPr>
+            <a:r>
+              <a:rPr lang="en-US" sz="1150" b="1" dirty="0">
+                <a:solidFill>
+                  <a:schemeClr val="tx1"/>
+                </a:solidFill>
+              </a:rPr>
+              <a:t>Policy rules</a:t>
+            </a:r>
+            <a:endParaRPr lang="en-US" sz="1150" dirty="0"/>
+          </a:p>
+        </p:txBody>
+      </p:sp>
+      <p:sp>
+        <p:nvSpPr>
+          <p:cNvPr id="37" name="Shape 34"/>
+          <p:cNvSpPr/>
+          <p:nvPr/>
+        </p:nvSpPr>
+        <p:spPr>
+          <a:xfrm>
+            <a:off x="8148218" y="4462272"/>
+            <a:ext cx="182880" cy="182880"/>
+          </a:xfrm>
+          <a:prstGeom prst="ellipse">
+            <a:avLst/>
+          </a:prstGeom>
+          <a:solidFill>
+            <a:srgbClr val="2C6E49"/>
+          </a:solidFill>
+          <a:ln w="12700">
+            <a:solidFill>
+              <a:srgbClr val="FFFFFF"/>
+            </a:solidFill>
+            <a:prstDash val="solid"/>
+          </a:ln>
+        </p:spPr>
+        <p:txBody>
+          <a:bodyPr/>
+          <a:lstStyle/>
+          <a:p>
+            <a:endParaRPr lang="en-US"/>
+          </a:p>
+        </p:txBody>
+      </p:sp>
+      <p:sp>
+        <p:nvSpPr>
+          <p:cNvPr id="38" name="Text 35"/>
+          <p:cNvSpPr txBox="1"/>
+          <p:nvPr/>
+        </p:nvSpPr>
+        <p:spPr>
+          <a:xfrm>
+            <a:off x="7188098" y="4078224"/>
+            <a:ext cx="2103120" cy="274320"/>
+          </a:xfrm>
+          <a:prstGeom prst="rect">
+            <a:avLst/>
+          </a:prstGeom>
+          <a:noFill/>
+          <a:ln/>
+        </p:spPr>
+        <p:txBody>
+          <a:bodyPr wrap="square" lIns="0" tIns="0" rIns="0" bIns="0" rtlCol="0" anchor="b"/>
+          <a:lstStyle/>
+          <a:p>
+            <a:pPr marL="0" indent="0" algn="ctr">
+              <a:buNone/>
+            </a:pPr>
+            <a:r>
+              <a:rPr lang="en-US" sz="1150" b="1" dirty="0">
+                <a:solidFill>
+                  <a:schemeClr val="tx1"/>
+                </a:solidFill>
+              </a:rPr>
+              <a:t>Economist surveys</a:t>
+            </a:r>
+            <a:endParaRPr lang="en-US" sz="1150" dirty="0"/>
+          </a:p>
+        </p:txBody>
+      </p:sp>
+      <p:sp>
+        <p:nvSpPr>
+          <p:cNvPr id="39" name="Shape 36"/>
+          <p:cNvSpPr/>
+          <p:nvPr/>
+        </p:nvSpPr>
+        <p:spPr>
+          <a:xfrm>
+            <a:off x="10293401" y="4462272"/>
+            <a:ext cx="182880" cy="182880"/>
+          </a:xfrm>
+          <a:prstGeom prst="ellipse">
+            <a:avLst/>
+          </a:prstGeom>
+          <a:solidFill>
+            <a:srgbClr val="C8553D"/>
+          </a:solidFill>
+          <a:ln w="12700">
+            <a:solidFill>
+              <a:srgbClr val="FFFFFF"/>
+            </a:solidFill>
+            <a:prstDash val="solid"/>
+          </a:ln>
+        </p:spPr>
+        <p:txBody>
+          <a:bodyPr/>
+          <a:lstStyle/>
+          <a:p>
+            <a:endParaRPr lang="en-US"/>
+          </a:p>
+        </p:txBody>
+      </p:sp>
+      <p:sp>
+        <p:nvSpPr>
+          <p:cNvPr id="40" name="Text 37"/>
+          <p:cNvSpPr txBox="1"/>
+          <p:nvPr/>
+        </p:nvSpPr>
+        <p:spPr>
+          <a:xfrm>
+            <a:off x="9333281" y="4078224"/>
+            <a:ext cx="2103120" cy="274320"/>
+          </a:xfrm>
+          <a:prstGeom prst="rect">
+            <a:avLst/>
+          </a:prstGeom>
+          <a:noFill/>
+          <a:ln/>
+        </p:spPr>
+        <p:txBody>
+          <a:bodyPr wrap="square" lIns="0" tIns="0" rIns="0" bIns="0" rtlCol="0" anchor="b"/>
+          <a:lstStyle/>
+          <a:p>
+            <a:pPr marL="0" indent="0" algn="ctr">
+              <a:buNone/>
+            </a:pPr>
+            <a:r>
+              <a:rPr lang="en-US" sz="1150" b="1" dirty="0">
+                <a:solidFill>
+                  <a:schemeClr val="tx1"/>
+                </a:solidFill>
+              </a:rPr>
+              <a:t>LLM 'FOMC agents'</a:t>
+            </a:r>
+            <a:endParaRPr lang="en-US" sz="1150" dirty="0"/>
+          </a:p>
+        </p:txBody>
+      </p:sp>
+      <p:sp>
+        <p:nvSpPr>
+          <p:cNvPr id="41" name="Shape 38"/>
+          <p:cNvSpPr/>
+          <p:nvPr/>
+        </p:nvSpPr>
+        <p:spPr>
+          <a:xfrm>
+            <a:off x="6094476" y="4553712"/>
+            <a:ext cx="0" cy="256032"/>
+          </a:xfrm>
+          <a:prstGeom prst="line">
+            <a:avLst/>
+          </a:prstGeom>
+          <a:noFill/>
+          <a:ln w="22225">
+            <a:solidFill>
+              <a:srgbClr val="1E2761"/>
+            </a:solidFill>
+            <a:prstDash val="solid"/>
+          </a:ln>
+        </p:spPr>
+        <p:txBody>
+          <a:bodyPr/>
+          <a:lstStyle/>
+          <a:p>
+            <a:endParaRPr lang="en-US"/>
+          </a:p>
+        </p:txBody>
+      </p:sp>
+      <p:sp>
+        <p:nvSpPr>
+          <p:cNvPr id="42" name="Shape 39"/>
+          <p:cNvSpPr/>
+          <p:nvPr/>
+        </p:nvSpPr>
+        <p:spPr>
+          <a:xfrm>
+            <a:off x="5454396" y="4809744"/>
+            <a:ext cx="1280160" cy="365760"/>
+          </a:xfrm>
+          <a:prstGeom prst="roundRect">
+            <a:avLst>
+              <a:gd name="adj" fmla="val 50000"/>
+            </a:avLst>
+          </a:prstGeom>
+          <a:solidFill>
+            <a:srgbClr val="1E2761"/>
+          </a:solidFill>
+          <a:ln w="12700">
+            <a:solidFill>
+              <a:srgbClr val="1E2761"/>
+            </a:solidFill>
+            <a:prstDash val="solid"/>
+          </a:ln>
+        </p:spPr>
+        <p:txBody>
+          <a:bodyPr/>
+          <a:lstStyle/>
+          <a:p>
+            <a:endParaRPr lang="en-US"/>
+          </a:p>
+        </p:txBody>
+      </p:sp>
+      <p:sp>
+        <p:nvSpPr>
+          <p:cNvPr id="43" name="Text 40"/>
+          <p:cNvSpPr txBox="1"/>
+          <p:nvPr/>
+        </p:nvSpPr>
+        <p:spPr>
+          <a:xfrm>
+            <a:off x="5454396" y="4809744"/>
+            <a:ext cx="1280160" cy="365760"/>
+          </a:xfrm>
+          <a:prstGeom prst="rect">
+            <a:avLst/>
+          </a:prstGeom>
+          <a:noFill/>
+          <a:ln/>
+        </p:spPr>
+        <p:txBody>
+          <a:bodyPr wrap="square" lIns="0" tIns="0" rIns="0" bIns="0" rtlCol="0" anchor="ctr"/>
+          <a:lstStyle/>
+          <a:p>
+            <a:pPr marL="0" indent="0" algn="ctr">
+              <a:buNone/>
+            </a:pPr>
+            <a:r>
+              <a:rPr lang="en-US" sz="1300" b="1" dirty="0">
+                <a:solidFill>
+                  <a:schemeClr val="bg1"/>
+                </a:solidFill>
+                <a:latin typeface="Cambria" pitchFamily="34" charset="0"/>
+                <a:ea typeface="Cambria" pitchFamily="34" charset="-122"/>
+                <a:cs typeface="Cambria" pitchFamily="34" charset="-120"/>
+              </a:rPr>
+              <a:t>FedCast</a:t>
+            </a:r>
+            <a:endParaRPr lang="en-US" sz="1300" dirty="0"/>
+          </a:p>
+        </p:txBody>
+      </p:sp>
+      <p:sp>
+        <p:nvSpPr>
+          <p:cNvPr id="44" name="Text 41"/>
+          <p:cNvSpPr txBox="1"/>
+          <p:nvPr/>
+        </p:nvSpPr>
+        <p:spPr>
+          <a:xfrm>
+            <a:off x="2528316" y="5285232"/>
+            <a:ext cx="7132320" cy="548640"/>
+          </a:xfrm>
+          <a:prstGeom prst="rect">
+            <a:avLst/>
+          </a:prstGeom>
+          <a:noFill/>
+          <a:ln/>
+        </p:spPr>
+        <p:txBody>
+          <a:bodyPr wrap="square" lIns="0" tIns="0" rIns="0" bIns="0" rtlCol="0" anchor="t"/>
+          <a:lstStyle/>
+          <a:p>
+            <a:pPr marL="0" indent="0" algn="ctr">
+              <a:buNone/>
+            </a:pPr>
+            <a:r>
+              <a:rPr lang="en-US" sz="1150" dirty="0">
+                <a:solidFill>
+                  <a:schemeClr val="tx1"/>
+                </a:solidFill>
+              </a:rPr>
+              <a:t>Takes one input from each area, prices, 32 years of decisions, the Fed's own rules and a language model that must quote what it reads, and combines them by code at fixed weights. Neither a formula nor an oracle.</a:t>
+            </a:r>
+            <a:endParaRPr lang="en-US" sz="1150" dirty="0"/>
+          </a:p>
+        </p:txBody>
+      </p:sp>
+      <p:sp>
+        <p:nvSpPr>
+          <p:cNvPr id="45" name="Text 42"/>
+          <p:cNvSpPr txBox="1"/>
+          <p:nvPr/>
+        </p:nvSpPr>
+        <p:spPr>
+          <a:xfrm>
+            <a:off x="548640" y="6053328"/>
+            <a:ext cx="11091672" cy="274320"/>
+          </a:xfrm>
+          <a:prstGeom prst="rect">
+            <a:avLst/>
+          </a:prstGeom>
+          <a:noFill/>
+          <a:ln/>
+        </p:spPr>
+        <p:txBody>
           <a:bodyPr wrap="square" lIns="0" tIns="0" rIns="0" bIns="0" rtlCol="0" anchor="t"/>
           <a:lstStyle/>
           <a:p>
@@ -23156,27 +26580,391 @@
               <a:buNone/>
             </a:pPr>
             <a:r>
-              <a:rPr lang="en-US" sz="1500" b="1" dirty="0">
-                <a:solidFill>
-                  <a:schemeClr val="tx2"/>
-                </a:solidFill>
-              </a:rPr>
-              <a:t>Policy rules</a:t>
-            </a:r>
-            <a:endParaRPr lang="en-US" sz="1500" dirty="0"/>
-          </a:p>
-        </p:txBody>
-      </p:sp>
-      <p:sp>
-        <p:nvSpPr>
-          <p:cNvPr id="19" name="Text 16"/>
-          <p:cNvSpPr txBox="1"/>
-          <p:nvPr/>
-        </p:nvSpPr>
-        <p:spPr>
-          <a:xfrm>
-            <a:off x="6428232" y="2039112"/>
-            <a:ext cx="2157984" cy="566928"/>
+              <a:rPr lang="en-US" sz="950" dirty="0">
+                <a:solidFill>
+                  <a:schemeClr val="accent4"/>
+                </a:solidFill>
+              </a:rPr>
+              <a:t>Sources: Bonini, Huang and Simaan, 'Watching the FedWatch' (232 meetings, May 1994 to March 2024); FedSight AI preprint, December 2025; Takano, Hirano and Nakagawa, arXiv 2511.02469.</a:t>
+            </a:r>
+            <a:endParaRPr lang="en-US" sz="950" dirty="0"/>
+          </a:p>
+        </p:txBody>
+      </p:sp>
+      <p:sp>
+        <p:nvSpPr>
+          <p:cNvPr id="3" name="Slide Number Placeholder 0"/>
+          <p:cNvSpPr>
+            <a:spLocks noGrp="1"/>
+          </p:cNvSpPr>
+          <p:nvPr>
+            <p:ph type="sldNum" sz="quarter" idx="4294967295"/>
+          </p:nvPr>
+        </p:nvSpPr>
+        <p:spPr>
+          <a:xfrm>
+            <a:off x="11091672" y="6400800"/>
+            <a:ext cx="548640" cy="274320"/>
+          </a:xfrm>
+          <a:prstGeom prst="rect">
+            <a:avLst/>
+          </a:prstGeom>
+          <a:extLst>
+            <a:ext uri="{C572A759-6A51-4108-AA02-DFA0A04FC94B}">
+              <ma14:wrappingTextBoxFlag xmlns="" xmlns:ma14="http://schemas.microsoft.com/office/mac/drawingml/2011/main" val="0"/>
+            </a:ext>
+          </a:extLst>
+        </p:spPr>
+        <p:txBody>
+          <a:bodyPr/>
+          <a:lstStyle>
+            <a:lvl1pPr>
+              <a:defRPr sz="1000">
+                <a:solidFill>
+                  <a:srgbClr val="6B7280"/>
+                </a:solidFill>
+              </a:defRPr>
+            </a:lvl1pPr>
+          </a:lstStyle>
+          <a:p>
+            <a:pPr algn="r"/>
+            <a:fld id="{F7021451-1387-4CA6-816F-3879F97B5CBC}" type="slidenum">
+              <a:rPr lang="en-US" b="0"/>
+              <a:t>6</a:t>
+            </a:fld>
+            <a:endParaRPr lang="en-US"/>
+          </a:p>
+        </p:txBody>
+      </p:sp>
+      <p:grpSp>
+        <p:nvGrpSpPr>
+          <p:cNvPr id="58" name="Group 57">
+            <a:extLst>
+              <a:ext uri="{FF2B5EF4-FFF2-40B4-BE49-F238E27FC236}">
+                <a16:creationId xmlns:a16="http://schemas.microsoft.com/office/drawing/2014/main" id="{A802D491-A62F-1162-BFE9-FD3D35327ADB}"/>
+              </a:ext>
+            </a:extLst>
+          </p:cNvPr>
+          <p:cNvGrpSpPr/>
+          <p:nvPr/>
+        </p:nvGrpSpPr>
+        <p:grpSpPr>
+          <a:xfrm>
+            <a:off x="3391314" y="1435608"/>
+            <a:ext cx="2615184" cy="2331720"/>
+            <a:chOff x="13899460" y="984504"/>
+            <a:chExt cx="2615184" cy="2331720"/>
+          </a:xfrm>
+        </p:grpSpPr>
+        <p:sp>
+          <p:nvSpPr>
+            <p:cNvPr id="47" name="Shape 13">
+              <a:extLst>
+                <a:ext uri="{FF2B5EF4-FFF2-40B4-BE49-F238E27FC236}">
+                  <a16:creationId xmlns:a16="http://schemas.microsoft.com/office/drawing/2014/main" id="{DA25A6FE-F77D-E8A6-20B9-411A7FD3D117}"/>
+                </a:ext>
+              </a:extLst>
+            </p:cNvPr>
+            <p:cNvSpPr/>
+            <p:nvPr/>
+          </p:nvSpPr>
+          <p:spPr>
+            <a:xfrm>
+              <a:off x="13899460" y="984504"/>
+              <a:ext cx="2615184" cy="2331720"/>
+            </a:xfrm>
+            <a:prstGeom prst="roundRect">
+              <a:avLst>
+                <a:gd name="adj" fmla="val 4706"/>
+              </a:avLst>
+            </a:prstGeom>
+            <a:solidFill>
+              <a:srgbClr val="EEF2F7"/>
+            </a:solidFill>
+            <a:ln w="12700">
+              <a:solidFill>
+                <a:srgbClr val="EEF2F7"/>
+              </a:solidFill>
+              <a:prstDash val="solid"/>
+            </a:ln>
+            <a:effectLst>
+              <a:outerShdw blurRad="50800" dist="12700" dir="5400000" algn="bl" rotWithShape="0">
+                <a:srgbClr val="000000">
+                  <a:alpha val="8000"/>
+                </a:srgbClr>
+              </a:outerShdw>
+            </a:effectLst>
+          </p:spPr>
+          <p:txBody>
+            <a:bodyPr/>
+            <a:lstStyle/>
+            <a:p>
+              <a:endParaRPr lang="en-US"/>
+            </a:p>
+          </p:txBody>
+        </p:sp>
+        <p:sp>
+          <p:nvSpPr>
+            <p:cNvPr id="49" name="Shape 14">
+              <a:extLst>
+                <a:ext uri="{FF2B5EF4-FFF2-40B4-BE49-F238E27FC236}">
+                  <a16:creationId xmlns:a16="http://schemas.microsoft.com/office/drawing/2014/main" id="{D3AFCF19-9FC3-1193-08FC-A28D668436ED}"/>
+                </a:ext>
+              </a:extLst>
+            </p:cNvPr>
+            <p:cNvSpPr/>
+            <p:nvPr/>
+          </p:nvSpPr>
+          <p:spPr>
+            <a:xfrm>
+              <a:off x="14128060" y="1258824"/>
+              <a:ext cx="146304" cy="146304"/>
+            </a:xfrm>
+            <a:prstGeom prst="rect">
+              <a:avLst/>
+            </a:prstGeom>
+            <a:solidFill>
+              <a:srgbClr val="E9B44C"/>
+            </a:solidFill>
+            <a:ln w="12700">
+              <a:solidFill>
+                <a:srgbClr val="E9B44C"/>
+              </a:solidFill>
+              <a:prstDash val="solid"/>
+            </a:ln>
+          </p:spPr>
+          <p:txBody>
+            <a:bodyPr/>
+            <a:lstStyle/>
+            <a:p>
+              <a:endParaRPr lang="en-US"/>
+            </a:p>
+          </p:txBody>
+        </p:sp>
+        <p:sp>
+          <p:nvSpPr>
+            <p:cNvPr id="51" name="Text 15">
+              <a:extLst>
+                <a:ext uri="{FF2B5EF4-FFF2-40B4-BE49-F238E27FC236}">
+                  <a16:creationId xmlns:a16="http://schemas.microsoft.com/office/drawing/2014/main" id="{FB0A3ABB-64C9-2CF9-6F24-84DF14C5024C}"/>
+                </a:ext>
+              </a:extLst>
+            </p:cNvPr>
+            <p:cNvSpPr txBox="1"/>
+            <p:nvPr/>
+          </p:nvSpPr>
+          <p:spPr>
+            <a:xfrm>
+              <a:off x="14356660" y="1149096"/>
+              <a:ext cx="1975104" cy="365760"/>
+            </a:xfrm>
+            <a:prstGeom prst="rect">
+              <a:avLst/>
+            </a:prstGeom>
+            <a:noFill/>
+            <a:ln/>
+          </p:spPr>
+          <p:txBody>
+            <a:bodyPr wrap="square" lIns="0" tIns="0" rIns="0" bIns="0" rtlCol="0" anchor="t"/>
+            <a:lstStyle/>
+            <a:p>
+              <a:pPr marL="0" indent="0">
+                <a:buNone/>
+              </a:pPr>
+              <a:r>
+                <a:rPr lang="en-US" sz="1500" b="1" dirty="0">
+                  <a:solidFill>
+                    <a:schemeClr val="tx2"/>
+                  </a:solidFill>
+                </a:rPr>
+                <a:t>Policy rules</a:t>
+              </a:r>
+              <a:endParaRPr lang="en-US" sz="1500" dirty="0"/>
+            </a:p>
+          </p:txBody>
+        </p:sp>
+        <p:sp>
+          <p:nvSpPr>
+            <p:cNvPr id="53" name="Text 16">
+              <a:extLst>
+                <a:ext uri="{FF2B5EF4-FFF2-40B4-BE49-F238E27FC236}">
+                  <a16:creationId xmlns:a16="http://schemas.microsoft.com/office/drawing/2014/main" id="{E1D2F99F-D5EE-908F-CDDA-4E9EC9CA47D7}"/>
+                </a:ext>
+              </a:extLst>
+            </p:cNvPr>
+            <p:cNvSpPr txBox="1"/>
+            <p:nvPr/>
+          </p:nvSpPr>
+          <p:spPr>
+            <a:xfrm>
+              <a:off x="14128060" y="1606296"/>
+              <a:ext cx="2157984" cy="566928"/>
+            </a:xfrm>
+            <a:prstGeom prst="rect">
+              <a:avLst/>
+            </a:prstGeom>
+            <a:noFill/>
+            <a:ln/>
+          </p:spPr>
+          <p:txBody>
+            <a:bodyPr wrap="square" lIns="0" tIns="0" rIns="0" bIns="0" rtlCol="0" anchor="t"/>
+            <a:lstStyle/>
+            <a:p>
+              <a:pPr marL="0" indent="0">
+                <a:buNone/>
+              </a:pPr>
+              <a:r>
+                <a:rPr lang="en-US" sz="1200" b="1" dirty="0">
+                  <a:solidFill>
+                    <a:schemeClr val="tx1"/>
+                  </a:solidFill>
+                </a:rPr>
+                <a:t>The Taylor family</a:t>
+              </a:r>
+              <a:endParaRPr lang="en-US" sz="1200" dirty="0"/>
+            </a:p>
+          </p:txBody>
+        </p:sp>
+        <p:sp>
+          <p:nvSpPr>
+            <p:cNvPr id="55" name="Text 17">
+              <a:extLst>
+                <a:ext uri="{FF2B5EF4-FFF2-40B4-BE49-F238E27FC236}">
+                  <a16:creationId xmlns:a16="http://schemas.microsoft.com/office/drawing/2014/main" id="{90EEBB27-F1D1-537C-DB2F-09A602414014}"/>
+                </a:ext>
+              </a:extLst>
+            </p:cNvPr>
+            <p:cNvSpPr txBox="1"/>
+            <p:nvPr/>
+          </p:nvSpPr>
+          <p:spPr>
+            <a:xfrm>
+              <a:off x="14128060" y="2191512"/>
+              <a:ext cx="2157984" cy="548640"/>
+            </a:xfrm>
+            <a:prstGeom prst="rect">
+              <a:avLst/>
+            </a:prstGeom>
+            <a:noFill/>
+            <a:ln/>
+          </p:spPr>
+          <p:txBody>
+            <a:bodyPr wrap="square" lIns="0" tIns="0" rIns="0" bIns="0" rtlCol="0" anchor="t"/>
+            <a:lstStyle/>
+            <a:p>
+              <a:pPr marL="0" indent="0">
+                <a:buNone/>
+              </a:pPr>
+              <a:r>
+                <a:rPr lang="en-US" sz="1150" b="1" dirty="0">
+                  <a:solidFill>
+                    <a:srgbClr val="6B7280"/>
+                  </a:solidFill>
+                </a:rPr>
+                <a:t>What it is  </a:t>
+              </a:r>
+              <a:r>
+                <a:rPr lang="en-US" sz="1150" dirty="0">
+                  <a:solidFill>
+                    <a:schemeClr val="tx1"/>
+                  </a:solidFill>
+                </a:rPr>
+                <a:t>The rate a formula says is appropriate given inflation and unemployment</a:t>
+              </a:r>
+              <a:endParaRPr lang="en-US" sz="1150" dirty="0"/>
+            </a:p>
+          </p:txBody>
+        </p:sp>
+        <p:sp>
+          <p:nvSpPr>
+            <p:cNvPr id="57" name="Text 18">
+              <a:extLst>
+                <a:ext uri="{FF2B5EF4-FFF2-40B4-BE49-F238E27FC236}">
+                  <a16:creationId xmlns:a16="http://schemas.microsoft.com/office/drawing/2014/main" id="{B2779653-131A-CB7F-E507-2EED87363D23}"/>
+                </a:ext>
+              </a:extLst>
+            </p:cNvPr>
+            <p:cNvSpPr txBox="1"/>
+            <p:nvPr/>
+          </p:nvSpPr>
+          <p:spPr>
+            <a:xfrm>
+              <a:off x="14128060" y="2758440"/>
+              <a:ext cx="2157984" cy="530352"/>
+            </a:xfrm>
+            <a:prstGeom prst="rect">
+              <a:avLst/>
+            </a:prstGeom>
+            <a:noFill/>
+            <a:ln/>
+          </p:spPr>
+          <p:txBody>
+            <a:bodyPr wrap="square" lIns="0" tIns="0" rIns="0" bIns="0" rtlCol="0" anchor="t"/>
+            <a:lstStyle/>
+            <a:p>
+              <a:pPr marL="0" indent="0">
+                <a:buNone/>
+              </a:pPr>
+              <a:r>
+                <a:rPr lang="en-US" sz="1150" b="1" dirty="0">
+                  <a:solidFill>
+                    <a:srgbClr val="6B7280"/>
+                  </a:solidFill>
+                </a:rPr>
+                <a:t>Strength  </a:t>
+              </a:r>
+              <a:r>
+                <a:rPr lang="en-US" sz="1150" dirty="0">
+                  <a:solidFill>
+                    <a:schemeClr val="tx1"/>
+                  </a:solidFill>
+                </a:rPr>
+                <a:t>Transparent; the Fed's own published benchmarks</a:t>
+              </a:r>
+              <a:endParaRPr lang="en-US" sz="1150" dirty="0"/>
+            </a:p>
+          </p:txBody>
+        </p:sp>
+      </p:grpSp>
+    </p:spTree>
+  </p:cSld>
+  <p:clrMapOvr>
+    <a:masterClrMapping/>
+  </p:clrMapOvr>
+</p:sld>
+</file>
+
+<file path=ppt/slides/slide7.xml><?xml version="1.0" encoding="utf-8"?>
+<p:sld xmlns:a="http://schemas.openxmlformats.org/drawingml/2006/main" xmlns:r="http://schemas.openxmlformats.org/officeDocument/2006/relationships" xmlns:p="http://schemas.openxmlformats.org/presentationml/2006/main">
+  <p:cSld name="Slide 5">
+    <p:spTree>
+      <p:nvGrpSpPr>
+        <p:cNvPr id="1" name=""/>
+        <p:cNvGrpSpPr/>
+        <p:nvPr/>
+      </p:nvGrpSpPr>
+      <p:grpSpPr>
+        <a:xfrm>
+          <a:off x="0" y="0"/>
+          <a:ext cx="0" cy="0"/>
+          <a:chOff x="0" y="0"/>
+          <a:chExt cx="0" cy="0"/>
+        </a:xfrm>
+      </p:grpSpPr>
+      <p:sp>
+        <p:nvSpPr>
+          <p:cNvPr id="2" name="Text 0"/>
+          <p:cNvSpPr>
+            <a:spLocks noGrp="1"/>
+          </p:cNvSpPr>
+          <p:nvPr>
+            <p:ph type="title" idx="100" hasCustomPrompt="1"/>
+          </p:nvPr>
+        </p:nvSpPr>
+        <p:spPr>
+          <a:xfrm>
+            <a:off x="548640" y="411480"/>
+            <a:ext cx="11091672" cy="822960"/>
           </a:xfrm>
           <a:prstGeom prst="rect">
             <a:avLst/>
@@ -23185,126 +26973,38 @@
           <a:ln/>
         </p:spPr>
         <p:txBody>
-          <a:bodyPr wrap="square" lIns="0" tIns="0" rIns="0" bIns="0" rtlCol="0" anchor="t"/>
-          <a:lstStyle/>
-          <a:p>
-            <a:pPr marL="0" indent="0">
+          <a:bodyPr wrap="square" lIns="0" tIns="0" rIns="0" bIns="0" rtlCol="0" anchor="ctr"/>
+          <a:lstStyle/>
+          <a:p>
+            <a:pPr marL="0" indent="0" algn="l">
               <a:buNone/>
             </a:pPr>
             <a:r>
-              <a:rPr lang="en-US" sz="1200" b="1" dirty="0">
-                <a:solidFill>
-                  <a:schemeClr val="tx1"/>
-                </a:solidFill>
-              </a:rPr>
-              <a:t>The Taylor family</a:t>
-            </a:r>
-            <a:endParaRPr lang="en-US" sz="1200" dirty="0"/>
-          </a:p>
-        </p:txBody>
-      </p:sp>
-      <p:sp>
-        <p:nvSpPr>
-          <p:cNvPr id="20" name="Text 17"/>
-          <p:cNvSpPr txBox="1"/>
-          <p:nvPr/>
-        </p:nvSpPr>
-        <p:spPr>
-          <a:xfrm>
-            <a:off x="6428232" y="2624328"/>
-            <a:ext cx="2157984" cy="548640"/>
-          </a:xfrm>
-          <a:prstGeom prst="rect">
-            <a:avLst/>
-          </a:prstGeom>
-          <a:noFill/>
-          <a:ln/>
-        </p:spPr>
-        <p:txBody>
-          <a:bodyPr wrap="square" lIns="0" tIns="0" rIns="0" bIns="0" rtlCol="0" anchor="t"/>
-          <a:lstStyle/>
-          <a:p>
-            <a:pPr marL="0" indent="0">
-              <a:buNone/>
-            </a:pPr>
-            <a:r>
-              <a:rPr lang="en-US" sz="1150" b="1" dirty="0">
-                <a:solidFill>
-                  <a:srgbClr val="6B7280"/>
-                </a:solidFill>
-              </a:rPr>
-              <a:t>What it is  </a:t>
-            </a:r>
-            <a:r>
-              <a:rPr lang="en-US" sz="1150" dirty="0">
-                <a:solidFill>
-                  <a:schemeClr val="tx1"/>
-                </a:solidFill>
-              </a:rPr>
-              <a:t>The rate a formula says is appropriate given inflation and unemployment</a:t>
-            </a:r>
-            <a:endParaRPr lang="en-US" sz="1150" dirty="0"/>
-          </a:p>
-        </p:txBody>
-      </p:sp>
-      <p:sp>
-        <p:nvSpPr>
-          <p:cNvPr id="21" name="Text 18"/>
-          <p:cNvSpPr txBox="1"/>
-          <p:nvPr/>
-        </p:nvSpPr>
-        <p:spPr>
-          <a:xfrm>
-            <a:off x="6428232" y="3191256"/>
-            <a:ext cx="2157984" cy="530352"/>
-          </a:xfrm>
-          <a:prstGeom prst="rect">
-            <a:avLst/>
-          </a:prstGeom>
-          <a:noFill/>
-          <a:ln/>
-        </p:spPr>
-        <p:txBody>
-          <a:bodyPr wrap="square" lIns="0" tIns="0" rIns="0" bIns="0" rtlCol="0" anchor="t"/>
-          <a:lstStyle/>
-          <a:p>
-            <a:pPr marL="0" indent="0">
-              <a:buNone/>
-            </a:pPr>
-            <a:r>
-              <a:rPr lang="en-US" sz="1150" b="1" dirty="0">
-                <a:solidFill>
-                  <a:srgbClr val="6B7280"/>
-                </a:solidFill>
-              </a:rPr>
-              <a:t>Strength  </a:t>
-            </a:r>
-            <a:r>
-              <a:rPr lang="en-US" sz="1150" dirty="0">
-                <a:solidFill>
-                  <a:schemeClr val="tx1"/>
-                </a:solidFill>
-              </a:rPr>
-              <a:t>Transparent; the Fed's own published benchmarks</a:t>
-            </a:r>
-            <a:endParaRPr lang="en-US" sz="1150" dirty="0"/>
-          </a:p>
-        </p:txBody>
-      </p:sp>
-      <p:sp>
-        <p:nvSpPr>
-          <p:cNvPr id="22" name="Shape 19"/>
+              <a:rPr lang="en-US" sz="3200" b="1" dirty="0">
+                <a:solidFill>
+                  <a:schemeClr val="tx2"/>
+                </a:solidFill>
+              </a:rPr>
+              <a:t>Why this approach ?</a:t>
+            </a:r>
+            <a:endParaRPr lang="en-US" sz="3200" dirty="0"/>
+          </a:p>
+        </p:txBody>
+      </p:sp>
+      <p:sp>
+        <p:nvSpPr>
+          <p:cNvPr id="4" name="Shape 1"/>
           <p:cNvSpPr/>
           <p:nvPr/>
         </p:nvSpPr>
         <p:spPr>
           <a:xfrm>
-            <a:off x="9025128" y="1417320"/>
-            <a:ext cx="2615184" cy="2331720"/>
+            <a:off x="548640" y="1417320"/>
+            <a:ext cx="3520440" cy="3977640"/>
           </a:xfrm>
           <a:prstGeom prst="roundRect">
             <a:avLst>
-              <a:gd name="adj" fmla="val 4706"/>
+              <a:gd name="adj" fmla="val 3117"/>
             </a:avLst>
           </a:prstGeom>
           <a:solidFill>
@@ -23334,689 +27034,17 @@
       </p:sp>
       <p:sp>
         <p:nvSpPr>
-          <p:cNvPr id="23" name="Shape 20"/>
+          <p:cNvPr id="5" name="Shape 2"/>
           <p:cNvSpPr/>
           <p:nvPr/>
         </p:nvSpPr>
         <p:spPr>
           <a:xfrm>
-            <a:off x="9253728" y="1691640"/>
-            <a:ext cx="146304" cy="146304"/>
-          </a:xfrm>
-          <a:prstGeom prst="rect">
-            <a:avLst/>
-          </a:prstGeom>
-          <a:solidFill>
-            <a:srgbClr val="C8553D"/>
-          </a:solidFill>
-          <a:ln w="12700">
-            <a:solidFill>
-              <a:srgbClr val="C8553D"/>
-            </a:solidFill>
-            <a:prstDash val="solid"/>
-          </a:ln>
-        </p:spPr>
-        <p:txBody>
-          <a:bodyPr/>
-          <a:lstStyle/>
-          <a:p>
-            <a:endParaRPr lang="en-US"/>
-          </a:p>
-        </p:txBody>
-      </p:sp>
-      <p:sp>
-        <p:nvSpPr>
-          <p:cNvPr id="24" name="Text 21"/>
-          <p:cNvSpPr txBox="1"/>
-          <p:nvPr/>
-        </p:nvSpPr>
-        <p:spPr>
-          <a:xfrm>
-            <a:off x="9482328" y="1581912"/>
-            <a:ext cx="1975104" cy="365760"/>
-          </a:xfrm>
-          <a:prstGeom prst="rect">
-            <a:avLst/>
-          </a:prstGeom>
-          <a:noFill/>
-          <a:ln/>
-        </p:spPr>
-        <p:txBody>
-          <a:bodyPr wrap="square" lIns="0" tIns="0" rIns="0" bIns="0" rtlCol="0" anchor="t"/>
-          <a:lstStyle/>
-          <a:p>
-            <a:pPr marL="0" indent="0">
-              <a:buNone/>
-            </a:pPr>
-            <a:r>
-              <a:rPr lang="en-US" sz="1500" b="1" dirty="0">
-                <a:solidFill>
-                  <a:schemeClr val="tx2"/>
-                </a:solidFill>
-              </a:rPr>
-              <a:t>ML / AI signals</a:t>
-            </a:r>
-            <a:endParaRPr lang="en-US" sz="1500" dirty="0"/>
-          </a:p>
-        </p:txBody>
-      </p:sp>
-      <p:sp>
-        <p:nvSpPr>
-          <p:cNvPr id="25" name="Text 22"/>
-          <p:cNvSpPr txBox="1"/>
-          <p:nvPr/>
-        </p:nvSpPr>
-        <p:spPr>
-          <a:xfrm>
-            <a:off x="9253728" y="2039112"/>
-            <a:ext cx="2157984" cy="566928"/>
-          </a:xfrm>
-          <a:prstGeom prst="rect">
-            <a:avLst/>
-          </a:prstGeom>
-          <a:noFill/>
-          <a:ln/>
-        </p:spPr>
-        <p:txBody>
-          <a:bodyPr wrap="square" lIns="0" tIns="0" rIns="0" bIns="0" rtlCol="0" anchor="t"/>
-          <a:lstStyle/>
-          <a:p>
-            <a:pPr marL="0" indent="0">
-              <a:buNone/>
-            </a:pPr>
-            <a:r>
-              <a:rPr lang="en-US" sz="1200" b="1" dirty="0">
-                <a:solidFill>
-                  <a:schemeClr val="tx1"/>
-                </a:solidFill>
-              </a:rPr>
-              <a:t>LLM 'FOMC agent' papers (2025)</a:t>
-            </a:r>
-            <a:endParaRPr lang="en-US" sz="1200" dirty="0"/>
-          </a:p>
-        </p:txBody>
-      </p:sp>
-      <p:sp>
-        <p:nvSpPr>
-          <p:cNvPr id="26" name="Text 23"/>
-          <p:cNvSpPr txBox="1"/>
-          <p:nvPr/>
-        </p:nvSpPr>
-        <p:spPr>
-          <a:xfrm>
-            <a:off x="9253728" y="2624328"/>
-            <a:ext cx="2157984" cy="548640"/>
-          </a:xfrm>
-          <a:prstGeom prst="rect">
-            <a:avLst/>
-          </a:prstGeom>
-          <a:noFill/>
-          <a:ln/>
-        </p:spPr>
-        <p:txBody>
-          <a:bodyPr wrap="square" lIns="0" tIns="0" rIns="0" bIns="0" rtlCol="0" anchor="t"/>
-          <a:lstStyle/>
-          <a:p>
-            <a:pPr marL="0" indent="0">
-              <a:buNone/>
-            </a:pPr>
-            <a:r>
-              <a:rPr lang="en-US" sz="1150" b="1" dirty="0">
-                <a:solidFill>
-                  <a:srgbClr val="6B7280"/>
-                </a:solidFill>
-              </a:rPr>
-              <a:t>What it is  </a:t>
-            </a:r>
-            <a:r>
-              <a:rPr lang="en-US" sz="1150" dirty="0">
-                <a:solidFill>
-                  <a:schemeClr val="tx1"/>
-                </a:solidFill>
-              </a:rPr>
-              <a:t>Models that read the Fed's text and vote</a:t>
-            </a:r>
-            <a:endParaRPr lang="en-US" sz="1150" dirty="0"/>
-          </a:p>
-        </p:txBody>
-      </p:sp>
-      <p:sp>
-        <p:nvSpPr>
-          <p:cNvPr id="27" name="Text 24"/>
-          <p:cNvSpPr txBox="1"/>
-          <p:nvPr/>
-        </p:nvSpPr>
-        <p:spPr>
-          <a:xfrm>
-            <a:off x="9253728" y="3191256"/>
-            <a:ext cx="2157984" cy="530352"/>
-          </a:xfrm>
-          <a:prstGeom prst="rect">
-            <a:avLst/>
-          </a:prstGeom>
-          <a:noFill/>
-          <a:ln/>
-        </p:spPr>
-        <p:txBody>
-          <a:bodyPr wrap="square" lIns="0" tIns="0" rIns="0" bIns="0" rtlCol="0" anchor="t"/>
-          <a:lstStyle/>
-          <a:p>
-            <a:pPr marL="0" indent="0">
-              <a:buNone/>
-            </a:pPr>
-            <a:r>
-              <a:rPr lang="en-US" sz="1150" b="1" dirty="0">
-                <a:solidFill>
-                  <a:srgbClr val="6B7280"/>
-                </a:solidFill>
-              </a:rPr>
-              <a:t>Strength  </a:t>
-            </a:r>
-            <a:r>
-              <a:rPr lang="en-US" sz="1150" dirty="0">
-                <a:solidFill>
-                  <a:schemeClr val="tx1"/>
-                </a:solidFill>
-              </a:rPr>
-              <a:t>Reported 90%+ accuracy on 2023 to 2024</a:t>
-            </a:r>
-            <a:endParaRPr lang="en-US" sz="1150" dirty="0"/>
-          </a:p>
-        </p:txBody>
-      </p:sp>
-      <p:sp>
-        <p:nvSpPr>
-          <p:cNvPr id="28" name="Shape 25"/>
-          <p:cNvSpPr/>
-          <p:nvPr/>
-        </p:nvSpPr>
-        <p:spPr>
-          <a:xfrm>
-            <a:off x="731520" y="4553712"/>
-            <a:ext cx="10725912" cy="0"/>
-          </a:xfrm>
-          <a:prstGeom prst="line">
-            <a:avLst/>
-          </a:prstGeom>
-          <a:noFill/>
-          <a:ln w="22225">
-            <a:solidFill>
-              <a:srgbClr val="6B7280"/>
-            </a:solidFill>
-            <a:prstDash val="solid"/>
-            <a:headEnd type="triangle"/>
-            <a:tailEnd type="triangle"/>
-          </a:ln>
-        </p:spPr>
-        <p:txBody>
-          <a:bodyPr/>
-          <a:lstStyle/>
-          <a:p>
-            <a:endParaRPr lang="en-US"/>
-          </a:p>
-        </p:txBody>
-      </p:sp>
-      <p:sp>
-        <p:nvSpPr>
-          <p:cNvPr id="29" name="Text 26"/>
-          <p:cNvSpPr txBox="1"/>
-          <p:nvPr/>
-        </p:nvSpPr>
-        <p:spPr>
-          <a:xfrm>
-            <a:off x="548640" y="4663440"/>
-            <a:ext cx="2194560" cy="274320"/>
-          </a:xfrm>
-          <a:prstGeom prst="rect">
-            <a:avLst/>
-          </a:prstGeom>
-          <a:noFill/>
-          <a:ln/>
-        </p:spPr>
-        <p:txBody>
-          <a:bodyPr wrap="square" lIns="0" tIns="0" rIns="0" bIns="0" rtlCol="0" anchor="t"/>
-          <a:lstStyle/>
-          <a:p>
-            <a:pPr marL="0" indent="0">
-              <a:buNone/>
-            </a:pPr>
-            <a:r>
-              <a:rPr lang="en-US" sz="1200" b="1" dirty="0">
-                <a:solidFill>
-                  <a:schemeClr val="accent4"/>
-                </a:solidFill>
-              </a:rPr>
-              <a:t>Pure data</a:t>
-            </a:r>
-            <a:endParaRPr lang="en-US" sz="1200" dirty="0"/>
-          </a:p>
-        </p:txBody>
-      </p:sp>
-      <p:sp>
-        <p:nvSpPr>
-          <p:cNvPr id="30" name="Text 27"/>
-          <p:cNvSpPr txBox="1"/>
-          <p:nvPr/>
-        </p:nvSpPr>
-        <p:spPr>
-          <a:xfrm>
-            <a:off x="548640" y="4919472"/>
-            <a:ext cx="2377440" cy="457200"/>
-          </a:xfrm>
-          <a:prstGeom prst="rect">
-            <a:avLst/>
-          </a:prstGeom>
-          <a:noFill/>
-          <a:ln/>
-        </p:spPr>
-        <p:txBody>
-          <a:bodyPr wrap="square" lIns="0" tIns="0" rIns="0" bIns="0" rtlCol="0" anchor="t"/>
-          <a:lstStyle/>
-          <a:p>
-            <a:pPr marL="0" indent="0">
-              <a:buNone/>
-            </a:pPr>
-            <a:r>
-              <a:rPr lang="en-US" sz="1050" dirty="0">
-                <a:solidFill>
-                  <a:schemeClr val="accent4"/>
-                </a:solidFill>
-              </a:rPr>
-              <a:t>prices and formulas; no reading of the Fed's words</a:t>
-            </a:r>
-            <a:endParaRPr lang="en-US" sz="1050" dirty="0"/>
-          </a:p>
-        </p:txBody>
-      </p:sp>
-      <p:sp>
-        <p:nvSpPr>
-          <p:cNvPr id="31" name="Text 28"/>
-          <p:cNvSpPr txBox="1"/>
-          <p:nvPr/>
-        </p:nvSpPr>
-        <p:spPr>
-          <a:xfrm>
-            <a:off x="9445752" y="4663440"/>
-            <a:ext cx="2194560" cy="274320"/>
-          </a:xfrm>
-          <a:prstGeom prst="rect">
-            <a:avLst/>
-          </a:prstGeom>
-          <a:noFill/>
-          <a:ln/>
-        </p:spPr>
-        <p:txBody>
-          <a:bodyPr wrap="square" lIns="0" tIns="0" rIns="0" bIns="0" rtlCol="0" anchor="t"/>
-          <a:lstStyle/>
-          <a:p>
-            <a:pPr marL="0" indent="0" algn="r">
-              <a:buNone/>
-            </a:pPr>
-            <a:r>
-              <a:rPr lang="en-US" sz="1200" b="1" dirty="0">
-                <a:solidFill>
-                  <a:schemeClr val="accent4"/>
-                </a:solidFill>
-              </a:rPr>
-              <a:t>Pure model</a:t>
-            </a:r>
-            <a:endParaRPr lang="en-US" sz="1200" dirty="0"/>
-          </a:p>
-        </p:txBody>
-      </p:sp>
-      <p:sp>
-        <p:nvSpPr>
-          <p:cNvPr id="32" name="Text 29"/>
-          <p:cNvSpPr txBox="1"/>
-          <p:nvPr/>
-        </p:nvSpPr>
-        <p:spPr>
-          <a:xfrm>
-            <a:off x="9262872" y="4919472"/>
-            <a:ext cx="2377440" cy="457200"/>
-          </a:xfrm>
-          <a:prstGeom prst="rect">
-            <a:avLst/>
-          </a:prstGeom>
-          <a:noFill/>
-          <a:ln/>
-        </p:spPr>
-        <p:txBody>
-          <a:bodyPr wrap="square" lIns="0" tIns="0" rIns="0" bIns="0" rtlCol="0" anchor="t"/>
-          <a:lstStyle/>
-          <a:p>
-            <a:pPr marL="0" indent="0" algn="r">
-              <a:buNone/>
-            </a:pPr>
-            <a:r>
-              <a:rPr lang="en-US" sz="1050" dirty="0">
-                <a:solidFill>
-                  <a:schemeClr val="accent4"/>
-                </a:solidFill>
-              </a:rPr>
-              <a:t>one model's judgement; nothing it reads is checked</a:t>
-            </a:r>
-            <a:endParaRPr lang="en-US" sz="1050" dirty="0"/>
-          </a:p>
-        </p:txBody>
-      </p:sp>
-      <p:sp>
-        <p:nvSpPr>
-          <p:cNvPr id="33" name="Shape 30"/>
-          <p:cNvSpPr/>
-          <p:nvPr/>
-        </p:nvSpPr>
-        <p:spPr>
-          <a:xfrm>
-            <a:off x="1819930" y="4462272"/>
-            <a:ext cx="182880" cy="182880"/>
+            <a:off x="822960" y="1600200"/>
+            <a:ext cx="384048" cy="384048"/>
           </a:xfrm>
           <a:prstGeom prst="ellipse">
             <a:avLst/>
-          </a:prstGeom>
-          <a:solidFill>
-            <a:srgbClr val="1E2761"/>
-          </a:solidFill>
-          <a:ln w="12700">
-            <a:solidFill>
-              <a:srgbClr val="FFFFFF"/>
-            </a:solidFill>
-            <a:prstDash val="solid"/>
-          </a:ln>
-        </p:spPr>
-        <p:txBody>
-          <a:bodyPr/>
-          <a:lstStyle/>
-          <a:p>
-            <a:endParaRPr lang="en-US"/>
-          </a:p>
-        </p:txBody>
-      </p:sp>
-      <p:sp>
-        <p:nvSpPr>
-          <p:cNvPr id="34" name="Text 31"/>
-          <p:cNvSpPr txBox="1"/>
-          <p:nvPr/>
-        </p:nvSpPr>
-        <p:spPr>
-          <a:xfrm>
-            <a:off x="859810" y="4078224"/>
-            <a:ext cx="2103120" cy="274320"/>
-          </a:xfrm>
-          <a:prstGeom prst="rect">
-            <a:avLst/>
-          </a:prstGeom>
-          <a:noFill/>
-          <a:ln/>
-        </p:spPr>
-        <p:txBody>
-          <a:bodyPr wrap="square" lIns="0" tIns="0" rIns="0" bIns="0" rtlCol="0" anchor="b"/>
-          <a:lstStyle/>
-          <a:p>
-            <a:pPr marL="0" indent="0" algn="ctr">
-              <a:buNone/>
-            </a:pPr>
-            <a:r>
-              <a:rPr lang="en-US" sz="1150" b="1" dirty="0">
-                <a:solidFill>
-                  <a:schemeClr val="tx1"/>
-                </a:solidFill>
-              </a:rPr>
-              <a:t>Futures, prediction markets</a:t>
-            </a:r>
-            <a:endParaRPr lang="en-US" sz="1150" dirty="0"/>
-          </a:p>
-        </p:txBody>
-      </p:sp>
-      <p:sp>
-        <p:nvSpPr>
-          <p:cNvPr id="35" name="Shape 32"/>
-          <p:cNvSpPr/>
-          <p:nvPr/>
-        </p:nvSpPr>
-        <p:spPr>
-          <a:xfrm>
-            <a:off x="3857854" y="4462272"/>
-            <a:ext cx="182880" cy="182880"/>
-          </a:xfrm>
-          <a:prstGeom prst="ellipse">
-            <a:avLst/>
-          </a:prstGeom>
-          <a:solidFill>
-            <a:srgbClr val="E9B44C"/>
-          </a:solidFill>
-          <a:ln w="12700">
-            <a:solidFill>
-              <a:srgbClr val="FFFFFF"/>
-            </a:solidFill>
-            <a:prstDash val="solid"/>
-          </a:ln>
-        </p:spPr>
-        <p:txBody>
-          <a:bodyPr/>
-          <a:lstStyle/>
-          <a:p>
-            <a:endParaRPr lang="en-US"/>
-          </a:p>
-        </p:txBody>
-      </p:sp>
-      <p:sp>
-        <p:nvSpPr>
-          <p:cNvPr id="36" name="Text 33"/>
-          <p:cNvSpPr txBox="1"/>
-          <p:nvPr/>
-        </p:nvSpPr>
-        <p:spPr>
-          <a:xfrm>
-            <a:off x="2897734" y="4078224"/>
-            <a:ext cx="2103120" cy="274320"/>
-          </a:xfrm>
-          <a:prstGeom prst="rect">
-            <a:avLst/>
-          </a:prstGeom>
-          <a:noFill/>
-          <a:ln/>
-        </p:spPr>
-        <p:txBody>
-          <a:bodyPr wrap="square" lIns="0" tIns="0" rIns="0" bIns="0" rtlCol="0" anchor="b"/>
-          <a:lstStyle/>
-          <a:p>
-            <a:pPr marL="0" indent="0" algn="ctr">
-              <a:buNone/>
-            </a:pPr>
-            <a:r>
-              <a:rPr lang="en-US" sz="1150" b="1" dirty="0">
-                <a:solidFill>
-                  <a:schemeClr val="tx1"/>
-                </a:solidFill>
-              </a:rPr>
-              <a:t>Policy rules</a:t>
-            </a:r>
-            <a:endParaRPr lang="en-US" sz="1150" dirty="0"/>
-          </a:p>
-        </p:txBody>
-      </p:sp>
-      <p:sp>
-        <p:nvSpPr>
-          <p:cNvPr id="37" name="Shape 34"/>
-          <p:cNvSpPr/>
-          <p:nvPr/>
-        </p:nvSpPr>
-        <p:spPr>
-          <a:xfrm>
-            <a:off x="8148218" y="4462272"/>
-            <a:ext cx="182880" cy="182880"/>
-          </a:xfrm>
-          <a:prstGeom prst="ellipse">
-            <a:avLst/>
-          </a:prstGeom>
-          <a:solidFill>
-            <a:srgbClr val="2C6E49"/>
-          </a:solidFill>
-          <a:ln w="12700">
-            <a:solidFill>
-              <a:srgbClr val="FFFFFF"/>
-            </a:solidFill>
-            <a:prstDash val="solid"/>
-          </a:ln>
-        </p:spPr>
-        <p:txBody>
-          <a:bodyPr/>
-          <a:lstStyle/>
-          <a:p>
-            <a:endParaRPr lang="en-US"/>
-          </a:p>
-        </p:txBody>
-      </p:sp>
-      <p:sp>
-        <p:nvSpPr>
-          <p:cNvPr id="38" name="Text 35"/>
-          <p:cNvSpPr txBox="1"/>
-          <p:nvPr/>
-        </p:nvSpPr>
-        <p:spPr>
-          <a:xfrm>
-            <a:off x="7188098" y="4078224"/>
-            <a:ext cx="2103120" cy="274320"/>
-          </a:xfrm>
-          <a:prstGeom prst="rect">
-            <a:avLst/>
-          </a:prstGeom>
-          <a:noFill/>
-          <a:ln/>
-        </p:spPr>
-        <p:txBody>
-          <a:bodyPr wrap="square" lIns="0" tIns="0" rIns="0" bIns="0" rtlCol="0" anchor="b"/>
-          <a:lstStyle/>
-          <a:p>
-            <a:pPr marL="0" indent="0" algn="ctr">
-              <a:buNone/>
-            </a:pPr>
-            <a:r>
-              <a:rPr lang="en-US" sz="1150" b="1" dirty="0">
-                <a:solidFill>
-                  <a:schemeClr val="tx1"/>
-                </a:solidFill>
-              </a:rPr>
-              <a:t>Economist surveys</a:t>
-            </a:r>
-            <a:endParaRPr lang="en-US" sz="1150" dirty="0"/>
-          </a:p>
-        </p:txBody>
-      </p:sp>
-      <p:sp>
-        <p:nvSpPr>
-          <p:cNvPr id="39" name="Shape 36"/>
-          <p:cNvSpPr/>
-          <p:nvPr/>
-        </p:nvSpPr>
-        <p:spPr>
-          <a:xfrm>
-            <a:off x="10293401" y="4462272"/>
-            <a:ext cx="182880" cy="182880"/>
-          </a:xfrm>
-          <a:prstGeom prst="ellipse">
-            <a:avLst/>
-          </a:prstGeom>
-          <a:solidFill>
-            <a:srgbClr val="C8553D"/>
-          </a:solidFill>
-          <a:ln w="12700">
-            <a:solidFill>
-              <a:srgbClr val="FFFFFF"/>
-            </a:solidFill>
-            <a:prstDash val="solid"/>
-          </a:ln>
-        </p:spPr>
-        <p:txBody>
-          <a:bodyPr/>
-          <a:lstStyle/>
-          <a:p>
-            <a:endParaRPr lang="en-US"/>
-          </a:p>
-        </p:txBody>
-      </p:sp>
-      <p:sp>
-        <p:nvSpPr>
-          <p:cNvPr id="40" name="Text 37"/>
-          <p:cNvSpPr txBox="1"/>
-          <p:nvPr/>
-        </p:nvSpPr>
-        <p:spPr>
-          <a:xfrm>
-            <a:off x="9333281" y="4078224"/>
-            <a:ext cx="2103120" cy="274320"/>
-          </a:xfrm>
-          <a:prstGeom prst="rect">
-            <a:avLst/>
-          </a:prstGeom>
-          <a:noFill/>
-          <a:ln/>
-        </p:spPr>
-        <p:txBody>
-          <a:bodyPr wrap="square" lIns="0" tIns="0" rIns="0" bIns="0" rtlCol="0" anchor="b"/>
-          <a:lstStyle/>
-          <a:p>
-            <a:pPr marL="0" indent="0" algn="ctr">
-              <a:buNone/>
-            </a:pPr>
-            <a:r>
-              <a:rPr lang="en-US" sz="1150" b="1" dirty="0">
-                <a:solidFill>
-                  <a:schemeClr val="tx1"/>
-                </a:solidFill>
-              </a:rPr>
-              <a:t>LLM 'FOMC agents'</a:t>
-            </a:r>
-            <a:endParaRPr lang="en-US" sz="1150" dirty="0"/>
-          </a:p>
-        </p:txBody>
-      </p:sp>
-      <p:sp>
-        <p:nvSpPr>
-          <p:cNvPr id="41" name="Shape 38"/>
-          <p:cNvSpPr/>
-          <p:nvPr/>
-        </p:nvSpPr>
-        <p:spPr>
-          <a:xfrm>
-            <a:off x="6094476" y="4553712"/>
-            <a:ext cx="0" cy="256032"/>
-          </a:xfrm>
-          <a:prstGeom prst="line">
-            <a:avLst/>
-          </a:prstGeom>
-          <a:noFill/>
-          <a:ln w="22225">
-            <a:solidFill>
-              <a:srgbClr val="1E2761"/>
-            </a:solidFill>
-            <a:prstDash val="solid"/>
-          </a:ln>
-        </p:spPr>
-        <p:txBody>
-          <a:bodyPr/>
-          <a:lstStyle/>
-          <a:p>
-            <a:endParaRPr lang="en-US"/>
-          </a:p>
-        </p:txBody>
-      </p:sp>
-      <p:sp>
-        <p:nvSpPr>
-          <p:cNvPr id="42" name="Shape 39"/>
-          <p:cNvSpPr/>
-          <p:nvPr/>
-        </p:nvSpPr>
-        <p:spPr>
-          <a:xfrm>
-            <a:off x="5454396" y="4809744"/>
-            <a:ext cx="1280160" cy="365760"/>
-          </a:xfrm>
-          <a:prstGeom prst="roundRect">
-            <a:avLst>
-              <a:gd name="adj" fmla="val 50000"/>
-            </a:avLst>
           </a:prstGeom>
           <a:solidFill>
             <a:srgbClr val="1E2761"/>
@@ -24038,14 +27066,14 @@
       </p:sp>
       <p:sp>
         <p:nvSpPr>
-          <p:cNvPr id="43" name="Text 40"/>
+          <p:cNvPr id="6" name="Text 3"/>
           <p:cNvSpPr txBox="1"/>
           <p:nvPr/>
         </p:nvSpPr>
         <p:spPr>
           <a:xfrm>
-            <a:off x="5454396" y="4809744"/>
-            <a:ext cx="1280160" cy="365760"/>
+            <a:off x="822960" y="1600200"/>
+            <a:ext cx="384048" cy="384048"/>
           </a:xfrm>
           <a:prstGeom prst="rect">
             <a:avLst/>
@@ -24061,30 +27089,27 @@
               <a:buNone/>
             </a:pPr>
             <a:r>
-              <a:rPr lang="en-US" sz="1300" b="1" dirty="0">
+              <a:rPr lang="en-US" sz="1400" b="1" dirty="0">
                 <a:solidFill>
                   <a:schemeClr val="bg1"/>
                 </a:solidFill>
-                <a:latin typeface="Cambria" pitchFamily="34" charset="0"/>
-                <a:ea typeface="Cambria" pitchFamily="34" charset="-122"/>
-                <a:cs typeface="Cambria" pitchFamily="34" charset="-120"/>
-              </a:rPr>
-              <a:t>FedCast</a:t>
-            </a:r>
-            <a:endParaRPr lang="en-US" sz="1300" dirty="0"/>
-          </a:p>
-        </p:txBody>
-      </p:sp>
-      <p:sp>
-        <p:nvSpPr>
-          <p:cNvPr id="44" name="Text 41"/>
+              </a:rPr>
+              <a:t>1</a:t>
+            </a:r>
+            <a:endParaRPr lang="en-US" sz="1400" dirty="0"/>
+          </a:p>
+        </p:txBody>
+      </p:sp>
+      <p:sp>
+        <p:nvSpPr>
+          <p:cNvPr id="7" name="Text 4"/>
           <p:cNvSpPr txBox="1"/>
           <p:nvPr/>
         </p:nvSpPr>
         <p:spPr>
           <a:xfrm>
-            <a:off x="2528316" y="5285232"/>
-            <a:ext cx="7132320" cy="548640"/>
+            <a:off x="1325880" y="1554480"/>
+            <a:ext cx="2560320" cy="502920"/>
           </a:xfrm>
           <a:prstGeom prst="rect">
             <a:avLst/>
@@ -24093,34 +27118,34 @@
           <a:ln/>
         </p:spPr>
         <p:txBody>
-          <a:bodyPr wrap="square" lIns="0" tIns="0" rIns="0" bIns="0" rtlCol="0" anchor="t"/>
-          <a:lstStyle/>
-          <a:p>
-            <a:pPr marL="0" indent="0" algn="ctr">
+          <a:bodyPr wrap="square" lIns="0" tIns="0" rIns="0" bIns="0" rtlCol="0" anchor="ctr"/>
+          <a:lstStyle/>
+          <a:p>
+            <a:pPr marL="0" indent="0">
               <a:buNone/>
             </a:pPr>
             <a:r>
-              <a:rPr lang="en-US" sz="1150" dirty="0">
-                <a:solidFill>
-                  <a:schemeClr val="tx1"/>
-                </a:solidFill>
-              </a:rPr>
-              <a:t>Takes one input from each area, prices, 32 years of decisions, the Fed's own rules and a language model that must quote what it reads, and combines them by code at fixed weights. Neither a formula nor an oracle.</a:t>
-            </a:r>
-            <a:endParaRPr lang="en-US" sz="1150" dirty="0"/>
-          </a:p>
-        </p:txBody>
-      </p:sp>
-      <p:sp>
-        <p:nvSpPr>
-          <p:cNvPr id="45" name="Text 42"/>
+              <a:rPr lang="en-US" sz="1500" b="1" dirty="0">
+                <a:solidFill>
+                  <a:schemeClr val="tx2"/>
+                </a:solidFill>
+              </a:rPr>
+              <a:t>We judge the process, not the luck</a:t>
+            </a:r>
+            <a:endParaRPr lang="en-US" sz="1500" dirty="0"/>
+          </a:p>
+        </p:txBody>
+      </p:sp>
+      <p:sp>
+        <p:nvSpPr>
+          <p:cNvPr id="8" name="Text 5"/>
           <p:cNvSpPr txBox="1"/>
           <p:nvPr/>
         </p:nvSpPr>
         <p:spPr>
           <a:xfrm>
-            <a:off x="548640" y="6053328"/>
-            <a:ext cx="11091672" cy="274320"/>
+            <a:off x="822960" y="2240280"/>
+            <a:ext cx="3017520" cy="3063240"/>
           </a:xfrm>
           <a:prstGeom prst="rect">
             <a:avLst/>
@@ -24132,140 +27157,70 @@
           <a:bodyPr wrap="square" lIns="0" tIns="0" rIns="0" bIns="0" rtlCol="0" anchor="t"/>
           <a:lstStyle/>
           <a:p>
-            <a:pPr marL="0" indent="0">
-              <a:buNone/>
-            </a:pPr>
-            <a:r>
-              <a:rPr lang="en-US" sz="950" dirty="0">
-                <a:solidFill>
-                  <a:schemeClr val="accent4"/>
-                </a:solidFill>
-              </a:rPr>
-              <a:t>Sources: Bonini, Huang and Simaan, 'Watching the FedWatch' (232 meetings, May 1994 to March 2024); FedSight AI preprint, December 2025; Takano, Hirano and Nakagawa, arXiv 2511.02469.</a:t>
-            </a:r>
-            <a:endParaRPr lang="en-US" sz="950" dirty="0"/>
-          </a:p>
-        </p:txBody>
-      </p:sp>
-      <p:sp>
-        <p:nvSpPr>
-          <p:cNvPr id="3" name="Slide Number Placeholder 0"/>
-          <p:cNvSpPr>
-            <a:spLocks noGrp="1"/>
-          </p:cNvSpPr>
-          <p:nvPr>
-            <p:ph type="sldNum" sz="quarter" idx="4294967295"/>
-          </p:nvPr>
-        </p:nvSpPr>
-        <p:spPr>
-          <a:xfrm>
-            <a:off x="11091672" y="6400800"/>
-            <a:ext cx="548640" cy="274320"/>
-          </a:xfrm>
-          <a:prstGeom prst="rect">
-            <a:avLst/>
-          </a:prstGeom>
-          <a:extLst>
-            <a:ext uri="{C572A759-6A51-4108-AA02-DFA0A04FC94B}">
-              <ma14:wrappingTextBoxFlag xmlns="" xmlns:ma14="http://schemas.microsoft.com/office/mac/drawingml/2011/main" val="0"/>
-            </a:ext>
-          </a:extLst>
-        </p:spPr>
-        <p:txBody>
-          <a:bodyPr/>
-          <a:lstStyle>
-            <a:lvl1pPr>
-              <a:defRPr sz="1000">
-                <a:solidFill>
-                  <a:srgbClr val="6B7280"/>
-                </a:solidFill>
-              </a:defRPr>
-            </a:lvl1pPr>
-          </a:lstStyle>
-          <a:p>
-            <a:pPr algn="r"/>
-            <a:fld id="{F7021451-1387-4CA6-816F-3879F97B5CBC}" type="slidenum">
-              <a:rPr lang="en-US" b="0"/>
-              <a:t>5</a:t>
-            </a:fld>
-            <a:endParaRPr lang="en-US"/>
-          </a:p>
-        </p:txBody>
-      </p:sp>
-    </p:spTree>
-  </p:cSld>
-  <p:clrMapOvr>
-    <a:masterClrMapping/>
-  </p:clrMapOvr>
-</p:sld>
-</file>
-
-<file path=ppt/slides/slide6.xml><?xml version="1.0" encoding="utf-8"?>
-<p:sld xmlns:a="http://schemas.openxmlformats.org/drawingml/2006/main" xmlns:r="http://schemas.openxmlformats.org/officeDocument/2006/relationships" xmlns:p="http://schemas.openxmlformats.org/presentationml/2006/main">
-  <p:cSld name="Slide 5">
-    <p:spTree>
-      <p:nvGrpSpPr>
-        <p:cNvPr id="1" name=""/>
-        <p:cNvGrpSpPr/>
-        <p:nvPr/>
-      </p:nvGrpSpPr>
-      <p:grpSpPr>
-        <a:xfrm>
-          <a:off x="0" y="0"/>
-          <a:ext cx="0" cy="0"/>
-          <a:chOff x="0" y="0"/>
-          <a:chExt cx="0" cy="0"/>
-        </a:xfrm>
-      </p:grpSpPr>
-      <p:sp>
-        <p:nvSpPr>
-          <p:cNvPr id="2" name="Text 0"/>
-          <p:cNvSpPr>
-            <a:spLocks noGrp="1"/>
-          </p:cNvSpPr>
-          <p:nvPr>
-            <p:ph type="title" idx="100" hasCustomPrompt="1"/>
-          </p:nvPr>
-        </p:nvSpPr>
-        <p:spPr>
-          <a:xfrm>
-            <a:off x="548640" y="411480"/>
-            <a:ext cx="11091672" cy="822960"/>
-          </a:xfrm>
-          <a:prstGeom prst="rect">
-            <a:avLst/>
-          </a:prstGeom>
-          <a:noFill/>
-          <a:ln/>
-        </p:spPr>
-        <p:txBody>
-          <a:bodyPr wrap="square" lIns="0" tIns="0" rIns="0" bIns="0" rtlCol="0" anchor="ctr"/>
-          <a:lstStyle/>
-          <a:p>
-            <a:pPr marL="0" indent="0" algn="l">
-              <a:buNone/>
-            </a:pPr>
-            <a:r>
-              <a:rPr lang="en-US" sz="3200" b="1" dirty="0">
-                <a:solidFill>
-                  <a:schemeClr val="tx2"/>
-                </a:solidFill>
-              </a:rPr>
-              <a:t>Why this approach ?</a:t>
-            </a:r>
-            <a:endParaRPr lang="en-US" sz="3200" dirty="0"/>
-          </a:p>
-        </p:txBody>
-      </p:sp>
-      <p:sp>
-        <p:nvSpPr>
-          <p:cNvPr id="4" name="Shape 1"/>
+            <a:pPr marL="342900" indent="-342900">
+              <a:spcAft>
+                <a:spcPts val="800"/>
+              </a:spcAft>
+              <a:buSzPct val="100000"/>
+              <a:buChar char="•"/>
+            </a:pPr>
+            <a:r>
+              <a:rPr lang="en-US" sz="1300" dirty="0">
+                <a:solidFill>
+                  <a:schemeClr val="tx1"/>
+                </a:solidFill>
+              </a:rPr>
+              <a:t>Eight decisions a year: a good year proves nothing</a:t>
+            </a:r>
+            <a:endParaRPr lang="en-US" sz="1300" dirty="0"/>
+          </a:p>
+          <a:p>
+            <a:pPr marL="342900" indent="-342900">
+              <a:spcAft>
+                <a:spcPts val="800"/>
+              </a:spcAft>
+              <a:buSzPct val="100000"/>
+              <a:buChar char="•"/>
+            </a:pPr>
+            <a:r>
+              <a:rPr lang="en-US" sz="1300" dirty="0">
+                <a:solidFill>
+                  <a:schemeClr val="tx1"/>
+                </a:solidFill>
+              </a:rPr>
+              <a:t>The yardstick is a ten-point scorecard, fixed before any code: same evidence, same answer? every claim quoted? any number from memory? a shock moves the number the right way?</a:t>
+            </a:r>
+            <a:endParaRPr lang="en-US" sz="1300" dirty="0"/>
+          </a:p>
+          <a:p>
+            <a:pPr marL="342900" indent="-342900">
+              <a:spcAft>
+                <a:spcPts val="800"/>
+              </a:spcAft>
+              <a:buSzPct val="100000"/>
+              <a:buChar char="•"/>
+            </a:pPr>
+            <a:r>
+              <a:rPr lang="en-US" sz="1300" dirty="0">
+                <a:solidFill>
+                  <a:schemeClr val="tx1"/>
+                </a:solidFill>
+              </a:rPr>
+              <a:t>Outcomes are logged after each decision and never used to tune</a:t>
+            </a:r>
+            <a:endParaRPr lang="en-US" sz="1300" dirty="0"/>
+          </a:p>
+        </p:txBody>
+      </p:sp>
+      <p:sp>
+        <p:nvSpPr>
+          <p:cNvPr id="9" name="Shape 6"/>
           <p:cNvSpPr/>
           <p:nvPr/>
         </p:nvSpPr>
         <p:spPr>
           <a:xfrm>
-            <a:off x="548640" y="1417320"/>
+            <a:off x="4297680" y="1417320"/>
             <a:ext cx="3520440" cy="3977640"/>
           </a:xfrm>
           <a:prstGeom prst="roundRect">
@@ -24300,13 +27255,13 @@
       </p:sp>
       <p:sp>
         <p:nvSpPr>
-          <p:cNvPr id="5" name="Shape 2"/>
+          <p:cNvPr id="10" name="Shape 7"/>
           <p:cNvSpPr/>
           <p:nvPr/>
         </p:nvSpPr>
         <p:spPr>
           <a:xfrm>
-            <a:off x="822960" y="1600200"/>
+            <a:off x="4572000" y="1600200"/>
             <a:ext cx="384048" cy="384048"/>
           </a:xfrm>
           <a:prstGeom prst="ellipse">
@@ -24332,13 +27287,13 @@
       </p:sp>
       <p:sp>
         <p:nvSpPr>
-          <p:cNvPr id="6" name="Text 3"/>
+          <p:cNvPr id="11" name="Text 8"/>
           <p:cNvSpPr txBox="1"/>
           <p:nvPr/>
         </p:nvSpPr>
         <p:spPr>
           <a:xfrm>
-            <a:off x="822960" y="1600200"/>
+            <a:off x="4572000" y="1600200"/>
             <a:ext cx="384048" cy="384048"/>
           </a:xfrm>
           <a:prstGeom prst="rect">
@@ -24360,7 +27315,7 @@
                   <a:schemeClr val="bg1"/>
                 </a:solidFill>
               </a:rPr>
-              <a:t>1</a:t>
+              <a:t>2</a:t>
             </a:r>
             <a:endParaRPr lang="en-US" sz="1400" dirty="0"/>
           </a:p>
@@ -24368,13 +27323,13 @@
       </p:sp>
       <p:sp>
         <p:nvSpPr>
-          <p:cNvPr id="7" name="Text 4"/>
+          <p:cNvPr id="12" name="Text 9"/>
           <p:cNvSpPr txBox="1"/>
           <p:nvPr/>
         </p:nvSpPr>
         <p:spPr>
           <a:xfrm>
-            <a:off x="1325880" y="1554480"/>
+            <a:off x="5074920" y="1554480"/>
             <a:ext cx="2560320" cy="502920"/>
           </a:xfrm>
           <a:prstGeom prst="rect">
@@ -24396,7 +27351,7 @@
                   <a:schemeClr val="tx2"/>
                 </a:solidFill>
               </a:rPr>
-              <a:t>We judge the process, not the luck</a:t>
+              <a:t>Every step is auditable</a:t>
             </a:r>
             <a:endParaRPr lang="en-US" sz="1500" dirty="0"/>
           </a:p>
@@ -24404,13 +27359,13 @@
       </p:sp>
       <p:sp>
         <p:nvSpPr>
-          <p:cNvPr id="8" name="Text 5"/>
+          <p:cNvPr id="13" name="Text 10"/>
           <p:cNvSpPr txBox="1"/>
           <p:nvPr/>
         </p:nvSpPr>
         <p:spPr>
           <a:xfrm>
-            <a:off x="822960" y="2240280"/>
+            <a:off x="4572000" y="2240280"/>
             <a:ext cx="3017520" cy="3063240"/>
           </a:xfrm>
           <a:prstGeom prst="rect">
@@ -24436,7 +27391,7 @@
                   <a:schemeClr val="tx1"/>
                 </a:solidFill>
               </a:rPr>
-              <a:t>Eight decisions a year: a good year proves nothing</a:t>
+              <a:t>An analyst that says 'inflation remains elevated' must quote the statement line it read, and code checks the quote is there, character for character</a:t>
             </a:r>
             <a:endParaRPr lang="en-US" sz="1300" dirty="0"/>
           </a:p>
@@ -24454,7 +27409,7 @@
                   <a:schemeClr val="tx1"/>
                 </a:solidFill>
               </a:rPr>
-              <a:t>The yardstick is a ten-point scorecard, fixed before any code: same evidence, same answer? every claim quoted? any number from memory? a shock moves the number the right way?</a:t>
+              <a:t>Every number it uses must exist in the frozen evidence, or it is flagged as from memory</a:t>
             </a:r>
             <a:endParaRPr lang="en-US" sz="1300" dirty="0"/>
           </a:p>
@@ -24472,7 +27427,7 @@
                   <a:schemeClr val="tx1"/>
                 </a:solidFill>
               </a:rPr>
-              <a:t>Outcomes are logged after each decision and never used to tune</a:t>
+              <a:t>Every model lists the items it read; every ledger entry recomputes from its snapshot. If it is not quoted, it does not count</a:t>
             </a:r>
             <a:endParaRPr lang="en-US" sz="1300" dirty="0"/>
           </a:p>
@@ -24480,13 +27435,13 @@
       </p:sp>
       <p:sp>
         <p:nvSpPr>
-          <p:cNvPr id="9" name="Shape 6"/>
+          <p:cNvPr id="14" name="Shape 11"/>
           <p:cNvSpPr/>
           <p:nvPr/>
         </p:nvSpPr>
         <p:spPr>
           <a:xfrm>
-            <a:off x="4297680" y="1417320"/>
+            <a:off x="8046720" y="1417320"/>
             <a:ext cx="3520440" cy="3977640"/>
           </a:xfrm>
           <a:prstGeom prst="roundRect">
@@ -24521,13 +27476,13 @@
       </p:sp>
       <p:sp>
         <p:nvSpPr>
-          <p:cNvPr id="10" name="Shape 7"/>
+          <p:cNvPr id="15" name="Shape 12"/>
           <p:cNvSpPr/>
           <p:nvPr/>
         </p:nvSpPr>
         <p:spPr>
           <a:xfrm>
-            <a:off x="4572000" y="1600200"/>
+            <a:off x="8321040" y="1600200"/>
             <a:ext cx="384048" cy="384048"/>
           </a:xfrm>
           <a:prstGeom prst="ellipse">
@@ -24553,227 +27508,6 @@
       </p:sp>
       <p:sp>
         <p:nvSpPr>
-          <p:cNvPr id="11" name="Text 8"/>
-          <p:cNvSpPr txBox="1"/>
-          <p:nvPr/>
-        </p:nvSpPr>
-        <p:spPr>
-          <a:xfrm>
-            <a:off x="4572000" y="1600200"/>
-            <a:ext cx="384048" cy="384048"/>
-          </a:xfrm>
-          <a:prstGeom prst="rect">
-            <a:avLst/>
-          </a:prstGeom>
-          <a:noFill/>
-          <a:ln/>
-        </p:spPr>
-        <p:txBody>
-          <a:bodyPr wrap="square" lIns="0" tIns="0" rIns="0" bIns="0" rtlCol="0" anchor="ctr"/>
-          <a:lstStyle/>
-          <a:p>
-            <a:pPr marL="0" indent="0" algn="ctr">
-              <a:buNone/>
-            </a:pPr>
-            <a:r>
-              <a:rPr lang="en-US" sz="1400" b="1" dirty="0">
-                <a:solidFill>
-                  <a:schemeClr val="bg1"/>
-                </a:solidFill>
-              </a:rPr>
-              <a:t>2</a:t>
-            </a:r>
-            <a:endParaRPr lang="en-US" sz="1400" dirty="0"/>
-          </a:p>
-        </p:txBody>
-      </p:sp>
-      <p:sp>
-        <p:nvSpPr>
-          <p:cNvPr id="12" name="Text 9"/>
-          <p:cNvSpPr txBox="1"/>
-          <p:nvPr/>
-        </p:nvSpPr>
-        <p:spPr>
-          <a:xfrm>
-            <a:off x="5074920" y="1554480"/>
-            <a:ext cx="2560320" cy="502920"/>
-          </a:xfrm>
-          <a:prstGeom prst="rect">
-            <a:avLst/>
-          </a:prstGeom>
-          <a:noFill/>
-          <a:ln/>
-        </p:spPr>
-        <p:txBody>
-          <a:bodyPr wrap="square" lIns="0" tIns="0" rIns="0" bIns="0" rtlCol="0" anchor="ctr"/>
-          <a:lstStyle/>
-          <a:p>
-            <a:pPr marL="0" indent="0">
-              <a:buNone/>
-            </a:pPr>
-            <a:r>
-              <a:rPr lang="en-US" sz="1500" b="1" dirty="0">
-                <a:solidFill>
-                  <a:schemeClr val="tx2"/>
-                </a:solidFill>
-              </a:rPr>
-              <a:t>Every step is auditable</a:t>
-            </a:r>
-            <a:endParaRPr lang="en-US" sz="1500" dirty="0"/>
-          </a:p>
-        </p:txBody>
-      </p:sp>
-      <p:sp>
-        <p:nvSpPr>
-          <p:cNvPr id="13" name="Text 10"/>
-          <p:cNvSpPr txBox="1"/>
-          <p:nvPr/>
-        </p:nvSpPr>
-        <p:spPr>
-          <a:xfrm>
-            <a:off x="4572000" y="2240280"/>
-            <a:ext cx="3017520" cy="3063240"/>
-          </a:xfrm>
-          <a:prstGeom prst="rect">
-            <a:avLst/>
-          </a:prstGeom>
-          <a:noFill/>
-          <a:ln/>
-        </p:spPr>
-        <p:txBody>
-          <a:bodyPr wrap="square" lIns="0" tIns="0" rIns="0" bIns="0" rtlCol="0" anchor="t"/>
-          <a:lstStyle/>
-          <a:p>
-            <a:pPr marL="342900" indent="-342900">
-              <a:spcAft>
-                <a:spcPts val="800"/>
-              </a:spcAft>
-              <a:buSzPct val="100000"/>
-              <a:buChar char="•"/>
-            </a:pPr>
-            <a:r>
-              <a:rPr lang="en-US" sz="1300" dirty="0">
-                <a:solidFill>
-                  <a:schemeClr val="tx1"/>
-                </a:solidFill>
-              </a:rPr>
-              <a:t>An analyst that says 'inflation remains elevated' must quote the statement line it read, and code checks the quote is there, character for character</a:t>
-            </a:r>
-            <a:endParaRPr lang="en-US" sz="1300" dirty="0"/>
-          </a:p>
-          <a:p>
-            <a:pPr marL="342900" indent="-342900">
-              <a:spcAft>
-                <a:spcPts val="800"/>
-              </a:spcAft>
-              <a:buSzPct val="100000"/>
-              <a:buChar char="•"/>
-            </a:pPr>
-            <a:r>
-              <a:rPr lang="en-US" sz="1300" dirty="0">
-                <a:solidFill>
-                  <a:schemeClr val="tx1"/>
-                </a:solidFill>
-              </a:rPr>
-              <a:t>Every number it uses must exist in the frozen evidence, or it is flagged as from memory</a:t>
-            </a:r>
-            <a:endParaRPr lang="en-US" sz="1300" dirty="0"/>
-          </a:p>
-          <a:p>
-            <a:pPr marL="342900" indent="-342900">
-              <a:spcAft>
-                <a:spcPts val="800"/>
-              </a:spcAft>
-              <a:buSzPct val="100000"/>
-              <a:buChar char="•"/>
-            </a:pPr>
-            <a:r>
-              <a:rPr lang="en-US" sz="1300" dirty="0">
-                <a:solidFill>
-                  <a:schemeClr val="tx1"/>
-                </a:solidFill>
-              </a:rPr>
-              <a:t>Every model lists the items it read; every ledger entry recomputes from its snapshot. If it is not quoted, it does not count</a:t>
-            </a:r>
-            <a:endParaRPr lang="en-US" sz="1300" dirty="0"/>
-          </a:p>
-        </p:txBody>
-      </p:sp>
-      <p:sp>
-        <p:nvSpPr>
-          <p:cNvPr id="14" name="Shape 11"/>
-          <p:cNvSpPr/>
-          <p:nvPr/>
-        </p:nvSpPr>
-        <p:spPr>
-          <a:xfrm>
-            <a:off x="8046720" y="1417320"/>
-            <a:ext cx="3520440" cy="3977640"/>
-          </a:xfrm>
-          <a:prstGeom prst="roundRect">
-            <a:avLst>
-              <a:gd name="adj" fmla="val 3117"/>
-            </a:avLst>
-          </a:prstGeom>
-          <a:solidFill>
-            <a:srgbClr val="EEF2F7"/>
-          </a:solidFill>
-          <a:ln w="12700">
-            <a:solidFill>
-              <a:srgbClr val="EEF2F7"/>
-            </a:solidFill>
-            <a:prstDash val="solid"/>
-          </a:ln>
-          <a:effectLst>
-            <a:outerShdw blurRad="50800" dist="12700" dir="5400000" algn="bl" rotWithShape="0">
-              <a:srgbClr val="000000">
-                <a:alpha val="8000"/>
-              </a:srgbClr>
-            </a:outerShdw>
-          </a:effectLst>
-        </p:spPr>
-        <p:txBody>
-          <a:bodyPr/>
-          <a:lstStyle/>
-          <a:p>
-            <a:endParaRPr lang="en-US"/>
-          </a:p>
-        </p:txBody>
-      </p:sp>
-      <p:sp>
-        <p:nvSpPr>
-          <p:cNvPr id="15" name="Shape 12"/>
-          <p:cNvSpPr/>
-          <p:nvPr/>
-        </p:nvSpPr>
-        <p:spPr>
-          <a:xfrm>
-            <a:off x="8321040" y="1600200"/>
-            <a:ext cx="384048" cy="384048"/>
-          </a:xfrm>
-          <a:prstGeom prst="ellipse">
-            <a:avLst/>
-          </a:prstGeom>
-          <a:solidFill>
-            <a:srgbClr val="1E2761"/>
-          </a:solidFill>
-          <a:ln w="12700">
-            <a:solidFill>
-              <a:srgbClr val="1E2761"/>
-            </a:solidFill>
-            <a:prstDash val="solid"/>
-          </a:ln>
-        </p:spPr>
-        <p:txBody>
-          <a:bodyPr/>
-          <a:lstStyle/>
-          <a:p>
-            <a:endParaRPr lang="en-US"/>
-          </a:p>
-        </p:txBody>
-      </p:sp>
-      <p:sp>
-        <p:nvSpPr>
           <p:cNvPr id="16" name="Text 13"/>
           <p:cNvSpPr txBox="1"/>
           <p:nvPr/>
@@ -24959,7 +27693,7 @@
             <a:pPr algn="r"/>
             <a:fld id="{F7021451-1387-4CA6-816F-3879F97B5CBC}" type="slidenum">
               <a:rPr lang="en-US" b="0"/>
-              <a:t>6</a:t>
+              <a:t>7</a:t>
             </a:fld>
             <a:endParaRPr lang="en-US"/>
           </a:p>
@@ -24973,9 +27707,9 @@
 </p:sld>
 </file>
 
-<file path=ppt/slides/slide7.xml><?xml version="1.0" encoding="utf-8"?>
+<file path=ppt/slides/slide8.xml><?xml version="1.0" encoding="utf-8"?>
 <p:sld xmlns:a="http://schemas.openxmlformats.org/drawingml/2006/main" xmlns:r="http://schemas.openxmlformats.org/officeDocument/2006/relationships" xmlns:p="http://schemas.openxmlformats.org/presentationml/2006/main">
-  <p:cSld name="Slide 7">
+  <p:cSld>
     <p:spTree>
       <p:nvGrpSpPr>
         <p:cNvPr id="1" name=""/>
@@ -25024,7 +27758,7 @@
                   <a:schemeClr val="tx2"/>
                 </a:solidFill>
               </a:rPr>
-              <a:t>Model Architecture</a:t>
+              <a:t>Model architecture</a:t>
             </a:r>
             <a:endParaRPr lang="en-US" sz="3200" dirty="0"/>
           </a:p>
@@ -25541,7 +28275,7 @@
                   <a:schemeClr val="bg1"/>
                 </a:solidFill>
               </a:rPr>
-              <a:t>Five specialist analysts reading the Fed's own words; every claim quoted and verified by code; a bounded lean, not a weight</a:t>
+              <a:t>Five specialist analysts reading the Fed's own words; every claim quoted and verified by code; a bounded opinion, not a weight</a:t>
             </a:r>
             <a:endParaRPr lang="en-US" sz="950" dirty="0"/>
           </a:p>
@@ -25678,7 +28412,7 @@
                   <a:schemeClr val="tx1"/>
                 </a:solidFill>
               </a:rPr>
-              <a:t>Weights 0.6 / 0.2 / 0.1 / 0.1, fixed and published. A 1.5% floor on every outcome. Then the analysts' lean, capped at 10 points. Code does this; no model writes the number.</a:t>
+              <a:t>Weights 0.6 / 0.2 / 0.1 / 0.1, fixed and published. A 1.5% floor on every outcome. Then the analysts' opinion, capped at 10 points. Code does this; no model writes the number.</a:t>
             </a:r>
             <a:endParaRPr lang="en-US" sz="950" dirty="0"/>
           </a:p>
@@ -25983,7 +28717,7 @@
                   <a:schemeClr val="tx1"/>
                 </a:solidFill>
               </a:rPr>
-              <a:t>23 items frozen and fingerprinted, dated in US time, data as first published. Nothing outside it may be read.</a:t>
+              <a:t>23 items, frozen and fingerprinted, dated in US time, data as first published.</a:t>
             </a:r>
             <a:endParaRPr lang="en-US" sz="1000" dirty="0"/>
           </a:p>
@@ -26087,7 +28821,7 @@
                   <a:schemeClr val="tx1"/>
                 </a:solidFill>
               </a:rPr>
-              <a:t>Computed by code and handed to the analysts as numbers: inflation gap, labour slack, financial conditions, statement tone, base rates, projections.</a:t>
+              <a:t>Numbers computed by code: inflation gap, labour slack, financial conditions, statement tone, base rates, projections.</a:t>
             </a:r>
             <a:endParaRPr lang="en-US" sz="1000" dirty="0"/>
           </a:p>
@@ -26191,7 +28925,7 @@
                   <a:schemeClr val="tx1"/>
                 </a:solidFill>
               </a:rPr>
-              <a:t>Four families at fixed weights, the floor, then the specialists' lean.</a:t>
+              <a:t>Four families at fixed weights; a 1.5% floor; then the specialists' opinion.</a:t>
             </a:r>
             <a:endParaRPr lang="en-US" sz="1000" dirty="0"/>
           </a:p>
@@ -26295,7 +29029,7 @@
                   <a:schemeClr val="tx1"/>
                 </a:solidFill>
               </a:rPr>
-              <a:t>Only analysts 4 to 8 enter the number. Analysts 1 to 3 are checks and balances on the ladder.</a:t>
+              <a:t>Analysts 4 to 8 enter the number. Analysts 1 to 3 are controls.</a:t>
             </a:r>
             <a:endParaRPr lang="en-US" sz="1000" dirty="0"/>
           </a:p>
@@ -26399,7 +29133,7 @@
                   <a:schemeClr val="tx1"/>
                 </a:solidFill>
               </a:rPr>
-              <a:t>Views tilt by at most 10 points and expire; watch-outs must be answered by id; documents and odds become evidence.</a:t>
+              <a:t>Views move the number by at most 10 points and expire; watch-outs are answered by id; documents and odds become evidence.</a:t>
             </a:r>
             <a:endParaRPr lang="en-US" sz="1000" dirty="0"/>
           </a:p>
@@ -26503,7 +29237,7 @@
                   <a:schemeClr val="tx1"/>
                 </a:solidFill>
               </a:rPr>
-              <a:t>Append-only, hash-chained; every entry recomputes from its snapshot and the runs it names.</a:t>
+              <a:t>Append-only, hash-chained; every entry recomputes from its snapshot.</a:t>
             </a:r>
             <a:endParaRPr lang="en-US" sz="1000" dirty="0"/>
           </a:p>
@@ -26529,7 +29263,7 @@
           </a:prstGeom>
           <a:extLst>
             <a:ext uri="{C572A759-6A51-4108-AA02-DFA0A04FC94B}">
-              <ma14:wrappingTextBoxFlag xmlns="" xmlns:ma14="http://schemas.microsoft.com/office/mac/drawingml/2011/main" val="0"/>
+              <ma14:wrappingTextBoxFlag xmlns:ma14="http://schemas.microsoft.com/office/mac/drawingml/2011/main" xmlns="" val="0"/>
             </a:ext>
           </a:extLst>
         </p:spPr>
@@ -26548,13 +29282,18 @@
             <a:pPr algn="r"/>
             <a:fld id="{F7021451-1387-4CA6-816F-3879F97B5CBC}" type="slidenum">
               <a:rPr lang="en-US" b="0"/>
-              <a:t>7</a:t>
+              <a:t>8</a:t>
             </a:fld>
             <a:endParaRPr lang="en-US"/>
           </a:p>
         </p:txBody>
       </p:sp>
     </p:spTree>
+    <p:extLst>
+      <p:ext uri="{BB962C8B-B14F-4D97-AF65-F5344CB8AC3E}">
+        <p14:creationId xmlns:p14="http://schemas.microsoft.com/office/powerpoint/2010/main" val="3575907113"/>
+      </p:ext>
+    </p:extLst>
   </p:cSld>
   <p:clrMapOvr>
     <a:masterClrMapping/>
@@ -26562,7 +29301,7 @@
 </p:sld>
 </file>
 
-<file path=ppt/slides/slide8.xml><?xml version="1.0" encoding="utf-8"?>
+<file path=ppt/slides/slide9.xml><?xml version="1.0" encoding="utf-8"?>
 <p:sld xmlns:a="http://schemas.openxmlformats.org/drawingml/2006/main" xmlns:r="http://schemas.openxmlformats.org/officeDocument/2006/relationships" xmlns:p="http://schemas.openxmlformats.org/presentationml/2006/main">
   <p:cSld name="Slide 8">
     <p:spTree>
@@ -26628,7 +29367,7 @@
           <p:nvPr>
             <p:extLst>
               <p:ext uri="{D42A27DB-BD31-4B8C-83A1-F6EECF244321}">
-                <p14:modId xmlns:p14="http://schemas.microsoft.com/office/powerpoint/2010/main" val="1142723790"/>
+                <p14:modId xmlns:p14="http://schemas.microsoft.com/office/powerpoint/2010/main" val="3165394686"/>
               </p:ext>
             </p:extLst>
           </p:nvPr>
@@ -29667,12 +32406,20 @@
                         <a:buNone/>
                       </a:pPr>
                       <a:r>
+                        <a:rPr lang="en-US" sz="1000" b="1">
+                          <a:solidFill>
+                            <a:srgbClr val="1B1F2A"/>
+                          </a:solidFill>
+                        </a:rPr>
+                        <a:t>specialists' opinion: </a:t>
+                      </a:r>
+                      <a:r>
                         <a:rPr lang="en-US" sz="1000" b="1" dirty="0">
                           <a:solidFill>
                             <a:srgbClr val="1B1F2A"/>
                           </a:solidFill>
                         </a:rPr>
-                        <a:t>Specialists' lean: a modifier on the pooled number, not a model in the pool. </a:t>
+                        <a:t>a modifier on the pooled number, not a model in the pool. </a:t>
                       </a:r>
                       <a:r>
                         <a:rPr lang="en-US" sz="1000" dirty="0">
@@ -30615,582 +33362,9 @@
             <a:pPr algn="r"/>
             <a:fld id="{F7021451-1387-4CA6-816F-3879F97B5CBC}" type="slidenum">
               <a:rPr lang="en-US" b="0"/>
-              <a:t>8</a:t>
+              <a:t>9</a:t>
             </a:fld>
             <a:endParaRPr lang="en-US"/>
-          </a:p>
-        </p:txBody>
-      </p:sp>
-    </p:spTree>
-  </p:cSld>
-  <p:clrMapOvr>
-    <a:masterClrMapping/>
-  </p:clrMapOvr>
-</p:sld>
-</file>
-
-<file path=ppt/slides/slide9.xml><?xml version="1.0" encoding="utf-8"?>
-<p:sld xmlns:a="http://schemas.openxmlformats.org/drawingml/2006/main" xmlns:r="http://schemas.openxmlformats.org/officeDocument/2006/relationships" xmlns:p="http://schemas.openxmlformats.org/presentationml/2006/main">
-  <p:cSld name="Slide 9">
-    <p:spTree>
-      <p:nvGrpSpPr>
-        <p:cNvPr id="1" name=""/>
-        <p:cNvGrpSpPr/>
-        <p:nvPr/>
-      </p:nvGrpSpPr>
-      <p:grpSpPr>
-        <a:xfrm>
-          <a:off x="0" y="0"/>
-          <a:ext cx="0" cy="0"/>
-          <a:chOff x="0" y="0"/>
-          <a:chExt cx="0" cy="0"/>
-        </a:xfrm>
-      </p:grpSpPr>
-      <p:sp>
-        <p:nvSpPr>
-          <p:cNvPr id="2" name="Text 0"/>
-          <p:cNvSpPr>
-            <a:spLocks noGrp="1"/>
-          </p:cNvSpPr>
-          <p:nvPr>
-            <p:ph type="title" idx="100" hasCustomPrompt="1"/>
-          </p:nvPr>
-        </p:nvSpPr>
-        <p:spPr>
-          <a:xfrm>
-            <a:off x="548640" y="548640"/>
-            <a:ext cx="11091672" cy="822960"/>
-          </a:xfrm>
-          <a:prstGeom prst="rect">
-            <a:avLst/>
-          </a:prstGeom>
-          <a:noFill/>
-          <a:ln/>
-        </p:spPr>
-        <p:txBody>
-          <a:bodyPr wrap="square" lIns="0" tIns="0" rIns="0" bIns="0" rtlCol="0" anchor="ctr"/>
-          <a:lstStyle/>
-          <a:p>
-            <a:pPr marL="0" indent="0" algn="l">
-              <a:buNone/>
-            </a:pPr>
-            <a:r>
-              <a:rPr lang="en-US" sz="3000" b="1" dirty="0">
-                <a:solidFill>
-                  <a:schemeClr val="bg1"/>
-                </a:solidFill>
-              </a:rPr>
-              <a:t>Live demo 2: the evidence graph and the pool</a:t>
-            </a:r>
-            <a:endParaRPr lang="en-US" sz="3000" dirty="0"/>
-          </a:p>
-        </p:txBody>
-      </p:sp>
-      <p:sp>
-        <p:nvSpPr>
-          <p:cNvPr id="3" name="Shape 1"/>
-          <p:cNvSpPr/>
-          <p:nvPr/>
-        </p:nvSpPr>
-        <p:spPr>
-          <a:xfrm>
-            <a:off x="10177272" y="685800"/>
-            <a:ext cx="1463040" cy="548640"/>
-          </a:xfrm>
-          <a:prstGeom prst="roundRect">
-            <a:avLst>
-              <a:gd name="adj" fmla="val 16667"/>
-            </a:avLst>
-          </a:prstGeom>
-          <a:solidFill>
-            <a:srgbClr val="E9B44C"/>
-          </a:solidFill>
-          <a:ln w="12700">
-            <a:solidFill>
-              <a:srgbClr val="E9B44C"/>
-            </a:solidFill>
-            <a:prstDash val="solid"/>
-          </a:ln>
-        </p:spPr>
-        <p:txBody>
-          <a:bodyPr/>
-          <a:lstStyle/>
-          <a:p>
-            <a:endParaRPr lang="en-US"/>
-          </a:p>
-        </p:txBody>
-      </p:sp>
-      <p:sp>
-        <p:nvSpPr>
-          <p:cNvPr id="4" name="Text 2"/>
-          <p:cNvSpPr txBox="1"/>
-          <p:nvPr/>
-        </p:nvSpPr>
-        <p:spPr>
-          <a:xfrm>
-            <a:off x="10177272" y="685800"/>
-            <a:ext cx="1463040" cy="548640"/>
-          </a:xfrm>
-          <a:prstGeom prst="rect">
-            <a:avLst/>
-          </a:prstGeom>
-          <a:noFill/>
-          <a:ln/>
-        </p:spPr>
-        <p:txBody>
-          <a:bodyPr wrap="square" lIns="0" tIns="0" rIns="0" bIns="0" rtlCol="0" anchor="ctr"/>
-          <a:lstStyle/>
-          <a:p>
-            <a:pPr marL="0" indent="0" algn="ctr">
-              <a:buNone/>
-            </a:pPr>
-            <a:r>
-              <a:rPr lang="en-US" sz="1600" b="1" dirty="0">
-                <a:solidFill>
-                  <a:srgbClr val="1B1F2A"/>
-                </a:solidFill>
-              </a:rPr>
-              <a:t>3 min</a:t>
-            </a:r>
-            <a:endParaRPr lang="en-US" sz="1600" dirty="0"/>
-          </a:p>
-        </p:txBody>
-      </p:sp>
-      <p:sp>
-        <p:nvSpPr>
-          <p:cNvPr id="5" name="Shape 3"/>
-          <p:cNvSpPr/>
-          <p:nvPr/>
-        </p:nvSpPr>
-        <p:spPr>
-          <a:xfrm>
-            <a:off x="548640" y="1737360"/>
-            <a:ext cx="3520440" cy="3200400"/>
-          </a:xfrm>
-          <a:prstGeom prst="roundRect">
-            <a:avLst>
-              <a:gd name="adj" fmla="val 3429"/>
-            </a:avLst>
-          </a:prstGeom>
-          <a:solidFill>
-            <a:srgbClr val="1E2761"/>
-          </a:solidFill>
-          <a:ln w="12700">
-            <a:solidFill>
-              <a:srgbClr val="1E2761"/>
-            </a:solidFill>
-            <a:prstDash val="solid"/>
-          </a:ln>
-        </p:spPr>
-        <p:txBody>
-          <a:bodyPr/>
-          <a:lstStyle/>
-          <a:p>
-            <a:endParaRPr lang="en-US"/>
-          </a:p>
-        </p:txBody>
-      </p:sp>
-      <p:sp>
-        <p:nvSpPr>
-          <p:cNvPr id="6" name="Text 4"/>
-          <p:cNvSpPr txBox="1"/>
-          <p:nvPr/>
-        </p:nvSpPr>
-        <p:spPr>
-          <a:xfrm>
-            <a:off x="822960" y="1920240"/>
-            <a:ext cx="2926080" cy="457200"/>
-          </a:xfrm>
-          <a:prstGeom prst="rect">
-            <a:avLst/>
-          </a:prstGeom>
-          <a:noFill/>
-          <a:ln/>
-        </p:spPr>
-        <p:txBody>
-          <a:bodyPr wrap="square" lIns="0" tIns="0" rIns="0" bIns="0" rtlCol="0" anchor="ctr"/>
-          <a:lstStyle/>
-          <a:p>
-            <a:pPr marL="0" indent="0">
-              <a:buNone/>
-            </a:pPr>
-            <a:r>
-              <a:rPr lang="en-US" sz="1800" b="1" dirty="0">
-                <a:solidFill>
-                  <a:srgbClr val="E9B44C"/>
-                </a:solidFill>
-              </a:rPr>
-              <a:t>Open</a:t>
-            </a:r>
-            <a:endParaRPr lang="en-US" sz="1800" dirty="0"/>
-          </a:p>
-        </p:txBody>
-      </p:sp>
-      <p:sp>
-        <p:nvSpPr>
-          <p:cNvPr id="7" name="Text 5"/>
-          <p:cNvSpPr txBox="1"/>
-          <p:nvPr/>
-        </p:nvSpPr>
-        <p:spPr>
-          <a:xfrm>
-            <a:off x="822960" y="2468880"/>
-            <a:ext cx="2971800" cy="2377440"/>
-          </a:xfrm>
-          <a:prstGeom prst="rect">
-            <a:avLst/>
-          </a:prstGeom>
-          <a:noFill/>
-          <a:ln/>
-        </p:spPr>
-        <p:txBody>
-          <a:bodyPr wrap="square" lIns="0" tIns="0" rIns="0" bIns="0" rtlCol="0" anchor="t"/>
-          <a:lstStyle/>
-          <a:p>
-            <a:pPr marL="342900" indent="-342900">
-              <a:spcAft>
-                <a:spcPts val="800"/>
-              </a:spcAft>
-              <a:buSzPct val="100000"/>
-              <a:buChar char="•"/>
-            </a:pPr>
-            <a:r>
-              <a:rPr lang="en-US" sz="1300" dirty="0">
-                <a:solidFill>
-                  <a:srgbClr val="FFFFFF"/>
-                </a:solidFill>
-              </a:rPr>
-              <a:t>Evidence graph</a:t>
-            </a:r>
-            <a:endParaRPr lang="en-US" sz="1300" dirty="0"/>
-          </a:p>
-          <a:p>
-            <a:pPr marL="342900" indent="-342900">
-              <a:spcAft>
-                <a:spcPts val="800"/>
-              </a:spcAft>
-              <a:buSzPct val="100000"/>
-              <a:buChar char="•"/>
-            </a:pPr>
-            <a:r>
-              <a:rPr lang="en-US" sz="1300" dirty="0">
-                <a:solidFill>
-                  <a:srgbClr val="FFFFFF"/>
-                </a:solidFill>
-              </a:rPr>
-              <a:t>Click the Market-implied box</a:t>
-            </a:r>
-            <a:endParaRPr lang="en-US" sz="1300" dirty="0"/>
-          </a:p>
-          <a:p>
-            <a:pPr marL="342900" indent="-342900">
-              <a:spcAft>
-                <a:spcPts val="800"/>
-              </a:spcAft>
-              <a:buSzPct val="100000"/>
-              <a:buChar char="•"/>
-            </a:pPr>
-            <a:r>
-              <a:rPr lang="en-US" sz="1300" dirty="0">
-                <a:solidFill>
-                  <a:srgbClr val="FFFFFF"/>
-                </a:solidFill>
-              </a:rPr>
-              <a:t>Click the Pool box</a:t>
-            </a:r>
-            <a:endParaRPr lang="en-US" sz="1300" dirty="0"/>
-          </a:p>
-          <a:p>
-            <a:pPr marL="342900" indent="-342900">
-              <a:spcAft>
-                <a:spcPts val="800"/>
-              </a:spcAft>
-              <a:buSzPct val="100000"/>
-              <a:buChar char="•"/>
-            </a:pPr>
-            <a:r>
-              <a:rPr lang="en-US" sz="1300" dirty="0">
-                <a:solidFill>
-                  <a:srgbClr val="FFFFFF"/>
-                </a:solidFill>
-              </a:rPr>
-              <a:t>Methodology, scroll to the worked example</a:t>
-            </a:r>
-            <a:endParaRPr lang="en-US" sz="1300" dirty="0"/>
-          </a:p>
-        </p:txBody>
-      </p:sp>
-      <p:sp>
-        <p:nvSpPr>
-          <p:cNvPr id="8" name="Shape 6"/>
-          <p:cNvSpPr/>
-          <p:nvPr/>
-        </p:nvSpPr>
-        <p:spPr>
-          <a:xfrm>
-            <a:off x="4297680" y="1737360"/>
-            <a:ext cx="3520440" cy="3200400"/>
-          </a:xfrm>
-          <a:prstGeom prst="roundRect">
-            <a:avLst>
-              <a:gd name="adj" fmla="val 3429"/>
-            </a:avLst>
-          </a:prstGeom>
-          <a:solidFill>
-            <a:srgbClr val="1E2761"/>
-          </a:solidFill>
-          <a:ln w="12700">
-            <a:solidFill>
-              <a:srgbClr val="1E2761"/>
-            </a:solidFill>
-            <a:prstDash val="solid"/>
-          </a:ln>
-        </p:spPr>
-        <p:txBody>
-          <a:bodyPr/>
-          <a:lstStyle/>
-          <a:p>
-            <a:endParaRPr lang="en-US"/>
-          </a:p>
-        </p:txBody>
-      </p:sp>
-      <p:sp>
-        <p:nvSpPr>
-          <p:cNvPr id="9" name="Text 7"/>
-          <p:cNvSpPr txBox="1"/>
-          <p:nvPr/>
-        </p:nvSpPr>
-        <p:spPr>
-          <a:xfrm>
-            <a:off x="4572000" y="1920240"/>
-            <a:ext cx="2926080" cy="457200"/>
-          </a:xfrm>
-          <a:prstGeom prst="rect">
-            <a:avLst/>
-          </a:prstGeom>
-          <a:noFill/>
-          <a:ln/>
-        </p:spPr>
-        <p:txBody>
-          <a:bodyPr wrap="square" lIns="0" tIns="0" rIns="0" bIns="0" rtlCol="0" anchor="ctr"/>
-          <a:lstStyle/>
-          <a:p>
-            <a:pPr marL="0" indent="0">
-              <a:buNone/>
-            </a:pPr>
-            <a:r>
-              <a:rPr lang="en-US" sz="1800" b="1" dirty="0">
-                <a:solidFill>
-                  <a:srgbClr val="E9B44C"/>
-                </a:solidFill>
-              </a:rPr>
-              <a:t>Point at</a:t>
-            </a:r>
-            <a:endParaRPr lang="en-US" sz="1800" dirty="0"/>
-          </a:p>
-        </p:txBody>
-      </p:sp>
-      <p:sp>
-        <p:nvSpPr>
-          <p:cNvPr id="10" name="Text 8"/>
-          <p:cNvSpPr txBox="1"/>
-          <p:nvPr/>
-        </p:nvSpPr>
-        <p:spPr>
-          <a:xfrm>
-            <a:off x="4572000" y="2468880"/>
-            <a:ext cx="2971800" cy="2377440"/>
-          </a:xfrm>
-          <a:prstGeom prst="rect">
-            <a:avLst/>
-          </a:prstGeom>
-          <a:noFill/>
-          <a:ln/>
-        </p:spPr>
-        <p:txBody>
-          <a:bodyPr wrap="square" lIns="0" tIns="0" rIns="0" bIns="0" rtlCol="0" anchor="t"/>
-          <a:lstStyle/>
-          <a:p>
-            <a:pPr marL="342900" indent="-342900">
-              <a:spcAft>
-                <a:spcPts val="800"/>
-              </a:spcAft>
-              <a:buSzPct val="100000"/>
-              <a:buChar char="•"/>
-            </a:pPr>
-            <a:r>
-              <a:rPr lang="en-US" sz="1300" dirty="0">
-                <a:solidFill>
-                  <a:srgbClr val="FFFFFF"/>
-                </a:solidFill>
-              </a:rPr>
-              <a:t>Market-implied: the futures price, 100 minus price, the expected change, the 90/10 split</a:t>
-            </a:r>
-            <a:endParaRPr lang="en-US" sz="1300" dirty="0"/>
-          </a:p>
-          <a:p>
-            <a:pPr marL="342900" indent="-342900">
-              <a:spcAft>
-                <a:spcPts val="800"/>
-              </a:spcAft>
-              <a:buSzPct val="100000"/>
-              <a:buChar char="•"/>
-            </a:pPr>
-            <a:r>
-              <a:rPr lang="en-US" sz="1300" dirty="0">
-                <a:solidFill>
-                  <a:srgbClr val="FFFFFF"/>
-                </a:solidFill>
-              </a:rPr>
-              <a:t>Pool: the four weights, the pooled line, the specialists' tilt line, Machine track</a:t>
-            </a:r>
-            <a:endParaRPr lang="en-US" sz="1300" dirty="0"/>
-          </a:p>
-          <a:p>
-            <a:pPr marL="342900" indent="-342900">
-              <a:spcAft>
-                <a:spcPts val="800"/>
-              </a:spcAft>
-              <a:buSzPct val="100000"/>
-              <a:buChar char="•"/>
-            </a:pPr>
-            <a:r>
-              <a:rPr lang="en-US" sz="1300" dirty="0">
-                <a:solidFill>
-                  <a:srgbClr val="FFFFFF"/>
-                </a:solidFill>
-              </a:rPr>
-              <a:t>Any evidence item: the frozen text and the link to the original</a:t>
-            </a:r>
-            <a:endParaRPr lang="en-US" sz="1300" dirty="0"/>
-          </a:p>
-        </p:txBody>
-      </p:sp>
-      <p:sp>
-        <p:nvSpPr>
-          <p:cNvPr id="11" name="Shape 9"/>
-          <p:cNvSpPr/>
-          <p:nvPr/>
-        </p:nvSpPr>
-        <p:spPr>
-          <a:xfrm>
-            <a:off x="8046720" y="1737360"/>
-            <a:ext cx="3520440" cy="3200400"/>
-          </a:xfrm>
-          <a:prstGeom prst="roundRect">
-            <a:avLst>
-              <a:gd name="adj" fmla="val 3429"/>
-            </a:avLst>
-          </a:prstGeom>
-          <a:solidFill>
-            <a:srgbClr val="1E2761"/>
-          </a:solidFill>
-          <a:ln w="12700">
-            <a:solidFill>
-              <a:srgbClr val="1E2761"/>
-            </a:solidFill>
-            <a:prstDash val="solid"/>
-          </a:ln>
-        </p:spPr>
-        <p:txBody>
-          <a:bodyPr/>
-          <a:lstStyle/>
-          <a:p>
-            <a:endParaRPr lang="en-US"/>
-          </a:p>
-        </p:txBody>
-      </p:sp>
-      <p:sp>
-        <p:nvSpPr>
-          <p:cNvPr id="12" name="Text 10"/>
-          <p:cNvSpPr txBox="1"/>
-          <p:nvPr/>
-        </p:nvSpPr>
-        <p:spPr>
-          <a:xfrm>
-            <a:off x="8321040" y="1920240"/>
-            <a:ext cx="2926080" cy="457200"/>
-          </a:xfrm>
-          <a:prstGeom prst="rect">
-            <a:avLst/>
-          </a:prstGeom>
-          <a:noFill/>
-          <a:ln/>
-        </p:spPr>
-        <p:txBody>
-          <a:bodyPr wrap="square" lIns="0" tIns="0" rIns="0" bIns="0" rtlCol="0" anchor="ctr"/>
-          <a:lstStyle/>
-          <a:p>
-            <a:pPr marL="0" indent="0">
-              <a:buNone/>
-            </a:pPr>
-            <a:r>
-              <a:rPr lang="en-US" sz="1800" b="1" dirty="0">
-                <a:solidFill>
-                  <a:srgbClr val="E9B44C"/>
-                </a:solidFill>
-              </a:rPr>
-              <a:t>Say</a:t>
-            </a:r>
-            <a:endParaRPr lang="en-US" sz="1800" dirty="0"/>
-          </a:p>
-        </p:txBody>
-      </p:sp>
-      <p:sp>
-        <p:nvSpPr>
-          <p:cNvPr id="13" name="Text 11"/>
-          <p:cNvSpPr txBox="1"/>
-          <p:nvPr/>
-        </p:nvSpPr>
-        <p:spPr>
-          <a:xfrm>
-            <a:off x="8321040" y="2468880"/>
-            <a:ext cx="2971800" cy="2377440"/>
-          </a:xfrm>
-          <a:prstGeom prst="rect">
-            <a:avLst/>
-          </a:prstGeom>
-          <a:noFill/>
-          <a:ln/>
-        </p:spPr>
-        <p:txBody>
-          <a:bodyPr wrap="square" lIns="0" tIns="0" rIns="0" bIns="0" rtlCol="0" anchor="t"/>
-          <a:lstStyle/>
-          <a:p>
-            <a:pPr marL="342900" indent="-342900">
-              <a:spcAft>
-                <a:spcPts val="800"/>
-              </a:spcAft>
-              <a:buSzPct val="100000"/>
-              <a:buChar char="•"/>
-            </a:pPr>
-            <a:r>
-              <a:rPr lang="en-US" sz="1300" dirty="0">
-                <a:solidFill>
-                  <a:srgbClr val="FFFFFF"/>
-                </a:solidFill>
-              </a:rPr>
-              <a:t>Blue is in the number, grey is computed but not in it. Click a model and you see only what it read.</a:t>
-            </a:r>
-            <a:endParaRPr lang="en-US" sz="1300" dirty="0"/>
-          </a:p>
-          <a:p>
-            <a:pPr marL="342900" indent="-342900">
-              <a:spcAft>
-                <a:spcPts val="800"/>
-              </a:spcAft>
-              <a:buSzPct val="100000"/>
-              <a:buChar char="•"/>
-            </a:pPr>
-            <a:r>
-              <a:rPr lang="en-US" sz="1300" dirty="0">
-                <a:solidFill>
-                  <a:srgbClr val="FFFFFF"/>
-                </a:solidFill>
-              </a:rPr>
-              <a:t>The language model's lean is the one line between Pooled and Machine track. It can tilt, it cannot write.</a:t>
-            </a:r>
-            <a:endParaRPr lang="en-US" sz="1300" dirty="0"/>
           </a:p>
         </p:txBody>
       </p:sp>

--- a/docs/FedCast_Fullerton.pptx
+++ b/docs/FedCast_Fullerton.pptx
@@ -3910,7 +3910,11 @@
                   <a:srgbClr val="CADCFC"/>
                 </a:solidFill>
               </a:rPr>
-              <a:t>A forecaster for the next Federal Reserve rate decision, built to be judged by its process rather than its luck</a:t>
+              <a:t>A forecaster for the next Federal Reserve rate decision, built to be judged by its process</a:t>
+            </a:r>
+            <a:r>
+              <a:rPr lang="en-US" dirty="0"/>
+              <a:t>.</a:t>
             </a:r>
             <a:endParaRPr lang="en-US" sz="2000" dirty="0"/>
           </a:p>
@@ -4660,6 +4664,13 @@
             <a:prstDash val="solid"/>
           </a:ln>
         </p:spPr>
+        <p:txBody>
+          <a:bodyPr/>
+          <a:lstStyle/>
+          <a:p>
+            <a:endParaRPr lang="en-US"/>
+          </a:p>
+        </p:txBody>
       </p:sp>
       <p:sp>
         <p:nvSpPr>
@@ -4685,6 +4696,13 @@
             <a:prstDash val="solid"/>
           </a:ln>
         </p:spPr>
+        <p:txBody>
+          <a:bodyPr/>
+          <a:lstStyle/>
+          <a:p>
+            <a:endParaRPr lang="en-US"/>
+          </a:p>
+        </p:txBody>
       </p:sp>
       <p:sp>
         <p:nvSpPr>
@@ -4818,6 +4836,13 @@
             <a:prstDash val="solid"/>
           </a:ln>
         </p:spPr>
+        <p:txBody>
+          <a:bodyPr/>
+          <a:lstStyle/>
+          <a:p>
+            <a:endParaRPr lang="en-US"/>
+          </a:p>
+        </p:txBody>
       </p:sp>
       <p:sp>
         <p:nvSpPr>
@@ -4972,6 +4997,13 @@
             <a:prstDash val="solid"/>
           </a:ln>
         </p:spPr>
+        <p:txBody>
+          <a:bodyPr/>
+          <a:lstStyle/>
+          <a:p>
+            <a:endParaRPr lang="en-US"/>
+          </a:p>
+        </p:txBody>
       </p:sp>
       <p:sp>
         <p:nvSpPr>
@@ -4997,6 +5029,13 @@
             <a:prstDash val="solid"/>
           </a:ln>
         </p:spPr>
+        <p:txBody>
+          <a:bodyPr/>
+          <a:lstStyle/>
+          <a:p>
+            <a:endParaRPr lang="en-US"/>
+          </a:p>
+        </p:txBody>
       </p:sp>
       <p:sp>
         <p:nvSpPr>
@@ -5130,6 +5169,13 @@
             <a:prstDash val="solid"/>
           </a:ln>
         </p:spPr>
+        <p:txBody>
+          <a:bodyPr/>
+          <a:lstStyle/>
+          <a:p>
+            <a:endParaRPr lang="en-US"/>
+          </a:p>
+        </p:txBody>
       </p:sp>
       <p:sp>
         <p:nvSpPr>
@@ -5284,6 +5330,13 @@
             <a:prstDash val="solid"/>
           </a:ln>
         </p:spPr>
+        <p:txBody>
+          <a:bodyPr/>
+          <a:lstStyle/>
+          <a:p>
+            <a:endParaRPr lang="en-US"/>
+          </a:p>
+        </p:txBody>
       </p:sp>
       <p:sp>
         <p:nvSpPr>
@@ -5309,6 +5362,13 @@
             <a:prstDash val="solid"/>
           </a:ln>
         </p:spPr>
+        <p:txBody>
+          <a:bodyPr/>
+          <a:lstStyle/>
+          <a:p>
+            <a:endParaRPr lang="en-US"/>
+          </a:p>
+        </p:txBody>
       </p:sp>
       <p:sp>
         <p:nvSpPr>
@@ -5442,6 +5502,13 @@
             <a:prstDash val="solid"/>
           </a:ln>
         </p:spPr>
+        <p:txBody>
+          <a:bodyPr/>
+          <a:lstStyle/>
+          <a:p>
+            <a:endParaRPr lang="en-US"/>
+          </a:p>
+        </p:txBody>
       </p:sp>
       <p:sp>
         <p:nvSpPr>
@@ -12874,15 +12941,7 @@
                   <a:schemeClr val="tx1"/>
                 </a:solidFill>
               </a:rPr>
-              <a:t>A grading form in the app: a user marks an analyst's answer from 1 to 5 on four questions (did it start from the base rate, argue both sides, say what it was unsure of, say what would prove it wrong). Twenty hand grades become the reference; a model grader is trusted only once it agrees with them. The grade becomes the tenth measured dimension and a </a:t>
-            </a:r>
-            <a:r>
-              <a:rPr lang="en-US" sz="1000">
-                <a:solidFill>
-                  <a:schemeClr val="tx1"/>
-                </a:solidFill>
-              </a:rPr>
-              <a:t>gate on the opinion.</a:t>
+              <a:t>A grading form in the app: a user marks an analyst's answer from 1 to 5 on four questions (did it start from the base rate, argue both sides, say what it was unsure of, say what would prove it wrong). Twenty hand grades become the reference; a model grader is trusted only once it agrees with them. The grade becomes the tenth measured dimension and a gate on the opinion.</a:t>
             </a:r>
             <a:endParaRPr lang="en-US" sz="1000" dirty="0"/>
           </a:p>
@@ -13063,9 +13122,28 @@
                   <a:schemeClr val="tx1"/>
                 </a:solidFill>
               </a:rPr>
-              <a:t>1987, 1998, 2008, 2020: the Fed cut on financial stress, not the data the models read. A watch-out agent that scans for bank failures, funding stress and market dislocations and raises a typed watch-out every analyst must answer.</a:t>
-            </a:r>
+              <a:t>1987, 1998, 2008, 2020: the Fed cut on financial stress, differing from what the models read. </a:t>
+            </a:r>
+          </a:p>
+          <a:p>
+            <a:pPr marL="0" indent="0">
+              <a:buNone/>
+            </a:pPr>
             <a:endParaRPr lang="en-US" sz="1000" dirty="0"/>
+          </a:p>
+          <a:p>
+            <a:pPr marL="0" indent="0">
+              <a:buNone/>
+            </a:pPr>
+            <a:r>
+              <a:rPr lang="en-US" sz="1000" b="1" dirty="0">
+                <a:solidFill>
+                  <a:schemeClr val="tx1"/>
+                </a:solidFill>
+              </a:rPr>
+              <a:t>A watch-out agent that scans for bank failures, funding stress and market dislocations and raises a typed watch-out every analyst must answer.</a:t>
+            </a:r>
+            <a:endParaRPr lang="en-US" sz="1000" b="1" dirty="0"/>
           </a:p>
         </p:txBody>
       </p:sp>
@@ -13208,7 +13286,7 @@
                   <a:schemeClr val="tx2"/>
                 </a:solidFill>
               </a:rPr>
-              <a:t>A second model family</a:t>
+              <a:t>Further validation from second model family. (cheaper?)</a:t>
             </a:r>
             <a:endParaRPr lang="en-US" sz="1300" dirty="0"/>
           </a:p>
@@ -13244,7 +13322,20 @@
                   <a:schemeClr val="tx1"/>
                 </a:solidFill>
               </a:rPr>
-              <a:t>The same harness, the same snapshots, a different language model. If the ladder reads the same, the harness is doing the work, not the model.</a:t>
+              <a:t>The same harness, the same snapshots, a different language model. </a:t>
+            </a:r>
+          </a:p>
+          <a:p>
+            <a:pPr marL="0" indent="0">
+              <a:buNone/>
+            </a:pPr>
+            <a:r>
+              <a:rPr lang="en-US" sz="1000" dirty="0">
+                <a:solidFill>
+                  <a:schemeClr val="tx1"/>
+                </a:solidFill>
+              </a:rPr>
+              <a:t>If the ladder reads the same, the harness is doing the work, not the model.</a:t>
             </a:r>
             <a:endParaRPr lang="en-US" sz="1000" dirty="0"/>
           </a:p>
@@ -13389,7 +13480,7 @@
                   <a:schemeClr val="tx2"/>
                 </a:solidFill>
               </a:rPr>
-              <a:t>Other central banks and geographies</a:t>
+              <a:t>Scale: Other central banks and geographies</a:t>
             </a:r>
             <a:endParaRPr lang="en-US" sz="1300" dirty="0"/>
           </a:p>
@@ -13570,7 +13661,7 @@
                   <a:schemeClr val="tx2"/>
                 </a:solidFill>
               </a:rPr>
-              <a:t>Better classical models</a:t>
+              <a:t>Improvement: Better classical models</a:t>
             </a:r>
             <a:endParaRPr lang="en-US" sz="1300" dirty="0"/>
           </a:p>
@@ -13601,12 +13692,12 @@
               <a:buNone/>
             </a:pPr>
             <a:r>
-              <a:rPr lang="en-US" sz="1000" dirty="0">
+              <a:rPr lang="en-US" sz="1000">
                 <a:solidFill>
                   <a:schemeClr val="tx1"/>
                 </a:solidFill>
               </a:rPr>
-              <a:t>The probit's successor: features written down before fitting, a regularised ordinal model, a reliability check beside the log score, and the expanding window as the only judge. A regularised boosted model as one pre-registered candidate. About 130 usable decisions, 68% holds: small models, honestly tested, not big ones.</a:t>
+              <a:t>Our probit scored poorly. The cause is the data: 68% of decisions are holds and the cuts bunch into a few episodes, so the model learns hold and misses the rest. Replace it with a model built for that imbalance (class weights, or an ordinal model that shrinks toward the base rate), tested only on decisions it has not seen. About 130 usable decisions, so small models.</a:t>
             </a:r>
             <a:endParaRPr lang="en-US" sz="1000" dirty="0"/>
           </a:p>
@@ -16979,7 +17070,7 @@
         </p:nvGraphicFramePr>
         <p:xfrm>
           <a:off x="6172200" y="1783080"/>
-          <a:ext cx="5468112" cy="914400"/>
+          <a:ext cx="5742432" cy="3072384"/>
         </p:xfrm>
         <a:graphic>
           <a:graphicData uri="http://schemas.openxmlformats.org/drawingml/2006/table">
@@ -19775,7 +19866,7 @@
         </p:nvGraphicFramePr>
         <p:xfrm>
           <a:off x="6172200" y="1783080"/>
-          <a:ext cx="5468112" cy="914400"/>
+          <a:ext cx="5742432" cy="1920240"/>
         </p:xfrm>
         <a:graphic>
           <a:graphicData uri="http://schemas.openxmlformats.org/drawingml/2006/table">
@@ -21687,7 +21778,7 @@
         </p:nvSpPr>
         <p:spPr>
           <a:xfrm>
-            <a:off x="5120640" y="1435608"/>
+            <a:off x="5120640" y="1307592"/>
             <a:ext cx="6519672" cy="777240"/>
           </a:xfrm>
           <a:prstGeom prst="rect">
@@ -21700,8 +21791,9 @@
           <a:bodyPr wrap="square" lIns="0" tIns="0" rIns="0" bIns="0" rtlCol="0" anchor="ctr"/>
           <a:lstStyle/>
           <a:p>
-            <a:pPr marL="0" indent="0">
-              <a:buNone/>
+            <a:pPr marL="171450" indent="-171450">
+              <a:buFont typeface="Arial" panose="020B0604020202020204" pitchFamily="34" charset="0"/>
+              <a:buChar char="•"/>
             </a:pPr>
             <a:r>
               <a:rPr lang="en-US" sz="1150" dirty="0">
@@ -21709,7 +21801,7 @@
                   <a:schemeClr val="tx1"/>
                 </a:solidFill>
               </a:rPr>
-              <a:t>The 28 October decision, our final number before it, and what the outcome says. The app: the forecast as it stands today.</a:t>
+              <a:t>The 28 October decision, what our outcome says.</a:t>
             </a:r>
             <a:endParaRPr lang="en-US" sz="1150" dirty="0"/>
           </a:p>
@@ -21827,7 +21919,7 @@
         </p:nvSpPr>
         <p:spPr>
           <a:xfrm>
-            <a:off x="5120640" y="2304288"/>
+            <a:off x="5120640" y="2148840"/>
             <a:ext cx="6519672" cy="777240"/>
           </a:xfrm>
           <a:prstGeom prst="rect">
@@ -21840,8 +21932,9 @@
           <a:bodyPr wrap="square" lIns="0" tIns="0" rIns="0" bIns="0" rtlCol="0" anchor="ctr"/>
           <a:lstStyle/>
           <a:p>
-            <a:pPr marL="0" indent="0">
-              <a:buNone/>
+            <a:pPr marL="171450" indent="-171450">
+              <a:buFont typeface="Arial" panose="020B0604020202020204" pitchFamily="34" charset="0"/>
+              <a:buChar char="•"/>
             </a:pPr>
             <a:r>
               <a:rPr lang="en-US" sz="1150" dirty="0">
@@ -21849,7 +21942,21 @@
                   <a:schemeClr val="tx1"/>
                 </a:solidFill>
               </a:rPr>
-              <a:t>Four kinds of signal already exist; where FedCast sits among them, and the three reasons we built it this way.</a:t>
+              <a:t>Four kinds of signal already exist; </a:t>
+            </a:r>
+          </a:p>
+          <a:p>
+            <a:pPr marL="171450" indent="-171450">
+              <a:buFont typeface="Arial" panose="020B0604020202020204" pitchFamily="34" charset="0"/>
+              <a:buChar char="•"/>
+            </a:pPr>
+            <a:r>
+              <a:rPr lang="en-US" sz="1150" dirty="0">
+                <a:solidFill>
+                  <a:schemeClr val="tx1"/>
+                </a:solidFill>
+              </a:rPr>
+              <a:t>Three reasons we built it this way.</a:t>
             </a:r>
             <a:endParaRPr lang="en-US" sz="1150" dirty="0"/>
           </a:p>
@@ -21980,8 +22087,9 @@
           <a:bodyPr wrap="square" lIns="0" tIns="0" rIns="0" bIns="0" rtlCol="0" anchor="ctr"/>
           <a:lstStyle/>
           <a:p>
-            <a:pPr marL="0" indent="0">
-              <a:buNone/>
+            <a:pPr marL="171450" indent="-171450">
+              <a:buFont typeface="Arial" panose="020B0604020202020204" pitchFamily="34" charset="0"/>
+              <a:buChar char="•"/>
             </a:pPr>
             <a:r>
               <a:rPr lang="en-US" sz="1150" dirty="0">
@@ -21989,7 +22097,25 @@
                   <a:schemeClr val="tx1"/>
                 </a:solidFill>
               </a:rPr>
-              <a:t>Four families of input pooled by code at fixed weights, and the arithmetic from five models to one number. The app: the evidence graph and the pool.</a:t>
+              <a:t>Model Architecture</a:t>
+            </a:r>
+          </a:p>
+          <a:p>
+            <a:pPr marL="171450" indent="-171450">
+              <a:buFont typeface="Arial" panose="020B0604020202020204" pitchFamily="34" charset="0"/>
+              <a:buChar char="•"/>
+            </a:pPr>
+            <a:r>
+              <a:rPr lang="en-US" sz="1150" dirty="0"/>
+              <a:t>A</a:t>
+            </a:r>
+            <a:r>
+              <a:rPr lang="en-US" sz="1150" dirty="0">
+                <a:solidFill>
+                  <a:schemeClr val="tx1"/>
+                </a:solidFill>
+              </a:rPr>
+              <a:t>pp showcase</a:t>
             </a:r>
             <a:endParaRPr lang="en-US" sz="1150" dirty="0"/>
           </a:p>
@@ -22120,8 +22246,9 @@
           <a:bodyPr wrap="square" lIns="0" tIns="0" rIns="0" bIns="0" rtlCol="0" anchor="ctr"/>
           <a:lstStyle/>
           <a:p>
-            <a:pPr marL="0" indent="0">
-              <a:buNone/>
+            <a:pPr marL="171450" indent="-171450">
+              <a:buFont typeface="Arial" panose="020B0604020202020204" pitchFamily="34" charset="0"/>
+              <a:buChar char="•"/>
             </a:pPr>
             <a:r>
               <a:rPr lang="en-US" sz="1150" dirty="0">
@@ -22129,7 +22256,21 @@
                   <a:schemeClr val="tx1"/>
                 </a:solidFill>
               </a:rPr>
-              <a:t>What a language model cannot stop doing and how the harness works around it; the eight analysts; what each is asked and what it returned. The app: the prompts and the results.</a:t>
+              <a:t>Limitations of model and how we workaround it. </a:t>
+            </a:r>
+          </a:p>
+          <a:p>
+            <a:pPr marL="171450" indent="-171450">
+              <a:buFont typeface="Arial" panose="020B0604020202020204" pitchFamily="34" charset="0"/>
+              <a:buChar char="•"/>
+            </a:pPr>
+            <a:r>
+              <a:rPr lang="en-US" sz="1150" dirty="0">
+                <a:solidFill>
+                  <a:schemeClr val="tx1"/>
+                </a:solidFill>
+              </a:rPr>
+              <a:t>The app: the prompts and the results.</a:t>
             </a:r>
             <a:endParaRPr lang="en-US" sz="1150" dirty="0"/>
           </a:p>
@@ -22247,7 +22388,7 @@
         </p:nvSpPr>
         <p:spPr>
           <a:xfrm>
-            <a:off x="5120640" y="4910328"/>
+            <a:off x="5120640" y="4818888"/>
             <a:ext cx="6519672" cy="777240"/>
           </a:xfrm>
           <a:prstGeom prst="rect">
@@ -22260,8 +22401,9 @@
           <a:bodyPr wrap="square" lIns="0" tIns="0" rIns="0" bIns="0" rtlCol="0" anchor="ctr"/>
           <a:lstStyle/>
           <a:p>
-            <a:pPr marL="0" indent="0">
-              <a:buNone/>
+            <a:pPr marL="171450" indent="-171450">
+              <a:buFont typeface="Arial" panose="020B0604020202020204" pitchFamily="34" charset="0"/>
+              <a:buChar char="•"/>
             </a:pPr>
             <a:r>
               <a:rPr lang="en-US" sz="1150" dirty="0">
@@ -22269,7 +22411,7 @@
                   <a:schemeClr val="tx1"/>
                 </a:solidFill>
               </a:rPr>
-              <a:t>What each step of the harness bought, measured on four snapshots. The app: the scorecard, the drift table, the ledger and replay.</a:t>
+              <a:t>Effectiveness of the harness</a:t>
             </a:r>
             <a:endParaRPr lang="en-US" sz="1150" dirty="0"/>
           </a:p>
@@ -22387,7 +22529,7 @@
         </p:nvSpPr>
         <p:spPr>
           <a:xfrm>
-            <a:off x="5120640" y="5779008"/>
+            <a:off x="5120640" y="5596128"/>
             <a:ext cx="6519672" cy="777240"/>
           </a:xfrm>
           <a:prstGeom prst="rect">
@@ -22400,8 +22542,9 @@
           <a:bodyPr wrap="square" lIns="0" tIns="0" rIns="0" bIns="0" rtlCol="0" anchor="ctr"/>
           <a:lstStyle/>
           <a:p>
-            <a:pPr marL="0" indent="0">
-              <a:buNone/>
+            <a:pPr marL="171450" indent="-171450">
+              <a:buFont typeface="Arial" panose="020B0604020202020204" pitchFamily="34" charset="0"/>
+              <a:buChar char="•"/>
             </a:pPr>
             <a:r>
               <a:rPr lang="en-US" sz="1150" dirty="0">
@@ -22409,7 +22552,32 @@
                   <a:schemeClr val="tx1"/>
                 </a:solidFill>
               </a:rPr>
-              <a:t>Six follow-ups in order of value. Appendix: how the analysts' opinion moves the number; the probit.</a:t>
+              <a:t>Follow up</a:t>
+            </a:r>
+          </a:p>
+          <a:p>
+            <a:pPr marL="171450" indent="-171450">
+              <a:buFont typeface="Arial" panose="020B0604020202020204" pitchFamily="34" charset="0"/>
+              <a:buChar char="•"/>
+            </a:pPr>
+            <a:r>
+              <a:rPr lang="en-US" sz="1150" dirty="0" err="1"/>
+              <a:t>QnA</a:t>
+            </a:r>
+            <a:endParaRPr lang="en-US" sz="1150" dirty="0"/>
+          </a:p>
+          <a:p>
+            <a:pPr marL="171450" indent="-171450">
+              <a:buFont typeface="Arial" panose="020B0604020202020204" pitchFamily="34" charset="0"/>
+              <a:buChar char="•"/>
+            </a:pPr>
+            <a:r>
+              <a:rPr lang="en-US" sz="1150" dirty="0">
+                <a:solidFill>
+                  <a:schemeClr val="tx1"/>
+                </a:solidFill>
+              </a:rPr>
+              <a:t>Appendix: how the analysts' opinion moves the number; the probit.</a:t>
             </a:r>
             <a:endParaRPr lang="en-US" sz="1150" dirty="0"/>
           </a:p>
@@ -22863,6 +23031,13 @@
             </a:outerShdw>
           </a:effectLst>
         </p:spPr>
+        <p:txBody>
+          <a:bodyPr/>
+          <a:lstStyle/>
+          <a:p>
+            <a:endParaRPr lang="en-US"/>
+          </a:p>
+        </p:txBody>
       </p:sp>
       <p:sp>
         <p:nvSpPr>
@@ -22966,7 +23141,7 @@
                   <a:schemeClr val="tx1"/>
                 </a:solidFill>
               </a:rPr>
-              <a:t>23 items frozen on 28 October: futures, eight FRED series as first published, both statements, minutes, transcript, projections, speeches, 32 years of decisions, the NY Fed natural rate, prediction-market odds.</a:t>
+              <a:t>23 items frozen on 28 October: futures, eight FRED series as first published, Fed statements, minutes, transcript, projections, speeches, 32 years of decisions, the NY Fed natural rate, prediction-market odds.</a:t>
             </a:r>
             <a:endParaRPr lang="en-US" sz="1000" dirty="0"/>
           </a:p>
@@ -23002,7 +23177,7 @@
                   <a:schemeClr val="tx2"/>
                 </a:solidFill>
               </a:rPr>
-              <a:t>Classic models, pooled by code</a:t>
+              <a:t>Classic models, weighted by code</a:t>
             </a:r>
             <a:endParaRPr lang="en-US" sz="1150" dirty="0"/>
           </a:p>
@@ -23038,9 +23213,17 @@
                   <a:schemeClr val="tx1"/>
                 </a:solidFill>
               </a:rPr>
-              <a:t>Futures-implied 0.6, the Fed's Taylor rules 0.2, prediction-market odds 0.1, historical base rates 0.1; a 1.5% floor on every outcome. Pooled: no change 70.9%, hike 26.2%.</a:t>
-            </a:r>
-            <a:endParaRPr lang="en-US" sz="1000" dirty="0"/>
+              <a:t>Futures-implied 0.6, the Fed's Taylor rules 0.2, prediction-market odds 0.1, historical base rates 0.1; a 1.5% floor on every outcome. Pooled: </a:t>
+            </a:r>
+            <a:r>
+              <a:rPr lang="en-US" sz="1000" b="1" dirty="0">
+                <a:solidFill>
+                  <a:schemeClr val="tx1"/>
+                </a:solidFill>
+              </a:rPr>
+              <a:t>no change 70.9%, hike 26.2%.</a:t>
+            </a:r>
+            <a:endParaRPr lang="en-US" sz="1000" b="1" dirty="0"/>
           </a:p>
         </p:txBody>
       </p:sp>
@@ -23110,9 +23293,35 @@
                   <a:schemeClr val="tx1"/>
                 </a:solidFill>
               </a:rPr>
-              <a:t>Five specialists read the Fed's words; every claim quoted and verified by code. Their mean opinion, +4.0, moves 4 points toward a hike: no change 67.6%, +25 bps 22.4%, +50 bps 7.7%.</a:t>
-            </a:r>
-            <a:endParaRPr lang="en-US" sz="1000" dirty="0"/>
+              <a:t>Five specialists read the Fed's words; every claim quoted and verified by code.</a:t>
+            </a:r>
+          </a:p>
+          <a:p>
+            <a:pPr marL="0" indent="0">
+              <a:buNone/>
+            </a:pPr>
+            <a:r>
+              <a:rPr lang="en-US" sz="1000" dirty="0">
+                <a:solidFill>
+                  <a:schemeClr val="tx1"/>
+                </a:solidFill>
+              </a:rPr>
+              <a:t> Their mean opinion moves 4 points toward a hike: </a:t>
+            </a:r>
+          </a:p>
+          <a:p>
+            <a:pPr marL="0" indent="0">
+              <a:buNone/>
+            </a:pPr>
+            <a:r>
+              <a:rPr lang="en-US" sz="1000" b="1" dirty="0">
+                <a:solidFill>
+                  <a:schemeClr val="tx1"/>
+                </a:solidFill>
+              </a:rPr>
+              <a:t>no change 67.6%, +25 bps 22.4%, +50 bps 7.7%.</a:t>
+            </a:r>
+            <a:endParaRPr lang="en-US" sz="1000" b="1" dirty="0"/>
           </a:p>
         </p:txBody>
       </p:sp>
@@ -23149,6 +23358,13 @@
             </a:outerShdw>
           </a:effectLst>
         </p:spPr>
+        <p:txBody>
+          <a:bodyPr/>
+          <a:lstStyle/>
+          <a:p>
+            <a:endParaRPr lang="en-US"/>
+          </a:p>
+        </p:txBody>
       </p:sp>
       <p:sp>
         <p:nvSpPr>
@@ -23274,7 +23490,7 @@
         </p:nvGraphicFramePr>
         <p:xfrm>
           <a:off x="6400800" y="4114800"/>
-          <a:ext cx="5010912" cy="914400"/>
+          <a:ext cx="5056632" cy="1536192"/>
         </p:xfrm>
         <a:graphic>
           <a:graphicData uri="http://schemas.openxmlformats.org/drawingml/2006/table">
@@ -27170,7 +27386,23 @@
                   <a:schemeClr val="tx1"/>
                 </a:solidFill>
               </a:rPr>
-              <a:t>Eight decisions a year: a good year proves nothing</a:t>
+              <a:t>We are at early stages of model building hence </a:t>
+            </a:r>
+            <a:r>
+              <a:rPr lang="en-US" sz="1300" b="1" dirty="0">
+                <a:solidFill>
+                  <a:schemeClr val="tx1"/>
+                </a:solidFill>
+              </a:rPr>
+              <a:t>process takes precedence over results</a:t>
+            </a:r>
+            <a:r>
+              <a:rPr lang="en-US" sz="1300" dirty="0">
+                <a:solidFill>
+                  <a:schemeClr val="tx1"/>
+                </a:solidFill>
+              </a:rPr>
+              <a:t>.</a:t>
             </a:r>
             <a:endParaRPr lang="en-US" sz="1300" dirty="0"/>
           </a:p>
@@ -27188,7 +27420,87 @@
                   <a:schemeClr val="tx1"/>
                 </a:solidFill>
               </a:rPr>
-              <a:t>The yardstick is a ten-point scorecard, fixed before any code: same evidence, same answer? every claim quoted? any number from memory? a shock moves the number the right way?</a:t>
+              <a:t>A good repeatable process ensures repeatability: </a:t>
+            </a:r>
+          </a:p>
+          <a:p>
+            <a:pPr marL="800100" lvl="1" indent="-342900">
+              <a:spcAft>
+                <a:spcPts val="800"/>
+              </a:spcAft>
+              <a:buSzPct val="100000"/>
+              <a:buChar char="•"/>
+            </a:pPr>
+            <a:r>
+              <a:rPr lang="en-US" sz="1300" dirty="0"/>
+              <a:t>S</a:t>
+            </a:r>
+            <a:r>
+              <a:rPr lang="en-US" sz="1300" dirty="0">
+                <a:solidFill>
+                  <a:schemeClr val="tx1"/>
+                </a:solidFill>
+              </a:rPr>
+              <a:t>ame evidence, same answer?</a:t>
+            </a:r>
+          </a:p>
+          <a:p>
+            <a:pPr marL="800100" lvl="1" indent="-342900">
+              <a:spcAft>
+                <a:spcPts val="800"/>
+              </a:spcAft>
+              <a:buSzPct val="100000"/>
+              <a:buChar char="•"/>
+            </a:pPr>
+            <a:r>
+              <a:rPr lang="en-US" sz="1300" dirty="0"/>
+              <a:t>Is </a:t>
+            </a:r>
+            <a:r>
+              <a:rPr lang="en-US" sz="1300" dirty="0">
+                <a:solidFill>
+                  <a:schemeClr val="tx1"/>
+                </a:solidFill>
+              </a:rPr>
+              <a:t>every claim quoted? </a:t>
+            </a:r>
+          </a:p>
+          <a:p>
+            <a:pPr marL="800100" lvl="1" indent="-342900">
+              <a:spcAft>
+                <a:spcPts val="800"/>
+              </a:spcAft>
+              <a:buSzPct val="100000"/>
+              <a:buChar char="•"/>
+            </a:pPr>
+            <a:r>
+              <a:rPr lang="en-US" sz="1300" dirty="0">
+                <a:solidFill>
+                  <a:schemeClr val="tx1"/>
+                </a:solidFill>
+              </a:rPr>
+              <a:t>any number from memory? </a:t>
+            </a:r>
+          </a:p>
+          <a:p>
+            <a:pPr marL="800100" lvl="1" indent="-342900">
+              <a:spcAft>
+                <a:spcPts val="800"/>
+              </a:spcAft>
+              <a:buSzPct val="100000"/>
+              <a:buChar char="•"/>
+            </a:pPr>
+            <a:r>
+              <a:rPr lang="en-US" sz="1300" dirty="0"/>
+              <a:t>Does </a:t>
+            </a:r>
+            <a:r>
+              <a:rPr lang="en-US" sz="1300" dirty="0">
+                <a:solidFill>
+                  <a:schemeClr val="tx1"/>
+                </a:solidFill>
+              </a:rPr>
+              <a:t>a shock moves the number the right way?</a:t>
             </a:r>
             <a:endParaRPr lang="en-US" sz="1300" dirty="0"/>
           </a:p>
@@ -27351,7 +27663,7 @@
                   <a:schemeClr val="tx2"/>
                 </a:solidFill>
               </a:rPr>
-              <a:t>Every step is auditable</a:t>
+              <a:t>We build every step to be auditable</a:t>
             </a:r>
             <a:endParaRPr lang="en-US" sz="1500" dirty="0"/>
           </a:p>
@@ -27409,9 +27721,17 @@
                   <a:schemeClr val="tx1"/>
                 </a:solidFill>
               </a:rPr>
-              <a:t>Every number it uses must exist in the frozen evidence, or it is flagged as from memory</a:t>
-            </a:r>
-            <a:endParaRPr lang="en-US" sz="1300" dirty="0"/>
+              <a:t>Every number it uses must exist in the frozen evidence, or </a:t>
+            </a:r>
+            <a:r>
+              <a:rPr lang="en-US" sz="1300" b="1" dirty="0">
+                <a:solidFill>
+                  <a:schemeClr val="tx1"/>
+                </a:solidFill>
+              </a:rPr>
+              <a:t>it is flagged as from memory</a:t>
+            </a:r>
+            <a:endParaRPr lang="en-US" sz="1300" b="1" dirty="0"/>
           </a:p>
           <a:p>
             <a:pPr marL="342900" indent="-342900">
@@ -27429,7 +27749,27 @@
               </a:rPr>
               <a:t>Every model lists the items it read; every ledger entry recomputes from its snapshot. If it is not quoted, it does not count</a:t>
             </a:r>
-            <a:endParaRPr lang="en-US" sz="1300" dirty="0"/>
+          </a:p>
+          <a:p>
+            <a:pPr marL="342900" indent="-342900">
+              <a:spcAft>
+                <a:spcPts val="800"/>
+              </a:spcAft>
+              <a:buSzPct val="100000"/>
+              <a:buChar char="•"/>
+            </a:pPr>
+            <a:r>
+              <a:rPr lang="en-US" sz="1300" dirty="0"/>
+              <a:t>We believe that this method allows us to </a:t>
+            </a:r>
+            <a:r>
+              <a:rPr lang="en-US" sz="1300" b="1" dirty="0"/>
+              <a:t>use less expensive models </a:t>
+            </a:r>
+            <a:r>
+              <a:rPr lang="en-US" sz="1300" dirty="0"/>
+              <a:t>as well</a:t>
+            </a:r>
           </a:p>
         </p:txBody>
       </p:sp>
@@ -27612,7 +27952,7 @@
                   <a:schemeClr val="tx1"/>
                 </a:solidFill>
               </a:rPr>
-              <a:t>Everything is quotable and the analysts can read only the evidence, so a wrong call is a traceable wrong call: we see which quote led where</a:t>
+              <a:t>Since is quotable and the human analyst can read only the evidence, so a wrong call is a traceable wrong call: we see which quote led were.</a:t>
             </a:r>
             <a:endParaRPr lang="en-US" sz="1300" dirty="0"/>
           </a:p>
@@ -27758,7 +28098,7 @@
                   <a:schemeClr val="tx2"/>
                 </a:solidFill>
               </a:rPr>
-              <a:t>Model architecture</a:t>
+              <a:t>Model architecture: Ensemble model</a:t>
             </a:r>
             <a:endParaRPr lang="en-US" sz="3200" dirty="0"/>
           </a:p>
@@ -28412,9 +28752,31 @@
                   <a:schemeClr val="tx1"/>
                 </a:solidFill>
               </a:rPr>
-              <a:t>Weights 0.6 / 0.2 / 0.1 / 0.1, fixed and published. A 1.5% floor on every outcome. Then the analysts' opinion, capped at 10 points. Code does this; no model writes the number.</a:t>
-            </a:r>
+              <a:t>Weights 0.6 / 0.2 / 0.1 / 0.1, fixed and published. A 1.5% floor on every outcome.</a:t>
+            </a:r>
+          </a:p>
+          <a:p>
+            <a:pPr marL="0" indent="0" algn="ctr">
+              <a:buNone/>
+            </a:pPr>
             <a:endParaRPr lang="en-US" sz="950" dirty="0"/>
+          </a:p>
+          <a:p>
+            <a:pPr marL="0" indent="0" algn="ctr">
+              <a:buNone/>
+            </a:pPr>
+            <a:r>
+              <a:rPr lang="en-US" sz="950" dirty="0">
+                <a:solidFill>
+                  <a:schemeClr val="tx1"/>
+                </a:solidFill>
+              </a:rPr>
+              <a:t> </a:t>
+            </a:r>
+            <a:r>
+              <a:rPr lang="en-US" sz="950" dirty="0"/>
+              <a:t>LLM analyst opinions then skew it.</a:t>
+            </a:r>
           </a:p>
         </p:txBody>
       </p:sp>

--- a/docs/FedCast_Fullerton.pptx
+++ b/docs/FedCast_Fullerton.pptx
@@ -1091,9 +1091,16 @@
           <a:lstStyle/>
           <a:p>
             <a:r>
-              <a:rPr lang="en-US" dirty="0"/>
-              <a:t>Before the session: start the app (fedcast ui), press Pull evidence then Run forecast so the top bar reads 'under an hour ago', open the Forecast view, and have the Evidence graph, Analyst prompts, Analyst results and Scorecard tabs one click away. Open with the one-line thesis: a language model inside an engineered harness gives forecasts that are measurably more repeatable and more faithful to evidence than the same model asked naively, and the way to prove it is to measure the process, not to wait for eight decisions a year to come true.</a:t>
-            </a:r>
+              <a:rPr lang="en-US"/>
+              <a:t>BEFORE: app open at localhost:8765, evidence pulled today, Forecast view showing the December number. Tabs ready: Evidence graph, Analyst prompts, Analyst results, Scorecard, Ledger.</a:t>
+            </a:r>
+          </a:p>
+          <a:p>
+            <a:r>
+              <a:rPr lang="en-US"/>
+              <a:t>OPEN (30 s): one sentence. A forecaster for the next Fed decision, built to be judged by its process, not its luck. Today: how it called 28 October, how it is built, what the language model is allowed to do, and how we prove it behaves.</a:t>
+            </a:r>
+            <a:endParaRPr lang="en-US" dirty="0"/>
           </a:p>
         </p:txBody>
       </p:sp>
@@ -1178,9 +1185,10 @@
           <a:lstStyle/>
           <a:p>
             <a:r>
-              <a:rPr lang="en-US" dirty="0"/>
-              <a:t>This is the longest demo. Start at the raw futures price so the audience sees arithmetic, not a black box. Then the pool box, then one click into an evidence item to show the frozen text.</a:t>
-            </a:r>
+              <a:rPr lang="en-US"/>
+              <a:t>DEMO 2, 3 MIN, the longest. Evidence graph: click Market-implied (futures price, 100 minus price, expected change, the 90/10 split: arithmetic, not a black box). Click Pool (weights, pooled line, the specialists' opinion line, Machine track). Click one evidence item (frozen text, link to the original). Say: blue is in the number, grey is computed but not in it; the language model's opinion is one line between Pooled and Machine track: it can tilt, it cannot write.</a:t>
+            </a:r>
+            <a:endParaRPr lang="en-US" dirty="0"/>
           </a:p>
         </p:txBody>
       </p:sp>
@@ -1265,9 +1273,10 @@
           <a:lstStyle/>
           <a:p>
             <a:r>
-              <a:rPr lang="en-US" dirty="0"/>
-              <a:t>Three things a language model cannot be made to stop doing: it remembers, it varies between runs, and it can invent support. None is removed; each is designed around. The proof is on the harness slide later.</a:t>
-            </a:r>
+              <a:rPr lang="en-US"/>
+              <a:t>2 MIN. Three things a language model cannot be made to stop doing. Memory: instruction, quote per claim, every number checked, sent back once. Variance: fixed schema, five identical runs, the spread measured, pass mark 2 points. Invented support: every quote matched by code character for character, bounds, one repair round. Say: 'none is removed; each is designed around, and measured.' The proof comes two slides later.</a:t>
+            </a:r>
+            <a:endParaRPr lang="en-US" dirty="0"/>
           </a:p>
         </p:txBody>
       </p:sp>
@@ -1352,9 +1361,10 @@
           <a:lstStyle/>
           <a:p>
             <a:r>
-              <a:rPr lang="en-US" dirty="0"/>
-              <a:t>One model, the same frozen evidence, eight configurations. Left: analysts 1 to 3 are controls, drawn grey and dashed; they never enter the number. Right: the five specialists that do. Every analyst runs five times on the same snapshot; for 1 to 3 those runs build the benchmark 4 to 8 are measured against. Analyst 1 sets the baseline (variance, numbers from memory, nothing quoted); 2 tests what immutable evidence fixes; 3 tests the answer shape and code verification. Each rung adds one thing, so the change in the measurements is the value of that thing.</a:t>
-            </a:r>
+              <a:rPr lang="en-US"/>
+              <a:t>2 MIN. Left, the three controls, grey and dashed: they never enter the number. 1 naive: the question only. 2: evidence shown, free text. 3: same evidence, fixed shape, verifier. Right, the five specialists that do enter: one slice each, the same shape and verifier. Each is asked a question about its slice, never a probability; it returns quoted claims and an opinion from -10 to +10. Bottom: every analyst runs five times; 1 to 3 build the benchmark 4 to 8 are measured against.</a:t>
+            </a:r>
+            <a:endParaRPr lang="en-US" dirty="0"/>
           </a:p>
         </p:txBody>
       </p:sp>
@@ -1439,9 +1449,10 @@
           <a:lstStyle/>
           <a:p>
             <a:r>
-              <a:rPr lang="en-US" dirty="0"/>
-              <a:t>Open analyst 1 first so the contrast with analyst 6 lands. Scroll the full prompt slowly past the schema and the pre-read; do not read it out.</a:t>
-            </a:r>
+              <a:rPr lang="en-US"/>
+              <a:t>DEMO 3, 2 MIN. Analyst prompts view. Open analyst 1: 195 characters, no evidence. Open analyst 6: the system prompt, the schema (claims with quote and item id; the opinion bounded -10 to +10), the inflation pre-read, the item ids. Say: 'if it is not on this page, the analyst does not get it; the only difference between analyst 1 and analyst 6 is this page.'</a:t>
+            </a:r>
+            <a:endParaRPr lang="en-US" dirty="0"/>
           </a:p>
         </p:txBody>
       </p:sp>
@@ -1526,17 +1537,16 @@
           <a:lstStyle/>
           <a:p>
             <a:r>
-              <a:rPr lang="en-US" dirty="0"/>
-              <a:t>Three charts, one per dimension, averaged over the four snapshots. Left: how much the answer moves between identical runs. The step that matters is analyst 2 to analyst 3: the answer shape and the verifier take the wobble from three and a half points to under one. Middle: numbers from memory, gone as soon as the evidence is shown. Right: share of claims whose quote code found verbatim; analyst 2 cannot be measured because it quotes nothing. The specialists keep what analyst 3 achieved. For analysts 3 to 8 the wobble is </a:t>
-            </a:r>
-            <a:r>
               <a:rPr lang="en-US"/>
-              <a:t>in their opinion, which is already in points of probability, </a:t>
-            </a:r>
-            <a:r>
-              <a:rPr lang="en-US" dirty="0"/>
-              <a:t>so the four bars are comparable.</a:t>
-            </a:r>
+              <a:t>2 MIN. THIS IS THE PROOF. Left chart: wobble between identical runs, 4.2 for the naive model, 3.5 with evidence, 0.6 with the answer shape and verifier, 0.8 for the specialists. Middle: numbers from memory, 37 to 0 as soon as evidence is shown. Right: quoted claims, 0 to 99.7%.</a:t>
+            </a:r>
+          </a:p>
+          <a:p>
+            <a:r>
+              <a:rPr lang="en-US"/>
+              <a:t>Say: 'the step from analyst 2 to analyst 3 is the harness. Evidence alone does not make the model repeatable; the answer shape plus code verification does. Specialists keep that and add attribution.'</a:t>
+            </a:r>
+            <a:endParaRPr lang="en-US" dirty="0"/>
           </a:p>
         </p:txBody>
       </p:sp>
@@ -1621,17 +1631,10 @@
           <a:lstStyle/>
           <a:p>
             <a:r>
-              <a:rPr lang="en-US" dirty="0"/>
-              <a:t>One line of method, then the outcome. Each specialist runs five times on the same frozen snapshot; the five answers must sit within the variance pass mark, every claim must carry a quote code finds, and no number may come from memory. Only then </a:t>
-            </a:r>
-            <a:r>
               <a:rPr lang="en-US"/>
-              <a:t>does the opinion count. </a:t>
-            </a:r>
-            <a:r>
-              <a:rPr lang="en-US" dirty="0"/>
-              <a:t>The band is the 28 October run; bottom left is what the five said and what it did to the number; bottom right is one claim as recorded, with the quote code found.</a:t>
-            </a:r>
+              <a:t>2 MIN. The 28 October run: 25 runs, 25 prompts, 263 claims, all 263 verified, 0 numbers from memory, five opinions. Four say hike, labour says hold; mean +4.0; 4 points moved toward a hike: +25 from 20.2 to 22.4. Right: one real claim with its quote found by code in the September statement. Say: 'two dissents for a hike is that opinion, in the vote.'</a:t>
+            </a:r>
+            <a:endParaRPr lang="en-US" dirty="0"/>
           </a:p>
         </p:txBody>
       </p:sp>
@@ -1716,9 +1719,10 @@
           <a:lstStyle/>
           <a:p>
             <a:r>
-              <a:rPr lang="en-US" dirty="0"/>
-              <a:t>If asked where a quote comes from, open the statement claim on analyst 4: the quote is the statement's own line, found by code in item fed.statement.2026-09-16.</a:t>
-            </a:r>
+              <a:rPr lang="en-US"/>
+              <a:t>DEMO 4, 2 MIN. Analyst results. Analyst 1 card: a cut, numbers from memory flagged. Analyst 4 card: opinion, grounded, leaked, watch-out badges; one claim with its quote and the verified mark. If asked where a quote comes from, open the statement claim on analyst 4: the statement's own line, found by code.</a:t>
+            </a:r>
+            <a:endParaRPr lang="en-US" dirty="0"/>
           </a:p>
         </p:txBody>
       </p:sp>
@@ -1803,9 +1807,10 @@
           <a:lstStyle/>
           <a:p>
             <a:r>
-              <a:rPr lang="en-US" dirty="0"/>
-              <a:t>If time is short, skip the dropdown and go straight to the over-time table.</a:t>
-            </a:r>
+              <a:rPr lang="en-US"/>
+              <a:t>DEMO 5, 2 MIN. Scorecard view. Pick 24 October, then 28 October in the dropdown; expand 'what was checked' under Shock direction (seven shocks, each with its delta); scroll to the over-time table. Say: 'red in the control columns is expected; red on the right would be a defect. Two red cells have already pointed at defects, both fixed.' If short on time, go straight to the over-time table.</a:t>
+            </a:r>
+            <a:endParaRPr lang="en-US" dirty="0"/>
           </a:p>
         </p:txBody>
       </p:sp>
@@ -1890,9 +1895,10 @@
           <a:lstStyle/>
           <a:p>
             <a:r>
-              <a:rPr lang="en-US" dirty="0"/>
-              <a:t>One minute. Press the button, read the result line, move on.</a:t>
-            </a:r>
+              <a:rPr lang="en-US"/>
+              <a:t>DEMO 6, 1 MIN. Ledger view, press Verify ledger. Read the result line: chain intact, entries under the current spec recompute exactly. Say: 'nothing here can be edited without the chain breaking; any entry recomputes from its snapshot; eight numbered amendments, each with its reason.' Move on.</a:t>
+            </a:r>
+            <a:endParaRPr lang="en-US" dirty="0"/>
           </a:p>
         </p:txBody>
       </p:sp>
@@ -1977,9 +1983,10 @@
           <a:lstStyle/>
           <a:p>
             <a:r>
-              <a:rPr lang="en-US" dirty="0"/>
-              <a:t>Six follow-ups, in order of value. One: pre-registered weight sets scored on every live decision, so the weights stop being judgement. Two: reasoning quality graded by people in the app, which becomes the tenth measured dimension and a gate. Three: an events agent for the regime shifts the models cannot read. Four: a second model family to show the harness, not the model, does the work. Five: other central banks; the chain needs a calendar, a rate series, the statements and a curve, and the scorecard transfers unchanged. Six: better classical models, judged by the expanding window only.</a:t>
-            </a:r>
+              <a:rPr lang="en-US"/>
+              <a:t>2 MIN. December is on file (entry #23, +25 at 73.6%). Six follow-ups in order of value: 1 pre-registered weight sets scored on every live decision; 2 reasoning quality graded by people in the app, the grader trusted only once it agrees with the hand grades; 3 an events agent for regime shifts; 4 a second model family; 5 other central banks, same chain; 6 a classical model built for class imbalance. Ask the room which they would do first.</a:t>
+            </a:r>
+            <a:endParaRPr lang="en-US" dirty="0"/>
           </a:p>
         </p:txBody>
       </p:sp>
@@ -2064,9 +2071,16 @@
           <a:lstStyle/>
           <a:p>
             <a:r>
-              <a:rPr lang="en-US" dirty="0"/>
-              <a:t>One minute. The thread: every system on the right put a model's output in front of people making live decisions, and the hard part was never the model, it was earning trust in what it said. FedCast is that problem made explicit and measurable.</a:t>
-            </a:r>
+              <a:rPr lang="en-US"/>
+              <a:t>1 MIN. Thread: every system here put a model's output in front of people making live decisions; the hard part was never the model, it was earning trust in what it said. FedCast is that problem made measurable.</a:t>
+            </a:r>
+          </a:p>
+          <a:p>
+            <a:r>
+              <a:rPr lang="en-US"/>
+              <a:t>Do not read the cards; pick one (investment analytics, COVID) and move on.</a:t>
+            </a:r>
+            <a:endParaRPr lang="en-US" dirty="0"/>
           </a:p>
         </p:txBody>
       </p:sp>
@@ -2151,9 +2165,10 @@
           <a:lstStyle/>
           <a:p>
             <a:r>
-              <a:rPr lang="en-US" dirty="0"/>
-              <a:t>Close on the ask. The forecast for 28 October is on file; the scoring is automatic from here; what the room can add is scrutiny and the next target.</a:t>
-            </a:r>
+              <a:rPr lang="en-US"/>
+              <a:t>1 MIN. Close on the three lines, then the ask: scrutinise the scorecard, challenge a quote, name the next decision that deserves the same chain. Questions.</a:t>
+            </a:r>
+            <a:endParaRPr lang="en-US" dirty="0"/>
           </a:p>
         </p:txBody>
       </p:sp>
@@ -2238,9 +2253,10 @@
           <a:lstStyle/>
           <a:p>
             <a:r>
-              <a:rPr lang="en-US" dirty="0"/>
-              <a:t>Read left to right as an evolution. Analyst 1 wobbles by three to five points between identical runs, cites nothing, and leaks three dozen numbers from memory; it still thinks the Fed is cutting. Adding the evidence (analyst 2) removes the leaks but not the wobble, and nothing can be checked. Adding the answer shape and the verifier (analyst 3) is the step that makes the output stable and fully verifiable. Specialists (4 to 8) keep that and add attribution. Same model, same day; the difference at each step is the one thing added.</a:t>
-            </a:r>
+              <a:rPr lang="en-US"/>
+              <a:t>BACKUP. The full ladder table, four snapshots. Use if someone asks for the numbers behind the charts on slide 14.</a:t>
+            </a:r>
+            <a:endParaRPr lang="en-US" dirty="0"/>
           </a:p>
         </p:txBody>
       </p:sp>
@@ -2325,9 +2341,10 @@
           <a:lstStyle/>
           <a:p>
             <a:r>
-              <a:rPr lang="en-US" dirty="0"/>
-              <a:t>Three parts. The score: already in points of probability, capped at 10 like a human view. The average: one vote each. The spread: the points leave every bucket on the hold-or-cut side and land on both hike buckets, in proportion to size and distance from the middle, so the shape of the distribution is kept and nothing goes to zero.</a:t>
-            </a:r>
+              <a:rPr lang="en-US"/>
+              <a:t>APPENDIX. Use if asked how +4.0 moves the number. Three parts: the opinion (points of probability, capped at 10 like a human view); the average (one vote each); the spread (each bucket re-weighted by e to the steepness times its position, rescaled; the steepness is searched so exactly 4 points cross). The table is entry #18.</a:t>
+            </a:r>
+            <a:endParaRPr lang="en-US" dirty="0"/>
           </a:p>
         </p:txBody>
       </p:sp>
@@ -2412,9 +2429,10 @@
           <a:lstStyle/>
           <a:p>
             <a:r>
-              <a:rPr lang="en-US" dirty="0"/>
-              <a:t>The quant side's own test. A first ordered probit, spec frozen before fitting, failed its out-of-sample gate and was reported, not tuned. A second version beats the base rate on the expanding window but was specified after seeing the first fail, so it carries a contamination caveat and waits for live decisions. The base rates, which need no fitting, beat the fitted model and are the yardstick. Below: why no gradient-boosted anything.</a:t>
-            </a:r>
+              <a:rPr lang="en-US"/>
+              <a:t>APPENDIX. Use if asked about the probit or classic ML. v1 failed its gate; v2 beats the base rate but was specified after seeing v1 fail, so it is caveated and sits at weight 0. The base rate given the previous decision beat the fitted model and is in the pool. Small, unbalanced sample: no big models.</a:t>
+            </a:r>
+            <a:endParaRPr lang="en-US" dirty="0"/>
           </a:p>
         </p:txBody>
       </p:sp>
@@ -2499,9 +2517,10 @@
           <a:lstStyle/>
           <a:p>
             <a:r>
-              <a:rPr lang="en-US" dirty="0"/>
-              <a:t>One minute. The thread: a decision was made, here is how we called it, why we built the tool this way, how the number is put together, what the language model is allowed to do and how we prove it behaves, and what comes next. Six stops, with the app opened between them.</a:t>
-            </a:r>
+              <a:rPr lang="en-US"/>
+              <a:t>30 S. Six stops in this order; the app opens between them. Say: 'what happened, why we built it this way, how the number is built, what the LLM may do, how we prove it, what is next.'</a:t>
+            </a:r>
+            <a:endParaRPr lang="en-US" dirty="0"/>
           </a:p>
         </p:txBody>
       </p:sp>
@@ -2586,9 +2605,28 @@
           <a:lstStyle/>
           <a:p>
             <a:r>
-              <a:rPr lang="en-US" dirty="0"/>
-              <a:t>Left, three points: where the numbers come from, the pool of classic models, the LLM analysts on top. Right, three points: we hit the target but so did the market and the odds, and we do not claim to beat them at five weeks; the LLM analysts got the direction right, and the table shows each one's opinion against the vote; every reason is a quote found in the evidence, and one decision proves little, so the scoring is formal and the rest of the talk is about process.</a:t>
-            </a:r>
+              <a:rPr lang="en-US"/>
+              <a:t>2 MIN. Top row left to right: the date, our number nine hours before, what the Fed did, the vote.</a:t>
+            </a:r>
+          </a:p>
+          <a:p>
+            <a:r>
+              <a:rPr lang="en-US"/>
+              <a:t>LEFT, three points: 23 frozen items; four classic models pooled by code at fixed weights (70.9% no change); five LLM analysts on top, opinion +4.0, final 67.6%.</a:t>
+            </a:r>
+          </a:p>
+          <a:p>
+            <a:r>
+              <a:rPr lang="en-US"/>
+              <a:t>RIGHT, three points: we hit the target, so did the market and the odds, no claim to beat them at five weeks; the LLM analysts got the direction right, table: four hawks, labour the dove, mean +4.0, and the vote had two dissents for a hike; every reason is a quote, one decision proves little, scored formally when the rate row lands.</a:t>
+            </a:r>
+          </a:p>
+          <a:p>
+            <a:r>
+              <a:rPr lang="en-US"/>
+              <a:t>Then: 'the rest of this talk is how that number was made and why you can trust the process.'</a:t>
+            </a:r>
+            <a:endParaRPr lang="en-US" dirty="0"/>
           </a:p>
         </p:txBody>
       </p:sp>
@@ -2673,9 +2711,10 @@
           <a:lstStyle/>
           <a:p>
             <a:r>
-              <a:rPr lang="en-US" dirty="0"/>
-              <a:t>Keep this to one minute. The point is only that the number exists, is dated, and is traceable. Do not explain the models yet.</a:t>
-            </a:r>
+              <a:rPr lang="en-US"/>
+              <a:t>DEMO 1, 1 MIN. Forecast view. Point at the two tracks, the meta line (entry, snapshot hash, specialists' opinion), the five bars. Say: made at &lt;time&gt; from evidence frozen at &lt;time&gt;; everything next is how it got there. Do not explain models yet.</a:t>
+            </a:r>
+            <a:endParaRPr lang="en-US" dirty="0"/>
           </a:p>
         </p:txBody>
       </p:sp>
@@ -2760,9 +2799,16 @@
           <a:lstStyle/>
           <a:p>
             <a:r>
-              <a:rPr lang="en-US" dirty="0"/>
-              <a:t>Four kinds of signal exist already; each is good at one thing. Market prices are the best single predictor at thirty days and are the anchor of the pool. Surveys carry judgement; FedCast takes the data the committee reads instead, as history and a fitted model. The rules are the Fed's own benchmarks. The LLM papers show a model can read the Fed, on sixteen meetings. FedCast's claim is not a better guess but the combination: one of each kind, pooled by code at fixed weights, every number traceable to frozen evidence.</a:t>
-            </a:r>
+              <a:rPr lang="en-US"/>
+              <a:t>2 MIN. Four kinds of signal exist; each good at one thing. Market prices: best single predictor at 30 days, about 88% right, the anchor of our pool. Rules: transparent, but r* and u* are unobservable. Surveys: slow. LLM papers: 90%+ on sixteen meetings, no verification, no replay.</a:t>
+            </a:r>
+          </a:p>
+          <a:p>
+            <a:r>
+              <a:rPr lang="en-US"/>
+              <a:t>The line: pure data on the left, pure model on the right. FedCast in the middle: one input from each, combined by code at fixed weights. 'Neither a formula nor an oracle.'</a:t>
+            </a:r>
+            <a:endParaRPr lang="en-US" dirty="0"/>
           </a:p>
         </p:txBody>
       </p:sp>
@@ -2847,9 +2893,16 @@
           <a:lstStyle/>
           <a:p>
             <a:r>
-              <a:rPr lang="en-US" dirty="0"/>
-              <a:t>Three reasons, the first is the one to land. Eight decisions a year cannot tell skill from luck, so we judge the process with a scorecard fixed before any code. Second, auditable means concrete: an analyst that says inflation is elevated must quote the line it read and code must find it. Third, because everything is quotable and the analysts can read only the evidence, a wrong call is a traceable wrong call, and because the harness is repeatable it goes wrong the same way every time, so a fix can be tested and stays fixed. Details later in the deck: the ladder, the scorecard, the drift table.</a:t>
-            </a:r>
+              <a:rPr lang="en-US"/>
+              <a:t>2 MIN. The one to land is point 1: eight decisions a year cannot tell skill from luck, so we judge the process, with questions fixed before any code: same evidence same answer, every claim quoted, no number from memory, shocks move the number the right way. Outcomes logged, never used to tune.</a:t>
+            </a:r>
+          </a:p>
+          <a:p>
+            <a:r>
+              <a:rPr lang="en-US"/>
+              <a:t>Point 2, concrete: an analyst that says inflation is elevated must quote the line, and code checks it. Point 3: because everything is quotable and repeatable, a wrong call is traceable and a fix stays fixed: audit, fix, re-measure.</a:t>
+            </a:r>
+            <a:endParaRPr lang="en-US" dirty="0"/>
           </a:p>
         </p:txBody>
       </p:sp>
@@ -2934,9 +2987,16 @@
           <a:lstStyle/>
           <a:p>
             <a:r>
-              <a:rPr lang="en-US" dirty="0"/>
-              <a:t>Left: the diagram from the brief. Four families of input, combined by code with fixed, published weights; no model writes the number. The language-model family enters only as a bounded opinion. Right: the chain in order, each line a view in the app. Walk the diagram first, then the chain.</a:t>
-            </a:r>
+              <a:rPr lang="en-US"/>
+              <a:t>2 MIN. Left, the four families: economic predictors (futures, Taylor rules, odds), empirical history, classic ML (probit, weight 0), LLM-derived (bounded opinion, not a weight). Pooled by code; no model writes the number.</a:t>
+            </a:r>
+          </a:p>
+          <a:p>
+            <a:r>
+              <a:rPr lang="en-US"/>
+              <a:t>Right, the chain in order: evidence, signals, pool, analysts (only 4 to 8 enter; 1 to 3 are controls), you (bounded, typed channels), ledger. Say: 'every line here is a view in the app.'</a:t>
+            </a:r>
+            <a:endParaRPr lang="en-US" dirty="0"/>
           </a:p>
         </p:txBody>
       </p:sp>
@@ -3021,25 +3081,16 @@
           <a:lstStyle/>
           <a:p>
             <a:r>
-              <a:rPr lang="en-US" dirty="0"/>
-              <a:t>Entry 18, the final one before the meeting. The pool is a weighted average, then the floor. The specialists</a:t>
-            </a:r>
-            <a:r>
               <a:rPr lang="en-US"/>
-              <a:t>' mean score of +4.0 is 4.0 points of probability </a:t>
-            </a:r>
-            <a:r>
-              <a:rPr lang="en-US" dirty="0"/>
-              <a:t>moved toward a hike, through the same capped mechanism a human view uses</a:t>
-            </a:r>
+              <a:t>2 MIN. Read the table top to bottom: what each model reads, its distribution, its weight. Pooled line: weighted average then the 1.5% floor (no outcome below 1.5%, so nothing is ever called impossible). The tinted row: the specialists' opinion, +4.0, moves 4 points toward a hike, after the pool, capped at 10. Machine forecast: 67.6 / 22.4 / 7.7.</a:t>
+            </a:r>
+          </a:p>
+          <a:p>
             <a:r>
               <a:rPr lang="en-US"/>
-              <a:t>. The opinion </a:t>
-            </a:r>
-            <a:r>
-              <a:rPr lang="en-US" dirty="0"/>
-              <a:t>row is tinted and labelled 'after pooling': it is a modifier on the pooled number, not a model in the pool. Then the footer: the weights are judgement, logged; ideally they would be backtested, but there is no live record yet, so live scores from 28 October onward decide them by amendment.</a:t>
-            </a:r>
+              <a:t>Red box: weights are judgement, logged, never fitted; the backtest decides who is in the pool, live scores will decide the weights, by amendment.</a:t>
+            </a:r>
+            <a:endParaRPr lang="en-US" dirty="0"/>
           </a:p>
         </p:txBody>
       </p:sp>
@@ -7805,7 +7856,7 @@
                   <a:srgbClr val="CADCFC"/>
                 </a:solidFill>
               </a:rPr>
-              <a:t>Each specialist is asked one question about its own slice (above), never for a probability. It returns claims, each with a verbatim quote and item id, and a score from . Code averages the five scores and moves that many points of probability from the hold side to the hike side (or the reverse), capped at 10.</a:t>
+              <a:t>Each specialist is asked one question about its own slice (above), never for a probability. It returns claims, each with a verbatim quote and item id, and an opinion from -10 to +10: points of probability toward a hike (positive) or a cut (negative). Code averages the five opinions and moves that many points from the hold side to the hike side (or the reverse), capped at 10.</a:t>
             </a:r>
             <a:endParaRPr lang="en-US" sz="1150" dirty="0"/>
           </a:p>
@@ -9722,7 +9773,7 @@
                   <a:schemeClr val="bg1"/>
                 </a:solidFill>
               </a:rPr>
-              <a:t>5 scores, ±10</a:t>
+              <a:t>5 opinions, ±10</a:t>
             </a:r>
             <a:endParaRPr lang="en-US" sz="2000" dirty="0"/>
           </a:p>
@@ -10440,7 +10491,7 @@
               <a:buNone/>
             </a:pPr>
             <a:r>
-              <a:rPr lang="en-US" sz="1400" b="1">
+              <a:rPr lang="en-US" sz="1200" b="1">
                 <a:solidFill>
                   <a:schemeClr val="tx2"/>
                 </a:solidFill>
@@ -10451,7 +10502,7 @@
               <a:t>+25 bps: 20.2% </a:t>
             </a:r>
             <a:r>
-              <a:rPr lang="en-US" sz="1400" b="1" dirty="0">
+              <a:rPr lang="en-US" sz="1200" b="1" dirty="0">
                 <a:solidFill>
                   <a:schemeClr val="tx2"/>
                 </a:solidFill>
@@ -10461,7 +10512,7 @@
               </a:rPr>
               <a:t>→ 22.4%</a:t>
             </a:r>
-            <a:endParaRPr lang="en-US" sz="1400" dirty="0"/>
+            <a:endParaRPr lang="en-US" sz="1200" dirty="0"/>
           </a:p>
         </p:txBody>
       </p:sp>
@@ -16601,7 +16652,7 @@
                   <a:schemeClr val="accent4"/>
                 </a:solidFill>
               </a:rPr>
-              <a:t>repeatability in points of their score because they output a score, not a distribution.</a:t>
+              <a:t>repeatability in points of their opinion because they output an opinion, not a distribution.</a:t>
             </a:r>
             <a:endParaRPr lang="en-US" sz="1050" dirty="0"/>
           </a:p>
@@ -16711,7 +16762,23 @@
                   <a:schemeClr val="tx2"/>
                 </a:solidFill>
               </a:rPr>
-              <a:t>Appendix: how the analysts' score moves the number</a:t>
+              <a:t>Appendix: how </a:t>
+            </a:r>
+            <a:r>
+              <a:rPr lang="en-US" sz="3200" b="1">
+                <a:solidFill>
+                  <a:schemeClr val="tx2"/>
+                </a:solidFill>
+              </a:rPr>
+              <a:t>the analysts' opinion moves </a:t>
+            </a:r>
+            <a:r>
+              <a:rPr lang="en-US" sz="3200" b="1" dirty="0">
+                <a:solidFill>
+                  <a:schemeClr val="tx2"/>
+                </a:solidFill>
+              </a:rPr>
+              <a:t>the number</a:t>
             </a:r>
             <a:endParaRPr lang="en-US" sz="3200" dirty="0"/>
           </a:p>
@@ -16783,12 +16850,12 @@
               <a:buNone/>
             </a:pPr>
             <a:r>
-              <a:rPr lang="en-US" sz="1400" b="1" dirty="0">
+              <a:rPr lang="en-US" sz="1400" b="1">
                 <a:solidFill>
                   <a:schemeClr val="tx2"/>
                 </a:solidFill>
               </a:rPr>
-              <a:t>1. The score</a:t>
+              <a:t>1. The opinion</a:t>
             </a:r>
             <a:endParaRPr lang="en-US" sz="1400" dirty="0"/>
           </a:p>
@@ -16917,12 +16984,20 @@
               <a:buChar char="•"/>
             </a:pPr>
             <a:r>
+              <a:rPr lang="en-US" sz="1050">
+                <a:solidFill>
+                  <a:schemeClr val="tx1"/>
+                </a:solidFill>
+              </a:rPr>
+              <a:t>Five opinions, one vote each, </a:t>
+            </a:r>
+            <a:r>
               <a:rPr lang="en-US" sz="1050" dirty="0">
                 <a:solidFill>
                   <a:schemeClr val="tx1"/>
                 </a:solidFill>
               </a:rPr>
-              <a:t>Five scores, one vote each, plain mean. 28 October: +6.0, +6.2, +5.8, +3.4, −1.4; mean +4.0.</a:t>
+              <a:t>plain mean. 28 October: +6.0, +6.2, +5.8, +3.4, −1.4; mean +4.0.</a:t>
             </a:r>
             <a:endParaRPr lang="en-US" sz="1050" dirty="0"/>
           </a:p>
@@ -17012,7 +17087,23 @@
                   <a:schemeClr val="tx1"/>
                 </a:solidFill>
               </a:rPr>
-              <a:t>Number the five outcomes −2, −1, 0, +1, +2 from most dovish to most hawkish. Multiply each bucket by e raised to (steepness × its number), then rescale so the five sum to one. Code searches for the one steepness at which exactly the mean score's points cross the line; on 28 October it was 0.153. Each bucket moves in proportion to its own size and its distance from the middle, so no bucket is zeroed and the shape is kept.</a:t>
+              <a:t>Number the five outcomes −2, −1, 0, +1, +2 from most dovish to most hawkish. Multiply each bucket by e raised to (steepness × its number), then rescale so the five sum to one. Code searches for the one steepness at which exactly </a:t>
+            </a:r>
+            <a:r>
+              <a:rPr lang="en-US" sz="1000">
+                <a:solidFill>
+                  <a:schemeClr val="tx1"/>
+                </a:solidFill>
+              </a:rPr>
+              <a:t>the mean opinion's </a:t>
+            </a:r>
+            <a:r>
+              <a:rPr lang="en-US" sz="1000" dirty="0">
+                <a:solidFill>
+                  <a:schemeClr val="tx1"/>
+                </a:solidFill>
+              </a:rPr>
+              <a:t>points cross the line; on 28 October it was 0.153. Each bucket moves in proportion to its own size and its distance from the middle, so no bucket is zeroed and the shape is kept.</a:t>
             </a:r>
             <a:endParaRPr lang="en-US" sz="1000" dirty="0"/>
           </a:p>
@@ -17048,7 +17139,23 @@
                   <a:schemeClr val="tx2"/>
                 </a:solidFill>
               </a:rPr>
-              <a:t>28 October, entry #18: mean score +4.0</a:t>
+              <a:t>28 October, entry #18</a:t>
+            </a:r>
+            <a:r>
+              <a:rPr lang="en-US" sz="1400" b="1">
+                <a:solidFill>
+                  <a:schemeClr val="tx2"/>
+                </a:solidFill>
+              </a:rPr>
+              <a:t>: mean opinion </a:t>
+            </a:r>
+            <a:r>
+              <a:rPr lang="en-US" sz="1400" b="1" dirty="0">
+                <a:solidFill>
+                  <a:schemeClr val="tx2"/>
+                </a:solidFill>
+              </a:rPr>
+              <a:t>+4.0</a:t>
             </a:r>
             <a:endParaRPr lang="en-US" sz="1400" dirty="0"/>
           </a:p>
@@ -21510,12 +21617,12 @@
               <a:buNone/>
             </a:pPr>
             <a:r>
-              <a:rPr lang="en-US" sz="1000" dirty="0">
+              <a:rPr lang="en-US" sz="1000">
                 <a:solidFill>
                   <a:schemeClr val="tx1"/>
                 </a:solidFill>
               </a:rPr>
-              <a:t>About 130 scheduled decisions with full features, roughly 250 in all; 68% are holds and the cuts cluster in three short episodes. On a sample that small and that unbalanced a boosted tree or a random forest memorises the episodes and a calibration curve on a few dozen non-hold cases is noise. The route is a better-specified small model: features written down before fitting, heavy regularisation, a reliability check beside the log score, the expanding window as the only judge. A regularised boosted model can be one pre-registered candidate, judged the same way.</a:t>
+              <a:t>About 130 usable decisions; 68% are holds and the cuts bunch into a few episodes. A big model memorises the episodes and looks good on any test near them. The replacement must handle that imbalance (class weights, or an ordinal model shrunk toward the base rate) and be judged only on decisions it has not seen, the expanding window.</a:t>
             </a:r>
             <a:endParaRPr lang="en-US" sz="1000" dirty="0"/>
           </a:p>
@@ -27415,13 +27522,18 @@
               <a:buChar char="•"/>
             </a:pPr>
             <a:r>
-              <a:rPr lang="en-US" sz="1300" dirty="0">
+              <a:rPr lang="en-US" sz="1300">
                 <a:solidFill>
                   <a:schemeClr val="tx1"/>
                 </a:solidFill>
               </a:rPr>
-              <a:t>A good repeatable process ensures repeatability: </a:t>
-            </a:r>
+              <a:t>A good process is a repeatable one: </a:t>
+            </a:r>
+            <a:endParaRPr lang="en-US" sz="1300" dirty="0">
+              <a:solidFill>
+                <a:schemeClr val="tx1"/>
+              </a:solidFill>
+            </a:endParaRPr>
           </a:p>
           <a:p>
             <a:pPr marL="800100" lvl="1" indent="-342900">
@@ -27491,8 +27603,16 @@
               <a:buChar char="•"/>
             </a:pPr>
             <a:r>
-              <a:rPr lang="en-US" sz="1300" dirty="0"/>
-              <a:t>Does </a:t>
+              <a:rPr lang="en-US" sz="1300"/>
+              <a:t>Does a shock move the number</a:t>
+            </a:r>
+            <a:r>
+              <a:rPr lang="en-US" sz="1300">
+                <a:solidFill>
+                  <a:schemeClr val="tx1"/>
+                </a:solidFill>
+              </a:rPr>
+              <a:t> </a:t>
             </a:r>
             <a:r>
               <a:rPr lang="en-US" sz="1300" dirty="0">
@@ -27500,7 +27620,7 @@
                   <a:schemeClr val="tx1"/>
                 </a:solidFill>
               </a:rPr>
-              <a:t>a shock moves the number the right way?</a:t>
+              <a:t>the right way?</a:t>
             </a:r>
             <a:endParaRPr lang="en-US" sz="1300" dirty="0"/>
           </a:p>
@@ -27947,12 +28067,28 @@
               <a:buChar char="•"/>
             </a:pPr>
             <a:r>
+              <a:rPr lang="en-US" sz="1300">
+                <a:solidFill>
+                  <a:schemeClr val="tx1"/>
+                </a:solidFill>
+              </a:rPr>
+              <a:t>Since everything is quotable and the LLM analysts can read only the evidence, </a:t>
+            </a:r>
+            <a:r>
               <a:rPr lang="en-US" sz="1300" dirty="0">
                 <a:solidFill>
                   <a:schemeClr val="tx1"/>
                 </a:solidFill>
               </a:rPr>
-              <a:t>Since is quotable and the human analyst can read only the evidence, so a wrong call is a traceable wrong call: we see which quote led were.</a:t>
+              <a:t>so a wrong call is a traceable wrong call: we </a:t>
+            </a:r>
+            <a:r>
+              <a:rPr lang="en-US" sz="1300">
+                <a:solidFill>
+                  <a:schemeClr val="tx1"/>
+                </a:solidFill>
+              </a:rPr>
+              <a:t>see which quote led where.</a:t>
             </a:r>
             <a:endParaRPr lang="en-US" sz="1300" dirty="0"/>
           </a:p>
@@ -29729,7 +29865,7 @@
           <p:nvPr>
             <p:extLst>
               <p:ext uri="{D42A27DB-BD31-4B8C-83A1-F6EECF244321}">
-                <p14:modId xmlns:p14="http://schemas.microsoft.com/office/powerpoint/2010/main" val="3165394686"/>
+                <p14:modId xmlns:p14="http://schemas.microsoft.com/office/powerpoint/2010/main" val="1563022806"/>
               </p:ext>
             </p:extLst>
           </p:nvPr>
@@ -32773,7 +32909,7 @@
                             <a:srgbClr val="1B1F2A"/>
                           </a:solidFill>
                         </a:rPr>
-                        <a:t>specialists' opinion: </a:t>
+                        <a:t>Specialists' opinion: </a:t>
                       </a:r>
                       <a:r>
                         <a:rPr lang="en-US" sz="1000" b="1" dirty="0">

--- a/docs/FedCast_Fullerton.pptx
+++ b/docs/FedCast_Fullerton.pptx
@@ -5,7 +5,7 @@
     <p:sldMasterId id="2147483648" r:id="rId1"/>
   </p:sldMasterIdLst>
   <p:notesMasterIdLst>
-    <p:notesMasterId r:id="rId25"/>
+    <p:notesMasterId r:id="rId26"/>
   </p:notesMasterIdLst>
   <p:sldIdLst>
     <p:sldId id="256" r:id="rId2"/>
@@ -18,7 +18,7 @@
     <p:sldId id="281" r:id="rId9"/>
     <p:sldId id="263" r:id="rId10"/>
     <p:sldId id="264" r:id="rId11"/>
-    <p:sldId id="283" r:id="rId12"/>
+    <p:sldId id="285" r:id="rId12"/>
     <p:sldId id="266" r:id="rId13"/>
     <p:sldId id="268" r:id="rId14"/>
     <p:sldId id="269" r:id="rId15"/>
@@ -31,6 +31,7 @@
     <p:sldId id="277" r:id="rId22"/>
     <p:sldId id="278" r:id="rId23"/>
     <p:sldId id="279" r:id="rId24"/>
+    <p:sldId id="286" r:id="rId25"/>
   </p:sldIdLst>
   <p:sldSz cx="12192000" cy="6858000"/>
   <p:notesSz cx="6858000" cy="12192000"/>
@@ -149,7 +150,7 @@
           <p14:sldIdLst>
             <p14:sldId id="263"/>
             <p14:sldId id="264"/>
-            <p14:sldId id="283"/>
+            <p14:sldId id="285"/>
           </p14:sldIdLst>
         </p14:section>
         <p14:section name="The harness" id="{92928B70-AC41-17EA-8015-68E5296D82D9}">
@@ -178,6 +179,7 @@
             <p14:sldId id="277"/>
             <p14:sldId id="278"/>
             <p14:sldId id="279"/>
+            <p14:sldId id="286"/>
           </p14:sldIdLst>
         </p14:section>
       </p14:sectionLst>
@@ -1274,7 +1276,7 @@
           <a:p>
             <a:r>
               <a:rPr lang="en-US"/>
-              <a:t>2 MIN. Three things a language model cannot be made to stop doing. Memory: instruction, quote per claim, every number checked, sent back once. Variance: fixed schema, five identical runs, the spread measured, pass mark 2 points. Invented support: every quote matched by code character for character, bounds, one repair round. Say: 'none is removed; each is designed around, and measured.' The proof comes two slides later.</a:t>
+              <a:t>2 MIN. Two things a language model cannot stop doing. LEFT: it answers from memory and differently each time. Same fix for both: break the one big question into small fixed ones with a fixed answer shape, like a multiple-choice and short-answer paper, so there is less room to wander; evidence only, every claim quoted; every number checked; five identical runs, spread within 2 points. RIGHT: it can invent support. Fix: verification by code, not by a model; bounds; one repair round. 'Neither is removed; each is designed around, and measured.' Proof three slides on.</a:t>
             </a:r>
             <a:endParaRPr lang="en-US" dirty="0"/>
           </a:p>
@@ -1306,7 +1308,7 @@
     </p:spTree>
     <p:extLst>
       <p:ext uri="{BB962C8B-B14F-4D97-AF65-F5344CB8AC3E}">
-        <p14:creationId xmlns:p14="http://schemas.microsoft.com/office/powerpoint/2010/main" val="51336607"/>
+        <p14:creationId xmlns:p14="http://schemas.microsoft.com/office/powerpoint/2010/main" val="3245161562"/>
       </p:ext>
     </p:extLst>
   </p:cSld>
@@ -1362,7 +1364,7 @@
           <a:p>
             <a:r>
               <a:rPr lang="en-US"/>
-              <a:t>2 MIN. Left, the three controls, grey and dashed: they never enter the number. 1 naive: the question only. 2: evidence shown, free text. 3: same evidence, fixed shape, verifier. Right, the five specialists that do enter: one slice each, the same shape and verifier. Each is asked a question about its slice, never a probability; it returns quoted claims and an opinion from -10 to +10. Bottom: every analyst runs five times; 1 to 3 build the benchmark 4 to 8 are measured against.</a:t>
+              <a:t>2 MIN. THREE POINTS. One: the left three are controls, grey and dashed; they never touch the number. Analyst 1 is the model on its own; 2 adds the evidence; 3 adds the answer shape and the verifier. Two: the five on the right enter the number; each gets one slice of evidence and one question about it, never 'give me a probability'; it returns quoted claims and an opinion from -10 to +10. Three: every analyst runs five times on the same snapshot; for 1 to 3 those runs are the benchmark 4 to 8 are measured against. Walk through: 1 sets the baseline, 2 tests what evidence fixes, 3 tests the shape and the verifier.</a:t>
             </a:r>
             <a:endParaRPr lang="en-US" dirty="0"/>
           </a:p>
@@ -2472,6 +2474,94 @@
 </p:notes>
 </file>
 
+<file path=ppt/notesSlides/notesSlide24.xml><?xml version="1.0" encoding="utf-8"?>
+<p:notes xmlns:a="http://schemas.openxmlformats.org/drawingml/2006/main" xmlns:r="http://schemas.openxmlformats.org/officeDocument/2006/relationships" xmlns:p="http://schemas.openxmlformats.org/presentationml/2006/main">
+  <p:cSld>
+    <p:spTree>
+      <p:nvGrpSpPr>
+        <p:cNvPr id="1" name=""/>
+        <p:cNvGrpSpPr/>
+        <p:nvPr/>
+      </p:nvGrpSpPr>
+      <p:grpSpPr>
+        <a:xfrm>
+          <a:off x="0" y="0"/>
+          <a:ext cx="0" cy="0"/>
+          <a:chOff x="0" y="0"/>
+          <a:chExt cx="0" cy="0"/>
+        </a:xfrm>
+      </p:grpSpPr>
+      <p:sp>
+        <p:nvSpPr>
+          <p:cNvPr id="2" name="Slide Image Placeholder 1"/>
+          <p:cNvSpPr>
+            <a:spLocks noGrp="1" noRot="1" noChangeAspect="1"/>
+          </p:cNvSpPr>
+          <p:nvPr>
+            <p:ph type="sldImg"/>
+          </p:nvPr>
+        </p:nvSpPr>
+        <p:spPr/>
+      </p:sp>
+      <p:sp>
+        <p:nvSpPr>
+          <p:cNvPr id="3" name="Notes Placeholder 2"/>
+          <p:cNvSpPr>
+            <a:spLocks noGrp="1"/>
+          </p:cNvSpPr>
+          <p:nvPr>
+            <p:ph type="body" idx="1"/>
+          </p:nvPr>
+        </p:nvSpPr>
+        <p:spPr/>
+        <p:txBody>
+          <a:bodyPr/>
+          <a:lstStyle/>
+          <a:p>
+            <a:r>
+              <a:rPr lang="en-US"/>
+              <a:t>APPENDIX. Use if asked what historical base rates are. Take the 266 scheduled decisions since 1994, group by the previous decision, count what came next: that is the forecast. After a hike: hiked again 64%, held 36%, never cut. No parameters; it beat the fitted probit on the expanding window, so it is in the pool at 0.1. It is the prior the other models update.</a:t>
+            </a:r>
+            <a:endParaRPr lang="en-US" dirty="0"/>
+          </a:p>
+        </p:txBody>
+      </p:sp>
+      <p:sp>
+        <p:nvSpPr>
+          <p:cNvPr id="4" name="Slide Number Placeholder 3"/>
+          <p:cNvSpPr>
+            <a:spLocks noGrp="1"/>
+          </p:cNvSpPr>
+          <p:nvPr>
+            <p:ph type="sldNum" sz="quarter" idx="10"/>
+          </p:nvPr>
+        </p:nvSpPr>
+        <p:spPr/>
+        <p:txBody>
+          <a:bodyPr/>
+          <a:lstStyle/>
+          <a:p>
+            <a:fld id="{F7021451-1387-4CA6-816F-3879F97B5CBC}" type="slidenum">
+              <a:rPr lang="en-US"/>
+              <a:t>24</a:t>
+            </a:fld>
+            <a:endParaRPr lang="en-US"/>
+          </a:p>
+        </p:txBody>
+      </p:sp>
+    </p:spTree>
+    <p:extLst>
+      <p:ext uri="{BB962C8B-B14F-4D97-AF65-F5344CB8AC3E}">
+        <p14:creationId xmlns:p14="http://schemas.microsoft.com/office/powerpoint/2010/main" val="4133600115"/>
+      </p:ext>
+    </p:extLst>
+  </p:cSld>
+  <p:clrMapOvr>
+    <a:masterClrMapping/>
+  </p:clrMapOvr>
+</p:notes>
+</file>
+
 <file path=ppt/notesSlides/notesSlide3.xml><?xml version="1.0" encoding="utf-8"?>
 <p:notes xmlns:a="http://schemas.openxmlformats.org/drawingml/2006/main" xmlns:r="http://schemas.openxmlformats.org/officeDocument/2006/relationships" xmlns:p="http://schemas.openxmlformats.org/presentationml/2006/main">
   <p:cSld>
@@ -2988,13 +3078,13 @@
           <a:p>
             <a:r>
               <a:rPr lang="en-US"/>
-              <a:t>2 MIN. Left, the four families: economic predictors (futures, Taylor rules, odds), empirical history, classic ML (probit, weight 0), LLM-derived (bounded opinion, not a weight). Pooled by code; no model writes the number.</a:t>
+              <a:t>2 MIN. Left, the four families. Economic predictors: futures (the anchor), the Fed's four rules, odds. Empirical data: what the Fed did next after each kind of decision since 1994; after a hike it hiked again two times in three and never cut, so history alone says 'hike' today. Classic ML: the probit, weight 0. LLM-derived: a bounded opinion, not a weight. Pooled by code; no model writes the number.</a:t>
             </a:r>
           </a:p>
           <a:p>
             <a:r>
               <a:rPr lang="en-US"/>
-              <a:t>Right, the chain in order: evidence, signals, pool, analysts (only 4 to 8 enter; 1 to 3 are controls), you (bounded, typed channels), ledger. Say: 'every line here is a view in the app.'</a:t>
+              <a:t>Right, the chain in order: evidence, signals, pool, analysts (only 4 to 8 enter; 1 to 3 are controls), you, ledger. 'Every line is a view in the app.'</a:t>
             </a:r>
             <a:endParaRPr lang="en-US" dirty="0"/>
           </a:p>
@@ -3082,13 +3172,19 @@
           <a:p>
             <a:r>
               <a:rPr lang="en-US"/>
-              <a:t>2 MIN. Read the table top to bottom: what each model reads, its distribution, its weight. Pooled line: weighted average then the 1.5% floor (no outcome below 1.5%, so nothing is ever called impossible). The tinted row: the specialists' opinion, +4.0, moves 4 points toward a hike, after the pool, capped at 10. Machine forecast: 67.6 / 22.4 / 7.7.</a:t>
+              <a:t>2 MIN. Read down: what each model reads, its distribution, its weight. Market: the futures price. Rules: inflation, unemployment, the natural rate. Odds: Polymarket. Base rates: the 49 meetings since 1994 that followed a hike (appendix if asked). Probit: nine macro features, weight 0.</a:t>
             </a:r>
           </a:p>
           <a:p>
             <a:r>
               <a:rPr lang="en-US"/>
-              <a:t>Red box: weights are judgement, logged, never fitted; the backtest decides who is in the pool, live scores will decide the weights, by amendment.</a:t>
+              <a:t>Pooled: weighted average then the 1.5% floor (nothing is ever called impossible). Tinted row: the specialists' opinion, +4.0, moves 4 points toward a hike, capped at 10. Machine forecast: 67.6 / 22.4 / 7.7.</a:t>
+            </a:r>
+          </a:p>
+          <a:p>
+            <a:r>
+              <a:rPr lang="en-US"/>
+              <a:t>Red box: weights are judgement, logged, never fitted; live scores will decide them.</a:t>
             </a:r>
             <a:endParaRPr lang="en-US" dirty="0"/>
           </a:p>
@@ -3397,7 +3493,7 @@
           </a:prstGeom>
           <a:extLst>
             <a:ext uri="{C572A759-6A51-4108-AA02-DFA0A04FC94B}">
-              <ma14:wrappingTextBoxFlag xmlns="" xmlns:ma14="http://schemas.microsoft.com/office/mac/drawingml/2011/main" val="0"/>
+              <ma14:wrappingTextBoxFlag xmlns:ma14="http://schemas.microsoft.com/office/mac/drawingml/2011/main" xmlns="" val="0"/>
             </a:ext>
           </a:extLst>
         </p:spPr>
@@ -3582,7 +3678,7 @@
           </a:prstGeom>
           <a:extLst>
             <a:ext uri="{C572A759-6A51-4108-AA02-DFA0A04FC94B}">
-              <ma14:wrappingTextBoxFlag xmlns="" xmlns:ma14="http://schemas.microsoft.com/office/mac/drawingml/2011/main" val="0"/>
+              <ma14:wrappingTextBoxFlag xmlns:ma14="http://schemas.microsoft.com/office/mac/drawingml/2011/main" xmlns="" val="0"/>
             </a:ext>
           </a:extLst>
         </p:spPr>
@@ -4683,7 +4779,7 @@
                   <a:schemeClr val="accent4"/>
                 </a:solidFill>
               </a:rPr>
-              <a:t>Three things a language model cannot be made to stop doing. None is removed; each is designed around, and the design is measured on every snapshot.</a:t>
+              <a:t>Two things a language model cannot be made to stop doing. Neither is removed; each is designed around, and the design is measured on every snapshot.</a:t>
             </a:r>
             <a:endParaRPr lang="en-US" sz="1200" dirty="0"/>
           </a:p>
@@ -4698,11 +4794,11 @@
         <p:spPr>
           <a:xfrm>
             <a:off x="548640" y="1645920"/>
-            <a:ext cx="3593592" cy="1051560"/>
+            <a:ext cx="5431536" cy="1097280"/>
           </a:xfrm>
           <a:prstGeom prst="roundRect">
             <a:avLst>
-              <a:gd name="adj" fmla="val 8696"/>
+              <a:gd name="adj" fmla="val 8333"/>
             </a:avLst>
           </a:prstGeom>
           <a:solidFill>
@@ -4715,13 +4811,6 @@
             <a:prstDash val="solid"/>
           </a:ln>
         </p:spPr>
-        <p:txBody>
-          <a:bodyPr/>
-          <a:lstStyle/>
-          <a:p>
-            <a:endParaRPr lang="en-US"/>
-          </a:p>
-        </p:txBody>
       </p:sp>
       <p:sp>
         <p:nvSpPr>
@@ -4731,8 +4820,8 @@
         </p:nvSpPr>
         <p:spPr>
           <a:xfrm>
-            <a:off x="548640" y="2514600"/>
-            <a:ext cx="3593592" cy="182880"/>
+            <a:off x="548640" y="2560320"/>
+            <a:ext cx="5431536" cy="182880"/>
           </a:xfrm>
           <a:prstGeom prst="rect">
             <a:avLst/>
@@ -4747,13 +4836,6 @@
             <a:prstDash val="solid"/>
           </a:ln>
         </p:spPr>
-        <p:txBody>
-          <a:bodyPr/>
-          <a:lstStyle/>
-          <a:p>
-            <a:endParaRPr lang="en-US"/>
-          </a:p>
-        </p:txBody>
       </p:sp>
       <p:sp>
         <p:nvSpPr>
@@ -4763,8 +4845,8 @@
         </p:nvSpPr>
         <p:spPr>
           <a:xfrm>
-            <a:off x="731520" y="1755648"/>
-            <a:ext cx="3227832" cy="182880"/>
+            <a:off x="777240" y="1755648"/>
+            <a:ext cx="4974336" cy="182880"/>
           </a:xfrm>
           <a:prstGeom prst="rect">
             <a:avLst/>
@@ -4799,8 +4881,8 @@
         </p:nvSpPr>
         <p:spPr>
           <a:xfrm>
-            <a:off x="731520" y="1956816"/>
-            <a:ext cx="3227832" cy="329184"/>
+            <a:off x="777240" y="1956816"/>
+            <a:ext cx="4974336" cy="329184"/>
           </a:xfrm>
           <a:prstGeom prst="rect">
             <a:avLst/>
@@ -4816,14 +4898,14 @@
               <a:buNone/>
             </a:pPr>
             <a:r>
-              <a:rPr lang="en-US" sz="1500" b="1" dirty="0">
+              <a:rPr lang="en-US" sz="1600" b="1" dirty="0">
                 <a:solidFill>
                   <a:schemeClr val="bg1"/>
                 </a:solidFill>
               </a:rPr>
-              <a:t>Memory cannot be switched off</a:t>
-            </a:r>
-            <a:endParaRPr lang="en-US" sz="1500" dirty="0"/>
+              <a:t>It answers from memory, and differently each time</a:t>
+            </a:r>
+            <a:endParaRPr lang="en-US" sz="1600" dirty="0"/>
           </a:p>
         </p:txBody>
       </p:sp>
@@ -4835,8 +4917,8 @@
         </p:nvSpPr>
         <p:spPr>
           <a:xfrm>
-            <a:off x="731520" y="2286000"/>
-            <a:ext cx="3227832" cy="384048"/>
+            <a:off x="777240" y="2304288"/>
+            <a:ext cx="4974336" cy="411480"/>
           </a:xfrm>
           <a:prstGeom prst="rect">
             <a:avLst/>
@@ -4857,7 +4939,7 @@
                   <a:srgbClr val="F8D7CE"/>
                 </a:solidFill>
               </a:rPr>
-              <a:t>It knows the Fed from its training and will use that unless stopped.</a:t>
+              <a:t>It knows the Fed from its training and will use that unless stopped; ask the same question twice and the number moves.</a:t>
             </a:r>
             <a:endParaRPr lang="en-US" sz="1100" dirty="0"/>
           </a:p>
@@ -4871,8 +4953,8 @@
         </p:nvSpPr>
         <p:spPr>
           <a:xfrm>
-            <a:off x="548640" y="2697480"/>
-            <a:ext cx="3593592" cy="2743200"/>
+            <a:off x="548640" y="2743200"/>
+            <a:ext cx="5431536" cy="3108960"/>
           </a:xfrm>
           <a:prstGeom prst="rect">
             <a:avLst/>
@@ -4887,13 +4969,6 @@
             <a:prstDash val="solid"/>
           </a:ln>
         </p:spPr>
-        <p:txBody>
-          <a:bodyPr/>
-          <a:lstStyle/>
-          <a:p>
-            <a:endParaRPr lang="en-US"/>
-          </a:p>
-        </p:txBody>
       </p:sp>
       <p:sp>
         <p:nvSpPr>
@@ -4903,8 +4978,8 @@
         </p:nvSpPr>
         <p:spPr>
           <a:xfrm>
-            <a:off x="731520" y="2834640"/>
-            <a:ext cx="3227832" cy="182880"/>
+            <a:off x="777240" y="2880360"/>
+            <a:ext cx="4974336" cy="182880"/>
           </a:xfrm>
           <a:prstGeom prst="rect">
             <a:avLst/>
@@ -4939,8 +5014,8 @@
         </p:nvSpPr>
         <p:spPr>
           <a:xfrm>
-            <a:off x="731520" y="3108960"/>
-            <a:ext cx="3227832" cy="2240280"/>
+            <a:off x="777240" y="3154680"/>
+            <a:ext cx="4974336" cy="2606040"/>
           </a:xfrm>
           <a:prstGeom prst="rect">
             <a:avLst/>
@@ -4962,7 +5037,7 @@
                   <a:srgbClr val="1B1F2A"/>
                 </a:solidFill>
               </a:rPr>
-              <a:t>Instruction: </a:t>
+              <a:t>Break the question down: </a:t>
             </a:r>
             <a:r>
               <a:rPr lang="en-US" sz="1300" dirty="0">
@@ -4970,7 +5045,7 @@
                   <a:schemeClr val="tx1"/>
                 </a:solidFill>
               </a:rPr>
-              <a:t>use only the evidence; nothing remembered about the economy, the Fed or markets.</a:t>
+              <a:t>instead of one big 'what will the Fed do', each analyst gets small fixed questions with a fixed answer shape, like a multiple-choice and short-answer paper. Less room to wander, so less variation between runs.</a:t>
             </a:r>
             <a:endParaRPr lang="en-US" sz="1300" dirty="0"/>
           </a:p>
@@ -4985,7 +5060,7 @@
                   <a:srgbClr val="1B1F2A"/>
                 </a:solidFill>
               </a:rPr>
-              <a:t>Answer shape: </a:t>
+              <a:t>Evidence only: </a:t>
             </a:r>
             <a:r>
               <a:rPr lang="en-US" sz="1300" dirty="0">
@@ -4993,7 +5068,7 @@
                   <a:schemeClr val="tx1"/>
                 </a:solidFill>
               </a:rPr>
-              <a:t>every claim carries a verbatim quote from a named item, so a remembered fact has nowhere to stand.</a:t>
+              <a:t>the instruction says use only the evidence; every claim must carry a verbatim quote from a named item, so a remembered fact has nowhere to stand.</a:t>
             </a:r>
             <a:endParaRPr lang="en-US" sz="1300" dirty="0"/>
           </a:p>
@@ -5008,7 +5083,7 @@
                   <a:srgbClr val="1B1F2A"/>
                 </a:solidFill>
               </a:rPr>
-              <a:t>Check: </a:t>
+              <a:t>Measured: </a:t>
             </a:r>
             <a:r>
               <a:rPr lang="en-US" sz="1300" dirty="0">
@@ -5016,7 +5091,7 @@
                   <a:schemeClr val="tx1"/>
                 </a:solidFill>
               </a:rPr>
-              <a:t>every number is matched to the snapshot by code; one not found is flagged as from memory and sent back once.</a:t>
+              <a:t>every number in the answer is matched to the snapshot by code; five identical runs per analyst, and the spread between them must stay within 2 points.</a:t>
             </a:r>
             <a:endParaRPr lang="en-US" sz="1300" dirty="0"/>
           </a:p>
@@ -5030,12 +5105,12 @@
         </p:nvSpPr>
         <p:spPr>
           <a:xfrm>
-            <a:off x="4297680" y="1645920"/>
-            <a:ext cx="3593592" cy="1051560"/>
+            <a:off x="6208776" y="1645920"/>
+            <a:ext cx="5431536" cy="1097280"/>
           </a:xfrm>
           <a:prstGeom prst="roundRect">
             <a:avLst>
-              <a:gd name="adj" fmla="val 8696"/>
+              <a:gd name="adj" fmla="val 8333"/>
             </a:avLst>
           </a:prstGeom>
           <a:solidFill>
@@ -5048,13 +5123,6 @@
             <a:prstDash val="solid"/>
           </a:ln>
         </p:spPr>
-        <p:txBody>
-          <a:bodyPr/>
-          <a:lstStyle/>
-          <a:p>
-            <a:endParaRPr lang="en-US"/>
-          </a:p>
-        </p:txBody>
       </p:sp>
       <p:sp>
         <p:nvSpPr>
@@ -5064,8 +5132,8 @@
         </p:nvSpPr>
         <p:spPr>
           <a:xfrm>
-            <a:off x="4297680" y="2514600"/>
-            <a:ext cx="3593592" cy="182880"/>
+            <a:off x="6208776" y="2560320"/>
+            <a:ext cx="5431536" cy="182880"/>
           </a:xfrm>
           <a:prstGeom prst="rect">
             <a:avLst/>
@@ -5080,13 +5148,6 @@
             <a:prstDash val="solid"/>
           </a:ln>
         </p:spPr>
-        <p:txBody>
-          <a:bodyPr/>
-          <a:lstStyle/>
-          <a:p>
-            <a:endParaRPr lang="en-US"/>
-          </a:p>
-        </p:txBody>
       </p:sp>
       <p:sp>
         <p:nvSpPr>
@@ -5096,8 +5157,8 @@
         </p:nvSpPr>
         <p:spPr>
           <a:xfrm>
-            <a:off x="4480560" y="1755648"/>
-            <a:ext cx="3227832" cy="182880"/>
+            <a:off x="6437376" y="1755648"/>
+            <a:ext cx="4974336" cy="182880"/>
           </a:xfrm>
           <a:prstGeom prst="rect">
             <a:avLst/>
@@ -5132,8 +5193,8 @@
         </p:nvSpPr>
         <p:spPr>
           <a:xfrm>
-            <a:off x="4480560" y="1956816"/>
-            <a:ext cx="3227832" cy="329184"/>
+            <a:off x="6437376" y="1956816"/>
+            <a:ext cx="4974336" cy="329184"/>
           </a:xfrm>
           <a:prstGeom prst="rect">
             <a:avLst/>
@@ -5149,14 +5210,14 @@
               <a:buNone/>
             </a:pPr>
             <a:r>
-              <a:rPr lang="en-US" sz="1500" b="1" dirty="0">
+              <a:rPr lang="en-US" sz="1600" b="1" dirty="0">
                 <a:solidFill>
                   <a:schemeClr val="bg1"/>
                 </a:solidFill>
               </a:rPr>
-              <a:t>Answers vary between runs</a:t>
-            </a:r>
-            <a:endParaRPr lang="en-US" sz="1500" dirty="0"/>
+              <a:t>It can invent its own support</a:t>
+            </a:r>
+            <a:endParaRPr lang="en-US" sz="1600" dirty="0"/>
           </a:p>
         </p:txBody>
       </p:sp>
@@ -5168,8 +5229,8 @@
         </p:nvSpPr>
         <p:spPr>
           <a:xfrm>
-            <a:off x="4480560" y="2286000"/>
-            <a:ext cx="3227832" cy="384048"/>
+            <a:off x="6437376" y="2304288"/>
+            <a:ext cx="4974336" cy="411480"/>
           </a:xfrm>
           <a:prstGeom prst="rect">
             <a:avLst/>
@@ -5190,7 +5251,7 @@
                   <a:srgbClr val="F8D7CE"/>
                 </a:solidFill>
               </a:rPr>
-              <a:t>Ask twice and the number moves.</a:t>
+              <a:t>A fluent quote or figure that was never in the document.</a:t>
             </a:r>
             <a:endParaRPr lang="en-US" sz="1100" dirty="0"/>
           </a:p>
@@ -5204,8 +5265,8 @@
         </p:nvSpPr>
         <p:spPr>
           <a:xfrm>
-            <a:off x="4297680" y="2697480"/>
-            <a:ext cx="3593592" cy="2743200"/>
+            <a:off x="6208776" y="2743200"/>
+            <a:ext cx="5431536" cy="3108960"/>
           </a:xfrm>
           <a:prstGeom prst="rect">
             <a:avLst/>
@@ -5220,13 +5281,6 @@
             <a:prstDash val="solid"/>
           </a:ln>
         </p:spPr>
-        <p:txBody>
-          <a:bodyPr/>
-          <a:lstStyle/>
-          <a:p>
-            <a:endParaRPr lang="en-US"/>
-          </a:p>
-        </p:txBody>
       </p:sp>
       <p:sp>
         <p:nvSpPr>
@@ -5236,8 +5290,8 @@
         </p:nvSpPr>
         <p:spPr>
           <a:xfrm>
-            <a:off x="4480560" y="2834640"/>
-            <a:ext cx="3227832" cy="182880"/>
+            <a:off x="6437376" y="2880360"/>
+            <a:ext cx="4974336" cy="182880"/>
           </a:xfrm>
           <a:prstGeom prst="rect">
             <a:avLst/>
@@ -5272,8 +5326,8 @@
         </p:nvSpPr>
         <p:spPr>
           <a:xfrm>
-            <a:off x="4480560" y="3108960"/>
-            <a:ext cx="3227832" cy="2240280"/>
+            <a:off x="6437376" y="3154680"/>
+            <a:ext cx="4974336" cy="2606040"/>
           </a:xfrm>
           <a:prstGeom prst="rect">
             <a:avLst/>
@@ -5295,7 +5349,7 @@
                   <a:srgbClr val="1B1F2A"/>
                 </a:solidFill>
               </a:rPr>
-              <a:t>Answer shape: </a:t>
+              <a:t>Check by code, not by a model: </a:t>
             </a:r>
             <a:r>
               <a:rPr lang="en-US" sz="1300" dirty="0">
@@ -5303,7 +5357,7 @@
                   <a:schemeClr val="tx1"/>
                 </a:solidFill>
               </a:rPr>
-              <a:t>a fixed JSON schema; anything else is rejected unread.</a:t>
+              <a:t>every quote is matched to its item character for character; a quote stitched from two places fails.</a:t>
             </a:r>
             <a:endParaRPr lang="en-US" sz="1300" dirty="0"/>
           </a:p>
@@ -5318,7 +5372,7 @@
                   <a:srgbClr val="1B1F2A"/>
                 </a:solidFill>
               </a:rPr>
-              <a:t>Five identical runs </a:t>
+              <a:t>Bounds: </a:t>
             </a:r>
             <a:r>
               <a:rPr lang="en-US" sz="1300" dirty="0">
@@ -5326,7 +5380,7 @@
                   <a:schemeClr val="tx1"/>
                 </a:solidFill>
               </a:rPr>
-              <a:t>per analyst per snapshot, each stored under its prompt hash.</a:t>
+              <a:t>every watch-out answered by id; the opinion clipped to −10 to +10.</a:t>
             </a:r>
             <a:endParaRPr lang="en-US" sz="1300" dirty="0"/>
           </a:p>
@@ -5341,7 +5395,7 @@
                   <a:srgbClr val="1B1F2A"/>
                 </a:solidFill>
               </a:rPr>
-              <a:t>Measured: </a:t>
+              <a:t>One repair round: </a:t>
             </a:r>
             <a:r>
               <a:rPr lang="en-US" sz="1300" dirty="0">
@@ -5349,7 +5403,7 @@
                   <a:schemeClr val="tx1"/>
                 </a:solidFill>
               </a:rPr>
-              <a:t>the spread of the five answers. Pass mark: 2 points.</a:t>
+              <a:t>the verifier's report goes back once; both answers are kept; what still fails stays unverified, never hidden.</a:t>
             </a:r>
             <a:endParaRPr lang="en-US" sz="1300" dirty="0"/>
           </a:p>
@@ -5357,340 +5411,7 @@
       </p:sp>
       <p:sp>
         <p:nvSpPr>
-          <p:cNvPr id="21" name="Shape 18"/>
-          <p:cNvSpPr/>
-          <p:nvPr/>
-        </p:nvSpPr>
-        <p:spPr>
-          <a:xfrm>
-            <a:off x="8046720" y="1645920"/>
-            <a:ext cx="3593592" cy="1051560"/>
-          </a:xfrm>
-          <a:prstGeom prst="roundRect">
-            <a:avLst>
-              <a:gd name="adj" fmla="val 8696"/>
-            </a:avLst>
-          </a:prstGeom>
-          <a:solidFill>
-            <a:srgbClr val="C8553D"/>
-          </a:solidFill>
-          <a:ln w="12700">
-            <a:solidFill>
-              <a:srgbClr val="C8553D"/>
-            </a:solidFill>
-            <a:prstDash val="solid"/>
-          </a:ln>
-        </p:spPr>
-        <p:txBody>
-          <a:bodyPr/>
-          <a:lstStyle/>
-          <a:p>
-            <a:endParaRPr lang="en-US"/>
-          </a:p>
-        </p:txBody>
-      </p:sp>
-      <p:sp>
-        <p:nvSpPr>
-          <p:cNvPr id="22" name="Shape 19"/>
-          <p:cNvSpPr/>
-          <p:nvPr/>
-        </p:nvSpPr>
-        <p:spPr>
-          <a:xfrm>
-            <a:off x="8046720" y="2514600"/>
-            <a:ext cx="3593592" cy="182880"/>
-          </a:xfrm>
-          <a:prstGeom prst="rect">
-            <a:avLst/>
-          </a:prstGeom>
-          <a:solidFill>
-            <a:srgbClr val="C8553D"/>
-          </a:solidFill>
-          <a:ln w="12700">
-            <a:solidFill>
-              <a:srgbClr val="C8553D"/>
-            </a:solidFill>
-            <a:prstDash val="solid"/>
-          </a:ln>
-        </p:spPr>
-        <p:txBody>
-          <a:bodyPr/>
-          <a:lstStyle/>
-          <a:p>
-            <a:endParaRPr lang="en-US"/>
-          </a:p>
-        </p:txBody>
-      </p:sp>
-      <p:sp>
-        <p:nvSpPr>
-          <p:cNvPr id="23" name="Text 20"/>
-          <p:cNvSpPr txBox="1"/>
-          <p:nvPr/>
-        </p:nvSpPr>
-        <p:spPr>
-          <a:xfrm>
-            <a:off x="8229600" y="1755648"/>
-            <a:ext cx="3227832" cy="182880"/>
-          </a:xfrm>
-          <a:prstGeom prst="rect">
-            <a:avLst/>
-          </a:prstGeom>
-          <a:noFill/>
-          <a:ln/>
-        </p:spPr>
-        <p:txBody>
-          <a:bodyPr wrap="square" lIns="0" tIns="0" rIns="0" bIns="0" rtlCol="0" anchor="t"/>
-          <a:lstStyle/>
-          <a:p>
-            <a:pPr marL="0" indent="0">
-              <a:buNone/>
-            </a:pPr>
-            <a:r>
-              <a:rPr lang="en-US" sz="900" b="1" kern="0" spc="100" dirty="0">
-                <a:solidFill>
-                  <a:srgbClr val="F8D7CE"/>
-                </a:solidFill>
-              </a:rPr>
-              <a:t>LIMIT</a:t>
-            </a:r>
-            <a:endParaRPr lang="en-US" sz="900" dirty="0"/>
-          </a:p>
-        </p:txBody>
-      </p:sp>
-      <p:sp>
-        <p:nvSpPr>
-          <p:cNvPr id="24" name="Text 21"/>
-          <p:cNvSpPr txBox="1"/>
-          <p:nvPr/>
-        </p:nvSpPr>
-        <p:spPr>
-          <a:xfrm>
-            <a:off x="8229600" y="1956816"/>
-            <a:ext cx="3227832" cy="329184"/>
-          </a:xfrm>
-          <a:prstGeom prst="rect">
-            <a:avLst/>
-          </a:prstGeom>
-          <a:noFill/>
-          <a:ln/>
-        </p:spPr>
-        <p:txBody>
-          <a:bodyPr wrap="square" lIns="0" tIns="0" rIns="0" bIns="0" rtlCol="0" anchor="t"/>
-          <a:lstStyle/>
-          <a:p>
-            <a:pPr marL="0" indent="0">
-              <a:buNone/>
-            </a:pPr>
-            <a:r>
-              <a:rPr lang="en-US" sz="1500" b="1" dirty="0">
-                <a:solidFill>
-                  <a:schemeClr val="bg1"/>
-                </a:solidFill>
-              </a:rPr>
-              <a:t>It can invent its own support</a:t>
-            </a:r>
-            <a:endParaRPr lang="en-US" sz="1500" dirty="0"/>
-          </a:p>
-        </p:txBody>
-      </p:sp>
-      <p:sp>
-        <p:nvSpPr>
-          <p:cNvPr id="25" name="Text 22"/>
-          <p:cNvSpPr txBox="1"/>
-          <p:nvPr/>
-        </p:nvSpPr>
-        <p:spPr>
-          <a:xfrm>
-            <a:off x="8229600" y="2286000"/>
-            <a:ext cx="3227832" cy="384048"/>
-          </a:xfrm>
-          <a:prstGeom prst="rect">
-            <a:avLst/>
-          </a:prstGeom>
-          <a:noFill/>
-          <a:ln/>
-        </p:spPr>
-        <p:txBody>
-          <a:bodyPr wrap="square" lIns="0" tIns="0" rIns="0" bIns="0" rtlCol="0" anchor="t"/>
-          <a:lstStyle/>
-          <a:p>
-            <a:pPr marL="0" indent="0">
-              <a:buNone/>
-            </a:pPr>
-            <a:r>
-              <a:rPr lang="en-US" sz="1100" dirty="0">
-                <a:solidFill>
-                  <a:srgbClr val="F8D7CE"/>
-                </a:solidFill>
-              </a:rPr>
-              <a:t>A fluent quote or figure that was never in the document.</a:t>
-            </a:r>
-            <a:endParaRPr lang="en-US" sz="1100" dirty="0"/>
-          </a:p>
-        </p:txBody>
-      </p:sp>
-      <p:sp>
-        <p:nvSpPr>
-          <p:cNvPr id="26" name="Shape 23"/>
-          <p:cNvSpPr/>
-          <p:nvPr/>
-        </p:nvSpPr>
-        <p:spPr>
-          <a:xfrm>
-            <a:off x="8046720" y="2697480"/>
-            <a:ext cx="3593592" cy="2743200"/>
-          </a:xfrm>
-          <a:prstGeom prst="rect">
-            <a:avLst/>
-          </a:prstGeom>
-          <a:solidFill>
-            <a:srgbClr val="EEF2F7"/>
-          </a:solidFill>
-          <a:ln w="12700">
-            <a:solidFill>
-              <a:srgbClr val="EEF2F7"/>
-            </a:solidFill>
-            <a:prstDash val="solid"/>
-          </a:ln>
-        </p:spPr>
-        <p:txBody>
-          <a:bodyPr/>
-          <a:lstStyle/>
-          <a:p>
-            <a:endParaRPr lang="en-US"/>
-          </a:p>
-        </p:txBody>
-      </p:sp>
-      <p:sp>
-        <p:nvSpPr>
-          <p:cNvPr id="27" name="Text 24"/>
-          <p:cNvSpPr txBox="1"/>
-          <p:nvPr/>
-        </p:nvSpPr>
-        <p:spPr>
-          <a:xfrm>
-            <a:off x="8229600" y="2834640"/>
-            <a:ext cx="3227832" cy="182880"/>
-          </a:xfrm>
-          <a:prstGeom prst="rect">
-            <a:avLst/>
-          </a:prstGeom>
-          <a:noFill/>
-          <a:ln/>
-        </p:spPr>
-        <p:txBody>
-          <a:bodyPr wrap="square" lIns="0" tIns="0" rIns="0" bIns="0" rtlCol="0" anchor="t"/>
-          <a:lstStyle/>
-          <a:p>
-            <a:pPr marL="0" indent="0">
-              <a:buNone/>
-            </a:pPr>
-            <a:r>
-              <a:rPr lang="en-US" sz="900" b="1" kern="0" spc="100" dirty="0">
-                <a:solidFill>
-                  <a:schemeClr val="accent4"/>
-                </a:solidFill>
-              </a:rPr>
-              <a:t>WHAT WE DO</a:t>
-            </a:r>
-            <a:endParaRPr lang="en-US" sz="900" dirty="0"/>
-          </a:p>
-        </p:txBody>
-      </p:sp>
-      <p:sp>
-        <p:nvSpPr>
-          <p:cNvPr id="28" name="Text 25"/>
-          <p:cNvSpPr txBox="1"/>
-          <p:nvPr/>
-        </p:nvSpPr>
-        <p:spPr>
-          <a:xfrm>
-            <a:off x="8229600" y="3108960"/>
-            <a:ext cx="3227832" cy="2240280"/>
-          </a:xfrm>
-          <a:prstGeom prst="rect">
-            <a:avLst/>
-          </a:prstGeom>
-          <a:noFill/>
-          <a:ln/>
-        </p:spPr>
-        <p:txBody>
-          <a:bodyPr wrap="square" lIns="0" tIns="0" rIns="0" bIns="0" rtlCol="0" anchor="t"/>
-          <a:lstStyle/>
-          <a:p>
-            <a:pPr marL="342900" indent="-342900">
-              <a:buSzPct val="100000"/>
-              <a:buChar char="•"/>
-            </a:pPr>
-            <a:r>
-              <a:rPr lang="en-US" sz="1300" b="1" dirty="0">
-                <a:solidFill>
-                  <a:srgbClr val="1B1F2A"/>
-                </a:solidFill>
-              </a:rPr>
-              <a:t>Check: </a:t>
-            </a:r>
-            <a:r>
-              <a:rPr lang="en-US" sz="1300" dirty="0">
-                <a:solidFill>
-                  <a:schemeClr val="tx1"/>
-                </a:solidFill>
-              </a:rPr>
-              <a:t>every quote matched to its item character for character, by code; a quote stitched from two places fails.</a:t>
-            </a:r>
-            <a:endParaRPr lang="en-US" sz="1300" dirty="0"/>
-          </a:p>
-          <a:p>
-            <a:pPr marL="342900" indent="-342900">
-              <a:buSzPct val="100000"/>
-              <a:buChar char="•"/>
-            </a:pPr>
-            <a:r>
-              <a:rPr lang="en-US" sz="1300" b="1" dirty="0">
-                <a:solidFill>
-                  <a:srgbClr val="1B1F2A"/>
-                </a:solidFill>
-              </a:rPr>
-              <a:t>Bounds: </a:t>
-            </a:r>
-            <a:r>
-              <a:rPr lang="en-US" sz="1300" dirty="0">
-                <a:solidFill>
-                  <a:schemeClr val="tx1"/>
-                </a:solidFill>
-              </a:rPr>
-              <a:t>every watch-out answered by id; the opinion clipped to −10 to +10.</a:t>
-            </a:r>
-            <a:endParaRPr lang="en-US" sz="1300" dirty="0"/>
-          </a:p>
-          <a:p>
-            <a:pPr marL="342900" indent="-342900">
-              <a:buSzPct val="100000"/>
-              <a:buChar char="•"/>
-            </a:pPr>
-            <a:r>
-              <a:rPr lang="en-US" sz="1300" b="1" dirty="0">
-                <a:solidFill>
-                  <a:srgbClr val="1B1F2A"/>
-                </a:solidFill>
-              </a:rPr>
-              <a:t>One repair round: </a:t>
-            </a:r>
-            <a:r>
-              <a:rPr lang="en-US" sz="1300" dirty="0">
-                <a:solidFill>
-                  <a:schemeClr val="tx1"/>
-                </a:solidFill>
-              </a:rPr>
-              <a:t>the verifier's report goes back once; both answers are kept; what still fails stays unverified.</a:t>
-            </a:r>
-            <a:endParaRPr lang="en-US" sz="1300" dirty="0"/>
-          </a:p>
-        </p:txBody>
-      </p:sp>
-      <p:sp>
-        <p:nvSpPr>
-          <p:cNvPr id="3" name="Slide Number Placeholder 0"/>
+          <p:cNvPr id="25" name="Slide Number Placeholder 0"/>
           <p:cNvSpPr>
             <a:spLocks noGrp="1"/>
           </p:cNvSpPr>
@@ -5708,7 +5429,7 @@
           </a:prstGeom>
           <a:extLst>
             <a:ext uri="{C572A759-6A51-4108-AA02-DFA0A04FC94B}">
-              <ma14:wrappingTextBoxFlag xmlns="" xmlns:ma14="http://schemas.microsoft.com/office/mac/drawingml/2011/main" val="0"/>
+              <ma14:wrappingTextBoxFlag xmlns:ma14="http://schemas.microsoft.com/office/mac/drawingml/2011/main" xmlns="" val="0"/>
             </a:ext>
           </a:extLst>
         </p:spPr>
@@ -5736,7 +5457,7 @@
     </p:spTree>
     <p:extLst>
       <p:ext uri="{BB962C8B-B14F-4D97-AF65-F5344CB8AC3E}">
-        <p14:creationId xmlns:p14="http://schemas.microsoft.com/office/powerpoint/2010/main" val="603732033"/>
+        <p14:creationId xmlns:p14="http://schemas.microsoft.com/office/powerpoint/2010/main" val="3216961536"/>
       </p:ext>
     </p:extLst>
   </p:cSld>
@@ -8115,7 +7836,7 @@
           </a:prstGeom>
           <a:extLst>
             <a:ext uri="{C572A759-6A51-4108-AA02-DFA0A04FC94B}">
-              <ma14:wrappingTextBoxFlag xmlns="" xmlns:ma14="http://schemas.microsoft.com/office/mac/drawingml/2011/main" val="0"/>
+              <ma14:wrappingTextBoxFlag xmlns:ma14="http://schemas.microsoft.com/office/mac/drawingml/2011/main" xmlns="" val="0"/>
             </a:ext>
           </a:extLst>
         </p:spPr>
@@ -9104,7 +8825,7 @@
           </a:prstGeom>
           <a:extLst>
             <a:ext uri="{C572A759-6A51-4108-AA02-DFA0A04FC94B}">
-              <ma14:wrappingTextBoxFlag xmlns="" xmlns:ma14="http://schemas.microsoft.com/office/mac/drawingml/2011/main" val="0"/>
+              <ma14:wrappingTextBoxFlag xmlns:ma14="http://schemas.microsoft.com/office/mac/drawingml/2011/main" xmlns="" val="0"/>
             </a:ext>
           </a:extLst>
         </p:spPr>
@@ -10808,7 +10529,7 @@
           </a:prstGeom>
           <a:extLst>
             <a:ext uri="{C572A759-6A51-4108-AA02-DFA0A04FC94B}">
-              <ma14:wrappingTextBoxFlag xmlns="" xmlns:ma14="http://schemas.microsoft.com/office/mac/drawingml/2011/main" val="0"/>
+              <ma14:wrappingTextBoxFlag xmlns:ma14="http://schemas.microsoft.com/office/mac/drawingml/2011/main" xmlns="" val="0"/>
             </a:ext>
           </a:extLst>
         </p:spPr>
@@ -13774,7 +13495,7 @@
           </a:prstGeom>
           <a:extLst>
             <a:ext uri="{C572A759-6A51-4108-AA02-DFA0A04FC94B}">
-              <ma14:wrappingTextBoxFlag xmlns="" xmlns:ma14="http://schemas.microsoft.com/office/mac/drawingml/2011/main" val="0"/>
+              <ma14:wrappingTextBoxFlag xmlns:ma14="http://schemas.microsoft.com/office/mac/drawingml/2011/main" xmlns="" val="0"/>
             </a:ext>
           </a:extLst>
         </p:spPr>
@@ -14698,7 +14419,7 @@
           </a:prstGeom>
           <a:extLst>
             <a:ext uri="{C572A759-6A51-4108-AA02-DFA0A04FC94B}">
-              <ma14:wrappingTextBoxFlag xmlns="" xmlns:ma14="http://schemas.microsoft.com/office/mac/drawingml/2011/main" val="0"/>
+              <ma14:wrappingTextBoxFlag xmlns:ma14="http://schemas.microsoft.com/office/mac/drawingml/2011/main" xmlns="" val="0"/>
             </a:ext>
           </a:extLst>
         </p:spPr>
@@ -16678,7 +16399,7 @@
           </a:prstGeom>
           <a:extLst>
             <a:ext uri="{C572A759-6A51-4108-AA02-DFA0A04FC94B}">
-              <ma14:wrappingTextBoxFlag xmlns="" xmlns:ma14="http://schemas.microsoft.com/office/mac/drawingml/2011/main" val="0"/>
+              <ma14:wrappingTextBoxFlag xmlns:ma14="http://schemas.microsoft.com/office/mac/drawingml/2011/main" xmlns="" val="0"/>
             </a:ext>
           </a:extLst>
         </p:spPr>
@@ -19655,7 +19376,7 @@
           </a:prstGeom>
           <a:extLst>
             <a:ext uri="{C572A759-6A51-4108-AA02-DFA0A04FC94B}">
-              <ma14:wrappingTextBoxFlag xmlns:ma14="http://schemas.microsoft.com/office/mac/drawingml/2011/main" xmlns="" val="0"/>
+              <ma14:wrappingTextBoxFlag xmlns="" xmlns:ma14="http://schemas.microsoft.com/office/mac/drawingml/2011/main" val="0"/>
             </a:ext>
           </a:extLst>
         </p:spPr>
@@ -21648,7 +21369,7 @@
           </a:prstGeom>
           <a:extLst>
             <a:ext uri="{C572A759-6A51-4108-AA02-DFA0A04FC94B}">
-              <ma14:wrappingTextBoxFlag xmlns:ma14="http://schemas.microsoft.com/office/mac/drawingml/2011/main" xmlns="" val="0"/>
+              <ma14:wrappingTextBoxFlag xmlns="" xmlns:ma14="http://schemas.microsoft.com/office/mac/drawingml/2011/main" val="0"/>
             </a:ext>
           </a:extLst>
         </p:spPr>
@@ -21677,6 +21398,2010 @@
     <p:extLst>
       <p:ext uri="{BB962C8B-B14F-4D97-AF65-F5344CB8AC3E}">
         <p14:creationId xmlns:p14="http://schemas.microsoft.com/office/powerpoint/2010/main" val="742894264"/>
+      </p:ext>
+    </p:extLst>
+  </p:cSld>
+  <p:clrMapOvr>
+    <a:masterClrMapping/>
+  </p:clrMapOvr>
+</p:sld>
+</file>
+
+<file path=ppt/slides/slide24.xml><?xml version="1.0" encoding="utf-8"?>
+<p:sld xmlns:a="http://schemas.openxmlformats.org/drawingml/2006/main" xmlns:r="http://schemas.openxmlformats.org/officeDocument/2006/relationships" xmlns:p="http://schemas.openxmlformats.org/presentationml/2006/main">
+  <p:cSld>
+    <p:spTree>
+      <p:nvGrpSpPr>
+        <p:cNvPr id="1" name=""/>
+        <p:cNvGrpSpPr/>
+        <p:nvPr/>
+      </p:nvGrpSpPr>
+      <p:grpSpPr>
+        <a:xfrm>
+          <a:off x="0" y="0"/>
+          <a:ext cx="0" cy="0"/>
+          <a:chOff x="0" y="0"/>
+          <a:chExt cx="0" cy="0"/>
+        </a:xfrm>
+      </p:grpSpPr>
+      <p:sp>
+        <p:nvSpPr>
+          <p:cNvPr id="2" name="Text 0"/>
+          <p:cNvSpPr>
+            <a:spLocks noGrp="1"/>
+          </p:cNvSpPr>
+          <p:nvPr>
+            <p:ph type="title" idx="100" hasCustomPrompt="1"/>
+          </p:nvPr>
+        </p:nvSpPr>
+        <p:spPr>
+          <a:xfrm>
+            <a:off x="548640" y="411480"/>
+            <a:ext cx="11091672" cy="822960"/>
+          </a:xfrm>
+          <a:prstGeom prst="rect">
+            <a:avLst/>
+          </a:prstGeom>
+          <a:noFill/>
+          <a:ln/>
+        </p:spPr>
+        <p:txBody>
+          <a:bodyPr wrap="square" lIns="0" tIns="0" rIns="0" bIns="0" rtlCol="0" anchor="ctr"/>
+          <a:lstStyle/>
+          <a:p>
+            <a:pPr marL="0" indent="0" algn="l">
+              <a:buNone/>
+            </a:pPr>
+            <a:r>
+              <a:rPr lang="en-US" sz="3200" b="1" dirty="0">
+                <a:solidFill>
+                  <a:schemeClr val="tx2"/>
+                </a:solidFill>
+              </a:rPr>
+              <a:t>Appendix: historical base rates</a:t>
+            </a:r>
+            <a:endParaRPr lang="en-US" sz="3200" dirty="0"/>
+          </a:p>
+        </p:txBody>
+      </p:sp>
+      <p:sp>
+        <p:nvSpPr>
+          <p:cNvPr id="4" name="Shape 1"/>
+          <p:cNvSpPr/>
+          <p:nvPr/>
+        </p:nvSpPr>
+        <p:spPr>
+          <a:xfrm>
+            <a:off x="548640" y="1325880"/>
+            <a:ext cx="5394960" cy="4846320"/>
+          </a:xfrm>
+          <a:prstGeom prst="roundRect">
+            <a:avLst>
+              <a:gd name="adj" fmla="val 2264"/>
+            </a:avLst>
+          </a:prstGeom>
+          <a:solidFill>
+            <a:srgbClr val="EEF2F7"/>
+          </a:solidFill>
+          <a:ln w="12700">
+            <a:solidFill>
+              <a:srgbClr val="EEF2F7"/>
+            </a:solidFill>
+            <a:prstDash val="solid"/>
+          </a:ln>
+          <a:effectLst>
+            <a:outerShdw blurRad="50800" dist="12700" dir="5400000" algn="bl" rotWithShape="0">
+              <a:srgbClr val="000000">
+                <a:alpha val="8000"/>
+              </a:srgbClr>
+            </a:outerShdw>
+          </a:effectLst>
+        </p:spPr>
+      </p:sp>
+      <p:sp>
+        <p:nvSpPr>
+          <p:cNvPr id="5" name="Text 2"/>
+          <p:cNvSpPr txBox="1"/>
+          <p:nvPr/>
+        </p:nvSpPr>
+        <p:spPr>
+          <a:xfrm>
+            <a:off x="777240" y="1417320"/>
+            <a:ext cx="4937760" cy="320040"/>
+          </a:xfrm>
+          <a:prstGeom prst="rect">
+            <a:avLst/>
+          </a:prstGeom>
+          <a:noFill/>
+          <a:ln/>
+        </p:spPr>
+        <p:txBody>
+          <a:bodyPr wrap="square" lIns="0" tIns="0" rIns="0" bIns="0" rtlCol="0" anchor="t"/>
+          <a:lstStyle/>
+          <a:p>
+            <a:pPr marL="0" indent="0">
+              <a:buNone/>
+            </a:pPr>
+            <a:r>
+              <a:rPr lang="en-US" sz="1400" b="1" dirty="0">
+                <a:solidFill>
+                  <a:schemeClr val="tx2"/>
+                </a:solidFill>
+              </a:rPr>
+              <a:t>What it is</a:t>
+            </a:r>
+            <a:endParaRPr lang="en-US" sz="1400" dirty="0"/>
+          </a:p>
+        </p:txBody>
+      </p:sp>
+      <p:sp>
+        <p:nvSpPr>
+          <p:cNvPr id="6" name="Text 3"/>
+          <p:cNvSpPr txBox="1"/>
+          <p:nvPr/>
+        </p:nvSpPr>
+        <p:spPr>
+          <a:xfrm>
+            <a:off x="777240" y="1755648"/>
+            <a:ext cx="4937760" cy="4297680"/>
+          </a:xfrm>
+          <a:prstGeom prst="rect">
+            <a:avLst/>
+          </a:prstGeom>
+          <a:noFill/>
+          <a:ln/>
+        </p:spPr>
+        <p:txBody>
+          <a:bodyPr wrap="square" lIns="0" tIns="0" rIns="0" bIns="0" rtlCol="0" anchor="t"/>
+          <a:lstStyle/>
+          <a:p>
+            <a:pPr marL="342900" indent="-342900">
+              <a:spcAft>
+                <a:spcPts val="500"/>
+              </a:spcAft>
+              <a:buSzPct val="100000"/>
+              <a:buChar char="•"/>
+            </a:pPr>
+            <a:r>
+              <a:rPr lang="en-US" sz="1050" dirty="0">
+                <a:solidFill>
+                  <a:schemeClr val="tx1"/>
+                </a:solidFill>
+              </a:rPr>
+              <a:t>The simplest model in the pool, and the only one with no parameters: nothing is fitted, nothing can be tuned.</a:t>
+            </a:r>
+            <a:endParaRPr lang="en-US" sz="1050" dirty="0"/>
+          </a:p>
+          <a:p>
+            <a:pPr marL="342900" indent="-342900">
+              <a:spcAft>
+                <a:spcPts val="500"/>
+              </a:spcAft>
+              <a:buSzPct val="100000"/>
+              <a:buChar char="•"/>
+            </a:pPr>
+            <a:r>
+              <a:rPr lang="en-US" sz="1050" dirty="0">
+                <a:solidFill>
+                  <a:schemeClr val="tx1"/>
+                </a:solidFill>
+              </a:rPr>
+              <a:t>Take the 266 scheduled decisions since 1994. Group them by what the Fed had done at the previous meeting: a hike, a hold or a cut. Count what it did next. That count is the forecast.</a:t>
+            </a:r>
+            <a:endParaRPr lang="en-US" sz="1050" dirty="0"/>
+          </a:p>
+          <a:p>
+            <a:pPr marL="342900" indent="-342900">
+              <a:spcAft>
+                <a:spcPts val="500"/>
+              </a:spcAft>
+              <a:buSzPct val="100000"/>
+              <a:buChar char="•"/>
+            </a:pPr>
+            <a:r>
+              <a:rPr lang="en-US" sz="1050" dirty="0">
+                <a:solidFill>
+                  <a:schemeClr val="tx1"/>
+                </a:solidFill>
+              </a:rPr>
+              <a:t>Today the last decision was a hike, so the model reads the 49 meetings that followed a hike: hold 35%, hike 65%. The hike share is split 80/20 between +25 and +50, the historical share of large moves.</a:t>
+            </a:r>
+            <a:endParaRPr lang="en-US" sz="1050" dirty="0"/>
+          </a:p>
+          <a:p>
+            <a:pPr marL="342900" indent="-342900">
+              <a:spcAft>
+                <a:spcPts val="500"/>
+              </a:spcAft>
+              <a:buSzPct val="100000"/>
+              <a:buChar char="•"/>
+            </a:pPr>
+            <a:r>
+              <a:rPr lang="en-US" sz="1050" dirty="0">
+                <a:solidFill>
+                  <a:schemeClr val="tx1"/>
+                </a:solidFill>
+              </a:rPr>
+              <a:t>Why it is in the pool: on the expanding-window test it beat the fitted probit (log score −0.584 against −0.788), so it earned 0.1 (amendment #6). Why not more: it knows nothing about today; it is the prior the other models update.</a:t>
+            </a:r>
+            <a:endParaRPr lang="en-US" sz="1050" dirty="0"/>
+          </a:p>
+          <a:p>
+            <a:pPr marL="342900" indent="-342900">
+              <a:spcAft>
+                <a:spcPts val="500"/>
+              </a:spcAft>
+              <a:buSzPct val="100000"/>
+              <a:buChar char="•"/>
+            </a:pPr>
+            <a:r>
+              <a:rPr lang="en-US" sz="1050" dirty="0">
+                <a:solidFill>
+                  <a:schemeClr val="tx1"/>
+                </a:solidFill>
+              </a:rPr>
+              <a:t>Intermeeting moves (28 since 1994) are counted separately and never as a scheduled decision.</a:t>
+            </a:r>
+            <a:endParaRPr lang="en-US" sz="1050" dirty="0"/>
+          </a:p>
+        </p:txBody>
+      </p:sp>
+      <p:sp>
+        <p:nvSpPr>
+          <p:cNvPr id="7" name="Text 4"/>
+          <p:cNvSpPr txBox="1"/>
+          <p:nvPr/>
+        </p:nvSpPr>
+        <p:spPr>
+          <a:xfrm>
+            <a:off x="6172200" y="1371600"/>
+            <a:ext cx="5468112" cy="320040"/>
+          </a:xfrm>
+          <a:prstGeom prst="rect">
+            <a:avLst/>
+          </a:prstGeom>
+          <a:noFill/>
+          <a:ln/>
+        </p:spPr>
+        <p:txBody>
+          <a:bodyPr wrap="square" lIns="0" tIns="0" rIns="0" bIns="0" rtlCol="0" anchor="t"/>
+          <a:lstStyle/>
+          <a:p>
+            <a:pPr marL="0" indent="0">
+              <a:buNone/>
+            </a:pPr>
+            <a:r>
+              <a:rPr lang="en-US" sz="1400" b="1" dirty="0">
+                <a:solidFill>
+                  <a:schemeClr val="tx2"/>
+                </a:solidFill>
+              </a:rPr>
+              <a:t>What the Fed did next, 266 scheduled meetings since 1994</a:t>
+            </a:r>
+            <a:endParaRPr lang="en-US" sz="1400" dirty="0"/>
+          </a:p>
+        </p:txBody>
+      </p:sp>
+      <p:graphicFrame>
+        <p:nvGraphicFramePr>
+          <p:cNvPr id="27" name="Table 0"/>
+          <p:cNvGraphicFramePr>
+            <a:graphicFrameLocks noGrp="1"/>
+          </p:cNvGraphicFramePr>
+          <p:nvPr>
+            <p:extLst>
+              <p:ext uri="{D42A27DB-BD31-4B8C-83A1-F6EECF244321}">
+                <p14:modId xmlns:p14="http://schemas.microsoft.com/office/powerpoint/2010/main" val="1579011935"/>
+              </p:ext>
+            </p:extLst>
+          </p:nvPr>
+        </p:nvGraphicFramePr>
+        <p:xfrm>
+          <a:off x="6172200" y="1783080"/>
+          <a:ext cx="5468112" cy="914400"/>
+        </p:xfrm>
+        <a:graphic>
+          <a:graphicData uri="http://schemas.openxmlformats.org/drawingml/2006/table">
+            <a:tbl>
+              <a:tblPr/>
+              <a:tblGrid>
+                <a:gridCol w="1920240">
+                  <a:extLst>
+                    <a:ext uri="{9D8B030D-6E8A-4147-A177-3AD203B41FA5}">
+                      <a16:colId xmlns:a16="http://schemas.microsoft.com/office/drawing/2014/main" val="20000"/>
+                    </a:ext>
+                  </a:extLst>
+                </a:gridCol>
+                <a:gridCol w="914400">
+                  <a:extLst>
+                    <a:ext uri="{9D8B030D-6E8A-4147-A177-3AD203B41FA5}">
+                      <a16:colId xmlns:a16="http://schemas.microsoft.com/office/drawing/2014/main" val="20001"/>
+                    </a:ext>
+                  </a:extLst>
+                </a:gridCol>
+                <a:gridCol w="960120">
+                  <a:extLst>
+                    <a:ext uri="{9D8B030D-6E8A-4147-A177-3AD203B41FA5}">
+                      <a16:colId xmlns:a16="http://schemas.microsoft.com/office/drawing/2014/main" val="20002"/>
+                    </a:ext>
+                  </a:extLst>
+                </a:gridCol>
+                <a:gridCol w="960120">
+                  <a:extLst>
+                    <a:ext uri="{9D8B030D-6E8A-4147-A177-3AD203B41FA5}">
+                      <a16:colId xmlns:a16="http://schemas.microsoft.com/office/drawing/2014/main" val="20003"/>
+                    </a:ext>
+                  </a:extLst>
+                </a:gridCol>
+                <a:gridCol w="987552">
+                  <a:extLst>
+                    <a:ext uri="{9D8B030D-6E8A-4147-A177-3AD203B41FA5}">
+                      <a16:colId xmlns:a16="http://schemas.microsoft.com/office/drawing/2014/main" val="20004"/>
+                    </a:ext>
+                  </a:extLst>
+                </a:gridCol>
+              </a:tblGrid>
+              <a:tr h="420624">
+                <a:tc>
+                  <a:txBody>
+                    <a:bodyPr/>
+                    <a:lstStyle/>
+                    <a:p>
+                      <a:pPr marL="0" indent="0">
+                        <a:buNone/>
+                      </a:pPr>
+                      <a:r>
+                        <a:rPr lang="en-US" sz="1150" b="1" dirty="0">
+                          <a:solidFill>
+                            <a:srgbClr val="FFFFFF"/>
+                          </a:solidFill>
+                        </a:rPr>
+                        <a:t>Previous decision</a:t>
+                      </a:r>
+                      <a:endParaRPr lang="en-US" sz="1150" dirty="0"/>
+                    </a:p>
+                  </a:txBody>
+                  <a:tcPr marL="45720" marR="45720" anchor="ctr">
+                    <a:lnL w="6350" cap="flat" cmpd="sng" algn="ctr">
+                      <a:solidFill>
+                        <a:srgbClr val="D5DBE5"/>
+                      </a:solidFill>
+                      <a:prstDash val="solid"/>
+                      <a:round/>
+                      <a:headEnd type="none" w="med" len="med"/>
+                      <a:tailEnd type="none" w="med" len="med"/>
+                    </a:lnL>
+                    <a:lnR w="6350" cap="flat" cmpd="sng" algn="ctr">
+                      <a:solidFill>
+                        <a:srgbClr val="D5DBE5"/>
+                      </a:solidFill>
+                      <a:prstDash val="solid"/>
+                      <a:round/>
+                      <a:headEnd type="none" w="med" len="med"/>
+                      <a:tailEnd type="none" w="med" len="med"/>
+                    </a:lnR>
+                    <a:lnT w="6350" cap="flat" cmpd="sng" algn="ctr">
+                      <a:solidFill>
+                        <a:srgbClr val="D5DBE5"/>
+                      </a:solidFill>
+                      <a:prstDash val="solid"/>
+                      <a:round/>
+                      <a:headEnd type="none" w="med" len="med"/>
+                      <a:tailEnd type="none" w="med" len="med"/>
+                    </a:lnT>
+                    <a:lnB w="6350" cap="flat" cmpd="sng" algn="ctr">
+                      <a:solidFill>
+                        <a:srgbClr val="D5DBE5"/>
+                      </a:solidFill>
+                      <a:prstDash val="solid"/>
+                      <a:round/>
+                      <a:headEnd type="none" w="med" len="med"/>
+                      <a:tailEnd type="none" w="med" len="med"/>
+                    </a:lnB>
+                    <a:solidFill>
+                      <a:srgbClr val="1E2761"/>
+                    </a:solidFill>
+                  </a:tcPr>
+                </a:tc>
+                <a:tc>
+                  <a:txBody>
+                    <a:bodyPr/>
+                    <a:lstStyle/>
+                    <a:p>
+                      <a:pPr marL="0" indent="0" algn="ctr">
+                        <a:buNone/>
+                      </a:pPr>
+                      <a:r>
+                        <a:rPr lang="en-US" sz="1150" b="1" dirty="0">
+                          <a:solidFill>
+                            <a:srgbClr val="FFFFFF"/>
+                          </a:solidFill>
+                        </a:rPr>
+                        <a:t>Cases</a:t>
+                      </a:r>
+                      <a:endParaRPr lang="en-US" sz="1150" dirty="0"/>
+                    </a:p>
+                  </a:txBody>
+                  <a:tcPr marL="45720" marR="45720" anchor="ctr">
+                    <a:lnL w="6350" cap="flat" cmpd="sng" algn="ctr">
+                      <a:solidFill>
+                        <a:srgbClr val="D5DBE5"/>
+                      </a:solidFill>
+                      <a:prstDash val="solid"/>
+                      <a:round/>
+                      <a:headEnd type="none" w="med" len="med"/>
+                      <a:tailEnd type="none" w="med" len="med"/>
+                    </a:lnL>
+                    <a:lnR w="6350" cap="flat" cmpd="sng" algn="ctr">
+                      <a:solidFill>
+                        <a:srgbClr val="D5DBE5"/>
+                      </a:solidFill>
+                      <a:prstDash val="solid"/>
+                      <a:round/>
+                      <a:headEnd type="none" w="med" len="med"/>
+                      <a:tailEnd type="none" w="med" len="med"/>
+                    </a:lnR>
+                    <a:lnT w="6350" cap="flat" cmpd="sng" algn="ctr">
+                      <a:solidFill>
+                        <a:srgbClr val="D5DBE5"/>
+                      </a:solidFill>
+                      <a:prstDash val="solid"/>
+                      <a:round/>
+                      <a:headEnd type="none" w="med" len="med"/>
+                      <a:tailEnd type="none" w="med" len="med"/>
+                    </a:lnT>
+                    <a:lnB w="6350" cap="flat" cmpd="sng" algn="ctr">
+                      <a:solidFill>
+                        <a:srgbClr val="D5DBE5"/>
+                      </a:solidFill>
+                      <a:prstDash val="solid"/>
+                      <a:round/>
+                      <a:headEnd type="none" w="med" len="med"/>
+                      <a:tailEnd type="none" w="med" len="med"/>
+                    </a:lnB>
+                    <a:solidFill>
+                      <a:srgbClr val="1E2761"/>
+                    </a:solidFill>
+                  </a:tcPr>
+                </a:tc>
+                <a:tc>
+                  <a:txBody>
+                    <a:bodyPr/>
+                    <a:lstStyle/>
+                    <a:p>
+                      <a:pPr marL="0" indent="0" algn="ctr">
+                        <a:buNone/>
+                      </a:pPr>
+                      <a:r>
+                        <a:rPr lang="en-US" sz="1150" b="1" dirty="0">
+                          <a:solidFill>
+                            <a:srgbClr val="FFFFFF"/>
+                          </a:solidFill>
+                        </a:rPr>
+                        <a:t>Next: cut</a:t>
+                      </a:r>
+                      <a:endParaRPr lang="en-US" sz="1150" dirty="0"/>
+                    </a:p>
+                  </a:txBody>
+                  <a:tcPr marL="45720" marR="45720" anchor="ctr">
+                    <a:lnL w="6350" cap="flat" cmpd="sng" algn="ctr">
+                      <a:solidFill>
+                        <a:srgbClr val="D5DBE5"/>
+                      </a:solidFill>
+                      <a:prstDash val="solid"/>
+                      <a:round/>
+                      <a:headEnd type="none" w="med" len="med"/>
+                      <a:tailEnd type="none" w="med" len="med"/>
+                    </a:lnL>
+                    <a:lnR w="6350" cap="flat" cmpd="sng" algn="ctr">
+                      <a:solidFill>
+                        <a:srgbClr val="D5DBE5"/>
+                      </a:solidFill>
+                      <a:prstDash val="solid"/>
+                      <a:round/>
+                      <a:headEnd type="none" w="med" len="med"/>
+                      <a:tailEnd type="none" w="med" len="med"/>
+                    </a:lnR>
+                    <a:lnT w="6350" cap="flat" cmpd="sng" algn="ctr">
+                      <a:solidFill>
+                        <a:srgbClr val="D5DBE5"/>
+                      </a:solidFill>
+                      <a:prstDash val="solid"/>
+                      <a:round/>
+                      <a:headEnd type="none" w="med" len="med"/>
+                      <a:tailEnd type="none" w="med" len="med"/>
+                    </a:lnT>
+                    <a:lnB w="6350" cap="flat" cmpd="sng" algn="ctr">
+                      <a:solidFill>
+                        <a:srgbClr val="D5DBE5"/>
+                      </a:solidFill>
+                      <a:prstDash val="solid"/>
+                      <a:round/>
+                      <a:headEnd type="none" w="med" len="med"/>
+                      <a:tailEnd type="none" w="med" len="med"/>
+                    </a:lnB>
+                    <a:solidFill>
+                      <a:srgbClr val="1E2761"/>
+                    </a:solidFill>
+                  </a:tcPr>
+                </a:tc>
+                <a:tc>
+                  <a:txBody>
+                    <a:bodyPr/>
+                    <a:lstStyle/>
+                    <a:p>
+                      <a:pPr marL="0" indent="0" algn="ctr">
+                        <a:buNone/>
+                      </a:pPr>
+                      <a:r>
+                        <a:rPr lang="en-US" sz="1150" b="1" dirty="0">
+                          <a:solidFill>
+                            <a:srgbClr val="FFFFFF"/>
+                          </a:solidFill>
+                        </a:rPr>
+                        <a:t>Next: hold</a:t>
+                      </a:r>
+                      <a:endParaRPr lang="en-US" sz="1150" dirty="0"/>
+                    </a:p>
+                  </a:txBody>
+                  <a:tcPr marL="45720" marR="45720" anchor="ctr">
+                    <a:lnL w="6350" cap="flat" cmpd="sng" algn="ctr">
+                      <a:solidFill>
+                        <a:srgbClr val="D5DBE5"/>
+                      </a:solidFill>
+                      <a:prstDash val="solid"/>
+                      <a:round/>
+                      <a:headEnd type="none" w="med" len="med"/>
+                      <a:tailEnd type="none" w="med" len="med"/>
+                    </a:lnL>
+                    <a:lnR w="6350" cap="flat" cmpd="sng" algn="ctr">
+                      <a:solidFill>
+                        <a:srgbClr val="D5DBE5"/>
+                      </a:solidFill>
+                      <a:prstDash val="solid"/>
+                      <a:round/>
+                      <a:headEnd type="none" w="med" len="med"/>
+                      <a:tailEnd type="none" w="med" len="med"/>
+                    </a:lnR>
+                    <a:lnT w="6350" cap="flat" cmpd="sng" algn="ctr">
+                      <a:solidFill>
+                        <a:srgbClr val="D5DBE5"/>
+                      </a:solidFill>
+                      <a:prstDash val="solid"/>
+                      <a:round/>
+                      <a:headEnd type="none" w="med" len="med"/>
+                      <a:tailEnd type="none" w="med" len="med"/>
+                    </a:lnT>
+                    <a:lnB w="6350" cap="flat" cmpd="sng" algn="ctr">
+                      <a:solidFill>
+                        <a:srgbClr val="D5DBE5"/>
+                      </a:solidFill>
+                      <a:prstDash val="solid"/>
+                      <a:round/>
+                      <a:headEnd type="none" w="med" len="med"/>
+                      <a:tailEnd type="none" w="med" len="med"/>
+                    </a:lnB>
+                    <a:solidFill>
+                      <a:srgbClr val="1E2761"/>
+                    </a:solidFill>
+                  </a:tcPr>
+                </a:tc>
+                <a:tc>
+                  <a:txBody>
+                    <a:bodyPr/>
+                    <a:lstStyle/>
+                    <a:p>
+                      <a:pPr marL="0" indent="0" algn="ctr">
+                        <a:buNone/>
+                      </a:pPr>
+                      <a:r>
+                        <a:rPr lang="en-US" sz="1150" b="1" dirty="0">
+                          <a:solidFill>
+                            <a:srgbClr val="FFFFFF"/>
+                          </a:solidFill>
+                        </a:rPr>
+                        <a:t>Next: hike</a:t>
+                      </a:r>
+                      <a:endParaRPr lang="en-US" sz="1150" dirty="0"/>
+                    </a:p>
+                  </a:txBody>
+                  <a:tcPr marL="45720" marR="45720" anchor="ctr">
+                    <a:lnL w="6350" cap="flat" cmpd="sng" algn="ctr">
+                      <a:solidFill>
+                        <a:srgbClr val="D5DBE5"/>
+                      </a:solidFill>
+                      <a:prstDash val="solid"/>
+                      <a:round/>
+                      <a:headEnd type="none" w="med" len="med"/>
+                      <a:tailEnd type="none" w="med" len="med"/>
+                    </a:lnL>
+                    <a:lnR w="6350" cap="flat" cmpd="sng" algn="ctr">
+                      <a:solidFill>
+                        <a:srgbClr val="D5DBE5"/>
+                      </a:solidFill>
+                      <a:prstDash val="solid"/>
+                      <a:round/>
+                      <a:headEnd type="none" w="med" len="med"/>
+                      <a:tailEnd type="none" w="med" len="med"/>
+                    </a:lnR>
+                    <a:lnT w="6350" cap="flat" cmpd="sng" algn="ctr">
+                      <a:solidFill>
+                        <a:srgbClr val="D5DBE5"/>
+                      </a:solidFill>
+                      <a:prstDash val="solid"/>
+                      <a:round/>
+                      <a:headEnd type="none" w="med" len="med"/>
+                      <a:tailEnd type="none" w="med" len="med"/>
+                    </a:lnT>
+                    <a:lnB w="6350" cap="flat" cmpd="sng" algn="ctr">
+                      <a:solidFill>
+                        <a:srgbClr val="D5DBE5"/>
+                      </a:solidFill>
+                      <a:prstDash val="solid"/>
+                      <a:round/>
+                      <a:headEnd type="none" w="med" len="med"/>
+                      <a:tailEnd type="none" w="med" len="med"/>
+                    </a:lnB>
+                    <a:solidFill>
+                      <a:srgbClr val="1E2761"/>
+                    </a:solidFill>
+                  </a:tcPr>
+                </a:tc>
+                <a:extLst>
+                  <a:ext uri="{0D108BD9-81ED-4DB2-BD59-A6C34878D82A}">
+                    <a16:rowId xmlns:a16="http://schemas.microsoft.com/office/drawing/2014/main" val="10000"/>
+                  </a:ext>
+                </a:extLst>
+              </a:tr>
+              <a:tr h="420624">
+                <a:tc>
+                  <a:txBody>
+                    <a:bodyPr/>
+                    <a:lstStyle/>
+                    <a:p>
+                      <a:pPr marL="0" indent="0">
+                        <a:buNone/>
+                      </a:pPr>
+                      <a:r>
+                        <a:rPr lang="en-US" sz="1150" b="1" dirty="0">
+                          <a:solidFill>
+                            <a:srgbClr val="1B1F2A"/>
+                          </a:solidFill>
+                        </a:rPr>
+                        <a:t>A hike (today's case)</a:t>
+                      </a:r>
+                      <a:endParaRPr lang="en-US" sz="1150" dirty="0"/>
+                    </a:p>
+                  </a:txBody>
+                  <a:tcPr marL="45720" marR="45720" anchor="ctr">
+                    <a:lnL w="6350" cap="flat" cmpd="sng" algn="ctr">
+                      <a:solidFill>
+                        <a:srgbClr val="D5DBE5"/>
+                      </a:solidFill>
+                      <a:prstDash val="solid"/>
+                      <a:round/>
+                      <a:headEnd type="none" w="med" len="med"/>
+                      <a:tailEnd type="none" w="med" len="med"/>
+                    </a:lnL>
+                    <a:lnR w="6350" cap="flat" cmpd="sng" algn="ctr">
+                      <a:solidFill>
+                        <a:srgbClr val="D5DBE5"/>
+                      </a:solidFill>
+                      <a:prstDash val="solid"/>
+                      <a:round/>
+                      <a:headEnd type="none" w="med" len="med"/>
+                      <a:tailEnd type="none" w="med" len="med"/>
+                    </a:lnR>
+                    <a:lnT w="6350" cap="flat" cmpd="sng" algn="ctr">
+                      <a:solidFill>
+                        <a:srgbClr val="D5DBE5"/>
+                      </a:solidFill>
+                      <a:prstDash val="solid"/>
+                      <a:round/>
+                      <a:headEnd type="none" w="med" len="med"/>
+                      <a:tailEnd type="none" w="med" len="med"/>
+                    </a:lnT>
+                    <a:lnB w="6350" cap="flat" cmpd="sng" algn="ctr">
+                      <a:solidFill>
+                        <a:srgbClr val="D5DBE5"/>
+                      </a:solidFill>
+                      <a:prstDash val="solid"/>
+                      <a:round/>
+                      <a:headEnd type="none" w="med" len="med"/>
+                      <a:tailEnd type="none" w="med" len="med"/>
+                    </a:lnB>
+                  </a:tcPr>
+                </a:tc>
+                <a:tc>
+                  <a:txBody>
+                    <a:bodyPr/>
+                    <a:lstStyle/>
+                    <a:p>
+                      <a:pPr marL="0" indent="0" algn="ctr">
+                        <a:buNone/>
+                      </a:pPr>
+                      <a:r>
+                        <a:rPr lang="en-US" sz="1150" b="1" dirty="0">
+                          <a:solidFill>
+                            <a:srgbClr val="1B1F2A"/>
+                          </a:solidFill>
+                        </a:rPr>
+                        <a:t>50</a:t>
+                      </a:r>
+                      <a:endParaRPr lang="en-US" sz="1150" dirty="0"/>
+                    </a:p>
+                  </a:txBody>
+                  <a:tcPr marL="45720" marR="45720" anchor="ctr">
+                    <a:lnL w="6350" cap="flat" cmpd="sng" algn="ctr">
+                      <a:solidFill>
+                        <a:srgbClr val="D5DBE5"/>
+                      </a:solidFill>
+                      <a:prstDash val="solid"/>
+                      <a:round/>
+                      <a:headEnd type="none" w="med" len="med"/>
+                      <a:tailEnd type="none" w="med" len="med"/>
+                    </a:lnL>
+                    <a:lnR w="6350" cap="flat" cmpd="sng" algn="ctr">
+                      <a:solidFill>
+                        <a:srgbClr val="D5DBE5"/>
+                      </a:solidFill>
+                      <a:prstDash val="solid"/>
+                      <a:round/>
+                      <a:headEnd type="none" w="med" len="med"/>
+                      <a:tailEnd type="none" w="med" len="med"/>
+                    </a:lnR>
+                    <a:lnT w="6350" cap="flat" cmpd="sng" algn="ctr">
+                      <a:solidFill>
+                        <a:srgbClr val="D5DBE5"/>
+                      </a:solidFill>
+                      <a:prstDash val="solid"/>
+                      <a:round/>
+                      <a:headEnd type="none" w="med" len="med"/>
+                      <a:tailEnd type="none" w="med" len="med"/>
+                    </a:lnT>
+                    <a:lnB w="6350" cap="flat" cmpd="sng" algn="ctr">
+                      <a:solidFill>
+                        <a:srgbClr val="D5DBE5"/>
+                      </a:solidFill>
+                      <a:prstDash val="solid"/>
+                      <a:round/>
+                      <a:headEnd type="none" w="med" len="med"/>
+                      <a:tailEnd type="none" w="med" len="med"/>
+                    </a:lnB>
+                  </a:tcPr>
+                </a:tc>
+                <a:tc>
+                  <a:txBody>
+                    <a:bodyPr/>
+                    <a:lstStyle/>
+                    <a:p>
+                      <a:pPr marL="0" indent="0" algn="ctr">
+                        <a:buNone/>
+                      </a:pPr>
+                      <a:r>
+                        <a:rPr lang="en-US" sz="1150" b="1" dirty="0">
+                          <a:solidFill>
+                            <a:srgbClr val="1B1F2A"/>
+                          </a:solidFill>
+                        </a:rPr>
+                        <a:t>0%</a:t>
+                      </a:r>
+                      <a:endParaRPr lang="en-US" sz="1150" dirty="0"/>
+                    </a:p>
+                  </a:txBody>
+                  <a:tcPr marL="45720" marR="45720" anchor="ctr">
+                    <a:lnL w="6350" cap="flat" cmpd="sng" algn="ctr">
+                      <a:solidFill>
+                        <a:srgbClr val="D5DBE5"/>
+                      </a:solidFill>
+                      <a:prstDash val="solid"/>
+                      <a:round/>
+                      <a:headEnd type="none" w="med" len="med"/>
+                      <a:tailEnd type="none" w="med" len="med"/>
+                    </a:lnL>
+                    <a:lnR w="6350" cap="flat" cmpd="sng" algn="ctr">
+                      <a:solidFill>
+                        <a:srgbClr val="D5DBE5"/>
+                      </a:solidFill>
+                      <a:prstDash val="solid"/>
+                      <a:round/>
+                      <a:headEnd type="none" w="med" len="med"/>
+                      <a:tailEnd type="none" w="med" len="med"/>
+                    </a:lnR>
+                    <a:lnT w="6350" cap="flat" cmpd="sng" algn="ctr">
+                      <a:solidFill>
+                        <a:srgbClr val="D5DBE5"/>
+                      </a:solidFill>
+                      <a:prstDash val="solid"/>
+                      <a:round/>
+                      <a:headEnd type="none" w="med" len="med"/>
+                      <a:tailEnd type="none" w="med" len="med"/>
+                    </a:lnT>
+                    <a:lnB w="6350" cap="flat" cmpd="sng" algn="ctr">
+                      <a:solidFill>
+                        <a:srgbClr val="D5DBE5"/>
+                      </a:solidFill>
+                      <a:prstDash val="solid"/>
+                      <a:round/>
+                      <a:headEnd type="none" w="med" len="med"/>
+                      <a:tailEnd type="none" w="med" len="med"/>
+                    </a:lnB>
+                  </a:tcPr>
+                </a:tc>
+                <a:tc>
+                  <a:txBody>
+                    <a:bodyPr/>
+                    <a:lstStyle/>
+                    <a:p>
+                      <a:pPr marL="0" indent="0" algn="ctr">
+                        <a:buNone/>
+                      </a:pPr>
+                      <a:r>
+                        <a:rPr lang="en-US" sz="1150" b="1" dirty="0">
+                          <a:solidFill>
+                            <a:srgbClr val="1B1F2A"/>
+                          </a:solidFill>
+                        </a:rPr>
+                        <a:t>36%</a:t>
+                      </a:r>
+                      <a:endParaRPr lang="en-US" sz="1150" dirty="0"/>
+                    </a:p>
+                  </a:txBody>
+                  <a:tcPr marL="45720" marR="45720" anchor="ctr">
+                    <a:lnL w="6350" cap="flat" cmpd="sng" algn="ctr">
+                      <a:solidFill>
+                        <a:srgbClr val="D5DBE5"/>
+                      </a:solidFill>
+                      <a:prstDash val="solid"/>
+                      <a:round/>
+                      <a:headEnd type="none" w="med" len="med"/>
+                      <a:tailEnd type="none" w="med" len="med"/>
+                    </a:lnL>
+                    <a:lnR w="6350" cap="flat" cmpd="sng" algn="ctr">
+                      <a:solidFill>
+                        <a:srgbClr val="D5DBE5"/>
+                      </a:solidFill>
+                      <a:prstDash val="solid"/>
+                      <a:round/>
+                      <a:headEnd type="none" w="med" len="med"/>
+                      <a:tailEnd type="none" w="med" len="med"/>
+                    </a:lnR>
+                    <a:lnT w="6350" cap="flat" cmpd="sng" algn="ctr">
+                      <a:solidFill>
+                        <a:srgbClr val="D5DBE5"/>
+                      </a:solidFill>
+                      <a:prstDash val="solid"/>
+                      <a:round/>
+                      <a:headEnd type="none" w="med" len="med"/>
+                      <a:tailEnd type="none" w="med" len="med"/>
+                    </a:lnT>
+                    <a:lnB w="6350" cap="flat" cmpd="sng" algn="ctr">
+                      <a:solidFill>
+                        <a:srgbClr val="D5DBE5"/>
+                      </a:solidFill>
+                      <a:prstDash val="solid"/>
+                      <a:round/>
+                      <a:headEnd type="none" w="med" len="med"/>
+                      <a:tailEnd type="none" w="med" len="med"/>
+                    </a:lnB>
+                  </a:tcPr>
+                </a:tc>
+                <a:tc>
+                  <a:txBody>
+                    <a:bodyPr/>
+                    <a:lstStyle/>
+                    <a:p>
+                      <a:pPr marL="0" indent="0" algn="ctr">
+                        <a:buNone/>
+                      </a:pPr>
+                      <a:r>
+                        <a:rPr lang="en-US" sz="1150" b="1" dirty="0">
+                          <a:solidFill>
+                            <a:srgbClr val="C8553D"/>
+                          </a:solidFill>
+                        </a:rPr>
+                        <a:t>64%</a:t>
+                      </a:r>
+                      <a:endParaRPr lang="en-US" sz="1150" dirty="0"/>
+                    </a:p>
+                  </a:txBody>
+                  <a:tcPr marL="45720" marR="45720" anchor="ctr">
+                    <a:lnL w="6350" cap="flat" cmpd="sng" algn="ctr">
+                      <a:solidFill>
+                        <a:srgbClr val="D5DBE5"/>
+                      </a:solidFill>
+                      <a:prstDash val="solid"/>
+                      <a:round/>
+                      <a:headEnd type="none" w="med" len="med"/>
+                      <a:tailEnd type="none" w="med" len="med"/>
+                    </a:lnL>
+                    <a:lnR w="6350" cap="flat" cmpd="sng" algn="ctr">
+                      <a:solidFill>
+                        <a:srgbClr val="D5DBE5"/>
+                      </a:solidFill>
+                      <a:prstDash val="solid"/>
+                      <a:round/>
+                      <a:headEnd type="none" w="med" len="med"/>
+                      <a:tailEnd type="none" w="med" len="med"/>
+                    </a:lnR>
+                    <a:lnT w="6350" cap="flat" cmpd="sng" algn="ctr">
+                      <a:solidFill>
+                        <a:srgbClr val="D5DBE5"/>
+                      </a:solidFill>
+                      <a:prstDash val="solid"/>
+                      <a:round/>
+                      <a:headEnd type="none" w="med" len="med"/>
+                      <a:tailEnd type="none" w="med" len="med"/>
+                    </a:lnT>
+                    <a:lnB w="6350" cap="flat" cmpd="sng" algn="ctr">
+                      <a:solidFill>
+                        <a:srgbClr val="D5DBE5"/>
+                      </a:solidFill>
+                      <a:prstDash val="solid"/>
+                      <a:round/>
+                      <a:headEnd type="none" w="med" len="med"/>
+                      <a:tailEnd type="none" w="med" len="med"/>
+                    </a:lnB>
+                  </a:tcPr>
+                </a:tc>
+                <a:extLst>
+                  <a:ext uri="{0D108BD9-81ED-4DB2-BD59-A6C34878D82A}">
+                    <a16:rowId xmlns:a16="http://schemas.microsoft.com/office/drawing/2014/main" val="10001"/>
+                  </a:ext>
+                </a:extLst>
+              </a:tr>
+              <a:tr h="420624">
+                <a:tc>
+                  <a:txBody>
+                    <a:bodyPr/>
+                    <a:lstStyle/>
+                    <a:p>
+                      <a:pPr marL="0" indent="0">
+                        <a:buNone/>
+                      </a:pPr>
+                      <a:r>
+                        <a:rPr lang="en-US" sz="1150" dirty="0">
+                          <a:solidFill>
+                            <a:srgbClr val="1B1F2A"/>
+                          </a:solidFill>
+                        </a:rPr>
+                        <a:t>A hold</a:t>
+                      </a:r>
+                      <a:endParaRPr lang="en-US" sz="1150" dirty="0"/>
+                    </a:p>
+                  </a:txBody>
+                  <a:tcPr marL="45720" marR="45720" anchor="ctr">
+                    <a:lnL w="6350" cap="flat" cmpd="sng" algn="ctr">
+                      <a:solidFill>
+                        <a:srgbClr val="D5DBE5"/>
+                      </a:solidFill>
+                      <a:prstDash val="solid"/>
+                      <a:round/>
+                      <a:headEnd type="none" w="med" len="med"/>
+                      <a:tailEnd type="none" w="med" len="med"/>
+                    </a:lnL>
+                    <a:lnR w="6350" cap="flat" cmpd="sng" algn="ctr">
+                      <a:solidFill>
+                        <a:srgbClr val="D5DBE5"/>
+                      </a:solidFill>
+                      <a:prstDash val="solid"/>
+                      <a:round/>
+                      <a:headEnd type="none" w="med" len="med"/>
+                      <a:tailEnd type="none" w="med" len="med"/>
+                    </a:lnR>
+                    <a:lnT w="6350" cap="flat" cmpd="sng" algn="ctr">
+                      <a:solidFill>
+                        <a:srgbClr val="D5DBE5"/>
+                      </a:solidFill>
+                      <a:prstDash val="solid"/>
+                      <a:round/>
+                      <a:headEnd type="none" w="med" len="med"/>
+                      <a:tailEnd type="none" w="med" len="med"/>
+                    </a:lnT>
+                    <a:lnB w="6350" cap="flat" cmpd="sng" algn="ctr">
+                      <a:solidFill>
+                        <a:srgbClr val="D5DBE5"/>
+                      </a:solidFill>
+                      <a:prstDash val="solid"/>
+                      <a:round/>
+                      <a:headEnd type="none" w="med" len="med"/>
+                      <a:tailEnd type="none" w="med" len="med"/>
+                    </a:lnB>
+                  </a:tcPr>
+                </a:tc>
+                <a:tc>
+                  <a:txBody>
+                    <a:bodyPr/>
+                    <a:lstStyle/>
+                    <a:p>
+                      <a:pPr marL="0" indent="0" algn="ctr">
+                        <a:buNone/>
+                      </a:pPr>
+                      <a:r>
+                        <a:rPr lang="en-US" sz="1150" dirty="0">
+                          <a:solidFill>
+                            <a:srgbClr val="1B1F2A"/>
+                          </a:solidFill>
+                        </a:rPr>
+                        <a:t>183</a:t>
+                      </a:r>
+                      <a:endParaRPr lang="en-US" sz="1150" dirty="0"/>
+                    </a:p>
+                  </a:txBody>
+                  <a:tcPr marL="45720" marR="45720" anchor="ctr">
+                    <a:lnL w="6350" cap="flat" cmpd="sng" algn="ctr">
+                      <a:solidFill>
+                        <a:srgbClr val="D5DBE5"/>
+                      </a:solidFill>
+                      <a:prstDash val="solid"/>
+                      <a:round/>
+                      <a:headEnd type="none" w="med" len="med"/>
+                      <a:tailEnd type="none" w="med" len="med"/>
+                    </a:lnL>
+                    <a:lnR w="6350" cap="flat" cmpd="sng" algn="ctr">
+                      <a:solidFill>
+                        <a:srgbClr val="D5DBE5"/>
+                      </a:solidFill>
+                      <a:prstDash val="solid"/>
+                      <a:round/>
+                      <a:headEnd type="none" w="med" len="med"/>
+                      <a:tailEnd type="none" w="med" len="med"/>
+                    </a:lnR>
+                    <a:lnT w="6350" cap="flat" cmpd="sng" algn="ctr">
+                      <a:solidFill>
+                        <a:srgbClr val="D5DBE5"/>
+                      </a:solidFill>
+                      <a:prstDash val="solid"/>
+                      <a:round/>
+                      <a:headEnd type="none" w="med" len="med"/>
+                      <a:tailEnd type="none" w="med" len="med"/>
+                    </a:lnT>
+                    <a:lnB w="6350" cap="flat" cmpd="sng" algn="ctr">
+                      <a:solidFill>
+                        <a:srgbClr val="D5DBE5"/>
+                      </a:solidFill>
+                      <a:prstDash val="solid"/>
+                      <a:round/>
+                      <a:headEnd type="none" w="med" len="med"/>
+                      <a:tailEnd type="none" w="med" len="med"/>
+                    </a:lnB>
+                  </a:tcPr>
+                </a:tc>
+                <a:tc>
+                  <a:txBody>
+                    <a:bodyPr/>
+                    <a:lstStyle/>
+                    <a:p>
+                      <a:pPr marL="0" indent="0" algn="ctr">
+                        <a:buNone/>
+                      </a:pPr>
+                      <a:r>
+                        <a:rPr lang="en-US" sz="1150" dirty="0">
+                          <a:solidFill>
+                            <a:srgbClr val="1B1F2A"/>
+                          </a:solidFill>
+                        </a:rPr>
+                        <a:t>6%</a:t>
+                      </a:r>
+                      <a:endParaRPr lang="en-US" sz="1150" dirty="0"/>
+                    </a:p>
+                  </a:txBody>
+                  <a:tcPr marL="45720" marR="45720" anchor="ctr">
+                    <a:lnL w="6350" cap="flat" cmpd="sng" algn="ctr">
+                      <a:solidFill>
+                        <a:srgbClr val="D5DBE5"/>
+                      </a:solidFill>
+                      <a:prstDash val="solid"/>
+                      <a:round/>
+                      <a:headEnd type="none" w="med" len="med"/>
+                      <a:tailEnd type="none" w="med" len="med"/>
+                    </a:lnL>
+                    <a:lnR w="6350" cap="flat" cmpd="sng" algn="ctr">
+                      <a:solidFill>
+                        <a:srgbClr val="D5DBE5"/>
+                      </a:solidFill>
+                      <a:prstDash val="solid"/>
+                      <a:round/>
+                      <a:headEnd type="none" w="med" len="med"/>
+                      <a:tailEnd type="none" w="med" len="med"/>
+                    </a:lnR>
+                    <a:lnT w="6350" cap="flat" cmpd="sng" algn="ctr">
+                      <a:solidFill>
+                        <a:srgbClr val="D5DBE5"/>
+                      </a:solidFill>
+                      <a:prstDash val="solid"/>
+                      <a:round/>
+                      <a:headEnd type="none" w="med" len="med"/>
+                      <a:tailEnd type="none" w="med" len="med"/>
+                    </a:lnT>
+                    <a:lnB w="6350" cap="flat" cmpd="sng" algn="ctr">
+                      <a:solidFill>
+                        <a:srgbClr val="D5DBE5"/>
+                      </a:solidFill>
+                      <a:prstDash val="solid"/>
+                      <a:round/>
+                      <a:headEnd type="none" w="med" len="med"/>
+                      <a:tailEnd type="none" w="med" len="med"/>
+                    </a:lnB>
+                  </a:tcPr>
+                </a:tc>
+                <a:tc>
+                  <a:txBody>
+                    <a:bodyPr/>
+                    <a:lstStyle/>
+                    <a:p>
+                      <a:pPr marL="0" indent="0" algn="ctr">
+                        <a:buNone/>
+                      </a:pPr>
+                      <a:r>
+                        <a:rPr lang="en-US" sz="1150" dirty="0">
+                          <a:solidFill>
+                            <a:srgbClr val="2C6E49"/>
+                          </a:solidFill>
+                        </a:rPr>
+                        <a:t>85%</a:t>
+                      </a:r>
+                      <a:endParaRPr lang="en-US" sz="1150" dirty="0"/>
+                    </a:p>
+                  </a:txBody>
+                  <a:tcPr marL="45720" marR="45720" anchor="ctr">
+                    <a:lnL w="6350" cap="flat" cmpd="sng" algn="ctr">
+                      <a:solidFill>
+                        <a:srgbClr val="D5DBE5"/>
+                      </a:solidFill>
+                      <a:prstDash val="solid"/>
+                      <a:round/>
+                      <a:headEnd type="none" w="med" len="med"/>
+                      <a:tailEnd type="none" w="med" len="med"/>
+                    </a:lnL>
+                    <a:lnR w="6350" cap="flat" cmpd="sng" algn="ctr">
+                      <a:solidFill>
+                        <a:srgbClr val="D5DBE5"/>
+                      </a:solidFill>
+                      <a:prstDash val="solid"/>
+                      <a:round/>
+                      <a:headEnd type="none" w="med" len="med"/>
+                      <a:tailEnd type="none" w="med" len="med"/>
+                    </a:lnR>
+                    <a:lnT w="6350" cap="flat" cmpd="sng" algn="ctr">
+                      <a:solidFill>
+                        <a:srgbClr val="D5DBE5"/>
+                      </a:solidFill>
+                      <a:prstDash val="solid"/>
+                      <a:round/>
+                      <a:headEnd type="none" w="med" len="med"/>
+                      <a:tailEnd type="none" w="med" len="med"/>
+                    </a:lnT>
+                    <a:lnB w="6350" cap="flat" cmpd="sng" algn="ctr">
+                      <a:solidFill>
+                        <a:srgbClr val="D5DBE5"/>
+                      </a:solidFill>
+                      <a:prstDash val="solid"/>
+                      <a:round/>
+                      <a:headEnd type="none" w="med" len="med"/>
+                      <a:tailEnd type="none" w="med" len="med"/>
+                    </a:lnB>
+                  </a:tcPr>
+                </a:tc>
+                <a:tc>
+                  <a:txBody>
+                    <a:bodyPr/>
+                    <a:lstStyle/>
+                    <a:p>
+                      <a:pPr marL="0" indent="0" algn="ctr">
+                        <a:buNone/>
+                      </a:pPr>
+                      <a:r>
+                        <a:rPr lang="en-US" sz="1150" dirty="0">
+                          <a:solidFill>
+                            <a:srgbClr val="1B1F2A"/>
+                          </a:solidFill>
+                        </a:rPr>
+                        <a:t>9%</a:t>
+                      </a:r>
+                      <a:endParaRPr lang="en-US" sz="1150" dirty="0"/>
+                    </a:p>
+                  </a:txBody>
+                  <a:tcPr marL="45720" marR="45720" anchor="ctr">
+                    <a:lnL w="6350" cap="flat" cmpd="sng" algn="ctr">
+                      <a:solidFill>
+                        <a:srgbClr val="D5DBE5"/>
+                      </a:solidFill>
+                      <a:prstDash val="solid"/>
+                      <a:round/>
+                      <a:headEnd type="none" w="med" len="med"/>
+                      <a:tailEnd type="none" w="med" len="med"/>
+                    </a:lnL>
+                    <a:lnR w="6350" cap="flat" cmpd="sng" algn="ctr">
+                      <a:solidFill>
+                        <a:srgbClr val="D5DBE5"/>
+                      </a:solidFill>
+                      <a:prstDash val="solid"/>
+                      <a:round/>
+                      <a:headEnd type="none" w="med" len="med"/>
+                      <a:tailEnd type="none" w="med" len="med"/>
+                    </a:lnR>
+                    <a:lnT w="6350" cap="flat" cmpd="sng" algn="ctr">
+                      <a:solidFill>
+                        <a:srgbClr val="D5DBE5"/>
+                      </a:solidFill>
+                      <a:prstDash val="solid"/>
+                      <a:round/>
+                      <a:headEnd type="none" w="med" len="med"/>
+                      <a:tailEnd type="none" w="med" len="med"/>
+                    </a:lnT>
+                    <a:lnB w="6350" cap="flat" cmpd="sng" algn="ctr">
+                      <a:solidFill>
+                        <a:srgbClr val="D5DBE5"/>
+                      </a:solidFill>
+                      <a:prstDash val="solid"/>
+                      <a:round/>
+                      <a:headEnd type="none" w="med" len="med"/>
+                      <a:tailEnd type="none" w="med" len="med"/>
+                    </a:lnB>
+                  </a:tcPr>
+                </a:tc>
+                <a:extLst>
+                  <a:ext uri="{0D108BD9-81ED-4DB2-BD59-A6C34878D82A}">
+                    <a16:rowId xmlns:a16="http://schemas.microsoft.com/office/drawing/2014/main" val="10002"/>
+                  </a:ext>
+                </a:extLst>
+              </a:tr>
+              <a:tr h="420624">
+                <a:tc>
+                  <a:txBody>
+                    <a:bodyPr/>
+                    <a:lstStyle/>
+                    <a:p>
+                      <a:pPr marL="0" indent="0">
+                        <a:buNone/>
+                      </a:pPr>
+                      <a:r>
+                        <a:rPr lang="en-US" sz="1150" dirty="0">
+                          <a:solidFill>
+                            <a:srgbClr val="1B1F2A"/>
+                          </a:solidFill>
+                        </a:rPr>
+                        <a:t>A cut</a:t>
+                      </a:r>
+                      <a:endParaRPr lang="en-US" sz="1150" dirty="0"/>
+                    </a:p>
+                  </a:txBody>
+                  <a:tcPr marL="45720" marR="45720" anchor="ctr">
+                    <a:lnL w="6350" cap="flat" cmpd="sng" algn="ctr">
+                      <a:solidFill>
+                        <a:srgbClr val="D5DBE5"/>
+                      </a:solidFill>
+                      <a:prstDash val="solid"/>
+                      <a:round/>
+                      <a:headEnd type="none" w="med" len="med"/>
+                      <a:tailEnd type="none" w="med" len="med"/>
+                    </a:lnL>
+                    <a:lnR w="6350" cap="flat" cmpd="sng" algn="ctr">
+                      <a:solidFill>
+                        <a:srgbClr val="D5DBE5"/>
+                      </a:solidFill>
+                      <a:prstDash val="solid"/>
+                      <a:round/>
+                      <a:headEnd type="none" w="med" len="med"/>
+                      <a:tailEnd type="none" w="med" len="med"/>
+                    </a:lnR>
+                    <a:lnT w="6350" cap="flat" cmpd="sng" algn="ctr">
+                      <a:solidFill>
+                        <a:srgbClr val="D5DBE5"/>
+                      </a:solidFill>
+                      <a:prstDash val="solid"/>
+                      <a:round/>
+                      <a:headEnd type="none" w="med" len="med"/>
+                      <a:tailEnd type="none" w="med" len="med"/>
+                    </a:lnT>
+                    <a:lnB w="6350" cap="flat" cmpd="sng" algn="ctr">
+                      <a:solidFill>
+                        <a:srgbClr val="D5DBE5"/>
+                      </a:solidFill>
+                      <a:prstDash val="solid"/>
+                      <a:round/>
+                      <a:headEnd type="none" w="med" len="med"/>
+                      <a:tailEnd type="none" w="med" len="med"/>
+                    </a:lnB>
+                  </a:tcPr>
+                </a:tc>
+                <a:tc>
+                  <a:txBody>
+                    <a:bodyPr/>
+                    <a:lstStyle/>
+                    <a:p>
+                      <a:pPr marL="0" indent="0" algn="ctr">
+                        <a:buNone/>
+                      </a:pPr>
+                      <a:r>
+                        <a:rPr lang="en-US" sz="1150" dirty="0">
+                          <a:solidFill>
+                            <a:srgbClr val="1B1F2A"/>
+                          </a:solidFill>
+                        </a:rPr>
+                        <a:t>32</a:t>
+                      </a:r>
+                      <a:endParaRPr lang="en-US" sz="1150" dirty="0"/>
+                    </a:p>
+                  </a:txBody>
+                  <a:tcPr marL="45720" marR="45720" anchor="ctr">
+                    <a:lnL w="6350" cap="flat" cmpd="sng" algn="ctr">
+                      <a:solidFill>
+                        <a:srgbClr val="D5DBE5"/>
+                      </a:solidFill>
+                      <a:prstDash val="solid"/>
+                      <a:round/>
+                      <a:headEnd type="none" w="med" len="med"/>
+                      <a:tailEnd type="none" w="med" len="med"/>
+                    </a:lnL>
+                    <a:lnR w="6350" cap="flat" cmpd="sng" algn="ctr">
+                      <a:solidFill>
+                        <a:srgbClr val="D5DBE5"/>
+                      </a:solidFill>
+                      <a:prstDash val="solid"/>
+                      <a:round/>
+                      <a:headEnd type="none" w="med" len="med"/>
+                      <a:tailEnd type="none" w="med" len="med"/>
+                    </a:lnR>
+                    <a:lnT w="6350" cap="flat" cmpd="sng" algn="ctr">
+                      <a:solidFill>
+                        <a:srgbClr val="D5DBE5"/>
+                      </a:solidFill>
+                      <a:prstDash val="solid"/>
+                      <a:round/>
+                      <a:headEnd type="none" w="med" len="med"/>
+                      <a:tailEnd type="none" w="med" len="med"/>
+                    </a:lnT>
+                    <a:lnB w="6350" cap="flat" cmpd="sng" algn="ctr">
+                      <a:solidFill>
+                        <a:srgbClr val="D5DBE5"/>
+                      </a:solidFill>
+                      <a:prstDash val="solid"/>
+                      <a:round/>
+                      <a:headEnd type="none" w="med" len="med"/>
+                      <a:tailEnd type="none" w="med" len="med"/>
+                    </a:lnB>
+                  </a:tcPr>
+                </a:tc>
+                <a:tc>
+                  <a:txBody>
+                    <a:bodyPr/>
+                    <a:lstStyle/>
+                    <a:p>
+                      <a:pPr marL="0" indent="0" algn="ctr">
+                        <a:buNone/>
+                      </a:pPr>
+                      <a:r>
+                        <a:rPr lang="en-US" sz="1150" dirty="0">
+                          <a:solidFill>
+                            <a:srgbClr val="2C6E49"/>
+                          </a:solidFill>
+                        </a:rPr>
+                        <a:t>66%</a:t>
+                      </a:r>
+                      <a:endParaRPr lang="en-US" sz="1150" dirty="0"/>
+                    </a:p>
+                  </a:txBody>
+                  <a:tcPr marL="45720" marR="45720" anchor="ctr">
+                    <a:lnL w="6350" cap="flat" cmpd="sng" algn="ctr">
+                      <a:solidFill>
+                        <a:srgbClr val="D5DBE5"/>
+                      </a:solidFill>
+                      <a:prstDash val="solid"/>
+                      <a:round/>
+                      <a:headEnd type="none" w="med" len="med"/>
+                      <a:tailEnd type="none" w="med" len="med"/>
+                    </a:lnL>
+                    <a:lnR w="6350" cap="flat" cmpd="sng" algn="ctr">
+                      <a:solidFill>
+                        <a:srgbClr val="D5DBE5"/>
+                      </a:solidFill>
+                      <a:prstDash val="solid"/>
+                      <a:round/>
+                      <a:headEnd type="none" w="med" len="med"/>
+                      <a:tailEnd type="none" w="med" len="med"/>
+                    </a:lnR>
+                    <a:lnT w="6350" cap="flat" cmpd="sng" algn="ctr">
+                      <a:solidFill>
+                        <a:srgbClr val="D5DBE5"/>
+                      </a:solidFill>
+                      <a:prstDash val="solid"/>
+                      <a:round/>
+                      <a:headEnd type="none" w="med" len="med"/>
+                      <a:tailEnd type="none" w="med" len="med"/>
+                    </a:lnT>
+                    <a:lnB w="6350" cap="flat" cmpd="sng" algn="ctr">
+                      <a:solidFill>
+                        <a:srgbClr val="D5DBE5"/>
+                      </a:solidFill>
+                      <a:prstDash val="solid"/>
+                      <a:round/>
+                      <a:headEnd type="none" w="med" len="med"/>
+                      <a:tailEnd type="none" w="med" len="med"/>
+                    </a:lnB>
+                  </a:tcPr>
+                </a:tc>
+                <a:tc>
+                  <a:txBody>
+                    <a:bodyPr/>
+                    <a:lstStyle/>
+                    <a:p>
+                      <a:pPr marL="0" indent="0" algn="ctr">
+                        <a:buNone/>
+                      </a:pPr>
+                      <a:r>
+                        <a:rPr lang="en-US" sz="1150" dirty="0">
+                          <a:solidFill>
+                            <a:srgbClr val="1B1F2A"/>
+                          </a:solidFill>
+                        </a:rPr>
+                        <a:t>34%</a:t>
+                      </a:r>
+                      <a:endParaRPr lang="en-US" sz="1150" dirty="0"/>
+                    </a:p>
+                  </a:txBody>
+                  <a:tcPr marL="45720" marR="45720" anchor="ctr">
+                    <a:lnL w="6350" cap="flat" cmpd="sng" algn="ctr">
+                      <a:solidFill>
+                        <a:srgbClr val="D5DBE5"/>
+                      </a:solidFill>
+                      <a:prstDash val="solid"/>
+                      <a:round/>
+                      <a:headEnd type="none" w="med" len="med"/>
+                      <a:tailEnd type="none" w="med" len="med"/>
+                    </a:lnL>
+                    <a:lnR w="6350" cap="flat" cmpd="sng" algn="ctr">
+                      <a:solidFill>
+                        <a:srgbClr val="D5DBE5"/>
+                      </a:solidFill>
+                      <a:prstDash val="solid"/>
+                      <a:round/>
+                      <a:headEnd type="none" w="med" len="med"/>
+                      <a:tailEnd type="none" w="med" len="med"/>
+                    </a:lnR>
+                    <a:lnT w="6350" cap="flat" cmpd="sng" algn="ctr">
+                      <a:solidFill>
+                        <a:srgbClr val="D5DBE5"/>
+                      </a:solidFill>
+                      <a:prstDash val="solid"/>
+                      <a:round/>
+                      <a:headEnd type="none" w="med" len="med"/>
+                      <a:tailEnd type="none" w="med" len="med"/>
+                    </a:lnT>
+                    <a:lnB w="6350" cap="flat" cmpd="sng" algn="ctr">
+                      <a:solidFill>
+                        <a:srgbClr val="D5DBE5"/>
+                      </a:solidFill>
+                      <a:prstDash val="solid"/>
+                      <a:round/>
+                      <a:headEnd type="none" w="med" len="med"/>
+                      <a:tailEnd type="none" w="med" len="med"/>
+                    </a:lnB>
+                  </a:tcPr>
+                </a:tc>
+                <a:tc>
+                  <a:txBody>
+                    <a:bodyPr/>
+                    <a:lstStyle/>
+                    <a:p>
+                      <a:pPr marL="0" indent="0" algn="ctr">
+                        <a:buNone/>
+                      </a:pPr>
+                      <a:r>
+                        <a:rPr lang="en-US" sz="1150" dirty="0">
+                          <a:solidFill>
+                            <a:srgbClr val="1B1F2A"/>
+                          </a:solidFill>
+                        </a:rPr>
+                        <a:t>0%</a:t>
+                      </a:r>
+                      <a:endParaRPr lang="en-US" sz="1150" dirty="0"/>
+                    </a:p>
+                  </a:txBody>
+                  <a:tcPr marL="45720" marR="45720" anchor="ctr">
+                    <a:lnL w="6350" cap="flat" cmpd="sng" algn="ctr">
+                      <a:solidFill>
+                        <a:srgbClr val="D5DBE5"/>
+                      </a:solidFill>
+                      <a:prstDash val="solid"/>
+                      <a:round/>
+                      <a:headEnd type="none" w="med" len="med"/>
+                      <a:tailEnd type="none" w="med" len="med"/>
+                    </a:lnL>
+                    <a:lnR w="6350" cap="flat" cmpd="sng" algn="ctr">
+                      <a:solidFill>
+                        <a:srgbClr val="D5DBE5"/>
+                      </a:solidFill>
+                      <a:prstDash val="solid"/>
+                      <a:round/>
+                      <a:headEnd type="none" w="med" len="med"/>
+                      <a:tailEnd type="none" w="med" len="med"/>
+                    </a:lnR>
+                    <a:lnT w="6350" cap="flat" cmpd="sng" algn="ctr">
+                      <a:solidFill>
+                        <a:srgbClr val="D5DBE5"/>
+                      </a:solidFill>
+                      <a:prstDash val="solid"/>
+                      <a:round/>
+                      <a:headEnd type="none" w="med" len="med"/>
+                      <a:tailEnd type="none" w="med" len="med"/>
+                    </a:lnT>
+                    <a:lnB w="6350" cap="flat" cmpd="sng" algn="ctr">
+                      <a:solidFill>
+                        <a:srgbClr val="D5DBE5"/>
+                      </a:solidFill>
+                      <a:prstDash val="solid"/>
+                      <a:round/>
+                      <a:headEnd type="none" w="med" len="med"/>
+                      <a:tailEnd type="none" w="med" len="med"/>
+                    </a:lnB>
+                  </a:tcPr>
+                </a:tc>
+                <a:extLst>
+                  <a:ext uri="{0D108BD9-81ED-4DB2-BD59-A6C34878D82A}">
+                    <a16:rowId xmlns:a16="http://schemas.microsoft.com/office/drawing/2014/main" val="10003"/>
+                  </a:ext>
+                </a:extLst>
+              </a:tr>
+              <a:tr h="420624">
+                <a:tc>
+                  <a:txBody>
+                    <a:bodyPr/>
+                    <a:lstStyle/>
+                    <a:p>
+                      <a:pPr marL="0" indent="0">
+                        <a:buNone/>
+                      </a:pPr>
+                      <a:r>
+                        <a:rPr lang="en-US" sz="1150" dirty="0">
+                          <a:solidFill>
+                            <a:srgbClr val="6B7280"/>
+                          </a:solidFill>
+                        </a:rPr>
+                        <a:t>All decisions</a:t>
+                      </a:r>
+                      <a:endParaRPr lang="en-US" sz="1150" dirty="0"/>
+                    </a:p>
+                  </a:txBody>
+                  <a:tcPr marL="45720" marR="45720" anchor="ctr">
+                    <a:lnL w="6350" cap="flat" cmpd="sng" algn="ctr">
+                      <a:solidFill>
+                        <a:srgbClr val="D5DBE5"/>
+                      </a:solidFill>
+                      <a:prstDash val="solid"/>
+                      <a:round/>
+                      <a:headEnd type="none" w="med" len="med"/>
+                      <a:tailEnd type="none" w="med" len="med"/>
+                    </a:lnL>
+                    <a:lnR w="6350" cap="flat" cmpd="sng" algn="ctr">
+                      <a:solidFill>
+                        <a:srgbClr val="D5DBE5"/>
+                      </a:solidFill>
+                      <a:prstDash val="solid"/>
+                      <a:round/>
+                      <a:headEnd type="none" w="med" len="med"/>
+                      <a:tailEnd type="none" w="med" len="med"/>
+                    </a:lnR>
+                    <a:lnT w="6350" cap="flat" cmpd="sng" algn="ctr">
+                      <a:solidFill>
+                        <a:srgbClr val="D5DBE5"/>
+                      </a:solidFill>
+                      <a:prstDash val="solid"/>
+                      <a:round/>
+                      <a:headEnd type="none" w="med" len="med"/>
+                      <a:tailEnd type="none" w="med" len="med"/>
+                    </a:lnT>
+                    <a:lnB w="6350" cap="flat" cmpd="sng" algn="ctr">
+                      <a:solidFill>
+                        <a:srgbClr val="D5DBE5"/>
+                      </a:solidFill>
+                      <a:prstDash val="solid"/>
+                      <a:round/>
+                      <a:headEnd type="none" w="med" len="med"/>
+                      <a:tailEnd type="none" w="med" len="med"/>
+                    </a:lnB>
+                  </a:tcPr>
+                </a:tc>
+                <a:tc>
+                  <a:txBody>
+                    <a:bodyPr/>
+                    <a:lstStyle/>
+                    <a:p>
+                      <a:pPr marL="0" indent="0" algn="ctr">
+                        <a:buNone/>
+                      </a:pPr>
+                      <a:r>
+                        <a:rPr lang="en-US" sz="1150" dirty="0">
+                          <a:solidFill>
+                            <a:srgbClr val="6B7280"/>
+                          </a:solidFill>
+                        </a:rPr>
+                        <a:t>266</a:t>
+                      </a:r>
+                      <a:endParaRPr lang="en-US" sz="1150" dirty="0"/>
+                    </a:p>
+                  </a:txBody>
+                  <a:tcPr marL="45720" marR="45720" anchor="ctr">
+                    <a:lnL w="6350" cap="flat" cmpd="sng" algn="ctr">
+                      <a:solidFill>
+                        <a:srgbClr val="D5DBE5"/>
+                      </a:solidFill>
+                      <a:prstDash val="solid"/>
+                      <a:round/>
+                      <a:headEnd type="none" w="med" len="med"/>
+                      <a:tailEnd type="none" w="med" len="med"/>
+                    </a:lnL>
+                    <a:lnR w="6350" cap="flat" cmpd="sng" algn="ctr">
+                      <a:solidFill>
+                        <a:srgbClr val="D5DBE5"/>
+                      </a:solidFill>
+                      <a:prstDash val="solid"/>
+                      <a:round/>
+                      <a:headEnd type="none" w="med" len="med"/>
+                      <a:tailEnd type="none" w="med" len="med"/>
+                    </a:lnR>
+                    <a:lnT w="6350" cap="flat" cmpd="sng" algn="ctr">
+                      <a:solidFill>
+                        <a:srgbClr val="D5DBE5"/>
+                      </a:solidFill>
+                      <a:prstDash val="solid"/>
+                      <a:round/>
+                      <a:headEnd type="none" w="med" len="med"/>
+                      <a:tailEnd type="none" w="med" len="med"/>
+                    </a:lnT>
+                    <a:lnB w="6350" cap="flat" cmpd="sng" algn="ctr">
+                      <a:solidFill>
+                        <a:srgbClr val="D5DBE5"/>
+                      </a:solidFill>
+                      <a:prstDash val="solid"/>
+                      <a:round/>
+                      <a:headEnd type="none" w="med" len="med"/>
+                      <a:tailEnd type="none" w="med" len="med"/>
+                    </a:lnB>
+                  </a:tcPr>
+                </a:tc>
+                <a:tc>
+                  <a:txBody>
+                    <a:bodyPr/>
+                    <a:lstStyle/>
+                    <a:p>
+                      <a:pPr marL="0" indent="0" algn="ctr">
+                        <a:buNone/>
+                      </a:pPr>
+                      <a:r>
+                        <a:rPr lang="en-US" sz="1150" dirty="0">
+                          <a:solidFill>
+                            <a:srgbClr val="6B7280"/>
+                          </a:solidFill>
+                        </a:rPr>
+                        <a:t>12%</a:t>
+                      </a:r>
+                      <a:endParaRPr lang="en-US" sz="1150" dirty="0"/>
+                    </a:p>
+                  </a:txBody>
+                  <a:tcPr marL="45720" marR="45720" anchor="ctr">
+                    <a:lnL w="6350" cap="flat" cmpd="sng" algn="ctr">
+                      <a:solidFill>
+                        <a:srgbClr val="D5DBE5"/>
+                      </a:solidFill>
+                      <a:prstDash val="solid"/>
+                      <a:round/>
+                      <a:headEnd type="none" w="med" len="med"/>
+                      <a:tailEnd type="none" w="med" len="med"/>
+                    </a:lnL>
+                    <a:lnR w="6350" cap="flat" cmpd="sng" algn="ctr">
+                      <a:solidFill>
+                        <a:srgbClr val="D5DBE5"/>
+                      </a:solidFill>
+                      <a:prstDash val="solid"/>
+                      <a:round/>
+                      <a:headEnd type="none" w="med" len="med"/>
+                      <a:tailEnd type="none" w="med" len="med"/>
+                    </a:lnR>
+                    <a:lnT w="6350" cap="flat" cmpd="sng" algn="ctr">
+                      <a:solidFill>
+                        <a:srgbClr val="D5DBE5"/>
+                      </a:solidFill>
+                      <a:prstDash val="solid"/>
+                      <a:round/>
+                      <a:headEnd type="none" w="med" len="med"/>
+                      <a:tailEnd type="none" w="med" len="med"/>
+                    </a:lnT>
+                    <a:lnB w="6350" cap="flat" cmpd="sng" algn="ctr">
+                      <a:solidFill>
+                        <a:srgbClr val="D5DBE5"/>
+                      </a:solidFill>
+                      <a:prstDash val="solid"/>
+                      <a:round/>
+                      <a:headEnd type="none" w="med" len="med"/>
+                      <a:tailEnd type="none" w="med" len="med"/>
+                    </a:lnB>
+                  </a:tcPr>
+                </a:tc>
+                <a:tc>
+                  <a:txBody>
+                    <a:bodyPr/>
+                    <a:lstStyle/>
+                    <a:p>
+                      <a:pPr marL="0" indent="0" algn="ctr">
+                        <a:buNone/>
+                      </a:pPr>
+                      <a:r>
+                        <a:rPr lang="en-US" sz="1150" dirty="0">
+                          <a:solidFill>
+                            <a:srgbClr val="6B7280"/>
+                          </a:solidFill>
+                        </a:rPr>
+                        <a:t>69%</a:t>
+                      </a:r>
+                      <a:endParaRPr lang="en-US" sz="1150" dirty="0"/>
+                    </a:p>
+                  </a:txBody>
+                  <a:tcPr marL="45720" marR="45720" anchor="ctr">
+                    <a:lnL w="6350" cap="flat" cmpd="sng" algn="ctr">
+                      <a:solidFill>
+                        <a:srgbClr val="D5DBE5"/>
+                      </a:solidFill>
+                      <a:prstDash val="solid"/>
+                      <a:round/>
+                      <a:headEnd type="none" w="med" len="med"/>
+                      <a:tailEnd type="none" w="med" len="med"/>
+                    </a:lnL>
+                    <a:lnR w="6350" cap="flat" cmpd="sng" algn="ctr">
+                      <a:solidFill>
+                        <a:srgbClr val="D5DBE5"/>
+                      </a:solidFill>
+                      <a:prstDash val="solid"/>
+                      <a:round/>
+                      <a:headEnd type="none" w="med" len="med"/>
+                      <a:tailEnd type="none" w="med" len="med"/>
+                    </a:lnR>
+                    <a:lnT w="6350" cap="flat" cmpd="sng" algn="ctr">
+                      <a:solidFill>
+                        <a:srgbClr val="D5DBE5"/>
+                      </a:solidFill>
+                      <a:prstDash val="solid"/>
+                      <a:round/>
+                      <a:headEnd type="none" w="med" len="med"/>
+                      <a:tailEnd type="none" w="med" len="med"/>
+                    </a:lnT>
+                    <a:lnB w="6350" cap="flat" cmpd="sng" algn="ctr">
+                      <a:solidFill>
+                        <a:srgbClr val="D5DBE5"/>
+                      </a:solidFill>
+                      <a:prstDash val="solid"/>
+                      <a:round/>
+                      <a:headEnd type="none" w="med" len="med"/>
+                      <a:tailEnd type="none" w="med" len="med"/>
+                    </a:lnB>
+                  </a:tcPr>
+                </a:tc>
+                <a:tc>
+                  <a:txBody>
+                    <a:bodyPr/>
+                    <a:lstStyle/>
+                    <a:p>
+                      <a:pPr marL="0" indent="0" algn="ctr">
+                        <a:buNone/>
+                      </a:pPr>
+                      <a:r>
+                        <a:rPr lang="en-US" sz="1150" dirty="0">
+                          <a:solidFill>
+                            <a:srgbClr val="6B7280"/>
+                          </a:solidFill>
+                        </a:rPr>
+                        <a:t>19%</a:t>
+                      </a:r>
+                      <a:endParaRPr lang="en-US" sz="1150" dirty="0"/>
+                    </a:p>
+                  </a:txBody>
+                  <a:tcPr marL="45720" marR="45720" anchor="ctr">
+                    <a:lnL w="6350" cap="flat" cmpd="sng" algn="ctr">
+                      <a:solidFill>
+                        <a:srgbClr val="D5DBE5"/>
+                      </a:solidFill>
+                      <a:prstDash val="solid"/>
+                      <a:round/>
+                      <a:headEnd type="none" w="med" len="med"/>
+                      <a:tailEnd type="none" w="med" len="med"/>
+                    </a:lnL>
+                    <a:lnR w="6350" cap="flat" cmpd="sng" algn="ctr">
+                      <a:solidFill>
+                        <a:srgbClr val="D5DBE5"/>
+                      </a:solidFill>
+                      <a:prstDash val="solid"/>
+                      <a:round/>
+                      <a:headEnd type="none" w="med" len="med"/>
+                      <a:tailEnd type="none" w="med" len="med"/>
+                    </a:lnR>
+                    <a:lnT w="6350" cap="flat" cmpd="sng" algn="ctr">
+                      <a:solidFill>
+                        <a:srgbClr val="D5DBE5"/>
+                      </a:solidFill>
+                      <a:prstDash val="solid"/>
+                      <a:round/>
+                      <a:headEnd type="none" w="med" len="med"/>
+                      <a:tailEnd type="none" w="med" len="med"/>
+                    </a:lnT>
+                    <a:lnB w="6350" cap="flat" cmpd="sng" algn="ctr">
+                      <a:solidFill>
+                        <a:srgbClr val="D5DBE5"/>
+                      </a:solidFill>
+                      <a:prstDash val="solid"/>
+                      <a:round/>
+                      <a:headEnd type="none" w="med" len="med"/>
+                      <a:tailEnd type="none" w="med" len="med"/>
+                    </a:lnB>
+                  </a:tcPr>
+                </a:tc>
+                <a:extLst>
+                  <a:ext uri="{0D108BD9-81ED-4DB2-BD59-A6C34878D82A}">
+                    <a16:rowId xmlns:a16="http://schemas.microsoft.com/office/drawing/2014/main" val="10004"/>
+                  </a:ext>
+                </a:extLst>
+              </a:tr>
+            </a:tbl>
+          </a:graphicData>
+        </a:graphic>
+      </p:graphicFrame>
+      <p:sp>
+        <p:nvSpPr>
+          <p:cNvPr id="9" name="Text 5"/>
+          <p:cNvSpPr txBox="1"/>
+          <p:nvPr/>
+        </p:nvSpPr>
+        <p:spPr>
+          <a:xfrm>
+            <a:off x="6172200" y="4023360"/>
+            <a:ext cx="5468112" cy="822960"/>
+          </a:xfrm>
+          <a:prstGeom prst="rect">
+            <a:avLst/>
+          </a:prstGeom>
+          <a:noFill/>
+          <a:ln/>
+        </p:spPr>
+        <p:txBody>
+          <a:bodyPr wrap="square" lIns="0" tIns="0" rIns="0" bIns="0" rtlCol="0" anchor="t"/>
+          <a:lstStyle/>
+          <a:p>
+            <a:pPr marL="0" indent="0">
+              <a:buNone/>
+            </a:pPr>
+            <a:r>
+              <a:rPr lang="en-US" sz="1050" dirty="0">
+                <a:solidFill>
+                  <a:schemeClr val="accent4"/>
+                </a:solidFill>
+              </a:rPr>
+              <a:t>Read the first row: of the 50 meetings that came right after a hike, the Fed hiked again at 32 and held at 18; it never cut straight after a hike. The pool uses the 49 cases known at the time of the 28 October snapshot.</a:t>
+            </a:r>
+            <a:endParaRPr lang="en-US" sz="1050" dirty="0"/>
+          </a:p>
+        </p:txBody>
+      </p:sp>
+      <p:sp>
+        <p:nvSpPr>
+          <p:cNvPr id="10" name="Text 6"/>
+          <p:cNvSpPr txBox="1"/>
+          <p:nvPr/>
+        </p:nvSpPr>
+        <p:spPr>
+          <a:xfrm>
+            <a:off x="6172200" y="4892040"/>
+            <a:ext cx="5468112" cy="320040"/>
+          </a:xfrm>
+          <a:prstGeom prst="rect">
+            <a:avLst/>
+          </a:prstGeom>
+          <a:noFill/>
+          <a:ln/>
+        </p:spPr>
+        <p:txBody>
+          <a:bodyPr wrap="square" lIns="0" tIns="0" rIns="0" bIns="0" rtlCol="0" anchor="t"/>
+          <a:lstStyle/>
+          <a:p>
+            <a:pPr marL="0" indent="0">
+              <a:buNone/>
+            </a:pPr>
+            <a:r>
+              <a:rPr lang="en-US" sz="1400" b="1" dirty="0">
+                <a:solidFill>
+                  <a:schemeClr val="tx2"/>
+                </a:solidFill>
+              </a:rPr>
+              <a:t>Why a prior matters</a:t>
+            </a:r>
+            <a:endParaRPr lang="en-US" sz="1400" dirty="0"/>
+          </a:p>
+        </p:txBody>
+      </p:sp>
+      <p:sp>
+        <p:nvSpPr>
+          <p:cNvPr id="11" name="Text 7"/>
+          <p:cNvSpPr txBox="1"/>
+          <p:nvPr/>
+        </p:nvSpPr>
+        <p:spPr>
+          <a:xfrm>
+            <a:off x="6172200" y="5212080"/>
+            <a:ext cx="5468112" cy="914400"/>
+          </a:xfrm>
+          <a:prstGeom prst="rect">
+            <a:avLst/>
+          </a:prstGeom>
+          <a:noFill/>
+          <a:ln/>
+        </p:spPr>
+        <p:txBody>
+          <a:bodyPr wrap="square" lIns="0" tIns="0" rIns="0" bIns="0" rtlCol="0" anchor="t"/>
+          <a:lstStyle/>
+          <a:p>
+            <a:pPr marL="0" indent="0">
+              <a:buNone/>
+            </a:pPr>
+            <a:r>
+              <a:rPr lang="en-US" sz="1050" dirty="0">
+                <a:solidFill>
+                  <a:schemeClr val="tx1"/>
+                </a:solidFill>
+              </a:rPr>
+              <a:t>The Fed moves in runs. A hike is usually followed by another hike, a cut by another cut, and a hold by a hold. Any forecast that ignores this starts from the wrong place; the base rate is the place to start, and the market, the rules and the analysts move it from there.</a:t>
+            </a:r>
+            <a:endParaRPr lang="en-US" sz="1050" dirty="0"/>
+          </a:p>
+        </p:txBody>
+      </p:sp>
+      <p:sp>
+        <p:nvSpPr>
+          <p:cNvPr id="25" name="Slide Number Placeholder 0"/>
+          <p:cNvSpPr>
+            <a:spLocks noGrp="1"/>
+          </p:cNvSpPr>
+          <p:nvPr>
+            <p:ph type="sldNum" sz="quarter" idx="4294967295"/>
+          </p:nvPr>
+        </p:nvSpPr>
+        <p:spPr>
+          <a:xfrm>
+            <a:off x="11091672" y="6400800"/>
+            <a:ext cx="548640" cy="274320"/>
+          </a:xfrm>
+          <a:prstGeom prst="rect">
+            <a:avLst/>
+          </a:prstGeom>
+          <a:extLst>
+            <a:ext uri="{C572A759-6A51-4108-AA02-DFA0A04FC94B}">
+              <ma14:wrappingTextBoxFlag xmlns:ma14="http://schemas.microsoft.com/office/mac/drawingml/2011/main" xmlns="" val="0"/>
+            </a:ext>
+          </a:extLst>
+        </p:spPr>
+        <p:txBody>
+          <a:bodyPr/>
+          <a:lstStyle>
+            <a:lvl1pPr>
+              <a:defRPr sz="1000">
+                <a:solidFill>
+                  <a:srgbClr val="6B7280"/>
+                </a:solidFill>
+              </a:defRPr>
+            </a:lvl1pPr>
+          </a:lstStyle>
+          <a:p>
+            <a:pPr algn="r"/>
+            <a:fld id="{F7021451-1387-4CA6-816F-3879F97B5CBC}" type="slidenum">
+              <a:rPr lang="en-US" b="0"/>
+              <a:t>24</a:t>
+            </a:fld>
+            <a:endParaRPr lang="en-US"/>
+          </a:p>
+        </p:txBody>
+      </p:sp>
+    </p:spTree>
+    <p:extLst>
+      <p:ext uri="{BB962C8B-B14F-4D97-AF65-F5344CB8AC3E}">
+        <p14:creationId xmlns:p14="http://schemas.microsoft.com/office/powerpoint/2010/main" val="4031238931"/>
       </p:ext>
     </p:extLst>
   </p:cSld>
@@ -22710,7 +24435,7 @@
           </a:prstGeom>
           <a:extLst>
             <a:ext uri="{C572A759-6A51-4108-AA02-DFA0A04FC94B}">
-              <ma14:wrappingTextBoxFlag xmlns:ma14="http://schemas.microsoft.com/office/mac/drawingml/2011/main" xmlns="" val="0"/>
+              <ma14:wrappingTextBoxFlag xmlns="" xmlns:ma14="http://schemas.microsoft.com/office/mac/drawingml/2011/main" val="0"/>
             </a:ext>
           </a:extLst>
         </p:spPr>
@@ -24962,7 +26687,7 @@
           </a:prstGeom>
           <a:extLst>
             <a:ext uri="{C572A759-6A51-4108-AA02-DFA0A04FC94B}">
-              <ma14:wrappingTextBoxFlag xmlns:ma14="http://schemas.microsoft.com/office/mac/drawingml/2011/main" xmlns="" val="0"/>
+              <ma14:wrappingTextBoxFlag xmlns="" xmlns:ma14="http://schemas.microsoft.com/office/mac/drawingml/2011/main" val="0"/>
             </a:ext>
           </a:extLst>
         </p:spPr>
@@ -26934,7 +28659,7 @@
           </a:prstGeom>
           <a:extLst>
             <a:ext uri="{C572A759-6A51-4108-AA02-DFA0A04FC94B}">
-              <ma14:wrappingTextBoxFlag xmlns="" xmlns:ma14="http://schemas.microsoft.com/office/mac/drawingml/2011/main" val="0"/>
+              <ma14:wrappingTextBoxFlag xmlns:ma14="http://schemas.microsoft.com/office/mac/drawingml/2011/main" xmlns="" val="0"/>
             </a:ext>
           </a:extLst>
         </p:spPr>
@@ -28150,7 +29875,7 @@
           </a:prstGeom>
           <a:extLst>
             <a:ext uri="{C572A759-6A51-4108-AA02-DFA0A04FC94B}">
-              <ma14:wrappingTextBoxFlag xmlns="" xmlns:ma14="http://schemas.microsoft.com/office/mac/drawingml/2011/main" val="0"/>
+              <ma14:wrappingTextBoxFlag xmlns:ma14="http://schemas.microsoft.com/office/mac/drawingml/2011/main" xmlns="" val="0"/>
             </a:ext>
           </a:extLst>
         </p:spPr>
@@ -28472,12 +30197,12 @@
               <a:buNone/>
             </a:pPr>
             <a:r>
-              <a:rPr lang="en-US" sz="950" dirty="0">
+              <a:rPr lang="en-US" sz="950">
                 <a:solidFill>
                   <a:schemeClr val="bg1"/>
                 </a:solidFill>
               </a:rPr>
-              <a:t>What followed each kind of decision over 32 years of FOMC history, conditioned on the last move</a:t>
+              <a:t>What the Fed did next after each kind of decision, 266 scheduled meetings since 1994. After a hike: hiked again 64%, held 36%, never cut</a:t>
             </a:r>
             <a:endParaRPr lang="en-US" sz="950" dirty="0"/>
           </a:p>
@@ -29761,7 +31486,7 @@
           </a:prstGeom>
           <a:extLst>
             <a:ext uri="{C572A759-6A51-4108-AA02-DFA0A04FC94B}">
-              <ma14:wrappingTextBoxFlag xmlns:ma14="http://schemas.microsoft.com/office/mac/drawingml/2011/main" xmlns="" val="0"/>
+              <ma14:wrappingTextBoxFlag xmlns="" xmlns:ma14="http://schemas.microsoft.com/office/mac/drawingml/2011/main" val="0"/>
             </a:ext>
           </a:extLst>
         </p:spPr>
@@ -29865,7 +31590,7 @@
           <p:nvPr>
             <p:extLst>
               <p:ext uri="{D42A27DB-BD31-4B8C-83A1-F6EECF244321}">
-                <p14:modId xmlns:p14="http://schemas.microsoft.com/office/powerpoint/2010/main" val="1563022806"/>
+                <p14:modId xmlns:p14="http://schemas.microsoft.com/office/powerpoint/2010/main" val="3817199728"/>
               </p:ext>
             </p:extLst>
           </p:nvPr>
@@ -30431,12 +32156,12 @@
                         <a:buNone/>
                       </a:pPr>
                       <a:r>
-                        <a:rPr lang="en-US" sz="1050" dirty="0">
+                        <a:rPr lang="en-US" sz="1050">
                           <a:solidFill>
                             <a:srgbClr val="1B1F2A"/>
                           </a:solidFill>
                         </a:rPr>
-                        <a:t>November fed-funds future against the overnight rate: +2.5 bp expected, split between the two nearest outcomes</a:t>
+                        <a:t>The November fed-funds futures price</a:t>
                       </a:r>
                       <a:endParaRPr lang="en-US" sz="1050" dirty="0"/>
                     </a:p>
@@ -30844,12 +32569,12 @@
                         <a:buNone/>
                       </a:pPr>
                       <a:r>
-                        <a:rPr lang="en-US" sz="1050" dirty="0">
+                        <a:rPr lang="en-US" sz="1050">
                           <a:solidFill>
                             <a:srgbClr val="1B1F2A"/>
                           </a:solidFill>
                         </a:rPr>
-                        <a:t>12-month core PCE 3.0%, unemployment 4.2%, r* from the NY Fed DSGE model (0.65 / 1.86 / 3.06%); three level rules × nine r*/u* pairs plus the first-difference rule × three u*: 30 prescriptions, mean +22.5 bp</a:t>
+                        <a:t>Core PCE inflation, unemployment, the NY Fed natural rate, through the Fed's own four policy rules</a:t>
                       </a:r>
                       <a:endParaRPr lang="en-US" sz="1050" dirty="0"/>
                     </a:p>
@@ -31257,12 +32982,12 @@
                         <a:buNone/>
                       </a:pPr>
                       <a:r>
-                        <a:rPr lang="en-US" sz="1050" dirty="0">
+                        <a:rPr lang="en-US" sz="1050">
                           <a:solidFill>
                             <a:srgbClr val="1B1F2A"/>
                           </a:solidFill>
                         </a:rPr>
-                        <a:t>Polymarket, 26 Oct, $67m traded: 94.5% no change at the mid price, 94.9% once the five prices are renormalised</a:t>
+                        <a:t>Polymarket odds on each outcome, 26 October</a:t>
                       </a:r>
                       <a:endParaRPr lang="en-US" sz="1050" dirty="0"/>
                     </a:p>
@@ -31670,12 +33395,12 @@
                         <a:buNone/>
                       </a:pPr>
                       <a:r>
-                        <a:rPr lang="en-US" sz="1050" dirty="0">
+                        <a:rPr lang="en-US" sz="1050">
                           <a:solidFill>
                             <a:srgbClr val="1B1F2A"/>
                           </a:solidFill>
                         </a:rPr>
-                        <a:t>What followed a hike at the 49 scheduled meetings since 1994 that came after one</a:t>
+                        <a:t>What the Fed did at the 49 meetings since 1994 that followed a hike</a:t>
                       </a:r>
                       <a:endParaRPr lang="en-US" sz="1050" dirty="0"/>
                     </a:p>
@@ -32083,12 +33808,12 @@
                         <a:buNone/>
                       </a:pPr>
                       <a:r>
-                        <a:rPr lang="en-US" sz="1050" dirty="0">
+                        <a:rPr lang="en-US" sz="1050">
                           <a:solidFill>
                             <a:srgbClr val="1B1F2A"/>
                           </a:solidFill>
                         </a:rPr>
-                        <a:t>Nine features on first-published data; failed v1, caveated v2</a:t>
+                        <a:t>Nine macro features, as first published; fitted on decisions since 2000</a:t>
                       </a:r>
                       <a:endParaRPr lang="en-US" sz="1050" dirty="0"/>
                     </a:p>
@@ -33841,7 +35566,7 @@
           </a:prstGeom>
           <a:extLst>
             <a:ext uri="{C572A759-6A51-4108-AA02-DFA0A04FC94B}">
-              <ma14:wrappingTextBoxFlag xmlns="" xmlns:ma14="http://schemas.microsoft.com/office/mac/drawingml/2011/main" val="0"/>
+              <ma14:wrappingTextBoxFlag xmlns:ma14="http://schemas.microsoft.com/office/mac/drawingml/2011/main" xmlns="" val="0"/>
             </a:ext>
           </a:extLst>
         </p:spPr>

--- a/docs/FedCast_Fullerton.pptx
+++ b/docs/FedCast_Fullerton.pptx
@@ -3493,7 +3493,7 @@
           </a:prstGeom>
           <a:extLst>
             <a:ext uri="{C572A759-6A51-4108-AA02-DFA0A04FC94B}">
-              <ma14:wrappingTextBoxFlag xmlns:ma14="http://schemas.microsoft.com/office/mac/drawingml/2011/main" xmlns="" val="0"/>
+              <ma14:wrappingTextBoxFlag xmlns="" xmlns:ma14="http://schemas.microsoft.com/office/mac/drawingml/2011/main" val="0"/>
             </a:ext>
           </a:extLst>
         </p:spPr>
@@ -3678,7 +3678,7 @@
           </a:prstGeom>
           <a:extLst>
             <a:ext uri="{C572A759-6A51-4108-AA02-DFA0A04FC94B}">
-              <ma14:wrappingTextBoxFlag xmlns:ma14="http://schemas.microsoft.com/office/mac/drawingml/2011/main" xmlns="" val="0"/>
+              <ma14:wrappingTextBoxFlag xmlns="" xmlns:ma14="http://schemas.microsoft.com/office/mac/drawingml/2011/main" val="0"/>
             </a:ext>
           </a:extLst>
         </p:spPr>
@@ -4811,6 +4811,13 @@
             <a:prstDash val="solid"/>
           </a:ln>
         </p:spPr>
+        <p:txBody>
+          <a:bodyPr/>
+          <a:lstStyle/>
+          <a:p>
+            <a:endParaRPr lang="en-US"/>
+          </a:p>
+        </p:txBody>
       </p:sp>
       <p:sp>
         <p:nvSpPr>
@@ -4836,6 +4843,13 @@
             <a:prstDash val="solid"/>
           </a:ln>
         </p:spPr>
+        <p:txBody>
+          <a:bodyPr/>
+          <a:lstStyle/>
+          <a:p>
+            <a:endParaRPr lang="en-US"/>
+          </a:p>
+        </p:txBody>
       </p:sp>
       <p:sp>
         <p:nvSpPr>
@@ -4969,6 +4983,13 @@
             <a:prstDash val="solid"/>
           </a:ln>
         </p:spPr>
+        <p:txBody>
+          <a:bodyPr/>
+          <a:lstStyle/>
+          <a:p>
+            <a:endParaRPr lang="en-US"/>
+          </a:p>
+        </p:txBody>
       </p:sp>
       <p:sp>
         <p:nvSpPr>
@@ -5123,6 +5144,13 @@
             <a:prstDash val="solid"/>
           </a:ln>
         </p:spPr>
+        <p:txBody>
+          <a:bodyPr/>
+          <a:lstStyle/>
+          <a:p>
+            <a:endParaRPr lang="en-US"/>
+          </a:p>
+        </p:txBody>
       </p:sp>
       <p:sp>
         <p:nvSpPr>
@@ -5148,6 +5176,13 @@
             <a:prstDash val="solid"/>
           </a:ln>
         </p:spPr>
+        <p:txBody>
+          <a:bodyPr/>
+          <a:lstStyle/>
+          <a:p>
+            <a:endParaRPr lang="en-US"/>
+          </a:p>
+        </p:txBody>
       </p:sp>
       <p:sp>
         <p:nvSpPr>
@@ -5281,6 +5316,13 @@
             <a:prstDash val="solid"/>
           </a:ln>
         </p:spPr>
+        <p:txBody>
+          <a:bodyPr/>
+          <a:lstStyle/>
+          <a:p>
+            <a:endParaRPr lang="en-US"/>
+          </a:p>
+        </p:txBody>
       </p:sp>
       <p:sp>
         <p:nvSpPr>
@@ -5429,7 +5471,7 @@
           </a:prstGeom>
           <a:extLst>
             <a:ext uri="{C572A759-6A51-4108-AA02-DFA0A04FC94B}">
-              <ma14:wrappingTextBoxFlag xmlns:ma14="http://schemas.microsoft.com/office/mac/drawingml/2011/main" xmlns="" val="0"/>
+              <ma14:wrappingTextBoxFlag xmlns="" xmlns:ma14="http://schemas.microsoft.com/office/mac/drawingml/2011/main" val="0"/>
             </a:ext>
           </a:extLst>
         </p:spPr>
@@ -7572,12 +7614,36 @@
               <a:buNone/>
             </a:pPr>
             <a:r>
+              <a:rPr lang="en-US" sz="1150" dirty="0">
+                <a:solidFill>
+                  <a:srgbClr val="CADCFC"/>
+                </a:solidFill>
+              </a:rPr>
+              <a:t>Each specialist is asked one question about its own slice (above</a:t>
+            </a:r>
+            <a:r>
               <a:rPr lang="en-US" sz="1150">
                 <a:solidFill>
                   <a:srgbClr val="CADCFC"/>
                 </a:solidFill>
               </a:rPr>
-              <a:t>Each specialist is asked one question about its own slice (above), never for a probability. It returns claims, each with a verbatim quote and item id, and an opinion from -10 to +10: points of probability toward a hike (positive) or a cut (negative). Code averages the five opinions and moves that many points from the hold side to the hike side (or the reverse), capped at 10.</a:t>
+              <a:t>), not how likely each outcome is. </a:t>
+            </a:r>
+            <a:r>
+              <a:rPr lang="en-US" sz="1150" dirty="0">
+                <a:solidFill>
+                  <a:srgbClr val="CADCFC"/>
+                </a:solidFill>
+              </a:rPr>
+              <a:t>It returns claims, each with a verbatim quote and item id, and an opinion from -</a:t>
+            </a:r>
+            <a:r>
+              <a:rPr lang="en-US" sz="1150">
+                <a:solidFill>
+                  <a:srgbClr val="CADCFC"/>
+                </a:solidFill>
+              </a:rPr>
+              <a:t>10 (strongly dovish) to +10 (strongly hawkish). Code averages the five opinions and moves that many points of probability from hold toward a hike (positive) or a cut (negative), capped at 10.</a:t>
             </a:r>
             <a:endParaRPr lang="en-US" sz="1150" dirty="0"/>
           </a:p>
@@ -7836,7 +7902,7 @@
           </a:prstGeom>
           <a:extLst>
             <a:ext uri="{C572A759-6A51-4108-AA02-DFA0A04FC94B}">
-              <ma14:wrappingTextBoxFlag xmlns:ma14="http://schemas.microsoft.com/office/mac/drawingml/2011/main" xmlns="" val="0"/>
+              <ma14:wrappingTextBoxFlag xmlns="" xmlns:ma14="http://schemas.microsoft.com/office/mac/drawingml/2011/main" val="0"/>
             </a:ext>
           </a:extLst>
         </p:spPr>
@@ -8607,7 +8673,7 @@
                   <a:schemeClr val="tx2"/>
                 </a:solidFill>
               </a:rPr>
-              <a:t>Numbers from memory (count)</a:t>
+              <a:t>Cited numbers from memory (count)</a:t>
             </a:r>
             <a:endParaRPr lang="en-US" sz="1300" dirty="0"/>
           </a:p>
@@ -8825,7 +8891,7 @@
           </a:prstGeom>
           <a:extLst>
             <a:ext uri="{C572A759-6A51-4108-AA02-DFA0A04FC94B}">
-              <ma14:wrappingTextBoxFlag xmlns:ma14="http://schemas.microsoft.com/office/mac/drawingml/2011/main" xmlns="" val="0"/>
+              <ma14:wrappingTextBoxFlag xmlns="" xmlns:ma14="http://schemas.microsoft.com/office/mac/drawingml/2011/main" val="0"/>
             </a:ext>
           </a:extLst>
         </p:spPr>
@@ -10529,7 +10595,7 @@
           </a:prstGeom>
           <a:extLst>
             <a:ext uri="{C572A759-6A51-4108-AA02-DFA0A04FC94B}">
-              <ma14:wrappingTextBoxFlag xmlns:ma14="http://schemas.microsoft.com/office/mac/drawingml/2011/main" xmlns="" val="0"/>
+              <ma14:wrappingTextBoxFlag xmlns="" xmlns:ma14="http://schemas.microsoft.com/office/mac/drawingml/2011/main" val="0"/>
             </a:ext>
           </a:extLst>
         </p:spPr>
@@ -13495,7 +13561,7 @@
           </a:prstGeom>
           <a:extLst>
             <a:ext uri="{C572A759-6A51-4108-AA02-DFA0A04FC94B}">
-              <ma14:wrappingTextBoxFlag xmlns:ma14="http://schemas.microsoft.com/office/mac/drawingml/2011/main" xmlns="" val="0"/>
+              <ma14:wrappingTextBoxFlag xmlns="" xmlns:ma14="http://schemas.microsoft.com/office/mac/drawingml/2011/main" val="0"/>
             </a:ext>
           </a:extLst>
         </p:spPr>
@@ -14419,7 +14485,7 @@
           </a:prstGeom>
           <a:extLst>
             <a:ext uri="{C572A759-6A51-4108-AA02-DFA0A04FC94B}">
-              <ma14:wrappingTextBoxFlag xmlns:ma14="http://schemas.microsoft.com/office/mac/drawingml/2011/main" xmlns="" val="0"/>
+              <ma14:wrappingTextBoxFlag xmlns="" xmlns:ma14="http://schemas.microsoft.com/office/mac/drawingml/2011/main" val="0"/>
             </a:ext>
           </a:extLst>
         </p:spPr>
@@ -16399,7 +16465,7 @@
           </a:prstGeom>
           <a:extLst>
             <a:ext uri="{C572A759-6A51-4108-AA02-DFA0A04FC94B}">
-              <ma14:wrappingTextBoxFlag xmlns:ma14="http://schemas.microsoft.com/office/mac/drawingml/2011/main" xmlns="" val="0"/>
+              <ma14:wrappingTextBoxFlag xmlns="" xmlns:ma14="http://schemas.microsoft.com/office/mac/drawingml/2011/main" val="0"/>
             </a:ext>
           </a:extLst>
         </p:spPr>
@@ -19376,7 +19442,7 @@
           </a:prstGeom>
           <a:extLst>
             <a:ext uri="{C572A759-6A51-4108-AA02-DFA0A04FC94B}">
-              <ma14:wrappingTextBoxFlag xmlns="" xmlns:ma14="http://schemas.microsoft.com/office/mac/drawingml/2011/main" val="0"/>
+              <ma14:wrappingTextBoxFlag xmlns:ma14="http://schemas.microsoft.com/office/mac/drawingml/2011/main" xmlns="" val="0"/>
             </a:ext>
           </a:extLst>
         </p:spPr>
@@ -21369,7 +21435,7 @@
           </a:prstGeom>
           <a:extLst>
             <a:ext uri="{C572A759-6A51-4108-AA02-DFA0A04FC94B}">
-              <ma14:wrappingTextBoxFlag xmlns="" xmlns:ma14="http://schemas.microsoft.com/office/mac/drawingml/2011/main" val="0"/>
+              <ma14:wrappingTextBoxFlag xmlns:ma14="http://schemas.microsoft.com/office/mac/drawingml/2011/main" xmlns="" val="0"/>
             </a:ext>
           </a:extLst>
         </p:spPr>
@@ -21497,6 +21563,13 @@
             </a:outerShdw>
           </a:effectLst>
         </p:spPr>
+        <p:txBody>
+          <a:bodyPr/>
+          <a:lstStyle/>
+          <a:p>
+            <a:endParaRPr lang="en-US"/>
+          </a:p>
+        </p:txBody>
       </p:sp>
       <p:sp>
         <p:nvSpPr>
@@ -21698,7 +21771,7 @@
         </p:nvGraphicFramePr>
         <p:xfrm>
           <a:off x="6172200" y="1783080"/>
-          <a:ext cx="5468112" cy="914400"/>
+          <a:ext cx="5742432" cy="2103120"/>
         </p:xfrm>
         <a:graphic>
           <a:graphicData uri="http://schemas.openxmlformats.org/drawingml/2006/table">
@@ -23373,7 +23446,7 @@
           </a:prstGeom>
           <a:extLst>
             <a:ext uri="{C572A759-6A51-4108-AA02-DFA0A04FC94B}">
-              <ma14:wrappingTextBoxFlag xmlns:ma14="http://schemas.microsoft.com/office/mac/drawingml/2011/main" xmlns="" val="0"/>
+              <ma14:wrappingTextBoxFlag xmlns="" xmlns:ma14="http://schemas.microsoft.com/office/mac/drawingml/2011/main" val="0"/>
             </a:ext>
           </a:extLst>
         </p:spPr>
@@ -24435,7 +24508,7 @@
           </a:prstGeom>
           <a:extLst>
             <a:ext uri="{C572A759-6A51-4108-AA02-DFA0A04FC94B}">
-              <ma14:wrappingTextBoxFlag xmlns="" xmlns:ma14="http://schemas.microsoft.com/office/mac/drawingml/2011/main" val="0"/>
+              <ma14:wrappingTextBoxFlag xmlns:ma14="http://schemas.microsoft.com/office/mac/drawingml/2011/main" xmlns="" val="0"/>
             </a:ext>
           </a:extLst>
         </p:spPr>
@@ -26687,7 +26760,7 @@
           </a:prstGeom>
           <a:extLst>
             <a:ext uri="{C572A759-6A51-4108-AA02-DFA0A04FC94B}">
-              <ma14:wrappingTextBoxFlag xmlns="" xmlns:ma14="http://schemas.microsoft.com/office/mac/drawingml/2011/main" val="0"/>
+              <ma14:wrappingTextBoxFlag xmlns:ma14="http://schemas.microsoft.com/office/mac/drawingml/2011/main" xmlns="" val="0"/>
             </a:ext>
           </a:extLst>
         </p:spPr>
@@ -28659,7 +28732,7 @@
           </a:prstGeom>
           <a:extLst>
             <a:ext uri="{C572A759-6A51-4108-AA02-DFA0A04FC94B}">
-              <ma14:wrappingTextBoxFlag xmlns:ma14="http://schemas.microsoft.com/office/mac/drawingml/2011/main" xmlns="" val="0"/>
+              <ma14:wrappingTextBoxFlag xmlns="" xmlns:ma14="http://schemas.microsoft.com/office/mac/drawingml/2011/main" val="0"/>
             </a:ext>
           </a:extLst>
         </p:spPr>
@@ -29875,7 +29948,7 @@
           </a:prstGeom>
           <a:extLst>
             <a:ext uri="{C572A759-6A51-4108-AA02-DFA0A04FC94B}">
-              <ma14:wrappingTextBoxFlag xmlns:ma14="http://schemas.microsoft.com/office/mac/drawingml/2011/main" xmlns="" val="0"/>
+              <ma14:wrappingTextBoxFlag xmlns="" xmlns:ma14="http://schemas.microsoft.com/office/mac/drawingml/2011/main" val="0"/>
             </a:ext>
           </a:extLst>
         </p:spPr>
@@ -31486,7 +31559,7 @@
           </a:prstGeom>
           <a:extLst>
             <a:ext uri="{C572A759-6A51-4108-AA02-DFA0A04FC94B}">
-              <ma14:wrappingTextBoxFlag xmlns="" xmlns:ma14="http://schemas.microsoft.com/office/mac/drawingml/2011/main" val="0"/>
+              <ma14:wrappingTextBoxFlag xmlns:ma14="http://schemas.microsoft.com/office/mac/drawingml/2011/main" xmlns="" val="0"/>
             </a:ext>
           </a:extLst>
         </p:spPr>
@@ -31597,7 +31670,7 @@
         </p:nvGraphicFramePr>
         <p:xfrm>
           <a:off x="548640" y="1325880"/>
-          <a:ext cx="11091672" cy="3899916"/>
+          <a:ext cx="11091672" cy="3749040"/>
         </p:xfrm>
         <a:graphic>
           <a:graphicData uri="http://schemas.openxmlformats.org/drawingml/2006/table">
@@ -35566,7 +35639,7 @@
           </a:prstGeom>
           <a:extLst>
             <a:ext uri="{C572A759-6A51-4108-AA02-DFA0A04FC94B}">
-              <ma14:wrappingTextBoxFlag xmlns:ma14="http://schemas.microsoft.com/office/mac/drawingml/2011/main" xmlns="" val="0"/>
+              <ma14:wrappingTextBoxFlag xmlns="" xmlns:ma14="http://schemas.microsoft.com/office/mac/drawingml/2011/main" val="0"/>
             </a:ext>
           </a:extLst>
         </p:spPr>

--- a/docs/FedCast_Fullerton.pptx
+++ b/docs/FedCast_Fullerton.pptx
@@ -9492,7 +9492,21 @@
                   <a:schemeClr val="tx1"/>
                 </a:solidFill>
               </a:rPr>
-              <a:t>100%; 0 numbers from memory</a:t>
+              <a:t>100% from evidence </a:t>
+            </a:r>
+            <a:endParaRPr lang="en-US" sz="1050" dirty="0"/>
+          </a:p>
+          <a:p>
+            <a:pPr marL="0" indent="0" algn="ctr">
+              <a:buNone/>
+            </a:pPr>
+            <a:r>
+              <a:rPr lang="en-US" sz="1050" dirty="0">
+                <a:solidFill>
+                  <a:schemeClr val="tx1"/>
+                </a:solidFill>
+              </a:rPr>
+              <a:t>0 numbers from memory</a:t>
             </a:r>
             <a:endParaRPr lang="en-US" sz="1050" dirty="0"/>
           </a:p>
@@ -9555,12 +9569,12 @@
               <a:buNone/>
             </a:pPr>
             <a:r>
-              <a:rPr lang="en-US" sz="2000" b="1">
+              <a:rPr lang="en-US" sz="2000" b="1" dirty="0">
                 <a:solidFill>
                   <a:schemeClr val="bg1"/>
                 </a:solidFill>
               </a:rPr>
-              <a:t>5 opinions, ±10</a:t>
+              <a:t>5 opinions</a:t>
             </a:r>
             <a:endParaRPr lang="en-US" sz="2000" dirty="0"/>
           </a:p>
@@ -9590,22 +9604,6 @@
             <a:pPr marL="0" indent="0" algn="ctr">
               <a:buNone/>
             </a:pPr>
-            <a:r>
-              <a:rPr lang="en-US" sz="1050" dirty="0">
-                <a:solidFill>
-                  <a:srgbClr val="CADCFC"/>
-                </a:solidFill>
-              </a:rPr>
-              <a:t>+6.0 · +6.2 · +5.8 · −1.4 </a:t>
-            </a:r>
-            <a:r>
-              <a:rPr lang="en-US" sz="1050">
-                <a:solidFill>
-                  <a:srgbClr val="CADCFC"/>
-                </a:solidFill>
-              </a:rPr>
-              <a:t>· +3.4</a:t>
-            </a:r>
             <a:endParaRPr lang="en-US" sz="1050" dirty="0"/>
           </a:p>
         </p:txBody>
@@ -9619,7 +9617,7 @@
         <p:spPr>
           <a:xfrm>
             <a:off x="548640" y="3931920"/>
-            <a:ext cx="4434840" cy="2377440"/>
+            <a:ext cx="4434840" cy="2468880"/>
           </a:xfrm>
           <a:prstGeom prst="roundRect">
             <a:avLst>
@@ -10188,7 +10186,7 @@
         <p:spPr>
           <a:xfrm>
             <a:off x="2880360" y="4315968"/>
-            <a:ext cx="1965960" cy="1188720"/>
+            <a:ext cx="2011680" cy="1005840"/>
           </a:xfrm>
           <a:prstGeom prst="rect">
             <a:avLst/>
@@ -10204,146 +10202,43 @@
               <a:buNone/>
             </a:pPr>
             <a:r>
-              <a:rPr lang="en-US" sz="1050" b="1" dirty="0">
+              <a:rPr lang="en-US" sz="1000" b="1">
                 <a:solidFill>
                   <a:schemeClr val="tx1"/>
                 </a:solidFill>
               </a:rPr>
-              <a:t>Four say hike, one says hold back. </a:t>
-            </a:r>
-            <a:r>
-              <a:rPr lang="en-US" sz="1050" dirty="0">
+              <a:t>Four say hike, one says hold: </a:t>
+            </a:r>
+            <a:r>
+              <a:rPr lang="en-US" sz="1000">
                 <a:solidFill>
                   <a:schemeClr val="tx1"/>
                 </a:solidFill>
               </a:rPr>
-              <a:t>Plain average, one vote each: +4.0.</a:t>
-            </a:r>
-            <a:endParaRPr lang="en-US" sz="1050" dirty="0"/>
+              <a:t>+4.0.</a:t>
+            </a:r>
           </a:p>
           <a:p>
             <a:pPr marL="0" indent="0">
               <a:buNone/>
             </a:pPr>
             <a:r>
-              <a:rPr lang="en-US" sz="1050" b="1">
+              <a:rPr lang="en-US" sz="1000" b="1">
                 <a:solidFill>
                   <a:schemeClr val="tx1"/>
                 </a:solidFill>
               </a:rPr>
-              <a:t>Each point of opinion </a:t>
-            </a:r>
-            <a:r>
-              <a:rPr lang="en-US" sz="1050" b="1" dirty="0">
+              <a:t>+4.0 moves 4 points of probability to the hike side. </a:t>
+            </a:r>
+            <a:r>
+              <a:rPr lang="en-US" sz="1000">
                 <a:solidFill>
                   <a:schemeClr val="tx1"/>
                 </a:solidFill>
               </a:rPr>
-              <a:t>moves one point of probability </a:t>
-            </a:r>
-            <a:r>
-              <a:rPr lang="en-US" sz="1050" dirty="0">
-                <a:solidFill>
-                  <a:schemeClr val="tx1"/>
-                </a:solidFill>
-              </a:rPr>
-              <a:t>from the hold side to the hike side, by rule, capped at 10. So +4.0 moves 4.0 points, after the pool:</a:t>
-            </a:r>
-            <a:endParaRPr lang="en-US" sz="1050" dirty="0"/>
-          </a:p>
-        </p:txBody>
-      </p:sp>
-      <p:sp>
-        <p:nvSpPr>
-          <p:cNvPr id="25" name="Text 21"/>
-          <p:cNvSpPr txBox="1"/>
-          <p:nvPr/>
-        </p:nvSpPr>
-        <p:spPr>
-          <a:xfrm>
-            <a:off x="2880360" y="5559552"/>
-            <a:ext cx="2011680" cy="329184"/>
-          </a:xfrm>
-          <a:prstGeom prst="rect">
-            <a:avLst/>
-          </a:prstGeom>
-          <a:noFill/>
-          <a:ln/>
-        </p:spPr>
-        <p:txBody>
-          <a:bodyPr wrap="square" lIns="0" tIns="0" rIns="0" bIns="0" rtlCol="0" anchor="t"/>
-          <a:lstStyle/>
-          <a:p>
-            <a:pPr marL="0" indent="0">
-              <a:buNone/>
-            </a:pPr>
-            <a:r>
-              <a:rPr lang="en-US" sz="1200" b="1">
-                <a:solidFill>
-                  <a:schemeClr val="tx2"/>
-                </a:solidFill>
-                <a:latin typeface="Cambria" pitchFamily="34" charset="0"/>
-                <a:ea typeface="Cambria" pitchFamily="34" charset="-122"/>
-                <a:cs typeface="Cambria" pitchFamily="34" charset="-120"/>
-              </a:rPr>
-              <a:t>+25 bps: 20.2% </a:t>
-            </a:r>
-            <a:r>
-              <a:rPr lang="en-US" sz="1200" b="1" dirty="0">
-                <a:solidFill>
-                  <a:schemeClr val="tx2"/>
-                </a:solidFill>
-                <a:latin typeface="Cambria" pitchFamily="34" charset="0"/>
-                <a:ea typeface="Cambria" pitchFamily="34" charset="-122"/>
-                <a:cs typeface="Cambria" pitchFamily="34" charset="-120"/>
-              </a:rPr>
-              <a:t>→ 22.4%</a:t>
-            </a:r>
-            <a:endParaRPr lang="en-US" sz="1200" dirty="0"/>
-          </a:p>
-        </p:txBody>
-      </p:sp>
-      <p:sp>
-        <p:nvSpPr>
-          <p:cNvPr id="26" name="Text 22"/>
-          <p:cNvSpPr txBox="1"/>
-          <p:nvPr/>
-        </p:nvSpPr>
-        <p:spPr>
-          <a:xfrm>
-            <a:off x="2880360" y="5897880"/>
-            <a:ext cx="2011680" cy="365760"/>
-          </a:xfrm>
-          <a:prstGeom prst="rect">
-            <a:avLst/>
-          </a:prstGeom>
-          <a:noFill/>
-          <a:ln/>
-        </p:spPr>
-        <p:txBody>
-          <a:bodyPr wrap="square" lIns="0" tIns="0" rIns="0" bIns="0" rtlCol="0" anchor="t"/>
-          <a:lstStyle/>
-          <a:p>
-            <a:pPr marL="0" indent="0">
-              <a:buNone/>
-            </a:pPr>
-            <a:r>
-              <a:rPr lang="en-US" sz="950">
-                <a:solidFill>
-                  <a:schemeClr val="accent4"/>
-                </a:solidFill>
-              </a:rPr>
-              <a:t>+50 bps 6.0 </a:t>
-            </a:r>
-            <a:r>
-              <a:rPr lang="en-US" sz="950" dirty="0">
-                <a:solidFill>
-                  <a:schemeClr val="accent4"/>
-                </a:solidFill>
-              </a:rPr>
-              <a:t>→ 7.7; no change 70.9 → 67.6; cuts 3.0 → 2.3</a:t>
-            </a:r>
-            <a:endParaRPr lang="en-US" sz="950" dirty="0"/>
+              <a:t>Each bucket is scaled by a factor rising from the cut end to the hike end, so the hikes gain 4.0 and hold plus the cuts lose 4.0:</a:t>
+            </a:r>
+            <a:endParaRPr lang="en-US" sz="1000" dirty="0"/>
           </a:p>
         </p:txBody>
       </p:sp>
@@ -10620,6 +10515,1114 @@
           </a:p>
         </p:txBody>
       </p:sp>
+      <p:graphicFrame>
+        <p:nvGraphicFr